--- a/projet_final/projet_final/MEC8211-Projet-final-Presentation.pptx
+++ b/projet_final/projet_final/MEC8211-Projet-final-Presentation.pptx
@@ -5,14 +5,17 @@
     <p:sldMasterId id="2147483648" r:id="rId1"/>
   </p:sldMasterIdLst>
   <p:notesMasterIdLst>
-    <p:notesMasterId r:id="rId7"/>
+    <p:notesMasterId r:id="rId10"/>
   </p:notesMasterIdLst>
   <p:sldIdLst>
     <p:sldId id="256" r:id="rId2"/>
     <p:sldId id="258" r:id="rId3"/>
     <p:sldId id="257" r:id="rId4"/>
     <p:sldId id="259" r:id="rId5"/>
-    <p:sldId id="260" r:id="rId6"/>
+    <p:sldId id="263" r:id="rId6"/>
+    <p:sldId id="260" r:id="rId7"/>
+    <p:sldId id="262" r:id="rId8"/>
+    <p:sldId id="261" r:id="rId9"/>
   </p:sldIdLst>
   <p:sldSz cx="12192000" cy="6858000"/>
   <p:notesSz cx="6858000" cy="9144000"/>
@@ -201,7 +204,7 @@
           <a:p>
             <a:fld id="{BB0B2023-C595-443A-8D8C-AB9DF5A28D48}" type="datetimeFigureOut">
               <a:rPr lang="fr-FR" smtClean="0"/>
-              <a:t>07/04/2026</a:t>
+              <a:t>09/04/2026</a:t>
             </a:fld>
             <a:endParaRPr lang="fr-FR"/>
           </a:p>
@@ -468,6 +471,282 @@
 </p:notesMaster>
 </file>
 
+<file path=ppt/notesSlides/notesSlide1.xml><?xml version="1.0" encoding="utf-8"?>
+<p:notes xmlns:a="http://schemas.openxmlformats.org/drawingml/2006/main" xmlns:r="http://schemas.openxmlformats.org/officeDocument/2006/relationships" xmlns:p="http://schemas.openxmlformats.org/presentationml/2006/main">
+  <p:cSld>
+    <p:spTree>
+      <p:nvGrpSpPr>
+        <p:cNvPr id="1" name=""/>
+        <p:cNvGrpSpPr/>
+        <p:nvPr/>
+      </p:nvGrpSpPr>
+      <p:grpSpPr>
+        <a:xfrm>
+          <a:off x="0" y="0"/>
+          <a:ext cx="0" cy="0"/>
+          <a:chOff x="0" y="0"/>
+          <a:chExt cx="0" cy="0"/>
+        </a:xfrm>
+      </p:grpSpPr>
+      <p:sp>
+        <p:nvSpPr>
+          <p:cNvPr id="2" name="Espace réservé de l'image des diapositives 1"/>
+          <p:cNvSpPr>
+            <a:spLocks noGrp="1" noRot="1" noChangeAspect="1"/>
+          </p:cNvSpPr>
+          <p:nvPr>
+            <p:ph type="sldImg"/>
+          </p:nvPr>
+        </p:nvSpPr>
+        <p:spPr/>
+      </p:sp>
+      <p:sp>
+        <p:nvSpPr>
+          <p:cNvPr id="3" name="Espace réservé des notes 2"/>
+          <p:cNvSpPr>
+            <a:spLocks noGrp="1"/>
+          </p:cNvSpPr>
+          <p:nvPr>
+            <p:ph type="body" idx="1"/>
+          </p:nvPr>
+        </p:nvSpPr>
+        <p:spPr/>
+        <p:txBody>
+          <a:bodyPr/>
+          <a:lstStyle/>
+          <a:p>
+            <a:endParaRPr lang="fr-FR" dirty="0"/>
+          </a:p>
+        </p:txBody>
+      </p:sp>
+      <p:sp>
+        <p:nvSpPr>
+          <p:cNvPr id="4" name="Espace réservé du numéro de diapositive 3"/>
+          <p:cNvSpPr>
+            <a:spLocks noGrp="1"/>
+          </p:cNvSpPr>
+          <p:nvPr>
+            <p:ph type="sldNum" sz="quarter" idx="5"/>
+          </p:nvPr>
+        </p:nvSpPr>
+        <p:spPr/>
+        <p:txBody>
+          <a:bodyPr/>
+          <a:lstStyle/>
+          <a:p>
+            <a:fld id="{F6105186-0725-443C-BC59-E521425E81CD}" type="slidenum">
+              <a:rPr lang="fr-FR" smtClean="0"/>
+              <a:t>2</a:t>
+            </a:fld>
+            <a:endParaRPr lang="fr-FR"/>
+          </a:p>
+        </p:txBody>
+      </p:sp>
+    </p:spTree>
+    <p:extLst>
+      <p:ext uri="{BB962C8B-B14F-4D97-AF65-F5344CB8AC3E}">
+        <p14:creationId xmlns:p14="http://schemas.microsoft.com/office/powerpoint/2010/main" val="1309825238"/>
+      </p:ext>
+    </p:extLst>
+  </p:cSld>
+  <p:clrMapOvr>
+    <a:masterClrMapping/>
+  </p:clrMapOvr>
+</p:notes>
+</file>
+
+<file path=ppt/notesSlides/notesSlide2.xml><?xml version="1.0" encoding="utf-8"?>
+<p:notes xmlns:a="http://schemas.openxmlformats.org/drawingml/2006/main" xmlns:r="http://schemas.openxmlformats.org/officeDocument/2006/relationships" xmlns:p="http://schemas.openxmlformats.org/presentationml/2006/main">
+  <p:cSld>
+    <p:spTree>
+      <p:nvGrpSpPr>
+        <p:cNvPr id="1" name=""/>
+        <p:cNvGrpSpPr/>
+        <p:nvPr/>
+      </p:nvGrpSpPr>
+      <p:grpSpPr>
+        <a:xfrm>
+          <a:off x="0" y="0"/>
+          <a:ext cx="0" cy="0"/>
+          <a:chOff x="0" y="0"/>
+          <a:chExt cx="0" cy="0"/>
+        </a:xfrm>
+      </p:grpSpPr>
+      <p:sp>
+        <p:nvSpPr>
+          <p:cNvPr id="2" name="Espace réservé de l'image des diapositives 1"/>
+          <p:cNvSpPr>
+            <a:spLocks noGrp="1" noRot="1" noChangeAspect="1"/>
+          </p:cNvSpPr>
+          <p:nvPr>
+            <p:ph type="sldImg"/>
+          </p:nvPr>
+        </p:nvSpPr>
+        <p:spPr/>
+      </p:sp>
+      <p:sp>
+        <p:nvSpPr>
+          <p:cNvPr id="3" name="Espace réservé des notes 2"/>
+          <p:cNvSpPr>
+            <a:spLocks noGrp="1"/>
+          </p:cNvSpPr>
+          <p:nvPr>
+            <p:ph type="body" idx="1"/>
+          </p:nvPr>
+        </p:nvSpPr>
+        <p:spPr/>
+        <p:txBody>
+          <a:bodyPr/>
+          <a:lstStyle/>
+          <a:p>
+            <a:endParaRPr lang="fr-FR" dirty="0"/>
+          </a:p>
+        </p:txBody>
+      </p:sp>
+      <p:sp>
+        <p:nvSpPr>
+          <p:cNvPr id="4" name="Espace réservé du numéro de diapositive 3"/>
+          <p:cNvSpPr>
+            <a:spLocks noGrp="1"/>
+          </p:cNvSpPr>
+          <p:nvPr>
+            <p:ph type="sldNum" sz="quarter" idx="5"/>
+          </p:nvPr>
+        </p:nvSpPr>
+        <p:spPr/>
+        <p:txBody>
+          <a:bodyPr/>
+          <a:lstStyle/>
+          <a:p>
+            <a:fld id="{F6105186-0725-443C-BC59-E521425E81CD}" type="slidenum">
+              <a:rPr lang="fr-FR" smtClean="0"/>
+              <a:t>6</a:t>
+            </a:fld>
+            <a:endParaRPr lang="fr-FR"/>
+          </a:p>
+        </p:txBody>
+      </p:sp>
+    </p:spTree>
+    <p:extLst>
+      <p:ext uri="{BB962C8B-B14F-4D97-AF65-F5344CB8AC3E}">
+        <p14:creationId xmlns:p14="http://schemas.microsoft.com/office/powerpoint/2010/main" val="3124078397"/>
+      </p:ext>
+    </p:extLst>
+  </p:cSld>
+  <p:clrMapOvr>
+    <a:masterClrMapping/>
+  </p:clrMapOvr>
+</p:notes>
+</file>
+
+<file path=ppt/notesSlides/notesSlide3.xml><?xml version="1.0" encoding="utf-8"?>
+<p:notes xmlns:a="http://schemas.openxmlformats.org/drawingml/2006/main" xmlns:r="http://schemas.openxmlformats.org/officeDocument/2006/relationships" xmlns:p="http://schemas.openxmlformats.org/presentationml/2006/main">
+  <p:cSld>
+    <p:spTree>
+      <p:nvGrpSpPr>
+        <p:cNvPr id="1" name="">
+          <a:extLst>
+            <a:ext uri="{FF2B5EF4-FFF2-40B4-BE49-F238E27FC236}">
+              <a16:creationId xmlns:a16="http://schemas.microsoft.com/office/drawing/2014/main" id="{CA1A5BB4-E065-36E2-E641-90C9FFDD7834}"/>
+            </a:ext>
+          </a:extLst>
+        </p:cNvPr>
+        <p:cNvGrpSpPr/>
+        <p:nvPr/>
+      </p:nvGrpSpPr>
+      <p:grpSpPr>
+        <a:xfrm>
+          <a:off x="0" y="0"/>
+          <a:ext cx="0" cy="0"/>
+          <a:chOff x="0" y="0"/>
+          <a:chExt cx="0" cy="0"/>
+        </a:xfrm>
+      </p:grpSpPr>
+      <p:sp>
+        <p:nvSpPr>
+          <p:cNvPr id="2" name="Espace réservé de l'image des diapositives 1">
+            <a:extLst>
+              <a:ext uri="{FF2B5EF4-FFF2-40B4-BE49-F238E27FC236}">
+                <a16:creationId xmlns:a16="http://schemas.microsoft.com/office/drawing/2014/main" id="{22410028-CE57-DC42-95CE-01AA00C9DE1D}"/>
+              </a:ext>
+            </a:extLst>
+          </p:cNvPr>
+          <p:cNvSpPr>
+            <a:spLocks noGrp="1" noRot="1" noChangeAspect="1"/>
+          </p:cNvSpPr>
+          <p:nvPr>
+            <p:ph type="sldImg"/>
+          </p:nvPr>
+        </p:nvSpPr>
+        <p:spPr/>
+      </p:sp>
+      <p:sp>
+        <p:nvSpPr>
+          <p:cNvPr id="3" name="Espace réservé des notes 2">
+            <a:extLst>
+              <a:ext uri="{FF2B5EF4-FFF2-40B4-BE49-F238E27FC236}">
+                <a16:creationId xmlns:a16="http://schemas.microsoft.com/office/drawing/2014/main" id="{CC76DD03-F160-73AB-38E7-83F367B7A565}"/>
+              </a:ext>
+            </a:extLst>
+          </p:cNvPr>
+          <p:cNvSpPr>
+            <a:spLocks noGrp="1"/>
+          </p:cNvSpPr>
+          <p:nvPr>
+            <p:ph type="body" idx="1"/>
+          </p:nvPr>
+        </p:nvSpPr>
+        <p:spPr/>
+        <p:txBody>
+          <a:bodyPr/>
+          <a:lstStyle/>
+          <a:p>
+            <a:endParaRPr lang="fr-FR" dirty="0"/>
+          </a:p>
+        </p:txBody>
+      </p:sp>
+      <p:sp>
+        <p:nvSpPr>
+          <p:cNvPr id="4" name="Espace réservé du numéro de diapositive 3">
+            <a:extLst>
+              <a:ext uri="{FF2B5EF4-FFF2-40B4-BE49-F238E27FC236}">
+                <a16:creationId xmlns:a16="http://schemas.microsoft.com/office/drawing/2014/main" id="{1636A260-3B6F-7D51-9372-EBA998234BA9}"/>
+              </a:ext>
+            </a:extLst>
+          </p:cNvPr>
+          <p:cNvSpPr>
+            <a:spLocks noGrp="1"/>
+          </p:cNvSpPr>
+          <p:nvPr>
+            <p:ph type="sldNum" sz="quarter" idx="5"/>
+          </p:nvPr>
+        </p:nvSpPr>
+        <p:spPr/>
+        <p:txBody>
+          <a:bodyPr/>
+          <a:lstStyle/>
+          <a:p>
+            <a:fld id="{F6105186-0725-443C-BC59-E521425E81CD}" type="slidenum">
+              <a:rPr lang="fr-FR" smtClean="0"/>
+              <a:t>7</a:t>
+            </a:fld>
+            <a:endParaRPr lang="fr-FR"/>
+          </a:p>
+        </p:txBody>
+      </p:sp>
+    </p:spTree>
+    <p:extLst>
+      <p:ext uri="{BB962C8B-B14F-4D97-AF65-F5344CB8AC3E}">
+        <p14:creationId xmlns:p14="http://schemas.microsoft.com/office/powerpoint/2010/main" val="1194227384"/>
+      </p:ext>
+    </p:extLst>
+  </p:cSld>
+  <p:clrMapOvr>
+    <a:masterClrMapping/>
+  </p:clrMapOvr>
+</p:notes>
+</file>
+
 <file path=ppt/slideLayouts/slideLayout1.xml><?xml version="1.0" encoding="utf-8"?>
 <p:sldLayout xmlns:a="http://schemas.openxmlformats.org/drawingml/2006/main" xmlns:r="http://schemas.openxmlformats.org/officeDocument/2006/relationships" xmlns:p="http://schemas.openxmlformats.org/presentationml/2006/main" type="title" preserve="1">
   <p:cSld name="Diapositive de titre">
@@ -615,7 +894,7 @@
           <a:p>
             <a:fld id="{4E51AFDA-D128-4B68-A211-269E2451E5DE}" type="datetimeFigureOut">
               <a:rPr lang="fr-FR" smtClean="0"/>
-              <a:t>07/04/2026</a:t>
+              <a:t>09/04/2026</a:t>
             </a:fld>
             <a:endParaRPr lang="fr-FR"/>
           </a:p>
@@ -813,7 +1092,7 @@
           <a:p>
             <a:fld id="{4E51AFDA-D128-4B68-A211-269E2451E5DE}" type="datetimeFigureOut">
               <a:rPr lang="fr-FR" smtClean="0"/>
-              <a:t>07/04/2026</a:t>
+              <a:t>09/04/2026</a:t>
             </a:fld>
             <a:endParaRPr lang="fr-FR"/>
           </a:p>
@@ -1021,7 +1300,7 @@
           <a:p>
             <a:fld id="{4E51AFDA-D128-4B68-A211-269E2451E5DE}" type="datetimeFigureOut">
               <a:rPr lang="fr-FR" smtClean="0"/>
-              <a:t>07/04/2026</a:t>
+              <a:t>09/04/2026</a:t>
             </a:fld>
             <a:endParaRPr lang="fr-FR"/>
           </a:p>
@@ -1219,7 +1498,7 @@
           <a:p>
             <a:fld id="{4E51AFDA-D128-4B68-A211-269E2451E5DE}" type="datetimeFigureOut">
               <a:rPr lang="fr-FR" smtClean="0"/>
-              <a:t>07/04/2026</a:t>
+              <a:t>09/04/2026</a:t>
             </a:fld>
             <a:endParaRPr lang="fr-FR"/>
           </a:p>
@@ -1494,7 +1773,7 @@
           <a:p>
             <a:fld id="{4E51AFDA-D128-4B68-A211-269E2451E5DE}" type="datetimeFigureOut">
               <a:rPr lang="fr-FR" smtClean="0"/>
-              <a:t>07/04/2026</a:t>
+              <a:t>09/04/2026</a:t>
             </a:fld>
             <a:endParaRPr lang="fr-FR"/>
           </a:p>
@@ -1759,7 +2038,7 @@
           <a:p>
             <a:fld id="{4E51AFDA-D128-4B68-A211-269E2451E5DE}" type="datetimeFigureOut">
               <a:rPr lang="fr-FR" smtClean="0"/>
-              <a:t>07/04/2026</a:t>
+              <a:t>09/04/2026</a:t>
             </a:fld>
             <a:endParaRPr lang="fr-FR"/>
           </a:p>
@@ -2171,7 +2450,7 @@
           <a:p>
             <a:fld id="{4E51AFDA-D128-4B68-A211-269E2451E5DE}" type="datetimeFigureOut">
               <a:rPr lang="fr-FR" smtClean="0"/>
-              <a:t>07/04/2026</a:t>
+              <a:t>09/04/2026</a:t>
             </a:fld>
             <a:endParaRPr lang="fr-FR"/>
           </a:p>
@@ -2312,7 +2591,7 @@
           <a:p>
             <a:fld id="{4E51AFDA-D128-4B68-A211-269E2451E5DE}" type="datetimeFigureOut">
               <a:rPr lang="fr-FR" smtClean="0"/>
-              <a:t>07/04/2026</a:t>
+              <a:t>09/04/2026</a:t>
             </a:fld>
             <a:endParaRPr lang="fr-FR"/>
           </a:p>
@@ -2425,7 +2704,7 @@
           <a:p>
             <a:fld id="{4E51AFDA-D128-4B68-A211-269E2451E5DE}" type="datetimeFigureOut">
               <a:rPr lang="fr-FR" smtClean="0"/>
-              <a:t>07/04/2026</a:t>
+              <a:t>09/04/2026</a:t>
             </a:fld>
             <a:endParaRPr lang="fr-FR"/>
           </a:p>
@@ -2736,7 +3015,7 @@
           <a:p>
             <a:fld id="{4E51AFDA-D128-4B68-A211-269E2451E5DE}" type="datetimeFigureOut">
               <a:rPr lang="fr-FR" smtClean="0"/>
-              <a:t>07/04/2026</a:t>
+              <a:t>09/04/2026</a:t>
             </a:fld>
             <a:endParaRPr lang="fr-FR"/>
           </a:p>
@@ -3024,7 +3303,7 @@
           <a:p>
             <a:fld id="{4E51AFDA-D128-4B68-A211-269E2451E5DE}" type="datetimeFigureOut">
               <a:rPr lang="fr-FR" smtClean="0"/>
-              <a:t>07/04/2026</a:t>
+              <a:t>09/04/2026</a:t>
             </a:fld>
             <a:endParaRPr lang="fr-FR"/>
           </a:p>
@@ -3101,9 +3380,12 @@
 <p:sldMaster xmlns:a="http://schemas.openxmlformats.org/drawingml/2006/main" xmlns:r="http://schemas.openxmlformats.org/officeDocument/2006/relationships" xmlns:p="http://schemas.openxmlformats.org/presentationml/2006/main">
   <p:cSld>
     <p:bg>
-      <p:bgRef idx="1001">
-        <a:schemeClr val="bg1"/>
-      </p:bgRef>
+      <p:bgPr>
+        <a:solidFill>
+          <a:srgbClr val="EBE9E9"/>
+        </a:solidFill>
+        <a:effectLst/>
+      </p:bgPr>
     </p:bg>
     <p:spTree>
       <p:nvGrpSpPr>
@@ -3265,7 +3547,7 @@
           <a:p>
             <a:fld id="{4E51AFDA-D128-4B68-A211-269E2451E5DE}" type="datetimeFigureOut">
               <a:rPr lang="fr-FR" smtClean="0"/>
-              <a:t>07/04/2026</a:t>
+              <a:t>09/04/2026</a:t>
             </a:fld>
             <a:endParaRPr lang="fr-FR"/>
           </a:p>
@@ -3862,7 +4144,12 @@
             <p:ph type="title"/>
           </p:nvPr>
         </p:nvSpPr>
-        <p:spPr/>
+        <p:spPr>
+          <a:xfrm>
+            <a:off x="838200" y="18255"/>
+            <a:ext cx="10515600" cy="1325563"/>
+          </a:xfrm>
+        </p:spPr>
         <p:txBody>
           <a:bodyPr/>
           <a:lstStyle/>
@@ -3890,18 +4177,128 @@
             <p:ph idx="1"/>
           </p:nvPr>
         </p:nvSpPr>
-        <p:spPr/>
+        <p:spPr>
+          <a:xfrm>
+            <a:off x="316992" y="1243584"/>
+            <a:ext cx="5644896" cy="5248655"/>
+          </a:xfrm>
+        </p:spPr>
         <p:txBody>
-          <a:bodyPr/>
+          <a:bodyPr>
+            <a:normAutofit lnSpcReduction="10000"/>
+          </a:bodyPr>
           <a:lstStyle/>
           <a:p>
             <a:r>
               <a:rPr lang="fr-FR" dirty="0"/>
-              <a:t>Utilité de modéliser ça</a:t>
+              <a:t>Vitesse de refroidissement influence les propriétés </a:t>
+            </a:r>
+          </a:p>
+          <a:p>
+            <a:pPr>
+              <a:buFontTx/>
+              <a:buChar char="-"/>
+            </a:pPr>
+            <a:r>
+              <a:rPr lang="fr-FR" dirty="0"/>
+              <a:t>Mécanique</a:t>
+            </a:r>
+          </a:p>
+          <a:p>
+            <a:pPr>
+              <a:buFontTx/>
+              <a:buChar char="-"/>
+            </a:pPr>
+            <a:r>
+              <a:rPr lang="fr-FR" dirty="0"/>
+              <a:t>Électrique</a:t>
+            </a:r>
+          </a:p>
+          <a:p>
+            <a:pPr>
+              <a:buFontTx/>
+              <a:buChar char="-"/>
+            </a:pPr>
+            <a:r>
+              <a:rPr lang="fr-FR" dirty="0"/>
+              <a:t>Thermique </a:t>
+            </a:r>
+          </a:p>
+          <a:p>
+            <a:pPr>
+              <a:buFontTx/>
+              <a:buChar char="-"/>
+            </a:pPr>
+            <a:endParaRPr lang="fr-FR" dirty="0"/>
+          </a:p>
+          <a:p>
+            <a:r>
+              <a:rPr lang="fr-FR" dirty="0"/>
+              <a:t>Modéliser le refroidissement</a:t>
+            </a:r>
+          </a:p>
+          <a:p>
+            <a:pPr>
+              <a:buFontTx/>
+              <a:buChar char="-"/>
+            </a:pPr>
+            <a:r>
+              <a:rPr lang="fr-FR" dirty="0"/>
+              <a:t>Obtenir la vitesse de refroidissement</a:t>
+            </a:r>
+          </a:p>
+          <a:p>
+            <a:pPr>
+              <a:buFontTx/>
+              <a:buChar char="-"/>
+            </a:pPr>
+            <a:r>
+              <a:rPr lang="fr-FR" dirty="0"/>
+              <a:t>Connaître la composition du matériau final </a:t>
+            </a:r>
+          </a:p>
+          <a:p>
+            <a:pPr>
+              <a:buFontTx/>
+              <a:buChar char="-"/>
+            </a:pPr>
+            <a:r>
+              <a:rPr lang="fr-FR" dirty="0"/>
+              <a:t>Déduire ses propriétés </a:t>
             </a:r>
           </a:p>
         </p:txBody>
       </p:sp>
+      <p:pic>
+        <p:nvPicPr>
+          <p:cNvPr id="5" name="Image 4">
+            <a:extLst>
+              <a:ext uri="{FF2B5EF4-FFF2-40B4-BE49-F238E27FC236}">
+                <a16:creationId xmlns:a16="http://schemas.microsoft.com/office/drawing/2014/main" id="{A30176CA-BFB8-62B8-8124-3190FD696E28}"/>
+              </a:ext>
+            </a:extLst>
+          </p:cNvPr>
+          <p:cNvPicPr>
+            <a:picLocks noChangeAspect="1"/>
+          </p:cNvPicPr>
+          <p:nvPr/>
+        </p:nvPicPr>
+        <p:blipFill>
+          <a:blip r:embed="rId3"/>
+          <a:stretch>
+            <a:fillRect/>
+          </a:stretch>
+        </p:blipFill>
+        <p:spPr>
+          <a:xfrm>
+            <a:off x="6483096" y="883433"/>
+            <a:ext cx="4839119" cy="5608806"/>
+          </a:xfrm>
+          <a:prstGeom prst="rect">
+            <a:avLst/>
+          </a:prstGeom>
+        </p:spPr>
+      </p:pic>
     </p:spTree>
     <p:extLst>
       <p:ext uri="{BB962C8B-B14F-4D97-AF65-F5344CB8AC3E}">
@@ -3965,8 +4362,8 @@
           </a:p>
         </p:txBody>
       </p:sp>
-      <mc:AlternateContent xmlns:mc="http://schemas.openxmlformats.org/markup-compatibility/2006">
-        <mc:Choice xmlns:a14="http://schemas.microsoft.com/office/drawing/2010/main" Requires="a14">
+      <mc:AlternateContent xmlns:mc="http://schemas.openxmlformats.org/markup-compatibility/2006" xmlns:a14="http://schemas.microsoft.com/office/drawing/2010/main">
+        <mc:Choice Requires="a14">
           <p:sp>
             <p:nvSpPr>
               <p:cNvPr id="3" name="Espace réservé du contenu 2">
@@ -3990,7 +4387,9 @@
               </a:xfrm>
             </p:spPr>
             <p:txBody>
-              <a:bodyPr/>
+              <a:bodyPr>
+                <a:normAutofit/>
+              </a:bodyPr>
               <a:lstStyle/>
               <a:p>
                 <a:pPr fontAlgn="base"/>
@@ -4023,6 +4422,9 @@
               </a:p>
               <a:p>
                 <a:pPr marL="0" indent="0" fontAlgn="base">
+                  <a:spcBef>
+                    <a:spcPts val="1800"/>
+                  </a:spcBef>
                   <a:buNone/>
                 </a:pPr>
                 <a:r>
@@ -4033,6 +4435,9 @@
               </a:p>
               <a:p>
                 <a:pPr marL="0" indent="0">
+                  <a:spcBef>
+                    <a:spcPts val="1800"/>
+                  </a:spcBef>
                   <a:buNone/>
                 </a:pPr>
                 <a14:m>
@@ -4161,10 +4566,13 @@
                     </m:oMath>
                   </m:oMathPara>
                 </a14:m>
-                <a:endParaRPr lang="fr-FR" b="0" dirty="0"/>
+                <a:endParaRPr lang="fr-FR" dirty="0"/>
               </a:p>
               <a:p>
                 <a:pPr marL="0" indent="0">
+                  <a:spcBef>
+                    <a:spcPts val="1800"/>
+                  </a:spcBef>
                   <a:buNone/>
                 </a:pPr>
                 <a:r>
@@ -4174,6 +4582,9 @@
               </a:p>
               <a:p>
                 <a:pPr marL="0" indent="0" algn="ctr">
+                  <a:spcBef>
+                    <a:spcPts val="1800"/>
+                  </a:spcBef>
                   <a:buNone/>
                 </a:pPr>
                 <a14:m>
@@ -4343,12 +4754,16 @@
                       <m:sSubSup>
                         <m:sSubSupPr>
                           <m:ctrlPr>
-                            <a:rPr lang="fr-FR" i="1"/>
+                            <a:rPr lang="fr-FR" i="1">
+                              <a:latin typeface="Cambria Math" panose="02040503050406030204" pitchFamily="18" charset="0"/>
+                            </a:rPr>
                           </m:ctrlPr>
                         </m:sSubSupPr>
                         <m:e>
                           <m:r>
-                            <a:rPr lang="fr-FR" i="1"/>
+                            <a:rPr lang="fr-FR" i="1">
+                              <a:latin typeface="Cambria Math" panose="02040503050406030204" pitchFamily="18" charset="0"/>
+                            </a:rPr>
                             <m:t>𝑇</m:t>
                           </m:r>
                         </m:e>
@@ -4362,7 +4777,9 @@
                         </m:sub>
                         <m:sup>
                           <m:r>
-                            <a:rPr lang="fr-FR" i="1"/>
+                            <a:rPr lang="fr-FR" i="1">
+                              <a:latin typeface="Cambria Math" panose="02040503050406030204" pitchFamily="18" charset="0"/>
+                            </a:rPr>
                             <m:t>4</m:t>
                           </m:r>
                         </m:sup>
@@ -4384,7 +4801,7 @@
                     <a:spcPct val="90000"/>
                   </a:lnSpc>
                   <a:spcBef>
-                    <a:spcPts val="1000"/>
+                    <a:spcPts val="2400"/>
                   </a:spcBef>
                   <a:spcAft>
                     <a:spcPts val="0"/>
@@ -4868,7 +5285,7 @@
             </p:txBody>
           </p:sp>
         </mc:Choice>
-        <mc:Fallback>
+        <mc:Fallback xmlns="">
           <p:sp>
             <p:nvSpPr>
               <p:cNvPr id="3" name="Espace réservé du contenu 2">
@@ -4893,7 +5310,7 @@
               <a:blipFill>
                 <a:blip r:embed="rId2"/>
                 <a:stretch>
-                  <a:fillRect l="-1566" t="-1934"/>
+                  <a:fillRect l="-1566" t="-1934" b="-796"/>
                 </a:stretch>
               </a:blipFill>
             </p:spPr>
@@ -4941,8 +5358,8 @@
         </p:blipFill>
         <p:spPr bwMode="auto">
           <a:xfrm>
-            <a:off x="9356308" y="2295524"/>
-            <a:ext cx="2314503" cy="3221355"/>
+            <a:off x="8819114" y="232980"/>
+            <a:ext cx="2171199" cy="3021902"/>
           </a:xfrm>
           <a:prstGeom prst="rect">
             <a:avLst/>
@@ -4957,6 +5374,36 @@
               </a14:hiddenFill>
             </a:ext>
           </a:extLst>
+        </p:spPr>
+      </p:pic>
+      <p:pic>
+        <p:nvPicPr>
+          <p:cNvPr id="5" name="Image 4">
+            <a:extLst>
+              <a:ext uri="{FF2B5EF4-FFF2-40B4-BE49-F238E27FC236}">
+                <a16:creationId xmlns:a16="http://schemas.microsoft.com/office/drawing/2014/main" id="{44134258-3467-C98F-64B0-DF4243CE64E0}"/>
+              </a:ext>
+            </a:extLst>
+          </p:cNvPr>
+          <p:cNvPicPr>
+            <a:picLocks noChangeAspect="1"/>
+          </p:cNvPicPr>
+          <p:nvPr/>
+        </p:nvPicPr>
+        <p:blipFill>
+          <a:blip r:embed="rId4"/>
+          <a:stretch>
+            <a:fillRect/>
+          </a:stretch>
+        </p:blipFill>
+        <p:spPr>
+          <a:xfrm>
+            <a:off x="8372852" y="3798791"/>
+            <a:ext cx="3533376" cy="2233360"/>
+          </a:xfrm>
+          <a:prstGeom prst="rect">
+            <a:avLst/>
+          </a:prstGeom>
         </p:spPr>
       </p:pic>
     </p:spTree>
@@ -5017,7 +5464,7 @@
           <a:p>
             <a:r>
               <a:rPr lang="fr-FR" dirty="0"/>
-              <a:t>Discrétisation </a:t>
+              <a:t>Discrétisation : Milieu </a:t>
             </a:r>
           </a:p>
         </p:txBody>
@@ -5498,6 +5945,12 @@
                       </m:num>
                       <m:den>
                         <m:r>
+                          <a:rPr lang="fr-FR" b="0" i="0" smtClean="0">
+                            <a:latin typeface="Cambria Math" panose="02040503050406030204" pitchFamily="18" charset="0"/>
+                          </a:rPr>
+                          <m:t>2</m:t>
+                        </m:r>
+                        <m:r>
                           <m:rPr>
                             <m:sty m:val="p"/>
                           </m:rPr>
@@ -5537,7 +5990,7 @@
                       <m:f>
                         <m:fPr>
                           <m:ctrlPr>
-                            <a:rPr lang="fr-FR" i="1">
+                            <a:rPr lang="fr-FR" sz="2400" i="1">
                               <a:latin typeface="Cambria Math" panose="02040503050406030204" pitchFamily="18" charset="0"/>
                             </a:rPr>
                           </m:ctrlPr>
@@ -5546,14 +5999,14 @@
                           <m:sSup>
                             <m:sSupPr>
                               <m:ctrlPr>
-                                <a:rPr lang="fr-FR" i="1">
+                                <a:rPr lang="fr-FR" sz="2400" i="1">
                                   <a:latin typeface="Cambria Math" panose="02040503050406030204" pitchFamily="18" charset="0"/>
                                 </a:rPr>
                               </m:ctrlPr>
                             </m:sSupPr>
                             <m:e>
                               <m:r>
-                                <a:rPr lang="fr-FR" i="1">
+                                <a:rPr lang="fr-FR" sz="2400" i="1">
                                   <a:latin typeface="Cambria Math" panose="02040503050406030204" pitchFamily="18" charset="0"/>
                                 </a:rPr>
                                 <m:t>𝜕</m:t>
@@ -5561,7 +6014,7 @@
                             </m:e>
                             <m:sup>
                               <m:r>
-                                <a:rPr lang="fr-FR" i="1">
+                                <a:rPr lang="fr-FR" sz="2400" i="1">
                                   <a:latin typeface="Cambria Math" panose="02040503050406030204" pitchFamily="18" charset="0"/>
                                 </a:rPr>
                                 <m:t>2</m:t>
@@ -5569,7 +6022,7 @@
                             </m:sup>
                           </m:sSup>
                           <m:r>
-                            <a:rPr lang="fr-FR" i="1">
+                            <a:rPr lang="fr-FR" sz="2400" i="1">
                               <a:latin typeface="Cambria Math" panose="02040503050406030204" pitchFamily="18" charset="0"/>
                             </a:rPr>
                             <m:t>𝑇</m:t>
@@ -5577,7 +6030,7 @@
                         </m:num>
                         <m:den>
                           <m:r>
-                            <a:rPr lang="fr-FR" i="1">
+                            <a:rPr lang="fr-FR" sz="2400" i="1">
                               <a:latin typeface="Cambria Math" panose="02040503050406030204" pitchFamily="18" charset="0"/>
                             </a:rPr>
                             <m:t>𝜕</m:t>
@@ -5585,14 +6038,14 @@
                           <m:sSup>
                             <m:sSupPr>
                               <m:ctrlPr>
-                                <a:rPr lang="fr-FR" i="1">
+                                <a:rPr lang="fr-FR" sz="2400" i="1">
                                   <a:latin typeface="Cambria Math" panose="02040503050406030204" pitchFamily="18" charset="0"/>
                                 </a:rPr>
                               </m:ctrlPr>
                             </m:sSupPr>
                             <m:e>
                               <m:r>
-                                <a:rPr lang="fr-FR" i="1">
+                                <a:rPr lang="fr-FR" sz="2400" i="1">
                                   <a:latin typeface="Cambria Math" panose="02040503050406030204" pitchFamily="18" charset="0"/>
                                 </a:rPr>
                                 <m:t>𝑅</m:t>
@@ -5600,7 +6053,7 @@
                             </m:e>
                             <m:sup>
                               <m:r>
-                                <a:rPr lang="fr-FR" i="1">
+                                <a:rPr lang="fr-FR" sz="2400" i="1">
                                   <a:latin typeface="Cambria Math" panose="02040503050406030204" pitchFamily="18" charset="0"/>
                                 </a:rPr>
                                 <m:t>2</m:t>
@@ -5610,7 +6063,7 @@
                         </m:den>
                       </m:f>
                       <m:r>
-                        <a:rPr lang="fr-FR" b="0" i="1" smtClean="0">
+                        <a:rPr lang="fr-FR" sz="2400" b="0" i="1" smtClean="0">
                           <a:latin typeface="Cambria Math" panose="02040503050406030204" pitchFamily="18" charset="0"/>
                         </a:rPr>
                         <m:t>+</m:t>
@@ -5618,14 +6071,14 @@
                       <m:f>
                         <m:fPr>
                           <m:ctrlPr>
-                            <a:rPr lang="fr-FR" i="1">
+                            <a:rPr lang="fr-FR" sz="2400" i="1">
                               <a:latin typeface="Cambria Math" panose="02040503050406030204" pitchFamily="18" charset="0"/>
                             </a:rPr>
                           </m:ctrlPr>
                         </m:fPr>
                         <m:num>
                           <m:r>
-                            <a:rPr lang="fr-FR" b="0" i="1" smtClean="0">
+                            <a:rPr lang="fr-FR" sz="2400" b="0" i="1" smtClean="0">
                               <a:latin typeface="Cambria Math" panose="02040503050406030204" pitchFamily="18" charset="0"/>
                             </a:rPr>
                             <m:t>1</m:t>
@@ -5633,7 +6086,7 @@
                         </m:num>
                         <m:den>
                           <m:r>
-                            <a:rPr lang="fr-FR" b="0" i="1" smtClean="0">
+                            <a:rPr lang="fr-FR" sz="2400" b="0" i="1" smtClean="0">
                               <a:latin typeface="Cambria Math" panose="02040503050406030204" pitchFamily="18" charset="0"/>
                             </a:rPr>
                             <m:t>𝑅</m:t>
@@ -5643,20 +6096,20 @@
                       <m:f>
                         <m:fPr>
                           <m:ctrlPr>
-                            <a:rPr lang="fr-FR" i="1">
+                            <a:rPr lang="fr-FR" sz="2400" i="1">
                               <a:latin typeface="Cambria Math" panose="02040503050406030204" pitchFamily="18" charset="0"/>
                             </a:rPr>
                           </m:ctrlPr>
                         </m:fPr>
                         <m:num>
                           <m:r>
-                            <a:rPr lang="fr-FR" i="1">
+                            <a:rPr lang="fr-FR" sz="2400" i="1">
                               <a:latin typeface="Cambria Math" panose="02040503050406030204" pitchFamily="18" charset="0"/>
                             </a:rPr>
                             <m:t>𝜕</m:t>
                           </m:r>
                           <m:r>
-                            <a:rPr lang="fr-FR" i="1">
+                            <a:rPr lang="fr-FR" sz="2400" i="1">
                               <a:latin typeface="Cambria Math" panose="02040503050406030204" pitchFamily="18" charset="0"/>
                             </a:rPr>
                             <m:t>𝑇</m:t>
@@ -5664,13 +6117,13 @@
                         </m:num>
                         <m:den>
                           <m:r>
-                            <a:rPr lang="fr-FR" i="1">
+                            <a:rPr lang="fr-FR" sz="2400" i="1">
                               <a:latin typeface="Cambria Math" panose="02040503050406030204" pitchFamily="18" charset="0"/>
                             </a:rPr>
                             <m:t>𝜕</m:t>
                           </m:r>
                           <m:r>
-                            <a:rPr lang="fr-FR" i="1">
+                            <a:rPr lang="fr-FR" sz="2400" i="1">
                               <a:latin typeface="Cambria Math" panose="02040503050406030204" pitchFamily="18" charset="0"/>
                             </a:rPr>
                             <m:t>𝑅</m:t>
@@ -5678,7 +6131,7 @@
                         </m:den>
                       </m:f>
                       <m:r>
-                        <a:rPr lang="fr-FR" b="0" i="1" smtClean="0">
+                        <a:rPr lang="fr-FR" sz="2400" b="0" i="1" smtClean="0">
                           <a:latin typeface="Cambria Math" panose="02040503050406030204" pitchFamily="18" charset="0"/>
                         </a:rPr>
                         <m:t>+</m:t>
@@ -5686,7 +6139,7 @@
                       <m:f>
                         <m:fPr>
                           <m:ctrlPr>
-                            <a:rPr lang="fr-FR" i="1">
+                            <a:rPr lang="fr-FR" sz="2400" i="1">
                               <a:latin typeface="Cambria Math" panose="02040503050406030204" pitchFamily="18" charset="0"/>
                             </a:rPr>
                           </m:ctrlPr>
@@ -5695,14 +6148,14 @@
                           <m:sSup>
                             <m:sSupPr>
                               <m:ctrlPr>
-                                <a:rPr lang="fr-FR" i="1">
+                                <a:rPr lang="fr-FR" sz="2400" i="1">
                                   <a:latin typeface="Cambria Math" panose="02040503050406030204" pitchFamily="18" charset="0"/>
                                 </a:rPr>
                               </m:ctrlPr>
                             </m:sSupPr>
                             <m:e>
                               <m:r>
-                                <a:rPr lang="fr-FR" i="1">
+                                <a:rPr lang="fr-FR" sz="2400" i="1">
                                   <a:latin typeface="Cambria Math" panose="02040503050406030204" pitchFamily="18" charset="0"/>
                                 </a:rPr>
                                 <m:t>𝜕</m:t>
@@ -5710,7 +6163,7 @@
                             </m:e>
                             <m:sup>
                               <m:r>
-                                <a:rPr lang="fr-FR" i="1">
+                                <a:rPr lang="fr-FR" sz="2400" i="1">
                                   <a:latin typeface="Cambria Math" panose="02040503050406030204" pitchFamily="18" charset="0"/>
                                 </a:rPr>
                                 <m:t>2</m:t>
@@ -5718,7 +6171,7 @@
                             </m:sup>
                           </m:sSup>
                           <m:r>
-                            <a:rPr lang="fr-FR" i="1">
+                            <a:rPr lang="fr-FR" sz="2400" i="1">
                               <a:latin typeface="Cambria Math" panose="02040503050406030204" pitchFamily="18" charset="0"/>
                             </a:rPr>
                             <m:t>𝑇</m:t>
@@ -5726,7 +6179,7 @@
                         </m:num>
                         <m:den>
                           <m:r>
-                            <a:rPr lang="fr-FR" i="1">
+                            <a:rPr lang="fr-FR" sz="2400" i="1">
                               <a:latin typeface="Cambria Math" panose="02040503050406030204" pitchFamily="18" charset="0"/>
                             </a:rPr>
                             <m:t>𝜕</m:t>
@@ -5734,14 +6187,14 @@
                           <m:sSup>
                             <m:sSupPr>
                               <m:ctrlPr>
-                                <a:rPr lang="fr-FR" i="1">
+                                <a:rPr lang="fr-FR" sz="2400" i="1">
                                   <a:latin typeface="Cambria Math" panose="02040503050406030204" pitchFamily="18" charset="0"/>
                                 </a:rPr>
                               </m:ctrlPr>
                             </m:sSupPr>
                             <m:e>
                               <m:r>
-                                <a:rPr lang="fr-FR" i="1">
+                                <a:rPr lang="fr-FR" sz="2400" i="1">
                                   <a:latin typeface="Cambria Math" panose="02040503050406030204" pitchFamily="18" charset="0"/>
                                 </a:rPr>
                                 <m:t>𝑧</m:t>
@@ -5749,7 +6202,7 @@
                             </m:e>
                             <m:sup>
                               <m:r>
-                                <a:rPr lang="fr-FR" i="1">
+                                <a:rPr lang="fr-FR" sz="2400" i="1">
                                   <a:latin typeface="Cambria Math" panose="02040503050406030204" pitchFamily="18" charset="0"/>
                                 </a:rPr>
                                 <m:t>2</m:t>
@@ -5759,7 +6212,7 @@
                         </m:den>
                       </m:f>
                       <m:r>
-                        <a:rPr lang="fr-FR" b="0" i="1" smtClean="0">
+                        <a:rPr lang="fr-FR" sz="2400" b="0" i="1" smtClean="0">
                           <a:latin typeface="Cambria Math" panose="02040503050406030204" pitchFamily="18" charset="0"/>
                         </a:rPr>
                         <m:t>−</m:t>
@@ -5767,7 +6220,7 @@
                       <m:f>
                         <m:fPr>
                           <m:ctrlPr>
-                            <a:rPr lang="fr-FR" i="1">
+                            <a:rPr lang="fr-FR" sz="2400" i="1">
                               <a:latin typeface="Cambria Math" panose="02040503050406030204" pitchFamily="18" charset="0"/>
                             </a:rPr>
                           </m:ctrlPr>
@@ -5777,7 +6230,7 @@
                             <m:rPr>
                               <m:sty m:val="p"/>
                             </m:rPr>
-                            <a:rPr lang="el-GR" i="1">
+                            <a:rPr lang="el-GR" sz="2400" i="1">
                               <a:latin typeface="Cambria Math" panose="02040503050406030204" pitchFamily="18" charset="0"/>
                             </a:rPr>
                             <m:t>ρ</m:t>
@@ -5785,14 +6238,14 @@
                           <m:sSub>
                             <m:sSubPr>
                               <m:ctrlPr>
-                                <a:rPr lang="fr-FR" i="1">
+                                <a:rPr lang="fr-FR" sz="2400" i="1">
                                   <a:latin typeface="Cambria Math" panose="02040503050406030204" pitchFamily="18" charset="0"/>
                                 </a:rPr>
                               </m:ctrlPr>
                             </m:sSubPr>
                             <m:e>
                               <m:r>
-                                <a:rPr lang="fr-FR" i="1">
+                                <a:rPr lang="fr-FR" sz="2400" i="1">
                                   <a:latin typeface="Cambria Math" panose="02040503050406030204" pitchFamily="18" charset="0"/>
                                 </a:rPr>
                                 <m:t>𝐶</m:t>
@@ -5800,7 +6253,7 @@
                             </m:e>
                             <m:sub>
                               <m:r>
-                                <a:rPr lang="fr-FR" i="1">
+                                <a:rPr lang="fr-FR" sz="2400" i="1">
                                   <a:latin typeface="Cambria Math" panose="02040503050406030204" pitchFamily="18" charset="0"/>
                                 </a:rPr>
                                 <m:t>𝑝</m:t>
@@ -5813,7 +6266,7 @@
                             <m:rPr>
                               <m:sty m:val="p"/>
                             </m:rPr>
-                            <a:rPr lang="fr-FR" b="0" i="0" smtClean="0">
+                            <a:rPr lang="fr-FR" sz="2400" b="0" i="0" smtClean="0">
                               <a:latin typeface="Cambria Math" panose="02040503050406030204" pitchFamily="18" charset="0"/>
                             </a:rPr>
                             <m:t>k</m:t>
@@ -5822,7 +6275,7 @@
                             <m:rPr>
                               <m:nor/>
                             </m:rPr>
-                            <a:rPr lang="fr-FR"/>
+                            <a:rPr lang="fr-FR" sz="2400"/>
                             <m:t> </m:t>
                           </m:r>
                         </m:den>
@@ -5830,20 +6283,20 @@
                       <m:f>
                         <m:fPr>
                           <m:ctrlPr>
-                            <a:rPr lang="fr-FR" i="1">
+                            <a:rPr lang="fr-FR" sz="2400" i="1">
                               <a:latin typeface="Cambria Math" panose="02040503050406030204" pitchFamily="18" charset="0"/>
                             </a:rPr>
                           </m:ctrlPr>
                         </m:fPr>
                         <m:num>
                           <m:r>
-                            <a:rPr lang="fr-FR" i="1">
+                            <a:rPr lang="fr-FR" sz="2400" i="1">
                               <a:latin typeface="Cambria Math" panose="02040503050406030204" pitchFamily="18" charset="0"/>
                             </a:rPr>
                             <m:t>𝜕</m:t>
                           </m:r>
                           <m:r>
-                            <a:rPr lang="fr-FR" i="1">
+                            <a:rPr lang="fr-FR" sz="2400" i="1">
                               <a:latin typeface="Cambria Math" panose="02040503050406030204" pitchFamily="18" charset="0"/>
                             </a:rPr>
                             <m:t>𝑇</m:t>
@@ -5851,13 +6304,13 @@
                         </m:num>
                         <m:den>
                           <m:r>
-                            <a:rPr lang="fr-FR" i="1">
+                            <a:rPr lang="fr-FR" sz="2400" i="1">
                               <a:latin typeface="Cambria Math" panose="02040503050406030204" pitchFamily="18" charset="0"/>
                             </a:rPr>
                             <m:t>𝜕</m:t>
                           </m:r>
                           <m:r>
-                            <a:rPr lang="fr-FR" i="1">
+                            <a:rPr lang="fr-FR" sz="2400" i="1">
                               <a:latin typeface="Cambria Math" panose="02040503050406030204" pitchFamily="18" charset="0"/>
                             </a:rPr>
                             <m:t>𝑡</m:t>
@@ -5865,7 +6318,7 @@
                         </m:den>
                       </m:f>
                       <m:r>
-                        <a:rPr lang="fr-FR" b="0" i="1" smtClean="0">
+                        <a:rPr lang="fr-FR" sz="2400" b="0" i="1" smtClean="0">
                           <a:latin typeface="Cambria Math" panose="02040503050406030204" pitchFamily="18" charset="0"/>
                         </a:rPr>
                         <m:t>=0</m:t>
@@ -5873,7 +6326,7 @@
                     </m:oMath>
                   </m:oMathPara>
                 </a14:m>
-                <a:endParaRPr lang="fr-FR" i="1" dirty="0">
+                <a:endParaRPr lang="fr-FR" sz="2400" i="1" dirty="0">
                   <a:latin typeface="Cambria Math" panose="02040503050406030204" pitchFamily="18" charset="0"/>
                 </a:endParaRPr>
               </a:p>
@@ -6107,13 +6560,7 @@
                                 <a:rPr lang="fr-FR" sz="2400" i="1">
                                   <a:latin typeface="Cambria Math" panose="02040503050406030204" pitchFamily="18" charset="0"/>
                                 </a:rPr>
-                                <m:t>+1</m:t>
-                              </m:r>
-                              <m:r>
-                                <a:rPr lang="fr-FR" sz="2400" i="1">
-                                  <a:latin typeface="Cambria Math" panose="02040503050406030204" pitchFamily="18" charset="0"/>
-                                </a:rPr>
-                                <m:t>,</m:t>
+                                <m:t>+1,</m:t>
                               </m:r>
                               <m:r>
                                 <a:rPr lang="fr-FR" sz="2400" i="1">
@@ -6221,13 +6668,7 @@
                                 <a:rPr lang="fr-FR" sz="2400" i="1">
                                   <a:latin typeface="Cambria Math" panose="02040503050406030204" pitchFamily="18" charset="0"/>
                                 </a:rPr>
-                                <m:t>−</m:t>
-                              </m:r>
-                              <m:r>
-                                <a:rPr lang="fr-FR" sz="2400" i="1">
-                                  <a:latin typeface="Cambria Math" panose="02040503050406030204" pitchFamily="18" charset="0"/>
-                                </a:rPr>
-                                <m:t>1,</m:t>
+                                <m:t>−1,</m:t>
                               </m:r>
                               <m:r>
                                 <a:rPr lang="fr-FR" sz="2400" i="1">
@@ -6360,13 +6801,7 @@
                                 <a:rPr lang="fr-FR" sz="2400" i="1">
                                   <a:latin typeface="Cambria Math" panose="02040503050406030204" pitchFamily="18" charset="0"/>
                                 </a:rPr>
-                                <m:t>+1</m:t>
-                              </m:r>
-                              <m:r>
-                                <a:rPr lang="fr-FR" sz="2400" i="1">
-                                  <a:latin typeface="Cambria Math" panose="02040503050406030204" pitchFamily="18" charset="0"/>
-                                </a:rPr>
-                                <m:t>,</m:t>
+                                <m:t>+1,</m:t>
                               </m:r>
                               <m:r>
                                 <a:rPr lang="fr-FR" sz="2400" i="1">
@@ -6417,13 +6852,7 @@
                                 <a:rPr lang="fr-FR" sz="2400" i="1">
                                   <a:latin typeface="Cambria Math" panose="02040503050406030204" pitchFamily="18" charset="0"/>
                                 </a:rPr>
-                                <m:t>−1</m:t>
-                              </m:r>
-                              <m:r>
-                                <a:rPr lang="fr-FR" sz="2400" i="1">
-                                  <a:latin typeface="Cambria Math" panose="02040503050406030204" pitchFamily="18" charset="0"/>
-                                </a:rPr>
-                                <m:t>,</m:t>
+                                <m:t>−1,</m:t>
                               </m:r>
                               <m:r>
                                 <a:rPr lang="fr-FR" sz="2400" i="1">
@@ -6443,6 +6872,12 @@
                           </m:sSubSup>
                         </m:num>
                         <m:den>
+                          <m:r>
+                            <a:rPr lang="fr-FR" sz="2400" b="0" i="0" smtClean="0">
+                              <a:latin typeface="Cambria Math" panose="02040503050406030204" pitchFamily="18" charset="0"/>
+                            </a:rPr>
+                            <m:t>2</m:t>
+                          </m:r>
                           <m:r>
                             <m:rPr>
                               <m:sty m:val="p"/>
@@ -6771,12 +7206,16 @@
           <p:nvPr/>
         </p:nvSpPr>
         <p:spPr>
-          <a:xfrm rot="4099154">
-            <a:off x="1500336" y="3125056"/>
-            <a:ext cx="737170" cy="3385710"/>
+          <a:xfrm rot="4263975">
+            <a:off x="1775824" y="2807560"/>
+            <a:ext cx="607576" cy="3713718"/>
           </a:xfrm>
           <a:prstGeom prst="curvedRightArrow">
-            <a:avLst/>
+            <a:avLst>
+              <a:gd name="adj1" fmla="val 25000"/>
+              <a:gd name="adj2" fmla="val 50000"/>
+              <a:gd name="adj3" fmla="val 36727"/>
+            </a:avLst>
           </a:prstGeom>
         </p:spPr>
         <p:style>
@@ -6902,8 +7341,8 @@
           </a:p>
         </p:txBody>
       </p:sp>
-      <mc:AlternateContent xmlns:mc="http://schemas.openxmlformats.org/markup-compatibility/2006">
-        <mc:Choice xmlns:a14="http://schemas.microsoft.com/office/drawing/2010/main" Requires="a14">
+      <mc:AlternateContent xmlns:mc="http://schemas.openxmlformats.org/markup-compatibility/2006" xmlns:a14="http://schemas.microsoft.com/office/drawing/2010/main">
+        <mc:Choice Requires="a14">
           <p:sp>
             <p:nvSpPr>
               <p:cNvPr id="5" name="ZoneTexte 4">
@@ -7118,14 +7557,7 @@
                                 <a:latin typeface="Cambria Math" panose="02040503050406030204" pitchFamily="18" charset="0"/>
                                 <a:ea typeface="Cambria Math" panose="02040503050406030204" pitchFamily="18" charset="0"/>
                               </a:rPr>
-                              <m:t>+1</m:t>
-                            </m:r>
-                            <m:r>
-                              <a:rPr lang="fr-FR" sz="2600" i="1">
-                                <a:latin typeface="Cambria Math" panose="02040503050406030204" pitchFamily="18" charset="0"/>
-                                <a:ea typeface="Cambria Math" panose="02040503050406030204" pitchFamily="18" charset="0"/>
-                              </a:rPr>
-                              <m:t>,</m:t>
+                              <m:t>+1,</m:t>
                             </m:r>
                             <m:r>
                               <a:rPr lang="fr-FR" sz="2600" i="1">
@@ -7248,14 +7680,7 @@
                                 <a:latin typeface="Cambria Math" panose="02040503050406030204" pitchFamily="18" charset="0"/>
                                 <a:ea typeface="Cambria Math" panose="02040503050406030204" pitchFamily="18" charset="0"/>
                               </a:rPr>
-                              <m:t>−</m:t>
-                            </m:r>
-                            <m:r>
-                              <a:rPr lang="fr-FR" sz="2600" i="1">
-                                <a:latin typeface="Cambria Math" panose="02040503050406030204" pitchFamily="18" charset="0"/>
-                                <a:ea typeface="Cambria Math" panose="02040503050406030204" pitchFamily="18" charset="0"/>
-                              </a:rPr>
-                              <m:t>1,</m:t>
+                              <m:t>−1,</m:t>
                             </m:r>
                             <m:r>
                               <a:rPr lang="fr-FR" sz="2600" i="1">
@@ -7695,7 +8120,7 @@
             </p:txBody>
           </p:sp>
         </mc:Choice>
-        <mc:Fallback>
+        <mc:Fallback xmlns="">
           <p:sp>
             <p:nvSpPr>
               <p:cNvPr id="5" name="ZoneTexte 4">
@@ -7775,6 +8200,94 @@
           <p:cNvPr id="2" name="Titre 1">
             <a:extLst>
               <a:ext uri="{FF2B5EF4-FFF2-40B4-BE49-F238E27FC236}">
+                <a16:creationId xmlns:a16="http://schemas.microsoft.com/office/drawing/2014/main" id="{B9C5C6ED-CEB0-DF95-C2D4-5220839D039C}"/>
+              </a:ext>
+            </a:extLst>
+          </p:cNvPr>
+          <p:cNvSpPr>
+            <a:spLocks noGrp="1"/>
+          </p:cNvSpPr>
+          <p:nvPr>
+            <p:ph type="title"/>
+          </p:nvPr>
+        </p:nvSpPr>
+        <p:spPr>
+          <a:xfrm>
+            <a:off x="838200" y="18255"/>
+            <a:ext cx="10515600" cy="1325563"/>
+          </a:xfrm>
+        </p:spPr>
+        <p:txBody>
+          <a:bodyPr/>
+          <a:lstStyle/>
+          <a:p>
+            <a:r>
+              <a:rPr lang="fr-FR" dirty="0"/>
+              <a:t>Discrétisation : frontières</a:t>
+            </a:r>
+          </a:p>
+        </p:txBody>
+      </p:sp>
+      <p:sp>
+        <p:nvSpPr>
+          <p:cNvPr id="3" name="Espace réservé du contenu 2">
+            <a:extLst>
+              <a:ext uri="{FF2B5EF4-FFF2-40B4-BE49-F238E27FC236}">
+                <a16:creationId xmlns:a16="http://schemas.microsoft.com/office/drawing/2014/main" id="{492A9C98-CDF3-02FE-6E21-30036838C3DB}"/>
+              </a:ext>
+            </a:extLst>
+          </p:cNvPr>
+          <p:cNvSpPr>
+            <a:spLocks noGrp="1"/>
+          </p:cNvSpPr>
+          <p:nvPr>
+            <p:ph idx="1"/>
+          </p:nvPr>
+        </p:nvSpPr>
+        <p:spPr/>
+        <p:txBody>
+          <a:bodyPr/>
+          <a:lstStyle/>
+          <a:p>
+            <a:endParaRPr lang="fr-FR" dirty="0"/>
+          </a:p>
+        </p:txBody>
+      </p:sp>
+    </p:spTree>
+    <p:extLst>
+      <p:ext uri="{BB962C8B-B14F-4D97-AF65-F5344CB8AC3E}">
+        <p14:creationId xmlns:p14="http://schemas.microsoft.com/office/powerpoint/2010/main" val="3300882518"/>
+      </p:ext>
+    </p:extLst>
+  </p:cSld>
+  <p:clrMapOvr>
+    <a:masterClrMapping/>
+  </p:clrMapOvr>
+</p:sld>
+</file>
+
+<file path=ppt/slides/slide6.xml><?xml version="1.0" encoding="utf-8"?>
+<p:sld xmlns:a="http://schemas.openxmlformats.org/drawingml/2006/main" xmlns:r="http://schemas.openxmlformats.org/officeDocument/2006/relationships" xmlns:p="http://schemas.openxmlformats.org/presentationml/2006/main">
+  <p:cSld>
+    <p:spTree>
+      <p:nvGrpSpPr>
+        <p:cNvPr id="1" name=""/>
+        <p:cNvGrpSpPr/>
+        <p:nvPr/>
+      </p:nvGrpSpPr>
+      <p:grpSpPr>
+        <a:xfrm>
+          <a:off x="0" y="0"/>
+          <a:ext cx="0" cy="0"/>
+          <a:chOff x="0" y="0"/>
+          <a:chExt cx="0" cy="0"/>
+        </a:xfrm>
+      </p:grpSpPr>
+      <p:sp>
+        <p:nvSpPr>
+          <p:cNvPr id="2" name="Titre 1">
+            <a:extLst>
+              <a:ext uri="{FF2B5EF4-FFF2-40B4-BE49-F238E27FC236}">
                 <a16:creationId xmlns:a16="http://schemas.microsoft.com/office/drawing/2014/main" id="{59B0DE8D-01F9-F51A-DBBD-3867112623A3}"/>
               </a:ext>
             </a:extLst>
@@ -7803,12 +8316,7548 @@
           </a:p>
         </p:txBody>
       </p:sp>
+      <mc:AlternateContent xmlns:mc="http://schemas.openxmlformats.org/markup-compatibility/2006">
+        <mc:Choice xmlns:a14="http://schemas.microsoft.com/office/drawing/2010/main" Requires="a14">
+          <p:sp>
+            <p:nvSpPr>
+              <p:cNvPr id="3" name="Espace réservé du contenu 2">
+                <a:extLst>
+                  <a:ext uri="{FF2B5EF4-FFF2-40B4-BE49-F238E27FC236}">
+                    <a16:creationId xmlns:a16="http://schemas.microsoft.com/office/drawing/2014/main" id="{3369A214-4D5D-715B-6640-CC12B4B650A6}"/>
+                  </a:ext>
+                </a:extLst>
+              </p:cNvPr>
+              <p:cNvSpPr>
+                <a:spLocks noGrp="1"/>
+              </p:cNvSpPr>
+              <p:nvPr>
+                <p:ph idx="1"/>
+              </p:nvPr>
+            </p:nvSpPr>
+            <p:spPr>
+              <a:xfrm>
+                <a:off x="570411" y="1605124"/>
+                <a:ext cx="10515600" cy="5504688"/>
+              </a:xfrm>
+            </p:spPr>
+            <p:txBody>
+              <a:bodyPr>
+                <a:normAutofit/>
+              </a:bodyPr>
+              <a:lstStyle/>
+              <a:p>
+                <a:r>
+                  <a:rPr lang="fr-FR" dirty="0"/>
+                  <a:t>Développement de Taylor </a:t>
+                </a:r>
+              </a:p>
+              <a:p>
+                <a14:m>
+                  <m:oMath xmlns:m="http://schemas.openxmlformats.org/officeDocument/2006/math">
+                    <m:sSub>
+                      <m:sSubPr>
+                        <m:ctrlPr>
+                          <a:rPr lang="fr-FR" i="1">
+                            <a:latin typeface="Cambria Math" panose="02040503050406030204" pitchFamily="18" charset="0"/>
+                          </a:rPr>
+                        </m:ctrlPr>
+                      </m:sSubPr>
+                      <m:e>
+                        <m:r>
+                          <m:rPr>
+                            <m:sty m:val="p"/>
+                          </m:rPr>
+                          <a:rPr lang="fr-FR">
+                            <a:latin typeface="Cambria Math" panose="02040503050406030204" pitchFamily="18" charset="0"/>
+                          </a:rPr>
+                          <m:t>T</m:t>
+                        </m:r>
+                      </m:e>
+                      <m:sub>
+                        <m:r>
+                          <m:rPr>
+                            <m:sty m:val="p"/>
+                          </m:rPr>
+                          <a:rPr lang="fr-FR">
+                            <a:latin typeface="Cambria Math" panose="02040503050406030204" pitchFamily="18" charset="0"/>
+                          </a:rPr>
+                          <m:t>i</m:t>
+                        </m:r>
+                        <m:r>
+                          <a:rPr lang="fr-FR" b="0" i="0" smtClean="0">
+                            <a:latin typeface="Cambria Math" panose="02040503050406030204" pitchFamily="18" charset="0"/>
+                          </a:rPr>
+                          <m:t>+</m:t>
+                        </m:r>
+                        <m:r>
+                          <a:rPr lang="fr-FR">
+                            <a:latin typeface="Cambria Math" panose="02040503050406030204" pitchFamily="18" charset="0"/>
+                          </a:rPr>
+                          <m:t>1</m:t>
+                        </m:r>
+                      </m:sub>
+                    </m:sSub>
+                    <m:r>
+                      <a:rPr lang="fr-FR">
+                        <a:latin typeface="Cambria Math" panose="02040503050406030204" pitchFamily="18" charset="0"/>
+                      </a:rPr>
+                      <m:t>=</m:t>
+                    </m:r>
+                    <m:sSub>
+                      <m:sSubPr>
+                        <m:ctrlPr>
+                          <a:rPr lang="fr-FR" i="1">
+                            <a:latin typeface="Cambria Math" panose="02040503050406030204" pitchFamily="18" charset="0"/>
+                          </a:rPr>
+                        </m:ctrlPr>
+                      </m:sSubPr>
+                      <m:e>
+                        <m:r>
+                          <m:rPr>
+                            <m:sty m:val="p"/>
+                          </m:rPr>
+                          <a:rPr lang="fr-FR">
+                            <a:latin typeface="Cambria Math" panose="02040503050406030204" pitchFamily="18" charset="0"/>
+                          </a:rPr>
+                          <m:t>T</m:t>
+                        </m:r>
+                      </m:e>
+                      <m:sub>
+                        <m:r>
+                          <m:rPr>
+                            <m:sty m:val="p"/>
+                          </m:rPr>
+                          <a:rPr lang="fr-FR">
+                            <a:latin typeface="Cambria Math" panose="02040503050406030204" pitchFamily="18" charset="0"/>
+                          </a:rPr>
+                          <m:t>i</m:t>
+                        </m:r>
+                      </m:sub>
+                    </m:sSub>
+                    <m:r>
+                      <a:rPr lang="fr-FR" b="0" i="1" smtClean="0">
+                        <a:latin typeface="Cambria Math" panose="02040503050406030204" pitchFamily="18" charset="0"/>
+                      </a:rPr>
+                      <m:t>+</m:t>
+                    </m:r>
+                    <m:f>
+                      <m:fPr>
+                        <m:ctrlPr>
+                          <a:rPr lang="fr-FR" i="1">
+                            <a:latin typeface="Cambria Math" panose="02040503050406030204" pitchFamily="18" charset="0"/>
+                          </a:rPr>
+                        </m:ctrlPr>
+                      </m:fPr>
+                      <m:num>
+                        <m:r>
+                          <a:rPr lang="fr-FR" i="1">
+                            <a:latin typeface="Cambria Math" panose="02040503050406030204" pitchFamily="18" charset="0"/>
+                          </a:rPr>
+                          <m:t>𝜕</m:t>
+                        </m:r>
+                        <m:r>
+                          <a:rPr lang="fr-FR" i="1">
+                            <a:latin typeface="Cambria Math" panose="02040503050406030204" pitchFamily="18" charset="0"/>
+                          </a:rPr>
+                          <m:t>𝑇</m:t>
+                        </m:r>
+                      </m:num>
+                      <m:den>
+                        <m:r>
+                          <a:rPr lang="fr-FR" i="1">
+                            <a:latin typeface="Cambria Math" panose="02040503050406030204" pitchFamily="18" charset="0"/>
+                          </a:rPr>
+                          <m:t>𝜕</m:t>
+                        </m:r>
+                        <m:r>
+                          <a:rPr lang="fr-FR" i="1">
+                            <a:latin typeface="Cambria Math" panose="02040503050406030204" pitchFamily="18" charset="0"/>
+                          </a:rPr>
+                          <m:t>𝑥</m:t>
+                        </m:r>
+                      </m:den>
+                    </m:f>
+                    <m:sSub>
+                      <m:sSubPr>
+                        <m:ctrlPr>
+                          <a:rPr lang="fr-FR" i="1">
+                            <a:latin typeface="Cambria Math" panose="02040503050406030204" pitchFamily="18" charset="0"/>
+                          </a:rPr>
+                        </m:ctrlPr>
+                      </m:sSubPr>
+                      <m:e>
+                        <m:d>
+                          <m:dPr>
+                            <m:begChr m:val=""/>
+                            <m:endChr m:val="|"/>
+                            <m:ctrlPr>
+                              <a:rPr lang="fr-FR" i="1">
+                                <a:latin typeface="Cambria Math" panose="02040503050406030204" pitchFamily="18" charset="0"/>
+                              </a:rPr>
+                            </m:ctrlPr>
+                          </m:dPr>
+                          <m:e>
+                            <m:r>
+                              <a:rPr lang="fr-FR" i="1">
+                                <a:latin typeface="Cambria Math" panose="02040503050406030204" pitchFamily="18" charset="0"/>
+                              </a:rPr>
+                              <m:t>​</m:t>
+                            </m:r>
+                          </m:e>
+                        </m:d>
+                      </m:e>
+                      <m:sub>
+                        <m:r>
+                          <m:rPr>
+                            <m:sty m:val="p"/>
+                          </m:rPr>
+                          <a:rPr lang="fr-FR">
+                            <a:latin typeface="Cambria Math" panose="02040503050406030204" pitchFamily="18" charset="0"/>
+                          </a:rPr>
+                          <m:t>i</m:t>
+                        </m:r>
+                      </m:sub>
+                    </m:sSub>
+                    <m:r>
+                      <m:rPr>
+                        <m:sty m:val="p"/>
+                      </m:rPr>
+                      <a:rPr lang="fr-FR">
+                        <a:latin typeface="Cambria Math" panose="02040503050406030204" pitchFamily="18" charset="0"/>
+                      </a:rPr>
+                      <m:t>Δ</m:t>
+                    </m:r>
+                    <m:r>
+                      <a:rPr lang="fr-FR" i="1">
+                        <a:latin typeface="Cambria Math" panose="02040503050406030204" pitchFamily="18" charset="0"/>
+                      </a:rPr>
+                      <m:t>𝑥</m:t>
+                    </m:r>
+                    <m:r>
+                      <a:rPr lang="fr-FR" i="1">
+                        <a:latin typeface="Cambria Math" panose="02040503050406030204" pitchFamily="18" charset="0"/>
+                      </a:rPr>
+                      <m:t>+</m:t>
+                    </m:r>
+                    <m:f>
+                      <m:fPr>
+                        <m:ctrlPr>
+                          <a:rPr lang="fr-FR" i="1">
+                            <a:latin typeface="Cambria Math" panose="02040503050406030204" pitchFamily="18" charset="0"/>
+                          </a:rPr>
+                        </m:ctrlPr>
+                      </m:fPr>
+                      <m:num>
+                        <m:sSup>
+                          <m:sSupPr>
+                            <m:ctrlPr>
+                              <a:rPr lang="fr-FR" i="1">
+                                <a:latin typeface="Cambria Math" panose="02040503050406030204" pitchFamily="18" charset="0"/>
+                              </a:rPr>
+                            </m:ctrlPr>
+                          </m:sSupPr>
+                          <m:e>
+                            <m:r>
+                              <a:rPr lang="fr-FR" i="1">
+                                <a:latin typeface="Cambria Math" panose="02040503050406030204" pitchFamily="18" charset="0"/>
+                              </a:rPr>
+                              <m:t>𝜕</m:t>
+                            </m:r>
+                          </m:e>
+                          <m:sup>
+                            <m:r>
+                              <a:rPr lang="fr-FR" i="1">
+                                <a:latin typeface="Cambria Math" panose="02040503050406030204" pitchFamily="18" charset="0"/>
+                              </a:rPr>
+                              <m:t>2</m:t>
+                            </m:r>
+                          </m:sup>
+                        </m:sSup>
+                        <m:r>
+                          <a:rPr lang="fr-FR" i="1">
+                            <a:latin typeface="Cambria Math" panose="02040503050406030204" pitchFamily="18" charset="0"/>
+                          </a:rPr>
+                          <m:t>𝑇</m:t>
+                        </m:r>
+                      </m:num>
+                      <m:den>
+                        <m:r>
+                          <a:rPr lang="fr-FR" i="1">
+                            <a:latin typeface="Cambria Math" panose="02040503050406030204" pitchFamily="18" charset="0"/>
+                          </a:rPr>
+                          <m:t>𝜕</m:t>
+                        </m:r>
+                        <m:sSup>
+                          <m:sSupPr>
+                            <m:ctrlPr>
+                              <a:rPr lang="fr-FR" i="1">
+                                <a:latin typeface="Cambria Math" panose="02040503050406030204" pitchFamily="18" charset="0"/>
+                              </a:rPr>
+                            </m:ctrlPr>
+                          </m:sSupPr>
+                          <m:e>
+                            <m:r>
+                              <a:rPr lang="fr-FR" i="1">
+                                <a:latin typeface="Cambria Math" panose="02040503050406030204" pitchFamily="18" charset="0"/>
+                              </a:rPr>
+                              <m:t>𝑥</m:t>
+                            </m:r>
+                          </m:e>
+                          <m:sup>
+                            <m:r>
+                              <a:rPr lang="fr-FR" i="1">
+                                <a:latin typeface="Cambria Math" panose="02040503050406030204" pitchFamily="18" charset="0"/>
+                              </a:rPr>
+                              <m:t>2</m:t>
+                            </m:r>
+                          </m:sup>
+                        </m:sSup>
+                      </m:den>
+                    </m:f>
+                    <m:sSub>
+                      <m:sSubPr>
+                        <m:ctrlPr>
+                          <a:rPr lang="fr-FR" i="1">
+                            <a:latin typeface="Cambria Math" panose="02040503050406030204" pitchFamily="18" charset="0"/>
+                          </a:rPr>
+                        </m:ctrlPr>
+                      </m:sSubPr>
+                      <m:e>
+                        <m:d>
+                          <m:dPr>
+                            <m:begChr m:val=""/>
+                            <m:endChr m:val="|"/>
+                            <m:ctrlPr>
+                              <a:rPr lang="fr-FR" i="1">
+                                <a:latin typeface="Cambria Math" panose="02040503050406030204" pitchFamily="18" charset="0"/>
+                              </a:rPr>
+                            </m:ctrlPr>
+                          </m:dPr>
+                          <m:e>
+                            <m:r>
+                              <a:rPr lang="fr-FR" i="1">
+                                <a:latin typeface="Cambria Math" panose="02040503050406030204" pitchFamily="18" charset="0"/>
+                              </a:rPr>
+                              <m:t>​</m:t>
+                            </m:r>
+                          </m:e>
+                        </m:d>
+                      </m:e>
+                      <m:sub>
+                        <m:r>
+                          <a:rPr lang="fr-FR" i="1">
+                            <a:latin typeface="Cambria Math" panose="02040503050406030204" pitchFamily="18" charset="0"/>
+                          </a:rPr>
+                          <m:t>𝑖</m:t>
+                        </m:r>
+                      </m:sub>
+                    </m:sSub>
+                    <m:f>
+                      <m:fPr>
+                        <m:ctrlPr>
+                          <a:rPr lang="fr-FR" i="1">
+                            <a:latin typeface="Cambria Math" panose="02040503050406030204" pitchFamily="18" charset="0"/>
+                          </a:rPr>
+                        </m:ctrlPr>
+                      </m:fPr>
+                      <m:num>
+                        <m:r>
+                          <m:rPr>
+                            <m:sty m:val="p"/>
+                          </m:rPr>
+                          <a:rPr lang="fr-FR">
+                            <a:latin typeface="Cambria Math" panose="02040503050406030204" pitchFamily="18" charset="0"/>
+                          </a:rPr>
+                          <m:t>Δ</m:t>
+                        </m:r>
+                        <m:sSup>
+                          <m:sSupPr>
+                            <m:ctrlPr>
+                              <a:rPr lang="fr-FR" i="1">
+                                <a:latin typeface="Cambria Math" panose="02040503050406030204" pitchFamily="18" charset="0"/>
+                              </a:rPr>
+                            </m:ctrlPr>
+                          </m:sSupPr>
+                          <m:e>
+                            <m:r>
+                              <a:rPr lang="fr-FR" i="1">
+                                <a:latin typeface="Cambria Math" panose="02040503050406030204" pitchFamily="18" charset="0"/>
+                              </a:rPr>
+                              <m:t>𝑥</m:t>
+                            </m:r>
+                          </m:e>
+                          <m:sup>
+                            <m:r>
+                              <a:rPr lang="fr-FR" i="1">
+                                <a:latin typeface="Cambria Math" panose="02040503050406030204" pitchFamily="18" charset="0"/>
+                              </a:rPr>
+                              <m:t>2</m:t>
+                            </m:r>
+                          </m:sup>
+                        </m:sSup>
+                      </m:num>
+                      <m:den>
+                        <m:r>
+                          <a:rPr lang="fr-FR" i="1">
+                            <a:latin typeface="Cambria Math" panose="02040503050406030204" pitchFamily="18" charset="0"/>
+                          </a:rPr>
+                          <m:t>2!</m:t>
+                        </m:r>
+                      </m:den>
+                    </m:f>
+                    <m:r>
+                      <a:rPr lang="fr-FR" b="0" i="1" smtClean="0">
+                        <a:latin typeface="Cambria Math" panose="02040503050406030204" pitchFamily="18" charset="0"/>
+                      </a:rPr>
+                      <m:t>+</m:t>
+                    </m:r>
+                    <m:f>
+                      <m:fPr>
+                        <m:ctrlPr>
+                          <a:rPr lang="fr-FR" i="1">
+                            <a:latin typeface="Cambria Math" panose="02040503050406030204" pitchFamily="18" charset="0"/>
+                          </a:rPr>
+                        </m:ctrlPr>
+                      </m:fPr>
+                      <m:num>
+                        <m:sSup>
+                          <m:sSupPr>
+                            <m:ctrlPr>
+                              <a:rPr lang="fr-FR" i="1">
+                                <a:latin typeface="Cambria Math" panose="02040503050406030204" pitchFamily="18" charset="0"/>
+                              </a:rPr>
+                            </m:ctrlPr>
+                          </m:sSupPr>
+                          <m:e>
+                            <m:r>
+                              <a:rPr lang="fr-FR" i="1">
+                                <a:latin typeface="Cambria Math" panose="02040503050406030204" pitchFamily="18" charset="0"/>
+                              </a:rPr>
+                              <m:t>𝜕</m:t>
+                            </m:r>
+                          </m:e>
+                          <m:sup>
+                            <m:r>
+                              <a:rPr lang="fr-FR" b="0" i="1" smtClean="0">
+                                <a:latin typeface="Cambria Math" panose="02040503050406030204" pitchFamily="18" charset="0"/>
+                              </a:rPr>
+                              <m:t>3</m:t>
+                            </m:r>
+                          </m:sup>
+                        </m:sSup>
+                        <m:r>
+                          <a:rPr lang="fr-FR" i="1">
+                            <a:latin typeface="Cambria Math" panose="02040503050406030204" pitchFamily="18" charset="0"/>
+                          </a:rPr>
+                          <m:t>𝑇</m:t>
+                        </m:r>
+                      </m:num>
+                      <m:den>
+                        <m:r>
+                          <a:rPr lang="fr-FR" i="1">
+                            <a:latin typeface="Cambria Math" panose="02040503050406030204" pitchFamily="18" charset="0"/>
+                          </a:rPr>
+                          <m:t>𝜕</m:t>
+                        </m:r>
+                        <m:sSup>
+                          <m:sSupPr>
+                            <m:ctrlPr>
+                              <a:rPr lang="fr-FR" i="1">
+                                <a:latin typeface="Cambria Math" panose="02040503050406030204" pitchFamily="18" charset="0"/>
+                              </a:rPr>
+                            </m:ctrlPr>
+                          </m:sSupPr>
+                          <m:e>
+                            <m:r>
+                              <a:rPr lang="fr-FR" i="1">
+                                <a:latin typeface="Cambria Math" panose="02040503050406030204" pitchFamily="18" charset="0"/>
+                              </a:rPr>
+                              <m:t>𝑥</m:t>
+                            </m:r>
+                          </m:e>
+                          <m:sup>
+                            <m:r>
+                              <a:rPr lang="fr-FR" i="1">
+                                <a:latin typeface="Cambria Math" panose="02040503050406030204" pitchFamily="18" charset="0"/>
+                              </a:rPr>
+                              <m:t>3</m:t>
+                            </m:r>
+                          </m:sup>
+                        </m:sSup>
+                      </m:den>
+                    </m:f>
+                    <m:sSub>
+                      <m:sSubPr>
+                        <m:ctrlPr>
+                          <a:rPr lang="fr-FR" i="1">
+                            <a:latin typeface="Cambria Math" panose="02040503050406030204" pitchFamily="18" charset="0"/>
+                          </a:rPr>
+                        </m:ctrlPr>
+                      </m:sSubPr>
+                      <m:e>
+                        <m:d>
+                          <m:dPr>
+                            <m:begChr m:val=""/>
+                            <m:endChr m:val="|"/>
+                            <m:ctrlPr>
+                              <a:rPr lang="fr-FR" i="1">
+                                <a:latin typeface="Cambria Math" panose="02040503050406030204" pitchFamily="18" charset="0"/>
+                              </a:rPr>
+                            </m:ctrlPr>
+                          </m:dPr>
+                          <m:e>
+                            <m:r>
+                              <a:rPr lang="fr-FR" i="1">
+                                <a:latin typeface="Cambria Math" panose="02040503050406030204" pitchFamily="18" charset="0"/>
+                              </a:rPr>
+                              <m:t>​</m:t>
+                            </m:r>
+                          </m:e>
+                        </m:d>
+                      </m:e>
+                      <m:sub>
+                        <m:r>
+                          <a:rPr lang="fr-FR" i="1">
+                            <a:latin typeface="Cambria Math" panose="02040503050406030204" pitchFamily="18" charset="0"/>
+                          </a:rPr>
+                          <m:t>𝑖</m:t>
+                        </m:r>
+                      </m:sub>
+                    </m:sSub>
+                    <m:f>
+                      <m:fPr>
+                        <m:ctrlPr>
+                          <a:rPr lang="fr-FR" i="1">
+                            <a:latin typeface="Cambria Math" panose="02040503050406030204" pitchFamily="18" charset="0"/>
+                          </a:rPr>
+                        </m:ctrlPr>
+                      </m:fPr>
+                      <m:num>
+                        <m:r>
+                          <m:rPr>
+                            <m:sty m:val="p"/>
+                          </m:rPr>
+                          <a:rPr lang="fr-FR">
+                            <a:latin typeface="Cambria Math" panose="02040503050406030204" pitchFamily="18" charset="0"/>
+                          </a:rPr>
+                          <m:t>Δ</m:t>
+                        </m:r>
+                        <m:sSup>
+                          <m:sSupPr>
+                            <m:ctrlPr>
+                              <a:rPr lang="fr-FR" i="1">
+                                <a:latin typeface="Cambria Math" panose="02040503050406030204" pitchFamily="18" charset="0"/>
+                              </a:rPr>
+                            </m:ctrlPr>
+                          </m:sSupPr>
+                          <m:e>
+                            <m:r>
+                              <a:rPr lang="fr-FR" i="1">
+                                <a:latin typeface="Cambria Math" panose="02040503050406030204" pitchFamily="18" charset="0"/>
+                              </a:rPr>
+                              <m:t>𝑥</m:t>
+                            </m:r>
+                          </m:e>
+                          <m:sup>
+                            <m:r>
+                              <a:rPr lang="fr-FR" i="1">
+                                <a:latin typeface="Cambria Math" panose="02040503050406030204" pitchFamily="18" charset="0"/>
+                              </a:rPr>
+                              <m:t>3</m:t>
+                            </m:r>
+                          </m:sup>
+                        </m:sSup>
+                      </m:num>
+                      <m:den>
+                        <m:r>
+                          <a:rPr lang="fr-FR" i="1">
+                            <a:latin typeface="Cambria Math" panose="02040503050406030204" pitchFamily="18" charset="0"/>
+                          </a:rPr>
+                          <m:t>3!</m:t>
+                        </m:r>
+                      </m:den>
+                    </m:f>
+                    <m:r>
+                      <a:rPr lang="fr-FR" i="1">
+                        <a:latin typeface="Cambria Math" panose="02040503050406030204" pitchFamily="18" charset="0"/>
+                      </a:rPr>
+                      <m:t>+</m:t>
+                    </m:r>
+                    <m:f>
+                      <m:fPr>
+                        <m:ctrlPr>
+                          <a:rPr lang="fr-FR" i="1">
+                            <a:latin typeface="Cambria Math" panose="02040503050406030204" pitchFamily="18" charset="0"/>
+                          </a:rPr>
+                        </m:ctrlPr>
+                      </m:fPr>
+                      <m:num>
+                        <m:sSup>
+                          <m:sSupPr>
+                            <m:ctrlPr>
+                              <a:rPr lang="fr-FR" i="1">
+                                <a:latin typeface="Cambria Math" panose="02040503050406030204" pitchFamily="18" charset="0"/>
+                              </a:rPr>
+                            </m:ctrlPr>
+                          </m:sSupPr>
+                          <m:e>
+                            <m:r>
+                              <a:rPr lang="fr-FR" i="1">
+                                <a:latin typeface="Cambria Math" panose="02040503050406030204" pitchFamily="18" charset="0"/>
+                              </a:rPr>
+                              <m:t>𝜕</m:t>
+                            </m:r>
+                          </m:e>
+                          <m:sup>
+                            <m:r>
+                              <a:rPr lang="fr-FR" i="1">
+                                <a:latin typeface="Cambria Math" panose="02040503050406030204" pitchFamily="18" charset="0"/>
+                              </a:rPr>
+                              <m:t>4</m:t>
+                            </m:r>
+                          </m:sup>
+                        </m:sSup>
+                        <m:r>
+                          <a:rPr lang="fr-FR" i="1">
+                            <a:latin typeface="Cambria Math" panose="02040503050406030204" pitchFamily="18" charset="0"/>
+                          </a:rPr>
+                          <m:t>𝑇</m:t>
+                        </m:r>
+                      </m:num>
+                      <m:den>
+                        <m:r>
+                          <a:rPr lang="fr-FR" i="1">
+                            <a:latin typeface="Cambria Math" panose="02040503050406030204" pitchFamily="18" charset="0"/>
+                          </a:rPr>
+                          <m:t>𝜕</m:t>
+                        </m:r>
+                        <m:sSup>
+                          <m:sSupPr>
+                            <m:ctrlPr>
+                              <a:rPr lang="fr-FR" i="1">
+                                <a:latin typeface="Cambria Math" panose="02040503050406030204" pitchFamily="18" charset="0"/>
+                              </a:rPr>
+                            </m:ctrlPr>
+                          </m:sSupPr>
+                          <m:e>
+                            <m:r>
+                              <a:rPr lang="fr-FR" i="1">
+                                <a:latin typeface="Cambria Math" panose="02040503050406030204" pitchFamily="18" charset="0"/>
+                              </a:rPr>
+                              <m:t>𝑥</m:t>
+                            </m:r>
+                          </m:e>
+                          <m:sup>
+                            <m:r>
+                              <a:rPr lang="fr-FR" i="1">
+                                <a:latin typeface="Cambria Math" panose="02040503050406030204" pitchFamily="18" charset="0"/>
+                              </a:rPr>
+                              <m:t>4</m:t>
+                            </m:r>
+                          </m:sup>
+                        </m:sSup>
+                      </m:den>
+                    </m:f>
+                    <m:sSub>
+                      <m:sSubPr>
+                        <m:ctrlPr>
+                          <a:rPr lang="fr-FR" i="1">
+                            <a:latin typeface="Cambria Math" panose="02040503050406030204" pitchFamily="18" charset="0"/>
+                          </a:rPr>
+                        </m:ctrlPr>
+                      </m:sSubPr>
+                      <m:e>
+                        <m:d>
+                          <m:dPr>
+                            <m:begChr m:val=""/>
+                            <m:endChr m:val="|"/>
+                            <m:ctrlPr>
+                              <a:rPr lang="fr-FR" i="1">
+                                <a:latin typeface="Cambria Math" panose="02040503050406030204" pitchFamily="18" charset="0"/>
+                              </a:rPr>
+                            </m:ctrlPr>
+                          </m:dPr>
+                          <m:e>
+                            <m:r>
+                              <a:rPr lang="fr-FR" i="1">
+                                <a:latin typeface="Cambria Math" panose="02040503050406030204" pitchFamily="18" charset="0"/>
+                              </a:rPr>
+                              <m:t>​</m:t>
+                            </m:r>
+                          </m:e>
+                        </m:d>
+                      </m:e>
+                      <m:sub>
+                        <m:r>
+                          <a:rPr lang="fr-FR" i="1">
+                            <a:latin typeface="Cambria Math" panose="02040503050406030204" pitchFamily="18" charset="0"/>
+                          </a:rPr>
+                          <m:t>𝑖</m:t>
+                        </m:r>
+                      </m:sub>
+                    </m:sSub>
+                    <m:f>
+                      <m:fPr>
+                        <m:ctrlPr>
+                          <a:rPr lang="fr-FR" i="1">
+                            <a:latin typeface="Cambria Math" panose="02040503050406030204" pitchFamily="18" charset="0"/>
+                          </a:rPr>
+                        </m:ctrlPr>
+                      </m:fPr>
+                      <m:num>
+                        <m:r>
+                          <m:rPr>
+                            <m:sty m:val="p"/>
+                          </m:rPr>
+                          <a:rPr lang="fr-FR">
+                            <a:latin typeface="Cambria Math" panose="02040503050406030204" pitchFamily="18" charset="0"/>
+                          </a:rPr>
+                          <m:t>Δ</m:t>
+                        </m:r>
+                        <m:sSup>
+                          <m:sSupPr>
+                            <m:ctrlPr>
+                              <a:rPr lang="fr-FR" i="1">
+                                <a:latin typeface="Cambria Math" panose="02040503050406030204" pitchFamily="18" charset="0"/>
+                              </a:rPr>
+                            </m:ctrlPr>
+                          </m:sSupPr>
+                          <m:e>
+                            <m:r>
+                              <a:rPr lang="fr-FR" i="1">
+                                <a:latin typeface="Cambria Math" panose="02040503050406030204" pitchFamily="18" charset="0"/>
+                              </a:rPr>
+                              <m:t>𝑥</m:t>
+                            </m:r>
+                          </m:e>
+                          <m:sup>
+                            <m:r>
+                              <a:rPr lang="fr-FR" i="1">
+                                <a:latin typeface="Cambria Math" panose="02040503050406030204" pitchFamily="18" charset="0"/>
+                              </a:rPr>
+                              <m:t>4</m:t>
+                            </m:r>
+                          </m:sup>
+                        </m:sSup>
+                      </m:num>
+                      <m:den>
+                        <m:r>
+                          <a:rPr lang="fr-FR" i="1">
+                            <a:latin typeface="Cambria Math" panose="02040503050406030204" pitchFamily="18" charset="0"/>
+                          </a:rPr>
+                          <m:t>4!</m:t>
+                        </m:r>
+                      </m:den>
+                    </m:f>
+                    <m:r>
+                      <a:rPr lang="fr-FR" i="1">
+                        <a:latin typeface="Cambria Math" panose="02040503050406030204" pitchFamily="18" charset="0"/>
+                      </a:rPr>
+                      <m:t>+</m:t>
+                    </m:r>
+                    <m:r>
+                      <a:rPr lang="fr-FR" i="1">
+                        <a:latin typeface="Cambria Math" panose="02040503050406030204" pitchFamily="18" charset="0"/>
+                      </a:rPr>
+                      <m:t>𝑜</m:t>
+                    </m:r>
+                    <m:r>
+                      <a:rPr lang="fr-FR" i="1">
+                        <a:latin typeface="Cambria Math" panose="02040503050406030204" pitchFamily="18" charset="0"/>
+                      </a:rPr>
+                      <m:t>(</m:t>
+                    </m:r>
+                    <m:r>
+                      <m:rPr>
+                        <m:sty m:val="p"/>
+                      </m:rPr>
+                      <a:rPr lang="fr-FR">
+                        <a:latin typeface="Cambria Math" panose="02040503050406030204" pitchFamily="18" charset="0"/>
+                      </a:rPr>
+                      <m:t>Δ</m:t>
+                    </m:r>
+                    <m:sSup>
+                      <m:sSupPr>
+                        <m:ctrlPr>
+                          <a:rPr lang="fr-FR" i="1">
+                            <a:latin typeface="Cambria Math" panose="02040503050406030204" pitchFamily="18" charset="0"/>
+                          </a:rPr>
+                        </m:ctrlPr>
+                      </m:sSupPr>
+                      <m:e>
+                        <m:r>
+                          <a:rPr lang="fr-FR" i="1">
+                            <a:latin typeface="Cambria Math" panose="02040503050406030204" pitchFamily="18" charset="0"/>
+                          </a:rPr>
+                          <m:t>𝑥</m:t>
+                        </m:r>
+                      </m:e>
+                      <m:sup>
+                        <m:r>
+                          <a:rPr lang="fr-FR" i="1">
+                            <a:latin typeface="Cambria Math" panose="02040503050406030204" pitchFamily="18" charset="0"/>
+                          </a:rPr>
+                          <m:t>4</m:t>
+                        </m:r>
+                      </m:sup>
+                    </m:sSup>
+                    <m:r>
+                      <a:rPr lang="fr-FR" i="1">
+                        <a:latin typeface="Cambria Math" panose="02040503050406030204" pitchFamily="18" charset="0"/>
+                      </a:rPr>
+                      <m:t>)</m:t>
+                    </m:r>
+                  </m:oMath>
+                </a14:m>
+                <a:endParaRPr lang="fr-FR" dirty="0">
+                  <a:latin typeface="Cambria Math" panose="02040503050406030204" pitchFamily="18" charset="0"/>
+                </a:endParaRPr>
+              </a:p>
+              <a:p>
+                <a14:m>
+                  <m:oMath xmlns:m="http://schemas.openxmlformats.org/officeDocument/2006/math">
+                    <m:sSub>
+                      <m:sSubPr>
+                        <m:ctrlPr>
+                          <a:rPr lang="fr-FR" i="1">
+                            <a:latin typeface="Cambria Math" panose="02040503050406030204" pitchFamily="18" charset="0"/>
+                          </a:rPr>
+                        </m:ctrlPr>
+                      </m:sSubPr>
+                      <m:e>
+                        <m:r>
+                          <m:rPr>
+                            <m:sty m:val="p"/>
+                          </m:rPr>
+                          <a:rPr lang="fr-FR">
+                            <a:latin typeface="Cambria Math" panose="02040503050406030204" pitchFamily="18" charset="0"/>
+                          </a:rPr>
+                          <m:t>T</m:t>
+                        </m:r>
+                      </m:e>
+                      <m:sub>
+                        <m:r>
+                          <m:rPr>
+                            <m:sty m:val="p"/>
+                          </m:rPr>
+                          <a:rPr lang="fr-FR">
+                            <a:latin typeface="Cambria Math" panose="02040503050406030204" pitchFamily="18" charset="0"/>
+                          </a:rPr>
+                          <m:t>i</m:t>
+                        </m:r>
+                        <m:r>
+                          <a:rPr lang="fr-FR" b="0" i="0" smtClean="0">
+                            <a:latin typeface="Cambria Math" panose="02040503050406030204" pitchFamily="18" charset="0"/>
+                          </a:rPr>
+                          <m:t>−</m:t>
+                        </m:r>
+                        <m:r>
+                          <a:rPr lang="fr-FR">
+                            <a:latin typeface="Cambria Math" panose="02040503050406030204" pitchFamily="18" charset="0"/>
+                          </a:rPr>
+                          <m:t>1</m:t>
+                        </m:r>
+                      </m:sub>
+                    </m:sSub>
+                    <m:r>
+                      <a:rPr lang="fr-FR">
+                        <a:latin typeface="Cambria Math" panose="02040503050406030204" pitchFamily="18" charset="0"/>
+                      </a:rPr>
+                      <m:t>=</m:t>
+                    </m:r>
+                    <m:sSub>
+                      <m:sSubPr>
+                        <m:ctrlPr>
+                          <a:rPr lang="fr-FR" i="1">
+                            <a:latin typeface="Cambria Math" panose="02040503050406030204" pitchFamily="18" charset="0"/>
+                          </a:rPr>
+                        </m:ctrlPr>
+                      </m:sSubPr>
+                      <m:e>
+                        <m:r>
+                          <m:rPr>
+                            <m:sty m:val="p"/>
+                          </m:rPr>
+                          <a:rPr lang="fr-FR">
+                            <a:latin typeface="Cambria Math" panose="02040503050406030204" pitchFamily="18" charset="0"/>
+                          </a:rPr>
+                          <m:t>T</m:t>
+                        </m:r>
+                      </m:e>
+                      <m:sub>
+                        <m:r>
+                          <m:rPr>
+                            <m:sty m:val="p"/>
+                          </m:rPr>
+                          <a:rPr lang="fr-FR">
+                            <a:latin typeface="Cambria Math" panose="02040503050406030204" pitchFamily="18" charset="0"/>
+                          </a:rPr>
+                          <m:t>i</m:t>
+                        </m:r>
+                      </m:sub>
+                    </m:sSub>
+                    <m:r>
+                      <a:rPr lang="fr-FR" b="0" i="1" smtClean="0">
+                        <a:latin typeface="Cambria Math" panose="02040503050406030204" pitchFamily="18" charset="0"/>
+                      </a:rPr>
+                      <m:t>−</m:t>
+                    </m:r>
+                    <m:f>
+                      <m:fPr>
+                        <m:ctrlPr>
+                          <a:rPr lang="fr-FR" i="1">
+                            <a:latin typeface="Cambria Math" panose="02040503050406030204" pitchFamily="18" charset="0"/>
+                          </a:rPr>
+                        </m:ctrlPr>
+                      </m:fPr>
+                      <m:num>
+                        <m:r>
+                          <a:rPr lang="fr-FR" i="1">
+                            <a:latin typeface="Cambria Math" panose="02040503050406030204" pitchFamily="18" charset="0"/>
+                          </a:rPr>
+                          <m:t>𝜕</m:t>
+                        </m:r>
+                        <m:r>
+                          <a:rPr lang="fr-FR" i="1">
+                            <a:latin typeface="Cambria Math" panose="02040503050406030204" pitchFamily="18" charset="0"/>
+                          </a:rPr>
+                          <m:t>𝑇</m:t>
+                        </m:r>
+                      </m:num>
+                      <m:den>
+                        <m:r>
+                          <a:rPr lang="fr-FR" i="1">
+                            <a:latin typeface="Cambria Math" panose="02040503050406030204" pitchFamily="18" charset="0"/>
+                          </a:rPr>
+                          <m:t>𝜕</m:t>
+                        </m:r>
+                        <m:r>
+                          <a:rPr lang="fr-FR" i="1">
+                            <a:latin typeface="Cambria Math" panose="02040503050406030204" pitchFamily="18" charset="0"/>
+                          </a:rPr>
+                          <m:t>𝑥</m:t>
+                        </m:r>
+                      </m:den>
+                    </m:f>
+                    <m:sSub>
+                      <m:sSubPr>
+                        <m:ctrlPr>
+                          <a:rPr lang="fr-FR" i="1">
+                            <a:latin typeface="Cambria Math" panose="02040503050406030204" pitchFamily="18" charset="0"/>
+                          </a:rPr>
+                        </m:ctrlPr>
+                      </m:sSubPr>
+                      <m:e>
+                        <m:d>
+                          <m:dPr>
+                            <m:begChr m:val=""/>
+                            <m:endChr m:val="|"/>
+                            <m:ctrlPr>
+                              <a:rPr lang="fr-FR" i="1">
+                                <a:latin typeface="Cambria Math" panose="02040503050406030204" pitchFamily="18" charset="0"/>
+                              </a:rPr>
+                            </m:ctrlPr>
+                          </m:dPr>
+                          <m:e>
+                            <m:r>
+                              <a:rPr lang="fr-FR" i="1">
+                                <a:latin typeface="Cambria Math" panose="02040503050406030204" pitchFamily="18" charset="0"/>
+                              </a:rPr>
+                              <m:t>​</m:t>
+                            </m:r>
+                          </m:e>
+                        </m:d>
+                      </m:e>
+                      <m:sub>
+                        <m:r>
+                          <m:rPr>
+                            <m:sty m:val="p"/>
+                          </m:rPr>
+                          <a:rPr lang="fr-FR">
+                            <a:latin typeface="Cambria Math" panose="02040503050406030204" pitchFamily="18" charset="0"/>
+                          </a:rPr>
+                          <m:t>i</m:t>
+                        </m:r>
+                      </m:sub>
+                    </m:sSub>
+                    <m:r>
+                      <m:rPr>
+                        <m:sty m:val="p"/>
+                      </m:rPr>
+                      <a:rPr lang="fr-FR">
+                        <a:latin typeface="Cambria Math" panose="02040503050406030204" pitchFamily="18" charset="0"/>
+                      </a:rPr>
+                      <m:t>Δ</m:t>
+                    </m:r>
+                    <m:r>
+                      <a:rPr lang="fr-FR" b="0" i="1" smtClean="0">
+                        <a:latin typeface="Cambria Math" panose="02040503050406030204" pitchFamily="18" charset="0"/>
+                      </a:rPr>
+                      <m:t>𝑥</m:t>
+                    </m:r>
+                    <m:r>
+                      <a:rPr lang="fr-FR" i="1">
+                        <a:latin typeface="Cambria Math" panose="02040503050406030204" pitchFamily="18" charset="0"/>
+                      </a:rPr>
+                      <m:t>+</m:t>
+                    </m:r>
+                    <m:f>
+                      <m:fPr>
+                        <m:ctrlPr>
+                          <a:rPr lang="fr-FR" i="1">
+                            <a:latin typeface="Cambria Math" panose="02040503050406030204" pitchFamily="18" charset="0"/>
+                          </a:rPr>
+                        </m:ctrlPr>
+                      </m:fPr>
+                      <m:num>
+                        <m:sSup>
+                          <m:sSupPr>
+                            <m:ctrlPr>
+                              <a:rPr lang="fr-FR" i="1">
+                                <a:latin typeface="Cambria Math" panose="02040503050406030204" pitchFamily="18" charset="0"/>
+                              </a:rPr>
+                            </m:ctrlPr>
+                          </m:sSupPr>
+                          <m:e>
+                            <m:r>
+                              <a:rPr lang="fr-FR" i="1">
+                                <a:latin typeface="Cambria Math" panose="02040503050406030204" pitchFamily="18" charset="0"/>
+                              </a:rPr>
+                              <m:t>𝜕</m:t>
+                            </m:r>
+                          </m:e>
+                          <m:sup>
+                            <m:r>
+                              <a:rPr lang="fr-FR" i="1">
+                                <a:latin typeface="Cambria Math" panose="02040503050406030204" pitchFamily="18" charset="0"/>
+                              </a:rPr>
+                              <m:t>2</m:t>
+                            </m:r>
+                          </m:sup>
+                        </m:sSup>
+                        <m:r>
+                          <a:rPr lang="fr-FR" i="1">
+                            <a:latin typeface="Cambria Math" panose="02040503050406030204" pitchFamily="18" charset="0"/>
+                          </a:rPr>
+                          <m:t>𝑇</m:t>
+                        </m:r>
+                      </m:num>
+                      <m:den>
+                        <m:r>
+                          <a:rPr lang="fr-FR" i="1">
+                            <a:latin typeface="Cambria Math" panose="02040503050406030204" pitchFamily="18" charset="0"/>
+                          </a:rPr>
+                          <m:t>𝜕</m:t>
+                        </m:r>
+                        <m:sSup>
+                          <m:sSupPr>
+                            <m:ctrlPr>
+                              <a:rPr lang="fr-FR" i="1">
+                                <a:latin typeface="Cambria Math" panose="02040503050406030204" pitchFamily="18" charset="0"/>
+                              </a:rPr>
+                            </m:ctrlPr>
+                          </m:sSupPr>
+                          <m:e>
+                            <m:r>
+                              <a:rPr lang="fr-FR" i="1">
+                                <a:latin typeface="Cambria Math" panose="02040503050406030204" pitchFamily="18" charset="0"/>
+                              </a:rPr>
+                              <m:t>𝑥</m:t>
+                            </m:r>
+                          </m:e>
+                          <m:sup>
+                            <m:r>
+                              <a:rPr lang="fr-FR" i="1">
+                                <a:latin typeface="Cambria Math" panose="02040503050406030204" pitchFamily="18" charset="0"/>
+                              </a:rPr>
+                              <m:t>2</m:t>
+                            </m:r>
+                          </m:sup>
+                        </m:sSup>
+                      </m:den>
+                    </m:f>
+                    <m:sSub>
+                      <m:sSubPr>
+                        <m:ctrlPr>
+                          <a:rPr lang="fr-FR" i="1">
+                            <a:latin typeface="Cambria Math" panose="02040503050406030204" pitchFamily="18" charset="0"/>
+                          </a:rPr>
+                        </m:ctrlPr>
+                      </m:sSubPr>
+                      <m:e>
+                        <m:d>
+                          <m:dPr>
+                            <m:begChr m:val=""/>
+                            <m:endChr m:val="|"/>
+                            <m:ctrlPr>
+                              <a:rPr lang="fr-FR" i="1">
+                                <a:latin typeface="Cambria Math" panose="02040503050406030204" pitchFamily="18" charset="0"/>
+                              </a:rPr>
+                            </m:ctrlPr>
+                          </m:dPr>
+                          <m:e>
+                            <m:r>
+                              <a:rPr lang="fr-FR" i="1">
+                                <a:latin typeface="Cambria Math" panose="02040503050406030204" pitchFamily="18" charset="0"/>
+                              </a:rPr>
+                              <m:t>​</m:t>
+                            </m:r>
+                          </m:e>
+                        </m:d>
+                      </m:e>
+                      <m:sub>
+                        <m:r>
+                          <a:rPr lang="fr-FR" i="1">
+                            <a:latin typeface="Cambria Math" panose="02040503050406030204" pitchFamily="18" charset="0"/>
+                          </a:rPr>
+                          <m:t>𝑖</m:t>
+                        </m:r>
+                      </m:sub>
+                    </m:sSub>
+                    <m:f>
+                      <m:fPr>
+                        <m:ctrlPr>
+                          <a:rPr lang="fr-FR" i="1">
+                            <a:latin typeface="Cambria Math" panose="02040503050406030204" pitchFamily="18" charset="0"/>
+                          </a:rPr>
+                        </m:ctrlPr>
+                      </m:fPr>
+                      <m:num>
+                        <m:r>
+                          <m:rPr>
+                            <m:sty m:val="p"/>
+                          </m:rPr>
+                          <a:rPr lang="fr-FR">
+                            <a:latin typeface="Cambria Math" panose="02040503050406030204" pitchFamily="18" charset="0"/>
+                          </a:rPr>
+                          <m:t>Δ</m:t>
+                        </m:r>
+                        <m:sSup>
+                          <m:sSupPr>
+                            <m:ctrlPr>
+                              <a:rPr lang="fr-FR" i="1">
+                                <a:latin typeface="Cambria Math" panose="02040503050406030204" pitchFamily="18" charset="0"/>
+                              </a:rPr>
+                            </m:ctrlPr>
+                          </m:sSupPr>
+                          <m:e>
+                            <m:r>
+                              <a:rPr lang="fr-FR" i="1">
+                                <a:latin typeface="Cambria Math" panose="02040503050406030204" pitchFamily="18" charset="0"/>
+                              </a:rPr>
+                              <m:t>𝑥</m:t>
+                            </m:r>
+                          </m:e>
+                          <m:sup>
+                            <m:r>
+                              <a:rPr lang="fr-FR" b="0" i="1" smtClean="0">
+                                <a:latin typeface="Cambria Math" panose="02040503050406030204" pitchFamily="18" charset="0"/>
+                              </a:rPr>
+                              <m:t>2</m:t>
+                            </m:r>
+                          </m:sup>
+                        </m:sSup>
+                      </m:num>
+                      <m:den>
+                        <m:r>
+                          <a:rPr lang="fr-FR" i="1">
+                            <a:latin typeface="Cambria Math" panose="02040503050406030204" pitchFamily="18" charset="0"/>
+                          </a:rPr>
+                          <m:t>2!</m:t>
+                        </m:r>
+                      </m:den>
+                    </m:f>
+                    <m:r>
+                      <a:rPr lang="fr-FR" b="0" i="1" smtClean="0">
+                        <a:latin typeface="Cambria Math" panose="02040503050406030204" pitchFamily="18" charset="0"/>
+                      </a:rPr>
+                      <m:t>−</m:t>
+                    </m:r>
+                    <m:f>
+                      <m:fPr>
+                        <m:ctrlPr>
+                          <a:rPr lang="fr-FR" i="1">
+                            <a:latin typeface="Cambria Math" panose="02040503050406030204" pitchFamily="18" charset="0"/>
+                          </a:rPr>
+                        </m:ctrlPr>
+                      </m:fPr>
+                      <m:num>
+                        <m:sSup>
+                          <m:sSupPr>
+                            <m:ctrlPr>
+                              <a:rPr lang="fr-FR" i="1">
+                                <a:latin typeface="Cambria Math" panose="02040503050406030204" pitchFamily="18" charset="0"/>
+                              </a:rPr>
+                            </m:ctrlPr>
+                          </m:sSupPr>
+                          <m:e>
+                            <m:r>
+                              <a:rPr lang="fr-FR" i="1">
+                                <a:latin typeface="Cambria Math" panose="02040503050406030204" pitchFamily="18" charset="0"/>
+                              </a:rPr>
+                              <m:t>𝜕</m:t>
+                            </m:r>
+                          </m:e>
+                          <m:sup>
+                            <m:r>
+                              <a:rPr lang="fr-FR" b="0" i="1" smtClean="0">
+                                <a:latin typeface="Cambria Math" panose="02040503050406030204" pitchFamily="18" charset="0"/>
+                              </a:rPr>
+                              <m:t>3</m:t>
+                            </m:r>
+                          </m:sup>
+                        </m:sSup>
+                        <m:r>
+                          <a:rPr lang="fr-FR" i="1">
+                            <a:latin typeface="Cambria Math" panose="02040503050406030204" pitchFamily="18" charset="0"/>
+                          </a:rPr>
+                          <m:t>𝑇</m:t>
+                        </m:r>
+                      </m:num>
+                      <m:den>
+                        <m:r>
+                          <a:rPr lang="fr-FR" i="1">
+                            <a:latin typeface="Cambria Math" panose="02040503050406030204" pitchFamily="18" charset="0"/>
+                          </a:rPr>
+                          <m:t>𝜕</m:t>
+                        </m:r>
+                        <m:sSup>
+                          <m:sSupPr>
+                            <m:ctrlPr>
+                              <a:rPr lang="fr-FR" i="1">
+                                <a:latin typeface="Cambria Math" panose="02040503050406030204" pitchFamily="18" charset="0"/>
+                              </a:rPr>
+                            </m:ctrlPr>
+                          </m:sSupPr>
+                          <m:e>
+                            <m:r>
+                              <a:rPr lang="fr-FR" i="1">
+                                <a:latin typeface="Cambria Math" panose="02040503050406030204" pitchFamily="18" charset="0"/>
+                              </a:rPr>
+                              <m:t>𝑥</m:t>
+                            </m:r>
+                          </m:e>
+                          <m:sup>
+                            <m:r>
+                              <a:rPr lang="fr-FR" i="1">
+                                <a:latin typeface="Cambria Math" panose="02040503050406030204" pitchFamily="18" charset="0"/>
+                              </a:rPr>
+                              <m:t>3</m:t>
+                            </m:r>
+                          </m:sup>
+                        </m:sSup>
+                      </m:den>
+                    </m:f>
+                    <m:sSub>
+                      <m:sSubPr>
+                        <m:ctrlPr>
+                          <a:rPr lang="fr-FR" i="1">
+                            <a:latin typeface="Cambria Math" panose="02040503050406030204" pitchFamily="18" charset="0"/>
+                          </a:rPr>
+                        </m:ctrlPr>
+                      </m:sSubPr>
+                      <m:e>
+                        <m:d>
+                          <m:dPr>
+                            <m:begChr m:val=""/>
+                            <m:endChr m:val="|"/>
+                            <m:ctrlPr>
+                              <a:rPr lang="fr-FR" i="1">
+                                <a:latin typeface="Cambria Math" panose="02040503050406030204" pitchFamily="18" charset="0"/>
+                              </a:rPr>
+                            </m:ctrlPr>
+                          </m:dPr>
+                          <m:e>
+                            <m:r>
+                              <a:rPr lang="fr-FR" i="1">
+                                <a:latin typeface="Cambria Math" panose="02040503050406030204" pitchFamily="18" charset="0"/>
+                              </a:rPr>
+                              <m:t>​</m:t>
+                            </m:r>
+                          </m:e>
+                        </m:d>
+                      </m:e>
+                      <m:sub>
+                        <m:r>
+                          <a:rPr lang="fr-FR" i="1">
+                            <a:latin typeface="Cambria Math" panose="02040503050406030204" pitchFamily="18" charset="0"/>
+                          </a:rPr>
+                          <m:t>𝑖</m:t>
+                        </m:r>
+                      </m:sub>
+                    </m:sSub>
+                    <m:f>
+                      <m:fPr>
+                        <m:ctrlPr>
+                          <a:rPr lang="fr-FR" i="1">
+                            <a:latin typeface="Cambria Math" panose="02040503050406030204" pitchFamily="18" charset="0"/>
+                          </a:rPr>
+                        </m:ctrlPr>
+                      </m:fPr>
+                      <m:num>
+                        <m:r>
+                          <m:rPr>
+                            <m:sty m:val="p"/>
+                          </m:rPr>
+                          <a:rPr lang="fr-FR">
+                            <a:latin typeface="Cambria Math" panose="02040503050406030204" pitchFamily="18" charset="0"/>
+                          </a:rPr>
+                          <m:t>Δ</m:t>
+                        </m:r>
+                        <m:sSup>
+                          <m:sSupPr>
+                            <m:ctrlPr>
+                              <a:rPr lang="fr-FR" i="1">
+                                <a:latin typeface="Cambria Math" panose="02040503050406030204" pitchFamily="18" charset="0"/>
+                              </a:rPr>
+                            </m:ctrlPr>
+                          </m:sSupPr>
+                          <m:e>
+                            <m:r>
+                              <a:rPr lang="fr-FR" i="1">
+                                <a:latin typeface="Cambria Math" panose="02040503050406030204" pitchFamily="18" charset="0"/>
+                              </a:rPr>
+                              <m:t>𝑥</m:t>
+                            </m:r>
+                          </m:e>
+                          <m:sup>
+                            <m:r>
+                              <a:rPr lang="fr-FR" b="0" i="1" smtClean="0">
+                                <a:latin typeface="Cambria Math" panose="02040503050406030204" pitchFamily="18" charset="0"/>
+                              </a:rPr>
+                              <m:t>3</m:t>
+                            </m:r>
+                          </m:sup>
+                        </m:sSup>
+                      </m:num>
+                      <m:den>
+                        <m:r>
+                          <a:rPr lang="fr-FR" i="1">
+                            <a:latin typeface="Cambria Math" panose="02040503050406030204" pitchFamily="18" charset="0"/>
+                          </a:rPr>
+                          <m:t>3!</m:t>
+                        </m:r>
+                      </m:den>
+                    </m:f>
+                    <m:r>
+                      <a:rPr lang="fr-FR" i="1">
+                        <a:latin typeface="Cambria Math" panose="02040503050406030204" pitchFamily="18" charset="0"/>
+                      </a:rPr>
+                      <m:t>+</m:t>
+                    </m:r>
+                    <m:f>
+                      <m:fPr>
+                        <m:ctrlPr>
+                          <a:rPr lang="fr-FR" i="1">
+                            <a:latin typeface="Cambria Math" panose="02040503050406030204" pitchFamily="18" charset="0"/>
+                          </a:rPr>
+                        </m:ctrlPr>
+                      </m:fPr>
+                      <m:num>
+                        <m:sSup>
+                          <m:sSupPr>
+                            <m:ctrlPr>
+                              <a:rPr lang="fr-FR" i="1">
+                                <a:latin typeface="Cambria Math" panose="02040503050406030204" pitchFamily="18" charset="0"/>
+                              </a:rPr>
+                            </m:ctrlPr>
+                          </m:sSupPr>
+                          <m:e>
+                            <m:r>
+                              <a:rPr lang="fr-FR" i="1">
+                                <a:latin typeface="Cambria Math" panose="02040503050406030204" pitchFamily="18" charset="0"/>
+                              </a:rPr>
+                              <m:t>𝜕</m:t>
+                            </m:r>
+                          </m:e>
+                          <m:sup>
+                            <m:r>
+                              <a:rPr lang="fr-FR" i="1">
+                                <a:latin typeface="Cambria Math" panose="02040503050406030204" pitchFamily="18" charset="0"/>
+                              </a:rPr>
+                              <m:t>4</m:t>
+                            </m:r>
+                          </m:sup>
+                        </m:sSup>
+                        <m:r>
+                          <a:rPr lang="fr-FR" i="1">
+                            <a:latin typeface="Cambria Math" panose="02040503050406030204" pitchFamily="18" charset="0"/>
+                          </a:rPr>
+                          <m:t>𝑇</m:t>
+                        </m:r>
+                      </m:num>
+                      <m:den>
+                        <m:r>
+                          <a:rPr lang="fr-FR" i="1">
+                            <a:latin typeface="Cambria Math" panose="02040503050406030204" pitchFamily="18" charset="0"/>
+                          </a:rPr>
+                          <m:t>𝜕</m:t>
+                        </m:r>
+                        <m:sSup>
+                          <m:sSupPr>
+                            <m:ctrlPr>
+                              <a:rPr lang="fr-FR" i="1">
+                                <a:latin typeface="Cambria Math" panose="02040503050406030204" pitchFamily="18" charset="0"/>
+                              </a:rPr>
+                            </m:ctrlPr>
+                          </m:sSupPr>
+                          <m:e>
+                            <m:r>
+                              <a:rPr lang="fr-FR" i="1">
+                                <a:latin typeface="Cambria Math" panose="02040503050406030204" pitchFamily="18" charset="0"/>
+                              </a:rPr>
+                              <m:t>𝑥</m:t>
+                            </m:r>
+                          </m:e>
+                          <m:sup>
+                            <m:r>
+                              <a:rPr lang="fr-FR" i="1">
+                                <a:latin typeface="Cambria Math" panose="02040503050406030204" pitchFamily="18" charset="0"/>
+                              </a:rPr>
+                              <m:t>4</m:t>
+                            </m:r>
+                          </m:sup>
+                        </m:sSup>
+                      </m:den>
+                    </m:f>
+                    <m:sSub>
+                      <m:sSubPr>
+                        <m:ctrlPr>
+                          <a:rPr lang="fr-FR" i="1">
+                            <a:latin typeface="Cambria Math" panose="02040503050406030204" pitchFamily="18" charset="0"/>
+                          </a:rPr>
+                        </m:ctrlPr>
+                      </m:sSubPr>
+                      <m:e>
+                        <m:d>
+                          <m:dPr>
+                            <m:begChr m:val=""/>
+                            <m:endChr m:val="|"/>
+                            <m:ctrlPr>
+                              <a:rPr lang="fr-FR" i="1">
+                                <a:latin typeface="Cambria Math" panose="02040503050406030204" pitchFamily="18" charset="0"/>
+                              </a:rPr>
+                            </m:ctrlPr>
+                          </m:dPr>
+                          <m:e>
+                            <m:r>
+                              <a:rPr lang="fr-FR" i="1">
+                                <a:latin typeface="Cambria Math" panose="02040503050406030204" pitchFamily="18" charset="0"/>
+                              </a:rPr>
+                              <m:t>​</m:t>
+                            </m:r>
+                          </m:e>
+                        </m:d>
+                      </m:e>
+                      <m:sub>
+                        <m:r>
+                          <a:rPr lang="fr-FR" i="1">
+                            <a:latin typeface="Cambria Math" panose="02040503050406030204" pitchFamily="18" charset="0"/>
+                          </a:rPr>
+                          <m:t>𝑖</m:t>
+                        </m:r>
+                      </m:sub>
+                    </m:sSub>
+                    <m:f>
+                      <m:fPr>
+                        <m:ctrlPr>
+                          <a:rPr lang="fr-FR" i="1">
+                            <a:latin typeface="Cambria Math" panose="02040503050406030204" pitchFamily="18" charset="0"/>
+                          </a:rPr>
+                        </m:ctrlPr>
+                      </m:fPr>
+                      <m:num>
+                        <m:r>
+                          <m:rPr>
+                            <m:sty m:val="p"/>
+                          </m:rPr>
+                          <a:rPr lang="fr-FR">
+                            <a:latin typeface="Cambria Math" panose="02040503050406030204" pitchFamily="18" charset="0"/>
+                          </a:rPr>
+                          <m:t>Δ</m:t>
+                        </m:r>
+                        <m:sSup>
+                          <m:sSupPr>
+                            <m:ctrlPr>
+                              <a:rPr lang="fr-FR" i="1">
+                                <a:latin typeface="Cambria Math" panose="02040503050406030204" pitchFamily="18" charset="0"/>
+                              </a:rPr>
+                            </m:ctrlPr>
+                          </m:sSupPr>
+                          <m:e>
+                            <m:r>
+                              <a:rPr lang="fr-FR" i="1">
+                                <a:latin typeface="Cambria Math" panose="02040503050406030204" pitchFamily="18" charset="0"/>
+                              </a:rPr>
+                              <m:t>𝑥</m:t>
+                            </m:r>
+                          </m:e>
+                          <m:sup>
+                            <m:r>
+                              <a:rPr lang="fr-FR" i="1">
+                                <a:latin typeface="Cambria Math" panose="02040503050406030204" pitchFamily="18" charset="0"/>
+                              </a:rPr>
+                              <m:t>4</m:t>
+                            </m:r>
+                          </m:sup>
+                        </m:sSup>
+                      </m:num>
+                      <m:den>
+                        <m:r>
+                          <a:rPr lang="fr-FR" i="1">
+                            <a:latin typeface="Cambria Math" panose="02040503050406030204" pitchFamily="18" charset="0"/>
+                          </a:rPr>
+                          <m:t>4!</m:t>
+                        </m:r>
+                      </m:den>
+                    </m:f>
+                    <m:r>
+                      <a:rPr lang="fr-FR" i="1">
+                        <a:latin typeface="Cambria Math" panose="02040503050406030204" pitchFamily="18" charset="0"/>
+                      </a:rPr>
+                      <m:t>+</m:t>
+                    </m:r>
+                    <m:r>
+                      <a:rPr lang="fr-FR" i="1">
+                        <a:latin typeface="Cambria Math" panose="02040503050406030204" pitchFamily="18" charset="0"/>
+                      </a:rPr>
+                      <m:t>𝑜</m:t>
+                    </m:r>
+                    <m:r>
+                      <a:rPr lang="fr-FR" i="1">
+                        <a:latin typeface="Cambria Math" panose="02040503050406030204" pitchFamily="18" charset="0"/>
+                      </a:rPr>
+                      <m:t>(</m:t>
+                    </m:r>
+                    <m:r>
+                      <m:rPr>
+                        <m:sty m:val="p"/>
+                      </m:rPr>
+                      <a:rPr lang="fr-FR">
+                        <a:latin typeface="Cambria Math" panose="02040503050406030204" pitchFamily="18" charset="0"/>
+                      </a:rPr>
+                      <m:t>Δ</m:t>
+                    </m:r>
+                    <m:sSup>
+                      <m:sSupPr>
+                        <m:ctrlPr>
+                          <a:rPr lang="fr-FR" i="1">
+                            <a:latin typeface="Cambria Math" panose="02040503050406030204" pitchFamily="18" charset="0"/>
+                          </a:rPr>
+                        </m:ctrlPr>
+                      </m:sSupPr>
+                      <m:e>
+                        <m:r>
+                          <a:rPr lang="fr-FR" i="1">
+                            <a:latin typeface="Cambria Math" panose="02040503050406030204" pitchFamily="18" charset="0"/>
+                          </a:rPr>
+                          <m:t>𝑥</m:t>
+                        </m:r>
+                      </m:e>
+                      <m:sup>
+                        <m:r>
+                          <a:rPr lang="fr-FR" i="1">
+                            <a:latin typeface="Cambria Math" panose="02040503050406030204" pitchFamily="18" charset="0"/>
+                          </a:rPr>
+                          <m:t>4</m:t>
+                        </m:r>
+                      </m:sup>
+                    </m:sSup>
+                    <m:r>
+                      <a:rPr lang="fr-FR" i="1">
+                        <a:latin typeface="Cambria Math" panose="02040503050406030204" pitchFamily="18" charset="0"/>
+                      </a:rPr>
+                      <m:t>)</m:t>
+                    </m:r>
+                  </m:oMath>
+                </a14:m>
+                <a:endParaRPr lang="fr-FR" dirty="0">
+                  <a:latin typeface="Cambria Math" panose="02040503050406030204" pitchFamily="18" charset="0"/>
+                </a:endParaRPr>
+              </a:p>
+              <a:p>
+                <a:pPr marL="0" indent="0">
+                  <a:buNone/>
+                </a:pPr>
+                <a:endParaRPr lang="fr-FR" b="0" i="0" dirty="0">
+                  <a:latin typeface="Cambria Math" panose="02040503050406030204" pitchFamily="18" charset="0"/>
+                </a:endParaRPr>
+              </a:p>
+              <a:p>
+                <a:pPr marL="0" indent="0">
+                  <a:buNone/>
+                </a:pPr>
+                <a:r>
+                  <a:rPr lang="fr-FR" b="0" i="0" dirty="0">
+                    <a:latin typeface="Cambria Math" panose="02040503050406030204" pitchFamily="18" charset="0"/>
+                  </a:rPr>
+                  <a:t>Ordre 1 en temps :</a:t>
+                </a:r>
+              </a:p>
+              <a:p>
+                <a14:m>
+                  <m:oMath xmlns:m="http://schemas.openxmlformats.org/officeDocument/2006/math">
+                    <m:f>
+                      <m:fPr>
+                        <m:ctrlPr>
+                          <a:rPr lang="fr-FR" i="1">
+                            <a:latin typeface="Cambria Math" panose="02040503050406030204" pitchFamily="18" charset="0"/>
+                          </a:rPr>
+                        </m:ctrlPr>
+                      </m:fPr>
+                      <m:num>
+                        <m:sSubSup>
+                          <m:sSubSupPr>
+                            <m:ctrlPr>
+                              <a:rPr lang="fr-FR" i="1">
+                                <a:latin typeface="Cambria Math" panose="02040503050406030204" pitchFamily="18" charset="0"/>
+                              </a:rPr>
+                            </m:ctrlPr>
+                          </m:sSubSupPr>
+                          <m:e>
+                            <m:r>
+                              <a:rPr lang="fr-FR" i="1">
+                                <a:latin typeface="Cambria Math" panose="02040503050406030204" pitchFamily="18" charset="0"/>
+                              </a:rPr>
+                              <m:t>𝑇</m:t>
+                            </m:r>
+                          </m:e>
+                          <m:sub>
+                            <m:r>
+                              <a:rPr lang="fr-FR" i="1">
+                                <a:latin typeface="Cambria Math" panose="02040503050406030204" pitchFamily="18" charset="0"/>
+                              </a:rPr>
+                              <m:t>𝑅</m:t>
+                            </m:r>
+                            <m:r>
+                              <a:rPr lang="fr-FR" i="1">
+                                <a:latin typeface="Cambria Math" panose="02040503050406030204" pitchFamily="18" charset="0"/>
+                              </a:rPr>
+                              <m:t>,</m:t>
+                            </m:r>
+                            <m:r>
+                              <a:rPr lang="fr-FR" i="1">
+                                <a:latin typeface="Cambria Math" panose="02040503050406030204" pitchFamily="18" charset="0"/>
+                              </a:rPr>
+                              <m:t>𝑧</m:t>
+                            </m:r>
+                          </m:sub>
+                          <m:sup>
+                            <m:r>
+                              <a:rPr lang="fr-FR" i="1">
+                                <a:latin typeface="Cambria Math" panose="02040503050406030204" pitchFamily="18" charset="0"/>
+                              </a:rPr>
+                              <m:t>𝑡</m:t>
+                            </m:r>
+                            <m:r>
+                              <a:rPr lang="fr-FR" i="1">
+                                <a:latin typeface="Cambria Math" panose="02040503050406030204" pitchFamily="18" charset="0"/>
+                              </a:rPr>
+                              <m:t>+</m:t>
+                            </m:r>
+                            <m:r>
+                              <m:rPr>
+                                <m:sty m:val="p"/>
+                              </m:rPr>
+                              <a:rPr lang="fr-FR">
+                                <a:latin typeface="Cambria Math" panose="02040503050406030204" pitchFamily="18" charset="0"/>
+                              </a:rPr>
+                              <m:t>Δt</m:t>
+                            </m:r>
+                          </m:sup>
+                        </m:sSubSup>
+                        <m:r>
+                          <a:rPr lang="fr-FR" i="1">
+                            <a:latin typeface="Cambria Math" panose="02040503050406030204" pitchFamily="18" charset="0"/>
+                          </a:rPr>
+                          <m:t>−</m:t>
+                        </m:r>
+                        <m:sSubSup>
+                          <m:sSubSupPr>
+                            <m:ctrlPr>
+                              <a:rPr lang="fr-FR" i="1">
+                                <a:latin typeface="Cambria Math" panose="02040503050406030204" pitchFamily="18" charset="0"/>
+                              </a:rPr>
+                            </m:ctrlPr>
+                          </m:sSubSupPr>
+                          <m:e>
+                            <m:r>
+                              <a:rPr lang="fr-FR" i="1">
+                                <a:latin typeface="Cambria Math" panose="02040503050406030204" pitchFamily="18" charset="0"/>
+                              </a:rPr>
+                              <m:t>𝑇</m:t>
+                            </m:r>
+                          </m:e>
+                          <m:sub>
+                            <m:r>
+                              <a:rPr lang="fr-FR" i="1">
+                                <a:latin typeface="Cambria Math" panose="02040503050406030204" pitchFamily="18" charset="0"/>
+                              </a:rPr>
+                              <m:t>𝑅</m:t>
+                            </m:r>
+                            <m:r>
+                              <a:rPr lang="fr-FR" i="1">
+                                <a:latin typeface="Cambria Math" panose="02040503050406030204" pitchFamily="18" charset="0"/>
+                              </a:rPr>
+                              <m:t>,</m:t>
+                            </m:r>
+                            <m:r>
+                              <a:rPr lang="fr-FR" i="1">
+                                <a:latin typeface="Cambria Math" panose="02040503050406030204" pitchFamily="18" charset="0"/>
+                              </a:rPr>
+                              <m:t>𝑧</m:t>
+                            </m:r>
+                          </m:sub>
+                          <m:sup>
+                            <m:r>
+                              <a:rPr lang="fr-FR" i="1">
+                                <a:latin typeface="Cambria Math" panose="02040503050406030204" pitchFamily="18" charset="0"/>
+                              </a:rPr>
+                              <m:t>𝑡</m:t>
+                            </m:r>
+                          </m:sup>
+                        </m:sSubSup>
+                      </m:num>
+                      <m:den>
+                        <m:r>
+                          <m:rPr>
+                            <m:sty m:val="p"/>
+                          </m:rPr>
+                          <a:rPr lang="fr-FR">
+                            <a:latin typeface="Cambria Math" panose="02040503050406030204" pitchFamily="18" charset="0"/>
+                          </a:rPr>
+                          <m:t>Δt</m:t>
+                        </m:r>
+                        <m:r>
+                          <m:rPr>
+                            <m:nor/>
+                          </m:rPr>
+                          <a:rPr lang="fr-FR"/>
+                          <m:t> </m:t>
+                        </m:r>
+                      </m:den>
+                    </m:f>
+                    <m:r>
+                      <a:rPr lang="fr-FR" b="0" i="1" smtClean="0">
+                        <a:latin typeface="Cambria Math" panose="02040503050406030204" pitchFamily="18" charset="0"/>
+                      </a:rPr>
+                      <m:t>=</m:t>
+                    </m:r>
+                    <m:sSub>
+                      <m:sSubPr>
+                        <m:ctrlPr>
+                          <a:rPr lang="fr-FR" i="1" smtClean="0">
+                            <a:solidFill>
+                              <a:srgbClr val="FF0000"/>
+                            </a:solidFill>
+                            <a:latin typeface="Cambria Math" panose="02040503050406030204" pitchFamily="18" charset="0"/>
+                          </a:rPr>
+                        </m:ctrlPr>
+                      </m:sSubPr>
+                      <m:e>
+                        <m:r>
+                          <a:rPr lang="fr-FR" b="0" i="1" smtClean="0">
+                            <a:solidFill>
+                              <a:schemeClr val="tx1"/>
+                            </a:solidFill>
+                            <a:latin typeface="Cambria Math" panose="02040503050406030204" pitchFamily="18" charset="0"/>
+                          </a:rPr>
+                          <m:t>(</m:t>
+                        </m:r>
+                        <m:r>
+                          <a:rPr lang="fr-FR" i="1" smtClean="0">
+                            <a:solidFill>
+                              <a:srgbClr val="FF0000"/>
+                            </a:solidFill>
+                            <a:latin typeface="Cambria Math" panose="02040503050406030204" pitchFamily="18" charset="0"/>
+                          </a:rPr>
+                          <m:t>𝑇</m:t>
+                        </m:r>
+                      </m:e>
+                      <m:sub>
+                        <m:r>
+                          <a:rPr lang="fr-FR" i="1">
+                            <a:solidFill>
+                              <a:srgbClr val="FF0000"/>
+                            </a:solidFill>
+                            <a:latin typeface="Cambria Math" panose="02040503050406030204" pitchFamily="18" charset="0"/>
+                          </a:rPr>
+                          <m:t>𝑖</m:t>
+                        </m:r>
+                      </m:sub>
+                    </m:sSub>
+                    <m:r>
+                      <a:rPr lang="fr-FR" i="1">
+                        <a:latin typeface="Cambria Math" panose="02040503050406030204" pitchFamily="18" charset="0"/>
+                      </a:rPr>
+                      <m:t>+</m:t>
+                    </m:r>
+                    <m:f>
+                      <m:fPr>
+                        <m:ctrlPr>
+                          <a:rPr lang="fr-FR" i="1">
+                            <a:latin typeface="Cambria Math" panose="02040503050406030204" pitchFamily="18" charset="0"/>
+                          </a:rPr>
+                        </m:ctrlPr>
+                      </m:fPr>
+                      <m:num>
+                        <m:r>
+                          <a:rPr lang="fr-FR" i="1">
+                            <a:latin typeface="Cambria Math" panose="02040503050406030204" pitchFamily="18" charset="0"/>
+                          </a:rPr>
+                          <m:t>𝜕</m:t>
+                        </m:r>
+                        <m:r>
+                          <a:rPr lang="fr-FR" i="1">
+                            <a:latin typeface="Cambria Math" panose="02040503050406030204" pitchFamily="18" charset="0"/>
+                          </a:rPr>
+                          <m:t>𝑇</m:t>
+                        </m:r>
+                      </m:num>
+                      <m:den>
+                        <m:r>
+                          <a:rPr lang="fr-FR" i="1">
+                            <a:latin typeface="Cambria Math" panose="02040503050406030204" pitchFamily="18" charset="0"/>
+                          </a:rPr>
+                          <m:t>𝜕</m:t>
+                        </m:r>
+                        <m:r>
+                          <a:rPr lang="fr-FR" b="0" i="1" smtClean="0">
+                            <a:latin typeface="Cambria Math" panose="02040503050406030204" pitchFamily="18" charset="0"/>
+                          </a:rPr>
+                          <m:t>𝑡</m:t>
+                        </m:r>
+                      </m:den>
+                    </m:f>
+                    <m:sSub>
+                      <m:sSubPr>
+                        <m:ctrlPr>
+                          <a:rPr lang="fr-FR" i="1" smtClean="0">
+                            <a:latin typeface="Cambria Math" panose="02040503050406030204" pitchFamily="18" charset="0"/>
+                          </a:rPr>
+                        </m:ctrlPr>
+                      </m:sSubPr>
+                      <m:e>
+                        <m:d>
+                          <m:dPr>
+                            <m:begChr m:val=""/>
+                            <m:endChr m:val="|"/>
+                            <m:ctrlPr>
+                              <a:rPr lang="fr-FR" i="1">
+                                <a:latin typeface="Cambria Math" panose="02040503050406030204" pitchFamily="18" charset="0"/>
+                              </a:rPr>
+                            </m:ctrlPr>
+                          </m:dPr>
+                          <m:e>
+                            <m:r>
+                              <a:rPr lang="fr-FR" i="1">
+                                <a:latin typeface="Cambria Math" panose="02040503050406030204" pitchFamily="18" charset="0"/>
+                              </a:rPr>
+                              <m:t>​</m:t>
+                            </m:r>
+                          </m:e>
+                        </m:d>
+                      </m:e>
+                      <m:sub>
+                        <m:r>
+                          <a:rPr lang="fr-FR" b="0" i="1" smtClean="0">
+                            <a:latin typeface="Cambria Math" panose="02040503050406030204" pitchFamily="18" charset="0"/>
+                          </a:rPr>
+                          <m:t>𝑡</m:t>
+                        </m:r>
+                        <m:r>
+                          <a:rPr lang="fr-FR" b="0" i="1" smtClean="0">
+                            <a:latin typeface="Cambria Math" panose="02040503050406030204" pitchFamily="18" charset="0"/>
+                          </a:rPr>
+                          <m:t>,</m:t>
+                        </m:r>
+                        <m:r>
+                          <a:rPr lang="fr-FR" b="0" i="1" smtClean="0">
+                            <a:latin typeface="Cambria Math" panose="02040503050406030204" pitchFamily="18" charset="0"/>
+                          </a:rPr>
+                          <m:t>𝑅</m:t>
+                        </m:r>
+                        <m:r>
+                          <a:rPr lang="fr-FR" b="0" i="1" smtClean="0">
+                            <a:latin typeface="Cambria Math" panose="02040503050406030204" pitchFamily="18" charset="0"/>
+                          </a:rPr>
+                          <m:t>,</m:t>
+                        </m:r>
+                        <m:r>
+                          <a:rPr lang="fr-FR" b="0" i="1" smtClean="0">
+                            <a:latin typeface="Cambria Math" panose="02040503050406030204" pitchFamily="18" charset="0"/>
+                          </a:rPr>
+                          <m:t>𝑧</m:t>
+                        </m:r>
+                      </m:sub>
+                    </m:sSub>
+                    <m:r>
+                      <m:rPr>
+                        <m:sty m:val="p"/>
+                      </m:rPr>
+                      <a:rPr lang="fr-FR" smtClean="0">
+                        <a:latin typeface="Cambria Math" panose="02040503050406030204" pitchFamily="18" charset="0"/>
+                      </a:rPr>
+                      <m:t>Δ</m:t>
+                    </m:r>
+                    <m:r>
+                      <a:rPr lang="fr-FR" b="0" i="1" smtClean="0">
+                        <a:latin typeface="Cambria Math" panose="02040503050406030204" pitchFamily="18" charset="0"/>
+                      </a:rPr>
+                      <m:t>𝑡</m:t>
+                    </m:r>
+                    <m:r>
+                      <a:rPr lang="fr-FR" b="0" i="1" smtClean="0">
+                        <a:latin typeface="Cambria Math" panose="02040503050406030204" pitchFamily="18" charset="0"/>
+                      </a:rPr>
+                      <m:t>+</m:t>
+                    </m:r>
+                    <m:f>
+                      <m:fPr>
+                        <m:ctrlPr>
+                          <a:rPr lang="fr-FR" i="1">
+                            <a:latin typeface="Cambria Math" panose="02040503050406030204" pitchFamily="18" charset="0"/>
+                          </a:rPr>
+                        </m:ctrlPr>
+                      </m:fPr>
+                      <m:num>
+                        <m:sSup>
+                          <m:sSupPr>
+                            <m:ctrlPr>
+                              <a:rPr lang="fr-FR" i="1">
+                                <a:latin typeface="Cambria Math" panose="02040503050406030204" pitchFamily="18" charset="0"/>
+                              </a:rPr>
+                            </m:ctrlPr>
+                          </m:sSupPr>
+                          <m:e>
+                            <m:r>
+                              <a:rPr lang="fr-FR" i="1">
+                                <a:latin typeface="Cambria Math" panose="02040503050406030204" pitchFamily="18" charset="0"/>
+                              </a:rPr>
+                              <m:t>𝜕</m:t>
+                            </m:r>
+                          </m:e>
+                          <m:sup>
+                            <m:r>
+                              <a:rPr lang="fr-FR" i="1">
+                                <a:latin typeface="Cambria Math" panose="02040503050406030204" pitchFamily="18" charset="0"/>
+                              </a:rPr>
+                              <m:t>2</m:t>
+                            </m:r>
+                          </m:sup>
+                        </m:sSup>
+                        <m:r>
+                          <a:rPr lang="fr-FR" i="1">
+                            <a:latin typeface="Cambria Math" panose="02040503050406030204" pitchFamily="18" charset="0"/>
+                          </a:rPr>
+                          <m:t>𝑇</m:t>
+                        </m:r>
+                      </m:num>
+                      <m:den>
+                        <m:r>
+                          <a:rPr lang="fr-FR" i="1">
+                            <a:latin typeface="Cambria Math" panose="02040503050406030204" pitchFamily="18" charset="0"/>
+                          </a:rPr>
+                          <m:t>𝜕</m:t>
+                        </m:r>
+                        <m:sSup>
+                          <m:sSupPr>
+                            <m:ctrlPr>
+                              <a:rPr lang="fr-FR" i="1">
+                                <a:latin typeface="Cambria Math" panose="02040503050406030204" pitchFamily="18" charset="0"/>
+                              </a:rPr>
+                            </m:ctrlPr>
+                          </m:sSupPr>
+                          <m:e>
+                            <m:r>
+                              <a:rPr lang="fr-FR" b="0" i="1" smtClean="0">
+                                <a:latin typeface="Cambria Math" panose="02040503050406030204" pitchFamily="18" charset="0"/>
+                              </a:rPr>
+                              <m:t>𝑡</m:t>
+                            </m:r>
+                          </m:e>
+                          <m:sup>
+                            <m:r>
+                              <a:rPr lang="fr-FR" i="1">
+                                <a:latin typeface="Cambria Math" panose="02040503050406030204" pitchFamily="18" charset="0"/>
+                              </a:rPr>
+                              <m:t>2</m:t>
+                            </m:r>
+                          </m:sup>
+                        </m:sSup>
+                      </m:den>
+                    </m:f>
+                    <m:sSub>
+                      <m:sSubPr>
+                        <m:ctrlPr>
+                          <a:rPr lang="fr-FR" i="1">
+                            <a:latin typeface="Cambria Math" panose="02040503050406030204" pitchFamily="18" charset="0"/>
+                          </a:rPr>
+                        </m:ctrlPr>
+                      </m:sSubPr>
+                      <m:e>
+                        <m:d>
+                          <m:dPr>
+                            <m:begChr m:val=""/>
+                            <m:endChr m:val="|"/>
+                            <m:ctrlPr>
+                              <a:rPr lang="fr-FR" i="1">
+                                <a:latin typeface="Cambria Math" panose="02040503050406030204" pitchFamily="18" charset="0"/>
+                              </a:rPr>
+                            </m:ctrlPr>
+                          </m:dPr>
+                          <m:e>
+                            <m:r>
+                              <a:rPr lang="fr-FR" i="1">
+                                <a:latin typeface="Cambria Math" panose="02040503050406030204" pitchFamily="18" charset="0"/>
+                              </a:rPr>
+                              <m:t>​</m:t>
+                            </m:r>
+                          </m:e>
+                        </m:d>
+                      </m:e>
+                      <m:sub>
+                        <m:r>
+                          <a:rPr lang="fr-FR" b="0" i="1" smtClean="0">
+                            <a:latin typeface="Cambria Math" panose="02040503050406030204" pitchFamily="18" charset="0"/>
+                          </a:rPr>
+                          <m:t>𝑡</m:t>
+                        </m:r>
+                        <m:r>
+                          <a:rPr lang="fr-FR" b="0" i="1" smtClean="0">
+                            <a:latin typeface="Cambria Math" panose="02040503050406030204" pitchFamily="18" charset="0"/>
+                          </a:rPr>
+                          <m:t>,</m:t>
+                        </m:r>
+                        <m:r>
+                          <a:rPr lang="fr-FR" b="0" i="1" smtClean="0">
+                            <a:latin typeface="Cambria Math" panose="02040503050406030204" pitchFamily="18" charset="0"/>
+                          </a:rPr>
+                          <m:t>𝑅</m:t>
+                        </m:r>
+                        <m:r>
+                          <a:rPr lang="fr-FR" b="0" i="1" smtClean="0">
+                            <a:latin typeface="Cambria Math" panose="02040503050406030204" pitchFamily="18" charset="0"/>
+                          </a:rPr>
+                          <m:t>,</m:t>
+                        </m:r>
+                        <m:r>
+                          <a:rPr lang="fr-FR" b="0" i="1" smtClean="0">
+                            <a:latin typeface="Cambria Math" panose="02040503050406030204" pitchFamily="18" charset="0"/>
+                          </a:rPr>
+                          <m:t>𝑧</m:t>
+                        </m:r>
+                      </m:sub>
+                    </m:sSub>
+                    <m:f>
+                      <m:fPr>
+                        <m:ctrlPr>
+                          <a:rPr lang="fr-FR" i="1">
+                            <a:latin typeface="Cambria Math" panose="02040503050406030204" pitchFamily="18" charset="0"/>
+                          </a:rPr>
+                        </m:ctrlPr>
+                      </m:fPr>
+                      <m:num>
+                        <m:r>
+                          <m:rPr>
+                            <m:sty m:val="p"/>
+                          </m:rPr>
+                          <a:rPr lang="fr-FR">
+                            <a:latin typeface="Cambria Math" panose="02040503050406030204" pitchFamily="18" charset="0"/>
+                          </a:rPr>
+                          <m:t>Δ</m:t>
+                        </m:r>
+                        <m:sSup>
+                          <m:sSupPr>
+                            <m:ctrlPr>
+                              <a:rPr lang="fr-FR" i="1">
+                                <a:latin typeface="Cambria Math" panose="02040503050406030204" pitchFamily="18" charset="0"/>
+                              </a:rPr>
+                            </m:ctrlPr>
+                          </m:sSupPr>
+                          <m:e>
+                            <m:r>
+                              <a:rPr lang="fr-FR" b="0" i="1" smtClean="0">
+                                <a:latin typeface="Cambria Math" panose="02040503050406030204" pitchFamily="18" charset="0"/>
+                              </a:rPr>
+                              <m:t>𝑡</m:t>
+                            </m:r>
+                          </m:e>
+                          <m:sup>
+                            <m:r>
+                              <a:rPr lang="fr-FR" i="1">
+                                <a:latin typeface="Cambria Math" panose="02040503050406030204" pitchFamily="18" charset="0"/>
+                              </a:rPr>
+                              <m:t>2</m:t>
+                            </m:r>
+                          </m:sup>
+                        </m:sSup>
+                      </m:num>
+                      <m:den>
+                        <m:r>
+                          <a:rPr lang="fr-FR" i="1">
+                            <a:latin typeface="Cambria Math" panose="02040503050406030204" pitchFamily="18" charset="0"/>
+                          </a:rPr>
+                          <m:t>2!</m:t>
+                        </m:r>
+                      </m:den>
+                    </m:f>
+                    <m:r>
+                      <a:rPr lang="fr-FR" b="0" i="1" smtClean="0">
+                        <a:latin typeface="Cambria Math" panose="02040503050406030204" pitchFamily="18" charset="0"/>
+                      </a:rPr>
+                      <m:t>+</m:t>
+                    </m:r>
+                    <m:r>
+                      <a:rPr lang="fr-FR" b="0" i="1" smtClean="0">
+                        <a:latin typeface="Cambria Math" panose="02040503050406030204" pitchFamily="18" charset="0"/>
+                      </a:rPr>
+                      <m:t>𝑜</m:t>
+                    </m:r>
+                    <m:r>
+                      <a:rPr lang="fr-FR" b="0" i="1" smtClean="0">
+                        <a:latin typeface="Cambria Math" panose="02040503050406030204" pitchFamily="18" charset="0"/>
+                      </a:rPr>
+                      <m:t>(</m:t>
+                    </m:r>
+                    <m:r>
+                      <m:rPr>
+                        <m:sty m:val="p"/>
+                      </m:rPr>
+                      <a:rPr lang="fr-FR">
+                        <a:latin typeface="Cambria Math" panose="02040503050406030204" pitchFamily="18" charset="0"/>
+                      </a:rPr>
+                      <m:t>Δ</m:t>
+                    </m:r>
+                    <m:sSup>
+                      <m:sSupPr>
+                        <m:ctrlPr>
+                          <a:rPr lang="fr-FR" i="1">
+                            <a:latin typeface="Cambria Math" panose="02040503050406030204" pitchFamily="18" charset="0"/>
+                          </a:rPr>
+                        </m:ctrlPr>
+                      </m:sSupPr>
+                      <m:e>
+                        <m:r>
+                          <a:rPr lang="fr-FR" b="0" i="1" smtClean="0">
+                            <a:latin typeface="Cambria Math" panose="02040503050406030204" pitchFamily="18" charset="0"/>
+                          </a:rPr>
+                          <m:t>𝑡</m:t>
+                        </m:r>
+                      </m:e>
+                      <m:sup>
+                        <m:r>
+                          <a:rPr lang="fr-FR" b="0" i="1" smtClean="0">
+                            <a:latin typeface="Cambria Math" panose="02040503050406030204" pitchFamily="18" charset="0"/>
+                          </a:rPr>
+                          <m:t>2</m:t>
+                        </m:r>
+                      </m:sup>
+                    </m:sSup>
+                    <m:r>
+                      <a:rPr lang="fr-FR" b="0" i="1" smtClean="0">
+                        <a:latin typeface="Cambria Math" panose="02040503050406030204" pitchFamily="18" charset="0"/>
+                      </a:rPr>
+                      <m:t>)</m:t>
+                    </m:r>
+                    <m:r>
+                      <a:rPr lang="fr-FR" b="0" i="1" smtClean="0">
+                        <a:solidFill>
+                          <a:srgbClr val="FF0000"/>
+                        </a:solidFill>
+                        <a:latin typeface="Cambria Math" panose="02040503050406030204" pitchFamily="18" charset="0"/>
+                      </a:rPr>
+                      <m:t>−</m:t>
+                    </m:r>
+                    <m:sSub>
+                      <m:sSubPr>
+                        <m:ctrlPr>
+                          <a:rPr lang="fr-FR" b="0" i="1" smtClean="0">
+                            <a:solidFill>
+                              <a:srgbClr val="FF0000"/>
+                            </a:solidFill>
+                            <a:latin typeface="Cambria Math" panose="02040503050406030204" pitchFamily="18" charset="0"/>
+                          </a:rPr>
+                        </m:ctrlPr>
+                      </m:sSubPr>
+                      <m:e>
+                        <m:r>
+                          <a:rPr lang="fr-FR" b="0" i="1" smtClean="0">
+                            <a:solidFill>
+                              <a:srgbClr val="FF0000"/>
+                            </a:solidFill>
+                            <a:latin typeface="Cambria Math" panose="02040503050406030204" pitchFamily="18" charset="0"/>
+                          </a:rPr>
+                          <m:t>𝑇</m:t>
+                        </m:r>
+                      </m:e>
+                      <m:sub>
+                        <m:r>
+                          <a:rPr lang="fr-FR" b="0" i="1" smtClean="0">
+                            <a:solidFill>
+                              <a:srgbClr val="FF0000"/>
+                            </a:solidFill>
+                            <a:latin typeface="Cambria Math" panose="02040503050406030204" pitchFamily="18" charset="0"/>
+                          </a:rPr>
+                          <m:t>𝑖</m:t>
+                        </m:r>
+                      </m:sub>
+                    </m:sSub>
+                  </m:oMath>
+                </a14:m>
+                <a:r>
+                  <a:rPr lang="fr-FR" b="0" i="0" dirty="0">
+                    <a:latin typeface="Cambria Math" panose="02040503050406030204" pitchFamily="18" charset="0"/>
+                  </a:rPr>
+                  <a:t>)</a:t>
+                </a:r>
+                <a:r>
+                  <a:rPr lang="fr-FR" dirty="0"/>
+                  <a:t> </a:t>
+                </a:r>
+                <a14:m>
+                  <m:oMath xmlns:m="http://schemas.openxmlformats.org/officeDocument/2006/math">
+                    <m:f>
+                      <m:fPr>
+                        <m:ctrlPr>
+                          <a:rPr lang="fr-FR" i="1">
+                            <a:latin typeface="Cambria Math" panose="02040503050406030204" pitchFamily="18" charset="0"/>
+                          </a:rPr>
+                        </m:ctrlPr>
+                      </m:fPr>
+                      <m:num>
+                        <m:r>
+                          <a:rPr lang="fr-FR" b="0" i="1" smtClean="0">
+                            <a:latin typeface="Cambria Math" panose="02040503050406030204" pitchFamily="18" charset="0"/>
+                          </a:rPr>
+                          <m:t>1</m:t>
+                        </m:r>
+                      </m:num>
+                      <m:den>
+                        <m:r>
+                          <m:rPr>
+                            <m:sty m:val="p"/>
+                          </m:rPr>
+                          <a:rPr lang="fr-FR">
+                            <a:latin typeface="Cambria Math" panose="02040503050406030204" pitchFamily="18" charset="0"/>
+                          </a:rPr>
+                          <m:t>Δ</m:t>
+                        </m:r>
+                        <m:r>
+                          <a:rPr lang="fr-FR" b="0" i="1" smtClean="0">
+                            <a:latin typeface="Cambria Math" panose="02040503050406030204" pitchFamily="18" charset="0"/>
+                          </a:rPr>
+                          <m:t>𝑡</m:t>
+                        </m:r>
+                      </m:den>
+                    </m:f>
+                  </m:oMath>
+                </a14:m>
+                <a:endParaRPr lang="fr-FR" i="1" dirty="0">
+                  <a:latin typeface="Cambria Math" panose="02040503050406030204" pitchFamily="18" charset="0"/>
+                </a:endParaRPr>
+              </a:p>
+              <a:p>
+                <a:pPr marL="0" indent="0">
+                  <a:buNone/>
+                </a:pPr>
+                <a:r>
+                  <a:rPr lang="fr-FR" b="0" dirty="0"/>
+                  <a:t>	          </a:t>
+                </a:r>
+                <a14:m>
+                  <m:oMath xmlns:m="http://schemas.openxmlformats.org/officeDocument/2006/math">
+                    <m:r>
+                      <a:rPr lang="fr-FR" b="0" i="0" smtClean="0">
+                        <a:latin typeface="Cambria Math" panose="02040503050406030204" pitchFamily="18" charset="0"/>
+                      </a:rPr>
+                      <m:t>=</m:t>
+                    </m:r>
+                  </m:oMath>
+                </a14:m>
+                <a:r>
+                  <a:rPr lang="fr-FR" dirty="0"/>
+                  <a:t> </a:t>
+                </a:r>
+                <a14:m>
+                  <m:oMath xmlns:m="http://schemas.openxmlformats.org/officeDocument/2006/math">
+                    <m:f>
+                      <m:fPr>
+                        <m:ctrlPr>
+                          <a:rPr lang="fr-FR" i="1">
+                            <a:latin typeface="Cambria Math" panose="02040503050406030204" pitchFamily="18" charset="0"/>
+                          </a:rPr>
+                        </m:ctrlPr>
+                      </m:fPr>
+                      <m:num>
+                        <m:r>
+                          <a:rPr lang="fr-FR" i="1">
+                            <a:latin typeface="Cambria Math" panose="02040503050406030204" pitchFamily="18" charset="0"/>
+                          </a:rPr>
+                          <m:t>𝜕</m:t>
+                        </m:r>
+                        <m:r>
+                          <a:rPr lang="fr-FR" i="1">
+                            <a:latin typeface="Cambria Math" panose="02040503050406030204" pitchFamily="18" charset="0"/>
+                          </a:rPr>
+                          <m:t>𝑇</m:t>
+                        </m:r>
+                      </m:num>
+                      <m:den>
+                        <m:r>
+                          <a:rPr lang="fr-FR" i="1">
+                            <a:latin typeface="Cambria Math" panose="02040503050406030204" pitchFamily="18" charset="0"/>
+                          </a:rPr>
+                          <m:t>𝜕</m:t>
+                        </m:r>
+                        <m:r>
+                          <a:rPr lang="fr-FR" i="1">
+                            <a:latin typeface="Cambria Math" panose="02040503050406030204" pitchFamily="18" charset="0"/>
+                          </a:rPr>
+                          <m:t>𝑡</m:t>
+                        </m:r>
+                      </m:den>
+                    </m:f>
+                    <m:sSub>
+                      <m:sSubPr>
+                        <m:ctrlPr>
+                          <a:rPr lang="fr-FR" i="1">
+                            <a:latin typeface="Cambria Math" panose="02040503050406030204" pitchFamily="18" charset="0"/>
+                          </a:rPr>
+                        </m:ctrlPr>
+                      </m:sSubPr>
+                      <m:e>
+                        <m:d>
+                          <m:dPr>
+                            <m:begChr m:val=""/>
+                            <m:endChr m:val="|"/>
+                            <m:ctrlPr>
+                              <a:rPr lang="fr-FR" i="1">
+                                <a:latin typeface="Cambria Math" panose="02040503050406030204" pitchFamily="18" charset="0"/>
+                              </a:rPr>
+                            </m:ctrlPr>
+                          </m:dPr>
+                          <m:e>
+                            <m:r>
+                              <a:rPr lang="fr-FR" i="1">
+                                <a:latin typeface="Cambria Math" panose="02040503050406030204" pitchFamily="18" charset="0"/>
+                              </a:rPr>
+                              <m:t>​</m:t>
+                            </m:r>
+                          </m:e>
+                        </m:d>
+                      </m:e>
+                      <m:sub>
+                        <m:r>
+                          <a:rPr lang="fr-FR" i="1">
+                            <a:latin typeface="Cambria Math" panose="02040503050406030204" pitchFamily="18" charset="0"/>
+                          </a:rPr>
+                          <m:t>𝑡</m:t>
+                        </m:r>
+                        <m:r>
+                          <a:rPr lang="fr-FR" i="1">
+                            <a:latin typeface="Cambria Math" panose="02040503050406030204" pitchFamily="18" charset="0"/>
+                          </a:rPr>
+                          <m:t>,</m:t>
+                        </m:r>
+                        <m:r>
+                          <a:rPr lang="fr-FR" i="1">
+                            <a:latin typeface="Cambria Math" panose="02040503050406030204" pitchFamily="18" charset="0"/>
+                          </a:rPr>
+                          <m:t>𝑅</m:t>
+                        </m:r>
+                        <m:r>
+                          <a:rPr lang="fr-FR" i="1">
+                            <a:latin typeface="Cambria Math" panose="02040503050406030204" pitchFamily="18" charset="0"/>
+                          </a:rPr>
+                          <m:t>,</m:t>
+                        </m:r>
+                        <m:r>
+                          <a:rPr lang="fr-FR" i="1">
+                            <a:latin typeface="Cambria Math" panose="02040503050406030204" pitchFamily="18" charset="0"/>
+                          </a:rPr>
+                          <m:t>𝑧</m:t>
+                        </m:r>
+                      </m:sub>
+                    </m:sSub>
+                    <m:r>
+                      <a:rPr lang="fr-FR" b="0" i="1" smtClean="0">
+                        <a:latin typeface="Cambria Math" panose="02040503050406030204" pitchFamily="18" charset="0"/>
+                      </a:rPr>
+                      <m:t>+</m:t>
+                    </m:r>
+                    <m:f>
+                      <m:fPr>
+                        <m:ctrlPr>
+                          <a:rPr lang="fr-FR" i="1">
+                            <a:latin typeface="Cambria Math" panose="02040503050406030204" pitchFamily="18" charset="0"/>
+                          </a:rPr>
+                        </m:ctrlPr>
+                      </m:fPr>
+                      <m:num>
+                        <m:sSup>
+                          <m:sSupPr>
+                            <m:ctrlPr>
+                              <a:rPr lang="fr-FR" i="1">
+                                <a:latin typeface="Cambria Math" panose="02040503050406030204" pitchFamily="18" charset="0"/>
+                              </a:rPr>
+                            </m:ctrlPr>
+                          </m:sSupPr>
+                          <m:e>
+                            <m:r>
+                              <a:rPr lang="fr-FR" i="1">
+                                <a:latin typeface="Cambria Math" panose="02040503050406030204" pitchFamily="18" charset="0"/>
+                              </a:rPr>
+                              <m:t>𝜕</m:t>
+                            </m:r>
+                          </m:e>
+                          <m:sup>
+                            <m:r>
+                              <a:rPr lang="fr-FR" i="1">
+                                <a:latin typeface="Cambria Math" panose="02040503050406030204" pitchFamily="18" charset="0"/>
+                              </a:rPr>
+                              <m:t>2</m:t>
+                            </m:r>
+                          </m:sup>
+                        </m:sSup>
+                        <m:r>
+                          <a:rPr lang="fr-FR" i="1">
+                            <a:latin typeface="Cambria Math" panose="02040503050406030204" pitchFamily="18" charset="0"/>
+                          </a:rPr>
+                          <m:t>𝑇</m:t>
+                        </m:r>
+                      </m:num>
+                      <m:den>
+                        <m:r>
+                          <a:rPr lang="fr-FR" i="1">
+                            <a:latin typeface="Cambria Math" panose="02040503050406030204" pitchFamily="18" charset="0"/>
+                          </a:rPr>
+                          <m:t>𝜕</m:t>
+                        </m:r>
+                        <m:sSup>
+                          <m:sSupPr>
+                            <m:ctrlPr>
+                              <a:rPr lang="fr-FR" i="1">
+                                <a:latin typeface="Cambria Math" panose="02040503050406030204" pitchFamily="18" charset="0"/>
+                              </a:rPr>
+                            </m:ctrlPr>
+                          </m:sSupPr>
+                          <m:e>
+                            <m:r>
+                              <a:rPr lang="fr-FR" i="1">
+                                <a:latin typeface="Cambria Math" panose="02040503050406030204" pitchFamily="18" charset="0"/>
+                              </a:rPr>
+                              <m:t>𝑡</m:t>
+                            </m:r>
+                          </m:e>
+                          <m:sup>
+                            <m:r>
+                              <a:rPr lang="fr-FR" i="1">
+                                <a:latin typeface="Cambria Math" panose="02040503050406030204" pitchFamily="18" charset="0"/>
+                              </a:rPr>
+                              <m:t>2</m:t>
+                            </m:r>
+                          </m:sup>
+                        </m:sSup>
+                      </m:den>
+                    </m:f>
+                    <m:sSub>
+                      <m:sSubPr>
+                        <m:ctrlPr>
+                          <a:rPr lang="fr-FR" i="1">
+                            <a:latin typeface="Cambria Math" panose="02040503050406030204" pitchFamily="18" charset="0"/>
+                          </a:rPr>
+                        </m:ctrlPr>
+                      </m:sSubPr>
+                      <m:e>
+                        <m:d>
+                          <m:dPr>
+                            <m:begChr m:val=""/>
+                            <m:endChr m:val="|"/>
+                            <m:ctrlPr>
+                              <a:rPr lang="fr-FR" i="1">
+                                <a:latin typeface="Cambria Math" panose="02040503050406030204" pitchFamily="18" charset="0"/>
+                              </a:rPr>
+                            </m:ctrlPr>
+                          </m:dPr>
+                          <m:e>
+                            <m:r>
+                              <a:rPr lang="fr-FR" i="1">
+                                <a:latin typeface="Cambria Math" panose="02040503050406030204" pitchFamily="18" charset="0"/>
+                              </a:rPr>
+                              <m:t>​</m:t>
+                            </m:r>
+                          </m:e>
+                        </m:d>
+                      </m:e>
+                      <m:sub>
+                        <m:r>
+                          <a:rPr lang="fr-FR" b="0" i="1" smtClean="0">
+                            <a:latin typeface="Cambria Math" panose="02040503050406030204" pitchFamily="18" charset="0"/>
+                          </a:rPr>
+                          <m:t>𝑡</m:t>
+                        </m:r>
+                        <m:r>
+                          <a:rPr lang="fr-FR" b="0" i="1" smtClean="0">
+                            <a:latin typeface="Cambria Math" panose="02040503050406030204" pitchFamily="18" charset="0"/>
+                          </a:rPr>
+                          <m:t>,</m:t>
+                        </m:r>
+                        <m:r>
+                          <a:rPr lang="fr-FR" b="0" i="1" smtClean="0">
+                            <a:latin typeface="Cambria Math" panose="02040503050406030204" pitchFamily="18" charset="0"/>
+                          </a:rPr>
+                          <m:t>𝑅</m:t>
+                        </m:r>
+                        <m:r>
+                          <a:rPr lang="fr-FR" b="0" i="1" smtClean="0">
+                            <a:latin typeface="Cambria Math" panose="02040503050406030204" pitchFamily="18" charset="0"/>
+                          </a:rPr>
+                          <m:t>,</m:t>
+                        </m:r>
+                        <m:r>
+                          <a:rPr lang="fr-FR" b="0" i="1" smtClean="0">
+                            <a:latin typeface="Cambria Math" panose="02040503050406030204" pitchFamily="18" charset="0"/>
+                          </a:rPr>
+                          <m:t>𝑧</m:t>
+                        </m:r>
+                      </m:sub>
+                    </m:sSub>
+                    <m:f>
+                      <m:fPr>
+                        <m:ctrlPr>
+                          <a:rPr lang="fr-FR" i="1">
+                            <a:latin typeface="Cambria Math" panose="02040503050406030204" pitchFamily="18" charset="0"/>
+                          </a:rPr>
+                        </m:ctrlPr>
+                      </m:fPr>
+                      <m:num>
+                        <m:r>
+                          <m:rPr>
+                            <m:sty m:val="p"/>
+                          </m:rPr>
+                          <a:rPr lang="fr-FR" smtClean="0">
+                            <a:solidFill>
+                              <a:srgbClr val="0070C0"/>
+                            </a:solidFill>
+                            <a:latin typeface="Cambria Math" panose="02040503050406030204" pitchFamily="18" charset="0"/>
+                          </a:rPr>
+                          <m:t>Δ</m:t>
+                        </m:r>
+                        <m:r>
+                          <a:rPr lang="fr-FR" b="0" i="1" smtClean="0">
+                            <a:solidFill>
+                              <a:srgbClr val="0070C0"/>
+                            </a:solidFill>
+                            <a:latin typeface="Cambria Math" panose="02040503050406030204" pitchFamily="18" charset="0"/>
+                          </a:rPr>
+                          <m:t>𝑡</m:t>
+                        </m:r>
+                      </m:num>
+                      <m:den>
+                        <m:r>
+                          <a:rPr lang="fr-FR" i="1">
+                            <a:latin typeface="Cambria Math" panose="02040503050406030204" pitchFamily="18" charset="0"/>
+                          </a:rPr>
+                          <m:t>2!</m:t>
+                        </m:r>
+                      </m:den>
+                    </m:f>
+                    <m:r>
+                      <a:rPr lang="fr-FR" i="1">
+                        <a:latin typeface="Cambria Math" panose="02040503050406030204" pitchFamily="18" charset="0"/>
+                      </a:rPr>
+                      <m:t>+</m:t>
+                    </m:r>
+                    <m:r>
+                      <a:rPr lang="fr-FR" i="1">
+                        <a:latin typeface="Cambria Math" panose="02040503050406030204" pitchFamily="18" charset="0"/>
+                      </a:rPr>
+                      <m:t>𝑜</m:t>
+                    </m:r>
+                    <m:r>
+                      <a:rPr lang="fr-FR" i="1">
+                        <a:latin typeface="Cambria Math" panose="02040503050406030204" pitchFamily="18" charset="0"/>
+                      </a:rPr>
+                      <m:t>(</m:t>
+                    </m:r>
+                    <m:r>
+                      <m:rPr>
+                        <m:sty m:val="p"/>
+                      </m:rPr>
+                      <a:rPr lang="fr-FR" smtClean="0">
+                        <a:solidFill>
+                          <a:srgbClr val="0070C0"/>
+                        </a:solidFill>
+                        <a:latin typeface="Cambria Math" panose="02040503050406030204" pitchFamily="18" charset="0"/>
+                      </a:rPr>
+                      <m:t>Δ</m:t>
+                    </m:r>
+                    <m:r>
+                      <a:rPr lang="fr-FR" b="0" i="1" smtClean="0">
+                        <a:solidFill>
+                          <a:srgbClr val="0070C0"/>
+                        </a:solidFill>
+                        <a:latin typeface="Cambria Math" panose="02040503050406030204" pitchFamily="18" charset="0"/>
+                      </a:rPr>
+                      <m:t>𝑡</m:t>
+                    </m:r>
+                    <m:r>
+                      <a:rPr lang="fr-FR" i="1">
+                        <a:latin typeface="Cambria Math" panose="02040503050406030204" pitchFamily="18" charset="0"/>
+                      </a:rPr>
+                      <m:t>)</m:t>
+                    </m:r>
+                  </m:oMath>
+                </a14:m>
+                <a:endParaRPr lang="fr-FR" b="0" i="0" dirty="0">
+                  <a:latin typeface="Cambria Math" panose="02040503050406030204" pitchFamily="18" charset="0"/>
+                </a:endParaRPr>
+              </a:p>
+              <a:p>
+                <a:pPr marL="0" indent="0">
+                  <a:buNone/>
+                </a:pPr>
+                <a:endParaRPr lang="fr-FR" b="0" dirty="0"/>
+              </a:p>
+              <a:p>
+                <a:pPr marL="0" indent="0">
+                  <a:buNone/>
+                </a:pPr>
+                <a:endParaRPr lang="fr-FR" dirty="0"/>
+              </a:p>
+            </p:txBody>
+          </p:sp>
+        </mc:Choice>
+        <mc:Fallback>
+          <p:sp>
+            <p:nvSpPr>
+              <p:cNvPr id="3" name="Espace réservé du contenu 2">
+                <a:extLst>
+                  <a:ext uri="{FF2B5EF4-FFF2-40B4-BE49-F238E27FC236}">
+                    <a16:creationId xmlns:a16="http://schemas.microsoft.com/office/drawing/2014/main" id="{3369A214-4D5D-715B-6640-CC12B4B650A6}"/>
+                  </a:ext>
+                </a:extLst>
+              </p:cNvPr>
+              <p:cNvSpPr>
+                <a:spLocks noGrp="1" noRot="1" noChangeAspect="1" noMove="1" noResize="1" noEditPoints="1" noAdjustHandles="1" noChangeArrowheads="1" noChangeShapeType="1" noTextEdit="1"/>
+              </p:cNvSpPr>
+              <p:nvPr>
+                <p:ph idx="1"/>
+              </p:nvPr>
+            </p:nvSpPr>
+            <p:spPr>
+              <a:xfrm>
+                <a:off x="570411" y="1605124"/>
+                <a:ext cx="10515600" cy="5504688"/>
+              </a:xfrm>
+              <a:blipFill>
+                <a:blip r:embed="rId3"/>
+                <a:stretch>
+                  <a:fillRect l="-1217" t="-1883"/>
+                </a:stretch>
+              </a:blipFill>
+            </p:spPr>
+            <p:txBody>
+              <a:bodyPr/>
+              <a:lstStyle/>
+              <a:p>
+                <a:r>
+                  <a:rPr lang="fr-FR">
+                    <a:noFill/>
+                  </a:rPr>
+                  <a:t> </a:t>
+                </a:r>
+              </a:p>
+            </p:txBody>
+          </p:sp>
+        </mc:Fallback>
+      </mc:AlternateContent>
+    </p:spTree>
+    <p:extLst>
+      <p:ext uri="{BB962C8B-B14F-4D97-AF65-F5344CB8AC3E}">
+        <p14:creationId xmlns:p14="http://schemas.microsoft.com/office/powerpoint/2010/main" val="1216024341"/>
+      </p:ext>
+    </p:extLst>
+  </p:cSld>
+  <p:clrMapOvr>
+    <a:masterClrMapping/>
+  </p:clrMapOvr>
+</p:sld>
+</file>
+
+<file path=ppt/slides/slide7.xml><?xml version="1.0" encoding="utf-8"?>
+<p:sld xmlns:a="http://schemas.openxmlformats.org/drawingml/2006/main" xmlns:r="http://schemas.openxmlformats.org/officeDocument/2006/relationships" xmlns:p="http://schemas.openxmlformats.org/presentationml/2006/main">
+  <p:cSld>
+    <p:spTree>
+      <p:nvGrpSpPr>
+        <p:cNvPr id="1" name="">
+          <a:extLst>
+            <a:ext uri="{FF2B5EF4-FFF2-40B4-BE49-F238E27FC236}">
+              <a16:creationId xmlns:a16="http://schemas.microsoft.com/office/drawing/2014/main" id="{F84C4141-85F8-8321-5A47-F7279370D582}"/>
+            </a:ext>
+          </a:extLst>
+        </p:cNvPr>
+        <p:cNvGrpSpPr/>
+        <p:nvPr/>
+      </p:nvGrpSpPr>
+      <p:grpSpPr>
+        <a:xfrm>
+          <a:off x="0" y="0"/>
+          <a:ext cx="0" cy="0"/>
+          <a:chOff x="0" y="0"/>
+          <a:chExt cx="0" cy="0"/>
+        </a:xfrm>
+      </p:grpSpPr>
+      <p:sp>
+        <p:nvSpPr>
+          <p:cNvPr id="2" name="Titre 1">
+            <a:extLst>
+              <a:ext uri="{FF2B5EF4-FFF2-40B4-BE49-F238E27FC236}">
+                <a16:creationId xmlns:a16="http://schemas.microsoft.com/office/drawing/2014/main" id="{AF7B92C8-7E5E-8CDA-7607-D5BFCF6EADC5}"/>
+              </a:ext>
+            </a:extLst>
+          </p:cNvPr>
+          <p:cNvSpPr>
+            <a:spLocks noGrp="1"/>
+          </p:cNvSpPr>
+          <p:nvPr>
+            <p:ph type="title"/>
+          </p:nvPr>
+        </p:nvSpPr>
+        <p:spPr>
+          <a:xfrm>
+            <a:off x="838200" y="18255"/>
+            <a:ext cx="10515600" cy="1325563"/>
+          </a:xfrm>
+        </p:spPr>
+        <p:txBody>
+          <a:bodyPr/>
+          <a:lstStyle/>
+          <a:p>
+            <a:r>
+              <a:rPr lang="fr-FR" dirty="0"/>
+              <a:t>Calcul de l’ordre de convergence </a:t>
+            </a:r>
+          </a:p>
+        </p:txBody>
+      </p:sp>
+      <mc:AlternateContent xmlns:mc="http://schemas.openxmlformats.org/markup-compatibility/2006">
+        <mc:Choice xmlns:a14="http://schemas.microsoft.com/office/drawing/2010/main" Requires="a14">
+          <p:sp>
+            <p:nvSpPr>
+              <p:cNvPr id="3" name="Espace réservé du contenu 2">
+                <a:extLst>
+                  <a:ext uri="{FF2B5EF4-FFF2-40B4-BE49-F238E27FC236}">
+                    <a16:creationId xmlns:a16="http://schemas.microsoft.com/office/drawing/2014/main" id="{A145214A-2ADA-193F-B05A-48501377A832}"/>
+                  </a:ext>
+                </a:extLst>
+              </p:cNvPr>
+              <p:cNvSpPr>
+                <a:spLocks noGrp="1"/>
+              </p:cNvSpPr>
+              <p:nvPr>
+                <p:ph idx="1"/>
+              </p:nvPr>
+            </p:nvSpPr>
+            <p:spPr>
+              <a:xfrm>
+                <a:off x="429768" y="1335057"/>
+                <a:ext cx="11676888" cy="5504688"/>
+              </a:xfrm>
+            </p:spPr>
+            <p:txBody>
+              <a:bodyPr>
+                <a:normAutofit/>
+              </a:bodyPr>
+              <a:lstStyle/>
+              <a:p>
+                <a:pPr marL="0" indent="0">
+                  <a:buNone/>
+                </a:pPr>
+                <a:r>
+                  <a:rPr lang="fr-FR" sz="2400" b="0" i="0" dirty="0">
+                    <a:latin typeface="Cambria Math" panose="02040503050406030204" pitchFamily="18" charset="0"/>
+                  </a:rPr>
+                  <a:t>Ordre 2 en espace (R et z) :</a:t>
+                </a:r>
+              </a:p>
+              <a:p>
+                <a14:m>
+                  <m:oMath xmlns:m="http://schemas.openxmlformats.org/officeDocument/2006/math">
+                    <m:f>
+                      <m:fPr>
+                        <m:ctrlPr>
+                          <a:rPr lang="fr-FR" sz="2400" i="1">
+                            <a:latin typeface="Cambria Math" panose="02040503050406030204" pitchFamily="18" charset="0"/>
+                          </a:rPr>
+                        </m:ctrlPr>
+                      </m:fPr>
+                      <m:num>
+                        <m:sSubSup>
+                          <m:sSubSupPr>
+                            <m:ctrlPr>
+                              <a:rPr lang="fr-FR" sz="2400" i="1">
+                                <a:latin typeface="Cambria Math" panose="02040503050406030204" pitchFamily="18" charset="0"/>
+                              </a:rPr>
+                            </m:ctrlPr>
+                          </m:sSubSupPr>
+                          <m:e>
+                            <m:r>
+                              <a:rPr lang="fr-FR" sz="2400" i="1">
+                                <a:latin typeface="Cambria Math" panose="02040503050406030204" pitchFamily="18" charset="0"/>
+                              </a:rPr>
+                              <m:t>𝑇</m:t>
+                            </m:r>
+                          </m:e>
+                          <m:sub>
+                            <m:r>
+                              <a:rPr lang="fr-FR" sz="2400" i="1">
+                                <a:latin typeface="Cambria Math" panose="02040503050406030204" pitchFamily="18" charset="0"/>
+                              </a:rPr>
+                              <m:t>𝑅</m:t>
+                            </m:r>
+                            <m:r>
+                              <a:rPr lang="fr-FR" sz="2400" i="1">
+                                <a:latin typeface="Cambria Math" panose="02040503050406030204" pitchFamily="18" charset="0"/>
+                              </a:rPr>
+                              <m:t>+1,</m:t>
+                            </m:r>
+                            <m:r>
+                              <a:rPr lang="fr-FR" sz="2400" i="1">
+                                <a:latin typeface="Cambria Math" panose="02040503050406030204" pitchFamily="18" charset="0"/>
+                              </a:rPr>
+                              <m:t>𝑧</m:t>
+                            </m:r>
+                          </m:sub>
+                          <m:sup>
+                            <m:r>
+                              <a:rPr lang="fr-FR" sz="2400" i="1">
+                                <a:latin typeface="Cambria Math" panose="02040503050406030204" pitchFamily="18" charset="0"/>
+                              </a:rPr>
+                              <m:t>𝑡</m:t>
+                            </m:r>
+                          </m:sup>
+                        </m:sSubSup>
+                        <m:r>
+                          <a:rPr lang="fr-FR" sz="2400" i="1">
+                            <a:latin typeface="Cambria Math" panose="02040503050406030204" pitchFamily="18" charset="0"/>
+                          </a:rPr>
+                          <m:t>−</m:t>
+                        </m:r>
+                        <m:sSubSup>
+                          <m:sSubSupPr>
+                            <m:ctrlPr>
+                              <a:rPr lang="fr-FR" sz="2400" i="1">
+                                <a:latin typeface="Cambria Math" panose="02040503050406030204" pitchFamily="18" charset="0"/>
+                              </a:rPr>
+                            </m:ctrlPr>
+                          </m:sSubSupPr>
+                          <m:e>
+                            <m:r>
+                              <a:rPr lang="fr-FR" sz="2400" i="1">
+                                <a:latin typeface="Cambria Math" panose="02040503050406030204" pitchFamily="18" charset="0"/>
+                              </a:rPr>
+                              <m:t>𝑇</m:t>
+                            </m:r>
+                          </m:e>
+                          <m:sub>
+                            <m:r>
+                              <a:rPr lang="fr-FR" sz="2400" i="1">
+                                <a:latin typeface="Cambria Math" panose="02040503050406030204" pitchFamily="18" charset="0"/>
+                              </a:rPr>
+                              <m:t>𝑅</m:t>
+                            </m:r>
+                            <m:r>
+                              <a:rPr lang="fr-FR" sz="2400" i="1">
+                                <a:latin typeface="Cambria Math" panose="02040503050406030204" pitchFamily="18" charset="0"/>
+                              </a:rPr>
+                              <m:t>−1,</m:t>
+                            </m:r>
+                            <m:r>
+                              <a:rPr lang="fr-FR" sz="2400" i="1">
+                                <a:latin typeface="Cambria Math" panose="02040503050406030204" pitchFamily="18" charset="0"/>
+                              </a:rPr>
+                              <m:t>𝑧</m:t>
+                            </m:r>
+                          </m:sub>
+                          <m:sup>
+                            <m:r>
+                              <a:rPr lang="fr-FR" sz="2400" i="1">
+                                <a:latin typeface="Cambria Math" panose="02040503050406030204" pitchFamily="18" charset="0"/>
+                              </a:rPr>
+                              <m:t>𝑡</m:t>
+                            </m:r>
+                          </m:sup>
+                        </m:sSubSup>
+                      </m:num>
+                      <m:den>
+                        <m:r>
+                          <m:rPr>
+                            <m:sty m:val="p"/>
+                          </m:rPr>
+                          <a:rPr lang="fr-FR" sz="2400">
+                            <a:latin typeface="Cambria Math" panose="02040503050406030204" pitchFamily="18" charset="0"/>
+                          </a:rPr>
+                          <m:t>Δ</m:t>
+                        </m:r>
+                        <m:r>
+                          <a:rPr lang="fr-FR" sz="2400" i="1">
+                            <a:latin typeface="Cambria Math" panose="02040503050406030204" pitchFamily="18" charset="0"/>
+                          </a:rPr>
+                          <m:t>𝑅</m:t>
+                        </m:r>
+                      </m:den>
+                    </m:f>
+                    <m:r>
+                      <a:rPr lang="fr-FR" sz="2400" b="0" i="1" smtClean="0">
+                        <a:latin typeface="Cambria Math" panose="02040503050406030204" pitchFamily="18" charset="0"/>
+                      </a:rPr>
+                      <m:t>=</m:t>
+                    </m:r>
+                    <m:sSub>
+                      <m:sSubPr>
+                        <m:ctrlPr>
+                          <a:rPr lang="fr-FR" sz="2400" i="1" smtClean="0">
+                            <a:solidFill>
+                              <a:srgbClr val="FF0000"/>
+                            </a:solidFill>
+                            <a:latin typeface="Cambria Math" panose="02040503050406030204" pitchFamily="18" charset="0"/>
+                          </a:rPr>
+                        </m:ctrlPr>
+                      </m:sSubPr>
+                      <m:e>
+                        <m:f>
+                          <m:fPr>
+                            <m:ctrlPr>
+                              <a:rPr lang="fr-FR" sz="2400" i="1">
+                                <a:latin typeface="Cambria Math" panose="02040503050406030204" pitchFamily="18" charset="0"/>
+                              </a:rPr>
+                            </m:ctrlPr>
+                          </m:fPr>
+                          <m:num>
+                            <m:r>
+                              <a:rPr lang="fr-FR" sz="2400" i="1">
+                                <a:latin typeface="Cambria Math" panose="02040503050406030204" pitchFamily="18" charset="0"/>
+                              </a:rPr>
+                              <m:t>1</m:t>
+                            </m:r>
+                          </m:num>
+                          <m:den>
+                            <m:r>
+                              <a:rPr lang="fr-FR" sz="2400" b="0" i="0" smtClean="0">
+                                <a:latin typeface="Cambria Math" panose="02040503050406030204" pitchFamily="18" charset="0"/>
+                              </a:rPr>
+                              <m:t>2</m:t>
+                            </m:r>
+                            <m:r>
+                              <m:rPr>
+                                <m:sty m:val="p"/>
+                              </m:rPr>
+                              <a:rPr lang="fr-FR" sz="2400">
+                                <a:latin typeface="Cambria Math" panose="02040503050406030204" pitchFamily="18" charset="0"/>
+                              </a:rPr>
+                              <m:t>Δ</m:t>
+                            </m:r>
+                            <m:r>
+                              <a:rPr lang="fr-FR" sz="2400" i="1">
+                                <a:latin typeface="Cambria Math" panose="02040503050406030204" pitchFamily="18" charset="0"/>
+                              </a:rPr>
+                              <m:t>𝑅</m:t>
+                            </m:r>
+                          </m:den>
+                        </m:f>
+                        <m:r>
+                          <a:rPr lang="fr-FR" sz="2400" b="0" i="1" smtClean="0">
+                            <a:solidFill>
+                              <a:schemeClr val="tx1"/>
+                            </a:solidFill>
+                            <a:latin typeface="Cambria Math" panose="02040503050406030204" pitchFamily="18" charset="0"/>
+                          </a:rPr>
+                          <m:t>(</m:t>
+                        </m:r>
+                        <m:r>
+                          <a:rPr lang="fr-FR" sz="2400" i="1" smtClean="0">
+                            <a:solidFill>
+                              <a:srgbClr val="FF0000"/>
+                            </a:solidFill>
+                            <a:latin typeface="Cambria Math" panose="02040503050406030204" pitchFamily="18" charset="0"/>
+                          </a:rPr>
+                          <m:t>𝑇</m:t>
+                        </m:r>
+                      </m:e>
+                      <m:sub>
+                        <m:r>
+                          <a:rPr lang="fr-FR" sz="2400" i="1">
+                            <a:solidFill>
+                              <a:srgbClr val="FF0000"/>
+                            </a:solidFill>
+                            <a:latin typeface="Cambria Math" panose="02040503050406030204" pitchFamily="18" charset="0"/>
+                          </a:rPr>
+                          <m:t>𝑖</m:t>
+                        </m:r>
+                      </m:sub>
+                    </m:sSub>
+                    <m:r>
+                      <a:rPr lang="fr-FR" sz="2400" i="1">
+                        <a:latin typeface="Cambria Math" panose="02040503050406030204" pitchFamily="18" charset="0"/>
+                      </a:rPr>
+                      <m:t>+</m:t>
+                    </m:r>
+                    <m:f>
+                      <m:fPr>
+                        <m:ctrlPr>
+                          <a:rPr lang="fr-FR" sz="2400" i="1">
+                            <a:latin typeface="Cambria Math" panose="02040503050406030204" pitchFamily="18" charset="0"/>
+                          </a:rPr>
+                        </m:ctrlPr>
+                      </m:fPr>
+                      <m:num>
+                        <m:r>
+                          <a:rPr lang="fr-FR" sz="2400" i="1">
+                            <a:latin typeface="Cambria Math" panose="02040503050406030204" pitchFamily="18" charset="0"/>
+                          </a:rPr>
+                          <m:t>𝜕</m:t>
+                        </m:r>
+                        <m:r>
+                          <a:rPr lang="fr-FR" sz="2400" i="1">
+                            <a:latin typeface="Cambria Math" panose="02040503050406030204" pitchFamily="18" charset="0"/>
+                          </a:rPr>
+                          <m:t>𝑇</m:t>
+                        </m:r>
+                      </m:num>
+                      <m:den>
+                        <m:r>
+                          <a:rPr lang="fr-FR" sz="2400" i="1">
+                            <a:latin typeface="Cambria Math" panose="02040503050406030204" pitchFamily="18" charset="0"/>
+                          </a:rPr>
+                          <m:t>𝜕</m:t>
+                        </m:r>
+                        <m:r>
+                          <a:rPr lang="fr-FR" sz="2400" b="0" i="1" smtClean="0">
+                            <a:latin typeface="Cambria Math" panose="02040503050406030204" pitchFamily="18" charset="0"/>
+                          </a:rPr>
+                          <m:t>𝑅</m:t>
+                        </m:r>
+                      </m:den>
+                    </m:f>
+                    <m:sSub>
+                      <m:sSubPr>
+                        <m:ctrlPr>
+                          <a:rPr lang="fr-FR" sz="2400" i="1" smtClean="0">
+                            <a:latin typeface="Cambria Math" panose="02040503050406030204" pitchFamily="18" charset="0"/>
+                          </a:rPr>
+                        </m:ctrlPr>
+                      </m:sSubPr>
+                      <m:e>
+                        <m:d>
+                          <m:dPr>
+                            <m:begChr m:val=""/>
+                            <m:endChr m:val="|"/>
+                            <m:ctrlPr>
+                              <a:rPr lang="fr-FR" sz="2400" i="1">
+                                <a:latin typeface="Cambria Math" panose="02040503050406030204" pitchFamily="18" charset="0"/>
+                              </a:rPr>
+                            </m:ctrlPr>
+                          </m:dPr>
+                          <m:e>
+                            <m:r>
+                              <a:rPr lang="fr-FR" sz="2400" i="1">
+                                <a:latin typeface="Cambria Math" panose="02040503050406030204" pitchFamily="18" charset="0"/>
+                              </a:rPr>
+                              <m:t>​</m:t>
+                            </m:r>
+                          </m:e>
+                        </m:d>
+                      </m:e>
+                      <m:sub>
+                        <m:r>
+                          <a:rPr lang="fr-FR" sz="2400" b="0" i="1" smtClean="0">
+                            <a:latin typeface="Cambria Math" panose="02040503050406030204" pitchFamily="18" charset="0"/>
+                          </a:rPr>
+                          <m:t>𝑡</m:t>
+                        </m:r>
+                        <m:r>
+                          <a:rPr lang="fr-FR" sz="2400" b="0" i="1" smtClean="0">
+                            <a:latin typeface="Cambria Math" panose="02040503050406030204" pitchFamily="18" charset="0"/>
+                          </a:rPr>
+                          <m:t>,</m:t>
+                        </m:r>
+                        <m:r>
+                          <a:rPr lang="fr-FR" sz="2400" b="0" i="1" smtClean="0">
+                            <a:latin typeface="Cambria Math" panose="02040503050406030204" pitchFamily="18" charset="0"/>
+                          </a:rPr>
+                          <m:t>𝑅</m:t>
+                        </m:r>
+                        <m:r>
+                          <a:rPr lang="fr-FR" sz="2400" b="0" i="1" smtClean="0">
+                            <a:latin typeface="Cambria Math" panose="02040503050406030204" pitchFamily="18" charset="0"/>
+                          </a:rPr>
+                          <m:t>,</m:t>
+                        </m:r>
+                        <m:r>
+                          <a:rPr lang="fr-FR" sz="2400" b="0" i="1" smtClean="0">
+                            <a:latin typeface="Cambria Math" panose="02040503050406030204" pitchFamily="18" charset="0"/>
+                          </a:rPr>
+                          <m:t>𝑧</m:t>
+                        </m:r>
+                      </m:sub>
+                    </m:sSub>
+                    <m:r>
+                      <m:rPr>
+                        <m:sty m:val="p"/>
+                      </m:rPr>
+                      <a:rPr lang="fr-FR" sz="2400" smtClean="0">
+                        <a:latin typeface="Cambria Math" panose="02040503050406030204" pitchFamily="18" charset="0"/>
+                      </a:rPr>
+                      <m:t>Δ</m:t>
+                    </m:r>
+                    <m:r>
+                      <a:rPr lang="fr-FR" sz="2400" b="0" i="1" smtClean="0">
+                        <a:latin typeface="Cambria Math" panose="02040503050406030204" pitchFamily="18" charset="0"/>
+                      </a:rPr>
+                      <m:t>𝑅</m:t>
+                    </m:r>
+                    <m:r>
+                      <a:rPr lang="fr-FR" sz="2400" b="0" i="1" smtClean="0">
+                        <a:solidFill>
+                          <a:srgbClr val="FF0000"/>
+                        </a:solidFill>
+                        <a:latin typeface="Cambria Math" panose="02040503050406030204" pitchFamily="18" charset="0"/>
+                      </a:rPr>
+                      <m:t>+</m:t>
+                    </m:r>
+                    <m:f>
+                      <m:fPr>
+                        <m:ctrlPr>
+                          <a:rPr lang="fr-FR" sz="2400" i="1">
+                            <a:solidFill>
+                              <a:srgbClr val="FF0000"/>
+                            </a:solidFill>
+                            <a:latin typeface="Cambria Math" panose="02040503050406030204" pitchFamily="18" charset="0"/>
+                          </a:rPr>
+                        </m:ctrlPr>
+                      </m:fPr>
+                      <m:num>
+                        <m:sSup>
+                          <m:sSupPr>
+                            <m:ctrlPr>
+                              <a:rPr lang="fr-FR" sz="2400" i="1">
+                                <a:solidFill>
+                                  <a:srgbClr val="FF0000"/>
+                                </a:solidFill>
+                                <a:latin typeface="Cambria Math" panose="02040503050406030204" pitchFamily="18" charset="0"/>
+                              </a:rPr>
+                            </m:ctrlPr>
+                          </m:sSupPr>
+                          <m:e>
+                            <m:r>
+                              <a:rPr lang="fr-FR" sz="2400" i="1">
+                                <a:solidFill>
+                                  <a:srgbClr val="FF0000"/>
+                                </a:solidFill>
+                                <a:latin typeface="Cambria Math" panose="02040503050406030204" pitchFamily="18" charset="0"/>
+                              </a:rPr>
+                              <m:t>𝜕</m:t>
+                            </m:r>
+                          </m:e>
+                          <m:sup>
+                            <m:r>
+                              <a:rPr lang="fr-FR" sz="2400" i="1">
+                                <a:solidFill>
+                                  <a:srgbClr val="FF0000"/>
+                                </a:solidFill>
+                                <a:latin typeface="Cambria Math" panose="02040503050406030204" pitchFamily="18" charset="0"/>
+                              </a:rPr>
+                              <m:t>2</m:t>
+                            </m:r>
+                          </m:sup>
+                        </m:sSup>
+                        <m:r>
+                          <a:rPr lang="fr-FR" sz="2400" i="1">
+                            <a:solidFill>
+                              <a:srgbClr val="FF0000"/>
+                            </a:solidFill>
+                            <a:latin typeface="Cambria Math" panose="02040503050406030204" pitchFamily="18" charset="0"/>
+                          </a:rPr>
+                          <m:t>𝑇</m:t>
+                        </m:r>
+                      </m:num>
+                      <m:den>
+                        <m:r>
+                          <a:rPr lang="fr-FR" sz="2400" i="1">
+                            <a:solidFill>
+                              <a:srgbClr val="FF0000"/>
+                            </a:solidFill>
+                            <a:latin typeface="Cambria Math" panose="02040503050406030204" pitchFamily="18" charset="0"/>
+                          </a:rPr>
+                          <m:t>𝜕</m:t>
+                        </m:r>
+                        <m:sSup>
+                          <m:sSupPr>
+                            <m:ctrlPr>
+                              <a:rPr lang="fr-FR" sz="2400" i="1">
+                                <a:solidFill>
+                                  <a:srgbClr val="FF0000"/>
+                                </a:solidFill>
+                                <a:latin typeface="Cambria Math" panose="02040503050406030204" pitchFamily="18" charset="0"/>
+                              </a:rPr>
+                            </m:ctrlPr>
+                          </m:sSupPr>
+                          <m:e>
+                            <m:r>
+                              <a:rPr lang="fr-FR" sz="2400" b="0" i="1" smtClean="0">
+                                <a:solidFill>
+                                  <a:srgbClr val="FF0000"/>
+                                </a:solidFill>
+                                <a:latin typeface="Cambria Math" panose="02040503050406030204" pitchFamily="18" charset="0"/>
+                              </a:rPr>
+                              <m:t>𝑅</m:t>
+                            </m:r>
+                          </m:e>
+                          <m:sup>
+                            <m:r>
+                              <a:rPr lang="fr-FR" sz="2400" i="1">
+                                <a:solidFill>
+                                  <a:srgbClr val="FF0000"/>
+                                </a:solidFill>
+                                <a:latin typeface="Cambria Math" panose="02040503050406030204" pitchFamily="18" charset="0"/>
+                              </a:rPr>
+                              <m:t>2</m:t>
+                            </m:r>
+                          </m:sup>
+                        </m:sSup>
+                      </m:den>
+                    </m:f>
+                    <m:sSub>
+                      <m:sSubPr>
+                        <m:ctrlPr>
+                          <a:rPr lang="fr-FR" sz="2400" i="1">
+                            <a:solidFill>
+                              <a:srgbClr val="FF0000"/>
+                            </a:solidFill>
+                            <a:latin typeface="Cambria Math" panose="02040503050406030204" pitchFamily="18" charset="0"/>
+                          </a:rPr>
+                        </m:ctrlPr>
+                      </m:sSubPr>
+                      <m:e>
+                        <m:d>
+                          <m:dPr>
+                            <m:begChr m:val=""/>
+                            <m:endChr m:val="|"/>
+                            <m:ctrlPr>
+                              <a:rPr lang="fr-FR" sz="2400" i="1">
+                                <a:solidFill>
+                                  <a:srgbClr val="FF0000"/>
+                                </a:solidFill>
+                                <a:latin typeface="Cambria Math" panose="02040503050406030204" pitchFamily="18" charset="0"/>
+                              </a:rPr>
+                            </m:ctrlPr>
+                          </m:dPr>
+                          <m:e>
+                            <m:r>
+                              <a:rPr lang="fr-FR" sz="2400" i="1">
+                                <a:solidFill>
+                                  <a:srgbClr val="FF0000"/>
+                                </a:solidFill>
+                                <a:latin typeface="Cambria Math" panose="02040503050406030204" pitchFamily="18" charset="0"/>
+                              </a:rPr>
+                              <m:t>​</m:t>
+                            </m:r>
+                          </m:e>
+                        </m:d>
+                      </m:e>
+                      <m:sub>
+                        <m:r>
+                          <a:rPr lang="fr-FR" sz="2400" i="1">
+                            <a:solidFill>
+                              <a:srgbClr val="FF0000"/>
+                            </a:solidFill>
+                            <a:latin typeface="Cambria Math" panose="02040503050406030204" pitchFamily="18" charset="0"/>
+                          </a:rPr>
+                          <m:t>𝑡</m:t>
+                        </m:r>
+                        <m:r>
+                          <a:rPr lang="fr-FR" sz="2400" i="1">
+                            <a:solidFill>
+                              <a:srgbClr val="FF0000"/>
+                            </a:solidFill>
+                            <a:latin typeface="Cambria Math" panose="02040503050406030204" pitchFamily="18" charset="0"/>
+                          </a:rPr>
+                          <m:t>,</m:t>
+                        </m:r>
+                        <m:r>
+                          <a:rPr lang="fr-FR" sz="2400" i="1">
+                            <a:solidFill>
+                              <a:srgbClr val="FF0000"/>
+                            </a:solidFill>
+                            <a:latin typeface="Cambria Math" panose="02040503050406030204" pitchFamily="18" charset="0"/>
+                          </a:rPr>
+                          <m:t>𝑅</m:t>
+                        </m:r>
+                        <m:r>
+                          <a:rPr lang="fr-FR" sz="2400" i="1">
+                            <a:solidFill>
+                              <a:srgbClr val="FF0000"/>
+                            </a:solidFill>
+                            <a:latin typeface="Cambria Math" panose="02040503050406030204" pitchFamily="18" charset="0"/>
+                          </a:rPr>
+                          <m:t>,</m:t>
+                        </m:r>
+                        <m:r>
+                          <a:rPr lang="fr-FR" sz="2400" i="1">
+                            <a:solidFill>
+                              <a:srgbClr val="FF0000"/>
+                            </a:solidFill>
+                            <a:latin typeface="Cambria Math" panose="02040503050406030204" pitchFamily="18" charset="0"/>
+                          </a:rPr>
+                          <m:t>𝑧</m:t>
+                        </m:r>
+                      </m:sub>
+                    </m:sSub>
+                    <m:f>
+                      <m:fPr>
+                        <m:ctrlPr>
+                          <a:rPr lang="fr-FR" sz="2400" i="1">
+                            <a:solidFill>
+                              <a:srgbClr val="FF0000"/>
+                            </a:solidFill>
+                            <a:latin typeface="Cambria Math" panose="02040503050406030204" pitchFamily="18" charset="0"/>
+                          </a:rPr>
+                        </m:ctrlPr>
+                      </m:fPr>
+                      <m:num>
+                        <m:r>
+                          <m:rPr>
+                            <m:sty m:val="p"/>
+                          </m:rPr>
+                          <a:rPr lang="fr-FR" sz="2400">
+                            <a:solidFill>
+                              <a:srgbClr val="FF0000"/>
+                            </a:solidFill>
+                            <a:latin typeface="Cambria Math" panose="02040503050406030204" pitchFamily="18" charset="0"/>
+                          </a:rPr>
+                          <m:t>Δ</m:t>
+                        </m:r>
+                        <m:sSup>
+                          <m:sSupPr>
+                            <m:ctrlPr>
+                              <a:rPr lang="fr-FR" sz="2400" i="1">
+                                <a:solidFill>
+                                  <a:srgbClr val="FF0000"/>
+                                </a:solidFill>
+                                <a:latin typeface="Cambria Math" panose="02040503050406030204" pitchFamily="18" charset="0"/>
+                              </a:rPr>
+                            </m:ctrlPr>
+                          </m:sSupPr>
+                          <m:e>
+                            <m:r>
+                              <a:rPr lang="fr-FR" sz="2400" b="0" i="1" smtClean="0">
+                                <a:solidFill>
+                                  <a:srgbClr val="FF0000"/>
+                                </a:solidFill>
+                                <a:latin typeface="Cambria Math" panose="02040503050406030204" pitchFamily="18" charset="0"/>
+                              </a:rPr>
+                              <m:t>𝑅</m:t>
+                            </m:r>
+                          </m:e>
+                          <m:sup>
+                            <m:r>
+                              <a:rPr lang="fr-FR" sz="2400" i="1">
+                                <a:solidFill>
+                                  <a:srgbClr val="FF0000"/>
+                                </a:solidFill>
+                                <a:latin typeface="Cambria Math" panose="02040503050406030204" pitchFamily="18" charset="0"/>
+                              </a:rPr>
+                              <m:t>2</m:t>
+                            </m:r>
+                          </m:sup>
+                        </m:sSup>
+                      </m:num>
+                      <m:den>
+                        <m:r>
+                          <a:rPr lang="fr-FR" sz="2400" i="1">
+                            <a:solidFill>
+                              <a:srgbClr val="FF0000"/>
+                            </a:solidFill>
+                            <a:latin typeface="Cambria Math" panose="02040503050406030204" pitchFamily="18" charset="0"/>
+                          </a:rPr>
+                          <m:t>2!</m:t>
+                        </m:r>
+                      </m:den>
+                    </m:f>
+                    <m:r>
+                      <a:rPr lang="fr-FR" sz="2400" b="0" i="1" smtClean="0">
+                        <a:latin typeface="Cambria Math" panose="02040503050406030204" pitchFamily="18" charset="0"/>
+                      </a:rPr>
+                      <m:t>+</m:t>
+                    </m:r>
+                    <m:f>
+                      <m:fPr>
+                        <m:ctrlPr>
+                          <a:rPr lang="fr-FR" sz="2400" i="1">
+                            <a:latin typeface="Cambria Math" panose="02040503050406030204" pitchFamily="18" charset="0"/>
+                          </a:rPr>
+                        </m:ctrlPr>
+                      </m:fPr>
+                      <m:num>
+                        <m:sSup>
+                          <m:sSupPr>
+                            <m:ctrlPr>
+                              <a:rPr lang="fr-FR" sz="2400" i="1">
+                                <a:latin typeface="Cambria Math" panose="02040503050406030204" pitchFamily="18" charset="0"/>
+                              </a:rPr>
+                            </m:ctrlPr>
+                          </m:sSupPr>
+                          <m:e>
+                            <m:r>
+                              <a:rPr lang="fr-FR" sz="2400" i="1">
+                                <a:latin typeface="Cambria Math" panose="02040503050406030204" pitchFamily="18" charset="0"/>
+                              </a:rPr>
+                              <m:t>𝜕</m:t>
+                            </m:r>
+                          </m:e>
+                          <m:sup>
+                            <m:r>
+                              <a:rPr lang="fr-FR" sz="2400" b="0" i="1" smtClean="0">
+                                <a:latin typeface="Cambria Math" panose="02040503050406030204" pitchFamily="18" charset="0"/>
+                              </a:rPr>
+                              <m:t>3</m:t>
+                            </m:r>
+                          </m:sup>
+                        </m:sSup>
+                        <m:r>
+                          <a:rPr lang="fr-FR" sz="2400" i="1">
+                            <a:latin typeface="Cambria Math" panose="02040503050406030204" pitchFamily="18" charset="0"/>
+                          </a:rPr>
+                          <m:t>𝑇</m:t>
+                        </m:r>
+                      </m:num>
+                      <m:den>
+                        <m:r>
+                          <a:rPr lang="fr-FR" sz="2400" i="1">
+                            <a:latin typeface="Cambria Math" panose="02040503050406030204" pitchFamily="18" charset="0"/>
+                          </a:rPr>
+                          <m:t>𝜕</m:t>
+                        </m:r>
+                        <m:sSup>
+                          <m:sSupPr>
+                            <m:ctrlPr>
+                              <a:rPr lang="fr-FR" sz="2400" i="1">
+                                <a:latin typeface="Cambria Math" panose="02040503050406030204" pitchFamily="18" charset="0"/>
+                              </a:rPr>
+                            </m:ctrlPr>
+                          </m:sSupPr>
+                          <m:e>
+                            <m:r>
+                              <a:rPr lang="fr-FR" sz="2400" b="0" i="1" smtClean="0">
+                                <a:latin typeface="Cambria Math" panose="02040503050406030204" pitchFamily="18" charset="0"/>
+                              </a:rPr>
+                              <m:t>𝑅</m:t>
+                            </m:r>
+                          </m:e>
+                          <m:sup>
+                            <m:r>
+                              <a:rPr lang="fr-FR" sz="2400" i="1">
+                                <a:latin typeface="Cambria Math" panose="02040503050406030204" pitchFamily="18" charset="0"/>
+                              </a:rPr>
+                              <m:t>3</m:t>
+                            </m:r>
+                          </m:sup>
+                        </m:sSup>
+                      </m:den>
+                    </m:f>
+                    <m:sSub>
+                      <m:sSubPr>
+                        <m:ctrlPr>
+                          <a:rPr lang="fr-FR" sz="2400" i="1">
+                            <a:latin typeface="Cambria Math" panose="02040503050406030204" pitchFamily="18" charset="0"/>
+                          </a:rPr>
+                        </m:ctrlPr>
+                      </m:sSubPr>
+                      <m:e>
+                        <m:d>
+                          <m:dPr>
+                            <m:begChr m:val=""/>
+                            <m:endChr m:val="|"/>
+                            <m:ctrlPr>
+                              <a:rPr lang="fr-FR" sz="2400" i="1">
+                                <a:latin typeface="Cambria Math" panose="02040503050406030204" pitchFamily="18" charset="0"/>
+                              </a:rPr>
+                            </m:ctrlPr>
+                          </m:dPr>
+                          <m:e>
+                            <m:r>
+                              <a:rPr lang="fr-FR" sz="2400" i="1">
+                                <a:latin typeface="Cambria Math" panose="02040503050406030204" pitchFamily="18" charset="0"/>
+                              </a:rPr>
+                              <m:t>​</m:t>
+                            </m:r>
+                          </m:e>
+                        </m:d>
+                      </m:e>
+                      <m:sub>
+                        <m:r>
+                          <a:rPr lang="fr-FR" sz="2400" i="1">
+                            <a:latin typeface="Cambria Math" panose="02040503050406030204" pitchFamily="18" charset="0"/>
+                          </a:rPr>
+                          <m:t>𝑡</m:t>
+                        </m:r>
+                        <m:r>
+                          <a:rPr lang="fr-FR" sz="2400" i="1">
+                            <a:latin typeface="Cambria Math" panose="02040503050406030204" pitchFamily="18" charset="0"/>
+                          </a:rPr>
+                          <m:t>,</m:t>
+                        </m:r>
+                        <m:r>
+                          <a:rPr lang="fr-FR" sz="2400" i="1">
+                            <a:latin typeface="Cambria Math" panose="02040503050406030204" pitchFamily="18" charset="0"/>
+                          </a:rPr>
+                          <m:t>𝑅</m:t>
+                        </m:r>
+                        <m:r>
+                          <a:rPr lang="fr-FR" sz="2400" i="1">
+                            <a:latin typeface="Cambria Math" panose="02040503050406030204" pitchFamily="18" charset="0"/>
+                          </a:rPr>
+                          <m:t>,</m:t>
+                        </m:r>
+                        <m:r>
+                          <a:rPr lang="fr-FR" sz="2400" i="1">
+                            <a:latin typeface="Cambria Math" panose="02040503050406030204" pitchFamily="18" charset="0"/>
+                          </a:rPr>
+                          <m:t>𝑧</m:t>
+                        </m:r>
+                      </m:sub>
+                    </m:sSub>
+                    <m:f>
+                      <m:fPr>
+                        <m:ctrlPr>
+                          <a:rPr lang="fr-FR" sz="2400" i="1">
+                            <a:latin typeface="Cambria Math" panose="02040503050406030204" pitchFamily="18" charset="0"/>
+                          </a:rPr>
+                        </m:ctrlPr>
+                      </m:fPr>
+                      <m:num>
+                        <m:r>
+                          <m:rPr>
+                            <m:sty m:val="p"/>
+                          </m:rPr>
+                          <a:rPr lang="fr-FR" sz="2400">
+                            <a:latin typeface="Cambria Math" panose="02040503050406030204" pitchFamily="18" charset="0"/>
+                          </a:rPr>
+                          <m:t>Δ</m:t>
+                        </m:r>
+                        <m:sSup>
+                          <m:sSupPr>
+                            <m:ctrlPr>
+                              <a:rPr lang="fr-FR" sz="2400" i="1">
+                                <a:latin typeface="Cambria Math" panose="02040503050406030204" pitchFamily="18" charset="0"/>
+                              </a:rPr>
+                            </m:ctrlPr>
+                          </m:sSupPr>
+                          <m:e>
+                            <m:r>
+                              <a:rPr lang="fr-FR" sz="2400" b="0" i="1" smtClean="0">
+                                <a:latin typeface="Cambria Math" panose="02040503050406030204" pitchFamily="18" charset="0"/>
+                              </a:rPr>
+                              <m:t>𝑅</m:t>
+                            </m:r>
+                          </m:e>
+                          <m:sup>
+                            <m:r>
+                              <a:rPr lang="fr-FR" sz="2400" i="1">
+                                <a:latin typeface="Cambria Math" panose="02040503050406030204" pitchFamily="18" charset="0"/>
+                              </a:rPr>
+                              <m:t>3</m:t>
+                            </m:r>
+                          </m:sup>
+                        </m:sSup>
+                      </m:num>
+                      <m:den>
+                        <m:r>
+                          <a:rPr lang="fr-FR" sz="2400" i="1">
+                            <a:latin typeface="Cambria Math" panose="02040503050406030204" pitchFamily="18" charset="0"/>
+                          </a:rPr>
+                          <m:t>3!</m:t>
+                        </m:r>
+                      </m:den>
+                    </m:f>
+                    <m:r>
+                      <a:rPr lang="fr-FR" sz="2400" b="0" i="1" smtClean="0">
+                        <a:latin typeface="Cambria Math" panose="02040503050406030204" pitchFamily="18" charset="0"/>
+                      </a:rPr>
+                      <m:t>+</m:t>
+                    </m:r>
+                    <m:r>
+                      <a:rPr lang="fr-FR" sz="2400" b="0" i="1" smtClean="0">
+                        <a:latin typeface="Cambria Math" panose="02040503050406030204" pitchFamily="18" charset="0"/>
+                      </a:rPr>
+                      <m:t>𝑜</m:t>
+                    </m:r>
+                    <m:d>
+                      <m:dPr>
+                        <m:ctrlPr>
+                          <a:rPr lang="fr-FR" sz="2400" b="0" i="1" smtClean="0">
+                            <a:latin typeface="Cambria Math" panose="02040503050406030204" pitchFamily="18" charset="0"/>
+                          </a:rPr>
+                        </m:ctrlPr>
+                      </m:dPr>
+                      <m:e>
+                        <m:r>
+                          <m:rPr>
+                            <m:sty m:val="p"/>
+                          </m:rPr>
+                          <a:rPr lang="fr-FR" sz="2400">
+                            <a:latin typeface="Cambria Math" panose="02040503050406030204" pitchFamily="18" charset="0"/>
+                          </a:rPr>
+                          <m:t>Δ</m:t>
+                        </m:r>
+                        <m:sSup>
+                          <m:sSupPr>
+                            <m:ctrlPr>
+                              <a:rPr lang="fr-FR" sz="2400" i="1">
+                                <a:latin typeface="Cambria Math" panose="02040503050406030204" pitchFamily="18" charset="0"/>
+                              </a:rPr>
+                            </m:ctrlPr>
+                          </m:sSupPr>
+                          <m:e>
+                            <m:r>
+                              <a:rPr lang="fr-FR" sz="2400" b="0" i="1" smtClean="0">
+                                <a:latin typeface="Cambria Math" panose="02040503050406030204" pitchFamily="18" charset="0"/>
+                              </a:rPr>
+                              <m:t>𝑅</m:t>
+                            </m:r>
+                          </m:e>
+                          <m:sup>
+                            <m:r>
+                              <a:rPr lang="fr-FR" sz="2400" b="0" i="1" smtClean="0">
+                                <a:latin typeface="Cambria Math" panose="02040503050406030204" pitchFamily="18" charset="0"/>
+                              </a:rPr>
+                              <m:t>3</m:t>
+                            </m:r>
+                          </m:sup>
+                        </m:sSup>
+                      </m:e>
+                    </m:d>
+                  </m:oMath>
+                </a14:m>
+                <a:endParaRPr lang="fr-FR" sz="2400" b="0" i="1" dirty="0">
+                  <a:latin typeface="Cambria Math" panose="02040503050406030204" pitchFamily="18" charset="0"/>
+                </a:endParaRPr>
+              </a:p>
+              <a:p>
+                <a:pPr marL="0" indent="0">
+                  <a:buNone/>
+                </a:pPr>
+                <a:r>
+                  <a:rPr lang="fr-FR" sz="2400" b="0" dirty="0">
+                    <a:solidFill>
+                      <a:srgbClr val="FF0000"/>
+                    </a:solidFill>
+                  </a:rPr>
+                  <a:t>		           </a:t>
+                </a:r>
+                <a14:m>
+                  <m:oMath xmlns:m="http://schemas.openxmlformats.org/officeDocument/2006/math">
+                    <m:r>
+                      <a:rPr lang="fr-FR" sz="2400" b="0" i="1" smtClean="0">
+                        <a:solidFill>
+                          <a:srgbClr val="FF0000"/>
+                        </a:solidFill>
+                        <a:latin typeface="Cambria Math" panose="02040503050406030204" pitchFamily="18" charset="0"/>
+                      </a:rPr>
+                      <m:t>−</m:t>
+                    </m:r>
+                    <m:sSub>
+                      <m:sSubPr>
+                        <m:ctrlPr>
+                          <a:rPr lang="fr-FR" sz="2400" b="0" i="1" smtClean="0">
+                            <a:solidFill>
+                              <a:srgbClr val="FF0000"/>
+                            </a:solidFill>
+                            <a:latin typeface="Cambria Math" panose="02040503050406030204" pitchFamily="18" charset="0"/>
+                          </a:rPr>
+                        </m:ctrlPr>
+                      </m:sSubPr>
+                      <m:e>
+                        <m:r>
+                          <a:rPr lang="fr-FR" sz="2400" b="0" i="1" smtClean="0">
+                            <a:solidFill>
+                              <a:srgbClr val="FF0000"/>
+                            </a:solidFill>
+                            <a:latin typeface="Cambria Math" panose="02040503050406030204" pitchFamily="18" charset="0"/>
+                          </a:rPr>
+                          <m:t>𝑇</m:t>
+                        </m:r>
+                      </m:e>
+                      <m:sub>
+                        <m:r>
+                          <a:rPr lang="fr-FR" sz="2400" b="0" i="1" smtClean="0">
+                            <a:solidFill>
+                              <a:srgbClr val="FF0000"/>
+                            </a:solidFill>
+                            <a:latin typeface="Cambria Math" panose="02040503050406030204" pitchFamily="18" charset="0"/>
+                          </a:rPr>
+                          <m:t>𝑖</m:t>
+                        </m:r>
+                      </m:sub>
+                    </m:sSub>
+                  </m:oMath>
+                </a14:m>
+                <a:r>
+                  <a:rPr lang="fr-FR" sz="2400" dirty="0"/>
+                  <a:t> </a:t>
+                </a:r>
+                <a14:m>
+                  <m:oMath xmlns:m="http://schemas.openxmlformats.org/officeDocument/2006/math">
+                    <m:r>
+                      <a:rPr lang="fr-FR" sz="2400" i="1">
+                        <a:latin typeface="Cambria Math" panose="02040503050406030204" pitchFamily="18" charset="0"/>
+                      </a:rPr>
+                      <m:t>+</m:t>
+                    </m:r>
+                    <m:f>
+                      <m:fPr>
+                        <m:ctrlPr>
+                          <a:rPr lang="fr-FR" sz="2400" i="1">
+                            <a:latin typeface="Cambria Math" panose="02040503050406030204" pitchFamily="18" charset="0"/>
+                          </a:rPr>
+                        </m:ctrlPr>
+                      </m:fPr>
+                      <m:num>
+                        <m:r>
+                          <a:rPr lang="fr-FR" sz="2400" i="1">
+                            <a:latin typeface="Cambria Math" panose="02040503050406030204" pitchFamily="18" charset="0"/>
+                          </a:rPr>
+                          <m:t>𝜕</m:t>
+                        </m:r>
+                        <m:r>
+                          <a:rPr lang="fr-FR" sz="2400" i="1">
+                            <a:latin typeface="Cambria Math" panose="02040503050406030204" pitchFamily="18" charset="0"/>
+                          </a:rPr>
+                          <m:t>𝑇</m:t>
+                        </m:r>
+                      </m:num>
+                      <m:den>
+                        <m:r>
+                          <a:rPr lang="fr-FR" sz="2400" i="1">
+                            <a:latin typeface="Cambria Math" panose="02040503050406030204" pitchFamily="18" charset="0"/>
+                          </a:rPr>
+                          <m:t>𝜕</m:t>
+                        </m:r>
+                        <m:r>
+                          <a:rPr lang="fr-FR" sz="2400" b="0" i="1" smtClean="0">
+                            <a:latin typeface="Cambria Math" panose="02040503050406030204" pitchFamily="18" charset="0"/>
+                          </a:rPr>
+                          <m:t>𝑅</m:t>
+                        </m:r>
+                      </m:den>
+                    </m:f>
+                    <m:sSub>
+                      <m:sSubPr>
+                        <m:ctrlPr>
+                          <a:rPr lang="fr-FR" sz="2400" i="1" smtClean="0">
+                            <a:latin typeface="Cambria Math" panose="02040503050406030204" pitchFamily="18" charset="0"/>
+                          </a:rPr>
+                        </m:ctrlPr>
+                      </m:sSubPr>
+                      <m:e>
+                        <m:d>
+                          <m:dPr>
+                            <m:begChr m:val=""/>
+                            <m:endChr m:val="|"/>
+                            <m:ctrlPr>
+                              <a:rPr lang="fr-FR" sz="2400" i="1">
+                                <a:latin typeface="Cambria Math" panose="02040503050406030204" pitchFamily="18" charset="0"/>
+                              </a:rPr>
+                            </m:ctrlPr>
+                          </m:dPr>
+                          <m:e>
+                            <m:r>
+                              <a:rPr lang="fr-FR" sz="2400" i="1">
+                                <a:latin typeface="Cambria Math" panose="02040503050406030204" pitchFamily="18" charset="0"/>
+                              </a:rPr>
+                              <m:t>​</m:t>
+                            </m:r>
+                          </m:e>
+                        </m:d>
+                      </m:e>
+                      <m:sub>
+                        <m:r>
+                          <a:rPr lang="fr-FR" sz="2400" b="0" i="1" smtClean="0">
+                            <a:latin typeface="Cambria Math" panose="02040503050406030204" pitchFamily="18" charset="0"/>
+                          </a:rPr>
+                          <m:t>𝑡</m:t>
+                        </m:r>
+                        <m:r>
+                          <a:rPr lang="fr-FR" sz="2400" b="0" i="1" smtClean="0">
+                            <a:latin typeface="Cambria Math" panose="02040503050406030204" pitchFamily="18" charset="0"/>
+                          </a:rPr>
+                          <m:t>,</m:t>
+                        </m:r>
+                        <m:r>
+                          <a:rPr lang="fr-FR" sz="2400" b="0" i="1" smtClean="0">
+                            <a:latin typeface="Cambria Math" panose="02040503050406030204" pitchFamily="18" charset="0"/>
+                          </a:rPr>
+                          <m:t>𝑅</m:t>
+                        </m:r>
+                        <m:r>
+                          <a:rPr lang="fr-FR" sz="2400" b="0" i="1" smtClean="0">
+                            <a:latin typeface="Cambria Math" panose="02040503050406030204" pitchFamily="18" charset="0"/>
+                          </a:rPr>
+                          <m:t>,</m:t>
+                        </m:r>
+                        <m:r>
+                          <a:rPr lang="fr-FR" sz="2400" b="0" i="1" smtClean="0">
+                            <a:latin typeface="Cambria Math" panose="02040503050406030204" pitchFamily="18" charset="0"/>
+                          </a:rPr>
+                          <m:t>𝑧</m:t>
+                        </m:r>
+                      </m:sub>
+                    </m:sSub>
+                    <m:r>
+                      <m:rPr>
+                        <m:sty m:val="p"/>
+                      </m:rPr>
+                      <a:rPr lang="fr-FR" sz="2400">
+                        <a:latin typeface="Cambria Math" panose="02040503050406030204" pitchFamily="18" charset="0"/>
+                      </a:rPr>
+                      <m:t>Δ</m:t>
+                    </m:r>
+                    <m:r>
+                      <a:rPr lang="fr-FR" sz="2400" b="0" i="1" smtClean="0">
+                        <a:latin typeface="Cambria Math" panose="02040503050406030204" pitchFamily="18" charset="0"/>
+                      </a:rPr>
+                      <m:t>𝑅</m:t>
+                    </m:r>
+                    <m:r>
+                      <a:rPr lang="fr-FR" sz="2400" b="0" i="1" smtClean="0">
+                        <a:solidFill>
+                          <a:srgbClr val="FF0000"/>
+                        </a:solidFill>
+                        <a:latin typeface="Cambria Math" panose="02040503050406030204" pitchFamily="18" charset="0"/>
+                      </a:rPr>
+                      <m:t>−</m:t>
+                    </m:r>
+                    <m:f>
+                      <m:fPr>
+                        <m:ctrlPr>
+                          <a:rPr lang="fr-FR" sz="2400" i="1">
+                            <a:solidFill>
+                              <a:srgbClr val="FF0000"/>
+                            </a:solidFill>
+                            <a:latin typeface="Cambria Math" panose="02040503050406030204" pitchFamily="18" charset="0"/>
+                          </a:rPr>
+                        </m:ctrlPr>
+                      </m:fPr>
+                      <m:num>
+                        <m:sSup>
+                          <m:sSupPr>
+                            <m:ctrlPr>
+                              <a:rPr lang="fr-FR" sz="2400" i="1">
+                                <a:solidFill>
+                                  <a:srgbClr val="FF0000"/>
+                                </a:solidFill>
+                                <a:latin typeface="Cambria Math" panose="02040503050406030204" pitchFamily="18" charset="0"/>
+                              </a:rPr>
+                            </m:ctrlPr>
+                          </m:sSupPr>
+                          <m:e>
+                            <m:r>
+                              <a:rPr lang="fr-FR" sz="2400" i="1">
+                                <a:solidFill>
+                                  <a:srgbClr val="FF0000"/>
+                                </a:solidFill>
+                                <a:latin typeface="Cambria Math" panose="02040503050406030204" pitchFamily="18" charset="0"/>
+                              </a:rPr>
+                              <m:t>𝜕</m:t>
+                            </m:r>
+                          </m:e>
+                          <m:sup>
+                            <m:r>
+                              <a:rPr lang="fr-FR" sz="2400" i="1">
+                                <a:solidFill>
+                                  <a:srgbClr val="FF0000"/>
+                                </a:solidFill>
+                                <a:latin typeface="Cambria Math" panose="02040503050406030204" pitchFamily="18" charset="0"/>
+                              </a:rPr>
+                              <m:t>2</m:t>
+                            </m:r>
+                          </m:sup>
+                        </m:sSup>
+                        <m:r>
+                          <a:rPr lang="fr-FR" sz="2400" i="1">
+                            <a:solidFill>
+                              <a:srgbClr val="FF0000"/>
+                            </a:solidFill>
+                            <a:latin typeface="Cambria Math" panose="02040503050406030204" pitchFamily="18" charset="0"/>
+                          </a:rPr>
+                          <m:t>𝑇</m:t>
+                        </m:r>
+                      </m:num>
+                      <m:den>
+                        <m:r>
+                          <a:rPr lang="fr-FR" sz="2400" i="1">
+                            <a:solidFill>
+                              <a:srgbClr val="FF0000"/>
+                            </a:solidFill>
+                            <a:latin typeface="Cambria Math" panose="02040503050406030204" pitchFamily="18" charset="0"/>
+                          </a:rPr>
+                          <m:t>𝜕</m:t>
+                        </m:r>
+                        <m:sSup>
+                          <m:sSupPr>
+                            <m:ctrlPr>
+                              <a:rPr lang="fr-FR" sz="2400" i="1">
+                                <a:solidFill>
+                                  <a:srgbClr val="FF0000"/>
+                                </a:solidFill>
+                                <a:latin typeface="Cambria Math" panose="02040503050406030204" pitchFamily="18" charset="0"/>
+                              </a:rPr>
+                            </m:ctrlPr>
+                          </m:sSupPr>
+                          <m:e>
+                            <m:r>
+                              <a:rPr lang="fr-FR" sz="2400" i="1">
+                                <a:solidFill>
+                                  <a:srgbClr val="FF0000"/>
+                                </a:solidFill>
+                                <a:latin typeface="Cambria Math" panose="02040503050406030204" pitchFamily="18" charset="0"/>
+                              </a:rPr>
+                              <m:t>𝑥</m:t>
+                            </m:r>
+                          </m:e>
+                          <m:sup>
+                            <m:r>
+                              <a:rPr lang="fr-FR" sz="2400" i="1">
+                                <a:solidFill>
+                                  <a:srgbClr val="FF0000"/>
+                                </a:solidFill>
+                                <a:latin typeface="Cambria Math" panose="02040503050406030204" pitchFamily="18" charset="0"/>
+                              </a:rPr>
+                              <m:t>2</m:t>
+                            </m:r>
+                          </m:sup>
+                        </m:sSup>
+                      </m:den>
+                    </m:f>
+                    <m:sSub>
+                      <m:sSubPr>
+                        <m:ctrlPr>
+                          <a:rPr lang="fr-FR" sz="2400" i="1">
+                            <a:solidFill>
+                              <a:srgbClr val="FF0000"/>
+                            </a:solidFill>
+                            <a:latin typeface="Cambria Math" panose="02040503050406030204" pitchFamily="18" charset="0"/>
+                          </a:rPr>
+                        </m:ctrlPr>
+                      </m:sSubPr>
+                      <m:e>
+                        <m:d>
+                          <m:dPr>
+                            <m:begChr m:val=""/>
+                            <m:endChr m:val="|"/>
+                            <m:ctrlPr>
+                              <a:rPr lang="fr-FR" sz="2400" i="1">
+                                <a:solidFill>
+                                  <a:srgbClr val="FF0000"/>
+                                </a:solidFill>
+                                <a:latin typeface="Cambria Math" panose="02040503050406030204" pitchFamily="18" charset="0"/>
+                              </a:rPr>
+                            </m:ctrlPr>
+                          </m:dPr>
+                          <m:e>
+                            <m:r>
+                              <a:rPr lang="fr-FR" sz="2400" i="1">
+                                <a:solidFill>
+                                  <a:srgbClr val="FF0000"/>
+                                </a:solidFill>
+                                <a:latin typeface="Cambria Math" panose="02040503050406030204" pitchFamily="18" charset="0"/>
+                              </a:rPr>
+                              <m:t>​</m:t>
+                            </m:r>
+                          </m:e>
+                        </m:d>
+                      </m:e>
+                      <m:sub>
+                        <m:r>
+                          <a:rPr lang="fr-FR" sz="2400" i="1">
+                            <a:solidFill>
+                              <a:srgbClr val="FF0000"/>
+                            </a:solidFill>
+                            <a:latin typeface="Cambria Math" panose="02040503050406030204" pitchFamily="18" charset="0"/>
+                          </a:rPr>
+                          <m:t>𝑡</m:t>
+                        </m:r>
+                        <m:r>
+                          <a:rPr lang="fr-FR" sz="2400" i="1">
+                            <a:solidFill>
+                              <a:srgbClr val="FF0000"/>
+                            </a:solidFill>
+                            <a:latin typeface="Cambria Math" panose="02040503050406030204" pitchFamily="18" charset="0"/>
+                          </a:rPr>
+                          <m:t>,</m:t>
+                        </m:r>
+                        <m:r>
+                          <a:rPr lang="fr-FR" sz="2400" i="1">
+                            <a:solidFill>
+                              <a:srgbClr val="FF0000"/>
+                            </a:solidFill>
+                            <a:latin typeface="Cambria Math" panose="02040503050406030204" pitchFamily="18" charset="0"/>
+                          </a:rPr>
+                          <m:t>𝑅</m:t>
+                        </m:r>
+                        <m:r>
+                          <a:rPr lang="fr-FR" sz="2400" i="1">
+                            <a:solidFill>
+                              <a:srgbClr val="FF0000"/>
+                            </a:solidFill>
+                            <a:latin typeface="Cambria Math" panose="02040503050406030204" pitchFamily="18" charset="0"/>
+                          </a:rPr>
+                          <m:t>,</m:t>
+                        </m:r>
+                        <m:r>
+                          <a:rPr lang="fr-FR" sz="2400" i="1">
+                            <a:solidFill>
+                              <a:srgbClr val="FF0000"/>
+                            </a:solidFill>
+                            <a:latin typeface="Cambria Math" panose="02040503050406030204" pitchFamily="18" charset="0"/>
+                          </a:rPr>
+                          <m:t>𝑧</m:t>
+                        </m:r>
+                      </m:sub>
+                    </m:sSub>
+                    <m:f>
+                      <m:fPr>
+                        <m:ctrlPr>
+                          <a:rPr lang="fr-FR" sz="2400" i="1">
+                            <a:solidFill>
+                              <a:srgbClr val="FF0000"/>
+                            </a:solidFill>
+                            <a:latin typeface="Cambria Math" panose="02040503050406030204" pitchFamily="18" charset="0"/>
+                          </a:rPr>
+                        </m:ctrlPr>
+                      </m:fPr>
+                      <m:num>
+                        <m:r>
+                          <m:rPr>
+                            <m:sty m:val="p"/>
+                          </m:rPr>
+                          <a:rPr lang="fr-FR" sz="2400">
+                            <a:solidFill>
+                              <a:srgbClr val="FF0000"/>
+                            </a:solidFill>
+                            <a:latin typeface="Cambria Math" panose="02040503050406030204" pitchFamily="18" charset="0"/>
+                          </a:rPr>
+                          <m:t>Δ</m:t>
+                        </m:r>
+                        <m:sSup>
+                          <m:sSupPr>
+                            <m:ctrlPr>
+                              <a:rPr lang="fr-FR" sz="2400" i="1">
+                                <a:solidFill>
+                                  <a:srgbClr val="FF0000"/>
+                                </a:solidFill>
+                                <a:latin typeface="Cambria Math" panose="02040503050406030204" pitchFamily="18" charset="0"/>
+                              </a:rPr>
+                            </m:ctrlPr>
+                          </m:sSupPr>
+                          <m:e>
+                            <m:r>
+                              <a:rPr lang="fr-FR" sz="2400" b="0" i="1" smtClean="0">
+                                <a:solidFill>
+                                  <a:srgbClr val="FF0000"/>
+                                </a:solidFill>
+                                <a:latin typeface="Cambria Math" panose="02040503050406030204" pitchFamily="18" charset="0"/>
+                              </a:rPr>
+                              <m:t>𝑅</m:t>
+                            </m:r>
+                          </m:e>
+                          <m:sup>
+                            <m:r>
+                              <a:rPr lang="fr-FR" sz="2400" i="1">
+                                <a:solidFill>
+                                  <a:srgbClr val="FF0000"/>
+                                </a:solidFill>
+                                <a:latin typeface="Cambria Math" panose="02040503050406030204" pitchFamily="18" charset="0"/>
+                              </a:rPr>
+                              <m:t>2</m:t>
+                            </m:r>
+                          </m:sup>
+                        </m:sSup>
+                      </m:num>
+                      <m:den>
+                        <m:r>
+                          <a:rPr lang="fr-FR" sz="2400" i="1">
+                            <a:solidFill>
+                              <a:srgbClr val="FF0000"/>
+                            </a:solidFill>
+                            <a:latin typeface="Cambria Math" panose="02040503050406030204" pitchFamily="18" charset="0"/>
+                          </a:rPr>
+                          <m:t>2!</m:t>
+                        </m:r>
+                      </m:den>
+                    </m:f>
+                  </m:oMath>
+                </a14:m>
+                <a:r>
+                  <a:rPr lang="fr-FR" sz="2400" dirty="0">
+                    <a:solidFill>
+                      <a:srgbClr val="FF0000"/>
+                    </a:solidFill>
+                  </a:rPr>
+                  <a:t> </a:t>
+                </a:r>
+                <a14:m>
+                  <m:oMath xmlns:m="http://schemas.openxmlformats.org/officeDocument/2006/math">
+                    <m:r>
+                      <a:rPr lang="fr-FR" sz="2400" dirty="0">
+                        <a:latin typeface="Cambria Math" panose="02040503050406030204" pitchFamily="18" charset="0"/>
+                      </a:rPr>
+                      <m:t>+</m:t>
+                    </m:r>
+                    <m:f>
+                      <m:fPr>
+                        <m:ctrlPr>
+                          <a:rPr lang="fr-FR" sz="2400" i="1">
+                            <a:latin typeface="Cambria Math" panose="02040503050406030204" pitchFamily="18" charset="0"/>
+                          </a:rPr>
+                        </m:ctrlPr>
+                      </m:fPr>
+                      <m:num>
+                        <m:sSup>
+                          <m:sSupPr>
+                            <m:ctrlPr>
+                              <a:rPr lang="fr-FR" sz="2400" i="1">
+                                <a:latin typeface="Cambria Math" panose="02040503050406030204" pitchFamily="18" charset="0"/>
+                              </a:rPr>
+                            </m:ctrlPr>
+                          </m:sSupPr>
+                          <m:e>
+                            <m:r>
+                              <a:rPr lang="fr-FR" sz="2400" i="1">
+                                <a:latin typeface="Cambria Math" panose="02040503050406030204" pitchFamily="18" charset="0"/>
+                              </a:rPr>
+                              <m:t>𝜕</m:t>
+                            </m:r>
+                          </m:e>
+                          <m:sup>
+                            <m:r>
+                              <a:rPr lang="fr-FR" sz="2400" b="0" i="1" smtClean="0">
+                                <a:latin typeface="Cambria Math" panose="02040503050406030204" pitchFamily="18" charset="0"/>
+                              </a:rPr>
+                              <m:t>3</m:t>
+                            </m:r>
+                          </m:sup>
+                        </m:sSup>
+                        <m:r>
+                          <a:rPr lang="fr-FR" sz="2400" i="1">
+                            <a:latin typeface="Cambria Math" panose="02040503050406030204" pitchFamily="18" charset="0"/>
+                          </a:rPr>
+                          <m:t>𝑇</m:t>
+                        </m:r>
+                      </m:num>
+                      <m:den>
+                        <m:r>
+                          <a:rPr lang="fr-FR" sz="2400" i="1">
+                            <a:latin typeface="Cambria Math" panose="02040503050406030204" pitchFamily="18" charset="0"/>
+                          </a:rPr>
+                          <m:t>𝜕</m:t>
+                        </m:r>
+                        <m:sSup>
+                          <m:sSupPr>
+                            <m:ctrlPr>
+                              <a:rPr lang="fr-FR" sz="2400" i="1">
+                                <a:latin typeface="Cambria Math" panose="02040503050406030204" pitchFamily="18" charset="0"/>
+                              </a:rPr>
+                            </m:ctrlPr>
+                          </m:sSupPr>
+                          <m:e>
+                            <m:r>
+                              <a:rPr lang="fr-FR" sz="2400" i="1">
+                                <a:latin typeface="Cambria Math" panose="02040503050406030204" pitchFamily="18" charset="0"/>
+                              </a:rPr>
+                              <m:t>𝑅</m:t>
+                            </m:r>
+                          </m:e>
+                          <m:sup>
+                            <m:r>
+                              <a:rPr lang="fr-FR" sz="2400" i="1">
+                                <a:latin typeface="Cambria Math" panose="02040503050406030204" pitchFamily="18" charset="0"/>
+                              </a:rPr>
+                              <m:t>3</m:t>
+                            </m:r>
+                          </m:sup>
+                        </m:sSup>
+                      </m:den>
+                    </m:f>
+                    <m:sSub>
+                      <m:sSubPr>
+                        <m:ctrlPr>
+                          <a:rPr lang="fr-FR" sz="2400" i="1">
+                            <a:latin typeface="Cambria Math" panose="02040503050406030204" pitchFamily="18" charset="0"/>
+                          </a:rPr>
+                        </m:ctrlPr>
+                      </m:sSubPr>
+                      <m:e>
+                        <m:d>
+                          <m:dPr>
+                            <m:begChr m:val=""/>
+                            <m:endChr m:val="|"/>
+                            <m:ctrlPr>
+                              <a:rPr lang="fr-FR" sz="2400" i="1">
+                                <a:latin typeface="Cambria Math" panose="02040503050406030204" pitchFamily="18" charset="0"/>
+                              </a:rPr>
+                            </m:ctrlPr>
+                          </m:dPr>
+                          <m:e>
+                            <m:r>
+                              <a:rPr lang="fr-FR" sz="2400" i="1">
+                                <a:latin typeface="Cambria Math" panose="02040503050406030204" pitchFamily="18" charset="0"/>
+                              </a:rPr>
+                              <m:t>​</m:t>
+                            </m:r>
+                          </m:e>
+                        </m:d>
+                      </m:e>
+                      <m:sub>
+                        <m:r>
+                          <a:rPr lang="fr-FR" sz="2400" i="1">
+                            <a:latin typeface="Cambria Math" panose="02040503050406030204" pitchFamily="18" charset="0"/>
+                          </a:rPr>
+                          <m:t>𝑡</m:t>
+                        </m:r>
+                        <m:r>
+                          <a:rPr lang="fr-FR" sz="2400" i="1">
+                            <a:latin typeface="Cambria Math" panose="02040503050406030204" pitchFamily="18" charset="0"/>
+                          </a:rPr>
+                          <m:t>,</m:t>
+                        </m:r>
+                        <m:r>
+                          <a:rPr lang="fr-FR" sz="2400" i="1">
+                            <a:latin typeface="Cambria Math" panose="02040503050406030204" pitchFamily="18" charset="0"/>
+                          </a:rPr>
+                          <m:t>𝑅</m:t>
+                        </m:r>
+                        <m:r>
+                          <a:rPr lang="fr-FR" sz="2400" i="1">
+                            <a:latin typeface="Cambria Math" panose="02040503050406030204" pitchFamily="18" charset="0"/>
+                          </a:rPr>
+                          <m:t>,</m:t>
+                        </m:r>
+                        <m:r>
+                          <a:rPr lang="fr-FR" sz="2400" i="1">
+                            <a:latin typeface="Cambria Math" panose="02040503050406030204" pitchFamily="18" charset="0"/>
+                          </a:rPr>
+                          <m:t>𝑧</m:t>
+                        </m:r>
+                      </m:sub>
+                    </m:sSub>
+                    <m:f>
+                      <m:fPr>
+                        <m:ctrlPr>
+                          <a:rPr lang="fr-FR" sz="2400" i="1">
+                            <a:latin typeface="Cambria Math" panose="02040503050406030204" pitchFamily="18" charset="0"/>
+                          </a:rPr>
+                        </m:ctrlPr>
+                      </m:fPr>
+                      <m:num>
+                        <m:r>
+                          <m:rPr>
+                            <m:sty m:val="p"/>
+                          </m:rPr>
+                          <a:rPr lang="fr-FR" sz="2400">
+                            <a:latin typeface="Cambria Math" panose="02040503050406030204" pitchFamily="18" charset="0"/>
+                          </a:rPr>
+                          <m:t>Δ</m:t>
+                        </m:r>
+                        <m:sSup>
+                          <m:sSupPr>
+                            <m:ctrlPr>
+                              <a:rPr lang="fr-FR" sz="2400" i="1">
+                                <a:latin typeface="Cambria Math" panose="02040503050406030204" pitchFamily="18" charset="0"/>
+                              </a:rPr>
+                            </m:ctrlPr>
+                          </m:sSupPr>
+                          <m:e>
+                            <m:r>
+                              <a:rPr lang="fr-FR" sz="2400" i="1">
+                                <a:latin typeface="Cambria Math" panose="02040503050406030204" pitchFamily="18" charset="0"/>
+                              </a:rPr>
+                              <m:t>𝑅</m:t>
+                            </m:r>
+                          </m:e>
+                          <m:sup>
+                            <m:r>
+                              <a:rPr lang="fr-FR" sz="2400" i="1">
+                                <a:latin typeface="Cambria Math" panose="02040503050406030204" pitchFamily="18" charset="0"/>
+                              </a:rPr>
+                              <m:t>3</m:t>
+                            </m:r>
+                          </m:sup>
+                        </m:sSup>
+                      </m:num>
+                      <m:den>
+                        <m:r>
+                          <a:rPr lang="fr-FR" sz="2400" i="1">
+                            <a:latin typeface="Cambria Math" panose="02040503050406030204" pitchFamily="18" charset="0"/>
+                          </a:rPr>
+                          <m:t>3!</m:t>
+                        </m:r>
+                      </m:den>
+                    </m:f>
+                    <m:r>
+                      <a:rPr lang="fr-FR" sz="2400" i="1">
+                        <a:latin typeface="Cambria Math" panose="02040503050406030204" pitchFamily="18" charset="0"/>
+                      </a:rPr>
+                      <m:t>+</m:t>
+                    </m:r>
+                    <m:r>
+                      <a:rPr lang="fr-FR" sz="2400" i="1">
+                        <a:latin typeface="Cambria Math" panose="02040503050406030204" pitchFamily="18" charset="0"/>
+                      </a:rPr>
+                      <m:t>𝑜</m:t>
+                    </m:r>
+                    <m:d>
+                      <m:dPr>
+                        <m:ctrlPr>
+                          <a:rPr lang="fr-FR" sz="2400" i="1">
+                            <a:latin typeface="Cambria Math" panose="02040503050406030204" pitchFamily="18" charset="0"/>
+                          </a:rPr>
+                        </m:ctrlPr>
+                      </m:dPr>
+                      <m:e>
+                        <m:r>
+                          <m:rPr>
+                            <m:sty m:val="p"/>
+                          </m:rPr>
+                          <a:rPr lang="fr-FR" sz="2400">
+                            <a:latin typeface="Cambria Math" panose="02040503050406030204" pitchFamily="18" charset="0"/>
+                          </a:rPr>
+                          <m:t>Δ</m:t>
+                        </m:r>
+                        <m:sSup>
+                          <m:sSupPr>
+                            <m:ctrlPr>
+                              <a:rPr lang="fr-FR" sz="2400" i="1">
+                                <a:latin typeface="Cambria Math" panose="02040503050406030204" pitchFamily="18" charset="0"/>
+                              </a:rPr>
+                            </m:ctrlPr>
+                          </m:sSupPr>
+                          <m:e>
+                            <m:r>
+                              <a:rPr lang="fr-FR" sz="2400" i="1">
+                                <a:latin typeface="Cambria Math" panose="02040503050406030204" pitchFamily="18" charset="0"/>
+                              </a:rPr>
+                              <m:t>𝑅</m:t>
+                            </m:r>
+                          </m:e>
+                          <m:sup>
+                            <m:r>
+                              <a:rPr lang="fr-FR" sz="2400" i="1">
+                                <a:latin typeface="Cambria Math" panose="02040503050406030204" pitchFamily="18" charset="0"/>
+                              </a:rPr>
+                              <m:t>3</m:t>
+                            </m:r>
+                          </m:sup>
+                        </m:sSup>
+                      </m:e>
+                    </m:d>
+                  </m:oMath>
+                </a14:m>
+                <a:r>
+                  <a:rPr lang="fr-FR" sz="2400" b="0" i="0" dirty="0">
+                    <a:latin typeface="Cambria Math" panose="02040503050406030204" pitchFamily="18" charset="0"/>
+                  </a:rPr>
+                  <a:t>)</a:t>
+                </a:r>
+                <a:endParaRPr lang="fr-FR" sz="2400" i="1" dirty="0">
+                  <a:latin typeface="Cambria Math" panose="02040503050406030204" pitchFamily="18" charset="0"/>
+                </a:endParaRPr>
+              </a:p>
+              <a:p>
+                <a:pPr marL="0" indent="0">
+                  <a:buNone/>
+                </a:pPr>
+                <a:r>
+                  <a:rPr lang="fr-FR" sz="2400" b="0" dirty="0"/>
+                  <a:t>	          	   </a:t>
+                </a:r>
+                <a14:m>
+                  <m:oMath xmlns:m="http://schemas.openxmlformats.org/officeDocument/2006/math">
+                    <m:r>
+                      <a:rPr lang="fr-FR" sz="2400" b="0" i="0" smtClean="0">
+                        <a:latin typeface="Cambria Math" panose="02040503050406030204" pitchFamily="18" charset="0"/>
+                      </a:rPr>
+                      <m:t>=</m:t>
+                    </m:r>
+                  </m:oMath>
+                </a14:m>
+                <a:r>
+                  <a:rPr lang="fr-FR" sz="2400" dirty="0"/>
+                  <a:t> </a:t>
+                </a:r>
+                <a14:m>
+                  <m:oMath xmlns:m="http://schemas.openxmlformats.org/officeDocument/2006/math">
+                    <m:f>
+                      <m:fPr>
+                        <m:ctrlPr>
+                          <a:rPr lang="fr-FR" sz="2400" i="1">
+                            <a:latin typeface="Cambria Math" panose="02040503050406030204" pitchFamily="18" charset="0"/>
+                          </a:rPr>
+                        </m:ctrlPr>
+                      </m:fPr>
+                      <m:num>
+                        <m:r>
+                          <a:rPr lang="fr-FR" sz="2400" i="1">
+                            <a:latin typeface="Cambria Math" panose="02040503050406030204" pitchFamily="18" charset="0"/>
+                          </a:rPr>
+                          <m:t>𝜕</m:t>
+                        </m:r>
+                        <m:r>
+                          <a:rPr lang="fr-FR" sz="2400" i="1">
+                            <a:latin typeface="Cambria Math" panose="02040503050406030204" pitchFamily="18" charset="0"/>
+                          </a:rPr>
+                          <m:t>𝑇</m:t>
+                        </m:r>
+                      </m:num>
+                      <m:den>
+                        <m:r>
+                          <a:rPr lang="fr-FR" sz="2400" i="1">
+                            <a:latin typeface="Cambria Math" panose="02040503050406030204" pitchFamily="18" charset="0"/>
+                          </a:rPr>
+                          <m:t>𝜕</m:t>
+                        </m:r>
+                        <m:r>
+                          <a:rPr lang="fr-FR" sz="2400" i="1">
+                            <a:latin typeface="Cambria Math" panose="02040503050406030204" pitchFamily="18" charset="0"/>
+                          </a:rPr>
+                          <m:t>𝑡</m:t>
+                        </m:r>
+                      </m:den>
+                    </m:f>
+                    <m:sSub>
+                      <m:sSubPr>
+                        <m:ctrlPr>
+                          <a:rPr lang="fr-FR" sz="2400" i="1">
+                            <a:latin typeface="Cambria Math" panose="02040503050406030204" pitchFamily="18" charset="0"/>
+                          </a:rPr>
+                        </m:ctrlPr>
+                      </m:sSubPr>
+                      <m:e>
+                        <m:d>
+                          <m:dPr>
+                            <m:begChr m:val=""/>
+                            <m:endChr m:val="|"/>
+                            <m:ctrlPr>
+                              <a:rPr lang="fr-FR" sz="2400" i="1">
+                                <a:latin typeface="Cambria Math" panose="02040503050406030204" pitchFamily="18" charset="0"/>
+                              </a:rPr>
+                            </m:ctrlPr>
+                          </m:dPr>
+                          <m:e>
+                            <m:r>
+                              <a:rPr lang="fr-FR" sz="2400" i="1">
+                                <a:latin typeface="Cambria Math" panose="02040503050406030204" pitchFamily="18" charset="0"/>
+                              </a:rPr>
+                              <m:t>​</m:t>
+                            </m:r>
+                          </m:e>
+                        </m:d>
+                      </m:e>
+                      <m:sub>
+                        <m:r>
+                          <a:rPr lang="fr-FR" sz="2400" i="1">
+                            <a:latin typeface="Cambria Math" panose="02040503050406030204" pitchFamily="18" charset="0"/>
+                          </a:rPr>
+                          <m:t>𝑡</m:t>
+                        </m:r>
+                        <m:r>
+                          <a:rPr lang="fr-FR" sz="2400" i="1">
+                            <a:latin typeface="Cambria Math" panose="02040503050406030204" pitchFamily="18" charset="0"/>
+                          </a:rPr>
+                          <m:t>,</m:t>
+                        </m:r>
+                        <m:r>
+                          <a:rPr lang="fr-FR" sz="2400" i="1">
+                            <a:latin typeface="Cambria Math" panose="02040503050406030204" pitchFamily="18" charset="0"/>
+                          </a:rPr>
+                          <m:t>𝑅</m:t>
+                        </m:r>
+                        <m:r>
+                          <a:rPr lang="fr-FR" sz="2400" i="1">
+                            <a:latin typeface="Cambria Math" panose="02040503050406030204" pitchFamily="18" charset="0"/>
+                          </a:rPr>
+                          <m:t>,</m:t>
+                        </m:r>
+                        <m:r>
+                          <a:rPr lang="fr-FR" sz="2400" i="1">
+                            <a:latin typeface="Cambria Math" panose="02040503050406030204" pitchFamily="18" charset="0"/>
+                          </a:rPr>
+                          <m:t>𝑧</m:t>
+                        </m:r>
+                      </m:sub>
+                    </m:sSub>
+                    <m:r>
+                      <a:rPr lang="fr-FR" sz="2400" b="0" i="1" smtClean="0">
+                        <a:latin typeface="Cambria Math" panose="02040503050406030204" pitchFamily="18" charset="0"/>
+                      </a:rPr>
+                      <m:t>+</m:t>
+                    </m:r>
+                    <m:f>
+                      <m:fPr>
+                        <m:ctrlPr>
+                          <a:rPr lang="fr-FR" sz="2400" i="1">
+                            <a:latin typeface="Cambria Math" panose="02040503050406030204" pitchFamily="18" charset="0"/>
+                          </a:rPr>
+                        </m:ctrlPr>
+                      </m:fPr>
+                      <m:num>
+                        <m:sSup>
+                          <m:sSupPr>
+                            <m:ctrlPr>
+                              <a:rPr lang="fr-FR" sz="2400" i="1">
+                                <a:latin typeface="Cambria Math" panose="02040503050406030204" pitchFamily="18" charset="0"/>
+                              </a:rPr>
+                            </m:ctrlPr>
+                          </m:sSupPr>
+                          <m:e>
+                            <m:r>
+                              <a:rPr lang="fr-FR" sz="2400" i="1">
+                                <a:latin typeface="Cambria Math" panose="02040503050406030204" pitchFamily="18" charset="0"/>
+                              </a:rPr>
+                              <m:t>𝜕</m:t>
+                            </m:r>
+                          </m:e>
+                          <m:sup>
+                            <m:r>
+                              <a:rPr lang="fr-FR" sz="2400" b="0" i="1" smtClean="0">
+                                <a:latin typeface="Cambria Math" panose="02040503050406030204" pitchFamily="18" charset="0"/>
+                              </a:rPr>
+                              <m:t>3</m:t>
+                            </m:r>
+                          </m:sup>
+                        </m:sSup>
+                        <m:r>
+                          <a:rPr lang="fr-FR" sz="2400" i="1">
+                            <a:latin typeface="Cambria Math" panose="02040503050406030204" pitchFamily="18" charset="0"/>
+                          </a:rPr>
+                          <m:t>𝑇</m:t>
+                        </m:r>
+                      </m:num>
+                      <m:den>
+                        <m:r>
+                          <a:rPr lang="fr-FR" sz="2400" i="1">
+                            <a:latin typeface="Cambria Math" panose="02040503050406030204" pitchFamily="18" charset="0"/>
+                          </a:rPr>
+                          <m:t>𝜕</m:t>
+                        </m:r>
+                        <m:sSup>
+                          <m:sSupPr>
+                            <m:ctrlPr>
+                              <a:rPr lang="fr-FR" sz="2400" i="1">
+                                <a:latin typeface="Cambria Math" panose="02040503050406030204" pitchFamily="18" charset="0"/>
+                              </a:rPr>
+                            </m:ctrlPr>
+                          </m:sSupPr>
+                          <m:e>
+                            <m:r>
+                              <a:rPr lang="fr-FR" sz="2400" b="0" i="1" smtClean="0">
+                                <a:latin typeface="Cambria Math" panose="02040503050406030204" pitchFamily="18" charset="0"/>
+                              </a:rPr>
+                              <m:t>𝑅</m:t>
+                            </m:r>
+                          </m:e>
+                          <m:sup>
+                            <m:r>
+                              <a:rPr lang="fr-FR" sz="2400" b="0" i="1" smtClean="0">
+                                <a:latin typeface="Cambria Math" panose="02040503050406030204" pitchFamily="18" charset="0"/>
+                              </a:rPr>
+                              <m:t>3</m:t>
+                            </m:r>
+                          </m:sup>
+                        </m:sSup>
+                      </m:den>
+                    </m:f>
+                    <m:sSub>
+                      <m:sSubPr>
+                        <m:ctrlPr>
+                          <a:rPr lang="fr-FR" sz="2400" i="1">
+                            <a:latin typeface="Cambria Math" panose="02040503050406030204" pitchFamily="18" charset="0"/>
+                          </a:rPr>
+                        </m:ctrlPr>
+                      </m:sSubPr>
+                      <m:e>
+                        <m:d>
+                          <m:dPr>
+                            <m:begChr m:val=""/>
+                            <m:endChr m:val="|"/>
+                            <m:ctrlPr>
+                              <a:rPr lang="fr-FR" sz="2400" i="1">
+                                <a:latin typeface="Cambria Math" panose="02040503050406030204" pitchFamily="18" charset="0"/>
+                              </a:rPr>
+                            </m:ctrlPr>
+                          </m:dPr>
+                          <m:e>
+                            <m:r>
+                              <a:rPr lang="fr-FR" sz="2400" i="1">
+                                <a:latin typeface="Cambria Math" panose="02040503050406030204" pitchFamily="18" charset="0"/>
+                              </a:rPr>
+                              <m:t>​</m:t>
+                            </m:r>
+                          </m:e>
+                        </m:d>
+                      </m:e>
+                      <m:sub>
+                        <m:r>
+                          <a:rPr lang="fr-FR" sz="2400" i="1">
+                            <a:latin typeface="Cambria Math" panose="02040503050406030204" pitchFamily="18" charset="0"/>
+                          </a:rPr>
+                          <m:t>𝑖</m:t>
+                        </m:r>
+                      </m:sub>
+                    </m:sSub>
+                    <m:f>
+                      <m:fPr>
+                        <m:ctrlPr>
+                          <a:rPr lang="fr-FR" sz="2400" i="1">
+                            <a:latin typeface="Cambria Math" panose="02040503050406030204" pitchFamily="18" charset="0"/>
+                          </a:rPr>
+                        </m:ctrlPr>
+                      </m:fPr>
+                      <m:num>
+                        <m:r>
+                          <m:rPr>
+                            <m:sty m:val="p"/>
+                          </m:rPr>
+                          <a:rPr lang="fr-FR" sz="2400" smtClean="0">
+                            <a:solidFill>
+                              <a:srgbClr val="0070C0"/>
+                            </a:solidFill>
+                            <a:latin typeface="Cambria Math" panose="02040503050406030204" pitchFamily="18" charset="0"/>
+                          </a:rPr>
+                          <m:t>Δ</m:t>
+                        </m:r>
+                        <m:sSup>
+                          <m:sSupPr>
+                            <m:ctrlPr>
+                              <a:rPr lang="fr-FR" sz="2400" i="1">
+                                <a:solidFill>
+                                  <a:srgbClr val="0070C0"/>
+                                </a:solidFill>
+                                <a:latin typeface="Cambria Math" panose="02040503050406030204" pitchFamily="18" charset="0"/>
+                              </a:rPr>
+                            </m:ctrlPr>
+                          </m:sSupPr>
+                          <m:e>
+                            <m:r>
+                              <a:rPr lang="fr-FR" sz="2400" b="0" i="1" smtClean="0">
+                                <a:solidFill>
+                                  <a:srgbClr val="0070C0"/>
+                                </a:solidFill>
+                                <a:latin typeface="Cambria Math" panose="02040503050406030204" pitchFamily="18" charset="0"/>
+                              </a:rPr>
+                              <m:t>𝑅</m:t>
+                            </m:r>
+                          </m:e>
+                          <m:sup>
+                            <m:r>
+                              <a:rPr lang="fr-FR" sz="2400" i="1">
+                                <a:solidFill>
+                                  <a:srgbClr val="0070C0"/>
+                                </a:solidFill>
+                                <a:latin typeface="Cambria Math" panose="02040503050406030204" pitchFamily="18" charset="0"/>
+                              </a:rPr>
+                              <m:t>2</m:t>
+                            </m:r>
+                          </m:sup>
+                        </m:sSup>
+                      </m:num>
+                      <m:den>
+                        <m:r>
+                          <a:rPr lang="fr-FR" sz="2400" b="0" i="1" smtClean="0">
+                            <a:latin typeface="Cambria Math" panose="02040503050406030204" pitchFamily="18" charset="0"/>
+                          </a:rPr>
+                          <m:t>3</m:t>
+                        </m:r>
+                        <m:r>
+                          <a:rPr lang="fr-FR" sz="2400" i="1">
+                            <a:latin typeface="Cambria Math" panose="02040503050406030204" pitchFamily="18" charset="0"/>
+                          </a:rPr>
+                          <m:t>!</m:t>
+                        </m:r>
+                      </m:den>
+                    </m:f>
+                    <m:r>
+                      <a:rPr lang="fr-FR" sz="2400" i="1">
+                        <a:latin typeface="Cambria Math" panose="02040503050406030204" pitchFamily="18" charset="0"/>
+                      </a:rPr>
+                      <m:t>+</m:t>
+                    </m:r>
+                    <m:r>
+                      <a:rPr lang="fr-FR" sz="2400" i="1">
+                        <a:latin typeface="Cambria Math" panose="02040503050406030204" pitchFamily="18" charset="0"/>
+                      </a:rPr>
+                      <m:t>𝑜</m:t>
+                    </m:r>
+                    <m:r>
+                      <a:rPr lang="fr-FR" sz="2400" i="1">
+                        <a:latin typeface="Cambria Math" panose="02040503050406030204" pitchFamily="18" charset="0"/>
+                      </a:rPr>
+                      <m:t>(</m:t>
+                    </m:r>
+                    <m:r>
+                      <m:rPr>
+                        <m:sty m:val="p"/>
+                      </m:rPr>
+                      <a:rPr lang="fr-FR" sz="2400" smtClean="0">
+                        <a:solidFill>
+                          <a:srgbClr val="0070C0"/>
+                        </a:solidFill>
+                        <a:latin typeface="Cambria Math" panose="02040503050406030204" pitchFamily="18" charset="0"/>
+                      </a:rPr>
+                      <m:t>Δ</m:t>
+                    </m:r>
+                    <m:sSup>
+                      <m:sSupPr>
+                        <m:ctrlPr>
+                          <a:rPr lang="fr-FR" sz="2400" i="1">
+                            <a:solidFill>
+                              <a:srgbClr val="0070C0"/>
+                            </a:solidFill>
+                            <a:latin typeface="Cambria Math" panose="02040503050406030204" pitchFamily="18" charset="0"/>
+                          </a:rPr>
+                        </m:ctrlPr>
+                      </m:sSupPr>
+                      <m:e>
+                        <m:r>
+                          <a:rPr lang="fr-FR" sz="2400" b="0" i="1" smtClean="0">
+                            <a:solidFill>
+                              <a:srgbClr val="0070C0"/>
+                            </a:solidFill>
+                            <a:latin typeface="Cambria Math" panose="02040503050406030204" pitchFamily="18" charset="0"/>
+                          </a:rPr>
+                          <m:t>𝑅</m:t>
+                        </m:r>
+                      </m:e>
+                      <m:sup>
+                        <m:r>
+                          <a:rPr lang="fr-FR" sz="2400" b="0" i="1" smtClean="0">
+                            <a:solidFill>
+                              <a:srgbClr val="0070C0"/>
+                            </a:solidFill>
+                            <a:latin typeface="Cambria Math" panose="02040503050406030204" pitchFamily="18" charset="0"/>
+                          </a:rPr>
+                          <m:t>2</m:t>
+                        </m:r>
+                      </m:sup>
+                    </m:sSup>
+                    <m:r>
+                      <a:rPr lang="fr-FR" sz="2400" i="1">
+                        <a:latin typeface="Cambria Math" panose="02040503050406030204" pitchFamily="18" charset="0"/>
+                      </a:rPr>
+                      <m:t>)</m:t>
+                    </m:r>
+                  </m:oMath>
+                </a14:m>
+                <a:endParaRPr lang="fr-FR" sz="2400" b="0" i="0" dirty="0">
+                  <a:latin typeface="Cambria Math" panose="02040503050406030204" pitchFamily="18" charset="0"/>
+                </a:endParaRPr>
+              </a:p>
+              <a:p>
+                <a:endParaRPr lang="fr-FR" sz="2400" i="1" dirty="0">
+                  <a:latin typeface="Cambria Math" panose="02040503050406030204" pitchFamily="18" charset="0"/>
+                </a:endParaRPr>
+              </a:p>
+              <a:p>
+                <a14:m>
+                  <m:oMath xmlns:m="http://schemas.openxmlformats.org/officeDocument/2006/math">
+                    <m:f>
+                      <m:fPr>
+                        <m:ctrlPr>
+                          <a:rPr lang="fr-FR" sz="2400" i="1">
+                            <a:latin typeface="Cambria Math" panose="02040503050406030204" pitchFamily="18" charset="0"/>
+                          </a:rPr>
+                        </m:ctrlPr>
+                      </m:fPr>
+                      <m:num>
+                        <m:sSubSup>
+                          <m:sSubSupPr>
+                            <m:ctrlPr>
+                              <a:rPr lang="fr-FR" sz="2400" i="1">
+                                <a:latin typeface="Cambria Math" panose="02040503050406030204" pitchFamily="18" charset="0"/>
+                              </a:rPr>
+                            </m:ctrlPr>
+                          </m:sSubSupPr>
+                          <m:e>
+                            <m:r>
+                              <a:rPr lang="fr-FR" sz="2400" i="1">
+                                <a:latin typeface="Cambria Math" panose="02040503050406030204" pitchFamily="18" charset="0"/>
+                              </a:rPr>
+                              <m:t>𝑇</m:t>
+                            </m:r>
+                          </m:e>
+                          <m:sub>
+                            <m:r>
+                              <a:rPr lang="fr-FR" sz="2400" i="1">
+                                <a:latin typeface="Cambria Math" panose="02040503050406030204" pitchFamily="18" charset="0"/>
+                              </a:rPr>
+                              <m:t>𝑅</m:t>
+                            </m:r>
+                            <m:r>
+                              <a:rPr lang="fr-FR" sz="2400" i="1">
+                                <a:latin typeface="Cambria Math" panose="02040503050406030204" pitchFamily="18" charset="0"/>
+                              </a:rPr>
+                              <m:t>,</m:t>
+                            </m:r>
+                            <m:r>
+                              <a:rPr lang="fr-FR" sz="2400" i="1">
+                                <a:latin typeface="Cambria Math" panose="02040503050406030204" pitchFamily="18" charset="0"/>
+                              </a:rPr>
+                              <m:t>𝑧</m:t>
+                            </m:r>
+                            <m:r>
+                              <a:rPr lang="fr-FR" sz="2400" i="1">
+                                <a:latin typeface="Cambria Math" panose="02040503050406030204" pitchFamily="18" charset="0"/>
+                              </a:rPr>
+                              <m:t>+1</m:t>
+                            </m:r>
+                          </m:sub>
+                          <m:sup>
+                            <m:r>
+                              <a:rPr lang="fr-FR" sz="2400" i="1">
+                                <a:latin typeface="Cambria Math" panose="02040503050406030204" pitchFamily="18" charset="0"/>
+                              </a:rPr>
+                              <m:t>𝑡</m:t>
+                            </m:r>
+                          </m:sup>
+                        </m:sSubSup>
+                        <m:r>
+                          <a:rPr lang="fr-FR" sz="2400" i="1">
+                            <a:latin typeface="Cambria Math" panose="02040503050406030204" pitchFamily="18" charset="0"/>
+                          </a:rPr>
+                          <m:t>−</m:t>
+                        </m:r>
+                        <m:sSubSup>
+                          <m:sSubSupPr>
+                            <m:ctrlPr>
+                              <a:rPr lang="fr-FR" sz="2400" i="1">
+                                <a:latin typeface="Cambria Math" panose="02040503050406030204" pitchFamily="18" charset="0"/>
+                              </a:rPr>
+                            </m:ctrlPr>
+                          </m:sSubSupPr>
+                          <m:e>
+                            <m:r>
+                              <a:rPr lang="fr-FR" sz="2400" i="1">
+                                <a:latin typeface="Cambria Math" panose="02040503050406030204" pitchFamily="18" charset="0"/>
+                              </a:rPr>
+                              <m:t>2</m:t>
+                            </m:r>
+                            <m:r>
+                              <a:rPr lang="fr-FR" sz="2400" i="1">
+                                <a:latin typeface="Cambria Math" panose="02040503050406030204" pitchFamily="18" charset="0"/>
+                              </a:rPr>
+                              <m:t>𝑇</m:t>
+                            </m:r>
+                          </m:e>
+                          <m:sub>
+                            <m:r>
+                              <a:rPr lang="fr-FR" sz="2400" i="1">
+                                <a:latin typeface="Cambria Math" panose="02040503050406030204" pitchFamily="18" charset="0"/>
+                              </a:rPr>
+                              <m:t>𝑅</m:t>
+                            </m:r>
+                            <m:r>
+                              <a:rPr lang="fr-FR" sz="2400" i="1">
+                                <a:latin typeface="Cambria Math" panose="02040503050406030204" pitchFamily="18" charset="0"/>
+                              </a:rPr>
+                              <m:t>,</m:t>
+                            </m:r>
+                            <m:r>
+                              <a:rPr lang="fr-FR" sz="2400" i="1">
+                                <a:latin typeface="Cambria Math" panose="02040503050406030204" pitchFamily="18" charset="0"/>
+                              </a:rPr>
+                              <m:t>𝑧</m:t>
+                            </m:r>
+                          </m:sub>
+                          <m:sup>
+                            <m:r>
+                              <a:rPr lang="fr-FR" sz="2400" i="1">
+                                <a:latin typeface="Cambria Math" panose="02040503050406030204" pitchFamily="18" charset="0"/>
+                              </a:rPr>
+                              <m:t>𝑡</m:t>
+                            </m:r>
+                          </m:sup>
+                        </m:sSubSup>
+                        <m:r>
+                          <a:rPr lang="fr-FR" sz="2400" i="1">
+                            <a:latin typeface="Cambria Math" panose="02040503050406030204" pitchFamily="18" charset="0"/>
+                          </a:rPr>
+                          <m:t>+</m:t>
+                        </m:r>
+                        <m:sSubSup>
+                          <m:sSubSupPr>
+                            <m:ctrlPr>
+                              <a:rPr lang="fr-FR" sz="2400" i="1">
+                                <a:latin typeface="Cambria Math" panose="02040503050406030204" pitchFamily="18" charset="0"/>
+                              </a:rPr>
+                            </m:ctrlPr>
+                          </m:sSubSupPr>
+                          <m:e>
+                            <m:r>
+                              <a:rPr lang="fr-FR" sz="2400" i="1">
+                                <a:latin typeface="Cambria Math" panose="02040503050406030204" pitchFamily="18" charset="0"/>
+                              </a:rPr>
+                              <m:t>𝑇</m:t>
+                            </m:r>
+                          </m:e>
+                          <m:sub>
+                            <m:r>
+                              <a:rPr lang="fr-FR" sz="2400" i="1">
+                                <a:latin typeface="Cambria Math" panose="02040503050406030204" pitchFamily="18" charset="0"/>
+                              </a:rPr>
+                              <m:t>𝑅</m:t>
+                            </m:r>
+                            <m:r>
+                              <a:rPr lang="fr-FR" sz="2400" i="1">
+                                <a:latin typeface="Cambria Math" panose="02040503050406030204" pitchFamily="18" charset="0"/>
+                              </a:rPr>
+                              <m:t>,</m:t>
+                            </m:r>
+                            <m:r>
+                              <a:rPr lang="fr-FR" sz="2400" i="1">
+                                <a:latin typeface="Cambria Math" panose="02040503050406030204" pitchFamily="18" charset="0"/>
+                              </a:rPr>
+                              <m:t>𝑧</m:t>
+                            </m:r>
+                            <m:r>
+                              <a:rPr lang="fr-FR" sz="2400" i="1">
+                                <a:latin typeface="Cambria Math" panose="02040503050406030204" pitchFamily="18" charset="0"/>
+                              </a:rPr>
+                              <m:t>−1</m:t>
+                            </m:r>
+                          </m:sub>
+                          <m:sup>
+                            <m:r>
+                              <a:rPr lang="fr-FR" sz="2400" i="1">
+                                <a:latin typeface="Cambria Math" panose="02040503050406030204" pitchFamily="18" charset="0"/>
+                              </a:rPr>
+                              <m:t>𝑡</m:t>
+                            </m:r>
+                          </m:sup>
+                        </m:sSubSup>
+                      </m:num>
+                      <m:den>
+                        <m:r>
+                          <m:rPr>
+                            <m:sty m:val="p"/>
+                          </m:rPr>
+                          <a:rPr lang="fr-FR" sz="2400">
+                            <a:latin typeface="Cambria Math" panose="02040503050406030204" pitchFamily="18" charset="0"/>
+                          </a:rPr>
+                          <m:t>Δ</m:t>
+                        </m:r>
+                        <m:sSup>
+                          <m:sSupPr>
+                            <m:ctrlPr>
+                              <a:rPr lang="fr-FR" sz="2400" i="1">
+                                <a:latin typeface="Cambria Math" panose="02040503050406030204" pitchFamily="18" charset="0"/>
+                              </a:rPr>
+                            </m:ctrlPr>
+                          </m:sSupPr>
+                          <m:e>
+                            <m:r>
+                              <m:rPr>
+                                <m:sty m:val="p"/>
+                              </m:rPr>
+                              <a:rPr lang="fr-FR" sz="2400">
+                                <a:latin typeface="Cambria Math" panose="02040503050406030204" pitchFamily="18" charset="0"/>
+                              </a:rPr>
+                              <m:t>z</m:t>
+                            </m:r>
+                          </m:e>
+                          <m:sup>
+                            <m:r>
+                              <a:rPr lang="fr-FR" sz="2400">
+                                <a:latin typeface="Cambria Math" panose="02040503050406030204" pitchFamily="18" charset="0"/>
+                              </a:rPr>
+                              <m:t>2</m:t>
+                            </m:r>
+                          </m:sup>
+                        </m:sSup>
+                        <m:r>
+                          <m:rPr>
+                            <m:nor/>
+                          </m:rPr>
+                          <a:rPr lang="fr-FR" sz="2400"/>
+                          <m:t> </m:t>
+                        </m:r>
+                      </m:den>
+                    </m:f>
+                    <m:r>
+                      <a:rPr lang="fr-FR" sz="2400" b="0" i="1" smtClean="0">
+                        <a:latin typeface="Cambria Math" panose="02040503050406030204" pitchFamily="18" charset="0"/>
+                      </a:rPr>
+                      <m:t>=</m:t>
+                    </m:r>
+                    <m:sSub>
+                      <m:sSubPr>
+                        <m:ctrlPr>
+                          <a:rPr lang="fr-FR" sz="2400" i="1">
+                            <a:solidFill>
+                              <a:srgbClr val="FF0000"/>
+                            </a:solidFill>
+                            <a:latin typeface="Cambria Math" panose="02040503050406030204" pitchFamily="18" charset="0"/>
+                          </a:rPr>
+                        </m:ctrlPr>
+                      </m:sSubPr>
+                      <m:e>
+                        <m:f>
+                          <m:fPr>
+                            <m:ctrlPr>
+                              <a:rPr lang="fr-FR" sz="2400" i="1" smtClean="0">
+                                <a:latin typeface="Cambria Math" panose="02040503050406030204" pitchFamily="18" charset="0"/>
+                              </a:rPr>
+                            </m:ctrlPr>
+                          </m:fPr>
+                          <m:num>
+                            <m:r>
+                              <a:rPr lang="fr-FR" sz="2400" i="1">
+                                <a:latin typeface="Cambria Math" panose="02040503050406030204" pitchFamily="18" charset="0"/>
+                              </a:rPr>
+                              <m:t>1</m:t>
+                            </m:r>
+                          </m:num>
+                          <m:den>
+                            <m:r>
+                              <m:rPr>
+                                <m:sty m:val="p"/>
+                              </m:rPr>
+                              <a:rPr lang="fr-FR" sz="2400">
+                                <a:latin typeface="Cambria Math" panose="02040503050406030204" pitchFamily="18" charset="0"/>
+                              </a:rPr>
+                              <m:t>Δ</m:t>
+                            </m:r>
+                            <m:sSup>
+                              <m:sSupPr>
+                                <m:ctrlPr>
+                                  <a:rPr lang="fr-FR" sz="2400" i="1">
+                                    <a:latin typeface="Cambria Math" panose="02040503050406030204" pitchFamily="18" charset="0"/>
+                                  </a:rPr>
+                                </m:ctrlPr>
+                              </m:sSupPr>
+                              <m:e>
+                                <m:r>
+                                  <m:rPr>
+                                    <m:sty m:val="p"/>
+                                  </m:rPr>
+                                  <a:rPr lang="fr-FR" sz="2400">
+                                    <a:latin typeface="Cambria Math" panose="02040503050406030204" pitchFamily="18" charset="0"/>
+                                  </a:rPr>
+                                  <m:t>z</m:t>
+                                </m:r>
+                              </m:e>
+                              <m:sup>
+                                <m:r>
+                                  <a:rPr lang="fr-FR" sz="2400">
+                                    <a:latin typeface="Cambria Math" panose="02040503050406030204" pitchFamily="18" charset="0"/>
+                                  </a:rPr>
+                                  <m:t>2</m:t>
+                                </m:r>
+                              </m:sup>
+                            </m:sSup>
+                          </m:den>
+                        </m:f>
+                        <m:r>
+                          <a:rPr lang="fr-FR" sz="2400" i="1">
+                            <a:latin typeface="Cambria Math" panose="02040503050406030204" pitchFamily="18" charset="0"/>
+                          </a:rPr>
+                          <m:t>(</m:t>
+                        </m:r>
+                        <m:r>
+                          <a:rPr lang="fr-FR" sz="2400" i="1">
+                            <a:solidFill>
+                              <a:srgbClr val="FF0000"/>
+                            </a:solidFill>
+                            <a:latin typeface="Cambria Math" panose="02040503050406030204" pitchFamily="18" charset="0"/>
+                          </a:rPr>
+                          <m:t>𝑇</m:t>
+                        </m:r>
+                      </m:e>
+                      <m:sub>
+                        <m:r>
+                          <a:rPr lang="fr-FR" sz="2400" i="1">
+                            <a:solidFill>
+                              <a:srgbClr val="FF0000"/>
+                            </a:solidFill>
+                            <a:latin typeface="Cambria Math" panose="02040503050406030204" pitchFamily="18" charset="0"/>
+                          </a:rPr>
+                          <m:t>𝑖</m:t>
+                        </m:r>
+                      </m:sub>
+                    </m:sSub>
+                    <m:r>
+                      <a:rPr lang="fr-FR" sz="2400" i="1" smtClean="0">
+                        <a:solidFill>
+                          <a:srgbClr val="FF0000"/>
+                        </a:solidFill>
+                        <a:latin typeface="Cambria Math" panose="02040503050406030204" pitchFamily="18" charset="0"/>
+                      </a:rPr>
+                      <m:t>+</m:t>
+                    </m:r>
+                    <m:f>
+                      <m:fPr>
+                        <m:ctrlPr>
+                          <a:rPr lang="fr-FR" sz="2400" i="1">
+                            <a:solidFill>
+                              <a:srgbClr val="FF0000"/>
+                            </a:solidFill>
+                            <a:latin typeface="Cambria Math" panose="02040503050406030204" pitchFamily="18" charset="0"/>
+                          </a:rPr>
+                        </m:ctrlPr>
+                      </m:fPr>
+                      <m:num>
+                        <m:r>
+                          <a:rPr lang="fr-FR" sz="2400" i="1">
+                            <a:solidFill>
+                              <a:srgbClr val="FF0000"/>
+                            </a:solidFill>
+                            <a:latin typeface="Cambria Math" panose="02040503050406030204" pitchFamily="18" charset="0"/>
+                          </a:rPr>
+                          <m:t>𝜕</m:t>
+                        </m:r>
+                        <m:r>
+                          <a:rPr lang="fr-FR" sz="2400" i="1">
+                            <a:solidFill>
+                              <a:srgbClr val="FF0000"/>
+                            </a:solidFill>
+                            <a:latin typeface="Cambria Math" panose="02040503050406030204" pitchFamily="18" charset="0"/>
+                          </a:rPr>
+                          <m:t>𝑇</m:t>
+                        </m:r>
+                      </m:num>
+                      <m:den>
+                        <m:r>
+                          <a:rPr lang="fr-FR" sz="2400" i="1">
+                            <a:solidFill>
+                              <a:srgbClr val="FF0000"/>
+                            </a:solidFill>
+                            <a:latin typeface="Cambria Math" panose="02040503050406030204" pitchFamily="18" charset="0"/>
+                          </a:rPr>
+                          <m:t>𝜕</m:t>
+                        </m:r>
+                        <m:r>
+                          <a:rPr lang="fr-FR" sz="2400" b="0" i="1" smtClean="0">
+                            <a:solidFill>
+                              <a:srgbClr val="FF0000"/>
+                            </a:solidFill>
+                            <a:latin typeface="Cambria Math" panose="02040503050406030204" pitchFamily="18" charset="0"/>
+                          </a:rPr>
+                          <m:t>𝑧</m:t>
+                        </m:r>
+                      </m:den>
+                    </m:f>
+                    <m:sSub>
+                      <m:sSubPr>
+                        <m:ctrlPr>
+                          <a:rPr lang="fr-FR" sz="2400" i="1">
+                            <a:solidFill>
+                              <a:srgbClr val="FF0000"/>
+                            </a:solidFill>
+                            <a:latin typeface="Cambria Math" panose="02040503050406030204" pitchFamily="18" charset="0"/>
+                          </a:rPr>
+                        </m:ctrlPr>
+                      </m:sSubPr>
+                      <m:e>
+                        <m:d>
+                          <m:dPr>
+                            <m:begChr m:val=""/>
+                            <m:endChr m:val="|"/>
+                            <m:ctrlPr>
+                              <a:rPr lang="fr-FR" sz="2400" i="1">
+                                <a:solidFill>
+                                  <a:srgbClr val="FF0000"/>
+                                </a:solidFill>
+                                <a:latin typeface="Cambria Math" panose="02040503050406030204" pitchFamily="18" charset="0"/>
+                              </a:rPr>
+                            </m:ctrlPr>
+                          </m:dPr>
+                          <m:e>
+                            <m:r>
+                              <a:rPr lang="fr-FR" sz="2400" i="1">
+                                <a:solidFill>
+                                  <a:srgbClr val="FF0000"/>
+                                </a:solidFill>
+                                <a:latin typeface="Cambria Math" panose="02040503050406030204" pitchFamily="18" charset="0"/>
+                              </a:rPr>
+                              <m:t>​</m:t>
+                            </m:r>
+                          </m:e>
+                        </m:d>
+                      </m:e>
+                      <m:sub>
+                        <m:r>
+                          <a:rPr lang="fr-FR" sz="2400" i="1">
+                            <a:solidFill>
+                              <a:srgbClr val="FF0000"/>
+                            </a:solidFill>
+                            <a:latin typeface="Cambria Math" panose="02040503050406030204" pitchFamily="18" charset="0"/>
+                          </a:rPr>
+                          <m:t>𝑡</m:t>
+                        </m:r>
+                        <m:r>
+                          <a:rPr lang="fr-FR" sz="2400" i="1">
+                            <a:solidFill>
+                              <a:srgbClr val="FF0000"/>
+                            </a:solidFill>
+                            <a:latin typeface="Cambria Math" panose="02040503050406030204" pitchFamily="18" charset="0"/>
+                          </a:rPr>
+                          <m:t>,</m:t>
+                        </m:r>
+                        <m:r>
+                          <a:rPr lang="fr-FR" sz="2400" i="1">
+                            <a:solidFill>
+                              <a:srgbClr val="FF0000"/>
+                            </a:solidFill>
+                            <a:latin typeface="Cambria Math" panose="02040503050406030204" pitchFamily="18" charset="0"/>
+                          </a:rPr>
+                          <m:t>𝑅</m:t>
+                        </m:r>
+                        <m:r>
+                          <a:rPr lang="fr-FR" sz="2400" i="1">
+                            <a:solidFill>
+                              <a:srgbClr val="FF0000"/>
+                            </a:solidFill>
+                            <a:latin typeface="Cambria Math" panose="02040503050406030204" pitchFamily="18" charset="0"/>
+                          </a:rPr>
+                          <m:t>,</m:t>
+                        </m:r>
+                        <m:r>
+                          <a:rPr lang="fr-FR" sz="2400" i="1">
+                            <a:solidFill>
+                              <a:srgbClr val="FF0000"/>
+                            </a:solidFill>
+                            <a:latin typeface="Cambria Math" panose="02040503050406030204" pitchFamily="18" charset="0"/>
+                          </a:rPr>
+                          <m:t>𝑧</m:t>
+                        </m:r>
+                      </m:sub>
+                    </m:sSub>
+                    <m:r>
+                      <m:rPr>
+                        <m:sty m:val="p"/>
+                      </m:rPr>
+                      <a:rPr lang="fr-FR" sz="2400">
+                        <a:solidFill>
+                          <a:srgbClr val="FF0000"/>
+                        </a:solidFill>
+                        <a:latin typeface="Cambria Math" panose="02040503050406030204" pitchFamily="18" charset="0"/>
+                      </a:rPr>
+                      <m:t>Δ</m:t>
+                    </m:r>
+                    <m:r>
+                      <a:rPr lang="fr-FR" sz="2400" b="0" i="1" smtClean="0">
+                        <a:solidFill>
+                          <a:srgbClr val="FF0000"/>
+                        </a:solidFill>
+                        <a:latin typeface="Cambria Math" panose="02040503050406030204" pitchFamily="18" charset="0"/>
+                      </a:rPr>
+                      <m:t>𝑧</m:t>
+                    </m:r>
+                    <m:r>
+                      <a:rPr lang="fr-FR" sz="2400" i="1" smtClean="0">
+                        <a:solidFill>
+                          <a:schemeClr val="tx1"/>
+                        </a:solidFill>
+                        <a:latin typeface="Cambria Math" panose="02040503050406030204" pitchFamily="18" charset="0"/>
+                      </a:rPr>
+                      <m:t>+</m:t>
+                    </m:r>
+                    <m:f>
+                      <m:fPr>
+                        <m:ctrlPr>
+                          <a:rPr lang="fr-FR" sz="2400" i="1">
+                            <a:solidFill>
+                              <a:schemeClr val="tx1"/>
+                            </a:solidFill>
+                            <a:latin typeface="Cambria Math" panose="02040503050406030204" pitchFamily="18" charset="0"/>
+                          </a:rPr>
+                        </m:ctrlPr>
+                      </m:fPr>
+                      <m:num>
+                        <m:sSup>
+                          <m:sSupPr>
+                            <m:ctrlPr>
+                              <a:rPr lang="fr-FR" sz="2400" i="1">
+                                <a:solidFill>
+                                  <a:schemeClr val="tx1"/>
+                                </a:solidFill>
+                                <a:latin typeface="Cambria Math" panose="02040503050406030204" pitchFamily="18" charset="0"/>
+                              </a:rPr>
+                            </m:ctrlPr>
+                          </m:sSupPr>
+                          <m:e>
+                            <m:r>
+                              <a:rPr lang="fr-FR" sz="2400" i="1">
+                                <a:solidFill>
+                                  <a:schemeClr val="tx1"/>
+                                </a:solidFill>
+                                <a:latin typeface="Cambria Math" panose="02040503050406030204" pitchFamily="18" charset="0"/>
+                              </a:rPr>
+                              <m:t>𝜕</m:t>
+                            </m:r>
+                          </m:e>
+                          <m:sup>
+                            <m:r>
+                              <a:rPr lang="fr-FR" sz="2400" i="1">
+                                <a:solidFill>
+                                  <a:schemeClr val="tx1"/>
+                                </a:solidFill>
+                                <a:latin typeface="Cambria Math" panose="02040503050406030204" pitchFamily="18" charset="0"/>
+                              </a:rPr>
+                              <m:t>2</m:t>
+                            </m:r>
+                          </m:sup>
+                        </m:sSup>
+                        <m:r>
+                          <a:rPr lang="fr-FR" sz="2400" i="1">
+                            <a:solidFill>
+                              <a:schemeClr val="tx1"/>
+                            </a:solidFill>
+                            <a:latin typeface="Cambria Math" panose="02040503050406030204" pitchFamily="18" charset="0"/>
+                          </a:rPr>
+                          <m:t>𝑇</m:t>
+                        </m:r>
+                      </m:num>
+                      <m:den>
+                        <m:r>
+                          <a:rPr lang="fr-FR" sz="2400" i="1">
+                            <a:solidFill>
+                              <a:schemeClr val="tx1"/>
+                            </a:solidFill>
+                            <a:latin typeface="Cambria Math" panose="02040503050406030204" pitchFamily="18" charset="0"/>
+                          </a:rPr>
+                          <m:t>𝜕</m:t>
+                        </m:r>
+                        <m:sSup>
+                          <m:sSupPr>
+                            <m:ctrlPr>
+                              <a:rPr lang="fr-FR" sz="2400" i="1">
+                                <a:solidFill>
+                                  <a:schemeClr val="tx1"/>
+                                </a:solidFill>
+                                <a:latin typeface="Cambria Math" panose="02040503050406030204" pitchFamily="18" charset="0"/>
+                              </a:rPr>
+                            </m:ctrlPr>
+                          </m:sSupPr>
+                          <m:e>
+                            <m:r>
+                              <a:rPr lang="fr-FR" sz="2400" b="0" i="1" smtClean="0">
+                                <a:solidFill>
+                                  <a:schemeClr val="tx1"/>
+                                </a:solidFill>
+                                <a:latin typeface="Cambria Math" panose="02040503050406030204" pitchFamily="18" charset="0"/>
+                              </a:rPr>
+                              <m:t>𝑧</m:t>
+                            </m:r>
+                          </m:e>
+                          <m:sup>
+                            <m:r>
+                              <a:rPr lang="fr-FR" sz="2400" i="1">
+                                <a:solidFill>
+                                  <a:schemeClr val="tx1"/>
+                                </a:solidFill>
+                                <a:latin typeface="Cambria Math" panose="02040503050406030204" pitchFamily="18" charset="0"/>
+                              </a:rPr>
+                              <m:t>2</m:t>
+                            </m:r>
+                          </m:sup>
+                        </m:sSup>
+                      </m:den>
+                    </m:f>
+                    <m:sSub>
+                      <m:sSubPr>
+                        <m:ctrlPr>
+                          <a:rPr lang="fr-FR" sz="2400" i="1">
+                            <a:solidFill>
+                              <a:schemeClr val="tx1"/>
+                            </a:solidFill>
+                            <a:latin typeface="Cambria Math" panose="02040503050406030204" pitchFamily="18" charset="0"/>
+                          </a:rPr>
+                        </m:ctrlPr>
+                      </m:sSubPr>
+                      <m:e>
+                        <m:d>
+                          <m:dPr>
+                            <m:begChr m:val=""/>
+                            <m:endChr m:val="|"/>
+                            <m:ctrlPr>
+                              <a:rPr lang="fr-FR" sz="2400" i="1">
+                                <a:solidFill>
+                                  <a:schemeClr val="tx1"/>
+                                </a:solidFill>
+                                <a:latin typeface="Cambria Math" panose="02040503050406030204" pitchFamily="18" charset="0"/>
+                              </a:rPr>
+                            </m:ctrlPr>
+                          </m:dPr>
+                          <m:e>
+                            <m:r>
+                              <a:rPr lang="fr-FR" sz="2400" i="1">
+                                <a:solidFill>
+                                  <a:schemeClr val="tx1"/>
+                                </a:solidFill>
+                                <a:latin typeface="Cambria Math" panose="02040503050406030204" pitchFamily="18" charset="0"/>
+                              </a:rPr>
+                              <m:t>​</m:t>
+                            </m:r>
+                          </m:e>
+                        </m:d>
+                      </m:e>
+                      <m:sub>
+                        <m:r>
+                          <a:rPr lang="fr-FR" sz="2400" i="1">
+                            <a:solidFill>
+                              <a:schemeClr val="tx1"/>
+                            </a:solidFill>
+                            <a:latin typeface="Cambria Math" panose="02040503050406030204" pitchFamily="18" charset="0"/>
+                          </a:rPr>
+                          <m:t>𝑡</m:t>
+                        </m:r>
+                        <m:r>
+                          <a:rPr lang="fr-FR" sz="2400" i="1">
+                            <a:solidFill>
+                              <a:schemeClr val="tx1"/>
+                            </a:solidFill>
+                            <a:latin typeface="Cambria Math" panose="02040503050406030204" pitchFamily="18" charset="0"/>
+                          </a:rPr>
+                          <m:t>,</m:t>
+                        </m:r>
+                        <m:r>
+                          <a:rPr lang="fr-FR" sz="2400" i="1">
+                            <a:solidFill>
+                              <a:schemeClr val="tx1"/>
+                            </a:solidFill>
+                            <a:latin typeface="Cambria Math" panose="02040503050406030204" pitchFamily="18" charset="0"/>
+                          </a:rPr>
+                          <m:t>𝑅</m:t>
+                        </m:r>
+                        <m:r>
+                          <a:rPr lang="fr-FR" sz="2400" i="1">
+                            <a:solidFill>
+                              <a:schemeClr val="tx1"/>
+                            </a:solidFill>
+                            <a:latin typeface="Cambria Math" panose="02040503050406030204" pitchFamily="18" charset="0"/>
+                          </a:rPr>
+                          <m:t>,</m:t>
+                        </m:r>
+                        <m:r>
+                          <a:rPr lang="fr-FR" sz="2400" i="1">
+                            <a:solidFill>
+                              <a:schemeClr val="tx1"/>
+                            </a:solidFill>
+                            <a:latin typeface="Cambria Math" panose="02040503050406030204" pitchFamily="18" charset="0"/>
+                          </a:rPr>
+                          <m:t>𝑧</m:t>
+                        </m:r>
+                      </m:sub>
+                    </m:sSub>
+                    <m:f>
+                      <m:fPr>
+                        <m:ctrlPr>
+                          <a:rPr lang="fr-FR" sz="2400" i="1">
+                            <a:solidFill>
+                              <a:schemeClr val="tx1"/>
+                            </a:solidFill>
+                            <a:latin typeface="Cambria Math" panose="02040503050406030204" pitchFamily="18" charset="0"/>
+                          </a:rPr>
+                        </m:ctrlPr>
+                      </m:fPr>
+                      <m:num>
+                        <m:r>
+                          <m:rPr>
+                            <m:sty m:val="p"/>
+                          </m:rPr>
+                          <a:rPr lang="fr-FR" sz="2400">
+                            <a:solidFill>
+                              <a:schemeClr val="tx1"/>
+                            </a:solidFill>
+                            <a:latin typeface="Cambria Math" panose="02040503050406030204" pitchFamily="18" charset="0"/>
+                          </a:rPr>
+                          <m:t>Δ</m:t>
+                        </m:r>
+                        <m:sSup>
+                          <m:sSupPr>
+                            <m:ctrlPr>
+                              <a:rPr lang="fr-FR" sz="2400" i="1">
+                                <a:solidFill>
+                                  <a:schemeClr val="tx1"/>
+                                </a:solidFill>
+                                <a:latin typeface="Cambria Math" panose="02040503050406030204" pitchFamily="18" charset="0"/>
+                              </a:rPr>
+                            </m:ctrlPr>
+                          </m:sSupPr>
+                          <m:e>
+                            <m:r>
+                              <a:rPr lang="fr-FR" sz="2400" b="0" i="1" smtClean="0">
+                                <a:solidFill>
+                                  <a:schemeClr val="tx1"/>
+                                </a:solidFill>
+                                <a:latin typeface="Cambria Math" panose="02040503050406030204" pitchFamily="18" charset="0"/>
+                              </a:rPr>
+                              <m:t>𝑧</m:t>
+                            </m:r>
+                          </m:e>
+                          <m:sup>
+                            <m:r>
+                              <a:rPr lang="fr-FR" sz="2400" i="1">
+                                <a:solidFill>
+                                  <a:schemeClr val="tx1"/>
+                                </a:solidFill>
+                                <a:latin typeface="Cambria Math" panose="02040503050406030204" pitchFamily="18" charset="0"/>
+                              </a:rPr>
+                              <m:t>2</m:t>
+                            </m:r>
+                          </m:sup>
+                        </m:sSup>
+                      </m:num>
+                      <m:den>
+                        <m:r>
+                          <a:rPr lang="fr-FR" sz="2400" i="1">
+                            <a:solidFill>
+                              <a:schemeClr val="tx1"/>
+                            </a:solidFill>
+                            <a:latin typeface="Cambria Math" panose="02040503050406030204" pitchFamily="18" charset="0"/>
+                          </a:rPr>
+                          <m:t>2!</m:t>
+                        </m:r>
+                      </m:den>
+                    </m:f>
+                    <m:r>
+                      <a:rPr lang="fr-FR" sz="2400" i="1" smtClean="0">
+                        <a:solidFill>
+                          <a:srgbClr val="FF0000"/>
+                        </a:solidFill>
+                        <a:latin typeface="Cambria Math" panose="02040503050406030204" pitchFamily="18" charset="0"/>
+                      </a:rPr>
+                      <m:t>+</m:t>
+                    </m:r>
+                    <m:f>
+                      <m:fPr>
+                        <m:ctrlPr>
+                          <a:rPr lang="fr-FR" sz="2400" i="1" smtClean="0">
+                            <a:solidFill>
+                              <a:srgbClr val="FF0000"/>
+                            </a:solidFill>
+                            <a:latin typeface="Cambria Math" panose="02040503050406030204" pitchFamily="18" charset="0"/>
+                          </a:rPr>
+                        </m:ctrlPr>
+                      </m:fPr>
+                      <m:num>
+                        <m:sSup>
+                          <m:sSupPr>
+                            <m:ctrlPr>
+                              <a:rPr lang="fr-FR" sz="2400" i="1">
+                                <a:solidFill>
+                                  <a:srgbClr val="FF0000"/>
+                                </a:solidFill>
+                                <a:latin typeface="Cambria Math" panose="02040503050406030204" pitchFamily="18" charset="0"/>
+                              </a:rPr>
+                            </m:ctrlPr>
+                          </m:sSupPr>
+                          <m:e>
+                            <m:r>
+                              <a:rPr lang="fr-FR" sz="2400" i="1">
+                                <a:solidFill>
+                                  <a:srgbClr val="FF0000"/>
+                                </a:solidFill>
+                                <a:latin typeface="Cambria Math" panose="02040503050406030204" pitchFamily="18" charset="0"/>
+                              </a:rPr>
+                              <m:t>𝜕</m:t>
+                            </m:r>
+                          </m:e>
+                          <m:sup>
+                            <m:r>
+                              <a:rPr lang="fr-FR" sz="2400" i="1">
+                                <a:solidFill>
+                                  <a:srgbClr val="FF0000"/>
+                                </a:solidFill>
+                                <a:latin typeface="Cambria Math" panose="02040503050406030204" pitchFamily="18" charset="0"/>
+                              </a:rPr>
+                              <m:t>3</m:t>
+                            </m:r>
+                          </m:sup>
+                        </m:sSup>
+                        <m:r>
+                          <a:rPr lang="fr-FR" sz="2400" i="1">
+                            <a:solidFill>
+                              <a:srgbClr val="FF0000"/>
+                            </a:solidFill>
+                            <a:latin typeface="Cambria Math" panose="02040503050406030204" pitchFamily="18" charset="0"/>
+                          </a:rPr>
+                          <m:t>𝑇</m:t>
+                        </m:r>
+                      </m:num>
+                      <m:den>
+                        <m:r>
+                          <a:rPr lang="fr-FR" sz="2400" i="1">
+                            <a:solidFill>
+                              <a:srgbClr val="FF0000"/>
+                            </a:solidFill>
+                            <a:latin typeface="Cambria Math" panose="02040503050406030204" pitchFamily="18" charset="0"/>
+                          </a:rPr>
+                          <m:t>𝜕</m:t>
+                        </m:r>
+                        <m:sSup>
+                          <m:sSupPr>
+                            <m:ctrlPr>
+                              <a:rPr lang="fr-FR" sz="2400" i="1">
+                                <a:solidFill>
+                                  <a:srgbClr val="FF0000"/>
+                                </a:solidFill>
+                                <a:latin typeface="Cambria Math" panose="02040503050406030204" pitchFamily="18" charset="0"/>
+                              </a:rPr>
+                            </m:ctrlPr>
+                          </m:sSupPr>
+                          <m:e>
+                            <m:r>
+                              <a:rPr lang="fr-FR" sz="2400" b="0" i="1" smtClean="0">
+                                <a:solidFill>
+                                  <a:srgbClr val="FF0000"/>
+                                </a:solidFill>
+                                <a:latin typeface="Cambria Math" panose="02040503050406030204" pitchFamily="18" charset="0"/>
+                              </a:rPr>
+                              <m:t>𝑧</m:t>
+                            </m:r>
+                          </m:e>
+                          <m:sup>
+                            <m:r>
+                              <a:rPr lang="fr-FR" sz="2400" i="1">
+                                <a:solidFill>
+                                  <a:srgbClr val="FF0000"/>
+                                </a:solidFill>
+                                <a:latin typeface="Cambria Math" panose="02040503050406030204" pitchFamily="18" charset="0"/>
+                              </a:rPr>
+                              <m:t>3</m:t>
+                            </m:r>
+                          </m:sup>
+                        </m:sSup>
+                      </m:den>
+                    </m:f>
+                    <m:sSub>
+                      <m:sSubPr>
+                        <m:ctrlPr>
+                          <a:rPr lang="fr-FR" sz="2400" i="1">
+                            <a:solidFill>
+                              <a:srgbClr val="FF0000"/>
+                            </a:solidFill>
+                            <a:latin typeface="Cambria Math" panose="02040503050406030204" pitchFamily="18" charset="0"/>
+                          </a:rPr>
+                        </m:ctrlPr>
+                      </m:sSubPr>
+                      <m:e>
+                        <m:d>
+                          <m:dPr>
+                            <m:begChr m:val=""/>
+                            <m:endChr m:val="|"/>
+                            <m:ctrlPr>
+                              <a:rPr lang="fr-FR" sz="2400" i="1">
+                                <a:solidFill>
+                                  <a:srgbClr val="FF0000"/>
+                                </a:solidFill>
+                                <a:latin typeface="Cambria Math" panose="02040503050406030204" pitchFamily="18" charset="0"/>
+                              </a:rPr>
+                            </m:ctrlPr>
+                          </m:dPr>
+                          <m:e>
+                            <m:r>
+                              <a:rPr lang="fr-FR" sz="2400" i="1">
+                                <a:solidFill>
+                                  <a:srgbClr val="FF0000"/>
+                                </a:solidFill>
+                                <a:latin typeface="Cambria Math" panose="02040503050406030204" pitchFamily="18" charset="0"/>
+                              </a:rPr>
+                              <m:t>​</m:t>
+                            </m:r>
+                          </m:e>
+                        </m:d>
+                      </m:e>
+                      <m:sub>
+                        <m:r>
+                          <a:rPr lang="fr-FR" sz="2400" i="1">
+                            <a:solidFill>
+                              <a:srgbClr val="FF0000"/>
+                            </a:solidFill>
+                            <a:latin typeface="Cambria Math" panose="02040503050406030204" pitchFamily="18" charset="0"/>
+                          </a:rPr>
+                          <m:t>𝑡</m:t>
+                        </m:r>
+                        <m:r>
+                          <a:rPr lang="fr-FR" sz="2400" i="1">
+                            <a:solidFill>
+                              <a:srgbClr val="FF0000"/>
+                            </a:solidFill>
+                            <a:latin typeface="Cambria Math" panose="02040503050406030204" pitchFamily="18" charset="0"/>
+                          </a:rPr>
+                          <m:t>,</m:t>
+                        </m:r>
+                        <m:r>
+                          <a:rPr lang="fr-FR" sz="2400" i="1">
+                            <a:solidFill>
+                              <a:srgbClr val="FF0000"/>
+                            </a:solidFill>
+                            <a:latin typeface="Cambria Math" panose="02040503050406030204" pitchFamily="18" charset="0"/>
+                          </a:rPr>
+                          <m:t>𝑅</m:t>
+                        </m:r>
+                        <m:r>
+                          <a:rPr lang="fr-FR" sz="2400" i="1">
+                            <a:solidFill>
+                              <a:srgbClr val="FF0000"/>
+                            </a:solidFill>
+                            <a:latin typeface="Cambria Math" panose="02040503050406030204" pitchFamily="18" charset="0"/>
+                          </a:rPr>
+                          <m:t>,</m:t>
+                        </m:r>
+                        <m:r>
+                          <a:rPr lang="fr-FR" sz="2400" i="1">
+                            <a:solidFill>
+                              <a:srgbClr val="FF0000"/>
+                            </a:solidFill>
+                            <a:latin typeface="Cambria Math" panose="02040503050406030204" pitchFamily="18" charset="0"/>
+                          </a:rPr>
+                          <m:t>𝑧</m:t>
+                        </m:r>
+                      </m:sub>
+                    </m:sSub>
+                    <m:f>
+                      <m:fPr>
+                        <m:ctrlPr>
+                          <a:rPr lang="fr-FR" sz="2400" i="1">
+                            <a:solidFill>
+                              <a:srgbClr val="FF0000"/>
+                            </a:solidFill>
+                            <a:latin typeface="Cambria Math" panose="02040503050406030204" pitchFamily="18" charset="0"/>
+                          </a:rPr>
+                        </m:ctrlPr>
+                      </m:fPr>
+                      <m:num>
+                        <m:r>
+                          <m:rPr>
+                            <m:sty m:val="p"/>
+                          </m:rPr>
+                          <a:rPr lang="fr-FR" sz="2400">
+                            <a:solidFill>
+                              <a:srgbClr val="FF0000"/>
+                            </a:solidFill>
+                            <a:latin typeface="Cambria Math" panose="02040503050406030204" pitchFamily="18" charset="0"/>
+                          </a:rPr>
+                          <m:t>Δ</m:t>
+                        </m:r>
+                        <m:sSup>
+                          <m:sSupPr>
+                            <m:ctrlPr>
+                              <a:rPr lang="fr-FR" sz="2400" i="1">
+                                <a:solidFill>
+                                  <a:srgbClr val="FF0000"/>
+                                </a:solidFill>
+                                <a:latin typeface="Cambria Math" panose="02040503050406030204" pitchFamily="18" charset="0"/>
+                              </a:rPr>
+                            </m:ctrlPr>
+                          </m:sSupPr>
+                          <m:e>
+                            <m:r>
+                              <a:rPr lang="fr-FR" sz="2400" b="0" i="1" smtClean="0">
+                                <a:solidFill>
+                                  <a:srgbClr val="FF0000"/>
+                                </a:solidFill>
+                                <a:latin typeface="Cambria Math" panose="02040503050406030204" pitchFamily="18" charset="0"/>
+                              </a:rPr>
+                              <m:t>𝑧</m:t>
+                            </m:r>
+                          </m:e>
+                          <m:sup>
+                            <m:r>
+                              <a:rPr lang="fr-FR" sz="2400" i="1">
+                                <a:solidFill>
+                                  <a:srgbClr val="FF0000"/>
+                                </a:solidFill>
+                                <a:latin typeface="Cambria Math" panose="02040503050406030204" pitchFamily="18" charset="0"/>
+                              </a:rPr>
+                              <m:t>3</m:t>
+                            </m:r>
+                          </m:sup>
+                        </m:sSup>
+                      </m:num>
+                      <m:den>
+                        <m:r>
+                          <a:rPr lang="fr-FR" sz="2400" i="1">
+                            <a:solidFill>
+                              <a:srgbClr val="FF0000"/>
+                            </a:solidFill>
+                            <a:latin typeface="Cambria Math" panose="02040503050406030204" pitchFamily="18" charset="0"/>
+                          </a:rPr>
+                          <m:t>3!</m:t>
+                        </m:r>
+                      </m:den>
+                    </m:f>
+                    <m:r>
+                      <a:rPr lang="fr-FR" sz="2400" i="1">
+                        <a:latin typeface="Cambria Math" panose="02040503050406030204" pitchFamily="18" charset="0"/>
+                      </a:rPr>
+                      <m:t>+</m:t>
+                    </m:r>
+                    <m:f>
+                      <m:fPr>
+                        <m:ctrlPr>
+                          <a:rPr lang="fr-FR" sz="2400" i="1">
+                            <a:latin typeface="Cambria Math" panose="02040503050406030204" pitchFamily="18" charset="0"/>
+                          </a:rPr>
+                        </m:ctrlPr>
+                      </m:fPr>
+                      <m:num>
+                        <m:sSup>
+                          <m:sSupPr>
+                            <m:ctrlPr>
+                              <a:rPr lang="fr-FR" sz="2400" i="1">
+                                <a:latin typeface="Cambria Math" panose="02040503050406030204" pitchFamily="18" charset="0"/>
+                              </a:rPr>
+                            </m:ctrlPr>
+                          </m:sSupPr>
+                          <m:e>
+                            <m:r>
+                              <a:rPr lang="fr-FR" sz="2400" i="1">
+                                <a:latin typeface="Cambria Math" panose="02040503050406030204" pitchFamily="18" charset="0"/>
+                              </a:rPr>
+                              <m:t>𝜕</m:t>
+                            </m:r>
+                          </m:e>
+                          <m:sup>
+                            <m:r>
+                              <a:rPr lang="fr-FR" sz="2400" i="1">
+                                <a:latin typeface="Cambria Math" panose="02040503050406030204" pitchFamily="18" charset="0"/>
+                              </a:rPr>
+                              <m:t>4</m:t>
+                            </m:r>
+                          </m:sup>
+                        </m:sSup>
+                        <m:r>
+                          <a:rPr lang="fr-FR" sz="2400" i="1">
+                            <a:latin typeface="Cambria Math" panose="02040503050406030204" pitchFamily="18" charset="0"/>
+                          </a:rPr>
+                          <m:t>𝑇</m:t>
+                        </m:r>
+                      </m:num>
+                      <m:den>
+                        <m:r>
+                          <a:rPr lang="fr-FR" sz="2400" i="1">
+                            <a:latin typeface="Cambria Math" panose="02040503050406030204" pitchFamily="18" charset="0"/>
+                          </a:rPr>
+                          <m:t>𝜕</m:t>
+                        </m:r>
+                        <m:sSup>
+                          <m:sSupPr>
+                            <m:ctrlPr>
+                              <a:rPr lang="fr-FR" sz="2400" i="1">
+                                <a:latin typeface="Cambria Math" panose="02040503050406030204" pitchFamily="18" charset="0"/>
+                              </a:rPr>
+                            </m:ctrlPr>
+                          </m:sSupPr>
+                          <m:e>
+                            <m:r>
+                              <a:rPr lang="fr-FR" sz="2400" b="0" i="1" smtClean="0">
+                                <a:latin typeface="Cambria Math" panose="02040503050406030204" pitchFamily="18" charset="0"/>
+                              </a:rPr>
+                              <m:t>𝑧</m:t>
+                            </m:r>
+                          </m:e>
+                          <m:sup>
+                            <m:r>
+                              <a:rPr lang="fr-FR" sz="2400" i="1">
+                                <a:latin typeface="Cambria Math" panose="02040503050406030204" pitchFamily="18" charset="0"/>
+                              </a:rPr>
+                              <m:t>4</m:t>
+                            </m:r>
+                          </m:sup>
+                        </m:sSup>
+                      </m:den>
+                    </m:f>
+                    <m:sSub>
+                      <m:sSubPr>
+                        <m:ctrlPr>
+                          <a:rPr lang="fr-FR" sz="2400" i="1">
+                            <a:latin typeface="Cambria Math" panose="02040503050406030204" pitchFamily="18" charset="0"/>
+                          </a:rPr>
+                        </m:ctrlPr>
+                      </m:sSubPr>
+                      <m:e>
+                        <m:d>
+                          <m:dPr>
+                            <m:begChr m:val=""/>
+                            <m:endChr m:val="|"/>
+                            <m:ctrlPr>
+                              <a:rPr lang="fr-FR" sz="2400" i="1">
+                                <a:latin typeface="Cambria Math" panose="02040503050406030204" pitchFamily="18" charset="0"/>
+                              </a:rPr>
+                            </m:ctrlPr>
+                          </m:dPr>
+                          <m:e>
+                            <m:r>
+                              <a:rPr lang="fr-FR" sz="2400" i="1">
+                                <a:latin typeface="Cambria Math" panose="02040503050406030204" pitchFamily="18" charset="0"/>
+                              </a:rPr>
+                              <m:t>​</m:t>
+                            </m:r>
+                          </m:e>
+                        </m:d>
+                      </m:e>
+                      <m:sub>
+                        <m:r>
+                          <a:rPr lang="fr-FR" sz="2400" i="1">
+                            <a:latin typeface="Cambria Math" panose="02040503050406030204" pitchFamily="18" charset="0"/>
+                          </a:rPr>
+                          <m:t>𝑖</m:t>
+                        </m:r>
+                      </m:sub>
+                    </m:sSub>
+                    <m:f>
+                      <m:fPr>
+                        <m:ctrlPr>
+                          <a:rPr lang="fr-FR" sz="2400" i="1">
+                            <a:latin typeface="Cambria Math" panose="02040503050406030204" pitchFamily="18" charset="0"/>
+                          </a:rPr>
+                        </m:ctrlPr>
+                      </m:fPr>
+                      <m:num>
+                        <m:r>
+                          <m:rPr>
+                            <m:sty m:val="p"/>
+                          </m:rPr>
+                          <a:rPr lang="fr-FR" sz="2400">
+                            <a:latin typeface="Cambria Math" panose="02040503050406030204" pitchFamily="18" charset="0"/>
+                          </a:rPr>
+                          <m:t>Δ</m:t>
+                        </m:r>
+                        <m:sSup>
+                          <m:sSupPr>
+                            <m:ctrlPr>
+                              <a:rPr lang="fr-FR" sz="2400" i="1">
+                                <a:latin typeface="Cambria Math" panose="02040503050406030204" pitchFamily="18" charset="0"/>
+                              </a:rPr>
+                            </m:ctrlPr>
+                          </m:sSupPr>
+                          <m:e>
+                            <m:r>
+                              <a:rPr lang="fr-FR" sz="2400" b="0" i="1" smtClean="0">
+                                <a:latin typeface="Cambria Math" panose="02040503050406030204" pitchFamily="18" charset="0"/>
+                              </a:rPr>
+                              <m:t>𝑧</m:t>
+                            </m:r>
+                          </m:e>
+                          <m:sup>
+                            <m:r>
+                              <a:rPr lang="fr-FR" sz="2400" i="1">
+                                <a:latin typeface="Cambria Math" panose="02040503050406030204" pitchFamily="18" charset="0"/>
+                              </a:rPr>
+                              <m:t>4</m:t>
+                            </m:r>
+                          </m:sup>
+                        </m:sSup>
+                      </m:num>
+                      <m:den>
+                        <m:r>
+                          <a:rPr lang="fr-FR" sz="2400" i="1">
+                            <a:latin typeface="Cambria Math" panose="02040503050406030204" pitchFamily="18" charset="0"/>
+                          </a:rPr>
+                          <m:t>4!</m:t>
+                        </m:r>
+                      </m:den>
+                    </m:f>
+                  </m:oMath>
+                </a14:m>
+                <a:endParaRPr lang="fr-FR" sz="2400" dirty="0"/>
+              </a:p>
+              <a:p>
+                <a:pPr marL="0" indent="0">
+                  <a:buNone/>
+                </a:pPr>
+                <a:r>
+                  <a:rPr lang="fr-FR" sz="2400" b="0" dirty="0"/>
+                  <a:t> 			</a:t>
+                </a:r>
+                <a:r>
+                  <a:rPr lang="fr-FR" sz="2400" dirty="0"/>
+                  <a:t> </a:t>
+                </a:r>
+                <a14:m>
+                  <m:oMath xmlns:m="http://schemas.openxmlformats.org/officeDocument/2006/math">
+                    <m:r>
+                      <a:rPr lang="fr-FR" sz="2400" b="0" i="0" smtClean="0">
+                        <a:latin typeface="Cambria Math" panose="02040503050406030204" pitchFamily="18" charset="0"/>
+                      </a:rPr>
+                      <m:t>    </m:t>
+                    </m:r>
+                    <m:r>
+                      <a:rPr lang="fr-FR" sz="2400" b="0" i="1" smtClean="0">
+                        <a:solidFill>
+                          <a:srgbClr val="FF0000"/>
+                        </a:solidFill>
+                        <a:latin typeface="Cambria Math" panose="02040503050406030204" pitchFamily="18" charset="0"/>
+                      </a:rPr>
+                      <m:t>+</m:t>
+                    </m:r>
+                    <m:sSub>
+                      <m:sSubPr>
+                        <m:ctrlPr>
+                          <a:rPr lang="fr-FR" sz="2400" i="1">
+                            <a:solidFill>
+                              <a:srgbClr val="FF0000"/>
+                            </a:solidFill>
+                            <a:latin typeface="Cambria Math" panose="02040503050406030204" pitchFamily="18" charset="0"/>
+                          </a:rPr>
+                        </m:ctrlPr>
+                      </m:sSubPr>
+                      <m:e>
+                        <m:r>
+                          <a:rPr lang="fr-FR" sz="2400" i="1">
+                            <a:solidFill>
+                              <a:srgbClr val="FF0000"/>
+                            </a:solidFill>
+                            <a:latin typeface="Cambria Math" panose="02040503050406030204" pitchFamily="18" charset="0"/>
+                          </a:rPr>
+                          <m:t>𝑇</m:t>
+                        </m:r>
+                      </m:e>
+                      <m:sub>
+                        <m:r>
+                          <a:rPr lang="fr-FR" sz="2400" i="1">
+                            <a:solidFill>
+                              <a:srgbClr val="FF0000"/>
+                            </a:solidFill>
+                            <a:latin typeface="Cambria Math" panose="02040503050406030204" pitchFamily="18" charset="0"/>
+                          </a:rPr>
+                          <m:t>𝑖</m:t>
+                        </m:r>
+                      </m:sub>
+                    </m:sSub>
+                    <m:r>
+                      <a:rPr lang="fr-FR" sz="2400" b="0" i="1" smtClean="0">
+                        <a:solidFill>
+                          <a:srgbClr val="FF0000"/>
+                        </a:solidFill>
+                        <a:latin typeface="Cambria Math" panose="02040503050406030204" pitchFamily="18" charset="0"/>
+                      </a:rPr>
+                      <m:t>−</m:t>
+                    </m:r>
+                    <m:f>
+                      <m:fPr>
+                        <m:ctrlPr>
+                          <a:rPr lang="fr-FR" sz="2400" i="1" smtClean="0">
+                            <a:solidFill>
+                              <a:srgbClr val="FF0000"/>
+                            </a:solidFill>
+                            <a:latin typeface="Cambria Math" panose="02040503050406030204" pitchFamily="18" charset="0"/>
+                          </a:rPr>
+                        </m:ctrlPr>
+                      </m:fPr>
+                      <m:num>
+                        <m:r>
+                          <a:rPr lang="fr-FR" sz="2400" i="1">
+                            <a:solidFill>
+                              <a:srgbClr val="FF0000"/>
+                            </a:solidFill>
+                            <a:latin typeface="Cambria Math" panose="02040503050406030204" pitchFamily="18" charset="0"/>
+                          </a:rPr>
+                          <m:t>𝜕</m:t>
+                        </m:r>
+                        <m:r>
+                          <a:rPr lang="fr-FR" sz="2400" i="1">
+                            <a:solidFill>
+                              <a:srgbClr val="FF0000"/>
+                            </a:solidFill>
+                            <a:latin typeface="Cambria Math" panose="02040503050406030204" pitchFamily="18" charset="0"/>
+                          </a:rPr>
+                          <m:t>𝑇</m:t>
+                        </m:r>
+                      </m:num>
+                      <m:den>
+                        <m:r>
+                          <a:rPr lang="fr-FR" sz="2400" i="1">
+                            <a:solidFill>
+                              <a:srgbClr val="FF0000"/>
+                            </a:solidFill>
+                            <a:latin typeface="Cambria Math" panose="02040503050406030204" pitchFamily="18" charset="0"/>
+                          </a:rPr>
+                          <m:t>𝜕</m:t>
+                        </m:r>
+                        <m:r>
+                          <a:rPr lang="fr-FR" sz="2400" i="1">
+                            <a:solidFill>
+                              <a:srgbClr val="FF0000"/>
+                            </a:solidFill>
+                            <a:latin typeface="Cambria Math" panose="02040503050406030204" pitchFamily="18" charset="0"/>
+                          </a:rPr>
+                          <m:t>𝑧</m:t>
+                        </m:r>
+                      </m:den>
+                    </m:f>
+                    <m:sSub>
+                      <m:sSubPr>
+                        <m:ctrlPr>
+                          <a:rPr lang="fr-FR" sz="2400" i="1">
+                            <a:solidFill>
+                              <a:srgbClr val="FF0000"/>
+                            </a:solidFill>
+                            <a:latin typeface="Cambria Math" panose="02040503050406030204" pitchFamily="18" charset="0"/>
+                          </a:rPr>
+                        </m:ctrlPr>
+                      </m:sSubPr>
+                      <m:e>
+                        <m:d>
+                          <m:dPr>
+                            <m:begChr m:val=""/>
+                            <m:endChr m:val="|"/>
+                            <m:ctrlPr>
+                              <a:rPr lang="fr-FR" sz="2400" i="1">
+                                <a:solidFill>
+                                  <a:srgbClr val="FF0000"/>
+                                </a:solidFill>
+                                <a:latin typeface="Cambria Math" panose="02040503050406030204" pitchFamily="18" charset="0"/>
+                              </a:rPr>
+                            </m:ctrlPr>
+                          </m:dPr>
+                          <m:e>
+                            <m:r>
+                              <a:rPr lang="fr-FR" sz="2400" i="1">
+                                <a:solidFill>
+                                  <a:srgbClr val="FF0000"/>
+                                </a:solidFill>
+                                <a:latin typeface="Cambria Math" panose="02040503050406030204" pitchFamily="18" charset="0"/>
+                              </a:rPr>
+                              <m:t>​</m:t>
+                            </m:r>
+                          </m:e>
+                        </m:d>
+                      </m:e>
+                      <m:sub>
+                        <m:r>
+                          <a:rPr lang="fr-FR" sz="2400" i="1">
+                            <a:solidFill>
+                              <a:srgbClr val="FF0000"/>
+                            </a:solidFill>
+                            <a:latin typeface="Cambria Math" panose="02040503050406030204" pitchFamily="18" charset="0"/>
+                          </a:rPr>
+                          <m:t>𝑡</m:t>
+                        </m:r>
+                        <m:r>
+                          <a:rPr lang="fr-FR" sz="2400" i="1">
+                            <a:solidFill>
+                              <a:srgbClr val="FF0000"/>
+                            </a:solidFill>
+                            <a:latin typeface="Cambria Math" panose="02040503050406030204" pitchFamily="18" charset="0"/>
+                          </a:rPr>
+                          <m:t>,</m:t>
+                        </m:r>
+                        <m:r>
+                          <a:rPr lang="fr-FR" sz="2400" i="1">
+                            <a:solidFill>
+                              <a:srgbClr val="FF0000"/>
+                            </a:solidFill>
+                            <a:latin typeface="Cambria Math" panose="02040503050406030204" pitchFamily="18" charset="0"/>
+                          </a:rPr>
+                          <m:t>𝑅</m:t>
+                        </m:r>
+                        <m:r>
+                          <a:rPr lang="fr-FR" sz="2400" i="1">
+                            <a:solidFill>
+                              <a:srgbClr val="FF0000"/>
+                            </a:solidFill>
+                            <a:latin typeface="Cambria Math" panose="02040503050406030204" pitchFamily="18" charset="0"/>
+                          </a:rPr>
+                          <m:t>,</m:t>
+                        </m:r>
+                        <m:r>
+                          <a:rPr lang="fr-FR" sz="2400" i="1">
+                            <a:solidFill>
+                              <a:srgbClr val="FF0000"/>
+                            </a:solidFill>
+                            <a:latin typeface="Cambria Math" panose="02040503050406030204" pitchFamily="18" charset="0"/>
+                          </a:rPr>
+                          <m:t>𝑧</m:t>
+                        </m:r>
+                      </m:sub>
+                    </m:sSub>
+                    <m:r>
+                      <m:rPr>
+                        <m:sty m:val="p"/>
+                      </m:rPr>
+                      <a:rPr lang="fr-FR" sz="2400">
+                        <a:solidFill>
+                          <a:srgbClr val="FF0000"/>
+                        </a:solidFill>
+                        <a:latin typeface="Cambria Math" panose="02040503050406030204" pitchFamily="18" charset="0"/>
+                      </a:rPr>
+                      <m:t>Δ</m:t>
+                    </m:r>
+                    <m:r>
+                      <a:rPr lang="fr-FR" sz="2400" i="1">
+                        <a:solidFill>
+                          <a:srgbClr val="FF0000"/>
+                        </a:solidFill>
+                        <a:latin typeface="Cambria Math" panose="02040503050406030204" pitchFamily="18" charset="0"/>
+                      </a:rPr>
+                      <m:t>𝑧</m:t>
+                    </m:r>
+                    <m:r>
+                      <a:rPr lang="fr-FR" sz="2400" i="1">
+                        <a:latin typeface="Cambria Math" panose="02040503050406030204" pitchFamily="18" charset="0"/>
+                      </a:rPr>
+                      <m:t>+</m:t>
+                    </m:r>
+                    <m:f>
+                      <m:fPr>
+                        <m:ctrlPr>
+                          <a:rPr lang="fr-FR" sz="2400" i="1">
+                            <a:latin typeface="Cambria Math" panose="02040503050406030204" pitchFamily="18" charset="0"/>
+                          </a:rPr>
+                        </m:ctrlPr>
+                      </m:fPr>
+                      <m:num>
+                        <m:sSup>
+                          <m:sSupPr>
+                            <m:ctrlPr>
+                              <a:rPr lang="fr-FR" sz="2400" i="1">
+                                <a:latin typeface="Cambria Math" panose="02040503050406030204" pitchFamily="18" charset="0"/>
+                              </a:rPr>
+                            </m:ctrlPr>
+                          </m:sSupPr>
+                          <m:e>
+                            <m:r>
+                              <a:rPr lang="fr-FR" sz="2400" i="1">
+                                <a:latin typeface="Cambria Math" panose="02040503050406030204" pitchFamily="18" charset="0"/>
+                              </a:rPr>
+                              <m:t>𝜕</m:t>
+                            </m:r>
+                          </m:e>
+                          <m:sup>
+                            <m:r>
+                              <a:rPr lang="fr-FR" sz="2400" i="1">
+                                <a:latin typeface="Cambria Math" panose="02040503050406030204" pitchFamily="18" charset="0"/>
+                              </a:rPr>
+                              <m:t>2</m:t>
+                            </m:r>
+                          </m:sup>
+                        </m:sSup>
+                        <m:r>
+                          <a:rPr lang="fr-FR" sz="2400" i="1">
+                            <a:latin typeface="Cambria Math" panose="02040503050406030204" pitchFamily="18" charset="0"/>
+                          </a:rPr>
+                          <m:t>𝑇</m:t>
+                        </m:r>
+                      </m:num>
+                      <m:den>
+                        <m:r>
+                          <a:rPr lang="fr-FR" sz="2400" i="1">
+                            <a:latin typeface="Cambria Math" panose="02040503050406030204" pitchFamily="18" charset="0"/>
+                          </a:rPr>
+                          <m:t>𝜕</m:t>
+                        </m:r>
+                        <m:sSup>
+                          <m:sSupPr>
+                            <m:ctrlPr>
+                              <a:rPr lang="fr-FR" sz="2400" i="1">
+                                <a:latin typeface="Cambria Math" panose="02040503050406030204" pitchFamily="18" charset="0"/>
+                              </a:rPr>
+                            </m:ctrlPr>
+                          </m:sSupPr>
+                          <m:e>
+                            <m:r>
+                              <a:rPr lang="fr-FR" sz="2400" i="1">
+                                <a:latin typeface="Cambria Math" panose="02040503050406030204" pitchFamily="18" charset="0"/>
+                              </a:rPr>
+                              <m:t>𝑧</m:t>
+                            </m:r>
+                          </m:e>
+                          <m:sup>
+                            <m:r>
+                              <a:rPr lang="fr-FR" sz="2400" i="1">
+                                <a:latin typeface="Cambria Math" panose="02040503050406030204" pitchFamily="18" charset="0"/>
+                              </a:rPr>
+                              <m:t>2</m:t>
+                            </m:r>
+                          </m:sup>
+                        </m:sSup>
+                      </m:den>
+                    </m:f>
+                    <m:sSub>
+                      <m:sSubPr>
+                        <m:ctrlPr>
+                          <a:rPr lang="fr-FR" sz="2400" i="1">
+                            <a:latin typeface="Cambria Math" panose="02040503050406030204" pitchFamily="18" charset="0"/>
+                          </a:rPr>
+                        </m:ctrlPr>
+                      </m:sSubPr>
+                      <m:e>
+                        <m:d>
+                          <m:dPr>
+                            <m:begChr m:val=""/>
+                            <m:endChr m:val="|"/>
+                            <m:ctrlPr>
+                              <a:rPr lang="fr-FR" sz="2400" i="1">
+                                <a:latin typeface="Cambria Math" panose="02040503050406030204" pitchFamily="18" charset="0"/>
+                              </a:rPr>
+                            </m:ctrlPr>
+                          </m:dPr>
+                          <m:e>
+                            <m:r>
+                              <a:rPr lang="fr-FR" sz="2400" i="1">
+                                <a:latin typeface="Cambria Math" panose="02040503050406030204" pitchFamily="18" charset="0"/>
+                              </a:rPr>
+                              <m:t>​</m:t>
+                            </m:r>
+                          </m:e>
+                        </m:d>
+                      </m:e>
+                      <m:sub>
+                        <m:r>
+                          <a:rPr lang="fr-FR" sz="2400" i="1">
+                            <a:latin typeface="Cambria Math" panose="02040503050406030204" pitchFamily="18" charset="0"/>
+                          </a:rPr>
+                          <m:t>𝑡</m:t>
+                        </m:r>
+                        <m:r>
+                          <a:rPr lang="fr-FR" sz="2400" i="1">
+                            <a:latin typeface="Cambria Math" panose="02040503050406030204" pitchFamily="18" charset="0"/>
+                          </a:rPr>
+                          <m:t>,</m:t>
+                        </m:r>
+                        <m:r>
+                          <a:rPr lang="fr-FR" sz="2400" i="1">
+                            <a:latin typeface="Cambria Math" panose="02040503050406030204" pitchFamily="18" charset="0"/>
+                          </a:rPr>
+                          <m:t>𝑅</m:t>
+                        </m:r>
+                        <m:r>
+                          <a:rPr lang="fr-FR" sz="2400" i="1">
+                            <a:latin typeface="Cambria Math" panose="02040503050406030204" pitchFamily="18" charset="0"/>
+                          </a:rPr>
+                          <m:t>,</m:t>
+                        </m:r>
+                        <m:r>
+                          <a:rPr lang="fr-FR" sz="2400" i="1">
+                            <a:latin typeface="Cambria Math" panose="02040503050406030204" pitchFamily="18" charset="0"/>
+                          </a:rPr>
+                          <m:t>𝑧</m:t>
+                        </m:r>
+                      </m:sub>
+                    </m:sSub>
+                    <m:f>
+                      <m:fPr>
+                        <m:ctrlPr>
+                          <a:rPr lang="fr-FR" sz="2400" i="1">
+                            <a:latin typeface="Cambria Math" panose="02040503050406030204" pitchFamily="18" charset="0"/>
+                          </a:rPr>
+                        </m:ctrlPr>
+                      </m:fPr>
+                      <m:num>
+                        <m:r>
+                          <m:rPr>
+                            <m:sty m:val="p"/>
+                          </m:rPr>
+                          <a:rPr lang="fr-FR" sz="2400">
+                            <a:latin typeface="Cambria Math" panose="02040503050406030204" pitchFamily="18" charset="0"/>
+                          </a:rPr>
+                          <m:t>Δ</m:t>
+                        </m:r>
+                        <m:sSup>
+                          <m:sSupPr>
+                            <m:ctrlPr>
+                              <a:rPr lang="fr-FR" sz="2400" i="1">
+                                <a:latin typeface="Cambria Math" panose="02040503050406030204" pitchFamily="18" charset="0"/>
+                              </a:rPr>
+                            </m:ctrlPr>
+                          </m:sSupPr>
+                          <m:e>
+                            <m:r>
+                              <a:rPr lang="fr-FR" sz="2400" i="1">
+                                <a:latin typeface="Cambria Math" panose="02040503050406030204" pitchFamily="18" charset="0"/>
+                              </a:rPr>
+                              <m:t>𝑧</m:t>
+                            </m:r>
+                          </m:e>
+                          <m:sup>
+                            <m:r>
+                              <a:rPr lang="fr-FR" sz="2400" i="1">
+                                <a:latin typeface="Cambria Math" panose="02040503050406030204" pitchFamily="18" charset="0"/>
+                              </a:rPr>
+                              <m:t>2</m:t>
+                            </m:r>
+                          </m:sup>
+                        </m:sSup>
+                      </m:num>
+                      <m:den>
+                        <m:r>
+                          <a:rPr lang="fr-FR" sz="2400" i="1">
+                            <a:latin typeface="Cambria Math" panose="02040503050406030204" pitchFamily="18" charset="0"/>
+                          </a:rPr>
+                          <m:t>2!</m:t>
+                        </m:r>
+                      </m:den>
+                    </m:f>
+                    <m:r>
+                      <a:rPr lang="fr-FR" sz="2400" b="0" i="1" smtClean="0">
+                        <a:solidFill>
+                          <a:srgbClr val="FF0000"/>
+                        </a:solidFill>
+                        <a:latin typeface="Cambria Math" panose="02040503050406030204" pitchFamily="18" charset="0"/>
+                      </a:rPr>
+                      <m:t>−</m:t>
+                    </m:r>
+                    <m:f>
+                      <m:fPr>
+                        <m:ctrlPr>
+                          <a:rPr lang="fr-FR" sz="2400" i="1">
+                            <a:solidFill>
+                              <a:srgbClr val="FF0000"/>
+                            </a:solidFill>
+                            <a:latin typeface="Cambria Math" panose="02040503050406030204" pitchFamily="18" charset="0"/>
+                          </a:rPr>
+                        </m:ctrlPr>
+                      </m:fPr>
+                      <m:num>
+                        <m:sSup>
+                          <m:sSupPr>
+                            <m:ctrlPr>
+                              <a:rPr lang="fr-FR" sz="2400" i="1">
+                                <a:solidFill>
+                                  <a:srgbClr val="FF0000"/>
+                                </a:solidFill>
+                                <a:latin typeface="Cambria Math" panose="02040503050406030204" pitchFamily="18" charset="0"/>
+                              </a:rPr>
+                            </m:ctrlPr>
+                          </m:sSupPr>
+                          <m:e>
+                            <m:r>
+                              <a:rPr lang="fr-FR" sz="2400" i="1">
+                                <a:solidFill>
+                                  <a:srgbClr val="FF0000"/>
+                                </a:solidFill>
+                                <a:latin typeface="Cambria Math" panose="02040503050406030204" pitchFamily="18" charset="0"/>
+                              </a:rPr>
+                              <m:t>𝜕</m:t>
+                            </m:r>
+                          </m:e>
+                          <m:sup>
+                            <m:r>
+                              <a:rPr lang="fr-FR" sz="2400" i="1">
+                                <a:solidFill>
+                                  <a:srgbClr val="FF0000"/>
+                                </a:solidFill>
+                                <a:latin typeface="Cambria Math" panose="02040503050406030204" pitchFamily="18" charset="0"/>
+                              </a:rPr>
+                              <m:t>3</m:t>
+                            </m:r>
+                          </m:sup>
+                        </m:sSup>
+                        <m:r>
+                          <a:rPr lang="fr-FR" sz="2400" i="1">
+                            <a:solidFill>
+                              <a:srgbClr val="FF0000"/>
+                            </a:solidFill>
+                            <a:latin typeface="Cambria Math" panose="02040503050406030204" pitchFamily="18" charset="0"/>
+                          </a:rPr>
+                          <m:t>𝑇</m:t>
+                        </m:r>
+                      </m:num>
+                      <m:den>
+                        <m:r>
+                          <a:rPr lang="fr-FR" sz="2400" i="1">
+                            <a:solidFill>
+                              <a:srgbClr val="FF0000"/>
+                            </a:solidFill>
+                            <a:latin typeface="Cambria Math" panose="02040503050406030204" pitchFamily="18" charset="0"/>
+                          </a:rPr>
+                          <m:t>𝜕</m:t>
+                        </m:r>
+                        <m:sSup>
+                          <m:sSupPr>
+                            <m:ctrlPr>
+                              <a:rPr lang="fr-FR" sz="2400" i="1">
+                                <a:solidFill>
+                                  <a:srgbClr val="FF0000"/>
+                                </a:solidFill>
+                                <a:latin typeface="Cambria Math" panose="02040503050406030204" pitchFamily="18" charset="0"/>
+                              </a:rPr>
+                            </m:ctrlPr>
+                          </m:sSupPr>
+                          <m:e>
+                            <m:r>
+                              <a:rPr lang="fr-FR" sz="2400" i="1">
+                                <a:solidFill>
+                                  <a:srgbClr val="FF0000"/>
+                                </a:solidFill>
+                                <a:latin typeface="Cambria Math" panose="02040503050406030204" pitchFamily="18" charset="0"/>
+                              </a:rPr>
+                              <m:t>𝑧</m:t>
+                            </m:r>
+                          </m:e>
+                          <m:sup>
+                            <m:r>
+                              <a:rPr lang="fr-FR" sz="2400" i="1">
+                                <a:solidFill>
+                                  <a:srgbClr val="FF0000"/>
+                                </a:solidFill>
+                                <a:latin typeface="Cambria Math" panose="02040503050406030204" pitchFamily="18" charset="0"/>
+                              </a:rPr>
+                              <m:t>3</m:t>
+                            </m:r>
+                          </m:sup>
+                        </m:sSup>
+                      </m:den>
+                    </m:f>
+                    <m:sSub>
+                      <m:sSubPr>
+                        <m:ctrlPr>
+                          <a:rPr lang="fr-FR" sz="2400" i="1">
+                            <a:solidFill>
+                              <a:srgbClr val="FF0000"/>
+                            </a:solidFill>
+                            <a:latin typeface="Cambria Math" panose="02040503050406030204" pitchFamily="18" charset="0"/>
+                          </a:rPr>
+                        </m:ctrlPr>
+                      </m:sSubPr>
+                      <m:e>
+                        <m:d>
+                          <m:dPr>
+                            <m:begChr m:val=""/>
+                            <m:endChr m:val="|"/>
+                            <m:ctrlPr>
+                              <a:rPr lang="fr-FR" sz="2400" i="1">
+                                <a:solidFill>
+                                  <a:srgbClr val="FF0000"/>
+                                </a:solidFill>
+                                <a:latin typeface="Cambria Math" panose="02040503050406030204" pitchFamily="18" charset="0"/>
+                              </a:rPr>
+                            </m:ctrlPr>
+                          </m:dPr>
+                          <m:e>
+                            <m:r>
+                              <a:rPr lang="fr-FR" sz="2400" i="1">
+                                <a:solidFill>
+                                  <a:srgbClr val="FF0000"/>
+                                </a:solidFill>
+                                <a:latin typeface="Cambria Math" panose="02040503050406030204" pitchFamily="18" charset="0"/>
+                              </a:rPr>
+                              <m:t>​</m:t>
+                            </m:r>
+                          </m:e>
+                        </m:d>
+                      </m:e>
+                      <m:sub>
+                        <m:r>
+                          <a:rPr lang="fr-FR" sz="2400" i="1">
+                            <a:solidFill>
+                              <a:srgbClr val="FF0000"/>
+                            </a:solidFill>
+                            <a:latin typeface="Cambria Math" panose="02040503050406030204" pitchFamily="18" charset="0"/>
+                          </a:rPr>
+                          <m:t>𝑡</m:t>
+                        </m:r>
+                        <m:r>
+                          <a:rPr lang="fr-FR" sz="2400" i="1">
+                            <a:solidFill>
+                              <a:srgbClr val="FF0000"/>
+                            </a:solidFill>
+                            <a:latin typeface="Cambria Math" panose="02040503050406030204" pitchFamily="18" charset="0"/>
+                          </a:rPr>
+                          <m:t>,</m:t>
+                        </m:r>
+                        <m:r>
+                          <a:rPr lang="fr-FR" sz="2400" i="1">
+                            <a:solidFill>
+                              <a:srgbClr val="FF0000"/>
+                            </a:solidFill>
+                            <a:latin typeface="Cambria Math" panose="02040503050406030204" pitchFamily="18" charset="0"/>
+                          </a:rPr>
+                          <m:t>𝑅</m:t>
+                        </m:r>
+                        <m:r>
+                          <a:rPr lang="fr-FR" sz="2400" i="1">
+                            <a:solidFill>
+                              <a:srgbClr val="FF0000"/>
+                            </a:solidFill>
+                            <a:latin typeface="Cambria Math" panose="02040503050406030204" pitchFamily="18" charset="0"/>
+                          </a:rPr>
+                          <m:t>,</m:t>
+                        </m:r>
+                        <m:r>
+                          <a:rPr lang="fr-FR" sz="2400" i="1">
+                            <a:solidFill>
+                              <a:srgbClr val="FF0000"/>
+                            </a:solidFill>
+                            <a:latin typeface="Cambria Math" panose="02040503050406030204" pitchFamily="18" charset="0"/>
+                          </a:rPr>
+                          <m:t>𝑧</m:t>
+                        </m:r>
+                      </m:sub>
+                    </m:sSub>
+                    <m:f>
+                      <m:fPr>
+                        <m:ctrlPr>
+                          <a:rPr lang="fr-FR" sz="2400" i="1">
+                            <a:solidFill>
+                              <a:srgbClr val="FF0000"/>
+                            </a:solidFill>
+                            <a:latin typeface="Cambria Math" panose="02040503050406030204" pitchFamily="18" charset="0"/>
+                          </a:rPr>
+                        </m:ctrlPr>
+                      </m:fPr>
+                      <m:num>
+                        <m:r>
+                          <m:rPr>
+                            <m:sty m:val="p"/>
+                          </m:rPr>
+                          <a:rPr lang="fr-FR" sz="2400">
+                            <a:solidFill>
+                              <a:srgbClr val="FF0000"/>
+                            </a:solidFill>
+                            <a:latin typeface="Cambria Math" panose="02040503050406030204" pitchFamily="18" charset="0"/>
+                          </a:rPr>
+                          <m:t>Δ</m:t>
+                        </m:r>
+                        <m:sSup>
+                          <m:sSupPr>
+                            <m:ctrlPr>
+                              <a:rPr lang="fr-FR" sz="2400" i="1">
+                                <a:solidFill>
+                                  <a:srgbClr val="FF0000"/>
+                                </a:solidFill>
+                                <a:latin typeface="Cambria Math" panose="02040503050406030204" pitchFamily="18" charset="0"/>
+                              </a:rPr>
+                            </m:ctrlPr>
+                          </m:sSupPr>
+                          <m:e>
+                            <m:r>
+                              <a:rPr lang="fr-FR" sz="2400" i="1">
+                                <a:solidFill>
+                                  <a:srgbClr val="FF0000"/>
+                                </a:solidFill>
+                                <a:latin typeface="Cambria Math" panose="02040503050406030204" pitchFamily="18" charset="0"/>
+                              </a:rPr>
+                              <m:t>𝑧</m:t>
+                            </m:r>
+                          </m:e>
+                          <m:sup>
+                            <m:r>
+                              <a:rPr lang="fr-FR" sz="2400" i="1">
+                                <a:solidFill>
+                                  <a:srgbClr val="FF0000"/>
+                                </a:solidFill>
+                                <a:latin typeface="Cambria Math" panose="02040503050406030204" pitchFamily="18" charset="0"/>
+                              </a:rPr>
+                              <m:t>3</m:t>
+                            </m:r>
+                          </m:sup>
+                        </m:sSup>
+                      </m:num>
+                      <m:den>
+                        <m:r>
+                          <a:rPr lang="fr-FR" sz="2400" i="1">
+                            <a:solidFill>
+                              <a:srgbClr val="FF0000"/>
+                            </a:solidFill>
+                            <a:latin typeface="Cambria Math" panose="02040503050406030204" pitchFamily="18" charset="0"/>
+                          </a:rPr>
+                          <m:t>3!</m:t>
+                        </m:r>
+                      </m:den>
+                    </m:f>
+                    <m:r>
+                      <a:rPr lang="fr-FR" sz="2400" i="1">
+                        <a:latin typeface="Cambria Math" panose="02040503050406030204" pitchFamily="18" charset="0"/>
+                      </a:rPr>
+                      <m:t>+</m:t>
+                    </m:r>
+                    <m:f>
+                      <m:fPr>
+                        <m:ctrlPr>
+                          <a:rPr lang="fr-FR" sz="2400" i="1">
+                            <a:latin typeface="Cambria Math" panose="02040503050406030204" pitchFamily="18" charset="0"/>
+                          </a:rPr>
+                        </m:ctrlPr>
+                      </m:fPr>
+                      <m:num>
+                        <m:sSup>
+                          <m:sSupPr>
+                            <m:ctrlPr>
+                              <a:rPr lang="fr-FR" sz="2400" i="1">
+                                <a:latin typeface="Cambria Math" panose="02040503050406030204" pitchFamily="18" charset="0"/>
+                              </a:rPr>
+                            </m:ctrlPr>
+                          </m:sSupPr>
+                          <m:e>
+                            <m:r>
+                              <a:rPr lang="fr-FR" sz="2400" i="1">
+                                <a:latin typeface="Cambria Math" panose="02040503050406030204" pitchFamily="18" charset="0"/>
+                              </a:rPr>
+                              <m:t>𝜕</m:t>
+                            </m:r>
+                          </m:e>
+                          <m:sup>
+                            <m:r>
+                              <a:rPr lang="fr-FR" sz="2400" i="1">
+                                <a:latin typeface="Cambria Math" panose="02040503050406030204" pitchFamily="18" charset="0"/>
+                              </a:rPr>
+                              <m:t>4</m:t>
+                            </m:r>
+                          </m:sup>
+                        </m:sSup>
+                        <m:r>
+                          <a:rPr lang="fr-FR" sz="2400" i="1">
+                            <a:latin typeface="Cambria Math" panose="02040503050406030204" pitchFamily="18" charset="0"/>
+                          </a:rPr>
+                          <m:t>𝑇</m:t>
+                        </m:r>
+                      </m:num>
+                      <m:den>
+                        <m:r>
+                          <a:rPr lang="fr-FR" sz="2400" i="1">
+                            <a:latin typeface="Cambria Math" panose="02040503050406030204" pitchFamily="18" charset="0"/>
+                          </a:rPr>
+                          <m:t>𝜕</m:t>
+                        </m:r>
+                        <m:sSup>
+                          <m:sSupPr>
+                            <m:ctrlPr>
+                              <a:rPr lang="fr-FR" sz="2400" i="1">
+                                <a:latin typeface="Cambria Math" panose="02040503050406030204" pitchFamily="18" charset="0"/>
+                              </a:rPr>
+                            </m:ctrlPr>
+                          </m:sSupPr>
+                          <m:e>
+                            <m:r>
+                              <a:rPr lang="fr-FR" sz="2400" i="1">
+                                <a:latin typeface="Cambria Math" panose="02040503050406030204" pitchFamily="18" charset="0"/>
+                              </a:rPr>
+                              <m:t>𝑧</m:t>
+                            </m:r>
+                          </m:e>
+                          <m:sup>
+                            <m:r>
+                              <a:rPr lang="fr-FR" sz="2400" i="1">
+                                <a:latin typeface="Cambria Math" panose="02040503050406030204" pitchFamily="18" charset="0"/>
+                              </a:rPr>
+                              <m:t>4</m:t>
+                            </m:r>
+                          </m:sup>
+                        </m:sSup>
+                      </m:den>
+                    </m:f>
+                    <m:sSub>
+                      <m:sSubPr>
+                        <m:ctrlPr>
+                          <a:rPr lang="fr-FR" sz="2400" i="1">
+                            <a:latin typeface="Cambria Math" panose="02040503050406030204" pitchFamily="18" charset="0"/>
+                          </a:rPr>
+                        </m:ctrlPr>
+                      </m:sSubPr>
+                      <m:e>
+                        <m:d>
+                          <m:dPr>
+                            <m:begChr m:val=""/>
+                            <m:endChr m:val="|"/>
+                            <m:ctrlPr>
+                              <a:rPr lang="fr-FR" sz="2400" i="1">
+                                <a:latin typeface="Cambria Math" panose="02040503050406030204" pitchFamily="18" charset="0"/>
+                              </a:rPr>
+                            </m:ctrlPr>
+                          </m:dPr>
+                          <m:e>
+                            <m:r>
+                              <a:rPr lang="fr-FR" sz="2400" i="1">
+                                <a:latin typeface="Cambria Math" panose="02040503050406030204" pitchFamily="18" charset="0"/>
+                              </a:rPr>
+                              <m:t>​</m:t>
+                            </m:r>
+                          </m:e>
+                        </m:d>
+                      </m:e>
+                      <m:sub>
+                        <m:r>
+                          <a:rPr lang="fr-FR" sz="2400" i="1">
+                            <a:latin typeface="Cambria Math" panose="02040503050406030204" pitchFamily="18" charset="0"/>
+                          </a:rPr>
+                          <m:t>𝑖</m:t>
+                        </m:r>
+                      </m:sub>
+                    </m:sSub>
+                    <m:f>
+                      <m:fPr>
+                        <m:ctrlPr>
+                          <a:rPr lang="fr-FR" sz="2400" i="1">
+                            <a:latin typeface="Cambria Math" panose="02040503050406030204" pitchFamily="18" charset="0"/>
+                          </a:rPr>
+                        </m:ctrlPr>
+                      </m:fPr>
+                      <m:num>
+                        <m:r>
+                          <m:rPr>
+                            <m:sty m:val="p"/>
+                          </m:rPr>
+                          <a:rPr lang="fr-FR" sz="2400">
+                            <a:latin typeface="Cambria Math" panose="02040503050406030204" pitchFamily="18" charset="0"/>
+                          </a:rPr>
+                          <m:t>Δ</m:t>
+                        </m:r>
+                        <m:sSup>
+                          <m:sSupPr>
+                            <m:ctrlPr>
+                              <a:rPr lang="fr-FR" sz="2400" i="1">
+                                <a:latin typeface="Cambria Math" panose="02040503050406030204" pitchFamily="18" charset="0"/>
+                              </a:rPr>
+                            </m:ctrlPr>
+                          </m:sSupPr>
+                          <m:e>
+                            <m:r>
+                              <a:rPr lang="fr-FR" sz="2400" i="1">
+                                <a:latin typeface="Cambria Math" panose="02040503050406030204" pitchFamily="18" charset="0"/>
+                              </a:rPr>
+                              <m:t>𝑧</m:t>
+                            </m:r>
+                          </m:e>
+                          <m:sup>
+                            <m:r>
+                              <a:rPr lang="fr-FR" sz="2400" i="1">
+                                <a:latin typeface="Cambria Math" panose="02040503050406030204" pitchFamily="18" charset="0"/>
+                              </a:rPr>
+                              <m:t>4</m:t>
+                            </m:r>
+                          </m:sup>
+                        </m:sSup>
+                      </m:num>
+                      <m:den>
+                        <m:r>
+                          <a:rPr lang="fr-FR" sz="2400" i="1">
+                            <a:latin typeface="Cambria Math" panose="02040503050406030204" pitchFamily="18" charset="0"/>
+                          </a:rPr>
+                          <m:t>4!</m:t>
+                        </m:r>
+                      </m:den>
+                    </m:f>
+                  </m:oMath>
+                </a14:m>
+                <a:endParaRPr lang="fr-FR" sz="2000" b="0" dirty="0"/>
+              </a:p>
+              <a:p>
+                <a:pPr marL="0" indent="0">
+                  <a:buNone/>
+                </a:pPr>
+                <a:r>
+                  <a:rPr lang="fr-FR" sz="2000" dirty="0"/>
+                  <a:t>			      </a:t>
+                </a:r>
+                <a14:m>
+                  <m:oMath xmlns:m="http://schemas.openxmlformats.org/officeDocument/2006/math">
+                    <m:r>
+                      <a:rPr lang="fr-FR" sz="2000" i="1">
+                        <a:solidFill>
+                          <a:srgbClr val="FF0000"/>
+                        </a:solidFill>
+                        <a:latin typeface="Cambria Math" panose="02040503050406030204" pitchFamily="18" charset="0"/>
+                      </a:rPr>
+                      <m:t>− </m:t>
+                    </m:r>
+                    <m:r>
+                      <a:rPr lang="fr-FR" sz="2400" b="0" i="1" dirty="0" smtClean="0">
+                        <a:solidFill>
+                          <a:srgbClr val="FF0000"/>
+                        </a:solidFill>
+                        <a:latin typeface="Cambria Math" panose="02040503050406030204" pitchFamily="18" charset="0"/>
+                      </a:rPr>
+                      <m:t>2</m:t>
+                    </m:r>
+                    <m:sSub>
+                      <m:sSubPr>
+                        <m:ctrlPr>
+                          <a:rPr lang="fr-FR" sz="2400" i="1">
+                            <a:solidFill>
+                              <a:srgbClr val="FF0000"/>
+                            </a:solidFill>
+                            <a:latin typeface="Cambria Math" panose="02040503050406030204" pitchFamily="18" charset="0"/>
+                          </a:rPr>
+                        </m:ctrlPr>
+                      </m:sSubPr>
+                      <m:e>
+                        <m:r>
+                          <a:rPr lang="fr-FR" sz="2400" i="1">
+                            <a:solidFill>
+                              <a:srgbClr val="FF0000"/>
+                            </a:solidFill>
+                            <a:latin typeface="Cambria Math" panose="02040503050406030204" pitchFamily="18" charset="0"/>
+                          </a:rPr>
+                          <m:t>𝑇</m:t>
+                        </m:r>
+                      </m:e>
+                      <m:sub>
+                        <m:r>
+                          <a:rPr lang="fr-FR" sz="2400" i="1">
+                            <a:solidFill>
+                              <a:srgbClr val="FF0000"/>
+                            </a:solidFill>
+                            <a:latin typeface="Cambria Math" panose="02040503050406030204" pitchFamily="18" charset="0"/>
+                          </a:rPr>
+                          <m:t>𝑖</m:t>
+                        </m:r>
+                      </m:sub>
+                    </m:sSub>
+                    <m:r>
+                      <a:rPr lang="fr-FR" sz="2400" b="0" i="1" smtClean="0">
+                        <a:solidFill>
+                          <a:schemeClr val="tx1"/>
+                        </a:solidFill>
+                        <a:latin typeface="Cambria Math" panose="02040503050406030204" pitchFamily="18" charset="0"/>
+                      </a:rPr>
+                      <m:t>+</m:t>
+                    </m:r>
+                    <m:r>
+                      <a:rPr lang="fr-FR" sz="2400" b="0" i="1" smtClean="0">
+                        <a:solidFill>
+                          <a:schemeClr val="tx1"/>
+                        </a:solidFill>
+                        <a:latin typeface="Cambria Math" panose="02040503050406030204" pitchFamily="18" charset="0"/>
+                      </a:rPr>
+                      <m:t>𝑜</m:t>
+                    </m:r>
+                    <m:r>
+                      <a:rPr lang="fr-FR" sz="2400" b="0" i="1" smtClean="0">
+                        <a:solidFill>
+                          <a:schemeClr val="tx1"/>
+                        </a:solidFill>
+                        <a:latin typeface="Cambria Math" panose="02040503050406030204" pitchFamily="18" charset="0"/>
+                      </a:rPr>
+                      <m:t>(</m:t>
+                    </m:r>
+                    <m:r>
+                      <m:rPr>
+                        <m:sty m:val="p"/>
+                      </m:rPr>
+                      <a:rPr lang="fr-FR" sz="2400">
+                        <a:solidFill>
+                          <a:schemeClr val="tx1"/>
+                        </a:solidFill>
+                        <a:latin typeface="Cambria Math" panose="02040503050406030204" pitchFamily="18" charset="0"/>
+                      </a:rPr>
+                      <m:t>Δ</m:t>
+                    </m:r>
+                    <m:sSup>
+                      <m:sSupPr>
+                        <m:ctrlPr>
+                          <a:rPr lang="fr-FR" sz="2400" i="1">
+                            <a:solidFill>
+                              <a:schemeClr val="tx1"/>
+                            </a:solidFill>
+                            <a:latin typeface="Cambria Math" panose="02040503050406030204" pitchFamily="18" charset="0"/>
+                          </a:rPr>
+                        </m:ctrlPr>
+                      </m:sSupPr>
+                      <m:e>
+                        <m:r>
+                          <a:rPr lang="fr-FR" sz="2400" i="1">
+                            <a:solidFill>
+                              <a:schemeClr val="tx1"/>
+                            </a:solidFill>
+                            <a:latin typeface="Cambria Math" panose="02040503050406030204" pitchFamily="18" charset="0"/>
+                          </a:rPr>
+                          <m:t>𝑧</m:t>
+                        </m:r>
+                      </m:e>
+                      <m:sup>
+                        <m:r>
+                          <a:rPr lang="fr-FR" sz="2400" i="1">
+                            <a:solidFill>
+                              <a:schemeClr val="tx1"/>
+                            </a:solidFill>
+                            <a:latin typeface="Cambria Math" panose="02040503050406030204" pitchFamily="18" charset="0"/>
+                          </a:rPr>
+                          <m:t>4</m:t>
+                        </m:r>
+                      </m:sup>
+                    </m:sSup>
+                    <m:r>
+                      <a:rPr lang="fr-FR" sz="2400" b="0" i="1" smtClean="0">
+                        <a:solidFill>
+                          <a:schemeClr val="tx1"/>
+                        </a:solidFill>
+                        <a:latin typeface="Cambria Math" panose="02040503050406030204" pitchFamily="18" charset="0"/>
+                      </a:rPr>
+                      <m:t>)</m:t>
+                    </m:r>
+                  </m:oMath>
+                </a14:m>
+                <a:r>
+                  <a:rPr lang="fr-FR" sz="2400" b="0" dirty="0">
+                    <a:solidFill>
+                      <a:schemeClr val="tx1"/>
+                    </a:solidFill>
+                  </a:rPr>
+                  <a:t>)</a:t>
+                </a:r>
+              </a:p>
+              <a:p>
+                <a:pPr marL="0" indent="0">
+                  <a:buNone/>
+                </a:pPr>
+                <a:r>
+                  <a:rPr lang="fr-FR" sz="2400" dirty="0"/>
+                  <a:t>			 </a:t>
+                </a:r>
+                <a14:m>
+                  <m:oMath xmlns:m="http://schemas.openxmlformats.org/officeDocument/2006/math">
+                    <m:r>
+                      <a:rPr lang="fr-FR" sz="2000" b="0" i="0" dirty="0" smtClean="0">
+                        <a:solidFill>
+                          <a:srgbClr val="FF0000"/>
+                        </a:solidFill>
+                        <a:latin typeface="Cambria Math" panose="02040503050406030204" pitchFamily="18" charset="0"/>
+                      </a:rPr>
+                      <m:t>    </m:t>
+                    </m:r>
+                    <m:r>
+                      <a:rPr lang="fr-FR" sz="2000" i="1" dirty="0" smtClean="0">
+                        <a:solidFill>
+                          <a:srgbClr val="FF0000"/>
+                        </a:solidFill>
+                        <a:latin typeface="Cambria Math" panose="02040503050406030204" pitchFamily="18" charset="0"/>
+                      </a:rPr>
+                      <m:t>=</m:t>
+                    </m:r>
+                    <m:r>
+                      <a:rPr lang="fr-FR" sz="2000" i="1">
+                        <a:solidFill>
+                          <a:srgbClr val="FF0000"/>
+                        </a:solidFill>
+                        <a:latin typeface="Cambria Math" panose="02040503050406030204" pitchFamily="18" charset="0"/>
+                      </a:rPr>
+                      <m:t> </m:t>
+                    </m:r>
+                    <m:f>
+                      <m:fPr>
+                        <m:ctrlPr>
+                          <a:rPr lang="fr-FR" sz="2400" i="1">
+                            <a:latin typeface="Cambria Math" panose="02040503050406030204" pitchFamily="18" charset="0"/>
+                          </a:rPr>
+                        </m:ctrlPr>
+                      </m:fPr>
+                      <m:num>
+                        <m:sSup>
+                          <m:sSupPr>
+                            <m:ctrlPr>
+                              <a:rPr lang="fr-FR" sz="2400" i="1">
+                                <a:latin typeface="Cambria Math" panose="02040503050406030204" pitchFamily="18" charset="0"/>
+                              </a:rPr>
+                            </m:ctrlPr>
+                          </m:sSupPr>
+                          <m:e>
+                            <m:r>
+                              <a:rPr lang="fr-FR" sz="2400" i="1">
+                                <a:latin typeface="Cambria Math" panose="02040503050406030204" pitchFamily="18" charset="0"/>
+                              </a:rPr>
+                              <m:t>𝜕</m:t>
+                            </m:r>
+                          </m:e>
+                          <m:sup>
+                            <m:r>
+                              <a:rPr lang="fr-FR" sz="2400" i="1">
+                                <a:latin typeface="Cambria Math" panose="02040503050406030204" pitchFamily="18" charset="0"/>
+                              </a:rPr>
+                              <m:t>2</m:t>
+                            </m:r>
+                          </m:sup>
+                        </m:sSup>
+                        <m:r>
+                          <a:rPr lang="fr-FR" sz="2400" i="1">
+                            <a:latin typeface="Cambria Math" panose="02040503050406030204" pitchFamily="18" charset="0"/>
+                          </a:rPr>
+                          <m:t>𝑇</m:t>
+                        </m:r>
+                      </m:num>
+                      <m:den>
+                        <m:r>
+                          <a:rPr lang="fr-FR" sz="2400" i="1">
+                            <a:latin typeface="Cambria Math" panose="02040503050406030204" pitchFamily="18" charset="0"/>
+                          </a:rPr>
+                          <m:t>𝜕</m:t>
+                        </m:r>
+                        <m:sSup>
+                          <m:sSupPr>
+                            <m:ctrlPr>
+                              <a:rPr lang="fr-FR" sz="2400" i="1">
+                                <a:latin typeface="Cambria Math" panose="02040503050406030204" pitchFamily="18" charset="0"/>
+                              </a:rPr>
+                            </m:ctrlPr>
+                          </m:sSupPr>
+                          <m:e>
+                            <m:r>
+                              <a:rPr lang="fr-FR" sz="2400" i="1">
+                                <a:latin typeface="Cambria Math" panose="02040503050406030204" pitchFamily="18" charset="0"/>
+                              </a:rPr>
+                              <m:t>𝑧</m:t>
+                            </m:r>
+                          </m:e>
+                          <m:sup>
+                            <m:r>
+                              <a:rPr lang="fr-FR" sz="2400" i="1">
+                                <a:latin typeface="Cambria Math" panose="02040503050406030204" pitchFamily="18" charset="0"/>
+                              </a:rPr>
+                              <m:t>2</m:t>
+                            </m:r>
+                          </m:sup>
+                        </m:sSup>
+                      </m:den>
+                    </m:f>
+                    <m:sSub>
+                      <m:sSubPr>
+                        <m:ctrlPr>
+                          <a:rPr lang="fr-FR" sz="2400" i="1">
+                            <a:latin typeface="Cambria Math" panose="02040503050406030204" pitchFamily="18" charset="0"/>
+                          </a:rPr>
+                        </m:ctrlPr>
+                      </m:sSubPr>
+                      <m:e>
+                        <m:d>
+                          <m:dPr>
+                            <m:begChr m:val=""/>
+                            <m:endChr m:val="|"/>
+                            <m:ctrlPr>
+                              <a:rPr lang="fr-FR" sz="2400" i="1">
+                                <a:latin typeface="Cambria Math" panose="02040503050406030204" pitchFamily="18" charset="0"/>
+                              </a:rPr>
+                            </m:ctrlPr>
+                          </m:dPr>
+                          <m:e>
+                            <m:r>
+                              <a:rPr lang="fr-FR" sz="2400" i="1">
+                                <a:latin typeface="Cambria Math" panose="02040503050406030204" pitchFamily="18" charset="0"/>
+                              </a:rPr>
+                              <m:t>​</m:t>
+                            </m:r>
+                          </m:e>
+                        </m:d>
+                      </m:e>
+                      <m:sub>
+                        <m:r>
+                          <a:rPr lang="fr-FR" sz="2400" i="1">
+                            <a:latin typeface="Cambria Math" panose="02040503050406030204" pitchFamily="18" charset="0"/>
+                          </a:rPr>
+                          <m:t>𝑡</m:t>
+                        </m:r>
+                        <m:r>
+                          <a:rPr lang="fr-FR" sz="2400" i="1">
+                            <a:latin typeface="Cambria Math" panose="02040503050406030204" pitchFamily="18" charset="0"/>
+                          </a:rPr>
+                          <m:t>,</m:t>
+                        </m:r>
+                        <m:r>
+                          <a:rPr lang="fr-FR" sz="2400" i="1">
+                            <a:latin typeface="Cambria Math" panose="02040503050406030204" pitchFamily="18" charset="0"/>
+                          </a:rPr>
+                          <m:t>𝑅</m:t>
+                        </m:r>
+                        <m:r>
+                          <a:rPr lang="fr-FR" sz="2400" i="1">
+                            <a:latin typeface="Cambria Math" panose="02040503050406030204" pitchFamily="18" charset="0"/>
+                          </a:rPr>
+                          <m:t>,</m:t>
+                        </m:r>
+                        <m:r>
+                          <a:rPr lang="fr-FR" sz="2400" i="1">
+                            <a:latin typeface="Cambria Math" panose="02040503050406030204" pitchFamily="18" charset="0"/>
+                          </a:rPr>
+                          <m:t>𝑧</m:t>
+                        </m:r>
+                      </m:sub>
+                    </m:sSub>
+                    <m:r>
+                      <a:rPr lang="fr-FR" sz="2400" b="0" i="0" smtClean="0">
+                        <a:latin typeface="Cambria Math" panose="02040503050406030204" pitchFamily="18" charset="0"/>
+                      </a:rPr>
+                      <m:t>+</m:t>
+                    </m:r>
+                    <m:r>
+                      <a:rPr lang="fr-FR" sz="2400" b="0" i="1" smtClean="0">
+                        <a:latin typeface="Cambria Math" panose="02040503050406030204" pitchFamily="18" charset="0"/>
+                      </a:rPr>
+                      <m:t>2</m:t>
+                    </m:r>
+                    <m:f>
+                      <m:fPr>
+                        <m:ctrlPr>
+                          <a:rPr lang="fr-FR" sz="2400" i="1">
+                            <a:latin typeface="Cambria Math" panose="02040503050406030204" pitchFamily="18" charset="0"/>
+                          </a:rPr>
+                        </m:ctrlPr>
+                      </m:fPr>
+                      <m:num>
+                        <m:sSup>
+                          <m:sSupPr>
+                            <m:ctrlPr>
+                              <a:rPr lang="fr-FR" sz="2400" i="1">
+                                <a:latin typeface="Cambria Math" panose="02040503050406030204" pitchFamily="18" charset="0"/>
+                              </a:rPr>
+                            </m:ctrlPr>
+                          </m:sSupPr>
+                          <m:e>
+                            <m:r>
+                              <a:rPr lang="fr-FR" sz="2400" i="1">
+                                <a:latin typeface="Cambria Math" panose="02040503050406030204" pitchFamily="18" charset="0"/>
+                              </a:rPr>
+                              <m:t>𝜕</m:t>
+                            </m:r>
+                          </m:e>
+                          <m:sup>
+                            <m:r>
+                              <a:rPr lang="fr-FR" sz="2400" i="1">
+                                <a:latin typeface="Cambria Math" panose="02040503050406030204" pitchFamily="18" charset="0"/>
+                              </a:rPr>
+                              <m:t>4</m:t>
+                            </m:r>
+                          </m:sup>
+                        </m:sSup>
+                        <m:r>
+                          <a:rPr lang="fr-FR" sz="2400" i="1">
+                            <a:latin typeface="Cambria Math" panose="02040503050406030204" pitchFamily="18" charset="0"/>
+                          </a:rPr>
+                          <m:t>𝑇</m:t>
+                        </m:r>
+                      </m:num>
+                      <m:den>
+                        <m:r>
+                          <a:rPr lang="fr-FR" sz="2400" i="1">
+                            <a:latin typeface="Cambria Math" panose="02040503050406030204" pitchFamily="18" charset="0"/>
+                          </a:rPr>
+                          <m:t>𝜕</m:t>
+                        </m:r>
+                        <m:sSup>
+                          <m:sSupPr>
+                            <m:ctrlPr>
+                              <a:rPr lang="fr-FR" sz="2400" i="1">
+                                <a:latin typeface="Cambria Math" panose="02040503050406030204" pitchFamily="18" charset="0"/>
+                              </a:rPr>
+                            </m:ctrlPr>
+                          </m:sSupPr>
+                          <m:e>
+                            <m:r>
+                              <a:rPr lang="fr-FR" sz="2400" i="1">
+                                <a:latin typeface="Cambria Math" panose="02040503050406030204" pitchFamily="18" charset="0"/>
+                              </a:rPr>
+                              <m:t>𝑧</m:t>
+                            </m:r>
+                          </m:e>
+                          <m:sup>
+                            <m:r>
+                              <a:rPr lang="fr-FR" sz="2400" i="1">
+                                <a:latin typeface="Cambria Math" panose="02040503050406030204" pitchFamily="18" charset="0"/>
+                              </a:rPr>
+                              <m:t>4</m:t>
+                            </m:r>
+                          </m:sup>
+                        </m:sSup>
+                      </m:den>
+                    </m:f>
+                    <m:sSub>
+                      <m:sSubPr>
+                        <m:ctrlPr>
+                          <a:rPr lang="fr-FR" sz="2400" i="1">
+                            <a:latin typeface="Cambria Math" panose="02040503050406030204" pitchFamily="18" charset="0"/>
+                          </a:rPr>
+                        </m:ctrlPr>
+                      </m:sSubPr>
+                      <m:e>
+                        <m:d>
+                          <m:dPr>
+                            <m:begChr m:val=""/>
+                            <m:endChr m:val="|"/>
+                            <m:ctrlPr>
+                              <a:rPr lang="fr-FR" sz="2400" i="1">
+                                <a:latin typeface="Cambria Math" panose="02040503050406030204" pitchFamily="18" charset="0"/>
+                              </a:rPr>
+                            </m:ctrlPr>
+                          </m:dPr>
+                          <m:e>
+                            <m:r>
+                              <a:rPr lang="fr-FR" sz="2400" i="1">
+                                <a:latin typeface="Cambria Math" panose="02040503050406030204" pitchFamily="18" charset="0"/>
+                              </a:rPr>
+                              <m:t>​</m:t>
+                            </m:r>
+                          </m:e>
+                        </m:d>
+                      </m:e>
+                      <m:sub>
+                        <m:r>
+                          <a:rPr lang="fr-FR" sz="2400" i="1">
+                            <a:latin typeface="Cambria Math" panose="02040503050406030204" pitchFamily="18" charset="0"/>
+                          </a:rPr>
+                          <m:t>𝑖</m:t>
+                        </m:r>
+                      </m:sub>
+                    </m:sSub>
+                    <m:f>
+                      <m:fPr>
+                        <m:ctrlPr>
+                          <a:rPr lang="fr-FR" sz="2400" i="1">
+                            <a:latin typeface="Cambria Math" panose="02040503050406030204" pitchFamily="18" charset="0"/>
+                          </a:rPr>
+                        </m:ctrlPr>
+                      </m:fPr>
+                      <m:num>
+                        <m:r>
+                          <m:rPr>
+                            <m:sty m:val="p"/>
+                          </m:rPr>
+                          <a:rPr lang="fr-FR" sz="2400" smtClean="0">
+                            <a:solidFill>
+                              <a:srgbClr val="0070C0"/>
+                            </a:solidFill>
+                            <a:latin typeface="Cambria Math" panose="02040503050406030204" pitchFamily="18" charset="0"/>
+                          </a:rPr>
+                          <m:t>Δ</m:t>
+                        </m:r>
+                        <m:sSup>
+                          <m:sSupPr>
+                            <m:ctrlPr>
+                              <a:rPr lang="fr-FR" sz="2400" i="1">
+                                <a:solidFill>
+                                  <a:srgbClr val="0070C0"/>
+                                </a:solidFill>
+                                <a:latin typeface="Cambria Math" panose="02040503050406030204" pitchFamily="18" charset="0"/>
+                              </a:rPr>
+                            </m:ctrlPr>
+                          </m:sSupPr>
+                          <m:e>
+                            <m:r>
+                              <a:rPr lang="fr-FR" sz="2400" i="1">
+                                <a:solidFill>
+                                  <a:srgbClr val="0070C0"/>
+                                </a:solidFill>
+                                <a:latin typeface="Cambria Math" panose="02040503050406030204" pitchFamily="18" charset="0"/>
+                              </a:rPr>
+                              <m:t>𝑧</m:t>
+                            </m:r>
+                          </m:e>
+                          <m:sup>
+                            <m:r>
+                              <a:rPr lang="fr-FR" sz="2400" b="0" i="1" smtClean="0">
+                                <a:solidFill>
+                                  <a:srgbClr val="0070C0"/>
+                                </a:solidFill>
+                                <a:latin typeface="Cambria Math" panose="02040503050406030204" pitchFamily="18" charset="0"/>
+                              </a:rPr>
+                              <m:t>2</m:t>
+                            </m:r>
+                          </m:sup>
+                        </m:sSup>
+                      </m:num>
+                      <m:den>
+                        <m:r>
+                          <a:rPr lang="fr-FR" sz="2400" i="1">
+                            <a:latin typeface="Cambria Math" panose="02040503050406030204" pitchFamily="18" charset="0"/>
+                          </a:rPr>
+                          <m:t>4!</m:t>
+                        </m:r>
+                      </m:den>
+                    </m:f>
+                    <m:r>
+                      <a:rPr lang="fr-FR" sz="2400" b="0" i="1" smtClean="0">
+                        <a:latin typeface="Cambria Math" panose="02040503050406030204" pitchFamily="18" charset="0"/>
+                      </a:rPr>
+                      <m:t>+</m:t>
+                    </m:r>
+                    <m:r>
+                      <a:rPr lang="fr-FR" sz="2400" i="1">
+                        <a:latin typeface="Cambria Math" panose="02040503050406030204" pitchFamily="18" charset="0"/>
+                      </a:rPr>
+                      <m:t>𝑜</m:t>
+                    </m:r>
+                    <m:r>
+                      <a:rPr lang="fr-FR" sz="2400" i="1">
+                        <a:latin typeface="Cambria Math" panose="02040503050406030204" pitchFamily="18" charset="0"/>
+                      </a:rPr>
+                      <m:t>(</m:t>
+                    </m:r>
+                    <m:r>
+                      <m:rPr>
+                        <m:sty m:val="p"/>
+                      </m:rPr>
+                      <a:rPr lang="fr-FR" sz="2400" smtClean="0">
+                        <a:solidFill>
+                          <a:srgbClr val="0070C0"/>
+                        </a:solidFill>
+                        <a:latin typeface="Cambria Math" panose="02040503050406030204" pitchFamily="18" charset="0"/>
+                      </a:rPr>
+                      <m:t>Δ</m:t>
+                    </m:r>
+                    <m:sSup>
+                      <m:sSupPr>
+                        <m:ctrlPr>
+                          <a:rPr lang="fr-FR" sz="2400" i="1">
+                            <a:solidFill>
+                              <a:srgbClr val="0070C0"/>
+                            </a:solidFill>
+                            <a:latin typeface="Cambria Math" panose="02040503050406030204" pitchFamily="18" charset="0"/>
+                          </a:rPr>
+                        </m:ctrlPr>
+                      </m:sSupPr>
+                      <m:e>
+                        <m:r>
+                          <a:rPr lang="fr-FR" sz="2400" i="1">
+                            <a:solidFill>
+                              <a:srgbClr val="0070C0"/>
+                            </a:solidFill>
+                            <a:latin typeface="Cambria Math" panose="02040503050406030204" pitchFamily="18" charset="0"/>
+                          </a:rPr>
+                          <m:t>𝑧</m:t>
+                        </m:r>
+                      </m:e>
+                      <m:sup>
+                        <m:r>
+                          <a:rPr lang="fr-FR" sz="2400" b="0" i="1" smtClean="0">
+                            <a:solidFill>
+                              <a:srgbClr val="0070C0"/>
+                            </a:solidFill>
+                            <a:latin typeface="Cambria Math" panose="02040503050406030204" pitchFamily="18" charset="0"/>
+                          </a:rPr>
+                          <m:t>2</m:t>
+                        </m:r>
+                      </m:sup>
+                    </m:sSup>
+                    <m:r>
+                      <a:rPr lang="fr-FR" sz="2400" i="1">
+                        <a:latin typeface="Cambria Math" panose="02040503050406030204" pitchFamily="18" charset="0"/>
+                      </a:rPr>
+                      <m:t>)</m:t>
+                    </m:r>
+                  </m:oMath>
+                </a14:m>
+                <a:endParaRPr lang="fr-FR" sz="2400" b="0" dirty="0">
+                  <a:solidFill>
+                    <a:schemeClr val="tx1"/>
+                  </a:solidFill>
+                </a:endParaRPr>
+              </a:p>
+              <a:p>
+                <a:pPr marL="0" indent="0">
+                  <a:buNone/>
+                </a:pPr>
+                <a:endParaRPr lang="fr-FR" dirty="0"/>
+              </a:p>
+            </p:txBody>
+          </p:sp>
+        </mc:Choice>
+        <mc:Fallback>
+          <p:sp>
+            <p:nvSpPr>
+              <p:cNvPr id="3" name="Espace réservé du contenu 2">
+                <a:extLst>
+                  <a:ext uri="{FF2B5EF4-FFF2-40B4-BE49-F238E27FC236}">
+                    <a16:creationId xmlns:a16="http://schemas.microsoft.com/office/drawing/2014/main" id="{A145214A-2ADA-193F-B05A-48501377A832}"/>
+                  </a:ext>
+                </a:extLst>
+              </p:cNvPr>
+              <p:cNvSpPr>
+                <a:spLocks noGrp="1" noRot="1" noChangeAspect="1" noMove="1" noResize="1" noEditPoints="1" noAdjustHandles="1" noChangeArrowheads="1" noChangeShapeType="1" noTextEdit="1"/>
+              </p:cNvSpPr>
+              <p:nvPr>
+                <p:ph idx="1"/>
+              </p:nvPr>
+            </p:nvSpPr>
+            <p:spPr>
+              <a:xfrm>
+                <a:off x="429768" y="1335057"/>
+                <a:ext cx="11676888" cy="5504688"/>
+              </a:xfrm>
+              <a:blipFill>
+                <a:blip r:embed="rId3"/>
+                <a:stretch>
+                  <a:fillRect l="-836" t="-1550"/>
+                </a:stretch>
+              </a:blipFill>
+            </p:spPr>
+            <p:txBody>
+              <a:bodyPr/>
+              <a:lstStyle/>
+              <a:p>
+                <a:r>
+                  <a:rPr lang="fr-FR">
+                    <a:noFill/>
+                  </a:rPr>
+                  <a:t> </a:t>
+                </a:r>
+              </a:p>
+            </p:txBody>
+          </p:sp>
+        </mc:Fallback>
+      </mc:AlternateContent>
+    </p:spTree>
+    <p:extLst>
+      <p:ext uri="{BB962C8B-B14F-4D97-AF65-F5344CB8AC3E}">
+        <p14:creationId xmlns:p14="http://schemas.microsoft.com/office/powerpoint/2010/main" val="2901290548"/>
+      </p:ext>
+    </p:extLst>
+  </p:cSld>
+  <p:clrMapOvr>
+    <a:masterClrMapping/>
+  </p:clrMapOvr>
+</p:sld>
+</file>
+
+<file path=ppt/slides/slide8.xml><?xml version="1.0" encoding="utf-8"?>
+<p:sld xmlns:a="http://schemas.openxmlformats.org/drawingml/2006/main" xmlns:r="http://schemas.openxmlformats.org/officeDocument/2006/relationships" xmlns:p="http://schemas.openxmlformats.org/presentationml/2006/main">
+  <p:cSld>
+    <p:spTree>
+      <p:nvGrpSpPr>
+        <p:cNvPr id="1" name=""/>
+        <p:cNvGrpSpPr/>
+        <p:nvPr/>
+      </p:nvGrpSpPr>
+      <p:grpSpPr>
+        <a:xfrm>
+          <a:off x="0" y="0"/>
+          <a:ext cx="0" cy="0"/>
+          <a:chOff x="0" y="0"/>
+          <a:chExt cx="0" cy="0"/>
+        </a:xfrm>
+      </p:grpSpPr>
+      <p:sp>
+        <p:nvSpPr>
+          <p:cNvPr id="2" name="Titre 1">
+            <a:extLst>
+              <a:ext uri="{FF2B5EF4-FFF2-40B4-BE49-F238E27FC236}">
+                <a16:creationId xmlns:a16="http://schemas.microsoft.com/office/drawing/2014/main" id="{730210F2-DE1D-E808-58AF-DFA01EAAB4C6}"/>
+              </a:ext>
+            </a:extLst>
+          </p:cNvPr>
+          <p:cNvSpPr>
+            <a:spLocks noGrp="1"/>
+          </p:cNvSpPr>
+          <p:nvPr>
+            <p:ph type="title"/>
+          </p:nvPr>
+        </p:nvSpPr>
+        <p:spPr/>
+        <p:txBody>
+          <a:bodyPr/>
+          <a:lstStyle/>
+          <a:p>
+            <a:endParaRPr lang="fr-FR"/>
+          </a:p>
+        </p:txBody>
+      </p:sp>
       <p:sp>
         <p:nvSpPr>
           <p:cNvPr id="3" name="Espace réservé du contenu 2">
             <a:extLst>
               <a:ext uri="{FF2B5EF4-FFF2-40B4-BE49-F238E27FC236}">
-                <a16:creationId xmlns:a16="http://schemas.microsoft.com/office/drawing/2014/main" id="{3369A214-4D5D-715B-6640-CC12B4B650A6}"/>
+                <a16:creationId xmlns:a16="http://schemas.microsoft.com/office/drawing/2014/main" id="{4013CAEC-1AC4-C17B-EAFA-EC1AB7DBA279}"/>
               </a:ext>
             </a:extLst>
           </p:cNvPr>
@@ -7824,39 +15873,14 @@
           <a:bodyPr/>
           <a:lstStyle/>
           <a:p>
-            <a:r>
-              <a:rPr lang="fr-FR" dirty="0"/>
-              <a:t>Ordre 1 en temps </a:t>
-            </a:r>
-          </a:p>
-          <a:p>
-            <a:r>
-              <a:rPr lang="fr-FR" dirty="0"/>
-              <a:t>Ordre 2 en R et en z </a:t>
-            </a:r>
-          </a:p>
-          <a:p>
-            <a:endParaRPr lang="fr-FR" dirty="0"/>
-          </a:p>
-          <a:p>
-            <a:pPr marL="0" indent="0">
-              <a:buNone/>
-            </a:pPr>
-            <a:r>
-              <a:rPr lang="fr-FR" dirty="0"/>
-              <a:t>J’ai fait les calculs mais pas encore eu le temps de les mettre </a:t>
-            </a:r>
-            <a:r>
-              <a:rPr lang="fr-FR"/>
-              <a:t>au propre</a:t>
-            </a:r>
+            <a:endParaRPr lang="fr-FR"/>
           </a:p>
         </p:txBody>
       </p:sp>
     </p:spTree>
     <p:extLst>
       <p:ext uri="{BB962C8B-B14F-4D97-AF65-F5344CB8AC3E}">
-        <p14:creationId xmlns:p14="http://schemas.microsoft.com/office/powerpoint/2010/main" val="1216024341"/>
+        <p14:creationId xmlns:p14="http://schemas.microsoft.com/office/powerpoint/2010/main" val="3778705103"/>
       </p:ext>
     </p:extLst>
   </p:cSld>

--- a/projet_final/projet_final/MEC8211-Projet-final-Presentation.pptx
+++ b/projet_final/projet_final/MEC8211-Projet-final-Presentation.pptx
@@ -204,7 +204,7 @@
           <a:p>
             <a:fld id="{BB0B2023-C595-443A-8D8C-AB9DF5A28D48}" type="datetimeFigureOut">
               <a:rPr lang="fr-FR" smtClean="0"/>
-              <a:t>09/04/2026</a:t>
+              <a:t>10/04/2026</a:t>
             </a:fld>
             <a:endParaRPr lang="fr-FR"/>
           </a:p>
@@ -894,7 +894,7 @@
           <a:p>
             <a:fld id="{4E51AFDA-D128-4B68-A211-269E2451E5DE}" type="datetimeFigureOut">
               <a:rPr lang="fr-FR" smtClean="0"/>
-              <a:t>09/04/2026</a:t>
+              <a:t>10/04/2026</a:t>
             </a:fld>
             <a:endParaRPr lang="fr-FR"/>
           </a:p>
@@ -1092,7 +1092,7 @@
           <a:p>
             <a:fld id="{4E51AFDA-D128-4B68-A211-269E2451E5DE}" type="datetimeFigureOut">
               <a:rPr lang="fr-FR" smtClean="0"/>
-              <a:t>09/04/2026</a:t>
+              <a:t>10/04/2026</a:t>
             </a:fld>
             <a:endParaRPr lang="fr-FR"/>
           </a:p>
@@ -1300,7 +1300,7 @@
           <a:p>
             <a:fld id="{4E51AFDA-D128-4B68-A211-269E2451E5DE}" type="datetimeFigureOut">
               <a:rPr lang="fr-FR" smtClean="0"/>
-              <a:t>09/04/2026</a:t>
+              <a:t>10/04/2026</a:t>
             </a:fld>
             <a:endParaRPr lang="fr-FR"/>
           </a:p>
@@ -1498,7 +1498,7 @@
           <a:p>
             <a:fld id="{4E51AFDA-D128-4B68-A211-269E2451E5DE}" type="datetimeFigureOut">
               <a:rPr lang="fr-FR" smtClean="0"/>
-              <a:t>09/04/2026</a:t>
+              <a:t>10/04/2026</a:t>
             </a:fld>
             <a:endParaRPr lang="fr-FR"/>
           </a:p>
@@ -1773,7 +1773,7 @@
           <a:p>
             <a:fld id="{4E51AFDA-D128-4B68-A211-269E2451E5DE}" type="datetimeFigureOut">
               <a:rPr lang="fr-FR" smtClean="0"/>
-              <a:t>09/04/2026</a:t>
+              <a:t>10/04/2026</a:t>
             </a:fld>
             <a:endParaRPr lang="fr-FR"/>
           </a:p>
@@ -2038,7 +2038,7 @@
           <a:p>
             <a:fld id="{4E51AFDA-D128-4B68-A211-269E2451E5DE}" type="datetimeFigureOut">
               <a:rPr lang="fr-FR" smtClean="0"/>
-              <a:t>09/04/2026</a:t>
+              <a:t>10/04/2026</a:t>
             </a:fld>
             <a:endParaRPr lang="fr-FR"/>
           </a:p>
@@ -2450,7 +2450,7 @@
           <a:p>
             <a:fld id="{4E51AFDA-D128-4B68-A211-269E2451E5DE}" type="datetimeFigureOut">
               <a:rPr lang="fr-FR" smtClean="0"/>
-              <a:t>09/04/2026</a:t>
+              <a:t>10/04/2026</a:t>
             </a:fld>
             <a:endParaRPr lang="fr-FR"/>
           </a:p>
@@ -2591,7 +2591,7 @@
           <a:p>
             <a:fld id="{4E51AFDA-D128-4B68-A211-269E2451E5DE}" type="datetimeFigureOut">
               <a:rPr lang="fr-FR" smtClean="0"/>
-              <a:t>09/04/2026</a:t>
+              <a:t>10/04/2026</a:t>
             </a:fld>
             <a:endParaRPr lang="fr-FR"/>
           </a:p>
@@ -2704,7 +2704,7 @@
           <a:p>
             <a:fld id="{4E51AFDA-D128-4B68-A211-269E2451E5DE}" type="datetimeFigureOut">
               <a:rPr lang="fr-FR" smtClean="0"/>
-              <a:t>09/04/2026</a:t>
+              <a:t>10/04/2026</a:t>
             </a:fld>
             <a:endParaRPr lang="fr-FR"/>
           </a:p>
@@ -3015,7 +3015,7 @@
           <a:p>
             <a:fld id="{4E51AFDA-D128-4B68-A211-269E2451E5DE}" type="datetimeFigureOut">
               <a:rPr lang="fr-FR" smtClean="0"/>
-              <a:t>09/04/2026</a:t>
+              <a:t>10/04/2026</a:t>
             </a:fld>
             <a:endParaRPr lang="fr-FR"/>
           </a:p>
@@ -3303,7 +3303,7 @@
           <a:p>
             <a:fld id="{4E51AFDA-D128-4B68-A211-269E2451E5DE}" type="datetimeFigureOut">
               <a:rPr lang="fr-FR" smtClean="0"/>
-              <a:t>09/04/2026</a:t>
+              <a:t>10/04/2026</a:t>
             </a:fld>
             <a:endParaRPr lang="fr-FR"/>
           </a:p>
@@ -3547,7 +3547,7 @@
           <a:p>
             <a:fld id="{4E51AFDA-D128-4B68-A211-269E2451E5DE}" type="datetimeFigureOut">
               <a:rPr lang="fr-FR" smtClean="0"/>
-              <a:t>09/04/2026</a:t>
+              <a:t>10/04/2026</a:t>
             </a:fld>
             <a:endParaRPr lang="fr-FR"/>
           </a:p>
@@ -4362,8 +4362,8 @@
           </a:p>
         </p:txBody>
       </p:sp>
-      <mc:AlternateContent xmlns:mc="http://schemas.openxmlformats.org/markup-compatibility/2006" xmlns:a14="http://schemas.microsoft.com/office/drawing/2010/main">
-        <mc:Choice Requires="a14">
+      <mc:AlternateContent xmlns:mc="http://schemas.openxmlformats.org/markup-compatibility/2006">
+        <mc:Choice xmlns:a14="http://schemas.microsoft.com/office/drawing/2010/main" Requires="a14">
           <p:sp>
             <p:nvSpPr>
               <p:cNvPr id="3" name="Espace réservé du contenu 2">
@@ -4395,7 +4395,7 @@
                 <a:pPr fontAlgn="base"/>
                 <a:r>
                   <a:rPr lang="fr-FR" dirty="0"/>
-                  <a:t>Refroidissement à l'air ambient d'un lingot métallique </a:t>
+                  <a:t>Refroidissement à l'air ambient d'un lingot métallique cylindrique </a:t>
                 </a:r>
                 <a:r>
                   <a:rPr lang="en-US" dirty="0"/>
@@ -5285,7 +5285,7 @@
             </p:txBody>
           </p:sp>
         </mc:Choice>
-        <mc:Fallback xmlns="">
+        <mc:Fallback>
           <p:sp>
             <p:nvSpPr>
               <p:cNvPr id="3" name="Espace réservé du contenu 2">
@@ -5319,7 +5319,7 @@
               <a:lstStyle/>
               <a:p>
                 <a:r>
-                  <a:rPr lang="fr-FR">
+                  <a:rPr lang="fr-CA">
                     <a:noFill/>
                   </a:rPr>
                   <a:t> </a:t>
@@ -5504,7 +5504,7 @@
                 </a:pPr>
                 <a:r>
                   <a:rPr lang="fr-FR" dirty="0"/>
-                  <a:t>Hors des frontières (R-1, R+1, z-1, z+1 sont définis)</a:t>
+                  <a:t>Hors des frontières (r-1, r+1, z-1, z+1 sont définis)</a:t>
                 </a:r>
               </a:p>
               <a:p>
@@ -5621,10 +5621,10 @@
                           </m:e>
                           <m:sub>
                             <m:r>
-                              <a:rPr lang="fr-FR" b="0" i="1" smtClean="0">
-                                <a:latin typeface="Cambria Math" panose="02040503050406030204" pitchFamily="18" charset="0"/>
-                              </a:rPr>
-                              <m:t>𝑅</m:t>
+                              <a:rPr lang="fr-CA" b="0" i="1" smtClean="0">
+                                <a:latin typeface="Cambria Math" panose="02040503050406030204" pitchFamily="18" charset="0"/>
+                              </a:rPr>
+                              <m:t>𝑟</m:t>
                             </m:r>
                             <m:r>
                               <a:rPr lang="fr-FR" b="0" i="1" smtClean="0">
@@ -5687,10 +5687,10 @@
                           </m:e>
                           <m:sub>
                             <m:r>
-                              <a:rPr lang="fr-FR" b="0" i="1" smtClean="0">
-                                <a:latin typeface="Cambria Math" panose="02040503050406030204" pitchFamily="18" charset="0"/>
-                              </a:rPr>
-                              <m:t>𝑅</m:t>
+                              <a:rPr lang="fr-CA" b="0" i="1" smtClean="0">
+                                <a:latin typeface="Cambria Math" panose="02040503050406030204" pitchFamily="18" charset="0"/>
+                              </a:rPr>
+                              <m:t>𝑟</m:t>
                             </m:r>
                             <m:r>
                               <a:rPr lang="fr-FR" b="0" i="1" smtClean="0">
@@ -5771,10 +5771,10 @@
                           <m:t>𝜕</m:t>
                         </m:r>
                         <m:r>
-                          <a:rPr lang="fr-FR" b="0" i="1" smtClean="0">
-                            <a:latin typeface="Cambria Math" panose="02040503050406030204" pitchFamily="18" charset="0"/>
-                          </a:rPr>
-                          <m:t>𝑅</m:t>
+                          <a:rPr lang="fr-CA" b="0" i="1" smtClean="0">
+                            <a:latin typeface="Cambria Math" panose="02040503050406030204" pitchFamily="18" charset="0"/>
+                          </a:rPr>
+                          <m:t>𝑟</m:t>
                         </m:r>
                       </m:den>
                     </m:f>
@@ -5852,10 +5852,10 @@
                           </m:e>
                           <m:sub>
                             <m:r>
-                              <a:rPr lang="fr-FR" i="1">
-                                <a:latin typeface="Cambria Math" panose="02040503050406030204" pitchFamily="18" charset="0"/>
-                              </a:rPr>
-                              <m:t>𝑅</m:t>
+                              <a:rPr lang="fr-CA" b="0" i="1" smtClean="0">
+                                <a:latin typeface="Cambria Math" panose="02040503050406030204" pitchFamily="18" charset="0"/>
+                              </a:rPr>
+                              <m:t>𝑟</m:t>
                             </m:r>
                             <m:r>
                               <a:rPr lang="fr-FR" b="0" i="1" smtClean="0">
@@ -5909,10 +5909,10 @@
                           </m:e>
                           <m:sub>
                             <m:r>
-                              <a:rPr lang="fr-FR" i="1">
-                                <a:latin typeface="Cambria Math" panose="02040503050406030204" pitchFamily="18" charset="0"/>
-                              </a:rPr>
-                              <m:t>𝑅</m:t>
+                              <a:rPr lang="fr-CA" b="0" i="1" smtClean="0">
+                                <a:latin typeface="Cambria Math" panose="02040503050406030204" pitchFamily="18" charset="0"/>
+                              </a:rPr>
+                              <m:t>𝑟</m:t>
                             </m:r>
                             <m:r>
                               <a:rPr lang="fr-FR" b="0" i="1" smtClean="0">
@@ -5960,10 +5960,10 @@
                           <m:t>Δ</m:t>
                         </m:r>
                         <m:r>
-                          <a:rPr lang="fr-FR" b="0" i="1" smtClean="0">
-                            <a:latin typeface="Cambria Math" panose="02040503050406030204" pitchFamily="18" charset="0"/>
-                          </a:rPr>
-                          <m:t>𝑅</m:t>
+                          <a:rPr lang="fr-CA" b="0" i="1" smtClean="0">
+                            <a:latin typeface="Cambria Math" panose="02040503050406030204" pitchFamily="18" charset="0"/>
+                          </a:rPr>
+                          <m:t>𝑟</m:t>
                         </m:r>
                       </m:den>
                     </m:f>
@@ -6045,10 +6045,10 @@
                             </m:sSupPr>
                             <m:e>
                               <m:r>
-                                <a:rPr lang="fr-FR" sz="2400" i="1">
+                                <a:rPr lang="fr-CA" sz="2400" b="0" i="1" smtClean="0">
                                   <a:latin typeface="Cambria Math" panose="02040503050406030204" pitchFamily="18" charset="0"/>
                                 </a:rPr>
-                                <m:t>𝑅</m:t>
+                                <m:t>𝑟</m:t>
                               </m:r>
                             </m:e>
                             <m:sup>
@@ -6123,10 +6123,10 @@
                             <m:t>𝜕</m:t>
                           </m:r>
                           <m:r>
-                            <a:rPr lang="fr-FR" sz="2400" i="1">
+                            <a:rPr lang="fr-CA" sz="2400" b="0" i="1" smtClean="0">
                               <a:latin typeface="Cambria Math" panose="02040503050406030204" pitchFamily="18" charset="0"/>
                             </a:rPr>
-                            <m:t>𝑅</m:t>
+                            <m:t>𝑟</m:t>
                           </m:r>
                         </m:den>
                       </m:f>
@@ -6366,10 +6366,10 @@
                         </m:e>
                         <m:sub>
                           <m:r>
-                            <a:rPr lang="fr-FR" sz="2400" i="1">
+                            <a:rPr lang="fr-CA" sz="2400" b="0" i="1" smtClean="0">
                               <a:latin typeface="Cambria Math" panose="02040503050406030204" pitchFamily="18" charset="0"/>
                             </a:rPr>
-                            <m:t>𝑅</m:t>
+                            <m:t>𝑟</m:t>
                           </m:r>
                           <m:r>
                             <a:rPr lang="fr-FR" sz="2400" i="1">
@@ -6432,10 +6432,10 @@
                         </m:e>
                         <m:sub>
                           <m:r>
-                            <a:rPr lang="fr-FR" sz="2400" i="1">
+                            <a:rPr lang="fr-CA" sz="2400" b="0" i="1" smtClean="0">
                               <a:latin typeface="Cambria Math" panose="02040503050406030204" pitchFamily="18" charset="0"/>
                             </a:rPr>
-                            <m:t>𝑅</m:t>
+                            <m:t>𝑟</m:t>
                           </m:r>
                           <m:r>
                             <a:rPr lang="fr-FR" sz="2400" i="1">
@@ -6551,10 +6551,10 @@
                             </m:e>
                             <m:sub>
                               <m:r>
-                                <a:rPr lang="fr-FR" sz="2400" i="1">
+                                <a:rPr lang="fr-CA" sz="2400" b="0" i="1" smtClean="0">
                                   <a:latin typeface="Cambria Math" panose="02040503050406030204" pitchFamily="18" charset="0"/>
                                 </a:rPr>
-                                <m:t>𝑅</m:t>
+                                <m:t>𝑟</m:t>
                               </m:r>
                               <m:r>
                                 <a:rPr lang="fr-FR" sz="2400" i="1">
@@ -6608,10 +6608,10 @@
                             </m:e>
                             <m:sub>
                               <m:r>
-                                <a:rPr lang="fr-FR" sz="2400" i="1">
+                                <a:rPr lang="fr-CA" sz="2400" b="0" i="1" smtClean="0">
                                   <a:latin typeface="Cambria Math" panose="02040503050406030204" pitchFamily="18" charset="0"/>
                                 </a:rPr>
-                                <m:t>𝑅</m:t>
+                                <m:t>𝑟</m:t>
                               </m:r>
                               <m:r>
                                 <a:rPr lang="fr-FR" sz="2400" i="1">
@@ -6659,10 +6659,10 @@
                             </m:e>
                             <m:sub>
                               <m:r>
-                                <a:rPr lang="fr-FR" sz="2400" i="1">
+                                <a:rPr lang="fr-CA" sz="2400" b="0" i="1" smtClean="0">
                                   <a:latin typeface="Cambria Math" panose="02040503050406030204" pitchFamily="18" charset="0"/>
                                 </a:rPr>
-                                <m:t>𝑅</m:t>
+                                <m:t>𝑟</m:t>
                               </m:r>
                               <m:r>
                                 <a:rPr lang="fr-FR" sz="2400" i="1">
@@ -6710,10 +6710,10 @@
                                 <m:rPr>
                                   <m:sty m:val="p"/>
                                 </m:rPr>
-                                <a:rPr lang="fr-FR" sz="2400">
+                                <a:rPr lang="fr-CA" sz="2400" b="0" i="0" smtClean="0">
                                   <a:latin typeface="Cambria Math" panose="02040503050406030204" pitchFamily="18" charset="0"/>
                                 </a:rPr>
-                                <m:t>R</m:t>
+                                <m:t>r</m:t>
                               </m:r>
                             </m:e>
                             <m:sup>
@@ -6792,10 +6792,10 @@
                             </m:e>
                             <m:sub>
                               <m:r>
-                                <a:rPr lang="fr-FR" sz="2400" i="1">
+                                <a:rPr lang="fr-CA" sz="2400" b="0" i="1" smtClean="0">
                                   <a:latin typeface="Cambria Math" panose="02040503050406030204" pitchFamily="18" charset="0"/>
                                 </a:rPr>
-                                <m:t>𝑅</m:t>
+                                <m:t>𝑟</m:t>
                               </m:r>
                               <m:r>
                                 <a:rPr lang="fr-FR" sz="2400" i="1">
@@ -6843,10 +6843,10 @@
                             </m:e>
                             <m:sub>
                               <m:r>
-                                <a:rPr lang="fr-FR" sz="2400" i="1">
+                                <a:rPr lang="fr-CA" sz="2400" b="0" i="1" smtClean="0">
                                   <a:latin typeface="Cambria Math" panose="02040503050406030204" pitchFamily="18" charset="0"/>
                                 </a:rPr>
-                                <m:t>𝑅</m:t>
+                                <m:t>𝑟</m:t>
                               </m:r>
                               <m:r>
                                 <a:rPr lang="fr-FR" sz="2400" i="1">
@@ -6888,10 +6888,10 @@
                             <m:t>Δ</m:t>
                           </m:r>
                           <m:r>
-                            <a:rPr lang="fr-FR" sz="2400" i="1">
+                            <a:rPr lang="fr-CA" sz="2400" b="0" i="1" smtClean="0">
                               <a:latin typeface="Cambria Math" panose="02040503050406030204" pitchFamily="18" charset="0"/>
                             </a:rPr>
-                            <m:t>𝑅</m:t>
+                            <m:t>𝑟</m:t>
                           </m:r>
                         </m:den>
                       </m:f>
@@ -6928,10 +6928,10 @@
                             </m:e>
                             <m:sub>
                               <m:r>
-                                <a:rPr lang="fr-FR" sz="2400" i="1">
+                                <a:rPr lang="fr-CA" sz="2400" b="0" i="1" smtClean="0">
                                   <a:latin typeface="Cambria Math" panose="02040503050406030204" pitchFamily="18" charset="0"/>
                                 </a:rPr>
-                                <m:t>𝑅</m:t>
+                                <m:t>𝑟</m:t>
                               </m:r>
                               <m:r>
                                 <a:rPr lang="fr-FR" sz="2400" i="1">
@@ -6991,10 +6991,10 @@
                             </m:e>
                             <m:sub>
                               <m:r>
-                                <a:rPr lang="fr-FR" sz="2400" i="1">
+                                <a:rPr lang="fr-CA" sz="2400" b="0" i="1" smtClean="0">
                                   <a:latin typeface="Cambria Math" panose="02040503050406030204" pitchFamily="18" charset="0"/>
                                 </a:rPr>
-                                <m:t>𝑅</m:t>
+                                <m:t>𝑟</m:t>
                               </m:r>
                               <m:r>
                                 <a:rPr lang="fr-FR" sz="2400" i="1">
@@ -7042,10 +7042,10 @@
                             </m:e>
                             <m:sub>
                               <m:r>
-                                <a:rPr lang="fr-FR" sz="2400" i="1">
+                                <a:rPr lang="fr-CA" sz="2400" b="0" i="1" smtClean="0">
                                   <a:latin typeface="Cambria Math" panose="02040503050406030204" pitchFamily="18" charset="0"/>
                                 </a:rPr>
-                                <m:t>𝑅</m:t>
+                                <m:t>𝑟</m:t>
                               </m:r>
                               <m:r>
                                 <a:rPr lang="fr-FR" sz="2400" i="1">
@@ -7183,7 +7183,7 @@
               <a:lstStyle/>
               <a:p>
                 <a:r>
-                  <a:rPr lang="fr-FR">
+                  <a:rPr lang="fr-CA">
                     <a:noFill/>
                   </a:rPr>
                   <a:t> </a:t>
@@ -7341,8 +7341,8 @@
           </a:p>
         </p:txBody>
       </p:sp>
-      <mc:AlternateContent xmlns:mc="http://schemas.openxmlformats.org/markup-compatibility/2006" xmlns:a14="http://schemas.microsoft.com/office/drawing/2010/main">
-        <mc:Choice Requires="a14">
+      <mc:AlternateContent xmlns:mc="http://schemas.openxmlformats.org/markup-compatibility/2006">
+        <mc:Choice xmlns:a14="http://schemas.microsoft.com/office/drawing/2010/main" Requires="a14">
           <p:sp>
             <p:nvSpPr>
               <p:cNvPr id="5" name="ZoneTexte 4">
@@ -7445,11 +7445,11 @@
                           </m:sSupPr>
                           <m:e>
                             <m:r>
-                              <a:rPr lang="fr-FR" sz="2600" i="1">
+                              <a:rPr lang="fr-CA" sz="2600" b="0" i="1" smtClean="0">
                                 <a:latin typeface="Cambria Math" panose="02040503050406030204" pitchFamily="18" charset="0"/>
                                 <a:ea typeface="Cambria Math" panose="02040503050406030204" pitchFamily="18" charset="0"/>
                               </a:rPr>
-                              <m:t>𝑅</m:t>
+                              <m:t>𝑟</m:t>
                             </m:r>
                           </m:e>
                           <m:sup>
@@ -7546,11 +7546,11 @@
                           </m:e>
                           <m:sub>
                             <m:r>
-                              <a:rPr lang="fr-FR" sz="2600" i="1">
+                              <a:rPr lang="fr-CA" sz="2600" b="0" i="1" smtClean="0">
                                 <a:latin typeface="Cambria Math" panose="02040503050406030204" pitchFamily="18" charset="0"/>
                                 <a:ea typeface="Cambria Math" panose="02040503050406030204" pitchFamily="18" charset="0"/>
                               </a:rPr>
-                              <m:t>𝑅</m:t>
+                              <m:t>𝑟</m:t>
                             </m:r>
                             <m:r>
                               <a:rPr lang="fr-FR" sz="2600" i="1">
@@ -7611,11 +7611,11 @@
                           </m:e>
                           <m:sub>
                             <m:r>
-                              <a:rPr lang="fr-FR" sz="2600" i="1">
+                              <a:rPr lang="fr-CA" sz="2600" b="0" i="1" smtClean="0">
                                 <a:latin typeface="Cambria Math" panose="02040503050406030204" pitchFamily="18" charset="0"/>
                                 <a:ea typeface="Cambria Math" panose="02040503050406030204" pitchFamily="18" charset="0"/>
                               </a:rPr>
-                              <m:t>𝑅</m:t>
+                              <m:t>𝑟</m:t>
                             </m:r>
                             <m:r>
                               <a:rPr lang="fr-FR" sz="2600" i="1">
@@ -7669,11 +7669,11 @@
                           </m:e>
                           <m:sub>
                             <m:r>
-                              <a:rPr lang="fr-FR" sz="2600" i="1">
+                              <a:rPr lang="fr-CA" sz="2600" b="0" i="1" smtClean="0">
                                 <a:latin typeface="Cambria Math" panose="02040503050406030204" pitchFamily="18" charset="0"/>
                                 <a:ea typeface="Cambria Math" panose="02040503050406030204" pitchFamily="18" charset="0"/>
                               </a:rPr>
-                              <m:t>𝑅</m:t>
+                              <m:t>𝑟</m:t>
                             </m:r>
                             <m:r>
                               <a:rPr lang="fr-FR" sz="2600" i="1">
@@ -7726,11 +7726,11 @@
                               <m:rPr>
                                 <m:sty m:val="p"/>
                               </m:rPr>
-                              <a:rPr lang="fr-FR" sz="2600">
+                              <a:rPr lang="fr-CA" sz="2600" b="0" i="0" smtClean="0">
                                 <a:latin typeface="Cambria Math" panose="02040503050406030204" pitchFamily="18" charset="0"/>
                                 <a:ea typeface="Cambria Math" panose="02040503050406030204" pitchFamily="18" charset="0"/>
                               </a:rPr>
-                              <m:t>R</m:t>
+                              <m:t>r</m:t>
                             </m:r>
                           </m:e>
                           <m:sup>
@@ -7918,10 +7918,10 @@
                           </m:e>
                           <m:sub>
                             <m:r>
-                              <a:rPr lang="fr-FR" sz="2600" i="1">
-                                <a:latin typeface="Cambria Math" panose="02040503050406030204" pitchFamily="18" charset="0"/>
-                              </a:rPr>
-                              <m:t>𝑅</m:t>
+                              <a:rPr lang="fr-CA" sz="2600" b="0" i="1" smtClean="0">
+                                <a:latin typeface="Cambria Math" panose="02040503050406030204" pitchFamily="18" charset="0"/>
+                              </a:rPr>
+                              <m:t>𝑟</m:t>
                             </m:r>
                             <m:r>
                               <a:rPr lang="fr-FR" sz="2600" i="1">
@@ -7981,10 +7981,10 @@
                           </m:e>
                           <m:sub>
                             <m:r>
-                              <a:rPr lang="fr-FR" sz="2600" i="1">
-                                <a:latin typeface="Cambria Math" panose="02040503050406030204" pitchFamily="18" charset="0"/>
-                              </a:rPr>
-                              <m:t>𝑅</m:t>
+                              <a:rPr lang="fr-CA" sz="2600" b="0" i="1" smtClean="0">
+                                <a:latin typeface="Cambria Math" panose="02040503050406030204" pitchFamily="18" charset="0"/>
+                              </a:rPr>
+                              <m:t>𝑟</m:t>
                             </m:r>
                             <m:r>
                               <a:rPr lang="fr-FR" sz="2600" i="1">
@@ -8032,10 +8032,10 @@
                           </m:e>
                           <m:sub>
                             <m:r>
-                              <a:rPr lang="fr-FR" sz="2600" i="1">
-                                <a:latin typeface="Cambria Math" panose="02040503050406030204" pitchFamily="18" charset="0"/>
-                              </a:rPr>
-                              <m:t>𝑅</m:t>
+                              <a:rPr lang="fr-CA" sz="2600" b="0" i="1" smtClean="0">
+                                <a:latin typeface="Cambria Math" panose="02040503050406030204" pitchFamily="18" charset="0"/>
+                              </a:rPr>
+                              <m:t>𝑟</m:t>
                             </m:r>
                             <m:r>
                               <a:rPr lang="fr-FR" sz="2600" i="1">
@@ -8120,7 +8120,7 @@
             </p:txBody>
           </p:sp>
         </mc:Choice>
-        <mc:Fallback xmlns="">
+        <mc:Fallback>
           <p:sp>
             <p:nvSpPr>
               <p:cNvPr id="5" name="ZoneTexte 4">
@@ -8155,7 +8155,7 @@
               <a:lstStyle/>
               <a:p>
                 <a:r>
-                  <a:rPr lang="fr-FR">
+                  <a:rPr lang="fr-CA">
                     <a:noFill/>
                   </a:rPr>
                   <a:t> </a:t>
@@ -9924,10 +9924,10 @@
                           </m:e>
                           <m:sub>
                             <m:r>
-                              <a:rPr lang="fr-FR" i="1">
-                                <a:latin typeface="Cambria Math" panose="02040503050406030204" pitchFamily="18" charset="0"/>
-                              </a:rPr>
-                              <m:t>𝑅</m:t>
+                              <a:rPr lang="fr-CA" b="0" i="1" smtClean="0">
+                                <a:latin typeface="Cambria Math" panose="02040503050406030204" pitchFamily="18" charset="0"/>
+                              </a:rPr>
+                              <m:t>𝑟</m:t>
                             </m:r>
                             <m:r>
                               <a:rPr lang="fr-FR" i="1">
@@ -9990,10 +9990,10 @@
                           </m:e>
                           <m:sub>
                             <m:r>
-                              <a:rPr lang="fr-FR" i="1">
-                                <a:latin typeface="Cambria Math" panose="02040503050406030204" pitchFamily="18" charset="0"/>
-                              </a:rPr>
-                              <m:t>𝑅</m:t>
+                              <a:rPr lang="fr-CA" b="0" i="1" smtClean="0">
+                                <a:latin typeface="Cambria Math" panose="02040503050406030204" pitchFamily="18" charset="0"/>
+                              </a:rPr>
+                              <m:t>𝑟</m:t>
                             </m:r>
                             <m:r>
                               <a:rPr lang="fr-FR" i="1">
@@ -10172,10 +10172,10 @@
                           <m:t>,</m:t>
                         </m:r>
                         <m:r>
-                          <a:rPr lang="fr-FR" b="0" i="1" smtClean="0">
-                            <a:latin typeface="Cambria Math" panose="02040503050406030204" pitchFamily="18" charset="0"/>
-                          </a:rPr>
-                          <m:t>𝑅</m:t>
+                          <a:rPr lang="fr-CA" b="0" i="1" smtClean="0">
+                            <a:latin typeface="Cambria Math" panose="02040503050406030204" pitchFamily="18" charset="0"/>
+                          </a:rPr>
+                          <m:t>𝑟</m:t>
                         </m:r>
                         <m:r>
                           <a:rPr lang="fr-FR" b="0" i="1" smtClean="0">
@@ -10330,10 +10330,10 @@
                           <m:t>,</m:t>
                         </m:r>
                         <m:r>
-                          <a:rPr lang="fr-FR" b="0" i="1" smtClean="0">
-                            <a:latin typeface="Cambria Math" panose="02040503050406030204" pitchFamily="18" charset="0"/>
-                          </a:rPr>
-                          <m:t>𝑅</m:t>
+                          <a:rPr lang="fr-CA" b="0" i="1" smtClean="0">
+                            <a:latin typeface="Cambria Math" panose="02040503050406030204" pitchFamily="18" charset="0"/>
+                          </a:rPr>
+                          <m:t>𝑟</m:t>
                         </m:r>
                         <m:r>
                           <a:rPr lang="fr-FR" b="0" i="1" smtClean="0">
@@ -10661,10 +10661,10 @@
                           <m:t>,</m:t>
                         </m:r>
                         <m:r>
-                          <a:rPr lang="fr-FR" i="1">
-                            <a:latin typeface="Cambria Math" panose="02040503050406030204" pitchFamily="18" charset="0"/>
-                          </a:rPr>
-                          <m:t>𝑅</m:t>
+                          <a:rPr lang="fr-CA" b="0" i="1" smtClean="0">
+                            <a:latin typeface="Cambria Math" panose="02040503050406030204" pitchFamily="18" charset="0"/>
+                          </a:rPr>
+                          <m:t>𝑟</m:t>
                         </m:r>
                         <m:r>
                           <a:rPr lang="fr-FR" i="1">
@@ -10804,10 +10804,10 @@
                           <m:t>,</m:t>
                         </m:r>
                         <m:r>
-                          <a:rPr lang="fr-FR" b="0" i="1" smtClean="0">
-                            <a:latin typeface="Cambria Math" panose="02040503050406030204" pitchFamily="18" charset="0"/>
-                          </a:rPr>
-                          <m:t>𝑅</m:t>
+                          <a:rPr lang="fr-CA" b="0" i="1" smtClean="0">
+                            <a:latin typeface="Cambria Math" panose="02040503050406030204" pitchFamily="18" charset="0"/>
+                          </a:rPr>
+                          <m:t>𝑟</m:t>
                         </m:r>
                         <m:r>
                           <a:rPr lang="fr-FR" b="0" i="1" smtClean="0">
@@ -10963,7 +10963,7 @@
               <a:lstStyle/>
               <a:p>
                 <a:r>
-                  <a:rPr lang="fr-FR">
+                  <a:rPr lang="fr-CA">
                     <a:noFill/>
                   </a:rPr>
                   <a:t> </a:t>
@@ -11112,10 +11112,10 @@
                           </m:e>
                           <m:sub>
                             <m:r>
-                              <a:rPr lang="fr-FR" sz="2400" i="1">
-                                <a:latin typeface="Cambria Math" panose="02040503050406030204" pitchFamily="18" charset="0"/>
-                              </a:rPr>
-                              <m:t>𝑅</m:t>
+                              <a:rPr lang="fr-CA" sz="2400" b="0" i="1" smtClean="0">
+                                <a:latin typeface="Cambria Math" panose="02040503050406030204" pitchFamily="18" charset="0"/>
+                              </a:rPr>
+                              <m:t>𝑟</m:t>
                             </m:r>
                             <m:r>
                               <a:rPr lang="fr-FR" sz="2400" i="1">
@@ -11163,10 +11163,10 @@
                           </m:e>
                           <m:sub>
                             <m:r>
-                              <a:rPr lang="fr-FR" sz="2400" i="1">
-                                <a:latin typeface="Cambria Math" panose="02040503050406030204" pitchFamily="18" charset="0"/>
-                              </a:rPr>
-                              <m:t>𝑅</m:t>
+                              <a:rPr lang="fr-CA" sz="2400" b="0" i="1" smtClean="0">
+                                <a:latin typeface="Cambria Math" panose="02040503050406030204" pitchFamily="18" charset="0"/>
+                              </a:rPr>
+                              <m:t>𝑟</m:t>
                             </m:r>
                             <m:r>
                               <a:rPr lang="fr-FR" sz="2400" i="1">
@@ -11202,10 +11202,10 @@
                           <m:t>Δ</m:t>
                         </m:r>
                         <m:r>
-                          <a:rPr lang="fr-FR" sz="2400" i="1">
-                            <a:latin typeface="Cambria Math" panose="02040503050406030204" pitchFamily="18" charset="0"/>
-                          </a:rPr>
-                          <m:t>𝑅</m:t>
+                          <a:rPr lang="fr-CA" sz="2400" b="0" i="1" smtClean="0">
+                            <a:latin typeface="Cambria Math" panose="02040503050406030204" pitchFamily="18" charset="0"/>
+                          </a:rPr>
+                          <m:t>𝑟</m:t>
                         </m:r>
                       </m:den>
                     </m:f>
@@ -11260,10 +11260,10 @@
                               <m:t>Δ</m:t>
                             </m:r>
                             <m:r>
-                              <a:rPr lang="fr-FR" sz="2400" i="1">
-                                <a:latin typeface="Cambria Math" panose="02040503050406030204" pitchFamily="18" charset="0"/>
-                              </a:rPr>
-                              <m:t>𝑅</m:t>
+                              <a:rPr lang="fr-CA" sz="2400" b="0" i="1" smtClean="0">
+                                <a:latin typeface="Cambria Math" panose="02040503050406030204" pitchFamily="18" charset="0"/>
+                              </a:rPr>
+                              <m:t>𝑟</m:t>
                             </m:r>
                           </m:den>
                         </m:f>
@@ -11334,10 +11334,10 @@
                           <m:t>𝜕</m:t>
                         </m:r>
                         <m:r>
-                          <a:rPr lang="fr-FR" sz="2400" b="0" i="1" smtClean="0">
-                            <a:latin typeface="Cambria Math" panose="02040503050406030204" pitchFamily="18" charset="0"/>
-                          </a:rPr>
-                          <m:t>𝑅</m:t>
+                          <a:rPr lang="fr-CA" sz="2400" b="0" i="1" smtClean="0">
+                            <a:latin typeface="Cambria Math" panose="02040503050406030204" pitchFamily="18" charset="0"/>
+                          </a:rPr>
+                          <m:t>𝑟</m:t>
                         </m:r>
                       </m:den>
                     </m:f>
@@ -11384,10 +11384,10 @@
                           <m:t>,</m:t>
                         </m:r>
                         <m:r>
-                          <a:rPr lang="fr-FR" sz="2400" b="0" i="1" smtClean="0">
-                            <a:latin typeface="Cambria Math" panose="02040503050406030204" pitchFamily="18" charset="0"/>
-                          </a:rPr>
-                          <m:t>𝑅</m:t>
+                          <a:rPr lang="fr-CA" sz="2400" b="0" i="1" smtClean="0">
+                            <a:latin typeface="Cambria Math" panose="02040503050406030204" pitchFamily="18" charset="0"/>
+                          </a:rPr>
+                          <m:t>𝑟</m:t>
                         </m:r>
                         <m:r>
                           <a:rPr lang="fr-FR" sz="2400" b="0" i="1" smtClean="0">
@@ -11413,10 +11413,10 @@
                       <m:t>Δ</m:t>
                     </m:r>
                     <m:r>
-                      <a:rPr lang="fr-FR" sz="2400" b="0" i="1" smtClean="0">
+                      <a:rPr lang="fr-CA" sz="2400" b="0" i="1" smtClean="0">
                         <a:latin typeface="Cambria Math" panose="02040503050406030204" pitchFamily="18" charset="0"/>
                       </a:rPr>
-                      <m:t>𝑅</m:t>
+                      <m:t>𝑟</m:t>
                     </m:r>
                     <m:r>
                       <a:rPr lang="fr-FR" sz="2400" b="0" i="1" smtClean="0">
@@ -11506,13 +11506,13 @@
                           </m:sSupPr>
                           <m:e>
                             <m:r>
-                              <a:rPr lang="fr-FR" sz="2400" b="0" i="1" smtClean="0">
+                              <a:rPr lang="fr-CA" sz="2400" b="0" i="1" smtClean="0">
                                 <a:solidFill>
                                   <a:srgbClr val="FF0000"/>
                                 </a:solidFill>
                                 <a:latin typeface="Cambria Math" panose="02040503050406030204" pitchFamily="18" charset="0"/>
                               </a:rPr>
-                              <m:t>𝑅</m:t>
+                              <m:t>𝑟</m:t>
                             </m:r>
                           </m:e>
                           <m:sup>
@@ -11587,13 +11587,13 @@
                           <m:t>,</m:t>
                         </m:r>
                         <m:r>
-                          <a:rPr lang="fr-FR" sz="2400" i="1">
+                          <a:rPr lang="fr-CA" sz="2400" b="0" i="1" smtClean="0">
                             <a:solidFill>
                               <a:srgbClr val="FF0000"/>
                             </a:solidFill>
                             <a:latin typeface="Cambria Math" panose="02040503050406030204" pitchFamily="18" charset="0"/>
                           </a:rPr>
-                          <m:t>𝑅</m:t>
+                          <m:t>𝑟</m:t>
                         </m:r>
                         <m:r>
                           <a:rPr lang="fr-FR" sz="2400" i="1">
@@ -11652,13 +11652,13 @@
                           </m:sSupPr>
                           <m:e>
                             <m:r>
-                              <a:rPr lang="fr-FR" sz="2400" b="0" i="1" smtClean="0">
+                              <a:rPr lang="fr-CA" sz="2400" b="0" i="1" smtClean="0">
                                 <a:solidFill>
                                   <a:srgbClr val="FF0000"/>
                                 </a:solidFill>
                                 <a:latin typeface="Cambria Math" panose="02040503050406030204" pitchFamily="18" charset="0"/>
                               </a:rPr>
-                              <m:t>𝑅</m:t>
+                              <m:t>𝑟</m:t>
                             </m:r>
                           </m:e>
                           <m:sup>
@@ -11750,10 +11750,10 @@
                           </m:sSupPr>
                           <m:e>
                             <m:r>
-                              <a:rPr lang="fr-FR" sz="2400" b="0" i="1" smtClean="0">
-                                <a:latin typeface="Cambria Math" panose="02040503050406030204" pitchFamily="18" charset="0"/>
-                              </a:rPr>
-                              <m:t>𝑅</m:t>
+                              <a:rPr lang="fr-CA" sz="2400" b="0" i="1" smtClean="0">
+                                <a:latin typeface="Cambria Math" panose="02040503050406030204" pitchFamily="18" charset="0"/>
+                              </a:rPr>
+                              <m:t>𝑟</m:t>
                             </m:r>
                           </m:e>
                           <m:sup>
@@ -11810,10 +11810,10 @@
                           <m:t>,</m:t>
                         </m:r>
                         <m:r>
-                          <a:rPr lang="fr-FR" sz="2400" i="1">
-                            <a:latin typeface="Cambria Math" panose="02040503050406030204" pitchFamily="18" charset="0"/>
-                          </a:rPr>
-                          <m:t>𝑅</m:t>
+                          <a:rPr lang="fr-CA" sz="2400" b="0" i="1" smtClean="0">
+                            <a:latin typeface="Cambria Math" panose="02040503050406030204" pitchFamily="18" charset="0"/>
+                          </a:rPr>
+                          <m:t>𝑟</m:t>
                         </m:r>
                         <m:r>
                           <a:rPr lang="fr-FR" sz="2400" i="1">
@@ -11857,10 +11857,10 @@
                           </m:sSupPr>
                           <m:e>
                             <m:r>
-                              <a:rPr lang="fr-FR" sz="2400" b="0" i="1" smtClean="0">
-                                <a:latin typeface="Cambria Math" panose="02040503050406030204" pitchFamily="18" charset="0"/>
-                              </a:rPr>
-                              <m:t>𝑅</m:t>
+                              <a:rPr lang="fr-CA" sz="2400" b="0" i="1" smtClean="0">
+                                <a:latin typeface="Cambria Math" panose="02040503050406030204" pitchFamily="18" charset="0"/>
+                              </a:rPr>
+                              <m:t>𝑟</m:t>
                             </m:r>
                           </m:e>
                           <m:sup>
@@ -11922,10 +11922,10 @@
                           </m:sSupPr>
                           <m:e>
                             <m:r>
-                              <a:rPr lang="fr-FR" sz="2400" b="0" i="1" smtClean="0">
-                                <a:latin typeface="Cambria Math" panose="02040503050406030204" pitchFamily="18" charset="0"/>
-                              </a:rPr>
-                              <m:t>𝑅</m:t>
+                              <a:rPr lang="fr-CA" sz="2400" b="0" i="1" smtClean="0">
+                                <a:latin typeface="Cambria Math" panose="02040503050406030204" pitchFamily="18" charset="0"/>
+                              </a:rPr>
+                              <m:t>𝑟</m:t>
                             </m:r>
                           </m:e>
                           <m:sup>
@@ -12046,10 +12046,10 @@
                           <m:t>𝜕</m:t>
                         </m:r>
                         <m:r>
-                          <a:rPr lang="fr-FR" sz="2400" b="0" i="1" smtClean="0">
-                            <a:latin typeface="Cambria Math" panose="02040503050406030204" pitchFamily="18" charset="0"/>
-                          </a:rPr>
-                          <m:t>𝑅</m:t>
+                          <a:rPr lang="fr-CA" sz="2400" b="0" i="1" smtClean="0">
+                            <a:latin typeface="Cambria Math" panose="02040503050406030204" pitchFamily="18" charset="0"/>
+                          </a:rPr>
+                          <m:t>𝑟</m:t>
                         </m:r>
                       </m:den>
                     </m:f>
@@ -12096,10 +12096,10 @@
                           <m:t>,</m:t>
                         </m:r>
                         <m:r>
-                          <a:rPr lang="fr-FR" sz="2400" b="0" i="1" smtClean="0">
-                            <a:latin typeface="Cambria Math" panose="02040503050406030204" pitchFamily="18" charset="0"/>
-                          </a:rPr>
-                          <m:t>𝑅</m:t>
+                          <a:rPr lang="fr-CA" sz="2400" b="0" i="1" smtClean="0">
+                            <a:latin typeface="Cambria Math" panose="02040503050406030204" pitchFamily="18" charset="0"/>
+                          </a:rPr>
+                          <m:t>𝑟</m:t>
                         </m:r>
                         <m:r>
                           <a:rPr lang="fr-FR" sz="2400" b="0" i="1" smtClean="0">
@@ -12125,10 +12125,10 @@
                       <m:t>Δ</m:t>
                     </m:r>
                     <m:r>
-                      <a:rPr lang="fr-FR" sz="2400" b="0" i="1" smtClean="0">
+                      <a:rPr lang="fr-CA" sz="2400" b="0" i="1" smtClean="0">
                         <a:latin typeface="Cambria Math" panose="02040503050406030204" pitchFamily="18" charset="0"/>
                       </a:rPr>
-                      <m:t>𝑅</m:t>
+                      <m:t>𝑟</m:t>
                     </m:r>
                     <m:r>
                       <a:rPr lang="fr-FR" sz="2400" b="0" i="1" smtClean="0">
@@ -12299,13 +12299,13 @@
                           <m:t>,</m:t>
                         </m:r>
                         <m:r>
-                          <a:rPr lang="fr-FR" sz="2400" i="1">
+                          <a:rPr lang="fr-CA" sz="2400" b="0" i="1" smtClean="0">
                             <a:solidFill>
                               <a:srgbClr val="FF0000"/>
                             </a:solidFill>
                             <a:latin typeface="Cambria Math" panose="02040503050406030204" pitchFamily="18" charset="0"/>
                           </a:rPr>
-                          <m:t>𝑅</m:t>
+                          <m:t>𝑟</m:t>
                         </m:r>
                         <m:r>
                           <a:rPr lang="fr-FR" sz="2400" i="1">
@@ -12364,13 +12364,13 @@
                           </m:sSupPr>
                           <m:e>
                             <m:r>
-                              <a:rPr lang="fr-FR" sz="2400" b="0" i="1" smtClean="0">
+                              <a:rPr lang="fr-CA" sz="2400" b="0" i="1" smtClean="0">
                                 <a:solidFill>
                                   <a:srgbClr val="FF0000"/>
                                 </a:solidFill>
                                 <a:latin typeface="Cambria Math" panose="02040503050406030204" pitchFamily="18" charset="0"/>
                               </a:rPr>
-                              <m:t>𝑅</m:t>
+                              <m:t>𝑟</m:t>
                             </m:r>
                           </m:e>
                           <m:sup>
@@ -12474,10 +12474,10 @@
                           </m:sSupPr>
                           <m:e>
                             <m:r>
-                              <a:rPr lang="fr-FR" sz="2400" i="1">
-                                <a:latin typeface="Cambria Math" panose="02040503050406030204" pitchFamily="18" charset="0"/>
-                              </a:rPr>
-                              <m:t>𝑅</m:t>
+                              <a:rPr lang="fr-CA" sz="2400" b="0" i="1" smtClean="0">
+                                <a:latin typeface="Cambria Math" panose="02040503050406030204" pitchFamily="18" charset="0"/>
+                              </a:rPr>
+                              <m:t>𝑟</m:t>
                             </m:r>
                           </m:e>
                           <m:sup>
@@ -12534,10 +12534,10 @@
                           <m:t>,</m:t>
                         </m:r>
                         <m:r>
-                          <a:rPr lang="fr-FR" sz="2400" i="1">
-                            <a:latin typeface="Cambria Math" panose="02040503050406030204" pitchFamily="18" charset="0"/>
-                          </a:rPr>
-                          <m:t>𝑅</m:t>
+                          <a:rPr lang="fr-CA" sz="2400" b="0" i="1" smtClean="0">
+                            <a:latin typeface="Cambria Math" panose="02040503050406030204" pitchFamily="18" charset="0"/>
+                          </a:rPr>
+                          <m:t>𝑟</m:t>
                         </m:r>
                         <m:r>
                           <a:rPr lang="fr-FR" sz="2400" i="1">
@@ -12581,10 +12581,10 @@
                           </m:sSupPr>
                           <m:e>
                             <m:r>
-                              <a:rPr lang="fr-FR" sz="2400" i="1">
-                                <a:latin typeface="Cambria Math" panose="02040503050406030204" pitchFamily="18" charset="0"/>
-                              </a:rPr>
-                              <m:t>𝑅</m:t>
+                              <a:rPr lang="fr-CA" sz="2400" b="0" i="1" smtClean="0">
+                                <a:latin typeface="Cambria Math" panose="02040503050406030204" pitchFamily="18" charset="0"/>
+                              </a:rPr>
+                              <m:t>𝑟</m:t>
                             </m:r>
                           </m:e>
                           <m:sup>
@@ -12646,10 +12646,10 @@
                           </m:sSupPr>
                           <m:e>
                             <m:r>
-                              <a:rPr lang="fr-FR" sz="2400" i="1">
-                                <a:latin typeface="Cambria Math" panose="02040503050406030204" pitchFamily="18" charset="0"/>
-                              </a:rPr>
-                              <m:t>𝑅</m:t>
+                              <a:rPr lang="fr-CA" sz="2400" b="0" i="1" smtClean="0">
+                                <a:latin typeface="Cambria Math" panose="02040503050406030204" pitchFamily="18" charset="0"/>
+                              </a:rPr>
+                              <m:t>𝑟</m:t>
                             </m:r>
                           </m:e>
                           <m:sup>
@@ -12779,10 +12779,10 @@
                           <m:t>,</m:t>
                         </m:r>
                         <m:r>
-                          <a:rPr lang="fr-FR" sz="2400" i="1">
-                            <a:latin typeface="Cambria Math" panose="02040503050406030204" pitchFamily="18" charset="0"/>
-                          </a:rPr>
-                          <m:t>𝑅</m:t>
+                          <a:rPr lang="fr-CA" sz="2400" b="0" i="1" smtClean="0">
+                            <a:latin typeface="Cambria Math" panose="02040503050406030204" pitchFamily="18" charset="0"/>
+                          </a:rPr>
+                          <m:t>𝑟</m:t>
                         </m:r>
                         <m:r>
                           <a:rPr lang="fr-FR" sz="2400" i="1">
@@ -12862,10 +12862,10 @@
                           </m:sSupPr>
                           <m:e>
                             <m:r>
-                              <a:rPr lang="fr-FR" sz="2400" b="0" i="1" smtClean="0">
-                                <a:latin typeface="Cambria Math" panose="02040503050406030204" pitchFamily="18" charset="0"/>
-                              </a:rPr>
-                              <m:t>𝑅</m:t>
+                              <a:rPr lang="fr-CA" sz="2400" b="0" i="1" smtClean="0">
+                                <a:latin typeface="Cambria Math" panose="02040503050406030204" pitchFamily="18" charset="0"/>
+                              </a:rPr>
+                              <m:t>𝑟</m:t>
                             </m:r>
                           </m:e>
                           <m:sup>
@@ -12951,13 +12951,13 @@
                           </m:sSupPr>
                           <m:e>
                             <m:r>
-                              <a:rPr lang="fr-FR" sz="2400" b="0" i="1" smtClean="0">
+                              <a:rPr lang="fr-CA" sz="2400" b="0" i="1" smtClean="0">
                                 <a:solidFill>
                                   <a:srgbClr val="0070C0"/>
                                 </a:solidFill>
                                 <a:latin typeface="Cambria Math" panose="02040503050406030204" pitchFamily="18" charset="0"/>
                               </a:rPr>
-                              <m:t>𝑅</m:t>
+                              <m:t>𝑟</m:t>
                             </m:r>
                           </m:e>
                           <m:sup>
@@ -13031,13 +13031,13 @@
                       </m:sSupPr>
                       <m:e>
                         <m:r>
-                          <a:rPr lang="fr-FR" sz="2400" b="0" i="1" smtClean="0">
+                          <a:rPr lang="fr-CA" sz="2400" b="0" i="1" smtClean="0">
                             <a:solidFill>
                               <a:srgbClr val="0070C0"/>
                             </a:solidFill>
                             <a:latin typeface="Cambria Math" panose="02040503050406030204" pitchFamily="18" charset="0"/>
                           </a:rPr>
-                          <m:t>𝑅</m:t>
+                          <m:t>𝑟</m:t>
                         </m:r>
                       </m:e>
                       <m:sup>
@@ -13099,10 +13099,10 @@
                           </m:e>
                           <m:sub>
                             <m:r>
-                              <a:rPr lang="fr-FR" sz="2400" i="1">
-                                <a:latin typeface="Cambria Math" panose="02040503050406030204" pitchFamily="18" charset="0"/>
-                              </a:rPr>
-                              <m:t>𝑅</m:t>
+                              <a:rPr lang="fr-CA" sz="2400" b="0" i="1" smtClean="0">
+                                <a:latin typeface="Cambria Math" panose="02040503050406030204" pitchFamily="18" charset="0"/>
+                              </a:rPr>
+                              <m:t>𝑟</m:t>
                             </m:r>
                             <m:r>
                               <a:rPr lang="fr-FR" sz="2400" i="1">
@@ -13162,10 +13162,10 @@
                           </m:e>
                           <m:sub>
                             <m:r>
-                              <a:rPr lang="fr-FR" sz="2400" i="1">
-                                <a:latin typeface="Cambria Math" panose="02040503050406030204" pitchFamily="18" charset="0"/>
-                              </a:rPr>
-                              <m:t>𝑅</m:t>
+                              <a:rPr lang="fr-CA" sz="2400" b="0" i="1" smtClean="0">
+                                <a:latin typeface="Cambria Math" panose="02040503050406030204" pitchFamily="18" charset="0"/>
+                              </a:rPr>
+                              <m:t>𝑟</m:t>
                             </m:r>
                             <m:r>
                               <a:rPr lang="fr-FR" sz="2400" i="1">
@@ -13213,10 +13213,10 @@
                           </m:e>
                           <m:sub>
                             <m:r>
-                              <a:rPr lang="fr-FR" sz="2400" i="1">
-                                <a:latin typeface="Cambria Math" panose="02040503050406030204" pitchFamily="18" charset="0"/>
-                              </a:rPr>
-                              <m:t>𝑅</m:t>
+                              <a:rPr lang="fr-CA" sz="2400" b="0" i="1" smtClean="0">
+                                <a:latin typeface="Cambria Math" panose="02040503050406030204" pitchFamily="18" charset="0"/>
+                              </a:rPr>
+                              <m:t>𝑟</m:t>
                             </m:r>
                             <m:r>
                               <a:rPr lang="fr-FR" sz="2400" i="1">
@@ -13515,13 +13515,13 @@
                           <m:t>,</m:t>
                         </m:r>
                         <m:r>
-                          <a:rPr lang="fr-FR" sz="2400" i="1">
+                          <a:rPr lang="fr-CA" sz="2400" b="0" i="1" smtClean="0">
                             <a:solidFill>
                               <a:srgbClr val="FF0000"/>
                             </a:solidFill>
                             <a:latin typeface="Cambria Math" panose="02040503050406030204" pitchFamily="18" charset="0"/>
                           </a:rPr>
-                          <m:t>𝑅</m:t>
+                          <m:t>𝑟</m:t>
                         </m:r>
                         <m:r>
                           <a:rPr lang="fr-FR" sz="2400" i="1">
@@ -13733,13 +13733,13 @@
                           <m:t>,</m:t>
                         </m:r>
                         <m:r>
-                          <a:rPr lang="fr-FR" sz="2400" i="1">
+                          <a:rPr lang="fr-CA" sz="2400" b="0" i="1" smtClean="0">
                             <a:solidFill>
                               <a:schemeClr val="tx1"/>
                             </a:solidFill>
                             <a:latin typeface="Cambria Math" panose="02040503050406030204" pitchFamily="18" charset="0"/>
                           </a:rPr>
-                          <m:t>𝑅</m:t>
+                          <m:t>𝑟</m:t>
                         </m:r>
                         <m:r>
                           <a:rPr lang="fr-FR" sz="2400" i="1">
@@ -14001,13 +14001,13 @@
                           <m:t>,</m:t>
                         </m:r>
                         <m:r>
-                          <a:rPr lang="fr-FR" sz="2400" i="1">
+                          <a:rPr lang="fr-CA" sz="2400" b="0" i="1" smtClean="0">
                             <a:solidFill>
                               <a:srgbClr val="FF0000"/>
                             </a:solidFill>
                             <a:latin typeface="Cambria Math" panose="02040503050406030204" pitchFamily="18" charset="0"/>
                           </a:rPr>
-                          <m:t>𝑅</m:t>
+                          <m:t>𝑟</m:t>
                         </m:r>
                         <m:r>
                           <a:rPr lang="fr-FR" sz="2400" i="1">
@@ -14458,13 +14458,13 @@
                           <m:t>,</m:t>
                         </m:r>
                         <m:r>
-                          <a:rPr lang="fr-FR" sz="2400" i="1">
+                          <a:rPr lang="fr-CA" sz="2400" b="0" i="1" smtClean="0">
                             <a:solidFill>
                               <a:srgbClr val="FF0000"/>
                             </a:solidFill>
                             <a:latin typeface="Cambria Math" panose="02040503050406030204" pitchFamily="18" charset="0"/>
                           </a:rPr>
-                          <m:t>𝑅</m:t>
+                          <m:t>𝑟</m:t>
                         </m:r>
                         <m:r>
                           <a:rPr lang="fr-FR" sz="2400" i="1">
@@ -14631,10 +14631,10 @@
                           <m:t>,</m:t>
                         </m:r>
                         <m:r>
-                          <a:rPr lang="fr-FR" sz="2400" i="1">
-                            <a:latin typeface="Cambria Math" panose="02040503050406030204" pitchFamily="18" charset="0"/>
-                          </a:rPr>
-                          <m:t>𝑅</m:t>
+                          <a:rPr lang="fr-CA" sz="2400" b="0" i="1" smtClean="0">
+                            <a:latin typeface="Cambria Math" panose="02040503050406030204" pitchFamily="18" charset="0"/>
+                          </a:rPr>
+                          <m:t>𝑟</m:t>
                         </m:r>
                         <m:r>
                           <a:rPr lang="fr-FR" sz="2400" i="1">
@@ -14872,13 +14872,13 @@
                           <m:t>,</m:t>
                         </m:r>
                         <m:r>
-                          <a:rPr lang="fr-FR" sz="2400" i="1">
+                          <a:rPr lang="fr-CA" sz="2400" b="0" i="1" smtClean="0">
                             <a:solidFill>
                               <a:srgbClr val="FF0000"/>
                             </a:solidFill>
                             <a:latin typeface="Cambria Math" panose="02040503050406030204" pitchFamily="18" charset="0"/>
                           </a:rPr>
-                          <m:t>𝑅</m:t>
+                          <m:t>𝑟</m:t>
                         </m:r>
                         <m:r>
                           <a:rPr lang="fr-FR" sz="2400" i="1">
@@ -15457,10 +15457,10 @@
                           <m:t>,</m:t>
                         </m:r>
                         <m:r>
-                          <a:rPr lang="fr-FR" sz="2400" i="1">
-                            <a:latin typeface="Cambria Math" panose="02040503050406030204" pitchFamily="18" charset="0"/>
-                          </a:rPr>
-                          <m:t>𝑅</m:t>
+                          <a:rPr lang="fr-CA" sz="2400" b="0" i="1" smtClean="0">
+                            <a:latin typeface="Cambria Math" panose="02040503050406030204" pitchFamily="18" charset="0"/>
+                          </a:rPr>
+                          <m:t>𝑟</m:t>
                         </m:r>
                         <m:r>
                           <a:rPr lang="fr-FR" sz="2400" i="1">
@@ -15787,7 +15787,7 @@
               <a:lstStyle/>
               <a:p>
                 <a:r>
-                  <a:rPr lang="fr-FR">
+                  <a:rPr lang="fr-CA">
                     <a:noFill/>
                   </a:rPr>
                   <a:t> </a:t>

--- a/projet_final/projet_final/MEC8211-Projet-final-Presentation.pptx
+++ b/projet_final/projet_final/MEC8211-Projet-final-Presentation.pptx
@@ -5,17 +5,18 @@
     <p:sldMasterId id="2147483648" r:id="rId1"/>
   </p:sldMasterIdLst>
   <p:notesMasterIdLst>
-    <p:notesMasterId r:id="rId10"/>
+    <p:notesMasterId r:id="rId11"/>
   </p:notesMasterIdLst>
   <p:sldIdLst>
     <p:sldId id="256" r:id="rId2"/>
     <p:sldId id="258" r:id="rId3"/>
     <p:sldId id="257" r:id="rId4"/>
-    <p:sldId id="259" r:id="rId5"/>
-    <p:sldId id="263" r:id="rId6"/>
-    <p:sldId id="260" r:id="rId7"/>
-    <p:sldId id="262" r:id="rId8"/>
-    <p:sldId id="261" r:id="rId9"/>
+    <p:sldId id="264" r:id="rId5"/>
+    <p:sldId id="259" r:id="rId6"/>
+    <p:sldId id="263" r:id="rId7"/>
+    <p:sldId id="260" r:id="rId8"/>
+    <p:sldId id="262" r:id="rId9"/>
+    <p:sldId id="261" r:id="rId10"/>
   </p:sldIdLst>
   <p:sldSz cx="12192000" cy="6858000"/>
   <p:notesSz cx="6858000" cy="9144000"/>
@@ -620,7 +621,7 @@
           <a:p>
             <a:fld id="{F6105186-0725-443C-BC59-E521425E81CD}" type="slidenum">
               <a:rPr lang="fr-FR" smtClean="0"/>
-              <a:t>6</a:t>
+              <a:t>7</a:t>
             </a:fld>
             <a:endParaRPr lang="fr-FR"/>
           </a:p>
@@ -728,7 +729,7 @@
           <a:p>
             <a:fld id="{F6105186-0725-443C-BC59-E521425E81CD}" type="slidenum">
               <a:rPr lang="fr-FR" smtClean="0"/>
-              <a:t>7</a:t>
+              <a:t>8</a:t>
             </a:fld>
             <a:endParaRPr lang="fr-FR"/>
           </a:p>
@@ -5424,6 +5425,1493 @@
   <p:cSld>
     <p:spTree>
       <p:nvGrpSpPr>
+        <p:cNvPr id="1" name="">
+          <a:extLst>
+            <a:ext uri="{FF2B5EF4-FFF2-40B4-BE49-F238E27FC236}">
+              <a16:creationId xmlns:a16="http://schemas.microsoft.com/office/drawing/2014/main" id="{030694C9-7099-3A84-9A6D-5B2A0879BE8B}"/>
+            </a:ext>
+          </a:extLst>
+        </p:cNvPr>
+        <p:cNvGrpSpPr/>
+        <p:nvPr/>
+      </p:nvGrpSpPr>
+      <p:grpSpPr>
+        <a:xfrm>
+          <a:off x="0" y="0"/>
+          <a:ext cx="0" cy="0"/>
+          <a:chOff x="0" y="0"/>
+          <a:chExt cx="0" cy="0"/>
+        </a:xfrm>
+      </p:grpSpPr>
+      <p:sp>
+        <p:nvSpPr>
+          <p:cNvPr id="2" name="Titre 1">
+            <a:extLst>
+              <a:ext uri="{FF2B5EF4-FFF2-40B4-BE49-F238E27FC236}">
+                <a16:creationId xmlns:a16="http://schemas.microsoft.com/office/drawing/2014/main" id="{0DEC12AB-5894-7E9F-0510-EB109BFCA985}"/>
+              </a:ext>
+            </a:extLst>
+          </p:cNvPr>
+          <p:cNvSpPr>
+            <a:spLocks noGrp="1"/>
+          </p:cNvSpPr>
+          <p:nvPr>
+            <p:ph type="title"/>
+          </p:nvPr>
+        </p:nvSpPr>
+        <p:spPr>
+          <a:xfrm>
+            <a:off x="838200" y="18255"/>
+            <a:ext cx="10515600" cy="1325563"/>
+          </a:xfrm>
+        </p:spPr>
+        <p:txBody>
+          <a:bodyPr/>
+          <a:lstStyle/>
+          <a:p>
+            <a:r>
+              <a:rPr lang="fr-FR" dirty="0"/>
+              <a:t>Modélisation mathématique</a:t>
+            </a:r>
+          </a:p>
+        </p:txBody>
+      </p:sp>
+      <mc:AlternateContent xmlns:mc="http://schemas.openxmlformats.org/markup-compatibility/2006">
+        <mc:Choice xmlns:a14="http://schemas.microsoft.com/office/drawing/2010/main" Requires="a14">
+          <p:sp>
+            <p:nvSpPr>
+              <p:cNvPr id="3" name="Espace réservé du contenu 2">
+                <a:extLst>
+                  <a:ext uri="{FF2B5EF4-FFF2-40B4-BE49-F238E27FC236}">
+                    <a16:creationId xmlns:a16="http://schemas.microsoft.com/office/drawing/2014/main" id="{8073797C-3545-B398-B72A-5A621002005D}"/>
+                  </a:ext>
+                </a:extLst>
+              </p:cNvPr>
+              <p:cNvSpPr>
+                <a:spLocks noGrp="1"/>
+              </p:cNvSpPr>
+              <p:nvPr>
+                <p:ph idx="1"/>
+              </p:nvPr>
+            </p:nvSpPr>
+            <p:spPr>
+              <a:xfrm>
+                <a:off x="838200" y="1155033"/>
+                <a:ext cx="8177463" cy="5358062"/>
+              </a:xfrm>
+            </p:spPr>
+            <p:txBody>
+              <a:bodyPr>
+                <a:normAutofit fontScale="92500" lnSpcReduction="10000"/>
+              </a:bodyPr>
+              <a:lstStyle/>
+              <a:p>
+                <a:pPr marL="0" indent="0" fontAlgn="base">
+                  <a:spcBef>
+                    <a:spcPts val="1800"/>
+                  </a:spcBef>
+                  <a:buNone/>
+                </a:pPr>
+                <a:r>
+                  <a:rPr lang="fr-FR" dirty="0"/>
+                  <a:t>Equation de la chaleur en 2D </a:t>
+                </a:r>
+                <a:endParaRPr lang="en-US" dirty="0"/>
+              </a:p>
+              <a:p>
+                <a:pPr marL="0" indent="0">
+                  <a:spcBef>
+                    <a:spcPts val="1800"/>
+                  </a:spcBef>
+                  <a:buNone/>
+                </a:pPr>
+                <a14:m>
+                  <m:oMathPara xmlns:m="http://schemas.openxmlformats.org/officeDocument/2006/math">
+                    <m:oMathParaPr>
+                      <m:jc m:val="centerGroup"/>
+                    </m:oMathParaPr>
+                    <m:oMath xmlns:m="http://schemas.openxmlformats.org/officeDocument/2006/math">
+                      <m:r>
+                        <m:rPr>
+                          <m:sty m:val="p"/>
+                        </m:rPr>
+                        <a:rPr lang="el-GR" i="1">
+                          <a:latin typeface="Cambria Math" panose="02040503050406030204" pitchFamily="18" charset="0"/>
+                        </a:rPr>
+                        <m:t>ρ</m:t>
+                      </m:r>
+                      <m:sSub>
+                        <m:sSubPr>
+                          <m:ctrlPr>
+                            <a:rPr lang="fr-FR" b="0" i="1" smtClean="0">
+                              <a:latin typeface="Cambria Math" panose="02040503050406030204" pitchFamily="18" charset="0"/>
+                            </a:rPr>
+                          </m:ctrlPr>
+                        </m:sSubPr>
+                        <m:e>
+                          <m:r>
+                            <a:rPr lang="fr-FR" b="0" i="1" smtClean="0">
+                              <a:latin typeface="Cambria Math" panose="02040503050406030204" pitchFamily="18" charset="0"/>
+                            </a:rPr>
+                            <m:t>𝐶</m:t>
+                          </m:r>
+                        </m:e>
+                        <m:sub>
+                          <m:r>
+                            <a:rPr lang="fr-FR" b="0" i="1" smtClean="0">
+                              <a:latin typeface="Cambria Math" panose="02040503050406030204" pitchFamily="18" charset="0"/>
+                            </a:rPr>
+                            <m:t>𝑝</m:t>
+                          </m:r>
+                        </m:sub>
+                      </m:sSub>
+                      <m:f>
+                        <m:fPr>
+                          <m:ctrlPr>
+                            <a:rPr lang="fr-FR" i="1">
+                              <a:latin typeface="Cambria Math" panose="02040503050406030204" pitchFamily="18" charset="0"/>
+                            </a:rPr>
+                          </m:ctrlPr>
+                        </m:fPr>
+                        <m:num>
+                          <m:r>
+                            <a:rPr lang="fr-FR" i="1">
+                              <a:latin typeface="Cambria Math" panose="02040503050406030204" pitchFamily="18" charset="0"/>
+                            </a:rPr>
+                            <m:t>𝜕</m:t>
+                          </m:r>
+                          <m:r>
+                            <a:rPr lang="fr-FR" b="0" i="1" smtClean="0">
+                              <a:latin typeface="Cambria Math" panose="02040503050406030204" pitchFamily="18" charset="0"/>
+                            </a:rPr>
+                            <m:t>𝑇</m:t>
+                          </m:r>
+                        </m:num>
+                        <m:den>
+                          <m:r>
+                            <a:rPr lang="fr-FR" i="1">
+                              <a:latin typeface="Cambria Math" panose="02040503050406030204" pitchFamily="18" charset="0"/>
+                            </a:rPr>
+                            <m:t>𝜕</m:t>
+                          </m:r>
+                          <m:r>
+                            <a:rPr lang="fr-FR" b="0" i="1" smtClean="0">
+                              <a:latin typeface="Cambria Math" panose="02040503050406030204" pitchFamily="18" charset="0"/>
+                            </a:rPr>
+                            <m:t>𝑡</m:t>
+                          </m:r>
+                        </m:den>
+                      </m:f>
+                      <m:r>
+                        <a:rPr lang="fr-FR" b="0" i="1" smtClean="0">
+                          <a:latin typeface="Cambria Math" panose="02040503050406030204" pitchFamily="18" charset="0"/>
+                        </a:rPr>
+                        <m:t>=</m:t>
+                      </m:r>
+                      <m:r>
+                        <a:rPr lang="fr-FR" b="0" i="1" smtClean="0">
+                          <a:latin typeface="Cambria Math" panose="02040503050406030204" pitchFamily="18" charset="0"/>
+                        </a:rPr>
+                        <m:t>𝑘</m:t>
+                      </m:r>
+                      <m:sSup>
+                        <m:sSupPr>
+                          <m:ctrlPr>
+                            <a:rPr lang="fr-FR" b="0" i="1" smtClean="0">
+                              <a:latin typeface="Cambria Math" panose="02040503050406030204" pitchFamily="18" charset="0"/>
+                            </a:rPr>
+                          </m:ctrlPr>
+                        </m:sSupPr>
+                        <m:e>
+                          <m:r>
+                            <m:rPr>
+                              <m:sty m:val="p"/>
+                            </m:rPr>
+                            <a:rPr lang="fr-FR" b="0" i="1" smtClean="0">
+                              <a:latin typeface="Cambria Math" panose="02040503050406030204" pitchFamily="18" charset="0"/>
+                            </a:rPr>
+                            <m:t>∇</m:t>
+                          </m:r>
+                        </m:e>
+                        <m:sup>
+                          <m:r>
+                            <a:rPr lang="fr-FR" b="0" i="1" smtClean="0">
+                              <a:latin typeface="Cambria Math" panose="02040503050406030204" pitchFamily="18" charset="0"/>
+                            </a:rPr>
+                            <m:t>2</m:t>
+                          </m:r>
+                        </m:sup>
+                      </m:sSup>
+                      <m:r>
+                        <a:rPr lang="fr-FR" b="0" i="1" smtClean="0">
+                          <a:latin typeface="Cambria Math" panose="02040503050406030204" pitchFamily="18" charset="0"/>
+                        </a:rPr>
+                        <m:t>𝑇</m:t>
+                      </m:r>
+                    </m:oMath>
+                  </m:oMathPara>
+                </a14:m>
+                <a:endParaRPr lang="fr-FR" b="0" dirty="0"/>
+              </a:p>
+              <a:p>
+                <a:pPr marL="0" indent="0">
+                  <a:spcBef>
+                    <a:spcPts val="1800"/>
+                  </a:spcBef>
+                  <a:buNone/>
+                </a:pPr>
+                <a:r>
+                  <a:rPr lang="fr-FR" dirty="0"/>
+                  <a:t>En cartésien, on a :</a:t>
+                </a:r>
+              </a:p>
+              <a:p>
+                <a:pPr marL="0" indent="0">
+                  <a:spcBef>
+                    <a:spcPts val="1800"/>
+                  </a:spcBef>
+                  <a:buNone/>
+                </a:pPr>
+                <a14:m>
+                  <m:oMathPara xmlns:m="http://schemas.openxmlformats.org/officeDocument/2006/math">
+                    <m:oMathParaPr>
+                      <m:jc m:val="centerGroup"/>
+                    </m:oMathParaPr>
+                    <m:oMath xmlns:m="http://schemas.openxmlformats.org/officeDocument/2006/math">
+                      <m:r>
+                        <m:rPr>
+                          <m:sty m:val="p"/>
+                        </m:rPr>
+                        <a:rPr lang="el-GR" i="1">
+                          <a:latin typeface="Cambria Math" panose="02040503050406030204" pitchFamily="18" charset="0"/>
+                        </a:rPr>
+                        <m:t>ρ</m:t>
+                      </m:r>
+                      <m:sSub>
+                        <m:sSubPr>
+                          <m:ctrlPr>
+                            <a:rPr lang="fr-FR" i="1">
+                              <a:latin typeface="Cambria Math" panose="02040503050406030204" pitchFamily="18" charset="0"/>
+                            </a:rPr>
+                          </m:ctrlPr>
+                        </m:sSubPr>
+                        <m:e>
+                          <m:r>
+                            <a:rPr lang="fr-FR" i="1">
+                              <a:latin typeface="Cambria Math" panose="02040503050406030204" pitchFamily="18" charset="0"/>
+                            </a:rPr>
+                            <m:t>𝐶</m:t>
+                          </m:r>
+                        </m:e>
+                        <m:sub>
+                          <m:r>
+                            <a:rPr lang="fr-FR" i="1">
+                              <a:latin typeface="Cambria Math" panose="02040503050406030204" pitchFamily="18" charset="0"/>
+                            </a:rPr>
+                            <m:t>𝑝</m:t>
+                          </m:r>
+                        </m:sub>
+                      </m:sSub>
+                      <m:r>
+                        <a:rPr lang="fr-FR" i="1">
+                          <a:latin typeface="Cambria Math" panose="02040503050406030204" pitchFamily="18" charset="0"/>
+                        </a:rPr>
+                        <m:t> </m:t>
+                      </m:r>
+                      <m:f>
+                        <m:fPr>
+                          <m:ctrlPr>
+                            <a:rPr lang="fr-FR" i="1">
+                              <a:latin typeface="Cambria Math" panose="02040503050406030204" pitchFamily="18" charset="0"/>
+                            </a:rPr>
+                          </m:ctrlPr>
+                        </m:fPr>
+                        <m:num>
+                          <m:r>
+                            <a:rPr lang="fr-FR" i="1">
+                              <a:latin typeface="Cambria Math" panose="02040503050406030204" pitchFamily="18" charset="0"/>
+                            </a:rPr>
+                            <m:t>𝜕</m:t>
+                          </m:r>
+                          <m:r>
+                            <a:rPr lang="fr-FR" i="1">
+                              <a:latin typeface="Cambria Math" panose="02040503050406030204" pitchFamily="18" charset="0"/>
+                            </a:rPr>
+                            <m:t>𝑇</m:t>
+                          </m:r>
+                        </m:num>
+                        <m:den>
+                          <m:r>
+                            <a:rPr lang="fr-FR" i="1">
+                              <a:latin typeface="Cambria Math" panose="02040503050406030204" pitchFamily="18" charset="0"/>
+                            </a:rPr>
+                            <m:t>𝜕</m:t>
+                          </m:r>
+                          <m:r>
+                            <a:rPr lang="fr-FR" i="1">
+                              <a:latin typeface="Cambria Math" panose="02040503050406030204" pitchFamily="18" charset="0"/>
+                            </a:rPr>
+                            <m:t>𝑡</m:t>
+                          </m:r>
+                        </m:den>
+                      </m:f>
+                      <m:r>
+                        <a:rPr lang="fr-CA" b="0" i="1" smtClean="0">
+                          <a:latin typeface="Cambria Math" panose="02040503050406030204" pitchFamily="18" charset="0"/>
+                        </a:rPr>
+                        <m:t>=</m:t>
+                      </m:r>
+                      <m:r>
+                        <a:rPr lang="fr-CA" b="0" i="1" smtClean="0">
+                          <a:latin typeface="Cambria Math" panose="02040503050406030204" pitchFamily="18" charset="0"/>
+                        </a:rPr>
+                        <m:t>𝑘</m:t>
+                      </m:r>
+                      <m:r>
+                        <a:rPr lang="fr-CA" b="0" i="1" smtClean="0">
+                          <a:latin typeface="Cambria Math" panose="02040503050406030204" pitchFamily="18" charset="0"/>
+                        </a:rPr>
+                        <m:t>(</m:t>
+                      </m:r>
+                      <m:f>
+                        <m:fPr>
+                          <m:ctrlPr>
+                            <a:rPr lang="fr-FR" i="1">
+                              <a:latin typeface="Cambria Math" panose="02040503050406030204" pitchFamily="18" charset="0"/>
+                            </a:rPr>
+                          </m:ctrlPr>
+                        </m:fPr>
+                        <m:num>
+                          <m:sSup>
+                            <m:sSupPr>
+                              <m:ctrlPr>
+                                <a:rPr lang="fr-FR" i="1">
+                                  <a:latin typeface="Cambria Math" panose="02040503050406030204" pitchFamily="18" charset="0"/>
+                                </a:rPr>
+                              </m:ctrlPr>
+                            </m:sSupPr>
+                            <m:e>
+                              <m:r>
+                                <a:rPr lang="fr-FR" i="1">
+                                  <a:latin typeface="Cambria Math" panose="02040503050406030204" pitchFamily="18" charset="0"/>
+                                </a:rPr>
+                                <m:t>𝜕</m:t>
+                              </m:r>
+                            </m:e>
+                            <m:sup>
+                              <m:r>
+                                <a:rPr lang="fr-FR" i="1">
+                                  <a:latin typeface="Cambria Math" panose="02040503050406030204" pitchFamily="18" charset="0"/>
+                                </a:rPr>
+                                <m:t>2</m:t>
+                              </m:r>
+                            </m:sup>
+                          </m:sSup>
+                          <m:r>
+                            <a:rPr lang="fr-FR" i="1">
+                              <a:latin typeface="Cambria Math" panose="02040503050406030204" pitchFamily="18" charset="0"/>
+                            </a:rPr>
+                            <m:t>𝑇</m:t>
+                          </m:r>
+                        </m:num>
+                        <m:den>
+                          <m:r>
+                            <a:rPr lang="fr-FR" i="1">
+                              <a:latin typeface="Cambria Math" panose="02040503050406030204" pitchFamily="18" charset="0"/>
+                            </a:rPr>
+                            <m:t>𝜕</m:t>
+                          </m:r>
+                          <m:sSup>
+                            <m:sSupPr>
+                              <m:ctrlPr>
+                                <a:rPr lang="fr-FR" i="1">
+                                  <a:latin typeface="Cambria Math" panose="02040503050406030204" pitchFamily="18" charset="0"/>
+                                </a:rPr>
+                              </m:ctrlPr>
+                            </m:sSupPr>
+                            <m:e>
+                              <m:r>
+                                <a:rPr lang="fr-CA" b="0" i="1" smtClean="0">
+                                  <a:latin typeface="Cambria Math" panose="02040503050406030204" pitchFamily="18" charset="0"/>
+                                </a:rPr>
+                                <m:t>𝑥</m:t>
+                              </m:r>
+                            </m:e>
+                            <m:sup>
+                              <m:r>
+                                <a:rPr lang="fr-FR" i="1">
+                                  <a:latin typeface="Cambria Math" panose="02040503050406030204" pitchFamily="18" charset="0"/>
+                                </a:rPr>
+                                <m:t>2</m:t>
+                              </m:r>
+                            </m:sup>
+                          </m:sSup>
+                        </m:den>
+                      </m:f>
+                      <m:r>
+                        <a:rPr lang="fr-FR" i="1">
+                          <a:latin typeface="Cambria Math" panose="02040503050406030204" pitchFamily="18" charset="0"/>
+                        </a:rPr>
+                        <m:t>+</m:t>
+                      </m:r>
+                      <m:f>
+                        <m:fPr>
+                          <m:ctrlPr>
+                            <a:rPr lang="fr-FR" i="1">
+                              <a:latin typeface="Cambria Math" panose="02040503050406030204" pitchFamily="18" charset="0"/>
+                            </a:rPr>
+                          </m:ctrlPr>
+                        </m:fPr>
+                        <m:num>
+                          <m:sSup>
+                            <m:sSupPr>
+                              <m:ctrlPr>
+                                <a:rPr lang="fr-FR" i="1">
+                                  <a:latin typeface="Cambria Math" panose="02040503050406030204" pitchFamily="18" charset="0"/>
+                                </a:rPr>
+                              </m:ctrlPr>
+                            </m:sSupPr>
+                            <m:e>
+                              <m:r>
+                                <a:rPr lang="fr-FR" i="1">
+                                  <a:latin typeface="Cambria Math" panose="02040503050406030204" pitchFamily="18" charset="0"/>
+                                </a:rPr>
+                                <m:t>𝜕</m:t>
+                              </m:r>
+                            </m:e>
+                            <m:sup>
+                              <m:r>
+                                <a:rPr lang="fr-FR" i="1">
+                                  <a:latin typeface="Cambria Math" panose="02040503050406030204" pitchFamily="18" charset="0"/>
+                                </a:rPr>
+                                <m:t>2</m:t>
+                              </m:r>
+                            </m:sup>
+                          </m:sSup>
+                          <m:r>
+                            <a:rPr lang="fr-FR" i="1">
+                              <a:latin typeface="Cambria Math" panose="02040503050406030204" pitchFamily="18" charset="0"/>
+                            </a:rPr>
+                            <m:t>𝑇</m:t>
+                          </m:r>
+                        </m:num>
+                        <m:den>
+                          <m:r>
+                            <a:rPr lang="fr-FR" i="1">
+                              <a:latin typeface="Cambria Math" panose="02040503050406030204" pitchFamily="18" charset="0"/>
+                            </a:rPr>
+                            <m:t>𝜕</m:t>
+                          </m:r>
+                          <m:sSup>
+                            <m:sSupPr>
+                              <m:ctrlPr>
+                                <a:rPr lang="fr-FR" i="1">
+                                  <a:latin typeface="Cambria Math" panose="02040503050406030204" pitchFamily="18" charset="0"/>
+                                </a:rPr>
+                              </m:ctrlPr>
+                            </m:sSupPr>
+                            <m:e>
+                              <m:r>
+                                <a:rPr lang="fr-CA" b="0" i="1" smtClean="0">
+                                  <a:latin typeface="Cambria Math" panose="02040503050406030204" pitchFamily="18" charset="0"/>
+                                </a:rPr>
+                                <m:t>𝑦</m:t>
+                              </m:r>
+                            </m:e>
+                            <m:sup>
+                              <m:r>
+                                <a:rPr lang="fr-FR" i="1">
+                                  <a:latin typeface="Cambria Math" panose="02040503050406030204" pitchFamily="18" charset="0"/>
+                                </a:rPr>
+                                <m:t>2</m:t>
+                              </m:r>
+                            </m:sup>
+                          </m:sSup>
+                        </m:den>
+                      </m:f>
+                      <m:r>
+                        <a:rPr lang="fr-CA" b="0" i="1" smtClean="0">
+                          <a:latin typeface="Cambria Math" panose="02040503050406030204" pitchFamily="18" charset="0"/>
+                        </a:rPr>
+                        <m:t>)</m:t>
+                      </m:r>
+                    </m:oMath>
+                  </m:oMathPara>
+                </a14:m>
+                <a:endParaRPr lang="fr-FR" b="0" dirty="0"/>
+              </a:p>
+              <a:p>
+                <a:pPr marL="0" indent="0">
+                  <a:spcBef>
+                    <a:spcPts val="1800"/>
+                  </a:spcBef>
+                  <a:buNone/>
+                </a:pPr>
+                <a:r>
+                  <a:rPr lang="fr-FR" dirty="0"/>
+                  <a:t>En cylindrique, on retrouve :</a:t>
+                </a:r>
+              </a:p>
+              <a:p>
+                <a:pPr marL="0" indent="0">
+                  <a:spcBef>
+                    <a:spcPts val="1800"/>
+                  </a:spcBef>
+                  <a:buNone/>
+                </a:pPr>
+                <a14:m>
+                  <m:oMathPara xmlns:m="http://schemas.openxmlformats.org/officeDocument/2006/math">
+                    <m:oMathParaPr>
+                      <m:jc m:val="centerGroup"/>
+                    </m:oMathParaPr>
+                    <m:oMath xmlns:m="http://schemas.openxmlformats.org/officeDocument/2006/math">
+                      <m:r>
+                        <a:rPr lang="fr-CA" b="0" i="1" smtClean="0">
+                          <a:latin typeface="Cambria Math" panose="02040503050406030204" pitchFamily="18" charset="0"/>
+                        </a:rPr>
+                        <m:t>𝑥</m:t>
+                      </m:r>
+                      <m:r>
+                        <a:rPr lang="fr-CA" i="1">
+                          <a:latin typeface="Cambria Math" panose="02040503050406030204" pitchFamily="18" charset="0"/>
+                        </a:rPr>
+                        <m:t>=</m:t>
+                      </m:r>
+                      <m:r>
+                        <m:rPr>
+                          <m:sty m:val="p"/>
+                        </m:rPr>
+                        <a:rPr lang="fr-CA">
+                          <a:latin typeface="Cambria Math" panose="02040503050406030204" pitchFamily="18" charset="0"/>
+                        </a:rPr>
+                        <m:t>r</m:t>
+                      </m:r>
+                      <m:func>
+                        <m:funcPr>
+                          <m:ctrlPr>
+                            <a:rPr lang="fr-CA" i="1">
+                              <a:latin typeface="Cambria Math" panose="02040503050406030204" pitchFamily="18" charset="0"/>
+                            </a:rPr>
+                          </m:ctrlPr>
+                        </m:funcPr>
+                        <m:fName>
+                          <m:r>
+                            <m:rPr>
+                              <m:sty m:val="p"/>
+                            </m:rPr>
+                            <a:rPr lang="fr-CA">
+                              <a:latin typeface="Cambria Math" panose="02040503050406030204" pitchFamily="18" charset="0"/>
+                            </a:rPr>
+                            <m:t>cos</m:t>
+                          </m:r>
+                        </m:fName>
+                        <m:e>
+                          <m:d>
+                            <m:dPr>
+                              <m:ctrlPr>
+                                <a:rPr lang="fr-CA" i="1">
+                                  <a:latin typeface="Cambria Math" panose="02040503050406030204" pitchFamily="18" charset="0"/>
+                                </a:rPr>
+                              </m:ctrlPr>
+                            </m:dPr>
+                            <m:e>
+                              <m:r>
+                                <a:rPr lang="fr-CA" i="1">
+                                  <a:latin typeface="Cambria Math" panose="02040503050406030204" pitchFamily="18" charset="0"/>
+                                </a:rPr>
+                                <m:t>𝜃</m:t>
+                              </m:r>
+                            </m:e>
+                          </m:d>
+                        </m:e>
+                      </m:func>
+                      <m:r>
+                        <a:rPr lang="fr-CA" i="1">
+                          <a:latin typeface="Cambria Math" panose="02040503050406030204" pitchFamily="18" charset="0"/>
+                        </a:rPr>
+                        <m:t>𝑒𝑡</m:t>
+                      </m:r>
+                      <m:r>
+                        <a:rPr lang="fr-CA" i="1">
+                          <a:latin typeface="Cambria Math" panose="02040503050406030204" pitchFamily="18" charset="0"/>
+                        </a:rPr>
+                        <m:t> </m:t>
+                      </m:r>
+                      <m:r>
+                        <a:rPr lang="fr-CA" i="1">
+                          <a:latin typeface="Cambria Math" panose="02040503050406030204" pitchFamily="18" charset="0"/>
+                        </a:rPr>
+                        <m:t>𝑦</m:t>
+                      </m:r>
+                      <m:r>
+                        <a:rPr lang="fr-CA" i="1">
+                          <a:latin typeface="Cambria Math" panose="02040503050406030204" pitchFamily="18" charset="0"/>
+                        </a:rPr>
+                        <m:t>=</m:t>
+                      </m:r>
+                      <m:r>
+                        <a:rPr lang="fr-CA" b="0" i="1" smtClean="0">
+                          <a:latin typeface="Cambria Math" panose="02040503050406030204" pitchFamily="18" charset="0"/>
+                        </a:rPr>
+                        <m:t>𝑧</m:t>
+                      </m:r>
+                      <m:r>
+                        <a:rPr lang="fr-CA" b="0" i="1" smtClean="0">
+                          <a:latin typeface="Cambria Math" panose="02040503050406030204" pitchFamily="18" charset="0"/>
+                        </a:rPr>
+                        <m:t>, </m:t>
+                      </m:r>
+                      <m:r>
+                        <a:rPr lang="fr-CA" b="0" i="1" smtClean="0">
+                          <a:latin typeface="Cambria Math" panose="02040503050406030204" pitchFamily="18" charset="0"/>
+                        </a:rPr>
+                        <m:t>𝜃</m:t>
+                      </m:r>
+                      <m:r>
+                        <a:rPr lang="fr-CA" b="0" i="1" smtClean="0">
+                          <a:latin typeface="Cambria Math" panose="02040503050406030204" pitchFamily="18" charset="0"/>
+                        </a:rPr>
+                        <m:t>=0</m:t>
+                      </m:r>
+                    </m:oMath>
+                  </m:oMathPara>
+                </a14:m>
+                <a:endParaRPr lang="fr-FR" dirty="0"/>
+              </a:p>
+              <a:p>
+                <a:pPr marL="0" indent="0" algn="ctr">
+                  <a:spcBef>
+                    <a:spcPts val="1800"/>
+                  </a:spcBef>
+                  <a:buNone/>
+                </a:pPr>
+                <a14:m>
+                  <m:oMath xmlns:m="http://schemas.openxmlformats.org/officeDocument/2006/math">
+                    <m:sSup>
+                      <m:sSupPr>
+                        <m:ctrlPr>
+                          <a:rPr lang="fr-FR" i="1">
+                            <a:latin typeface="Cambria Math" panose="02040503050406030204" pitchFamily="18" charset="0"/>
+                          </a:rPr>
+                        </m:ctrlPr>
+                      </m:sSupPr>
+                      <m:e>
+                        <m:r>
+                          <m:rPr>
+                            <m:sty m:val="p"/>
+                          </m:rPr>
+                          <a:rPr lang="fr-FR" i="1">
+                            <a:latin typeface="Cambria Math" panose="02040503050406030204" pitchFamily="18" charset="0"/>
+                          </a:rPr>
+                          <m:t>∇</m:t>
+                        </m:r>
+                      </m:e>
+                      <m:sup>
+                        <m:r>
+                          <a:rPr lang="fr-FR" i="1">
+                            <a:latin typeface="Cambria Math" panose="02040503050406030204" pitchFamily="18" charset="0"/>
+                          </a:rPr>
+                          <m:t>2</m:t>
+                        </m:r>
+                      </m:sup>
+                    </m:sSup>
+                    <m:r>
+                      <a:rPr lang="fr-FR" i="1">
+                        <a:latin typeface="Cambria Math" panose="02040503050406030204" pitchFamily="18" charset="0"/>
+                      </a:rPr>
+                      <m:t>𝑇</m:t>
+                    </m:r>
+                  </m:oMath>
+                </a14:m>
+                <a:r>
+                  <a:rPr lang="fr-FR" dirty="0"/>
+                  <a:t> = </a:t>
+                </a:r>
+                <a14:m>
+                  <m:oMath xmlns:m="http://schemas.openxmlformats.org/officeDocument/2006/math">
+                    <m:f>
+                      <m:fPr>
+                        <m:ctrlPr>
+                          <a:rPr lang="fr-FR" i="1">
+                            <a:latin typeface="Cambria Math" panose="02040503050406030204" pitchFamily="18" charset="0"/>
+                          </a:rPr>
+                        </m:ctrlPr>
+                      </m:fPr>
+                      <m:num>
+                        <m:sSup>
+                          <m:sSupPr>
+                            <m:ctrlPr>
+                              <a:rPr lang="fr-FR" i="1">
+                                <a:latin typeface="Cambria Math" panose="02040503050406030204" pitchFamily="18" charset="0"/>
+                              </a:rPr>
+                            </m:ctrlPr>
+                          </m:sSupPr>
+                          <m:e>
+                            <m:r>
+                              <a:rPr lang="fr-FR" i="1">
+                                <a:latin typeface="Cambria Math" panose="02040503050406030204" pitchFamily="18" charset="0"/>
+                              </a:rPr>
+                              <m:t>𝜕</m:t>
+                            </m:r>
+                          </m:e>
+                          <m:sup>
+                            <m:r>
+                              <a:rPr lang="fr-FR" i="1">
+                                <a:latin typeface="Cambria Math" panose="02040503050406030204" pitchFamily="18" charset="0"/>
+                              </a:rPr>
+                              <m:t>2</m:t>
+                            </m:r>
+                          </m:sup>
+                        </m:sSup>
+                        <m:r>
+                          <a:rPr lang="fr-FR" i="1">
+                            <a:latin typeface="Cambria Math" panose="02040503050406030204" pitchFamily="18" charset="0"/>
+                          </a:rPr>
+                          <m:t>𝑇</m:t>
+                        </m:r>
+                      </m:num>
+                      <m:den>
+                        <m:r>
+                          <a:rPr lang="fr-FR" i="1">
+                            <a:latin typeface="Cambria Math" panose="02040503050406030204" pitchFamily="18" charset="0"/>
+                          </a:rPr>
+                          <m:t>𝜕</m:t>
+                        </m:r>
+                        <m:sSup>
+                          <m:sSupPr>
+                            <m:ctrlPr>
+                              <a:rPr lang="fr-FR" i="1">
+                                <a:latin typeface="Cambria Math" panose="02040503050406030204" pitchFamily="18" charset="0"/>
+                              </a:rPr>
+                            </m:ctrlPr>
+                          </m:sSupPr>
+                          <m:e>
+                            <m:r>
+                              <a:rPr lang="fr-CA" i="1">
+                                <a:latin typeface="Cambria Math" panose="02040503050406030204" pitchFamily="18" charset="0"/>
+                              </a:rPr>
+                              <m:t>𝑟</m:t>
+                            </m:r>
+                          </m:e>
+                          <m:sup>
+                            <m:r>
+                              <a:rPr lang="fr-FR" i="1">
+                                <a:latin typeface="Cambria Math" panose="02040503050406030204" pitchFamily="18" charset="0"/>
+                              </a:rPr>
+                              <m:t>2</m:t>
+                            </m:r>
+                          </m:sup>
+                        </m:sSup>
+                      </m:den>
+                    </m:f>
+                    <m:r>
+                      <a:rPr lang="fr-FR" i="1">
+                        <a:latin typeface="Cambria Math" panose="02040503050406030204" pitchFamily="18" charset="0"/>
+                      </a:rPr>
+                      <m:t>+</m:t>
+                    </m:r>
+                    <m:f>
+                      <m:fPr>
+                        <m:ctrlPr>
+                          <a:rPr lang="fr-FR" i="1">
+                            <a:latin typeface="Cambria Math" panose="02040503050406030204" pitchFamily="18" charset="0"/>
+                          </a:rPr>
+                        </m:ctrlPr>
+                      </m:fPr>
+                      <m:num>
+                        <m:r>
+                          <a:rPr lang="fr-FR" i="1">
+                            <a:latin typeface="Cambria Math" panose="02040503050406030204" pitchFamily="18" charset="0"/>
+                          </a:rPr>
+                          <m:t>1</m:t>
+                        </m:r>
+                      </m:num>
+                      <m:den>
+                        <m:r>
+                          <a:rPr lang="fr-CA" b="0" i="1" smtClean="0">
+                            <a:latin typeface="Cambria Math" panose="02040503050406030204" pitchFamily="18" charset="0"/>
+                          </a:rPr>
+                          <m:t>𝑟</m:t>
+                        </m:r>
+                      </m:den>
+                    </m:f>
+                    <m:f>
+                      <m:fPr>
+                        <m:ctrlPr>
+                          <a:rPr lang="fr-FR" i="1">
+                            <a:latin typeface="Cambria Math" panose="02040503050406030204" pitchFamily="18" charset="0"/>
+                          </a:rPr>
+                        </m:ctrlPr>
+                      </m:fPr>
+                      <m:num>
+                        <m:r>
+                          <a:rPr lang="fr-FR" i="1">
+                            <a:latin typeface="Cambria Math" panose="02040503050406030204" pitchFamily="18" charset="0"/>
+                          </a:rPr>
+                          <m:t>𝜕</m:t>
+                        </m:r>
+                        <m:r>
+                          <a:rPr lang="fr-FR" i="1">
+                            <a:latin typeface="Cambria Math" panose="02040503050406030204" pitchFamily="18" charset="0"/>
+                          </a:rPr>
+                          <m:t>𝑇</m:t>
+                        </m:r>
+                      </m:num>
+                      <m:den>
+                        <m:r>
+                          <a:rPr lang="fr-FR" i="1">
+                            <a:latin typeface="Cambria Math" panose="02040503050406030204" pitchFamily="18" charset="0"/>
+                          </a:rPr>
+                          <m:t>𝜕</m:t>
+                        </m:r>
+                        <m:r>
+                          <a:rPr lang="fr-CA" i="1">
+                            <a:latin typeface="Cambria Math" panose="02040503050406030204" pitchFamily="18" charset="0"/>
+                          </a:rPr>
+                          <m:t>𝑟</m:t>
+                        </m:r>
+                      </m:den>
+                    </m:f>
+                    <m:r>
+                      <a:rPr lang="fr-FR" i="1">
+                        <a:latin typeface="Cambria Math" panose="02040503050406030204" pitchFamily="18" charset="0"/>
+                      </a:rPr>
+                      <m:t>+</m:t>
+                    </m:r>
+                    <m:f>
+                      <m:fPr>
+                        <m:ctrlPr>
+                          <a:rPr lang="fr-FR" i="1">
+                            <a:latin typeface="Cambria Math" panose="02040503050406030204" pitchFamily="18" charset="0"/>
+                          </a:rPr>
+                        </m:ctrlPr>
+                      </m:fPr>
+                      <m:num>
+                        <m:sSup>
+                          <m:sSupPr>
+                            <m:ctrlPr>
+                              <a:rPr lang="fr-FR" i="1">
+                                <a:latin typeface="Cambria Math" panose="02040503050406030204" pitchFamily="18" charset="0"/>
+                              </a:rPr>
+                            </m:ctrlPr>
+                          </m:sSupPr>
+                          <m:e>
+                            <m:r>
+                              <a:rPr lang="fr-FR" i="1">
+                                <a:latin typeface="Cambria Math" panose="02040503050406030204" pitchFamily="18" charset="0"/>
+                              </a:rPr>
+                              <m:t>𝜕</m:t>
+                            </m:r>
+                          </m:e>
+                          <m:sup>
+                            <m:r>
+                              <a:rPr lang="fr-FR" i="1">
+                                <a:latin typeface="Cambria Math" panose="02040503050406030204" pitchFamily="18" charset="0"/>
+                              </a:rPr>
+                              <m:t>2</m:t>
+                            </m:r>
+                          </m:sup>
+                        </m:sSup>
+                        <m:r>
+                          <a:rPr lang="fr-FR" i="1">
+                            <a:latin typeface="Cambria Math" panose="02040503050406030204" pitchFamily="18" charset="0"/>
+                          </a:rPr>
+                          <m:t>𝑇</m:t>
+                        </m:r>
+                      </m:num>
+                      <m:den>
+                        <m:r>
+                          <a:rPr lang="fr-FR" i="1">
+                            <a:latin typeface="Cambria Math" panose="02040503050406030204" pitchFamily="18" charset="0"/>
+                          </a:rPr>
+                          <m:t>𝜕</m:t>
+                        </m:r>
+                        <m:sSup>
+                          <m:sSupPr>
+                            <m:ctrlPr>
+                              <a:rPr lang="fr-FR" i="1">
+                                <a:latin typeface="Cambria Math" panose="02040503050406030204" pitchFamily="18" charset="0"/>
+                              </a:rPr>
+                            </m:ctrlPr>
+                          </m:sSupPr>
+                          <m:e>
+                            <m:r>
+                              <a:rPr lang="fr-FR" i="1">
+                                <a:latin typeface="Cambria Math" panose="02040503050406030204" pitchFamily="18" charset="0"/>
+                              </a:rPr>
+                              <m:t>𝑧</m:t>
+                            </m:r>
+                          </m:e>
+                          <m:sup>
+                            <m:r>
+                              <a:rPr lang="fr-FR" i="1">
+                                <a:latin typeface="Cambria Math" panose="02040503050406030204" pitchFamily="18" charset="0"/>
+                              </a:rPr>
+                              <m:t>2</m:t>
+                            </m:r>
+                          </m:sup>
+                        </m:sSup>
+                      </m:den>
+                    </m:f>
+                  </m:oMath>
+                </a14:m>
+                <a:endParaRPr lang="fr-FR" dirty="0"/>
+              </a:p>
+              <a:p>
+                <a:pPr marL="0" indent="0" algn="ctr">
+                  <a:spcBef>
+                    <a:spcPts val="1800"/>
+                  </a:spcBef>
+                  <a:buNone/>
+                </a:pPr>
+                <a:endParaRPr lang="fr-FR" dirty="0"/>
+              </a:p>
+              <a:p>
+                <a:pPr marL="0" indent="0">
+                  <a:spcBef>
+                    <a:spcPts val="1800"/>
+                  </a:spcBef>
+                  <a:buNone/>
+                </a:pPr>
+                <a14:m>
+                  <m:oMathPara xmlns:m="http://schemas.openxmlformats.org/officeDocument/2006/math">
+                    <m:oMathParaPr>
+                      <m:jc m:val="centerGroup"/>
+                    </m:oMathParaPr>
+                    <m:oMath xmlns:m="http://schemas.openxmlformats.org/officeDocument/2006/math">
+                      <m:r>
+                        <m:rPr>
+                          <m:sty m:val="p"/>
+                        </m:rPr>
+                        <a:rPr lang="el-GR" i="1">
+                          <a:latin typeface="Cambria Math" panose="02040503050406030204" pitchFamily="18" charset="0"/>
+                        </a:rPr>
+                        <m:t>ρ</m:t>
+                      </m:r>
+                      <m:sSub>
+                        <m:sSubPr>
+                          <m:ctrlPr>
+                            <a:rPr lang="fr-FR" i="1">
+                              <a:latin typeface="Cambria Math" panose="02040503050406030204" pitchFamily="18" charset="0"/>
+                            </a:rPr>
+                          </m:ctrlPr>
+                        </m:sSubPr>
+                        <m:e>
+                          <m:r>
+                            <a:rPr lang="fr-FR" i="1">
+                              <a:latin typeface="Cambria Math" panose="02040503050406030204" pitchFamily="18" charset="0"/>
+                            </a:rPr>
+                            <m:t>𝐶</m:t>
+                          </m:r>
+                        </m:e>
+                        <m:sub>
+                          <m:r>
+                            <a:rPr lang="fr-FR" i="1">
+                              <a:latin typeface="Cambria Math" panose="02040503050406030204" pitchFamily="18" charset="0"/>
+                            </a:rPr>
+                            <m:t>𝑝</m:t>
+                          </m:r>
+                        </m:sub>
+                      </m:sSub>
+                      <m:r>
+                        <a:rPr lang="fr-FR" i="1">
+                          <a:latin typeface="Cambria Math" panose="02040503050406030204" pitchFamily="18" charset="0"/>
+                        </a:rPr>
+                        <m:t> </m:t>
+                      </m:r>
+                      <m:f>
+                        <m:fPr>
+                          <m:ctrlPr>
+                            <a:rPr lang="fr-FR" i="1">
+                              <a:latin typeface="Cambria Math" panose="02040503050406030204" pitchFamily="18" charset="0"/>
+                            </a:rPr>
+                          </m:ctrlPr>
+                        </m:fPr>
+                        <m:num>
+                          <m:r>
+                            <a:rPr lang="fr-FR" i="1">
+                              <a:latin typeface="Cambria Math" panose="02040503050406030204" pitchFamily="18" charset="0"/>
+                            </a:rPr>
+                            <m:t>𝜕</m:t>
+                          </m:r>
+                          <m:r>
+                            <a:rPr lang="fr-FR" i="1">
+                              <a:latin typeface="Cambria Math" panose="02040503050406030204" pitchFamily="18" charset="0"/>
+                            </a:rPr>
+                            <m:t>𝑇</m:t>
+                          </m:r>
+                        </m:num>
+                        <m:den>
+                          <m:r>
+                            <a:rPr lang="fr-FR" i="1">
+                              <a:latin typeface="Cambria Math" panose="02040503050406030204" pitchFamily="18" charset="0"/>
+                            </a:rPr>
+                            <m:t>𝜕</m:t>
+                          </m:r>
+                          <m:r>
+                            <a:rPr lang="fr-FR" i="1">
+                              <a:latin typeface="Cambria Math" panose="02040503050406030204" pitchFamily="18" charset="0"/>
+                            </a:rPr>
+                            <m:t>𝑡</m:t>
+                          </m:r>
+                        </m:den>
+                      </m:f>
+                      <m:r>
+                        <a:rPr lang="fr-FR" i="1">
+                          <a:latin typeface="Cambria Math" panose="02040503050406030204" pitchFamily="18" charset="0"/>
+                        </a:rPr>
+                        <m:t> </m:t>
+                      </m:r>
+                      <m:r>
+                        <a:rPr lang="fr-CA" b="0" i="1" smtClean="0">
+                          <a:latin typeface="Cambria Math" panose="02040503050406030204" pitchFamily="18" charset="0"/>
+                        </a:rPr>
+                        <m:t>=</m:t>
+                      </m:r>
+                      <m:r>
+                        <a:rPr lang="fr-CA" b="0" i="1" smtClean="0">
+                          <a:latin typeface="Cambria Math" panose="02040503050406030204" pitchFamily="18" charset="0"/>
+                        </a:rPr>
+                        <m:t>𝑘</m:t>
+                      </m:r>
+                      <m:r>
+                        <a:rPr lang="fr-CA" b="0" i="1" smtClean="0">
+                          <a:latin typeface="Cambria Math" panose="02040503050406030204" pitchFamily="18" charset="0"/>
+                        </a:rPr>
+                        <m:t>(</m:t>
+                      </m:r>
+                      <m:f>
+                        <m:fPr>
+                          <m:ctrlPr>
+                            <a:rPr lang="fr-FR" i="1">
+                              <a:latin typeface="Cambria Math" panose="02040503050406030204" pitchFamily="18" charset="0"/>
+                            </a:rPr>
+                          </m:ctrlPr>
+                        </m:fPr>
+                        <m:num>
+                          <m:sSup>
+                            <m:sSupPr>
+                              <m:ctrlPr>
+                                <a:rPr lang="fr-FR" i="1">
+                                  <a:latin typeface="Cambria Math" panose="02040503050406030204" pitchFamily="18" charset="0"/>
+                                </a:rPr>
+                              </m:ctrlPr>
+                            </m:sSupPr>
+                            <m:e>
+                              <m:r>
+                                <a:rPr lang="fr-FR" i="1">
+                                  <a:latin typeface="Cambria Math" panose="02040503050406030204" pitchFamily="18" charset="0"/>
+                                </a:rPr>
+                                <m:t>𝜕</m:t>
+                              </m:r>
+                            </m:e>
+                            <m:sup>
+                              <m:r>
+                                <a:rPr lang="fr-FR" i="1">
+                                  <a:latin typeface="Cambria Math" panose="02040503050406030204" pitchFamily="18" charset="0"/>
+                                </a:rPr>
+                                <m:t>2</m:t>
+                              </m:r>
+                            </m:sup>
+                          </m:sSup>
+                          <m:r>
+                            <a:rPr lang="fr-FR" i="1">
+                              <a:latin typeface="Cambria Math" panose="02040503050406030204" pitchFamily="18" charset="0"/>
+                            </a:rPr>
+                            <m:t>𝑇</m:t>
+                          </m:r>
+                        </m:num>
+                        <m:den>
+                          <m:r>
+                            <a:rPr lang="fr-FR" i="1">
+                              <a:latin typeface="Cambria Math" panose="02040503050406030204" pitchFamily="18" charset="0"/>
+                            </a:rPr>
+                            <m:t>𝜕</m:t>
+                          </m:r>
+                          <m:sSup>
+                            <m:sSupPr>
+                              <m:ctrlPr>
+                                <a:rPr lang="fr-FR" i="1">
+                                  <a:latin typeface="Cambria Math" panose="02040503050406030204" pitchFamily="18" charset="0"/>
+                                </a:rPr>
+                              </m:ctrlPr>
+                            </m:sSupPr>
+                            <m:e>
+                              <m:r>
+                                <a:rPr lang="fr-CA" i="1">
+                                  <a:latin typeface="Cambria Math" panose="02040503050406030204" pitchFamily="18" charset="0"/>
+                                </a:rPr>
+                                <m:t>𝑟</m:t>
+                              </m:r>
+                            </m:e>
+                            <m:sup>
+                              <m:r>
+                                <a:rPr lang="fr-FR" i="1">
+                                  <a:latin typeface="Cambria Math" panose="02040503050406030204" pitchFamily="18" charset="0"/>
+                                </a:rPr>
+                                <m:t>2</m:t>
+                              </m:r>
+                            </m:sup>
+                          </m:sSup>
+                        </m:den>
+                      </m:f>
+                      <m:r>
+                        <a:rPr lang="fr-FR" i="1">
+                          <a:latin typeface="Cambria Math" panose="02040503050406030204" pitchFamily="18" charset="0"/>
+                        </a:rPr>
+                        <m:t>+</m:t>
+                      </m:r>
+                      <m:f>
+                        <m:fPr>
+                          <m:ctrlPr>
+                            <a:rPr lang="fr-FR" i="1">
+                              <a:latin typeface="Cambria Math" panose="02040503050406030204" pitchFamily="18" charset="0"/>
+                            </a:rPr>
+                          </m:ctrlPr>
+                        </m:fPr>
+                        <m:num>
+                          <m:r>
+                            <a:rPr lang="fr-FR" i="1">
+                              <a:latin typeface="Cambria Math" panose="02040503050406030204" pitchFamily="18" charset="0"/>
+                            </a:rPr>
+                            <m:t>1</m:t>
+                          </m:r>
+                        </m:num>
+                        <m:den>
+                          <m:r>
+                            <a:rPr lang="fr-CA" b="0" i="1" smtClean="0">
+                              <a:latin typeface="Cambria Math" panose="02040503050406030204" pitchFamily="18" charset="0"/>
+                            </a:rPr>
+                            <m:t>𝑟</m:t>
+                          </m:r>
+                        </m:den>
+                      </m:f>
+                      <m:f>
+                        <m:fPr>
+                          <m:ctrlPr>
+                            <a:rPr lang="fr-FR" i="1">
+                              <a:latin typeface="Cambria Math" panose="02040503050406030204" pitchFamily="18" charset="0"/>
+                            </a:rPr>
+                          </m:ctrlPr>
+                        </m:fPr>
+                        <m:num>
+                          <m:r>
+                            <a:rPr lang="fr-FR" i="1">
+                              <a:latin typeface="Cambria Math" panose="02040503050406030204" pitchFamily="18" charset="0"/>
+                            </a:rPr>
+                            <m:t>𝜕</m:t>
+                          </m:r>
+                          <m:r>
+                            <a:rPr lang="fr-FR" i="1">
+                              <a:latin typeface="Cambria Math" panose="02040503050406030204" pitchFamily="18" charset="0"/>
+                            </a:rPr>
+                            <m:t>𝑇</m:t>
+                          </m:r>
+                        </m:num>
+                        <m:den>
+                          <m:r>
+                            <a:rPr lang="fr-FR" i="1">
+                              <a:latin typeface="Cambria Math" panose="02040503050406030204" pitchFamily="18" charset="0"/>
+                            </a:rPr>
+                            <m:t>𝜕</m:t>
+                          </m:r>
+                          <m:r>
+                            <a:rPr lang="fr-CA" i="1">
+                              <a:latin typeface="Cambria Math" panose="02040503050406030204" pitchFamily="18" charset="0"/>
+                            </a:rPr>
+                            <m:t>𝑟</m:t>
+                          </m:r>
+                        </m:den>
+                      </m:f>
+                      <m:r>
+                        <a:rPr lang="fr-FR" i="1">
+                          <a:latin typeface="Cambria Math" panose="02040503050406030204" pitchFamily="18" charset="0"/>
+                        </a:rPr>
+                        <m:t>+</m:t>
+                      </m:r>
+                      <m:f>
+                        <m:fPr>
+                          <m:ctrlPr>
+                            <a:rPr lang="fr-FR" i="1">
+                              <a:latin typeface="Cambria Math" panose="02040503050406030204" pitchFamily="18" charset="0"/>
+                            </a:rPr>
+                          </m:ctrlPr>
+                        </m:fPr>
+                        <m:num>
+                          <m:sSup>
+                            <m:sSupPr>
+                              <m:ctrlPr>
+                                <a:rPr lang="fr-FR" i="1">
+                                  <a:latin typeface="Cambria Math" panose="02040503050406030204" pitchFamily="18" charset="0"/>
+                                </a:rPr>
+                              </m:ctrlPr>
+                            </m:sSupPr>
+                            <m:e>
+                              <m:r>
+                                <a:rPr lang="fr-FR" i="1">
+                                  <a:latin typeface="Cambria Math" panose="02040503050406030204" pitchFamily="18" charset="0"/>
+                                </a:rPr>
+                                <m:t>𝜕</m:t>
+                              </m:r>
+                            </m:e>
+                            <m:sup>
+                              <m:r>
+                                <a:rPr lang="fr-FR" i="1">
+                                  <a:latin typeface="Cambria Math" panose="02040503050406030204" pitchFamily="18" charset="0"/>
+                                </a:rPr>
+                                <m:t>2</m:t>
+                              </m:r>
+                            </m:sup>
+                          </m:sSup>
+                          <m:r>
+                            <a:rPr lang="fr-FR" i="1">
+                              <a:latin typeface="Cambria Math" panose="02040503050406030204" pitchFamily="18" charset="0"/>
+                            </a:rPr>
+                            <m:t>𝑇</m:t>
+                          </m:r>
+                        </m:num>
+                        <m:den>
+                          <m:r>
+                            <a:rPr lang="fr-FR" i="1">
+                              <a:latin typeface="Cambria Math" panose="02040503050406030204" pitchFamily="18" charset="0"/>
+                            </a:rPr>
+                            <m:t>𝜕</m:t>
+                          </m:r>
+                          <m:sSup>
+                            <m:sSupPr>
+                              <m:ctrlPr>
+                                <a:rPr lang="fr-FR" i="1">
+                                  <a:latin typeface="Cambria Math" panose="02040503050406030204" pitchFamily="18" charset="0"/>
+                                </a:rPr>
+                              </m:ctrlPr>
+                            </m:sSupPr>
+                            <m:e>
+                              <m:r>
+                                <a:rPr lang="fr-FR" i="1">
+                                  <a:latin typeface="Cambria Math" panose="02040503050406030204" pitchFamily="18" charset="0"/>
+                                </a:rPr>
+                                <m:t>𝑧</m:t>
+                              </m:r>
+                            </m:e>
+                            <m:sup>
+                              <m:r>
+                                <a:rPr lang="fr-FR" i="1">
+                                  <a:latin typeface="Cambria Math" panose="02040503050406030204" pitchFamily="18" charset="0"/>
+                                </a:rPr>
+                                <m:t>2</m:t>
+                              </m:r>
+                            </m:sup>
+                          </m:sSup>
+                        </m:den>
+                      </m:f>
+                      <m:r>
+                        <a:rPr lang="fr-CA" b="0" i="1" smtClean="0">
+                          <a:latin typeface="Cambria Math" panose="02040503050406030204" pitchFamily="18" charset="0"/>
+                        </a:rPr>
+                        <m:t>)</m:t>
+                      </m:r>
+                    </m:oMath>
+                  </m:oMathPara>
+                </a14:m>
+                <a:endParaRPr lang="fr-FR" i="1" dirty="0">
+                  <a:latin typeface="Cambria Math" panose="02040503050406030204" pitchFamily="18" charset="0"/>
+                </a:endParaRPr>
+              </a:p>
+              <a:p>
+                <a:pPr marL="0" indent="0">
+                  <a:spcBef>
+                    <a:spcPts val="1800"/>
+                  </a:spcBef>
+                  <a:buNone/>
+                </a:pPr>
+                <a:endParaRPr lang="fr-FR" b="0" dirty="0"/>
+              </a:p>
+              <a:p>
+                <a:pPr marL="0" indent="0" algn="ctr">
+                  <a:buNone/>
+                </a:pPr>
+                <a:endParaRPr lang="fr-FR" b="0" dirty="0"/>
+              </a:p>
+              <a:p>
+                <a:pPr marL="0" indent="0" algn="ctr">
+                  <a:buNone/>
+                </a:pPr>
+                <a:endParaRPr lang="fr-FR" b="0" dirty="0"/>
+              </a:p>
+              <a:p>
+                <a:pPr marL="0" indent="0" algn="ctr">
+                  <a:buNone/>
+                </a:pPr>
+                <a:endParaRPr lang="fr-FR" b="0" dirty="0"/>
+              </a:p>
+              <a:p>
+                <a:pPr marL="0" indent="0" algn="ctr">
+                  <a:buNone/>
+                </a:pPr>
+                <a:endParaRPr lang="fr-FR" b="0" dirty="0"/>
+              </a:p>
+              <a:p>
+                <a:pPr marL="0" indent="0" algn="ctr">
+                  <a:buNone/>
+                </a:pPr>
+                <a:endParaRPr lang="fr-FR" b="0" dirty="0"/>
+              </a:p>
+              <a:p>
+                <a:pPr marL="0" indent="0">
+                  <a:buNone/>
+                </a:pPr>
+                <a:endParaRPr lang="fr-FR" b="0" dirty="0"/>
+              </a:p>
+              <a:p>
+                <a:pPr marL="0" indent="0">
+                  <a:buNone/>
+                </a:pPr>
+                <a:endParaRPr lang="fr-FR" b="0" dirty="0"/>
+              </a:p>
+              <a:p>
+                <a:pPr marL="0" indent="0">
+                  <a:buNone/>
+                </a:pPr>
+                <a:endParaRPr lang="fr-FR" b="0" dirty="0"/>
+              </a:p>
+              <a:p>
+                <a:pPr marL="0" indent="0">
+                  <a:buNone/>
+                </a:pPr>
+                <a:endParaRPr lang="fr-FR" b="0" dirty="0"/>
+              </a:p>
+              <a:p>
+                <a:pPr marL="0" indent="0">
+                  <a:buNone/>
+                </a:pPr>
+                <a:endParaRPr lang="fr-FR" b="0" dirty="0"/>
+              </a:p>
+              <a:p>
+                <a:pPr marL="0" indent="0">
+                  <a:buNone/>
+                </a:pPr>
+                <a:endParaRPr lang="fr-FR" dirty="0"/>
+              </a:p>
+            </p:txBody>
+          </p:sp>
+        </mc:Choice>
+        <mc:Fallback>
+          <p:sp>
+            <p:nvSpPr>
+              <p:cNvPr id="3" name="Espace réservé du contenu 2">
+                <a:extLst>
+                  <a:ext uri="{FF2B5EF4-FFF2-40B4-BE49-F238E27FC236}">
+                    <a16:creationId xmlns:a16="http://schemas.microsoft.com/office/drawing/2014/main" id="{8073797C-3545-B398-B72A-5A621002005D}"/>
+                  </a:ext>
+                </a:extLst>
+              </p:cNvPr>
+              <p:cNvSpPr>
+                <a:spLocks noGrp="1" noRot="1" noChangeAspect="1" noMove="1" noResize="1" noEditPoints="1" noAdjustHandles="1" noChangeArrowheads="1" noChangeShapeType="1" noTextEdit="1"/>
+              </p:cNvSpPr>
+              <p:nvPr>
+                <p:ph idx="1"/>
+              </p:nvPr>
+            </p:nvSpPr>
+            <p:spPr>
+              <a:xfrm>
+                <a:off x="838200" y="1155033"/>
+                <a:ext cx="8177463" cy="5358062"/>
+              </a:xfrm>
+              <a:blipFill>
+                <a:blip r:embed="rId2"/>
+                <a:stretch>
+                  <a:fillRect l="-1342" t="-2275"/>
+                </a:stretch>
+              </a:blipFill>
+            </p:spPr>
+            <p:txBody>
+              <a:bodyPr/>
+              <a:lstStyle/>
+              <a:p>
+                <a:r>
+                  <a:rPr lang="fr-CA">
+                    <a:noFill/>
+                  </a:rPr>
+                  <a:t> </a:t>
+                </a:r>
+              </a:p>
+            </p:txBody>
+          </p:sp>
+        </mc:Fallback>
+      </mc:AlternateContent>
+      <p:sp>
+        <p:nvSpPr>
+          <p:cNvPr id="4" name="Rectangle 3">
+            <a:extLst>
+              <a:ext uri="{FF2B5EF4-FFF2-40B4-BE49-F238E27FC236}">
+                <a16:creationId xmlns:a16="http://schemas.microsoft.com/office/drawing/2014/main" id="{D8880BBA-A9C5-15DA-64A8-34FD76C6B27D}"/>
+              </a:ext>
+            </a:extLst>
+          </p:cNvPr>
+          <p:cNvSpPr/>
+          <p:nvPr/>
+        </p:nvSpPr>
+        <p:spPr>
+          <a:xfrm>
+            <a:off x="2606040" y="5321808"/>
+            <a:ext cx="4828032" cy="1325563"/>
+          </a:xfrm>
+          <a:prstGeom prst="rect">
+            <a:avLst/>
+          </a:prstGeom>
+          <a:noFill/>
+          <a:ln>
+            <a:solidFill>
+              <a:schemeClr val="accent6">
+                <a:lumMod val="60000"/>
+                <a:lumOff val="40000"/>
+              </a:schemeClr>
+            </a:solidFill>
+          </a:ln>
+        </p:spPr>
+        <p:style>
+          <a:lnRef idx="2">
+            <a:schemeClr val="accent6">
+              <a:shade val="15000"/>
+            </a:schemeClr>
+          </a:lnRef>
+          <a:fillRef idx="1">
+            <a:schemeClr val="accent6"/>
+          </a:fillRef>
+          <a:effectRef idx="0">
+            <a:schemeClr val="accent6"/>
+          </a:effectRef>
+          <a:fontRef idx="minor">
+            <a:schemeClr val="lt1"/>
+          </a:fontRef>
+        </p:style>
+        <p:txBody>
+          <a:bodyPr rtlCol="0" anchor="ctr"/>
+          <a:lstStyle/>
+          <a:p>
+            <a:pPr algn="ctr"/>
+            <a:endParaRPr lang="fr-CA"/>
+          </a:p>
+        </p:txBody>
+      </p:sp>
+    </p:spTree>
+    <p:extLst>
+      <p:ext uri="{BB962C8B-B14F-4D97-AF65-F5344CB8AC3E}">
+        <p14:creationId xmlns:p14="http://schemas.microsoft.com/office/powerpoint/2010/main" val="980743001"/>
+      </p:ext>
+    </p:extLst>
+  </p:cSld>
+  <p:clrMapOvr>
+    <a:masterClrMapping/>
+  </p:clrMapOvr>
+</p:sld>
+</file>
+
+<file path=ppt/slides/slide5.xml><?xml version="1.0" encoding="utf-8"?>
+<p:sld xmlns:a="http://schemas.openxmlformats.org/drawingml/2006/main" xmlns:r="http://schemas.openxmlformats.org/officeDocument/2006/relationships" xmlns:p="http://schemas.openxmlformats.org/presentationml/2006/main">
+  <p:cSld>
+    <p:spTree>
+      <p:nvGrpSpPr>
         <p:cNvPr id="1" name=""/>
         <p:cNvGrpSpPr/>
         <p:nvPr/>
@@ -5736,7 +7224,21 @@
                     </m:f>
                   </m:oMath>
                 </a14:m>
-                <a:endParaRPr lang="fr-FR" dirty="0"/>
+                <a:r>
+                  <a:rPr lang="fr-FR" dirty="0"/>
+                  <a:t> , </a:t>
+                </a:r>
+                <a:r>
+                  <a:rPr lang="fr-FR" sz="2400" dirty="0">
+                    <a:latin typeface="Cambria" panose="02040503050406030204" pitchFamily="18" charset="0"/>
+                    <a:ea typeface="Cambria" panose="02040503050406030204" pitchFamily="18" charset="0"/>
+                  </a:rPr>
+                  <a:t>ordre 1 </a:t>
+                </a:r>
+                <a:endParaRPr lang="fr-FR" dirty="0">
+                  <a:latin typeface="Cambria" panose="02040503050406030204" pitchFamily="18" charset="0"/>
+                  <a:ea typeface="Cambria" panose="02040503050406030204" pitchFamily="18" charset="0"/>
+                </a:endParaRPr>
               </a:p>
               <a:p>
                 <a14:m>
@@ -5969,9 +7471,17 @@
                     </m:f>
                   </m:oMath>
                 </a14:m>
-                <a:endParaRPr lang="fr-FR" dirty="0"/>
-              </a:p>
-              <a:p>
+                <a:r>
+                  <a:rPr lang="fr-FR" dirty="0"/>
+                  <a:t>, </a:t>
+                </a:r>
+                <a:r>
+                  <a:rPr lang="fr-FR" sz="2400" dirty="0">
+                    <a:latin typeface="Cambria" panose="02040503050406030204" pitchFamily="18" charset="0"/>
+                    <a:ea typeface="Cambria" panose="02040503050406030204" pitchFamily="18" charset="0"/>
+                  </a:rPr>
+                  <a:t>ordre 2</a:t>
+                </a:r>
                 <a:endParaRPr lang="fr-FR" dirty="0"/>
               </a:p>
               <a:p>
@@ -5979,6 +7489,9 @@
               </a:p>
               <a:p>
                 <a:pPr marL="0" indent="0">
+                  <a:spcBef>
+                    <a:spcPts val="1800"/>
+                  </a:spcBef>
                   <a:buNone/>
                 </a:pPr>
                 <a14:m>
@@ -5987,6 +7500,107 @@
                       <m:jc m:val="centerGroup"/>
                     </m:oMathParaPr>
                     <m:oMath xmlns:m="http://schemas.openxmlformats.org/officeDocument/2006/math">
+                      <m:r>
+                        <m:rPr>
+                          <m:sty m:val="p"/>
+                        </m:rPr>
+                        <a:rPr lang="el-GR" sz="2400" i="1">
+                          <a:latin typeface="Cambria Math" panose="02040503050406030204" pitchFamily="18" charset="0"/>
+                        </a:rPr>
+                        <m:t>ρ</m:t>
+                      </m:r>
+                      <m:sSub>
+                        <m:sSubPr>
+                          <m:ctrlPr>
+                            <a:rPr lang="fr-FR" sz="2400" i="1">
+                              <a:latin typeface="Cambria Math" panose="02040503050406030204" pitchFamily="18" charset="0"/>
+                            </a:rPr>
+                          </m:ctrlPr>
+                        </m:sSubPr>
+                        <m:e>
+                          <m:r>
+                            <a:rPr lang="fr-FR" sz="2400" i="1">
+                              <a:latin typeface="Cambria Math" panose="02040503050406030204" pitchFamily="18" charset="0"/>
+                            </a:rPr>
+                            <m:t>𝐶</m:t>
+                          </m:r>
+                        </m:e>
+                        <m:sub>
+                          <m:r>
+                            <a:rPr lang="fr-FR" sz="2400" i="1">
+                              <a:latin typeface="Cambria Math" panose="02040503050406030204" pitchFamily="18" charset="0"/>
+                            </a:rPr>
+                            <m:t>𝑝</m:t>
+                          </m:r>
+                        </m:sub>
+                      </m:sSub>
+                      <m:r>
+                        <a:rPr lang="fr-FR" sz="2400" i="1">
+                          <a:latin typeface="Cambria Math" panose="02040503050406030204" pitchFamily="18" charset="0"/>
+                        </a:rPr>
+                        <m:t> </m:t>
+                      </m:r>
+                      <m:f>
+                        <m:fPr>
+                          <m:ctrlPr>
+                            <a:rPr lang="fr-FR" sz="2400" i="1">
+                              <a:latin typeface="Cambria Math" panose="02040503050406030204" pitchFamily="18" charset="0"/>
+                            </a:rPr>
+                          </m:ctrlPr>
+                        </m:fPr>
+                        <m:num>
+                          <m:r>
+                            <a:rPr lang="fr-FR" sz="2400" i="1">
+                              <a:latin typeface="Cambria Math" panose="02040503050406030204" pitchFamily="18" charset="0"/>
+                            </a:rPr>
+                            <m:t>𝜕</m:t>
+                          </m:r>
+                          <m:r>
+                            <a:rPr lang="fr-FR" sz="2400" i="1">
+                              <a:latin typeface="Cambria Math" panose="02040503050406030204" pitchFamily="18" charset="0"/>
+                            </a:rPr>
+                            <m:t>𝑇</m:t>
+                          </m:r>
+                        </m:num>
+                        <m:den>
+                          <m:r>
+                            <a:rPr lang="fr-FR" sz="2400" i="1">
+                              <a:latin typeface="Cambria Math" panose="02040503050406030204" pitchFamily="18" charset="0"/>
+                            </a:rPr>
+                            <m:t>𝜕</m:t>
+                          </m:r>
+                          <m:r>
+                            <a:rPr lang="fr-FR" sz="2400" i="1">
+                              <a:latin typeface="Cambria Math" panose="02040503050406030204" pitchFamily="18" charset="0"/>
+                            </a:rPr>
+                            <m:t>𝑡</m:t>
+                          </m:r>
+                        </m:den>
+                      </m:f>
+                      <m:r>
+                        <a:rPr lang="fr-FR" sz="2400" i="1">
+                          <a:latin typeface="Cambria Math" panose="02040503050406030204" pitchFamily="18" charset="0"/>
+                        </a:rPr>
+                        <m:t> </m:t>
+                      </m:r>
+                      <m:r>
+                        <a:rPr lang="fr-CA" sz="2400" i="1">
+                          <a:latin typeface="Cambria Math" panose="02040503050406030204" pitchFamily="18" charset="0"/>
+                        </a:rPr>
+                        <m:t>=</m:t>
+                      </m:r>
+                      <m:r>
+                        <a:rPr lang="fr-CA" sz="2400" b="0" i="1" smtClean="0">
+                          <a:latin typeface="Cambria Math" panose="02040503050406030204" pitchFamily="18" charset="0"/>
+                        </a:rPr>
+                        <m:t>𝑘</m:t>
+                      </m:r>
+                      <m:r>
+                        <a:rPr lang="fr-CA" sz="2400" b="0" i="1" smtClean="0">
+                          <a:latin typeface="Cambria Math" panose="02040503050406030204" pitchFamily="18" charset="0"/>
+                        </a:rPr>
+                        <m:t>(</m:t>
+                      </m:r>
                       <m:f>
                         <m:fPr>
                           <m:ctrlPr>
@@ -6045,7 +7659,7 @@
                             </m:sSupPr>
                             <m:e>
                               <m:r>
-                                <a:rPr lang="fr-CA" sz="2400" b="0" i="1" smtClean="0">
+                                <a:rPr lang="fr-CA" sz="2400" i="1">
                                   <a:latin typeface="Cambria Math" panose="02040503050406030204" pitchFamily="18" charset="0"/>
                                 </a:rPr>
                                 <m:t>𝑟</m:t>
@@ -6063,7 +7677,7 @@
                         </m:den>
                       </m:f>
                       <m:r>
-                        <a:rPr lang="fr-FR" sz="2400" b="0" i="1" smtClean="0">
+                        <a:rPr lang="fr-FR" sz="2400" i="1">
                           <a:latin typeface="Cambria Math" panose="02040503050406030204" pitchFamily="18" charset="0"/>
                         </a:rPr>
                         <m:t>+</m:t>
@@ -6078,7 +7692,7 @@
                         </m:fPr>
                         <m:num>
                           <m:r>
-                            <a:rPr lang="fr-FR" sz="2400" b="0" i="1" smtClean="0">
+                            <a:rPr lang="fr-FR" sz="2400" i="1">
                               <a:latin typeface="Cambria Math" panose="02040503050406030204" pitchFamily="18" charset="0"/>
                             </a:rPr>
                             <m:t>1</m:t>
@@ -6086,10 +7700,10 @@
                         </m:num>
                         <m:den>
                           <m:r>
-                            <a:rPr lang="fr-FR" sz="2400" b="0" i="1" smtClean="0">
+                            <a:rPr lang="fr-CA" sz="2400" b="0" i="1" smtClean="0">
                               <a:latin typeface="Cambria Math" panose="02040503050406030204" pitchFamily="18" charset="0"/>
                             </a:rPr>
-                            <m:t>𝑅</m:t>
+                            <m:t>𝑟</m:t>
                           </m:r>
                         </m:den>
                       </m:f>
@@ -6123,7 +7737,7 @@
                             <m:t>𝜕</m:t>
                           </m:r>
                           <m:r>
-                            <a:rPr lang="fr-CA" sz="2400" b="0" i="1" smtClean="0">
+                            <a:rPr lang="fr-CA" sz="2400" i="1">
                               <a:latin typeface="Cambria Math" panose="02040503050406030204" pitchFamily="18" charset="0"/>
                             </a:rPr>
                             <m:t>𝑟</m:t>
@@ -6131,7 +7745,7 @@
                         </m:den>
                       </m:f>
                       <m:r>
-                        <a:rPr lang="fr-FR" sz="2400" b="0" i="1" smtClean="0">
+                        <a:rPr lang="fr-FR" sz="2400" i="1">
                           <a:latin typeface="Cambria Math" panose="02040503050406030204" pitchFamily="18" charset="0"/>
                         </a:rPr>
                         <m:t>+</m:t>
@@ -6212,116 +7826,10 @@
                         </m:den>
                       </m:f>
                       <m:r>
-                        <a:rPr lang="fr-FR" sz="2400" b="0" i="1" smtClean="0">
+                        <a:rPr lang="fr-CA" sz="2400" b="0" i="1" smtClean="0">
                           <a:latin typeface="Cambria Math" panose="02040503050406030204" pitchFamily="18" charset="0"/>
                         </a:rPr>
-                        <m:t>−</m:t>
-                      </m:r>
-                      <m:f>
-                        <m:fPr>
-                          <m:ctrlPr>
-                            <a:rPr lang="fr-FR" sz="2400" i="1">
-                              <a:latin typeface="Cambria Math" panose="02040503050406030204" pitchFamily="18" charset="0"/>
-                            </a:rPr>
-                          </m:ctrlPr>
-                        </m:fPr>
-                        <m:num>
-                          <m:r>
-                            <m:rPr>
-                              <m:sty m:val="p"/>
-                            </m:rPr>
-                            <a:rPr lang="el-GR" sz="2400" i="1">
-                              <a:latin typeface="Cambria Math" panose="02040503050406030204" pitchFamily="18" charset="0"/>
-                            </a:rPr>
-                            <m:t>ρ</m:t>
-                          </m:r>
-                          <m:sSub>
-                            <m:sSubPr>
-                              <m:ctrlPr>
-                                <a:rPr lang="fr-FR" sz="2400" i="1">
-                                  <a:latin typeface="Cambria Math" panose="02040503050406030204" pitchFamily="18" charset="0"/>
-                                </a:rPr>
-                              </m:ctrlPr>
-                            </m:sSubPr>
-                            <m:e>
-                              <m:r>
-                                <a:rPr lang="fr-FR" sz="2400" i="1">
-                                  <a:latin typeface="Cambria Math" panose="02040503050406030204" pitchFamily="18" charset="0"/>
-                                </a:rPr>
-                                <m:t>𝐶</m:t>
-                              </m:r>
-                            </m:e>
-                            <m:sub>
-                              <m:r>
-                                <a:rPr lang="fr-FR" sz="2400" i="1">
-                                  <a:latin typeface="Cambria Math" panose="02040503050406030204" pitchFamily="18" charset="0"/>
-                                </a:rPr>
-                                <m:t>𝑝</m:t>
-                              </m:r>
-                            </m:sub>
-                          </m:sSub>
-                        </m:num>
-                        <m:den>
-                          <m:r>
-                            <m:rPr>
-                              <m:sty m:val="p"/>
-                            </m:rPr>
-                            <a:rPr lang="fr-FR" sz="2400" b="0" i="0" smtClean="0">
-                              <a:latin typeface="Cambria Math" panose="02040503050406030204" pitchFamily="18" charset="0"/>
-                            </a:rPr>
-                            <m:t>k</m:t>
-                          </m:r>
-                          <m:r>
-                            <m:rPr>
-                              <m:nor/>
-                            </m:rPr>
-                            <a:rPr lang="fr-FR" sz="2400"/>
-                            <m:t> </m:t>
-                          </m:r>
-                        </m:den>
-                      </m:f>
-                      <m:f>
-                        <m:fPr>
-                          <m:ctrlPr>
-                            <a:rPr lang="fr-FR" sz="2400" i="1">
-                              <a:latin typeface="Cambria Math" panose="02040503050406030204" pitchFamily="18" charset="0"/>
-                            </a:rPr>
-                          </m:ctrlPr>
-                        </m:fPr>
-                        <m:num>
-                          <m:r>
-                            <a:rPr lang="fr-FR" sz="2400" i="1">
-                              <a:latin typeface="Cambria Math" panose="02040503050406030204" pitchFamily="18" charset="0"/>
-                            </a:rPr>
-                            <m:t>𝜕</m:t>
-                          </m:r>
-                          <m:r>
-                            <a:rPr lang="fr-FR" sz="2400" i="1">
-                              <a:latin typeface="Cambria Math" panose="02040503050406030204" pitchFamily="18" charset="0"/>
-                            </a:rPr>
-                            <m:t>𝑇</m:t>
-                          </m:r>
-                        </m:num>
-                        <m:den>
-                          <m:r>
-                            <a:rPr lang="fr-FR" sz="2400" i="1">
-                              <a:latin typeface="Cambria Math" panose="02040503050406030204" pitchFamily="18" charset="0"/>
-                            </a:rPr>
-                            <m:t>𝜕</m:t>
-                          </m:r>
-                          <m:r>
-                            <a:rPr lang="fr-FR" sz="2400" i="1">
-                              <a:latin typeface="Cambria Math" panose="02040503050406030204" pitchFamily="18" charset="0"/>
-                            </a:rPr>
-                            <m:t>𝑡</m:t>
-                          </m:r>
-                        </m:den>
-                      </m:f>
-                      <m:r>
-                        <a:rPr lang="fr-FR" sz="2400" b="0" i="1" smtClean="0">
-                          <a:latin typeface="Cambria Math" panose="02040503050406030204" pitchFamily="18" charset="0"/>
-                        </a:rPr>
-                        <m:t>=0</m:t>
+                        <m:t>)</m:t>
                       </m:r>
                     </m:oMath>
                   </m:oMathPara>
@@ -6758,10 +8266,10 @@
                         </m:num>
                         <m:den>
                           <m:r>
-                            <a:rPr lang="fr-FR" sz="2400" i="1">
+                            <a:rPr lang="fr-CA" sz="2400" b="0" i="1" smtClean="0">
                               <a:latin typeface="Cambria Math" panose="02040503050406030204" pitchFamily="18" charset="0"/>
                             </a:rPr>
-                            <m:t>𝑅</m:t>
+                            <m:t>𝑟</m:t>
                           </m:r>
                         </m:den>
                       </m:f>
@@ -7193,154 +8701,6 @@
           </p:sp>
         </mc:Fallback>
       </mc:AlternateContent>
-      <p:sp>
-        <p:nvSpPr>
-          <p:cNvPr id="4" name="Flèche : courbe vers la droite 3">
-            <a:extLst>
-              <a:ext uri="{FF2B5EF4-FFF2-40B4-BE49-F238E27FC236}">
-                <a16:creationId xmlns:a16="http://schemas.microsoft.com/office/drawing/2014/main" id="{1AFB7D79-82CC-3BF4-26BE-A0D023326082}"/>
-              </a:ext>
-            </a:extLst>
-          </p:cNvPr>
-          <p:cNvSpPr/>
-          <p:nvPr/>
-        </p:nvSpPr>
-        <p:spPr>
-          <a:xfrm rot="4263975">
-            <a:off x="1775824" y="2807560"/>
-            <a:ext cx="607576" cy="3713718"/>
-          </a:xfrm>
-          <a:prstGeom prst="curvedRightArrow">
-            <a:avLst>
-              <a:gd name="adj1" fmla="val 25000"/>
-              <a:gd name="adj2" fmla="val 50000"/>
-              <a:gd name="adj3" fmla="val 36727"/>
-            </a:avLst>
-          </a:prstGeom>
-        </p:spPr>
-        <p:style>
-          <a:lnRef idx="2">
-            <a:schemeClr val="accent1">
-              <a:shade val="15000"/>
-            </a:schemeClr>
-          </a:lnRef>
-          <a:fillRef idx="1">
-            <a:schemeClr val="accent1"/>
-          </a:fillRef>
-          <a:effectRef idx="0">
-            <a:schemeClr val="accent1"/>
-          </a:effectRef>
-          <a:fontRef idx="minor">
-            <a:schemeClr val="lt1"/>
-          </a:fontRef>
-        </p:style>
-        <p:txBody>
-          <a:bodyPr rtlCol="0" anchor="ctr"/>
-          <a:lstStyle>
-            <a:defPPr>
-              <a:defRPr lang="fr-FR"/>
-            </a:defPPr>
-            <a:lvl1pPr marL="0" algn="l" defTabSz="914400" rtl="0" eaLnBrk="1" latinLnBrk="0" hangingPunct="1">
-              <a:defRPr sz="1800" kern="1200">
-                <a:solidFill>
-                  <a:schemeClr val="lt1"/>
-                </a:solidFill>
-                <a:latin typeface="+mn-lt"/>
-                <a:ea typeface="+mn-ea"/>
-                <a:cs typeface="+mn-cs"/>
-              </a:defRPr>
-            </a:lvl1pPr>
-            <a:lvl2pPr marL="457200" algn="l" defTabSz="914400" rtl="0" eaLnBrk="1" latinLnBrk="0" hangingPunct="1">
-              <a:defRPr sz="1800" kern="1200">
-                <a:solidFill>
-                  <a:schemeClr val="lt1"/>
-                </a:solidFill>
-                <a:latin typeface="+mn-lt"/>
-                <a:ea typeface="+mn-ea"/>
-                <a:cs typeface="+mn-cs"/>
-              </a:defRPr>
-            </a:lvl2pPr>
-            <a:lvl3pPr marL="914400" algn="l" defTabSz="914400" rtl="0" eaLnBrk="1" latinLnBrk="0" hangingPunct="1">
-              <a:defRPr sz="1800" kern="1200">
-                <a:solidFill>
-                  <a:schemeClr val="lt1"/>
-                </a:solidFill>
-                <a:latin typeface="+mn-lt"/>
-                <a:ea typeface="+mn-ea"/>
-                <a:cs typeface="+mn-cs"/>
-              </a:defRPr>
-            </a:lvl3pPr>
-            <a:lvl4pPr marL="1371600" algn="l" defTabSz="914400" rtl="0" eaLnBrk="1" latinLnBrk="0" hangingPunct="1">
-              <a:defRPr sz="1800" kern="1200">
-                <a:solidFill>
-                  <a:schemeClr val="lt1"/>
-                </a:solidFill>
-                <a:latin typeface="+mn-lt"/>
-                <a:ea typeface="+mn-ea"/>
-                <a:cs typeface="+mn-cs"/>
-              </a:defRPr>
-            </a:lvl4pPr>
-            <a:lvl5pPr marL="1828800" algn="l" defTabSz="914400" rtl="0" eaLnBrk="1" latinLnBrk="0" hangingPunct="1">
-              <a:defRPr sz="1800" kern="1200">
-                <a:solidFill>
-                  <a:schemeClr val="lt1"/>
-                </a:solidFill>
-                <a:latin typeface="+mn-lt"/>
-                <a:ea typeface="+mn-ea"/>
-                <a:cs typeface="+mn-cs"/>
-              </a:defRPr>
-            </a:lvl5pPr>
-            <a:lvl6pPr marL="2286000" algn="l" defTabSz="914400" rtl="0" eaLnBrk="1" latinLnBrk="0" hangingPunct="1">
-              <a:defRPr sz="1800" kern="1200">
-                <a:solidFill>
-                  <a:schemeClr val="lt1"/>
-                </a:solidFill>
-                <a:latin typeface="+mn-lt"/>
-                <a:ea typeface="+mn-ea"/>
-                <a:cs typeface="+mn-cs"/>
-              </a:defRPr>
-            </a:lvl6pPr>
-            <a:lvl7pPr marL="2743200" algn="l" defTabSz="914400" rtl="0" eaLnBrk="1" latinLnBrk="0" hangingPunct="1">
-              <a:defRPr sz="1800" kern="1200">
-                <a:solidFill>
-                  <a:schemeClr val="lt1"/>
-                </a:solidFill>
-                <a:latin typeface="+mn-lt"/>
-                <a:ea typeface="+mn-ea"/>
-                <a:cs typeface="+mn-cs"/>
-              </a:defRPr>
-            </a:lvl7pPr>
-            <a:lvl8pPr marL="3200400" algn="l" defTabSz="914400" rtl="0" eaLnBrk="1" latinLnBrk="0" hangingPunct="1">
-              <a:defRPr sz="1800" kern="1200">
-                <a:solidFill>
-                  <a:schemeClr val="lt1"/>
-                </a:solidFill>
-                <a:latin typeface="+mn-lt"/>
-                <a:ea typeface="+mn-ea"/>
-                <a:cs typeface="+mn-cs"/>
-              </a:defRPr>
-            </a:lvl8pPr>
-            <a:lvl9pPr marL="3657600" algn="l" defTabSz="914400" rtl="0" eaLnBrk="1" latinLnBrk="0" hangingPunct="1">
-              <a:defRPr sz="1800" kern="1200">
-                <a:solidFill>
-                  <a:schemeClr val="lt1"/>
-                </a:solidFill>
-                <a:latin typeface="+mn-lt"/>
-                <a:ea typeface="+mn-ea"/>
-                <a:cs typeface="+mn-cs"/>
-              </a:defRPr>
-            </a:lvl9pPr>
-          </a:lstStyle>
-          <a:p>
-            <a:pPr algn="ctr"/>
-            <a:endParaRPr lang="fr-FR">
-              <a:solidFill>
-                <a:schemeClr val="tx1"/>
-              </a:solidFill>
-            </a:endParaRPr>
-          </a:p>
-        </p:txBody>
-      </p:sp>
       <mc:AlternateContent xmlns:mc="http://schemas.openxmlformats.org/markup-compatibility/2006">
         <mc:Choice xmlns:a14="http://schemas.microsoft.com/office/drawing/2010/main" Requires="a14">
           <p:sp>
@@ -7357,8 +8717,8 @@
             </p:nvSpPr>
             <p:spPr>
               <a:xfrm>
-                <a:off x="4860473" y="1439866"/>
-                <a:ext cx="5167085" cy="1759200"/>
+                <a:off x="4869617" y="1595314"/>
+                <a:ext cx="5362519" cy="1732654"/>
               </a:xfrm>
               <a:prstGeom prst="rect">
                 <a:avLst/>
@@ -7757,10 +9117,20 @@
                     </m:f>
                   </m:oMath>
                 </a14:m>
-                <a:endParaRPr lang="fr-FR" sz="2600" dirty="0">
-                  <a:latin typeface="Cambria" panose="02040503050406030204" pitchFamily="18" charset="0"/>
-                  <a:ea typeface="Cambria" panose="02040503050406030204" pitchFamily="18" charset="0"/>
-                </a:endParaRPr>
+                <a:r>
+                  <a:rPr lang="fr-FR" sz="2600" dirty="0">
+                    <a:latin typeface="Cambria" panose="02040503050406030204" pitchFamily="18" charset="0"/>
+                    <a:ea typeface="Cambria" panose="02040503050406030204" pitchFamily="18" charset="0"/>
+                  </a:rPr>
+                  <a:t>, </a:t>
+                </a:r>
+                <a:r>
+                  <a:rPr lang="fr-FR" sz="2000" dirty="0">
+                    <a:latin typeface="Cambria" panose="02040503050406030204" pitchFamily="18" charset="0"/>
+                    <a:ea typeface="Cambria" panose="02040503050406030204" pitchFamily="18" charset="0"/>
+                  </a:rPr>
+                  <a:t>ordre 2</a:t>
+                </a:r>
               </a:p>
               <a:p>
                 <a:pPr marL="457200" indent="-457200">
@@ -8115,7 +9485,17 @@
                     </m:f>
                   </m:oMath>
                 </a14:m>
-                <a:endParaRPr lang="fr-FR" sz="2600" dirty="0"/>
+                <a:r>
+                  <a:rPr lang="fr-FR" sz="2600" dirty="0"/>
+                  <a:t>, </a:t>
+                </a:r>
+                <a:r>
+                  <a:rPr lang="fr-FR" sz="2000" dirty="0">
+                    <a:latin typeface="Cambria" panose="02040503050406030204" pitchFamily="18" charset="0"/>
+                    <a:ea typeface="Cambria" panose="02040503050406030204" pitchFamily="18" charset="0"/>
+                  </a:rPr>
+                  <a:t>ordre 2</a:t>
+                </a:r>
               </a:p>
             </p:txBody>
           </p:sp>
@@ -8137,8 +9517,8 @@
             </p:nvSpPr>
             <p:spPr>
               <a:xfrm>
-                <a:off x="4860473" y="1439866"/>
-                <a:ext cx="5167085" cy="1759200"/>
+                <a:off x="4869617" y="1595314"/>
+                <a:ext cx="5362519" cy="1732654"/>
               </a:xfrm>
               <a:prstGeom prst="rect">
                 <a:avLst/>
@@ -8146,7 +9526,7 @@
               <a:blipFill>
                 <a:blip r:embed="rId3"/>
                 <a:stretch>
-                  <a:fillRect/>
+                  <a:fillRect b="-2113"/>
                 </a:stretch>
               </a:blipFill>
             </p:spPr>
@@ -8165,6 +9545,54 @@
           </p:sp>
         </mc:Fallback>
       </mc:AlternateContent>
+      <p:sp>
+        <p:nvSpPr>
+          <p:cNvPr id="6" name="Arc 5">
+            <a:extLst>
+              <a:ext uri="{FF2B5EF4-FFF2-40B4-BE49-F238E27FC236}">
+                <a16:creationId xmlns:a16="http://schemas.microsoft.com/office/drawing/2014/main" id="{669E06E8-CC02-FA18-F417-BCEB210B1102}"/>
+              </a:ext>
+            </a:extLst>
+          </p:cNvPr>
+          <p:cNvSpPr/>
+          <p:nvPr/>
+        </p:nvSpPr>
+        <p:spPr>
+          <a:xfrm rot="241833" flipH="1">
+            <a:off x="2857585" y="4094814"/>
+            <a:ext cx="2152095" cy="1509192"/>
+          </a:xfrm>
+          <a:prstGeom prst="arc">
+            <a:avLst/>
+          </a:prstGeom>
+          <a:ln>
+            <a:headEnd type="none" w="med" len="med"/>
+            <a:tailEnd type="triangle" w="med" len="med"/>
+          </a:ln>
+        </p:spPr>
+        <p:style>
+          <a:lnRef idx="2">
+            <a:schemeClr val="accent1"/>
+          </a:lnRef>
+          <a:fillRef idx="0">
+            <a:schemeClr val="accent1"/>
+          </a:fillRef>
+          <a:effectRef idx="1">
+            <a:schemeClr val="accent1"/>
+          </a:effectRef>
+          <a:fontRef idx="minor">
+            <a:schemeClr val="tx1"/>
+          </a:fontRef>
+        </p:style>
+        <p:txBody>
+          <a:bodyPr rtlCol="0" anchor="ctr"/>
+          <a:lstStyle/>
+          <a:p>
+            <a:pPr algn="ctr"/>
+            <a:endParaRPr lang="fr-CA"/>
+          </a:p>
+        </p:txBody>
+      </p:sp>
     </p:spTree>
     <p:extLst>
       <p:ext uri="{BB962C8B-B14F-4D97-AF65-F5344CB8AC3E}">
@@ -8178,7 +9606,7 @@
 </p:sld>
 </file>
 
-<file path=ppt/slides/slide5.xml><?xml version="1.0" encoding="utf-8"?>
+<file path=ppt/slides/slide6.xml><?xml version="1.0" encoding="utf-8"?>
 <p:sld xmlns:a="http://schemas.openxmlformats.org/drawingml/2006/main" xmlns:r="http://schemas.openxmlformats.org/officeDocument/2006/relationships" xmlns:p="http://schemas.openxmlformats.org/presentationml/2006/main">
   <p:cSld>
     <p:spTree>
@@ -8266,7 +9694,7 @@
 </p:sld>
 </file>
 
-<file path=ppt/slides/slide6.xml><?xml version="1.0" encoding="utf-8"?>
+<file path=ppt/slides/slide7.xml><?xml version="1.0" encoding="utf-8"?>
 <p:sld xmlns:a="http://schemas.openxmlformats.org/drawingml/2006/main" xmlns:r="http://schemas.openxmlformats.org/officeDocument/2006/relationships" xmlns:p="http://schemas.openxmlformats.org/presentationml/2006/main">
   <p:cSld>
     <p:spTree>
@@ -10986,7 +12414,7 @@
 </p:sld>
 </file>
 
-<file path=ppt/slides/slide7.xml><?xml version="1.0" encoding="utf-8"?>
+<file path=ppt/slides/slide8.xml><?xml version="1.0" encoding="utf-8"?>
 <p:sld xmlns:a="http://schemas.openxmlformats.org/drawingml/2006/main" xmlns:r="http://schemas.openxmlformats.org/officeDocument/2006/relationships" xmlns:p="http://schemas.openxmlformats.org/presentationml/2006/main">
   <p:cSld>
     <p:spTree>
@@ -15810,7 +17238,7 @@
 </p:sld>
 </file>
 
-<file path=ppt/slides/slide8.xml><?xml version="1.0" encoding="utf-8"?>
+<file path=ppt/slides/slide9.xml><?xml version="1.0" encoding="utf-8"?>
 <p:sld xmlns:a="http://schemas.openxmlformats.org/drawingml/2006/main" xmlns:r="http://schemas.openxmlformats.org/officeDocument/2006/relationships" xmlns:p="http://schemas.openxmlformats.org/presentationml/2006/main">
   <p:cSld>
     <p:spTree>

--- a/projet_final/projet_final/MEC8211-Projet-final-Presentation.pptx
+++ b/projet_final/projet_final/MEC8211-Projet-final-Presentation.pptx
@@ -9656,31 +9656,3469 @@
           </a:p>
         </p:txBody>
       </p:sp>
-      <p:sp>
-        <p:nvSpPr>
-          <p:cNvPr id="3" name="Espace réservé du contenu 2">
+      <p:pic>
+        <p:nvPicPr>
+          <p:cNvPr id="5" name="Espace réservé du contenu 4">
             <a:extLst>
               <a:ext uri="{FF2B5EF4-FFF2-40B4-BE49-F238E27FC236}">
-                <a16:creationId xmlns:a16="http://schemas.microsoft.com/office/drawing/2014/main" id="{492A9C98-CDF3-02FE-6E21-30036838C3DB}"/>
+                <a16:creationId xmlns:a16="http://schemas.microsoft.com/office/drawing/2014/main" id="{4595270A-CFC5-DE88-BDE0-18625C38E140}"/>
               </a:ext>
             </a:extLst>
           </p:cNvPr>
-          <p:cNvSpPr>
-            <a:spLocks noGrp="1"/>
-          </p:cNvSpPr>
+          <p:cNvPicPr>
+            <a:picLocks noGrp="1" noChangeAspect="1"/>
+          </p:cNvPicPr>
           <p:nvPr>
             <p:ph idx="1"/>
           </p:nvPr>
+        </p:nvPicPr>
+        <p:blipFill>
+          <a:blip r:embed="rId2"/>
+          <a:stretch>
+            <a:fillRect/>
+          </a:stretch>
+        </p:blipFill>
+        <p:spPr>
+          <a:xfrm>
+            <a:off x="1016619" y="4270193"/>
+            <a:ext cx="4204606" cy="2487977"/>
+          </a:xfrm>
+          <a:prstGeom prst="rect">
+            <a:avLst/>
+          </a:prstGeom>
+        </p:spPr>
+      </p:pic>
+      <mc:AlternateContent xmlns:mc="http://schemas.openxmlformats.org/markup-compatibility/2006">
+        <mc:Choice xmlns:a14="http://schemas.microsoft.com/office/drawing/2010/main" Requires="a14">
+          <p:sp>
+            <p:nvSpPr>
+              <p:cNvPr id="6" name="ZoneTexte 5">
+                <a:extLst>
+                  <a:ext uri="{FF2B5EF4-FFF2-40B4-BE49-F238E27FC236}">
+                    <a16:creationId xmlns:a16="http://schemas.microsoft.com/office/drawing/2014/main" id="{F5871682-0B46-824A-AEFF-E8E2BCE778AB}"/>
+                  </a:ext>
+                </a:extLst>
+              </p:cNvPr>
+              <p:cNvSpPr txBox="1"/>
+              <p:nvPr/>
+            </p:nvSpPr>
+            <p:spPr>
+              <a:xfrm>
+                <a:off x="667512" y="1343818"/>
+                <a:ext cx="5897880" cy="1288686"/>
+              </a:xfrm>
+              <a:prstGeom prst="rect">
+                <a:avLst/>
+              </a:prstGeom>
+              <a:noFill/>
+            </p:spPr>
+            <p:txBody>
+              <a:bodyPr wrap="square" rtlCol="0">
+                <a:spAutoFit/>
+              </a:bodyPr>
+              <a:lstStyle/>
+              <a:p>
+                <a:r>
+                  <a:rPr lang="fr-CA" dirty="0">
+                    <a:solidFill>
+                      <a:schemeClr val="accent2"/>
+                    </a:solidFill>
+                  </a:rPr>
+                  <a:t>Condition de symétrie (Neumann) :</a:t>
+                </a:r>
+              </a:p>
+              <a:p>
+                <a:pPr algn="ctr"/>
+                <a:r>
+                  <a:rPr lang="fr-CA" dirty="0">
+                    <a:solidFill>
+                      <a:schemeClr val="accent2"/>
+                    </a:solidFill>
+                  </a:rPr>
+                  <a:t>	</a:t>
+                </a:r>
+                <a14:m>
+                  <m:oMath xmlns:m="http://schemas.openxmlformats.org/officeDocument/2006/math">
+                    <m:f>
+                      <m:fPr>
+                        <m:ctrlPr>
+                          <a:rPr lang="fr-CA" b="0" i="1" smtClean="0">
+                            <a:solidFill>
+                              <a:schemeClr val="accent2"/>
+                            </a:solidFill>
+                            <a:latin typeface="Cambria Math" panose="02040503050406030204" pitchFamily="18" charset="0"/>
+                          </a:rPr>
+                        </m:ctrlPr>
+                      </m:fPr>
+                      <m:num>
+                        <m:r>
+                          <a:rPr lang="fr-CA" b="0" i="1" smtClean="0">
+                            <a:solidFill>
+                              <a:schemeClr val="accent2"/>
+                            </a:solidFill>
+                            <a:latin typeface="Cambria Math" panose="02040503050406030204" pitchFamily="18" charset="0"/>
+                          </a:rPr>
+                          <m:t>𝑑𝑇</m:t>
+                        </m:r>
+                      </m:num>
+                      <m:den>
+                        <m:r>
+                          <a:rPr lang="fr-CA" b="0" i="1" smtClean="0">
+                            <a:solidFill>
+                              <a:schemeClr val="accent2"/>
+                            </a:solidFill>
+                            <a:latin typeface="Cambria Math" panose="02040503050406030204" pitchFamily="18" charset="0"/>
+                          </a:rPr>
+                          <m:t>𝑑𝑧</m:t>
+                        </m:r>
+                      </m:den>
+                    </m:f>
+                    <m:r>
+                      <a:rPr lang="fr-CA" b="0" i="1" smtClean="0">
+                        <a:solidFill>
+                          <a:schemeClr val="accent2"/>
+                        </a:solidFill>
+                        <a:latin typeface="Cambria Math" panose="02040503050406030204" pitchFamily="18" charset="0"/>
+                      </a:rPr>
+                      <m:t>=0</m:t>
+                    </m:r>
+                  </m:oMath>
+                </a14:m>
+                <a:endParaRPr lang="fr-CA" b="0" i="1" dirty="0">
+                  <a:solidFill>
+                    <a:schemeClr val="accent2"/>
+                  </a:solidFill>
+                  <a:latin typeface="Cambria Math" panose="02040503050406030204" pitchFamily="18" charset="0"/>
+                </a:endParaRPr>
+              </a:p>
+              <a:p>
+                <a:pPr algn="ctr"/>
+                <a14:m>
+                  <m:oMathPara xmlns:m="http://schemas.openxmlformats.org/officeDocument/2006/math">
+                    <m:oMathParaPr>
+                      <m:jc m:val="centerGroup"/>
+                    </m:oMathParaPr>
+                    <m:oMath xmlns:m="http://schemas.openxmlformats.org/officeDocument/2006/math">
+                      <m:sSubSup>
+                        <m:sSubSupPr>
+                          <m:ctrlPr>
+                            <a:rPr lang="fr-CA" b="0" i="1" smtClean="0">
+                              <a:solidFill>
+                                <a:schemeClr val="accent2"/>
+                              </a:solidFill>
+                              <a:latin typeface="Cambria Math" panose="02040503050406030204" pitchFamily="18" charset="0"/>
+                            </a:rPr>
+                          </m:ctrlPr>
+                        </m:sSubSupPr>
+                        <m:e>
+                          <m:r>
+                            <a:rPr lang="fr-CA" b="0" i="1" smtClean="0">
+                              <a:solidFill>
+                                <a:schemeClr val="accent2"/>
+                              </a:solidFill>
+                              <a:latin typeface="Cambria Math" panose="02040503050406030204" pitchFamily="18" charset="0"/>
+                            </a:rPr>
+                            <m:t>𝑇</m:t>
+                          </m:r>
+                        </m:e>
+                        <m:sub>
+                          <m:r>
+                            <a:rPr lang="fr-CA" b="0" i="1" smtClean="0">
+                              <a:solidFill>
+                                <a:schemeClr val="accent2"/>
+                              </a:solidFill>
+                              <a:latin typeface="Cambria Math" panose="02040503050406030204" pitchFamily="18" charset="0"/>
+                            </a:rPr>
+                            <m:t>𝑟</m:t>
+                          </m:r>
+                          <m:r>
+                            <a:rPr lang="fr-CA" b="0" i="1" smtClean="0">
+                              <a:solidFill>
+                                <a:schemeClr val="accent2"/>
+                              </a:solidFill>
+                              <a:latin typeface="Cambria Math" panose="02040503050406030204" pitchFamily="18" charset="0"/>
+                            </a:rPr>
+                            <m:t>,</m:t>
+                          </m:r>
+                          <m:r>
+                            <a:rPr lang="fr-CA" b="0" i="1" smtClean="0">
+                              <a:solidFill>
+                                <a:schemeClr val="accent2"/>
+                              </a:solidFill>
+                              <a:latin typeface="Cambria Math" panose="02040503050406030204" pitchFamily="18" charset="0"/>
+                            </a:rPr>
+                            <m:t>𝑧</m:t>
+                          </m:r>
+                        </m:sub>
+                        <m:sup>
+                          <m:r>
+                            <a:rPr lang="fr-CA" b="0" i="1" smtClean="0">
+                              <a:solidFill>
+                                <a:schemeClr val="accent2"/>
+                              </a:solidFill>
+                              <a:latin typeface="Cambria Math" panose="02040503050406030204" pitchFamily="18" charset="0"/>
+                            </a:rPr>
+                            <m:t>𝑡</m:t>
+                          </m:r>
+                          <m:r>
+                            <a:rPr lang="fr-CA" b="0" i="1" smtClean="0">
+                              <a:solidFill>
+                                <a:schemeClr val="accent2"/>
+                              </a:solidFill>
+                              <a:latin typeface="Cambria Math" panose="02040503050406030204" pitchFamily="18" charset="0"/>
+                            </a:rPr>
+                            <m:t>+∆</m:t>
+                          </m:r>
+                          <m:r>
+                            <a:rPr lang="fr-CA" b="0" i="1" smtClean="0">
+                              <a:solidFill>
+                                <a:schemeClr val="accent2"/>
+                              </a:solidFill>
+                              <a:latin typeface="Cambria Math" panose="02040503050406030204" pitchFamily="18" charset="0"/>
+                              <a:ea typeface="Cambria Math" panose="02040503050406030204" pitchFamily="18" charset="0"/>
+                            </a:rPr>
+                            <m:t>𝑡</m:t>
+                          </m:r>
+                        </m:sup>
+                      </m:sSubSup>
+                      <m:r>
+                        <a:rPr lang="fr-CA" b="0" i="0" smtClean="0">
+                          <a:solidFill>
+                            <a:schemeClr val="accent2"/>
+                          </a:solidFill>
+                          <a:latin typeface="Cambria Math" panose="02040503050406030204" pitchFamily="18" charset="0"/>
+                        </a:rPr>
+                        <m:t>=</m:t>
+                      </m:r>
+                      <m:f>
+                        <m:fPr>
+                          <m:ctrlPr>
+                            <a:rPr lang="fr-CA" b="0" i="0" smtClean="0">
+                              <a:solidFill>
+                                <a:schemeClr val="accent2"/>
+                              </a:solidFill>
+                              <a:latin typeface="Cambria Math" panose="02040503050406030204" pitchFamily="18" charset="0"/>
+                            </a:rPr>
+                          </m:ctrlPr>
+                        </m:fPr>
+                        <m:num>
+                          <m:r>
+                            <a:rPr lang="fr-CA" b="0" i="0" smtClean="0">
+                              <a:solidFill>
+                                <a:schemeClr val="accent2"/>
+                              </a:solidFill>
+                              <a:latin typeface="Cambria Math" panose="02040503050406030204" pitchFamily="18" charset="0"/>
+                            </a:rPr>
+                            <m:t>−</m:t>
+                          </m:r>
+                          <m:r>
+                            <a:rPr lang="fr-CA" b="0" i="0" smtClean="0">
+                              <a:solidFill>
+                                <a:schemeClr val="accent2"/>
+                              </a:solidFill>
+                              <a:latin typeface="Cambria Math" panose="02040503050406030204" pitchFamily="18" charset="0"/>
+                            </a:rPr>
+                            <m:t>1</m:t>
+                          </m:r>
+                        </m:num>
+                        <m:den>
+                          <m:r>
+                            <a:rPr lang="fr-CA" b="0" i="0" smtClean="0">
+                              <a:solidFill>
+                                <a:schemeClr val="accent2"/>
+                              </a:solidFill>
+                              <a:latin typeface="Cambria Math" panose="02040503050406030204" pitchFamily="18" charset="0"/>
+                            </a:rPr>
+                            <m:t>3</m:t>
+                          </m:r>
+                        </m:den>
+                      </m:f>
+                      <m:sSubSup>
+                        <m:sSubSupPr>
+                          <m:ctrlPr>
+                            <a:rPr lang="fr-CA" i="1">
+                              <a:solidFill>
+                                <a:schemeClr val="accent2"/>
+                              </a:solidFill>
+                              <a:latin typeface="Cambria Math" panose="02040503050406030204" pitchFamily="18" charset="0"/>
+                            </a:rPr>
+                          </m:ctrlPr>
+                        </m:sSubSupPr>
+                        <m:e>
+                          <m:r>
+                            <a:rPr lang="fr-CA" i="1">
+                              <a:solidFill>
+                                <a:schemeClr val="accent2"/>
+                              </a:solidFill>
+                              <a:latin typeface="Cambria Math" panose="02040503050406030204" pitchFamily="18" charset="0"/>
+                            </a:rPr>
+                            <m:t>𝑇</m:t>
+                          </m:r>
+                        </m:e>
+                        <m:sub>
+                          <m:r>
+                            <a:rPr lang="fr-CA" i="1">
+                              <a:solidFill>
+                                <a:schemeClr val="accent2"/>
+                              </a:solidFill>
+                              <a:latin typeface="Cambria Math" panose="02040503050406030204" pitchFamily="18" charset="0"/>
+                            </a:rPr>
+                            <m:t>𝑟</m:t>
+                          </m:r>
+                          <m:r>
+                            <a:rPr lang="fr-CA" i="1">
+                              <a:solidFill>
+                                <a:schemeClr val="accent2"/>
+                              </a:solidFill>
+                              <a:latin typeface="Cambria Math" panose="02040503050406030204" pitchFamily="18" charset="0"/>
+                            </a:rPr>
+                            <m:t>,</m:t>
+                          </m:r>
+                          <m:r>
+                            <a:rPr lang="fr-CA" i="1">
+                              <a:solidFill>
+                                <a:schemeClr val="accent2"/>
+                              </a:solidFill>
+                              <a:latin typeface="Cambria Math" panose="02040503050406030204" pitchFamily="18" charset="0"/>
+                            </a:rPr>
+                            <m:t>𝑧</m:t>
+                          </m:r>
+                          <m:r>
+                            <a:rPr lang="fr-CA" b="0" i="1" smtClean="0">
+                              <a:solidFill>
+                                <a:schemeClr val="accent2"/>
+                              </a:solidFill>
+                              <a:latin typeface="Cambria Math" panose="02040503050406030204" pitchFamily="18" charset="0"/>
+                            </a:rPr>
+                            <m:t>+2</m:t>
+                          </m:r>
+                        </m:sub>
+                        <m:sup>
+                          <m:r>
+                            <a:rPr lang="fr-CA" i="1">
+                              <a:solidFill>
+                                <a:schemeClr val="accent2"/>
+                              </a:solidFill>
+                              <a:latin typeface="Cambria Math" panose="02040503050406030204" pitchFamily="18" charset="0"/>
+                            </a:rPr>
+                            <m:t>𝑡</m:t>
+                          </m:r>
+                        </m:sup>
+                      </m:sSubSup>
+                      <m:r>
+                        <a:rPr lang="fr-CA" b="0" i="1" smtClean="0">
+                          <a:solidFill>
+                            <a:schemeClr val="accent2"/>
+                          </a:solidFill>
+                          <a:latin typeface="Cambria Math" panose="02040503050406030204" pitchFamily="18" charset="0"/>
+                          <a:ea typeface="Cambria Math" panose="02040503050406030204" pitchFamily="18" charset="0"/>
+                        </a:rPr>
+                        <m:t>+</m:t>
+                      </m:r>
+                      <m:f>
+                        <m:fPr>
+                          <m:ctrlPr>
+                            <a:rPr lang="fr-CA" b="0" i="1" smtClean="0">
+                              <a:solidFill>
+                                <a:schemeClr val="accent2"/>
+                              </a:solidFill>
+                              <a:latin typeface="Cambria Math" panose="02040503050406030204" pitchFamily="18" charset="0"/>
+                              <a:ea typeface="Cambria Math" panose="02040503050406030204" pitchFamily="18" charset="0"/>
+                            </a:rPr>
+                          </m:ctrlPr>
+                        </m:fPr>
+                        <m:num>
+                          <m:r>
+                            <a:rPr lang="fr-CA" b="0" i="1" smtClean="0">
+                              <a:solidFill>
+                                <a:schemeClr val="accent2"/>
+                              </a:solidFill>
+                              <a:latin typeface="Cambria Math" panose="02040503050406030204" pitchFamily="18" charset="0"/>
+                              <a:ea typeface="Cambria Math" panose="02040503050406030204" pitchFamily="18" charset="0"/>
+                            </a:rPr>
+                            <m:t>4</m:t>
+                          </m:r>
+                        </m:num>
+                        <m:den>
+                          <m:r>
+                            <a:rPr lang="fr-CA" b="0" i="1" smtClean="0">
+                              <a:solidFill>
+                                <a:schemeClr val="accent2"/>
+                              </a:solidFill>
+                              <a:latin typeface="Cambria Math" panose="02040503050406030204" pitchFamily="18" charset="0"/>
+                              <a:ea typeface="Cambria Math" panose="02040503050406030204" pitchFamily="18" charset="0"/>
+                            </a:rPr>
+                            <m:t>3</m:t>
+                          </m:r>
+                        </m:den>
+                      </m:f>
+                      <m:sSubSup>
+                        <m:sSubSupPr>
+                          <m:ctrlPr>
+                            <a:rPr lang="fr-CA" i="1">
+                              <a:solidFill>
+                                <a:schemeClr val="accent2"/>
+                              </a:solidFill>
+                              <a:latin typeface="Cambria Math" panose="02040503050406030204" pitchFamily="18" charset="0"/>
+                            </a:rPr>
+                          </m:ctrlPr>
+                        </m:sSubSupPr>
+                        <m:e>
+                          <m:r>
+                            <a:rPr lang="fr-CA" i="1">
+                              <a:solidFill>
+                                <a:schemeClr val="accent2"/>
+                              </a:solidFill>
+                              <a:latin typeface="Cambria Math" panose="02040503050406030204" pitchFamily="18" charset="0"/>
+                            </a:rPr>
+                            <m:t>𝑇</m:t>
+                          </m:r>
+                        </m:e>
+                        <m:sub>
+                          <m:r>
+                            <a:rPr lang="fr-CA" i="1">
+                              <a:solidFill>
+                                <a:schemeClr val="accent2"/>
+                              </a:solidFill>
+                              <a:latin typeface="Cambria Math" panose="02040503050406030204" pitchFamily="18" charset="0"/>
+                            </a:rPr>
+                            <m:t>𝑟</m:t>
+                          </m:r>
+                          <m:r>
+                            <a:rPr lang="fr-CA" i="1">
+                              <a:solidFill>
+                                <a:schemeClr val="accent2"/>
+                              </a:solidFill>
+                              <a:latin typeface="Cambria Math" panose="02040503050406030204" pitchFamily="18" charset="0"/>
+                            </a:rPr>
+                            <m:t>,</m:t>
+                          </m:r>
+                          <m:r>
+                            <a:rPr lang="fr-CA" i="1">
+                              <a:solidFill>
+                                <a:schemeClr val="accent2"/>
+                              </a:solidFill>
+                              <a:latin typeface="Cambria Math" panose="02040503050406030204" pitchFamily="18" charset="0"/>
+                            </a:rPr>
+                            <m:t>𝑧</m:t>
+                          </m:r>
+                          <m:r>
+                            <a:rPr lang="fr-CA" b="0" i="1" smtClean="0">
+                              <a:solidFill>
+                                <a:schemeClr val="accent2"/>
+                              </a:solidFill>
+                              <a:latin typeface="Cambria Math" panose="02040503050406030204" pitchFamily="18" charset="0"/>
+                            </a:rPr>
+                            <m:t>+1</m:t>
+                          </m:r>
+                        </m:sub>
+                        <m:sup>
+                          <m:r>
+                            <a:rPr lang="fr-CA" i="1">
+                              <a:solidFill>
+                                <a:schemeClr val="accent2"/>
+                              </a:solidFill>
+                              <a:latin typeface="Cambria Math" panose="02040503050406030204" pitchFamily="18" charset="0"/>
+                            </a:rPr>
+                            <m:t>𝑡</m:t>
+                          </m:r>
+                        </m:sup>
+                      </m:sSubSup>
+                    </m:oMath>
+                  </m:oMathPara>
+                </a14:m>
+                <a:endParaRPr lang="fr-CA" dirty="0">
+                  <a:solidFill>
+                    <a:schemeClr val="accent2"/>
+                  </a:solidFill>
+                </a:endParaRPr>
+              </a:p>
+            </p:txBody>
+          </p:sp>
+        </mc:Choice>
+        <mc:Fallback>
+          <p:sp>
+            <p:nvSpPr>
+              <p:cNvPr id="6" name="ZoneTexte 5">
+                <a:extLst>
+                  <a:ext uri="{FF2B5EF4-FFF2-40B4-BE49-F238E27FC236}">
+                    <a16:creationId xmlns:a16="http://schemas.microsoft.com/office/drawing/2014/main" id="{F5871682-0B46-824A-AEFF-E8E2BCE778AB}"/>
+                  </a:ext>
+                </a:extLst>
+              </p:cNvPr>
+              <p:cNvSpPr txBox="1">
+                <a:spLocks noRot="1" noChangeAspect="1" noMove="1" noResize="1" noEditPoints="1" noAdjustHandles="1" noChangeArrowheads="1" noChangeShapeType="1" noTextEdit="1"/>
+              </p:cNvSpPr>
+              <p:nvPr/>
+            </p:nvSpPr>
+            <p:spPr>
+              <a:xfrm>
+                <a:off x="667512" y="1343818"/>
+                <a:ext cx="5897880" cy="1288686"/>
+              </a:xfrm>
+              <a:prstGeom prst="rect">
+                <a:avLst/>
+              </a:prstGeom>
+              <a:blipFill>
+                <a:blip r:embed="rId3"/>
+                <a:stretch>
+                  <a:fillRect l="-931" t="-1887"/>
+                </a:stretch>
+              </a:blipFill>
+            </p:spPr>
+            <p:txBody>
+              <a:bodyPr/>
+              <a:lstStyle/>
+              <a:p>
+                <a:r>
+                  <a:rPr lang="fr-CA">
+                    <a:noFill/>
+                  </a:rPr>
+                  <a:t> </a:t>
+                </a:r>
+              </a:p>
+            </p:txBody>
+          </p:sp>
+        </mc:Fallback>
+      </mc:AlternateContent>
+      <mc:AlternateContent xmlns:mc="http://schemas.openxmlformats.org/markup-compatibility/2006">
+        <mc:Choice xmlns:a14="http://schemas.microsoft.com/office/drawing/2010/main" Requires="a14">
+          <p:sp>
+            <p:nvSpPr>
+              <p:cNvPr id="7" name="ZoneTexte 6">
+                <a:extLst>
+                  <a:ext uri="{FF2B5EF4-FFF2-40B4-BE49-F238E27FC236}">
+                    <a16:creationId xmlns:a16="http://schemas.microsoft.com/office/drawing/2014/main" id="{35B26447-C369-915B-101D-E4FC7C5D7482}"/>
+                  </a:ext>
+                </a:extLst>
+              </p:cNvPr>
+              <p:cNvSpPr txBox="1"/>
+              <p:nvPr/>
+            </p:nvSpPr>
+            <p:spPr>
+              <a:xfrm>
+                <a:off x="582168" y="2784657"/>
+                <a:ext cx="5897880" cy="1288686"/>
+              </a:xfrm>
+              <a:prstGeom prst="rect">
+                <a:avLst/>
+              </a:prstGeom>
+              <a:noFill/>
+            </p:spPr>
+            <p:txBody>
+              <a:bodyPr wrap="square" rtlCol="0">
+                <a:spAutoFit/>
+              </a:bodyPr>
+              <a:lstStyle/>
+              <a:p>
+                <a:r>
+                  <a:rPr lang="fr-CA" dirty="0">
+                    <a:solidFill>
+                      <a:srgbClr val="FFBF00"/>
+                    </a:solidFill>
+                  </a:rPr>
+                  <a:t>Condition de symétrie (Neumann) :</a:t>
+                </a:r>
+              </a:p>
+              <a:p>
+                <a:pPr algn="ctr"/>
+                <a:r>
+                  <a:rPr lang="fr-CA" dirty="0">
+                    <a:solidFill>
+                      <a:srgbClr val="FFBF00"/>
+                    </a:solidFill>
+                  </a:rPr>
+                  <a:t>	</a:t>
+                </a:r>
+                <a14:m>
+                  <m:oMath xmlns:m="http://schemas.openxmlformats.org/officeDocument/2006/math">
+                    <m:f>
+                      <m:fPr>
+                        <m:ctrlPr>
+                          <a:rPr lang="fr-CA" b="0" i="1" smtClean="0">
+                            <a:solidFill>
+                              <a:srgbClr val="FFBF00"/>
+                            </a:solidFill>
+                            <a:latin typeface="Cambria Math" panose="02040503050406030204" pitchFamily="18" charset="0"/>
+                          </a:rPr>
+                        </m:ctrlPr>
+                      </m:fPr>
+                      <m:num>
+                        <m:r>
+                          <a:rPr lang="fr-CA" b="0" i="1" smtClean="0">
+                            <a:solidFill>
+                              <a:srgbClr val="FFBF00"/>
+                            </a:solidFill>
+                            <a:latin typeface="Cambria Math" panose="02040503050406030204" pitchFamily="18" charset="0"/>
+                          </a:rPr>
+                          <m:t>𝑑𝑇</m:t>
+                        </m:r>
+                      </m:num>
+                      <m:den>
+                        <m:r>
+                          <a:rPr lang="fr-CA" b="0" i="1" smtClean="0">
+                            <a:solidFill>
+                              <a:srgbClr val="FFBF00"/>
+                            </a:solidFill>
+                            <a:latin typeface="Cambria Math" panose="02040503050406030204" pitchFamily="18" charset="0"/>
+                          </a:rPr>
+                          <m:t>𝑑𝑧</m:t>
+                        </m:r>
+                      </m:den>
+                    </m:f>
+                    <m:r>
+                      <a:rPr lang="fr-CA" b="0" i="1" smtClean="0">
+                        <a:solidFill>
+                          <a:srgbClr val="FFBF00"/>
+                        </a:solidFill>
+                        <a:latin typeface="Cambria Math" panose="02040503050406030204" pitchFamily="18" charset="0"/>
+                      </a:rPr>
+                      <m:t>=0</m:t>
+                    </m:r>
+                  </m:oMath>
+                </a14:m>
+                <a:endParaRPr lang="fr-CA" b="0" i="1" dirty="0">
+                  <a:solidFill>
+                    <a:srgbClr val="FFBF00"/>
+                  </a:solidFill>
+                  <a:latin typeface="Cambria Math" panose="02040503050406030204" pitchFamily="18" charset="0"/>
+                </a:endParaRPr>
+              </a:p>
+              <a:p>
+                <a:pPr algn="ctr"/>
+                <a14:m>
+                  <m:oMathPara xmlns:m="http://schemas.openxmlformats.org/officeDocument/2006/math">
+                    <m:oMathParaPr>
+                      <m:jc m:val="centerGroup"/>
+                    </m:oMathParaPr>
+                    <m:oMath xmlns:m="http://schemas.openxmlformats.org/officeDocument/2006/math">
+                      <m:sSubSup>
+                        <m:sSubSupPr>
+                          <m:ctrlPr>
+                            <a:rPr lang="fr-CA" b="0" i="1" smtClean="0">
+                              <a:solidFill>
+                                <a:srgbClr val="FFBF00"/>
+                              </a:solidFill>
+                              <a:latin typeface="Cambria Math" panose="02040503050406030204" pitchFamily="18" charset="0"/>
+                            </a:rPr>
+                          </m:ctrlPr>
+                        </m:sSubSupPr>
+                        <m:e>
+                          <m:r>
+                            <a:rPr lang="fr-CA" b="0" i="1" smtClean="0">
+                              <a:solidFill>
+                                <a:srgbClr val="FFBF00"/>
+                              </a:solidFill>
+                              <a:latin typeface="Cambria Math" panose="02040503050406030204" pitchFamily="18" charset="0"/>
+                            </a:rPr>
+                            <m:t>𝑇</m:t>
+                          </m:r>
+                        </m:e>
+                        <m:sub>
+                          <m:r>
+                            <a:rPr lang="fr-CA" b="0" i="1" smtClean="0">
+                              <a:solidFill>
+                                <a:srgbClr val="FFBF00"/>
+                              </a:solidFill>
+                              <a:latin typeface="Cambria Math" panose="02040503050406030204" pitchFamily="18" charset="0"/>
+                            </a:rPr>
+                            <m:t>𝑟</m:t>
+                          </m:r>
+                          <m:r>
+                            <a:rPr lang="fr-CA" b="0" i="1" smtClean="0">
+                              <a:solidFill>
+                                <a:srgbClr val="FFBF00"/>
+                              </a:solidFill>
+                              <a:latin typeface="Cambria Math" panose="02040503050406030204" pitchFamily="18" charset="0"/>
+                            </a:rPr>
+                            <m:t>,</m:t>
+                          </m:r>
+                          <m:r>
+                            <a:rPr lang="fr-CA" b="0" i="1" smtClean="0">
+                              <a:solidFill>
+                                <a:srgbClr val="FFBF00"/>
+                              </a:solidFill>
+                              <a:latin typeface="Cambria Math" panose="02040503050406030204" pitchFamily="18" charset="0"/>
+                            </a:rPr>
+                            <m:t>𝑧</m:t>
+                          </m:r>
+                        </m:sub>
+                        <m:sup>
+                          <m:r>
+                            <a:rPr lang="fr-CA" b="0" i="1" smtClean="0">
+                              <a:solidFill>
+                                <a:srgbClr val="FFBF00"/>
+                              </a:solidFill>
+                              <a:latin typeface="Cambria Math" panose="02040503050406030204" pitchFamily="18" charset="0"/>
+                            </a:rPr>
+                            <m:t>𝑡</m:t>
+                          </m:r>
+                          <m:r>
+                            <a:rPr lang="fr-CA" b="0" i="1" smtClean="0">
+                              <a:solidFill>
+                                <a:srgbClr val="FFBF00"/>
+                              </a:solidFill>
+                              <a:latin typeface="Cambria Math" panose="02040503050406030204" pitchFamily="18" charset="0"/>
+                            </a:rPr>
+                            <m:t>+∆</m:t>
+                          </m:r>
+                          <m:r>
+                            <a:rPr lang="fr-CA" b="0" i="1" smtClean="0">
+                              <a:solidFill>
+                                <a:srgbClr val="FFBF00"/>
+                              </a:solidFill>
+                              <a:latin typeface="Cambria Math" panose="02040503050406030204" pitchFamily="18" charset="0"/>
+                              <a:ea typeface="Cambria Math" panose="02040503050406030204" pitchFamily="18" charset="0"/>
+                            </a:rPr>
+                            <m:t>𝑡</m:t>
+                          </m:r>
+                        </m:sup>
+                      </m:sSubSup>
+                      <m:r>
+                        <a:rPr lang="fr-CA" b="0" i="0" smtClean="0">
+                          <a:solidFill>
+                            <a:srgbClr val="FFBF00"/>
+                          </a:solidFill>
+                          <a:latin typeface="Cambria Math" panose="02040503050406030204" pitchFamily="18" charset="0"/>
+                        </a:rPr>
+                        <m:t>=</m:t>
+                      </m:r>
+                      <m:f>
+                        <m:fPr>
+                          <m:ctrlPr>
+                            <a:rPr lang="fr-CA" b="0" i="1" smtClean="0">
+                              <a:solidFill>
+                                <a:srgbClr val="FFBF00"/>
+                              </a:solidFill>
+                              <a:latin typeface="Cambria Math" panose="02040503050406030204" pitchFamily="18" charset="0"/>
+                            </a:rPr>
+                          </m:ctrlPr>
+                        </m:fPr>
+                        <m:num>
+                          <m:r>
+                            <a:rPr lang="fr-CA" b="0" i="0" smtClean="0">
+                              <a:solidFill>
+                                <a:srgbClr val="FFBF00"/>
+                              </a:solidFill>
+                              <a:latin typeface="Cambria Math" panose="02040503050406030204" pitchFamily="18" charset="0"/>
+                            </a:rPr>
+                            <m:t>−1</m:t>
+                          </m:r>
+                        </m:num>
+                        <m:den>
+                          <m:r>
+                            <a:rPr lang="fr-CA" b="0" i="0" smtClean="0">
+                              <a:solidFill>
+                                <a:srgbClr val="FFBF00"/>
+                              </a:solidFill>
+                              <a:latin typeface="Cambria Math" panose="02040503050406030204" pitchFamily="18" charset="0"/>
+                            </a:rPr>
+                            <m:t>3</m:t>
+                          </m:r>
+                        </m:den>
+                      </m:f>
+                      <m:sSubSup>
+                        <m:sSubSupPr>
+                          <m:ctrlPr>
+                            <a:rPr lang="fr-CA" i="1">
+                              <a:solidFill>
+                                <a:srgbClr val="FFBF00"/>
+                              </a:solidFill>
+                              <a:latin typeface="Cambria Math" panose="02040503050406030204" pitchFamily="18" charset="0"/>
+                            </a:rPr>
+                          </m:ctrlPr>
+                        </m:sSubSupPr>
+                        <m:e>
+                          <m:r>
+                            <a:rPr lang="fr-CA" i="1">
+                              <a:solidFill>
+                                <a:srgbClr val="FFBF00"/>
+                              </a:solidFill>
+                              <a:latin typeface="Cambria Math" panose="02040503050406030204" pitchFamily="18" charset="0"/>
+                            </a:rPr>
+                            <m:t>𝑇</m:t>
+                          </m:r>
+                        </m:e>
+                        <m:sub>
+                          <m:r>
+                            <a:rPr lang="fr-CA" i="1">
+                              <a:solidFill>
+                                <a:srgbClr val="FFBF00"/>
+                              </a:solidFill>
+                              <a:latin typeface="Cambria Math" panose="02040503050406030204" pitchFamily="18" charset="0"/>
+                            </a:rPr>
+                            <m:t>𝑟</m:t>
+                          </m:r>
+                          <m:r>
+                            <a:rPr lang="fr-CA" i="1">
+                              <a:solidFill>
+                                <a:srgbClr val="FFBF00"/>
+                              </a:solidFill>
+                              <a:latin typeface="Cambria Math" panose="02040503050406030204" pitchFamily="18" charset="0"/>
+                            </a:rPr>
+                            <m:t>,</m:t>
+                          </m:r>
+                          <m:r>
+                            <a:rPr lang="fr-CA" i="1">
+                              <a:solidFill>
+                                <a:srgbClr val="FFBF00"/>
+                              </a:solidFill>
+                              <a:latin typeface="Cambria Math" panose="02040503050406030204" pitchFamily="18" charset="0"/>
+                            </a:rPr>
+                            <m:t>𝑧</m:t>
+                          </m:r>
+                          <m:r>
+                            <a:rPr lang="fr-CA" b="0" i="1" smtClean="0">
+                              <a:solidFill>
+                                <a:srgbClr val="FFBF00"/>
+                              </a:solidFill>
+                              <a:latin typeface="Cambria Math" panose="02040503050406030204" pitchFamily="18" charset="0"/>
+                            </a:rPr>
+                            <m:t>+2</m:t>
+                          </m:r>
+                        </m:sub>
+                        <m:sup>
+                          <m:r>
+                            <a:rPr lang="fr-CA" i="1">
+                              <a:solidFill>
+                                <a:srgbClr val="FFBF00"/>
+                              </a:solidFill>
+                              <a:latin typeface="Cambria Math" panose="02040503050406030204" pitchFamily="18" charset="0"/>
+                            </a:rPr>
+                            <m:t>𝑡</m:t>
+                          </m:r>
+                        </m:sup>
+                      </m:sSubSup>
+                      <m:r>
+                        <a:rPr lang="fr-CA" b="0" i="1" smtClean="0">
+                          <a:solidFill>
+                            <a:srgbClr val="FFBF00"/>
+                          </a:solidFill>
+                          <a:latin typeface="Cambria Math" panose="02040503050406030204" pitchFamily="18" charset="0"/>
+                          <a:ea typeface="Cambria Math" panose="02040503050406030204" pitchFamily="18" charset="0"/>
+                        </a:rPr>
+                        <m:t>+</m:t>
+                      </m:r>
+                      <m:f>
+                        <m:fPr>
+                          <m:ctrlPr>
+                            <a:rPr lang="fr-CA" b="0" i="1" smtClean="0">
+                              <a:solidFill>
+                                <a:srgbClr val="FFBF00"/>
+                              </a:solidFill>
+                              <a:latin typeface="Cambria Math" panose="02040503050406030204" pitchFamily="18" charset="0"/>
+                              <a:ea typeface="Cambria Math" panose="02040503050406030204" pitchFamily="18" charset="0"/>
+                            </a:rPr>
+                          </m:ctrlPr>
+                        </m:fPr>
+                        <m:num>
+                          <m:r>
+                            <a:rPr lang="fr-CA" b="0" i="1" smtClean="0">
+                              <a:solidFill>
+                                <a:srgbClr val="FFBF00"/>
+                              </a:solidFill>
+                              <a:latin typeface="Cambria Math" panose="02040503050406030204" pitchFamily="18" charset="0"/>
+                              <a:ea typeface="Cambria Math" panose="02040503050406030204" pitchFamily="18" charset="0"/>
+                            </a:rPr>
+                            <m:t>4</m:t>
+                          </m:r>
+                        </m:num>
+                        <m:den>
+                          <m:r>
+                            <a:rPr lang="fr-CA" b="0" i="1" smtClean="0">
+                              <a:solidFill>
+                                <a:srgbClr val="FFBF00"/>
+                              </a:solidFill>
+                              <a:latin typeface="Cambria Math" panose="02040503050406030204" pitchFamily="18" charset="0"/>
+                              <a:ea typeface="Cambria Math" panose="02040503050406030204" pitchFamily="18" charset="0"/>
+                            </a:rPr>
+                            <m:t>3</m:t>
+                          </m:r>
+                        </m:den>
+                      </m:f>
+                      <m:sSubSup>
+                        <m:sSubSupPr>
+                          <m:ctrlPr>
+                            <a:rPr lang="fr-CA" i="1">
+                              <a:solidFill>
+                                <a:srgbClr val="FFBF00"/>
+                              </a:solidFill>
+                              <a:latin typeface="Cambria Math" panose="02040503050406030204" pitchFamily="18" charset="0"/>
+                            </a:rPr>
+                          </m:ctrlPr>
+                        </m:sSubSupPr>
+                        <m:e>
+                          <m:r>
+                            <a:rPr lang="fr-CA" i="1">
+                              <a:solidFill>
+                                <a:srgbClr val="FFBF00"/>
+                              </a:solidFill>
+                              <a:latin typeface="Cambria Math" panose="02040503050406030204" pitchFamily="18" charset="0"/>
+                            </a:rPr>
+                            <m:t>𝑇</m:t>
+                          </m:r>
+                        </m:e>
+                        <m:sub>
+                          <m:r>
+                            <a:rPr lang="fr-CA" i="1">
+                              <a:solidFill>
+                                <a:srgbClr val="FFBF00"/>
+                              </a:solidFill>
+                              <a:latin typeface="Cambria Math" panose="02040503050406030204" pitchFamily="18" charset="0"/>
+                            </a:rPr>
+                            <m:t>𝑟</m:t>
+                          </m:r>
+                          <m:r>
+                            <a:rPr lang="fr-CA" i="1">
+                              <a:solidFill>
+                                <a:srgbClr val="FFBF00"/>
+                              </a:solidFill>
+                              <a:latin typeface="Cambria Math" panose="02040503050406030204" pitchFamily="18" charset="0"/>
+                            </a:rPr>
+                            <m:t>,</m:t>
+                          </m:r>
+                          <m:r>
+                            <a:rPr lang="fr-CA" i="1">
+                              <a:solidFill>
+                                <a:srgbClr val="FFBF00"/>
+                              </a:solidFill>
+                              <a:latin typeface="Cambria Math" panose="02040503050406030204" pitchFamily="18" charset="0"/>
+                            </a:rPr>
+                            <m:t>𝑧</m:t>
+                          </m:r>
+                          <m:r>
+                            <a:rPr lang="fr-CA" b="0" i="1" smtClean="0">
+                              <a:solidFill>
+                                <a:srgbClr val="FFBF00"/>
+                              </a:solidFill>
+                              <a:latin typeface="Cambria Math" panose="02040503050406030204" pitchFamily="18" charset="0"/>
+                            </a:rPr>
+                            <m:t>+1</m:t>
+                          </m:r>
+                        </m:sub>
+                        <m:sup>
+                          <m:r>
+                            <a:rPr lang="fr-CA" i="1">
+                              <a:solidFill>
+                                <a:srgbClr val="FFBF00"/>
+                              </a:solidFill>
+                              <a:latin typeface="Cambria Math" panose="02040503050406030204" pitchFamily="18" charset="0"/>
+                            </a:rPr>
+                            <m:t>𝑡</m:t>
+                          </m:r>
+                        </m:sup>
+                      </m:sSubSup>
+                    </m:oMath>
+                  </m:oMathPara>
+                </a14:m>
+                <a:endParaRPr lang="fr-CA" dirty="0">
+                  <a:solidFill>
+                    <a:srgbClr val="FFBF00"/>
+                  </a:solidFill>
+                </a:endParaRPr>
+              </a:p>
+            </p:txBody>
+          </p:sp>
+        </mc:Choice>
+        <mc:Fallback>
+          <p:sp>
+            <p:nvSpPr>
+              <p:cNvPr id="7" name="ZoneTexte 6">
+                <a:extLst>
+                  <a:ext uri="{FF2B5EF4-FFF2-40B4-BE49-F238E27FC236}">
+                    <a16:creationId xmlns:a16="http://schemas.microsoft.com/office/drawing/2014/main" id="{35B26447-C369-915B-101D-E4FC7C5D7482}"/>
+                  </a:ext>
+                </a:extLst>
+              </p:cNvPr>
+              <p:cNvSpPr txBox="1">
+                <a:spLocks noRot="1" noChangeAspect="1" noMove="1" noResize="1" noEditPoints="1" noAdjustHandles="1" noChangeArrowheads="1" noChangeShapeType="1" noTextEdit="1"/>
+              </p:cNvSpPr>
+              <p:nvPr/>
+            </p:nvSpPr>
+            <p:spPr>
+              <a:xfrm>
+                <a:off x="582168" y="2784657"/>
+                <a:ext cx="5897880" cy="1288686"/>
+              </a:xfrm>
+              <a:prstGeom prst="rect">
+                <a:avLst/>
+              </a:prstGeom>
+              <a:blipFill>
+                <a:blip r:embed="rId4"/>
+                <a:stretch>
+                  <a:fillRect l="-931" t="-2370"/>
+                </a:stretch>
+              </a:blipFill>
+            </p:spPr>
+            <p:txBody>
+              <a:bodyPr/>
+              <a:lstStyle/>
+              <a:p>
+                <a:r>
+                  <a:rPr lang="fr-CA">
+                    <a:noFill/>
+                  </a:rPr>
+                  <a:t> </a:t>
+                </a:r>
+              </a:p>
+            </p:txBody>
+          </p:sp>
+        </mc:Fallback>
+      </mc:AlternateContent>
+      <mc:AlternateContent xmlns:mc="http://schemas.openxmlformats.org/markup-compatibility/2006">
+        <mc:Choice xmlns:a14="http://schemas.microsoft.com/office/drawing/2010/main" Requires="a14">
+          <p:sp>
+            <p:nvSpPr>
+              <p:cNvPr id="8" name="ZoneTexte 7">
+                <a:extLst>
+                  <a:ext uri="{FF2B5EF4-FFF2-40B4-BE49-F238E27FC236}">
+                    <a16:creationId xmlns:a16="http://schemas.microsoft.com/office/drawing/2014/main" id="{B81FF01E-407B-CE8F-80F4-CFC728E6CA10}"/>
+                  </a:ext>
+                </a:extLst>
+              </p:cNvPr>
+              <p:cNvSpPr txBox="1"/>
+              <p:nvPr/>
+            </p:nvSpPr>
+            <p:spPr>
+              <a:xfrm>
+                <a:off x="5803392" y="1268922"/>
+                <a:ext cx="6141720" cy="1869614"/>
+              </a:xfrm>
+              <a:prstGeom prst="rect">
+                <a:avLst/>
+              </a:prstGeom>
+              <a:noFill/>
+            </p:spPr>
+            <p:txBody>
+              <a:bodyPr wrap="square" rtlCol="0">
+                <a:spAutoFit/>
+              </a:bodyPr>
+              <a:lstStyle/>
+              <a:p>
+                <a:r>
+                  <a:rPr lang="fr-CA" dirty="0">
+                    <a:solidFill>
+                      <a:srgbClr val="5B9BD5"/>
+                    </a:solidFill>
+                  </a:rPr>
+                  <a:t>Condition de robin, convection-radiation :</a:t>
+                </a:r>
+              </a:p>
+              <a:p>
+                <a:pPr algn="ctr">
+                  <a:spcBef>
+                    <a:spcPts val="1800"/>
+                  </a:spcBef>
+                </a:pPr>
+                <a:r>
+                  <a:rPr lang="fr-CA" dirty="0">
+                    <a:solidFill>
+                      <a:srgbClr val="5B9BD5"/>
+                    </a:solidFill>
+                  </a:rPr>
+                  <a:t>	</a:t>
+                </a:r>
+                <a14:m>
+                  <m:oMath xmlns:m="http://schemas.openxmlformats.org/officeDocument/2006/math">
+                    <m:r>
+                      <a:rPr lang="fr-FR" i="1" smtClean="0">
+                        <a:solidFill>
+                          <a:srgbClr val="5B9BD5"/>
+                        </a:solidFill>
+                        <a:latin typeface="Cambria Math" panose="02040503050406030204" pitchFamily="18" charset="0"/>
+                      </a:rPr>
+                      <m:t>−</m:t>
+                    </m:r>
+                    <m:r>
+                      <a:rPr lang="fr-FR" i="1" smtClean="0">
+                        <a:solidFill>
+                          <a:srgbClr val="5B9BD5"/>
+                        </a:solidFill>
+                        <a:latin typeface="Cambria Math" panose="02040503050406030204" pitchFamily="18" charset="0"/>
+                      </a:rPr>
+                      <m:t>𝑘</m:t>
+                    </m:r>
+                    <m:r>
+                      <m:rPr>
+                        <m:sty m:val="p"/>
+                      </m:rPr>
+                      <a:rPr lang="fr-FR" i="1" smtClean="0">
+                        <a:solidFill>
+                          <a:srgbClr val="5B9BD5"/>
+                        </a:solidFill>
+                        <a:latin typeface="Cambria Math" panose="02040503050406030204" pitchFamily="18" charset="0"/>
+                      </a:rPr>
+                      <m:t>∇</m:t>
+                    </m:r>
+                    <m:r>
+                      <a:rPr lang="fr-FR" i="1" smtClean="0">
+                        <a:solidFill>
+                          <a:srgbClr val="5B9BD5"/>
+                        </a:solidFill>
+                        <a:latin typeface="Cambria Math" panose="02040503050406030204" pitchFamily="18" charset="0"/>
+                      </a:rPr>
+                      <m:t>𝑇</m:t>
+                    </m:r>
+                    <m:r>
+                      <a:rPr lang="fr-FR" i="1" smtClean="0">
+                        <a:solidFill>
+                          <a:srgbClr val="5B9BD5"/>
+                        </a:solidFill>
+                        <a:latin typeface="Cambria Math" panose="02040503050406030204" pitchFamily="18" charset="0"/>
+                      </a:rPr>
+                      <m:t>.</m:t>
+                    </m:r>
+                    <m:acc>
+                      <m:accPr>
+                        <m:chr m:val="⃗"/>
+                        <m:ctrlPr>
+                          <a:rPr lang="fr-FR" i="1" smtClean="0">
+                            <a:solidFill>
+                              <a:srgbClr val="5B9BD5"/>
+                            </a:solidFill>
+                            <a:latin typeface="Cambria Math" panose="02040503050406030204" pitchFamily="18" charset="0"/>
+                          </a:rPr>
+                        </m:ctrlPr>
+                      </m:accPr>
+                      <m:e>
+                        <m:r>
+                          <a:rPr lang="fr-CA" b="0" i="1" smtClean="0">
+                            <a:solidFill>
+                              <a:srgbClr val="5B9BD5"/>
+                            </a:solidFill>
+                            <a:latin typeface="Cambria Math" panose="02040503050406030204" pitchFamily="18" charset="0"/>
+                          </a:rPr>
+                          <m:t>𝑛</m:t>
+                        </m:r>
+                      </m:e>
+                    </m:acc>
+                    <m:r>
+                      <a:rPr lang="fr-FR" i="1" smtClean="0">
+                        <a:solidFill>
+                          <a:srgbClr val="5B9BD5"/>
+                        </a:solidFill>
+                        <a:latin typeface="Cambria Math" panose="02040503050406030204" pitchFamily="18" charset="0"/>
+                      </a:rPr>
+                      <m:t>=</m:t>
+                    </m:r>
+                    <m:r>
+                      <a:rPr lang="fr-FR" i="1" smtClean="0">
+                        <a:solidFill>
+                          <a:srgbClr val="5B9BD5"/>
+                        </a:solidFill>
+                        <a:latin typeface="Cambria Math" panose="02040503050406030204" pitchFamily="18" charset="0"/>
+                      </a:rPr>
+                      <m:t>h</m:t>
+                    </m:r>
+                    <m:d>
+                      <m:dPr>
+                        <m:ctrlPr>
+                          <a:rPr lang="fr-FR" i="1">
+                            <a:solidFill>
+                              <a:srgbClr val="5B9BD5"/>
+                            </a:solidFill>
+                            <a:latin typeface="Cambria Math" panose="02040503050406030204" pitchFamily="18" charset="0"/>
+                          </a:rPr>
+                        </m:ctrlPr>
+                      </m:dPr>
+                      <m:e>
+                        <m:r>
+                          <a:rPr lang="fr-FR" i="1">
+                            <a:solidFill>
+                              <a:srgbClr val="5B9BD5"/>
+                            </a:solidFill>
+                            <a:latin typeface="Cambria Math" panose="02040503050406030204" pitchFamily="18" charset="0"/>
+                          </a:rPr>
+                          <m:t>𝑇</m:t>
+                        </m:r>
+                        <m:r>
+                          <a:rPr lang="fr-FR" i="1">
+                            <a:solidFill>
+                              <a:srgbClr val="5B9BD5"/>
+                            </a:solidFill>
+                            <a:latin typeface="Cambria Math" panose="02040503050406030204" pitchFamily="18" charset="0"/>
+                          </a:rPr>
+                          <m:t>−</m:t>
+                        </m:r>
+                        <m:sSub>
+                          <m:sSubPr>
+                            <m:ctrlPr>
+                              <a:rPr lang="fr-FR" i="1">
+                                <a:solidFill>
+                                  <a:srgbClr val="5B9BD5"/>
+                                </a:solidFill>
+                                <a:latin typeface="Cambria Math" panose="02040503050406030204" pitchFamily="18" charset="0"/>
+                              </a:rPr>
+                            </m:ctrlPr>
+                          </m:sSubPr>
+                          <m:e>
+                            <m:r>
+                              <a:rPr lang="fr-FR" i="1">
+                                <a:solidFill>
+                                  <a:srgbClr val="5B9BD5"/>
+                                </a:solidFill>
+                                <a:latin typeface="Cambria Math" panose="02040503050406030204" pitchFamily="18" charset="0"/>
+                              </a:rPr>
+                              <m:t>𝑇</m:t>
+                            </m:r>
+                          </m:e>
+                          <m:sub>
+                            <m:r>
+                              <a:rPr lang="fr-FR" i="1">
+                                <a:solidFill>
+                                  <a:srgbClr val="5B9BD5"/>
+                                </a:solidFill>
+                                <a:latin typeface="Cambria Math" panose="02040503050406030204" pitchFamily="18" charset="0"/>
+                              </a:rPr>
+                              <m:t>∞</m:t>
+                            </m:r>
+                            <m:r>
+                              <m:rPr>
+                                <m:nor/>
+                              </m:rPr>
+                              <a:rPr lang="fr-FR" dirty="0">
+                                <a:solidFill>
+                                  <a:srgbClr val="5B9BD5"/>
+                                </a:solidFill>
+                              </a:rPr>
+                              <m:t> </m:t>
+                            </m:r>
+                          </m:sub>
+                        </m:sSub>
+                      </m:e>
+                    </m:d>
+                    <m:r>
+                      <a:rPr lang="fr-FR" i="1">
+                        <a:solidFill>
+                          <a:srgbClr val="5B9BD5"/>
+                        </a:solidFill>
+                        <a:latin typeface="Cambria Math" panose="02040503050406030204" pitchFamily="18" charset="0"/>
+                      </a:rPr>
+                      <m:t>+</m:t>
+                    </m:r>
+                    <m:r>
+                      <m:rPr>
+                        <m:sty m:val="p"/>
+                      </m:rPr>
+                      <a:rPr lang="fr-FR" i="1">
+                        <a:solidFill>
+                          <a:srgbClr val="5B9BD5"/>
+                        </a:solidFill>
+                        <a:latin typeface="Cambria Math" panose="02040503050406030204" pitchFamily="18" charset="0"/>
+                      </a:rPr>
+                      <m:t>ϵσ</m:t>
+                    </m:r>
+                    <m:r>
+                      <a:rPr lang="fr-FR" i="1">
+                        <a:solidFill>
+                          <a:srgbClr val="5B9BD5"/>
+                        </a:solidFill>
+                        <a:latin typeface="Cambria Math" panose="02040503050406030204" pitchFamily="18" charset="0"/>
+                      </a:rPr>
+                      <m:t>(</m:t>
+                    </m:r>
+                    <m:sSup>
+                      <m:sSupPr>
+                        <m:ctrlPr>
+                          <a:rPr lang="fr-FR" i="1">
+                            <a:solidFill>
+                              <a:srgbClr val="5B9BD5"/>
+                            </a:solidFill>
+                            <a:latin typeface="Cambria Math" panose="02040503050406030204" pitchFamily="18" charset="0"/>
+                          </a:rPr>
+                        </m:ctrlPr>
+                      </m:sSupPr>
+                      <m:e>
+                        <m:r>
+                          <a:rPr lang="fr-FR" i="1">
+                            <a:solidFill>
+                              <a:srgbClr val="5B9BD5"/>
+                            </a:solidFill>
+                            <a:latin typeface="Cambria Math" panose="02040503050406030204" pitchFamily="18" charset="0"/>
+                          </a:rPr>
+                          <m:t>𝑇</m:t>
+                        </m:r>
+                      </m:e>
+                      <m:sup>
+                        <m:r>
+                          <a:rPr lang="fr-FR" i="1">
+                            <a:solidFill>
+                              <a:srgbClr val="5B9BD5"/>
+                            </a:solidFill>
+                            <a:latin typeface="Cambria Math" panose="02040503050406030204" pitchFamily="18" charset="0"/>
+                          </a:rPr>
+                          <m:t>4</m:t>
+                        </m:r>
+                      </m:sup>
+                    </m:sSup>
+                    <m:r>
+                      <a:rPr lang="fr-FR" i="1">
+                        <a:solidFill>
+                          <a:srgbClr val="5B9BD5"/>
+                        </a:solidFill>
+                        <a:latin typeface="Cambria Math" panose="02040503050406030204" pitchFamily="18" charset="0"/>
+                      </a:rPr>
+                      <m:t>−</m:t>
+                    </m:r>
+                    <m:sSubSup>
+                      <m:sSubSupPr>
+                        <m:ctrlPr>
+                          <a:rPr lang="fr-FR" i="1">
+                            <a:solidFill>
+                              <a:srgbClr val="5B9BD5"/>
+                            </a:solidFill>
+                            <a:latin typeface="Cambria Math" panose="02040503050406030204" pitchFamily="18" charset="0"/>
+                          </a:rPr>
+                        </m:ctrlPr>
+                      </m:sSubSupPr>
+                      <m:e>
+                        <m:r>
+                          <a:rPr lang="fr-FR" i="1">
+                            <a:solidFill>
+                              <a:srgbClr val="5B9BD5"/>
+                            </a:solidFill>
+                            <a:latin typeface="Cambria Math" panose="02040503050406030204" pitchFamily="18" charset="0"/>
+                          </a:rPr>
+                          <m:t>𝑇</m:t>
+                        </m:r>
+                      </m:e>
+                      <m:sub>
+                        <m:r>
+                          <a:rPr lang="fr-FR" i="1">
+                            <a:solidFill>
+                              <a:srgbClr val="5B9BD5"/>
+                            </a:solidFill>
+                            <a:latin typeface="Cambria Math" panose="02040503050406030204" pitchFamily="18" charset="0"/>
+                          </a:rPr>
+                          <m:t>∞</m:t>
+                        </m:r>
+                      </m:sub>
+                      <m:sup>
+                        <m:r>
+                          <a:rPr lang="fr-FR" i="1">
+                            <a:solidFill>
+                              <a:srgbClr val="5B9BD5"/>
+                            </a:solidFill>
+                            <a:latin typeface="Cambria Math" panose="02040503050406030204" pitchFamily="18" charset="0"/>
+                          </a:rPr>
+                          <m:t>4</m:t>
+                        </m:r>
+                      </m:sup>
+                    </m:sSubSup>
+                    <m:r>
+                      <a:rPr lang="fr-FR" i="1">
+                        <a:solidFill>
+                          <a:srgbClr val="5B9BD5"/>
+                        </a:solidFill>
+                        <a:latin typeface="Cambria Math" panose="02040503050406030204" pitchFamily="18" charset="0"/>
+                      </a:rPr>
+                      <m:t>)</m:t>
+                    </m:r>
+                  </m:oMath>
+                </a14:m>
+                <a:endParaRPr lang="fr-FR" dirty="0">
+                  <a:solidFill>
+                    <a:srgbClr val="5B9BD5"/>
+                  </a:solidFill>
+                </a:endParaRPr>
+              </a:p>
+              <a:p>
+                <a:pPr algn="ctr"/>
+                <a14:m>
+                  <m:oMath xmlns:m="http://schemas.openxmlformats.org/officeDocument/2006/math">
+                    <m:sSubSup>
+                      <m:sSubSupPr>
+                        <m:ctrlPr>
+                          <a:rPr lang="fr-CA" b="0" i="1" smtClean="0">
+                            <a:solidFill>
+                              <a:srgbClr val="5B9BD5"/>
+                            </a:solidFill>
+                            <a:latin typeface="Cambria Math" panose="02040503050406030204" pitchFamily="18" charset="0"/>
+                          </a:rPr>
+                        </m:ctrlPr>
+                      </m:sSubSupPr>
+                      <m:e>
+                        <m:r>
+                          <a:rPr lang="fr-CA" b="0" i="1" smtClean="0">
+                            <a:solidFill>
+                              <a:srgbClr val="5B9BD5"/>
+                            </a:solidFill>
+                            <a:latin typeface="Cambria Math" panose="02040503050406030204" pitchFamily="18" charset="0"/>
+                          </a:rPr>
+                          <m:t>𝑇</m:t>
+                        </m:r>
+                      </m:e>
+                      <m:sub>
+                        <m:r>
+                          <a:rPr lang="fr-CA" b="0" i="1" smtClean="0">
+                            <a:solidFill>
+                              <a:srgbClr val="5B9BD5"/>
+                            </a:solidFill>
+                            <a:latin typeface="Cambria Math" panose="02040503050406030204" pitchFamily="18" charset="0"/>
+                          </a:rPr>
+                          <m:t>𝑟</m:t>
+                        </m:r>
+                        <m:r>
+                          <a:rPr lang="fr-CA" b="0" i="1" smtClean="0">
+                            <a:solidFill>
+                              <a:srgbClr val="5B9BD5"/>
+                            </a:solidFill>
+                            <a:latin typeface="Cambria Math" panose="02040503050406030204" pitchFamily="18" charset="0"/>
+                          </a:rPr>
+                          <m:t>,</m:t>
+                        </m:r>
+                        <m:r>
+                          <a:rPr lang="fr-CA" b="0" i="1" smtClean="0">
+                            <a:solidFill>
+                              <a:srgbClr val="5B9BD5"/>
+                            </a:solidFill>
+                            <a:latin typeface="Cambria Math" panose="02040503050406030204" pitchFamily="18" charset="0"/>
+                          </a:rPr>
+                          <m:t>𝑧</m:t>
+                        </m:r>
+                      </m:sub>
+                      <m:sup>
+                        <m:r>
+                          <a:rPr lang="fr-CA" b="0" i="1" smtClean="0">
+                            <a:solidFill>
+                              <a:srgbClr val="5B9BD5"/>
+                            </a:solidFill>
+                            <a:latin typeface="Cambria Math" panose="02040503050406030204" pitchFamily="18" charset="0"/>
+                          </a:rPr>
+                          <m:t>𝑡</m:t>
+                        </m:r>
+                        <m:r>
+                          <a:rPr lang="fr-CA" b="0" i="1" smtClean="0">
+                            <a:solidFill>
+                              <a:srgbClr val="5B9BD5"/>
+                            </a:solidFill>
+                            <a:latin typeface="Cambria Math" panose="02040503050406030204" pitchFamily="18" charset="0"/>
+                          </a:rPr>
+                          <m:t>+∆</m:t>
+                        </m:r>
+                        <m:r>
+                          <a:rPr lang="fr-CA" b="0" i="1" smtClean="0">
+                            <a:solidFill>
+                              <a:srgbClr val="5B9BD5"/>
+                            </a:solidFill>
+                            <a:latin typeface="Cambria Math" panose="02040503050406030204" pitchFamily="18" charset="0"/>
+                            <a:ea typeface="Cambria Math" panose="02040503050406030204" pitchFamily="18" charset="0"/>
+                          </a:rPr>
+                          <m:t>𝑡</m:t>
+                        </m:r>
+                      </m:sup>
+                    </m:sSubSup>
+                    <m:r>
+                      <a:rPr lang="fr-CA" b="0" i="0" smtClean="0">
+                        <a:solidFill>
+                          <a:srgbClr val="5B9BD5"/>
+                        </a:solidFill>
+                        <a:latin typeface="Cambria Math" panose="02040503050406030204" pitchFamily="18" charset="0"/>
+                      </a:rPr>
+                      <m:t>=</m:t>
+                    </m:r>
+                    <m:r>
+                      <a:rPr lang="fr-CA" b="0" i="0" smtClean="0">
+                        <a:solidFill>
+                          <a:srgbClr val="5B9BD5"/>
+                        </a:solidFill>
+                        <a:latin typeface="Cambria Math" panose="02040503050406030204" pitchFamily="18" charset="0"/>
+                      </a:rPr>
+                      <m:t>[</m:t>
+                    </m:r>
+                    <m:d>
+                      <m:dPr>
+                        <m:ctrlPr>
+                          <a:rPr lang="fr-CA" b="0" i="0" smtClean="0">
+                            <a:solidFill>
+                              <a:srgbClr val="5B9BD5"/>
+                            </a:solidFill>
+                            <a:latin typeface="Cambria Math" panose="02040503050406030204" pitchFamily="18" charset="0"/>
+                          </a:rPr>
+                        </m:ctrlPr>
+                      </m:dPr>
+                      <m:e>
+                        <m:f>
+                          <m:fPr>
+                            <m:ctrlPr>
+                              <a:rPr lang="fr-CA" b="0" i="0" smtClean="0">
+                                <a:solidFill>
+                                  <a:srgbClr val="5B9BD5"/>
+                                </a:solidFill>
+                                <a:latin typeface="Cambria Math" panose="02040503050406030204" pitchFamily="18" charset="0"/>
+                              </a:rPr>
+                            </m:ctrlPr>
+                          </m:fPr>
+                          <m:num>
+                            <m:r>
+                              <a:rPr lang="fr-CA" b="0" i="0" smtClean="0">
+                                <a:solidFill>
+                                  <a:srgbClr val="5B9BD5"/>
+                                </a:solidFill>
+                                <a:latin typeface="Cambria Math" panose="02040503050406030204" pitchFamily="18" charset="0"/>
+                              </a:rPr>
+                              <m:t>−2</m:t>
+                            </m:r>
+                            <m:r>
+                              <a:rPr lang="fr-CA" b="0" i="1" smtClean="0">
+                                <a:solidFill>
+                                  <a:srgbClr val="5B9BD5"/>
+                                </a:solidFill>
+                                <a:latin typeface="Cambria Math" panose="02040503050406030204" pitchFamily="18" charset="0"/>
+                              </a:rPr>
+                              <m:t>∆</m:t>
+                            </m:r>
+                            <m:r>
+                              <m:rPr>
+                                <m:sty m:val="p"/>
+                              </m:rPr>
+                              <a:rPr lang="fr-CA" b="0" i="0" smtClean="0">
+                                <a:solidFill>
+                                  <a:srgbClr val="5B9BD5"/>
+                                </a:solidFill>
+                                <a:latin typeface="Cambria Math" panose="02040503050406030204" pitchFamily="18" charset="0"/>
+                              </a:rPr>
+                              <m:t>z</m:t>
+                            </m:r>
+                          </m:num>
+                          <m:den>
+                            <m:r>
+                              <m:rPr>
+                                <m:sty m:val="p"/>
+                              </m:rPr>
+                              <a:rPr lang="fr-CA" b="0" i="0" smtClean="0">
+                                <a:solidFill>
+                                  <a:srgbClr val="5B9BD5"/>
+                                </a:solidFill>
+                                <a:latin typeface="Cambria Math" panose="02040503050406030204" pitchFamily="18" charset="0"/>
+                              </a:rPr>
+                              <m:t>k</m:t>
+                            </m:r>
+                          </m:den>
+                        </m:f>
+                      </m:e>
+                    </m:d>
+                    <m:r>
+                      <a:rPr lang="fr-CA" b="0" i="0" smtClean="0">
+                        <a:solidFill>
+                          <a:srgbClr val="5B9BD5"/>
+                        </a:solidFill>
+                        <a:latin typeface="Cambria Math" panose="02040503050406030204" pitchFamily="18" charset="0"/>
+                      </a:rPr>
+                      <m:t>∗(</m:t>
+                    </m:r>
+                    <m:r>
+                      <m:rPr>
+                        <m:sty m:val="p"/>
+                      </m:rPr>
+                      <a:rPr lang="fr-CA" b="0" i="0" smtClean="0">
+                        <a:solidFill>
+                          <a:srgbClr val="5B9BD5"/>
+                        </a:solidFill>
+                        <a:latin typeface="Cambria Math" panose="02040503050406030204" pitchFamily="18" charset="0"/>
+                      </a:rPr>
+                      <m:t>h</m:t>
+                    </m:r>
+                    <m:r>
+                      <a:rPr lang="fr-CA" b="0" i="0" smtClean="0">
+                        <a:solidFill>
+                          <a:srgbClr val="5B9BD5"/>
+                        </a:solidFill>
+                        <a:latin typeface="Cambria Math" panose="02040503050406030204" pitchFamily="18" charset="0"/>
+                      </a:rPr>
+                      <m:t>(</m:t>
+                    </m:r>
+                    <m:sSubSup>
+                      <m:sSubSupPr>
+                        <m:ctrlPr>
+                          <a:rPr lang="fr-CA" i="1">
+                            <a:solidFill>
+                              <a:srgbClr val="5B9BD5"/>
+                            </a:solidFill>
+                            <a:latin typeface="Cambria Math" panose="02040503050406030204" pitchFamily="18" charset="0"/>
+                          </a:rPr>
+                        </m:ctrlPr>
+                      </m:sSubSupPr>
+                      <m:e>
+                        <m:r>
+                          <a:rPr lang="fr-CA" i="1">
+                            <a:solidFill>
+                              <a:srgbClr val="5B9BD5"/>
+                            </a:solidFill>
+                            <a:latin typeface="Cambria Math" panose="02040503050406030204" pitchFamily="18" charset="0"/>
+                          </a:rPr>
+                          <m:t>𝑇</m:t>
+                        </m:r>
+                      </m:e>
+                      <m:sub>
+                        <m:r>
+                          <a:rPr lang="fr-CA" i="1">
+                            <a:solidFill>
+                              <a:srgbClr val="5B9BD5"/>
+                            </a:solidFill>
+                            <a:latin typeface="Cambria Math" panose="02040503050406030204" pitchFamily="18" charset="0"/>
+                          </a:rPr>
+                          <m:t>𝑟</m:t>
+                        </m:r>
+                        <m:r>
+                          <a:rPr lang="fr-CA" i="1">
+                            <a:solidFill>
+                              <a:srgbClr val="5B9BD5"/>
+                            </a:solidFill>
+                            <a:latin typeface="Cambria Math" panose="02040503050406030204" pitchFamily="18" charset="0"/>
+                          </a:rPr>
+                          <m:t>,</m:t>
+                        </m:r>
+                        <m:r>
+                          <a:rPr lang="fr-CA" i="1">
+                            <a:solidFill>
+                              <a:srgbClr val="5B9BD5"/>
+                            </a:solidFill>
+                            <a:latin typeface="Cambria Math" panose="02040503050406030204" pitchFamily="18" charset="0"/>
+                          </a:rPr>
+                          <m:t>𝑧</m:t>
+                        </m:r>
+                      </m:sub>
+                      <m:sup>
+                        <m:r>
+                          <a:rPr lang="fr-CA" b="0" i="1" smtClean="0">
+                            <a:solidFill>
+                              <a:srgbClr val="5B9BD5"/>
+                            </a:solidFill>
+                            <a:latin typeface="Cambria Math" panose="02040503050406030204" pitchFamily="18" charset="0"/>
+                          </a:rPr>
+                          <m:t>𝑡</m:t>
+                        </m:r>
+                      </m:sup>
+                    </m:sSubSup>
+                  </m:oMath>
+                </a14:m>
+                <a:r>
+                  <a:rPr lang="fr-CA" dirty="0">
+                    <a:solidFill>
+                      <a:srgbClr val="5B9BD5"/>
+                    </a:solidFill>
+                  </a:rPr>
+                  <a:t>-</a:t>
+                </a:r>
+                <a:r>
+                  <a:rPr lang="fr-FR" dirty="0">
+                    <a:solidFill>
+                      <a:srgbClr val="5B9BD5"/>
+                    </a:solidFill>
+                  </a:rPr>
+                  <a:t> </a:t>
+                </a:r>
+                <a14:m>
+                  <m:oMath xmlns:m="http://schemas.openxmlformats.org/officeDocument/2006/math">
+                    <m:sSub>
+                      <m:sSubPr>
+                        <m:ctrlPr>
+                          <a:rPr lang="fr-FR" i="1">
+                            <a:solidFill>
+                              <a:srgbClr val="5B9BD5"/>
+                            </a:solidFill>
+                            <a:latin typeface="Cambria Math" panose="02040503050406030204" pitchFamily="18" charset="0"/>
+                          </a:rPr>
+                        </m:ctrlPr>
+                      </m:sSubPr>
+                      <m:e>
+                        <m:r>
+                          <a:rPr lang="fr-FR" i="1">
+                            <a:solidFill>
+                              <a:srgbClr val="5B9BD5"/>
+                            </a:solidFill>
+                            <a:latin typeface="Cambria Math" panose="02040503050406030204" pitchFamily="18" charset="0"/>
+                          </a:rPr>
+                          <m:t>𝑇</m:t>
+                        </m:r>
+                      </m:e>
+                      <m:sub>
+                        <m:r>
+                          <a:rPr lang="fr-FR" i="1">
+                            <a:solidFill>
+                              <a:srgbClr val="5B9BD5"/>
+                            </a:solidFill>
+                            <a:latin typeface="Cambria Math" panose="02040503050406030204" pitchFamily="18" charset="0"/>
+                          </a:rPr>
+                          <m:t>∞</m:t>
+                        </m:r>
+                        <m:r>
+                          <m:rPr>
+                            <m:nor/>
+                          </m:rPr>
+                          <a:rPr lang="fr-FR" dirty="0">
+                            <a:solidFill>
+                              <a:srgbClr val="5B9BD5"/>
+                            </a:solidFill>
+                          </a:rPr>
+                          <m:t> </m:t>
+                        </m:r>
+                      </m:sub>
+                    </m:sSub>
+                    <m:r>
+                      <a:rPr lang="fr-CA" b="0" i="1" dirty="0" smtClean="0">
+                        <a:solidFill>
+                          <a:srgbClr val="5B9BD5"/>
+                        </a:solidFill>
+                        <a:latin typeface="Cambria Math" panose="02040503050406030204" pitchFamily="18" charset="0"/>
+                      </a:rPr>
+                      <m:t>)</m:t>
+                    </m:r>
+                  </m:oMath>
+                </a14:m>
+                <a:r>
+                  <a:rPr lang="fr-CA" dirty="0">
+                    <a:solidFill>
+                      <a:srgbClr val="5B9BD5"/>
+                    </a:solidFill>
+                  </a:rPr>
+                  <a:t> + </a:t>
+                </a:r>
+                <a14:m>
+                  <m:oMath xmlns:m="http://schemas.openxmlformats.org/officeDocument/2006/math">
+                    <m:r>
+                      <m:rPr>
+                        <m:sty m:val="p"/>
+                      </m:rPr>
+                      <a:rPr lang="fr-FR" i="1">
+                        <a:solidFill>
+                          <a:srgbClr val="5B9BD5"/>
+                        </a:solidFill>
+                        <a:latin typeface="Cambria Math" panose="02040503050406030204" pitchFamily="18" charset="0"/>
+                      </a:rPr>
+                      <m:t>ϵσ</m:t>
+                    </m:r>
+                    <m:r>
+                      <a:rPr lang="fr-FR" i="1">
+                        <a:solidFill>
+                          <a:srgbClr val="5B9BD5"/>
+                        </a:solidFill>
+                        <a:latin typeface="Cambria Math" panose="02040503050406030204" pitchFamily="18" charset="0"/>
+                      </a:rPr>
+                      <m:t>(</m:t>
+                    </m:r>
+                    <m:sSup>
+                      <m:sSupPr>
+                        <m:ctrlPr>
+                          <a:rPr lang="fr-FR" i="1">
+                            <a:solidFill>
+                              <a:srgbClr val="5B9BD5"/>
+                            </a:solidFill>
+                            <a:latin typeface="Cambria Math" panose="02040503050406030204" pitchFamily="18" charset="0"/>
+                          </a:rPr>
+                        </m:ctrlPr>
+                      </m:sSupPr>
+                      <m:e>
+                        <m:sSubSup>
+                          <m:sSubSupPr>
+                            <m:ctrlPr>
+                              <a:rPr lang="fr-CA" i="1">
+                                <a:solidFill>
+                                  <a:srgbClr val="5B9BD5"/>
+                                </a:solidFill>
+                                <a:latin typeface="Cambria Math" panose="02040503050406030204" pitchFamily="18" charset="0"/>
+                              </a:rPr>
+                            </m:ctrlPr>
+                          </m:sSubSupPr>
+                          <m:e>
+                            <m:r>
+                              <a:rPr lang="fr-CA" i="1">
+                                <a:solidFill>
+                                  <a:srgbClr val="5B9BD5"/>
+                                </a:solidFill>
+                                <a:latin typeface="Cambria Math" panose="02040503050406030204" pitchFamily="18" charset="0"/>
+                              </a:rPr>
+                              <m:t>𝑇</m:t>
+                            </m:r>
+                          </m:e>
+                          <m:sub>
+                            <m:r>
+                              <a:rPr lang="fr-CA" i="1">
+                                <a:solidFill>
+                                  <a:srgbClr val="5B9BD5"/>
+                                </a:solidFill>
+                                <a:latin typeface="Cambria Math" panose="02040503050406030204" pitchFamily="18" charset="0"/>
+                              </a:rPr>
+                              <m:t>𝑟</m:t>
+                            </m:r>
+                            <m:r>
+                              <a:rPr lang="fr-CA" i="1">
+                                <a:solidFill>
+                                  <a:srgbClr val="5B9BD5"/>
+                                </a:solidFill>
+                                <a:latin typeface="Cambria Math" panose="02040503050406030204" pitchFamily="18" charset="0"/>
+                              </a:rPr>
+                              <m:t>,</m:t>
+                            </m:r>
+                            <m:r>
+                              <a:rPr lang="fr-CA" i="1">
+                                <a:solidFill>
+                                  <a:srgbClr val="5B9BD5"/>
+                                </a:solidFill>
+                                <a:latin typeface="Cambria Math" panose="02040503050406030204" pitchFamily="18" charset="0"/>
+                              </a:rPr>
+                              <m:t>𝑧</m:t>
+                            </m:r>
+                          </m:sub>
+                          <m:sup>
+                            <m:r>
+                              <a:rPr lang="fr-CA" i="1">
+                                <a:solidFill>
+                                  <a:srgbClr val="5B9BD5"/>
+                                </a:solidFill>
+                                <a:latin typeface="Cambria Math" panose="02040503050406030204" pitchFamily="18" charset="0"/>
+                              </a:rPr>
+                              <m:t>𝑡</m:t>
+                            </m:r>
+                          </m:sup>
+                        </m:sSubSup>
+                      </m:e>
+                      <m:sup>
+                        <m:r>
+                          <a:rPr lang="fr-FR" i="1">
+                            <a:solidFill>
+                              <a:srgbClr val="5B9BD5"/>
+                            </a:solidFill>
+                            <a:latin typeface="Cambria Math" panose="02040503050406030204" pitchFamily="18" charset="0"/>
+                          </a:rPr>
+                          <m:t>4</m:t>
+                        </m:r>
+                      </m:sup>
+                    </m:sSup>
+                    <m:r>
+                      <a:rPr lang="fr-FR" i="1">
+                        <a:solidFill>
+                          <a:srgbClr val="5B9BD5"/>
+                        </a:solidFill>
+                        <a:latin typeface="Cambria Math" panose="02040503050406030204" pitchFamily="18" charset="0"/>
+                      </a:rPr>
+                      <m:t>−</m:t>
+                    </m:r>
+                    <m:sSubSup>
+                      <m:sSubSupPr>
+                        <m:ctrlPr>
+                          <a:rPr lang="fr-FR" i="1">
+                            <a:solidFill>
+                              <a:srgbClr val="5B9BD5"/>
+                            </a:solidFill>
+                            <a:latin typeface="Cambria Math" panose="02040503050406030204" pitchFamily="18" charset="0"/>
+                          </a:rPr>
+                        </m:ctrlPr>
+                      </m:sSubSupPr>
+                      <m:e>
+                        <m:r>
+                          <a:rPr lang="fr-FR" i="1">
+                            <a:solidFill>
+                              <a:srgbClr val="5B9BD5"/>
+                            </a:solidFill>
+                            <a:latin typeface="Cambria Math" panose="02040503050406030204" pitchFamily="18" charset="0"/>
+                          </a:rPr>
+                          <m:t>𝑇</m:t>
+                        </m:r>
+                      </m:e>
+                      <m:sub>
+                        <m:r>
+                          <a:rPr lang="fr-FR" i="1">
+                            <a:solidFill>
+                              <a:srgbClr val="5B9BD5"/>
+                            </a:solidFill>
+                            <a:latin typeface="Cambria Math" panose="02040503050406030204" pitchFamily="18" charset="0"/>
+                          </a:rPr>
+                          <m:t>∞</m:t>
+                        </m:r>
+                      </m:sub>
+                      <m:sup>
+                        <m:r>
+                          <a:rPr lang="fr-FR" i="1">
+                            <a:solidFill>
+                              <a:srgbClr val="5B9BD5"/>
+                            </a:solidFill>
+                            <a:latin typeface="Cambria Math" panose="02040503050406030204" pitchFamily="18" charset="0"/>
+                          </a:rPr>
+                          <m:t>4</m:t>
+                        </m:r>
+                      </m:sup>
+                    </m:sSubSup>
+                    <m:r>
+                      <a:rPr lang="fr-FR" i="1">
+                        <a:solidFill>
+                          <a:srgbClr val="5B9BD5"/>
+                        </a:solidFill>
+                        <a:latin typeface="Cambria Math" panose="02040503050406030204" pitchFamily="18" charset="0"/>
+                      </a:rPr>
+                      <m:t>)</m:t>
+                    </m:r>
+                    <m:r>
+                      <a:rPr lang="fr-CA" b="0" i="1" smtClean="0">
+                        <a:solidFill>
+                          <a:srgbClr val="5B9BD5"/>
+                        </a:solidFill>
+                        <a:latin typeface="Cambria Math" panose="02040503050406030204" pitchFamily="18" charset="0"/>
+                      </a:rPr>
+                      <m:t>) −</m:t>
+                    </m:r>
+                    <m:sSubSup>
+                      <m:sSubSupPr>
+                        <m:ctrlPr>
+                          <a:rPr lang="fr-CA" i="1">
+                            <a:solidFill>
+                              <a:srgbClr val="5B9BD5"/>
+                            </a:solidFill>
+                            <a:latin typeface="Cambria Math" panose="02040503050406030204" pitchFamily="18" charset="0"/>
+                          </a:rPr>
+                        </m:ctrlPr>
+                      </m:sSubSupPr>
+                      <m:e>
+                        <m:r>
+                          <a:rPr lang="fr-CA" i="1">
+                            <a:solidFill>
+                              <a:srgbClr val="5B9BD5"/>
+                            </a:solidFill>
+                            <a:latin typeface="Cambria Math" panose="02040503050406030204" pitchFamily="18" charset="0"/>
+                          </a:rPr>
+                          <m:t>𝑇</m:t>
+                        </m:r>
+                      </m:e>
+                      <m:sub>
+                        <m:r>
+                          <a:rPr lang="fr-CA" i="1">
+                            <a:solidFill>
+                              <a:srgbClr val="5B9BD5"/>
+                            </a:solidFill>
+                            <a:latin typeface="Cambria Math" panose="02040503050406030204" pitchFamily="18" charset="0"/>
+                          </a:rPr>
+                          <m:t>𝑟</m:t>
+                        </m:r>
+                        <m:r>
+                          <a:rPr lang="fr-CA" i="1">
+                            <a:solidFill>
+                              <a:srgbClr val="5B9BD5"/>
+                            </a:solidFill>
+                            <a:latin typeface="Cambria Math" panose="02040503050406030204" pitchFamily="18" charset="0"/>
+                          </a:rPr>
+                          <m:t>,</m:t>
+                        </m:r>
+                        <m:r>
+                          <a:rPr lang="fr-CA" i="1">
+                            <a:solidFill>
+                              <a:srgbClr val="5B9BD5"/>
+                            </a:solidFill>
+                            <a:latin typeface="Cambria Math" panose="02040503050406030204" pitchFamily="18" charset="0"/>
+                          </a:rPr>
+                          <m:t>𝑧</m:t>
+                        </m:r>
+                        <m:r>
+                          <a:rPr lang="fr-CA" b="0" i="1" smtClean="0">
+                            <a:solidFill>
+                              <a:srgbClr val="5B9BD5"/>
+                            </a:solidFill>
+                            <a:latin typeface="Cambria Math" panose="02040503050406030204" pitchFamily="18" charset="0"/>
+                          </a:rPr>
+                          <m:t>−2</m:t>
+                        </m:r>
+                      </m:sub>
+                      <m:sup>
+                        <m:r>
+                          <a:rPr lang="fr-CA" i="1">
+                            <a:solidFill>
+                              <a:srgbClr val="5B9BD5"/>
+                            </a:solidFill>
+                            <a:latin typeface="Cambria Math" panose="02040503050406030204" pitchFamily="18" charset="0"/>
+                          </a:rPr>
+                          <m:t>𝑡</m:t>
+                        </m:r>
+                      </m:sup>
+                    </m:sSubSup>
+                    <m:r>
+                      <a:rPr lang="fr-CA" b="0" i="1" smtClean="0">
+                        <a:solidFill>
+                          <a:srgbClr val="5B9BD5"/>
+                        </a:solidFill>
+                        <a:latin typeface="Cambria Math" panose="02040503050406030204" pitchFamily="18" charset="0"/>
+                        <a:ea typeface="Cambria Math" panose="02040503050406030204" pitchFamily="18" charset="0"/>
+                      </a:rPr>
+                      <m:t>+4</m:t>
+                    </m:r>
+                    <m:sSubSup>
+                      <m:sSubSupPr>
+                        <m:ctrlPr>
+                          <a:rPr lang="fr-CA" i="1">
+                            <a:solidFill>
+                              <a:srgbClr val="5B9BD5"/>
+                            </a:solidFill>
+                            <a:latin typeface="Cambria Math" panose="02040503050406030204" pitchFamily="18" charset="0"/>
+                          </a:rPr>
+                        </m:ctrlPr>
+                      </m:sSubSupPr>
+                      <m:e>
+                        <m:r>
+                          <a:rPr lang="fr-CA" i="1">
+                            <a:solidFill>
+                              <a:srgbClr val="5B9BD5"/>
+                            </a:solidFill>
+                            <a:latin typeface="Cambria Math" panose="02040503050406030204" pitchFamily="18" charset="0"/>
+                          </a:rPr>
+                          <m:t>𝑇</m:t>
+                        </m:r>
+                      </m:e>
+                      <m:sub>
+                        <m:r>
+                          <a:rPr lang="fr-CA" i="1">
+                            <a:solidFill>
+                              <a:srgbClr val="5B9BD5"/>
+                            </a:solidFill>
+                            <a:latin typeface="Cambria Math" panose="02040503050406030204" pitchFamily="18" charset="0"/>
+                          </a:rPr>
+                          <m:t>𝑟</m:t>
+                        </m:r>
+                        <m:r>
+                          <a:rPr lang="fr-CA" i="1">
+                            <a:solidFill>
+                              <a:srgbClr val="5B9BD5"/>
+                            </a:solidFill>
+                            <a:latin typeface="Cambria Math" panose="02040503050406030204" pitchFamily="18" charset="0"/>
+                          </a:rPr>
+                          <m:t>,</m:t>
+                        </m:r>
+                        <m:r>
+                          <a:rPr lang="fr-CA" i="1">
+                            <a:solidFill>
+                              <a:srgbClr val="5B9BD5"/>
+                            </a:solidFill>
+                            <a:latin typeface="Cambria Math" panose="02040503050406030204" pitchFamily="18" charset="0"/>
+                          </a:rPr>
+                          <m:t>𝑧</m:t>
+                        </m:r>
+                        <m:r>
+                          <a:rPr lang="fr-CA" b="0" i="1" smtClean="0">
+                            <a:solidFill>
+                              <a:srgbClr val="5B9BD5"/>
+                            </a:solidFill>
+                            <a:latin typeface="Cambria Math" panose="02040503050406030204" pitchFamily="18" charset="0"/>
+                          </a:rPr>
+                          <m:t>−1</m:t>
+                        </m:r>
+                      </m:sub>
+                      <m:sup>
+                        <m:r>
+                          <a:rPr lang="fr-CA" i="1">
+                            <a:solidFill>
+                              <a:srgbClr val="5B9BD5"/>
+                            </a:solidFill>
+                            <a:latin typeface="Cambria Math" panose="02040503050406030204" pitchFamily="18" charset="0"/>
+                          </a:rPr>
+                          <m:t>𝑡</m:t>
+                        </m:r>
+                      </m:sup>
+                    </m:sSubSup>
+                    <m:r>
+                      <a:rPr lang="fr-CA" b="0" i="1" smtClean="0">
+                        <a:solidFill>
+                          <a:srgbClr val="5B9BD5"/>
+                        </a:solidFill>
+                        <a:latin typeface="Cambria Math" panose="02040503050406030204" pitchFamily="18" charset="0"/>
+                        <a:ea typeface="Cambria Math" panose="02040503050406030204" pitchFamily="18" charset="0"/>
+                      </a:rPr>
+                      <m:t>)]÷3</m:t>
+                    </m:r>
+                  </m:oMath>
+                </a14:m>
+                <a:r>
+                  <a:rPr lang="fr-CA" dirty="0">
+                    <a:solidFill>
+                      <a:srgbClr val="5B9BD5"/>
+                    </a:solidFill>
+                  </a:rPr>
+                  <a:t> </a:t>
+                </a:r>
+              </a:p>
+              <a:p>
+                <a:pPr algn="ctr"/>
+                <a14:m>
+                  <m:oMathPara xmlns:m="http://schemas.openxmlformats.org/officeDocument/2006/math">
+                    <m:oMathParaPr>
+                      <m:jc m:val="centerGroup"/>
+                    </m:oMathParaPr>
+                    <m:oMath xmlns:m="http://schemas.openxmlformats.org/officeDocument/2006/math">
+                      <m:acc>
+                        <m:accPr>
+                          <m:chr m:val="⃗"/>
+                          <m:ctrlPr>
+                            <a:rPr lang="fr-FR" i="1">
+                              <a:solidFill>
+                                <a:srgbClr val="5B9BD5"/>
+                              </a:solidFill>
+                              <a:latin typeface="Cambria Math" panose="02040503050406030204" pitchFamily="18" charset="0"/>
+                            </a:rPr>
+                          </m:ctrlPr>
+                        </m:accPr>
+                        <m:e>
+                          <m:r>
+                            <a:rPr lang="fr-CA" i="1">
+                              <a:solidFill>
+                                <a:srgbClr val="5B9BD5"/>
+                              </a:solidFill>
+                              <a:latin typeface="Cambria Math" panose="02040503050406030204" pitchFamily="18" charset="0"/>
+                            </a:rPr>
+                            <m:t>𝑛</m:t>
+                          </m:r>
+                        </m:e>
+                      </m:acc>
+                      <m:r>
+                        <a:rPr lang="fr-CA" b="0" i="1" smtClean="0">
+                          <a:solidFill>
+                            <a:srgbClr val="5B9BD5"/>
+                          </a:solidFill>
+                          <a:latin typeface="Cambria Math" panose="02040503050406030204" pitchFamily="18" charset="0"/>
+                        </a:rPr>
+                        <m:t>=(0,1)</m:t>
+                      </m:r>
+                    </m:oMath>
+                  </m:oMathPara>
+                </a14:m>
+                <a:endParaRPr lang="fr-CA" dirty="0">
+                  <a:solidFill>
+                    <a:srgbClr val="5B9BD5"/>
+                  </a:solidFill>
+                </a:endParaRPr>
+              </a:p>
+            </p:txBody>
+          </p:sp>
+        </mc:Choice>
+        <mc:Fallback>
+          <p:sp>
+            <p:nvSpPr>
+              <p:cNvPr id="8" name="ZoneTexte 7">
+                <a:extLst>
+                  <a:ext uri="{FF2B5EF4-FFF2-40B4-BE49-F238E27FC236}">
+                    <a16:creationId xmlns:a16="http://schemas.microsoft.com/office/drawing/2014/main" id="{B81FF01E-407B-CE8F-80F4-CFC728E6CA10}"/>
+                  </a:ext>
+                </a:extLst>
+              </p:cNvPr>
+              <p:cNvSpPr txBox="1">
+                <a:spLocks noRot="1" noChangeAspect="1" noMove="1" noResize="1" noEditPoints="1" noAdjustHandles="1" noChangeArrowheads="1" noChangeShapeType="1" noTextEdit="1"/>
+              </p:cNvSpPr>
+              <p:nvPr/>
+            </p:nvSpPr>
+            <p:spPr>
+              <a:xfrm>
+                <a:off x="5803392" y="1268922"/>
+                <a:ext cx="6141720" cy="1869614"/>
+              </a:xfrm>
+              <a:prstGeom prst="rect">
+                <a:avLst/>
+              </a:prstGeom>
+              <a:blipFill>
+                <a:blip r:embed="rId5"/>
+                <a:stretch>
+                  <a:fillRect l="-794" t="-1303" b="-1954"/>
+                </a:stretch>
+              </a:blipFill>
+            </p:spPr>
+            <p:txBody>
+              <a:bodyPr/>
+              <a:lstStyle/>
+              <a:p>
+                <a:r>
+                  <a:rPr lang="fr-CA">
+                    <a:noFill/>
+                  </a:rPr>
+                  <a:t> </a:t>
+                </a:r>
+              </a:p>
+            </p:txBody>
+          </p:sp>
+        </mc:Fallback>
+      </mc:AlternateContent>
+      <mc:AlternateContent xmlns:mc="http://schemas.openxmlformats.org/markup-compatibility/2006">
+        <mc:Choice xmlns:a14="http://schemas.microsoft.com/office/drawing/2010/main" Requires="a14">
+          <p:sp>
+            <p:nvSpPr>
+              <p:cNvPr id="9" name="ZoneTexte 8">
+                <a:extLst>
+                  <a:ext uri="{FF2B5EF4-FFF2-40B4-BE49-F238E27FC236}">
+                    <a16:creationId xmlns:a16="http://schemas.microsoft.com/office/drawing/2014/main" id="{A0DEE587-681A-1A82-80C1-940949F38F5B}"/>
+                  </a:ext>
+                </a:extLst>
+              </p:cNvPr>
+              <p:cNvSpPr txBox="1"/>
+              <p:nvPr/>
+            </p:nvSpPr>
+            <p:spPr>
+              <a:xfrm>
+                <a:off x="5903976" y="3023260"/>
+                <a:ext cx="6288024" cy="1869614"/>
+              </a:xfrm>
+              <a:prstGeom prst="rect">
+                <a:avLst/>
+              </a:prstGeom>
+              <a:noFill/>
+            </p:spPr>
+            <p:txBody>
+              <a:bodyPr wrap="square" rtlCol="0">
+                <a:spAutoFit/>
+              </a:bodyPr>
+              <a:lstStyle/>
+              <a:p>
+                <a:r>
+                  <a:rPr lang="fr-CA" dirty="0">
+                    <a:solidFill>
+                      <a:srgbClr val="6FAD46"/>
+                    </a:solidFill>
+                  </a:rPr>
+                  <a:t>Condition de robin, convection-radiation :</a:t>
+                </a:r>
+              </a:p>
+              <a:p>
+                <a:pPr algn="ctr">
+                  <a:spcBef>
+                    <a:spcPts val="1800"/>
+                  </a:spcBef>
+                </a:pPr>
+                <a:r>
+                  <a:rPr lang="fr-CA" dirty="0">
+                    <a:solidFill>
+                      <a:srgbClr val="6FAD46"/>
+                    </a:solidFill>
+                  </a:rPr>
+                  <a:t>	</a:t>
+                </a:r>
+                <a14:m>
+                  <m:oMath xmlns:m="http://schemas.openxmlformats.org/officeDocument/2006/math">
+                    <m:r>
+                      <a:rPr lang="fr-FR" i="1" smtClean="0">
+                        <a:solidFill>
+                          <a:srgbClr val="6FAD46"/>
+                        </a:solidFill>
+                        <a:latin typeface="Cambria Math" panose="02040503050406030204" pitchFamily="18" charset="0"/>
+                      </a:rPr>
+                      <m:t>−</m:t>
+                    </m:r>
+                    <m:r>
+                      <a:rPr lang="fr-FR" i="1" smtClean="0">
+                        <a:solidFill>
+                          <a:srgbClr val="6FAD46"/>
+                        </a:solidFill>
+                        <a:latin typeface="Cambria Math" panose="02040503050406030204" pitchFamily="18" charset="0"/>
+                      </a:rPr>
+                      <m:t>𝑘</m:t>
+                    </m:r>
+                    <m:r>
+                      <m:rPr>
+                        <m:sty m:val="p"/>
+                      </m:rPr>
+                      <a:rPr lang="fr-FR" i="1" smtClean="0">
+                        <a:solidFill>
+                          <a:srgbClr val="6FAD46"/>
+                        </a:solidFill>
+                        <a:latin typeface="Cambria Math" panose="02040503050406030204" pitchFamily="18" charset="0"/>
+                      </a:rPr>
+                      <m:t>∇</m:t>
+                    </m:r>
+                    <m:r>
+                      <a:rPr lang="fr-FR" i="1" smtClean="0">
+                        <a:solidFill>
+                          <a:srgbClr val="6FAD46"/>
+                        </a:solidFill>
+                        <a:latin typeface="Cambria Math" panose="02040503050406030204" pitchFamily="18" charset="0"/>
+                      </a:rPr>
+                      <m:t>𝑇</m:t>
+                    </m:r>
+                    <m:r>
+                      <a:rPr lang="fr-FR" i="1" smtClean="0">
+                        <a:solidFill>
+                          <a:srgbClr val="6FAD46"/>
+                        </a:solidFill>
+                        <a:latin typeface="Cambria Math" panose="02040503050406030204" pitchFamily="18" charset="0"/>
+                      </a:rPr>
+                      <m:t>.</m:t>
+                    </m:r>
+                    <m:acc>
+                      <m:accPr>
+                        <m:chr m:val="⃗"/>
+                        <m:ctrlPr>
+                          <a:rPr lang="fr-FR" i="1" smtClean="0">
+                            <a:solidFill>
+                              <a:srgbClr val="6FAD46"/>
+                            </a:solidFill>
+                            <a:latin typeface="Cambria Math" panose="02040503050406030204" pitchFamily="18" charset="0"/>
+                          </a:rPr>
+                        </m:ctrlPr>
+                      </m:accPr>
+                      <m:e>
+                        <m:r>
+                          <a:rPr lang="fr-CA" b="0" i="1" smtClean="0">
+                            <a:solidFill>
+                              <a:srgbClr val="6FAD46"/>
+                            </a:solidFill>
+                            <a:latin typeface="Cambria Math" panose="02040503050406030204" pitchFamily="18" charset="0"/>
+                          </a:rPr>
+                          <m:t>𝑛</m:t>
+                        </m:r>
+                      </m:e>
+                    </m:acc>
+                    <m:r>
+                      <a:rPr lang="fr-FR" i="1" smtClean="0">
+                        <a:solidFill>
+                          <a:srgbClr val="6FAD46"/>
+                        </a:solidFill>
+                        <a:latin typeface="Cambria Math" panose="02040503050406030204" pitchFamily="18" charset="0"/>
+                      </a:rPr>
+                      <m:t>=</m:t>
+                    </m:r>
+                    <m:r>
+                      <a:rPr lang="fr-FR" i="1" smtClean="0">
+                        <a:solidFill>
+                          <a:srgbClr val="6FAD46"/>
+                        </a:solidFill>
+                        <a:latin typeface="Cambria Math" panose="02040503050406030204" pitchFamily="18" charset="0"/>
+                      </a:rPr>
+                      <m:t>h</m:t>
+                    </m:r>
+                    <m:d>
+                      <m:dPr>
+                        <m:ctrlPr>
+                          <a:rPr lang="fr-FR" i="1">
+                            <a:solidFill>
+                              <a:srgbClr val="6FAD46"/>
+                            </a:solidFill>
+                            <a:latin typeface="Cambria Math" panose="02040503050406030204" pitchFamily="18" charset="0"/>
+                          </a:rPr>
+                        </m:ctrlPr>
+                      </m:dPr>
+                      <m:e>
+                        <m:r>
+                          <a:rPr lang="fr-FR" i="1">
+                            <a:solidFill>
+                              <a:srgbClr val="6FAD46"/>
+                            </a:solidFill>
+                            <a:latin typeface="Cambria Math" panose="02040503050406030204" pitchFamily="18" charset="0"/>
+                          </a:rPr>
+                          <m:t>𝑇</m:t>
+                        </m:r>
+                        <m:r>
+                          <a:rPr lang="fr-FR" i="1">
+                            <a:solidFill>
+                              <a:srgbClr val="6FAD46"/>
+                            </a:solidFill>
+                            <a:latin typeface="Cambria Math" panose="02040503050406030204" pitchFamily="18" charset="0"/>
+                          </a:rPr>
+                          <m:t>−</m:t>
+                        </m:r>
+                        <m:sSub>
+                          <m:sSubPr>
+                            <m:ctrlPr>
+                              <a:rPr lang="fr-FR" i="1">
+                                <a:solidFill>
+                                  <a:srgbClr val="6FAD46"/>
+                                </a:solidFill>
+                                <a:latin typeface="Cambria Math" panose="02040503050406030204" pitchFamily="18" charset="0"/>
+                              </a:rPr>
+                            </m:ctrlPr>
+                          </m:sSubPr>
+                          <m:e>
+                            <m:r>
+                              <a:rPr lang="fr-FR" i="1">
+                                <a:solidFill>
+                                  <a:srgbClr val="6FAD46"/>
+                                </a:solidFill>
+                                <a:latin typeface="Cambria Math" panose="02040503050406030204" pitchFamily="18" charset="0"/>
+                              </a:rPr>
+                              <m:t>𝑇</m:t>
+                            </m:r>
+                          </m:e>
+                          <m:sub>
+                            <m:r>
+                              <a:rPr lang="fr-FR" i="1">
+                                <a:solidFill>
+                                  <a:srgbClr val="6FAD46"/>
+                                </a:solidFill>
+                                <a:latin typeface="Cambria Math" panose="02040503050406030204" pitchFamily="18" charset="0"/>
+                              </a:rPr>
+                              <m:t>∞</m:t>
+                            </m:r>
+                            <m:r>
+                              <m:rPr>
+                                <m:nor/>
+                              </m:rPr>
+                              <a:rPr lang="fr-FR" dirty="0">
+                                <a:solidFill>
+                                  <a:srgbClr val="6FAD46"/>
+                                </a:solidFill>
+                              </a:rPr>
+                              <m:t> </m:t>
+                            </m:r>
+                          </m:sub>
+                        </m:sSub>
+                      </m:e>
+                    </m:d>
+                    <m:r>
+                      <a:rPr lang="fr-FR" i="1">
+                        <a:solidFill>
+                          <a:srgbClr val="6FAD46"/>
+                        </a:solidFill>
+                        <a:latin typeface="Cambria Math" panose="02040503050406030204" pitchFamily="18" charset="0"/>
+                      </a:rPr>
+                      <m:t>+</m:t>
+                    </m:r>
+                    <m:r>
+                      <m:rPr>
+                        <m:sty m:val="p"/>
+                      </m:rPr>
+                      <a:rPr lang="fr-FR" i="1">
+                        <a:solidFill>
+                          <a:srgbClr val="6FAD46"/>
+                        </a:solidFill>
+                        <a:latin typeface="Cambria Math" panose="02040503050406030204" pitchFamily="18" charset="0"/>
+                      </a:rPr>
+                      <m:t>ϵσ</m:t>
+                    </m:r>
+                    <m:r>
+                      <a:rPr lang="fr-FR" i="1">
+                        <a:solidFill>
+                          <a:srgbClr val="6FAD46"/>
+                        </a:solidFill>
+                        <a:latin typeface="Cambria Math" panose="02040503050406030204" pitchFamily="18" charset="0"/>
+                      </a:rPr>
+                      <m:t>(</m:t>
+                    </m:r>
+                    <m:sSup>
+                      <m:sSupPr>
+                        <m:ctrlPr>
+                          <a:rPr lang="fr-FR" i="1">
+                            <a:solidFill>
+                              <a:srgbClr val="6FAD46"/>
+                            </a:solidFill>
+                            <a:latin typeface="Cambria Math" panose="02040503050406030204" pitchFamily="18" charset="0"/>
+                          </a:rPr>
+                        </m:ctrlPr>
+                      </m:sSupPr>
+                      <m:e>
+                        <m:r>
+                          <a:rPr lang="fr-FR" i="1">
+                            <a:solidFill>
+                              <a:srgbClr val="6FAD46"/>
+                            </a:solidFill>
+                            <a:latin typeface="Cambria Math" panose="02040503050406030204" pitchFamily="18" charset="0"/>
+                          </a:rPr>
+                          <m:t>𝑇</m:t>
+                        </m:r>
+                      </m:e>
+                      <m:sup>
+                        <m:r>
+                          <a:rPr lang="fr-FR" i="1">
+                            <a:solidFill>
+                              <a:srgbClr val="6FAD46"/>
+                            </a:solidFill>
+                            <a:latin typeface="Cambria Math" panose="02040503050406030204" pitchFamily="18" charset="0"/>
+                          </a:rPr>
+                          <m:t>4</m:t>
+                        </m:r>
+                      </m:sup>
+                    </m:sSup>
+                    <m:r>
+                      <a:rPr lang="fr-FR" i="1">
+                        <a:solidFill>
+                          <a:srgbClr val="6FAD46"/>
+                        </a:solidFill>
+                        <a:latin typeface="Cambria Math" panose="02040503050406030204" pitchFamily="18" charset="0"/>
+                      </a:rPr>
+                      <m:t>−</m:t>
+                    </m:r>
+                    <m:sSubSup>
+                      <m:sSubSupPr>
+                        <m:ctrlPr>
+                          <a:rPr lang="fr-FR" i="1">
+                            <a:solidFill>
+                              <a:srgbClr val="6FAD46"/>
+                            </a:solidFill>
+                            <a:latin typeface="Cambria Math" panose="02040503050406030204" pitchFamily="18" charset="0"/>
+                          </a:rPr>
+                        </m:ctrlPr>
+                      </m:sSubSupPr>
+                      <m:e>
+                        <m:r>
+                          <a:rPr lang="fr-FR" i="1">
+                            <a:solidFill>
+                              <a:srgbClr val="6FAD46"/>
+                            </a:solidFill>
+                            <a:latin typeface="Cambria Math" panose="02040503050406030204" pitchFamily="18" charset="0"/>
+                          </a:rPr>
+                          <m:t>𝑇</m:t>
+                        </m:r>
+                      </m:e>
+                      <m:sub>
+                        <m:r>
+                          <a:rPr lang="fr-FR" i="1">
+                            <a:solidFill>
+                              <a:srgbClr val="6FAD46"/>
+                            </a:solidFill>
+                            <a:latin typeface="Cambria Math" panose="02040503050406030204" pitchFamily="18" charset="0"/>
+                          </a:rPr>
+                          <m:t>∞</m:t>
+                        </m:r>
+                      </m:sub>
+                      <m:sup>
+                        <m:r>
+                          <a:rPr lang="fr-FR" i="1">
+                            <a:solidFill>
+                              <a:srgbClr val="6FAD46"/>
+                            </a:solidFill>
+                            <a:latin typeface="Cambria Math" panose="02040503050406030204" pitchFamily="18" charset="0"/>
+                          </a:rPr>
+                          <m:t>4</m:t>
+                        </m:r>
+                      </m:sup>
+                    </m:sSubSup>
+                    <m:r>
+                      <a:rPr lang="fr-FR" i="1">
+                        <a:solidFill>
+                          <a:srgbClr val="6FAD46"/>
+                        </a:solidFill>
+                        <a:latin typeface="Cambria Math" panose="02040503050406030204" pitchFamily="18" charset="0"/>
+                      </a:rPr>
+                      <m:t>)</m:t>
+                    </m:r>
+                  </m:oMath>
+                </a14:m>
+                <a:endParaRPr lang="fr-FR" dirty="0">
+                  <a:solidFill>
+                    <a:srgbClr val="6FAD46"/>
+                  </a:solidFill>
+                </a:endParaRPr>
+              </a:p>
+              <a:p>
+                <a:pPr algn="ctr"/>
+                <a14:m>
+                  <m:oMath xmlns:m="http://schemas.openxmlformats.org/officeDocument/2006/math">
+                    <m:sSubSup>
+                      <m:sSubSupPr>
+                        <m:ctrlPr>
+                          <a:rPr lang="fr-CA" b="0" i="1" smtClean="0">
+                            <a:solidFill>
+                              <a:srgbClr val="6FAD46"/>
+                            </a:solidFill>
+                            <a:latin typeface="Cambria Math" panose="02040503050406030204" pitchFamily="18" charset="0"/>
+                          </a:rPr>
+                        </m:ctrlPr>
+                      </m:sSubSupPr>
+                      <m:e>
+                        <m:r>
+                          <a:rPr lang="fr-CA" b="0" i="1" smtClean="0">
+                            <a:solidFill>
+                              <a:srgbClr val="6FAD46"/>
+                            </a:solidFill>
+                            <a:latin typeface="Cambria Math" panose="02040503050406030204" pitchFamily="18" charset="0"/>
+                          </a:rPr>
+                          <m:t>𝑇</m:t>
+                        </m:r>
+                      </m:e>
+                      <m:sub>
+                        <m:r>
+                          <a:rPr lang="fr-CA" b="0" i="1" smtClean="0">
+                            <a:solidFill>
+                              <a:srgbClr val="6FAD46"/>
+                            </a:solidFill>
+                            <a:latin typeface="Cambria Math" panose="02040503050406030204" pitchFamily="18" charset="0"/>
+                          </a:rPr>
+                          <m:t>𝑟</m:t>
+                        </m:r>
+                        <m:r>
+                          <a:rPr lang="fr-CA" b="0" i="1" smtClean="0">
+                            <a:solidFill>
+                              <a:srgbClr val="6FAD46"/>
+                            </a:solidFill>
+                            <a:latin typeface="Cambria Math" panose="02040503050406030204" pitchFamily="18" charset="0"/>
+                          </a:rPr>
+                          <m:t>,</m:t>
+                        </m:r>
+                        <m:r>
+                          <a:rPr lang="fr-CA" b="0" i="1" smtClean="0">
+                            <a:solidFill>
+                              <a:srgbClr val="6FAD46"/>
+                            </a:solidFill>
+                            <a:latin typeface="Cambria Math" panose="02040503050406030204" pitchFamily="18" charset="0"/>
+                          </a:rPr>
+                          <m:t>𝑧</m:t>
+                        </m:r>
+                      </m:sub>
+                      <m:sup>
+                        <m:r>
+                          <a:rPr lang="fr-CA" b="0" i="1" smtClean="0">
+                            <a:solidFill>
+                              <a:srgbClr val="6FAD46"/>
+                            </a:solidFill>
+                            <a:latin typeface="Cambria Math" panose="02040503050406030204" pitchFamily="18" charset="0"/>
+                          </a:rPr>
+                          <m:t>𝑡</m:t>
+                        </m:r>
+                        <m:r>
+                          <a:rPr lang="fr-CA" b="0" i="1" smtClean="0">
+                            <a:solidFill>
+                              <a:srgbClr val="6FAD46"/>
+                            </a:solidFill>
+                            <a:latin typeface="Cambria Math" panose="02040503050406030204" pitchFamily="18" charset="0"/>
+                          </a:rPr>
+                          <m:t>+∆</m:t>
+                        </m:r>
+                        <m:r>
+                          <a:rPr lang="fr-CA" b="0" i="1" smtClean="0">
+                            <a:solidFill>
+                              <a:srgbClr val="6FAD46"/>
+                            </a:solidFill>
+                            <a:latin typeface="Cambria Math" panose="02040503050406030204" pitchFamily="18" charset="0"/>
+                            <a:ea typeface="Cambria Math" panose="02040503050406030204" pitchFamily="18" charset="0"/>
+                          </a:rPr>
+                          <m:t>𝑡</m:t>
+                        </m:r>
+                      </m:sup>
+                    </m:sSubSup>
+                    <m:r>
+                      <a:rPr lang="fr-CA" b="0" i="0" smtClean="0">
+                        <a:solidFill>
+                          <a:srgbClr val="6FAD46"/>
+                        </a:solidFill>
+                        <a:latin typeface="Cambria Math" panose="02040503050406030204" pitchFamily="18" charset="0"/>
+                      </a:rPr>
+                      <m:t>=[</m:t>
+                    </m:r>
+                    <m:d>
+                      <m:dPr>
+                        <m:ctrlPr>
+                          <a:rPr lang="fr-CA" b="0" i="1" smtClean="0">
+                            <a:solidFill>
+                              <a:srgbClr val="6FAD46"/>
+                            </a:solidFill>
+                            <a:latin typeface="Cambria Math" panose="02040503050406030204" pitchFamily="18" charset="0"/>
+                          </a:rPr>
+                        </m:ctrlPr>
+                      </m:dPr>
+                      <m:e>
+                        <m:f>
+                          <m:fPr>
+                            <m:ctrlPr>
+                              <a:rPr lang="fr-CA" b="0" i="1" smtClean="0">
+                                <a:solidFill>
+                                  <a:srgbClr val="6FAD46"/>
+                                </a:solidFill>
+                                <a:latin typeface="Cambria Math" panose="02040503050406030204" pitchFamily="18" charset="0"/>
+                              </a:rPr>
+                            </m:ctrlPr>
+                          </m:fPr>
+                          <m:num>
+                            <m:r>
+                              <a:rPr lang="fr-CA" b="0" i="0" smtClean="0">
+                                <a:solidFill>
+                                  <a:srgbClr val="6FAD46"/>
+                                </a:solidFill>
+                                <a:latin typeface="Cambria Math" panose="02040503050406030204" pitchFamily="18" charset="0"/>
+                              </a:rPr>
+                              <m:t>−2</m:t>
+                            </m:r>
+                            <m:r>
+                              <a:rPr lang="fr-CA" b="0" i="1" smtClean="0">
+                                <a:solidFill>
+                                  <a:srgbClr val="6FAD46"/>
+                                </a:solidFill>
+                                <a:latin typeface="Cambria Math" panose="02040503050406030204" pitchFamily="18" charset="0"/>
+                              </a:rPr>
+                              <m:t>∆</m:t>
+                            </m:r>
+                            <m:r>
+                              <m:rPr>
+                                <m:sty m:val="p"/>
+                              </m:rPr>
+                              <a:rPr lang="fr-CA" b="0" i="0" smtClean="0">
+                                <a:solidFill>
+                                  <a:srgbClr val="6FAD46"/>
+                                </a:solidFill>
+                                <a:latin typeface="Cambria Math" panose="02040503050406030204" pitchFamily="18" charset="0"/>
+                              </a:rPr>
+                              <m:t>r</m:t>
+                            </m:r>
+                          </m:num>
+                          <m:den>
+                            <m:r>
+                              <m:rPr>
+                                <m:sty m:val="p"/>
+                              </m:rPr>
+                              <a:rPr lang="fr-CA" b="0" i="0" smtClean="0">
+                                <a:solidFill>
+                                  <a:srgbClr val="6FAD46"/>
+                                </a:solidFill>
+                                <a:latin typeface="Cambria Math" panose="02040503050406030204" pitchFamily="18" charset="0"/>
+                              </a:rPr>
+                              <m:t>k</m:t>
+                            </m:r>
+                          </m:den>
+                        </m:f>
+                      </m:e>
+                    </m:d>
+                    <m:r>
+                      <a:rPr lang="fr-CA" b="0" i="0" smtClean="0">
+                        <a:solidFill>
+                          <a:srgbClr val="6FAD46"/>
+                        </a:solidFill>
+                        <a:latin typeface="Cambria Math" panose="02040503050406030204" pitchFamily="18" charset="0"/>
+                      </a:rPr>
+                      <m:t>∗(</m:t>
+                    </m:r>
+                    <m:r>
+                      <m:rPr>
+                        <m:sty m:val="p"/>
+                      </m:rPr>
+                      <a:rPr lang="fr-CA" b="0" i="0" smtClean="0">
+                        <a:solidFill>
+                          <a:srgbClr val="6FAD46"/>
+                        </a:solidFill>
+                        <a:latin typeface="Cambria Math" panose="02040503050406030204" pitchFamily="18" charset="0"/>
+                      </a:rPr>
+                      <m:t>h</m:t>
+                    </m:r>
+                    <m:r>
+                      <a:rPr lang="fr-CA" b="0" i="0" smtClean="0">
+                        <a:solidFill>
+                          <a:srgbClr val="6FAD46"/>
+                        </a:solidFill>
+                        <a:latin typeface="Cambria Math" panose="02040503050406030204" pitchFamily="18" charset="0"/>
+                      </a:rPr>
+                      <m:t>(</m:t>
+                    </m:r>
+                    <m:sSubSup>
+                      <m:sSubSupPr>
+                        <m:ctrlPr>
+                          <a:rPr lang="fr-CA" i="1">
+                            <a:solidFill>
+                              <a:srgbClr val="6FAD46"/>
+                            </a:solidFill>
+                            <a:latin typeface="Cambria Math" panose="02040503050406030204" pitchFamily="18" charset="0"/>
+                          </a:rPr>
+                        </m:ctrlPr>
+                      </m:sSubSupPr>
+                      <m:e>
+                        <m:r>
+                          <a:rPr lang="fr-CA" i="1">
+                            <a:solidFill>
+                              <a:srgbClr val="6FAD46"/>
+                            </a:solidFill>
+                            <a:latin typeface="Cambria Math" panose="02040503050406030204" pitchFamily="18" charset="0"/>
+                          </a:rPr>
+                          <m:t>𝑇</m:t>
+                        </m:r>
+                      </m:e>
+                      <m:sub>
+                        <m:r>
+                          <a:rPr lang="fr-CA" i="1">
+                            <a:solidFill>
+                              <a:srgbClr val="6FAD46"/>
+                            </a:solidFill>
+                            <a:latin typeface="Cambria Math" panose="02040503050406030204" pitchFamily="18" charset="0"/>
+                          </a:rPr>
+                          <m:t>𝑟</m:t>
+                        </m:r>
+                        <m:r>
+                          <a:rPr lang="fr-CA" i="1">
+                            <a:solidFill>
+                              <a:srgbClr val="6FAD46"/>
+                            </a:solidFill>
+                            <a:latin typeface="Cambria Math" panose="02040503050406030204" pitchFamily="18" charset="0"/>
+                          </a:rPr>
+                          <m:t>,</m:t>
+                        </m:r>
+                        <m:r>
+                          <a:rPr lang="fr-CA" i="1">
+                            <a:solidFill>
+                              <a:srgbClr val="6FAD46"/>
+                            </a:solidFill>
+                            <a:latin typeface="Cambria Math" panose="02040503050406030204" pitchFamily="18" charset="0"/>
+                          </a:rPr>
+                          <m:t>𝑧</m:t>
+                        </m:r>
+                      </m:sub>
+                      <m:sup>
+                        <m:r>
+                          <a:rPr lang="fr-CA" b="0" i="1" smtClean="0">
+                            <a:solidFill>
+                              <a:srgbClr val="6FAD46"/>
+                            </a:solidFill>
+                            <a:latin typeface="Cambria Math" panose="02040503050406030204" pitchFamily="18" charset="0"/>
+                          </a:rPr>
+                          <m:t>𝑡</m:t>
+                        </m:r>
+                      </m:sup>
+                    </m:sSubSup>
+                  </m:oMath>
+                </a14:m>
+                <a:r>
+                  <a:rPr lang="fr-CA" dirty="0">
+                    <a:solidFill>
+                      <a:srgbClr val="6FAD46"/>
+                    </a:solidFill>
+                  </a:rPr>
+                  <a:t>-</a:t>
+                </a:r>
+                <a:r>
+                  <a:rPr lang="fr-FR" dirty="0">
+                    <a:solidFill>
+                      <a:srgbClr val="6FAD46"/>
+                    </a:solidFill>
+                  </a:rPr>
+                  <a:t> </a:t>
+                </a:r>
+                <a14:m>
+                  <m:oMath xmlns:m="http://schemas.openxmlformats.org/officeDocument/2006/math">
+                    <m:sSub>
+                      <m:sSubPr>
+                        <m:ctrlPr>
+                          <a:rPr lang="fr-FR" i="1">
+                            <a:solidFill>
+                              <a:srgbClr val="6FAD46"/>
+                            </a:solidFill>
+                            <a:latin typeface="Cambria Math" panose="02040503050406030204" pitchFamily="18" charset="0"/>
+                          </a:rPr>
+                        </m:ctrlPr>
+                      </m:sSubPr>
+                      <m:e>
+                        <m:r>
+                          <a:rPr lang="fr-FR" i="1">
+                            <a:solidFill>
+                              <a:srgbClr val="6FAD46"/>
+                            </a:solidFill>
+                            <a:latin typeface="Cambria Math" panose="02040503050406030204" pitchFamily="18" charset="0"/>
+                          </a:rPr>
+                          <m:t>𝑇</m:t>
+                        </m:r>
+                      </m:e>
+                      <m:sub>
+                        <m:r>
+                          <a:rPr lang="fr-FR" i="1">
+                            <a:solidFill>
+                              <a:srgbClr val="6FAD46"/>
+                            </a:solidFill>
+                            <a:latin typeface="Cambria Math" panose="02040503050406030204" pitchFamily="18" charset="0"/>
+                          </a:rPr>
+                          <m:t>∞</m:t>
+                        </m:r>
+                        <m:r>
+                          <m:rPr>
+                            <m:nor/>
+                          </m:rPr>
+                          <a:rPr lang="fr-FR" dirty="0">
+                            <a:solidFill>
+                              <a:srgbClr val="6FAD46"/>
+                            </a:solidFill>
+                          </a:rPr>
+                          <m:t> </m:t>
+                        </m:r>
+                      </m:sub>
+                    </m:sSub>
+                    <m:r>
+                      <a:rPr lang="fr-CA" b="0" i="1" dirty="0" smtClean="0">
+                        <a:solidFill>
+                          <a:srgbClr val="6FAD46"/>
+                        </a:solidFill>
+                        <a:latin typeface="Cambria Math" panose="02040503050406030204" pitchFamily="18" charset="0"/>
+                      </a:rPr>
+                      <m:t>)</m:t>
+                    </m:r>
+                  </m:oMath>
+                </a14:m>
+                <a:r>
+                  <a:rPr lang="fr-CA" dirty="0">
+                    <a:solidFill>
+                      <a:srgbClr val="6FAD46"/>
+                    </a:solidFill>
+                  </a:rPr>
+                  <a:t> + </a:t>
+                </a:r>
+                <a14:m>
+                  <m:oMath xmlns:m="http://schemas.openxmlformats.org/officeDocument/2006/math">
+                    <m:r>
+                      <m:rPr>
+                        <m:sty m:val="p"/>
+                      </m:rPr>
+                      <a:rPr lang="fr-FR" i="1">
+                        <a:solidFill>
+                          <a:srgbClr val="6FAD46"/>
+                        </a:solidFill>
+                        <a:latin typeface="Cambria Math" panose="02040503050406030204" pitchFamily="18" charset="0"/>
+                      </a:rPr>
+                      <m:t>ϵσ</m:t>
+                    </m:r>
+                    <m:r>
+                      <a:rPr lang="fr-FR" i="1">
+                        <a:solidFill>
+                          <a:srgbClr val="6FAD46"/>
+                        </a:solidFill>
+                        <a:latin typeface="Cambria Math" panose="02040503050406030204" pitchFamily="18" charset="0"/>
+                      </a:rPr>
+                      <m:t>(</m:t>
+                    </m:r>
+                    <m:sSup>
+                      <m:sSupPr>
+                        <m:ctrlPr>
+                          <a:rPr lang="fr-FR" i="1">
+                            <a:solidFill>
+                              <a:srgbClr val="6FAD46"/>
+                            </a:solidFill>
+                            <a:latin typeface="Cambria Math" panose="02040503050406030204" pitchFamily="18" charset="0"/>
+                          </a:rPr>
+                        </m:ctrlPr>
+                      </m:sSupPr>
+                      <m:e>
+                        <m:sSubSup>
+                          <m:sSubSupPr>
+                            <m:ctrlPr>
+                              <a:rPr lang="fr-CA" i="1">
+                                <a:solidFill>
+                                  <a:srgbClr val="6FAD46"/>
+                                </a:solidFill>
+                                <a:latin typeface="Cambria Math" panose="02040503050406030204" pitchFamily="18" charset="0"/>
+                              </a:rPr>
+                            </m:ctrlPr>
+                          </m:sSubSupPr>
+                          <m:e>
+                            <m:r>
+                              <a:rPr lang="fr-CA" i="1">
+                                <a:solidFill>
+                                  <a:srgbClr val="6FAD46"/>
+                                </a:solidFill>
+                                <a:latin typeface="Cambria Math" panose="02040503050406030204" pitchFamily="18" charset="0"/>
+                              </a:rPr>
+                              <m:t>𝑇</m:t>
+                            </m:r>
+                          </m:e>
+                          <m:sub>
+                            <m:r>
+                              <a:rPr lang="fr-CA" i="1">
+                                <a:solidFill>
+                                  <a:srgbClr val="6FAD46"/>
+                                </a:solidFill>
+                                <a:latin typeface="Cambria Math" panose="02040503050406030204" pitchFamily="18" charset="0"/>
+                              </a:rPr>
+                              <m:t>𝑟</m:t>
+                            </m:r>
+                            <m:r>
+                              <a:rPr lang="fr-CA" i="1">
+                                <a:solidFill>
+                                  <a:srgbClr val="6FAD46"/>
+                                </a:solidFill>
+                                <a:latin typeface="Cambria Math" panose="02040503050406030204" pitchFamily="18" charset="0"/>
+                              </a:rPr>
+                              <m:t>,</m:t>
+                            </m:r>
+                            <m:r>
+                              <a:rPr lang="fr-CA" i="1">
+                                <a:solidFill>
+                                  <a:srgbClr val="6FAD46"/>
+                                </a:solidFill>
+                                <a:latin typeface="Cambria Math" panose="02040503050406030204" pitchFamily="18" charset="0"/>
+                              </a:rPr>
+                              <m:t>𝑧</m:t>
+                            </m:r>
+                          </m:sub>
+                          <m:sup>
+                            <m:r>
+                              <a:rPr lang="fr-CA" i="1">
+                                <a:solidFill>
+                                  <a:srgbClr val="6FAD46"/>
+                                </a:solidFill>
+                                <a:latin typeface="Cambria Math" panose="02040503050406030204" pitchFamily="18" charset="0"/>
+                              </a:rPr>
+                              <m:t>𝑡</m:t>
+                            </m:r>
+                          </m:sup>
+                        </m:sSubSup>
+                      </m:e>
+                      <m:sup>
+                        <m:r>
+                          <a:rPr lang="fr-FR" i="1">
+                            <a:solidFill>
+                              <a:srgbClr val="6FAD46"/>
+                            </a:solidFill>
+                            <a:latin typeface="Cambria Math" panose="02040503050406030204" pitchFamily="18" charset="0"/>
+                          </a:rPr>
+                          <m:t>4</m:t>
+                        </m:r>
+                      </m:sup>
+                    </m:sSup>
+                    <m:r>
+                      <a:rPr lang="fr-FR" i="1">
+                        <a:solidFill>
+                          <a:srgbClr val="6FAD46"/>
+                        </a:solidFill>
+                        <a:latin typeface="Cambria Math" panose="02040503050406030204" pitchFamily="18" charset="0"/>
+                      </a:rPr>
+                      <m:t>−</m:t>
+                    </m:r>
+                    <m:sSubSup>
+                      <m:sSubSupPr>
+                        <m:ctrlPr>
+                          <a:rPr lang="fr-FR" i="1">
+                            <a:solidFill>
+                              <a:srgbClr val="6FAD46"/>
+                            </a:solidFill>
+                            <a:latin typeface="Cambria Math" panose="02040503050406030204" pitchFamily="18" charset="0"/>
+                          </a:rPr>
+                        </m:ctrlPr>
+                      </m:sSubSupPr>
+                      <m:e>
+                        <m:r>
+                          <a:rPr lang="fr-FR" i="1">
+                            <a:solidFill>
+                              <a:srgbClr val="6FAD46"/>
+                            </a:solidFill>
+                            <a:latin typeface="Cambria Math" panose="02040503050406030204" pitchFamily="18" charset="0"/>
+                          </a:rPr>
+                          <m:t>𝑇</m:t>
+                        </m:r>
+                      </m:e>
+                      <m:sub>
+                        <m:r>
+                          <a:rPr lang="fr-FR" i="1">
+                            <a:solidFill>
+                              <a:srgbClr val="6FAD46"/>
+                            </a:solidFill>
+                            <a:latin typeface="Cambria Math" panose="02040503050406030204" pitchFamily="18" charset="0"/>
+                          </a:rPr>
+                          <m:t>∞</m:t>
+                        </m:r>
+                      </m:sub>
+                      <m:sup>
+                        <m:r>
+                          <a:rPr lang="fr-FR" i="1">
+                            <a:solidFill>
+                              <a:srgbClr val="6FAD46"/>
+                            </a:solidFill>
+                            <a:latin typeface="Cambria Math" panose="02040503050406030204" pitchFamily="18" charset="0"/>
+                          </a:rPr>
+                          <m:t>4</m:t>
+                        </m:r>
+                      </m:sup>
+                    </m:sSubSup>
+                    <m:r>
+                      <a:rPr lang="fr-FR" i="1">
+                        <a:solidFill>
+                          <a:srgbClr val="6FAD46"/>
+                        </a:solidFill>
+                        <a:latin typeface="Cambria Math" panose="02040503050406030204" pitchFamily="18" charset="0"/>
+                      </a:rPr>
+                      <m:t>)</m:t>
+                    </m:r>
+                    <m:r>
+                      <a:rPr lang="fr-CA" b="0" i="1" smtClean="0">
+                        <a:solidFill>
+                          <a:srgbClr val="6FAD46"/>
+                        </a:solidFill>
+                        <a:latin typeface="Cambria Math" panose="02040503050406030204" pitchFamily="18" charset="0"/>
+                      </a:rPr>
+                      <m:t>) −</m:t>
+                    </m:r>
+                    <m:sSubSup>
+                      <m:sSubSupPr>
+                        <m:ctrlPr>
+                          <a:rPr lang="fr-CA" i="1">
+                            <a:solidFill>
+                              <a:srgbClr val="6FAD46"/>
+                            </a:solidFill>
+                            <a:latin typeface="Cambria Math" panose="02040503050406030204" pitchFamily="18" charset="0"/>
+                          </a:rPr>
+                        </m:ctrlPr>
+                      </m:sSubSupPr>
+                      <m:e>
+                        <m:r>
+                          <a:rPr lang="fr-CA" i="1">
+                            <a:solidFill>
+                              <a:srgbClr val="6FAD46"/>
+                            </a:solidFill>
+                            <a:latin typeface="Cambria Math" panose="02040503050406030204" pitchFamily="18" charset="0"/>
+                          </a:rPr>
+                          <m:t>𝑇</m:t>
+                        </m:r>
+                      </m:e>
+                      <m:sub>
+                        <m:r>
+                          <a:rPr lang="fr-CA" i="1">
+                            <a:solidFill>
+                              <a:srgbClr val="6FAD46"/>
+                            </a:solidFill>
+                            <a:latin typeface="Cambria Math" panose="02040503050406030204" pitchFamily="18" charset="0"/>
+                          </a:rPr>
+                          <m:t>𝑟</m:t>
+                        </m:r>
+                        <m:r>
+                          <a:rPr lang="fr-CA" i="1">
+                            <a:solidFill>
+                              <a:srgbClr val="6FAD46"/>
+                            </a:solidFill>
+                            <a:latin typeface="Cambria Math" panose="02040503050406030204" pitchFamily="18" charset="0"/>
+                          </a:rPr>
+                          <m:t>,</m:t>
+                        </m:r>
+                        <m:r>
+                          <a:rPr lang="fr-CA" i="1">
+                            <a:solidFill>
+                              <a:srgbClr val="6FAD46"/>
+                            </a:solidFill>
+                            <a:latin typeface="Cambria Math" panose="02040503050406030204" pitchFamily="18" charset="0"/>
+                          </a:rPr>
+                          <m:t>𝑧</m:t>
+                        </m:r>
+                        <m:r>
+                          <a:rPr lang="fr-CA" b="0" i="1" smtClean="0">
+                            <a:solidFill>
+                              <a:srgbClr val="6FAD46"/>
+                            </a:solidFill>
+                            <a:latin typeface="Cambria Math" panose="02040503050406030204" pitchFamily="18" charset="0"/>
+                          </a:rPr>
+                          <m:t>+</m:t>
+                        </m:r>
+                        <m:r>
+                          <a:rPr lang="fr-CA" b="0" i="1" smtClean="0">
+                            <a:solidFill>
+                              <a:srgbClr val="6FAD46"/>
+                            </a:solidFill>
+                            <a:latin typeface="Cambria Math" panose="02040503050406030204" pitchFamily="18" charset="0"/>
+                          </a:rPr>
+                          <m:t>2</m:t>
+                        </m:r>
+                      </m:sub>
+                      <m:sup>
+                        <m:r>
+                          <a:rPr lang="fr-CA" i="1">
+                            <a:solidFill>
+                              <a:srgbClr val="6FAD46"/>
+                            </a:solidFill>
+                            <a:latin typeface="Cambria Math" panose="02040503050406030204" pitchFamily="18" charset="0"/>
+                          </a:rPr>
+                          <m:t>𝑡</m:t>
+                        </m:r>
+                      </m:sup>
+                    </m:sSubSup>
+                    <m:r>
+                      <a:rPr lang="fr-CA" b="0" i="1" smtClean="0">
+                        <a:solidFill>
+                          <a:srgbClr val="6FAD46"/>
+                        </a:solidFill>
+                        <a:latin typeface="Cambria Math" panose="02040503050406030204" pitchFamily="18" charset="0"/>
+                        <a:ea typeface="Cambria Math" panose="02040503050406030204" pitchFamily="18" charset="0"/>
+                      </a:rPr>
+                      <m:t>+4</m:t>
+                    </m:r>
+                    <m:sSubSup>
+                      <m:sSubSupPr>
+                        <m:ctrlPr>
+                          <a:rPr lang="fr-CA" i="1">
+                            <a:solidFill>
+                              <a:srgbClr val="6FAD46"/>
+                            </a:solidFill>
+                            <a:latin typeface="Cambria Math" panose="02040503050406030204" pitchFamily="18" charset="0"/>
+                          </a:rPr>
+                        </m:ctrlPr>
+                      </m:sSubSupPr>
+                      <m:e>
+                        <m:r>
+                          <a:rPr lang="fr-CA" i="1">
+                            <a:solidFill>
+                              <a:srgbClr val="6FAD46"/>
+                            </a:solidFill>
+                            <a:latin typeface="Cambria Math" panose="02040503050406030204" pitchFamily="18" charset="0"/>
+                          </a:rPr>
+                          <m:t>𝑇</m:t>
+                        </m:r>
+                      </m:e>
+                      <m:sub>
+                        <m:r>
+                          <a:rPr lang="fr-CA" i="1">
+                            <a:solidFill>
+                              <a:srgbClr val="6FAD46"/>
+                            </a:solidFill>
+                            <a:latin typeface="Cambria Math" panose="02040503050406030204" pitchFamily="18" charset="0"/>
+                          </a:rPr>
+                          <m:t>𝑟</m:t>
+                        </m:r>
+                        <m:r>
+                          <a:rPr lang="fr-CA" i="1">
+                            <a:solidFill>
+                              <a:srgbClr val="6FAD46"/>
+                            </a:solidFill>
+                            <a:latin typeface="Cambria Math" panose="02040503050406030204" pitchFamily="18" charset="0"/>
+                          </a:rPr>
+                          <m:t>,</m:t>
+                        </m:r>
+                        <m:r>
+                          <a:rPr lang="fr-CA" i="1">
+                            <a:solidFill>
+                              <a:srgbClr val="6FAD46"/>
+                            </a:solidFill>
+                            <a:latin typeface="Cambria Math" panose="02040503050406030204" pitchFamily="18" charset="0"/>
+                          </a:rPr>
+                          <m:t>𝑧</m:t>
+                        </m:r>
+                        <m:r>
+                          <a:rPr lang="fr-CA" b="0" i="1" smtClean="0">
+                            <a:solidFill>
+                              <a:srgbClr val="6FAD46"/>
+                            </a:solidFill>
+                            <a:latin typeface="Cambria Math" panose="02040503050406030204" pitchFamily="18" charset="0"/>
+                          </a:rPr>
+                          <m:t>+</m:t>
+                        </m:r>
+                        <m:r>
+                          <a:rPr lang="fr-CA" b="0" i="1" smtClean="0">
+                            <a:solidFill>
+                              <a:srgbClr val="6FAD46"/>
+                            </a:solidFill>
+                            <a:latin typeface="Cambria Math" panose="02040503050406030204" pitchFamily="18" charset="0"/>
+                          </a:rPr>
+                          <m:t>1</m:t>
+                        </m:r>
+                      </m:sub>
+                      <m:sup>
+                        <m:r>
+                          <a:rPr lang="fr-CA" i="1">
+                            <a:solidFill>
+                              <a:srgbClr val="6FAD46"/>
+                            </a:solidFill>
+                            <a:latin typeface="Cambria Math" panose="02040503050406030204" pitchFamily="18" charset="0"/>
+                          </a:rPr>
+                          <m:t>𝑡</m:t>
+                        </m:r>
+                      </m:sup>
+                    </m:sSubSup>
+                    <m:r>
+                      <a:rPr lang="fr-CA" b="0" i="1" smtClean="0">
+                        <a:solidFill>
+                          <a:srgbClr val="6FAD46"/>
+                        </a:solidFill>
+                        <a:latin typeface="Cambria Math" panose="02040503050406030204" pitchFamily="18" charset="0"/>
+                        <a:ea typeface="Cambria Math" panose="02040503050406030204" pitchFamily="18" charset="0"/>
+                      </a:rPr>
+                      <m:t>)]÷3</m:t>
+                    </m:r>
+                  </m:oMath>
+                </a14:m>
+                <a:r>
+                  <a:rPr lang="fr-CA" dirty="0">
+                    <a:solidFill>
+                      <a:srgbClr val="6FAD46"/>
+                    </a:solidFill>
+                  </a:rPr>
+                  <a:t> </a:t>
+                </a:r>
+              </a:p>
+              <a:p>
+                <a:pPr algn="ctr"/>
+                <a14:m>
+                  <m:oMathPara xmlns:m="http://schemas.openxmlformats.org/officeDocument/2006/math">
+                    <m:oMathParaPr>
+                      <m:jc m:val="centerGroup"/>
+                    </m:oMathParaPr>
+                    <m:oMath xmlns:m="http://schemas.openxmlformats.org/officeDocument/2006/math">
+                      <m:acc>
+                        <m:accPr>
+                          <m:chr m:val="⃗"/>
+                          <m:ctrlPr>
+                            <a:rPr lang="fr-FR" i="1">
+                              <a:solidFill>
+                                <a:srgbClr val="6FAD46"/>
+                              </a:solidFill>
+                              <a:latin typeface="Cambria Math" panose="02040503050406030204" pitchFamily="18" charset="0"/>
+                            </a:rPr>
+                          </m:ctrlPr>
+                        </m:accPr>
+                        <m:e>
+                          <m:r>
+                            <a:rPr lang="fr-CA" i="1">
+                              <a:solidFill>
+                                <a:srgbClr val="6FAD46"/>
+                              </a:solidFill>
+                              <a:latin typeface="Cambria Math" panose="02040503050406030204" pitchFamily="18" charset="0"/>
+                            </a:rPr>
+                            <m:t>𝑛</m:t>
+                          </m:r>
+                        </m:e>
+                      </m:acc>
+                      <m:r>
+                        <a:rPr lang="fr-CA" b="0" i="1" smtClean="0">
+                          <a:solidFill>
+                            <a:srgbClr val="6FAD46"/>
+                          </a:solidFill>
+                          <a:latin typeface="Cambria Math" panose="02040503050406030204" pitchFamily="18" charset="0"/>
+                        </a:rPr>
+                        <m:t>=(</m:t>
+                      </m:r>
+                      <m:r>
+                        <a:rPr lang="fr-CA" b="0" i="1" smtClean="0">
+                          <a:solidFill>
+                            <a:srgbClr val="6FAD46"/>
+                          </a:solidFill>
+                          <a:latin typeface="Cambria Math" panose="02040503050406030204" pitchFamily="18" charset="0"/>
+                        </a:rPr>
+                        <m:t>1</m:t>
+                      </m:r>
+                      <m:r>
+                        <a:rPr lang="fr-CA" b="0" i="1" smtClean="0">
+                          <a:solidFill>
+                            <a:srgbClr val="6FAD46"/>
+                          </a:solidFill>
+                          <a:latin typeface="Cambria Math" panose="02040503050406030204" pitchFamily="18" charset="0"/>
+                        </a:rPr>
+                        <m:t>,</m:t>
+                      </m:r>
+                      <m:r>
+                        <a:rPr lang="fr-CA" b="0" i="1" smtClean="0">
+                          <a:solidFill>
+                            <a:srgbClr val="6FAD46"/>
+                          </a:solidFill>
+                          <a:latin typeface="Cambria Math" panose="02040503050406030204" pitchFamily="18" charset="0"/>
+                        </a:rPr>
+                        <m:t>0</m:t>
+                      </m:r>
+                      <m:r>
+                        <a:rPr lang="fr-CA" b="0" i="1" smtClean="0">
+                          <a:solidFill>
+                            <a:srgbClr val="6FAD46"/>
+                          </a:solidFill>
+                          <a:latin typeface="Cambria Math" panose="02040503050406030204" pitchFamily="18" charset="0"/>
+                        </a:rPr>
+                        <m:t>)</m:t>
+                      </m:r>
+                    </m:oMath>
+                  </m:oMathPara>
+                </a14:m>
+                <a:endParaRPr lang="fr-CA" dirty="0">
+                  <a:solidFill>
+                    <a:srgbClr val="6FAD46"/>
+                  </a:solidFill>
+                </a:endParaRPr>
+              </a:p>
+            </p:txBody>
+          </p:sp>
+        </mc:Choice>
+        <mc:Fallback>
+          <p:sp>
+            <p:nvSpPr>
+              <p:cNvPr id="9" name="ZoneTexte 8">
+                <a:extLst>
+                  <a:ext uri="{FF2B5EF4-FFF2-40B4-BE49-F238E27FC236}">
+                    <a16:creationId xmlns:a16="http://schemas.microsoft.com/office/drawing/2014/main" id="{A0DEE587-681A-1A82-80C1-940949F38F5B}"/>
+                  </a:ext>
+                </a:extLst>
+              </p:cNvPr>
+              <p:cNvSpPr txBox="1">
+                <a:spLocks noRot="1" noChangeAspect="1" noMove="1" noResize="1" noEditPoints="1" noAdjustHandles="1" noChangeArrowheads="1" noChangeShapeType="1" noTextEdit="1"/>
+              </p:cNvSpPr>
+              <p:nvPr/>
+            </p:nvSpPr>
+            <p:spPr>
+              <a:xfrm>
+                <a:off x="5903976" y="3023260"/>
+                <a:ext cx="6288024" cy="1869614"/>
+              </a:xfrm>
+              <a:prstGeom prst="rect">
+                <a:avLst/>
+              </a:prstGeom>
+              <a:blipFill>
+                <a:blip r:embed="rId6"/>
+                <a:stretch>
+                  <a:fillRect l="-873" t="-1629" b="-1629"/>
+                </a:stretch>
+              </a:blipFill>
+            </p:spPr>
+            <p:txBody>
+              <a:bodyPr/>
+              <a:lstStyle/>
+              <a:p>
+                <a:r>
+                  <a:rPr lang="fr-CA">
+                    <a:noFill/>
+                  </a:rPr>
+                  <a:t> </a:t>
+                </a:r>
+              </a:p>
+            </p:txBody>
+          </p:sp>
+        </mc:Fallback>
+      </mc:AlternateContent>
+      <p:sp>
+        <p:nvSpPr>
+          <p:cNvPr id="10" name="ZoneTexte 9">
+            <a:extLst>
+              <a:ext uri="{FF2B5EF4-FFF2-40B4-BE49-F238E27FC236}">
+                <a16:creationId xmlns:a16="http://schemas.microsoft.com/office/drawing/2014/main" id="{841669E0-8634-2A94-9DF2-325DD99B02AA}"/>
+              </a:ext>
+            </a:extLst>
+          </p:cNvPr>
+          <p:cNvSpPr txBox="1"/>
+          <p:nvPr/>
         </p:nvSpPr>
-        <p:spPr/>
+        <p:spPr>
+          <a:xfrm>
+            <a:off x="5999988" y="5008150"/>
+            <a:ext cx="6096000" cy="646331"/>
+          </a:xfrm>
+          <a:prstGeom prst="rect">
+            <a:avLst/>
+          </a:prstGeom>
+          <a:noFill/>
+        </p:spPr>
         <p:txBody>
-          <a:bodyPr/>
+          <a:bodyPr wrap="square" rtlCol="0">
+            <a:spAutoFit/>
+          </a:bodyPr>
           <a:lstStyle/>
           <a:p>
-            <a:endParaRPr lang="fr-FR" dirty="0"/>
+            <a:r>
+              <a:rPr lang="fr-CA" dirty="0" err="1"/>
+              <a:t>Dicrétisations</a:t>
+            </a:r>
+            <a:r>
+              <a:rPr lang="fr-CA" dirty="0"/>
+              <a:t> réalisées à l’aide des méthodes de </a:t>
+            </a:r>
+            <a:r>
+              <a:rPr lang="fr-CA" dirty="0" err="1"/>
+              <a:t>Gear</a:t>
+            </a:r>
+            <a:r>
+              <a:rPr lang="fr-CA" dirty="0"/>
+              <a:t>, d’ordre 2 :</a:t>
+            </a:r>
           </a:p>
         </p:txBody>
       </p:sp>
+      <p:pic>
+        <p:nvPicPr>
+          <p:cNvPr id="12" name="Image 11">
+            <a:extLst>
+              <a:ext uri="{FF2B5EF4-FFF2-40B4-BE49-F238E27FC236}">
+                <a16:creationId xmlns:a16="http://schemas.microsoft.com/office/drawing/2014/main" id="{32A8A863-AC5E-8C31-7C35-11133CCD2831}"/>
+              </a:ext>
+            </a:extLst>
+          </p:cNvPr>
+          <p:cNvPicPr>
+            <a:picLocks noChangeAspect="1"/>
+          </p:cNvPicPr>
+          <p:nvPr/>
+        </p:nvPicPr>
+        <p:blipFill>
+          <a:blip r:embed="rId7"/>
+          <a:stretch>
+            <a:fillRect/>
+          </a:stretch>
+        </p:blipFill>
+        <p:spPr>
+          <a:xfrm>
+            <a:off x="5903976" y="5752785"/>
+            <a:ext cx="6096000" cy="975360"/>
+          </a:xfrm>
+          <a:prstGeom prst="rect">
+            <a:avLst/>
+          </a:prstGeom>
+        </p:spPr>
+      </p:pic>
     </p:spTree>
     <p:extLst>
       <p:ext uri="{BB962C8B-B14F-4D97-AF65-F5344CB8AC3E}">

--- a/projet_final/projet_final/MEC8211-Projet-final-Presentation.pptx
+++ b/projet_final/projet_final/MEC8211-Projet-final-Presentation.pptx
@@ -5,7 +5,7 @@
     <p:sldMasterId id="2147483648" r:id="rId1"/>
   </p:sldMasterIdLst>
   <p:notesMasterIdLst>
-    <p:notesMasterId r:id="rId11"/>
+    <p:notesMasterId r:id="rId13"/>
   </p:notesMasterIdLst>
   <p:sldIdLst>
     <p:sldId id="256" r:id="rId2"/>
@@ -17,6 +17,8 @@
     <p:sldId id="260" r:id="rId8"/>
     <p:sldId id="262" r:id="rId9"/>
     <p:sldId id="261" r:id="rId10"/>
+    <p:sldId id="265" r:id="rId11"/>
+    <p:sldId id="266" r:id="rId12"/>
   </p:sldIdLst>
   <p:sldSz cx="12192000" cy="6858000"/>
   <p:notesSz cx="6858000" cy="9144000"/>
@@ -4112,6 +4114,316 @@
 </p:sld>
 </file>
 
+<file path=ppt/slides/slide10.xml><?xml version="1.0" encoding="utf-8"?>
+<p:sld xmlns:a="http://schemas.openxmlformats.org/drawingml/2006/main" xmlns:r="http://schemas.openxmlformats.org/officeDocument/2006/relationships" xmlns:p="http://schemas.openxmlformats.org/presentationml/2006/main">
+  <p:cSld>
+    <p:spTree>
+      <p:nvGrpSpPr>
+        <p:cNvPr id="1" name="">
+          <a:extLst>
+            <a:ext uri="{FF2B5EF4-FFF2-40B4-BE49-F238E27FC236}">
+              <a16:creationId xmlns:a16="http://schemas.microsoft.com/office/drawing/2014/main" id="{D728461F-0ADA-F2B0-A6E7-097DBD122703}"/>
+            </a:ext>
+          </a:extLst>
+        </p:cNvPr>
+        <p:cNvGrpSpPr/>
+        <p:nvPr/>
+      </p:nvGrpSpPr>
+      <p:grpSpPr>
+        <a:xfrm>
+          <a:off x="0" y="0"/>
+          <a:ext cx="0" cy="0"/>
+          <a:chOff x="0" y="0"/>
+          <a:chExt cx="0" cy="0"/>
+        </a:xfrm>
+      </p:grpSpPr>
+      <p:sp>
+        <p:nvSpPr>
+          <p:cNvPr id="2" name="Titre 1">
+            <a:extLst>
+              <a:ext uri="{FF2B5EF4-FFF2-40B4-BE49-F238E27FC236}">
+                <a16:creationId xmlns:a16="http://schemas.microsoft.com/office/drawing/2014/main" id="{C0CE1403-3D16-B3B5-E3F3-9368B3195007}"/>
+              </a:ext>
+            </a:extLst>
+          </p:cNvPr>
+          <p:cNvSpPr>
+            <a:spLocks noGrp="1"/>
+          </p:cNvSpPr>
+          <p:nvPr>
+            <p:ph type="title"/>
+          </p:nvPr>
+        </p:nvSpPr>
+        <p:spPr/>
+        <p:txBody>
+          <a:bodyPr/>
+          <a:lstStyle/>
+          <a:p>
+            <a:r>
+              <a:rPr lang="fr-FR" dirty="0"/>
+              <a:t>Vérification de code - Résultats :</a:t>
+            </a:r>
+          </a:p>
+        </p:txBody>
+      </p:sp>
+      <p:sp>
+        <p:nvSpPr>
+          <p:cNvPr id="3" name="Espace réservé du contenu 2">
+            <a:extLst>
+              <a:ext uri="{FF2B5EF4-FFF2-40B4-BE49-F238E27FC236}">
+                <a16:creationId xmlns:a16="http://schemas.microsoft.com/office/drawing/2014/main" id="{E699FE2D-5448-2AC8-260C-B0D0A0501122}"/>
+              </a:ext>
+            </a:extLst>
+          </p:cNvPr>
+          <p:cNvSpPr>
+            <a:spLocks noGrp="1"/>
+          </p:cNvSpPr>
+          <p:nvPr>
+            <p:ph idx="1"/>
+          </p:nvPr>
+        </p:nvSpPr>
+        <p:spPr/>
+        <p:txBody>
+          <a:bodyPr>
+            <a:normAutofit fontScale="92500" lnSpcReduction="20000"/>
+          </a:bodyPr>
+          <a:lstStyle/>
+          <a:p>
+            <a:r>
+              <a:rPr lang="fr-FR" dirty="0"/>
+              <a:t>Tests unitaires : rien de surprenant, objectif de conserver une pérennité et une stabilité du code malgré des changements.</a:t>
+            </a:r>
+          </a:p>
+          <a:p>
+            <a:r>
+              <a:rPr lang="fr-FR" dirty="0"/>
+              <a:t>Tests de vérification de code :</a:t>
+            </a:r>
+          </a:p>
+          <a:p>
+            <a:pPr lvl="1">
+              <a:buFont typeface="Courier New" panose="02070309020205020404" pitchFamily="49" charset="0"/>
+              <a:buChar char="o"/>
+            </a:pPr>
+            <a:r>
+              <a:rPr lang="fr-FR" dirty="0" err="1"/>
+              <a:t>testSymmetrie</a:t>
+            </a:r>
+            <a:r>
+              <a:rPr lang="fr-FR" dirty="0"/>
+              <a:t> :</a:t>
+            </a:r>
+          </a:p>
+          <a:p>
+            <a:pPr lvl="2">
+              <a:buFont typeface="Courier New" panose="02070309020205020404" pitchFamily="49" charset="0"/>
+              <a:buChar char="o"/>
+            </a:pPr>
+            <a:r>
+              <a:rPr lang="fr-FR" dirty="0"/>
+              <a:t> A révélé un </a:t>
+            </a:r>
+            <a:r>
+              <a:rPr lang="fr-FR" i="1" dirty="0"/>
+              <a:t>champ de mine</a:t>
+            </a:r>
+            <a:r>
+              <a:rPr lang="fr-FR" dirty="0"/>
+              <a:t> de bugs au sein du code.</a:t>
+            </a:r>
+          </a:p>
+          <a:p>
+            <a:pPr lvl="2">
+              <a:buFont typeface="Courier New" panose="02070309020205020404" pitchFamily="49" charset="0"/>
+              <a:buChar char="o"/>
+            </a:pPr>
+            <a:r>
+              <a:rPr lang="fr-FR" dirty="0"/>
+              <a:t>A permis de revisiter et de réécrire correctement les équations de discrétisation (que nous croyions déjà bonne).</a:t>
+            </a:r>
+          </a:p>
+          <a:p>
+            <a:pPr lvl="2">
+              <a:buFont typeface="Courier New" panose="02070309020205020404" pitchFamily="49" charset="0"/>
+              <a:buChar char="o"/>
+            </a:pPr>
+            <a:r>
+              <a:rPr lang="fr-FR" dirty="0"/>
+              <a:t>Problèmes d’indexation des points, notamment pour les conditions frontières aux </a:t>
+            </a:r>
+            <a:r>
+              <a:rPr lang="fr-FR" i="1" dirty="0"/>
+              <a:t>coins</a:t>
+            </a:r>
+            <a:r>
+              <a:rPr lang="fr-FR" dirty="0"/>
+              <a:t> du domaine.</a:t>
+            </a:r>
+          </a:p>
+          <a:p>
+            <a:pPr lvl="1">
+              <a:buFont typeface="Courier New" panose="02070309020205020404" pitchFamily="49" charset="0"/>
+              <a:buChar char="o"/>
+            </a:pPr>
+            <a:r>
+              <a:rPr lang="fr-FR" dirty="0" err="1"/>
+              <a:t>testInvarianceGaliléenne</a:t>
+            </a:r>
+            <a:r>
+              <a:rPr lang="fr-FR" dirty="0"/>
+              <a:t> :</a:t>
+            </a:r>
+          </a:p>
+          <a:p>
+            <a:pPr lvl="2">
+              <a:buFont typeface="Courier New" panose="02070309020205020404" pitchFamily="49" charset="0"/>
+              <a:buChar char="o"/>
+            </a:pPr>
+            <a:r>
+              <a:rPr lang="fr-FR" dirty="0"/>
+              <a:t>A révélé quelques subtilités du code qui on permis de l’améliorer, notamment la manière dont est calculé le rayon et la manière dont sont initialisés les paramètres.</a:t>
+            </a:r>
+          </a:p>
+          <a:p>
+            <a:pPr lvl="1">
+              <a:buFont typeface="Courier New" panose="02070309020205020404" pitchFamily="49" charset="0"/>
+              <a:buChar char="o"/>
+            </a:pPr>
+            <a:r>
+              <a:rPr lang="fr-FR" dirty="0" err="1"/>
+              <a:t>testConservationEnergie</a:t>
+            </a:r>
+            <a:r>
+              <a:rPr lang="fr-FR" dirty="0"/>
+              <a:t> :</a:t>
+            </a:r>
+          </a:p>
+          <a:p>
+            <a:pPr lvl="2">
+              <a:buFont typeface="Courier New" panose="02070309020205020404" pitchFamily="49" charset="0"/>
+              <a:buChar char="o"/>
+            </a:pPr>
+            <a:r>
+              <a:rPr lang="fr-FR" dirty="0"/>
+              <a:t>Un peu complexe à mettre en place. </a:t>
+            </a:r>
+          </a:p>
+          <a:p>
+            <a:pPr lvl="2">
+              <a:buFont typeface="Courier New" panose="02070309020205020404" pitchFamily="49" charset="0"/>
+              <a:buChar char="o"/>
+            </a:pPr>
+            <a:r>
+              <a:rPr lang="fr-FR" dirty="0"/>
+              <a:t>Flux de chaleur conservé de manière satisfaisante, au millième près.</a:t>
+            </a:r>
+          </a:p>
+        </p:txBody>
+      </p:sp>
+    </p:spTree>
+    <p:extLst>
+      <p:ext uri="{BB962C8B-B14F-4D97-AF65-F5344CB8AC3E}">
+        <p14:creationId xmlns:p14="http://schemas.microsoft.com/office/powerpoint/2010/main" val="845833206"/>
+      </p:ext>
+    </p:extLst>
+  </p:cSld>
+  <p:clrMapOvr>
+    <a:masterClrMapping/>
+  </p:clrMapOvr>
+</p:sld>
+</file>
+
+<file path=ppt/slides/slide11.xml><?xml version="1.0" encoding="utf-8"?>
+<p:sld xmlns:a="http://schemas.openxmlformats.org/drawingml/2006/main" xmlns:r="http://schemas.openxmlformats.org/officeDocument/2006/relationships" xmlns:p="http://schemas.openxmlformats.org/presentationml/2006/main">
+  <p:cSld>
+    <p:spTree>
+      <p:nvGrpSpPr>
+        <p:cNvPr id="1" name="">
+          <a:extLst>
+            <a:ext uri="{FF2B5EF4-FFF2-40B4-BE49-F238E27FC236}">
+              <a16:creationId xmlns:a16="http://schemas.microsoft.com/office/drawing/2014/main" id="{2D58B92D-CCAF-B970-4FDC-1318950469AF}"/>
+            </a:ext>
+          </a:extLst>
+        </p:cNvPr>
+        <p:cNvGrpSpPr/>
+        <p:nvPr/>
+      </p:nvGrpSpPr>
+      <p:grpSpPr>
+        <a:xfrm>
+          <a:off x="0" y="0"/>
+          <a:ext cx="0" cy="0"/>
+          <a:chOff x="0" y="0"/>
+          <a:chExt cx="0" cy="0"/>
+        </a:xfrm>
+      </p:grpSpPr>
+      <p:sp>
+        <p:nvSpPr>
+          <p:cNvPr id="2" name="Titre 1">
+            <a:extLst>
+              <a:ext uri="{FF2B5EF4-FFF2-40B4-BE49-F238E27FC236}">
+                <a16:creationId xmlns:a16="http://schemas.microsoft.com/office/drawing/2014/main" id="{D217134A-892B-0D3A-608A-3FB298A4622A}"/>
+              </a:ext>
+            </a:extLst>
+          </p:cNvPr>
+          <p:cNvSpPr>
+            <a:spLocks noGrp="1"/>
+          </p:cNvSpPr>
+          <p:nvPr>
+            <p:ph type="title"/>
+          </p:nvPr>
+        </p:nvSpPr>
+        <p:spPr/>
+        <p:txBody>
+          <a:bodyPr/>
+          <a:lstStyle/>
+          <a:p>
+            <a:r>
+              <a:rPr lang="fr-FR" dirty="0"/>
+              <a:t>Vérification de code - MMS :</a:t>
+            </a:r>
+          </a:p>
+        </p:txBody>
+      </p:sp>
+      <p:sp>
+        <p:nvSpPr>
+          <p:cNvPr id="3" name="Espace réservé du contenu 2">
+            <a:extLst>
+              <a:ext uri="{FF2B5EF4-FFF2-40B4-BE49-F238E27FC236}">
+                <a16:creationId xmlns:a16="http://schemas.microsoft.com/office/drawing/2014/main" id="{26B832D3-1AFE-0930-0EA6-79DF70C198F0}"/>
+              </a:ext>
+            </a:extLst>
+          </p:cNvPr>
+          <p:cNvSpPr>
+            <a:spLocks noGrp="1"/>
+          </p:cNvSpPr>
+          <p:nvPr>
+            <p:ph idx="1"/>
+          </p:nvPr>
+        </p:nvSpPr>
+        <p:spPr/>
+        <p:txBody>
+          <a:bodyPr/>
+          <a:lstStyle/>
+          <a:p>
+            <a:r>
+              <a:rPr lang="fr-FR" dirty="0"/>
+              <a:t>Implémentation de tests</a:t>
+            </a:r>
+          </a:p>
+        </p:txBody>
+      </p:sp>
+    </p:spTree>
+    <p:extLst>
+      <p:ext uri="{BB962C8B-B14F-4D97-AF65-F5344CB8AC3E}">
+        <p14:creationId xmlns:p14="http://schemas.microsoft.com/office/powerpoint/2010/main" val="3708032523"/>
+      </p:ext>
+    </p:extLst>
+  </p:cSld>
+  <p:clrMapOvr>
+    <a:masterClrMapping/>
+  </p:clrMapOvr>
+</p:sld>
+</file>
+
 <file path=ppt/slides/slide2.xml><?xml version="1.0" encoding="utf-8"?>
 <p:sld xmlns:a="http://schemas.openxmlformats.org/drawingml/2006/main" xmlns:r="http://schemas.openxmlformats.org/officeDocument/2006/relationships" xmlns:p="http://schemas.openxmlformats.org/presentationml/2006/main">
   <p:cSld>
@@ -15945,7 +16257,7 @@
                   <a:rPr lang="fr-FR" sz="2400" b="0" i="0" dirty="0">
                     <a:latin typeface="Cambria Math" panose="02040503050406030204" pitchFamily="18" charset="0"/>
                   </a:rPr>
-                  <a:t>Ordre 2 en espace (R et z) :</a:t>
+                  <a:t>Ordre 2 en espace (r et z) :</a:t>
                 </a:r>
               </a:p>
               <a:p>
@@ -20714,35 +21026,390 @@
           <a:bodyPr/>
           <a:lstStyle/>
           <a:p>
-            <a:endParaRPr lang="fr-FR"/>
+            <a:r>
+              <a:rPr lang="fr-FR" dirty="0"/>
+              <a:t>Vérification de code - Méthodologie :</a:t>
+            </a:r>
           </a:p>
         </p:txBody>
       </p:sp>
-      <p:sp>
-        <p:nvSpPr>
-          <p:cNvPr id="3" name="Espace réservé du contenu 2">
-            <a:extLst>
-              <a:ext uri="{FF2B5EF4-FFF2-40B4-BE49-F238E27FC236}">
-                <a16:creationId xmlns:a16="http://schemas.microsoft.com/office/drawing/2014/main" id="{4013CAEC-1AC4-C17B-EAFA-EC1AB7DBA279}"/>
-              </a:ext>
-            </a:extLst>
-          </p:cNvPr>
-          <p:cNvSpPr>
-            <a:spLocks noGrp="1"/>
-          </p:cNvSpPr>
-          <p:nvPr>
-            <p:ph idx="1"/>
-          </p:nvPr>
-        </p:nvSpPr>
-        <p:spPr/>
-        <p:txBody>
-          <a:bodyPr/>
-          <a:lstStyle/>
-          <a:p>
-            <a:endParaRPr lang="fr-FR"/>
-          </a:p>
-        </p:txBody>
-      </p:sp>
+      <mc:AlternateContent xmlns:mc="http://schemas.openxmlformats.org/markup-compatibility/2006">
+        <mc:Choice xmlns:a14="http://schemas.microsoft.com/office/drawing/2010/main" Requires="a14">
+          <p:sp>
+            <p:nvSpPr>
+              <p:cNvPr id="3" name="Espace réservé du contenu 2">
+                <a:extLst>
+                  <a:ext uri="{FF2B5EF4-FFF2-40B4-BE49-F238E27FC236}">
+                    <a16:creationId xmlns:a16="http://schemas.microsoft.com/office/drawing/2014/main" id="{4013CAEC-1AC4-C17B-EAFA-EC1AB7DBA279}"/>
+                  </a:ext>
+                </a:extLst>
+              </p:cNvPr>
+              <p:cNvSpPr>
+                <a:spLocks noGrp="1"/>
+              </p:cNvSpPr>
+              <p:nvPr>
+                <p:ph idx="1"/>
+              </p:nvPr>
+            </p:nvSpPr>
+            <p:spPr>
+              <a:xfrm>
+                <a:off x="838200" y="1825625"/>
+                <a:ext cx="10628376" cy="4351338"/>
+              </a:xfrm>
+            </p:spPr>
+            <p:txBody>
+              <a:bodyPr>
+                <a:normAutofit fontScale="77500" lnSpcReduction="20000"/>
+              </a:bodyPr>
+              <a:lstStyle/>
+              <a:p>
+                <a:pPr>
+                  <a:lnSpc>
+                    <a:spcPct val="124000"/>
+                  </a:lnSpc>
+                </a:pPr>
+                <a:r>
+                  <a:rPr lang="fr-FR" dirty="0"/>
+                  <a:t>Implémentation de divers tests avec le module </a:t>
+                </a:r>
+                <a:r>
+                  <a:rPr lang="fr-FR" i="1" dirty="0" err="1"/>
+                  <a:t>unittest</a:t>
+                </a:r>
+                <a:r>
+                  <a:rPr lang="fr-FR" dirty="0"/>
+                  <a:t> de python :</a:t>
+                </a:r>
+              </a:p>
+              <a:p>
+                <a:pPr lvl="1">
+                  <a:lnSpc>
+                    <a:spcPct val="124000"/>
+                  </a:lnSpc>
+                </a:pPr>
+                <a:r>
+                  <a:rPr lang="fr-FR" b="1" dirty="0"/>
+                  <a:t>Tests unitaires </a:t>
+                </a:r>
+                <a:r>
+                  <a:rPr lang="fr-FR" dirty="0"/>
+                  <a:t>pour les différentes fonctions du code implémentés :</a:t>
+                </a:r>
+              </a:p>
+              <a:p>
+                <a:pPr lvl="2">
+                  <a:lnSpc>
+                    <a:spcPct val="124000"/>
+                  </a:lnSpc>
+                  <a:buFont typeface="Courier New" panose="02070309020205020404" pitchFamily="49" charset="0"/>
+                  <a:buChar char="o"/>
+                </a:pPr>
+                <a:r>
+                  <a:rPr lang="fr-FR" b="1" dirty="0" err="1"/>
+                  <a:t>testPosition</a:t>
+                </a:r>
+                <a:r>
+                  <a:rPr lang="fr-FR" dirty="0"/>
+                  <a:t> : </a:t>
+                </a:r>
+                <a:r>
+                  <a:rPr lang="fr-CA" dirty="0"/>
+                  <a:t>Test la fonction Position avec des valeurs connues.</a:t>
+                </a:r>
+              </a:p>
+              <a:p>
+                <a:pPr lvl="2">
+                  <a:lnSpc>
+                    <a:spcPct val="124000"/>
+                  </a:lnSpc>
+                  <a:buFont typeface="Courier New" panose="02070309020205020404" pitchFamily="49" charset="0"/>
+                  <a:buChar char="o"/>
+                </a:pPr>
+                <a:r>
+                  <a:rPr lang="fr-CA" b="1" dirty="0" err="1"/>
+                  <a:t>testMilieu</a:t>
+                </a:r>
+                <a:r>
+                  <a:rPr lang="fr-CA" dirty="0"/>
+                  <a:t> : Test la fonction Milieu avec des valeurs connues.</a:t>
+                </a:r>
+              </a:p>
+              <a:p>
+                <a:pPr lvl="2">
+                  <a:lnSpc>
+                    <a:spcPct val="124000"/>
+                  </a:lnSpc>
+                  <a:buFont typeface="Courier New" panose="02070309020205020404" pitchFamily="49" charset="0"/>
+                  <a:buChar char="o"/>
+                </a:pPr>
+                <a:r>
+                  <a:rPr lang="fr-CA" b="1" dirty="0" err="1"/>
+                  <a:t>testTemperature</a:t>
+                </a:r>
+                <a:r>
+                  <a:rPr lang="fr-CA" dirty="0"/>
+                  <a:t> : Test la fonction </a:t>
+                </a:r>
+                <a:r>
+                  <a:rPr lang="fr-CA" dirty="0" err="1"/>
+                  <a:t>Temperature</a:t>
+                </a:r>
+                <a:r>
+                  <a:rPr lang="fr-CA" dirty="0"/>
+                  <a:t> avec des valeurs connues.</a:t>
+                </a:r>
+              </a:p>
+              <a:p>
+                <a:pPr lvl="1">
+                  <a:lnSpc>
+                    <a:spcPct val="124000"/>
+                  </a:lnSpc>
+                </a:pPr>
+                <a:r>
+                  <a:rPr lang="fr-CA" b="1" dirty="0"/>
+                  <a:t>Tests de vérification de code </a:t>
+                </a:r>
+                <a:r>
+                  <a:rPr lang="fr-CA" dirty="0"/>
+                  <a:t>implémentés :</a:t>
+                </a:r>
+              </a:p>
+              <a:p>
+                <a:pPr lvl="2">
+                  <a:lnSpc>
+                    <a:spcPct val="124000"/>
+                  </a:lnSpc>
+                  <a:buFont typeface="Courier New" panose="02070309020205020404" pitchFamily="49" charset="0"/>
+                  <a:buChar char="o"/>
+                </a:pPr>
+                <a:r>
+                  <a:rPr lang="fr-CA" b="1" dirty="0" err="1"/>
+                  <a:t>testSymetrie</a:t>
+                </a:r>
+                <a:r>
+                  <a:rPr lang="fr-CA" dirty="0"/>
+                  <a:t> : Test la simplification de la condition de symétrie en comparant le résultat symétrique au résultat du domaine complet.</a:t>
+                </a:r>
+              </a:p>
+              <a:p>
+                <a:pPr lvl="2">
+                  <a:lnSpc>
+                    <a:spcPct val="124000"/>
+                  </a:lnSpc>
+                  <a:buFont typeface="Courier New" panose="02070309020205020404" pitchFamily="49" charset="0"/>
+                  <a:buChar char="o"/>
+                </a:pPr>
+                <a:r>
+                  <a:rPr lang="fr-CA" b="1" dirty="0" err="1"/>
+                  <a:t>testConservationEnergie</a:t>
+                </a:r>
+                <a:r>
+                  <a:rPr lang="fr-CA" dirty="0"/>
+                  <a:t> : Test la conservation de l'énergie du solveur en effectuant un bilan </a:t>
+                </a:r>
+                <a:r>
+                  <a:rPr lang="fr-CA" dirty="0" err="1"/>
+                  <a:t>énegérique</a:t>
+                </a:r>
+                <a:r>
+                  <a:rPr lang="fr-CA" dirty="0"/>
+                  <a:t> à l'intérieur du domaine et sur la frontière. On cherche :</a:t>
+                </a:r>
+                <a:br>
+                  <a:rPr lang="fr-CA" dirty="0"/>
+                </a:br>
+                <a14:m>
+                  <m:oMath xmlns:m="http://schemas.openxmlformats.org/officeDocument/2006/math">
+                    <m:acc>
+                      <m:accPr>
+                        <m:chr m:val="̇"/>
+                        <m:ctrlPr>
+                          <a:rPr lang="fr-CA" i="1" smtClean="0">
+                            <a:latin typeface="Cambria Math" panose="02040503050406030204" pitchFamily="18" charset="0"/>
+                          </a:rPr>
+                        </m:ctrlPr>
+                      </m:accPr>
+                      <m:e>
+                        <m:sSub>
+                          <m:sSubPr>
+                            <m:ctrlPr>
+                              <a:rPr lang="fr-CA" b="0" i="1" smtClean="0">
+                                <a:latin typeface="Cambria Math" panose="02040503050406030204" pitchFamily="18" charset="0"/>
+                              </a:rPr>
+                            </m:ctrlPr>
+                          </m:sSubPr>
+                          <m:e>
+                            <m:r>
+                              <a:rPr lang="fr-CA" b="0" i="1" smtClean="0">
+                                <a:latin typeface="Cambria Math" panose="02040503050406030204" pitchFamily="18" charset="0"/>
+                              </a:rPr>
+                              <m:t>𝑞</m:t>
+                            </m:r>
+                          </m:e>
+                          <m:sub>
+                            <m:r>
+                              <a:rPr lang="fr-CA" b="0" i="1" smtClean="0">
+                                <a:latin typeface="Cambria Math" panose="02040503050406030204" pitchFamily="18" charset="0"/>
+                              </a:rPr>
+                              <m:t>𝑖𝑛𝑡</m:t>
+                            </m:r>
+                          </m:sub>
+                        </m:sSub>
+                      </m:e>
+                    </m:acc>
+                    <m:r>
+                      <a:rPr lang="fr-CA" i="1" smtClean="0">
+                        <a:latin typeface="Cambria Math" panose="02040503050406030204" pitchFamily="18" charset="0"/>
+                        <a:ea typeface="Cambria Math" panose="02040503050406030204" pitchFamily="18" charset="0"/>
+                      </a:rPr>
+                      <m:t>≈</m:t>
+                    </m:r>
+                    <m:acc>
+                      <m:accPr>
+                        <m:chr m:val="̇"/>
+                        <m:ctrlPr>
+                          <a:rPr lang="fr-CA" i="1">
+                            <a:latin typeface="Cambria Math" panose="02040503050406030204" pitchFamily="18" charset="0"/>
+                          </a:rPr>
+                        </m:ctrlPr>
+                      </m:accPr>
+                      <m:e>
+                        <m:sSub>
+                          <m:sSubPr>
+                            <m:ctrlPr>
+                              <a:rPr lang="fr-CA" i="1">
+                                <a:latin typeface="Cambria Math" panose="02040503050406030204" pitchFamily="18" charset="0"/>
+                              </a:rPr>
+                            </m:ctrlPr>
+                          </m:sSubPr>
+                          <m:e>
+                            <m:r>
+                              <a:rPr lang="fr-CA" i="1">
+                                <a:latin typeface="Cambria Math" panose="02040503050406030204" pitchFamily="18" charset="0"/>
+                              </a:rPr>
+                              <m:t>𝑞</m:t>
+                            </m:r>
+                          </m:e>
+                          <m:sub>
+                            <m:r>
+                              <a:rPr lang="fr-CA" i="1">
+                                <a:latin typeface="Cambria Math" panose="02040503050406030204" pitchFamily="18" charset="0"/>
+                              </a:rPr>
+                              <m:t>𝑓𝑟𝑜𝑛𝑡</m:t>
+                            </m:r>
+                          </m:sub>
+                        </m:sSub>
+                      </m:e>
+                    </m:acc>
+                  </m:oMath>
+                </a14:m>
+                <a:endParaRPr lang="fr-CA" dirty="0"/>
+              </a:p>
+              <a:p>
+                <a:pPr lvl="2">
+                  <a:lnSpc>
+                    <a:spcPct val="124000"/>
+                  </a:lnSpc>
+                  <a:buFont typeface="Courier New" panose="02070309020205020404" pitchFamily="49" charset="0"/>
+                  <a:buChar char="o"/>
+                </a:pPr>
+                <a:r>
+                  <a:rPr lang="fr-CA" b="1" dirty="0" err="1"/>
+                  <a:t>testInvarianceGalileenne</a:t>
+                </a:r>
+                <a:r>
+                  <a:rPr lang="fr-CA" dirty="0"/>
+                  <a:t> : Test l’invariance galiléenne du solveur par translation des coordonnées.</a:t>
+                </a:r>
+              </a:p>
+              <a:p>
+                <a:pPr lvl="1">
+                  <a:lnSpc>
+                    <a:spcPct val="124000"/>
+                  </a:lnSpc>
+                </a:pPr>
+                <a:r>
+                  <a:rPr lang="fr-CA" dirty="0"/>
+                  <a:t>Implémentation de la </a:t>
+                </a:r>
+                <a:r>
+                  <a:rPr lang="fr-CA" b="1" dirty="0"/>
+                  <a:t>MMS</a:t>
+                </a:r>
+                <a:r>
+                  <a:rPr lang="fr-CA" dirty="0"/>
+                  <a:t> pour évaluer l’ordre de convergence du solveur.</a:t>
+                </a:r>
+              </a:p>
+              <a:p>
+                <a:pPr lvl="2">
+                  <a:buFont typeface="Courier New" panose="02070309020205020404" pitchFamily="49" charset="0"/>
+                  <a:buChar char="o"/>
+                </a:pPr>
+                <a:endParaRPr lang="fr-CA" dirty="0"/>
+              </a:p>
+              <a:p>
+                <a:pPr lvl="2">
+                  <a:buFont typeface="Courier New" panose="02070309020205020404" pitchFamily="49" charset="0"/>
+                  <a:buChar char="o"/>
+                </a:pPr>
+                <a:endParaRPr lang="fr-FR" dirty="0"/>
+              </a:p>
+              <a:p>
+                <a:pPr lvl="2"/>
+                <a:endParaRPr lang="fr-FR" dirty="0"/>
+              </a:p>
+              <a:p>
+                <a:pPr lvl="2"/>
+                <a:endParaRPr lang="fr-FR" dirty="0"/>
+              </a:p>
+            </p:txBody>
+          </p:sp>
+        </mc:Choice>
+        <mc:Fallback>
+          <p:sp>
+            <p:nvSpPr>
+              <p:cNvPr id="3" name="Espace réservé du contenu 2">
+                <a:extLst>
+                  <a:ext uri="{FF2B5EF4-FFF2-40B4-BE49-F238E27FC236}">
+                    <a16:creationId xmlns:a16="http://schemas.microsoft.com/office/drawing/2014/main" id="{4013CAEC-1AC4-C17B-EAFA-EC1AB7DBA279}"/>
+                  </a:ext>
+                </a:extLst>
+              </p:cNvPr>
+              <p:cNvSpPr>
+                <a:spLocks noGrp="1" noRot="1" noChangeAspect="1" noMove="1" noResize="1" noEditPoints="1" noAdjustHandles="1" noChangeArrowheads="1" noChangeShapeType="1" noTextEdit="1"/>
+              </p:cNvSpPr>
+              <p:nvPr>
+                <p:ph idx="1"/>
+              </p:nvPr>
+            </p:nvSpPr>
+            <p:spPr>
+              <a:xfrm>
+                <a:off x="838200" y="1825625"/>
+                <a:ext cx="10628376" cy="4351338"/>
+              </a:xfrm>
+              <a:blipFill>
+                <a:blip r:embed="rId2"/>
+                <a:stretch>
+                  <a:fillRect l="-688" t="-700" r="-574"/>
+                </a:stretch>
+              </a:blipFill>
+            </p:spPr>
+            <p:txBody>
+              <a:bodyPr/>
+              <a:lstStyle/>
+              <a:p>
+                <a:r>
+                  <a:rPr lang="fr-CA">
+                    <a:noFill/>
+                  </a:rPr>
+                  <a:t> </a:t>
+                </a:r>
+              </a:p>
+            </p:txBody>
+          </p:sp>
+        </mc:Fallback>
+      </mc:AlternateContent>
     </p:spTree>
     <p:extLst>
       <p:ext uri="{BB962C8B-B14F-4D97-AF65-F5344CB8AC3E}">

--- a/projet_final/projet_final/MEC8211-Projet-final-Presentation.pptx
+++ b/projet_final/projet_final/MEC8211-Projet-final-Presentation.pptx
@@ -5,7 +5,7 @@
     <p:sldMasterId id="2147483648" r:id="rId1"/>
   </p:sldMasterIdLst>
   <p:notesMasterIdLst>
-    <p:notesMasterId r:id="rId13"/>
+    <p:notesMasterId r:id="rId15"/>
   </p:notesMasterIdLst>
   <p:sldIdLst>
     <p:sldId id="256" r:id="rId2"/>
@@ -19,6 +19,8 @@
     <p:sldId id="261" r:id="rId10"/>
     <p:sldId id="265" r:id="rId11"/>
     <p:sldId id="266" r:id="rId12"/>
+    <p:sldId id="267" r:id="rId13"/>
+    <p:sldId id="268" r:id="rId14"/>
   </p:sldIdLst>
   <p:sldSz cx="12192000" cy="6858000"/>
   <p:notesSz cx="6858000" cy="9144000"/>
@@ -4383,34 +4385,558 @@
           </a:p>
         </p:txBody>
       </p:sp>
-      <p:sp>
-        <p:nvSpPr>
-          <p:cNvPr id="3" name="Espace réservé du contenu 2">
-            <a:extLst>
-              <a:ext uri="{FF2B5EF4-FFF2-40B4-BE49-F238E27FC236}">
-                <a16:creationId xmlns:a16="http://schemas.microsoft.com/office/drawing/2014/main" id="{26B832D3-1AFE-0930-0EA6-79DF70C198F0}"/>
-              </a:ext>
-            </a:extLst>
-          </p:cNvPr>
-          <p:cNvSpPr>
-            <a:spLocks noGrp="1"/>
-          </p:cNvSpPr>
-          <p:nvPr>
-            <p:ph idx="1"/>
-          </p:nvPr>
-        </p:nvSpPr>
-        <p:spPr/>
-        <p:txBody>
-          <a:bodyPr/>
-          <a:lstStyle/>
-          <a:p>
-            <a:r>
-              <a:rPr lang="fr-FR" dirty="0"/>
-              <a:t>Implémentation de tests</a:t>
-            </a:r>
-          </a:p>
-        </p:txBody>
-      </p:sp>
+      <mc:AlternateContent xmlns:mc="http://schemas.openxmlformats.org/markup-compatibility/2006">
+        <mc:Choice xmlns:a14="http://schemas.microsoft.com/office/drawing/2010/main" Requires="a14">
+          <p:sp>
+            <p:nvSpPr>
+              <p:cNvPr id="3" name="Espace réservé du contenu 2">
+                <a:extLst>
+                  <a:ext uri="{FF2B5EF4-FFF2-40B4-BE49-F238E27FC236}">
+                    <a16:creationId xmlns:a16="http://schemas.microsoft.com/office/drawing/2014/main" id="{26B832D3-1AFE-0930-0EA6-79DF70C198F0}"/>
+                  </a:ext>
+                </a:extLst>
+              </p:cNvPr>
+              <p:cNvSpPr>
+                <a:spLocks noGrp="1"/>
+              </p:cNvSpPr>
+              <p:nvPr>
+                <p:ph idx="1"/>
+              </p:nvPr>
+            </p:nvSpPr>
+            <p:spPr/>
+            <p:txBody>
+              <a:bodyPr>
+                <a:normAutofit fontScale="92500" lnSpcReduction="20000"/>
+              </a:bodyPr>
+              <a:lstStyle/>
+              <a:p>
+                <a:r>
+                  <a:rPr lang="fr-FR" dirty="0"/>
+                  <a:t>Implémentation de la méthode des solutions manufacturés. </a:t>
+                </a:r>
+              </a:p>
+              <a:p>
+                <a:r>
+                  <a:rPr lang="fr-FR" dirty="0"/>
+                  <a:t>Changements nécessaires :</a:t>
+                </a:r>
+              </a:p>
+              <a:p>
+                <a:pPr lvl="1"/>
+                <a:r>
+                  <a:rPr lang="fr-FR" dirty="0"/>
+                  <a:t>Implémentation de conditions de Dirichlet aux frontières extérieures:</a:t>
+                </a:r>
+                <a:br>
+                  <a:rPr lang="fr-FR" dirty="0"/>
+                </a:br>
+                <a14:m>
+                  <m:oMath xmlns:m="http://schemas.openxmlformats.org/officeDocument/2006/math">
+                    <m:sSubSup>
+                      <m:sSubSupPr>
+                        <m:ctrlPr>
+                          <a:rPr lang="fr-CA" b="0" i="1" smtClean="0">
+                            <a:latin typeface="Cambria Math" panose="02040503050406030204" pitchFamily="18" charset="0"/>
+                          </a:rPr>
+                        </m:ctrlPr>
+                      </m:sSubSupPr>
+                      <m:e>
+                        <m:r>
+                          <a:rPr lang="fr-CA" b="0" i="1" smtClean="0">
+                            <a:latin typeface="Cambria Math" panose="02040503050406030204" pitchFamily="18" charset="0"/>
+                          </a:rPr>
+                          <m:t>𝑇</m:t>
+                        </m:r>
+                      </m:e>
+                      <m:sub>
+                        <m:r>
+                          <a:rPr lang="fr-CA" b="0" i="1" smtClean="0">
+                            <a:latin typeface="Cambria Math" panose="02040503050406030204" pitchFamily="18" charset="0"/>
+                          </a:rPr>
+                          <m:t>𝑟</m:t>
+                        </m:r>
+                        <m:r>
+                          <a:rPr lang="fr-CA" b="0" i="1" smtClean="0">
+                            <a:latin typeface="Cambria Math" panose="02040503050406030204" pitchFamily="18" charset="0"/>
+                          </a:rPr>
+                          <m:t>,</m:t>
+                        </m:r>
+                        <m:r>
+                          <a:rPr lang="fr-CA" b="0" i="1" smtClean="0">
+                            <a:latin typeface="Cambria Math" panose="02040503050406030204" pitchFamily="18" charset="0"/>
+                          </a:rPr>
+                          <m:t>𝑧</m:t>
+                        </m:r>
+                      </m:sub>
+                      <m:sup>
+                        <m:r>
+                          <a:rPr lang="fr-CA" b="0" i="1" smtClean="0">
+                            <a:latin typeface="Cambria Math" panose="02040503050406030204" pitchFamily="18" charset="0"/>
+                          </a:rPr>
+                          <m:t>𝑡</m:t>
+                        </m:r>
+                        <m:r>
+                          <a:rPr lang="fr-CA" b="0" i="1" smtClean="0">
+                            <a:latin typeface="Cambria Math" panose="02040503050406030204" pitchFamily="18" charset="0"/>
+                          </a:rPr>
+                          <m:t>+∆</m:t>
+                        </m:r>
+                        <m:r>
+                          <a:rPr lang="fr-CA" b="0" i="1" smtClean="0">
+                            <a:latin typeface="Cambria Math" panose="02040503050406030204" pitchFamily="18" charset="0"/>
+                          </a:rPr>
+                          <m:t>𝑡</m:t>
+                        </m:r>
+                      </m:sup>
+                    </m:sSubSup>
+                    <m:r>
+                      <a:rPr lang="fr-CA" b="0" i="1" smtClean="0">
+                        <a:latin typeface="Cambria Math" panose="02040503050406030204" pitchFamily="18" charset="0"/>
+                      </a:rPr>
+                      <m:t>=</m:t>
+                    </m:r>
+                    <m:sSubSup>
+                      <m:sSubSupPr>
+                        <m:ctrlPr>
+                          <a:rPr lang="fr-CA" b="0" i="1" smtClean="0">
+                            <a:latin typeface="Cambria Math" panose="02040503050406030204" pitchFamily="18" charset="0"/>
+                          </a:rPr>
+                        </m:ctrlPr>
+                      </m:sSubSupPr>
+                      <m:e>
+                        <m:sSub>
+                          <m:sSubPr>
+                            <m:ctrlPr>
+                              <a:rPr lang="fr-CA" b="0" i="1" smtClean="0">
+                                <a:latin typeface="Cambria Math" panose="02040503050406030204" pitchFamily="18" charset="0"/>
+                              </a:rPr>
+                            </m:ctrlPr>
+                          </m:sSubPr>
+                          <m:e>
+                            <m:r>
+                              <a:rPr lang="fr-CA" b="0" i="1" smtClean="0">
+                                <a:latin typeface="Cambria Math" panose="02040503050406030204" pitchFamily="18" charset="0"/>
+                              </a:rPr>
+                              <m:t>𝑇</m:t>
+                            </m:r>
+                          </m:e>
+                          <m:sub>
+                            <m:r>
+                              <a:rPr lang="fr-CA" b="0" i="1" smtClean="0">
+                                <a:latin typeface="Cambria Math" panose="02040503050406030204" pitchFamily="18" charset="0"/>
+                              </a:rPr>
+                              <m:t>𝑀𝑀𝑆</m:t>
+                            </m:r>
+                          </m:sub>
+                        </m:sSub>
+                      </m:e>
+                      <m:sub>
+                        <m:r>
+                          <a:rPr lang="fr-CA" b="0" i="1" smtClean="0">
+                            <a:latin typeface="Cambria Math" panose="02040503050406030204" pitchFamily="18" charset="0"/>
+                          </a:rPr>
+                          <m:t>𝑟</m:t>
+                        </m:r>
+                        <m:r>
+                          <a:rPr lang="fr-CA" b="0" i="1" smtClean="0">
+                            <a:latin typeface="Cambria Math" panose="02040503050406030204" pitchFamily="18" charset="0"/>
+                          </a:rPr>
+                          <m:t>,</m:t>
+                        </m:r>
+                        <m:r>
+                          <a:rPr lang="fr-CA" b="0" i="1" smtClean="0">
+                            <a:latin typeface="Cambria Math" panose="02040503050406030204" pitchFamily="18" charset="0"/>
+                          </a:rPr>
+                          <m:t>𝑧</m:t>
+                        </m:r>
+                      </m:sub>
+                      <m:sup>
+                        <m:r>
+                          <a:rPr lang="fr-CA" b="0" i="1" smtClean="0">
+                            <a:latin typeface="Cambria Math" panose="02040503050406030204" pitchFamily="18" charset="0"/>
+                          </a:rPr>
+                          <m:t>𝑡</m:t>
+                        </m:r>
+                        <m:r>
+                          <a:rPr lang="fr-CA" b="0" i="1" smtClean="0">
+                            <a:latin typeface="Cambria Math" panose="02040503050406030204" pitchFamily="18" charset="0"/>
+                          </a:rPr>
+                          <m:t>+∆</m:t>
+                        </m:r>
+                        <m:r>
+                          <a:rPr lang="fr-CA" b="0" i="1" smtClean="0">
+                            <a:latin typeface="Cambria Math" panose="02040503050406030204" pitchFamily="18" charset="0"/>
+                          </a:rPr>
+                          <m:t>𝑡</m:t>
+                        </m:r>
+                      </m:sup>
+                    </m:sSubSup>
+                  </m:oMath>
+                </a14:m>
+                <a:endParaRPr lang="fr-FR" dirty="0"/>
+              </a:p>
+              <a:p>
+                <a:pPr lvl="1"/>
+                <a:r>
+                  <a:rPr lang="fr-FR" dirty="0"/>
+                  <a:t>Implémentation d’un terme source dans l’équation du milieu du domaine.</a:t>
+                </a:r>
+              </a:p>
+              <a:p>
+                <a:pPr lvl="1"/>
+                <a:r>
+                  <a:rPr lang="fr-FR" dirty="0"/>
+                  <a:t>Repenser la classe </a:t>
+                </a:r>
+                <a:r>
+                  <a:rPr lang="fr-FR" i="1" dirty="0"/>
+                  <a:t>Paramètres</a:t>
+                </a:r>
+                <a:r>
+                  <a:rPr lang="fr-FR" dirty="0"/>
+                  <a:t> pour intégrer le tout et permettre à un utilisateur d’imposer une </a:t>
+                </a:r>
+                <a:r>
+                  <a:rPr lang="fr-FR" i="1" dirty="0"/>
+                  <a:t>MMS</a:t>
+                </a:r>
+                <a:r>
+                  <a:rPr lang="fr-FR" dirty="0"/>
+                  <a:t>, ou non.</a:t>
+                </a:r>
+              </a:p>
+              <a:p>
+                <a:r>
+                  <a:rPr lang="fr-FR" dirty="0"/>
+                  <a:t>Équation choisie :</a:t>
+                </a:r>
+                <a:br>
+                  <a:rPr lang="fr-FR" dirty="0"/>
+                </a:br>
+                <a14:m>
+                  <m:oMath xmlns:m="http://schemas.openxmlformats.org/officeDocument/2006/math">
+                    <m:sSub>
+                      <m:sSubPr>
+                        <m:ctrlPr>
+                          <a:rPr lang="fr-CA" b="0" i="1" smtClean="0">
+                            <a:latin typeface="Cambria Math" panose="02040503050406030204" pitchFamily="18" charset="0"/>
+                          </a:rPr>
+                        </m:ctrlPr>
+                      </m:sSubPr>
+                      <m:e>
+                        <m:r>
+                          <a:rPr lang="fr-CA" b="0" i="1" smtClean="0">
+                            <a:latin typeface="Cambria Math" panose="02040503050406030204" pitchFamily="18" charset="0"/>
+                          </a:rPr>
+                          <m:t>𝑇</m:t>
+                        </m:r>
+                      </m:e>
+                      <m:sub>
+                        <m:r>
+                          <a:rPr lang="fr-CA" b="0" i="1" smtClean="0">
+                            <a:latin typeface="Cambria Math" panose="02040503050406030204" pitchFamily="18" charset="0"/>
+                          </a:rPr>
+                          <m:t>𝑀𝑀𝑆</m:t>
+                        </m:r>
+                      </m:sub>
+                    </m:sSub>
+                    <m:r>
+                      <a:rPr lang="fr-CA" b="0" i="1" smtClean="0">
+                        <a:latin typeface="Cambria Math" panose="02040503050406030204" pitchFamily="18" charset="0"/>
+                      </a:rPr>
+                      <m:t>=</m:t>
+                    </m:r>
+                    <m:sSub>
+                      <m:sSubPr>
+                        <m:ctrlPr>
+                          <a:rPr lang="fr-CA" b="0" i="1" smtClean="0">
+                            <a:latin typeface="Cambria Math" panose="02040503050406030204" pitchFamily="18" charset="0"/>
+                          </a:rPr>
+                        </m:ctrlPr>
+                      </m:sSubPr>
+                      <m:e>
+                        <m:r>
+                          <a:rPr lang="fr-CA" b="0" i="1" smtClean="0">
+                            <a:latin typeface="Cambria Math" panose="02040503050406030204" pitchFamily="18" charset="0"/>
+                          </a:rPr>
+                          <m:t>𝑇</m:t>
+                        </m:r>
+                      </m:e>
+                      <m:sub>
+                        <m:r>
+                          <a:rPr lang="fr-CA" b="0" i="1" smtClean="0">
+                            <a:latin typeface="Cambria Math" panose="02040503050406030204" pitchFamily="18" charset="0"/>
+                          </a:rPr>
+                          <m:t>𝑟𝑒𝑓</m:t>
+                        </m:r>
+                      </m:sub>
+                    </m:sSub>
+                    <m:r>
+                      <a:rPr lang="fr-CA" b="0" i="1" smtClean="0">
+                        <a:latin typeface="Cambria Math" panose="02040503050406030204" pitchFamily="18" charset="0"/>
+                      </a:rPr>
+                      <m:t>+</m:t>
+                    </m:r>
+                    <m:r>
+                      <a:rPr lang="fr-CA" b="0" i="1" smtClean="0">
+                        <a:latin typeface="Cambria Math" panose="02040503050406030204" pitchFamily="18" charset="0"/>
+                      </a:rPr>
+                      <m:t>𝐴</m:t>
+                    </m:r>
+                    <m:sSup>
+                      <m:sSupPr>
+                        <m:ctrlPr>
+                          <a:rPr lang="fr-CA" b="0" i="1" smtClean="0">
+                            <a:latin typeface="Cambria Math" panose="02040503050406030204" pitchFamily="18" charset="0"/>
+                          </a:rPr>
+                        </m:ctrlPr>
+                      </m:sSupPr>
+                      <m:e>
+                        <m:r>
+                          <a:rPr lang="fr-CA" b="0" i="1" smtClean="0">
+                            <a:latin typeface="Cambria Math" panose="02040503050406030204" pitchFamily="18" charset="0"/>
+                          </a:rPr>
+                          <m:t>𝑒</m:t>
+                        </m:r>
+                      </m:e>
+                      <m:sup>
+                        <m:r>
+                          <a:rPr lang="fr-CA" b="0" i="1" smtClean="0">
+                            <a:latin typeface="Cambria Math" panose="02040503050406030204" pitchFamily="18" charset="0"/>
+                          </a:rPr>
+                          <m:t>(−</m:t>
+                        </m:r>
+                        <m:r>
+                          <a:rPr lang="fr-CA" b="0" i="1" smtClean="0">
+                            <a:latin typeface="Cambria Math" panose="02040503050406030204" pitchFamily="18" charset="0"/>
+                          </a:rPr>
+                          <m:t>𝑡</m:t>
+                        </m:r>
+                        <m:r>
+                          <a:rPr lang="fr-CA" b="0" i="1" smtClean="0">
+                            <a:latin typeface="Cambria Math" panose="02040503050406030204" pitchFamily="18" charset="0"/>
+                          </a:rPr>
+                          <m:t>/</m:t>
+                        </m:r>
+                        <m:sSub>
+                          <m:sSubPr>
+                            <m:ctrlPr>
+                              <a:rPr lang="fr-CA" b="0" i="1" smtClean="0">
+                                <a:latin typeface="Cambria Math" panose="02040503050406030204" pitchFamily="18" charset="0"/>
+                              </a:rPr>
+                            </m:ctrlPr>
+                          </m:sSubPr>
+                          <m:e>
+                            <m:r>
+                              <a:rPr lang="fr-CA" b="0" i="1" smtClean="0">
+                                <a:latin typeface="Cambria Math" panose="02040503050406030204" pitchFamily="18" charset="0"/>
+                              </a:rPr>
+                              <m:t>𝑡</m:t>
+                            </m:r>
+                          </m:e>
+                          <m:sub>
+                            <m:r>
+                              <a:rPr lang="fr-CA" b="0" i="1" smtClean="0">
+                                <a:latin typeface="Cambria Math" panose="02040503050406030204" pitchFamily="18" charset="0"/>
+                              </a:rPr>
+                              <m:t>𝑓𝑖𝑛𝑎𝑙</m:t>
+                            </m:r>
+                          </m:sub>
+                        </m:sSub>
+                        <m:r>
+                          <a:rPr lang="fr-CA" b="0" i="1" smtClean="0">
+                            <a:latin typeface="Cambria Math" panose="02040503050406030204" pitchFamily="18" charset="0"/>
+                          </a:rPr>
+                          <m:t>)</m:t>
+                        </m:r>
+                      </m:sup>
+                    </m:sSup>
+                    <m:func>
+                      <m:funcPr>
+                        <m:ctrlPr>
+                          <a:rPr lang="fr-CA" b="0" i="1" smtClean="0">
+                            <a:latin typeface="Cambria Math" panose="02040503050406030204" pitchFamily="18" charset="0"/>
+                          </a:rPr>
+                        </m:ctrlPr>
+                      </m:funcPr>
+                      <m:fName>
+                        <m:r>
+                          <m:rPr>
+                            <m:sty m:val="p"/>
+                          </m:rPr>
+                          <a:rPr lang="fr-CA" b="0" i="0" smtClean="0">
+                            <a:latin typeface="Cambria Math" panose="02040503050406030204" pitchFamily="18" charset="0"/>
+                          </a:rPr>
+                          <m:t>cos</m:t>
+                        </m:r>
+                      </m:fName>
+                      <m:e>
+                        <m:d>
+                          <m:dPr>
+                            <m:ctrlPr>
+                              <a:rPr lang="fr-CA" b="0" i="1" smtClean="0">
+                                <a:latin typeface="Cambria Math" panose="02040503050406030204" pitchFamily="18" charset="0"/>
+                              </a:rPr>
+                            </m:ctrlPr>
+                          </m:dPr>
+                          <m:e>
+                            <m:f>
+                              <m:fPr>
+                                <m:ctrlPr>
+                                  <a:rPr lang="fr-CA" b="0" i="1" smtClean="0">
+                                    <a:latin typeface="Cambria Math" panose="02040503050406030204" pitchFamily="18" charset="0"/>
+                                  </a:rPr>
+                                </m:ctrlPr>
+                              </m:fPr>
+                              <m:num>
+                                <m:r>
+                                  <a:rPr lang="fr-CA" b="0" i="1" smtClean="0">
+                                    <a:latin typeface="Cambria Math" panose="02040503050406030204" pitchFamily="18" charset="0"/>
+                                  </a:rPr>
+                                  <m:t>𝜋</m:t>
+                                </m:r>
+                                <m:r>
+                                  <a:rPr lang="fr-CA" b="0" i="1" smtClean="0">
+                                    <a:latin typeface="Cambria Math" panose="02040503050406030204" pitchFamily="18" charset="0"/>
+                                  </a:rPr>
+                                  <m:t>𝑟</m:t>
+                                </m:r>
+                              </m:num>
+                              <m:den>
+                                <m:r>
+                                  <a:rPr lang="fr-CA" b="0" i="1" smtClean="0">
+                                    <a:latin typeface="Cambria Math" panose="02040503050406030204" pitchFamily="18" charset="0"/>
+                                  </a:rPr>
+                                  <m:t>𝑅</m:t>
+                                </m:r>
+                              </m:den>
+                            </m:f>
+                          </m:e>
+                        </m:d>
+                      </m:e>
+                    </m:func>
+                    <m:r>
+                      <m:rPr>
+                        <m:sty m:val="p"/>
+                      </m:rPr>
+                      <a:rPr lang="fr-CA" b="0" i="0" smtClean="0">
+                        <a:latin typeface="Cambria Math" panose="02040503050406030204" pitchFamily="18" charset="0"/>
+                      </a:rPr>
+                      <m:t>cos</m:t>
+                    </m:r>
+                    <m:r>
+                      <a:rPr lang="fr-CA" b="0" i="1" smtClean="0">
+                        <a:latin typeface="Cambria Math" panose="02040503050406030204" pitchFamily="18" charset="0"/>
+                      </a:rPr>
+                      <m:t>⁡(</m:t>
+                    </m:r>
+                    <m:f>
+                      <m:fPr>
+                        <m:ctrlPr>
+                          <a:rPr lang="fr-CA" b="0" i="1" smtClean="0">
+                            <a:latin typeface="Cambria Math" panose="02040503050406030204" pitchFamily="18" charset="0"/>
+                          </a:rPr>
+                        </m:ctrlPr>
+                      </m:fPr>
+                      <m:num>
+                        <m:r>
+                          <a:rPr lang="fr-CA" b="0" i="1" smtClean="0">
+                            <a:latin typeface="Cambria Math" panose="02040503050406030204" pitchFamily="18" charset="0"/>
+                          </a:rPr>
+                          <m:t>𝜋</m:t>
+                        </m:r>
+                        <m:r>
+                          <a:rPr lang="fr-CA" b="0" i="1" smtClean="0">
+                            <a:latin typeface="Cambria Math" panose="02040503050406030204" pitchFamily="18" charset="0"/>
+                          </a:rPr>
+                          <m:t>𝑧</m:t>
+                        </m:r>
+                      </m:num>
+                      <m:den>
+                        <m:r>
+                          <a:rPr lang="fr-CA" b="0" i="1" smtClean="0">
+                            <a:latin typeface="Cambria Math" panose="02040503050406030204" pitchFamily="18" charset="0"/>
+                          </a:rPr>
+                          <m:t>𝐻</m:t>
+                        </m:r>
+                      </m:den>
+                    </m:f>
+                    <m:r>
+                      <a:rPr lang="fr-CA" b="0" i="1" smtClean="0">
+                        <a:latin typeface="Cambria Math" panose="02040503050406030204" pitchFamily="18" charset="0"/>
+                      </a:rPr>
+                      <m:t>)</m:t>
+                    </m:r>
+                  </m:oMath>
+                </a14:m>
+                <a:endParaRPr lang="fr-FR" dirty="0"/>
+              </a:p>
+              <a:p>
+                <a:pPr marL="914400" lvl="2" indent="0">
+                  <a:buNone/>
+                </a:pPr>
+                <a:r>
+                  <a:rPr lang="fr-FR" dirty="0"/>
+                  <a:t>Ici, on choisit 2 cosinus de manière à forcer l’équation a être symétrique aux frontières r=0, z=0.</a:t>
+                </a:r>
+              </a:p>
+              <a:p>
+                <a:r>
+                  <a:rPr lang="fr-FR" dirty="0"/>
+                  <a:t>Le calcul du terme source est fait à l’aide de la librairie </a:t>
+                </a:r>
+                <a:r>
+                  <a:rPr lang="fr-FR" i="1" dirty="0" err="1"/>
+                  <a:t>sympy</a:t>
+                </a:r>
+                <a:r>
+                  <a:rPr lang="fr-FR" dirty="0"/>
+                  <a:t> dans Python. Les développements ne seront donc pas présentés.</a:t>
+                </a:r>
+              </a:p>
+            </p:txBody>
+          </p:sp>
+        </mc:Choice>
+        <mc:Fallback>
+          <p:sp>
+            <p:nvSpPr>
+              <p:cNvPr id="3" name="Espace réservé du contenu 2">
+                <a:extLst>
+                  <a:ext uri="{FF2B5EF4-FFF2-40B4-BE49-F238E27FC236}">
+                    <a16:creationId xmlns:a16="http://schemas.microsoft.com/office/drawing/2014/main" id="{26B832D3-1AFE-0930-0EA6-79DF70C198F0}"/>
+                  </a:ext>
+                </a:extLst>
+              </p:cNvPr>
+              <p:cNvSpPr>
+                <a:spLocks noGrp="1" noRot="1" noChangeAspect="1" noMove="1" noResize="1" noEditPoints="1" noAdjustHandles="1" noChangeArrowheads="1" noChangeShapeType="1" noTextEdit="1"/>
+              </p:cNvSpPr>
+              <p:nvPr>
+                <p:ph idx="1"/>
+              </p:nvPr>
+            </p:nvSpPr>
+            <p:spPr>
+              <a:blipFill>
+                <a:blip r:embed="rId2"/>
+                <a:stretch>
+                  <a:fillRect l="-928" t="-3501" r="-464" b="-1401"/>
+                </a:stretch>
+              </a:blipFill>
+            </p:spPr>
+            <p:txBody>
+              <a:bodyPr/>
+              <a:lstStyle/>
+              <a:p>
+                <a:r>
+                  <a:rPr lang="fr-CA">
+                    <a:noFill/>
+                  </a:rPr>
+                  <a:t> </a:t>
+                </a:r>
+              </a:p>
+            </p:txBody>
+          </p:sp>
+        </mc:Fallback>
+      </mc:AlternateContent>
     </p:spTree>
     <p:extLst>
       <p:ext uri="{BB962C8B-B14F-4D97-AF65-F5344CB8AC3E}">
@@ -4421,6 +4947,664 @@
   <p:clrMapOvr>
     <a:masterClrMapping/>
   </p:clrMapOvr>
+</p:sld>
+</file>
+
+<file path=ppt/slides/slide12.xml><?xml version="1.0" encoding="utf-8"?>
+<p:sld xmlns:a="http://schemas.openxmlformats.org/drawingml/2006/main" xmlns:r="http://schemas.openxmlformats.org/officeDocument/2006/relationships" xmlns:p="http://schemas.openxmlformats.org/presentationml/2006/main">
+  <p:cSld>
+    <p:spTree>
+      <p:nvGrpSpPr>
+        <p:cNvPr id="1" name="">
+          <a:extLst>
+            <a:ext uri="{FF2B5EF4-FFF2-40B4-BE49-F238E27FC236}">
+              <a16:creationId xmlns:a16="http://schemas.microsoft.com/office/drawing/2014/main" id="{4810F47C-EA86-426C-9E31-441BF44D6DBA}"/>
+            </a:ext>
+          </a:extLst>
+        </p:cNvPr>
+        <p:cNvGrpSpPr/>
+        <p:nvPr/>
+      </p:nvGrpSpPr>
+      <p:grpSpPr>
+        <a:xfrm>
+          <a:off x="0" y="0"/>
+          <a:ext cx="0" cy="0"/>
+          <a:chOff x="0" y="0"/>
+          <a:chExt cx="0" cy="0"/>
+        </a:xfrm>
+      </p:grpSpPr>
+      <p:sp>
+        <p:nvSpPr>
+          <p:cNvPr id="2" name="Titre 1">
+            <a:extLst>
+              <a:ext uri="{FF2B5EF4-FFF2-40B4-BE49-F238E27FC236}">
+                <a16:creationId xmlns:a16="http://schemas.microsoft.com/office/drawing/2014/main" id="{15732BA4-6A05-72B7-DA5A-7F788E2CAD71}"/>
+              </a:ext>
+            </a:extLst>
+          </p:cNvPr>
+          <p:cNvSpPr>
+            <a:spLocks noGrp="1"/>
+          </p:cNvSpPr>
+          <p:nvPr>
+            <p:ph type="title"/>
+          </p:nvPr>
+        </p:nvSpPr>
+        <p:spPr/>
+        <p:txBody>
+          <a:bodyPr/>
+          <a:lstStyle/>
+          <a:p>
+            <a:r>
+              <a:rPr lang="fr-FR" dirty="0"/>
+              <a:t>Vérification de code – MMS – Résultats :</a:t>
+            </a:r>
+          </a:p>
+        </p:txBody>
+      </p:sp>
+      <p:pic>
+        <p:nvPicPr>
+          <p:cNvPr id="5" name="Espace réservé du contenu 4">
+            <a:extLst>
+              <a:ext uri="{FF2B5EF4-FFF2-40B4-BE49-F238E27FC236}">
+                <a16:creationId xmlns:a16="http://schemas.microsoft.com/office/drawing/2014/main" id="{C16CC2A3-774C-4A0E-8885-22E49233D892}"/>
+              </a:ext>
+            </a:extLst>
+          </p:cNvPr>
+          <p:cNvPicPr>
+            <a:picLocks noGrp="1" noChangeAspect="1"/>
+          </p:cNvPicPr>
+          <p:nvPr>
+            <p:ph idx="1"/>
+          </p:nvPr>
+        </p:nvPicPr>
+        <p:blipFill>
+          <a:blip r:embed="rId2">
+            <a:extLst>
+              <a:ext uri="{28A0092B-C50C-407E-A947-70E740481C1C}">
+                <a14:useLocalDpi xmlns:a14="http://schemas.microsoft.com/office/drawing/2010/main" val="0"/>
+              </a:ext>
+            </a:extLst>
+          </a:blip>
+          <a:stretch>
+            <a:fillRect/>
+          </a:stretch>
+        </p:blipFill>
+        <p:spPr>
+          <a:xfrm>
+            <a:off x="1902354" y="1690688"/>
+            <a:ext cx="8387292" cy="5032375"/>
+          </a:xfrm>
+          <a:prstGeom prst="rect">
+            <a:avLst/>
+          </a:prstGeom>
+        </p:spPr>
+      </p:pic>
+      <p:grpSp>
+        <p:nvGrpSpPr>
+          <p:cNvPr id="10" name="Groupe 9">
+            <a:extLst>
+              <a:ext uri="{FF2B5EF4-FFF2-40B4-BE49-F238E27FC236}">
+                <a16:creationId xmlns:a16="http://schemas.microsoft.com/office/drawing/2014/main" id="{0733C7CD-F52D-5C54-C2B4-44406B95C157}"/>
+              </a:ext>
+            </a:extLst>
+          </p:cNvPr>
+          <p:cNvGrpSpPr/>
+          <p:nvPr/>
+        </p:nvGrpSpPr>
+        <p:grpSpPr>
+          <a:xfrm>
+            <a:off x="311285" y="5077838"/>
+            <a:ext cx="3385226" cy="1448624"/>
+            <a:chOff x="311285" y="5077838"/>
+            <a:chExt cx="3385226" cy="1448624"/>
+          </a:xfrm>
+        </p:grpSpPr>
+        <p:sp>
+          <p:nvSpPr>
+            <p:cNvPr id="6" name="Rectangle 5">
+              <a:extLst>
+                <a:ext uri="{FF2B5EF4-FFF2-40B4-BE49-F238E27FC236}">
+                  <a16:creationId xmlns:a16="http://schemas.microsoft.com/office/drawing/2014/main" id="{D6CB769F-2C76-74CB-5981-7343AE429DE5}"/>
+                </a:ext>
+              </a:extLst>
+            </p:cNvPr>
+            <p:cNvSpPr/>
+            <p:nvPr/>
+          </p:nvSpPr>
+          <p:spPr>
+            <a:xfrm>
+              <a:off x="2373549" y="5077838"/>
+              <a:ext cx="1322962" cy="398834"/>
+            </a:xfrm>
+            <a:prstGeom prst="rect">
+              <a:avLst/>
+            </a:prstGeom>
+            <a:noFill/>
+            <a:ln w="57150">
+              <a:solidFill>
+                <a:schemeClr val="accent6">
+                  <a:lumMod val="60000"/>
+                  <a:lumOff val="40000"/>
+                </a:schemeClr>
+              </a:solidFill>
+            </a:ln>
+          </p:spPr>
+          <p:style>
+            <a:lnRef idx="2">
+              <a:schemeClr val="accent6">
+                <a:shade val="15000"/>
+              </a:schemeClr>
+            </a:lnRef>
+            <a:fillRef idx="1">
+              <a:schemeClr val="accent6"/>
+            </a:fillRef>
+            <a:effectRef idx="0">
+              <a:schemeClr val="accent6"/>
+            </a:effectRef>
+            <a:fontRef idx="minor">
+              <a:schemeClr val="lt1"/>
+            </a:fontRef>
+          </p:style>
+          <p:txBody>
+            <a:bodyPr rtlCol="0" anchor="ctr"/>
+            <a:lstStyle/>
+            <a:p>
+              <a:pPr algn="ctr"/>
+              <a:endParaRPr lang="fr-CA"/>
+            </a:p>
+          </p:txBody>
+        </p:sp>
+        <p:cxnSp>
+          <p:nvCxnSpPr>
+            <p:cNvPr id="8" name="Connecteur droit avec flèche 7">
+              <a:extLst>
+                <a:ext uri="{FF2B5EF4-FFF2-40B4-BE49-F238E27FC236}">
+                  <a16:creationId xmlns:a16="http://schemas.microsoft.com/office/drawing/2014/main" id="{CEEDC86A-29FF-1B82-1333-62836274B581}"/>
+                </a:ext>
+              </a:extLst>
+            </p:cNvPr>
+            <p:cNvCxnSpPr>
+              <a:stCxn id="6" idx="1"/>
+            </p:cNvCxnSpPr>
+            <p:nvPr/>
+          </p:nvCxnSpPr>
+          <p:spPr>
+            <a:xfrm flipH="1">
+              <a:off x="1322962" y="5277255"/>
+              <a:ext cx="1050587" cy="325877"/>
+            </a:xfrm>
+            <a:prstGeom prst="straightConnector1">
+              <a:avLst/>
+            </a:prstGeom>
+            <a:ln>
+              <a:tailEnd type="triangle"/>
+            </a:ln>
+          </p:spPr>
+          <p:style>
+            <a:lnRef idx="2">
+              <a:schemeClr val="accent1"/>
+            </a:lnRef>
+            <a:fillRef idx="0">
+              <a:schemeClr val="accent1"/>
+            </a:fillRef>
+            <a:effectRef idx="1">
+              <a:schemeClr val="accent1"/>
+            </a:effectRef>
+            <a:fontRef idx="minor">
+              <a:schemeClr val="tx1"/>
+            </a:fontRef>
+          </p:style>
+        </p:cxnSp>
+        <p:sp>
+          <p:nvSpPr>
+            <p:cNvPr id="9" name="ZoneTexte 8">
+              <a:extLst>
+                <a:ext uri="{FF2B5EF4-FFF2-40B4-BE49-F238E27FC236}">
+                  <a16:creationId xmlns:a16="http://schemas.microsoft.com/office/drawing/2014/main" id="{3AD781C3-D9E5-9A25-B650-D4D2A98A52FC}"/>
+                </a:ext>
+              </a:extLst>
+            </p:cNvPr>
+            <p:cNvSpPr txBox="1"/>
+            <p:nvPr/>
+          </p:nvSpPr>
+          <p:spPr>
+            <a:xfrm>
+              <a:off x="311285" y="5603132"/>
+              <a:ext cx="1741251" cy="923330"/>
+            </a:xfrm>
+            <a:prstGeom prst="rect">
+              <a:avLst/>
+            </a:prstGeom>
+            <a:noFill/>
+          </p:spPr>
+          <p:txBody>
+            <a:bodyPr wrap="square" rtlCol="0">
+              <a:spAutoFit/>
+            </a:bodyPr>
+            <a:lstStyle/>
+            <a:p>
+              <a:r>
+                <a:rPr lang="fr-CA" dirty="0"/>
+                <a:t>Discrétisation spatiale prend le dessus</a:t>
+              </a:r>
+            </a:p>
+          </p:txBody>
+        </p:sp>
+      </p:grpSp>
+    </p:spTree>
+    <p:extLst>
+      <p:ext uri="{BB962C8B-B14F-4D97-AF65-F5344CB8AC3E}">
+        <p14:creationId xmlns:p14="http://schemas.microsoft.com/office/powerpoint/2010/main" val="969147623"/>
+      </p:ext>
+    </p:extLst>
+  </p:cSld>
+  <p:clrMapOvr>
+    <a:masterClrMapping/>
+  </p:clrMapOvr>
+  <p:timing>
+    <p:tnLst>
+      <p:par>
+        <p:cTn id="1" dur="indefinite" restart="never" nodeType="tmRoot">
+          <p:childTnLst>
+            <p:seq concurrent="1" nextAc="seek">
+              <p:cTn id="2" dur="indefinite" nodeType="mainSeq">
+                <p:childTnLst>
+                  <p:par>
+                    <p:cTn id="3" fill="hold">
+                      <p:stCondLst>
+                        <p:cond delay="indefinite"/>
+                      </p:stCondLst>
+                      <p:childTnLst>
+                        <p:par>
+                          <p:cTn id="4" fill="hold">
+                            <p:stCondLst>
+                              <p:cond delay="0"/>
+                            </p:stCondLst>
+                            <p:childTnLst>
+                              <p:par>
+                                <p:cTn id="5" presetID="1" presetClass="entr" presetSubtype="0" fill="hold" nodeType="clickEffect">
+                                  <p:stCondLst>
+                                    <p:cond delay="0"/>
+                                  </p:stCondLst>
+                                  <p:childTnLst>
+                                    <p:set>
+                                      <p:cBhvr>
+                                        <p:cTn id="6" dur="1" fill="hold">
+                                          <p:stCondLst>
+                                            <p:cond delay="0"/>
+                                          </p:stCondLst>
+                                        </p:cTn>
+                                        <p:tgtEl>
+                                          <p:spTgt spid="10"/>
+                                        </p:tgtEl>
+                                        <p:attrNameLst>
+                                          <p:attrName>style.visibility</p:attrName>
+                                        </p:attrNameLst>
+                                      </p:cBhvr>
+                                      <p:to>
+                                        <p:strVal val="visible"/>
+                                      </p:to>
+                                    </p:set>
+                                  </p:childTnLst>
+                                </p:cTn>
+                              </p:par>
+                            </p:childTnLst>
+                          </p:cTn>
+                        </p:par>
+                      </p:childTnLst>
+                    </p:cTn>
+                  </p:par>
+                </p:childTnLst>
+              </p:cTn>
+              <p:prevCondLst>
+                <p:cond evt="onPrev" delay="0">
+                  <p:tgtEl>
+                    <p:sldTgt/>
+                  </p:tgtEl>
+                </p:cond>
+              </p:prevCondLst>
+              <p:nextCondLst>
+                <p:cond evt="onNext" delay="0">
+                  <p:tgtEl>
+                    <p:sldTgt/>
+                  </p:tgtEl>
+                </p:cond>
+              </p:nextCondLst>
+            </p:seq>
+          </p:childTnLst>
+        </p:cTn>
+      </p:par>
+    </p:tnLst>
+  </p:timing>
+</p:sld>
+</file>
+
+<file path=ppt/slides/slide13.xml><?xml version="1.0" encoding="utf-8"?>
+<p:sld xmlns:a="http://schemas.openxmlformats.org/drawingml/2006/main" xmlns:r="http://schemas.openxmlformats.org/officeDocument/2006/relationships" xmlns:p="http://schemas.openxmlformats.org/presentationml/2006/main">
+  <p:cSld>
+    <p:spTree>
+      <p:nvGrpSpPr>
+        <p:cNvPr id="1" name="">
+          <a:extLst>
+            <a:ext uri="{FF2B5EF4-FFF2-40B4-BE49-F238E27FC236}">
+              <a16:creationId xmlns:a16="http://schemas.microsoft.com/office/drawing/2014/main" id="{0714F719-4F8B-B0BF-A652-91D4A8E1C2E6}"/>
+            </a:ext>
+          </a:extLst>
+        </p:cNvPr>
+        <p:cNvGrpSpPr/>
+        <p:nvPr/>
+      </p:nvGrpSpPr>
+      <p:grpSpPr>
+        <a:xfrm>
+          <a:off x="0" y="0"/>
+          <a:ext cx="0" cy="0"/>
+          <a:chOff x="0" y="0"/>
+          <a:chExt cx="0" cy="0"/>
+        </a:xfrm>
+      </p:grpSpPr>
+      <p:sp>
+        <p:nvSpPr>
+          <p:cNvPr id="2" name="Titre 1">
+            <a:extLst>
+              <a:ext uri="{FF2B5EF4-FFF2-40B4-BE49-F238E27FC236}">
+                <a16:creationId xmlns:a16="http://schemas.microsoft.com/office/drawing/2014/main" id="{BF6CDAA5-638A-B4E8-6AFE-7C186CA43D2B}"/>
+              </a:ext>
+            </a:extLst>
+          </p:cNvPr>
+          <p:cNvSpPr>
+            <a:spLocks noGrp="1"/>
+          </p:cNvSpPr>
+          <p:nvPr>
+            <p:ph type="title"/>
+          </p:nvPr>
+        </p:nvSpPr>
+        <p:spPr/>
+        <p:txBody>
+          <a:bodyPr/>
+          <a:lstStyle/>
+          <a:p>
+            <a:r>
+              <a:rPr lang="fr-FR" dirty="0"/>
+              <a:t>Vérification de code – MMS – Résultats :</a:t>
+            </a:r>
+          </a:p>
+        </p:txBody>
+      </p:sp>
+      <p:pic>
+        <p:nvPicPr>
+          <p:cNvPr id="7" name="Espace réservé du contenu 6">
+            <a:extLst>
+              <a:ext uri="{FF2B5EF4-FFF2-40B4-BE49-F238E27FC236}">
+                <a16:creationId xmlns:a16="http://schemas.microsoft.com/office/drawing/2014/main" id="{6B8E9D59-8E3B-8479-E1C7-62F3A39A5D2D}"/>
+              </a:ext>
+            </a:extLst>
+          </p:cNvPr>
+          <p:cNvPicPr>
+            <a:picLocks noGrp="1" noChangeAspect="1"/>
+          </p:cNvPicPr>
+          <p:nvPr>
+            <p:ph idx="1"/>
+          </p:nvPr>
+        </p:nvPicPr>
+        <p:blipFill>
+          <a:blip r:embed="rId2">
+            <a:extLst>
+              <a:ext uri="{28A0092B-C50C-407E-A947-70E740481C1C}">
+                <a14:useLocalDpi xmlns:a14="http://schemas.microsoft.com/office/drawing/2010/main" val="0"/>
+              </a:ext>
+            </a:extLst>
+          </a:blip>
+          <a:stretch>
+            <a:fillRect/>
+          </a:stretch>
+        </p:blipFill>
+        <p:spPr>
+          <a:xfrm>
+            <a:off x="1902000" y="1690688"/>
+            <a:ext cx="8388000" cy="5032800"/>
+          </a:xfrm>
+          <a:prstGeom prst="rect">
+            <a:avLst/>
+          </a:prstGeom>
+        </p:spPr>
+      </p:pic>
+      <p:grpSp>
+        <p:nvGrpSpPr>
+          <p:cNvPr id="8" name="Groupe 7">
+            <a:extLst>
+              <a:ext uri="{FF2B5EF4-FFF2-40B4-BE49-F238E27FC236}">
+                <a16:creationId xmlns:a16="http://schemas.microsoft.com/office/drawing/2014/main" id="{4C4CFFBA-3429-F2F4-7F11-D968906589E4}"/>
+              </a:ext>
+            </a:extLst>
+          </p:cNvPr>
+          <p:cNvGrpSpPr/>
+          <p:nvPr/>
+        </p:nvGrpSpPr>
+        <p:grpSpPr>
+          <a:xfrm>
+            <a:off x="209387" y="3016251"/>
+            <a:ext cx="3385226" cy="1725623"/>
+            <a:chOff x="311285" y="5077838"/>
+            <a:chExt cx="3385226" cy="1725623"/>
+          </a:xfrm>
+        </p:grpSpPr>
+        <p:sp>
+          <p:nvSpPr>
+            <p:cNvPr id="9" name="Rectangle 8">
+              <a:extLst>
+                <a:ext uri="{FF2B5EF4-FFF2-40B4-BE49-F238E27FC236}">
+                  <a16:creationId xmlns:a16="http://schemas.microsoft.com/office/drawing/2014/main" id="{B57A2EE6-1A05-1DB3-5DAA-1C28E8D82F63}"/>
+                </a:ext>
+              </a:extLst>
+            </p:cNvPr>
+            <p:cNvSpPr/>
+            <p:nvPr/>
+          </p:nvSpPr>
+          <p:spPr>
+            <a:xfrm>
+              <a:off x="2373549" y="5077838"/>
+              <a:ext cx="1322962" cy="398834"/>
+            </a:xfrm>
+            <a:prstGeom prst="rect">
+              <a:avLst/>
+            </a:prstGeom>
+            <a:noFill/>
+            <a:ln w="57150">
+              <a:solidFill>
+                <a:schemeClr val="accent6">
+                  <a:lumMod val="60000"/>
+                  <a:lumOff val="40000"/>
+                </a:schemeClr>
+              </a:solidFill>
+            </a:ln>
+          </p:spPr>
+          <p:style>
+            <a:lnRef idx="2">
+              <a:schemeClr val="accent6">
+                <a:shade val="15000"/>
+              </a:schemeClr>
+            </a:lnRef>
+            <a:fillRef idx="1">
+              <a:schemeClr val="accent6"/>
+            </a:fillRef>
+            <a:effectRef idx="0">
+              <a:schemeClr val="accent6"/>
+            </a:effectRef>
+            <a:fontRef idx="minor">
+              <a:schemeClr val="lt1"/>
+            </a:fontRef>
+          </p:style>
+          <p:txBody>
+            <a:bodyPr rtlCol="0" anchor="ctr"/>
+            <a:lstStyle/>
+            <a:p>
+              <a:pPr algn="ctr"/>
+              <a:endParaRPr lang="fr-CA"/>
+            </a:p>
+          </p:txBody>
+        </p:sp>
+        <p:cxnSp>
+          <p:nvCxnSpPr>
+            <p:cNvPr id="10" name="Connecteur droit avec flèche 9">
+              <a:extLst>
+                <a:ext uri="{FF2B5EF4-FFF2-40B4-BE49-F238E27FC236}">
+                  <a16:creationId xmlns:a16="http://schemas.microsoft.com/office/drawing/2014/main" id="{EE0D9918-4259-5FE5-2239-A38236148190}"/>
+                </a:ext>
+              </a:extLst>
+            </p:cNvPr>
+            <p:cNvCxnSpPr>
+              <a:stCxn id="9" idx="1"/>
+            </p:cNvCxnSpPr>
+            <p:nvPr/>
+          </p:nvCxnSpPr>
+          <p:spPr>
+            <a:xfrm flipH="1">
+              <a:off x="1322962" y="5277255"/>
+              <a:ext cx="1050587" cy="325877"/>
+            </a:xfrm>
+            <a:prstGeom prst="straightConnector1">
+              <a:avLst/>
+            </a:prstGeom>
+            <a:ln>
+              <a:tailEnd type="triangle"/>
+            </a:ln>
+          </p:spPr>
+          <p:style>
+            <a:lnRef idx="2">
+              <a:schemeClr val="accent1"/>
+            </a:lnRef>
+            <a:fillRef idx="0">
+              <a:schemeClr val="accent1"/>
+            </a:fillRef>
+            <a:effectRef idx="1">
+              <a:schemeClr val="accent1"/>
+            </a:effectRef>
+            <a:fontRef idx="minor">
+              <a:schemeClr val="tx1"/>
+            </a:fontRef>
+          </p:style>
+        </p:cxnSp>
+        <p:sp>
+          <p:nvSpPr>
+            <p:cNvPr id="11" name="ZoneTexte 10">
+              <a:extLst>
+                <a:ext uri="{FF2B5EF4-FFF2-40B4-BE49-F238E27FC236}">
+                  <a16:creationId xmlns:a16="http://schemas.microsoft.com/office/drawing/2014/main" id="{FD1FA1AC-0CBB-05F3-2DE3-6DE994D15BDB}"/>
+                </a:ext>
+              </a:extLst>
+            </p:cNvPr>
+            <p:cNvSpPr txBox="1"/>
+            <p:nvPr/>
+          </p:nvSpPr>
+          <p:spPr>
+            <a:xfrm>
+              <a:off x="311285" y="5603132"/>
+              <a:ext cx="1741251" cy="1200329"/>
+            </a:xfrm>
+            <a:prstGeom prst="rect">
+              <a:avLst/>
+            </a:prstGeom>
+            <a:noFill/>
+          </p:spPr>
+          <p:txBody>
+            <a:bodyPr wrap="square" rtlCol="0">
+              <a:spAutoFit/>
+            </a:bodyPr>
+            <a:lstStyle/>
+            <a:p>
+              <a:r>
+                <a:rPr lang="fr-CA" dirty="0"/>
+                <a:t>Discrétisation temporelle prend le dessus</a:t>
+              </a:r>
+            </a:p>
+          </p:txBody>
+        </p:sp>
+      </p:grpSp>
+    </p:spTree>
+    <p:extLst>
+      <p:ext uri="{BB962C8B-B14F-4D97-AF65-F5344CB8AC3E}">
+        <p14:creationId xmlns:p14="http://schemas.microsoft.com/office/powerpoint/2010/main" val="963557291"/>
+      </p:ext>
+    </p:extLst>
+  </p:cSld>
+  <p:clrMapOvr>
+    <a:masterClrMapping/>
+  </p:clrMapOvr>
+  <p:timing>
+    <p:tnLst>
+      <p:par>
+        <p:cTn id="1" dur="indefinite" restart="never" nodeType="tmRoot">
+          <p:childTnLst>
+            <p:seq concurrent="1" nextAc="seek">
+              <p:cTn id="2" dur="indefinite" nodeType="mainSeq">
+                <p:childTnLst>
+                  <p:par>
+                    <p:cTn id="3" fill="hold">
+                      <p:stCondLst>
+                        <p:cond delay="indefinite"/>
+                      </p:stCondLst>
+                      <p:childTnLst>
+                        <p:par>
+                          <p:cTn id="4" fill="hold">
+                            <p:stCondLst>
+                              <p:cond delay="0"/>
+                            </p:stCondLst>
+                            <p:childTnLst>
+                              <p:par>
+                                <p:cTn id="5" presetID="1" presetClass="entr" presetSubtype="0" fill="hold" nodeType="clickEffect">
+                                  <p:stCondLst>
+                                    <p:cond delay="0"/>
+                                  </p:stCondLst>
+                                  <p:childTnLst>
+                                    <p:set>
+                                      <p:cBhvr>
+                                        <p:cTn id="6" dur="1" fill="hold">
+                                          <p:stCondLst>
+                                            <p:cond delay="0"/>
+                                          </p:stCondLst>
+                                        </p:cTn>
+                                        <p:tgtEl>
+                                          <p:spTgt spid="8"/>
+                                        </p:tgtEl>
+                                        <p:attrNameLst>
+                                          <p:attrName>style.visibility</p:attrName>
+                                        </p:attrNameLst>
+                                      </p:cBhvr>
+                                      <p:to>
+                                        <p:strVal val="visible"/>
+                                      </p:to>
+                                    </p:set>
+                                  </p:childTnLst>
+                                </p:cTn>
+                              </p:par>
+                            </p:childTnLst>
+                          </p:cTn>
+                        </p:par>
+                      </p:childTnLst>
+                    </p:cTn>
+                  </p:par>
+                </p:childTnLst>
+              </p:cTn>
+              <p:prevCondLst>
+                <p:cond evt="onPrev" delay="0">
+                  <p:tgtEl>
+                    <p:sldTgt/>
+                  </p:tgtEl>
+                </p:cond>
+              </p:prevCondLst>
+              <p:nextCondLst>
+                <p:cond evt="onNext" delay="0">
+                  <p:tgtEl>
+                    <p:sldTgt/>
+                  </p:tgtEl>
+                </p:cond>
+              </p:nextCondLst>
+            </p:seq>
+          </p:childTnLst>
+        </p:cTn>
+      </p:par>
+    </p:tnLst>
+  </p:timing>
 </p:sld>
 </file>
 

--- a/projet_final/projet_final/MEC8211-Projet-final-Presentation.pptx
+++ b/projet_final/projet_final/MEC8211-Projet-final-Presentation.pptx
@@ -4183,19 +4183,34 @@
             <p:ph idx="1"/>
           </p:nvPr>
         </p:nvSpPr>
-        <p:spPr/>
+        <p:spPr>
+          <a:xfrm>
+            <a:off x="663101" y="1690688"/>
+            <a:ext cx="11185187" cy="4915643"/>
+          </a:xfrm>
+        </p:spPr>
         <p:txBody>
           <a:bodyPr>
-            <a:normAutofit fontScale="92500" lnSpcReduction="20000"/>
+            <a:normAutofit fontScale="70000" lnSpcReduction="20000"/>
           </a:bodyPr>
           <a:lstStyle/>
           <a:p>
+            <a:pPr>
+              <a:lnSpc>
+                <a:spcPct val="134000"/>
+              </a:lnSpc>
+            </a:pPr>
             <a:r>
               <a:rPr lang="fr-FR" dirty="0"/>
               <a:t>Tests unitaires : rien de surprenant, objectif de conserver une pérennité et une stabilité du code malgré des changements.</a:t>
             </a:r>
           </a:p>
           <a:p>
+            <a:pPr>
+              <a:lnSpc>
+                <a:spcPct val="134000"/>
+              </a:lnSpc>
+            </a:pPr>
             <a:r>
               <a:rPr lang="fr-FR" dirty="0"/>
               <a:t>Tests de vérification de code :</a:t>
@@ -4203,11 +4218,14 @@
           </a:p>
           <a:p>
             <a:pPr lvl="1">
+              <a:lnSpc>
+                <a:spcPct val="134000"/>
+              </a:lnSpc>
               <a:buFont typeface="Courier New" panose="02070309020205020404" pitchFamily="49" charset="0"/>
               <a:buChar char="o"/>
             </a:pPr>
             <a:r>
-              <a:rPr lang="fr-FR" dirty="0" err="1"/>
+              <a:rPr lang="fr-FR" b="1" dirty="0" err="1"/>
               <a:t>testSymmetrie</a:t>
             </a:r>
             <a:r>
@@ -4217,6 +4235,9 @@
           </a:p>
           <a:p>
             <a:pPr lvl="2">
+              <a:lnSpc>
+                <a:spcPct val="134000"/>
+              </a:lnSpc>
               <a:buFont typeface="Courier New" panose="02070309020205020404" pitchFamily="49" charset="0"/>
               <a:buChar char="o"/>
             </a:pPr>
@@ -4230,27 +4251,57 @@
             </a:r>
             <a:r>
               <a:rPr lang="fr-FR" dirty="0"/>
-              <a:t> de bugs au sein du code.</a:t>
+              <a:t> de </a:t>
+            </a:r>
+            <a:r>
+              <a:rPr lang="fr-FR" b="1" dirty="0"/>
+              <a:t>bugs</a:t>
+            </a:r>
+            <a:r>
+              <a:rPr lang="fr-FR" dirty="0"/>
+              <a:t> au sein du code.</a:t>
             </a:r>
           </a:p>
           <a:p>
             <a:pPr lvl="2">
+              <a:lnSpc>
+                <a:spcPct val="134000"/>
+              </a:lnSpc>
               <a:buFont typeface="Courier New" panose="02070309020205020404" pitchFamily="49" charset="0"/>
               <a:buChar char="o"/>
             </a:pPr>
             <a:r>
               <a:rPr lang="fr-FR" dirty="0"/>
-              <a:t>A permis de revisiter et de réécrire correctement les équations de discrétisation (que nous croyions déjà bonne).</a:t>
+              <a:t>A permis de revisiter et de réécrire correctement les </a:t>
+            </a:r>
+            <a:r>
+              <a:rPr lang="fr-FR" b="1" dirty="0"/>
+              <a:t>équations de discrétisation </a:t>
+            </a:r>
+            <a:r>
+              <a:rPr lang="fr-FR" dirty="0"/>
+              <a:t>(que nous croyions déjà bonne).</a:t>
             </a:r>
           </a:p>
           <a:p>
             <a:pPr lvl="2">
+              <a:lnSpc>
+                <a:spcPct val="134000"/>
+              </a:lnSpc>
               <a:buFont typeface="Courier New" panose="02070309020205020404" pitchFamily="49" charset="0"/>
               <a:buChar char="o"/>
             </a:pPr>
             <a:r>
               <a:rPr lang="fr-FR" dirty="0"/>
-              <a:t>Problèmes d’indexation des points, notamment pour les conditions frontières aux </a:t>
+              <a:t>Problèmes </a:t>
+            </a:r>
+            <a:r>
+              <a:rPr lang="fr-FR" b="1" dirty="0"/>
+              <a:t>d’indexation des points</a:t>
+            </a:r>
+            <a:r>
+              <a:rPr lang="fr-FR" dirty="0"/>
+              <a:t>, notamment pour les conditions frontières aux </a:t>
             </a:r>
             <a:r>
               <a:rPr lang="fr-FR" i="1" dirty="0"/>
@@ -4263,11 +4314,14 @@
           </a:p>
           <a:p>
             <a:pPr lvl="1">
+              <a:lnSpc>
+                <a:spcPct val="134000"/>
+              </a:lnSpc>
               <a:buFont typeface="Courier New" panose="02070309020205020404" pitchFamily="49" charset="0"/>
               <a:buChar char="o"/>
             </a:pPr>
             <a:r>
-              <a:rPr lang="fr-FR" dirty="0" err="1"/>
+              <a:rPr lang="fr-FR" b="1" dirty="0" err="1"/>
               <a:t>testInvarianceGaliléenne</a:t>
             </a:r>
             <a:r>
@@ -4277,6 +4331,9 @@
           </a:p>
           <a:p>
             <a:pPr lvl="2">
+              <a:lnSpc>
+                <a:spcPct val="134000"/>
+              </a:lnSpc>
               <a:buFont typeface="Courier New" panose="02070309020205020404" pitchFamily="49" charset="0"/>
               <a:buChar char="o"/>
             </a:pPr>
@@ -4287,11 +4344,14 @@
           </a:p>
           <a:p>
             <a:pPr lvl="1">
+              <a:lnSpc>
+                <a:spcPct val="134000"/>
+              </a:lnSpc>
               <a:buFont typeface="Courier New" panose="02070309020205020404" pitchFamily="49" charset="0"/>
               <a:buChar char="o"/>
             </a:pPr>
             <a:r>
-              <a:rPr lang="fr-FR" dirty="0" err="1"/>
+              <a:rPr lang="fr-FR" b="1" dirty="0" err="1"/>
               <a:t>testConservationEnergie</a:t>
             </a:r>
             <a:r>
@@ -4301,6 +4361,9 @@
           </a:p>
           <a:p>
             <a:pPr lvl="2">
+              <a:lnSpc>
+                <a:spcPct val="134000"/>
+              </a:lnSpc>
               <a:buFont typeface="Courier New" panose="02070309020205020404" pitchFamily="49" charset="0"/>
               <a:buChar char="o"/>
             </a:pPr>
@@ -4311,6 +4374,9 @@
           </a:p>
           <a:p>
             <a:pPr lvl="2">
+              <a:lnSpc>
+                <a:spcPct val="134000"/>
+              </a:lnSpc>
               <a:buFont typeface="Courier New" panose="02070309020205020404" pitchFamily="49" charset="0"/>
               <a:buChar char="o"/>
             </a:pPr>
@@ -4380,7 +4446,7 @@
           <a:p>
             <a:r>
               <a:rPr lang="fr-FR" dirty="0"/>
-              <a:t>Vérification de code - MMS :</a:t>
+              <a:t>Vérification de code – MMS – Méthodologie </a:t>
             </a:r>
           </a:p>
         </p:txBody>
@@ -4403,29 +4469,56 @@
                 <p:ph idx="1"/>
               </p:nvPr>
             </p:nvSpPr>
-            <p:spPr/>
+            <p:spPr>
+              <a:xfrm>
+                <a:off x="838200" y="1690688"/>
+                <a:ext cx="10971179" cy="4964281"/>
+              </a:xfrm>
+            </p:spPr>
             <p:txBody>
               <a:bodyPr>
-                <a:normAutofit fontScale="92500" lnSpcReduction="20000"/>
+                <a:normAutofit fontScale="70000" lnSpcReduction="20000"/>
               </a:bodyPr>
               <a:lstStyle/>
               <a:p>
+                <a:pPr>
+                  <a:lnSpc>
+                    <a:spcPct val="134000"/>
+                  </a:lnSpc>
+                </a:pPr>
                 <a:r>
                   <a:rPr lang="fr-FR" dirty="0"/>
                   <a:t>Implémentation de la méthode des solutions manufacturés. </a:t>
                 </a:r>
               </a:p>
               <a:p>
+                <a:pPr>
+                  <a:lnSpc>
+                    <a:spcPct val="134000"/>
+                  </a:lnSpc>
+                </a:pPr>
                 <a:r>
                   <a:rPr lang="fr-FR" dirty="0"/>
                   <a:t>Changements nécessaires :</a:t>
                 </a:r>
               </a:p>
               <a:p>
-                <a:pPr lvl="1"/>
+                <a:pPr lvl="1">
+                  <a:lnSpc>
+                    <a:spcPct val="134000"/>
+                  </a:lnSpc>
+                </a:pPr>
                 <a:r>
                   <a:rPr lang="fr-FR" dirty="0"/>
-                  <a:t>Implémentation de conditions de Dirichlet aux frontières extérieures:</a:t>
+                  <a:t>Implémentation de conditions de Dirichlet aux </a:t>
+                </a:r>
+                <a:r>
+                  <a:rPr lang="fr-FR" b="1" dirty="0"/>
+                  <a:t>frontières extérieures</a:t>
+                </a:r>
+                <a:r>
+                  <a:rPr lang="fr-FR" dirty="0"/>
+                  <a:t>:</a:t>
                 </a:r>
                 <a:br>
                   <a:rPr lang="fr-FR" dirty="0"/>
@@ -4576,14 +4669,22 @@
                 <a:endParaRPr lang="fr-FR" dirty="0"/>
               </a:p>
               <a:p>
-                <a:pPr lvl="1"/>
+                <a:pPr lvl="1">
+                  <a:lnSpc>
+                    <a:spcPct val="134000"/>
+                  </a:lnSpc>
+                </a:pPr>
                 <a:r>
                   <a:rPr lang="fr-FR" dirty="0"/>
                   <a:t>Implémentation d’un terme source dans l’équation du milieu du domaine.</a:t>
                 </a:r>
               </a:p>
               <a:p>
-                <a:pPr lvl="1"/>
+                <a:pPr lvl="1">
+                  <a:lnSpc>
+                    <a:spcPct val="134000"/>
+                  </a:lnSpc>
+                </a:pPr>
                 <a:r>
                   <a:rPr lang="fr-FR" dirty="0"/>
                   <a:t>Repenser la classe </a:t>
@@ -4606,6 +4707,11 @@
                 </a:r>
               </a:p>
               <a:p>
+                <a:pPr>
+                  <a:lnSpc>
+                    <a:spcPct val="134000"/>
+                  </a:lnSpc>
+                </a:pPr>
                 <a:r>
                   <a:rPr lang="fr-FR" dirty="0"/>
                   <a:t>Équation choisie :</a:t>
@@ -4872,7 +4978,10 @@
                 <a:endParaRPr lang="fr-FR" dirty="0"/>
               </a:p>
               <a:p>
-                <a:pPr marL="914400" lvl="2" indent="0">
+                <a:pPr marL="914400" lvl="2" indent="0" algn="ctr">
+                  <a:lnSpc>
+                    <a:spcPct val="134000"/>
+                  </a:lnSpc>
                   <a:buNone/>
                 </a:pPr>
                 <a:r>
@@ -4881,6 +4990,11 @@
                 </a:r>
               </a:p>
               <a:p>
+                <a:pPr>
+                  <a:lnSpc>
+                    <a:spcPct val="134000"/>
+                  </a:lnSpc>
+                </a:pPr>
                 <a:r>
                   <a:rPr lang="fr-FR" dirty="0"/>
                   <a:t>Le calcul du terme source est fait à l’aide de la librairie </a:t>
@@ -4915,10 +5029,14 @@
               </p:nvPr>
             </p:nvSpPr>
             <p:spPr>
+              <a:xfrm>
+                <a:off x="838200" y="1690688"/>
+                <a:ext cx="10971179" cy="4964281"/>
+              </a:xfrm>
               <a:blipFill>
                 <a:blip r:embed="rId2"/>
                 <a:stretch>
-                  <a:fillRect l="-928" t="-3501" r="-464" b="-1401"/>
+                  <a:fillRect l="-500" r="-445"/>
                 </a:stretch>
               </a:blipFill>
             </p:spPr>

--- a/projet_final/projet_final/MEC8211-Projet-final-Presentation.pptx
+++ b/projet_final/projet_final/MEC8211-Projet-final-Presentation.pptx
@@ -5,7 +5,7 @@
     <p:sldMasterId id="2147483648" r:id="rId1"/>
   </p:sldMasterIdLst>
   <p:notesMasterIdLst>
-    <p:notesMasterId r:id="rId15"/>
+    <p:notesMasterId r:id="rId16"/>
   </p:notesMasterIdLst>
   <p:sldIdLst>
     <p:sldId id="256" r:id="rId2"/>
@@ -14,13 +14,14 @@
     <p:sldId id="264" r:id="rId5"/>
     <p:sldId id="259" r:id="rId6"/>
     <p:sldId id="263" r:id="rId7"/>
-    <p:sldId id="260" r:id="rId8"/>
-    <p:sldId id="262" r:id="rId9"/>
-    <p:sldId id="261" r:id="rId10"/>
-    <p:sldId id="265" r:id="rId11"/>
-    <p:sldId id="266" r:id="rId12"/>
-    <p:sldId id="267" r:id="rId13"/>
-    <p:sldId id="268" r:id="rId14"/>
+    <p:sldId id="269" r:id="rId8"/>
+    <p:sldId id="260" r:id="rId9"/>
+    <p:sldId id="262" r:id="rId10"/>
+    <p:sldId id="261" r:id="rId11"/>
+    <p:sldId id="265" r:id="rId12"/>
+    <p:sldId id="266" r:id="rId13"/>
+    <p:sldId id="267" r:id="rId14"/>
+    <p:sldId id="268" r:id="rId15"/>
   </p:sldIdLst>
   <p:sldSz cx="12192000" cy="6858000"/>
   <p:notesSz cx="6858000" cy="9144000"/>
@@ -625,7 +626,7 @@
           <a:p>
             <a:fld id="{F6105186-0725-443C-BC59-E521425E81CD}" type="slidenum">
               <a:rPr lang="fr-FR" smtClean="0"/>
-              <a:t>7</a:t>
+              <a:t>8</a:t>
             </a:fld>
             <a:endParaRPr lang="fr-FR"/>
           </a:p>
@@ -733,7 +734,7 @@
           <a:p>
             <a:fld id="{F6105186-0725-443C-BC59-E521425E81CD}" type="slidenum">
               <a:rPr lang="fr-FR" smtClean="0"/>
-              <a:t>8</a:t>
+              <a:t>9</a:t>
             </a:fld>
             <a:endParaRPr lang="fr-FR"/>
           </a:p>
@@ -3987,18 +3988,28 @@
         </p:nvSpPr>
         <p:spPr>
           <a:xfrm>
-            <a:off x="1524000" y="1426463"/>
+            <a:off x="1524000" y="2003869"/>
             <a:ext cx="9144000" cy="1425131"/>
           </a:xfrm>
         </p:spPr>
         <p:txBody>
-          <a:bodyPr/>
+          <a:bodyPr>
+            <a:normAutofit fontScale="90000"/>
+          </a:bodyPr>
           <a:lstStyle/>
           <a:p>
             <a:r>
               <a:rPr lang="fr-FR" noProof="0" dirty="0"/>
               <a:t>MEC8211 – Projet final</a:t>
             </a:r>
+            <a:br>
+              <a:rPr lang="fr-FR" noProof="0" dirty="0"/>
+            </a:br>
+            <a:r>
+              <a:rPr lang="fr-FR" sz="4400" noProof="0" dirty="0"/>
+              <a:t>Vérification et Validation d’un solveur de différences finies réalisé dans le cadre du cours GCH2545 – Modélisation numérique en ingénierie</a:t>
+            </a:r>
+            <a:endParaRPr lang="fr-FR" noProof="0" dirty="0"/>
           </a:p>
         </p:txBody>
       </p:sp>
@@ -4117,6 +4128,441 @@
 </file>
 
 <file path=ppt/slides/slide10.xml><?xml version="1.0" encoding="utf-8"?>
+<p:sld xmlns:a="http://schemas.openxmlformats.org/drawingml/2006/main" xmlns:r="http://schemas.openxmlformats.org/officeDocument/2006/relationships" xmlns:p="http://schemas.openxmlformats.org/presentationml/2006/main">
+  <p:cSld>
+    <p:spTree>
+      <p:nvGrpSpPr>
+        <p:cNvPr id="1" name=""/>
+        <p:cNvGrpSpPr/>
+        <p:nvPr/>
+      </p:nvGrpSpPr>
+      <p:grpSpPr>
+        <a:xfrm>
+          <a:off x="0" y="0"/>
+          <a:ext cx="0" cy="0"/>
+          <a:chOff x="0" y="0"/>
+          <a:chExt cx="0" cy="0"/>
+        </a:xfrm>
+      </p:grpSpPr>
+      <p:sp>
+        <p:nvSpPr>
+          <p:cNvPr id="2" name="Titre 1">
+            <a:extLst>
+              <a:ext uri="{FF2B5EF4-FFF2-40B4-BE49-F238E27FC236}">
+                <a16:creationId xmlns:a16="http://schemas.microsoft.com/office/drawing/2014/main" id="{730210F2-DE1D-E808-58AF-DFA01EAAB4C6}"/>
+              </a:ext>
+            </a:extLst>
+          </p:cNvPr>
+          <p:cNvSpPr>
+            <a:spLocks noGrp="1"/>
+          </p:cNvSpPr>
+          <p:nvPr>
+            <p:ph type="title"/>
+          </p:nvPr>
+        </p:nvSpPr>
+        <p:spPr/>
+        <p:txBody>
+          <a:bodyPr/>
+          <a:lstStyle/>
+          <a:p>
+            <a:r>
+              <a:rPr lang="fr-FR" dirty="0"/>
+              <a:t>Vérification de code - Méthodologie :</a:t>
+            </a:r>
+          </a:p>
+        </p:txBody>
+      </p:sp>
+      <mc:AlternateContent xmlns:mc="http://schemas.openxmlformats.org/markup-compatibility/2006">
+        <mc:Choice xmlns:a14="http://schemas.microsoft.com/office/drawing/2010/main" Requires="a14">
+          <p:sp>
+            <p:nvSpPr>
+              <p:cNvPr id="3" name="Espace réservé du contenu 2">
+                <a:extLst>
+                  <a:ext uri="{FF2B5EF4-FFF2-40B4-BE49-F238E27FC236}">
+                    <a16:creationId xmlns:a16="http://schemas.microsoft.com/office/drawing/2014/main" id="{4013CAEC-1AC4-C17B-EAFA-EC1AB7DBA279}"/>
+                  </a:ext>
+                </a:extLst>
+              </p:cNvPr>
+              <p:cNvSpPr>
+                <a:spLocks noGrp="1"/>
+              </p:cNvSpPr>
+              <p:nvPr>
+                <p:ph idx="1"/>
+              </p:nvPr>
+            </p:nvSpPr>
+            <p:spPr>
+              <a:xfrm>
+                <a:off x="838200" y="1825625"/>
+                <a:ext cx="10628376" cy="4351338"/>
+              </a:xfrm>
+            </p:spPr>
+            <p:txBody>
+              <a:bodyPr>
+                <a:normAutofit fontScale="77500" lnSpcReduction="20000"/>
+              </a:bodyPr>
+              <a:lstStyle/>
+              <a:p>
+                <a:pPr>
+                  <a:lnSpc>
+                    <a:spcPct val="124000"/>
+                  </a:lnSpc>
+                </a:pPr>
+                <a:r>
+                  <a:rPr lang="fr-FR" dirty="0"/>
+                  <a:t>Implémentation de divers tests avec le module </a:t>
+                </a:r>
+                <a:r>
+                  <a:rPr lang="fr-FR" i="1" dirty="0" err="1"/>
+                  <a:t>unittest</a:t>
+                </a:r>
+                <a:r>
+                  <a:rPr lang="fr-FR" dirty="0"/>
+                  <a:t> de python :</a:t>
+                </a:r>
+              </a:p>
+              <a:p>
+                <a:pPr lvl="1">
+                  <a:lnSpc>
+                    <a:spcPct val="124000"/>
+                  </a:lnSpc>
+                </a:pPr>
+                <a:r>
+                  <a:rPr lang="fr-FR" b="1" dirty="0"/>
+                  <a:t>Tests unitaires </a:t>
+                </a:r>
+                <a:r>
+                  <a:rPr lang="fr-FR" dirty="0"/>
+                  <a:t>pour les différentes fonctions du code implémentés :</a:t>
+                </a:r>
+              </a:p>
+              <a:p>
+                <a:pPr lvl="2">
+                  <a:lnSpc>
+                    <a:spcPct val="124000"/>
+                  </a:lnSpc>
+                  <a:buFont typeface="Courier New" panose="02070309020205020404" pitchFamily="49" charset="0"/>
+                  <a:buChar char="o"/>
+                </a:pPr>
+                <a:r>
+                  <a:rPr lang="fr-FR" b="1" dirty="0" err="1"/>
+                  <a:t>testPosition</a:t>
+                </a:r>
+                <a:r>
+                  <a:rPr lang="fr-FR" dirty="0"/>
+                  <a:t> : </a:t>
+                </a:r>
+                <a:r>
+                  <a:rPr lang="fr-CA" dirty="0"/>
+                  <a:t>Test la fonction Position avec des valeurs connues.</a:t>
+                </a:r>
+              </a:p>
+              <a:p>
+                <a:pPr lvl="2">
+                  <a:lnSpc>
+                    <a:spcPct val="124000"/>
+                  </a:lnSpc>
+                  <a:buFont typeface="Courier New" panose="02070309020205020404" pitchFamily="49" charset="0"/>
+                  <a:buChar char="o"/>
+                </a:pPr>
+                <a:r>
+                  <a:rPr lang="fr-CA" b="1" dirty="0" err="1"/>
+                  <a:t>testMilieu</a:t>
+                </a:r>
+                <a:r>
+                  <a:rPr lang="fr-CA" dirty="0"/>
+                  <a:t> : Test la fonction Milieu avec des valeurs connues.</a:t>
+                </a:r>
+              </a:p>
+              <a:p>
+                <a:pPr lvl="2">
+                  <a:lnSpc>
+                    <a:spcPct val="124000"/>
+                  </a:lnSpc>
+                  <a:buFont typeface="Courier New" panose="02070309020205020404" pitchFamily="49" charset="0"/>
+                  <a:buChar char="o"/>
+                </a:pPr>
+                <a:r>
+                  <a:rPr lang="fr-CA" b="1" dirty="0" err="1"/>
+                  <a:t>testTemperature</a:t>
+                </a:r>
+                <a:r>
+                  <a:rPr lang="fr-CA" dirty="0"/>
+                  <a:t> : Test la fonction </a:t>
+                </a:r>
+                <a:r>
+                  <a:rPr lang="fr-CA" dirty="0" err="1"/>
+                  <a:t>Temperature</a:t>
+                </a:r>
+                <a:r>
+                  <a:rPr lang="fr-CA" dirty="0"/>
+                  <a:t> avec des valeurs connues.</a:t>
+                </a:r>
+              </a:p>
+              <a:p>
+                <a:pPr lvl="1">
+                  <a:lnSpc>
+                    <a:spcPct val="124000"/>
+                  </a:lnSpc>
+                </a:pPr>
+                <a:r>
+                  <a:rPr lang="fr-CA" b="1" dirty="0"/>
+                  <a:t>Tests de vérification de code </a:t>
+                </a:r>
+                <a:r>
+                  <a:rPr lang="fr-CA" dirty="0"/>
+                  <a:t>implémentés :</a:t>
+                </a:r>
+              </a:p>
+              <a:p>
+                <a:pPr lvl="2">
+                  <a:lnSpc>
+                    <a:spcPct val="124000"/>
+                  </a:lnSpc>
+                  <a:buFont typeface="Courier New" panose="02070309020205020404" pitchFamily="49" charset="0"/>
+                  <a:buChar char="o"/>
+                </a:pPr>
+                <a:r>
+                  <a:rPr lang="fr-CA" b="1" dirty="0" err="1"/>
+                  <a:t>testSymetrie</a:t>
+                </a:r>
+                <a:r>
+                  <a:rPr lang="fr-CA" dirty="0"/>
+                  <a:t> : Test la simplification de la condition de symétrie en comparant le résultat symétrique au résultat du domaine complet.</a:t>
+                </a:r>
+              </a:p>
+              <a:p>
+                <a:pPr lvl="2">
+                  <a:lnSpc>
+                    <a:spcPct val="124000"/>
+                  </a:lnSpc>
+                  <a:buFont typeface="Courier New" panose="02070309020205020404" pitchFamily="49" charset="0"/>
+                  <a:buChar char="o"/>
+                </a:pPr>
+                <a:r>
+                  <a:rPr lang="fr-CA" b="1" dirty="0" err="1"/>
+                  <a:t>testConservationEnergie</a:t>
+                </a:r>
+                <a:r>
+                  <a:rPr lang="fr-CA" dirty="0"/>
+                  <a:t> : Test la conservation de l'énergie du solveur en effectuant un bilan </a:t>
+                </a:r>
+                <a:r>
+                  <a:rPr lang="fr-CA" dirty="0" err="1"/>
+                  <a:t>énegérique</a:t>
+                </a:r>
+                <a:r>
+                  <a:rPr lang="fr-CA" dirty="0"/>
+                  <a:t> à l'intérieur du domaine et sur la frontière. On cherche :</a:t>
+                </a:r>
+                <a:br>
+                  <a:rPr lang="fr-CA" dirty="0"/>
+                </a:br>
+                <a14:m>
+                  <m:oMath xmlns:m="http://schemas.openxmlformats.org/officeDocument/2006/math">
+                    <m:acc>
+                      <m:accPr>
+                        <m:chr m:val="̇"/>
+                        <m:ctrlPr>
+                          <a:rPr lang="fr-CA" i="1" smtClean="0">
+                            <a:latin typeface="Cambria Math" panose="02040503050406030204" pitchFamily="18" charset="0"/>
+                          </a:rPr>
+                        </m:ctrlPr>
+                      </m:accPr>
+                      <m:e>
+                        <m:sSub>
+                          <m:sSubPr>
+                            <m:ctrlPr>
+                              <a:rPr lang="fr-CA" b="0" i="1" smtClean="0">
+                                <a:latin typeface="Cambria Math" panose="02040503050406030204" pitchFamily="18" charset="0"/>
+                              </a:rPr>
+                            </m:ctrlPr>
+                          </m:sSubPr>
+                          <m:e>
+                            <m:r>
+                              <a:rPr lang="fr-CA" b="0" i="1" smtClean="0">
+                                <a:latin typeface="Cambria Math" panose="02040503050406030204" pitchFamily="18" charset="0"/>
+                              </a:rPr>
+                              <m:t>𝑞</m:t>
+                            </m:r>
+                          </m:e>
+                          <m:sub>
+                            <m:r>
+                              <a:rPr lang="fr-CA" b="0" i="1" smtClean="0">
+                                <a:latin typeface="Cambria Math" panose="02040503050406030204" pitchFamily="18" charset="0"/>
+                              </a:rPr>
+                              <m:t>𝑖𝑛𝑡</m:t>
+                            </m:r>
+                          </m:sub>
+                        </m:sSub>
+                      </m:e>
+                    </m:acc>
+                    <m:r>
+                      <a:rPr lang="fr-CA" i="1" smtClean="0">
+                        <a:latin typeface="Cambria Math" panose="02040503050406030204" pitchFamily="18" charset="0"/>
+                        <a:ea typeface="Cambria Math" panose="02040503050406030204" pitchFamily="18" charset="0"/>
+                      </a:rPr>
+                      <m:t>≈</m:t>
+                    </m:r>
+                    <m:acc>
+                      <m:accPr>
+                        <m:chr m:val="̇"/>
+                        <m:ctrlPr>
+                          <a:rPr lang="fr-CA" i="1">
+                            <a:latin typeface="Cambria Math" panose="02040503050406030204" pitchFamily="18" charset="0"/>
+                          </a:rPr>
+                        </m:ctrlPr>
+                      </m:accPr>
+                      <m:e>
+                        <m:sSub>
+                          <m:sSubPr>
+                            <m:ctrlPr>
+                              <a:rPr lang="fr-CA" i="1">
+                                <a:latin typeface="Cambria Math" panose="02040503050406030204" pitchFamily="18" charset="0"/>
+                              </a:rPr>
+                            </m:ctrlPr>
+                          </m:sSubPr>
+                          <m:e>
+                            <m:r>
+                              <a:rPr lang="fr-CA" i="1">
+                                <a:latin typeface="Cambria Math" panose="02040503050406030204" pitchFamily="18" charset="0"/>
+                              </a:rPr>
+                              <m:t>𝑞</m:t>
+                            </m:r>
+                          </m:e>
+                          <m:sub>
+                            <m:r>
+                              <a:rPr lang="fr-CA" i="1">
+                                <a:latin typeface="Cambria Math" panose="02040503050406030204" pitchFamily="18" charset="0"/>
+                              </a:rPr>
+                              <m:t>𝑓𝑟𝑜𝑛𝑡</m:t>
+                            </m:r>
+                          </m:sub>
+                        </m:sSub>
+                      </m:e>
+                    </m:acc>
+                  </m:oMath>
+                </a14:m>
+                <a:endParaRPr lang="fr-CA" dirty="0"/>
+              </a:p>
+              <a:p>
+                <a:pPr lvl="2">
+                  <a:lnSpc>
+                    <a:spcPct val="124000"/>
+                  </a:lnSpc>
+                  <a:buFont typeface="Courier New" panose="02070309020205020404" pitchFamily="49" charset="0"/>
+                  <a:buChar char="o"/>
+                </a:pPr>
+                <a:r>
+                  <a:rPr lang="fr-CA" b="1" dirty="0" err="1"/>
+                  <a:t>testInvarianceGalileenne</a:t>
+                </a:r>
+                <a:r>
+                  <a:rPr lang="fr-CA" dirty="0"/>
+                  <a:t> : Test l’invariance galiléenne du solveur par translation des coordonnées.</a:t>
+                </a:r>
+              </a:p>
+              <a:p>
+                <a:pPr lvl="1">
+                  <a:lnSpc>
+                    <a:spcPct val="124000"/>
+                  </a:lnSpc>
+                </a:pPr>
+                <a:r>
+                  <a:rPr lang="fr-CA" dirty="0"/>
+                  <a:t>Implémentation de la </a:t>
+                </a:r>
+                <a:r>
+                  <a:rPr lang="fr-CA" b="1" dirty="0"/>
+                  <a:t>MMS</a:t>
+                </a:r>
+                <a:r>
+                  <a:rPr lang="fr-CA" dirty="0"/>
+                  <a:t> pour évaluer l’ordre de convergence du solveur.</a:t>
+                </a:r>
+              </a:p>
+              <a:p>
+                <a:pPr lvl="2">
+                  <a:buFont typeface="Courier New" panose="02070309020205020404" pitchFamily="49" charset="0"/>
+                  <a:buChar char="o"/>
+                </a:pPr>
+                <a:endParaRPr lang="fr-CA" dirty="0"/>
+              </a:p>
+              <a:p>
+                <a:pPr lvl="2">
+                  <a:buFont typeface="Courier New" panose="02070309020205020404" pitchFamily="49" charset="0"/>
+                  <a:buChar char="o"/>
+                </a:pPr>
+                <a:endParaRPr lang="fr-FR" dirty="0"/>
+              </a:p>
+              <a:p>
+                <a:pPr lvl="2"/>
+                <a:endParaRPr lang="fr-FR" dirty="0"/>
+              </a:p>
+              <a:p>
+                <a:pPr lvl="2"/>
+                <a:endParaRPr lang="fr-FR" dirty="0"/>
+              </a:p>
+            </p:txBody>
+          </p:sp>
+        </mc:Choice>
+        <mc:Fallback>
+          <p:sp>
+            <p:nvSpPr>
+              <p:cNvPr id="3" name="Espace réservé du contenu 2">
+                <a:extLst>
+                  <a:ext uri="{FF2B5EF4-FFF2-40B4-BE49-F238E27FC236}">
+                    <a16:creationId xmlns:a16="http://schemas.microsoft.com/office/drawing/2014/main" id="{4013CAEC-1AC4-C17B-EAFA-EC1AB7DBA279}"/>
+                  </a:ext>
+                </a:extLst>
+              </p:cNvPr>
+              <p:cNvSpPr>
+                <a:spLocks noGrp="1" noRot="1" noChangeAspect="1" noMove="1" noResize="1" noEditPoints="1" noAdjustHandles="1" noChangeArrowheads="1" noChangeShapeType="1" noTextEdit="1"/>
+              </p:cNvSpPr>
+              <p:nvPr>
+                <p:ph idx="1"/>
+              </p:nvPr>
+            </p:nvSpPr>
+            <p:spPr>
+              <a:xfrm>
+                <a:off x="838200" y="1825625"/>
+                <a:ext cx="10628376" cy="4351338"/>
+              </a:xfrm>
+              <a:blipFill>
+                <a:blip r:embed="rId2"/>
+                <a:stretch>
+                  <a:fillRect l="-688" t="-700" r="-574"/>
+                </a:stretch>
+              </a:blipFill>
+            </p:spPr>
+            <p:txBody>
+              <a:bodyPr/>
+              <a:lstStyle/>
+              <a:p>
+                <a:r>
+                  <a:rPr lang="fr-CA">
+                    <a:noFill/>
+                  </a:rPr>
+                  <a:t> </a:t>
+                </a:r>
+              </a:p>
+            </p:txBody>
+          </p:sp>
+        </mc:Fallback>
+      </mc:AlternateContent>
+    </p:spTree>
+    <p:extLst>
+      <p:ext uri="{BB962C8B-B14F-4D97-AF65-F5344CB8AC3E}">
+        <p14:creationId xmlns:p14="http://schemas.microsoft.com/office/powerpoint/2010/main" val="3778705103"/>
+      </p:ext>
+    </p:extLst>
+  </p:cSld>
+  <p:clrMapOvr>
+    <a:masterClrMapping/>
+  </p:clrMapOvr>
+</p:sld>
+</file>
+
+<file path=ppt/slides/slide11.xml><?xml version="1.0" encoding="utf-8"?>
 <p:sld xmlns:a="http://schemas.openxmlformats.org/drawingml/2006/main" xmlns:r="http://schemas.openxmlformats.org/officeDocument/2006/relationships" xmlns:p="http://schemas.openxmlformats.org/presentationml/2006/main">
   <p:cSld>
     <p:spTree>
@@ -4400,7 +4846,7 @@
 </p:sld>
 </file>
 
-<file path=ppt/slides/slide11.xml><?xml version="1.0" encoding="utf-8"?>
+<file path=ppt/slides/slide12.xml><?xml version="1.0" encoding="utf-8"?>
 <p:sld xmlns:a="http://schemas.openxmlformats.org/drawingml/2006/main" xmlns:r="http://schemas.openxmlformats.org/officeDocument/2006/relationships" xmlns:p="http://schemas.openxmlformats.org/presentationml/2006/main">
   <p:cSld>
     <p:spTree>
@@ -5068,7 +5514,7 @@
 </p:sld>
 </file>
 
-<file path=ppt/slides/slide12.xml><?xml version="1.0" encoding="utf-8"?>
+<file path=ppt/slides/slide13.xml><?xml version="1.0" encoding="utf-8"?>
 <p:sld xmlns:a="http://schemas.openxmlformats.org/drawingml/2006/main" xmlns:r="http://schemas.openxmlformats.org/officeDocument/2006/relationships" xmlns:p="http://schemas.openxmlformats.org/presentationml/2006/main">
   <p:cSld>
     <p:spTree>
@@ -5397,7 +5843,7 @@
 </p:sld>
 </file>
 
-<file path=ppt/slides/slide13.xml><?xml version="1.0" encoding="utf-8"?>
+<file path=ppt/slides/slide14.xml><?xml version="1.0" encoding="utf-8"?>
 <p:sld xmlns:a="http://schemas.openxmlformats.org/drawingml/2006/main" xmlns:r="http://schemas.openxmlformats.org/officeDocument/2006/relationships" xmlns:p="http://schemas.openxmlformats.org/presentationml/2006/main">
   <p:cSld>
     <p:spTree>
@@ -8508,6 +8954,192 @@
           </a:p>
         </p:txBody>
       </p:sp>
+      <mc:AlternateContent xmlns:mc="http://schemas.openxmlformats.org/markup-compatibility/2006">
+        <mc:Choice xmlns:a14="http://schemas.microsoft.com/office/drawing/2010/main" Requires="a14">
+          <p:sp>
+            <p:nvSpPr>
+              <p:cNvPr id="6" name="ZoneTexte 5">
+                <a:extLst>
+                  <a:ext uri="{FF2B5EF4-FFF2-40B4-BE49-F238E27FC236}">
+                    <a16:creationId xmlns:a16="http://schemas.microsoft.com/office/drawing/2014/main" id="{0D3DAD9B-F895-38F3-7E66-F7CE93598C25}"/>
+                  </a:ext>
+                </a:extLst>
+              </p:cNvPr>
+              <p:cNvSpPr txBox="1"/>
+              <p:nvPr/>
+            </p:nvSpPr>
+            <p:spPr>
+              <a:xfrm>
+                <a:off x="8054501" y="1155033"/>
+                <a:ext cx="3920247" cy="4524315"/>
+              </a:xfrm>
+              <a:prstGeom prst="rect">
+                <a:avLst/>
+              </a:prstGeom>
+              <a:noFill/>
+            </p:spPr>
+            <p:txBody>
+              <a:bodyPr wrap="square" rtlCol="0">
+                <a:spAutoFit/>
+              </a:bodyPr>
+              <a:lstStyle/>
+              <a:p>
+                <a:r>
+                  <a:rPr lang="fr-CA" dirty="0"/>
+                  <a:t>Schéma d’Euler Explicite :</a:t>
+                </a:r>
+              </a:p>
+              <a:p>
+                <a:endParaRPr lang="fr-CA" dirty="0"/>
+              </a:p>
+              <a:p>
+                <a:r>
+                  <a:rPr lang="fr-CA" dirty="0"/>
+                  <a:t>On vient évaluer l’état d’un système à un temps </a:t>
+                </a:r>
+                <a14:m>
+                  <m:oMath xmlns:m="http://schemas.openxmlformats.org/officeDocument/2006/math">
+                    <m:r>
+                      <a:rPr lang="fr-CA" b="0" i="1" smtClean="0">
+                        <a:latin typeface="Cambria Math" panose="02040503050406030204" pitchFamily="18" charset="0"/>
+                      </a:rPr>
+                      <m:t>𝑡</m:t>
+                    </m:r>
+                    <m:r>
+                      <a:rPr lang="fr-CA" b="0" i="1" smtClean="0">
+                        <a:latin typeface="Cambria Math" panose="02040503050406030204" pitchFamily="18" charset="0"/>
+                      </a:rPr>
+                      <m:t>+∆</m:t>
+                    </m:r>
+                    <m:r>
+                      <a:rPr lang="fr-CA" b="0" i="1" smtClean="0">
+                        <a:latin typeface="Cambria Math" panose="02040503050406030204" pitchFamily="18" charset="0"/>
+                      </a:rPr>
+                      <m:t>𝑡</m:t>
+                    </m:r>
+                  </m:oMath>
+                </a14:m>
+                <a:r>
+                  <a:rPr lang="fr-CA" dirty="0"/>
+                  <a:t> à l’aide de l’état de ce système au temps </a:t>
+                </a:r>
+                <a14:m>
+                  <m:oMath xmlns:m="http://schemas.openxmlformats.org/officeDocument/2006/math">
+                    <m:r>
+                      <a:rPr lang="fr-CA" b="0" i="1" smtClean="0">
+                        <a:latin typeface="Cambria Math" panose="02040503050406030204" pitchFamily="18" charset="0"/>
+                      </a:rPr>
+                      <m:t>𝑡</m:t>
+                    </m:r>
+                  </m:oMath>
+                </a14:m>
+                <a:r>
+                  <a:rPr lang="fr-CA" dirty="0"/>
+                  <a:t>.</a:t>
+                </a:r>
+              </a:p>
+              <a:p>
+                <a:endParaRPr lang="fr-CA" dirty="0"/>
+              </a:p>
+              <a:p>
+                <a:r>
+                  <a:rPr lang="fr-CA" dirty="0"/>
+                  <a:t>Méthode directe (pas de système à résoudre) et peu coûteuse.</a:t>
+                </a:r>
+              </a:p>
+              <a:p>
+                <a:endParaRPr lang="fr-CA" dirty="0"/>
+              </a:p>
+              <a:p>
+                <a:r>
+                  <a:rPr lang="fr-CA" dirty="0"/>
+                  <a:t>Problème de stabilité : la méthode d’Euler explicite nécessite de respecter un critère de stabilité entre la discrétisation en temps et en espace :</a:t>
+                </a:r>
+              </a:p>
+              <a:p>
+                <a:endParaRPr lang="fr-CA" dirty="0"/>
+              </a:p>
+              <a:p>
+                <a:endParaRPr lang="fr-CA" dirty="0"/>
+              </a:p>
+            </p:txBody>
+          </p:sp>
+        </mc:Choice>
+        <mc:Fallback>
+          <p:sp>
+            <p:nvSpPr>
+              <p:cNvPr id="6" name="ZoneTexte 5">
+                <a:extLst>
+                  <a:ext uri="{FF2B5EF4-FFF2-40B4-BE49-F238E27FC236}">
+                    <a16:creationId xmlns:a16="http://schemas.microsoft.com/office/drawing/2014/main" id="{0D3DAD9B-F895-38F3-7E66-F7CE93598C25}"/>
+                  </a:ext>
+                </a:extLst>
+              </p:cNvPr>
+              <p:cNvSpPr txBox="1">
+                <a:spLocks noRot="1" noChangeAspect="1" noMove="1" noResize="1" noEditPoints="1" noAdjustHandles="1" noChangeArrowheads="1" noChangeShapeType="1" noTextEdit="1"/>
+              </p:cNvSpPr>
+              <p:nvPr/>
+            </p:nvSpPr>
+            <p:spPr>
+              <a:xfrm>
+                <a:off x="8054501" y="1155033"/>
+                <a:ext cx="3920247" cy="4524315"/>
+              </a:xfrm>
+              <a:prstGeom prst="rect">
+                <a:avLst/>
+              </a:prstGeom>
+              <a:blipFill>
+                <a:blip r:embed="rId3"/>
+                <a:stretch>
+                  <a:fillRect l="-1244" t="-538" r="-467"/>
+                </a:stretch>
+              </a:blipFill>
+            </p:spPr>
+            <p:txBody>
+              <a:bodyPr/>
+              <a:lstStyle/>
+              <a:p>
+                <a:r>
+                  <a:rPr lang="fr-CA">
+                    <a:noFill/>
+                  </a:rPr>
+                  <a:t> </a:t>
+                </a:r>
+              </a:p>
+            </p:txBody>
+          </p:sp>
+        </mc:Fallback>
+      </mc:AlternateContent>
+      <p:pic>
+        <p:nvPicPr>
+          <p:cNvPr id="8" name="Image 7">
+            <a:extLst>
+              <a:ext uri="{FF2B5EF4-FFF2-40B4-BE49-F238E27FC236}">
+                <a16:creationId xmlns:a16="http://schemas.microsoft.com/office/drawing/2014/main" id="{19BD9348-480B-8C6C-AE14-0653FA999484}"/>
+              </a:ext>
+            </a:extLst>
+          </p:cNvPr>
+          <p:cNvPicPr>
+            <a:picLocks noChangeAspect="1"/>
+          </p:cNvPicPr>
+          <p:nvPr/>
+        </p:nvPicPr>
+        <p:blipFill>
+          <a:blip r:embed="rId4"/>
+          <a:stretch>
+            <a:fillRect/>
+          </a:stretch>
+        </p:blipFill>
+        <p:spPr>
+          <a:xfrm>
+            <a:off x="7846411" y="5073307"/>
+            <a:ext cx="4258607" cy="911282"/>
+          </a:xfrm>
+          <a:prstGeom prst="rect">
+            <a:avLst/>
+          </a:prstGeom>
+        </p:spPr>
+      </p:pic>
     </p:spTree>
     <p:extLst>
       <p:ext uri="{BB962C8B-B14F-4D97-AF65-F5344CB8AC3E}">
@@ -8556,8 +9188,8 @@
         </p:nvSpPr>
         <p:spPr>
           <a:xfrm>
-            <a:off x="838200" y="0"/>
-            <a:ext cx="10515600" cy="1325563"/>
+            <a:off x="419100" y="0"/>
+            <a:ext cx="11353800" cy="1325563"/>
           </a:xfrm>
         </p:spPr>
         <p:txBody>
@@ -8566,7 +9198,7 @@
           <a:p>
             <a:r>
               <a:rPr lang="fr-FR" dirty="0"/>
-              <a:t>Discrétisation : Milieu </a:t>
+              <a:t>Discrétisation : Milieu – Schéma d’Euler Explicite </a:t>
             </a:r>
           </a:p>
         </p:txBody>
@@ -11255,8 +11887,8 @@
         </p:nvSpPr>
         <p:spPr>
           <a:xfrm>
-            <a:off x="838200" y="18255"/>
-            <a:ext cx="10515600" cy="1325563"/>
+            <a:off x="150876" y="-30897"/>
+            <a:ext cx="11945112" cy="1325563"/>
           </a:xfrm>
         </p:spPr>
         <p:txBody>
@@ -11265,7 +11897,7 @@
           <a:p>
             <a:r>
               <a:rPr lang="fr-FR" dirty="0"/>
-              <a:t>Discrétisation : frontières</a:t>
+              <a:t>Discrétisation : frontières - Schéma d’Euler Explicite </a:t>
             </a:r>
           </a:p>
         </p:txBody>
@@ -14751,6 +15383,498 @@
   <p:cSld>
     <p:spTree>
       <p:nvGrpSpPr>
+        <p:cNvPr id="1" name="">
+          <a:extLst>
+            <a:ext uri="{FF2B5EF4-FFF2-40B4-BE49-F238E27FC236}">
+              <a16:creationId xmlns:a16="http://schemas.microsoft.com/office/drawing/2014/main" id="{728D2072-1734-D724-EA81-E925334F5FC2}"/>
+            </a:ext>
+          </a:extLst>
+        </p:cNvPr>
+        <p:cNvGrpSpPr/>
+        <p:nvPr/>
+      </p:nvGrpSpPr>
+      <p:grpSpPr>
+        <a:xfrm>
+          <a:off x="0" y="0"/>
+          <a:ext cx="0" cy="0"/>
+          <a:chOff x="0" y="0"/>
+          <a:chExt cx="0" cy="0"/>
+        </a:xfrm>
+      </p:grpSpPr>
+      <p:sp>
+        <p:nvSpPr>
+          <p:cNvPr id="2" name="Titre 1">
+            <a:extLst>
+              <a:ext uri="{FF2B5EF4-FFF2-40B4-BE49-F238E27FC236}">
+                <a16:creationId xmlns:a16="http://schemas.microsoft.com/office/drawing/2014/main" id="{04BB688C-D97C-481D-A291-13AA5890C45F}"/>
+              </a:ext>
+            </a:extLst>
+          </p:cNvPr>
+          <p:cNvSpPr>
+            <a:spLocks noGrp="1"/>
+          </p:cNvSpPr>
+          <p:nvPr>
+            <p:ph type="title"/>
+          </p:nvPr>
+        </p:nvSpPr>
+        <p:spPr>
+          <a:xfrm>
+            <a:off x="838200" y="0"/>
+            <a:ext cx="10515600" cy="1325563"/>
+          </a:xfrm>
+        </p:spPr>
+        <p:txBody>
+          <a:bodyPr>
+            <a:normAutofit/>
+          </a:bodyPr>
+          <a:lstStyle/>
+          <a:p>
+            <a:r>
+              <a:rPr lang="fr-FR" dirty="0"/>
+              <a:t>Description du code :</a:t>
+            </a:r>
+          </a:p>
+        </p:txBody>
+      </p:sp>
+      <mc:AlternateContent xmlns:mc="http://schemas.openxmlformats.org/markup-compatibility/2006">
+        <mc:Choice xmlns:a14="http://schemas.microsoft.com/office/drawing/2010/main" Requires="a14">
+          <p:sp>
+            <p:nvSpPr>
+              <p:cNvPr id="3" name="Espace réservé du contenu 2">
+                <a:extLst>
+                  <a:ext uri="{FF2B5EF4-FFF2-40B4-BE49-F238E27FC236}">
+                    <a16:creationId xmlns:a16="http://schemas.microsoft.com/office/drawing/2014/main" id="{B4B15E8C-4AC7-7351-4AC9-E6164AE5CE0F}"/>
+                  </a:ext>
+                </a:extLst>
+              </p:cNvPr>
+              <p:cNvSpPr>
+                <a:spLocks noGrp="1"/>
+              </p:cNvSpPr>
+              <p:nvPr>
+                <p:ph idx="1"/>
+              </p:nvPr>
+            </p:nvSpPr>
+            <p:spPr>
+              <a:xfrm>
+                <a:off x="261258" y="1331494"/>
+                <a:ext cx="11930742" cy="5526505"/>
+              </a:xfrm>
+            </p:spPr>
+            <p:txBody>
+              <a:bodyPr>
+                <a:normAutofit fontScale="92500" lnSpcReduction="10000"/>
+              </a:bodyPr>
+              <a:lstStyle/>
+              <a:p>
+                <a:r>
+                  <a:rPr lang="fr-FR" dirty="0"/>
+                  <a:t>main.py : fichier permettant d’exécuter le solveur pour une configuration prédéterminée.</a:t>
+                </a:r>
+              </a:p>
+              <a:p>
+                <a:r>
+                  <a:rPr lang="fr-FR" dirty="0"/>
+                  <a:t>fonctions.py : le cœur du code</a:t>
+                </a:r>
+              </a:p>
+              <a:p>
+                <a:pPr lvl="1"/>
+                <a:r>
+                  <a:rPr lang="fr-FR" dirty="0"/>
+                  <a:t>Classe Paramètres : classe contenant la configuration du problème.</a:t>
+                </a:r>
+              </a:p>
+              <a:p>
+                <a:pPr lvl="2"/>
+                <a14:m>
+                  <m:oMath xmlns:m="http://schemas.openxmlformats.org/officeDocument/2006/math">
+                    <m:sSub>
+                      <m:sSubPr>
+                        <m:ctrlPr>
+                          <a:rPr lang="fr-CA" b="0" i="1" smtClean="0">
+                            <a:latin typeface="Cambria Math" panose="02040503050406030204" pitchFamily="18" charset="0"/>
+                          </a:rPr>
+                        </m:ctrlPr>
+                      </m:sSubPr>
+                      <m:e>
+                        <m:r>
+                          <a:rPr lang="fr-CA" b="0" i="1" smtClean="0">
+                            <a:latin typeface="Cambria Math" panose="02040503050406030204" pitchFamily="18" charset="0"/>
+                          </a:rPr>
+                          <m:t>𝑅</m:t>
+                        </m:r>
+                      </m:e>
+                      <m:sub>
+                        <m:r>
+                          <a:rPr lang="fr-CA" b="0" i="1" smtClean="0">
+                            <a:latin typeface="Cambria Math" panose="02040503050406030204" pitchFamily="18" charset="0"/>
+                          </a:rPr>
+                          <m:t>𝑚𝑎𝑥</m:t>
+                        </m:r>
+                      </m:sub>
+                    </m:sSub>
+                    <m:r>
+                      <a:rPr lang="fr-CA" b="0" i="1" smtClean="0">
+                        <a:latin typeface="Cambria Math" panose="02040503050406030204" pitchFamily="18" charset="0"/>
+                      </a:rPr>
+                      <m:t>,</m:t>
+                    </m:r>
+                    <m:r>
+                      <a:rPr lang="fr-CA" b="0" i="1" smtClean="0">
+                        <a:latin typeface="Cambria Math" panose="02040503050406030204" pitchFamily="18" charset="0"/>
+                      </a:rPr>
+                      <m:t>𝜌</m:t>
+                    </m:r>
+                    <m:r>
+                      <a:rPr lang="fr-CA" b="0" i="1" smtClean="0">
+                        <a:latin typeface="Cambria Math" panose="02040503050406030204" pitchFamily="18" charset="0"/>
+                      </a:rPr>
+                      <m:t>,</m:t>
+                    </m:r>
+                    <m:sSub>
+                      <m:sSubPr>
+                        <m:ctrlPr>
+                          <a:rPr lang="fr-CA" b="0" i="1" smtClean="0">
+                            <a:latin typeface="Cambria Math" panose="02040503050406030204" pitchFamily="18" charset="0"/>
+                          </a:rPr>
+                        </m:ctrlPr>
+                      </m:sSubPr>
+                      <m:e>
+                        <m:r>
+                          <a:rPr lang="fr-CA" b="0" i="1" smtClean="0">
+                            <a:latin typeface="Cambria Math" panose="02040503050406030204" pitchFamily="18" charset="0"/>
+                          </a:rPr>
+                          <m:t>𝐶</m:t>
+                        </m:r>
+                      </m:e>
+                      <m:sub>
+                        <m:r>
+                          <a:rPr lang="fr-CA" b="0" i="1" smtClean="0">
+                            <a:latin typeface="Cambria Math" panose="02040503050406030204" pitchFamily="18" charset="0"/>
+                          </a:rPr>
+                          <m:t>𝑝</m:t>
+                        </m:r>
+                      </m:sub>
+                    </m:sSub>
+                    <m:r>
+                      <a:rPr lang="fr-CA" b="0" i="1" smtClean="0">
+                        <a:latin typeface="Cambria Math" panose="02040503050406030204" pitchFamily="18" charset="0"/>
+                      </a:rPr>
+                      <m:t>, </m:t>
+                    </m:r>
+                    <m:r>
+                      <a:rPr lang="fr-CA" b="0" i="1" smtClean="0">
+                        <a:latin typeface="Cambria Math" panose="02040503050406030204" pitchFamily="18" charset="0"/>
+                      </a:rPr>
+                      <m:t>𝑛𝑟</m:t>
+                    </m:r>
+                    <m:r>
+                      <a:rPr lang="fr-CA" b="0" i="1" smtClean="0">
+                        <a:latin typeface="Cambria Math" panose="02040503050406030204" pitchFamily="18" charset="0"/>
+                      </a:rPr>
+                      <m:t>,</m:t>
+                    </m:r>
+                    <m:r>
+                      <a:rPr lang="fr-CA" b="0" i="1" smtClean="0">
+                        <a:latin typeface="Cambria Math" panose="02040503050406030204" pitchFamily="18" charset="0"/>
+                      </a:rPr>
+                      <m:t>𝑛𝑧</m:t>
+                    </m:r>
+                    <m:r>
+                      <a:rPr lang="fr-CA" b="0" i="1" smtClean="0">
+                        <a:latin typeface="Cambria Math" panose="02040503050406030204" pitchFamily="18" charset="0"/>
+                      </a:rPr>
+                      <m:t>,</m:t>
+                    </m:r>
+                    <m:r>
+                      <a:rPr lang="fr-CA" b="0" i="1" smtClean="0">
+                        <a:latin typeface="Cambria Math" panose="02040503050406030204" pitchFamily="18" charset="0"/>
+                      </a:rPr>
+                      <m:t>𝑑𝑟</m:t>
+                    </m:r>
+                    <m:r>
+                      <a:rPr lang="fr-CA" b="0" i="1" smtClean="0">
+                        <a:latin typeface="Cambria Math" panose="02040503050406030204" pitchFamily="18" charset="0"/>
+                      </a:rPr>
+                      <m:t>,</m:t>
+                    </m:r>
+                    <m:r>
+                      <a:rPr lang="fr-CA" b="0" i="1" smtClean="0">
+                        <a:latin typeface="Cambria Math" panose="02040503050406030204" pitchFamily="18" charset="0"/>
+                      </a:rPr>
+                      <m:t>𝑑𝑧</m:t>
+                    </m:r>
+                    <m:r>
+                      <a:rPr lang="fr-CA" b="0" i="1" smtClean="0">
+                        <a:latin typeface="Cambria Math" panose="02040503050406030204" pitchFamily="18" charset="0"/>
+                      </a:rPr>
+                      <m:t>,</m:t>
+                    </m:r>
+                    <m:r>
+                      <a:rPr lang="fr-CA" b="0" i="1" smtClean="0">
+                        <a:latin typeface="Cambria Math" panose="02040503050406030204" pitchFamily="18" charset="0"/>
+                      </a:rPr>
+                      <m:t>𝑑𝑡</m:t>
+                    </m:r>
+                    <m:r>
+                      <a:rPr lang="fr-CA" b="0" i="1" smtClean="0">
+                        <a:latin typeface="Cambria Math" panose="02040503050406030204" pitchFamily="18" charset="0"/>
+                      </a:rPr>
+                      <m:t>,</m:t>
+                    </m:r>
+                    <m:sSub>
+                      <m:sSubPr>
+                        <m:ctrlPr>
+                          <a:rPr lang="fr-CA" b="0" i="1" smtClean="0">
+                            <a:latin typeface="Cambria Math" panose="02040503050406030204" pitchFamily="18" charset="0"/>
+                          </a:rPr>
+                        </m:ctrlPr>
+                      </m:sSubPr>
+                      <m:e>
+                        <m:r>
+                          <a:rPr lang="fr-CA" b="0" i="1" smtClean="0">
+                            <a:latin typeface="Cambria Math" panose="02040503050406030204" pitchFamily="18" charset="0"/>
+                          </a:rPr>
+                          <m:t>𝑇</m:t>
+                        </m:r>
+                      </m:e>
+                      <m:sub>
+                        <m:r>
+                          <a:rPr lang="fr-CA" i="1">
+                            <a:latin typeface="Cambria Math" panose="02040503050406030204" pitchFamily="18" charset="0"/>
+                            <a:ea typeface="Cambria Math" panose="02040503050406030204" pitchFamily="18" charset="0"/>
+                          </a:rPr>
+                          <m:t>∞</m:t>
+                        </m:r>
+                      </m:sub>
+                    </m:sSub>
+                    <m:r>
+                      <a:rPr lang="fr-CA" b="0" i="1" smtClean="0">
+                        <a:latin typeface="Cambria Math" panose="02040503050406030204" pitchFamily="18" charset="0"/>
+                      </a:rPr>
+                      <m:t>,</m:t>
+                    </m:r>
+                    <m:r>
+                      <a:rPr lang="fr-CA" b="0" i="1" smtClean="0">
+                        <a:latin typeface="Cambria Math" panose="02040503050406030204" pitchFamily="18" charset="0"/>
+                      </a:rPr>
+                      <m:t>𝑝𝑜𝑠𝑖𝑡𝑖𝑜𝑛</m:t>
+                    </m:r>
+                    <m:r>
+                      <a:rPr lang="fr-CA" b="0" i="1" smtClean="0">
+                        <a:latin typeface="Cambria Math" panose="02040503050406030204" pitchFamily="18" charset="0"/>
+                      </a:rPr>
+                      <m:t>,</m:t>
+                    </m:r>
+                    <m:r>
+                      <a:rPr lang="fr-CA" b="0" i="1" smtClean="0">
+                        <a:latin typeface="Cambria Math" panose="02040503050406030204" pitchFamily="18" charset="0"/>
+                      </a:rPr>
+                      <m:t>𝑀𝑀𝑆</m:t>
+                    </m:r>
+                    <m:r>
+                      <a:rPr lang="fr-CA" b="0" i="1" smtClean="0">
+                        <a:latin typeface="Cambria Math" panose="02040503050406030204" pitchFamily="18" charset="0"/>
+                      </a:rPr>
+                      <m:t>,</m:t>
+                    </m:r>
+                    <m:r>
+                      <a:rPr lang="fr-CA" b="0" i="1" smtClean="0">
+                        <a:latin typeface="Cambria Math" panose="02040503050406030204" pitchFamily="18" charset="0"/>
+                      </a:rPr>
+                      <m:t>𝑒𝑡𝑐</m:t>
+                    </m:r>
+                    <m:r>
+                      <a:rPr lang="fr-CA" b="0" i="1" smtClean="0">
+                        <a:latin typeface="Cambria Math" panose="02040503050406030204" pitchFamily="18" charset="0"/>
+                      </a:rPr>
+                      <m:t>.</m:t>
+                    </m:r>
+                  </m:oMath>
+                </a14:m>
+                <a:endParaRPr lang="fr-CA" b="0" i="1" dirty="0">
+                  <a:latin typeface="Cambria Math" panose="02040503050406030204" pitchFamily="18" charset="0"/>
+                </a:endParaRPr>
+              </a:p>
+              <a:p>
+                <a:pPr lvl="1"/>
+                <a:r>
+                  <a:rPr lang="fr-CA" b="0" dirty="0"/>
+                  <a:t>Fonction Position : permet de générer les matrices de position des points du domaine </a:t>
+                </a:r>
+                <a:r>
+                  <a:rPr lang="fr-CA" dirty="0"/>
+                  <a:t>(</a:t>
+                </a:r>
+                <a:r>
+                  <a:rPr lang="fr-CA" b="1" dirty="0"/>
+                  <a:t>R </a:t>
+                </a:r>
+                <a:r>
+                  <a:rPr lang="fr-CA" dirty="0"/>
+                  <a:t>et </a:t>
+                </a:r>
+                <a:r>
+                  <a:rPr lang="fr-CA" b="1" dirty="0"/>
+                  <a:t>M</a:t>
+                </a:r>
+                <a:r>
+                  <a:rPr lang="fr-CA" dirty="0"/>
+                  <a:t>).</a:t>
+                </a:r>
+                <a14:m>
+                  <m:oMath xmlns:m="http://schemas.openxmlformats.org/officeDocument/2006/math">
+                    <m:r>
+                      <a:rPr lang="fr-CA" b="0" i="1" smtClean="0">
+                        <a:latin typeface="Cambria Math" panose="02040503050406030204" pitchFamily="18" charset="0"/>
+                      </a:rPr>
+                      <m:t> </m:t>
+                    </m:r>
+                  </m:oMath>
+                </a14:m>
+                <a:endParaRPr lang="fr-CA" b="0" dirty="0"/>
+              </a:p>
+              <a:p>
+                <a:pPr lvl="1"/>
+                <a:r>
+                  <a:rPr lang="fr-CA" dirty="0"/>
+                  <a:t>Fonction Température : calcul l’état de la température au pas de temps suivant.</a:t>
+                </a:r>
+              </a:p>
+              <a:p>
+                <a:pPr lvl="2"/>
+                <a:r>
+                  <a:rPr lang="fr-CA" b="0" dirty="0"/>
+                  <a:t>Génère un état intermédiaire composé de l’état au temps </a:t>
+                </a:r>
+                <a:r>
+                  <a:rPr lang="fr-CA" b="0" i="1" dirty="0"/>
+                  <a:t>t</a:t>
+                </a:r>
+                <a:r>
+                  <a:rPr lang="fr-CA" b="0" dirty="0"/>
+                  <a:t> au milieu et l’état au temps </a:t>
+                </a:r>
+                <a14:m>
+                  <m:oMath xmlns:m="http://schemas.openxmlformats.org/officeDocument/2006/math">
+                    <m:r>
+                      <a:rPr lang="fr-CA" b="0" i="1" smtClean="0">
+                        <a:latin typeface="Cambria Math" panose="02040503050406030204" pitchFamily="18" charset="0"/>
+                      </a:rPr>
+                      <m:t>𝑡</m:t>
+                    </m:r>
+                    <m:r>
+                      <a:rPr lang="fr-CA" b="0" i="1" smtClean="0">
+                        <a:latin typeface="Cambria Math" panose="02040503050406030204" pitchFamily="18" charset="0"/>
+                      </a:rPr>
+                      <m:t>+∆</m:t>
+                    </m:r>
+                    <m:r>
+                      <a:rPr lang="fr-CA" b="0" i="1" smtClean="0">
+                        <a:latin typeface="Cambria Math" panose="02040503050406030204" pitchFamily="18" charset="0"/>
+                      </a:rPr>
+                      <m:t>𝑡</m:t>
+                    </m:r>
+                  </m:oMath>
+                </a14:m>
+                <a:r>
+                  <a:rPr lang="fr-CA" b="0" dirty="0"/>
+                  <a:t> aux frontières.</a:t>
+                </a:r>
+              </a:p>
+              <a:p>
+                <a:pPr lvl="2"/>
+                <a:r>
+                  <a:rPr lang="fr-CA" dirty="0"/>
+                  <a:t>Appelle la fonction Milieu.</a:t>
+                </a:r>
+                <a:endParaRPr lang="fr-CA" b="0" dirty="0"/>
+              </a:p>
+              <a:p>
+                <a:pPr lvl="1"/>
+                <a:r>
+                  <a:rPr lang="fr-FR" dirty="0"/>
+                  <a:t>Fonction Milieu : permet de calculer l’état de la température au pas de temps suivant à l’aide de l’état intermédiaire fourni par la fonction Température.</a:t>
+                </a:r>
+              </a:p>
+              <a:p>
+                <a:pPr lvl="1"/>
+                <a:endParaRPr lang="fr-FR" dirty="0"/>
+              </a:p>
+              <a:p>
+                <a:pPr marL="0" indent="0">
+                  <a:buNone/>
+                </a:pPr>
+                <a:r>
+                  <a:rPr lang="fr-FR" dirty="0"/>
+                  <a:t>Résolution du système : on itère sur le temps en appelant la fonction Température, jusqu’à ce qu’on ait atteint le temps final.</a:t>
+                </a:r>
+              </a:p>
+            </p:txBody>
+          </p:sp>
+        </mc:Choice>
+        <mc:Fallback>
+          <p:sp>
+            <p:nvSpPr>
+              <p:cNvPr id="3" name="Espace réservé du contenu 2">
+                <a:extLst>
+                  <a:ext uri="{FF2B5EF4-FFF2-40B4-BE49-F238E27FC236}">
+                    <a16:creationId xmlns:a16="http://schemas.microsoft.com/office/drawing/2014/main" id="{B4B15E8C-4AC7-7351-4AC9-E6164AE5CE0F}"/>
+                  </a:ext>
+                </a:extLst>
+              </p:cNvPr>
+              <p:cNvSpPr>
+                <a:spLocks noGrp="1" noRot="1" noChangeAspect="1" noMove="1" noResize="1" noEditPoints="1" noAdjustHandles="1" noChangeArrowheads="1" noChangeShapeType="1" noTextEdit="1"/>
+              </p:cNvSpPr>
+              <p:nvPr>
+                <p:ph idx="1"/>
+              </p:nvPr>
+            </p:nvSpPr>
+            <p:spPr>
+              <a:xfrm>
+                <a:off x="261258" y="1331494"/>
+                <a:ext cx="11930742" cy="5526505"/>
+              </a:xfrm>
+              <a:blipFill>
+                <a:blip r:embed="rId2"/>
+                <a:stretch>
+                  <a:fillRect l="-920" t="-2205" r="-664"/>
+                </a:stretch>
+              </a:blipFill>
+            </p:spPr>
+            <p:txBody>
+              <a:bodyPr/>
+              <a:lstStyle/>
+              <a:p>
+                <a:r>
+                  <a:rPr lang="fr-CA">
+                    <a:noFill/>
+                  </a:rPr>
+                  <a:t> </a:t>
+                </a:r>
+              </a:p>
+            </p:txBody>
+          </p:sp>
+        </mc:Fallback>
+      </mc:AlternateContent>
+    </p:spTree>
+    <p:extLst>
+      <p:ext uri="{BB962C8B-B14F-4D97-AF65-F5344CB8AC3E}">
+        <p14:creationId xmlns:p14="http://schemas.microsoft.com/office/powerpoint/2010/main" val="597455943"/>
+      </p:ext>
+    </p:extLst>
+  </p:cSld>
+  <p:clrMapOvr>
+    <a:masterClrMapping/>
+  </p:clrMapOvr>
+</p:sld>
+</file>
+
+<file path=ppt/slides/slide8.xml><?xml version="1.0" encoding="utf-8"?>
+<p:sld xmlns:a="http://schemas.openxmlformats.org/drawingml/2006/main" xmlns:r="http://schemas.openxmlformats.org/officeDocument/2006/relationships" xmlns:p="http://schemas.openxmlformats.org/presentationml/2006/main">
+  <p:cSld>
+    <p:spTree>
+      <p:nvGrpSpPr>
         <p:cNvPr id="1" name=""/>
         <p:cNvGrpSpPr/>
         <p:nvPr/>
@@ -17466,7 +18590,7 @@
 </p:sld>
 </file>
 
-<file path=ppt/slides/slide8.xml><?xml version="1.0" encoding="utf-8"?>
+<file path=ppt/slides/slide9.xml><?xml version="1.0" encoding="utf-8"?>
 <p:sld xmlns:a="http://schemas.openxmlformats.org/drawingml/2006/main" xmlns:r="http://schemas.openxmlformats.org/officeDocument/2006/relationships" xmlns:p="http://schemas.openxmlformats.org/presentationml/2006/main">
   <p:cSld>
     <p:spTree>
@@ -22281,441 +23405,6 @@
     <p:extLst>
       <p:ext uri="{BB962C8B-B14F-4D97-AF65-F5344CB8AC3E}">
         <p14:creationId xmlns:p14="http://schemas.microsoft.com/office/powerpoint/2010/main" val="2901290548"/>
-      </p:ext>
-    </p:extLst>
-  </p:cSld>
-  <p:clrMapOvr>
-    <a:masterClrMapping/>
-  </p:clrMapOvr>
-</p:sld>
-</file>
-
-<file path=ppt/slides/slide9.xml><?xml version="1.0" encoding="utf-8"?>
-<p:sld xmlns:a="http://schemas.openxmlformats.org/drawingml/2006/main" xmlns:r="http://schemas.openxmlformats.org/officeDocument/2006/relationships" xmlns:p="http://schemas.openxmlformats.org/presentationml/2006/main">
-  <p:cSld>
-    <p:spTree>
-      <p:nvGrpSpPr>
-        <p:cNvPr id="1" name=""/>
-        <p:cNvGrpSpPr/>
-        <p:nvPr/>
-      </p:nvGrpSpPr>
-      <p:grpSpPr>
-        <a:xfrm>
-          <a:off x="0" y="0"/>
-          <a:ext cx="0" cy="0"/>
-          <a:chOff x="0" y="0"/>
-          <a:chExt cx="0" cy="0"/>
-        </a:xfrm>
-      </p:grpSpPr>
-      <p:sp>
-        <p:nvSpPr>
-          <p:cNvPr id="2" name="Titre 1">
-            <a:extLst>
-              <a:ext uri="{FF2B5EF4-FFF2-40B4-BE49-F238E27FC236}">
-                <a16:creationId xmlns:a16="http://schemas.microsoft.com/office/drawing/2014/main" id="{730210F2-DE1D-E808-58AF-DFA01EAAB4C6}"/>
-              </a:ext>
-            </a:extLst>
-          </p:cNvPr>
-          <p:cNvSpPr>
-            <a:spLocks noGrp="1"/>
-          </p:cNvSpPr>
-          <p:nvPr>
-            <p:ph type="title"/>
-          </p:nvPr>
-        </p:nvSpPr>
-        <p:spPr/>
-        <p:txBody>
-          <a:bodyPr/>
-          <a:lstStyle/>
-          <a:p>
-            <a:r>
-              <a:rPr lang="fr-FR" dirty="0"/>
-              <a:t>Vérification de code - Méthodologie :</a:t>
-            </a:r>
-          </a:p>
-        </p:txBody>
-      </p:sp>
-      <mc:AlternateContent xmlns:mc="http://schemas.openxmlformats.org/markup-compatibility/2006">
-        <mc:Choice xmlns:a14="http://schemas.microsoft.com/office/drawing/2010/main" Requires="a14">
-          <p:sp>
-            <p:nvSpPr>
-              <p:cNvPr id="3" name="Espace réservé du contenu 2">
-                <a:extLst>
-                  <a:ext uri="{FF2B5EF4-FFF2-40B4-BE49-F238E27FC236}">
-                    <a16:creationId xmlns:a16="http://schemas.microsoft.com/office/drawing/2014/main" id="{4013CAEC-1AC4-C17B-EAFA-EC1AB7DBA279}"/>
-                  </a:ext>
-                </a:extLst>
-              </p:cNvPr>
-              <p:cNvSpPr>
-                <a:spLocks noGrp="1"/>
-              </p:cNvSpPr>
-              <p:nvPr>
-                <p:ph idx="1"/>
-              </p:nvPr>
-            </p:nvSpPr>
-            <p:spPr>
-              <a:xfrm>
-                <a:off x="838200" y="1825625"/>
-                <a:ext cx="10628376" cy="4351338"/>
-              </a:xfrm>
-            </p:spPr>
-            <p:txBody>
-              <a:bodyPr>
-                <a:normAutofit fontScale="77500" lnSpcReduction="20000"/>
-              </a:bodyPr>
-              <a:lstStyle/>
-              <a:p>
-                <a:pPr>
-                  <a:lnSpc>
-                    <a:spcPct val="124000"/>
-                  </a:lnSpc>
-                </a:pPr>
-                <a:r>
-                  <a:rPr lang="fr-FR" dirty="0"/>
-                  <a:t>Implémentation de divers tests avec le module </a:t>
-                </a:r>
-                <a:r>
-                  <a:rPr lang="fr-FR" i="1" dirty="0" err="1"/>
-                  <a:t>unittest</a:t>
-                </a:r>
-                <a:r>
-                  <a:rPr lang="fr-FR" dirty="0"/>
-                  <a:t> de python :</a:t>
-                </a:r>
-              </a:p>
-              <a:p>
-                <a:pPr lvl="1">
-                  <a:lnSpc>
-                    <a:spcPct val="124000"/>
-                  </a:lnSpc>
-                </a:pPr>
-                <a:r>
-                  <a:rPr lang="fr-FR" b="1" dirty="0"/>
-                  <a:t>Tests unitaires </a:t>
-                </a:r>
-                <a:r>
-                  <a:rPr lang="fr-FR" dirty="0"/>
-                  <a:t>pour les différentes fonctions du code implémentés :</a:t>
-                </a:r>
-              </a:p>
-              <a:p>
-                <a:pPr lvl="2">
-                  <a:lnSpc>
-                    <a:spcPct val="124000"/>
-                  </a:lnSpc>
-                  <a:buFont typeface="Courier New" panose="02070309020205020404" pitchFamily="49" charset="0"/>
-                  <a:buChar char="o"/>
-                </a:pPr>
-                <a:r>
-                  <a:rPr lang="fr-FR" b="1" dirty="0" err="1"/>
-                  <a:t>testPosition</a:t>
-                </a:r>
-                <a:r>
-                  <a:rPr lang="fr-FR" dirty="0"/>
-                  <a:t> : </a:t>
-                </a:r>
-                <a:r>
-                  <a:rPr lang="fr-CA" dirty="0"/>
-                  <a:t>Test la fonction Position avec des valeurs connues.</a:t>
-                </a:r>
-              </a:p>
-              <a:p>
-                <a:pPr lvl="2">
-                  <a:lnSpc>
-                    <a:spcPct val="124000"/>
-                  </a:lnSpc>
-                  <a:buFont typeface="Courier New" panose="02070309020205020404" pitchFamily="49" charset="0"/>
-                  <a:buChar char="o"/>
-                </a:pPr>
-                <a:r>
-                  <a:rPr lang="fr-CA" b="1" dirty="0" err="1"/>
-                  <a:t>testMilieu</a:t>
-                </a:r>
-                <a:r>
-                  <a:rPr lang="fr-CA" dirty="0"/>
-                  <a:t> : Test la fonction Milieu avec des valeurs connues.</a:t>
-                </a:r>
-              </a:p>
-              <a:p>
-                <a:pPr lvl="2">
-                  <a:lnSpc>
-                    <a:spcPct val="124000"/>
-                  </a:lnSpc>
-                  <a:buFont typeface="Courier New" panose="02070309020205020404" pitchFamily="49" charset="0"/>
-                  <a:buChar char="o"/>
-                </a:pPr>
-                <a:r>
-                  <a:rPr lang="fr-CA" b="1" dirty="0" err="1"/>
-                  <a:t>testTemperature</a:t>
-                </a:r>
-                <a:r>
-                  <a:rPr lang="fr-CA" dirty="0"/>
-                  <a:t> : Test la fonction </a:t>
-                </a:r>
-                <a:r>
-                  <a:rPr lang="fr-CA" dirty="0" err="1"/>
-                  <a:t>Temperature</a:t>
-                </a:r>
-                <a:r>
-                  <a:rPr lang="fr-CA" dirty="0"/>
-                  <a:t> avec des valeurs connues.</a:t>
-                </a:r>
-              </a:p>
-              <a:p>
-                <a:pPr lvl="1">
-                  <a:lnSpc>
-                    <a:spcPct val="124000"/>
-                  </a:lnSpc>
-                </a:pPr>
-                <a:r>
-                  <a:rPr lang="fr-CA" b="1" dirty="0"/>
-                  <a:t>Tests de vérification de code </a:t>
-                </a:r>
-                <a:r>
-                  <a:rPr lang="fr-CA" dirty="0"/>
-                  <a:t>implémentés :</a:t>
-                </a:r>
-              </a:p>
-              <a:p>
-                <a:pPr lvl="2">
-                  <a:lnSpc>
-                    <a:spcPct val="124000"/>
-                  </a:lnSpc>
-                  <a:buFont typeface="Courier New" panose="02070309020205020404" pitchFamily="49" charset="0"/>
-                  <a:buChar char="o"/>
-                </a:pPr>
-                <a:r>
-                  <a:rPr lang="fr-CA" b="1" dirty="0" err="1"/>
-                  <a:t>testSymetrie</a:t>
-                </a:r>
-                <a:r>
-                  <a:rPr lang="fr-CA" dirty="0"/>
-                  <a:t> : Test la simplification de la condition de symétrie en comparant le résultat symétrique au résultat du domaine complet.</a:t>
-                </a:r>
-              </a:p>
-              <a:p>
-                <a:pPr lvl="2">
-                  <a:lnSpc>
-                    <a:spcPct val="124000"/>
-                  </a:lnSpc>
-                  <a:buFont typeface="Courier New" panose="02070309020205020404" pitchFamily="49" charset="0"/>
-                  <a:buChar char="o"/>
-                </a:pPr>
-                <a:r>
-                  <a:rPr lang="fr-CA" b="1" dirty="0" err="1"/>
-                  <a:t>testConservationEnergie</a:t>
-                </a:r>
-                <a:r>
-                  <a:rPr lang="fr-CA" dirty="0"/>
-                  <a:t> : Test la conservation de l'énergie du solveur en effectuant un bilan </a:t>
-                </a:r>
-                <a:r>
-                  <a:rPr lang="fr-CA" dirty="0" err="1"/>
-                  <a:t>énegérique</a:t>
-                </a:r>
-                <a:r>
-                  <a:rPr lang="fr-CA" dirty="0"/>
-                  <a:t> à l'intérieur du domaine et sur la frontière. On cherche :</a:t>
-                </a:r>
-                <a:br>
-                  <a:rPr lang="fr-CA" dirty="0"/>
-                </a:br>
-                <a14:m>
-                  <m:oMath xmlns:m="http://schemas.openxmlformats.org/officeDocument/2006/math">
-                    <m:acc>
-                      <m:accPr>
-                        <m:chr m:val="̇"/>
-                        <m:ctrlPr>
-                          <a:rPr lang="fr-CA" i="1" smtClean="0">
-                            <a:latin typeface="Cambria Math" panose="02040503050406030204" pitchFamily="18" charset="0"/>
-                          </a:rPr>
-                        </m:ctrlPr>
-                      </m:accPr>
-                      <m:e>
-                        <m:sSub>
-                          <m:sSubPr>
-                            <m:ctrlPr>
-                              <a:rPr lang="fr-CA" b="0" i="1" smtClean="0">
-                                <a:latin typeface="Cambria Math" panose="02040503050406030204" pitchFamily="18" charset="0"/>
-                              </a:rPr>
-                            </m:ctrlPr>
-                          </m:sSubPr>
-                          <m:e>
-                            <m:r>
-                              <a:rPr lang="fr-CA" b="0" i="1" smtClean="0">
-                                <a:latin typeface="Cambria Math" panose="02040503050406030204" pitchFamily="18" charset="0"/>
-                              </a:rPr>
-                              <m:t>𝑞</m:t>
-                            </m:r>
-                          </m:e>
-                          <m:sub>
-                            <m:r>
-                              <a:rPr lang="fr-CA" b="0" i="1" smtClean="0">
-                                <a:latin typeface="Cambria Math" panose="02040503050406030204" pitchFamily="18" charset="0"/>
-                              </a:rPr>
-                              <m:t>𝑖𝑛𝑡</m:t>
-                            </m:r>
-                          </m:sub>
-                        </m:sSub>
-                      </m:e>
-                    </m:acc>
-                    <m:r>
-                      <a:rPr lang="fr-CA" i="1" smtClean="0">
-                        <a:latin typeface="Cambria Math" panose="02040503050406030204" pitchFamily="18" charset="0"/>
-                        <a:ea typeface="Cambria Math" panose="02040503050406030204" pitchFamily="18" charset="0"/>
-                      </a:rPr>
-                      <m:t>≈</m:t>
-                    </m:r>
-                    <m:acc>
-                      <m:accPr>
-                        <m:chr m:val="̇"/>
-                        <m:ctrlPr>
-                          <a:rPr lang="fr-CA" i="1">
-                            <a:latin typeface="Cambria Math" panose="02040503050406030204" pitchFamily="18" charset="0"/>
-                          </a:rPr>
-                        </m:ctrlPr>
-                      </m:accPr>
-                      <m:e>
-                        <m:sSub>
-                          <m:sSubPr>
-                            <m:ctrlPr>
-                              <a:rPr lang="fr-CA" i="1">
-                                <a:latin typeface="Cambria Math" panose="02040503050406030204" pitchFamily="18" charset="0"/>
-                              </a:rPr>
-                            </m:ctrlPr>
-                          </m:sSubPr>
-                          <m:e>
-                            <m:r>
-                              <a:rPr lang="fr-CA" i="1">
-                                <a:latin typeface="Cambria Math" panose="02040503050406030204" pitchFamily="18" charset="0"/>
-                              </a:rPr>
-                              <m:t>𝑞</m:t>
-                            </m:r>
-                          </m:e>
-                          <m:sub>
-                            <m:r>
-                              <a:rPr lang="fr-CA" i="1">
-                                <a:latin typeface="Cambria Math" panose="02040503050406030204" pitchFamily="18" charset="0"/>
-                              </a:rPr>
-                              <m:t>𝑓𝑟𝑜𝑛𝑡</m:t>
-                            </m:r>
-                          </m:sub>
-                        </m:sSub>
-                      </m:e>
-                    </m:acc>
-                  </m:oMath>
-                </a14:m>
-                <a:endParaRPr lang="fr-CA" dirty="0"/>
-              </a:p>
-              <a:p>
-                <a:pPr lvl="2">
-                  <a:lnSpc>
-                    <a:spcPct val="124000"/>
-                  </a:lnSpc>
-                  <a:buFont typeface="Courier New" panose="02070309020205020404" pitchFamily="49" charset="0"/>
-                  <a:buChar char="o"/>
-                </a:pPr>
-                <a:r>
-                  <a:rPr lang="fr-CA" b="1" dirty="0" err="1"/>
-                  <a:t>testInvarianceGalileenne</a:t>
-                </a:r>
-                <a:r>
-                  <a:rPr lang="fr-CA" dirty="0"/>
-                  <a:t> : Test l’invariance galiléenne du solveur par translation des coordonnées.</a:t>
-                </a:r>
-              </a:p>
-              <a:p>
-                <a:pPr lvl="1">
-                  <a:lnSpc>
-                    <a:spcPct val="124000"/>
-                  </a:lnSpc>
-                </a:pPr>
-                <a:r>
-                  <a:rPr lang="fr-CA" dirty="0"/>
-                  <a:t>Implémentation de la </a:t>
-                </a:r>
-                <a:r>
-                  <a:rPr lang="fr-CA" b="1" dirty="0"/>
-                  <a:t>MMS</a:t>
-                </a:r>
-                <a:r>
-                  <a:rPr lang="fr-CA" dirty="0"/>
-                  <a:t> pour évaluer l’ordre de convergence du solveur.</a:t>
-                </a:r>
-              </a:p>
-              <a:p>
-                <a:pPr lvl="2">
-                  <a:buFont typeface="Courier New" panose="02070309020205020404" pitchFamily="49" charset="0"/>
-                  <a:buChar char="o"/>
-                </a:pPr>
-                <a:endParaRPr lang="fr-CA" dirty="0"/>
-              </a:p>
-              <a:p>
-                <a:pPr lvl="2">
-                  <a:buFont typeface="Courier New" panose="02070309020205020404" pitchFamily="49" charset="0"/>
-                  <a:buChar char="o"/>
-                </a:pPr>
-                <a:endParaRPr lang="fr-FR" dirty="0"/>
-              </a:p>
-              <a:p>
-                <a:pPr lvl="2"/>
-                <a:endParaRPr lang="fr-FR" dirty="0"/>
-              </a:p>
-              <a:p>
-                <a:pPr lvl="2"/>
-                <a:endParaRPr lang="fr-FR" dirty="0"/>
-              </a:p>
-            </p:txBody>
-          </p:sp>
-        </mc:Choice>
-        <mc:Fallback>
-          <p:sp>
-            <p:nvSpPr>
-              <p:cNvPr id="3" name="Espace réservé du contenu 2">
-                <a:extLst>
-                  <a:ext uri="{FF2B5EF4-FFF2-40B4-BE49-F238E27FC236}">
-                    <a16:creationId xmlns:a16="http://schemas.microsoft.com/office/drawing/2014/main" id="{4013CAEC-1AC4-C17B-EAFA-EC1AB7DBA279}"/>
-                  </a:ext>
-                </a:extLst>
-              </p:cNvPr>
-              <p:cNvSpPr>
-                <a:spLocks noGrp="1" noRot="1" noChangeAspect="1" noMove="1" noResize="1" noEditPoints="1" noAdjustHandles="1" noChangeArrowheads="1" noChangeShapeType="1" noTextEdit="1"/>
-              </p:cNvSpPr>
-              <p:nvPr>
-                <p:ph idx="1"/>
-              </p:nvPr>
-            </p:nvSpPr>
-            <p:spPr>
-              <a:xfrm>
-                <a:off x="838200" y="1825625"/>
-                <a:ext cx="10628376" cy="4351338"/>
-              </a:xfrm>
-              <a:blipFill>
-                <a:blip r:embed="rId2"/>
-                <a:stretch>
-                  <a:fillRect l="-688" t="-700" r="-574"/>
-                </a:stretch>
-              </a:blipFill>
-            </p:spPr>
-            <p:txBody>
-              <a:bodyPr/>
-              <a:lstStyle/>
-              <a:p>
-                <a:r>
-                  <a:rPr lang="fr-CA">
-                    <a:noFill/>
-                  </a:rPr>
-                  <a:t> </a:t>
-                </a:r>
-              </a:p>
-            </p:txBody>
-          </p:sp>
-        </mc:Fallback>
-      </mc:AlternateContent>
-    </p:spTree>
-    <p:extLst>
-      <p:ext uri="{BB962C8B-B14F-4D97-AF65-F5344CB8AC3E}">
-        <p14:creationId xmlns:p14="http://schemas.microsoft.com/office/powerpoint/2010/main" val="3778705103"/>
       </p:ext>
     </p:extLst>
   </p:cSld>

--- a/projet_final/projet_final/MEC8211-Projet-final-Presentation.pptx
+++ b/projet_final/projet_final/MEC8211-Projet-final-Presentation.pptx
@@ -15485,7 +15485,10 @@
                 </a:r>
               </a:p>
               <a:p>
-                <a:pPr lvl="2"/>
+                <a:pPr lvl="2">
+                  <a:buFont typeface="Courier New" panose="02070309020205020404" pitchFamily="49" charset="0"/>
+                  <a:buChar char="o"/>
+                </a:pPr>
                 <a14:m>
                   <m:oMath xmlns:m="http://schemas.openxmlformats.org/officeDocument/2006/math">
                     <m:sSub>
@@ -15742,7 +15745,10 @@
                 </a:r>
               </a:p>
               <a:p>
-                <a:pPr lvl="2"/>
+                <a:pPr lvl="2">
+                  <a:buFont typeface="Courier New" panose="02070309020205020404" pitchFamily="49" charset="0"/>
+                  <a:buChar char="o"/>
+                </a:pPr>
                 <a:r>
                   <a:rPr lang="fr-CA" b="0" dirty="0"/>
                   <a:t>Génère un état intermédiaire composé de l’état au temps </a:t>
@@ -15783,7 +15789,10 @@
                 </a:r>
               </a:p>
               <a:p>
-                <a:pPr lvl="2"/>
+                <a:pPr lvl="2">
+                  <a:buFont typeface="Courier New" panose="02070309020205020404" pitchFamily="49" charset="0"/>
+                  <a:buChar char="o"/>
+                </a:pPr>
                 <a:r>
                   <a:rPr lang="fr-CA" dirty="0"/>
                   <a:t>Appelle la fonction Milieu.</a:t>

--- a/projet_final/projet_final/MEC8211-Projet-final-Presentation.pptx
+++ b/projet_final/projet_final/MEC8211-Projet-final-Presentation.pptx
@@ -5,7 +5,7 @@
     <p:sldMasterId id="2147483648" r:id="rId1"/>
   </p:sldMasterIdLst>
   <p:notesMasterIdLst>
-    <p:notesMasterId r:id="rId16"/>
+    <p:notesMasterId r:id="rId22"/>
   </p:notesMasterIdLst>
   <p:sldIdLst>
     <p:sldId id="256" r:id="rId2"/>
@@ -22,6 +22,12 @@
     <p:sldId id="266" r:id="rId13"/>
     <p:sldId id="267" r:id="rId14"/>
     <p:sldId id="268" r:id="rId15"/>
+    <p:sldId id="272" r:id="rId16"/>
+    <p:sldId id="270" r:id="rId17"/>
+    <p:sldId id="271" r:id="rId18"/>
+    <p:sldId id="273" r:id="rId19"/>
+    <p:sldId id="275" r:id="rId20"/>
+    <p:sldId id="274" r:id="rId21"/>
   </p:sldIdLst>
   <p:sldSz cx="12192000" cy="6858000"/>
   <p:notesSz cx="6858000" cy="9144000"/>
@@ -210,7 +216,7 @@
           <a:p>
             <a:fld id="{BB0B2023-C595-443A-8D8C-AB9DF5A28D48}" type="datetimeFigureOut">
               <a:rPr lang="fr-FR" smtClean="0"/>
-              <a:t>10/04/2026</a:t>
+              <a:t>11/04/2026</a:t>
             </a:fld>
             <a:endParaRPr lang="fr-FR"/>
           </a:p>
@@ -368,7 +374,7 @@
           <a:p>
             <a:fld id="{F6105186-0725-443C-BC59-E521425E81CD}" type="slidenum">
               <a:rPr lang="fr-FR" smtClean="0"/>
-              <a:t>‹N°›</a:t>
+              <a:t>‹#›</a:t>
             </a:fld>
             <a:endParaRPr lang="fr-FR"/>
           </a:p>
@@ -900,7 +906,7 @@
           <a:p>
             <a:fld id="{4E51AFDA-D128-4B68-A211-269E2451E5DE}" type="datetimeFigureOut">
               <a:rPr lang="fr-FR" smtClean="0"/>
-              <a:t>10/04/2026</a:t>
+              <a:t>11/04/2026</a:t>
             </a:fld>
             <a:endParaRPr lang="fr-FR"/>
           </a:p>
@@ -954,7 +960,7 @@
           <a:p>
             <a:fld id="{FD85B578-4E75-4E1C-9BE3-D5DCC0715B13}" type="slidenum">
               <a:rPr lang="fr-FR" smtClean="0"/>
-              <a:t>‹N°›</a:t>
+              <a:t>‹#›</a:t>
             </a:fld>
             <a:endParaRPr lang="fr-FR"/>
           </a:p>
@@ -1098,7 +1104,7 @@
           <a:p>
             <a:fld id="{4E51AFDA-D128-4B68-A211-269E2451E5DE}" type="datetimeFigureOut">
               <a:rPr lang="fr-FR" smtClean="0"/>
-              <a:t>10/04/2026</a:t>
+              <a:t>11/04/2026</a:t>
             </a:fld>
             <a:endParaRPr lang="fr-FR"/>
           </a:p>
@@ -1152,7 +1158,7 @@
           <a:p>
             <a:fld id="{FD85B578-4E75-4E1C-9BE3-D5DCC0715B13}" type="slidenum">
               <a:rPr lang="fr-FR" smtClean="0"/>
-              <a:t>‹N°›</a:t>
+              <a:t>‹#›</a:t>
             </a:fld>
             <a:endParaRPr lang="fr-FR"/>
           </a:p>
@@ -1306,7 +1312,7 @@
           <a:p>
             <a:fld id="{4E51AFDA-D128-4B68-A211-269E2451E5DE}" type="datetimeFigureOut">
               <a:rPr lang="fr-FR" smtClean="0"/>
-              <a:t>10/04/2026</a:t>
+              <a:t>11/04/2026</a:t>
             </a:fld>
             <a:endParaRPr lang="fr-FR"/>
           </a:p>
@@ -1360,7 +1366,7 @@
           <a:p>
             <a:fld id="{FD85B578-4E75-4E1C-9BE3-D5DCC0715B13}" type="slidenum">
               <a:rPr lang="fr-FR" smtClean="0"/>
-              <a:t>‹N°›</a:t>
+              <a:t>‹#›</a:t>
             </a:fld>
             <a:endParaRPr lang="fr-FR"/>
           </a:p>
@@ -1504,7 +1510,7 @@
           <a:p>
             <a:fld id="{4E51AFDA-D128-4B68-A211-269E2451E5DE}" type="datetimeFigureOut">
               <a:rPr lang="fr-FR" smtClean="0"/>
-              <a:t>10/04/2026</a:t>
+              <a:t>11/04/2026</a:t>
             </a:fld>
             <a:endParaRPr lang="fr-FR"/>
           </a:p>
@@ -1558,7 +1564,7 @@
           <a:p>
             <a:fld id="{FD85B578-4E75-4E1C-9BE3-D5DCC0715B13}" type="slidenum">
               <a:rPr lang="fr-FR" smtClean="0"/>
-              <a:t>‹N°›</a:t>
+              <a:t>‹#›</a:t>
             </a:fld>
             <a:endParaRPr lang="fr-FR"/>
           </a:p>
@@ -1779,7 +1785,7 @@
           <a:p>
             <a:fld id="{4E51AFDA-D128-4B68-A211-269E2451E5DE}" type="datetimeFigureOut">
               <a:rPr lang="fr-FR" smtClean="0"/>
-              <a:t>10/04/2026</a:t>
+              <a:t>11/04/2026</a:t>
             </a:fld>
             <a:endParaRPr lang="fr-FR"/>
           </a:p>
@@ -1833,7 +1839,7 @@
           <a:p>
             <a:fld id="{FD85B578-4E75-4E1C-9BE3-D5DCC0715B13}" type="slidenum">
               <a:rPr lang="fr-FR" smtClean="0"/>
-              <a:t>‹N°›</a:t>
+              <a:t>‹#›</a:t>
             </a:fld>
             <a:endParaRPr lang="fr-FR"/>
           </a:p>
@@ -2044,7 +2050,7 @@
           <a:p>
             <a:fld id="{4E51AFDA-D128-4B68-A211-269E2451E5DE}" type="datetimeFigureOut">
               <a:rPr lang="fr-FR" smtClean="0"/>
-              <a:t>10/04/2026</a:t>
+              <a:t>11/04/2026</a:t>
             </a:fld>
             <a:endParaRPr lang="fr-FR"/>
           </a:p>
@@ -2098,7 +2104,7 @@
           <a:p>
             <a:fld id="{FD85B578-4E75-4E1C-9BE3-D5DCC0715B13}" type="slidenum">
               <a:rPr lang="fr-FR" smtClean="0"/>
-              <a:t>‹N°›</a:t>
+              <a:t>‹#›</a:t>
             </a:fld>
             <a:endParaRPr lang="fr-FR"/>
           </a:p>
@@ -2456,7 +2462,7 @@
           <a:p>
             <a:fld id="{4E51AFDA-D128-4B68-A211-269E2451E5DE}" type="datetimeFigureOut">
               <a:rPr lang="fr-FR" smtClean="0"/>
-              <a:t>10/04/2026</a:t>
+              <a:t>11/04/2026</a:t>
             </a:fld>
             <a:endParaRPr lang="fr-FR"/>
           </a:p>
@@ -2510,7 +2516,7 @@
           <a:p>
             <a:fld id="{FD85B578-4E75-4E1C-9BE3-D5DCC0715B13}" type="slidenum">
               <a:rPr lang="fr-FR" smtClean="0"/>
-              <a:t>‹N°›</a:t>
+              <a:t>‹#›</a:t>
             </a:fld>
             <a:endParaRPr lang="fr-FR"/>
           </a:p>
@@ -2597,7 +2603,7 @@
           <a:p>
             <a:fld id="{4E51AFDA-D128-4B68-A211-269E2451E5DE}" type="datetimeFigureOut">
               <a:rPr lang="fr-FR" smtClean="0"/>
-              <a:t>10/04/2026</a:t>
+              <a:t>11/04/2026</a:t>
             </a:fld>
             <a:endParaRPr lang="fr-FR"/>
           </a:p>
@@ -2651,7 +2657,7 @@
           <a:p>
             <a:fld id="{FD85B578-4E75-4E1C-9BE3-D5DCC0715B13}" type="slidenum">
               <a:rPr lang="fr-FR" smtClean="0"/>
-              <a:t>‹N°›</a:t>
+              <a:t>‹#›</a:t>
             </a:fld>
             <a:endParaRPr lang="fr-FR"/>
           </a:p>
@@ -2710,7 +2716,7 @@
           <a:p>
             <a:fld id="{4E51AFDA-D128-4B68-A211-269E2451E5DE}" type="datetimeFigureOut">
               <a:rPr lang="fr-FR" smtClean="0"/>
-              <a:t>10/04/2026</a:t>
+              <a:t>11/04/2026</a:t>
             </a:fld>
             <a:endParaRPr lang="fr-FR"/>
           </a:p>
@@ -2764,7 +2770,7 @@
           <a:p>
             <a:fld id="{FD85B578-4E75-4E1C-9BE3-D5DCC0715B13}" type="slidenum">
               <a:rPr lang="fr-FR" smtClean="0"/>
-              <a:t>‹N°›</a:t>
+              <a:t>‹#›</a:t>
             </a:fld>
             <a:endParaRPr lang="fr-FR"/>
           </a:p>
@@ -3021,7 +3027,7 @@
           <a:p>
             <a:fld id="{4E51AFDA-D128-4B68-A211-269E2451E5DE}" type="datetimeFigureOut">
               <a:rPr lang="fr-FR" smtClean="0"/>
-              <a:t>10/04/2026</a:t>
+              <a:t>11/04/2026</a:t>
             </a:fld>
             <a:endParaRPr lang="fr-FR"/>
           </a:p>
@@ -3075,7 +3081,7 @@
           <a:p>
             <a:fld id="{FD85B578-4E75-4E1C-9BE3-D5DCC0715B13}" type="slidenum">
               <a:rPr lang="fr-FR" smtClean="0"/>
-              <a:t>‹N°›</a:t>
+              <a:t>‹#›</a:t>
             </a:fld>
             <a:endParaRPr lang="fr-FR"/>
           </a:p>
@@ -3309,7 +3315,7 @@
           <a:p>
             <a:fld id="{4E51AFDA-D128-4B68-A211-269E2451E5DE}" type="datetimeFigureOut">
               <a:rPr lang="fr-FR" smtClean="0"/>
-              <a:t>10/04/2026</a:t>
+              <a:t>11/04/2026</a:t>
             </a:fld>
             <a:endParaRPr lang="fr-FR"/>
           </a:p>
@@ -3363,7 +3369,7 @@
           <a:p>
             <a:fld id="{FD85B578-4E75-4E1C-9BE3-D5DCC0715B13}" type="slidenum">
               <a:rPr lang="fr-FR" smtClean="0"/>
-              <a:t>‹N°›</a:t>
+              <a:t>‹#›</a:t>
             </a:fld>
             <a:endParaRPr lang="fr-FR"/>
           </a:p>
@@ -3553,7 +3559,7 @@
           <a:p>
             <a:fld id="{4E51AFDA-D128-4B68-A211-269E2451E5DE}" type="datetimeFigureOut">
               <a:rPr lang="fr-FR" smtClean="0"/>
-              <a:t>10/04/2026</a:t>
+              <a:t>11/04/2026</a:t>
             </a:fld>
             <a:endParaRPr lang="fr-FR"/>
           </a:p>
@@ -3643,7 +3649,7 @@
           <a:p>
             <a:fld id="{FD85B578-4E75-4E1C-9BE3-D5DCC0715B13}" type="slidenum">
               <a:rPr lang="fr-FR" smtClean="0"/>
-              <a:t>‹N°›</a:t>
+              <a:t>‹#›</a:t>
             </a:fld>
             <a:endParaRPr lang="fr-FR"/>
           </a:p>
@@ -4172,8 +4178,8 @@
           </a:p>
         </p:txBody>
       </p:sp>
-      <mc:AlternateContent xmlns:mc="http://schemas.openxmlformats.org/markup-compatibility/2006">
-        <mc:Choice xmlns:a14="http://schemas.microsoft.com/office/drawing/2010/main" Requires="a14">
+      <mc:AlternateContent xmlns:mc="http://schemas.openxmlformats.org/markup-compatibility/2006" xmlns:a14="http://schemas.microsoft.com/office/drawing/2010/main">
+        <mc:Choice Requires="a14">
           <p:sp>
             <p:nvSpPr>
               <p:cNvPr id="3" name="Espace réservé du contenu 2">
@@ -4505,7 +4511,7 @@
             </p:txBody>
           </p:sp>
         </mc:Choice>
-        <mc:Fallback>
+        <mc:Fallback xmlns="">
           <p:sp>
             <p:nvSpPr>
               <p:cNvPr id="3" name="Espace réservé du contenu 2">
@@ -4897,8 +4903,8 @@
           </a:p>
         </p:txBody>
       </p:sp>
-      <mc:AlternateContent xmlns:mc="http://schemas.openxmlformats.org/markup-compatibility/2006">
-        <mc:Choice xmlns:a14="http://schemas.microsoft.com/office/drawing/2010/main" Requires="a14">
+      <mc:AlternateContent xmlns:mc="http://schemas.openxmlformats.org/markup-compatibility/2006" xmlns:a14="http://schemas.microsoft.com/office/drawing/2010/main">
+        <mc:Choice Requires="a14">
           <p:sp>
             <p:nvSpPr>
               <p:cNvPr id="3" name="Espace réservé du contenu 2">
@@ -5457,7 +5463,7 @@
             </p:txBody>
           </p:sp>
         </mc:Choice>
-        <mc:Fallback>
+        <mc:Fallback xmlns="">
           <p:sp>
             <p:nvSpPr>
               <p:cNvPr id="3" name="Espace réservé du contenu 2">
@@ -6172,6 +6178,2569 @@
 </p:sld>
 </file>
 
+<file path=ppt/slides/slide15.xml><?xml version="1.0" encoding="utf-8"?>
+<p:sld xmlns:a="http://schemas.openxmlformats.org/drawingml/2006/main" xmlns:r="http://schemas.openxmlformats.org/officeDocument/2006/relationships" xmlns:p="http://schemas.openxmlformats.org/presentationml/2006/main">
+  <p:cSld>
+    <p:spTree>
+      <p:nvGrpSpPr>
+        <p:cNvPr id="1" name=""/>
+        <p:cNvGrpSpPr/>
+        <p:nvPr/>
+      </p:nvGrpSpPr>
+      <p:grpSpPr>
+        <a:xfrm>
+          <a:off x="0" y="0"/>
+          <a:ext cx="0" cy="0"/>
+          <a:chOff x="0" y="0"/>
+          <a:chExt cx="0" cy="0"/>
+        </a:xfrm>
+      </p:grpSpPr>
+      <p:sp>
+        <p:nvSpPr>
+          <p:cNvPr id="2" name="Title 1">
+            <a:extLst>
+              <a:ext uri="{FF2B5EF4-FFF2-40B4-BE49-F238E27FC236}">
+                <a16:creationId xmlns:a16="http://schemas.microsoft.com/office/drawing/2014/main" id="{A918AE09-663A-81B9-7889-A42F5868E2D6}"/>
+              </a:ext>
+            </a:extLst>
+          </p:cNvPr>
+          <p:cNvSpPr>
+            <a:spLocks noGrp="1"/>
+          </p:cNvSpPr>
+          <p:nvPr>
+            <p:ph type="title"/>
+          </p:nvPr>
+        </p:nvSpPr>
+        <p:spPr>
+          <a:xfrm>
+            <a:off x="838200" y="365125"/>
+            <a:ext cx="7894090" cy="808809"/>
+          </a:xfrm>
+        </p:spPr>
+        <p:txBody>
+          <a:bodyPr>
+            <a:normAutofit/>
+          </a:bodyPr>
+          <a:lstStyle/>
+          <a:p>
+            <a:r>
+              <a:rPr lang="fr-FR" dirty="0"/>
+              <a:t>Validation – erreur de simulation	:</a:t>
+            </a:r>
+            <a:endParaRPr lang="en-US" dirty="0"/>
+          </a:p>
+        </p:txBody>
+      </p:sp>
+      <mc:AlternateContent xmlns:mc="http://schemas.openxmlformats.org/markup-compatibility/2006">
+        <mc:Choice xmlns:a14="http://schemas.microsoft.com/office/drawing/2010/main" Requires="a14">
+          <p:sp>
+            <p:nvSpPr>
+              <p:cNvPr id="3" name="Content Placeholder 2">
+                <a:extLst>
+                  <a:ext uri="{FF2B5EF4-FFF2-40B4-BE49-F238E27FC236}">
+                    <a16:creationId xmlns:a16="http://schemas.microsoft.com/office/drawing/2014/main" id="{C2C32232-D971-F63A-4322-D27F6CDB07D2}"/>
+                  </a:ext>
+                </a:extLst>
+              </p:cNvPr>
+              <p:cNvSpPr>
+                <a:spLocks noGrp="1"/>
+              </p:cNvSpPr>
+              <p:nvPr>
+                <p:ph idx="1"/>
+              </p:nvPr>
+            </p:nvSpPr>
+            <p:spPr>
+              <a:xfrm>
+                <a:off x="491491" y="1173934"/>
+                <a:ext cx="7486650" cy="2347163"/>
+              </a:xfrm>
+            </p:spPr>
+            <p:txBody>
+              <a:bodyPr>
+                <a:normAutofit fontScale="92500"/>
+              </a:bodyPr>
+              <a:lstStyle/>
+              <a:p>
+                <a:pPr marL="0" indent="0">
+                  <a:buNone/>
+                </a:pPr>
+                <a14:m>
+                  <m:oMathPara xmlns:m="http://schemas.openxmlformats.org/officeDocument/2006/math">
+                    <m:oMathParaPr>
+                      <m:jc m:val="centerGroup"/>
+                    </m:oMathParaPr>
+                    <m:oMath xmlns:m="http://schemas.openxmlformats.org/officeDocument/2006/math">
+                      <m:r>
+                        <m:rPr>
+                          <m:sty m:val="p"/>
+                        </m:rPr>
+                        <a:rPr lang="fr-FR" sz="2000" b="0" i="1" smtClean="0">
+                          <a:latin typeface="Cambria Math" panose="02040503050406030204" pitchFamily="18" charset="0"/>
+                        </a:rPr>
+                        <m:t>E</m:t>
+                      </m:r>
+                      <m:r>
+                        <a:rPr lang="fr-FR" sz="2000" b="0" i="1" smtClean="0">
+                          <a:latin typeface="Cambria Math" panose="02040503050406030204" pitchFamily="18" charset="0"/>
+                        </a:rPr>
+                        <m:t>̃</m:t>
+                      </m:r>
+                      <m:r>
+                        <a:rPr lang="fr-FR" sz="2000" b="0" i="1" smtClean="0">
+                          <a:latin typeface="Cambria Math" panose="02040503050406030204" pitchFamily="18" charset="0"/>
+                        </a:rPr>
+                        <m:t> = </m:t>
+                      </m:r>
+                      <m:r>
+                        <m:rPr>
+                          <m:sty m:val="p"/>
+                        </m:rPr>
+                        <a:rPr lang="fr-FR" sz="2000" b="0" i="1" smtClean="0">
+                          <a:latin typeface="Cambria Math" panose="02040503050406030204" pitchFamily="18" charset="0"/>
+                        </a:rPr>
+                        <m:t>ye</m:t>
+                      </m:r>
+                      <m:r>
+                        <a:rPr lang="fr-FR" sz="2000" b="0" i="1" smtClean="0">
+                          <a:latin typeface="Cambria Math" panose="02040503050406030204" pitchFamily="18" charset="0"/>
+                        </a:rPr>
+                        <m:t> − </m:t>
+                      </m:r>
+                      <m:r>
+                        <m:rPr>
+                          <m:sty m:val="p"/>
+                        </m:rPr>
+                        <a:rPr lang="fr-FR" sz="2000" b="0" i="1" smtClean="0">
+                          <a:latin typeface="Cambria Math" panose="02040503050406030204" pitchFamily="18" charset="0"/>
+                        </a:rPr>
+                        <m:t>ym</m:t>
+                      </m:r>
+                      <m:r>
+                        <a:rPr lang="fr-FR" sz="2000" b="0" i="1" smtClean="0">
+                          <a:latin typeface="Cambria Math" panose="02040503050406030204" pitchFamily="18" charset="0"/>
+                        </a:rPr>
+                        <m:t> </m:t>
+                      </m:r>
+                    </m:oMath>
+                  </m:oMathPara>
+                </a14:m>
+                <a:endParaRPr lang="fr-FR" sz="2000" dirty="0"/>
+              </a:p>
+              <a:p>
+                <a:endParaRPr lang="fr-FR" sz="2000" dirty="0"/>
+              </a:p>
+              <a:p>
+                <a:r>
+                  <a:rPr lang="fr-FR" sz="2000" dirty="0"/>
+                  <a:t>Problème : pas de valeur expérimentale (manque de précision dans la littérature)</a:t>
+                </a:r>
+              </a:p>
+              <a:p>
+                <a:r>
+                  <a:rPr lang="fr-FR" sz="2000" dirty="0">
+                    <a:sym typeface="Wingdings" panose="05000000000000000000" pitchFamily="2" charset="2"/>
+                  </a:rPr>
+                  <a:t>Solution : passage par un code commercial</a:t>
+                </a:r>
+              </a:p>
+              <a:p>
+                <a:r>
+                  <a:rPr lang="fr-FR" sz="2000" dirty="0">
+                    <a:sym typeface="Wingdings" panose="05000000000000000000" pitchFamily="2" charset="2"/>
+                  </a:rPr>
+                  <a:t>Modélisation du problème sous SolidWorks pour un métal AISI 4340</a:t>
+                </a:r>
+                <a:endParaRPr lang="en-US" sz="2000" dirty="0"/>
+              </a:p>
+            </p:txBody>
+          </p:sp>
+        </mc:Choice>
+        <mc:Fallback>
+          <p:sp>
+            <p:nvSpPr>
+              <p:cNvPr id="3" name="Content Placeholder 2">
+                <a:extLst>
+                  <a:ext uri="{FF2B5EF4-FFF2-40B4-BE49-F238E27FC236}">
+                    <a16:creationId xmlns:a16="http://schemas.microsoft.com/office/drawing/2014/main" id="{C2C32232-D971-F63A-4322-D27F6CDB07D2}"/>
+                  </a:ext>
+                </a:extLst>
+              </p:cNvPr>
+              <p:cNvSpPr>
+                <a:spLocks noGrp="1" noRot="1" noChangeAspect="1" noMove="1" noResize="1" noEditPoints="1" noAdjustHandles="1" noChangeArrowheads="1" noChangeShapeType="1" noTextEdit="1"/>
+              </p:cNvSpPr>
+              <p:nvPr>
+                <p:ph idx="1"/>
+              </p:nvPr>
+            </p:nvSpPr>
+            <p:spPr>
+              <a:xfrm>
+                <a:off x="491491" y="1173934"/>
+                <a:ext cx="7486650" cy="2347163"/>
+              </a:xfrm>
+              <a:blipFill>
+                <a:blip r:embed="rId2"/>
+                <a:stretch>
+                  <a:fillRect l="-651" t="-779" r="-81"/>
+                </a:stretch>
+              </a:blipFill>
+            </p:spPr>
+            <p:txBody>
+              <a:bodyPr/>
+              <a:lstStyle/>
+              <a:p>
+                <a:r>
+                  <a:rPr lang="en-US">
+                    <a:noFill/>
+                  </a:rPr>
+                  <a:t> </a:t>
+                </a:r>
+              </a:p>
+            </p:txBody>
+          </p:sp>
+        </mc:Fallback>
+      </mc:AlternateContent>
+      <p:pic>
+        <p:nvPicPr>
+          <p:cNvPr id="7" name="Picture 6">
+            <a:extLst>
+              <a:ext uri="{FF2B5EF4-FFF2-40B4-BE49-F238E27FC236}">
+                <a16:creationId xmlns:a16="http://schemas.microsoft.com/office/drawing/2014/main" id="{32592D05-AA83-1726-AA8E-76EA7CE43027}"/>
+              </a:ext>
+            </a:extLst>
+          </p:cNvPr>
+          <p:cNvPicPr>
+            <a:picLocks noChangeAspect="1"/>
+          </p:cNvPicPr>
+          <p:nvPr/>
+        </p:nvPicPr>
+        <p:blipFill>
+          <a:blip r:embed="rId3">
+            <a:extLst>
+              <a:ext uri="{28A0092B-C50C-407E-A947-70E740481C1C}">
+                <a14:useLocalDpi xmlns:a14="http://schemas.microsoft.com/office/drawing/2010/main" val="0"/>
+              </a:ext>
+            </a:extLst>
+          </a:blip>
+          <a:stretch>
+            <a:fillRect/>
+          </a:stretch>
+        </p:blipFill>
+        <p:spPr>
+          <a:xfrm>
+            <a:off x="8625531" y="521767"/>
+            <a:ext cx="3566469" cy="2347163"/>
+          </a:xfrm>
+          <a:prstGeom prst="rect">
+            <a:avLst/>
+          </a:prstGeom>
+        </p:spPr>
+      </p:pic>
+      <p:pic>
+        <p:nvPicPr>
+          <p:cNvPr id="9" name="Picture 8">
+            <a:extLst>
+              <a:ext uri="{FF2B5EF4-FFF2-40B4-BE49-F238E27FC236}">
+                <a16:creationId xmlns:a16="http://schemas.microsoft.com/office/drawing/2014/main" id="{4100F7ED-BB1D-A4E9-64F3-B26EE6B577C0}"/>
+              </a:ext>
+            </a:extLst>
+          </p:cNvPr>
+          <p:cNvPicPr>
+            <a:picLocks noChangeAspect="1"/>
+          </p:cNvPicPr>
+          <p:nvPr/>
+        </p:nvPicPr>
+        <p:blipFill>
+          <a:blip r:embed="rId4">
+            <a:extLst>
+              <a:ext uri="{28A0092B-C50C-407E-A947-70E740481C1C}">
+                <a14:useLocalDpi xmlns:a14="http://schemas.microsoft.com/office/drawing/2010/main" val="0"/>
+              </a:ext>
+            </a:extLst>
+          </a:blip>
+          <a:stretch>
+            <a:fillRect/>
+          </a:stretch>
+        </p:blipFill>
+        <p:spPr>
+          <a:xfrm>
+            <a:off x="9077336" y="3704045"/>
+            <a:ext cx="2997683" cy="2997683"/>
+          </a:xfrm>
+          <a:prstGeom prst="rect">
+            <a:avLst/>
+          </a:prstGeom>
+        </p:spPr>
+      </p:pic>
+      <p:pic>
+        <p:nvPicPr>
+          <p:cNvPr id="11" name="Picture 10">
+            <a:extLst>
+              <a:ext uri="{FF2B5EF4-FFF2-40B4-BE49-F238E27FC236}">
+                <a16:creationId xmlns:a16="http://schemas.microsoft.com/office/drawing/2014/main" id="{F5B50BF5-90A1-6B98-D3FC-7350FE4FB618}"/>
+              </a:ext>
+            </a:extLst>
+          </p:cNvPr>
+          <p:cNvPicPr>
+            <a:picLocks noChangeAspect="1"/>
+          </p:cNvPicPr>
+          <p:nvPr/>
+        </p:nvPicPr>
+        <p:blipFill>
+          <a:blip r:embed="rId5">
+            <a:extLst>
+              <a:ext uri="{28A0092B-C50C-407E-A947-70E740481C1C}">
+                <a14:useLocalDpi xmlns:a14="http://schemas.microsoft.com/office/drawing/2010/main" val="0"/>
+              </a:ext>
+            </a:extLst>
+          </a:blip>
+          <a:stretch>
+            <a:fillRect/>
+          </a:stretch>
+        </p:blipFill>
+        <p:spPr>
+          <a:xfrm>
+            <a:off x="5602846" y="3704044"/>
+            <a:ext cx="3003714" cy="2997683"/>
+          </a:xfrm>
+          <a:prstGeom prst="rect">
+            <a:avLst/>
+          </a:prstGeom>
+        </p:spPr>
+      </p:pic>
+      <p:pic>
+        <p:nvPicPr>
+          <p:cNvPr id="13" name="Picture 12">
+            <a:extLst>
+              <a:ext uri="{FF2B5EF4-FFF2-40B4-BE49-F238E27FC236}">
+                <a16:creationId xmlns:a16="http://schemas.microsoft.com/office/drawing/2014/main" id="{A9A009A9-8BFC-1B9B-F910-FCE3DE41CCF7}"/>
+              </a:ext>
+            </a:extLst>
+          </p:cNvPr>
+          <p:cNvPicPr>
+            <a:picLocks noChangeAspect="1"/>
+          </p:cNvPicPr>
+          <p:nvPr/>
+        </p:nvPicPr>
+        <p:blipFill>
+          <a:blip r:embed="rId6">
+            <a:extLst>
+              <a:ext uri="{28A0092B-C50C-407E-A947-70E740481C1C}">
+                <a14:useLocalDpi xmlns:a14="http://schemas.microsoft.com/office/drawing/2010/main" val="0"/>
+              </a:ext>
+            </a:extLst>
+          </a:blip>
+          <a:stretch>
+            <a:fillRect/>
+          </a:stretch>
+        </p:blipFill>
+        <p:spPr>
+          <a:xfrm>
+            <a:off x="296732" y="4148806"/>
+            <a:ext cx="3848433" cy="2552921"/>
+          </a:xfrm>
+          <a:prstGeom prst="rect">
+            <a:avLst/>
+          </a:prstGeom>
+        </p:spPr>
+      </p:pic>
+      <p:sp>
+        <p:nvSpPr>
+          <p:cNvPr id="14" name="TextBox 13">
+            <a:extLst>
+              <a:ext uri="{FF2B5EF4-FFF2-40B4-BE49-F238E27FC236}">
+                <a16:creationId xmlns:a16="http://schemas.microsoft.com/office/drawing/2014/main" id="{A6A5E198-79E3-ED9B-9BBD-110FAE83354B}"/>
+              </a:ext>
+            </a:extLst>
+          </p:cNvPr>
+          <p:cNvSpPr txBox="1"/>
+          <p:nvPr/>
+        </p:nvSpPr>
+        <p:spPr>
+          <a:xfrm>
+            <a:off x="1144371" y="3874770"/>
+            <a:ext cx="2153154" cy="369332"/>
+          </a:xfrm>
+          <a:prstGeom prst="rect">
+            <a:avLst/>
+          </a:prstGeom>
+          <a:noFill/>
+        </p:spPr>
+        <p:txBody>
+          <a:bodyPr wrap="none" rtlCol="0">
+            <a:spAutoFit/>
+          </a:bodyPr>
+          <a:lstStyle/>
+          <a:p>
+            <a:r>
+              <a:rPr lang="fr-FR" dirty="0"/>
+              <a:t>Température initiale</a:t>
+            </a:r>
+            <a:endParaRPr lang="en-US" dirty="0"/>
+          </a:p>
+        </p:txBody>
+      </p:sp>
+      <p:sp>
+        <p:nvSpPr>
+          <p:cNvPr id="15" name="TextBox 14">
+            <a:extLst>
+              <a:ext uri="{FF2B5EF4-FFF2-40B4-BE49-F238E27FC236}">
+                <a16:creationId xmlns:a16="http://schemas.microsoft.com/office/drawing/2014/main" id="{54FE961D-8228-C8D9-8233-FE31E59D1AC9}"/>
+              </a:ext>
+            </a:extLst>
+          </p:cNvPr>
+          <p:cNvSpPr txBox="1"/>
+          <p:nvPr/>
+        </p:nvSpPr>
+        <p:spPr>
+          <a:xfrm>
+            <a:off x="5955189" y="3427905"/>
+            <a:ext cx="2299027" cy="369332"/>
+          </a:xfrm>
+          <a:prstGeom prst="rect">
+            <a:avLst/>
+          </a:prstGeom>
+          <a:noFill/>
+        </p:spPr>
+        <p:txBody>
+          <a:bodyPr wrap="none" rtlCol="0">
+            <a:spAutoFit/>
+          </a:bodyPr>
+          <a:lstStyle/>
+          <a:p>
+            <a:r>
+              <a:rPr lang="fr-FR" dirty="0"/>
+              <a:t>Radiation : émissivité</a:t>
+            </a:r>
+            <a:endParaRPr lang="en-US" dirty="0"/>
+          </a:p>
+        </p:txBody>
+      </p:sp>
+      <p:sp>
+        <p:nvSpPr>
+          <p:cNvPr id="16" name="TextBox 15">
+            <a:extLst>
+              <a:ext uri="{FF2B5EF4-FFF2-40B4-BE49-F238E27FC236}">
+                <a16:creationId xmlns:a16="http://schemas.microsoft.com/office/drawing/2014/main" id="{51AC3AD7-E755-29F6-BDA8-03CAC197225B}"/>
+              </a:ext>
+            </a:extLst>
+          </p:cNvPr>
+          <p:cNvSpPr txBox="1"/>
+          <p:nvPr/>
+        </p:nvSpPr>
+        <p:spPr>
+          <a:xfrm>
+            <a:off x="9912373" y="3427905"/>
+            <a:ext cx="1327608" cy="369332"/>
+          </a:xfrm>
+          <a:prstGeom prst="rect">
+            <a:avLst/>
+          </a:prstGeom>
+          <a:noFill/>
+        </p:spPr>
+        <p:txBody>
+          <a:bodyPr wrap="none" rtlCol="0">
+            <a:spAutoFit/>
+          </a:bodyPr>
+          <a:lstStyle/>
+          <a:p>
+            <a:r>
+              <a:rPr lang="fr-FR" dirty="0"/>
+              <a:t>Convection</a:t>
+            </a:r>
+            <a:endParaRPr lang="en-US" dirty="0"/>
+          </a:p>
+        </p:txBody>
+      </p:sp>
+    </p:spTree>
+    <p:extLst>
+      <p:ext uri="{BB962C8B-B14F-4D97-AF65-F5344CB8AC3E}">
+        <p14:creationId xmlns:p14="http://schemas.microsoft.com/office/powerpoint/2010/main" val="888647311"/>
+      </p:ext>
+    </p:extLst>
+  </p:cSld>
+  <p:clrMapOvr>
+    <a:masterClrMapping/>
+  </p:clrMapOvr>
+</p:sld>
+</file>
+
+<file path=ppt/slides/slide16.xml><?xml version="1.0" encoding="utf-8"?>
+<p:sld xmlns:a="http://schemas.openxmlformats.org/drawingml/2006/main" xmlns:r="http://schemas.openxmlformats.org/officeDocument/2006/relationships" xmlns:p="http://schemas.openxmlformats.org/presentationml/2006/main">
+  <p:cSld>
+    <p:spTree>
+      <p:nvGrpSpPr>
+        <p:cNvPr id="1" name=""/>
+        <p:cNvGrpSpPr/>
+        <p:nvPr/>
+      </p:nvGrpSpPr>
+      <p:grpSpPr>
+        <a:xfrm>
+          <a:off x="0" y="0"/>
+          <a:ext cx="0" cy="0"/>
+          <a:chOff x="0" y="0"/>
+          <a:chExt cx="0" cy="0"/>
+        </a:xfrm>
+      </p:grpSpPr>
+      <p:sp>
+        <p:nvSpPr>
+          <p:cNvPr id="2" name="Title 1">
+            <a:extLst>
+              <a:ext uri="{FF2B5EF4-FFF2-40B4-BE49-F238E27FC236}">
+                <a16:creationId xmlns:a16="http://schemas.microsoft.com/office/drawing/2014/main" id="{5A8D1F89-F778-6C72-5829-94790C929507}"/>
+              </a:ext>
+            </a:extLst>
+          </p:cNvPr>
+          <p:cNvSpPr>
+            <a:spLocks noGrp="1"/>
+          </p:cNvSpPr>
+          <p:nvPr>
+            <p:ph type="title"/>
+          </p:nvPr>
+        </p:nvSpPr>
+        <p:spPr/>
+        <p:txBody>
+          <a:bodyPr/>
+          <a:lstStyle/>
+          <a:p>
+            <a:r>
+              <a:rPr lang="fr-FR" dirty="0"/>
+              <a:t>Validation - erreur de simulation :</a:t>
+            </a:r>
+            <a:endParaRPr lang="en-US" dirty="0"/>
+          </a:p>
+        </p:txBody>
+      </p:sp>
+      <p:pic>
+        <p:nvPicPr>
+          <p:cNvPr id="35" name="Content Placeholder 34">
+            <a:extLst>
+              <a:ext uri="{FF2B5EF4-FFF2-40B4-BE49-F238E27FC236}">
+                <a16:creationId xmlns:a16="http://schemas.microsoft.com/office/drawing/2014/main" id="{B470CD96-A82E-E0EB-A3EC-1334F9C20B6F}"/>
+              </a:ext>
+            </a:extLst>
+          </p:cNvPr>
+          <p:cNvPicPr>
+            <a:picLocks noGrp="1" noRot="1" noChangeAspect="1" noMove="1" noResize="1" noEditPoints="1" noAdjustHandles="1" noChangeArrowheads="1" noChangeShapeType="1" noCrop="1"/>
+          </p:cNvPicPr>
+          <p:nvPr>
+            <p:ph idx="1"/>
+          </p:nvPr>
+        </p:nvPicPr>
+        <p:blipFill>
+          <a:blip r:embed="rId2">
+            <a:extLst>
+              <a:ext uri="{28A0092B-C50C-407E-A947-70E740481C1C}">
+                <a14:useLocalDpi xmlns:a14="http://schemas.microsoft.com/office/drawing/2010/main" val="0"/>
+              </a:ext>
+            </a:extLst>
+          </a:blip>
+          <a:stretch>
+            <a:fillRect/>
+          </a:stretch>
+        </p:blipFill>
+        <p:spPr>
+          <a:xfrm>
+            <a:off x="183670" y="4864715"/>
+            <a:ext cx="764723" cy="1531620"/>
+          </a:xfrm>
+          <a:prstGeom prst="rect">
+            <a:avLst/>
+          </a:prstGeom>
+        </p:spPr>
+      </p:pic>
+      <p:pic>
+        <p:nvPicPr>
+          <p:cNvPr id="37" name="Picture 36">
+            <a:extLst>
+              <a:ext uri="{FF2B5EF4-FFF2-40B4-BE49-F238E27FC236}">
+                <a16:creationId xmlns:a16="http://schemas.microsoft.com/office/drawing/2014/main" id="{BD5C8037-549E-B941-FE25-FC8B83B3AE8B}"/>
+              </a:ext>
+            </a:extLst>
+          </p:cNvPr>
+          <p:cNvPicPr>
+            <a:picLocks noGrp="1" noRot="1" noChangeAspect="1" noMove="1" noResize="1" noEditPoints="1" noAdjustHandles="1" noChangeArrowheads="1" noChangeShapeType="1" noCrop="1"/>
+          </p:cNvPicPr>
+          <p:nvPr/>
+        </p:nvPicPr>
+        <p:blipFill>
+          <a:blip r:embed="rId3">
+            <a:extLst>
+              <a:ext uri="{28A0092B-C50C-407E-A947-70E740481C1C}">
+                <a14:useLocalDpi xmlns:a14="http://schemas.microsoft.com/office/drawing/2010/main" val="0"/>
+              </a:ext>
+            </a:extLst>
+          </a:blip>
+          <a:stretch>
+            <a:fillRect/>
+          </a:stretch>
+        </p:blipFill>
+        <p:spPr>
+          <a:xfrm>
+            <a:off x="987481" y="4864715"/>
+            <a:ext cx="770186" cy="1531620"/>
+          </a:xfrm>
+          <a:prstGeom prst="rect">
+            <a:avLst/>
+          </a:prstGeom>
+        </p:spPr>
+      </p:pic>
+      <p:pic>
+        <p:nvPicPr>
+          <p:cNvPr id="39" name="Picture 38">
+            <a:extLst>
+              <a:ext uri="{FF2B5EF4-FFF2-40B4-BE49-F238E27FC236}">
+                <a16:creationId xmlns:a16="http://schemas.microsoft.com/office/drawing/2014/main" id="{D4695AF5-14C8-8B55-5D76-A5D9F788F65F}"/>
+              </a:ext>
+            </a:extLst>
+          </p:cNvPr>
+          <p:cNvPicPr>
+            <a:picLocks noGrp="1" noRot="1" noChangeAspect="1" noMove="1" noResize="1" noEditPoints="1" noAdjustHandles="1" noChangeArrowheads="1" noChangeShapeType="1" noCrop="1"/>
+          </p:cNvPicPr>
+          <p:nvPr/>
+        </p:nvPicPr>
+        <p:blipFill>
+          <a:blip r:embed="rId4">
+            <a:extLst>
+              <a:ext uri="{28A0092B-C50C-407E-A947-70E740481C1C}">
+                <a14:useLocalDpi xmlns:a14="http://schemas.microsoft.com/office/drawing/2010/main" val="0"/>
+              </a:ext>
+            </a:extLst>
+          </a:blip>
+          <a:stretch>
+            <a:fillRect/>
+          </a:stretch>
+        </p:blipFill>
+        <p:spPr>
+          <a:xfrm>
+            <a:off x="1791287" y="4864715"/>
+            <a:ext cx="775642" cy="1531620"/>
+          </a:xfrm>
+          <a:prstGeom prst="rect">
+            <a:avLst/>
+          </a:prstGeom>
+        </p:spPr>
+      </p:pic>
+      <p:pic>
+        <p:nvPicPr>
+          <p:cNvPr id="41" name="Picture 40">
+            <a:extLst>
+              <a:ext uri="{FF2B5EF4-FFF2-40B4-BE49-F238E27FC236}">
+                <a16:creationId xmlns:a16="http://schemas.microsoft.com/office/drawing/2014/main" id="{AE5FD986-C902-A6A4-CE75-3F189ADA9EED}"/>
+              </a:ext>
+            </a:extLst>
+          </p:cNvPr>
+          <p:cNvPicPr>
+            <a:picLocks noGrp="1" noRot="1" noChangeAspect="1" noMove="1" noResize="1" noEditPoints="1" noAdjustHandles="1" noChangeArrowheads="1" noChangeShapeType="1" noCrop="1"/>
+          </p:cNvPicPr>
+          <p:nvPr/>
+        </p:nvPicPr>
+        <p:blipFill>
+          <a:blip r:embed="rId5">
+            <a:extLst>
+              <a:ext uri="{28A0092B-C50C-407E-A947-70E740481C1C}">
+                <a14:useLocalDpi xmlns:a14="http://schemas.microsoft.com/office/drawing/2010/main" val="0"/>
+              </a:ext>
+            </a:extLst>
+          </a:blip>
+          <a:stretch>
+            <a:fillRect/>
+          </a:stretch>
+        </p:blipFill>
+        <p:spPr>
+          <a:xfrm>
+            <a:off x="2603321" y="4864715"/>
+            <a:ext cx="771257" cy="1531620"/>
+          </a:xfrm>
+          <a:prstGeom prst="rect">
+            <a:avLst/>
+          </a:prstGeom>
+        </p:spPr>
+      </p:pic>
+      <p:pic>
+        <p:nvPicPr>
+          <p:cNvPr id="43" name="Picture 42">
+            <a:extLst>
+              <a:ext uri="{FF2B5EF4-FFF2-40B4-BE49-F238E27FC236}">
+                <a16:creationId xmlns:a16="http://schemas.microsoft.com/office/drawing/2014/main" id="{E4EFAB5C-E687-B58A-EE9E-79B9093375AE}"/>
+              </a:ext>
+            </a:extLst>
+          </p:cNvPr>
+          <p:cNvPicPr>
+            <a:picLocks noGrp="1" noRot="1" noChangeAspect="1" noMove="1" noResize="1" noEditPoints="1" noAdjustHandles="1" noChangeArrowheads="1" noChangeShapeType="1" noCrop="1"/>
+          </p:cNvPicPr>
+          <p:nvPr/>
+        </p:nvPicPr>
+        <p:blipFill>
+          <a:blip r:embed="rId6">
+            <a:extLst>
+              <a:ext uri="{28A0092B-C50C-407E-A947-70E740481C1C}">
+                <a14:useLocalDpi xmlns:a14="http://schemas.microsoft.com/office/drawing/2010/main" val="0"/>
+              </a:ext>
+            </a:extLst>
+          </a:blip>
+          <a:stretch>
+            <a:fillRect/>
+          </a:stretch>
+        </p:blipFill>
+        <p:spPr>
+          <a:xfrm>
+            <a:off x="3401810" y="4864715"/>
+            <a:ext cx="764717" cy="1531620"/>
+          </a:xfrm>
+          <a:prstGeom prst="rect">
+            <a:avLst/>
+          </a:prstGeom>
+        </p:spPr>
+      </p:pic>
+      <p:pic>
+        <p:nvPicPr>
+          <p:cNvPr id="45" name="Picture 44">
+            <a:extLst>
+              <a:ext uri="{FF2B5EF4-FFF2-40B4-BE49-F238E27FC236}">
+                <a16:creationId xmlns:a16="http://schemas.microsoft.com/office/drawing/2014/main" id="{F72B7175-DEBB-3BDD-18D7-21B44DE17A67}"/>
+              </a:ext>
+            </a:extLst>
+          </p:cNvPr>
+          <p:cNvPicPr>
+            <a:picLocks noGrp="1" noRot="1" noChangeAspect="1" noMove="1" noResize="1" noEditPoints="1" noAdjustHandles="1" noChangeArrowheads="1" noChangeShapeType="1" noCrop="1"/>
+          </p:cNvPicPr>
+          <p:nvPr/>
+        </p:nvPicPr>
+        <p:blipFill>
+          <a:blip r:embed="rId7">
+            <a:extLst>
+              <a:ext uri="{28A0092B-C50C-407E-A947-70E740481C1C}">
+                <a14:useLocalDpi xmlns:a14="http://schemas.microsoft.com/office/drawing/2010/main" val="0"/>
+              </a:ext>
+            </a:extLst>
+          </a:blip>
+          <a:stretch>
+            <a:fillRect/>
+          </a:stretch>
+        </p:blipFill>
+        <p:spPr>
+          <a:xfrm>
+            <a:off x="4204095" y="4864715"/>
+            <a:ext cx="752530" cy="1531620"/>
+          </a:xfrm>
+          <a:prstGeom prst="rect">
+            <a:avLst/>
+          </a:prstGeom>
+        </p:spPr>
+      </p:pic>
+      <p:pic>
+        <p:nvPicPr>
+          <p:cNvPr id="47" name="Picture 46">
+            <a:extLst>
+              <a:ext uri="{FF2B5EF4-FFF2-40B4-BE49-F238E27FC236}">
+                <a16:creationId xmlns:a16="http://schemas.microsoft.com/office/drawing/2014/main" id="{CFEAD094-7ADB-7B93-230A-513191FA86AA}"/>
+              </a:ext>
+            </a:extLst>
+          </p:cNvPr>
+          <p:cNvPicPr>
+            <a:picLocks noGrp="1" noRot="1" noChangeAspect="1" noMove="1" noResize="1" noEditPoints="1" noAdjustHandles="1" noChangeArrowheads="1" noChangeShapeType="1" noCrop="1"/>
+          </p:cNvPicPr>
+          <p:nvPr/>
+        </p:nvPicPr>
+        <p:blipFill>
+          <a:blip r:embed="rId8">
+            <a:extLst>
+              <a:ext uri="{28A0092B-C50C-407E-A947-70E740481C1C}">
+                <a14:useLocalDpi xmlns:a14="http://schemas.microsoft.com/office/drawing/2010/main" val="0"/>
+              </a:ext>
+            </a:extLst>
+          </a:blip>
+          <a:stretch>
+            <a:fillRect/>
+          </a:stretch>
+        </p:blipFill>
+        <p:spPr>
+          <a:xfrm>
+            <a:off x="5009543" y="4864715"/>
+            <a:ext cx="773458" cy="1531620"/>
+          </a:xfrm>
+          <a:prstGeom prst="rect">
+            <a:avLst/>
+          </a:prstGeom>
+        </p:spPr>
+      </p:pic>
+      <p:pic>
+        <p:nvPicPr>
+          <p:cNvPr id="49" name="Picture 48">
+            <a:extLst>
+              <a:ext uri="{FF2B5EF4-FFF2-40B4-BE49-F238E27FC236}">
+                <a16:creationId xmlns:a16="http://schemas.microsoft.com/office/drawing/2014/main" id="{E0245B62-8CC7-E885-49A0-9C13DA3242F2}"/>
+              </a:ext>
+            </a:extLst>
+          </p:cNvPr>
+          <p:cNvPicPr>
+            <a:picLocks noGrp="1" noRot="1" noChangeAspect="1" noMove="1" noResize="1" noEditPoints="1" noAdjustHandles="1" noChangeArrowheads="1" noChangeShapeType="1" noCrop="1"/>
+          </p:cNvPicPr>
+          <p:nvPr/>
+        </p:nvPicPr>
+        <p:blipFill>
+          <a:blip r:embed="rId9">
+            <a:extLst>
+              <a:ext uri="{28A0092B-C50C-407E-A947-70E740481C1C}">
+                <a14:useLocalDpi xmlns:a14="http://schemas.microsoft.com/office/drawing/2010/main" val="0"/>
+              </a:ext>
+            </a:extLst>
+          </a:blip>
+          <a:stretch>
+            <a:fillRect/>
+          </a:stretch>
+        </p:blipFill>
+        <p:spPr>
+          <a:xfrm>
+            <a:off x="5833093" y="4864715"/>
+            <a:ext cx="774537" cy="1531620"/>
+          </a:xfrm>
+          <a:prstGeom prst="rect">
+            <a:avLst/>
+          </a:prstGeom>
+        </p:spPr>
+      </p:pic>
+      <p:pic>
+        <p:nvPicPr>
+          <p:cNvPr id="52" name="Picture 51">
+            <a:extLst>
+              <a:ext uri="{FF2B5EF4-FFF2-40B4-BE49-F238E27FC236}">
+                <a16:creationId xmlns:a16="http://schemas.microsoft.com/office/drawing/2014/main" id="{51A5B0D7-2859-21E8-101F-3B1B9D125349}"/>
+              </a:ext>
+            </a:extLst>
+          </p:cNvPr>
+          <p:cNvPicPr>
+            <a:picLocks noGrp="1" noRot="1" noChangeAspect="1" noMove="1" noResize="1" noEditPoints="1" noAdjustHandles="1" noChangeArrowheads="1" noChangeShapeType="1" noCrop="1"/>
+          </p:cNvPicPr>
+          <p:nvPr/>
+        </p:nvPicPr>
+        <p:blipFill>
+          <a:blip r:embed="rId10">
+            <a:extLst>
+              <a:ext uri="{28A0092B-C50C-407E-A947-70E740481C1C}">
+                <a14:useLocalDpi xmlns:a14="http://schemas.microsoft.com/office/drawing/2010/main" val="0"/>
+              </a:ext>
+            </a:extLst>
+          </a:blip>
+          <a:stretch>
+            <a:fillRect/>
+          </a:stretch>
+        </p:blipFill>
+        <p:spPr>
+          <a:xfrm>
+            <a:off x="6656258" y="4864715"/>
+            <a:ext cx="770161" cy="1531620"/>
+          </a:xfrm>
+          <a:prstGeom prst="rect">
+            <a:avLst/>
+          </a:prstGeom>
+        </p:spPr>
+      </p:pic>
+      <p:cxnSp>
+        <p:nvCxnSpPr>
+          <p:cNvPr id="54" name="Straight Arrow Connector 53">
+            <a:extLst>
+              <a:ext uri="{FF2B5EF4-FFF2-40B4-BE49-F238E27FC236}">
+                <a16:creationId xmlns:a16="http://schemas.microsoft.com/office/drawing/2014/main" id="{7DC9A4AC-38ED-A0E8-3543-95C8B64B1948}"/>
+              </a:ext>
+            </a:extLst>
+          </p:cNvPr>
+          <p:cNvCxnSpPr>
+            <a:cxnSpLocks noGrp="1" noRot="1" noMove="1" noResize="1" noEditPoints="1" noAdjustHandles="1" noChangeArrowheads="1" noChangeShapeType="1"/>
+          </p:cNvCxnSpPr>
+          <p:nvPr/>
+        </p:nvCxnSpPr>
+        <p:spPr>
+          <a:xfrm>
+            <a:off x="160020" y="6533495"/>
+            <a:ext cx="7338060" cy="0"/>
+          </a:xfrm>
+          <a:prstGeom prst="straightConnector1">
+            <a:avLst/>
+          </a:prstGeom>
+          <a:ln>
+            <a:tailEnd type="triangle"/>
+          </a:ln>
+        </p:spPr>
+        <p:style>
+          <a:lnRef idx="2">
+            <a:schemeClr val="dk1"/>
+          </a:lnRef>
+          <a:fillRef idx="0">
+            <a:schemeClr val="dk1"/>
+          </a:fillRef>
+          <a:effectRef idx="1">
+            <a:schemeClr val="dk1"/>
+          </a:effectRef>
+          <a:fontRef idx="minor">
+            <a:schemeClr val="tx1"/>
+          </a:fontRef>
+        </p:style>
+      </p:cxnSp>
+      <mc:AlternateContent xmlns:mc="http://schemas.openxmlformats.org/markup-compatibility/2006">
+        <mc:Choice xmlns:a14="http://schemas.microsoft.com/office/drawing/2010/main" Requires="a14">
+          <p:sp>
+            <p:nvSpPr>
+              <p:cNvPr id="58" name="TextBox 57">
+                <a:extLst>
+                  <a:ext uri="{FF2B5EF4-FFF2-40B4-BE49-F238E27FC236}">
+                    <a16:creationId xmlns:a16="http://schemas.microsoft.com/office/drawing/2014/main" id="{0CEAB3DF-E113-A48A-4976-5362A80A08F7}"/>
+                  </a:ext>
+                </a:extLst>
+              </p:cNvPr>
+              <p:cNvSpPr txBox="1"/>
+              <p:nvPr/>
+            </p:nvSpPr>
+            <p:spPr>
+              <a:xfrm>
+                <a:off x="560860" y="1690688"/>
+                <a:ext cx="10651970" cy="2986459"/>
+              </a:xfrm>
+              <a:prstGeom prst="rect">
+                <a:avLst/>
+              </a:prstGeom>
+              <a:noFill/>
+            </p:spPr>
+            <p:txBody>
+              <a:bodyPr wrap="square" rtlCol="0">
+                <a:spAutoFit/>
+              </a:bodyPr>
+              <a:lstStyle/>
+              <a:p>
+                <a:pPr marL="285750" indent="-285750">
+                  <a:buFont typeface="Arial" panose="020B0604020202020204" pitchFamily="34" charset="0"/>
+                  <a:buChar char="•"/>
+                </a:pPr>
+                <a:r>
+                  <a:rPr lang="fr-FR" dirty="0"/>
+                  <a:t>S’assurer de la qualité des résultats de SolidWorks </a:t>
+                </a:r>
+                <a:r>
+                  <a:rPr lang="fr-FR" dirty="0">
+                    <a:sym typeface="Wingdings" panose="05000000000000000000" pitchFamily="2" charset="2"/>
+                  </a:rPr>
+                  <a:t> analyse de convergence (temps et espace)</a:t>
+                </a:r>
+              </a:p>
+              <a:p>
+                <a:pPr marL="285750" indent="-285750">
+                  <a:buFont typeface="Arial" panose="020B0604020202020204" pitchFamily="34" charset="0"/>
+                  <a:buChar char="•"/>
+                </a:pPr>
+                <a14:m>
+                  <m:oMath xmlns:m="http://schemas.openxmlformats.org/officeDocument/2006/math">
+                    <m:r>
+                      <m:rPr>
+                        <m:sty m:val="p"/>
+                      </m:rPr>
+                      <a:rPr lang="fr-FR" b="0" i="1" smtClean="0">
+                        <a:latin typeface="Cambria Math" panose="02040503050406030204" pitchFamily="18" charset="0"/>
+                        <a:sym typeface="Wingdings" panose="05000000000000000000" pitchFamily="2" charset="2"/>
+                      </a:rPr>
+                      <m:t>h</m:t>
+                    </m:r>
+                    <m:r>
+                      <a:rPr lang="fr-FR" b="0" i="1" smtClean="0">
+                        <a:latin typeface="Cambria Math" panose="02040503050406030204" pitchFamily="18" charset="0"/>
+                        <a:sym typeface="Wingdings" panose="05000000000000000000" pitchFamily="2" charset="2"/>
+                      </a:rPr>
+                      <m:t>=</m:t>
+                    </m:r>
+                    <m:f>
+                      <m:fPr>
+                        <m:ctrlPr>
+                          <a:rPr lang="pt-BR" b="0" i="1" smtClean="0">
+                            <a:latin typeface="Cambria Math" panose="02040503050406030204" pitchFamily="18" charset="0"/>
+                            <a:sym typeface="Wingdings" panose="05000000000000000000" pitchFamily="2" charset="2"/>
+                          </a:rPr>
+                        </m:ctrlPr>
+                      </m:fPr>
+                      <m:num>
+                        <m:r>
+                          <m:rPr>
+                            <m:sty m:val="p"/>
+                          </m:rPr>
+                          <a:rPr lang="fr-FR" i="1">
+                            <a:latin typeface="Cambria Math" panose="02040503050406030204" pitchFamily="18" charset="0"/>
+                            <a:sym typeface="Wingdings" panose="05000000000000000000" pitchFamily="2" charset="2"/>
+                          </a:rPr>
+                          <m:t>Δt</m:t>
+                        </m:r>
+                      </m:num>
+                      <m:den>
+                        <m:r>
+                          <m:rPr>
+                            <m:sty m:val="p"/>
+                          </m:rPr>
+                          <a:rPr lang="fr-FR" b="0" i="1" smtClean="0">
+                            <a:latin typeface="Cambria Math" panose="02040503050406030204" pitchFamily="18" charset="0"/>
+                            <a:sym typeface="Wingdings" panose="05000000000000000000" pitchFamily="2" charset="2"/>
+                          </a:rPr>
+                          <m:t>Te</m:t>
+                        </m:r>
+                      </m:den>
+                    </m:f>
+                    <m:r>
+                      <a:rPr lang="fr-FR" b="0" i="1" smtClean="0">
+                        <a:latin typeface="Cambria Math" panose="02040503050406030204" pitchFamily="18" charset="0"/>
+                        <a:sym typeface="Wingdings" panose="05000000000000000000" pitchFamily="2" charset="2"/>
+                      </a:rPr>
+                      <m:t> </m:t>
+                    </m:r>
+                  </m:oMath>
+                </a14:m>
+                <a:r>
+                  <a:rPr lang="fr-FR" dirty="0">
+                    <a:sym typeface="Wingdings" panose="05000000000000000000" pitchFamily="2" charset="2"/>
+                  </a:rPr>
+                  <a:t> où Te désigne la taille des éléments (cm) et </a:t>
+                </a:r>
+                <a14:m>
+                  <m:oMath xmlns:m="http://schemas.openxmlformats.org/officeDocument/2006/math">
+                    <m:r>
+                      <m:rPr>
+                        <m:sty m:val="p"/>
+                      </m:rPr>
+                      <a:rPr lang="fr-FR" i="1">
+                        <a:latin typeface="Cambria Math" panose="02040503050406030204" pitchFamily="18" charset="0"/>
+                        <a:sym typeface="Wingdings" panose="05000000000000000000" pitchFamily="2" charset="2"/>
+                      </a:rPr>
+                      <m:t>Δt</m:t>
+                    </m:r>
+                  </m:oMath>
+                </a14:m>
+                <a:r>
+                  <a:rPr lang="fr-FR" dirty="0">
+                    <a:sym typeface="Wingdings" panose="05000000000000000000" pitchFamily="2" charset="2"/>
+                  </a:rPr>
+                  <a:t> le pas de temps (s)</a:t>
+                </a:r>
+              </a:p>
+              <a:p>
+                <a:pPr marL="285750" indent="-285750">
+                  <a:buFont typeface="Arial" panose="020B0604020202020204" pitchFamily="34" charset="0"/>
+                  <a:buChar char="•"/>
+                </a:pPr>
+                <a:r>
+                  <a:rPr lang="fr-FR" dirty="0">
+                    <a:sym typeface="Wingdings" panose="05000000000000000000" pitchFamily="2" charset="2"/>
+                  </a:rPr>
+                  <a:t>Analyse de convergence réalisé avec les paramètres : </a:t>
+                </a:r>
+              </a:p>
+              <a:p>
+                <a:pPr marL="742950" lvl="1" indent="-285750">
+                  <a:buFont typeface="Arial" panose="020B0604020202020204" pitchFamily="34" charset="0"/>
+                  <a:buChar char="•"/>
+                </a:pPr>
+                <a14:m>
+                  <m:oMath xmlns:m="http://schemas.openxmlformats.org/officeDocument/2006/math">
+                    <m:r>
+                      <m:rPr>
+                        <m:sty m:val="p"/>
+                      </m:rPr>
+                      <a:rPr lang="fr-FR" b="0" i="1" smtClean="0">
+                        <a:latin typeface="Cambria Math" panose="02040503050406030204" pitchFamily="18" charset="0"/>
+                        <a:sym typeface="Wingdings" panose="05000000000000000000" pitchFamily="2" charset="2"/>
+                      </a:rPr>
+                      <m:t>t</m:t>
+                    </m:r>
+                    <m:r>
+                      <m:rPr>
+                        <m:sty m:val="p"/>
+                      </m:rPr>
+                      <a:rPr lang="fr-FR" b="0" i="1" baseline="-25000" smtClean="0">
+                        <a:latin typeface="Cambria Math" panose="02040503050406030204" pitchFamily="18" charset="0"/>
+                        <a:sym typeface="Wingdings" panose="05000000000000000000" pitchFamily="2" charset="2"/>
+                      </a:rPr>
+                      <m:t>fin</m:t>
+                    </m:r>
+                    <m:r>
+                      <a:rPr lang="fr-FR" b="0" i="1" smtClean="0">
+                        <a:latin typeface="Cambria Math" panose="02040503050406030204" pitchFamily="18" charset="0"/>
+                        <a:sym typeface="Wingdings" panose="05000000000000000000" pitchFamily="2" charset="2"/>
+                      </a:rPr>
+                      <m:t> = 100</m:t>
+                    </m:r>
+                    <m:r>
+                      <m:rPr>
+                        <m:sty m:val="p"/>
+                      </m:rPr>
+                      <a:rPr lang="fr-FR" b="0" i="1" smtClean="0">
+                        <a:latin typeface="Cambria Math" panose="02040503050406030204" pitchFamily="18" charset="0"/>
+                        <a:sym typeface="Wingdings" panose="05000000000000000000" pitchFamily="2" charset="2"/>
+                      </a:rPr>
+                      <m:t>s</m:t>
+                    </m:r>
+                    <m:r>
+                      <a:rPr lang="fr-FR" b="0" i="1" smtClean="0">
+                        <a:latin typeface="Cambria Math" panose="02040503050406030204" pitchFamily="18" charset="0"/>
+                        <a:sym typeface="Wingdings" panose="05000000000000000000" pitchFamily="2" charset="2"/>
+                      </a:rPr>
+                      <m:t> , </m:t>
+                    </m:r>
+                    <m:r>
+                      <m:rPr>
+                        <m:sty m:val="p"/>
+                      </m:rPr>
+                      <a:rPr lang="fr-FR" b="0" i="1" smtClean="0">
+                        <a:latin typeface="Cambria Math" panose="02040503050406030204" pitchFamily="18" charset="0"/>
+                        <a:sym typeface="Wingdings" panose="05000000000000000000" pitchFamily="2" charset="2"/>
+                      </a:rPr>
+                      <m:t>h</m:t>
+                    </m:r>
+                    <m:r>
+                      <a:rPr lang="fr-FR" b="0" i="1" smtClean="0">
+                        <a:latin typeface="Cambria Math" panose="02040503050406030204" pitchFamily="18" charset="0"/>
+                        <a:sym typeface="Wingdings" panose="05000000000000000000" pitchFamily="2" charset="2"/>
+                      </a:rPr>
+                      <m:t>=2</m:t>
+                    </m:r>
+                  </m:oMath>
+                </a14:m>
+                <a:endParaRPr lang="fr-FR" dirty="0">
+                  <a:sym typeface="Wingdings" panose="05000000000000000000" pitchFamily="2" charset="2"/>
+                </a:endParaRPr>
+              </a:p>
+              <a:p>
+                <a:pPr marL="285750" indent="-285750">
+                  <a:buFont typeface="Arial" panose="020B0604020202020204" pitchFamily="34" charset="0"/>
+                  <a:buChar char="•"/>
+                </a:pPr>
+                <a:endParaRPr lang="fr-FR" dirty="0">
+                  <a:sym typeface="Wingdings" panose="05000000000000000000" pitchFamily="2" charset="2"/>
+                </a:endParaRPr>
+              </a:p>
+              <a:p>
+                <a:pPr marL="285750" indent="-285750">
+                  <a:buFont typeface="Arial" panose="020B0604020202020204" pitchFamily="34" charset="0"/>
+                  <a:buChar char="•"/>
+                </a:pPr>
+                <a:r>
+                  <a:rPr lang="fr-FR" dirty="0">
+                    <a:sym typeface="Wingdings" panose="05000000000000000000" pitchFamily="2" charset="2"/>
+                  </a:rPr>
+                  <a:t>Condition : obtenir convergence des valeurs finales + symétrie </a:t>
+                </a:r>
+              </a:p>
+              <a:p>
+                <a:pPr marL="285750" indent="-285750">
+                  <a:buFont typeface="Arial" panose="020B0604020202020204" pitchFamily="34" charset="0"/>
+                  <a:buChar char="•"/>
+                </a:pPr>
+                <a:endParaRPr lang="fr-FR" dirty="0">
+                  <a:sym typeface="Wingdings" panose="05000000000000000000" pitchFamily="2" charset="2"/>
+                </a:endParaRPr>
+              </a:p>
+              <a:p>
+                <a:pPr marL="285750" indent="-285750">
+                  <a:buFont typeface="Arial" panose="020B0604020202020204" pitchFamily="34" charset="0"/>
+                  <a:buChar char="•"/>
+                </a:pPr>
+                <a:r>
+                  <a:rPr lang="fr-FR" dirty="0">
+                    <a:sym typeface="Wingdings" panose="05000000000000000000" pitchFamily="2" charset="2"/>
+                  </a:rPr>
+                  <a:t>Obtention de résultat fiable pour </a:t>
+                </a:r>
+                <a14:m>
+                  <m:oMath xmlns:m="http://schemas.openxmlformats.org/officeDocument/2006/math">
+                    <m:r>
+                      <m:rPr>
+                        <m:sty m:val="p"/>
+                      </m:rPr>
+                      <a:rPr lang="fr-FR" i="1">
+                        <a:latin typeface="Cambria Math" panose="02040503050406030204" pitchFamily="18" charset="0"/>
+                        <a:sym typeface="Wingdings" panose="05000000000000000000" pitchFamily="2" charset="2"/>
+                      </a:rPr>
+                      <m:t>Δt</m:t>
+                    </m:r>
+                    <m:r>
+                      <a:rPr lang="fr-FR" b="0" i="1" smtClean="0">
+                        <a:latin typeface="Cambria Math" panose="02040503050406030204" pitchFamily="18" charset="0"/>
+                        <a:sym typeface="Wingdings" panose="05000000000000000000" pitchFamily="2" charset="2"/>
+                      </a:rPr>
+                      <m:t>= 0.6</m:t>
+                    </m:r>
+                    <m:r>
+                      <m:rPr>
+                        <m:sty m:val="p"/>
+                      </m:rPr>
+                      <a:rPr lang="fr-FR" b="0" i="1" smtClean="0">
+                        <a:latin typeface="Cambria Math" panose="02040503050406030204" pitchFamily="18" charset="0"/>
+                        <a:sym typeface="Wingdings" panose="05000000000000000000" pitchFamily="2" charset="2"/>
+                      </a:rPr>
+                      <m:t>s</m:t>
+                    </m:r>
+                  </m:oMath>
+                </a14:m>
+                <a:r>
+                  <a:rPr lang="fr-FR" dirty="0">
+                    <a:sym typeface="Wingdings" panose="05000000000000000000" pitchFamily="2" charset="2"/>
+                  </a:rPr>
+                  <a:t>  et </a:t>
+                </a:r>
+                <a14:m>
+                  <m:oMath xmlns:m="http://schemas.openxmlformats.org/officeDocument/2006/math">
+                    <m:r>
+                      <m:rPr>
+                        <m:sty m:val="p"/>
+                      </m:rPr>
+                      <a:rPr lang="fr-FR" i="1">
+                        <a:latin typeface="Cambria Math" panose="02040503050406030204" pitchFamily="18" charset="0"/>
+                        <a:sym typeface="Wingdings" panose="05000000000000000000" pitchFamily="2" charset="2"/>
+                      </a:rPr>
+                      <m:t>Te</m:t>
+                    </m:r>
+                    <m:r>
+                      <a:rPr lang="fr-FR" b="0" i="1" smtClean="0">
+                        <a:latin typeface="Cambria Math" panose="02040503050406030204" pitchFamily="18" charset="0"/>
+                        <a:sym typeface="Wingdings" panose="05000000000000000000" pitchFamily="2" charset="2"/>
+                      </a:rPr>
+                      <m:t> = 0.3</m:t>
+                    </m:r>
+                  </m:oMath>
+                </a14:m>
+                <a:endParaRPr lang="fr-FR" dirty="0">
+                  <a:sym typeface="Wingdings" panose="05000000000000000000" pitchFamily="2" charset="2"/>
+                </a:endParaRPr>
+              </a:p>
+              <a:p>
+                <a:endParaRPr lang="fr-FR" dirty="0">
+                  <a:sym typeface="Wingdings" panose="05000000000000000000" pitchFamily="2" charset="2"/>
+                </a:endParaRPr>
+              </a:p>
+              <a:p>
+                <a:endParaRPr lang="fr-FR" dirty="0">
+                  <a:sym typeface="Wingdings" panose="05000000000000000000" pitchFamily="2" charset="2"/>
+                </a:endParaRPr>
+              </a:p>
+            </p:txBody>
+          </p:sp>
+        </mc:Choice>
+        <mc:Fallback>
+          <p:sp>
+            <p:nvSpPr>
+              <p:cNvPr id="58" name="TextBox 57">
+                <a:extLst>
+                  <a:ext uri="{FF2B5EF4-FFF2-40B4-BE49-F238E27FC236}">
+                    <a16:creationId xmlns:a16="http://schemas.microsoft.com/office/drawing/2014/main" id="{0CEAB3DF-E113-A48A-4976-5362A80A08F7}"/>
+                  </a:ext>
+                </a:extLst>
+              </p:cNvPr>
+              <p:cNvSpPr txBox="1">
+                <a:spLocks noRot="1" noChangeAspect="1" noMove="1" noResize="1" noEditPoints="1" noAdjustHandles="1" noChangeArrowheads="1" noChangeShapeType="1" noTextEdit="1"/>
+              </p:cNvSpPr>
+              <p:nvPr/>
+            </p:nvSpPr>
+            <p:spPr>
+              <a:xfrm>
+                <a:off x="560860" y="1690688"/>
+                <a:ext cx="10651970" cy="2986459"/>
+              </a:xfrm>
+              <a:prstGeom prst="rect">
+                <a:avLst/>
+              </a:prstGeom>
+              <a:blipFill>
+                <a:blip r:embed="rId11"/>
+                <a:stretch>
+                  <a:fillRect l="-343" t="-1224"/>
+                </a:stretch>
+              </a:blipFill>
+            </p:spPr>
+            <p:txBody>
+              <a:bodyPr/>
+              <a:lstStyle/>
+              <a:p>
+                <a:r>
+                  <a:rPr lang="en-US">
+                    <a:noFill/>
+                  </a:rPr>
+                  <a:t> </a:t>
+                </a:r>
+              </a:p>
+            </p:txBody>
+          </p:sp>
+        </mc:Fallback>
+      </mc:AlternateContent>
+      <p:sp>
+        <p:nvSpPr>
+          <p:cNvPr id="59" name="TextBox 58">
+            <a:extLst>
+              <a:ext uri="{FF2B5EF4-FFF2-40B4-BE49-F238E27FC236}">
+                <a16:creationId xmlns:a16="http://schemas.microsoft.com/office/drawing/2014/main" id="{D1B8D06E-603C-C267-3757-24818DA12201}"/>
+              </a:ext>
+            </a:extLst>
+          </p:cNvPr>
+          <p:cNvSpPr txBox="1">
+            <a:spLocks noGrp="1" noRot="1" noMove="1" noResize="1" noEditPoints="1" noAdjustHandles="1" noChangeArrowheads="1" noChangeShapeType="1"/>
+          </p:cNvSpPr>
+          <p:nvPr/>
+        </p:nvSpPr>
+        <p:spPr>
+          <a:xfrm>
+            <a:off x="7498081" y="6396335"/>
+            <a:ext cx="771258" cy="307777"/>
+          </a:xfrm>
+          <a:prstGeom prst="rect">
+            <a:avLst/>
+          </a:prstGeom>
+          <a:noFill/>
+        </p:spPr>
+        <p:txBody>
+          <a:bodyPr wrap="square" rtlCol="0">
+            <a:spAutoFit/>
+          </a:bodyPr>
+          <a:lstStyle/>
+          <a:p>
+            <a:r>
+              <a:rPr lang="fr-FR" sz="1400" dirty="0"/>
+              <a:t>Te (cm)</a:t>
+            </a:r>
+            <a:endParaRPr lang="en-US" sz="1400" dirty="0"/>
+          </a:p>
+        </p:txBody>
+      </p:sp>
+      <p:sp>
+        <p:nvSpPr>
+          <p:cNvPr id="60" name="TextBox 59">
+            <a:extLst>
+              <a:ext uri="{FF2B5EF4-FFF2-40B4-BE49-F238E27FC236}">
+                <a16:creationId xmlns:a16="http://schemas.microsoft.com/office/drawing/2014/main" id="{377C65A6-DFDD-665B-F68B-741DFE066405}"/>
+              </a:ext>
+            </a:extLst>
+          </p:cNvPr>
+          <p:cNvSpPr txBox="1">
+            <a:spLocks noGrp="1" noRot="1" noMove="1" noResize="1" noEditPoints="1" noAdjustHandles="1" noChangeArrowheads="1" noChangeShapeType="1"/>
+          </p:cNvSpPr>
+          <p:nvPr/>
+        </p:nvSpPr>
+        <p:spPr>
+          <a:xfrm>
+            <a:off x="425608" y="6550223"/>
+            <a:ext cx="280846" cy="307777"/>
+          </a:xfrm>
+          <a:prstGeom prst="rect">
+            <a:avLst/>
+          </a:prstGeom>
+          <a:noFill/>
+        </p:spPr>
+        <p:txBody>
+          <a:bodyPr wrap="none" rtlCol="0">
+            <a:spAutoFit/>
+          </a:bodyPr>
+          <a:lstStyle/>
+          <a:p>
+            <a:r>
+              <a:rPr lang="fr-FR" sz="1400" dirty="0"/>
+              <a:t>1</a:t>
+            </a:r>
+            <a:endParaRPr lang="en-US" dirty="0"/>
+          </a:p>
+        </p:txBody>
+      </p:sp>
+      <p:sp>
+        <p:nvSpPr>
+          <p:cNvPr id="61" name="TextBox 60">
+            <a:extLst>
+              <a:ext uri="{FF2B5EF4-FFF2-40B4-BE49-F238E27FC236}">
+                <a16:creationId xmlns:a16="http://schemas.microsoft.com/office/drawing/2014/main" id="{88D5B6F5-F7F2-D061-02CE-DBF9E04F5741}"/>
+              </a:ext>
+            </a:extLst>
+          </p:cNvPr>
+          <p:cNvSpPr txBox="1">
+            <a:spLocks noGrp="1" noRot="1" noMove="1" noResize="1" noEditPoints="1" noAdjustHandles="1" noChangeArrowheads="1" noChangeShapeType="1"/>
+          </p:cNvSpPr>
+          <p:nvPr/>
+        </p:nvSpPr>
+        <p:spPr>
+          <a:xfrm>
+            <a:off x="6838695" y="6550223"/>
+            <a:ext cx="428322" cy="307777"/>
+          </a:xfrm>
+          <a:prstGeom prst="rect">
+            <a:avLst/>
+          </a:prstGeom>
+          <a:noFill/>
+        </p:spPr>
+        <p:txBody>
+          <a:bodyPr wrap="none" rtlCol="0">
+            <a:spAutoFit/>
+          </a:bodyPr>
+          <a:lstStyle/>
+          <a:p>
+            <a:r>
+              <a:rPr lang="fr-FR" sz="1400" dirty="0"/>
+              <a:t>0.2</a:t>
+            </a:r>
+            <a:endParaRPr lang="en-US" dirty="0"/>
+          </a:p>
+        </p:txBody>
+      </p:sp>
+      <p:sp>
+        <p:nvSpPr>
+          <p:cNvPr id="62" name="TextBox 61">
+            <a:extLst>
+              <a:ext uri="{FF2B5EF4-FFF2-40B4-BE49-F238E27FC236}">
+                <a16:creationId xmlns:a16="http://schemas.microsoft.com/office/drawing/2014/main" id="{7C2BD58C-6402-B763-16DB-A732584E4F56}"/>
+              </a:ext>
+            </a:extLst>
+          </p:cNvPr>
+          <p:cNvSpPr txBox="1">
+            <a:spLocks noGrp="1" noRot="1" noMove="1" noResize="1" noEditPoints="1" noAdjustHandles="1" noChangeArrowheads="1" noChangeShapeType="1"/>
+          </p:cNvSpPr>
+          <p:nvPr/>
+        </p:nvSpPr>
+        <p:spPr>
+          <a:xfrm>
+            <a:off x="3555159" y="6550223"/>
+            <a:ext cx="428322" cy="307777"/>
+          </a:xfrm>
+          <a:prstGeom prst="rect">
+            <a:avLst/>
+          </a:prstGeom>
+          <a:noFill/>
+        </p:spPr>
+        <p:txBody>
+          <a:bodyPr wrap="none" rtlCol="0">
+            <a:spAutoFit/>
+          </a:bodyPr>
+          <a:lstStyle/>
+          <a:p>
+            <a:r>
+              <a:rPr lang="fr-FR" sz="1400" dirty="0"/>
+              <a:t>0.6</a:t>
+            </a:r>
+            <a:endParaRPr lang="en-US" dirty="0"/>
+          </a:p>
+        </p:txBody>
+      </p:sp>
+      <p:pic>
+        <p:nvPicPr>
+          <p:cNvPr id="64" name="Picture 63">
+            <a:extLst>
+              <a:ext uri="{FF2B5EF4-FFF2-40B4-BE49-F238E27FC236}">
+                <a16:creationId xmlns:a16="http://schemas.microsoft.com/office/drawing/2014/main" id="{63B385C4-FDC5-27BD-D21F-1496ACB0F442}"/>
+              </a:ext>
+            </a:extLst>
+          </p:cNvPr>
+          <p:cNvPicPr>
+            <a:picLocks noChangeAspect="1"/>
+          </p:cNvPicPr>
+          <p:nvPr/>
+        </p:nvPicPr>
+        <p:blipFill>
+          <a:blip r:embed="rId12">
+            <a:extLst>
+              <a:ext uri="{28A0092B-C50C-407E-A947-70E740481C1C}">
+                <a14:useLocalDpi xmlns:a14="http://schemas.microsoft.com/office/drawing/2010/main" val="0"/>
+              </a:ext>
+            </a:extLst>
+          </a:blip>
+          <a:stretch>
+            <a:fillRect/>
+          </a:stretch>
+        </p:blipFill>
+        <p:spPr>
+          <a:xfrm>
+            <a:off x="8548852" y="4120909"/>
+            <a:ext cx="3239085" cy="2429314"/>
+          </a:xfrm>
+          <a:prstGeom prst="rect">
+            <a:avLst/>
+          </a:prstGeom>
+        </p:spPr>
+      </p:pic>
+    </p:spTree>
+    <p:extLst>
+      <p:ext uri="{BB962C8B-B14F-4D97-AF65-F5344CB8AC3E}">
+        <p14:creationId xmlns:p14="http://schemas.microsoft.com/office/powerpoint/2010/main" val="2856502644"/>
+      </p:ext>
+    </p:extLst>
+  </p:cSld>
+  <p:clrMapOvr>
+    <a:masterClrMapping/>
+  </p:clrMapOvr>
+</p:sld>
+</file>
+
+<file path=ppt/slides/slide17.xml><?xml version="1.0" encoding="utf-8"?>
+<p:sld xmlns:a="http://schemas.openxmlformats.org/drawingml/2006/main" xmlns:r="http://schemas.openxmlformats.org/officeDocument/2006/relationships" xmlns:p="http://schemas.openxmlformats.org/presentationml/2006/main">
+  <p:cSld>
+    <p:spTree>
+      <p:nvGrpSpPr>
+        <p:cNvPr id="1" name=""/>
+        <p:cNvGrpSpPr/>
+        <p:nvPr/>
+      </p:nvGrpSpPr>
+      <p:grpSpPr>
+        <a:xfrm>
+          <a:off x="0" y="0"/>
+          <a:ext cx="0" cy="0"/>
+          <a:chOff x="0" y="0"/>
+          <a:chExt cx="0" cy="0"/>
+        </a:xfrm>
+      </p:grpSpPr>
+      <p:sp>
+        <p:nvSpPr>
+          <p:cNvPr id="2" name="Title 1">
+            <a:extLst>
+              <a:ext uri="{FF2B5EF4-FFF2-40B4-BE49-F238E27FC236}">
+                <a16:creationId xmlns:a16="http://schemas.microsoft.com/office/drawing/2014/main" id="{65A98810-4DBB-A150-02D8-A72B03EB7ECC}"/>
+              </a:ext>
+            </a:extLst>
+          </p:cNvPr>
+          <p:cNvSpPr>
+            <a:spLocks noGrp="1"/>
+          </p:cNvSpPr>
+          <p:nvPr>
+            <p:ph type="title"/>
+          </p:nvPr>
+        </p:nvSpPr>
+        <p:spPr/>
+        <p:txBody>
+          <a:bodyPr/>
+          <a:lstStyle/>
+          <a:p>
+            <a:r>
+              <a:rPr lang="fr-FR" dirty="0"/>
+              <a:t>Validation - erreur expérimentale :</a:t>
+            </a:r>
+            <a:endParaRPr lang="en-US" dirty="0"/>
+          </a:p>
+        </p:txBody>
+      </p:sp>
+      <p:pic>
+        <p:nvPicPr>
+          <p:cNvPr id="5" name="Content Placeholder 4">
+            <a:extLst>
+              <a:ext uri="{FF2B5EF4-FFF2-40B4-BE49-F238E27FC236}">
+                <a16:creationId xmlns:a16="http://schemas.microsoft.com/office/drawing/2014/main" id="{EBB7CBB9-6184-B33E-4584-B7B75F691002}"/>
+              </a:ext>
+            </a:extLst>
+          </p:cNvPr>
+          <p:cNvPicPr>
+            <a:picLocks noGrp="1" noChangeAspect="1"/>
+          </p:cNvPicPr>
+          <p:nvPr>
+            <p:ph idx="1"/>
+          </p:nvPr>
+        </p:nvPicPr>
+        <p:blipFill>
+          <a:blip r:embed="rId2">
+            <a:extLst>
+              <a:ext uri="{28A0092B-C50C-407E-A947-70E740481C1C}">
+                <a14:useLocalDpi xmlns:a14="http://schemas.microsoft.com/office/drawing/2010/main" val="0"/>
+              </a:ext>
+            </a:extLst>
+          </a:blip>
+          <a:stretch>
+            <a:fillRect/>
+          </a:stretch>
+        </p:blipFill>
+        <p:spPr>
+          <a:xfrm>
+            <a:off x="8036455" y="1279180"/>
+            <a:ext cx="4060801" cy="3045601"/>
+          </a:xfrm>
+          <a:prstGeom prst="rect">
+            <a:avLst/>
+          </a:prstGeom>
+        </p:spPr>
+      </p:pic>
+      <p:pic>
+        <p:nvPicPr>
+          <p:cNvPr id="9" name="Picture 8">
+            <a:extLst>
+              <a:ext uri="{FF2B5EF4-FFF2-40B4-BE49-F238E27FC236}">
+                <a16:creationId xmlns:a16="http://schemas.microsoft.com/office/drawing/2014/main" id="{BD4F830D-AEB1-FC20-2BEA-EE909DD91100}"/>
+              </a:ext>
+            </a:extLst>
+          </p:cNvPr>
+          <p:cNvPicPr>
+            <a:picLocks noChangeAspect="1"/>
+          </p:cNvPicPr>
+          <p:nvPr/>
+        </p:nvPicPr>
+        <p:blipFill>
+          <a:blip r:embed="rId3">
+            <a:extLst>
+              <a:ext uri="{28A0092B-C50C-407E-A947-70E740481C1C}">
+                <a14:useLocalDpi xmlns:a14="http://schemas.microsoft.com/office/drawing/2010/main" val="0"/>
+              </a:ext>
+            </a:extLst>
+          </a:blip>
+          <a:stretch>
+            <a:fillRect/>
+          </a:stretch>
+        </p:blipFill>
+        <p:spPr>
+          <a:xfrm>
+            <a:off x="8399409" y="4324781"/>
+            <a:ext cx="3334892" cy="2858480"/>
+          </a:xfrm>
+          <a:prstGeom prst="rect">
+            <a:avLst/>
+          </a:prstGeom>
+        </p:spPr>
+      </p:pic>
+      <mc:AlternateContent xmlns:mc="http://schemas.openxmlformats.org/markup-compatibility/2006">
+        <mc:Choice xmlns:a14="http://schemas.microsoft.com/office/drawing/2010/main" Requires="a14">
+          <p:sp>
+            <p:nvSpPr>
+              <p:cNvPr id="10" name="TextBox 9">
+                <a:extLst>
+                  <a:ext uri="{FF2B5EF4-FFF2-40B4-BE49-F238E27FC236}">
+                    <a16:creationId xmlns:a16="http://schemas.microsoft.com/office/drawing/2014/main" id="{FB13BC59-1CF5-FBB2-63DD-9DDC99704668}"/>
+                  </a:ext>
+                </a:extLst>
+              </p:cNvPr>
+              <p:cNvSpPr txBox="1"/>
+              <p:nvPr/>
+            </p:nvSpPr>
+            <p:spPr>
+              <a:xfrm>
+                <a:off x="838200" y="1968560"/>
+                <a:ext cx="6614160" cy="5324919"/>
+              </a:xfrm>
+              <a:prstGeom prst="rect">
+                <a:avLst/>
+              </a:prstGeom>
+              <a:noFill/>
+            </p:spPr>
+            <p:txBody>
+              <a:bodyPr wrap="square" rtlCol="0">
+                <a:spAutoFit/>
+              </a:bodyPr>
+              <a:lstStyle/>
+              <a:p>
+                <a:r>
+                  <a:rPr lang="fr-FR" dirty="0"/>
+                  <a:t>Comparaison des champs de température pour </a:t>
+                </a:r>
+                <a:r>
+                  <a:rPr lang="fr-FR" dirty="0" err="1"/>
+                  <a:t>t</a:t>
+                </a:r>
+                <a:r>
+                  <a:rPr lang="fr-FR" baseline="-25000" dirty="0" err="1"/>
+                  <a:t>fin</a:t>
+                </a:r>
+                <a:r>
+                  <a:rPr lang="fr-FR" baseline="-25000" dirty="0"/>
+                  <a:t> </a:t>
+                </a:r>
+                <a:r>
+                  <a:rPr lang="fr-FR" dirty="0"/>
+                  <a:t>= 600s</a:t>
+                </a:r>
+              </a:p>
+              <a:p>
+                <a:endParaRPr lang="fr-FR" dirty="0"/>
+              </a:p>
+              <a:p>
+                <a:endParaRPr lang="fr-FR" dirty="0"/>
+              </a:p>
+              <a:p>
+                <a:endParaRPr lang="fr-FR" dirty="0"/>
+              </a:p>
+              <a:p>
+                <a:endParaRPr lang="fr-FR" dirty="0"/>
+              </a:p>
+              <a:p>
+                <a14:m>
+                  <m:oMathPara xmlns:m="http://schemas.openxmlformats.org/officeDocument/2006/math">
+                    <m:oMathParaPr>
+                      <m:jc m:val="centerGroup"/>
+                    </m:oMathParaPr>
+                    <m:oMath xmlns:m="http://schemas.openxmlformats.org/officeDocument/2006/math">
+                      <m:sSub>
+                        <m:sSubPr>
+                          <m:ctrlPr>
+                            <a:rPr lang="fr-FR" b="0" i="1" smtClean="0">
+                              <a:latin typeface="Cambria Math" panose="02040503050406030204" pitchFamily="18" charset="0"/>
+                            </a:rPr>
+                          </m:ctrlPr>
+                        </m:sSubPr>
+                        <m:e>
+                          <m:r>
+                            <a:rPr lang="fr-FR" b="0" i="1" smtClean="0">
+                              <a:latin typeface="Cambria Math" panose="02040503050406030204" pitchFamily="18" charset="0"/>
+                            </a:rPr>
+                            <m:t>𝐸</m:t>
+                          </m:r>
+                        </m:e>
+                        <m:sub>
+                          <m:sSub>
+                            <m:sSubPr>
+                              <m:ctrlPr>
+                                <a:rPr lang="fr-FR" b="0" i="1" smtClean="0">
+                                  <a:latin typeface="Cambria Math" panose="02040503050406030204" pitchFamily="18" charset="0"/>
+                                </a:rPr>
+                              </m:ctrlPr>
+                            </m:sSubPr>
+                            <m:e>
+                              <m:r>
+                                <a:rPr lang="fr-FR" b="0" i="1" smtClean="0">
+                                  <a:latin typeface="Cambria Math" panose="02040503050406030204" pitchFamily="18" charset="0"/>
+                                </a:rPr>
+                                <m:t>𝐿</m:t>
+                              </m:r>
+                            </m:e>
+                            <m:sub>
+                              <m:r>
+                                <a:rPr lang="fr-FR" b="0" i="1" smtClean="0">
+                                  <a:latin typeface="Cambria Math" panose="02040503050406030204" pitchFamily="18" charset="0"/>
+                                </a:rPr>
+                                <m:t>2</m:t>
+                              </m:r>
+                            </m:sub>
+                          </m:sSub>
+                        </m:sub>
+                      </m:sSub>
+                      <m:r>
+                        <a:rPr lang="fr-FR" b="0" i="1" smtClean="0">
+                          <a:latin typeface="Cambria Math" panose="02040503050406030204" pitchFamily="18" charset="0"/>
+                        </a:rPr>
+                        <m:t>=</m:t>
+                      </m:r>
+                      <m:rad>
+                        <m:radPr>
+                          <m:degHide m:val="on"/>
+                          <m:ctrlPr>
+                            <a:rPr lang="fr-FR" b="0" i="1" smtClean="0">
+                              <a:latin typeface="Cambria Math" panose="02040503050406030204" pitchFamily="18" charset="0"/>
+                            </a:rPr>
+                          </m:ctrlPr>
+                        </m:radPr>
+                        <m:deg/>
+                        <m:e>
+                          <m:f>
+                            <m:fPr>
+                              <m:ctrlPr>
+                                <a:rPr lang="fr-FR" i="1">
+                                  <a:latin typeface="Cambria Math" panose="02040503050406030204" pitchFamily="18" charset="0"/>
+                                </a:rPr>
+                              </m:ctrlPr>
+                            </m:fPr>
+                            <m:num>
+                              <m:r>
+                                <a:rPr lang="fr-FR" i="1">
+                                  <a:latin typeface="Cambria Math" panose="02040503050406030204" pitchFamily="18" charset="0"/>
+                                </a:rPr>
+                                <m:t>1</m:t>
+                              </m:r>
+                            </m:num>
+                            <m:den>
+                              <m:r>
+                                <m:rPr>
+                                  <m:sty m:val="p"/>
+                                </m:rPr>
+                                <a:rPr lang="fr-FR" i="1">
+                                  <a:latin typeface="Cambria Math" panose="02040503050406030204" pitchFamily="18" charset="0"/>
+                                </a:rPr>
+                                <m:t>N</m:t>
+                              </m:r>
+                            </m:den>
+                          </m:f>
+                          <m:nary>
+                            <m:naryPr>
+                              <m:chr m:val="∑"/>
+                              <m:ctrlPr>
+                                <a:rPr lang="fr-FR" i="1">
+                                  <a:latin typeface="Cambria Math" panose="02040503050406030204" pitchFamily="18" charset="0"/>
+                                </a:rPr>
+                              </m:ctrlPr>
+                            </m:naryPr>
+                            <m:sub>
+                              <m:r>
+                                <a:rPr lang="fr-FR" i="1">
+                                  <a:latin typeface="Cambria Math" panose="02040503050406030204" pitchFamily="18" charset="0"/>
+                                </a:rPr>
+                                <m:t>𝑖</m:t>
+                              </m:r>
+                              <m:r>
+                                <a:rPr lang="fr-FR" i="1">
+                                  <a:latin typeface="Cambria Math" panose="02040503050406030204" pitchFamily="18" charset="0"/>
+                                </a:rPr>
+                                <m:t>=</m:t>
+                              </m:r>
+                              <m:r>
+                                <a:rPr lang="fr-FR" i="1">
+                                  <a:latin typeface="Cambria Math" panose="02040503050406030204" pitchFamily="18" charset="0"/>
+                                </a:rPr>
+                                <m:t>1</m:t>
+                              </m:r>
+                            </m:sub>
+                            <m:sup>
+                              <m:r>
+                                <a:rPr lang="fr-FR" i="1">
+                                  <a:latin typeface="Cambria Math" panose="02040503050406030204" pitchFamily="18" charset="0"/>
+                                </a:rPr>
+                                <m:t>𝑁</m:t>
+                              </m:r>
+                            </m:sup>
+                            <m:e>
+                              <m:sSup>
+                                <m:sSupPr>
+                                  <m:ctrlPr>
+                                    <a:rPr lang="fr-FR" i="1">
+                                      <a:latin typeface="Cambria Math" panose="02040503050406030204" pitchFamily="18" charset="0"/>
+                                    </a:rPr>
+                                  </m:ctrlPr>
+                                </m:sSupPr>
+                                <m:e>
+                                  <m:d>
+                                    <m:dPr>
+                                      <m:ctrlPr>
+                                        <a:rPr lang="fr-FR" i="1">
+                                          <a:latin typeface="Cambria Math" panose="02040503050406030204" pitchFamily="18" charset="0"/>
+                                        </a:rPr>
+                                      </m:ctrlPr>
+                                    </m:dPr>
+                                    <m:e>
+                                      <m:sSub>
+                                        <m:sSubPr>
+                                          <m:ctrlPr>
+                                            <a:rPr lang="fr-FR" i="1">
+                                              <a:latin typeface="Cambria Math" panose="02040503050406030204" pitchFamily="18" charset="0"/>
+                                            </a:rPr>
+                                          </m:ctrlPr>
+                                        </m:sSubPr>
+                                        <m:e>
+                                          <m:r>
+                                            <a:rPr lang="fr-FR" i="1">
+                                              <a:latin typeface="Cambria Math" panose="02040503050406030204" pitchFamily="18" charset="0"/>
+                                            </a:rPr>
+                                            <m:t>𝑦</m:t>
+                                          </m:r>
+                                        </m:e>
+                                        <m:sub>
+                                          <m:r>
+                                            <a:rPr lang="fr-FR" i="1">
+                                              <a:latin typeface="Cambria Math" panose="02040503050406030204" pitchFamily="18" charset="0"/>
+                                            </a:rPr>
+                                            <m:t>𝑒</m:t>
+                                          </m:r>
+                                          <m:r>
+                                            <a:rPr lang="fr-FR" i="1">
+                                              <a:latin typeface="Cambria Math" panose="02040503050406030204" pitchFamily="18" charset="0"/>
+                                            </a:rPr>
+                                            <m:t>,</m:t>
+                                          </m:r>
+                                          <m:r>
+                                            <a:rPr lang="fr-FR" i="1">
+                                              <a:latin typeface="Cambria Math" panose="02040503050406030204" pitchFamily="18" charset="0"/>
+                                            </a:rPr>
+                                            <m:t>𝑖</m:t>
+                                          </m:r>
+                                        </m:sub>
+                                      </m:sSub>
+                                      <m:r>
+                                        <a:rPr lang="fr-FR" i="1">
+                                          <a:latin typeface="Cambria Math" panose="02040503050406030204" pitchFamily="18" charset="0"/>
+                                        </a:rPr>
+                                        <m:t>−</m:t>
+                                      </m:r>
+                                      <m:r>
+                                        <a:rPr lang="fr-FR" i="1">
+                                          <a:latin typeface="Cambria Math" panose="02040503050406030204" pitchFamily="18" charset="0"/>
+                                        </a:rPr>
+                                        <m:t>𝑦𝑚</m:t>
+                                      </m:r>
+                                      <m:r>
+                                        <a:rPr lang="fr-FR" i="1">
+                                          <a:latin typeface="Cambria Math" panose="02040503050406030204" pitchFamily="18" charset="0"/>
+                                        </a:rPr>
+                                        <m:t>,</m:t>
+                                      </m:r>
+                                      <m:r>
+                                        <a:rPr lang="fr-FR" i="1">
+                                          <a:latin typeface="Cambria Math" panose="02040503050406030204" pitchFamily="18" charset="0"/>
+                                        </a:rPr>
+                                        <m:t>𝑖</m:t>
+                                      </m:r>
+                                    </m:e>
+                                  </m:d>
+                                </m:e>
+                                <m:sup>
+                                  <m:r>
+                                    <a:rPr lang="fr-FR" i="1">
+                                      <a:latin typeface="Cambria Math" panose="02040503050406030204" pitchFamily="18" charset="0"/>
+                                    </a:rPr>
+                                    <m:t>2</m:t>
+                                  </m:r>
+                                </m:sup>
+                              </m:sSup>
+                            </m:e>
+                          </m:nary>
+                        </m:e>
+                      </m:rad>
+                    </m:oMath>
+                  </m:oMathPara>
+                </a14:m>
+                <a:endParaRPr lang="fr-FR" dirty="0"/>
+              </a:p>
+              <a:p>
+                <a:endParaRPr lang="fr-FR" dirty="0"/>
+              </a:p>
+              <a:p>
+                <a:endParaRPr lang="fr-FR" dirty="0"/>
+              </a:p>
+              <a:p>
+                <a:endParaRPr lang="fr-FR" dirty="0"/>
+              </a:p>
+              <a:p>
+                <a:endParaRPr lang="fr-FR" dirty="0"/>
+              </a:p>
+              <a:p>
+                <a:endParaRPr lang="fr-FR" dirty="0"/>
+              </a:p>
+              <a:p>
+                <a:endParaRPr lang="fr-FR" dirty="0"/>
+              </a:p>
+              <a:p>
+                <a:endParaRPr lang="fr-FR" dirty="0"/>
+              </a:p>
+              <a:p>
+                <a:endParaRPr lang="fr-FR" dirty="0"/>
+              </a:p>
+              <a:p>
+                <a:endParaRPr lang="fr-FR" dirty="0"/>
+              </a:p>
+              <a:p>
+                <a:endParaRPr lang="en-US" dirty="0"/>
+              </a:p>
+            </p:txBody>
+          </p:sp>
+        </mc:Choice>
+        <mc:Fallback>
+          <p:sp>
+            <p:nvSpPr>
+              <p:cNvPr id="10" name="TextBox 9">
+                <a:extLst>
+                  <a:ext uri="{FF2B5EF4-FFF2-40B4-BE49-F238E27FC236}">
+                    <a16:creationId xmlns:a16="http://schemas.microsoft.com/office/drawing/2014/main" id="{FB13BC59-1CF5-FBB2-63DD-9DDC99704668}"/>
+                  </a:ext>
+                </a:extLst>
+              </p:cNvPr>
+              <p:cNvSpPr txBox="1">
+                <a:spLocks noRot="1" noChangeAspect="1" noMove="1" noResize="1" noEditPoints="1" noAdjustHandles="1" noChangeArrowheads="1" noChangeShapeType="1" noTextEdit="1"/>
+              </p:cNvSpPr>
+              <p:nvPr/>
+            </p:nvSpPr>
+            <p:spPr>
+              <a:xfrm>
+                <a:off x="838200" y="1968560"/>
+                <a:ext cx="6614160" cy="5324919"/>
+              </a:xfrm>
+              <a:prstGeom prst="rect">
+                <a:avLst/>
+              </a:prstGeom>
+              <a:blipFill>
+                <a:blip r:embed="rId4"/>
+                <a:stretch>
+                  <a:fillRect l="-829" t="-573"/>
+                </a:stretch>
+              </a:blipFill>
+            </p:spPr>
+            <p:txBody>
+              <a:bodyPr/>
+              <a:lstStyle/>
+              <a:p>
+                <a:r>
+                  <a:rPr lang="en-US">
+                    <a:noFill/>
+                  </a:rPr>
+                  <a:t> </a:t>
+                </a:r>
+              </a:p>
+            </p:txBody>
+          </p:sp>
+        </mc:Fallback>
+      </mc:AlternateContent>
+    </p:spTree>
+    <p:extLst>
+      <p:ext uri="{BB962C8B-B14F-4D97-AF65-F5344CB8AC3E}">
+        <p14:creationId xmlns:p14="http://schemas.microsoft.com/office/powerpoint/2010/main" val="4162514676"/>
+      </p:ext>
+    </p:extLst>
+  </p:cSld>
+  <p:clrMapOvr>
+    <a:masterClrMapping/>
+  </p:clrMapOvr>
+</p:sld>
+</file>
+
+<file path=ppt/slides/slide18.xml><?xml version="1.0" encoding="utf-8"?>
+<p:sld xmlns:a="http://schemas.openxmlformats.org/drawingml/2006/main" xmlns:r="http://schemas.openxmlformats.org/officeDocument/2006/relationships" xmlns:p="http://schemas.openxmlformats.org/presentationml/2006/main">
+  <p:cSld>
+    <p:spTree>
+      <p:nvGrpSpPr>
+        <p:cNvPr id="1" name=""/>
+        <p:cNvGrpSpPr/>
+        <p:nvPr/>
+      </p:nvGrpSpPr>
+      <p:grpSpPr>
+        <a:xfrm>
+          <a:off x="0" y="0"/>
+          <a:ext cx="0" cy="0"/>
+          <a:chOff x="0" y="0"/>
+          <a:chExt cx="0" cy="0"/>
+        </a:xfrm>
+      </p:grpSpPr>
+      <p:sp>
+        <p:nvSpPr>
+          <p:cNvPr id="2" name="Title 1">
+            <a:extLst>
+              <a:ext uri="{FF2B5EF4-FFF2-40B4-BE49-F238E27FC236}">
+                <a16:creationId xmlns:a16="http://schemas.microsoft.com/office/drawing/2014/main" id="{F3C6439F-29E7-5985-9D89-DC076CF9176A}"/>
+              </a:ext>
+            </a:extLst>
+          </p:cNvPr>
+          <p:cNvSpPr>
+            <a:spLocks noGrp="1"/>
+          </p:cNvSpPr>
+          <p:nvPr>
+            <p:ph type="title"/>
+          </p:nvPr>
+        </p:nvSpPr>
+        <p:spPr/>
+        <p:txBody>
+          <a:bodyPr/>
+          <a:lstStyle/>
+          <a:p>
+            <a:r>
+              <a:rPr lang="fr-FR" dirty="0"/>
+              <a:t>Validation – erreur expérimentale</a:t>
+            </a:r>
+            <a:endParaRPr lang="en-US" dirty="0"/>
+          </a:p>
+        </p:txBody>
+      </p:sp>
+      <mc:AlternateContent xmlns:mc="http://schemas.openxmlformats.org/markup-compatibility/2006">
+        <mc:Choice xmlns:a14="http://schemas.microsoft.com/office/drawing/2010/main" Requires="a14">
+          <p:sp>
+            <p:nvSpPr>
+              <p:cNvPr id="3" name="Content Placeholder 2">
+                <a:extLst>
+                  <a:ext uri="{FF2B5EF4-FFF2-40B4-BE49-F238E27FC236}">
+                    <a16:creationId xmlns:a16="http://schemas.microsoft.com/office/drawing/2014/main" id="{D0659431-7107-A76B-E208-96EAABE1F908}"/>
+                  </a:ext>
+                </a:extLst>
+              </p:cNvPr>
+              <p:cNvSpPr>
+                <a:spLocks noGrp="1"/>
+              </p:cNvSpPr>
+              <p:nvPr>
+                <p:ph idx="1"/>
+              </p:nvPr>
+            </p:nvSpPr>
+            <p:spPr>
+              <a:xfrm>
+                <a:off x="838200" y="1825625"/>
+                <a:ext cx="10515600" cy="3134995"/>
+              </a:xfrm>
+            </p:spPr>
+            <p:txBody>
+              <a:bodyPr>
+                <a:normAutofit/>
+              </a:bodyPr>
+              <a:lstStyle/>
+              <a:p>
+                <a:r>
+                  <a:rPr lang="fr-FR" dirty="0"/>
+                  <a:t>Erreur épistémique d’un thermocouple classique : ±1.5°C*</a:t>
+                </a:r>
+              </a:p>
+              <a:p>
+                <a:pPr marL="0" indent="0" algn="ctr">
+                  <a:buNone/>
+                </a:pPr>
+                <a14:m>
+                  <m:oMath xmlns:m="http://schemas.openxmlformats.org/officeDocument/2006/math">
+                    <m:r>
+                      <m:rPr>
+                        <m:sty m:val="p"/>
+                      </m:rPr>
+                      <a:rPr lang="fr-FR" b="0" i="1" smtClean="0">
+                        <a:latin typeface="Cambria Math" panose="02040503050406030204" pitchFamily="18" charset="0"/>
+                      </a:rPr>
+                      <m:t>σ</m:t>
+                    </m:r>
+                    <m:r>
+                      <m:rPr>
+                        <m:sty m:val="p"/>
+                      </m:rPr>
+                      <a:rPr lang="fr-FR" b="0" i="1" baseline="-25000" smtClean="0">
+                        <a:latin typeface="Cambria Math" panose="02040503050406030204" pitchFamily="18" charset="0"/>
+                      </a:rPr>
+                      <m:t>tc</m:t>
+                    </m:r>
+                    <m:r>
+                      <a:rPr lang="fr-FR" b="0" i="1" smtClean="0">
+                        <a:latin typeface="Cambria Math" panose="02040503050406030204" pitchFamily="18" charset="0"/>
+                      </a:rPr>
+                      <m:t>= </m:t>
+                    </m:r>
+                    <m:f>
+                      <m:fPr>
+                        <m:ctrlPr>
+                          <a:rPr lang="fr-FR" b="0" i="1" smtClean="0">
+                            <a:latin typeface="Cambria Math" panose="02040503050406030204" pitchFamily="18" charset="0"/>
+                          </a:rPr>
+                        </m:ctrlPr>
+                      </m:fPr>
+                      <m:num>
+                        <m:r>
+                          <a:rPr lang="fr-FR" b="0" i="1" smtClean="0">
+                            <a:latin typeface="Cambria Math" panose="02040503050406030204" pitchFamily="18" charset="0"/>
+                          </a:rPr>
+                          <m:t>1</m:t>
+                        </m:r>
+                        <m:r>
+                          <a:rPr lang="fr-FR" b="0" i="1" smtClean="0">
+                            <a:latin typeface="Cambria Math" panose="02040503050406030204" pitchFamily="18" charset="0"/>
+                          </a:rPr>
+                          <m:t>.</m:t>
+                        </m:r>
+                        <m:r>
+                          <a:rPr lang="fr-FR" b="0" i="1" smtClean="0">
+                            <a:latin typeface="Cambria Math" panose="02040503050406030204" pitchFamily="18" charset="0"/>
+                          </a:rPr>
+                          <m:t>5</m:t>
+                        </m:r>
+                      </m:num>
+                      <m:den>
+                        <m:rad>
+                          <m:radPr>
+                            <m:degHide m:val="on"/>
+                            <m:ctrlPr>
+                              <a:rPr lang="fr-FR" b="0" i="1" smtClean="0">
+                                <a:latin typeface="Cambria Math" panose="02040503050406030204" pitchFamily="18" charset="0"/>
+                              </a:rPr>
+                            </m:ctrlPr>
+                          </m:radPr>
+                          <m:deg/>
+                          <m:e>
+                            <m:r>
+                              <a:rPr lang="fr-FR" b="0" i="1" smtClean="0">
+                                <a:latin typeface="Cambria Math" panose="02040503050406030204" pitchFamily="18" charset="0"/>
+                              </a:rPr>
+                              <m:t>3</m:t>
+                            </m:r>
+                          </m:e>
+                        </m:rad>
+                      </m:den>
+                    </m:f>
+                    <m:r>
+                      <a:rPr lang="fr-FR" b="0" i="1" smtClean="0">
+                        <a:latin typeface="Cambria Math" panose="02040503050406030204" pitchFamily="18" charset="0"/>
+                      </a:rPr>
+                      <m:t> = </m:t>
+                    </m:r>
+                    <m:r>
+                      <a:rPr lang="fr-FR" b="0" i="1" smtClean="0">
+                        <a:latin typeface="Cambria Math" panose="02040503050406030204" pitchFamily="18" charset="0"/>
+                      </a:rPr>
+                      <m:t>0</m:t>
+                    </m:r>
+                    <m:r>
+                      <a:rPr lang="fr-FR" b="0" i="1" smtClean="0">
+                        <a:latin typeface="Cambria Math" panose="02040503050406030204" pitchFamily="18" charset="0"/>
+                      </a:rPr>
+                      <m:t>.</m:t>
+                    </m:r>
+                    <m:r>
+                      <a:rPr lang="fr-FR" b="0" i="1" smtClean="0">
+                        <a:latin typeface="Cambria Math" panose="02040503050406030204" pitchFamily="18" charset="0"/>
+                      </a:rPr>
+                      <m:t>87</m:t>
+                    </m:r>
+                    <m:r>
+                      <a:rPr lang="fr-FR" b="0" i="1" smtClean="0">
+                        <a:latin typeface="Cambria Math" panose="02040503050406030204" pitchFamily="18" charset="0"/>
+                      </a:rPr>
+                      <m:t> °</m:t>
+                    </m:r>
+                    <m:r>
+                      <m:rPr>
+                        <m:sty m:val="p"/>
+                      </m:rPr>
+                      <a:rPr lang="fr-FR" b="0" i="1" smtClean="0">
+                        <a:latin typeface="Cambria Math" panose="02040503050406030204" pitchFamily="18" charset="0"/>
+                      </a:rPr>
+                      <m:t>C</m:t>
+                    </m:r>
+                  </m:oMath>
+                </a14:m>
+                <a:r>
+                  <a:rPr lang="fr-FR" dirty="0"/>
+                  <a:t> </a:t>
+                </a:r>
+              </a:p>
+              <a:p>
+                <a:pPr marL="0" indent="0">
+                  <a:buNone/>
+                </a:pPr>
+                <a:r>
+                  <a:rPr lang="fr-FR" dirty="0"/>
+                  <a:t> car distribution normale dans cet intervalle </a:t>
+                </a:r>
+              </a:p>
+              <a:p>
+                <a:pPr marL="0" indent="0">
+                  <a:buNone/>
+                </a:pPr>
+                <a:endParaRPr lang="fr-FR" dirty="0"/>
+              </a:p>
+              <a:p>
+                <a:pPr marL="0" indent="0">
+                  <a:buNone/>
+                </a:pPr>
+                <a14:m>
+                  <m:oMathPara xmlns:m="http://schemas.openxmlformats.org/officeDocument/2006/math">
+                    <m:oMathParaPr>
+                      <m:jc m:val="centerGroup"/>
+                    </m:oMathParaPr>
+                    <m:oMath xmlns:m="http://schemas.openxmlformats.org/officeDocument/2006/math">
+                      <m:r>
+                        <m:rPr>
+                          <m:sty m:val="p"/>
+                        </m:rPr>
+                        <a:rPr lang="fr-FR" b="0" i="1" smtClean="0">
+                          <a:latin typeface="Cambria Math" panose="02040503050406030204" pitchFamily="18" charset="0"/>
+                        </a:rPr>
+                        <m:t>u</m:t>
+                      </m:r>
+                      <m:r>
+                        <m:rPr>
+                          <m:sty m:val="p"/>
+                        </m:rPr>
+                        <a:rPr lang="fr-FR" b="0" i="1" baseline="-25000" smtClean="0">
+                          <a:latin typeface="Cambria Math" panose="02040503050406030204" pitchFamily="18" charset="0"/>
+                        </a:rPr>
+                        <m:t>D</m:t>
+                      </m:r>
+                      <m:r>
+                        <a:rPr lang="fr-FR" b="0" i="1" smtClean="0">
+                          <a:latin typeface="Cambria Math" panose="02040503050406030204" pitchFamily="18" charset="0"/>
+                        </a:rPr>
+                        <m:t> = </m:t>
+                      </m:r>
+                      <m:rad>
+                        <m:radPr>
+                          <m:degHide m:val="on"/>
+                          <m:ctrlPr>
+                            <a:rPr lang="fr-FR" b="0" i="1" smtClean="0">
+                              <a:latin typeface="Cambria Math" panose="02040503050406030204" pitchFamily="18" charset="0"/>
+                            </a:rPr>
+                          </m:ctrlPr>
+                        </m:radPr>
+                        <m:deg/>
+                        <m:e>
+                          <m:r>
+                            <m:rPr>
+                              <m:sty m:val="p"/>
+                            </m:rPr>
+                            <a:rPr lang="fr-FR" b="0" i="1" smtClean="0">
+                              <a:latin typeface="Cambria Math" panose="02040503050406030204" pitchFamily="18" charset="0"/>
+                            </a:rPr>
+                            <m:t>σ</m:t>
+                          </m:r>
+                          <m:r>
+                            <m:rPr>
+                              <m:sty m:val="p"/>
+                            </m:rPr>
+                            <a:rPr lang="fr-FR" b="0" i="1" baseline="-25000" smtClean="0">
+                              <a:latin typeface="Cambria Math" panose="02040503050406030204" pitchFamily="18" charset="0"/>
+                            </a:rPr>
+                            <m:t>tc</m:t>
+                          </m:r>
+                          <m:r>
+                            <a:rPr lang="fr-FR" b="0" i="1" baseline="30000" smtClean="0">
+                              <a:latin typeface="Cambria Math" panose="02040503050406030204" pitchFamily="18" charset="0"/>
+                            </a:rPr>
+                            <m:t>2</m:t>
+                          </m:r>
+                          <m:r>
+                            <a:rPr lang="fr-FR" b="0" i="1" smtClean="0">
+                              <a:latin typeface="Cambria Math" panose="02040503050406030204" pitchFamily="18" charset="0"/>
+                            </a:rPr>
+                            <m:t> + </m:t>
+                          </m:r>
+                          <m:r>
+                            <a:rPr lang="fr-FR" b="0" i="1" smtClean="0">
+                              <a:latin typeface="Cambria Math" panose="02040503050406030204" pitchFamily="18" charset="0"/>
+                            </a:rPr>
+                            <m:t>02</m:t>
+                          </m:r>
+                          <m:r>
+                            <a:rPr lang="fr-FR" b="0" i="1" smtClean="0">
+                              <a:latin typeface="Cambria Math" panose="02040503050406030204" pitchFamily="18" charset="0"/>
+                            </a:rPr>
+                            <m:t> </m:t>
+                          </m:r>
+                        </m:e>
+                      </m:rad>
+                      <m:r>
+                        <a:rPr lang="fr-FR" b="0" i="1" smtClean="0">
+                          <a:latin typeface="Cambria Math" panose="02040503050406030204" pitchFamily="18" charset="0"/>
+                        </a:rPr>
+                        <m:t>=</m:t>
+                      </m:r>
+                      <m:r>
+                        <m:rPr>
+                          <m:sty m:val="p"/>
+                        </m:rPr>
+                        <a:rPr lang="fr-FR" i="1">
+                          <a:latin typeface="Cambria Math" panose="02040503050406030204" pitchFamily="18" charset="0"/>
+                        </a:rPr>
+                        <m:t>σ</m:t>
+                      </m:r>
+                      <m:r>
+                        <m:rPr>
+                          <m:sty m:val="p"/>
+                        </m:rPr>
+                        <a:rPr lang="fr-FR" i="1" baseline="-25000">
+                          <a:latin typeface="Cambria Math" panose="02040503050406030204" pitchFamily="18" charset="0"/>
+                        </a:rPr>
+                        <m:t>tc</m:t>
+                      </m:r>
+                      <m:r>
+                        <a:rPr lang="fr-FR" b="0" i="1" smtClean="0">
+                          <a:latin typeface="Cambria Math" panose="02040503050406030204" pitchFamily="18" charset="0"/>
+                        </a:rPr>
+                        <m:t>=</m:t>
+                      </m:r>
+                      <m:r>
+                        <a:rPr lang="fr-FR" b="0" i="1" smtClean="0">
+                          <a:latin typeface="Cambria Math" panose="02040503050406030204" pitchFamily="18" charset="0"/>
+                        </a:rPr>
+                        <m:t>0</m:t>
+                      </m:r>
+                      <m:r>
+                        <a:rPr lang="fr-FR" b="0" i="1" smtClean="0">
+                          <a:latin typeface="Cambria Math" panose="02040503050406030204" pitchFamily="18" charset="0"/>
+                        </a:rPr>
+                        <m:t>.</m:t>
+                      </m:r>
+                      <m:r>
+                        <a:rPr lang="fr-FR" b="0" i="1" smtClean="0">
+                          <a:latin typeface="Cambria Math" panose="02040503050406030204" pitchFamily="18" charset="0"/>
+                        </a:rPr>
+                        <m:t>87</m:t>
+                      </m:r>
+                      <m:r>
+                        <a:rPr lang="fr-FR" b="0" i="1" smtClean="0">
+                          <a:latin typeface="Cambria Math" panose="02040503050406030204" pitchFamily="18" charset="0"/>
+                        </a:rPr>
+                        <m:t>°</m:t>
+                      </m:r>
+                      <m:r>
+                        <m:rPr>
+                          <m:sty m:val="p"/>
+                        </m:rPr>
+                        <a:rPr lang="fr-FR" b="0" i="1" smtClean="0">
+                          <a:latin typeface="Cambria Math" panose="02040503050406030204" pitchFamily="18" charset="0"/>
+                        </a:rPr>
+                        <m:t>C</m:t>
+                      </m:r>
+                    </m:oMath>
+                  </m:oMathPara>
+                </a14:m>
+                <a:endParaRPr lang="fr-FR" dirty="0"/>
+              </a:p>
+              <a:p>
+                <a:pPr marL="0" indent="0">
+                  <a:buNone/>
+                </a:pPr>
+                <a:endParaRPr lang="fr-FR" dirty="0"/>
+              </a:p>
+            </p:txBody>
+          </p:sp>
+        </mc:Choice>
+        <mc:Fallback>
+          <p:sp>
+            <p:nvSpPr>
+              <p:cNvPr id="3" name="Content Placeholder 2">
+                <a:extLst>
+                  <a:ext uri="{FF2B5EF4-FFF2-40B4-BE49-F238E27FC236}">
+                    <a16:creationId xmlns:a16="http://schemas.microsoft.com/office/drawing/2014/main" id="{D0659431-7107-A76B-E208-96EAABE1F908}"/>
+                  </a:ext>
+                </a:extLst>
+              </p:cNvPr>
+              <p:cNvSpPr>
+                <a:spLocks noGrp="1" noRot="1" noChangeAspect="1" noMove="1" noResize="1" noEditPoints="1" noAdjustHandles="1" noChangeArrowheads="1" noChangeShapeType="1" noTextEdit="1"/>
+              </p:cNvSpPr>
+              <p:nvPr>
+                <p:ph idx="1"/>
+              </p:nvPr>
+            </p:nvSpPr>
+            <p:spPr>
+              <a:xfrm>
+                <a:off x="838200" y="1825625"/>
+                <a:ext cx="10515600" cy="3134995"/>
+              </a:xfrm>
+              <a:blipFill>
+                <a:blip r:embed="rId2"/>
+                <a:stretch>
+                  <a:fillRect l="-1217" t="-3301"/>
+                </a:stretch>
+              </a:blipFill>
+            </p:spPr>
+            <p:txBody>
+              <a:bodyPr/>
+              <a:lstStyle/>
+              <a:p>
+                <a:r>
+                  <a:rPr lang="en-US">
+                    <a:noFill/>
+                  </a:rPr>
+                  <a:t> </a:t>
+                </a:r>
+              </a:p>
+            </p:txBody>
+          </p:sp>
+        </mc:Fallback>
+      </mc:AlternateContent>
+      <p:sp>
+        <p:nvSpPr>
+          <p:cNvPr id="4" name="TextBox 3">
+            <a:extLst>
+              <a:ext uri="{FF2B5EF4-FFF2-40B4-BE49-F238E27FC236}">
+                <a16:creationId xmlns:a16="http://schemas.microsoft.com/office/drawing/2014/main" id="{2CF3D44E-FDBD-44F9-D894-E056CB9F80B0}"/>
+              </a:ext>
+            </a:extLst>
+          </p:cNvPr>
+          <p:cNvSpPr txBox="1"/>
+          <p:nvPr/>
+        </p:nvSpPr>
+        <p:spPr>
+          <a:xfrm>
+            <a:off x="838200" y="6126480"/>
+            <a:ext cx="11231880" cy="369332"/>
+          </a:xfrm>
+          <a:prstGeom prst="rect">
+            <a:avLst/>
+          </a:prstGeom>
+          <a:noFill/>
+        </p:spPr>
+        <p:txBody>
+          <a:bodyPr wrap="square" rtlCol="0">
+            <a:spAutoFit/>
+          </a:bodyPr>
+          <a:lstStyle/>
+          <a:p>
+            <a:r>
+              <a:rPr lang="fr-FR" dirty="0"/>
+              <a:t>*Source : tcsa.fr/thermocouple/type-k-thermocouple.html</a:t>
+            </a:r>
+            <a:endParaRPr lang="en-US" dirty="0"/>
+          </a:p>
+        </p:txBody>
+      </p:sp>
+    </p:spTree>
+    <p:extLst>
+      <p:ext uri="{BB962C8B-B14F-4D97-AF65-F5344CB8AC3E}">
+        <p14:creationId xmlns:p14="http://schemas.microsoft.com/office/powerpoint/2010/main" val="153986674"/>
+      </p:ext>
+    </p:extLst>
+  </p:cSld>
+  <p:clrMapOvr>
+    <a:masterClrMapping/>
+  </p:clrMapOvr>
+</p:sld>
+</file>
+
+<file path=ppt/slides/slide19.xml><?xml version="1.0" encoding="utf-8"?>
+<p:sld xmlns:a="http://schemas.openxmlformats.org/drawingml/2006/main" xmlns:r="http://schemas.openxmlformats.org/officeDocument/2006/relationships" xmlns:p="http://schemas.openxmlformats.org/presentationml/2006/main">
+  <p:cSld>
+    <p:spTree>
+      <p:nvGrpSpPr>
+        <p:cNvPr id="1" name=""/>
+        <p:cNvGrpSpPr/>
+        <p:nvPr/>
+      </p:nvGrpSpPr>
+      <p:grpSpPr>
+        <a:xfrm>
+          <a:off x="0" y="0"/>
+          <a:ext cx="0" cy="0"/>
+          <a:chOff x="0" y="0"/>
+          <a:chExt cx="0" cy="0"/>
+        </a:xfrm>
+      </p:grpSpPr>
+      <p:sp>
+        <p:nvSpPr>
+          <p:cNvPr id="2" name="Title 1">
+            <a:extLst>
+              <a:ext uri="{FF2B5EF4-FFF2-40B4-BE49-F238E27FC236}">
+                <a16:creationId xmlns:a16="http://schemas.microsoft.com/office/drawing/2014/main" id="{54C6E061-A18D-9828-5D8A-6DB04AFF154E}"/>
+              </a:ext>
+            </a:extLst>
+          </p:cNvPr>
+          <p:cNvSpPr>
+            <a:spLocks noGrp="1"/>
+          </p:cNvSpPr>
+          <p:nvPr>
+            <p:ph type="title"/>
+          </p:nvPr>
+        </p:nvSpPr>
+        <p:spPr/>
+        <p:txBody>
+          <a:bodyPr/>
+          <a:lstStyle/>
+          <a:p>
+            <a:r>
+              <a:rPr lang="fr-FR" dirty="0"/>
+              <a:t>Validation – erreur numérique</a:t>
+            </a:r>
+            <a:endParaRPr lang="en-US" dirty="0"/>
+          </a:p>
+        </p:txBody>
+      </p:sp>
+      <p:sp>
+        <p:nvSpPr>
+          <p:cNvPr id="3" name="Content Placeholder 2">
+            <a:extLst>
+              <a:ext uri="{FF2B5EF4-FFF2-40B4-BE49-F238E27FC236}">
+                <a16:creationId xmlns:a16="http://schemas.microsoft.com/office/drawing/2014/main" id="{A130E620-26B7-5449-95D5-A34047E15DFF}"/>
+              </a:ext>
+            </a:extLst>
+          </p:cNvPr>
+          <p:cNvSpPr>
+            <a:spLocks noGrp="1"/>
+          </p:cNvSpPr>
+          <p:nvPr>
+            <p:ph idx="1"/>
+          </p:nvPr>
+        </p:nvSpPr>
+        <p:spPr/>
+        <p:txBody>
+          <a:bodyPr/>
+          <a:lstStyle/>
+          <a:p>
+            <a:r>
+              <a:rPr lang="fr-FR" dirty="0"/>
+              <a:t>En fonction de la valeur de GCI</a:t>
+            </a:r>
+            <a:endParaRPr lang="en-US" dirty="0"/>
+          </a:p>
+        </p:txBody>
+      </p:sp>
+    </p:spTree>
+    <p:extLst>
+      <p:ext uri="{BB962C8B-B14F-4D97-AF65-F5344CB8AC3E}">
+        <p14:creationId xmlns:p14="http://schemas.microsoft.com/office/powerpoint/2010/main" val="211247040"/>
+      </p:ext>
+    </p:extLst>
+  </p:cSld>
+  <p:clrMapOvr>
+    <a:masterClrMapping/>
+  </p:clrMapOvr>
+</p:sld>
+</file>
+
 <file path=ppt/slides/slide2.xml><?xml version="1.0" encoding="utf-8"?>
 <p:sld xmlns:a="http://schemas.openxmlformats.org/drawingml/2006/main" xmlns:r="http://schemas.openxmlformats.org/officeDocument/2006/relationships" xmlns:p="http://schemas.openxmlformats.org/presentationml/2006/main">
   <p:cSld>
@@ -6373,6 +8942,184 @@
 </p:sld>
 </file>
 
+<file path=ppt/slides/slide20.xml><?xml version="1.0" encoding="utf-8"?>
+<p:sld xmlns:a="http://schemas.openxmlformats.org/drawingml/2006/main" xmlns:r="http://schemas.openxmlformats.org/officeDocument/2006/relationships" xmlns:p="http://schemas.openxmlformats.org/presentationml/2006/main">
+  <p:cSld>
+    <p:spTree>
+      <p:nvGrpSpPr>
+        <p:cNvPr id="1" name=""/>
+        <p:cNvGrpSpPr/>
+        <p:nvPr/>
+      </p:nvGrpSpPr>
+      <p:grpSpPr>
+        <a:xfrm>
+          <a:off x="0" y="0"/>
+          <a:ext cx="0" cy="0"/>
+          <a:chOff x="0" y="0"/>
+          <a:chExt cx="0" cy="0"/>
+        </a:xfrm>
+      </p:grpSpPr>
+      <p:sp>
+        <p:nvSpPr>
+          <p:cNvPr id="2" name="Title 1">
+            <a:extLst>
+              <a:ext uri="{FF2B5EF4-FFF2-40B4-BE49-F238E27FC236}">
+                <a16:creationId xmlns:a16="http://schemas.microsoft.com/office/drawing/2014/main" id="{7171FAF8-D45E-B846-39C4-A2BDDFE609C9}"/>
+              </a:ext>
+            </a:extLst>
+          </p:cNvPr>
+          <p:cNvSpPr>
+            <a:spLocks noGrp="1"/>
+          </p:cNvSpPr>
+          <p:nvPr>
+            <p:ph type="title"/>
+          </p:nvPr>
+        </p:nvSpPr>
+        <p:spPr/>
+        <p:txBody>
+          <a:bodyPr/>
+          <a:lstStyle/>
+          <a:p>
+            <a:r>
+              <a:rPr lang="fr-FR" dirty="0"/>
+              <a:t>Amélioration possible</a:t>
+            </a:r>
+            <a:endParaRPr lang="en-US" dirty="0"/>
+          </a:p>
+        </p:txBody>
+      </p:sp>
+      <mc:AlternateContent xmlns:mc="http://schemas.openxmlformats.org/markup-compatibility/2006">
+        <mc:Choice xmlns:a14="http://schemas.microsoft.com/office/drawing/2010/main" Requires="a14">
+          <p:sp>
+            <p:nvSpPr>
+              <p:cNvPr id="3" name="Content Placeholder 2">
+                <a:extLst>
+                  <a:ext uri="{FF2B5EF4-FFF2-40B4-BE49-F238E27FC236}">
+                    <a16:creationId xmlns:a16="http://schemas.microsoft.com/office/drawing/2014/main" id="{DF9282C8-F6FB-A0A2-B31D-09362B254F0F}"/>
+                  </a:ext>
+                </a:extLst>
+              </p:cNvPr>
+              <p:cNvSpPr>
+                <a:spLocks noGrp="1"/>
+              </p:cNvSpPr>
+              <p:nvPr>
+                <p:ph idx="1"/>
+              </p:nvPr>
+            </p:nvSpPr>
+            <p:spPr/>
+            <p:txBody>
+              <a:bodyPr/>
+              <a:lstStyle/>
+              <a:p>
+                <a:r>
+                  <a:rPr lang="fr-FR" dirty="0"/>
+                  <a:t>Rajouter une erreur d’expérimentation à partir de la littérature d’une expérience similaire</a:t>
+                </a:r>
+                <a:r>
+                  <a:rPr lang="fr-FR" dirty="0">
+                    <a:sym typeface="Wingdings" panose="05000000000000000000" pitchFamily="2" charset="2"/>
+                  </a:rPr>
+                  <a:t> estimation plus concrète de </a:t>
+                </a:r>
+                <a14:m>
+                  <m:oMath xmlns:m="http://schemas.openxmlformats.org/officeDocument/2006/math">
+                    <m:r>
+                      <m:rPr>
+                        <m:sty m:val="p"/>
+                      </m:rPr>
+                      <a:rPr lang="fr-FR" i="1">
+                        <a:latin typeface="Cambria Math" panose="02040503050406030204" pitchFamily="18" charset="0"/>
+                      </a:rPr>
+                      <m:t>u</m:t>
+                    </m:r>
+                    <m:r>
+                      <m:rPr>
+                        <m:sty m:val="p"/>
+                      </m:rPr>
+                      <a:rPr lang="fr-FR" i="1" baseline="-25000">
+                        <a:latin typeface="Cambria Math" panose="02040503050406030204" pitchFamily="18" charset="0"/>
+                      </a:rPr>
+                      <m:t>D</m:t>
+                    </m:r>
+                    <m:r>
+                      <a:rPr lang="fr-FR" i="1">
+                        <a:latin typeface="Cambria Math" panose="02040503050406030204" pitchFamily="18" charset="0"/>
+                      </a:rPr>
+                      <m:t> </m:t>
+                    </m:r>
+                  </m:oMath>
+                </a14:m>
+                <a:endParaRPr lang="fr-FR" dirty="0"/>
+              </a:p>
+              <a:p>
+                <a:r>
+                  <a:rPr lang="fr-FR" dirty="0"/>
+                  <a:t>Affiner le pas de temps et d’espace pour la simulation SolidWorks</a:t>
+                </a:r>
+                <a:r>
+                  <a:rPr lang="fr-FR" dirty="0">
+                    <a:sym typeface="Wingdings" panose="05000000000000000000" pitchFamily="2" charset="2"/>
+                  </a:rPr>
+                  <a:t> précision accrue sur l’erreur de simulation</a:t>
+                </a:r>
+                <a:endParaRPr lang="en-US" dirty="0"/>
+              </a:p>
+            </p:txBody>
+          </p:sp>
+        </mc:Choice>
+        <mc:Fallback>
+          <p:sp>
+            <p:nvSpPr>
+              <p:cNvPr id="3" name="Content Placeholder 2">
+                <a:extLst>
+                  <a:ext uri="{FF2B5EF4-FFF2-40B4-BE49-F238E27FC236}">
+                    <a16:creationId xmlns:a16="http://schemas.microsoft.com/office/drawing/2014/main" id="{DF9282C8-F6FB-A0A2-B31D-09362B254F0F}"/>
+                  </a:ext>
+                </a:extLst>
+              </p:cNvPr>
+              <p:cNvSpPr>
+                <a:spLocks noGrp="1" noRot="1" noChangeAspect="1" noMove="1" noResize="1" noEditPoints="1" noAdjustHandles="1" noChangeArrowheads="1" noChangeShapeType="1" noTextEdit="1"/>
+              </p:cNvSpPr>
+              <p:nvPr>
+                <p:ph idx="1"/>
+              </p:nvPr>
+            </p:nvSpPr>
+            <p:spPr>
+              <a:blipFill>
+                <a:blip r:embed="rId2"/>
+                <a:stretch>
+                  <a:fillRect l="-1043" t="-2381"/>
+                </a:stretch>
+              </a:blipFill>
+            </p:spPr>
+            <p:txBody>
+              <a:bodyPr/>
+              <a:lstStyle/>
+              <a:p>
+                <a:r>
+                  <a:rPr lang="en-US">
+                    <a:noFill/>
+                  </a:rPr>
+                  <a:t> </a:t>
+                </a:r>
+              </a:p>
+            </p:txBody>
+          </p:sp>
+        </mc:Fallback>
+      </mc:AlternateContent>
+    </p:spTree>
+    <p:extLst>
+      <p:ext uri="{BB962C8B-B14F-4D97-AF65-F5344CB8AC3E}">
+        <p14:creationId xmlns:p14="http://schemas.microsoft.com/office/powerpoint/2010/main" val="3426608694"/>
+      </p:ext>
+    </p:extLst>
+  </p:cSld>
+  <p:clrMapOvr>
+    <a:masterClrMapping/>
+  </p:clrMapOvr>
+</p:sld>
+</file>
+
 <file path=ppt/slides/slide3.xml><?xml version="1.0" encoding="utf-8"?>
 <p:sld xmlns:a="http://schemas.openxmlformats.org/drawingml/2006/main" xmlns:r="http://schemas.openxmlformats.org/officeDocument/2006/relationships" xmlns:p="http://schemas.openxmlformats.org/presentationml/2006/main">
   <p:cSld>
@@ -6423,8 +9170,8 @@
           </a:p>
         </p:txBody>
       </p:sp>
-      <mc:AlternateContent xmlns:mc="http://schemas.openxmlformats.org/markup-compatibility/2006">
-        <mc:Choice xmlns:a14="http://schemas.microsoft.com/office/drawing/2010/main" Requires="a14">
+      <mc:AlternateContent xmlns:mc="http://schemas.openxmlformats.org/markup-compatibility/2006" xmlns:a14="http://schemas.microsoft.com/office/drawing/2010/main">
+        <mc:Choice Requires="a14">
           <p:sp>
             <p:nvSpPr>
               <p:cNvPr id="3" name="Espace réservé du contenu 2">
@@ -7346,7 +10093,7 @@
             </p:txBody>
           </p:sp>
         </mc:Choice>
-        <mc:Fallback>
+        <mc:Fallback xmlns="">
           <p:sp>
             <p:nvSpPr>
               <p:cNvPr id="3" name="Espace réservé du contenu 2">
@@ -7536,8 +10283,8 @@
           </a:p>
         </p:txBody>
       </p:sp>
-      <mc:AlternateContent xmlns:mc="http://schemas.openxmlformats.org/markup-compatibility/2006">
-        <mc:Choice xmlns:a14="http://schemas.microsoft.com/office/drawing/2010/main" Requires="a14">
+      <mc:AlternateContent xmlns:mc="http://schemas.openxmlformats.org/markup-compatibility/2006" xmlns:a14="http://schemas.microsoft.com/office/drawing/2010/main">
+        <mc:Choice Requires="a14">
           <p:sp>
             <p:nvSpPr>
               <p:cNvPr id="3" name="Espace réservé du contenu 2">
@@ -8131,7 +10878,13 @@
                         <a:rPr lang="fr-CA" b="0" i="1" smtClean="0">
                           <a:latin typeface="Cambria Math" panose="02040503050406030204" pitchFamily="18" charset="0"/>
                         </a:rPr>
-                        <m:t>=0</m:t>
+                        <m:t>=</m:t>
+                      </m:r>
+                      <m:r>
+                        <a:rPr lang="fr-CA" b="0" i="1" smtClean="0">
+                          <a:latin typeface="Cambria Math" panose="02040503050406030204" pitchFamily="18" charset="0"/>
+                        </a:rPr>
+                        <m:t>0</m:t>
                       </m:r>
                     </m:oMath>
                   </m:oMathPara>
@@ -8855,7 +11608,7 @@
             </p:txBody>
           </p:sp>
         </mc:Choice>
-        <mc:Fallback>
+        <mc:Fallback xmlns="">
           <p:sp>
             <p:nvSpPr>
               <p:cNvPr id="3" name="Espace réservé du contenu 2">
@@ -8954,8 +11707,8 @@
           </a:p>
         </p:txBody>
       </p:sp>
-      <mc:AlternateContent xmlns:mc="http://schemas.openxmlformats.org/markup-compatibility/2006">
-        <mc:Choice xmlns:a14="http://schemas.microsoft.com/office/drawing/2010/main" Requires="a14">
+      <mc:AlternateContent xmlns:mc="http://schemas.openxmlformats.org/markup-compatibility/2006" xmlns:a14="http://schemas.microsoft.com/office/drawing/2010/main">
+        <mc:Choice Requires="a14">
           <p:sp>
             <p:nvSpPr>
               <p:cNvPr id="6" name="ZoneTexte 5">
@@ -9065,7 +11818,7 @@
             </p:txBody>
           </p:sp>
         </mc:Choice>
-        <mc:Fallback>
+        <mc:Fallback xmlns="">
           <p:sp>
             <p:nvSpPr>
               <p:cNvPr id="6" name="ZoneTexte 5">
@@ -9203,8 +11956,8 @@
           </a:p>
         </p:txBody>
       </p:sp>
-      <mc:AlternateContent xmlns:mc="http://schemas.openxmlformats.org/markup-compatibility/2006">
-        <mc:Choice xmlns:a14="http://schemas.microsoft.com/office/drawing/2010/main" Requires="a14">
+      <mc:AlternateContent xmlns:mc="http://schemas.openxmlformats.org/markup-compatibility/2006" xmlns:a14="http://schemas.microsoft.com/office/drawing/2010/main">
+        <mc:Choice Requires="a14">
           <p:sp>
             <p:nvSpPr>
               <p:cNvPr id="3" name="Espace réservé du contenu 2">
@@ -9609,7 +12362,13 @@
                               <a:rPr lang="fr-FR" b="0" i="1" smtClean="0">
                                 <a:latin typeface="Cambria Math" panose="02040503050406030204" pitchFamily="18" charset="0"/>
                               </a:rPr>
-                              <m:t>+1</m:t>
+                              <m:t>+</m:t>
+                            </m:r>
+                            <m:r>
+                              <a:rPr lang="fr-FR" b="0" i="1" smtClean="0">
+                                <a:latin typeface="Cambria Math" panose="02040503050406030204" pitchFamily="18" charset="0"/>
+                              </a:rPr>
+                              <m:t>1</m:t>
                             </m:r>
                             <m:r>
                               <a:rPr lang="fr-FR" i="1">
@@ -9666,7 +12425,13 @@
                               <a:rPr lang="fr-FR" b="0" i="1" smtClean="0">
                                 <a:latin typeface="Cambria Math" panose="02040503050406030204" pitchFamily="18" charset="0"/>
                               </a:rPr>
-                              <m:t>−1</m:t>
+                              <m:t>−</m:t>
+                            </m:r>
+                            <m:r>
+                              <a:rPr lang="fr-FR" b="0" i="1" smtClean="0">
+                                <a:latin typeface="Cambria Math" panose="02040503050406030204" pitchFamily="18" charset="0"/>
+                              </a:rPr>
+                              <m:t>1</m:t>
                             </m:r>
                             <m:r>
                               <a:rPr lang="fr-FR" i="1">
@@ -10314,7 +13079,19 @@
                                 <a:rPr lang="fr-FR" sz="2400" i="1">
                                   <a:latin typeface="Cambria Math" panose="02040503050406030204" pitchFamily="18" charset="0"/>
                                 </a:rPr>
-                                <m:t>+1,</m:t>
+                                <m:t>+</m:t>
+                              </m:r>
+                              <m:r>
+                                <a:rPr lang="fr-FR" sz="2400" i="1">
+                                  <a:latin typeface="Cambria Math" panose="02040503050406030204" pitchFamily="18" charset="0"/>
+                                </a:rPr>
+                                <m:t>1</m:t>
+                              </m:r>
+                              <m:r>
+                                <a:rPr lang="fr-FR" sz="2400" i="1">
+                                  <a:latin typeface="Cambria Math" panose="02040503050406030204" pitchFamily="18" charset="0"/>
+                                </a:rPr>
+                                <m:t>,</m:t>
                               </m:r>
                               <m:r>
                                 <a:rPr lang="fr-FR" sz="2400" i="1">
@@ -10422,7 +13199,19 @@
                                 <a:rPr lang="fr-FR" sz="2400" i="1">
                                   <a:latin typeface="Cambria Math" panose="02040503050406030204" pitchFamily="18" charset="0"/>
                                 </a:rPr>
-                                <m:t>−1,</m:t>
+                                <m:t>−</m:t>
+                              </m:r>
+                              <m:r>
+                                <a:rPr lang="fr-FR" sz="2400" i="1">
+                                  <a:latin typeface="Cambria Math" panose="02040503050406030204" pitchFamily="18" charset="0"/>
+                                </a:rPr>
+                                <m:t>1</m:t>
+                              </m:r>
+                              <m:r>
+                                <a:rPr lang="fr-FR" sz="2400" i="1">
+                                  <a:latin typeface="Cambria Math" panose="02040503050406030204" pitchFamily="18" charset="0"/>
+                                </a:rPr>
+                                <m:t>,</m:t>
                               </m:r>
                               <m:r>
                                 <a:rPr lang="fr-FR" sz="2400" i="1">
@@ -10555,7 +13344,19 @@
                                 <a:rPr lang="fr-FR" sz="2400" i="1">
                                   <a:latin typeface="Cambria Math" panose="02040503050406030204" pitchFamily="18" charset="0"/>
                                 </a:rPr>
-                                <m:t>+1,</m:t>
+                                <m:t>+</m:t>
+                              </m:r>
+                              <m:r>
+                                <a:rPr lang="fr-FR" sz="2400" i="1">
+                                  <a:latin typeface="Cambria Math" panose="02040503050406030204" pitchFamily="18" charset="0"/>
+                                </a:rPr>
+                                <m:t>1</m:t>
+                              </m:r>
+                              <m:r>
+                                <a:rPr lang="fr-FR" sz="2400" i="1">
+                                  <a:latin typeface="Cambria Math" panose="02040503050406030204" pitchFamily="18" charset="0"/>
+                                </a:rPr>
+                                <m:t>,</m:t>
                               </m:r>
                               <m:r>
                                 <a:rPr lang="fr-FR" sz="2400" i="1">
@@ -10606,7 +13407,19 @@
                                 <a:rPr lang="fr-FR" sz="2400" i="1">
                                   <a:latin typeface="Cambria Math" panose="02040503050406030204" pitchFamily="18" charset="0"/>
                                 </a:rPr>
-                                <m:t>−1,</m:t>
+                                <m:t>−</m:t>
+                              </m:r>
+                              <m:r>
+                                <a:rPr lang="fr-FR" sz="2400" i="1">
+                                  <a:latin typeface="Cambria Math" panose="02040503050406030204" pitchFamily="18" charset="0"/>
+                                </a:rPr>
+                                <m:t>1</m:t>
+                              </m:r>
+                              <m:r>
+                                <a:rPr lang="fr-FR" sz="2400" i="1">
+                                  <a:latin typeface="Cambria Math" panose="02040503050406030204" pitchFamily="18" charset="0"/>
+                                </a:rPr>
+                                <m:t>,</m:t>
                               </m:r>
                               <m:r>
                                 <a:rPr lang="fr-FR" sz="2400" i="1">
@@ -10703,7 +13516,13 @@
                                 <a:rPr lang="fr-FR" sz="2400" i="1">
                                   <a:latin typeface="Cambria Math" panose="02040503050406030204" pitchFamily="18" charset="0"/>
                                 </a:rPr>
-                                <m:t>+1</m:t>
+                                <m:t>+</m:t>
+                              </m:r>
+                              <m:r>
+                                <a:rPr lang="fr-FR" sz="2400" i="1">
+                                  <a:latin typeface="Cambria Math" panose="02040503050406030204" pitchFamily="18" charset="0"/>
+                                </a:rPr>
+                                <m:t>1</m:t>
                               </m:r>
                             </m:sub>
                             <m:sup>
@@ -10817,7 +13636,13 @@
                                 <a:rPr lang="fr-FR" sz="2400" i="1">
                                   <a:latin typeface="Cambria Math" panose="02040503050406030204" pitchFamily="18" charset="0"/>
                                 </a:rPr>
-                                <m:t>−1</m:t>
+                                <m:t>−</m:t>
+                              </m:r>
+                              <m:r>
+                                <a:rPr lang="fr-FR" sz="2400" i="1">
+                                  <a:latin typeface="Cambria Math" panose="02040503050406030204" pitchFamily="18" charset="0"/>
+                                </a:rPr>
+                                <m:t>1</m:t>
                               </m:r>
                             </m:sub>
                             <m:sup>
@@ -10903,7 +13728,7 @@
             </p:txBody>
           </p:sp>
         </mc:Choice>
-        <mc:Fallback>
+        <mc:Fallback xmlns="">
           <p:sp>
             <p:nvSpPr>
               <p:cNvPr id="3" name="Espace réservé du contenu 2">
@@ -10947,8 +13772,8 @@
           </p:sp>
         </mc:Fallback>
       </mc:AlternateContent>
-      <mc:AlternateContent xmlns:mc="http://schemas.openxmlformats.org/markup-compatibility/2006">
-        <mc:Choice xmlns:a14="http://schemas.microsoft.com/office/drawing/2010/main" Requires="a14">
+      <mc:AlternateContent xmlns:mc="http://schemas.openxmlformats.org/markup-compatibility/2006" xmlns:a14="http://schemas.microsoft.com/office/drawing/2010/main">
+        <mc:Choice Requires="a14">
           <p:sp>
             <p:nvSpPr>
               <p:cNvPr id="5" name="ZoneTexte 4">
@@ -11163,7 +13988,21 @@
                                 <a:latin typeface="Cambria Math" panose="02040503050406030204" pitchFamily="18" charset="0"/>
                                 <a:ea typeface="Cambria Math" panose="02040503050406030204" pitchFamily="18" charset="0"/>
                               </a:rPr>
-                              <m:t>+1,</m:t>
+                              <m:t>+</m:t>
+                            </m:r>
+                            <m:r>
+                              <a:rPr lang="fr-FR" sz="2600" i="1">
+                                <a:latin typeface="Cambria Math" panose="02040503050406030204" pitchFamily="18" charset="0"/>
+                                <a:ea typeface="Cambria Math" panose="02040503050406030204" pitchFamily="18" charset="0"/>
+                              </a:rPr>
+                              <m:t>1</m:t>
+                            </m:r>
+                            <m:r>
+                              <a:rPr lang="fr-FR" sz="2600" i="1">
+                                <a:latin typeface="Cambria Math" panose="02040503050406030204" pitchFamily="18" charset="0"/>
+                                <a:ea typeface="Cambria Math" panose="02040503050406030204" pitchFamily="18" charset="0"/>
+                              </a:rPr>
+                              <m:t>,</m:t>
                             </m:r>
                             <m:r>
                               <a:rPr lang="fr-FR" sz="2600" i="1">
@@ -11286,7 +14125,21 @@
                                 <a:latin typeface="Cambria Math" panose="02040503050406030204" pitchFamily="18" charset="0"/>
                                 <a:ea typeface="Cambria Math" panose="02040503050406030204" pitchFamily="18" charset="0"/>
                               </a:rPr>
-                              <m:t>−1,</m:t>
+                              <m:t>−</m:t>
+                            </m:r>
+                            <m:r>
+                              <a:rPr lang="fr-FR" sz="2600" i="1">
+                                <a:latin typeface="Cambria Math" panose="02040503050406030204" pitchFamily="18" charset="0"/>
+                                <a:ea typeface="Cambria Math" panose="02040503050406030204" pitchFamily="18" charset="0"/>
+                              </a:rPr>
+                              <m:t>1</m:t>
+                            </m:r>
+                            <m:r>
+                              <a:rPr lang="fr-FR" sz="2600" i="1">
+                                <a:latin typeface="Cambria Math" panose="02040503050406030204" pitchFamily="18" charset="0"/>
+                                <a:ea typeface="Cambria Math" panose="02040503050406030204" pitchFamily="18" charset="0"/>
+                              </a:rPr>
+                              <m:t>,</m:t>
                             </m:r>
                             <m:r>
                               <a:rPr lang="fr-FR" sz="2600" i="1">
@@ -11555,7 +14408,13 @@
                               <a:rPr lang="fr-FR" sz="2600" i="1">
                                 <a:latin typeface="Cambria Math" panose="02040503050406030204" pitchFamily="18" charset="0"/>
                               </a:rPr>
-                              <m:t>+1</m:t>
+                              <m:t>+</m:t>
+                            </m:r>
+                            <m:r>
+                              <a:rPr lang="fr-FR" sz="2600" i="1">
+                                <a:latin typeface="Cambria Math" panose="02040503050406030204" pitchFamily="18" charset="0"/>
+                              </a:rPr>
+                              <m:t>1</m:t>
                             </m:r>
                           </m:sub>
                           <m:sup>
@@ -11669,7 +14528,13 @@
                               <a:rPr lang="fr-FR" sz="2600" i="1">
                                 <a:latin typeface="Cambria Math" panose="02040503050406030204" pitchFamily="18" charset="0"/>
                               </a:rPr>
-                              <m:t>−1</m:t>
+                              <m:t>−</m:t>
+                            </m:r>
+                            <m:r>
+                              <a:rPr lang="fr-FR" sz="2600" i="1">
+                                <a:latin typeface="Cambria Math" panose="02040503050406030204" pitchFamily="18" charset="0"/>
+                              </a:rPr>
+                              <m:t>1</m:t>
                             </m:r>
                           </m:sub>
                           <m:sup>
@@ -11746,7 +14611,7 @@
             </p:txBody>
           </p:sp>
         </mc:Choice>
-        <mc:Fallback>
+        <mc:Fallback xmlns="">
           <p:sp>
             <p:nvSpPr>
               <p:cNvPr id="5" name="ZoneTexte 4">
@@ -11934,8 +14799,8 @@
           </a:prstGeom>
         </p:spPr>
       </p:pic>
-      <mc:AlternateContent xmlns:mc="http://schemas.openxmlformats.org/markup-compatibility/2006">
-        <mc:Choice xmlns:a14="http://schemas.microsoft.com/office/drawing/2010/main" Requires="a14">
+      <mc:AlternateContent xmlns:mc="http://schemas.openxmlformats.org/markup-compatibility/2006" xmlns:a14="http://schemas.microsoft.com/office/drawing/2010/main">
+        <mc:Choice Requires="a14">
           <p:sp>
             <p:nvSpPr>
               <p:cNvPr id="6" name="ZoneTexte 5">
@@ -12026,7 +14891,16 @@
                         </a:solidFill>
                         <a:latin typeface="Cambria Math" panose="02040503050406030204" pitchFamily="18" charset="0"/>
                       </a:rPr>
-                      <m:t>=0</m:t>
+                      <m:t>=</m:t>
+                    </m:r>
+                    <m:r>
+                      <a:rPr lang="fr-CA" b="0" i="1" smtClean="0">
+                        <a:solidFill>
+                          <a:schemeClr val="accent2"/>
+                        </a:solidFill>
+                        <a:latin typeface="Cambria Math" panose="02040503050406030204" pitchFamily="18" charset="0"/>
+                      </a:rPr>
+                      <m:t>0</m:t>
                     </m:r>
                   </m:oMath>
                 </a14:m>
@@ -12139,7 +15013,7 @@
                       <m:f>
                         <m:fPr>
                           <m:ctrlPr>
-                            <a:rPr lang="fr-CA" b="0" i="0" smtClean="0">
+                            <a:rPr lang="fr-CA" b="0" i="1" smtClean="0">
                               <a:solidFill>
                                 <a:schemeClr val="accent2"/>
                               </a:solidFill>
@@ -12236,7 +15110,16 @@
                               </a:solidFill>
                               <a:latin typeface="Cambria Math" panose="02040503050406030204" pitchFamily="18" charset="0"/>
                             </a:rPr>
-                            <m:t>+2</m:t>
+                            <m:t>+</m:t>
+                          </m:r>
+                          <m:r>
+                            <a:rPr lang="fr-CA" b="0" i="1" smtClean="0">
+                              <a:solidFill>
+                                <a:schemeClr val="accent2"/>
+                              </a:solidFill>
+                              <a:latin typeface="Cambria Math" panose="02040503050406030204" pitchFamily="18" charset="0"/>
+                            </a:rPr>
+                            <m:t>2</m:t>
                           </m:r>
                         </m:sub>
                         <m:sup>
@@ -12355,7 +15238,16 @@
                               </a:solidFill>
                               <a:latin typeface="Cambria Math" panose="02040503050406030204" pitchFamily="18" charset="0"/>
                             </a:rPr>
-                            <m:t>+1</m:t>
+                            <m:t>+</m:t>
+                          </m:r>
+                          <m:r>
+                            <a:rPr lang="fr-CA" b="0" i="1" smtClean="0">
+                              <a:solidFill>
+                                <a:schemeClr val="accent2"/>
+                              </a:solidFill>
+                              <a:latin typeface="Cambria Math" panose="02040503050406030204" pitchFamily="18" charset="0"/>
+                            </a:rPr>
+                            <m:t>1</m:t>
                           </m:r>
                         </m:sub>
                         <m:sup>
@@ -12382,7 +15274,7 @@
             </p:txBody>
           </p:sp>
         </mc:Choice>
-        <mc:Fallback>
+        <mc:Fallback xmlns="">
           <p:sp>
             <p:nvSpPr>
               <p:cNvPr id="6" name="ZoneTexte 5">
@@ -12427,8 +15319,8 @@
           </p:sp>
         </mc:Fallback>
       </mc:AlternateContent>
-      <mc:AlternateContent xmlns:mc="http://schemas.openxmlformats.org/markup-compatibility/2006">
-        <mc:Choice xmlns:a14="http://schemas.microsoft.com/office/drawing/2010/main" Requires="a14">
+      <mc:AlternateContent xmlns:mc="http://schemas.openxmlformats.org/markup-compatibility/2006" xmlns:a14="http://schemas.microsoft.com/office/drawing/2010/main">
+        <mc:Choice Requires="a14">
           <p:sp>
             <p:nvSpPr>
               <p:cNvPr id="7" name="ZoneTexte 6">
@@ -12519,7 +15411,16 @@
                         </a:solidFill>
                         <a:latin typeface="Cambria Math" panose="02040503050406030204" pitchFamily="18" charset="0"/>
                       </a:rPr>
-                      <m:t>=0</m:t>
+                      <m:t>=</m:t>
+                    </m:r>
+                    <m:r>
+                      <a:rPr lang="fr-CA" b="0" i="1" smtClean="0">
+                        <a:solidFill>
+                          <a:srgbClr val="FFBF00"/>
+                        </a:solidFill>
+                        <a:latin typeface="Cambria Math" panose="02040503050406030204" pitchFamily="18" charset="0"/>
+                      </a:rPr>
+                      <m:t>0</m:t>
                     </m:r>
                   </m:oMath>
                 </a14:m>
@@ -12648,7 +15549,16 @@
                               </a:solidFill>
                               <a:latin typeface="Cambria Math" panose="02040503050406030204" pitchFamily="18" charset="0"/>
                             </a:rPr>
-                            <m:t>−1</m:t>
+                            <m:t>−</m:t>
+                          </m:r>
+                          <m:r>
+                            <a:rPr lang="fr-CA" b="0" i="0" smtClean="0">
+                              <a:solidFill>
+                                <a:srgbClr val="FFBF00"/>
+                              </a:solidFill>
+                              <a:latin typeface="Cambria Math" panose="02040503050406030204" pitchFamily="18" charset="0"/>
+                            </a:rPr>
+                            <m:t>1</m:t>
                           </m:r>
                         </m:num>
                         <m:den>
@@ -12720,7 +15630,16 @@
                               </a:solidFill>
                               <a:latin typeface="Cambria Math" panose="02040503050406030204" pitchFamily="18" charset="0"/>
                             </a:rPr>
-                            <m:t>+2</m:t>
+                            <m:t>+</m:t>
+                          </m:r>
+                          <m:r>
+                            <a:rPr lang="fr-CA" b="0" i="1" smtClean="0">
+                              <a:solidFill>
+                                <a:srgbClr val="FFBF00"/>
+                              </a:solidFill>
+                              <a:latin typeface="Cambria Math" panose="02040503050406030204" pitchFamily="18" charset="0"/>
+                            </a:rPr>
+                            <m:t>2</m:t>
                           </m:r>
                         </m:sub>
                         <m:sup>
@@ -12839,7 +15758,16 @@
                               </a:solidFill>
                               <a:latin typeface="Cambria Math" panose="02040503050406030204" pitchFamily="18" charset="0"/>
                             </a:rPr>
-                            <m:t>+1</m:t>
+                            <m:t>+</m:t>
+                          </m:r>
+                          <m:r>
+                            <a:rPr lang="fr-CA" b="0" i="1" smtClean="0">
+                              <a:solidFill>
+                                <a:srgbClr val="FFBF00"/>
+                              </a:solidFill>
+                              <a:latin typeface="Cambria Math" panose="02040503050406030204" pitchFamily="18" charset="0"/>
+                            </a:rPr>
+                            <m:t>1</m:t>
                           </m:r>
                         </m:sub>
                         <m:sup>
@@ -12866,7 +15794,7 @@
             </p:txBody>
           </p:sp>
         </mc:Choice>
-        <mc:Fallback>
+        <mc:Fallback xmlns="">
           <p:sp>
             <p:nvSpPr>
               <p:cNvPr id="7" name="ZoneTexte 6">
@@ -12911,8 +15839,8 @@
           </p:sp>
         </mc:Fallback>
       </mc:AlternateContent>
-      <mc:AlternateContent xmlns:mc="http://schemas.openxmlformats.org/markup-compatibility/2006">
-        <mc:Choice xmlns:a14="http://schemas.microsoft.com/office/drawing/2010/main" Requires="a14">
+      <mc:AlternateContent xmlns:mc="http://schemas.openxmlformats.org/markup-compatibility/2006" xmlns:a14="http://schemas.microsoft.com/office/drawing/2010/main">
+        <mc:Choice Requires="a14">
           <p:sp>
             <p:nvSpPr>
               <p:cNvPr id="8" name="ZoneTexte 7">
@@ -13361,21 +16289,12 @@
                         </a:solidFill>
                         <a:latin typeface="Cambria Math" panose="02040503050406030204" pitchFamily="18" charset="0"/>
                       </a:rPr>
-                      <m:t>=</m:t>
-                    </m:r>
-                    <m:r>
-                      <a:rPr lang="fr-CA" b="0" i="0" smtClean="0">
-                        <a:solidFill>
-                          <a:srgbClr val="5B9BD5"/>
-                        </a:solidFill>
-                        <a:latin typeface="Cambria Math" panose="02040503050406030204" pitchFamily="18" charset="0"/>
-                      </a:rPr>
-                      <m:t>[</m:t>
+                      <m:t>=[</m:t>
                     </m:r>
                     <m:d>
                       <m:dPr>
                         <m:ctrlPr>
-                          <a:rPr lang="fr-CA" b="0" i="0" smtClean="0">
+                          <a:rPr lang="fr-CA" b="0" i="1" smtClean="0">
                             <a:solidFill>
                               <a:srgbClr val="5B9BD5"/>
                             </a:solidFill>
@@ -13387,15 +16306,24 @@
                         <m:f>
                           <m:fPr>
                             <m:ctrlPr>
+                              <a:rPr lang="fr-CA" b="0" i="1" smtClean="0">
+                                <a:solidFill>
+                                  <a:srgbClr val="5B9BD5"/>
+                                </a:solidFill>
+                                <a:latin typeface="Cambria Math" panose="02040503050406030204" pitchFamily="18" charset="0"/>
+                              </a:rPr>
+                            </m:ctrlPr>
+                          </m:fPr>
+                          <m:num>
+                            <m:r>
                               <a:rPr lang="fr-CA" b="0" i="0" smtClean="0">
                                 <a:solidFill>
                                   <a:srgbClr val="5B9BD5"/>
                                 </a:solidFill>
                                 <a:latin typeface="Cambria Math" panose="02040503050406030204" pitchFamily="18" charset="0"/>
                               </a:rPr>
-                            </m:ctrlPr>
-                          </m:fPr>
-                          <m:num>
+                              <m:t>−</m:t>
+                            </m:r>
                             <m:r>
                               <a:rPr lang="fr-CA" b="0" i="0" smtClean="0">
                                 <a:solidFill>
@@ -13403,7 +16331,7 @@
                                 </a:solidFill>
                                 <a:latin typeface="Cambria Math" panose="02040503050406030204" pitchFamily="18" charset="0"/>
                               </a:rPr>
-                              <m:t>−2</m:t>
+                              <m:t>2</m:t>
                             </m:r>
                             <m:r>
                               <a:rPr lang="fr-CA" b="0" i="1" smtClean="0">
@@ -13861,7 +16789,16 @@
                             </a:solidFill>
                             <a:latin typeface="Cambria Math" panose="02040503050406030204" pitchFamily="18" charset="0"/>
                           </a:rPr>
-                          <m:t>−2</m:t>
+                          <m:t>−</m:t>
+                        </m:r>
+                        <m:r>
+                          <a:rPr lang="fr-CA" b="0" i="1" smtClean="0">
+                            <a:solidFill>
+                              <a:srgbClr val="5B9BD5"/>
+                            </a:solidFill>
+                            <a:latin typeface="Cambria Math" panose="02040503050406030204" pitchFamily="18" charset="0"/>
+                          </a:rPr>
+                          <m:t>2</m:t>
                         </m:r>
                       </m:sub>
                       <m:sup>
@@ -13884,7 +16821,17 @@
                         <a:latin typeface="Cambria Math" panose="02040503050406030204" pitchFamily="18" charset="0"/>
                         <a:ea typeface="Cambria Math" panose="02040503050406030204" pitchFamily="18" charset="0"/>
                       </a:rPr>
-                      <m:t>+4</m:t>
+                      <m:t>+</m:t>
+                    </m:r>
+                    <m:r>
+                      <a:rPr lang="fr-CA" b="0" i="1" smtClean="0">
+                        <a:solidFill>
+                          <a:srgbClr val="5B9BD5"/>
+                        </a:solidFill>
+                        <a:latin typeface="Cambria Math" panose="02040503050406030204" pitchFamily="18" charset="0"/>
+                        <a:ea typeface="Cambria Math" panose="02040503050406030204" pitchFamily="18" charset="0"/>
+                      </a:rPr>
+                      <m:t>4</m:t>
                     </m:r>
                     <m:sSubSup>
                       <m:sSubSupPr>
@@ -13943,7 +16890,16 @@
                             </a:solidFill>
                             <a:latin typeface="Cambria Math" panose="02040503050406030204" pitchFamily="18" charset="0"/>
                           </a:rPr>
-                          <m:t>−1</m:t>
+                          <m:t>−</m:t>
+                        </m:r>
+                        <m:r>
+                          <a:rPr lang="fr-CA" b="0" i="1" smtClean="0">
+                            <a:solidFill>
+                              <a:srgbClr val="5B9BD5"/>
+                            </a:solidFill>
+                            <a:latin typeface="Cambria Math" panose="02040503050406030204" pitchFamily="18" charset="0"/>
+                          </a:rPr>
+                          <m:t>1</m:t>
                         </m:r>
                       </m:sub>
                       <m:sup>
@@ -13966,7 +16922,17 @@
                         <a:latin typeface="Cambria Math" panose="02040503050406030204" pitchFamily="18" charset="0"/>
                         <a:ea typeface="Cambria Math" panose="02040503050406030204" pitchFamily="18" charset="0"/>
                       </a:rPr>
-                      <m:t>)]÷3</m:t>
+                      <m:t>)]÷</m:t>
+                    </m:r>
+                    <m:r>
+                      <a:rPr lang="fr-CA" b="0" i="1" smtClean="0">
+                        <a:solidFill>
+                          <a:srgbClr val="5B9BD5"/>
+                        </a:solidFill>
+                        <a:latin typeface="Cambria Math" panose="02040503050406030204" pitchFamily="18" charset="0"/>
+                        <a:ea typeface="Cambria Math" panose="02040503050406030204" pitchFamily="18" charset="0"/>
+                      </a:rPr>
+                      <m:t>3</m:t>
                     </m:r>
                   </m:oMath>
                 </a14:m>
@@ -14018,7 +16984,43 @@
                           </a:solidFill>
                           <a:latin typeface="Cambria Math" panose="02040503050406030204" pitchFamily="18" charset="0"/>
                         </a:rPr>
-                        <m:t>=(0,1)</m:t>
+                        <m:t>=(</m:t>
+                      </m:r>
+                      <m:r>
+                        <a:rPr lang="fr-CA" b="0" i="1" smtClean="0">
+                          <a:solidFill>
+                            <a:srgbClr val="5B9BD5"/>
+                          </a:solidFill>
+                          <a:latin typeface="Cambria Math" panose="02040503050406030204" pitchFamily="18" charset="0"/>
+                        </a:rPr>
+                        <m:t>0</m:t>
+                      </m:r>
+                      <m:r>
+                        <a:rPr lang="fr-CA" b="0" i="1" smtClean="0">
+                          <a:solidFill>
+                            <a:srgbClr val="5B9BD5"/>
+                          </a:solidFill>
+                          <a:latin typeface="Cambria Math" panose="02040503050406030204" pitchFamily="18" charset="0"/>
+                        </a:rPr>
+                        <m:t>,</m:t>
+                      </m:r>
+                      <m:r>
+                        <a:rPr lang="fr-CA" b="0" i="1" smtClean="0">
+                          <a:solidFill>
+                            <a:srgbClr val="5B9BD5"/>
+                          </a:solidFill>
+                          <a:latin typeface="Cambria Math" panose="02040503050406030204" pitchFamily="18" charset="0"/>
+                        </a:rPr>
+                        <m:t>1</m:t>
+                      </m:r>
+                      <m:r>
+                        <a:rPr lang="fr-CA" b="0" i="1" smtClean="0">
+                          <a:solidFill>
+                            <a:srgbClr val="5B9BD5"/>
+                          </a:solidFill>
+                          <a:latin typeface="Cambria Math" panose="02040503050406030204" pitchFamily="18" charset="0"/>
+                        </a:rPr>
+                        <m:t>)</m:t>
                       </m:r>
                     </m:oMath>
                   </m:oMathPara>
@@ -14032,7 +17034,7 @@
             </p:txBody>
           </p:sp>
         </mc:Choice>
-        <mc:Fallback>
+        <mc:Fallback xmlns="">
           <p:sp>
             <p:nvSpPr>
               <p:cNvPr id="8" name="ZoneTexte 7">
@@ -14077,8 +17079,8 @@
           </p:sp>
         </mc:Fallback>
       </mc:AlternateContent>
-      <mc:AlternateContent xmlns:mc="http://schemas.openxmlformats.org/markup-compatibility/2006">
-        <mc:Choice xmlns:a14="http://schemas.microsoft.com/office/drawing/2010/main" Requires="a14">
+      <mc:AlternateContent xmlns:mc="http://schemas.openxmlformats.org/markup-compatibility/2006" xmlns:a14="http://schemas.microsoft.com/office/drawing/2010/main">
+        <mc:Choice Requires="a14">
           <p:sp>
             <p:nvSpPr>
               <p:cNvPr id="9" name="ZoneTexte 8">
@@ -14560,7 +17562,16 @@
                                 </a:solidFill>
                                 <a:latin typeface="Cambria Math" panose="02040503050406030204" pitchFamily="18" charset="0"/>
                               </a:rPr>
-                              <m:t>−2</m:t>
+                              <m:t>−</m:t>
+                            </m:r>
+                            <m:r>
+                              <a:rPr lang="fr-CA" b="0" i="0" smtClean="0">
+                                <a:solidFill>
+                                  <a:srgbClr val="6FAD46"/>
+                                </a:solidFill>
+                                <a:latin typeface="Cambria Math" panose="02040503050406030204" pitchFamily="18" charset="0"/>
+                              </a:rPr>
+                              <m:t>2</m:t>
                             </m:r>
                             <m:r>
                               <a:rPr lang="fr-CA" b="0" i="1" smtClean="0">
@@ -15050,7 +18061,17 @@
                         <a:latin typeface="Cambria Math" panose="02040503050406030204" pitchFamily="18" charset="0"/>
                         <a:ea typeface="Cambria Math" panose="02040503050406030204" pitchFamily="18" charset="0"/>
                       </a:rPr>
-                      <m:t>+4</m:t>
+                      <m:t>+</m:t>
+                    </m:r>
+                    <m:r>
+                      <a:rPr lang="fr-CA" b="0" i="1" smtClean="0">
+                        <a:solidFill>
+                          <a:srgbClr val="6FAD46"/>
+                        </a:solidFill>
+                        <a:latin typeface="Cambria Math" panose="02040503050406030204" pitchFamily="18" charset="0"/>
+                        <a:ea typeface="Cambria Math" panose="02040503050406030204" pitchFamily="18" charset="0"/>
+                      </a:rPr>
+                      <m:t>4</m:t>
                     </m:r>
                     <m:sSubSup>
                       <m:sSubSupPr>
@@ -15141,7 +18162,17 @@
                         <a:latin typeface="Cambria Math" panose="02040503050406030204" pitchFamily="18" charset="0"/>
                         <a:ea typeface="Cambria Math" panose="02040503050406030204" pitchFamily="18" charset="0"/>
                       </a:rPr>
-                      <m:t>)]÷3</m:t>
+                      <m:t>)]÷</m:t>
+                    </m:r>
+                    <m:r>
+                      <a:rPr lang="fr-CA" b="0" i="1" smtClean="0">
+                        <a:solidFill>
+                          <a:srgbClr val="6FAD46"/>
+                        </a:solidFill>
+                        <a:latin typeface="Cambria Math" panose="02040503050406030204" pitchFamily="18" charset="0"/>
+                        <a:ea typeface="Cambria Math" panose="02040503050406030204" pitchFamily="18" charset="0"/>
+                      </a:rPr>
+                      <m:t>3</m:t>
                     </m:r>
                   </m:oMath>
                 </a14:m>
@@ -15243,7 +18274,7 @@
             </p:txBody>
           </p:sp>
         </mc:Choice>
-        <mc:Fallback>
+        <mc:Fallback xmlns="">
           <p:sp>
             <p:nvSpPr>
               <p:cNvPr id="9" name="ZoneTexte 8">
@@ -15436,8 +18467,8 @@
           </a:p>
         </p:txBody>
       </p:sp>
-      <mc:AlternateContent xmlns:mc="http://schemas.openxmlformats.org/markup-compatibility/2006">
-        <mc:Choice xmlns:a14="http://schemas.microsoft.com/office/drawing/2010/main" Requires="a14">
+      <mc:AlternateContent xmlns:mc="http://schemas.openxmlformats.org/markup-compatibility/2006" xmlns:a14="http://schemas.microsoft.com/office/drawing/2010/main">
+        <mc:Choice Requires="a14">
           <p:sp>
             <p:nvSpPr>
               <p:cNvPr id="3" name="Espace réservé du contenu 2">
@@ -15822,7 +18853,7 @@
             </p:txBody>
           </p:sp>
         </mc:Choice>
-        <mc:Fallback>
+        <mc:Fallback xmlns="">
           <p:sp>
             <p:nvSpPr>
               <p:cNvPr id="3" name="Espace réservé du contenu 2">
@@ -15929,8 +18960,8 @@
           </a:p>
         </p:txBody>
       </p:sp>
-      <mc:AlternateContent xmlns:mc="http://schemas.openxmlformats.org/markup-compatibility/2006">
-        <mc:Choice xmlns:a14="http://schemas.microsoft.com/office/drawing/2010/main" Requires="a14">
+      <mc:AlternateContent xmlns:mc="http://schemas.openxmlformats.org/markup-compatibility/2006" xmlns:a14="http://schemas.microsoft.com/office/drawing/2010/main">
+        <mc:Choice Requires="a14">
           <p:sp>
             <p:nvSpPr>
               <p:cNvPr id="3" name="Espace réservé du contenu 2">
@@ -16314,7 +19345,13 @@
                           <a:rPr lang="fr-FR" i="1">
                             <a:latin typeface="Cambria Math" panose="02040503050406030204" pitchFamily="18" charset="0"/>
                           </a:rPr>
-                          <m:t>2!</m:t>
+                          <m:t>2</m:t>
+                        </m:r>
+                        <m:r>
+                          <a:rPr lang="fr-FR" i="1">
+                            <a:latin typeface="Cambria Math" panose="02040503050406030204" pitchFamily="18" charset="0"/>
+                          </a:rPr>
+                          <m:t>!</m:t>
                         </m:r>
                       </m:den>
                     </m:f>
@@ -16486,7 +19523,13 @@
                           <a:rPr lang="fr-FR" i="1">
                             <a:latin typeface="Cambria Math" panose="02040503050406030204" pitchFamily="18" charset="0"/>
                           </a:rPr>
-                          <m:t>3!</m:t>
+                          <m:t>3</m:t>
+                        </m:r>
+                        <m:r>
+                          <a:rPr lang="fr-FR" i="1">
+                            <a:latin typeface="Cambria Math" panose="02040503050406030204" pitchFamily="18" charset="0"/>
+                          </a:rPr>
+                          <m:t>!</m:t>
                         </m:r>
                       </m:den>
                     </m:f>
@@ -16658,7 +19701,13 @@
                           <a:rPr lang="fr-FR" i="1">
                             <a:latin typeface="Cambria Math" panose="02040503050406030204" pitchFamily="18" charset="0"/>
                           </a:rPr>
-                          <m:t>4!</m:t>
+                          <m:t>4</m:t>
+                        </m:r>
+                        <m:r>
+                          <a:rPr lang="fr-FR" i="1">
+                            <a:latin typeface="Cambria Math" panose="02040503050406030204" pitchFamily="18" charset="0"/>
+                          </a:rPr>
+                          <m:t>!</m:t>
                         </m:r>
                       </m:den>
                     </m:f>
@@ -17076,7 +20125,13 @@
                           <a:rPr lang="fr-FR" i="1">
                             <a:latin typeface="Cambria Math" panose="02040503050406030204" pitchFamily="18" charset="0"/>
                           </a:rPr>
-                          <m:t>2!</m:t>
+                          <m:t>2</m:t>
+                        </m:r>
+                        <m:r>
+                          <a:rPr lang="fr-FR" i="1">
+                            <a:latin typeface="Cambria Math" panose="02040503050406030204" pitchFamily="18" charset="0"/>
+                          </a:rPr>
+                          <m:t>!</m:t>
                         </m:r>
                       </m:den>
                     </m:f>
@@ -17248,7 +20303,13 @@
                           <a:rPr lang="fr-FR" i="1">
                             <a:latin typeface="Cambria Math" panose="02040503050406030204" pitchFamily="18" charset="0"/>
                           </a:rPr>
-                          <m:t>3!</m:t>
+                          <m:t>3</m:t>
+                        </m:r>
+                        <m:r>
+                          <a:rPr lang="fr-FR" i="1">
+                            <a:latin typeface="Cambria Math" panose="02040503050406030204" pitchFamily="18" charset="0"/>
+                          </a:rPr>
+                          <m:t>!</m:t>
                         </m:r>
                       </m:den>
                     </m:f>
@@ -17420,7 +20481,13 @@
                           <a:rPr lang="fr-FR" i="1">
                             <a:latin typeface="Cambria Math" panose="02040503050406030204" pitchFamily="18" charset="0"/>
                           </a:rPr>
-                          <m:t>4!</m:t>
+                          <m:t>4</m:t>
+                        </m:r>
+                        <m:r>
+                          <a:rPr lang="fr-FR" i="1">
+                            <a:latin typeface="Cambria Math" panose="02040503050406030204" pitchFamily="18" charset="0"/>
+                          </a:rPr>
+                          <m:t>!</m:t>
                         </m:r>
                       </m:den>
                     </m:f>
@@ -18011,7 +21078,13 @@
                           <a:rPr lang="fr-FR" i="1">
                             <a:latin typeface="Cambria Math" panose="02040503050406030204" pitchFamily="18" charset="0"/>
                           </a:rPr>
-                          <m:t>2!</m:t>
+                          <m:t>2</m:t>
+                        </m:r>
+                        <m:r>
+                          <a:rPr lang="fr-FR" i="1">
+                            <a:latin typeface="Cambria Math" panose="02040503050406030204" pitchFamily="18" charset="0"/>
+                          </a:rPr>
+                          <m:t>!</m:t>
                         </m:r>
                       </m:den>
                     </m:f>
@@ -18472,7 +21545,13 @@
                           <a:rPr lang="fr-FR" i="1">
                             <a:latin typeface="Cambria Math" panose="02040503050406030204" pitchFamily="18" charset="0"/>
                           </a:rPr>
-                          <m:t>2!</m:t>
+                          <m:t>2</m:t>
+                        </m:r>
+                        <m:r>
+                          <a:rPr lang="fr-FR" i="1">
+                            <a:latin typeface="Cambria Math" panose="02040503050406030204" pitchFamily="18" charset="0"/>
+                          </a:rPr>
+                          <m:t>!</m:t>
                         </m:r>
                       </m:den>
                     </m:f>
@@ -18542,7 +21621,7 @@
             </p:txBody>
           </p:sp>
         </mc:Choice>
-        <mc:Fallback>
+        <mc:Fallback xmlns="">
           <p:sp>
             <p:nvSpPr>
               <p:cNvPr id="3" name="Espace réservé du contenu 2">
@@ -18655,8 +21734,8 @@
           </a:p>
         </p:txBody>
       </p:sp>
-      <mc:AlternateContent xmlns:mc="http://schemas.openxmlformats.org/markup-compatibility/2006">
-        <mc:Choice xmlns:a14="http://schemas.microsoft.com/office/drawing/2010/main" Requires="a14">
+      <mc:AlternateContent xmlns:mc="http://schemas.openxmlformats.org/markup-compatibility/2006" xmlns:a14="http://schemas.microsoft.com/office/drawing/2010/main">
+        <mc:Choice Requires="a14">
           <p:sp>
             <p:nvSpPr>
               <p:cNvPr id="3" name="Espace réservé du contenu 2">
@@ -23366,7 +26445,7 @@
             </p:txBody>
           </p:sp>
         </mc:Choice>
-        <mc:Fallback>
+        <mc:Fallback xmlns="">
           <p:sp>
             <p:nvSpPr>
               <p:cNvPr id="3" name="Espace réservé du contenu 2">

--- a/projet_final/projet_final/MEC8211-Projet-final-Presentation.pptx
+++ b/projet_final/projet_final/MEC8211-Projet-final-Presentation.pptx
@@ -5,7 +5,7 @@
     <p:sldMasterId id="2147483648" r:id="rId1"/>
   </p:sldMasterIdLst>
   <p:notesMasterIdLst>
-    <p:notesMasterId r:id="rId22"/>
+    <p:notesMasterId r:id="rId23"/>
   </p:notesMasterIdLst>
   <p:sldIdLst>
     <p:sldId id="256" r:id="rId2"/>
@@ -27,7 +27,8 @@
     <p:sldId id="271" r:id="rId18"/>
     <p:sldId id="273" r:id="rId19"/>
     <p:sldId id="275" r:id="rId20"/>
-    <p:sldId id="274" r:id="rId21"/>
+    <p:sldId id="276" r:id="rId21"/>
+    <p:sldId id="274" r:id="rId22"/>
   </p:sldIdLst>
   <p:sldSz cx="12192000" cy="6858000"/>
   <p:notesSz cx="6858000" cy="9144000"/>
@@ -216,7 +217,7 @@
           <a:p>
             <a:fld id="{BB0B2023-C595-443A-8D8C-AB9DF5A28D48}" type="datetimeFigureOut">
               <a:rPr lang="fr-FR" smtClean="0"/>
-              <a:t>11/04/2026</a:t>
+              <a:t>12/04/2026</a:t>
             </a:fld>
             <a:endParaRPr lang="fr-FR"/>
           </a:p>
@@ -906,7 +907,7 @@
           <a:p>
             <a:fld id="{4E51AFDA-D128-4B68-A211-269E2451E5DE}" type="datetimeFigureOut">
               <a:rPr lang="fr-FR" smtClean="0"/>
-              <a:t>11/04/2026</a:t>
+              <a:t>12/04/2026</a:t>
             </a:fld>
             <a:endParaRPr lang="fr-FR"/>
           </a:p>
@@ -1104,7 +1105,7 @@
           <a:p>
             <a:fld id="{4E51AFDA-D128-4B68-A211-269E2451E5DE}" type="datetimeFigureOut">
               <a:rPr lang="fr-FR" smtClean="0"/>
-              <a:t>11/04/2026</a:t>
+              <a:t>12/04/2026</a:t>
             </a:fld>
             <a:endParaRPr lang="fr-FR"/>
           </a:p>
@@ -1312,7 +1313,7 @@
           <a:p>
             <a:fld id="{4E51AFDA-D128-4B68-A211-269E2451E5DE}" type="datetimeFigureOut">
               <a:rPr lang="fr-FR" smtClean="0"/>
-              <a:t>11/04/2026</a:t>
+              <a:t>12/04/2026</a:t>
             </a:fld>
             <a:endParaRPr lang="fr-FR"/>
           </a:p>
@@ -1510,7 +1511,7 @@
           <a:p>
             <a:fld id="{4E51AFDA-D128-4B68-A211-269E2451E5DE}" type="datetimeFigureOut">
               <a:rPr lang="fr-FR" smtClean="0"/>
-              <a:t>11/04/2026</a:t>
+              <a:t>12/04/2026</a:t>
             </a:fld>
             <a:endParaRPr lang="fr-FR"/>
           </a:p>
@@ -1785,7 +1786,7 @@
           <a:p>
             <a:fld id="{4E51AFDA-D128-4B68-A211-269E2451E5DE}" type="datetimeFigureOut">
               <a:rPr lang="fr-FR" smtClean="0"/>
-              <a:t>11/04/2026</a:t>
+              <a:t>12/04/2026</a:t>
             </a:fld>
             <a:endParaRPr lang="fr-FR"/>
           </a:p>
@@ -2050,7 +2051,7 @@
           <a:p>
             <a:fld id="{4E51AFDA-D128-4B68-A211-269E2451E5DE}" type="datetimeFigureOut">
               <a:rPr lang="fr-FR" smtClean="0"/>
-              <a:t>11/04/2026</a:t>
+              <a:t>12/04/2026</a:t>
             </a:fld>
             <a:endParaRPr lang="fr-FR"/>
           </a:p>
@@ -2462,7 +2463,7 @@
           <a:p>
             <a:fld id="{4E51AFDA-D128-4B68-A211-269E2451E5DE}" type="datetimeFigureOut">
               <a:rPr lang="fr-FR" smtClean="0"/>
-              <a:t>11/04/2026</a:t>
+              <a:t>12/04/2026</a:t>
             </a:fld>
             <a:endParaRPr lang="fr-FR"/>
           </a:p>
@@ -2603,7 +2604,7 @@
           <a:p>
             <a:fld id="{4E51AFDA-D128-4B68-A211-269E2451E5DE}" type="datetimeFigureOut">
               <a:rPr lang="fr-FR" smtClean="0"/>
-              <a:t>11/04/2026</a:t>
+              <a:t>12/04/2026</a:t>
             </a:fld>
             <a:endParaRPr lang="fr-FR"/>
           </a:p>
@@ -2716,7 +2717,7 @@
           <a:p>
             <a:fld id="{4E51AFDA-D128-4B68-A211-269E2451E5DE}" type="datetimeFigureOut">
               <a:rPr lang="fr-FR" smtClean="0"/>
-              <a:t>11/04/2026</a:t>
+              <a:t>12/04/2026</a:t>
             </a:fld>
             <a:endParaRPr lang="fr-FR"/>
           </a:p>
@@ -3027,7 +3028,7 @@
           <a:p>
             <a:fld id="{4E51AFDA-D128-4B68-A211-269E2451E5DE}" type="datetimeFigureOut">
               <a:rPr lang="fr-FR" smtClean="0"/>
-              <a:t>11/04/2026</a:t>
+              <a:t>12/04/2026</a:t>
             </a:fld>
             <a:endParaRPr lang="fr-FR"/>
           </a:p>
@@ -3315,7 +3316,7 @@
           <a:p>
             <a:fld id="{4E51AFDA-D128-4B68-A211-269E2451E5DE}" type="datetimeFigureOut">
               <a:rPr lang="fr-FR" smtClean="0"/>
-              <a:t>11/04/2026</a:t>
+              <a:t>12/04/2026</a:t>
             </a:fld>
             <a:endParaRPr lang="fr-FR"/>
           </a:p>
@@ -3559,7 +3560,7 @@
           <a:p>
             <a:fld id="{4E51AFDA-D128-4B68-A211-269E2451E5DE}" type="datetimeFigureOut">
               <a:rPr lang="fr-FR" smtClean="0"/>
-              <a:t>11/04/2026</a:t>
+              <a:t>12/04/2026</a:t>
             </a:fld>
             <a:endParaRPr lang="fr-FR"/>
           </a:p>
@@ -7137,7 +7138,7 @@
                         <a:latin typeface="Cambria Math" panose="02040503050406030204" pitchFamily="18" charset="0"/>
                         <a:sym typeface="Wingdings" panose="05000000000000000000" pitchFamily="2" charset="2"/>
                       </a:rPr>
-                      <m:t>h</m:t>
+                      <m:t>r</m:t>
                     </m:r>
                     <m:r>
                       <a:rPr lang="fr-FR" b="0" i="1" smtClean="0">
@@ -7287,7 +7288,7 @@
                         <a:latin typeface="Cambria Math" panose="02040503050406030204" pitchFamily="18" charset="0"/>
                         <a:sym typeface="Wingdings" panose="05000000000000000000" pitchFamily="2" charset="2"/>
                       </a:rPr>
-                      <m:t>h</m:t>
+                      <m:t>r</m:t>
                     </m:r>
                     <m:r>
                       <a:rPr lang="fr-FR" b="0" i="1" smtClean="0">
@@ -7643,8 +7644,8 @@
         </p:blipFill>
         <p:spPr>
           <a:xfrm>
-            <a:off x="8548852" y="4120909"/>
-            <a:ext cx="3239085" cy="2429314"/>
+            <a:off x="7722504" y="3146976"/>
+            <a:ext cx="4330546" cy="3247910"/>
           </a:xfrm>
           <a:prstGeom prst="rect">
             <a:avLst/>
@@ -7704,7 +7705,7 @@
           <a:p>
             <a:r>
               <a:rPr lang="fr-FR" dirty="0"/>
-              <a:t>Validation - erreur expérimentale :</a:t>
+              <a:t>Validation - erreur simulation :</a:t>
             </a:r>
             <a:endParaRPr lang="en-US" dirty="0"/>
           </a:p>
@@ -7740,44 +7741,8 @@
         </p:blipFill>
         <p:spPr>
           <a:xfrm>
-            <a:off x="8036455" y="1279180"/>
+            <a:off x="8036454" y="365125"/>
             <a:ext cx="4060801" cy="3045601"/>
-          </a:xfrm>
-          <a:prstGeom prst="rect">
-            <a:avLst/>
-          </a:prstGeom>
-        </p:spPr>
-      </p:pic>
-      <p:pic>
-        <p:nvPicPr>
-          <p:cNvPr id="9" name="Picture 8">
-            <a:extLst>
-              <a:ext uri="{FF2B5EF4-FFF2-40B4-BE49-F238E27FC236}">
-                <a16:creationId xmlns:a16="http://schemas.microsoft.com/office/drawing/2014/main" id="{BD4F830D-AEB1-FC20-2BEA-EE909DD91100}"/>
-              </a:ext>
-            </a:extLst>
-          </p:cNvPr>
-          <p:cNvPicPr>
-            <a:picLocks noChangeAspect="1"/>
-          </p:cNvPicPr>
-          <p:nvPr/>
-        </p:nvPicPr>
-        <p:blipFill>
-          <a:blip r:embed="rId3">
-            <a:extLst>
-              <a:ext uri="{28A0092B-C50C-407E-A947-70E740481C1C}">
-                <a14:useLocalDpi xmlns:a14="http://schemas.microsoft.com/office/drawing/2010/main" val="0"/>
-              </a:ext>
-            </a:extLst>
-          </a:blip>
-          <a:stretch>
-            <a:fillRect/>
-          </a:stretch>
-        </p:blipFill>
-        <p:spPr>
-          <a:xfrm>
-            <a:off x="8399409" y="4324781"/>
-            <a:ext cx="3334892" cy="2858480"/>
           </a:xfrm>
           <a:prstGeom prst="rect">
             <a:avLst/>
@@ -7800,8 +7765,8 @@
             </p:nvSpPr>
             <p:spPr>
               <a:xfrm>
-                <a:off x="838200" y="1968560"/>
-                <a:ext cx="6614160" cy="5324919"/>
+                <a:off x="463497" y="1690688"/>
+                <a:ext cx="4512524" cy="3929858"/>
               </a:xfrm>
               <a:prstGeom prst="rect">
                 <a:avLst/>
@@ -7815,39 +7780,34 @@
               <a:lstStyle/>
               <a:p>
                 <a:r>
-                  <a:rPr lang="fr-FR" dirty="0"/>
+                  <a:rPr lang="fr-FR" sz="2400" dirty="0"/>
                   <a:t>Comparaison des champs de température pour </a:t>
                 </a:r>
                 <a:r>
-                  <a:rPr lang="fr-FR" dirty="0" err="1"/>
+                  <a:rPr lang="fr-FR" sz="2400" dirty="0" err="1"/>
                   <a:t>t</a:t>
                 </a:r>
                 <a:r>
-                  <a:rPr lang="fr-FR" baseline="-25000" dirty="0" err="1"/>
+                  <a:rPr lang="fr-FR" sz="2400" baseline="-25000" dirty="0" err="1"/>
                   <a:t>fin</a:t>
                 </a:r>
                 <a:r>
-                  <a:rPr lang="fr-FR" baseline="-25000" dirty="0"/>
+                  <a:rPr lang="fr-FR" sz="2400" baseline="-25000" dirty="0"/>
                   <a:t> </a:t>
                 </a:r>
                 <a:r>
-                  <a:rPr lang="fr-FR" dirty="0"/>
+                  <a:rPr lang="fr-FR" sz="2400" dirty="0"/>
                   <a:t>= 600s</a:t>
                 </a:r>
               </a:p>
               <a:p>
-                <a:endParaRPr lang="fr-FR" dirty="0"/>
+                <a:endParaRPr lang="fr-FR" sz="2400" dirty="0"/>
               </a:p>
               <a:p>
-                <a:endParaRPr lang="fr-FR" dirty="0"/>
+                <a:endParaRPr lang="fr-FR" sz="2400" dirty="0"/>
               </a:p>
               <a:p>
-                <a:endParaRPr lang="fr-FR" dirty="0"/>
-              </a:p>
-              <a:p>
-                <a:endParaRPr lang="fr-FR" dirty="0"/>
-              </a:p>
-              <a:p>
+                <a:pPr/>
                 <a14:m>
                   <m:oMathPara xmlns:m="http://schemas.openxmlformats.org/officeDocument/2006/math">
                     <m:oMathParaPr>
@@ -7857,14 +7817,14 @@
                       <m:sSub>
                         <m:sSubPr>
                           <m:ctrlPr>
-                            <a:rPr lang="fr-FR" b="0" i="1" smtClean="0">
+                            <a:rPr lang="fr-FR" sz="2400" b="0" i="1" smtClean="0">
                               <a:latin typeface="Cambria Math" panose="02040503050406030204" pitchFamily="18" charset="0"/>
                             </a:rPr>
                           </m:ctrlPr>
                         </m:sSubPr>
                         <m:e>
                           <m:r>
-                            <a:rPr lang="fr-FR" b="0" i="1" smtClean="0">
+                            <a:rPr lang="fr-FR" sz="2400" b="0" i="1" smtClean="0">
                               <a:latin typeface="Cambria Math" panose="02040503050406030204" pitchFamily="18" charset="0"/>
                             </a:rPr>
                             <m:t>𝐸</m:t>
@@ -7874,14 +7834,14 @@
                           <m:sSub>
                             <m:sSubPr>
                               <m:ctrlPr>
-                                <a:rPr lang="fr-FR" b="0" i="1" smtClean="0">
+                                <a:rPr lang="fr-FR" sz="2400" b="0" i="1" smtClean="0">
                                   <a:latin typeface="Cambria Math" panose="02040503050406030204" pitchFamily="18" charset="0"/>
                                 </a:rPr>
                               </m:ctrlPr>
                             </m:sSubPr>
                             <m:e>
                               <m:r>
-                                <a:rPr lang="fr-FR" b="0" i="1" smtClean="0">
+                                <a:rPr lang="fr-FR" sz="2400" b="0" i="1" smtClean="0">
                                   <a:latin typeface="Cambria Math" panose="02040503050406030204" pitchFamily="18" charset="0"/>
                                 </a:rPr>
                                 <m:t>𝐿</m:t>
@@ -7889,7 +7849,7 @@
                             </m:e>
                             <m:sub>
                               <m:r>
-                                <a:rPr lang="fr-FR" b="0" i="1" smtClean="0">
+                                <a:rPr lang="fr-FR" sz="2400" b="0" i="1" smtClean="0">
                                   <a:latin typeface="Cambria Math" panose="02040503050406030204" pitchFamily="18" charset="0"/>
                                 </a:rPr>
                                 <m:t>2</m:t>
@@ -7899,7 +7859,7 @@
                         </m:sub>
                       </m:sSub>
                       <m:r>
-                        <a:rPr lang="fr-FR" b="0" i="1" smtClean="0">
+                        <a:rPr lang="fr-FR" sz="2400" b="0" i="1" smtClean="0">
                           <a:latin typeface="Cambria Math" panose="02040503050406030204" pitchFamily="18" charset="0"/>
                         </a:rPr>
                         <m:t>=</m:t>
@@ -7908,7 +7868,7 @@
                         <m:radPr>
                           <m:degHide m:val="on"/>
                           <m:ctrlPr>
-                            <a:rPr lang="fr-FR" b="0" i="1" smtClean="0">
+                            <a:rPr lang="fr-FR" sz="2400" b="0" i="1" smtClean="0">
                               <a:latin typeface="Cambria Math" panose="02040503050406030204" pitchFamily="18" charset="0"/>
                             </a:rPr>
                           </m:ctrlPr>
@@ -7918,14 +7878,14 @@
                           <m:f>
                             <m:fPr>
                               <m:ctrlPr>
-                                <a:rPr lang="fr-FR" i="1">
+                                <a:rPr lang="fr-FR" sz="2400" i="1">
                                   <a:latin typeface="Cambria Math" panose="02040503050406030204" pitchFamily="18" charset="0"/>
                                 </a:rPr>
                               </m:ctrlPr>
                             </m:fPr>
                             <m:num>
                               <m:r>
-                                <a:rPr lang="fr-FR" i="1">
+                                <a:rPr lang="fr-FR" sz="2400" i="1">
                                   <a:latin typeface="Cambria Math" panose="02040503050406030204" pitchFamily="18" charset="0"/>
                                 </a:rPr>
                                 <m:t>1</m:t>
@@ -7936,7 +7896,7 @@
                                 <m:rPr>
                                   <m:sty m:val="p"/>
                                 </m:rPr>
-                                <a:rPr lang="fr-FR" i="1">
+                                <a:rPr lang="fr-FR" sz="2400" i="1">
                                   <a:latin typeface="Cambria Math" panose="02040503050406030204" pitchFamily="18" charset="0"/>
                                 </a:rPr>
                                 <m:t>N</m:t>
@@ -7947,34 +7907,28 @@
                             <m:naryPr>
                               <m:chr m:val="∑"/>
                               <m:ctrlPr>
-                                <a:rPr lang="fr-FR" i="1">
+                                <a:rPr lang="fr-FR" sz="2400" i="1">
                                   <a:latin typeface="Cambria Math" panose="02040503050406030204" pitchFamily="18" charset="0"/>
                                 </a:rPr>
                               </m:ctrlPr>
                             </m:naryPr>
                             <m:sub>
                               <m:r>
-                                <a:rPr lang="fr-FR" i="1">
+                                <a:rPr lang="fr-FR" sz="2400" i="1">
                                   <a:latin typeface="Cambria Math" panose="02040503050406030204" pitchFamily="18" charset="0"/>
                                 </a:rPr>
                                 <m:t>𝑖</m:t>
                               </m:r>
                               <m:r>
-                                <a:rPr lang="fr-FR" i="1">
+                                <a:rPr lang="fr-FR" sz="2400" i="1">
                                   <a:latin typeface="Cambria Math" panose="02040503050406030204" pitchFamily="18" charset="0"/>
                                 </a:rPr>
-                                <m:t>=</m:t>
-                              </m:r>
-                              <m:r>
-                                <a:rPr lang="fr-FR" i="1">
-                                  <a:latin typeface="Cambria Math" panose="02040503050406030204" pitchFamily="18" charset="0"/>
-                                </a:rPr>
-                                <m:t>1</m:t>
+                                <m:t>=1</m:t>
                               </m:r>
                             </m:sub>
                             <m:sup>
                               <m:r>
-                                <a:rPr lang="fr-FR" i="1">
+                                <a:rPr lang="fr-FR" sz="2400" i="1">
                                   <a:latin typeface="Cambria Math" panose="02040503050406030204" pitchFamily="18" charset="0"/>
                                 </a:rPr>
                                 <m:t>𝑁</m:t>
@@ -7984,7 +7938,7 @@
                               <m:sSup>
                                 <m:sSupPr>
                                   <m:ctrlPr>
-                                    <a:rPr lang="fr-FR" i="1">
+                                    <a:rPr lang="fr-FR" sz="2400" i="1">
                                       <a:latin typeface="Cambria Math" panose="02040503050406030204" pitchFamily="18" charset="0"/>
                                     </a:rPr>
                                   </m:ctrlPr>
@@ -7993,7 +7947,7 @@
                                   <m:d>
                                     <m:dPr>
                                       <m:ctrlPr>
-                                        <a:rPr lang="fr-FR" i="1">
+                                        <a:rPr lang="fr-FR" sz="2400" i="1">
                                           <a:latin typeface="Cambria Math" panose="02040503050406030204" pitchFamily="18" charset="0"/>
                                         </a:rPr>
                                       </m:ctrlPr>
@@ -8002,14 +7956,14 @@
                                       <m:sSub>
                                         <m:sSubPr>
                                           <m:ctrlPr>
-                                            <a:rPr lang="fr-FR" i="1">
+                                            <a:rPr lang="fr-FR" sz="2400" b="0" i="1" smtClean="0">
                                               <a:latin typeface="Cambria Math" panose="02040503050406030204" pitchFamily="18" charset="0"/>
                                             </a:rPr>
                                           </m:ctrlPr>
                                         </m:sSubPr>
                                         <m:e>
                                           <m:r>
-                                            <a:rPr lang="fr-FR" i="1">
+                                            <a:rPr lang="fr-FR" sz="2400" b="0" i="1" smtClean="0">
                                               <a:latin typeface="Cambria Math" panose="02040503050406030204" pitchFamily="18" charset="0"/>
                                             </a:rPr>
                                             <m:t>𝑦</m:t>
@@ -8017,19 +7971,19 @@
                                         </m:e>
                                         <m:sub>
                                           <m:r>
-                                            <a:rPr lang="fr-FR" i="1">
+                                            <a:rPr lang="fr-FR" sz="2400" b="0" i="1" smtClean="0">
                                               <a:latin typeface="Cambria Math" panose="02040503050406030204" pitchFamily="18" charset="0"/>
                                             </a:rPr>
-                                            <m:t>𝑒</m:t>
+                                            <m:t>𝑚</m:t>
                                           </m:r>
                                           <m:r>
-                                            <a:rPr lang="fr-FR" i="1">
+                                            <a:rPr lang="fr-FR" sz="2400" b="0" i="1" smtClean="0">
                                               <a:latin typeface="Cambria Math" panose="02040503050406030204" pitchFamily="18" charset="0"/>
                                             </a:rPr>
                                             <m:t>,</m:t>
                                           </m:r>
                                           <m:r>
-                                            <a:rPr lang="fr-FR" i="1">
+                                            <a:rPr lang="fr-FR" sz="2400" b="0" i="1" smtClean="0">
                                               <a:latin typeface="Cambria Math" panose="02040503050406030204" pitchFamily="18" charset="0"/>
                                             </a:rPr>
                                             <m:t>𝑖</m:t>
@@ -8037,35 +7991,54 @@
                                         </m:sub>
                                       </m:sSub>
                                       <m:r>
-                                        <a:rPr lang="fr-FR" i="1">
+                                        <a:rPr lang="fr-FR" sz="2400" i="1">
                                           <a:latin typeface="Cambria Math" panose="02040503050406030204" pitchFamily="18" charset="0"/>
                                         </a:rPr>
                                         <m:t>−</m:t>
                                       </m:r>
-                                      <m:r>
-                                        <a:rPr lang="fr-FR" i="1">
-                                          <a:latin typeface="Cambria Math" panose="02040503050406030204" pitchFamily="18" charset="0"/>
-                                        </a:rPr>
-                                        <m:t>𝑦𝑚</m:t>
-                                      </m:r>
-                                      <m:r>
-                                        <a:rPr lang="fr-FR" i="1">
-                                          <a:latin typeface="Cambria Math" panose="02040503050406030204" pitchFamily="18" charset="0"/>
-                                        </a:rPr>
-                                        <m:t>,</m:t>
-                                      </m:r>
-                                      <m:r>
-                                        <a:rPr lang="fr-FR" i="1">
-                                          <a:latin typeface="Cambria Math" panose="02040503050406030204" pitchFamily="18" charset="0"/>
-                                        </a:rPr>
-                                        <m:t>𝑖</m:t>
-                                      </m:r>
+                                      <m:sSub>
+                                        <m:sSubPr>
+                                          <m:ctrlPr>
+                                            <a:rPr lang="fr-FR" sz="2400" i="1">
+                                              <a:latin typeface="Cambria Math" panose="02040503050406030204" pitchFamily="18" charset="0"/>
+                                            </a:rPr>
+                                          </m:ctrlPr>
+                                        </m:sSubPr>
+                                        <m:e>
+                                          <m:r>
+                                            <a:rPr lang="fr-FR" sz="2400" i="1">
+                                              <a:latin typeface="Cambria Math" panose="02040503050406030204" pitchFamily="18" charset="0"/>
+                                            </a:rPr>
+                                            <m:t>𝑦</m:t>
+                                          </m:r>
+                                        </m:e>
+                                        <m:sub>
+                                          <m:r>
+                                            <a:rPr lang="fr-FR" sz="2400" i="1">
+                                              <a:latin typeface="Cambria Math" panose="02040503050406030204" pitchFamily="18" charset="0"/>
+                                            </a:rPr>
+                                            <m:t>𝑒</m:t>
+                                          </m:r>
+                                          <m:r>
+                                            <a:rPr lang="fr-FR" sz="2400" i="1">
+                                              <a:latin typeface="Cambria Math" panose="02040503050406030204" pitchFamily="18" charset="0"/>
+                                            </a:rPr>
+                                            <m:t>,</m:t>
+                                          </m:r>
+                                          <m:r>
+                                            <a:rPr lang="fr-FR" sz="2400" i="1">
+                                              <a:latin typeface="Cambria Math" panose="02040503050406030204" pitchFamily="18" charset="0"/>
+                                            </a:rPr>
+                                            <m:t>𝑖</m:t>
+                                          </m:r>
+                                        </m:sub>
+                                      </m:sSub>
                                     </m:e>
                                   </m:d>
                                 </m:e>
                                 <m:sup>
                                   <m:r>
-                                    <a:rPr lang="fr-FR" i="1">
+                                    <a:rPr lang="fr-FR" sz="2400" i="1">
                                       <a:latin typeface="Cambria Math" panose="02040503050406030204" pitchFamily="18" charset="0"/>
                                     </a:rPr>
                                     <m:t>2</m:t>
@@ -8076,40 +8049,51 @@
                           </m:nary>
                         </m:e>
                       </m:rad>
+                      <m:r>
+                        <a:rPr lang="fr-FR" sz="2400" b="0" i="1" smtClean="0">
+                          <a:latin typeface="Cambria Math" panose="02040503050406030204" pitchFamily="18" charset="0"/>
+                        </a:rPr>
+                        <m:t>= 11.8 </m:t>
+                      </m:r>
+                      <m:r>
+                        <a:rPr lang="fr-FR" sz="2400" b="0" i="1" smtClean="0">
+                          <a:latin typeface="Cambria Math" panose="02040503050406030204" pitchFamily="18" charset="0"/>
+                        </a:rPr>
+                        <m:t>𝐾</m:t>
+                      </m:r>
                     </m:oMath>
                   </m:oMathPara>
                 </a14:m>
-                <a:endParaRPr lang="fr-FR" dirty="0"/>
+                <a:endParaRPr lang="fr-FR" sz="2400" dirty="0"/>
               </a:p>
               <a:p>
                 <a:endParaRPr lang="fr-FR" dirty="0"/>
               </a:p>
               <a:p>
-                <a:endParaRPr lang="fr-FR" dirty="0"/>
-              </a:p>
-              <a:p>
-                <a:endParaRPr lang="fr-FR" dirty="0"/>
-              </a:p>
-              <a:p>
-                <a:endParaRPr lang="fr-FR" dirty="0"/>
-              </a:p>
-              <a:p>
-                <a:endParaRPr lang="fr-FR" dirty="0"/>
-              </a:p>
-              <a:p>
-                <a:endParaRPr lang="fr-FR" dirty="0"/>
-              </a:p>
-              <a:p>
-                <a:endParaRPr lang="fr-FR" dirty="0"/>
-              </a:p>
-              <a:p>
-                <a:endParaRPr lang="fr-FR" dirty="0"/>
-              </a:p>
-              <a:p>
-                <a:endParaRPr lang="fr-FR" dirty="0"/>
-              </a:p>
-              <a:p>
-                <a:endParaRPr lang="en-US" dirty="0"/>
+                <a:r>
+                  <a:rPr lang="en-US" dirty="0" err="1"/>
+                  <a:t>Calculer</a:t>
+                </a:r>
+                <a:r>
+                  <a:rPr lang="en-US" dirty="0"/>
+                  <a:t> pour 4 </a:t>
+                </a:r>
+                <a:r>
+                  <a:rPr lang="en-US" dirty="0" err="1"/>
+                  <a:t>valeurs</a:t>
+                </a:r>
+                <a:r>
+                  <a:rPr lang="en-US" dirty="0"/>
+                  <a:t> de </a:t>
+                </a:r>
+                <a:r>
+                  <a:rPr lang="en-US" dirty="0" err="1"/>
+                  <a:t>températures</a:t>
+                </a:r>
+                <a:r>
+                  <a:rPr lang="en-US" dirty="0"/>
+                  <a:t> </a:t>
+                </a:r>
               </a:p>
             </p:txBody>
           </p:sp>
@@ -8131,16 +8115,16 @@
             </p:nvSpPr>
             <p:spPr>
               <a:xfrm>
-                <a:off x="838200" y="1968560"/>
-                <a:ext cx="6614160" cy="5324919"/>
+                <a:off x="463497" y="1690688"/>
+                <a:ext cx="4512524" cy="3929858"/>
               </a:xfrm>
               <a:prstGeom prst="rect">
                 <a:avLst/>
               </a:prstGeom>
               <a:blipFill>
-                <a:blip r:embed="rId4"/>
+                <a:blip r:embed="rId3"/>
                 <a:stretch>
-                  <a:fillRect l="-829" t="-573"/>
+                  <a:fillRect l="-2027" t="-1240" b="-1550"/>
                 </a:stretch>
               </a:blipFill>
             </p:spPr>
@@ -8159,6 +8143,774 @@
           </p:sp>
         </mc:Fallback>
       </mc:AlternateContent>
+      <mc:AlternateContent xmlns:mc="http://schemas.openxmlformats.org/markup-compatibility/2006">
+        <mc:Choice xmlns:a14="http://schemas.microsoft.com/office/drawing/2010/main" Requires="a14">
+          <p:sp>
+            <p:nvSpPr>
+              <p:cNvPr id="3" name="TextBox 2">
+                <a:extLst>
+                  <a:ext uri="{FF2B5EF4-FFF2-40B4-BE49-F238E27FC236}">
+                    <a16:creationId xmlns:a16="http://schemas.microsoft.com/office/drawing/2014/main" id="{827367D0-BA41-060B-521D-6283AD7D3C1F}"/>
+                  </a:ext>
+                </a:extLst>
+              </p:cNvPr>
+              <p:cNvSpPr txBox="1"/>
+              <p:nvPr/>
+            </p:nvSpPr>
+            <p:spPr>
+              <a:xfrm>
+                <a:off x="5350724" y="1396545"/>
+                <a:ext cx="2496875" cy="2308324"/>
+              </a:xfrm>
+              <a:prstGeom prst="rect">
+                <a:avLst/>
+              </a:prstGeom>
+              <a:noFill/>
+            </p:spPr>
+            <p:txBody>
+              <a:bodyPr wrap="square" rtlCol="0">
+                <a:spAutoFit/>
+              </a:bodyPr>
+              <a:lstStyle/>
+              <a:p>
+                <a:r>
+                  <a:rPr lang="fr-FR" b="0" dirty="0">
+                    <a:latin typeface="Cambria Math" panose="02040503050406030204" pitchFamily="18" charset="0"/>
+                  </a:rPr>
+                  <a:t>Paramètres utilisés : </a:t>
+                </a:r>
+              </a:p>
+              <a:p>
+                <a:endParaRPr lang="fr-FR" i="1" dirty="0">
+                  <a:latin typeface="Cambria Math" panose="02040503050406030204" pitchFamily="18" charset="0"/>
+                </a:endParaRPr>
+              </a:p>
+              <a:p>
+                <a14:m>
+                  <m:oMath xmlns:m="http://schemas.openxmlformats.org/officeDocument/2006/math">
+                    <m:r>
+                      <a:rPr lang="fr-FR" b="0" i="1" smtClean="0">
+                        <a:latin typeface="Cambria Math" panose="02040503050406030204" pitchFamily="18" charset="0"/>
+                      </a:rPr>
+                      <m:t>𝜌</m:t>
+                    </m:r>
+                    <m:r>
+                      <a:rPr lang="fr-FR" b="0" i="1" smtClean="0">
+                        <a:latin typeface="Cambria Math" panose="02040503050406030204" pitchFamily="18" charset="0"/>
+                      </a:rPr>
+                      <m:t>=7850 </m:t>
+                    </m:r>
+                    <m:r>
+                      <a:rPr lang="fr-FR" b="0" i="1" smtClean="0">
+                        <a:latin typeface="Cambria Math" panose="02040503050406030204" pitchFamily="18" charset="0"/>
+                      </a:rPr>
+                      <m:t>𝑘𝑔</m:t>
+                    </m:r>
+                    <m:r>
+                      <m:rPr>
+                        <m:lit/>
+                      </m:rPr>
+                      <a:rPr lang="fr-FR" b="0" i="1" smtClean="0">
+                        <a:latin typeface="Cambria Math" panose="02040503050406030204" pitchFamily="18" charset="0"/>
+                      </a:rPr>
+                      <m:t>/</m:t>
+                    </m:r>
+                    <m:sSup>
+                      <m:sSupPr>
+                        <m:ctrlPr>
+                          <a:rPr lang="fr-FR" b="0" i="1" smtClean="0">
+                            <a:latin typeface="Cambria Math" panose="02040503050406030204" pitchFamily="18" charset="0"/>
+                          </a:rPr>
+                        </m:ctrlPr>
+                      </m:sSupPr>
+                      <m:e>
+                        <m:r>
+                          <a:rPr lang="fr-FR" b="0" i="1" smtClean="0">
+                            <a:latin typeface="Cambria Math" panose="02040503050406030204" pitchFamily="18" charset="0"/>
+                          </a:rPr>
+                          <m:t>𝑚</m:t>
+                        </m:r>
+                      </m:e>
+                      <m:sup>
+                        <m:r>
+                          <a:rPr lang="fr-FR" b="0" i="1" smtClean="0">
+                            <a:latin typeface="Cambria Math" panose="02040503050406030204" pitchFamily="18" charset="0"/>
+                          </a:rPr>
+                          <m:t>3</m:t>
+                        </m:r>
+                      </m:sup>
+                    </m:sSup>
+                  </m:oMath>
+                </a14:m>
+                <a:r>
+                  <a:rPr lang="fr-FR" b="0" dirty="0"/>
+                  <a:t> </a:t>
+                </a:r>
+              </a:p>
+              <a:p>
+                <a14:m>
+                  <m:oMath xmlns:m="http://schemas.openxmlformats.org/officeDocument/2006/math">
+                    <m:r>
+                      <a:rPr lang="fr-FR" b="0" i="1" smtClean="0">
+                        <a:latin typeface="Cambria Math" panose="02040503050406030204" pitchFamily="18" charset="0"/>
+                      </a:rPr>
+                      <m:t>𝜀</m:t>
+                    </m:r>
+                    <m:r>
+                      <a:rPr lang="fr-FR" b="0" i="1" smtClean="0">
+                        <a:latin typeface="Cambria Math" panose="02040503050406030204" pitchFamily="18" charset="0"/>
+                      </a:rPr>
+                      <m:t>=0.525 </m:t>
+                    </m:r>
+                  </m:oMath>
+                </a14:m>
+                <a:r>
+                  <a:rPr lang="fr-FR" b="0" dirty="0"/>
+                  <a:t> </a:t>
+                </a:r>
+              </a:p>
+              <a:p>
+                <a14:m>
+                  <m:oMath xmlns:m="http://schemas.openxmlformats.org/officeDocument/2006/math">
+                    <m:r>
+                      <a:rPr lang="fr-FR" b="0" i="1" smtClean="0">
+                        <a:latin typeface="Cambria Math" panose="02040503050406030204" pitchFamily="18" charset="0"/>
+                      </a:rPr>
+                      <m:t>h</m:t>
+                    </m:r>
+                    <m:r>
+                      <a:rPr lang="fr-FR" b="0" i="1" smtClean="0">
+                        <a:latin typeface="Cambria Math" panose="02040503050406030204" pitchFamily="18" charset="0"/>
+                      </a:rPr>
+                      <m:t>=10</m:t>
+                    </m:r>
+                    <m:r>
+                      <m:rPr>
+                        <m:nor/>
+                      </m:rPr>
+                      <a:rPr lang="fr-FR" b="0" i="0" smtClean="0">
+                        <a:latin typeface="Cambria Math" panose="02040503050406030204" pitchFamily="18" charset="0"/>
+                      </a:rPr>
+                      <m:t> </m:t>
+                    </m:r>
+                    <m:r>
+                      <m:rPr>
+                        <m:nor/>
+                      </m:rPr>
+                      <a:rPr lang="en-US"/>
+                      <m:t>W</m:t>
+                    </m:r>
+                    <m:r>
+                      <m:rPr>
+                        <m:nor/>
+                      </m:rPr>
+                      <a:rPr lang="en-US"/>
+                      <m:t>/</m:t>
+                    </m:r>
+                    <m:sSup>
+                      <m:sSupPr>
+                        <m:ctrlPr>
+                          <a:rPr lang="fr-FR" b="0" i="1" smtClean="0">
+                            <a:latin typeface="Cambria Math" panose="02040503050406030204" pitchFamily="18" charset="0"/>
+                          </a:rPr>
+                        </m:ctrlPr>
+                      </m:sSupPr>
+                      <m:e>
+                        <m:r>
+                          <a:rPr lang="fr-FR" b="0" i="1" smtClean="0">
+                            <a:latin typeface="Cambria Math" panose="02040503050406030204" pitchFamily="18" charset="0"/>
+                          </a:rPr>
+                          <m:t>𝑚</m:t>
+                        </m:r>
+                      </m:e>
+                      <m:sup>
+                        <m:r>
+                          <a:rPr lang="fr-FR" b="0" i="1" smtClean="0">
+                            <a:latin typeface="Cambria Math" panose="02040503050406030204" pitchFamily="18" charset="0"/>
+                          </a:rPr>
+                          <m:t>2</m:t>
+                        </m:r>
+                      </m:sup>
+                    </m:sSup>
+                    <m:r>
+                      <a:rPr lang="fr-FR" b="0" i="1" smtClean="0"/>
+                      <m:t>⋅</m:t>
+                    </m:r>
+                    <m:r>
+                      <m:rPr>
+                        <m:sty m:val="p"/>
+                      </m:rPr>
+                      <a:rPr lang="fr-FR" b="0" i="1" smtClean="0">
+                        <a:latin typeface="Cambria Math" panose="02040503050406030204" pitchFamily="18" charset="0"/>
+                      </a:rPr>
+                      <m:t>K</m:t>
+                    </m:r>
+                  </m:oMath>
+                </a14:m>
+                <a:r>
+                  <a:rPr lang="en-US" dirty="0"/>
+                  <a:t> </a:t>
+                </a:r>
+              </a:p>
+              <a:p>
+                <a14:m>
+                  <m:oMath xmlns:m="http://schemas.openxmlformats.org/officeDocument/2006/math">
+                    <m:sSub>
+                      <m:sSubPr>
+                        <m:ctrlPr>
+                          <a:rPr lang="fr-FR" b="0" i="1" smtClean="0">
+                            <a:latin typeface="Cambria Math" panose="02040503050406030204" pitchFamily="18" charset="0"/>
+                          </a:rPr>
+                        </m:ctrlPr>
+                      </m:sSubPr>
+                      <m:e>
+                        <m:r>
+                          <a:rPr lang="fr-FR" b="0" i="1" smtClean="0">
+                            <a:latin typeface="Cambria Math" panose="02040503050406030204" pitchFamily="18" charset="0"/>
+                          </a:rPr>
+                          <m:t>𝑇</m:t>
+                        </m:r>
+                      </m:e>
+                      <m:sub>
+                        <m:r>
+                          <a:rPr lang="fr-FR" b="0" i="1" smtClean="0">
+                            <a:latin typeface="Cambria Math" panose="02040503050406030204" pitchFamily="18" charset="0"/>
+                          </a:rPr>
+                          <m:t>𝑖𝑛𝑖𝑡</m:t>
+                        </m:r>
+                      </m:sub>
+                    </m:sSub>
+                    <m:r>
+                      <a:rPr lang="fr-FR" b="0" i="1" smtClean="0">
+                        <a:latin typeface="Cambria Math" panose="02040503050406030204" pitchFamily="18" charset="0"/>
+                      </a:rPr>
+                      <m:t>=1118.15 </m:t>
+                    </m:r>
+                    <m:r>
+                      <m:rPr>
+                        <m:sty m:val="p"/>
+                      </m:rPr>
+                      <a:rPr lang="fr-FR" b="0" i="1" smtClean="0">
+                        <a:latin typeface="Cambria Math" panose="02040503050406030204" pitchFamily="18" charset="0"/>
+                      </a:rPr>
+                      <m:t>K</m:t>
+                    </m:r>
+                  </m:oMath>
+                </a14:m>
+                <a:r>
+                  <a:rPr lang="en-US" dirty="0"/>
+                  <a:t> </a:t>
+                </a:r>
+              </a:p>
+              <a:p>
+                <a14:m>
+                  <m:oMath xmlns:m="http://schemas.openxmlformats.org/officeDocument/2006/math">
+                    <m:sSub>
+                      <m:sSubPr>
+                        <m:ctrlPr>
+                          <a:rPr lang="fr-FR" b="0" i="1" smtClean="0">
+                            <a:latin typeface="Cambria Math" panose="02040503050406030204" pitchFamily="18" charset="0"/>
+                          </a:rPr>
+                        </m:ctrlPr>
+                      </m:sSubPr>
+                      <m:e>
+                        <m:r>
+                          <a:rPr lang="fr-FR" b="0" i="1" smtClean="0">
+                            <a:latin typeface="Cambria Math" panose="02040503050406030204" pitchFamily="18" charset="0"/>
+                          </a:rPr>
+                          <m:t>𝑇</m:t>
+                        </m:r>
+                      </m:e>
+                      <m:sub>
+                        <m:r>
+                          <a:rPr lang="fr-FR" b="0" i="1" smtClean="0">
+                            <a:latin typeface="Cambria Math" panose="02040503050406030204" pitchFamily="18" charset="0"/>
+                          </a:rPr>
+                          <m:t>𝑎𝑚𝑏𝑖𝑎𝑛𝑡</m:t>
+                        </m:r>
+                      </m:sub>
+                    </m:sSub>
+                    <m:r>
+                      <a:rPr lang="fr-FR" b="0" i="1" smtClean="0">
+                        <a:latin typeface="Cambria Math" panose="02040503050406030204" pitchFamily="18" charset="0"/>
+                      </a:rPr>
+                      <m:t>=298.15 </m:t>
+                    </m:r>
+                    <m:r>
+                      <m:rPr>
+                        <m:sty m:val="p"/>
+                      </m:rPr>
+                      <a:rPr lang="fr-FR" b="0" i="1" smtClean="0">
+                        <a:latin typeface="Cambria Math" panose="02040503050406030204" pitchFamily="18" charset="0"/>
+                      </a:rPr>
+                      <m:t>K</m:t>
+                    </m:r>
+                    <m:r>
+                      <a:rPr lang="fr-FR" b="0" i="1" smtClean="0">
+                        <a:latin typeface="Cambria Math" panose="02040503050406030204" pitchFamily="18" charset="0"/>
+                      </a:rPr>
+                      <m:t> </m:t>
+                    </m:r>
+                  </m:oMath>
+                </a14:m>
+                <a:r>
+                  <a:rPr lang="en-US" dirty="0"/>
+                  <a:t> </a:t>
+                </a:r>
+              </a:p>
+              <a:p>
+                <a14:m>
+                  <m:oMath xmlns:m="http://schemas.openxmlformats.org/officeDocument/2006/math">
+                    <m:r>
+                      <a:rPr lang="fr-FR" b="0" i="1" smtClean="0">
+                        <a:latin typeface="Cambria Math" panose="02040503050406030204" pitchFamily="18" charset="0"/>
+                      </a:rPr>
+                      <m:t>𝑘</m:t>
+                    </m:r>
+                    <m:r>
+                      <a:rPr lang="fr-FR" b="0" i="1" smtClean="0">
+                        <a:latin typeface="Cambria Math" panose="02040503050406030204" pitchFamily="18" charset="0"/>
+                      </a:rPr>
+                      <m:t>=44.5</m:t>
+                    </m:r>
+                    <m:r>
+                      <a:rPr lang="fr-FR" b="0" i="1" smtClean="0">
+                        <a:latin typeface="Cambria Math" panose="02040503050406030204" pitchFamily="18" charset="0"/>
+                      </a:rPr>
+                      <m:t>𝑊</m:t>
+                    </m:r>
+                    <m:r>
+                      <m:rPr>
+                        <m:lit/>
+                      </m:rPr>
+                      <a:rPr lang="fr-FR" b="0" i="1" smtClean="0">
+                        <a:latin typeface="Cambria Math" panose="02040503050406030204" pitchFamily="18" charset="0"/>
+                      </a:rPr>
+                      <m:t>/</m:t>
+                    </m:r>
+                    <m:d>
+                      <m:dPr>
+                        <m:ctrlPr>
+                          <a:rPr lang="fr-FR" b="0" i="1" smtClean="0">
+                            <a:latin typeface="Cambria Math" panose="02040503050406030204" pitchFamily="18" charset="0"/>
+                          </a:rPr>
+                        </m:ctrlPr>
+                      </m:dPr>
+                      <m:e>
+                        <m:r>
+                          <a:rPr lang="fr-FR" b="0" i="1" smtClean="0">
+                            <a:latin typeface="Cambria Math" panose="02040503050406030204" pitchFamily="18" charset="0"/>
+                          </a:rPr>
+                          <m:t>𝑚</m:t>
+                        </m:r>
+                        <m:r>
+                          <a:rPr lang="fr-FR" b="0" i="1" smtClean="0">
+                            <a:latin typeface="Cambria Math" panose="02040503050406030204" pitchFamily="18" charset="0"/>
+                          </a:rPr>
+                          <m:t>⋅</m:t>
+                        </m:r>
+                        <m:r>
+                          <m:rPr>
+                            <m:sty m:val="p"/>
+                          </m:rPr>
+                          <a:rPr lang="fr-FR" b="0" i="1" smtClean="0">
+                            <a:latin typeface="Cambria Math" panose="02040503050406030204" pitchFamily="18" charset="0"/>
+                          </a:rPr>
+                          <m:t>K</m:t>
+                        </m:r>
+                      </m:e>
+                    </m:d>
+                  </m:oMath>
+                </a14:m>
+                <a:r>
+                  <a:rPr lang="en-US" dirty="0"/>
+                  <a:t> </a:t>
+                </a:r>
+              </a:p>
+            </p:txBody>
+          </p:sp>
+        </mc:Choice>
+        <mc:Fallback>
+          <p:sp>
+            <p:nvSpPr>
+              <p:cNvPr id="3" name="TextBox 2">
+                <a:extLst>
+                  <a:ext uri="{FF2B5EF4-FFF2-40B4-BE49-F238E27FC236}">
+                    <a16:creationId xmlns:a16="http://schemas.microsoft.com/office/drawing/2014/main" id="{827367D0-BA41-060B-521D-6283AD7D3C1F}"/>
+                  </a:ext>
+                </a:extLst>
+              </p:cNvPr>
+              <p:cNvSpPr txBox="1">
+                <a:spLocks noRot="1" noChangeAspect="1" noMove="1" noResize="1" noEditPoints="1" noAdjustHandles="1" noChangeArrowheads="1" noChangeShapeType="1" noTextEdit="1"/>
+              </p:cNvSpPr>
+              <p:nvPr/>
+            </p:nvSpPr>
+            <p:spPr>
+              <a:xfrm>
+                <a:off x="5350724" y="1396545"/>
+                <a:ext cx="2496875" cy="2308324"/>
+              </a:xfrm>
+              <a:prstGeom prst="rect">
+                <a:avLst/>
+              </a:prstGeom>
+              <a:blipFill>
+                <a:blip r:embed="rId4"/>
+                <a:stretch>
+                  <a:fillRect l="-2200" t="-1583" b="-3430"/>
+                </a:stretch>
+              </a:blipFill>
+            </p:spPr>
+            <p:txBody>
+              <a:bodyPr/>
+              <a:lstStyle/>
+              <a:p>
+                <a:r>
+                  <a:rPr lang="en-US">
+                    <a:noFill/>
+                  </a:rPr>
+                  <a:t> </a:t>
+                </a:r>
+              </a:p>
+            </p:txBody>
+          </p:sp>
+        </mc:Fallback>
+      </mc:AlternateContent>
+      <p:pic>
+        <p:nvPicPr>
+          <p:cNvPr id="12" name="Picture 11">
+            <a:extLst>
+              <a:ext uri="{FF2B5EF4-FFF2-40B4-BE49-F238E27FC236}">
+                <a16:creationId xmlns:a16="http://schemas.microsoft.com/office/drawing/2014/main" id="{044402B3-46AF-8558-B0C5-725A3070DC8C}"/>
+              </a:ext>
+            </a:extLst>
+          </p:cNvPr>
+          <p:cNvPicPr>
+            <a:picLocks noChangeAspect="1"/>
+          </p:cNvPicPr>
+          <p:nvPr/>
+        </p:nvPicPr>
+        <p:blipFill>
+          <a:blip r:embed="rId5">
+            <a:extLst>
+              <a:ext uri="{28A0092B-C50C-407E-A947-70E740481C1C}">
+                <a14:useLocalDpi xmlns:a14="http://schemas.microsoft.com/office/drawing/2010/main" val="0"/>
+              </a:ext>
+            </a:extLst>
+          </a:blip>
+          <a:stretch>
+            <a:fillRect/>
+          </a:stretch>
+        </p:blipFill>
+        <p:spPr>
+          <a:xfrm>
+            <a:off x="11198017" y="3971427"/>
+            <a:ext cx="899238" cy="2743438"/>
+          </a:xfrm>
+          <a:prstGeom prst="rect">
+            <a:avLst/>
+          </a:prstGeom>
+        </p:spPr>
+      </p:pic>
+      <mc:AlternateContent xmlns:mc="http://schemas.openxmlformats.org/markup-compatibility/2006">
+        <mc:Choice xmlns:a14="http://schemas.microsoft.com/office/drawing/2010/main" Requires="a14">
+          <p:sp>
+            <p:nvSpPr>
+              <p:cNvPr id="4" name="TextBox 3">
+                <a:extLst>
+                  <a:ext uri="{FF2B5EF4-FFF2-40B4-BE49-F238E27FC236}">
+                    <a16:creationId xmlns:a16="http://schemas.microsoft.com/office/drawing/2014/main" id="{F816710B-426E-2FF9-80BD-3E520DDC9AF1}"/>
+                  </a:ext>
+                </a:extLst>
+              </p:cNvPr>
+              <p:cNvSpPr txBox="1"/>
+              <p:nvPr/>
+            </p:nvSpPr>
+            <p:spPr>
+              <a:xfrm>
+                <a:off x="5350724" y="4465983"/>
+                <a:ext cx="1920240" cy="1754326"/>
+              </a:xfrm>
+              <a:prstGeom prst="rect">
+                <a:avLst/>
+              </a:prstGeom>
+              <a:noFill/>
+            </p:spPr>
+            <p:txBody>
+              <a:bodyPr wrap="square" rtlCol="0">
+                <a:spAutoFit/>
+              </a:bodyPr>
+              <a:lstStyle/>
+              <a:p>
+                <a:pPr/>
+                <a:r>
+                  <a:rPr lang="fr-FR" b="0" i="0" dirty="0">
+                    <a:latin typeface="Cambria Math" panose="02040503050406030204" pitchFamily="18" charset="0"/>
+                  </a:rPr>
+                  <a:t>Modèle python : </a:t>
+                </a:r>
+              </a:p>
+              <a:p>
+                <a:pPr/>
+                <a14:m>
+                  <m:oMathPara xmlns:m="http://schemas.openxmlformats.org/officeDocument/2006/math">
+                    <m:oMathParaPr>
+                      <m:jc m:val="left"/>
+                    </m:oMathParaPr>
+                    <m:oMath xmlns:m="http://schemas.openxmlformats.org/officeDocument/2006/math">
+                      <m:r>
+                        <a:rPr lang="fr-FR" b="0" i="1" smtClean="0">
+                          <a:latin typeface="Cambria Math" panose="02040503050406030204" pitchFamily="18" charset="0"/>
+                        </a:rPr>
+                        <m:t>𝑛</m:t>
+                      </m:r>
+                      <m:r>
+                        <a:rPr lang="fr-FR" b="0" i="1" baseline="-25000" smtClean="0">
+                          <a:latin typeface="Cambria Math" panose="02040503050406030204" pitchFamily="18" charset="0"/>
+                        </a:rPr>
+                        <m:t>𝑟</m:t>
+                      </m:r>
+                      <m:r>
+                        <a:rPr lang="fr-FR" b="0" i="1" smtClean="0">
+                          <a:latin typeface="Cambria Math" panose="02040503050406030204" pitchFamily="18" charset="0"/>
+                        </a:rPr>
+                        <m:t> = </m:t>
+                      </m:r>
+                      <m:r>
+                        <a:rPr lang="fr-FR" b="0" i="1" smtClean="0">
+                          <a:latin typeface="Cambria Math" panose="02040503050406030204" pitchFamily="18" charset="0"/>
+                        </a:rPr>
+                        <m:t>𝑛𝑧</m:t>
+                      </m:r>
+                      <m:r>
+                        <a:rPr lang="fr-FR" b="0" i="1" smtClean="0">
+                          <a:latin typeface="Cambria Math" panose="02040503050406030204" pitchFamily="18" charset="0"/>
+                        </a:rPr>
+                        <m:t> = 20</m:t>
+                      </m:r>
+                    </m:oMath>
+                  </m:oMathPara>
+                </a14:m>
+                <a:endParaRPr lang="fr-FR" b="0" i="0" dirty="0">
+                  <a:latin typeface="Cambria Math" panose="02040503050406030204" pitchFamily="18" charset="0"/>
+                </a:endParaRPr>
+              </a:p>
+              <a:p>
+                <a:pPr/>
+                <a14:m>
+                  <m:oMathPara xmlns:m="http://schemas.openxmlformats.org/officeDocument/2006/math">
+                    <m:oMathParaPr>
+                      <m:jc m:val="left"/>
+                    </m:oMathParaPr>
+                    <m:oMath xmlns:m="http://schemas.openxmlformats.org/officeDocument/2006/math">
+                      <m:r>
+                        <m:rPr>
+                          <m:sty m:val="p"/>
+                        </m:rPr>
+                        <a:rPr lang="fr-FR" b="0" i="1" smtClean="0">
+                          <a:latin typeface="Cambria Math" panose="02040503050406030204" pitchFamily="18" charset="0"/>
+                        </a:rPr>
+                        <m:t>dt</m:t>
+                      </m:r>
+                      <m:r>
+                        <a:rPr lang="fr-FR" b="0" i="1" smtClean="0">
+                          <a:latin typeface="Cambria Math" panose="02040503050406030204" pitchFamily="18" charset="0"/>
+                        </a:rPr>
+                        <m:t> = 0.025 </m:t>
+                      </m:r>
+                      <m:r>
+                        <m:rPr>
+                          <m:sty m:val="p"/>
+                        </m:rPr>
+                        <a:rPr lang="fr-FR" b="0" i="1" smtClean="0">
+                          <a:latin typeface="Cambria Math" panose="02040503050406030204" pitchFamily="18" charset="0"/>
+                        </a:rPr>
+                        <m:t>s</m:t>
+                      </m:r>
+                    </m:oMath>
+                  </m:oMathPara>
+                </a14:m>
+                <a:endParaRPr lang="fr-FR" b="0" i="0" dirty="0">
+                  <a:latin typeface="Cambria Math" panose="02040503050406030204" pitchFamily="18" charset="0"/>
+                </a:endParaRPr>
+              </a:p>
+              <a:p>
+                <a:pPr/>
+                <a:r>
+                  <a:rPr lang="fr-FR" b="0" i="0" dirty="0">
+                    <a:latin typeface="Cambria Math" panose="02040503050406030204" pitchFamily="18" charset="0"/>
+                  </a:rPr>
+                  <a:t>Simulation pour : </a:t>
+                </a:r>
+              </a:p>
+              <a:p>
+                <a:pPr/>
+                <a14:m>
+                  <m:oMathPara xmlns:m="http://schemas.openxmlformats.org/officeDocument/2006/math">
+                    <m:oMathParaPr>
+                      <m:jc m:val="left"/>
+                    </m:oMathParaPr>
+                    <m:oMath xmlns:m="http://schemas.openxmlformats.org/officeDocument/2006/math">
+                      <m:r>
+                        <m:rPr>
+                          <m:sty m:val="p"/>
+                        </m:rPr>
+                        <a:rPr lang="fr-FR" b="0" i="0" smtClean="0">
+                          <a:latin typeface="Cambria Math" panose="02040503050406030204" pitchFamily="18" charset="0"/>
+                        </a:rPr>
+                        <m:t>Δ</m:t>
+                      </m:r>
+                      <m:r>
+                        <a:rPr lang="fr-FR" b="0" i="1" smtClean="0">
+                          <a:latin typeface="Cambria Math" panose="02040503050406030204" pitchFamily="18" charset="0"/>
+                        </a:rPr>
+                        <m:t>𝑡</m:t>
+                      </m:r>
+                      <m:r>
+                        <a:rPr lang="fr-FR" b="0" i="1" smtClean="0">
+                          <a:latin typeface="Cambria Math" panose="02040503050406030204" pitchFamily="18" charset="0"/>
+                        </a:rPr>
+                        <m:t> =0.6 </m:t>
+                      </m:r>
+                      <m:r>
+                        <a:rPr lang="fr-FR" b="0" i="1" smtClean="0">
+                          <a:latin typeface="Cambria Math" panose="02040503050406030204" pitchFamily="18" charset="0"/>
+                        </a:rPr>
+                        <m:t>𝑠</m:t>
+                      </m:r>
+                      <m:r>
+                        <a:rPr lang="fr-FR" b="0" i="1" smtClean="0">
+                          <a:latin typeface="Cambria Math" panose="02040503050406030204" pitchFamily="18" charset="0"/>
+                        </a:rPr>
+                        <m:t> </m:t>
+                      </m:r>
+                    </m:oMath>
+                  </m:oMathPara>
+                </a14:m>
+                <a:endParaRPr lang="fr-FR" b="0" i="1" dirty="0">
+                  <a:latin typeface="Cambria Math" panose="02040503050406030204" pitchFamily="18" charset="0"/>
+                </a:endParaRPr>
+              </a:p>
+              <a:p>
+                <a:pPr/>
+                <a14:m>
+                  <m:oMathPara xmlns:m="http://schemas.openxmlformats.org/officeDocument/2006/math">
+                    <m:oMathParaPr>
+                      <m:jc m:val="left"/>
+                    </m:oMathParaPr>
+                    <m:oMath xmlns:m="http://schemas.openxmlformats.org/officeDocument/2006/math">
+                      <m:r>
+                        <m:rPr>
+                          <m:sty m:val="p"/>
+                        </m:rPr>
+                        <a:rPr lang="fr-FR" b="0" i="1" smtClean="0">
+                          <a:latin typeface="Cambria Math" panose="02040503050406030204" pitchFamily="18" charset="0"/>
+                        </a:rPr>
+                        <m:t>Te</m:t>
+                      </m:r>
+                      <m:r>
+                        <a:rPr lang="fr-FR" b="0" i="1" smtClean="0">
+                          <a:latin typeface="Cambria Math" panose="02040503050406030204" pitchFamily="18" charset="0"/>
+                        </a:rPr>
+                        <m:t> = 0.3 </m:t>
+                      </m:r>
+                      <m:r>
+                        <m:rPr>
+                          <m:sty m:val="p"/>
+                        </m:rPr>
+                        <a:rPr lang="fr-FR" b="0" i="1" smtClean="0">
+                          <a:latin typeface="Cambria Math" panose="02040503050406030204" pitchFamily="18" charset="0"/>
+                        </a:rPr>
+                        <m:t>cm</m:t>
+                      </m:r>
+                    </m:oMath>
+                  </m:oMathPara>
+                </a14:m>
+                <a:endParaRPr lang="en-US" dirty="0"/>
+              </a:p>
+            </p:txBody>
+          </p:sp>
+        </mc:Choice>
+        <mc:Fallback>
+          <p:sp>
+            <p:nvSpPr>
+              <p:cNvPr id="4" name="TextBox 3">
+                <a:extLst>
+                  <a:ext uri="{FF2B5EF4-FFF2-40B4-BE49-F238E27FC236}">
+                    <a16:creationId xmlns:a16="http://schemas.microsoft.com/office/drawing/2014/main" id="{F816710B-426E-2FF9-80BD-3E520DDC9AF1}"/>
+                  </a:ext>
+                </a:extLst>
+              </p:cNvPr>
+              <p:cNvSpPr txBox="1">
+                <a:spLocks noRot="1" noChangeAspect="1" noMove="1" noResize="1" noEditPoints="1" noAdjustHandles="1" noChangeArrowheads="1" noChangeShapeType="1" noTextEdit="1"/>
+              </p:cNvSpPr>
+              <p:nvPr/>
+            </p:nvSpPr>
+            <p:spPr>
+              <a:xfrm>
+                <a:off x="5350724" y="4465983"/>
+                <a:ext cx="1920240" cy="1754326"/>
+              </a:xfrm>
+              <a:prstGeom prst="rect">
+                <a:avLst/>
+              </a:prstGeom>
+              <a:blipFill>
+                <a:blip r:embed="rId6"/>
+                <a:stretch>
+                  <a:fillRect l="-2857" t="-2439" r="-2540"/>
+                </a:stretch>
+              </a:blipFill>
+            </p:spPr>
+            <p:txBody>
+              <a:bodyPr/>
+              <a:lstStyle/>
+              <a:p>
+                <a:r>
+                  <a:rPr lang="en-US">
+                    <a:noFill/>
+                  </a:rPr>
+                  <a:t> </a:t>
+                </a:r>
+              </a:p>
+            </p:txBody>
+          </p:sp>
+        </mc:Fallback>
+      </mc:AlternateContent>
+      <p:pic>
+        <p:nvPicPr>
+          <p:cNvPr id="14" name="Picture 13">
+            <a:extLst>
+              <a:ext uri="{FF2B5EF4-FFF2-40B4-BE49-F238E27FC236}">
+                <a16:creationId xmlns:a16="http://schemas.microsoft.com/office/drawing/2014/main" id="{766F6BA7-FB40-F5A0-46A1-686F83E06445}"/>
+              </a:ext>
+            </a:extLst>
+          </p:cNvPr>
+          <p:cNvPicPr>
+            <a:picLocks noChangeAspect="1"/>
+          </p:cNvPicPr>
+          <p:nvPr/>
+        </p:nvPicPr>
+        <p:blipFill>
+          <a:blip r:embed="rId7">
+            <a:extLst>
+              <a:ext uri="{28A0092B-C50C-407E-A947-70E740481C1C}">
+                <a14:useLocalDpi xmlns:a14="http://schemas.microsoft.com/office/drawing/2010/main" val="0"/>
+              </a:ext>
+            </a:extLst>
+          </a:blip>
+          <a:stretch>
+            <a:fillRect/>
+          </a:stretch>
+        </p:blipFill>
+        <p:spPr>
+          <a:xfrm>
+            <a:off x="8036454" y="3971427"/>
+            <a:ext cx="3035833" cy="2694622"/>
+          </a:xfrm>
+          <a:prstGeom prst="rect">
+            <a:avLst/>
+          </a:prstGeom>
+        </p:spPr>
+      </p:pic>
     </p:spTree>
     <p:extLst>
       <p:ext uri="{BB962C8B-B14F-4D97-AF65-F5344CB8AC3E}">
@@ -8212,14 +8964,14 @@
           <a:p>
             <a:r>
               <a:rPr lang="fr-FR" dirty="0"/>
-              <a:t>Validation – erreur expérimentale</a:t>
+              <a:t>Validation – incertitude expérimentale</a:t>
             </a:r>
             <a:endParaRPr lang="en-US" dirty="0"/>
           </a:p>
         </p:txBody>
       </p:sp>
-      <mc:AlternateContent xmlns:mc="http://schemas.openxmlformats.org/markup-compatibility/2006">
-        <mc:Choice xmlns:a14="http://schemas.microsoft.com/office/drawing/2010/main" Requires="a14">
+      <mc:AlternateContent xmlns:mc="http://schemas.openxmlformats.org/markup-compatibility/2006" xmlns:a14="http://schemas.microsoft.com/office/drawing/2010/main">
+        <mc:Choice Requires="a14">
           <p:sp>
             <p:nvSpPr>
               <p:cNvPr id="3" name="Content Placeholder 2">
@@ -8560,7 +9312,7 @@
             </p:txBody>
           </p:sp>
         </mc:Choice>
-        <mc:Fallback>
+        <mc:Fallback xmlns="">
           <p:sp>
             <p:nvSpPr>
               <p:cNvPr id="3" name="Content Placeholder 2">
@@ -8670,35 +9422,110 @@
           <a:chExt cx="0" cy="0"/>
         </a:xfrm>
       </p:grpSpPr>
-      <p:sp>
-        <p:nvSpPr>
-          <p:cNvPr id="2" name="Title 1">
-            <a:extLst>
-              <a:ext uri="{FF2B5EF4-FFF2-40B4-BE49-F238E27FC236}">
-                <a16:creationId xmlns:a16="http://schemas.microsoft.com/office/drawing/2014/main" id="{54C6E061-A18D-9828-5D8A-6DB04AFF154E}"/>
-              </a:ext>
-            </a:extLst>
-          </p:cNvPr>
-          <p:cNvSpPr>
-            <a:spLocks noGrp="1"/>
-          </p:cNvSpPr>
-          <p:nvPr>
-            <p:ph type="title"/>
-          </p:nvPr>
-        </p:nvSpPr>
-        <p:spPr/>
-        <p:txBody>
-          <a:bodyPr/>
-          <a:lstStyle/>
-          <a:p>
-            <a:r>
-              <a:rPr lang="fr-FR" dirty="0"/>
-              <a:t>Validation – erreur numérique</a:t>
-            </a:r>
-            <a:endParaRPr lang="en-US" dirty="0"/>
-          </a:p>
-        </p:txBody>
-      </p:sp>
+      <mc:AlternateContent xmlns:mc="http://schemas.openxmlformats.org/markup-compatibility/2006">
+        <mc:Choice xmlns:a14="http://schemas.microsoft.com/office/drawing/2010/main" Requires="a14">
+          <p:sp>
+            <p:nvSpPr>
+              <p:cNvPr id="2" name="Title 1">
+                <a:extLst>
+                  <a:ext uri="{FF2B5EF4-FFF2-40B4-BE49-F238E27FC236}">
+                    <a16:creationId xmlns:a16="http://schemas.microsoft.com/office/drawing/2014/main" id="{54C6E061-A18D-9828-5D8A-6DB04AFF154E}"/>
+                  </a:ext>
+                </a:extLst>
+              </p:cNvPr>
+              <p:cNvSpPr>
+                <a:spLocks noGrp="1"/>
+              </p:cNvSpPr>
+              <p:nvPr>
+                <p:ph type="title"/>
+              </p:nvPr>
+            </p:nvSpPr>
+            <p:spPr/>
+            <p:txBody>
+              <a:bodyPr/>
+              <a:lstStyle/>
+              <a:p>
+                <a:r>
+                  <a:rPr lang="fr-FR" dirty="0"/>
+                  <a:t>Validation – incertitude numérique </a:t>
+                </a:r>
+                <a14:m>
+                  <m:oMath xmlns:m="http://schemas.openxmlformats.org/officeDocument/2006/math">
+                    <m:sSub>
+                      <m:sSubPr>
+                        <m:ctrlPr>
+                          <a:rPr lang="fr-FR" b="0" i="1" smtClean="0">
+                            <a:latin typeface="Cambria Math" panose="02040503050406030204" pitchFamily="18" charset="0"/>
+                          </a:rPr>
+                        </m:ctrlPr>
+                      </m:sSubPr>
+                      <m:e>
+                        <m:r>
+                          <a:rPr lang="fr-FR" b="0" i="1" smtClean="0">
+                            <a:latin typeface="Cambria Math" panose="02040503050406030204" pitchFamily="18" charset="0"/>
+                          </a:rPr>
+                          <m:t>𝑢</m:t>
+                        </m:r>
+                      </m:e>
+                      <m:sub>
+                        <m:r>
+                          <m:rPr>
+                            <m:sty m:val="p"/>
+                          </m:rPr>
+                          <a:rPr lang="fr-FR" b="0" i="1" smtClean="0">
+                            <a:latin typeface="Cambria Math" panose="02040503050406030204" pitchFamily="18" charset="0"/>
+                          </a:rPr>
+                          <m:t>num</m:t>
+                        </m:r>
+                      </m:sub>
+                    </m:sSub>
+                  </m:oMath>
+                </a14:m>
+                <a:endParaRPr lang="en-US" dirty="0"/>
+              </a:p>
+            </p:txBody>
+          </p:sp>
+        </mc:Choice>
+        <mc:Fallback>
+          <p:sp>
+            <p:nvSpPr>
+              <p:cNvPr id="2" name="Title 1">
+                <a:extLst>
+                  <a:ext uri="{FF2B5EF4-FFF2-40B4-BE49-F238E27FC236}">
+                    <a16:creationId xmlns:a16="http://schemas.microsoft.com/office/drawing/2014/main" id="{54C6E061-A18D-9828-5D8A-6DB04AFF154E}"/>
+                  </a:ext>
+                </a:extLst>
+              </p:cNvPr>
+              <p:cNvSpPr>
+                <a:spLocks noGrp="1" noRot="1" noChangeAspect="1" noMove="1" noResize="1" noEditPoints="1" noAdjustHandles="1" noChangeArrowheads="1" noChangeShapeType="1" noTextEdit="1"/>
+              </p:cNvSpPr>
+              <p:nvPr>
+                <p:ph type="title"/>
+              </p:nvPr>
+            </p:nvSpPr>
+            <p:spPr>
+              <a:blipFill>
+                <a:blip r:embed="rId2"/>
+                <a:stretch>
+                  <a:fillRect l="-2377"/>
+                </a:stretch>
+              </a:blipFill>
+            </p:spPr>
+            <p:txBody>
+              <a:bodyPr/>
+              <a:lstStyle/>
+              <a:p>
+                <a:r>
+                  <a:rPr lang="en-US">
+                    <a:noFill/>
+                  </a:rPr>
+                  <a:t> </a:t>
+                </a:r>
+              </a:p>
+            </p:txBody>
+          </p:sp>
+        </mc:Fallback>
+      </mc:AlternateContent>
       <p:sp>
         <p:nvSpPr>
           <p:cNvPr id="3" name="Content Placeholder 2">
@@ -8959,6 +9786,478 @@
           <a:chExt cx="0" cy="0"/>
         </a:xfrm>
       </p:grpSpPr>
+      <mc:AlternateContent xmlns:mc="http://schemas.openxmlformats.org/markup-compatibility/2006">
+        <mc:Choice xmlns:a14="http://schemas.microsoft.com/office/drawing/2010/main" Requires="a14">
+          <p:sp>
+            <p:nvSpPr>
+              <p:cNvPr id="2" name="Title 1">
+                <a:extLst>
+                  <a:ext uri="{FF2B5EF4-FFF2-40B4-BE49-F238E27FC236}">
+                    <a16:creationId xmlns:a16="http://schemas.microsoft.com/office/drawing/2014/main" id="{5F4ABDAC-1290-62BE-A747-49C13C124D1C}"/>
+                  </a:ext>
+                </a:extLst>
+              </p:cNvPr>
+              <p:cNvSpPr>
+                <a:spLocks noGrp="1"/>
+              </p:cNvSpPr>
+              <p:nvPr>
+                <p:ph type="title"/>
+              </p:nvPr>
+            </p:nvSpPr>
+            <p:spPr/>
+            <p:txBody>
+              <a:bodyPr/>
+              <a:lstStyle/>
+              <a:p>
+                <a:r>
+                  <a:rPr lang="fr-FR" dirty="0"/>
+                  <a:t>Validation – incertitude </a:t>
+                </a:r>
+                <a14:m>
+                  <m:oMath xmlns:m="http://schemas.openxmlformats.org/officeDocument/2006/math">
+                    <m:sSub>
+                      <m:sSubPr>
+                        <m:ctrlPr>
+                          <a:rPr lang="fr-FR" b="0" i="1" smtClean="0">
+                            <a:latin typeface="Cambria Math" panose="02040503050406030204" pitchFamily="18" charset="0"/>
+                          </a:rPr>
+                        </m:ctrlPr>
+                      </m:sSubPr>
+                      <m:e>
+                        <m:r>
+                          <a:rPr lang="fr-FR" b="0" i="1" smtClean="0">
+                            <a:latin typeface="Cambria Math" panose="02040503050406030204" pitchFamily="18" charset="0"/>
+                          </a:rPr>
+                          <m:t>𝑢</m:t>
+                        </m:r>
+                      </m:e>
+                      <m:sub>
+                        <m:r>
+                          <a:rPr lang="fr-FR" b="0" i="1" smtClean="0">
+                            <a:latin typeface="Cambria Math" panose="02040503050406030204" pitchFamily="18" charset="0"/>
+                          </a:rPr>
+                          <m:t>𝑖𝑛𝑝𝑢𝑡</m:t>
+                        </m:r>
+                      </m:sub>
+                    </m:sSub>
+                  </m:oMath>
+                </a14:m>
+                <a:endParaRPr lang="en-US" dirty="0"/>
+              </a:p>
+            </p:txBody>
+          </p:sp>
+        </mc:Choice>
+        <mc:Fallback>
+          <p:sp>
+            <p:nvSpPr>
+              <p:cNvPr id="2" name="Title 1">
+                <a:extLst>
+                  <a:ext uri="{FF2B5EF4-FFF2-40B4-BE49-F238E27FC236}">
+                    <a16:creationId xmlns:a16="http://schemas.microsoft.com/office/drawing/2014/main" id="{5F4ABDAC-1290-62BE-A747-49C13C124D1C}"/>
+                  </a:ext>
+                </a:extLst>
+              </p:cNvPr>
+              <p:cNvSpPr>
+                <a:spLocks noGrp="1" noRot="1" noChangeAspect="1" noMove="1" noResize="1" noEditPoints="1" noAdjustHandles="1" noChangeArrowheads="1" noChangeShapeType="1" noTextEdit="1"/>
+              </p:cNvSpPr>
+              <p:nvPr>
+                <p:ph type="title"/>
+              </p:nvPr>
+            </p:nvSpPr>
+            <p:spPr>
+              <a:blipFill>
+                <a:blip r:embed="rId2"/>
+                <a:stretch>
+                  <a:fillRect l="-2377"/>
+                </a:stretch>
+              </a:blipFill>
+            </p:spPr>
+            <p:txBody>
+              <a:bodyPr/>
+              <a:lstStyle/>
+              <a:p>
+                <a:r>
+                  <a:rPr lang="en-US">
+                    <a:noFill/>
+                  </a:rPr>
+                  <a:t> </a:t>
+                </a:r>
+              </a:p>
+            </p:txBody>
+          </p:sp>
+        </mc:Fallback>
+      </mc:AlternateContent>
+      <mc:AlternateContent xmlns:mc="http://schemas.openxmlformats.org/markup-compatibility/2006">
+        <mc:Choice xmlns:a14="http://schemas.microsoft.com/office/drawing/2010/main" Requires="a14">
+          <p:sp>
+            <p:nvSpPr>
+              <p:cNvPr id="3" name="Content Placeholder 2">
+                <a:extLst>
+                  <a:ext uri="{FF2B5EF4-FFF2-40B4-BE49-F238E27FC236}">
+                    <a16:creationId xmlns:a16="http://schemas.microsoft.com/office/drawing/2014/main" id="{FF3B03C2-BC51-3422-84F2-F0391762AC5A}"/>
+                  </a:ext>
+                </a:extLst>
+              </p:cNvPr>
+              <p:cNvSpPr>
+                <a:spLocks noGrp="1"/>
+              </p:cNvSpPr>
+              <p:nvPr>
+                <p:ph idx="1"/>
+              </p:nvPr>
+            </p:nvSpPr>
+            <p:spPr/>
+            <p:txBody>
+              <a:bodyPr/>
+              <a:lstStyle/>
+              <a:p>
+                <a:r>
+                  <a:rPr lang="fr-FR" dirty="0"/>
+                  <a:t>Conductivité thermique suit une loi normale</a:t>
+                </a:r>
+              </a:p>
+              <a:p>
+                <a:pPr marL="0" indent="0" algn="ctr">
+                  <a:buNone/>
+                </a:pPr>
+                <a:r>
+                  <a:rPr lang="fr-FR" dirty="0"/>
+                  <a:t> </a:t>
+                </a:r>
+                <a14:m>
+                  <m:oMath xmlns:m="http://schemas.openxmlformats.org/officeDocument/2006/math">
+                    <m:r>
+                      <a:rPr lang="fr-FR" b="0" i="0" smtClean="0">
+                        <a:latin typeface="Cambria Math" panose="02040503050406030204" pitchFamily="18" charset="0"/>
+                      </a:rPr>
+                      <m:t>𝑘</m:t>
+                    </m:r>
+                    <m:r>
+                      <a:rPr lang="fr-FR" b="0" i="1" smtClean="0">
+                        <a:latin typeface="Cambria Math" panose="02040503050406030204" pitchFamily="18" charset="0"/>
+                      </a:rPr>
+                      <m:t> ∼</m:t>
+                    </m:r>
+                    <m:r>
+                      <a:rPr lang="fr-FR" b="0" i="1" smtClean="0">
+                        <a:latin typeface="Cambria Math" panose="02040503050406030204" pitchFamily="18" charset="0"/>
+                      </a:rPr>
+                      <m:t>𝒩</m:t>
+                    </m:r>
+                    <m:r>
+                      <a:rPr lang="fr-FR" b="0" i="1" smtClean="0">
+                        <a:latin typeface="Cambria Math" panose="02040503050406030204" pitchFamily="18" charset="0"/>
+                      </a:rPr>
+                      <m:t>(</m:t>
+                    </m:r>
+                    <m:r>
+                      <a:rPr lang="fr-FR" b="0" i="1" smtClean="0">
+                        <a:latin typeface="Cambria Math" panose="02040503050406030204" pitchFamily="18" charset="0"/>
+                      </a:rPr>
+                      <m:t>42</m:t>
+                    </m:r>
+                    <m:r>
+                      <a:rPr lang="fr-FR" b="0" i="1" smtClean="0">
+                        <a:latin typeface="Cambria Math" panose="02040503050406030204" pitchFamily="18" charset="0"/>
+                      </a:rPr>
+                      <m:t>.</m:t>
+                    </m:r>
+                    <m:r>
+                      <a:rPr lang="fr-FR" b="0" i="1" smtClean="0">
+                        <a:latin typeface="Cambria Math" panose="02040503050406030204" pitchFamily="18" charset="0"/>
+                      </a:rPr>
+                      <m:t>5</m:t>
+                    </m:r>
+                    <m:r>
+                      <a:rPr lang="fr-FR" b="0" i="1" smtClean="0">
+                        <a:latin typeface="Cambria Math" panose="02040503050406030204" pitchFamily="18" charset="0"/>
+                      </a:rPr>
+                      <m:t>,</m:t>
+                    </m:r>
+                    <m:r>
+                      <a:rPr lang="fr-FR" b="0" i="1" smtClean="0">
+                        <a:latin typeface="Cambria Math" panose="02040503050406030204" pitchFamily="18" charset="0"/>
+                      </a:rPr>
+                      <m:t>3</m:t>
+                    </m:r>
+                    <m:r>
+                      <a:rPr lang="fr-FR" b="0" i="1" smtClean="0">
+                        <a:latin typeface="Cambria Math" panose="02040503050406030204" pitchFamily="18" charset="0"/>
+                      </a:rPr>
+                      <m:t>.</m:t>
+                    </m:r>
+                    <m:r>
+                      <a:rPr lang="fr-FR" b="0" i="1" smtClean="0">
+                        <a:latin typeface="Cambria Math" panose="02040503050406030204" pitchFamily="18" charset="0"/>
+                      </a:rPr>
+                      <m:t>75</m:t>
+                    </m:r>
+                    <m:r>
+                      <a:rPr lang="fr-FR" b="0" i="1" smtClean="0">
+                        <a:latin typeface="Cambria Math" panose="02040503050406030204" pitchFamily="18" charset="0"/>
+                      </a:rPr>
+                      <m:t>) </m:t>
+                    </m:r>
+                    <m:r>
+                      <a:rPr lang="fr-FR" b="0" i="1" smtClean="0">
+                        <a:latin typeface="Cambria Math" panose="02040503050406030204" pitchFamily="18" charset="0"/>
+                      </a:rPr>
+                      <m:t>𝑊</m:t>
+                    </m:r>
+                    <m:r>
+                      <m:rPr>
+                        <m:lit/>
+                      </m:rPr>
+                      <a:rPr lang="fr-FR" b="0" i="1" smtClean="0">
+                        <a:latin typeface="Cambria Math" panose="02040503050406030204" pitchFamily="18" charset="0"/>
+                      </a:rPr>
+                      <m:t>/</m:t>
+                    </m:r>
+                    <m:r>
+                      <a:rPr lang="fr-FR" b="0" i="1" smtClean="0">
+                        <a:latin typeface="Cambria Math" panose="02040503050406030204" pitchFamily="18" charset="0"/>
+                      </a:rPr>
+                      <m:t>(</m:t>
+                    </m:r>
+                    <m:r>
+                      <a:rPr lang="fr-FR" b="0" i="1" smtClean="0">
+                        <a:latin typeface="Cambria Math" panose="02040503050406030204" pitchFamily="18" charset="0"/>
+                      </a:rPr>
+                      <m:t>𝑚</m:t>
+                    </m:r>
+                    <m:r>
+                      <a:rPr lang="fr-FR" b="0" i="1" smtClean="0">
+                        <a:latin typeface="Cambria Math" panose="02040503050406030204" pitchFamily="18" charset="0"/>
+                      </a:rPr>
+                      <m:t>⋅</m:t>
+                    </m:r>
+                    <m:r>
+                      <m:rPr>
+                        <m:sty m:val="p"/>
+                      </m:rPr>
+                      <a:rPr lang="fr-FR" b="0" i="1" smtClean="0">
+                        <a:latin typeface="Cambria Math" panose="02040503050406030204" pitchFamily="18" charset="0"/>
+                      </a:rPr>
+                      <m:t>K</m:t>
+                    </m:r>
+                    <m:r>
+                      <a:rPr lang="fr-FR" b="0" i="1" smtClean="0">
+                        <a:latin typeface="Cambria Math" panose="02040503050406030204" pitchFamily="18" charset="0"/>
+                      </a:rPr>
+                      <m:t>)</m:t>
+                    </m:r>
+                  </m:oMath>
+                </a14:m>
+                <a:endParaRPr lang="en-US" dirty="0"/>
+              </a:p>
+              <a:p>
+                <a:r>
+                  <a:rPr lang="en-US" dirty="0" err="1"/>
+                  <a:t>Emissivité</a:t>
+                </a:r>
+                <a:r>
+                  <a:rPr lang="en-US" dirty="0"/>
+                  <a:t> suit </a:t>
+                </a:r>
+                <a:r>
+                  <a:rPr lang="en-US" dirty="0" err="1"/>
+                  <a:t>une</a:t>
+                </a:r>
+                <a:r>
+                  <a:rPr lang="en-US" dirty="0"/>
+                  <a:t> </a:t>
+                </a:r>
+                <a:r>
+                  <a:rPr lang="en-US" dirty="0" err="1"/>
+                  <a:t>loi</a:t>
+                </a:r>
+                <a:r>
+                  <a:rPr lang="en-US" dirty="0"/>
+                  <a:t> </a:t>
+                </a:r>
+                <a:r>
+                  <a:rPr lang="en-US" dirty="0" err="1"/>
+                  <a:t>normale</a:t>
+                </a:r>
+                <a:r>
+                  <a:rPr lang="en-US" dirty="0"/>
+                  <a:t> </a:t>
+                </a:r>
+              </a:p>
+              <a:p>
+                <a:pPr marL="0" indent="0" algn="ctr">
+                  <a:buNone/>
+                </a:pPr>
+                <a14:m>
+                  <m:oMathPara xmlns:m="http://schemas.openxmlformats.org/officeDocument/2006/math">
+                    <m:oMathParaPr>
+                      <m:jc m:val="centerGroup"/>
+                    </m:oMathParaPr>
+                    <m:oMath xmlns:m="http://schemas.openxmlformats.org/officeDocument/2006/math">
+                      <m:r>
+                        <a:rPr lang="fr-FR" b="0" i="1" smtClean="0">
+                          <a:latin typeface="Cambria Math" panose="02040503050406030204" pitchFamily="18" charset="0"/>
+                        </a:rPr>
+                        <m:t>𝜀</m:t>
+                      </m:r>
+                      <m:r>
+                        <a:rPr lang="fr-FR" i="1">
+                          <a:latin typeface="Cambria Math" panose="02040503050406030204" pitchFamily="18" charset="0"/>
+                        </a:rPr>
+                        <m:t>∼</m:t>
+                      </m:r>
+                      <m:r>
+                        <a:rPr lang="fr-FR" i="1">
+                          <a:latin typeface="Cambria Math" panose="02040503050406030204" pitchFamily="18" charset="0"/>
+                        </a:rPr>
+                        <m:t>𝒩</m:t>
+                      </m:r>
+                      <m:d>
+                        <m:dPr>
+                          <m:ctrlPr>
+                            <a:rPr lang="fr-FR" b="0" i="1" smtClean="0">
+                              <a:latin typeface="Cambria Math" panose="02040503050406030204" pitchFamily="18" charset="0"/>
+                            </a:rPr>
+                          </m:ctrlPr>
+                        </m:dPr>
+                        <m:e>
+                          <m:r>
+                            <a:rPr lang="fr-FR" b="0" i="1" smtClean="0">
+                              <a:latin typeface="Cambria Math" panose="02040503050406030204" pitchFamily="18" charset="0"/>
+                            </a:rPr>
+                            <m:t>0</m:t>
+                          </m:r>
+                          <m:r>
+                            <a:rPr lang="fr-FR" b="0" i="1" smtClean="0">
+                              <a:latin typeface="Cambria Math" panose="02040503050406030204" pitchFamily="18" charset="0"/>
+                            </a:rPr>
+                            <m:t>.</m:t>
+                          </m:r>
+                          <m:r>
+                            <a:rPr lang="fr-FR" b="0" i="1" smtClean="0">
+                              <a:latin typeface="Cambria Math" panose="02040503050406030204" pitchFamily="18" charset="0"/>
+                            </a:rPr>
+                            <m:t>525</m:t>
+                          </m:r>
+                          <m:r>
+                            <a:rPr lang="fr-FR" b="0" i="1" smtClean="0">
+                              <a:latin typeface="Cambria Math" panose="02040503050406030204" pitchFamily="18" charset="0"/>
+                            </a:rPr>
+                            <m:t>,</m:t>
+                          </m:r>
+                          <m:r>
+                            <a:rPr lang="fr-FR" b="0" i="1" smtClean="0">
+                              <a:latin typeface="Cambria Math" panose="02040503050406030204" pitchFamily="18" charset="0"/>
+                            </a:rPr>
+                            <m:t>0</m:t>
+                          </m:r>
+                          <m:r>
+                            <a:rPr lang="fr-FR" b="0" i="1" smtClean="0">
+                              <a:latin typeface="Cambria Math" panose="02040503050406030204" pitchFamily="18" charset="0"/>
+                            </a:rPr>
+                            <m:t>.</m:t>
+                          </m:r>
+                          <m:r>
+                            <a:rPr lang="fr-FR" b="0" i="1" smtClean="0">
+                              <a:latin typeface="Cambria Math" panose="02040503050406030204" pitchFamily="18" charset="0"/>
+                            </a:rPr>
+                            <m:t>19</m:t>
+                          </m:r>
+                        </m:e>
+                      </m:d>
+                    </m:oMath>
+                  </m:oMathPara>
+                </a14:m>
+                <a:endParaRPr lang="fr-FR" b="0" dirty="0"/>
+              </a:p>
+              <a:p>
+                <a:pPr marL="0" indent="0">
+                  <a:buNone/>
+                </a:pPr>
+                <a:r>
+                  <a:rPr lang="fr-FR" dirty="0"/>
+                  <a:t>Par la méthode de Monte Carlo </a:t>
+                </a:r>
+                <a:endParaRPr lang="fr-FR" b="0" dirty="0"/>
+              </a:p>
+              <a:p>
+                <a:pPr marL="0" indent="0" algn="ctr">
+                  <a:buNone/>
+                </a:pPr>
+                <a:endParaRPr lang="en-US" dirty="0"/>
+              </a:p>
+            </p:txBody>
+          </p:sp>
+        </mc:Choice>
+        <mc:Fallback>
+          <p:sp>
+            <p:nvSpPr>
+              <p:cNvPr id="3" name="Content Placeholder 2">
+                <a:extLst>
+                  <a:ext uri="{FF2B5EF4-FFF2-40B4-BE49-F238E27FC236}">
+                    <a16:creationId xmlns:a16="http://schemas.microsoft.com/office/drawing/2014/main" id="{FF3B03C2-BC51-3422-84F2-F0391762AC5A}"/>
+                  </a:ext>
+                </a:extLst>
+              </p:cNvPr>
+              <p:cNvSpPr>
+                <a:spLocks noGrp="1" noRot="1" noChangeAspect="1" noMove="1" noResize="1" noEditPoints="1" noAdjustHandles="1" noChangeArrowheads="1" noChangeShapeType="1" noTextEdit="1"/>
+              </p:cNvSpPr>
+              <p:nvPr>
+                <p:ph idx="1"/>
+              </p:nvPr>
+            </p:nvSpPr>
+            <p:spPr>
+              <a:blipFill>
+                <a:blip r:embed="rId3"/>
+                <a:stretch>
+                  <a:fillRect l="-1217" t="-2381"/>
+                </a:stretch>
+              </a:blipFill>
+            </p:spPr>
+            <p:txBody>
+              <a:bodyPr/>
+              <a:lstStyle/>
+              <a:p>
+                <a:r>
+                  <a:rPr lang="en-US">
+                    <a:noFill/>
+                  </a:rPr>
+                  <a:t> </a:t>
+                </a:r>
+              </a:p>
+            </p:txBody>
+          </p:sp>
+        </mc:Fallback>
+      </mc:AlternateContent>
+    </p:spTree>
+    <p:extLst>
+      <p:ext uri="{BB962C8B-B14F-4D97-AF65-F5344CB8AC3E}">
+        <p14:creationId xmlns:p14="http://schemas.microsoft.com/office/powerpoint/2010/main" val="2810957893"/>
+      </p:ext>
+    </p:extLst>
+  </p:cSld>
+  <p:clrMapOvr>
+    <a:masterClrMapping/>
+  </p:clrMapOvr>
+</p:sld>
+</file>
+
+<file path=ppt/slides/slide21.xml><?xml version="1.0" encoding="utf-8"?>
+<p:sld xmlns:a="http://schemas.openxmlformats.org/drawingml/2006/main" xmlns:r="http://schemas.openxmlformats.org/officeDocument/2006/relationships" xmlns:p="http://schemas.openxmlformats.org/presentationml/2006/main">
+  <p:cSld>
+    <p:spTree>
+      <p:nvGrpSpPr>
+        <p:cNvPr id="1" name=""/>
+        <p:cNvGrpSpPr/>
+        <p:nvPr/>
+      </p:nvGrpSpPr>
+      <p:grpSpPr>
+        <a:xfrm>
+          <a:off x="0" y="0"/>
+          <a:ext cx="0" cy="0"/>
+          <a:chOff x="0" y="0"/>
+          <a:chExt cx="0" cy="0"/>
+        </a:xfrm>
+      </p:grpSpPr>
       <p:sp>
         <p:nvSpPr>
           <p:cNvPr id="2" name="Title 1">
@@ -9062,7 +10361,103 @@
                   </a:rPr>
                   <a:t> précision accrue sur l’erreur de simulation</a:t>
                 </a:r>
-                <a:endParaRPr lang="en-US" dirty="0"/>
+              </a:p>
+              <a:p>
+                <a:r>
+                  <a:rPr lang="fr-FR" dirty="0">
+                    <a:sym typeface="Wingdings" panose="05000000000000000000" pitchFamily="2" charset="2"/>
+                  </a:rPr>
+                  <a:t>Calcul de </a:t>
+                </a:r>
+                <a14:m>
+                  <m:oMath xmlns:m="http://schemas.openxmlformats.org/officeDocument/2006/math">
+                    <m:sSub>
+                      <m:sSubPr>
+                        <m:ctrlPr>
+                          <a:rPr lang="fr-FR" b="0" i="1" smtClean="0">
+                            <a:latin typeface="Cambria Math" panose="02040503050406030204" pitchFamily="18" charset="0"/>
+                            <a:sym typeface="Wingdings" panose="05000000000000000000" pitchFamily="2" charset="2"/>
+                          </a:rPr>
+                        </m:ctrlPr>
+                      </m:sSubPr>
+                      <m:e>
+                        <m:r>
+                          <a:rPr lang="fr-FR" b="0" i="1" smtClean="0">
+                            <a:latin typeface="Cambria Math" panose="02040503050406030204" pitchFamily="18" charset="0"/>
+                            <a:sym typeface="Wingdings" panose="05000000000000000000" pitchFamily="2" charset="2"/>
+                          </a:rPr>
+                          <m:t>𝐸</m:t>
+                        </m:r>
+                      </m:e>
+                      <m:sub>
+                        <m:sSub>
+                          <m:sSubPr>
+                            <m:ctrlPr>
+                              <a:rPr lang="fr-FR" b="0" i="1" smtClean="0">
+                                <a:latin typeface="Cambria Math" panose="02040503050406030204" pitchFamily="18" charset="0"/>
+                                <a:sym typeface="Wingdings" panose="05000000000000000000" pitchFamily="2" charset="2"/>
+                              </a:rPr>
+                            </m:ctrlPr>
+                          </m:sSubPr>
+                          <m:e>
+                            <m:r>
+                              <a:rPr lang="fr-FR" b="0" i="1" smtClean="0">
+                                <a:latin typeface="Cambria Math" panose="02040503050406030204" pitchFamily="18" charset="0"/>
+                                <a:sym typeface="Wingdings" panose="05000000000000000000" pitchFamily="2" charset="2"/>
+                              </a:rPr>
+                              <m:t>𝐿</m:t>
+                            </m:r>
+                          </m:e>
+                          <m:sub>
+                            <m:r>
+                              <a:rPr lang="fr-FR" b="0" i="1" smtClean="0">
+                                <a:latin typeface="Cambria Math" panose="02040503050406030204" pitchFamily="18" charset="0"/>
+                                <a:sym typeface="Wingdings" panose="05000000000000000000" pitchFamily="2" charset="2"/>
+                              </a:rPr>
+                              <m:t>2</m:t>
+                            </m:r>
+                          </m:sub>
+                        </m:sSub>
+                      </m:sub>
+                    </m:sSub>
+                  </m:oMath>
+                </a14:m>
+                <a:r>
+                  <a:rPr lang="en-US" dirty="0"/>
+                  <a:t> avec plus de points et </a:t>
+                </a:r>
+                <a:r>
+                  <a:rPr lang="en-US" dirty="0" err="1"/>
+                  <a:t>plusieurs</a:t>
+                </a:r>
+                <a:r>
+                  <a:rPr lang="en-US" dirty="0"/>
+                  <a:t> experiences pour </a:t>
+                </a:r>
+                <a:r>
+                  <a:rPr lang="en-US" dirty="0" err="1"/>
+                  <a:t>avoir</a:t>
+                </a:r>
+                <a:r>
+                  <a:rPr lang="en-US" dirty="0"/>
+                  <a:t> un </a:t>
+                </a:r>
+                <a:r>
+                  <a:rPr lang="en-US" dirty="0" err="1"/>
+                  <a:t>intervalle</a:t>
+                </a:r>
+                <a:r>
+                  <a:rPr lang="en-US" dirty="0"/>
+                  <a:t> de </a:t>
+                </a:r>
+                <a:r>
+                  <a:rPr lang="en-US" dirty="0" err="1"/>
+                  <a:t>confiance</a:t>
+                </a:r>
+                <a:r>
+                  <a:rPr lang="en-US" dirty="0"/>
+                  <a:t> sur E</a:t>
+                </a:r>
               </a:p>
             </p:txBody>
           </p:sp>
@@ -10878,13 +12273,7 @@
                         <a:rPr lang="fr-CA" b="0" i="1" smtClean="0">
                           <a:latin typeface="Cambria Math" panose="02040503050406030204" pitchFamily="18" charset="0"/>
                         </a:rPr>
-                        <m:t>=</m:t>
-                      </m:r>
-                      <m:r>
-                        <a:rPr lang="fr-CA" b="0" i="1" smtClean="0">
-                          <a:latin typeface="Cambria Math" panose="02040503050406030204" pitchFamily="18" charset="0"/>
-                        </a:rPr>
-                        <m:t>0</m:t>
+                        <m:t>=0</m:t>
                       </m:r>
                     </m:oMath>
                   </m:oMathPara>
@@ -12362,13 +13751,7 @@
                               <a:rPr lang="fr-FR" b="0" i="1" smtClean="0">
                                 <a:latin typeface="Cambria Math" panose="02040503050406030204" pitchFamily="18" charset="0"/>
                               </a:rPr>
-                              <m:t>+</m:t>
-                            </m:r>
-                            <m:r>
-                              <a:rPr lang="fr-FR" b="0" i="1" smtClean="0">
-                                <a:latin typeface="Cambria Math" panose="02040503050406030204" pitchFamily="18" charset="0"/>
-                              </a:rPr>
-                              <m:t>1</m:t>
+                              <m:t>+1</m:t>
                             </m:r>
                             <m:r>
                               <a:rPr lang="fr-FR" i="1">
@@ -12425,13 +13808,7 @@
                               <a:rPr lang="fr-FR" b="0" i="1" smtClean="0">
                                 <a:latin typeface="Cambria Math" panose="02040503050406030204" pitchFamily="18" charset="0"/>
                               </a:rPr>
-                              <m:t>−</m:t>
-                            </m:r>
-                            <m:r>
-                              <a:rPr lang="fr-FR" b="0" i="1" smtClean="0">
-                                <a:latin typeface="Cambria Math" panose="02040503050406030204" pitchFamily="18" charset="0"/>
-                              </a:rPr>
-                              <m:t>1</m:t>
+                              <m:t>−1</m:t>
                             </m:r>
                             <m:r>
                               <a:rPr lang="fr-FR" i="1">
@@ -13079,19 +14456,7 @@
                                 <a:rPr lang="fr-FR" sz="2400" i="1">
                                   <a:latin typeface="Cambria Math" panose="02040503050406030204" pitchFamily="18" charset="0"/>
                                 </a:rPr>
-                                <m:t>+</m:t>
-                              </m:r>
-                              <m:r>
-                                <a:rPr lang="fr-FR" sz="2400" i="1">
-                                  <a:latin typeface="Cambria Math" panose="02040503050406030204" pitchFamily="18" charset="0"/>
-                                </a:rPr>
-                                <m:t>1</m:t>
-                              </m:r>
-                              <m:r>
-                                <a:rPr lang="fr-FR" sz="2400" i="1">
-                                  <a:latin typeface="Cambria Math" panose="02040503050406030204" pitchFamily="18" charset="0"/>
-                                </a:rPr>
-                                <m:t>,</m:t>
+                                <m:t>+1,</m:t>
                               </m:r>
                               <m:r>
                                 <a:rPr lang="fr-FR" sz="2400" i="1">
@@ -13199,19 +14564,7 @@
                                 <a:rPr lang="fr-FR" sz="2400" i="1">
                                   <a:latin typeface="Cambria Math" panose="02040503050406030204" pitchFamily="18" charset="0"/>
                                 </a:rPr>
-                                <m:t>−</m:t>
-                              </m:r>
-                              <m:r>
-                                <a:rPr lang="fr-FR" sz="2400" i="1">
-                                  <a:latin typeface="Cambria Math" panose="02040503050406030204" pitchFamily="18" charset="0"/>
-                                </a:rPr>
-                                <m:t>1</m:t>
-                              </m:r>
-                              <m:r>
-                                <a:rPr lang="fr-FR" sz="2400" i="1">
-                                  <a:latin typeface="Cambria Math" panose="02040503050406030204" pitchFamily="18" charset="0"/>
-                                </a:rPr>
-                                <m:t>,</m:t>
+                                <m:t>−1,</m:t>
                               </m:r>
                               <m:r>
                                 <a:rPr lang="fr-FR" sz="2400" i="1">
@@ -13344,19 +14697,7 @@
                                 <a:rPr lang="fr-FR" sz="2400" i="1">
                                   <a:latin typeface="Cambria Math" panose="02040503050406030204" pitchFamily="18" charset="0"/>
                                 </a:rPr>
-                                <m:t>+</m:t>
-                              </m:r>
-                              <m:r>
-                                <a:rPr lang="fr-FR" sz="2400" i="1">
-                                  <a:latin typeface="Cambria Math" panose="02040503050406030204" pitchFamily="18" charset="0"/>
-                                </a:rPr>
-                                <m:t>1</m:t>
-                              </m:r>
-                              <m:r>
-                                <a:rPr lang="fr-FR" sz="2400" i="1">
-                                  <a:latin typeface="Cambria Math" panose="02040503050406030204" pitchFamily="18" charset="0"/>
-                                </a:rPr>
-                                <m:t>,</m:t>
+                                <m:t>+1,</m:t>
                               </m:r>
                               <m:r>
                                 <a:rPr lang="fr-FR" sz="2400" i="1">
@@ -13407,19 +14748,7 @@
                                 <a:rPr lang="fr-FR" sz="2400" i="1">
                                   <a:latin typeface="Cambria Math" panose="02040503050406030204" pitchFamily="18" charset="0"/>
                                 </a:rPr>
-                                <m:t>−</m:t>
-                              </m:r>
-                              <m:r>
-                                <a:rPr lang="fr-FR" sz="2400" i="1">
-                                  <a:latin typeface="Cambria Math" panose="02040503050406030204" pitchFamily="18" charset="0"/>
-                                </a:rPr>
-                                <m:t>1</m:t>
-                              </m:r>
-                              <m:r>
-                                <a:rPr lang="fr-FR" sz="2400" i="1">
-                                  <a:latin typeface="Cambria Math" panose="02040503050406030204" pitchFamily="18" charset="0"/>
-                                </a:rPr>
-                                <m:t>,</m:t>
+                                <m:t>−1,</m:t>
                               </m:r>
                               <m:r>
                                 <a:rPr lang="fr-FR" sz="2400" i="1">
@@ -13516,13 +14845,7 @@
                                 <a:rPr lang="fr-FR" sz="2400" i="1">
                                   <a:latin typeface="Cambria Math" panose="02040503050406030204" pitchFamily="18" charset="0"/>
                                 </a:rPr>
-                                <m:t>+</m:t>
-                              </m:r>
-                              <m:r>
-                                <a:rPr lang="fr-FR" sz="2400" i="1">
-                                  <a:latin typeface="Cambria Math" panose="02040503050406030204" pitchFamily="18" charset="0"/>
-                                </a:rPr>
-                                <m:t>1</m:t>
+                                <m:t>+1</m:t>
                               </m:r>
                             </m:sub>
                             <m:sup>
@@ -13636,13 +14959,7 @@
                                 <a:rPr lang="fr-FR" sz="2400" i="1">
                                   <a:latin typeface="Cambria Math" panose="02040503050406030204" pitchFamily="18" charset="0"/>
                                 </a:rPr>
-                                <m:t>−</m:t>
-                              </m:r>
-                              <m:r>
-                                <a:rPr lang="fr-FR" sz="2400" i="1">
-                                  <a:latin typeface="Cambria Math" panose="02040503050406030204" pitchFamily="18" charset="0"/>
-                                </a:rPr>
-                                <m:t>1</m:t>
+                                <m:t>−1</m:t>
                               </m:r>
                             </m:sub>
                             <m:sup>
@@ -13988,21 +15305,7 @@
                                 <a:latin typeface="Cambria Math" panose="02040503050406030204" pitchFamily="18" charset="0"/>
                                 <a:ea typeface="Cambria Math" panose="02040503050406030204" pitchFamily="18" charset="0"/>
                               </a:rPr>
-                              <m:t>+</m:t>
-                            </m:r>
-                            <m:r>
-                              <a:rPr lang="fr-FR" sz="2600" i="1">
-                                <a:latin typeface="Cambria Math" panose="02040503050406030204" pitchFamily="18" charset="0"/>
-                                <a:ea typeface="Cambria Math" panose="02040503050406030204" pitchFamily="18" charset="0"/>
-                              </a:rPr>
-                              <m:t>1</m:t>
-                            </m:r>
-                            <m:r>
-                              <a:rPr lang="fr-FR" sz="2600" i="1">
-                                <a:latin typeface="Cambria Math" panose="02040503050406030204" pitchFamily="18" charset="0"/>
-                                <a:ea typeface="Cambria Math" panose="02040503050406030204" pitchFamily="18" charset="0"/>
-                              </a:rPr>
-                              <m:t>,</m:t>
+                              <m:t>+1,</m:t>
                             </m:r>
                             <m:r>
                               <a:rPr lang="fr-FR" sz="2600" i="1">
@@ -14125,21 +15428,7 @@
                                 <a:latin typeface="Cambria Math" panose="02040503050406030204" pitchFamily="18" charset="0"/>
                                 <a:ea typeface="Cambria Math" panose="02040503050406030204" pitchFamily="18" charset="0"/>
                               </a:rPr>
-                              <m:t>−</m:t>
-                            </m:r>
-                            <m:r>
-                              <a:rPr lang="fr-FR" sz="2600" i="1">
-                                <a:latin typeface="Cambria Math" panose="02040503050406030204" pitchFamily="18" charset="0"/>
-                                <a:ea typeface="Cambria Math" panose="02040503050406030204" pitchFamily="18" charset="0"/>
-                              </a:rPr>
-                              <m:t>1</m:t>
-                            </m:r>
-                            <m:r>
-                              <a:rPr lang="fr-FR" sz="2600" i="1">
-                                <a:latin typeface="Cambria Math" panose="02040503050406030204" pitchFamily="18" charset="0"/>
-                                <a:ea typeface="Cambria Math" panose="02040503050406030204" pitchFamily="18" charset="0"/>
-                              </a:rPr>
-                              <m:t>,</m:t>
+                              <m:t>−1,</m:t>
                             </m:r>
                             <m:r>
                               <a:rPr lang="fr-FR" sz="2600" i="1">
@@ -14408,13 +15697,7 @@
                               <a:rPr lang="fr-FR" sz="2600" i="1">
                                 <a:latin typeface="Cambria Math" panose="02040503050406030204" pitchFamily="18" charset="0"/>
                               </a:rPr>
-                              <m:t>+</m:t>
-                            </m:r>
-                            <m:r>
-                              <a:rPr lang="fr-FR" sz="2600" i="1">
-                                <a:latin typeface="Cambria Math" panose="02040503050406030204" pitchFamily="18" charset="0"/>
-                              </a:rPr>
-                              <m:t>1</m:t>
+                              <m:t>+1</m:t>
                             </m:r>
                           </m:sub>
                           <m:sup>
@@ -14528,13 +15811,7 @@
                               <a:rPr lang="fr-FR" sz="2600" i="1">
                                 <a:latin typeface="Cambria Math" panose="02040503050406030204" pitchFamily="18" charset="0"/>
                               </a:rPr>
-                              <m:t>−</m:t>
-                            </m:r>
-                            <m:r>
-                              <a:rPr lang="fr-FR" sz="2600" i="1">
-                                <a:latin typeface="Cambria Math" panose="02040503050406030204" pitchFamily="18" charset="0"/>
-                              </a:rPr>
-                              <m:t>1</m:t>
+                              <m:t>−1</m:t>
                             </m:r>
                           </m:sub>
                           <m:sup>
@@ -19345,13 +20622,7 @@
                           <a:rPr lang="fr-FR" i="1">
                             <a:latin typeface="Cambria Math" panose="02040503050406030204" pitchFamily="18" charset="0"/>
                           </a:rPr>
-                          <m:t>2</m:t>
-                        </m:r>
-                        <m:r>
-                          <a:rPr lang="fr-FR" i="1">
-                            <a:latin typeface="Cambria Math" panose="02040503050406030204" pitchFamily="18" charset="0"/>
-                          </a:rPr>
-                          <m:t>!</m:t>
+                          <m:t>2!</m:t>
                         </m:r>
                       </m:den>
                     </m:f>
@@ -19523,13 +20794,7 @@
                           <a:rPr lang="fr-FR" i="1">
                             <a:latin typeface="Cambria Math" panose="02040503050406030204" pitchFamily="18" charset="0"/>
                           </a:rPr>
-                          <m:t>3</m:t>
-                        </m:r>
-                        <m:r>
-                          <a:rPr lang="fr-FR" i="1">
-                            <a:latin typeface="Cambria Math" panose="02040503050406030204" pitchFamily="18" charset="0"/>
-                          </a:rPr>
-                          <m:t>!</m:t>
+                          <m:t>3!</m:t>
                         </m:r>
                       </m:den>
                     </m:f>
@@ -19701,13 +20966,7 @@
                           <a:rPr lang="fr-FR" i="1">
                             <a:latin typeface="Cambria Math" panose="02040503050406030204" pitchFamily="18" charset="0"/>
                           </a:rPr>
-                          <m:t>4</m:t>
-                        </m:r>
-                        <m:r>
-                          <a:rPr lang="fr-FR" i="1">
-                            <a:latin typeface="Cambria Math" panose="02040503050406030204" pitchFamily="18" charset="0"/>
-                          </a:rPr>
-                          <m:t>!</m:t>
+                          <m:t>4!</m:t>
                         </m:r>
                       </m:den>
                     </m:f>
@@ -20125,13 +21384,7 @@
                           <a:rPr lang="fr-FR" i="1">
                             <a:latin typeface="Cambria Math" panose="02040503050406030204" pitchFamily="18" charset="0"/>
                           </a:rPr>
-                          <m:t>2</m:t>
-                        </m:r>
-                        <m:r>
-                          <a:rPr lang="fr-FR" i="1">
-                            <a:latin typeface="Cambria Math" panose="02040503050406030204" pitchFamily="18" charset="0"/>
-                          </a:rPr>
-                          <m:t>!</m:t>
+                          <m:t>2!</m:t>
                         </m:r>
                       </m:den>
                     </m:f>
@@ -20303,13 +21556,7 @@
                           <a:rPr lang="fr-FR" i="1">
                             <a:latin typeface="Cambria Math" panose="02040503050406030204" pitchFamily="18" charset="0"/>
                           </a:rPr>
-                          <m:t>3</m:t>
-                        </m:r>
-                        <m:r>
-                          <a:rPr lang="fr-FR" i="1">
-                            <a:latin typeface="Cambria Math" panose="02040503050406030204" pitchFamily="18" charset="0"/>
-                          </a:rPr>
-                          <m:t>!</m:t>
+                          <m:t>3!</m:t>
                         </m:r>
                       </m:den>
                     </m:f>
@@ -20481,13 +21728,7 @@
                           <a:rPr lang="fr-FR" i="1">
                             <a:latin typeface="Cambria Math" panose="02040503050406030204" pitchFamily="18" charset="0"/>
                           </a:rPr>
-                          <m:t>4</m:t>
-                        </m:r>
-                        <m:r>
-                          <a:rPr lang="fr-FR" i="1">
-                            <a:latin typeface="Cambria Math" panose="02040503050406030204" pitchFamily="18" charset="0"/>
-                          </a:rPr>
-                          <m:t>!</m:t>
+                          <m:t>4!</m:t>
                         </m:r>
                       </m:den>
                     </m:f>
@@ -21078,13 +22319,7 @@
                           <a:rPr lang="fr-FR" i="1">
                             <a:latin typeface="Cambria Math" panose="02040503050406030204" pitchFamily="18" charset="0"/>
                           </a:rPr>
-                          <m:t>2</m:t>
-                        </m:r>
-                        <m:r>
-                          <a:rPr lang="fr-FR" i="1">
-                            <a:latin typeface="Cambria Math" panose="02040503050406030204" pitchFamily="18" charset="0"/>
-                          </a:rPr>
-                          <m:t>!</m:t>
+                          <m:t>2!</m:t>
                         </m:r>
                       </m:den>
                     </m:f>
@@ -21545,13 +22780,7 @@
                           <a:rPr lang="fr-FR" i="1">
                             <a:latin typeface="Cambria Math" panose="02040503050406030204" pitchFamily="18" charset="0"/>
                           </a:rPr>
-                          <m:t>2</m:t>
-                        </m:r>
-                        <m:r>
-                          <a:rPr lang="fr-FR" i="1">
-                            <a:latin typeface="Cambria Math" panose="02040503050406030204" pitchFamily="18" charset="0"/>
-                          </a:rPr>
-                          <m:t>!</m:t>
+                          <m:t>2!</m:t>
                         </m:r>
                       </m:den>
                     </m:f>
@@ -21813,7 +23042,19 @@
                               <a:rPr lang="fr-FR" sz="2400" i="1">
                                 <a:latin typeface="Cambria Math" panose="02040503050406030204" pitchFamily="18" charset="0"/>
                               </a:rPr>
-                              <m:t>+1,</m:t>
+                              <m:t>+</m:t>
+                            </m:r>
+                            <m:r>
+                              <a:rPr lang="fr-FR" sz="2400" i="1">
+                                <a:latin typeface="Cambria Math" panose="02040503050406030204" pitchFamily="18" charset="0"/>
+                              </a:rPr>
+                              <m:t>1</m:t>
+                            </m:r>
+                            <m:r>
+                              <a:rPr lang="fr-FR" sz="2400" i="1">
+                                <a:latin typeface="Cambria Math" panose="02040503050406030204" pitchFamily="18" charset="0"/>
+                              </a:rPr>
+                              <m:t>,</m:t>
                             </m:r>
                             <m:r>
                               <a:rPr lang="fr-FR" sz="2400" i="1">
@@ -21864,7 +23105,19 @@
                               <a:rPr lang="fr-FR" sz="2400" i="1">
                                 <a:latin typeface="Cambria Math" panose="02040503050406030204" pitchFamily="18" charset="0"/>
                               </a:rPr>
-                              <m:t>−1,</m:t>
+                              <m:t>−</m:t>
+                            </m:r>
+                            <m:r>
+                              <a:rPr lang="fr-FR" sz="2400" i="1">
+                                <a:latin typeface="Cambria Math" panose="02040503050406030204" pitchFamily="18" charset="0"/>
+                              </a:rPr>
+                              <m:t>1</m:t>
+                            </m:r>
+                            <m:r>
+                              <a:rPr lang="fr-FR" sz="2400" i="1">
+                                <a:latin typeface="Cambria Math" panose="02040503050406030204" pitchFamily="18" charset="0"/>
+                              </a:rPr>
+                              <m:t>,</m:t>
                             </m:r>
                             <m:r>
                               <a:rPr lang="fr-FR" sz="2400" i="1">
@@ -22374,7 +23627,16 @@
                             </a:solidFill>
                             <a:latin typeface="Cambria Math" panose="02040503050406030204" pitchFamily="18" charset="0"/>
                           </a:rPr>
-                          <m:t>2!</m:t>
+                          <m:t>2</m:t>
+                        </m:r>
+                        <m:r>
+                          <a:rPr lang="fr-FR" sz="2400" i="1">
+                            <a:solidFill>
+                              <a:srgbClr val="FF0000"/>
+                            </a:solidFill>
+                            <a:latin typeface="Cambria Math" panose="02040503050406030204" pitchFamily="18" charset="0"/>
+                          </a:rPr>
+                          <m:t>!</m:t>
                         </m:r>
                       </m:den>
                     </m:f>
@@ -22570,7 +23832,13 @@
                           <a:rPr lang="fr-FR" sz="2400" i="1">
                             <a:latin typeface="Cambria Math" panose="02040503050406030204" pitchFamily="18" charset="0"/>
                           </a:rPr>
-                          <m:t>3!</m:t>
+                          <m:t>3</m:t>
+                        </m:r>
+                        <m:r>
+                          <a:rPr lang="fr-FR" sz="2400" i="1">
+                            <a:latin typeface="Cambria Math" panose="02040503050406030204" pitchFamily="18" charset="0"/>
+                          </a:rPr>
+                          <m:t>!</m:t>
                         </m:r>
                       </m:den>
                     </m:f>
@@ -23086,7 +24354,16 @@
                             </a:solidFill>
                             <a:latin typeface="Cambria Math" panose="02040503050406030204" pitchFamily="18" charset="0"/>
                           </a:rPr>
-                          <m:t>2!</m:t>
+                          <m:t>2</m:t>
+                        </m:r>
+                        <m:r>
+                          <a:rPr lang="fr-FR" sz="2400" i="1">
+                            <a:solidFill>
+                              <a:srgbClr val="FF0000"/>
+                            </a:solidFill>
+                            <a:latin typeface="Cambria Math" panose="02040503050406030204" pitchFamily="18" charset="0"/>
+                          </a:rPr>
+                          <m:t>!</m:t>
                         </m:r>
                       </m:den>
                     </m:f>
@@ -23294,7 +24571,13 @@
                           <a:rPr lang="fr-FR" sz="2400" i="1">
                             <a:latin typeface="Cambria Math" panose="02040503050406030204" pitchFamily="18" charset="0"/>
                           </a:rPr>
-                          <m:t>3!</m:t>
+                          <m:t>3</m:t>
+                        </m:r>
+                        <m:r>
+                          <a:rPr lang="fr-FR" sz="2400" i="1">
+                            <a:latin typeface="Cambria Math" panose="02040503050406030204" pitchFamily="18" charset="0"/>
+                          </a:rPr>
+                          <m:t>!</m:t>
                         </m:r>
                       </m:den>
                     </m:f>
@@ -23812,7 +25095,13 @@
                               <a:rPr lang="fr-FR" sz="2400" i="1">
                                 <a:latin typeface="Cambria Math" panose="02040503050406030204" pitchFamily="18" charset="0"/>
                               </a:rPr>
-                              <m:t>+1</m:t>
+                              <m:t>+</m:t>
+                            </m:r>
+                            <m:r>
+                              <a:rPr lang="fr-FR" sz="2400" i="1">
+                                <a:latin typeface="Cambria Math" panose="02040503050406030204" pitchFamily="18" charset="0"/>
+                              </a:rPr>
+                              <m:t>1</m:t>
                             </m:r>
                           </m:sub>
                           <m:sup>
@@ -23926,7 +25215,13 @@
                               <a:rPr lang="fr-FR" sz="2400" i="1">
                                 <a:latin typeface="Cambria Math" panose="02040503050406030204" pitchFamily="18" charset="0"/>
                               </a:rPr>
-                              <m:t>−1</m:t>
+                              <m:t>−</m:t>
+                            </m:r>
+                            <m:r>
+                              <a:rPr lang="fr-FR" sz="2400" i="1">
+                                <a:latin typeface="Cambria Math" panose="02040503050406030204" pitchFamily="18" charset="0"/>
+                              </a:rPr>
+                              <m:t>1</m:t>
                             </m:r>
                           </m:sub>
                           <m:sup>
@@ -24520,7 +25815,16 @@
                             </a:solidFill>
                             <a:latin typeface="Cambria Math" panose="02040503050406030204" pitchFamily="18" charset="0"/>
                           </a:rPr>
-                          <m:t>2!</m:t>
+                          <m:t>2</m:t>
+                        </m:r>
+                        <m:r>
+                          <a:rPr lang="fr-FR" sz="2400" i="1">
+                            <a:solidFill>
+                              <a:schemeClr val="tx1"/>
+                            </a:solidFill>
+                            <a:latin typeface="Cambria Math" panose="02040503050406030204" pitchFamily="18" charset="0"/>
+                          </a:rPr>
+                          <m:t>!</m:t>
                         </m:r>
                       </m:den>
                     </m:f>
@@ -24788,7 +26092,16 @@
                             </a:solidFill>
                             <a:latin typeface="Cambria Math" panose="02040503050406030204" pitchFamily="18" charset="0"/>
                           </a:rPr>
-                          <m:t>3!</m:t>
+                          <m:t>3</m:t>
+                        </m:r>
+                        <m:r>
+                          <a:rPr lang="fr-FR" sz="2400" i="1">
+                            <a:solidFill>
+                              <a:srgbClr val="FF0000"/>
+                            </a:solidFill>
+                            <a:latin typeface="Cambria Math" panose="02040503050406030204" pitchFamily="18" charset="0"/>
+                          </a:rPr>
+                          <m:t>!</m:t>
                         </m:r>
                       </m:den>
                     </m:f>
@@ -24960,7 +26273,13 @@
                           <a:rPr lang="fr-FR" sz="2400" i="1">
                             <a:latin typeface="Cambria Math" panose="02040503050406030204" pitchFamily="18" charset="0"/>
                           </a:rPr>
-                          <m:t>4!</m:t>
+                          <m:t>4</m:t>
+                        </m:r>
+                        <m:r>
+                          <a:rPr lang="fr-FR" sz="2400" i="1">
+                            <a:latin typeface="Cambria Math" panose="02040503050406030204" pitchFamily="18" charset="0"/>
+                          </a:rPr>
+                          <m:t>!</m:t>
                         </m:r>
                       </m:den>
                     </m:f>
@@ -25391,7 +26710,13 @@
                           <a:rPr lang="fr-FR" sz="2400" i="1">
                             <a:latin typeface="Cambria Math" panose="02040503050406030204" pitchFamily="18" charset="0"/>
                           </a:rPr>
-                          <m:t>2!</m:t>
+                          <m:t>2</m:t>
+                        </m:r>
+                        <m:r>
+                          <a:rPr lang="fr-FR" sz="2400" i="1">
+                            <a:latin typeface="Cambria Math" panose="02040503050406030204" pitchFamily="18" charset="0"/>
+                          </a:rPr>
+                          <m:t>!</m:t>
                         </m:r>
                       </m:den>
                     </m:f>
@@ -25659,7 +26984,16 @@
                             </a:solidFill>
                             <a:latin typeface="Cambria Math" panose="02040503050406030204" pitchFamily="18" charset="0"/>
                           </a:rPr>
-                          <m:t>3!</m:t>
+                          <m:t>3</m:t>
+                        </m:r>
+                        <m:r>
+                          <a:rPr lang="fr-FR" sz="2400" i="1">
+                            <a:solidFill>
+                              <a:srgbClr val="FF0000"/>
+                            </a:solidFill>
+                            <a:latin typeface="Cambria Math" panose="02040503050406030204" pitchFamily="18" charset="0"/>
+                          </a:rPr>
+                          <m:t>!</m:t>
                         </m:r>
                       </m:den>
                     </m:f>
@@ -25831,7 +27165,13 @@
                           <a:rPr lang="fr-FR" sz="2400" i="1">
                             <a:latin typeface="Cambria Math" panose="02040503050406030204" pitchFamily="18" charset="0"/>
                           </a:rPr>
-                          <m:t>4!</m:t>
+                          <m:t>4</m:t>
+                        </m:r>
+                        <m:r>
+                          <a:rPr lang="fr-FR" sz="2400" i="1">
+                            <a:latin typeface="Cambria Math" panose="02040503050406030204" pitchFamily="18" charset="0"/>
+                          </a:rPr>
+                          <m:t>!</m:t>
                         </m:r>
                       </m:den>
                     </m:f>
@@ -26354,7 +27694,13 @@
                           <a:rPr lang="fr-FR" sz="2400" i="1">
                             <a:latin typeface="Cambria Math" panose="02040503050406030204" pitchFamily="18" charset="0"/>
                           </a:rPr>
-                          <m:t>4!</m:t>
+                          <m:t>4</m:t>
+                        </m:r>
+                        <m:r>
+                          <a:rPr lang="fr-FR" sz="2400" i="1">
+                            <a:latin typeface="Cambria Math" panose="02040503050406030204" pitchFamily="18" charset="0"/>
+                          </a:rPr>
+                          <m:t>!</m:t>
                         </m:r>
                       </m:den>
                     </m:f>

--- a/projet_final/projet_final/MEC8211-Projet-final-Presentation.pptx
+++ b/projet_final/projet_final/MEC8211-Projet-final-Presentation.pptx
@@ -6196,42 +6196,6 @@
           <a:chExt cx="0" cy="0"/>
         </a:xfrm>
       </p:grpSpPr>
-      <p:sp>
-        <p:nvSpPr>
-          <p:cNvPr id="2" name="Title 1">
-            <a:extLst>
-              <a:ext uri="{FF2B5EF4-FFF2-40B4-BE49-F238E27FC236}">
-                <a16:creationId xmlns:a16="http://schemas.microsoft.com/office/drawing/2014/main" id="{A918AE09-663A-81B9-7889-A42F5868E2D6}"/>
-              </a:ext>
-            </a:extLst>
-          </p:cNvPr>
-          <p:cNvSpPr>
-            <a:spLocks noGrp="1"/>
-          </p:cNvSpPr>
-          <p:nvPr>
-            <p:ph type="title"/>
-          </p:nvPr>
-        </p:nvSpPr>
-        <p:spPr>
-          <a:xfrm>
-            <a:off x="838200" y="365125"/>
-            <a:ext cx="7894090" cy="808809"/>
-          </a:xfrm>
-        </p:spPr>
-        <p:txBody>
-          <a:bodyPr>
-            <a:normAutofit/>
-          </a:bodyPr>
-          <a:lstStyle/>
-          <a:p>
-            <a:r>
-              <a:rPr lang="fr-FR" dirty="0"/>
-              <a:t>Validation – erreur de simulation	:</a:t>
-            </a:r>
-            <a:endParaRPr lang="en-US" dirty="0"/>
-          </a:p>
-        </p:txBody>
-      </p:sp>
       <mc:AlternateContent xmlns:mc="http://schemas.openxmlformats.org/markup-compatibility/2006">
         <mc:Choice xmlns:a14="http://schemas.microsoft.com/office/drawing/2010/main" Requires="a14">
           <p:sp>
@@ -6252,13 +6216,13 @@
             </p:nvSpPr>
             <p:spPr>
               <a:xfrm>
-                <a:off x="491491" y="1173934"/>
-                <a:ext cx="7486650" cy="2347163"/>
+                <a:off x="491491" y="1417145"/>
+                <a:ext cx="7486650" cy="2103952"/>
               </a:xfrm>
             </p:spPr>
             <p:txBody>
               <a:bodyPr>
-                <a:normAutofit fontScale="92500"/>
+                <a:normAutofit lnSpcReduction="10000"/>
               </a:bodyPr>
               <a:lstStyle/>
               <a:p>
@@ -6290,22 +6254,7 @@
                         <a:rPr lang="fr-FR" sz="2000" b="0" i="1" smtClean="0">
                           <a:latin typeface="Cambria Math" panose="02040503050406030204" pitchFamily="18" charset="0"/>
                         </a:rPr>
-                        <m:t> = </m:t>
-                      </m:r>
-                      <m:r>
-                        <m:rPr>
-                          <m:sty m:val="p"/>
-                        </m:rPr>
-                        <a:rPr lang="fr-FR" sz="2000" b="0" i="1" smtClean="0">
-                          <a:latin typeface="Cambria Math" panose="02040503050406030204" pitchFamily="18" charset="0"/>
-                        </a:rPr>
-                        <m:t>ye</m:t>
-                      </m:r>
-                      <m:r>
-                        <a:rPr lang="fr-FR" sz="2000" b="0" i="1" smtClean="0">
-                          <a:latin typeface="Cambria Math" panose="02040503050406030204" pitchFamily="18" charset="0"/>
-                        </a:rPr>
-                        <m:t> − </m:t>
+                        <m:t> =  </m:t>
                       </m:r>
                       <m:r>
                         <m:rPr>
@@ -6322,13 +6271,25 @@
                         </a:rPr>
                         <m:t> </m:t>
                       </m:r>
+                      <m:r>
+                        <a:rPr lang="fr-FR" sz="2000" b="0" i="1" smtClean="0">
+                          <a:latin typeface="Cambria Math" panose="02040503050406030204" pitchFamily="18" charset="0"/>
+                        </a:rPr>
+                        <m:t>- </m:t>
+                      </m:r>
+                      <m:r>
+                        <m:rPr>
+                          <m:sty m:val="p"/>
+                        </m:rPr>
+                        <a:rPr lang="fr-FR" sz="2000" b="0" i="1" smtClean="0">
+                          <a:latin typeface="Cambria Math" panose="02040503050406030204" pitchFamily="18" charset="0"/>
+                        </a:rPr>
+                        <m:t>ye</m:t>
+                      </m:r>
                     </m:oMath>
                   </m:oMathPara>
                 </a14:m>
-                <a:endParaRPr lang="fr-FR" sz="2000" dirty="0"/>
-              </a:p>
-              <a:p>
-                <a:endParaRPr lang="fr-FR" sz="2000" dirty="0"/>
+                <a:endParaRPr lang="fr-FR" sz="2000" baseline="-25000" dirty="0"/>
               </a:p>
               <a:p>
                 <a:r>
@@ -6375,13 +6336,13 @@
             </p:nvSpPr>
             <p:spPr>
               <a:xfrm>
-                <a:off x="491491" y="1173934"/>
-                <a:ext cx="7486650" cy="2347163"/>
+                <a:off x="491491" y="1417145"/>
+                <a:ext cx="7486650" cy="2103952"/>
               </a:xfrm>
               <a:blipFill>
                 <a:blip r:embed="rId2"/>
                 <a:stretch>
-                  <a:fillRect l="-651" t="-779" r="-81"/>
+                  <a:fillRect l="-733"/>
                 </a:stretch>
               </a:blipFill>
             </p:spPr>
@@ -6652,6 +6613,40 @@
           </a:p>
         </p:txBody>
       </p:sp>
+      <p:sp>
+        <p:nvSpPr>
+          <p:cNvPr id="6" name="Title 1">
+            <a:extLst>
+              <a:ext uri="{FF2B5EF4-FFF2-40B4-BE49-F238E27FC236}">
+                <a16:creationId xmlns:a16="http://schemas.microsoft.com/office/drawing/2014/main" id="{25446CCA-7537-8071-3E29-39F463004EBB}"/>
+              </a:ext>
+            </a:extLst>
+          </p:cNvPr>
+          <p:cNvSpPr>
+            <a:spLocks noGrp="1"/>
+          </p:cNvSpPr>
+          <p:nvPr>
+            <p:ph type="title"/>
+          </p:nvPr>
+        </p:nvSpPr>
+        <p:spPr>
+          <a:xfrm>
+            <a:off x="838200" y="365125"/>
+            <a:ext cx="10515600" cy="1325563"/>
+          </a:xfrm>
+        </p:spPr>
+        <p:txBody>
+          <a:bodyPr/>
+          <a:lstStyle/>
+          <a:p>
+            <a:r>
+              <a:rPr lang="fr-FR" dirty="0"/>
+              <a:t>Validation - erreur simulation :</a:t>
+            </a:r>
+            <a:endParaRPr lang="en-US" dirty="0"/>
+          </a:p>
+        </p:txBody>
+      </p:sp>
     </p:spTree>
     <p:extLst>
       <p:ext uri="{BB962C8B-B14F-4D97-AF65-F5344CB8AC3E}">
@@ -6705,7 +6700,7 @@
           <a:p>
             <a:r>
               <a:rPr lang="fr-FR" dirty="0"/>
-              <a:t>Validation - erreur de simulation :</a:t>
+              <a:t>Validation - erreur simulation :</a:t>
             </a:r>
             <a:endParaRPr lang="en-US" dirty="0"/>
           </a:p>
@@ -7078,8 +7073,8 @@
           </a:fontRef>
         </p:style>
       </p:cxnSp>
-      <mc:AlternateContent xmlns:mc="http://schemas.openxmlformats.org/markup-compatibility/2006">
-        <mc:Choice xmlns:a14="http://schemas.microsoft.com/office/drawing/2010/main" Requires="a14">
+      <mc:AlternateContent xmlns:mc="http://schemas.openxmlformats.org/markup-compatibility/2006" xmlns:a14="http://schemas.microsoft.com/office/drawing/2010/main">
+        <mc:Choice Requires="a14">
           <p:sp>
             <p:nvSpPr>
               <p:cNvPr id="58" name="TextBox 57">
@@ -7261,7 +7256,14 @@
                         <a:latin typeface="Cambria Math" panose="02040503050406030204" pitchFamily="18" charset="0"/>
                         <a:sym typeface="Wingdings" panose="05000000000000000000" pitchFamily="2" charset="2"/>
                       </a:rPr>
-                      <m:t> = 100</m:t>
+                      <m:t> = </m:t>
+                    </m:r>
+                    <m:r>
+                      <a:rPr lang="fr-FR" b="0" i="1" smtClean="0">
+                        <a:latin typeface="Cambria Math" panose="02040503050406030204" pitchFamily="18" charset="0"/>
+                        <a:sym typeface="Wingdings" panose="05000000000000000000" pitchFamily="2" charset="2"/>
+                      </a:rPr>
+                      <m:t>100</m:t>
                     </m:r>
                     <m:r>
                       <m:rPr>
@@ -7295,7 +7297,14 @@
                         <a:latin typeface="Cambria Math" panose="02040503050406030204" pitchFamily="18" charset="0"/>
                         <a:sym typeface="Wingdings" panose="05000000000000000000" pitchFamily="2" charset="2"/>
                       </a:rPr>
-                      <m:t>=2</m:t>
+                      <m:t>=</m:t>
+                    </m:r>
+                    <m:r>
+                      <a:rPr lang="fr-FR" b="0" i="1" smtClean="0">
+                        <a:latin typeface="Cambria Math" panose="02040503050406030204" pitchFamily="18" charset="0"/>
+                        <a:sym typeface="Wingdings" panose="05000000000000000000" pitchFamily="2" charset="2"/>
+                      </a:rPr>
+                      <m:t>2</m:t>
                     </m:r>
                   </m:oMath>
                 </a14:m>
@@ -7361,7 +7370,28 @@
                         <a:latin typeface="Cambria Math" panose="02040503050406030204" pitchFamily="18" charset="0"/>
                         <a:sym typeface="Wingdings" panose="05000000000000000000" pitchFamily="2" charset="2"/>
                       </a:rPr>
-                      <m:t>= 0.6</m:t>
+                      <m:t>= </m:t>
+                    </m:r>
+                    <m:r>
+                      <a:rPr lang="fr-FR" b="0" i="1" smtClean="0">
+                        <a:latin typeface="Cambria Math" panose="02040503050406030204" pitchFamily="18" charset="0"/>
+                        <a:sym typeface="Wingdings" panose="05000000000000000000" pitchFamily="2" charset="2"/>
+                      </a:rPr>
+                      <m:t>0</m:t>
+                    </m:r>
+                    <m:r>
+                      <a:rPr lang="fr-FR" b="0" i="1" smtClean="0">
+                        <a:latin typeface="Cambria Math" panose="02040503050406030204" pitchFamily="18" charset="0"/>
+                        <a:sym typeface="Wingdings" panose="05000000000000000000" pitchFamily="2" charset="2"/>
+                      </a:rPr>
+                      <m:t>.</m:t>
+                    </m:r>
+                    <m:r>
+                      <a:rPr lang="fr-FR" b="0" i="1" smtClean="0">
+                        <a:latin typeface="Cambria Math" panose="02040503050406030204" pitchFamily="18" charset="0"/>
+                        <a:sym typeface="Wingdings" panose="05000000000000000000" pitchFamily="2" charset="2"/>
+                      </a:rPr>
+                      <m:t>6</m:t>
                     </m:r>
                     <m:r>
                       <m:rPr>
@@ -7398,7 +7428,28 @@
                         <a:latin typeface="Cambria Math" panose="02040503050406030204" pitchFamily="18" charset="0"/>
                         <a:sym typeface="Wingdings" panose="05000000000000000000" pitchFamily="2" charset="2"/>
                       </a:rPr>
-                      <m:t> = 0.3</m:t>
+                      <m:t> = </m:t>
+                    </m:r>
+                    <m:r>
+                      <a:rPr lang="fr-FR" b="0" i="1" smtClean="0">
+                        <a:latin typeface="Cambria Math" panose="02040503050406030204" pitchFamily="18" charset="0"/>
+                        <a:sym typeface="Wingdings" panose="05000000000000000000" pitchFamily="2" charset="2"/>
+                      </a:rPr>
+                      <m:t>0</m:t>
+                    </m:r>
+                    <m:r>
+                      <a:rPr lang="fr-FR" b="0" i="1" smtClean="0">
+                        <a:latin typeface="Cambria Math" panose="02040503050406030204" pitchFamily="18" charset="0"/>
+                        <a:sym typeface="Wingdings" panose="05000000000000000000" pitchFamily="2" charset="2"/>
+                      </a:rPr>
+                      <m:t>.</m:t>
+                    </m:r>
+                    <m:r>
+                      <a:rPr lang="fr-FR" b="0" i="1" smtClean="0">
+                        <a:latin typeface="Cambria Math" panose="02040503050406030204" pitchFamily="18" charset="0"/>
+                        <a:sym typeface="Wingdings" panose="05000000000000000000" pitchFamily="2" charset="2"/>
+                      </a:rPr>
+                      <m:t>3</m:t>
                     </m:r>
                   </m:oMath>
                 </a14:m>
@@ -7419,7 +7470,7 @@
             </p:txBody>
           </p:sp>
         </mc:Choice>
-        <mc:Fallback>
+        <mc:Fallback xmlns="">
           <p:sp>
             <p:nvSpPr>
               <p:cNvPr id="58" name="TextBox 57">
@@ -7766,7 +7817,7 @@
             <p:spPr>
               <a:xfrm>
                 <a:off x="463497" y="1690688"/>
-                <a:ext cx="4512524" cy="3929858"/>
+                <a:ext cx="4512524" cy="3652859"/>
               </a:xfrm>
               <a:prstGeom prst="rect">
                 <a:avLst/>
@@ -7923,7 +7974,13 @@
                                 <a:rPr lang="fr-FR" sz="2400" i="1">
                                   <a:latin typeface="Cambria Math" panose="02040503050406030204" pitchFamily="18" charset="0"/>
                                 </a:rPr>
-                                <m:t>=1</m:t>
+                                <m:t>=</m:t>
+                              </m:r>
+                              <m:r>
+                                <a:rPr lang="fr-FR" sz="2400" i="1">
+                                  <a:latin typeface="Cambria Math" panose="02040503050406030204" pitchFamily="18" charset="0"/>
+                                </a:rPr>
+                                <m:t>1</m:t>
                               </m:r>
                             </m:sub>
                             <m:sup>
@@ -8053,13 +8110,43 @@
                         <a:rPr lang="fr-FR" sz="2400" b="0" i="1" smtClean="0">
                           <a:latin typeface="Cambria Math" panose="02040503050406030204" pitchFamily="18" charset="0"/>
                         </a:rPr>
-                        <m:t>= 11.8 </m:t>
+                        <m:t>= </m:t>
+                      </m:r>
+                      <m:r>
+                        <a:rPr lang="fr-FR" sz="2400" b="0" i="1" smtClean="0">
+                          <a:latin typeface="Cambria Math" panose="02040503050406030204" pitchFamily="18" charset="0"/>
+                        </a:rPr>
+                        <m:t>11</m:t>
+                      </m:r>
+                      <m:r>
+                        <a:rPr lang="fr-FR" sz="2400" b="0" i="1" smtClean="0">
+                          <a:latin typeface="Cambria Math" panose="02040503050406030204" pitchFamily="18" charset="0"/>
+                        </a:rPr>
+                        <m:t>.</m:t>
+                      </m:r>
+                      <m:r>
+                        <a:rPr lang="fr-FR" sz="2400" b="0" i="1" smtClean="0">
+                          <a:latin typeface="Cambria Math" panose="02040503050406030204" pitchFamily="18" charset="0"/>
+                        </a:rPr>
+                        <m:t>8</m:t>
+                      </m:r>
+                      <m:r>
+                        <a:rPr lang="fr-FR" sz="2400" b="0" i="1" smtClean="0">
+                          <a:latin typeface="Cambria Math" panose="02040503050406030204" pitchFamily="18" charset="0"/>
+                        </a:rPr>
+                        <m:t> </m:t>
                       </m:r>
                       <m:r>
                         <a:rPr lang="fr-FR" sz="2400" b="0" i="1" smtClean="0">
                           <a:latin typeface="Cambria Math" panose="02040503050406030204" pitchFamily="18" charset="0"/>
                         </a:rPr>
                         <m:t>𝐾</m:t>
+                      </m:r>
+                      <m:r>
+                        <a:rPr lang="fr-FR" sz="2400" b="0" i="1" smtClean="0">
+                          <a:latin typeface="Cambria Math" panose="02040503050406030204" pitchFamily="18" charset="0"/>
+                        </a:rPr>
+                        <m:t>*</m:t>
                       </m:r>
                     </m:oMath>
                   </m:oMathPara>
@@ -8068,32 +8155,6 @@
               </a:p>
               <a:p>
                 <a:endParaRPr lang="fr-FR" dirty="0"/>
-              </a:p>
-              <a:p>
-                <a:r>
-                  <a:rPr lang="en-US" dirty="0" err="1"/>
-                  <a:t>Calculer</a:t>
-                </a:r>
-                <a:r>
-                  <a:rPr lang="en-US" dirty="0"/>
-                  <a:t> pour 4 </a:t>
-                </a:r>
-                <a:r>
-                  <a:rPr lang="en-US" dirty="0" err="1"/>
-                  <a:t>valeurs</a:t>
-                </a:r>
-                <a:r>
-                  <a:rPr lang="en-US" dirty="0"/>
-                  <a:t> de </a:t>
-                </a:r>
-                <a:r>
-                  <a:rPr lang="en-US" dirty="0" err="1"/>
-                  <a:t>températures</a:t>
-                </a:r>
-                <a:r>
-                  <a:rPr lang="en-US" dirty="0"/>
-                  <a:t> </a:t>
-                </a:r>
               </a:p>
             </p:txBody>
           </p:sp>
@@ -8116,7 +8177,7 @@
             <p:spPr>
               <a:xfrm>
                 <a:off x="463497" y="1690688"/>
-                <a:ext cx="4512524" cy="3929858"/>
+                <a:ext cx="4512524" cy="3652859"/>
               </a:xfrm>
               <a:prstGeom prst="rect">
                 <a:avLst/>
@@ -8124,7 +8185,7 @@
               <a:blipFill>
                 <a:blip r:embed="rId3"/>
                 <a:stretch>
-                  <a:fillRect l="-2027" t="-1240" b="-1550"/>
+                  <a:fillRect l="-2027" t="-1333"/>
                 </a:stretch>
               </a:blipFill>
             </p:spPr>
@@ -8143,8 +8204,8 @@
           </p:sp>
         </mc:Fallback>
       </mc:AlternateContent>
-      <mc:AlternateContent xmlns:mc="http://schemas.openxmlformats.org/markup-compatibility/2006">
-        <mc:Choice xmlns:a14="http://schemas.microsoft.com/office/drawing/2010/main" Requires="a14">
+      <mc:AlternateContent xmlns:mc="http://schemas.openxmlformats.org/markup-compatibility/2006" xmlns:a14="http://schemas.microsoft.com/office/drawing/2010/main">
+        <mc:Choice Requires="a14">
           <p:sp>
             <p:nvSpPr>
               <p:cNvPr id="3" name="TextBox 2">
@@ -8198,7 +8259,19 @@
                       <a:rPr lang="fr-FR" b="0" i="1" smtClean="0">
                         <a:latin typeface="Cambria Math" panose="02040503050406030204" pitchFamily="18" charset="0"/>
                       </a:rPr>
-                      <m:t>=7850 </m:t>
+                      <m:t>=</m:t>
+                    </m:r>
+                    <m:r>
+                      <a:rPr lang="fr-FR" b="0" i="1" smtClean="0">
+                        <a:latin typeface="Cambria Math" panose="02040503050406030204" pitchFamily="18" charset="0"/>
+                      </a:rPr>
+                      <m:t>7850</m:t>
+                    </m:r>
+                    <m:r>
+                      <a:rPr lang="fr-FR" b="0" i="1" smtClean="0">
+                        <a:latin typeface="Cambria Math" panose="02040503050406030204" pitchFamily="18" charset="0"/>
+                      </a:rPr>
+                      <m:t> </m:t>
                     </m:r>
                     <m:r>
                       <a:rPr lang="fr-FR" b="0" i="1" smtClean="0">
@@ -8260,7 +8333,31 @@
                       <a:rPr lang="fr-FR" b="0" i="1" smtClean="0">
                         <a:latin typeface="Cambria Math" panose="02040503050406030204" pitchFamily="18" charset="0"/>
                       </a:rPr>
-                      <m:t>=0.525 </m:t>
+                      <m:t>=</m:t>
+                    </m:r>
+                    <m:r>
+                      <a:rPr lang="fr-FR" b="0" i="1" smtClean="0">
+                        <a:latin typeface="Cambria Math" panose="02040503050406030204" pitchFamily="18" charset="0"/>
+                      </a:rPr>
+                      <m:t>0</m:t>
+                    </m:r>
+                    <m:r>
+                      <a:rPr lang="fr-FR" b="0" i="1" smtClean="0">
+                        <a:latin typeface="Cambria Math" panose="02040503050406030204" pitchFamily="18" charset="0"/>
+                      </a:rPr>
+                      <m:t>.</m:t>
+                    </m:r>
+                    <m:r>
+                      <a:rPr lang="fr-FR" b="0" i="1" smtClean="0">
+                        <a:latin typeface="Cambria Math" panose="02040503050406030204" pitchFamily="18" charset="0"/>
+                      </a:rPr>
+                      <m:t>525</m:t>
+                    </m:r>
+                    <m:r>
+                      <a:rPr lang="fr-FR" b="0" i="1" smtClean="0">
+                        <a:latin typeface="Cambria Math" panose="02040503050406030204" pitchFamily="18" charset="0"/>
+                      </a:rPr>
+                      <m:t> </m:t>
                     </m:r>
                   </m:oMath>
                 </a14:m>
@@ -8282,7 +8379,13 @@
                       <a:rPr lang="fr-FR" b="0" i="1" smtClean="0">
                         <a:latin typeface="Cambria Math" panose="02040503050406030204" pitchFamily="18" charset="0"/>
                       </a:rPr>
-                      <m:t>=10</m:t>
+                      <m:t>=</m:t>
+                    </m:r>
+                    <m:r>
+                      <a:rPr lang="fr-FR" b="0" i="1" smtClean="0">
+                        <a:latin typeface="Cambria Math" panose="02040503050406030204" pitchFamily="18" charset="0"/>
+                      </a:rPr>
+                      <m:t>10</m:t>
                     </m:r>
                     <m:r>
                       <m:rPr>
@@ -8333,7 +8436,9 @@
                       </m:sup>
                     </m:sSup>
                     <m:r>
-                      <a:rPr lang="fr-FR" b="0" i="1" smtClean="0"/>
+                      <a:rPr lang="fr-FR" b="0" i="1" smtClean="0">
+                        <a:latin typeface="Cambria Math" panose="02040503050406030204" pitchFamily="18" charset="0"/>
+                      </a:rPr>
                       <m:t>⋅</m:t>
                     </m:r>
                     <m:r>
@@ -8384,7 +8489,31 @@
                       <a:rPr lang="fr-FR" b="0" i="1" smtClean="0">
                         <a:latin typeface="Cambria Math" panose="02040503050406030204" pitchFamily="18" charset="0"/>
                       </a:rPr>
-                      <m:t>=1118.15 </m:t>
+                      <m:t>=</m:t>
+                    </m:r>
+                    <m:r>
+                      <a:rPr lang="fr-FR" b="0" i="1" smtClean="0">
+                        <a:latin typeface="Cambria Math" panose="02040503050406030204" pitchFamily="18" charset="0"/>
+                      </a:rPr>
+                      <m:t>1118</m:t>
+                    </m:r>
+                    <m:r>
+                      <a:rPr lang="fr-FR" b="0" i="1" smtClean="0">
+                        <a:latin typeface="Cambria Math" panose="02040503050406030204" pitchFamily="18" charset="0"/>
+                      </a:rPr>
+                      <m:t>.</m:t>
+                    </m:r>
+                    <m:r>
+                      <a:rPr lang="fr-FR" b="0" i="1" smtClean="0">
+                        <a:latin typeface="Cambria Math" panose="02040503050406030204" pitchFamily="18" charset="0"/>
+                      </a:rPr>
+                      <m:t>15</m:t>
+                    </m:r>
+                    <m:r>
+                      <a:rPr lang="fr-FR" b="0" i="1" smtClean="0">
+                        <a:latin typeface="Cambria Math" panose="02040503050406030204" pitchFamily="18" charset="0"/>
+                      </a:rPr>
+                      <m:t> </m:t>
                     </m:r>
                     <m:r>
                       <m:rPr>
@@ -8434,7 +8563,31 @@
                       <a:rPr lang="fr-FR" b="0" i="1" smtClean="0">
                         <a:latin typeface="Cambria Math" panose="02040503050406030204" pitchFamily="18" charset="0"/>
                       </a:rPr>
-                      <m:t>=298.15 </m:t>
+                      <m:t>=</m:t>
+                    </m:r>
+                    <m:r>
+                      <a:rPr lang="fr-FR" b="0" i="1" smtClean="0">
+                        <a:latin typeface="Cambria Math" panose="02040503050406030204" pitchFamily="18" charset="0"/>
+                      </a:rPr>
+                      <m:t>298</m:t>
+                    </m:r>
+                    <m:r>
+                      <a:rPr lang="fr-FR" b="0" i="1" smtClean="0">
+                        <a:latin typeface="Cambria Math" panose="02040503050406030204" pitchFamily="18" charset="0"/>
+                      </a:rPr>
+                      <m:t>.</m:t>
+                    </m:r>
+                    <m:r>
+                      <a:rPr lang="fr-FR" b="0" i="1" smtClean="0">
+                        <a:latin typeface="Cambria Math" panose="02040503050406030204" pitchFamily="18" charset="0"/>
+                      </a:rPr>
+                      <m:t>15</m:t>
+                    </m:r>
+                    <m:r>
+                      <a:rPr lang="fr-FR" b="0" i="1" smtClean="0">
+                        <a:latin typeface="Cambria Math" panose="02040503050406030204" pitchFamily="18" charset="0"/>
+                      </a:rPr>
+                      <m:t> </m:t>
                     </m:r>
                     <m:r>
                       <m:rPr>
@@ -8471,7 +8624,25 @@
                       <a:rPr lang="fr-FR" b="0" i="1" smtClean="0">
                         <a:latin typeface="Cambria Math" panose="02040503050406030204" pitchFamily="18" charset="0"/>
                       </a:rPr>
-                      <m:t>=44.5</m:t>
+                      <m:t>=</m:t>
+                    </m:r>
+                    <m:r>
+                      <a:rPr lang="fr-FR" b="0" i="1" smtClean="0">
+                        <a:latin typeface="Cambria Math" panose="02040503050406030204" pitchFamily="18" charset="0"/>
+                      </a:rPr>
+                      <m:t>44</m:t>
+                    </m:r>
+                    <m:r>
+                      <a:rPr lang="fr-FR" b="0" i="1" smtClean="0">
+                        <a:latin typeface="Cambria Math" panose="02040503050406030204" pitchFamily="18" charset="0"/>
+                      </a:rPr>
+                      <m:t>.</m:t>
+                    </m:r>
+                    <m:r>
+                      <a:rPr lang="fr-FR" b="0" i="1" smtClean="0">
+                        <a:latin typeface="Cambria Math" panose="02040503050406030204" pitchFamily="18" charset="0"/>
+                      </a:rPr>
+                      <m:t>5</m:t>
                     </m:r>
                     <m:r>
                       <a:rPr lang="fr-FR" b="0" i="1" smtClean="0">
@@ -8530,7 +8701,7 @@
             </p:txBody>
           </p:sp>
         </mc:Choice>
-        <mc:Fallback>
+        <mc:Fallback xmlns="">
           <p:sp>
             <p:nvSpPr>
               <p:cNvPr id="3" name="TextBox 2">
@@ -8627,7 +8798,7 @@
             </p:nvSpPr>
             <p:spPr>
               <a:xfrm>
-                <a:off x="5350724" y="4465983"/>
+                <a:off x="5350724" y="4441575"/>
                 <a:ext cx="1920240" cy="1754326"/>
               </a:xfrm>
               <a:prstGeom prst="rect">
@@ -8641,7 +8812,6 @@
               </a:bodyPr>
               <a:lstStyle/>
               <a:p>
-                <a:pPr/>
                 <a:r>
                   <a:rPr lang="fr-FR" b="0" i="0" dirty="0">
                     <a:latin typeface="Cambria Math" panose="02040503050406030204" pitchFamily="18" charset="0"/>
@@ -8685,7 +8855,13 @@
                         <a:rPr lang="fr-FR" b="0" i="1" smtClean="0">
                           <a:latin typeface="Cambria Math" panose="02040503050406030204" pitchFamily="18" charset="0"/>
                         </a:rPr>
-                        <m:t> = 20</m:t>
+                        <m:t> = </m:t>
+                      </m:r>
+                      <m:r>
+                        <a:rPr lang="fr-FR" b="0" i="1" smtClean="0">
+                          <a:latin typeface="Cambria Math" panose="02040503050406030204" pitchFamily="18" charset="0"/>
+                        </a:rPr>
+                        <m:t>20</m:t>
                       </m:r>
                     </m:oMath>
                   </m:oMathPara>
@@ -8715,7 +8891,31 @@
                         <a:rPr lang="fr-FR" b="0" i="1" smtClean="0">
                           <a:latin typeface="Cambria Math" panose="02040503050406030204" pitchFamily="18" charset="0"/>
                         </a:rPr>
-                        <m:t> = 0.025 </m:t>
+                        <m:t> = </m:t>
+                      </m:r>
+                      <m:r>
+                        <a:rPr lang="fr-FR" b="0" i="1" smtClean="0">
+                          <a:latin typeface="Cambria Math" panose="02040503050406030204" pitchFamily="18" charset="0"/>
+                        </a:rPr>
+                        <m:t>0</m:t>
+                      </m:r>
+                      <m:r>
+                        <a:rPr lang="fr-FR" b="0" i="1" smtClean="0">
+                          <a:latin typeface="Cambria Math" panose="02040503050406030204" pitchFamily="18" charset="0"/>
+                        </a:rPr>
+                        <m:t>.</m:t>
+                      </m:r>
+                      <m:r>
+                        <a:rPr lang="fr-FR" b="0" i="1" smtClean="0">
+                          <a:latin typeface="Cambria Math" panose="02040503050406030204" pitchFamily="18" charset="0"/>
+                        </a:rPr>
+                        <m:t>025</m:t>
+                      </m:r>
+                      <m:r>
+                        <a:rPr lang="fr-FR" b="0" i="1" smtClean="0">
+                          <a:latin typeface="Cambria Math" panose="02040503050406030204" pitchFamily="18" charset="0"/>
+                        </a:rPr>
+                        <m:t> </m:t>
                       </m:r>
                       <m:r>
                         <m:rPr>
@@ -8734,7 +8934,6 @@
                 </a:endParaRPr>
               </a:p>
               <a:p>
-                <a:pPr/>
                 <a:r>
                   <a:rPr lang="fr-FR" b="0" i="0" dirty="0">
                     <a:latin typeface="Cambria Math" panose="02040503050406030204" pitchFamily="18" charset="0"/>
@@ -8769,7 +8968,31 @@
                         <a:rPr lang="fr-FR" b="0" i="1" smtClean="0">
                           <a:latin typeface="Cambria Math" panose="02040503050406030204" pitchFamily="18" charset="0"/>
                         </a:rPr>
-                        <m:t> =0.6 </m:t>
+                        <m:t> =</m:t>
+                      </m:r>
+                      <m:r>
+                        <a:rPr lang="fr-FR" b="0" i="1" smtClean="0">
+                          <a:latin typeface="Cambria Math" panose="02040503050406030204" pitchFamily="18" charset="0"/>
+                        </a:rPr>
+                        <m:t>0</m:t>
+                      </m:r>
+                      <m:r>
+                        <a:rPr lang="fr-FR" b="0" i="1" smtClean="0">
+                          <a:latin typeface="Cambria Math" panose="02040503050406030204" pitchFamily="18" charset="0"/>
+                        </a:rPr>
+                        <m:t>.</m:t>
+                      </m:r>
+                      <m:r>
+                        <a:rPr lang="fr-FR" b="0" i="1" smtClean="0">
+                          <a:latin typeface="Cambria Math" panose="02040503050406030204" pitchFamily="18" charset="0"/>
+                        </a:rPr>
+                        <m:t>6</m:t>
+                      </m:r>
+                      <m:r>
+                        <a:rPr lang="fr-FR" b="0" i="1" smtClean="0">
+                          <a:latin typeface="Cambria Math" panose="02040503050406030204" pitchFamily="18" charset="0"/>
+                        </a:rPr>
+                        <m:t> </m:t>
                       </m:r>
                       <m:r>
                         <a:rPr lang="fr-FR" b="0" i="1" smtClean="0">
@@ -8811,7 +9034,31 @@
                         <a:rPr lang="fr-FR" b="0" i="1" smtClean="0">
                           <a:latin typeface="Cambria Math" panose="02040503050406030204" pitchFamily="18" charset="0"/>
                         </a:rPr>
-                        <m:t> = 0.3 </m:t>
+                        <m:t> = </m:t>
+                      </m:r>
+                      <m:r>
+                        <a:rPr lang="fr-FR" b="0" i="1" smtClean="0">
+                          <a:latin typeface="Cambria Math" panose="02040503050406030204" pitchFamily="18" charset="0"/>
+                        </a:rPr>
+                        <m:t>0</m:t>
+                      </m:r>
+                      <m:r>
+                        <a:rPr lang="fr-FR" b="0" i="1" smtClean="0">
+                          <a:latin typeface="Cambria Math" panose="02040503050406030204" pitchFamily="18" charset="0"/>
+                        </a:rPr>
+                        <m:t>.</m:t>
+                      </m:r>
+                      <m:r>
+                        <a:rPr lang="fr-FR" b="0" i="1" smtClean="0">
+                          <a:latin typeface="Cambria Math" panose="02040503050406030204" pitchFamily="18" charset="0"/>
+                        </a:rPr>
+                        <m:t>3</m:t>
+                      </m:r>
+                      <m:r>
+                        <a:rPr lang="fr-FR" b="0" i="1" smtClean="0">
+                          <a:latin typeface="Cambria Math" panose="02040503050406030204" pitchFamily="18" charset="0"/>
+                        </a:rPr>
+                        <m:t> </m:t>
                       </m:r>
                       <m:r>
                         <m:rPr>
@@ -8847,7 +9094,7 @@
             </p:nvSpPr>
             <p:spPr>
               <a:xfrm>
-                <a:off x="5350724" y="4465983"/>
+                <a:off x="5350724" y="4441575"/>
                 <a:ext cx="1920240" cy="1754326"/>
               </a:xfrm>
               <a:prstGeom prst="rect">
@@ -8911,6 +9158,84 @@
           </a:prstGeom>
         </p:spPr>
       </p:pic>
+      <p:sp>
+        <p:nvSpPr>
+          <p:cNvPr id="6" name="TextBox 5">
+            <a:extLst>
+              <a:ext uri="{FF2B5EF4-FFF2-40B4-BE49-F238E27FC236}">
+                <a16:creationId xmlns:a16="http://schemas.microsoft.com/office/drawing/2014/main" id="{D48753BC-C2A4-D20F-34BD-5542121EF1D7}"/>
+              </a:ext>
+            </a:extLst>
+          </p:cNvPr>
+          <p:cNvSpPr txBox="1"/>
+          <p:nvPr/>
+        </p:nvSpPr>
+        <p:spPr>
+          <a:xfrm>
+            <a:off x="94745" y="5996226"/>
+            <a:ext cx="4881276" cy="861774"/>
+          </a:xfrm>
+          <a:prstGeom prst="rect">
+            <a:avLst/>
+          </a:prstGeom>
+          <a:noFill/>
+        </p:spPr>
+        <p:txBody>
+          <a:bodyPr wrap="square" rtlCol="0">
+            <a:spAutoFit/>
+          </a:bodyPr>
+          <a:lstStyle/>
+          <a:p>
+            <a:r>
+              <a:rPr lang="en-US" sz="1600" dirty="0"/>
+              <a:t>*</a:t>
+            </a:r>
+            <a:r>
+              <a:rPr lang="en-US" sz="1600" dirty="0" err="1"/>
+              <a:t>Calculé</a:t>
+            </a:r>
+            <a:r>
+              <a:rPr lang="en-US" sz="1600" dirty="0"/>
+              <a:t> pour 4 </a:t>
+            </a:r>
+            <a:r>
+              <a:rPr lang="en-US" sz="1600" dirty="0" err="1"/>
+              <a:t>valeurs</a:t>
+            </a:r>
+            <a:r>
+              <a:rPr lang="en-US" sz="1600" dirty="0"/>
+              <a:t> de temperatures et pour </a:t>
+            </a:r>
+            <a:r>
+              <a:rPr lang="en-US" sz="1600" dirty="0" err="1"/>
+              <a:t>une</a:t>
+            </a:r>
+            <a:r>
+              <a:rPr lang="en-US" sz="1600" dirty="0"/>
+              <a:t> </a:t>
+            </a:r>
+            <a:r>
+              <a:rPr lang="en-US" sz="1600" dirty="0" err="1"/>
+              <a:t>seule</a:t>
+            </a:r>
+            <a:r>
+              <a:rPr lang="en-US" sz="1600" dirty="0"/>
+              <a:t> “</a:t>
+            </a:r>
+            <a:r>
+              <a:rPr lang="en-US" sz="1600" dirty="0" err="1"/>
+              <a:t>expérience</a:t>
+            </a:r>
+            <a:r>
+              <a:rPr lang="en-US" sz="1600" dirty="0"/>
+              <a:t>” </a:t>
+            </a:r>
+          </a:p>
+          <a:p>
+            <a:endParaRPr lang="en-US" dirty="0"/>
+          </a:p>
+        </p:txBody>
+      </p:sp>
     </p:spTree>
     <p:extLst>
       <p:ext uri="{BB962C8B-B14F-4D97-AF65-F5344CB8AC3E}">
@@ -9048,19 +9373,7 @@
                           <a:rPr lang="fr-FR" b="0" i="1" smtClean="0">
                             <a:latin typeface="Cambria Math" panose="02040503050406030204" pitchFamily="18" charset="0"/>
                           </a:rPr>
-                          <m:t>1</m:t>
-                        </m:r>
-                        <m:r>
-                          <a:rPr lang="fr-FR" b="0" i="1" smtClean="0">
-                            <a:latin typeface="Cambria Math" panose="02040503050406030204" pitchFamily="18" charset="0"/>
-                          </a:rPr>
-                          <m:t>.</m:t>
-                        </m:r>
-                        <m:r>
-                          <a:rPr lang="fr-FR" b="0" i="1" smtClean="0">
-                            <a:latin typeface="Cambria Math" panose="02040503050406030204" pitchFamily="18" charset="0"/>
-                          </a:rPr>
-                          <m:t>5</m:t>
+                          <m:t>1.5</m:t>
                         </m:r>
                       </m:num>
                       <m:den>
@@ -9089,31 +9402,7 @@
                       <a:rPr lang="fr-FR" b="0" i="1" smtClean="0">
                         <a:latin typeface="Cambria Math" panose="02040503050406030204" pitchFamily="18" charset="0"/>
                       </a:rPr>
-                      <m:t> = </m:t>
-                    </m:r>
-                    <m:r>
-                      <a:rPr lang="fr-FR" b="0" i="1" smtClean="0">
-                        <a:latin typeface="Cambria Math" panose="02040503050406030204" pitchFamily="18" charset="0"/>
-                      </a:rPr>
-                      <m:t>0</m:t>
-                    </m:r>
-                    <m:r>
-                      <a:rPr lang="fr-FR" b="0" i="1" smtClean="0">
-                        <a:latin typeface="Cambria Math" panose="02040503050406030204" pitchFamily="18" charset="0"/>
-                      </a:rPr>
-                      <m:t>.</m:t>
-                    </m:r>
-                    <m:r>
-                      <a:rPr lang="fr-FR" b="0" i="1" smtClean="0">
-                        <a:latin typeface="Cambria Math" panose="02040503050406030204" pitchFamily="18" charset="0"/>
-                      </a:rPr>
-                      <m:t>87</m:t>
-                    </m:r>
-                    <m:r>
-                      <a:rPr lang="fr-FR" b="0" i="1" smtClean="0">
-                        <a:latin typeface="Cambria Math" panose="02040503050406030204" pitchFamily="18" charset="0"/>
-                      </a:rPr>
-                      <m:t> °</m:t>
+                      <m:t> = 0.87 °</m:t>
                     </m:r>
                     <m:r>
                       <m:rPr>
@@ -9219,19 +9508,7 @@
                             <a:rPr lang="fr-FR" b="0" i="1" smtClean="0">
                               <a:latin typeface="Cambria Math" panose="02040503050406030204" pitchFamily="18" charset="0"/>
                             </a:rPr>
-                            <m:t> + </m:t>
-                          </m:r>
-                          <m:r>
-                            <a:rPr lang="fr-FR" b="0" i="1" smtClean="0">
-                              <a:latin typeface="Cambria Math" panose="02040503050406030204" pitchFamily="18" charset="0"/>
-                            </a:rPr>
-                            <m:t>02</m:t>
-                          </m:r>
-                          <m:r>
-                            <a:rPr lang="fr-FR" b="0" i="1" smtClean="0">
-                              <a:latin typeface="Cambria Math" panose="02040503050406030204" pitchFamily="18" charset="0"/>
-                            </a:rPr>
-                            <m:t> </m:t>
+                            <m:t> + 02 </m:t>
                           </m:r>
                         </m:e>
                       </m:rad>
@@ -9263,31 +9540,7 @@
                         <a:rPr lang="fr-FR" b="0" i="1" smtClean="0">
                           <a:latin typeface="Cambria Math" panose="02040503050406030204" pitchFamily="18" charset="0"/>
                         </a:rPr>
-                        <m:t>=</m:t>
-                      </m:r>
-                      <m:r>
-                        <a:rPr lang="fr-FR" b="0" i="1" smtClean="0">
-                          <a:latin typeface="Cambria Math" panose="02040503050406030204" pitchFamily="18" charset="0"/>
-                        </a:rPr>
-                        <m:t>0</m:t>
-                      </m:r>
-                      <m:r>
-                        <a:rPr lang="fr-FR" b="0" i="1" smtClean="0">
-                          <a:latin typeface="Cambria Math" panose="02040503050406030204" pitchFamily="18" charset="0"/>
-                        </a:rPr>
-                        <m:t>.</m:t>
-                      </m:r>
-                      <m:r>
-                        <a:rPr lang="fr-FR" b="0" i="1" smtClean="0">
-                          <a:latin typeface="Cambria Math" panose="02040503050406030204" pitchFamily="18" charset="0"/>
-                        </a:rPr>
-                        <m:t>87</m:t>
-                      </m:r>
-                      <m:r>
-                        <a:rPr lang="fr-FR" b="0" i="1" smtClean="0">
-                          <a:latin typeface="Cambria Math" panose="02040503050406030204" pitchFamily="18" charset="0"/>
-                        </a:rPr>
-                        <m:t>°</m:t>
+                        <m:t>=0.87°</m:t>
                       </m:r>
                       <m:r>
                         <m:rPr>
@@ -9422,8 +9675,8 @@
           <a:chExt cx="0" cy="0"/>
         </a:xfrm>
       </p:grpSpPr>
-      <mc:AlternateContent xmlns:mc="http://schemas.openxmlformats.org/markup-compatibility/2006">
-        <mc:Choice xmlns:a14="http://schemas.microsoft.com/office/drawing/2010/main" Requires="a14">
+      <mc:AlternateContent xmlns:mc="http://schemas.openxmlformats.org/markup-compatibility/2006" xmlns:a14="http://schemas.microsoft.com/office/drawing/2010/main">
+        <mc:Choice Requires="a14">
           <p:sp>
             <p:nvSpPr>
               <p:cNvPr id="2" name="Title 1">
@@ -9486,7 +9739,7 @@
             </p:txBody>
           </p:sp>
         </mc:Choice>
-        <mc:Fallback>
+        <mc:Fallback xmlns="">
           <p:sp>
             <p:nvSpPr>
               <p:cNvPr id="2" name="Title 1">
@@ -9786,8 +10039,8 @@
           <a:chExt cx="0" cy="0"/>
         </a:xfrm>
       </p:grpSpPr>
-      <mc:AlternateContent xmlns:mc="http://schemas.openxmlformats.org/markup-compatibility/2006">
-        <mc:Choice xmlns:a14="http://schemas.microsoft.com/office/drawing/2010/main" Requires="a14">
+      <mc:AlternateContent xmlns:mc="http://schemas.openxmlformats.org/markup-compatibility/2006" xmlns:a14="http://schemas.microsoft.com/office/drawing/2010/main">
+        <mc:Choice Requires="a14">
           <p:sp>
             <p:nvSpPr>
               <p:cNvPr id="2" name="Title 1">
@@ -9847,7 +10100,7 @@
             </p:txBody>
           </p:sp>
         </mc:Choice>
-        <mc:Fallback>
+        <mc:Fallback xmlns="">
           <p:sp>
             <p:nvSpPr>
               <p:cNvPr id="2" name="Title 1">
@@ -10175,7 +10428,7 @@
                 </a:pPr>
                 <a:r>
                   <a:rPr lang="fr-FR" dirty="0"/>
-                  <a:t>Par la méthode de Monte Carlo </a:t>
+                  <a:t>Par la méthode de Monte Carlo en travaillant sur la température moyenne de surface</a:t>
                 </a:r>
                 <a:endParaRPr lang="fr-FR" b="0" dirty="0"/>
               </a:p>
@@ -10287,8 +10540,8 @@
           </a:p>
         </p:txBody>
       </p:sp>
-      <mc:AlternateContent xmlns:mc="http://schemas.openxmlformats.org/markup-compatibility/2006">
-        <mc:Choice xmlns:a14="http://schemas.microsoft.com/office/drawing/2010/main" Requires="a14">
+      <mc:AlternateContent xmlns:mc="http://schemas.openxmlformats.org/markup-compatibility/2006" xmlns:a14="http://schemas.microsoft.com/office/drawing/2010/main">
+        <mc:Choice Requires="a14">
           <p:sp>
             <p:nvSpPr>
               <p:cNvPr id="3" name="Content Placeholder 2">
@@ -10462,7 +10715,7 @@
             </p:txBody>
           </p:sp>
         </mc:Choice>
-        <mc:Fallback>
+        <mc:Fallback xmlns="">
           <p:sp>
             <p:nvSpPr>
               <p:cNvPr id="3" name="Content Placeholder 2">
@@ -12273,7 +12526,13 @@
                         <a:rPr lang="fr-CA" b="0" i="1" smtClean="0">
                           <a:latin typeface="Cambria Math" panose="02040503050406030204" pitchFamily="18" charset="0"/>
                         </a:rPr>
-                        <m:t>=0</m:t>
+                        <m:t>=</m:t>
+                      </m:r>
+                      <m:r>
+                        <a:rPr lang="fr-CA" b="0" i="1" smtClean="0">
+                          <a:latin typeface="Cambria Math" panose="02040503050406030204" pitchFamily="18" charset="0"/>
+                        </a:rPr>
+                        <m:t>0</m:t>
                       </m:r>
                     </m:oMath>
                   </m:oMathPara>
@@ -13751,7 +14010,13 @@
                               <a:rPr lang="fr-FR" b="0" i="1" smtClean="0">
                                 <a:latin typeface="Cambria Math" panose="02040503050406030204" pitchFamily="18" charset="0"/>
                               </a:rPr>
-                              <m:t>+1</m:t>
+                              <m:t>+</m:t>
+                            </m:r>
+                            <m:r>
+                              <a:rPr lang="fr-FR" b="0" i="1" smtClean="0">
+                                <a:latin typeface="Cambria Math" panose="02040503050406030204" pitchFamily="18" charset="0"/>
+                              </a:rPr>
+                              <m:t>1</m:t>
                             </m:r>
                             <m:r>
                               <a:rPr lang="fr-FR" i="1">
@@ -13808,7 +14073,13 @@
                               <a:rPr lang="fr-FR" b="0" i="1" smtClean="0">
                                 <a:latin typeface="Cambria Math" panose="02040503050406030204" pitchFamily="18" charset="0"/>
                               </a:rPr>
-                              <m:t>−1</m:t>
+                              <m:t>−</m:t>
+                            </m:r>
+                            <m:r>
+                              <a:rPr lang="fr-FR" b="0" i="1" smtClean="0">
+                                <a:latin typeface="Cambria Math" panose="02040503050406030204" pitchFamily="18" charset="0"/>
+                              </a:rPr>
+                              <m:t>1</m:t>
                             </m:r>
                             <m:r>
                               <a:rPr lang="fr-FR" i="1">
@@ -14456,7 +14727,19 @@
                                 <a:rPr lang="fr-FR" sz="2400" i="1">
                                   <a:latin typeface="Cambria Math" panose="02040503050406030204" pitchFamily="18" charset="0"/>
                                 </a:rPr>
-                                <m:t>+1,</m:t>
+                                <m:t>+</m:t>
+                              </m:r>
+                              <m:r>
+                                <a:rPr lang="fr-FR" sz="2400" i="1">
+                                  <a:latin typeface="Cambria Math" panose="02040503050406030204" pitchFamily="18" charset="0"/>
+                                </a:rPr>
+                                <m:t>1</m:t>
+                              </m:r>
+                              <m:r>
+                                <a:rPr lang="fr-FR" sz="2400" i="1">
+                                  <a:latin typeface="Cambria Math" panose="02040503050406030204" pitchFamily="18" charset="0"/>
+                                </a:rPr>
+                                <m:t>,</m:t>
                               </m:r>
                               <m:r>
                                 <a:rPr lang="fr-FR" sz="2400" i="1">
@@ -14564,7 +14847,19 @@
                                 <a:rPr lang="fr-FR" sz="2400" i="1">
                                   <a:latin typeface="Cambria Math" panose="02040503050406030204" pitchFamily="18" charset="0"/>
                                 </a:rPr>
-                                <m:t>−1,</m:t>
+                                <m:t>−</m:t>
+                              </m:r>
+                              <m:r>
+                                <a:rPr lang="fr-FR" sz="2400" i="1">
+                                  <a:latin typeface="Cambria Math" panose="02040503050406030204" pitchFamily="18" charset="0"/>
+                                </a:rPr>
+                                <m:t>1</m:t>
+                              </m:r>
+                              <m:r>
+                                <a:rPr lang="fr-FR" sz="2400" i="1">
+                                  <a:latin typeface="Cambria Math" panose="02040503050406030204" pitchFamily="18" charset="0"/>
+                                </a:rPr>
+                                <m:t>,</m:t>
                               </m:r>
                               <m:r>
                                 <a:rPr lang="fr-FR" sz="2400" i="1">
@@ -14697,7 +14992,19 @@
                                 <a:rPr lang="fr-FR" sz="2400" i="1">
                                   <a:latin typeface="Cambria Math" panose="02040503050406030204" pitchFamily="18" charset="0"/>
                                 </a:rPr>
-                                <m:t>+1,</m:t>
+                                <m:t>+</m:t>
+                              </m:r>
+                              <m:r>
+                                <a:rPr lang="fr-FR" sz="2400" i="1">
+                                  <a:latin typeface="Cambria Math" panose="02040503050406030204" pitchFamily="18" charset="0"/>
+                                </a:rPr>
+                                <m:t>1</m:t>
+                              </m:r>
+                              <m:r>
+                                <a:rPr lang="fr-FR" sz="2400" i="1">
+                                  <a:latin typeface="Cambria Math" panose="02040503050406030204" pitchFamily="18" charset="0"/>
+                                </a:rPr>
+                                <m:t>,</m:t>
                               </m:r>
                               <m:r>
                                 <a:rPr lang="fr-FR" sz="2400" i="1">
@@ -14748,7 +15055,19 @@
                                 <a:rPr lang="fr-FR" sz="2400" i="1">
                                   <a:latin typeface="Cambria Math" panose="02040503050406030204" pitchFamily="18" charset="0"/>
                                 </a:rPr>
-                                <m:t>−1,</m:t>
+                                <m:t>−</m:t>
+                              </m:r>
+                              <m:r>
+                                <a:rPr lang="fr-FR" sz="2400" i="1">
+                                  <a:latin typeface="Cambria Math" panose="02040503050406030204" pitchFamily="18" charset="0"/>
+                                </a:rPr>
+                                <m:t>1</m:t>
+                              </m:r>
+                              <m:r>
+                                <a:rPr lang="fr-FR" sz="2400" i="1">
+                                  <a:latin typeface="Cambria Math" panose="02040503050406030204" pitchFamily="18" charset="0"/>
+                                </a:rPr>
+                                <m:t>,</m:t>
                               </m:r>
                               <m:r>
                                 <a:rPr lang="fr-FR" sz="2400" i="1">
@@ -14845,7 +15164,13 @@
                                 <a:rPr lang="fr-FR" sz="2400" i="1">
                                   <a:latin typeface="Cambria Math" panose="02040503050406030204" pitchFamily="18" charset="0"/>
                                 </a:rPr>
-                                <m:t>+1</m:t>
+                                <m:t>+</m:t>
+                              </m:r>
+                              <m:r>
+                                <a:rPr lang="fr-FR" sz="2400" i="1">
+                                  <a:latin typeface="Cambria Math" panose="02040503050406030204" pitchFamily="18" charset="0"/>
+                                </a:rPr>
+                                <m:t>1</m:t>
                               </m:r>
                             </m:sub>
                             <m:sup>
@@ -14959,7 +15284,13 @@
                                 <a:rPr lang="fr-FR" sz="2400" i="1">
                                   <a:latin typeface="Cambria Math" panose="02040503050406030204" pitchFamily="18" charset="0"/>
                                 </a:rPr>
-                                <m:t>−1</m:t>
+                                <m:t>−</m:t>
+                              </m:r>
+                              <m:r>
+                                <a:rPr lang="fr-FR" sz="2400" i="1">
+                                  <a:latin typeface="Cambria Math" panose="02040503050406030204" pitchFamily="18" charset="0"/>
+                                </a:rPr>
+                                <m:t>1</m:t>
                               </m:r>
                             </m:sub>
                             <m:sup>
@@ -15305,7 +15636,21 @@
                                 <a:latin typeface="Cambria Math" panose="02040503050406030204" pitchFamily="18" charset="0"/>
                                 <a:ea typeface="Cambria Math" panose="02040503050406030204" pitchFamily="18" charset="0"/>
                               </a:rPr>
-                              <m:t>+1,</m:t>
+                              <m:t>+</m:t>
+                            </m:r>
+                            <m:r>
+                              <a:rPr lang="fr-FR" sz="2600" i="1">
+                                <a:latin typeface="Cambria Math" panose="02040503050406030204" pitchFamily="18" charset="0"/>
+                                <a:ea typeface="Cambria Math" panose="02040503050406030204" pitchFamily="18" charset="0"/>
+                              </a:rPr>
+                              <m:t>1</m:t>
+                            </m:r>
+                            <m:r>
+                              <a:rPr lang="fr-FR" sz="2600" i="1">
+                                <a:latin typeface="Cambria Math" panose="02040503050406030204" pitchFamily="18" charset="0"/>
+                                <a:ea typeface="Cambria Math" panose="02040503050406030204" pitchFamily="18" charset="0"/>
+                              </a:rPr>
+                              <m:t>,</m:t>
                             </m:r>
                             <m:r>
                               <a:rPr lang="fr-FR" sz="2600" i="1">
@@ -15428,7 +15773,21 @@
                                 <a:latin typeface="Cambria Math" panose="02040503050406030204" pitchFamily="18" charset="0"/>
                                 <a:ea typeface="Cambria Math" panose="02040503050406030204" pitchFamily="18" charset="0"/>
                               </a:rPr>
-                              <m:t>−1,</m:t>
+                              <m:t>−</m:t>
+                            </m:r>
+                            <m:r>
+                              <a:rPr lang="fr-FR" sz="2600" i="1">
+                                <a:latin typeface="Cambria Math" panose="02040503050406030204" pitchFamily="18" charset="0"/>
+                                <a:ea typeface="Cambria Math" panose="02040503050406030204" pitchFamily="18" charset="0"/>
+                              </a:rPr>
+                              <m:t>1</m:t>
+                            </m:r>
+                            <m:r>
+                              <a:rPr lang="fr-FR" sz="2600" i="1">
+                                <a:latin typeface="Cambria Math" panose="02040503050406030204" pitchFamily="18" charset="0"/>
+                                <a:ea typeface="Cambria Math" panose="02040503050406030204" pitchFamily="18" charset="0"/>
+                              </a:rPr>
+                              <m:t>,</m:t>
                             </m:r>
                             <m:r>
                               <a:rPr lang="fr-FR" sz="2600" i="1">
@@ -15697,7 +16056,13 @@
                               <a:rPr lang="fr-FR" sz="2600" i="1">
                                 <a:latin typeface="Cambria Math" panose="02040503050406030204" pitchFamily="18" charset="0"/>
                               </a:rPr>
-                              <m:t>+1</m:t>
+                              <m:t>+</m:t>
+                            </m:r>
+                            <m:r>
+                              <a:rPr lang="fr-FR" sz="2600" i="1">
+                                <a:latin typeface="Cambria Math" panose="02040503050406030204" pitchFamily="18" charset="0"/>
+                              </a:rPr>
+                              <m:t>1</m:t>
                             </m:r>
                           </m:sub>
                           <m:sup>
@@ -15811,7 +16176,13 @@
                               <a:rPr lang="fr-FR" sz="2600" i="1">
                                 <a:latin typeface="Cambria Math" panose="02040503050406030204" pitchFamily="18" charset="0"/>
                               </a:rPr>
-                              <m:t>−1</m:t>
+                              <m:t>−</m:t>
+                            </m:r>
+                            <m:r>
+                              <a:rPr lang="fr-FR" sz="2600" i="1">
+                                <a:latin typeface="Cambria Math" panose="02040503050406030204" pitchFamily="18" charset="0"/>
+                              </a:rPr>
+                              <m:t>1</m:t>
                             </m:r>
                           </m:sub>
                           <m:sup>
@@ -20622,7 +20993,13 @@
                           <a:rPr lang="fr-FR" i="1">
                             <a:latin typeface="Cambria Math" panose="02040503050406030204" pitchFamily="18" charset="0"/>
                           </a:rPr>
-                          <m:t>2!</m:t>
+                          <m:t>2</m:t>
+                        </m:r>
+                        <m:r>
+                          <a:rPr lang="fr-FR" i="1">
+                            <a:latin typeface="Cambria Math" panose="02040503050406030204" pitchFamily="18" charset="0"/>
+                          </a:rPr>
+                          <m:t>!</m:t>
                         </m:r>
                       </m:den>
                     </m:f>
@@ -20794,7 +21171,13 @@
                           <a:rPr lang="fr-FR" i="1">
                             <a:latin typeface="Cambria Math" panose="02040503050406030204" pitchFamily="18" charset="0"/>
                           </a:rPr>
-                          <m:t>3!</m:t>
+                          <m:t>3</m:t>
+                        </m:r>
+                        <m:r>
+                          <a:rPr lang="fr-FR" i="1">
+                            <a:latin typeface="Cambria Math" panose="02040503050406030204" pitchFamily="18" charset="0"/>
+                          </a:rPr>
+                          <m:t>!</m:t>
                         </m:r>
                       </m:den>
                     </m:f>
@@ -20966,7 +21349,13 @@
                           <a:rPr lang="fr-FR" i="1">
                             <a:latin typeface="Cambria Math" panose="02040503050406030204" pitchFamily="18" charset="0"/>
                           </a:rPr>
-                          <m:t>4!</m:t>
+                          <m:t>4</m:t>
+                        </m:r>
+                        <m:r>
+                          <a:rPr lang="fr-FR" i="1">
+                            <a:latin typeface="Cambria Math" panose="02040503050406030204" pitchFamily="18" charset="0"/>
+                          </a:rPr>
+                          <m:t>!</m:t>
                         </m:r>
                       </m:den>
                     </m:f>
@@ -21384,7 +21773,13 @@
                           <a:rPr lang="fr-FR" i="1">
                             <a:latin typeface="Cambria Math" panose="02040503050406030204" pitchFamily="18" charset="0"/>
                           </a:rPr>
-                          <m:t>2!</m:t>
+                          <m:t>2</m:t>
+                        </m:r>
+                        <m:r>
+                          <a:rPr lang="fr-FR" i="1">
+                            <a:latin typeface="Cambria Math" panose="02040503050406030204" pitchFamily="18" charset="0"/>
+                          </a:rPr>
+                          <m:t>!</m:t>
                         </m:r>
                       </m:den>
                     </m:f>
@@ -21556,7 +21951,13 @@
                           <a:rPr lang="fr-FR" i="1">
                             <a:latin typeface="Cambria Math" panose="02040503050406030204" pitchFamily="18" charset="0"/>
                           </a:rPr>
-                          <m:t>3!</m:t>
+                          <m:t>3</m:t>
+                        </m:r>
+                        <m:r>
+                          <a:rPr lang="fr-FR" i="1">
+                            <a:latin typeface="Cambria Math" panose="02040503050406030204" pitchFamily="18" charset="0"/>
+                          </a:rPr>
+                          <m:t>!</m:t>
                         </m:r>
                       </m:den>
                     </m:f>
@@ -21728,7 +22129,13 @@
                           <a:rPr lang="fr-FR" i="1">
                             <a:latin typeface="Cambria Math" panose="02040503050406030204" pitchFamily="18" charset="0"/>
                           </a:rPr>
-                          <m:t>4!</m:t>
+                          <m:t>4</m:t>
+                        </m:r>
+                        <m:r>
+                          <a:rPr lang="fr-FR" i="1">
+                            <a:latin typeface="Cambria Math" panose="02040503050406030204" pitchFamily="18" charset="0"/>
+                          </a:rPr>
+                          <m:t>!</m:t>
                         </m:r>
                       </m:den>
                     </m:f>
@@ -22319,7 +22726,13 @@
                           <a:rPr lang="fr-FR" i="1">
                             <a:latin typeface="Cambria Math" panose="02040503050406030204" pitchFamily="18" charset="0"/>
                           </a:rPr>
-                          <m:t>2!</m:t>
+                          <m:t>2</m:t>
+                        </m:r>
+                        <m:r>
+                          <a:rPr lang="fr-FR" i="1">
+                            <a:latin typeface="Cambria Math" panose="02040503050406030204" pitchFamily="18" charset="0"/>
+                          </a:rPr>
+                          <m:t>!</m:t>
                         </m:r>
                       </m:den>
                     </m:f>
@@ -22780,7 +23193,13 @@
                           <a:rPr lang="fr-FR" i="1">
                             <a:latin typeface="Cambria Math" panose="02040503050406030204" pitchFamily="18" charset="0"/>
                           </a:rPr>
-                          <m:t>2!</m:t>
+                          <m:t>2</m:t>
+                        </m:r>
+                        <m:r>
+                          <a:rPr lang="fr-FR" i="1">
+                            <a:latin typeface="Cambria Math" panose="02040503050406030204" pitchFamily="18" charset="0"/>
+                          </a:rPr>
+                          <m:t>!</m:t>
                         </m:r>
                       </m:den>
                     </m:f>
@@ -23042,19 +23461,7 @@
                               <a:rPr lang="fr-FR" sz="2400" i="1">
                                 <a:latin typeface="Cambria Math" panose="02040503050406030204" pitchFamily="18" charset="0"/>
                               </a:rPr>
-                              <m:t>+</m:t>
-                            </m:r>
-                            <m:r>
-                              <a:rPr lang="fr-FR" sz="2400" i="1">
-                                <a:latin typeface="Cambria Math" panose="02040503050406030204" pitchFamily="18" charset="0"/>
-                              </a:rPr>
-                              <m:t>1</m:t>
-                            </m:r>
-                            <m:r>
-                              <a:rPr lang="fr-FR" sz="2400" i="1">
-                                <a:latin typeface="Cambria Math" panose="02040503050406030204" pitchFamily="18" charset="0"/>
-                              </a:rPr>
-                              <m:t>,</m:t>
+                              <m:t>+1,</m:t>
                             </m:r>
                             <m:r>
                               <a:rPr lang="fr-FR" sz="2400" i="1">
@@ -23105,19 +23512,7 @@
                               <a:rPr lang="fr-FR" sz="2400" i="1">
                                 <a:latin typeface="Cambria Math" panose="02040503050406030204" pitchFamily="18" charset="0"/>
                               </a:rPr>
-                              <m:t>−</m:t>
-                            </m:r>
-                            <m:r>
-                              <a:rPr lang="fr-FR" sz="2400" i="1">
-                                <a:latin typeface="Cambria Math" panose="02040503050406030204" pitchFamily="18" charset="0"/>
-                              </a:rPr>
-                              <m:t>1</m:t>
-                            </m:r>
-                            <m:r>
-                              <a:rPr lang="fr-FR" sz="2400" i="1">
-                                <a:latin typeface="Cambria Math" panose="02040503050406030204" pitchFamily="18" charset="0"/>
-                              </a:rPr>
-                              <m:t>,</m:t>
+                              <m:t>−1,</m:t>
                             </m:r>
                             <m:r>
                               <a:rPr lang="fr-FR" sz="2400" i="1">
@@ -23627,16 +24022,7 @@
                             </a:solidFill>
                             <a:latin typeface="Cambria Math" panose="02040503050406030204" pitchFamily="18" charset="0"/>
                           </a:rPr>
-                          <m:t>2</m:t>
-                        </m:r>
-                        <m:r>
-                          <a:rPr lang="fr-FR" sz="2400" i="1">
-                            <a:solidFill>
-                              <a:srgbClr val="FF0000"/>
-                            </a:solidFill>
-                            <a:latin typeface="Cambria Math" panose="02040503050406030204" pitchFamily="18" charset="0"/>
-                          </a:rPr>
-                          <m:t>!</m:t>
+                          <m:t>2!</m:t>
                         </m:r>
                       </m:den>
                     </m:f>
@@ -23832,13 +24218,7 @@
                           <a:rPr lang="fr-FR" sz="2400" i="1">
                             <a:latin typeface="Cambria Math" panose="02040503050406030204" pitchFamily="18" charset="0"/>
                           </a:rPr>
-                          <m:t>3</m:t>
-                        </m:r>
-                        <m:r>
-                          <a:rPr lang="fr-FR" sz="2400" i="1">
-                            <a:latin typeface="Cambria Math" panose="02040503050406030204" pitchFamily="18" charset="0"/>
-                          </a:rPr>
-                          <m:t>!</m:t>
+                          <m:t>3!</m:t>
                         </m:r>
                       </m:den>
                     </m:f>
@@ -24354,16 +24734,7 @@
                             </a:solidFill>
                             <a:latin typeface="Cambria Math" panose="02040503050406030204" pitchFamily="18" charset="0"/>
                           </a:rPr>
-                          <m:t>2</m:t>
-                        </m:r>
-                        <m:r>
-                          <a:rPr lang="fr-FR" sz="2400" i="1">
-                            <a:solidFill>
-                              <a:srgbClr val="FF0000"/>
-                            </a:solidFill>
-                            <a:latin typeface="Cambria Math" panose="02040503050406030204" pitchFamily="18" charset="0"/>
-                          </a:rPr>
-                          <m:t>!</m:t>
+                          <m:t>2!</m:t>
                         </m:r>
                       </m:den>
                     </m:f>
@@ -24571,13 +24942,7 @@
                           <a:rPr lang="fr-FR" sz="2400" i="1">
                             <a:latin typeface="Cambria Math" panose="02040503050406030204" pitchFamily="18" charset="0"/>
                           </a:rPr>
-                          <m:t>3</m:t>
-                        </m:r>
-                        <m:r>
-                          <a:rPr lang="fr-FR" sz="2400" i="1">
-                            <a:latin typeface="Cambria Math" panose="02040503050406030204" pitchFamily="18" charset="0"/>
-                          </a:rPr>
-                          <m:t>!</m:t>
+                          <m:t>3!</m:t>
                         </m:r>
                       </m:den>
                     </m:f>
@@ -25095,13 +25460,7 @@
                               <a:rPr lang="fr-FR" sz="2400" i="1">
                                 <a:latin typeface="Cambria Math" panose="02040503050406030204" pitchFamily="18" charset="0"/>
                               </a:rPr>
-                              <m:t>+</m:t>
-                            </m:r>
-                            <m:r>
-                              <a:rPr lang="fr-FR" sz="2400" i="1">
-                                <a:latin typeface="Cambria Math" panose="02040503050406030204" pitchFamily="18" charset="0"/>
-                              </a:rPr>
-                              <m:t>1</m:t>
+                              <m:t>+1</m:t>
                             </m:r>
                           </m:sub>
                           <m:sup>
@@ -25215,13 +25574,7 @@
                               <a:rPr lang="fr-FR" sz="2400" i="1">
                                 <a:latin typeface="Cambria Math" panose="02040503050406030204" pitchFamily="18" charset="0"/>
                               </a:rPr>
-                              <m:t>−</m:t>
-                            </m:r>
-                            <m:r>
-                              <a:rPr lang="fr-FR" sz="2400" i="1">
-                                <a:latin typeface="Cambria Math" panose="02040503050406030204" pitchFamily="18" charset="0"/>
-                              </a:rPr>
-                              <m:t>1</m:t>
+                              <m:t>−1</m:t>
                             </m:r>
                           </m:sub>
                           <m:sup>
@@ -25815,16 +26168,7 @@
                             </a:solidFill>
                             <a:latin typeface="Cambria Math" panose="02040503050406030204" pitchFamily="18" charset="0"/>
                           </a:rPr>
-                          <m:t>2</m:t>
-                        </m:r>
-                        <m:r>
-                          <a:rPr lang="fr-FR" sz="2400" i="1">
-                            <a:solidFill>
-                              <a:schemeClr val="tx1"/>
-                            </a:solidFill>
-                            <a:latin typeface="Cambria Math" panose="02040503050406030204" pitchFamily="18" charset="0"/>
-                          </a:rPr>
-                          <m:t>!</m:t>
+                          <m:t>2!</m:t>
                         </m:r>
                       </m:den>
                     </m:f>
@@ -26092,16 +26436,7 @@
                             </a:solidFill>
                             <a:latin typeface="Cambria Math" panose="02040503050406030204" pitchFamily="18" charset="0"/>
                           </a:rPr>
-                          <m:t>3</m:t>
-                        </m:r>
-                        <m:r>
-                          <a:rPr lang="fr-FR" sz="2400" i="1">
-                            <a:solidFill>
-                              <a:srgbClr val="FF0000"/>
-                            </a:solidFill>
-                            <a:latin typeface="Cambria Math" panose="02040503050406030204" pitchFamily="18" charset="0"/>
-                          </a:rPr>
-                          <m:t>!</m:t>
+                          <m:t>3!</m:t>
                         </m:r>
                       </m:den>
                     </m:f>
@@ -26273,13 +26608,7 @@
                           <a:rPr lang="fr-FR" sz="2400" i="1">
                             <a:latin typeface="Cambria Math" panose="02040503050406030204" pitchFamily="18" charset="0"/>
                           </a:rPr>
-                          <m:t>4</m:t>
-                        </m:r>
-                        <m:r>
-                          <a:rPr lang="fr-FR" sz="2400" i="1">
-                            <a:latin typeface="Cambria Math" panose="02040503050406030204" pitchFamily="18" charset="0"/>
-                          </a:rPr>
-                          <m:t>!</m:t>
+                          <m:t>4!</m:t>
                         </m:r>
                       </m:den>
                     </m:f>
@@ -26710,13 +27039,7 @@
                           <a:rPr lang="fr-FR" sz="2400" i="1">
                             <a:latin typeface="Cambria Math" panose="02040503050406030204" pitchFamily="18" charset="0"/>
                           </a:rPr>
-                          <m:t>2</m:t>
-                        </m:r>
-                        <m:r>
-                          <a:rPr lang="fr-FR" sz="2400" i="1">
-                            <a:latin typeface="Cambria Math" panose="02040503050406030204" pitchFamily="18" charset="0"/>
-                          </a:rPr>
-                          <m:t>!</m:t>
+                          <m:t>2!</m:t>
                         </m:r>
                       </m:den>
                     </m:f>
@@ -26984,16 +27307,7 @@
                             </a:solidFill>
                             <a:latin typeface="Cambria Math" panose="02040503050406030204" pitchFamily="18" charset="0"/>
                           </a:rPr>
-                          <m:t>3</m:t>
-                        </m:r>
-                        <m:r>
-                          <a:rPr lang="fr-FR" sz="2400" i="1">
-                            <a:solidFill>
-                              <a:srgbClr val="FF0000"/>
-                            </a:solidFill>
-                            <a:latin typeface="Cambria Math" panose="02040503050406030204" pitchFamily="18" charset="0"/>
-                          </a:rPr>
-                          <m:t>!</m:t>
+                          <m:t>3!</m:t>
                         </m:r>
                       </m:den>
                     </m:f>
@@ -27165,13 +27479,7 @@
                           <a:rPr lang="fr-FR" sz="2400" i="1">
                             <a:latin typeface="Cambria Math" panose="02040503050406030204" pitchFamily="18" charset="0"/>
                           </a:rPr>
-                          <m:t>4</m:t>
-                        </m:r>
-                        <m:r>
-                          <a:rPr lang="fr-FR" sz="2400" i="1">
-                            <a:latin typeface="Cambria Math" panose="02040503050406030204" pitchFamily="18" charset="0"/>
-                          </a:rPr>
-                          <m:t>!</m:t>
+                          <m:t>4!</m:t>
                         </m:r>
                       </m:den>
                     </m:f>
@@ -27694,13 +28002,7 @@
                           <a:rPr lang="fr-FR" sz="2400" i="1">
                             <a:latin typeface="Cambria Math" panose="02040503050406030204" pitchFamily="18" charset="0"/>
                           </a:rPr>
-                          <m:t>4</m:t>
-                        </m:r>
-                        <m:r>
-                          <a:rPr lang="fr-FR" sz="2400" i="1">
-                            <a:latin typeface="Cambria Math" panose="02040503050406030204" pitchFamily="18" charset="0"/>
-                          </a:rPr>
-                          <m:t>!</m:t>
+                          <m:t>4!</m:t>
                         </m:r>
                       </m:den>
                     </m:f>

--- a/projet_final/projet_final/MEC8211-Projet-final-Presentation.pptx
+++ b/projet_final/projet_final/MEC8211-Projet-final-Presentation.pptx
@@ -5,7 +5,7 @@
     <p:sldMasterId id="2147483648" r:id="rId1"/>
   </p:sldMasterIdLst>
   <p:notesMasterIdLst>
-    <p:notesMasterId r:id="rId16"/>
+    <p:notesMasterId r:id="rId17"/>
   </p:notesMasterIdLst>
   <p:sldIdLst>
     <p:sldId id="256" r:id="rId2"/>
@@ -22,6 +22,7 @@
     <p:sldId id="266" r:id="rId13"/>
     <p:sldId id="267" r:id="rId14"/>
     <p:sldId id="268" r:id="rId15"/>
+    <p:sldId id="270" r:id="rId16"/>
   </p:sldIdLst>
   <p:sldSz cx="12192000" cy="6858000"/>
   <p:notesSz cx="6858000" cy="9144000"/>
@@ -210,7 +211,7 @@
           <a:p>
             <a:fld id="{BB0B2023-C595-443A-8D8C-AB9DF5A28D48}" type="datetimeFigureOut">
               <a:rPr lang="fr-FR" smtClean="0"/>
-              <a:t>10/04/2026</a:t>
+              <a:t>11/04/2026</a:t>
             </a:fld>
             <a:endParaRPr lang="fr-FR"/>
           </a:p>
@@ -900,7 +901,7 @@
           <a:p>
             <a:fld id="{4E51AFDA-D128-4B68-A211-269E2451E5DE}" type="datetimeFigureOut">
               <a:rPr lang="fr-FR" smtClean="0"/>
-              <a:t>10/04/2026</a:t>
+              <a:t>11/04/2026</a:t>
             </a:fld>
             <a:endParaRPr lang="fr-FR"/>
           </a:p>
@@ -1098,7 +1099,7 @@
           <a:p>
             <a:fld id="{4E51AFDA-D128-4B68-A211-269E2451E5DE}" type="datetimeFigureOut">
               <a:rPr lang="fr-FR" smtClean="0"/>
-              <a:t>10/04/2026</a:t>
+              <a:t>11/04/2026</a:t>
             </a:fld>
             <a:endParaRPr lang="fr-FR"/>
           </a:p>
@@ -1306,7 +1307,7 @@
           <a:p>
             <a:fld id="{4E51AFDA-D128-4B68-A211-269E2451E5DE}" type="datetimeFigureOut">
               <a:rPr lang="fr-FR" smtClean="0"/>
-              <a:t>10/04/2026</a:t>
+              <a:t>11/04/2026</a:t>
             </a:fld>
             <a:endParaRPr lang="fr-FR"/>
           </a:p>
@@ -1504,7 +1505,7 @@
           <a:p>
             <a:fld id="{4E51AFDA-D128-4B68-A211-269E2451E5DE}" type="datetimeFigureOut">
               <a:rPr lang="fr-FR" smtClean="0"/>
-              <a:t>10/04/2026</a:t>
+              <a:t>11/04/2026</a:t>
             </a:fld>
             <a:endParaRPr lang="fr-FR"/>
           </a:p>
@@ -1779,7 +1780,7 @@
           <a:p>
             <a:fld id="{4E51AFDA-D128-4B68-A211-269E2451E5DE}" type="datetimeFigureOut">
               <a:rPr lang="fr-FR" smtClean="0"/>
-              <a:t>10/04/2026</a:t>
+              <a:t>11/04/2026</a:t>
             </a:fld>
             <a:endParaRPr lang="fr-FR"/>
           </a:p>
@@ -2044,7 +2045,7 @@
           <a:p>
             <a:fld id="{4E51AFDA-D128-4B68-A211-269E2451E5DE}" type="datetimeFigureOut">
               <a:rPr lang="fr-FR" smtClean="0"/>
-              <a:t>10/04/2026</a:t>
+              <a:t>11/04/2026</a:t>
             </a:fld>
             <a:endParaRPr lang="fr-FR"/>
           </a:p>
@@ -2456,7 +2457,7 @@
           <a:p>
             <a:fld id="{4E51AFDA-D128-4B68-A211-269E2451E5DE}" type="datetimeFigureOut">
               <a:rPr lang="fr-FR" smtClean="0"/>
-              <a:t>10/04/2026</a:t>
+              <a:t>11/04/2026</a:t>
             </a:fld>
             <a:endParaRPr lang="fr-FR"/>
           </a:p>
@@ -2597,7 +2598,7 @@
           <a:p>
             <a:fld id="{4E51AFDA-D128-4B68-A211-269E2451E5DE}" type="datetimeFigureOut">
               <a:rPr lang="fr-FR" smtClean="0"/>
-              <a:t>10/04/2026</a:t>
+              <a:t>11/04/2026</a:t>
             </a:fld>
             <a:endParaRPr lang="fr-FR"/>
           </a:p>
@@ -2710,7 +2711,7 @@
           <a:p>
             <a:fld id="{4E51AFDA-D128-4B68-A211-269E2451E5DE}" type="datetimeFigureOut">
               <a:rPr lang="fr-FR" smtClean="0"/>
-              <a:t>10/04/2026</a:t>
+              <a:t>11/04/2026</a:t>
             </a:fld>
             <a:endParaRPr lang="fr-FR"/>
           </a:p>
@@ -3021,7 +3022,7 @@
           <a:p>
             <a:fld id="{4E51AFDA-D128-4B68-A211-269E2451E5DE}" type="datetimeFigureOut">
               <a:rPr lang="fr-FR" smtClean="0"/>
-              <a:t>10/04/2026</a:t>
+              <a:t>11/04/2026</a:t>
             </a:fld>
             <a:endParaRPr lang="fr-FR"/>
           </a:p>
@@ -3309,7 +3310,7 @@
           <a:p>
             <a:fld id="{4E51AFDA-D128-4B68-A211-269E2451E5DE}" type="datetimeFigureOut">
               <a:rPr lang="fr-FR" smtClean="0"/>
-              <a:t>10/04/2026</a:t>
+              <a:t>11/04/2026</a:t>
             </a:fld>
             <a:endParaRPr lang="fr-FR"/>
           </a:p>
@@ -3553,7 +3554,7 @@
           <a:p>
             <a:fld id="{4E51AFDA-D128-4B68-A211-269E2451E5DE}" type="datetimeFigureOut">
               <a:rPr lang="fr-FR" smtClean="0"/>
-              <a:t>10/04/2026</a:t>
+              <a:t>11/04/2026</a:t>
             </a:fld>
             <a:endParaRPr lang="fr-FR"/>
           </a:p>
@@ -4172,8 +4173,8 @@
           </a:p>
         </p:txBody>
       </p:sp>
-      <mc:AlternateContent xmlns:mc="http://schemas.openxmlformats.org/markup-compatibility/2006">
-        <mc:Choice xmlns:a14="http://schemas.microsoft.com/office/drawing/2010/main" Requires="a14">
+      <mc:AlternateContent xmlns:mc="http://schemas.openxmlformats.org/markup-compatibility/2006" xmlns:a14="http://schemas.microsoft.com/office/drawing/2010/main">
+        <mc:Choice Requires="a14">
           <p:sp>
             <p:nvSpPr>
               <p:cNvPr id="3" name="Espace réservé du contenu 2">
@@ -4505,7 +4506,7 @@
             </p:txBody>
           </p:sp>
         </mc:Choice>
-        <mc:Fallback>
+        <mc:Fallback xmlns="">
           <p:sp>
             <p:nvSpPr>
               <p:cNvPr id="3" name="Espace réservé du contenu 2">
@@ -4897,8 +4898,8 @@
           </a:p>
         </p:txBody>
       </p:sp>
-      <mc:AlternateContent xmlns:mc="http://schemas.openxmlformats.org/markup-compatibility/2006">
-        <mc:Choice xmlns:a14="http://schemas.microsoft.com/office/drawing/2010/main" Requires="a14">
+      <mc:AlternateContent xmlns:mc="http://schemas.openxmlformats.org/markup-compatibility/2006" xmlns:a14="http://schemas.microsoft.com/office/drawing/2010/main">
+        <mc:Choice Requires="a14">
           <p:sp>
             <p:nvSpPr>
               <p:cNvPr id="3" name="Espace réservé du contenu 2">
@@ -5457,7 +5458,7 @@
             </p:txBody>
           </p:sp>
         </mc:Choice>
-        <mc:Fallback>
+        <mc:Fallback xmlns="">
           <p:sp>
             <p:nvSpPr>
               <p:cNvPr id="3" name="Espace réservé du contenu 2">
@@ -6172,6 +6173,364 @@
 </p:sld>
 </file>
 
+<file path=ppt/slides/slide15.xml><?xml version="1.0" encoding="utf-8"?>
+<p:sld xmlns:a="http://schemas.openxmlformats.org/drawingml/2006/main" xmlns:r="http://schemas.openxmlformats.org/officeDocument/2006/relationships" xmlns:p="http://schemas.openxmlformats.org/presentationml/2006/main">
+  <p:cSld>
+    <p:spTree>
+      <p:nvGrpSpPr>
+        <p:cNvPr id="1" name=""/>
+        <p:cNvGrpSpPr/>
+        <p:nvPr/>
+      </p:nvGrpSpPr>
+      <p:grpSpPr>
+        <a:xfrm>
+          <a:off x="0" y="0"/>
+          <a:ext cx="0" cy="0"/>
+          <a:chOff x="0" y="0"/>
+          <a:chExt cx="0" cy="0"/>
+        </a:xfrm>
+      </p:grpSpPr>
+      <p:sp>
+        <p:nvSpPr>
+          <p:cNvPr id="2" name="Titre 1">
+            <a:extLst>
+              <a:ext uri="{FF2B5EF4-FFF2-40B4-BE49-F238E27FC236}">
+                <a16:creationId xmlns:a16="http://schemas.microsoft.com/office/drawing/2014/main" id="{4F94C333-0F73-53F4-74F5-2F17FBB843C8}"/>
+              </a:ext>
+            </a:extLst>
+          </p:cNvPr>
+          <p:cNvSpPr>
+            <a:spLocks noGrp="1"/>
+          </p:cNvSpPr>
+          <p:nvPr>
+            <p:ph type="title"/>
+          </p:nvPr>
+        </p:nvSpPr>
+        <p:spPr>
+          <a:xfrm>
+            <a:off x="728472" y="18255"/>
+            <a:ext cx="10515600" cy="1325563"/>
+          </a:xfrm>
+        </p:spPr>
+        <p:txBody>
+          <a:bodyPr/>
+          <a:lstStyle/>
+          <a:p>
+            <a:r>
+              <a:rPr lang="fr-FR" dirty="0"/>
+              <a:t>Evaluation de l’erreur numérique (GCI)</a:t>
+            </a:r>
+          </a:p>
+        </p:txBody>
+      </p:sp>
+      <mc:AlternateContent xmlns:mc="http://schemas.openxmlformats.org/markup-compatibility/2006">
+        <mc:Choice xmlns:a14="http://schemas.microsoft.com/office/drawing/2010/main" Requires="a14">
+          <p:sp>
+            <p:nvSpPr>
+              <p:cNvPr id="3" name="Espace réservé du contenu 2">
+                <a:extLst>
+                  <a:ext uri="{FF2B5EF4-FFF2-40B4-BE49-F238E27FC236}">
+                    <a16:creationId xmlns:a16="http://schemas.microsoft.com/office/drawing/2014/main" id="{A8776E8C-A31D-1040-CF82-B10F1DDC4533}"/>
+                  </a:ext>
+                </a:extLst>
+              </p:cNvPr>
+              <p:cNvSpPr>
+                <a:spLocks noGrp="1"/>
+              </p:cNvSpPr>
+              <p:nvPr>
+                <p:ph idx="1"/>
+              </p:nvPr>
+            </p:nvSpPr>
+            <p:spPr>
+              <a:xfrm>
+                <a:off x="585216" y="1200912"/>
+                <a:ext cx="10768584" cy="4976051"/>
+              </a:xfrm>
+            </p:spPr>
+            <p:txBody>
+              <a:bodyPr/>
+              <a:lstStyle/>
+              <a:p>
+                <a:pPr marL="0" indent="0">
+                  <a:buNone/>
+                </a:pPr>
+                <a:r>
+                  <a:rPr lang="fr-FR" dirty="0"/>
+                  <a:t>Selon les 3 paramètres, </a:t>
+                </a:r>
+                <a14:m>
+                  <m:oMath xmlns:m="http://schemas.openxmlformats.org/officeDocument/2006/math">
+                    <m:f>
+                      <m:fPr>
+                        <m:ctrlPr>
+                          <a:rPr lang="fr-FR" i="1">
+                            <a:latin typeface="Cambria Math" panose="02040503050406030204" pitchFamily="18" charset="0"/>
+                          </a:rPr>
+                        </m:ctrlPr>
+                      </m:fPr>
+                      <m:num>
+                        <m:acc>
+                          <m:accPr>
+                            <m:chr m:val="̂"/>
+                            <m:ctrlPr>
+                              <a:rPr lang="fr-FR" i="1">
+                                <a:latin typeface="Cambria Math" panose="02040503050406030204" pitchFamily="18" charset="0"/>
+                              </a:rPr>
+                            </m:ctrlPr>
+                          </m:accPr>
+                          <m:e>
+                            <m:r>
+                              <a:rPr lang="fr-FR" i="1">
+                                <a:latin typeface="Cambria Math" panose="02040503050406030204" pitchFamily="18" charset="0"/>
+                              </a:rPr>
+                              <m:t>𝑝</m:t>
+                            </m:r>
+                          </m:e>
+                        </m:acc>
+                        <m:r>
+                          <a:rPr lang="fr-FR" i="1">
+                            <a:latin typeface="Cambria Math" panose="02040503050406030204" pitchFamily="18" charset="0"/>
+                          </a:rPr>
+                          <m:t>−</m:t>
+                        </m:r>
+                        <m:sSub>
+                          <m:sSubPr>
+                            <m:ctrlPr>
+                              <a:rPr lang="fr-FR" i="1">
+                                <a:latin typeface="Cambria Math" panose="02040503050406030204" pitchFamily="18" charset="0"/>
+                              </a:rPr>
+                            </m:ctrlPr>
+                          </m:sSubPr>
+                          <m:e>
+                            <m:r>
+                              <a:rPr lang="fr-FR" i="1">
+                                <a:latin typeface="Cambria Math" panose="02040503050406030204" pitchFamily="18" charset="0"/>
+                              </a:rPr>
+                              <m:t>𝑝</m:t>
+                            </m:r>
+                          </m:e>
+                          <m:sub>
+                            <m:r>
+                              <a:rPr lang="fr-FR" i="1">
+                                <a:latin typeface="Cambria Math" panose="02040503050406030204" pitchFamily="18" charset="0"/>
+                              </a:rPr>
+                              <m:t>𝑓</m:t>
+                            </m:r>
+                          </m:sub>
+                        </m:sSub>
+                      </m:num>
+                      <m:den>
+                        <m:sSub>
+                          <m:sSubPr>
+                            <m:ctrlPr>
+                              <a:rPr lang="fr-FR" i="1">
+                                <a:latin typeface="Cambria Math" panose="02040503050406030204" pitchFamily="18" charset="0"/>
+                              </a:rPr>
+                            </m:ctrlPr>
+                          </m:sSubPr>
+                          <m:e>
+                            <m:r>
+                              <a:rPr lang="fr-FR" i="1">
+                                <a:latin typeface="Cambria Math" panose="02040503050406030204" pitchFamily="18" charset="0"/>
+                              </a:rPr>
+                              <m:t>𝑝</m:t>
+                            </m:r>
+                          </m:e>
+                          <m:sub>
+                            <m:r>
+                              <a:rPr lang="fr-FR" i="1">
+                                <a:latin typeface="Cambria Math" panose="02040503050406030204" pitchFamily="18" charset="0"/>
+                              </a:rPr>
+                              <m:t>𝑓</m:t>
+                            </m:r>
+                          </m:sub>
+                        </m:sSub>
+                      </m:den>
+                    </m:f>
+                    <m:r>
+                      <a:rPr lang="fr-FR" i="1">
+                        <a:latin typeface="Cambria Math" panose="02040503050406030204" pitchFamily="18" charset="0"/>
+                      </a:rPr>
+                      <m:t>≤0,1</m:t>
+                    </m:r>
+                  </m:oMath>
+                </a14:m>
+                <a:endParaRPr lang="fr-FR" dirty="0"/>
+              </a:p>
+              <a:p>
+                <a:pPr marL="0" indent="0">
+                  <a:buNone/>
+                </a:pPr>
+                <a:r>
+                  <a:rPr lang="fr-FR" dirty="0"/>
+                  <a:t>Donc, pour le calcul du GCI, </a:t>
+                </a:r>
+                <a14:m>
+                  <m:oMath xmlns:m="http://schemas.openxmlformats.org/officeDocument/2006/math">
+                    <m:r>
+                      <a:rPr lang="fr-FR" b="0" i="1" smtClean="0">
+                        <a:latin typeface="Cambria Math" panose="02040503050406030204" pitchFamily="18" charset="0"/>
+                      </a:rPr>
+                      <m:t>𝑝</m:t>
+                    </m:r>
+                    <m:r>
+                      <a:rPr lang="fr-FR" b="0" i="1" smtClean="0">
+                        <a:latin typeface="Cambria Math" panose="02040503050406030204" pitchFamily="18" charset="0"/>
+                      </a:rPr>
+                      <m:t>=</m:t>
+                    </m:r>
+                    <m:sSub>
+                      <m:sSubPr>
+                        <m:ctrlPr>
+                          <a:rPr lang="fr-FR" b="0" i="1" smtClean="0">
+                            <a:latin typeface="Cambria Math" panose="02040503050406030204" pitchFamily="18" charset="0"/>
+                          </a:rPr>
+                        </m:ctrlPr>
+                      </m:sSubPr>
+                      <m:e>
+                        <m:r>
+                          <a:rPr lang="fr-FR" b="0" i="1" smtClean="0">
+                            <a:latin typeface="Cambria Math" panose="02040503050406030204" pitchFamily="18" charset="0"/>
+                          </a:rPr>
+                          <m:t>𝑝</m:t>
+                        </m:r>
+                      </m:e>
+                      <m:sub>
+                        <m:r>
+                          <a:rPr lang="fr-FR" b="0" i="1" smtClean="0">
+                            <a:latin typeface="Cambria Math" panose="02040503050406030204" pitchFamily="18" charset="0"/>
+                          </a:rPr>
+                          <m:t>𝑓</m:t>
+                        </m:r>
+                      </m:sub>
+                    </m:sSub>
+                  </m:oMath>
+                </a14:m>
+                <a:r>
+                  <a:rPr lang="fr-FR" b="0" dirty="0"/>
+                  <a:t> et </a:t>
+                </a:r>
+                <a14:m>
+                  <m:oMath xmlns:m="http://schemas.openxmlformats.org/officeDocument/2006/math">
+                    <m:sSub>
+                      <m:sSubPr>
+                        <m:ctrlPr>
+                          <a:rPr lang="fr-FR" b="0" i="1" smtClean="0">
+                            <a:latin typeface="Cambria Math" panose="02040503050406030204" pitchFamily="18" charset="0"/>
+                          </a:rPr>
+                        </m:ctrlPr>
+                      </m:sSubPr>
+                      <m:e>
+                        <m:r>
+                          <a:rPr lang="fr-FR" b="0" i="1" smtClean="0">
+                            <a:latin typeface="Cambria Math" panose="02040503050406030204" pitchFamily="18" charset="0"/>
+                          </a:rPr>
+                          <m:t>𝐹</m:t>
+                        </m:r>
+                      </m:e>
+                      <m:sub>
+                        <m:r>
+                          <a:rPr lang="fr-FR" b="0" i="1" smtClean="0">
+                            <a:latin typeface="Cambria Math" panose="02040503050406030204" pitchFamily="18" charset="0"/>
+                          </a:rPr>
+                          <m:t>𝑠</m:t>
+                        </m:r>
+                      </m:sub>
+                    </m:sSub>
+                    <m:r>
+                      <a:rPr lang="fr-FR" b="0" i="1" smtClean="0">
+                        <a:latin typeface="Cambria Math" panose="02040503050406030204" pitchFamily="18" charset="0"/>
+                      </a:rPr>
+                      <m:t>=1,25</m:t>
+                    </m:r>
+                  </m:oMath>
+                </a14:m>
+                <a:endParaRPr lang="fr-FR" b="0"/>
+              </a:p>
+              <a:p>
+                <a:pPr marL="0" indent="0">
+                  <a:buNone/>
+                </a:pPr>
+                <a:endParaRPr lang="fr-FR" b="0" dirty="0"/>
+              </a:p>
+              <a:p>
+                <a:pPr marL="0" indent="0">
+                  <a:buNone/>
+                </a:pPr>
+                <a:endParaRPr lang="fr-FR" b="0" dirty="0"/>
+              </a:p>
+              <a:p>
+                <a:pPr marL="0" indent="0">
+                  <a:buNone/>
+                </a:pPr>
+                <a:endParaRPr lang="fr-FR" dirty="0"/>
+              </a:p>
+              <a:p>
+                <a:pPr marL="0" indent="0">
+                  <a:buNone/>
+                </a:pPr>
+                <a:endParaRPr lang="fr-FR" b="0" dirty="0"/>
+              </a:p>
+            </p:txBody>
+          </p:sp>
+        </mc:Choice>
+        <mc:Fallback>
+          <p:sp>
+            <p:nvSpPr>
+              <p:cNvPr id="3" name="Espace réservé du contenu 2">
+                <a:extLst>
+                  <a:ext uri="{FF2B5EF4-FFF2-40B4-BE49-F238E27FC236}">
+                    <a16:creationId xmlns:a16="http://schemas.microsoft.com/office/drawing/2014/main" id="{A8776E8C-A31D-1040-CF82-B10F1DDC4533}"/>
+                  </a:ext>
+                </a:extLst>
+              </p:cNvPr>
+              <p:cNvSpPr>
+                <a:spLocks noGrp="1" noRot="1" noChangeAspect="1" noMove="1" noResize="1" noEditPoints="1" noAdjustHandles="1" noChangeArrowheads="1" noChangeShapeType="1" noTextEdit="1"/>
+              </p:cNvSpPr>
+              <p:nvPr>
+                <p:ph idx="1"/>
+              </p:nvPr>
+            </p:nvSpPr>
+            <p:spPr>
+              <a:xfrm>
+                <a:off x="585216" y="1200912"/>
+                <a:ext cx="10768584" cy="4976051"/>
+              </a:xfrm>
+              <a:blipFill>
+                <a:blip r:embed="rId2"/>
+                <a:stretch>
+                  <a:fillRect l="-1132"/>
+                </a:stretch>
+              </a:blipFill>
+            </p:spPr>
+            <p:txBody>
+              <a:bodyPr/>
+              <a:lstStyle/>
+              <a:p>
+                <a:r>
+                  <a:rPr lang="fr-FR">
+                    <a:noFill/>
+                  </a:rPr>
+                  <a:t> </a:t>
+                </a:r>
+              </a:p>
+            </p:txBody>
+          </p:sp>
+        </mc:Fallback>
+      </mc:AlternateContent>
+    </p:spTree>
+    <p:extLst>
+      <p:ext uri="{BB962C8B-B14F-4D97-AF65-F5344CB8AC3E}">
+        <p14:creationId xmlns:p14="http://schemas.microsoft.com/office/powerpoint/2010/main" val="2052818980"/>
+      </p:ext>
+    </p:extLst>
+  </p:cSld>
+  <p:clrMapOvr>
+    <a:masterClrMapping/>
+  </p:clrMapOvr>
+</p:sld>
+</file>
+
 <file path=ppt/slides/slide2.xml><?xml version="1.0" encoding="utf-8"?>
 <p:sld xmlns:a="http://schemas.openxmlformats.org/drawingml/2006/main" xmlns:r="http://schemas.openxmlformats.org/officeDocument/2006/relationships" xmlns:p="http://schemas.openxmlformats.org/presentationml/2006/main">
   <p:cSld>
@@ -6423,8 +6782,8 @@
           </a:p>
         </p:txBody>
       </p:sp>
-      <mc:AlternateContent xmlns:mc="http://schemas.openxmlformats.org/markup-compatibility/2006">
-        <mc:Choice xmlns:a14="http://schemas.microsoft.com/office/drawing/2010/main" Requires="a14">
+      <mc:AlternateContent xmlns:mc="http://schemas.openxmlformats.org/markup-compatibility/2006" xmlns:a14="http://schemas.microsoft.com/office/drawing/2010/main">
+        <mc:Choice Requires="a14">
           <p:sp>
             <p:nvSpPr>
               <p:cNvPr id="3" name="Espace réservé du contenu 2">
@@ -7346,7 +7705,7 @@
             </p:txBody>
           </p:sp>
         </mc:Choice>
-        <mc:Fallback>
+        <mc:Fallback xmlns="">
           <p:sp>
             <p:nvSpPr>
               <p:cNvPr id="3" name="Espace réservé du contenu 2">
@@ -7536,8 +7895,8 @@
           </a:p>
         </p:txBody>
       </p:sp>
-      <mc:AlternateContent xmlns:mc="http://schemas.openxmlformats.org/markup-compatibility/2006">
-        <mc:Choice xmlns:a14="http://schemas.microsoft.com/office/drawing/2010/main" Requires="a14">
+      <mc:AlternateContent xmlns:mc="http://schemas.openxmlformats.org/markup-compatibility/2006" xmlns:a14="http://schemas.microsoft.com/office/drawing/2010/main">
+        <mc:Choice Requires="a14">
           <p:sp>
             <p:nvSpPr>
               <p:cNvPr id="3" name="Espace réservé du contenu 2">
@@ -8855,7 +9214,7 @@
             </p:txBody>
           </p:sp>
         </mc:Choice>
-        <mc:Fallback>
+        <mc:Fallback xmlns="">
           <p:sp>
             <p:nvSpPr>
               <p:cNvPr id="3" name="Espace réservé du contenu 2">
@@ -8954,8 +9313,8 @@
           </a:p>
         </p:txBody>
       </p:sp>
-      <mc:AlternateContent xmlns:mc="http://schemas.openxmlformats.org/markup-compatibility/2006">
-        <mc:Choice xmlns:a14="http://schemas.microsoft.com/office/drawing/2010/main" Requires="a14">
+      <mc:AlternateContent xmlns:mc="http://schemas.openxmlformats.org/markup-compatibility/2006" xmlns:a14="http://schemas.microsoft.com/office/drawing/2010/main">
+        <mc:Choice Requires="a14">
           <p:sp>
             <p:nvSpPr>
               <p:cNvPr id="6" name="ZoneTexte 5">
@@ -9065,7 +9424,7 @@
             </p:txBody>
           </p:sp>
         </mc:Choice>
-        <mc:Fallback>
+        <mc:Fallback xmlns="">
           <p:sp>
             <p:nvSpPr>
               <p:cNvPr id="6" name="ZoneTexte 5">
@@ -9203,8 +9562,8 @@
           </a:p>
         </p:txBody>
       </p:sp>
-      <mc:AlternateContent xmlns:mc="http://schemas.openxmlformats.org/markup-compatibility/2006">
-        <mc:Choice xmlns:a14="http://schemas.microsoft.com/office/drawing/2010/main" Requires="a14">
+      <mc:AlternateContent xmlns:mc="http://schemas.openxmlformats.org/markup-compatibility/2006" xmlns:a14="http://schemas.microsoft.com/office/drawing/2010/main">
+        <mc:Choice Requires="a14">
           <p:sp>
             <p:nvSpPr>
               <p:cNvPr id="3" name="Espace réservé du contenu 2">
@@ -10903,7 +11262,7 @@
             </p:txBody>
           </p:sp>
         </mc:Choice>
-        <mc:Fallback>
+        <mc:Fallback xmlns="">
           <p:sp>
             <p:nvSpPr>
               <p:cNvPr id="3" name="Espace réservé du contenu 2">
@@ -10947,8 +11306,8 @@
           </p:sp>
         </mc:Fallback>
       </mc:AlternateContent>
-      <mc:AlternateContent xmlns:mc="http://schemas.openxmlformats.org/markup-compatibility/2006">
-        <mc:Choice xmlns:a14="http://schemas.microsoft.com/office/drawing/2010/main" Requires="a14">
+      <mc:AlternateContent xmlns:mc="http://schemas.openxmlformats.org/markup-compatibility/2006" xmlns:a14="http://schemas.microsoft.com/office/drawing/2010/main">
+        <mc:Choice Requires="a14">
           <p:sp>
             <p:nvSpPr>
               <p:cNvPr id="5" name="ZoneTexte 4">
@@ -11746,7 +12105,7 @@
             </p:txBody>
           </p:sp>
         </mc:Choice>
-        <mc:Fallback>
+        <mc:Fallback xmlns="">
           <p:sp>
             <p:nvSpPr>
               <p:cNvPr id="5" name="ZoneTexte 4">
@@ -11934,8 +12293,8 @@
           </a:prstGeom>
         </p:spPr>
       </p:pic>
-      <mc:AlternateContent xmlns:mc="http://schemas.openxmlformats.org/markup-compatibility/2006">
-        <mc:Choice xmlns:a14="http://schemas.microsoft.com/office/drawing/2010/main" Requires="a14">
+      <mc:AlternateContent xmlns:mc="http://schemas.openxmlformats.org/markup-compatibility/2006" xmlns:a14="http://schemas.microsoft.com/office/drawing/2010/main">
+        <mc:Choice Requires="a14">
           <p:sp>
             <p:nvSpPr>
               <p:cNvPr id="6" name="ZoneTexte 5">
@@ -12139,7 +12498,7 @@
                       <m:f>
                         <m:fPr>
                           <m:ctrlPr>
-                            <a:rPr lang="fr-CA" b="0" i="0" smtClean="0">
+                            <a:rPr lang="fr-CA" b="0" i="1" smtClean="0">
                               <a:solidFill>
                                 <a:schemeClr val="accent2"/>
                               </a:solidFill>
@@ -12155,16 +12514,7 @@
                               </a:solidFill>
                               <a:latin typeface="Cambria Math" panose="02040503050406030204" pitchFamily="18" charset="0"/>
                             </a:rPr>
-                            <m:t>−</m:t>
-                          </m:r>
-                          <m:r>
-                            <a:rPr lang="fr-CA" b="0" i="0" smtClean="0">
-                              <a:solidFill>
-                                <a:schemeClr val="accent2"/>
-                              </a:solidFill>
-                              <a:latin typeface="Cambria Math" panose="02040503050406030204" pitchFamily="18" charset="0"/>
-                            </a:rPr>
-                            <m:t>1</m:t>
+                            <m:t>−1</m:t>
                           </m:r>
                         </m:num>
                         <m:den>
@@ -12382,7 +12732,7 @@
             </p:txBody>
           </p:sp>
         </mc:Choice>
-        <mc:Fallback>
+        <mc:Fallback xmlns="">
           <p:sp>
             <p:nvSpPr>
               <p:cNvPr id="6" name="ZoneTexte 5">
@@ -12427,8 +12777,8 @@
           </p:sp>
         </mc:Fallback>
       </mc:AlternateContent>
-      <mc:AlternateContent xmlns:mc="http://schemas.openxmlformats.org/markup-compatibility/2006">
-        <mc:Choice xmlns:a14="http://schemas.microsoft.com/office/drawing/2010/main" Requires="a14">
+      <mc:AlternateContent xmlns:mc="http://schemas.openxmlformats.org/markup-compatibility/2006" xmlns:a14="http://schemas.microsoft.com/office/drawing/2010/main">
+        <mc:Choice Requires="a14">
           <p:sp>
             <p:nvSpPr>
               <p:cNvPr id="7" name="ZoneTexte 6">
@@ -12866,7 +13216,7 @@
             </p:txBody>
           </p:sp>
         </mc:Choice>
-        <mc:Fallback>
+        <mc:Fallback xmlns="">
           <p:sp>
             <p:nvSpPr>
               <p:cNvPr id="7" name="ZoneTexte 6">
@@ -12911,8 +13261,8 @@
           </p:sp>
         </mc:Fallback>
       </mc:AlternateContent>
-      <mc:AlternateContent xmlns:mc="http://schemas.openxmlformats.org/markup-compatibility/2006">
-        <mc:Choice xmlns:a14="http://schemas.microsoft.com/office/drawing/2010/main" Requires="a14">
+      <mc:AlternateContent xmlns:mc="http://schemas.openxmlformats.org/markup-compatibility/2006" xmlns:a14="http://schemas.microsoft.com/office/drawing/2010/main">
+        <mc:Choice Requires="a14">
           <p:sp>
             <p:nvSpPr>
               <p:cNvPr id="8" name="ZoneTexte 7">
@@ -13361,21 +13711,12 @@
                         </a:solidFill>
                         <a:latin typeface="Cambria Math" panose="02040503050406030204" pitchFamily="18" charset="0"/>
                       </a:rPr>
-                      <m:t>=</m:t>
-                    </m:r>
-                    <m:r>
-                      <a:rPr lang="fr-CA" b="0" i="0" smtClean="0">
-                        <a:solidFill>
-                          <a:srgbClr val="5B9BD5"/>
-                        </a:solidFill>
-                        <a:latin typeface="Cambria Math" panose="02040503050406030204" pitchFamily="18" charset="0"/>
-                      </a:rPr>
-                      <m:t>[</m:t>
+                      <m:t>=[</m:t>
                     </m:r>
                     <m:d>
                       <m:dPr>
                         <m:ctrlPr>
-                          <a:rPr lang="fr-CA" b="0" i="0" smtClean="0">
+                          <a:rPr lang="fr-CA" b="0" i="1" smtClean="0">
                             <a:solidFill>
                               <a:srgbClr val="5B9BD5"/>
                             </a:solidFill>
@@ -13387,7 +13728,7 @@
                         <m:f>
                           <m:fPr>
                             <m:ctrlPr>
-                              <a:rPr lang="fr-CA" b="0" i="0" smtClean="0">
+                              <a:rPr lang="fr-CA" b="0" i="1" smtClean="0">
                                 <a:solidFill>
                                   <a:srgbClr val="5B9BD5"/>
                                 </a:solidFill>
@@ -14032,7 +14373,7 @@
             </p:txBody>
           </p:sp>
         </mc:Choice>
-        <mc:Fallback>
+        <mc:Fallback xmlns="">
           <p:sp>
             <p:nvSpPr>
               <p:cNvPr id="8" name="ZoneTexte 7">
@@ -14077,8 +14418,8 @@
           </p:sp>
         </mc:Fallback>
       </mc:AlternateContent>
-      <mc:AlternateContent xmlns:mc="http://schemas.openxmlformats.org/markup-compatibility/2006">
-        <mc:Choice xmlns:a14="http://schemas.microsoft.com/office/drawing/2010/main" Requires="a14">
+      <mc:AlternateContent xmlns:mc="http://schemas.openxmlformats.org/markup-compatibility/2006" xmlns:a14="http://schemas.microsoft.com/office/drawing/2010/main">
+        <mc:Choice Requires="a14">
           <p:sp>
             <p:nvSpPr>
               <p:cNvPr id="9" name="ZoneTexte 8">
@@ -15018,16 +15359,7 @@
                             </a:solidFill>
                             <a:latin typeface="Cambria Math" panose="02040503050406030204" pitchFamily="18" charset="0"/>
                           </a:rPr>
-                          <m:t>+</m:t>
-                        </m:r>
-                        <m:r>
-                          <a:rPr lang="fr-CA" b="0" i="1" smtClean="0">
-                            <a:solidFill>
-                              <a:srgbClr val="6FAD46"/>
-                            </a:solidFill>
-                            <a:latin typeface="Cambria Math" panose="02040503050406030204" pitchFamily="18" charset="0"/>
-                          </a:rPr>
-                          <m:t>2</m:t>
+                          <m:t>+2</m:t>
                         </m:r>
                       </m:sub>
                       <m:sup>
@@ -15109,16 +15441,7 @@
                             </a:solidFill>
                             <a:latin typeface="Cambria Math" panose="02040503050406030204" pitchFamily="18" charset="0"/>
                           </a:rPr>
-                          <m:t>+</m:t>
-                        </m:r>
-                        <m:r>
-                          <a:rPr lang="fr-CA" b="0" i="1" smtClean="0">
-                            <a:solidFill>
-                              <a:srgbClr val="6FAD46"/>
-                            </a:solidFill>
-                            <a:latin typeface="Cambria Math" panose="02040503050406030204" pitchFamily="18" charset="0"/>
-                          </a:rPr>
-                          <m:t>1</m:t>
+                          <m:t>+1</m:t>
                         </m:r>
                       </m:sub>
                       <m:sup>
@@ -15193,43 +15516,7 @@
                           </a:solidFill>
                           <a:latin typeface="Cambria Math" panose="02040503050406030204" pitchFamily="18" charset="0"/>
                         </a:rPr>
-                        <m:t>=(</m:t>
-                      </m:r>
-                      <m:r>
-                        <a:rPr lang="fr-CA" b="0" i="1" smtClean="0">
-                          <a:solidFill>
-                            <a:srgbClr val="6FAD46"/>
-                          </a:solidFill>
-                          <a:latin typeface="Cambria Math" panose="02040503050406030204" pitchFamily="18" charset="0"/>
-                        </a:rPr>
-                        <m:t>1</m:t>
-                      </m:r>
-                      <m:r>
-                        <a:rPr lang="fr-CA" b="0" i="1" smtClean="0">
-                          <a:solidFill>
-                            <a:srgbClr val="6FAD46"/>
-                          </a:solidFill>
-                          <a:latin typeface="Cambria Math" panose="02040503050406030204" pitchFamily="18" charset="0"/>
-                        </a:rPr>
-                        <m:t>,</m:t>
-                      </m:r>
-                      <m:r>
-                        <a:rPr lang="fr-CA" b="0" i="1" smtClean="0">
-                          <a:solidFill>
-                            <a:srgbClr val="6FAD46"/>
-                          </a:solidFill>
-                          <a:latin typeface="Cambria Math" panose="02040503050406030204" pitchFamily="18" charset="0"/>
-                        </a:rPr>
-                        <m:t>0</m:t>
-                      </m:r>
-                      <m:r>
-                        <a:rPr lang="fr-CA" b="0" i="1" smtClean="0">
-                          <a:solidFill>
-                            <a:srgbClr val="6FAD46"/>
-                          </a:solidFill>
-                          <a:latin typeface="Cambria Math" panose="02040503050406030204" pitchFamily="18" charset="0"/>
-                        </a:rPr>
-                        <m:t>)</m:t>
+                        <m:t>=(1,0)</m:t>
                       </m:r>
                     </m:oMath>
                   </m:oMathPara>
@@ -15243,7 +15530,7 @@
             </p:txBody>
           </p:sp>
         </mc:Choice>
-        <mc:Fallback>
+        <mc:Fallback xmlns="">
           <p:sp>
             <p:nvSpPr>
               <p:cNvPr id="9" name="ZoneTexte 8">
@@ -15436,8 +15723,8 @@
           </a:p>
         </p:txBody>
       </p:sp>
-      <mc:AlternateContent xmlns:mc="http://schemas.openxmlformats.org/markup-compatibility/2006">
-        <mc:Choice xmlns:a14="http://schemas.microsoft.com/office/drawing/2010/main" Requires="a14">
+      <mc:AlternateContent xmlns:mc="http://schemas.openxmlformats.org/markup-compatibility/2006" xmlns:a14="http://schemas.microsoft.com/office/drawing/2010/main">
+        <mc:Choice Requires="a14">
           <p:sp>
             <p:nvSpPr>
               <p:cNvPr id="3" name="Espace réservé du contenu 2">
@@ -15822,7 +16109,7 @@
             </p:txBody>
           </p:sp>
         </mc:Choice>
-        <mc:Fallback>
+        <mc:Fallback xmlns="">
           <p:sp>
             <p:nvSpPr>
               <p:cNvPr id="3" name="Espace réservé du contenu 2">
@@ -15929,8 +16216,8 @@
           </a:p>
         </p:txBody>
       </p:sp>
-      <mc:AlternateContent xmlns:mc="http://schemas.openxmlformats.org/markup-compatibility/2006">
-        <mc:Choice xmlns:a14="http://schemas.microsoft.com/office/drawing/2010/main" Requires="a14">
+      <mc:AlternateContent xmlns:mc="http://schemas.openxmlformats.org/markup-compatibility/2006" xmlns:a14="http://schemas.microsoft.com/office/drawing/2010/main">
+        <mc:Choice Requires="a14">
           <p:sp>
             <p:nvSpPr>
               <p:cNvPr id="3" name="Espace réservé du contenu 2">
@@ -18542,7 +18829,7 @@
             </p:txBody>
           </p:sp>
         </mc:Choice>
-        <mc:Fallback>
+        <mc:Fallback xmlns="">
           <p:sp>
             <p:nvSpPr>
               <p:cNvPr id="3" name="Espace réservé du contenu 2">
@@ -18655,8 +18942,8 @@
           </a:p>
         </p:txBody>
       </p:sp>
-      <mc:AlternateContent xmlns:mc="http://schemas.openxmlformats.org/markup-compatibility/2006">
-        <mc:Choice xmlns:a14="http://schemas.microsoft.com/office/drawing/2010/main" Requires="a14">
+      <mc:AlternateContent xmlns:mc="http://schemas.openxmlformats.org/markup-compatibility/2006" xmlns:a14="http://schemas.microsoft.com/office/drawing/2010/main">
+        <mc:Choice Requires="a14">
           <p:sp>
             <p:nvSpPr>
               <p:cNvPr id="3" name="Espace réservé du contenu 2">
@@ -23366,7 +23653,7 @@
             </p:txBody>
           </p:sp>
         </mc:Choice>
-        <mc:Fallback>
+        <mc:Fallback xmlns="">
           <p:sp>
             <p:nvSpPr>
               <p:cNvPr id="3" name="Espace réservé du contenu 2">

--- a/projet_final/projet_final/MEC8211-Projet-final-Presentation.pptx
+++ b/projet_final/projet_final/MEC8211-Projet-final-Presentation.pptx
@@ -5,7 +5,7 @@
     <p:sldMasterId id="2147483648" r:id="rId1"/>
   </p:sldMasterIdLst>
   <p:notesMasterIdLst>
-    <p:notesMasterId r:id="rId23"/>
+    <p:notesMasterId r:id="rId24"/>
   </p:notesMasterIdLst>
   <p:sldIdLst>
     <p:sldId id="256" r:id="rId2"/>
@@ -28,7 +28,8 @@
     <p:sldId id="273" r:id="rId19"/>
     <p:sldId id="275" r:id="rId20"/>
     <p:sldId id="276" r:id="rId21"/>
-    <p:sldId id="274" r:id="rId22"/>
+    <p:sldId id="277" r:id="rId22"/>
+    <p:sldId id="274" r:id="rId23"/>
   </p:sldIdLst>
   <p:sldSz cx="12192000" cy="6858000"/>
   <p:notesSz cx="6858000" cy="9144000"/>
@@ -6196,8 +6197,8 @@
           <a:chExt cx="0" cy="0"/>
         </a:xfrm>
       </p:grpSpPr>
-      <mc:AlternateContent xmlns:mc="http://schemas.openxmlformats.org/markup-compatibility/2006">
-        <mc:Choice xmlns:a14="http://schemas.microsoft.com/office/drawing/2010/main" Requires="a14">
+      <mc:AlternateContent xmlns:mc="http://schemas.openxmlformats.org/markup-compatibility/2006" xmlns:a14="http://schemas.microsoft.com/office/drawing/2010/main">
+        <mc:Choice Requires="a14">
           <p:sp>
             <p:nvSpPr>
               <p:cNvPr id="3" name="Content Placeholder 2">
@@ -6269,13 +6270,7 @@
                         <a:rPr lang="fr-FR" sz="2000" b="0" i="1" smtClean="0">
                           <a:latin typeface="Cambria Math" panose="02040503050406030204" pitchFamily="18" charset="0"/>
                         </a:rPr>
-                        <m:t> </m:t>
-                      </m:r>
-                      <m:r>
-                        <a:rPr lang="fr-FR" sz="2000" b="0" i="1" smtClean="0">
-                          <a:latin typeface="Cambria Math" panose="02040503050406030204" pitchFamily="18" charset="0"/>
-                        </a:rPr>
-                        <m:t>- </m:t>
+                        <m:t> − </m:t>
                       </m:r>
                       <m:r>
                         <m:rPr>
@@ -6317,7 +6312,7 @@
             </p:txBody>
           </p:sp>
         </mc:Choice>
-        <mc:Fallback>
+        <mc:Fallback xmlns="">
           <p:sp>
             <p:nvSpPr>
               <p:cNvPr id="3" name="Content Placeholder 2">
@@ -7800,8 +7795,8 @@
           </a:prstGeom>
         </p:spPr>
       </p:pic>
-      <mc:AlternateContent xmlns:mc="http://schemas.openxmlformats.org/markup-compatibility/2006">
-        <mc:Choice xmlns:a14="http://schemas.microsoft.com/office/drawing/2010/main" Requires="a14">
+      <mc:AlternateContent xmlns:mc="http://schemas.openxmlformats.org/markup-compatibility/2006" xmlns:a14="http://schemas.microsoft.com/office/drawing/2010/main">
+        <mc:Choice Requires="a14">
           <p:sp>
             <p:nvSpPr>
               <p:cNvPr id="10" name="TextBox 9">
@@ -8146,7 +8141,7 @@
                         <a:rPr lang="fr-FR" sz="2400" b="0" i="1" smtClean="0">
                           <a:latin typeface="Cambria Math" panose="02040503050406030204" pitchFamily="18" charset="0"/>
                         </a:rPr>
-                        <m:t>*</m:t>
+                        <m:t>∗</m:t>
                       </m:r>
                     </m:oMath>
                   </m:oMathPara>
@@ -8159,7 +8154,7 @@
             </p:txBody>
           </p:sp>
         </mc:Choice>
-        <mc:Fallback>
+        <mc:Fallback xmlns="">
           <p:sp>
             <p:nvSpPr>
               <p:cNvPr id="10" name="TextBox 9">
@@ -8831,13 +8826,7 @@
                         <a:rPr lang="fr-FR" b="0" i="1" smtClean="0">
                           <a:latin typeface="Cambria Math" panose="02040503050406030204" pitchFamily="18" charset="0"/>
                         </a:rPr>
-                        <m:t>𝑛</m:t>
-                      </m:r>
-                      <m:r>
-                        <a:rPr lang="fr-FR" b="0" i="1" baseline="-25000" smtClean="0">
-                          <a:latin typeface="Cambria Math" panose="02040503050406030204" pitchFamily="18" charset="0"/>
-                        </a:rPr>
-                        <m:t>𝑟</m:t>
+                        <m:t>𝑛𝑟</m:t>
                       </m:r>
                       <m:r>
                         <a:rPr lang="fr-FR" b="0" i="1" smtClean="0">
@@ -9373,7 +9362,19 @@
                           <a:rPr lang="fr-FR" b="0" i="1" smtClean="0">
                             <a:latin typeface="Cambria Math" panose="02040503050406030204" pitchFamily="18" charset="0"/>
                           </a:rPr>
-                          <m:t>1.5</m:t>
+                          <m:t>1</m:t>
+                        </m:r>
+                        <m:r>
+                          <a:rPr lang="fr-FR" b="0" i="1" smtClean="0">
+                            <a:latin typeface="Cambria Math" panose="02040503050406030204" pitchFamily="18" charset="0"/>
+                          </a:rPr>
+                          <m:t>.</m:t>
+                        </m:r>
+                        <m:r>
+                          <a:rPr lang="fr-FR" b="0" i="1" smtClean="0">
+                            <a:latin typeface="Cambria Math" panose="02040503050406030204" pitchFamily="18" charset="0"/>
+                          </a:rPr>
+                          <m:t>5</m:t>
                         </m:r>
                       </m:num>
                       <m:den>
@@ -9402,7 +9403,31 @@
                       <a:rPr lang="fr-FR" b="0" i="1" smtClean="0">
                         <a:latin typeface="Cambria Math" panose="02040503050406030204" pitchFamily="18" charset="0"/>
                       </a:rPr>
-                      <m:t> = 0.87 °</m:t>
+                      <m:t> = </m:t>
+                    </m:r>
+                    <m:r>
+                      <a:rPr lang="fr-FR" b="0" i="1" smtClean="0">
+                        <a:latin typeface="Cambria Math" panose="02040503050406030204" pitchFamily="18" charset="0"/>
+                      </a:rPr>
+                      <m:t>0</m:t>
+                    </m:r>
+                    <m:r>
+                      <a:rPr lang="fr-FR" b="0" i="1" smtClean="0">
+                        <a:latin typeface="Cambria Math" panose="02040503050406030204" pitchFamily="18" charset="0"/>
+                      </a:rPr>
+                      <m:t>.</m:t>
+                    </m:r>
+                    <m:r>
+                      <a:rPr lang="fr-FR" b="0" i="1" smtClean="0">
+                        <a:latin typeface="Cambria Math" panose="02040503050406030204" pitchFamily="18" charset="0"/>
+                      </a:rPr>
+                      <m:t>87</m:t>
+                    </m:r>
+                    <m:r>
+                      <a:rPr lang="fr-FR" b="0" i="1" smtClean="0">
+                        <a:latin typeface="Cambria Math" panose="02040503050406030204" pitchFamily="18" charset="0"/>
+                      </a:rPr>
+                      <m:t> °</m:t>
                     </m:r>
                     <m:r>
                       <m:rPr>
@@ -9508,7 +9533,19 @@
                             <a:rPr lang="fr-FR" b="0" i="1" smtClean="0">
                               <a:latin typeface="Cambria Math" panose="02040503050406030204" pitchFamily="18" charset="0"/>
                             </a:rPr>
-                            <m:t> + 02 </m:t>
+                            <m:t> + </m:t>
+                          </m:r>
+                          <m:r>
+                            <a:rPr lang="fr-FR" b="0" i="1" smtClean="0">
+                              <a:latin typeface="Cambria Math" panose="02040503050406030204" pitchFamily="18" charset="0"/>
+                            </a:rPr>
+                            <m:t>02</m:t>
+                          </m:r>
+                          <m:r>
+                            <a:rPr lang="fr-FR" b="0" i="1" smtClean="0">
+                              <a:latin typeface="Cambria Math" panose="02040503050406030204" pitchFamily="18" charset="0"/>
+                            </a:rPr>
+                            <m:t> </m:t>
                           </m:r>
                         </m:e>
                       </m:rad>
@@ -9540,7 +9577,31 @@
                         <a:rPr lang="fr-FR" b="0" i="1" smtClean="0">
                           <a:latin typeface="Cambria Math" panose="02040503050406030204" pitchFamily="18" charset="0"/>
                         </a:rPr>
-                        <m:t>=0.87°</m:t>
+                        <m:t>=</m:t>
+                      </m:r>
+                      <m:r>
+                        <a:rPr lang="fr-FR" b="0" i="1" smtClean="0">
+                          <a:latin typeface="Cambria Math" panose="02040503050406030204" pitchFamily="18" charset="0"/>
+                        </a:rPr>
+                        <m:t>0</m:t>
+                      </m:r>
+                      <m:r>
+                        <a:rPr lang="fr-FR" b="0" i="1" smtClean="0">
+                          <a:latin typeface="Cambria Math" panose="02040503050406030204" pitchFamily="18" charset="0"/>
+                        </a:rPr>
+                        <m:t>.</m:t>
+                      </m:r>
+                      <m:r>
+                        <a:rPr lang="fr-FR" b="0" i="1" smtClean="0">
+                          <a:latin typeface="Cambria Math" panose="02040503050406030204" pitchFamily="18" charset="0"/>
+                        </a:rPr>
+                        <m:t>87</m:t>
+                      </m:r>
+                      <m:r>
+                        <a:rPr lang="fr-FR" b="0" i="1" smtClean="0">
+                          <a:latin typeface="Cambria Math" panose="02040503050406030204" pitchFamily="18" charset="0"/>
+                        </a:rPr>
+                        <m:t>°</m:t>
                       </m:r>
                       <m:r>
                         <m:rPr>
@@ -10158,9 +10219,16 @@
                 <p:ph idx="1"/>
               </p:nvPr>
             </p:nvSpPr>
-            <p:spPr/>
+            <p:spPr>
+              <a:xfrm>
+                <a:off x="838200" y="1512507"/>
+                <a:ext cx="10515600" cy="1902313"/>
+              </a:xfrm>
+            </p:spPr>
             <p:txBody>
-              <a:bodyPr/>
+              <a:bodyPr>
+                <a:normAutofit fontScale="77500" lnSpcReduction="20000"/>
+              </a:bodyPr>
               <a:lstStyle/>
               <a:p>
                 <a:r>
@@ -10428,7 +10496,7 @@
                 </a:pPr>
                 <a:r>
                   <a:rPr lang="fr-FR" dirty="0"/>
-                  <a:t>Par la méthode de Monte Carlo en travaillant sur la température moyenne de surface</a:t>
+                  <a:t>Par la méthode de Monte Carlo en travaillant sur la température moyenne de surface :</a:t>
                 </a:r>
                 <a:endParaRPr lang="fr-FR" b="0" dirty="0"/>
               </a:p>
@@ -10459,10 +10527,14 @@
               </p:nvPr>
             </p:nvSpPr>
             <p:spPr>
+              <a:xfrm>
+                <a:off x="838200" y="1512507"/>
+                <a:ext cx="10515600" cy="1902313"/>
+              </a:xfrm>
               <a:blipFill>
                 <a:blip r:embed="rId3"/>
                 <a:stretch>
-                  <a:fillRect l="-1217" t="-2381"/>
+                  <a:fillRect l="-754" t="-6410"/>
                 </a:stretch>
               </a:blipFill>
             </p:spPr>
@@ -10481,6 +10553,262 @@
           </p:sp>
         </mc:Fallback>
       </mc:AlternateContent>
+      <p:pic>
+        <p:nvPicPr>
+          <p:cNvPr id="5" name="Picture 4">
+            <a:extLst>
+              <a:ext uri="{FF2B5EF4-FFF2-40B4-BE49-F238E27FC236}">
+                <a16:creationId xmlns:a16="http://schemas.microsoft.com/office/drawing/2014/main" id="{DED20CE4-3C39-9D44-374C-AC20D7FBAB84}"/>
+              </a:ext>
+            </a:extLst>
+          </p:cNvPr>
+          <p:cNvPicPr>
+            <a:picLocks noChangeAspect="1"/>
+          </p:cNvPicPr>
+          <p:nvPr/>
+        </p:nvPicPr>
+        <p:blipFill>
+          <a:blip r:embed="rId4">
+            <a:extLst>
+              <a:ext uri="{28A0092B-C50C-407E-A947-70E740481C1C}">
+                <a14:useLocalDpi xmlns:a14="http://schemas.microsoft.com/office/drawing/2010/main" val="0"/>
+              </a:ext>
+            </a:extLst>
+          </a:blip>
+          <a:srcRect r="67245"/>
+          <a:stretch>
+            <a:fillRect/>
+          </a:stretch>
+        </p:blipFill>
+        <p:spPr>
+          <a:xfrm>
+            <a:off x="667378" y="3242213"/>
+            <a:ext cx="3522785" cy="3494180"/>
+          </a:xfrm>
+          <a:prstGeom prst="rect">
+            <a:avLst/>
+          </a:prstGeom>
+        </p:spPr>
+      </p:pic>
+      <mc:AlternateContent xmlns:mc="http://schemas.openxmlformats.org/markup-compatibility/2006">
+        <mc:Choice xmlns:a14="http://schemas.microsoft.com/office/drawing/2010/main" Requires="a14">
+          <p:sp>
+            <p:nvSpPr>
+              <p:cNvPr id="6" name="TextBox 5">
+                <a:extLst>
+                  <a:ext uri="{FF2B5EF4-FFF2-40B4-BE49-F238E27FC236}">
+                    <a16:creationId xmlns:a16="http://schemas.microsoft.com/office/drawing/2014/main" id="{E5311083-8219-5CC9-7AD5-1BA45AE6D7E6}"/>
+                  </a:ext>
+                </a:extLst>
+              </p:cNvPr>
+              <p:cNvSpPr txBox="1"/>
+              <p:nvPr/>
+            </p:nvSpPr>
+            <p:spPr>
+              <a:xfrm>
+                <a:off x="5556738" y="3320871"/>
+                <a:ext cx="5967884" cy="795539"/>
+              </a:xfrm>
+              <a:prstGeom prst="rect">
+                <a:avLst/>
+              </a:prstGeom>
+              <a:noFill/>
+            </p:spPr>
+            <p:txBody>
+              <a:bodyPr wrap="square" rtlCol="0">
+                <a:spAutoFit/>
+              </a:bodyPr>
+              <a:lstStyle/>
+              <a:p>
+                <a14:m>
+                  <m:oMath xmlns:m="http://schemas.openxmlformats.org/officeDocument/2006/math">
+                    <m:sSub>
+                      <m:sSubPr>
+                        <m:ctrlPr>
+                          <a:rPr lang="fr-FR" sz="2200" b="0" i="1" smtClean="0">
+                            <a:latin typeface="Cambria Math" panose="02040503050406030204" pitchFamily="18" charset="0"/>
+                          </a:rPr>
+                        </m:ctrlPr>
+                      </m:sSubPr>
+                      <m:e>
+                        <m:r>
+                          <a:rPr lang="fr-FR" sz="2200" b="0" i="1" smtClean="0">
+                            <a:latin typeface="Cambria Math" panose="02040503050406030204" pitchFamily="18" charset="0"/>
+                          </a:rPr>
+                          <m:t>𝑢</m:t>
+                        </m:r>
+                      </m:e>
+                      <m:sub>
+                        <m:r>
+                          <a:rPr lang="fr-FR" sz="2200" b="0" i="1" smtClean="0">
+                            <a:latin typeface="Cambria Math" panose="02040503050406030204" pitchFamily="18" charset="0"/>
+                          </a:rPr>
+                          <m:t>𝑖𝑛𝑝𝑢𝑡</m:t>
+                        </m:r>
+                      </m:sub>
+                    </m:sSub>
+                    <m:r>
+                      <a:rPr lang="fr-FR" sz="2200" b="0" i="1" smtClean="0">
+                        <a:latin typeface="Cambria Math" panose="02040503050406030204" pitchFamily="18" charset="0"/>
+                      </a:rPr>
+                      <m:t>=</m:t>
+                    </m:r>
+                    <m:r>
+                      <a:rPr lang="fr-FR" sz="2200" b="0" i="1" smtClean="0">
+                        <a:latin typeface="Cambria Math" panose="02040503050406030204" pitchFamily="18" charset="0"/>
+                      </a:rPr>
+                      <m:t>44</m:t>
+                    </m:r>
+                    <m:r>
+                      <a:rPr lang="fr-FR" sz="2200" b="0" i="1" smtClean="0">
+                        <a:latin typeface="Cambria Math" panose="02040503050406030204" pitchFamily="18" charset="0"/>
+                      </a:rPr>
+                      <m:t>.</m:t>
+                    </m:r>
+                    <m:r>
+                      <a:rPr lang="fr-FR" sz="2200" b="0" i="1" smtClean="0">
+                        <a:latin typeface="Cambria Math" panose="02040503050406030204" pitchFamily="18" charset="0"/>
+                      </a:rPr>
+                      <m:t>91</m:t>
+                    </m:r>
+                    <m:r>
+                      <a:rPr lang="fr-FR" sz="2200" b="0" i="1" smtClean="0">
+                        <a:latin typeface="Cambria Math" panose="02040503050406030204" pitchFamily="18" charset="0"/>
+                      </a:rPr>
+                      <m:t> </m:t>
+                    </m:r>
+                    <m:r>
+                      <m:rPr>
+                        <m:sty m:val="p"/>
+                      </m:rPr>
+                      <a:rPr lang="fr-FR" sz="2200" b="0" i="0" smtClean="0">
+                        <a:latin typeface="Cambria Math" panose="02040503050406030204" pitchFamily="18" charset="0"/>
+                      </a:rPr>
+                      <m:t>K</m:t>
+                    </m:r>
+                  </m:oMath>
+                </a14:m>
+                <a:r>
+                  <a:rPr lang="en-US" sz="2200" dirty="0"/>
+                  <a:t> </a:t>
+                </a:r>
+              </a:p>
+              <a:p>
+                <a:r>
+                  <a:rPr lang="en-US" sz="2200" dirty="0"/>
+                  <a:t>Effort à faire sur </a:t>
+                </a:r>
+                <a:r>
+                  <a:rPr lang="en-US" sz="2200" dirty="0" err="1"/>
+                  <a:t>l’incertitude</a:t>
+                </a:r>
+                <a:r>
+                  <a:rPr lang="en-US" sz="2200" dirty="0"/>
+                  <a:t> de </a:t>
+                </a:r>
+                <a14:m>
+                  <m:oMath xmlns:m="http://schemas.openxmlformats.org/officeDocument/2006/math">
+                    <m:r>
+                      <m:rPr>
+                        <m:sty m:val="p"/>
+                      </m:rPr>
+                      <a:rPr lang="fr-FR" sz="2200" b="0" i="1" smtClean="0">
+                        <a:latin typeface="Cambria Math" panose="02040503050406030204" pitchFamily="18" charset="0"/>
+                      </a:rPr>
+                      <m:t>ε</m:t>
+                    </m:r>
+                  </m:oMath>
+                </a14:m>
+                <a:r>
+                  <a:rPr lang="en-US" sz="2200" dirty="0"/>
+                  <a:t> </a:t>
+                </a:r>
+              </a:p>
+            </p:txBody>
+          </p:sp>
+        </mc:Choice>
+        <mc:Fallback>
+          <p:sp>
+            <p:nvSpPr>
+              <p:cNvPr id="6" name="TextBox 5">
+                <a:extLst>
+                  <a:ext uri="{FF2B5EF4-FFF2-40B4-BE49-F238E27FC236}">
+                    <a16:creationId xmlns:a16="http://schemas.microsoft.com/office/drawing/2014/main" id="{E5311083-8219-5CC9-7AD5-1BA45AE6D7E6}"/>
+                  </a:ext>
+                </a:extLst>
+              </p:cNvPr>
+              <p:cNvSpPr txBox="1">
+                <a:spLocks noRot="1" noChangeAspect="1" noMove="1" noResize="1" noEditPoints="1" noAdjustHandles="1" noChangeArrowheads="1" noChangeShapeType="1" noTextEdit="1"/>
+              </p:cNvSpPr>
+              <p:nvPr/>
+            </p:nvSpPr>
+            <p:spPr>
+              <a:xfrm>
+                <a:off x="5556738" y="3320871"/>
+                <a:ext cx="5967884" cy="795539"/>
+              </a:xfrm>
+              <a:prstGeom prst="rect">
+                <a:avLst/>
+              </a:prstGeom>
+              <a:blipFill>
+                <a:blip r:embed="rId5"/>
+                <a:stretch>
+                  <a:fillRect l="-1328" t="-3846" b="-15385"/>
+                </a:stretch>
+              </a:blipFill>
+            </p:spPr>
+            <p:txBody>
+              <a:bodyPr/>
+              <a:lstStyle/>
+              <a:p>
+                <a:r>
+                  <a:rPr lang="en-US">
+                    <a:noFill/>
+                  </a:rPr>
+                  <a:t> </a:t>
+                </a:r>
+              </a:p>
+            </p:txBody>
+          </p:sp>
+        </mc:Fallback>
+      </mc:AlternateContent>
+      <p:pic>
+        <p:nvPicPr>
+          <p:cNvPr id="10" name="Content Placeholder 4">
+            <a:extLst>
+              <a:ext uri="{FF2B5EF4-FFF2-40B4-BE49-F238E27FC236}">
+                <a16:creationId xmlns:a16="http://schemas.microsoft.com/office/drawing/2014/main" id="{E6568F1A-BFDC-4D6C-F765-418948158524}"/>
+              </a:ext>
+            </a:extLst>
+          </p:cNvPr>
+          <p:cNvPicPr>
+            <a:picLocks noChangeAspect="1"/>
+          </p:cNvPicPr>
+          <p:nvPr/>
+        </p:nvPicPr>
+        <p:blipFill>
+          <a:blip r:embed="rId4">
+            <a:extLst>
+              <a:ext uri="{28A0092B-C50C-407E-A947-70E740481C1C}">
+                <a14:useLocalDpi xmlns:a14="http://schemas.microsoft.com/office/drawing/2010/main" val="0"/>
+              </a:ext>
+            </a:extLst>
+          </a:blip>
+          <a:srcRect l="32515" t="8282"/>
+          <a:stretch>
+            <a:fillRect/>
+          </a:stretch>
+        </p:blipFill>
+        <p:spPr>
+          <a:xfrm>
+            <a:off x="5652467" y="4400835"/>
+            <a:ext cx="5120148" cy="2260801"/>
+          </a:xfrm>
+          <a:prstGeom prst="rect">
+            <a:avLst/>
+          </a:prstGeom>
+        </p:spPr>
+      </p:pic>
     </p:spTree>
     <p:extLst>
       <p:ext uri="{BB962C8B-B14F-4D97-AF65-F5344CB8AC3E}">
@@ -10495,6 +10823,90 @@
 </file>
 
 <file path=ppt/slides/slide21.xml><?xml version="1.0" encoding="utf-8"?>
+<p:sld xmlns:a="http://schemas.openxmlformats.org/drawingml/2006/main" xmlns:r="http://schemas.openxmlformats.org/officeDocument/2006/relationships" xmlns:p="http://schemas.openxmlformats.org/presentationml/2006/main">
+  <p:cSld>
+    <p:spTree>
+      <p:nvGrpSpPr>
+        <p:cNvPr id="1" name=""/>
+        <p:cNvGrpSpPr/>
+        <p:nvPr/>
+      </p:nvGrpSpPr>
+      <p:grpSpPr>
+        <a:xfrm>
+          <a:off x="0" y="0"/>
+          <a:ext cx="0" cy="0"/>
+          <a:chOff x="0" y="0"/>
+          <a:chExt cx="0" cy="0"/>
+        </a:xfrm>
+      </p:grpSpPr>
+      <p:sp>
+        <p:nvSpPr>
+          <p:cNvPr id="2" name="Title 1">
+            <a:extLst>
+              <a:ext uri="{FF2B5EF4-FFF2-40B4-BE49-F238E27FC236}">
+                <a16:creationId xmlns:a16="http://schemas.microsoft.com/office/drawing/2014/main" id="{B0F15578-24AA-1A1D-99B9-0FD28C04FF50}"/>
+              </a:ext>
+            </a:extLst>
+          </p:cNvPr>
+          <p:cNvSpPr>
+            <a:spLocks noGrp="1"/>
+          </p:cNvSpPr>
+          <p:nvPr>
+            <p:ph type="title"/>
+          </p:nvPr>
+        </p:nvSpPr>
+        <p:spPr/>
+        <p:txBody>
+          <a:bodyPr/>
+          <a:lstStyle/>
+          <a:p>
+            <a:r>
+              <a:rPr lang="fr-FR" dirty="0"/>
+              <a:t>Validation – erreur du modèle </a:t>
+            </a:r>
+            <a:endParaRPr lang="en-US" dirty="0"/>
+          </a:p>
+        </p:txBody>
+      </p:sp>
+      <p:sp>
+        <p:nvSpPr>
+          <p:cNvPr id="3" name="Content Placeholder 2">
+            <a:extLst>
+              <a:ext uri="{FF2B5EF4-FFF2-40B4-BE49-F238E27FC236}">
+                <a16:creationId xmlns:a16="http://schemas.microsoft.com/office/drawing/2014/main" id="{41DABA39-902C-A6ED-B4EF-7E3705D66722}"/>
+              </a:ext>
+            </a:extLst>
+          </p:cNvPr>
+          <p:cNvSpPr>
+            <a:spLocks noGrp="1"/>
+          </p:cNvSpPr>
+          <p:nvPr>
+            <p:ph idx="1"/>
+          </p:nvPr>
+        </p:nvSpPr>
+        <p:spPr/>
+        <p:txBody>
+          <a:bodyPr/>
+          <a:lstStyle/>
+          <a:p>
+            <a:endParaRPr lang="en-US"/>
+          </a:p>
+        </p:txBody>
+      </p:sp>
+    </p:spTree>
+    <p:extLst>
+      <p:ext uri="{BB962C8B-B14F-4D97-AF65-F5344CB8AC3E}">
+        <p14:creationId xmlns:p14="http://schemas.microsoft.com/office/powerpoint/2010/main" val="3191033194"/>
+      </p:ext>
+    </p:extLst>
+  </p:cSld>
+  <p:clrMapOvr>
+    <a:masterClrMapping/>
+  </p:clrMapOvr>
+</p:sld>
+</file>
+
+<file path=ppt/slides/slide22.xml><?xml version="1.0" encoding="utf-8"?>
 <p:sld xmlns:a="http://schemas.openxmlformats.org/drawingml/2006/main" xmlns:r="http://schemas.openxmlformats.org/officeDocument/2006/relationships" xmlns:p="http://schemas.openxmlformats.org/presentationml/2006/main">
   <p:cSld>
     <p:spTree>
@@ -14010,13 +14422,7 @@
                               <a:rPr lang="fr-FR" b="0" i="1" smtClean="0">
                                 <a:latin typeface="Cambria Math" panose="02040503050406030204" pitchFamily="18" charset="0"/>
                               </a:rPr>
-                              <m:t>+</m:t>
-                            </m:r>
-                            <m:r>
-                              <a:rPr lang="fr-FR" b="0" i="1" smtClean="0">
-                                <a:latin typeface="Cambria Math" panose="02040503050406030204" pitchFamily="18" charset="0"/>
-                              </a:rPr>
-                              <m:t>1</m:t>
+                              <m:t>+1</m:t>
                             </m:r>
                             <m:r>
                               <a:rPr lang="fr-FR" i="1">
@@ -14073,13 +14479,7 @@
                               <a:rPr lang="fr-FR" b="0" i="1" smtClean="0">
                                 <a:latin typeface="Cambria Math" panose="02040503050406030204" pitchFamily="18" charset="0"/>
                               </a:rPr>
-                              <m:t>−</m:t>
-                            </m:r>
-                            <m:r>
-                              <a:rPr lang="fr-FR" b="0" i="1" smtClean="0">
-                                <a:latin typeface="Cambria Math" panose="02040503050406030204" pitchFamily="18" charset="0"/>
-                              </a:rPr>
-                              <m:t>1</m:t>
+                              <m:t>−1</m:t>
                             </m:r>
                             <m:r>
                               <a:rPr lang="fr-FR" i="1">
@@ -14727,19 +15127,7 @@
                                 <a:rPr lang="fr-FR" sz="2400" i="1">
                                   <a:latin typeface="Cambria Math" panose="02040503050406030204" pitchFamily="18" charset="0"/>
                                 </a:rPr>
-                                <m:t>+</m:t>
-                              </m:r>
-                              <m:r>
-                                <a:rPr lang="fr-FR" sz="2400" i="1">
-                                  <a:latin typeface="Cambria Math" panose="02040503050406030204" pitchFamily="18" charset="0"/>
-                                </a:rPr>
-                                <m:t>1</m:t>
-                              </m:r>
-                              <m:r>
-                                <a:rPr lang="fr-FR" sz="2400" i="1">
-                                  <a:latin typeface="Cambria Math" panose="02040503050406030204" pitchFamily="18" charset="0"/>
-                                </a:rPr>
-                                <m:t>,</m:t>
+                                <m:t>+1,</m:t>
                               </m:r>
                               <m:r>
                                 <a:rPr lang="fr-FR" sz="2400" i="1">
@@ -14847,19 +15235,7 @@
                                 <a:rPr lang="fr-FR" sz="2400" i="1">
                                   <a:latin typeface="Cambria Math" panose="02040503050406030204" pitchFamily="18" charset="0"/>
                                 </a:rPr>
-                                <m:t>−</m:t>
-                              </m:r>
-                              <m:r>
-                                <a:rPr lang="fr-FR" sz="2400" i="1">
-                                  <a:latin typeface="Cambria Math" panose="02040503050406030204" pitchFamily="18" charset="0"/>
-                                </a:rPr>
-                                <m:t>1</m:t>
-                              </m:r>
-                              <m:r>
-                                <a:rPr lang="fr-FR" sz="2400" i="1">
-                                  <a:latin typeface="Cambria Math" panose="02040503050406030204" pitchFamily="18" charset="0"/>
-                                </a:rPr>
-                                <m:t>,</m:t>
+                                <m:t>−1,</m:t>
                               </m:r>
                               <m:r>
                                 <a:rPr lang="fr-FR" sz="2400" i="1">
@@ -14992,19 +15368,7 @@
                                 <a:rPr lang="fr-FR" sz="2400" i="1">
                                   <a:latin typeface="Cambria Math" panose="02040503050406030204" pitchFamily="18" charset="0"/>
                                 </a:rPr>
-                                <m:t>+</m:t>
-                              </m:r>
-                              <m:r>
-                                <a:rPr lang="fr-FR" sz="2400" i="1">
-                                  <a:latin typeface="Cambria Math" panose="02040503050406030204" pitchFamily="18" charset="0"/>
-                                </a:rPr>
-                                <m:t>1</m:t>
-                              </m:r>
-                              <m:r>
-                                <a:rPr lang="fr-FR" sz="2400" i="1">
-                                  <a:latin typeface="Cambria Math" panose="02040503050406030204" pitchFamily="18" charset="0"/>
-                                </a:rPr>
-                                <m:t>,</m:t>
+                                <m:t>+1,</m:t>
                               </m:r>
                               <m:r>
                                 <a:rPr lang="fr-FR" sz="2400" i="1">
@@ -15055,19 +15419,7 @@
                                 <a:rPr lang="fr-FR" sz="2400" i="1">
                                   <a:latin typeface="Cambria Math" panose="02040503050406030204" pitchFamily="18" charset="0"/>
                                 </a:rPr>
-                                <m:t>−</m:t>
-                              </m:r>
-                              <m:r>
-                                <a:rPr lang="fr-FR" sz="2400" i="1">
-                                  <a:latin typeface="Cambria Math" panose="02040503050406030204" pitchFamily="18" charset="0"/>
-                                </a:rPr>
-                                <m:t>1</m:t>
-                              </m:r>
-                              <m:r>
-                                <a:rPr lang="fr-FR" sz="2400" i="1">
-                                  <a:latin typeface="Cambria Math" panose="02040503050406030204" pitchFamily="18" charset="0"/>
-                                </a:rPr>
-                                <m:t>,</m:t>
+                                <m:t>−1,</m:t>
                               </m:r>
                               <m:r>
                                 <a:rPr lang="fr-FR" sz="2400" i="1">
@@ -15164,13 +15516,7 @@
                                 <a:rPr lang="fr-FR" sz="2400" i="1">
                                   <a:latin typeface="Cambria Math" panose="02040503050406030204" pitchFamily="18" charset="0"/>
                                 </a:rPr>
-                                <m:t>+</m:t>
-                              </m:r>
-                              <m:r>
-                                <a:rPr lang="fr-FR" sz="2400" i="1">
-                                  <a:latin typeface="Cambria Math" panose="02040503050406030204" pitchFamily="18" charset="0"/>
-                                </a:rPr>
-                                <m:t>1</m:t>
+                                <m:t>+1</m:t>
                               </m:r>
                             </m:sub>
                             <m:sup>
@@ -15284,13 +15630,7 @@
                                 <a:rPr lang="fr-FR" sz="2400" i="1">
                                   <a:latin typeface="Cambria Math" panose="02040503050406030204" pitchFamily="18" charset="0"/>
                                 </a:rPr>
-                                <m:t>−</m:t>
-                              </m:r>
-                              <m:r>
-                                <a:rPr lang="fr-FR" sz="2400" i="1">
-                                  <a:latin typeface="Cambria Math" panose="02040503050406030204" pitchFamily="18" charset="0"/>
-                                </a:rPr>
-                                <m:t>1</m:t>
+                                <m:t>−1</m:t>
                               </m:r>
                             </m:sub>
                             <m:sup>
@@ -15636,21 +15976,7 @@
                                 <a:latin typeface="Cambria Math" panose="02040503050406030204" pitchFamily="18" charset="0"/>
                                 <a:ea typeface="Cambria Math" panose="02040503050406030204" pitchFamily="18" charset="0"/>
                               </a:rPr>
-                              <m:t>+</m:t>
-                            </m:r>
-                            <m:r>
-                              <a:rPr lang="fr-FR" sz="2600" i="1">
-                                <a:latin typeface="Cambria Math" panose="02040503050406030204" pitchFamily="18" charset="0"/>
-                                <a:ea typeface="Cambria Math" panose="02040503050406030204" pitchFamily="18" charset="0"/>
-                              </a:rPr>
-                              <m:t>1</m:t>
-                            </m:r>
-                            <m:r>
-                              <a:rPr lang="fr-FR" sz="2600" i="1">
-                                <a:latin typeface="Cambria Math" panose="02040503050406030204" pitchFamily="18" charset="0"/>
-                                <a:ea typeface="Cambria Math" panose="02040503050406030204" pitchFamily="18" charset="0"/>
-                              </a:rPr>
-                              <m:t>,</m:t>
+                              <m:t>+1,</m:t>
                             </m:r>
                             <m:r>
                               <a:rPr lang="fr-FR" sz="2600" i="1">
@@ -15773,21 +16099,7 @@
                                 <a:latin typeface="Cambria Math" panose="02040503050406030204" pitchFamily="18" charset="0"/>
                                 <a:ea typeface="Cambria Math" panose="02040503050406030204" pitchFamily="18" charset="0"/>
                               </a:rPr>
-                              <m:t>−</m:t>
-                            </m:r>
-                            <m:r>
-                              <a:rPr lang="fr-FR" sz="2600" i="1">
-                                <a:latin typeface="Cambria Math" panose="02040503050406030204" pitchFamily="18" charset="0"/>
-                                <a:ea typeface="Cambria Math" panose="02040503050406030204" pitchFamily="18" charset="0"/>
-                              </a:rPr>
-                              <m:t>1</m:t>
-                            </m:r>
-                            <m:r>
-                              <a:rPr lang="fr-FR" sz="2600" i="1">
-                                <a:latin typeface="Cambria Math" panose="02040503050406030204" pitchFamily="18" charset="0"/>
-                                <a:ea typeface="Cambria Math" panose="02040503050406030204" pitchFamily="18" charset="0"/>
-                              </a:rPr>
-                              <m:t>,</m:t>
+                              <m:t>−1,</m:t>
                             </m:r>
                             <m:r>
                               <a:rPr lang="fr-FR" sz="2600" i="1">
@@ -16056,13 +16368,7 @@
                               <a:rPr lang="fr-FR" sz="2600" i="1">
                                 <a:latin typeface="Cambria Math" panose="02040503050406030204" pitchFamily="18" charset="0"/>
                               </a:rPr>
-                              <m:t>+</m:t>
-                            </m:r>
-                            <m:r>
-                              <a:rPr lang="fr-FR" sz="2600" i="1">
-                                <a:latin typeface="Cambria Math" panose="02040503050406030204" pitchFamily="18" charset="0"/>
-                              </a:rPr>
-                              <m:t>1</m:t>
+                              <m:t>+1</m:t>
                             </m:r>
                           </m:sub>
                           <m:sup>
@@ -16176,13 +16482,7 @@
                               <a:rPr lang="fr-FR" sz="2600" i="1">
                                 <a:latin typeface="Cambria Math" panose="02040503050406030204" pitchFamily="18" charset="0"/>
                               </a:rPr>
-                              <m:t>−</m:t>
-                            </m:r>
-                            <m:r>
-                              <a:rPr lang="fr-FR" sz="2600" i="1">
-                                <a:latin typeface="Cambria Math" panose="02040503050406030204" pitchFamily="18" charset="0"/>
-                              </a:rPr>
-                              <m:t>1</m:t>
+                              <m:t>−1</m:t>
                             </m:r>
                           </m:sub>
                           <m:sup>
@@ -23461,7 +23761,19 @@
                               <a:rPr lang="fr-FR" sz="2400" i="1">
                                 <a:latin typeface="Cambria Math" panose="02040503050406030204" pitchFamily="18" charset="0"/>
                               </a:rPr>
-                              <m:t>+1,</m:t>
+                              <m:t>+</m:t>
+                            </m:r>
+                            <m:r>
+                              <a:rPr lang="fr-FR" sz="2400" i="1">
+                                <a:latin typeface="Cambria Math" panose="02040503050406030204" pitchFamily="18" charset="0"/>
+                              </a:rPr>
+                              <m:t>1</m:t>
+                            </m:r>
+                            <m:r>
+                              <a:rPr lang="fr-FR" sz="2400" i="1">
+                                <a:latin typeface="Cambria Math" panose="02040503050406030204" pitchFamily="18" charset="0"/>
+                              </a:rPr>
+                              <m:t>,</m:t>
                             </m:r>
                             <m:r>
                               <a:rPr lang="fr-FR" sz="2400" i="1">
@@ -23512,7 +23824,19 @@
                               <a:rPr lang="fr-FR" sz="2400" i="1">
                                 <a:latin typeface="Cambria Math" panose="02040503050406030204" pitchFamily="18" charset="0"/>
                               </a:rPr>
-                              <m:t>−1,</m:t>
+                              <m:t>−</m:t>
+                            </m:r>
+                            <m:r>
+                              <a:rPr lang="fr-FR" sz="2400" i="1">
+                                <a:latin typeface="Cambria Math" panose="02040503050406030204" pitchFamily="18" charset="0"/>
+                              </a:rPr>
+                              <m:t>1</m:t>
+                            </m:r>
+                            <m:r>
+                              <a:rPr lang="fr-FR" sz="2400" i="1">
+                                <a:latin typeface="Cambria Math" panose="02040503050406030204" pitchFamily="18" charset="0"/>
+                              </a:rPr>
+                              <m:t>,</m:t>
                             </m:r>
                             <m:r>
                               <a:rPr lang="fr-FR" sz="2400" i="1">
@@ -24022,7 +24346,16 @@
                             </a:solidFill>
                             <a:latin typeface="Cambria Math" panose="02040503050406030204" pitchFamily="18" charset="0"/>
                           </a:rPr>
-                          <m:t>2!</m:t>
+                          <m:t>2</m:t>
+                        </m:r>
+                        <m:r>
+                          <a:rPr lang="fr-FR" sz="2400" i="1">
+                            <a:solidFill>
+                              <a:srgbClr val="FF0000"/>
+                            </a:solidFill>
+                            <a:latin typeface="Cambria Math" panose="02040503050406030204" pitchFamily="18" charset="0"/>
+                          </a:rPr>
+                          <m:t>!</m:t>
                         </m:r>
                       </m:den>
                     </m:f>
@@ -24218,7 +24551,13 @@
                           <a:rPr lang="fr-FR" sz="2400" i="1">
                             <a:latin typeface="Cambria Math" panose="02040503050406030204" pitchFamily="18" charset="0"/>
                           </a:rPr>
-                          <m:t>3!</m:t>
+                          <m:t>3</m:t>
+                        </m:r>
+                        <m:r>
+                          <a:rPr lang="fr-FR" sz="2400" i="1">
+                            <a:latin typeface="Cambria Math" panose="02040503050406030204" pitchFamily="18" charset="0"/>
+                          </a:rPr>
+                          <m:t>!</m:t>
                         </m:r>
                       </m:den>
                     </m:f>
@@ -24734,7 +25073,16 @@
                             </a:solidFill>
                             <a:latin typeface="Cambria Math" panose="02040503050406030204" pitchFamily="18" charset="0"/>
                           </a:rPr>
-                          <m:t>2!</m:t>
+                          <m:t>2</m:t>
+                        </m:r>
+                        <m:r>
+                          <a:rPr lang="fr-FR" sz="2400" i="1">
+                            <a:solidFill>
+                              <a:srgbClr val="FF0000"/>
+                            </a:solidFill>
+                            <a:latin typeface="Cambria Math" panose="02040503050406030204" pitchFamily="18" charset="0"/>
+                          </a:rPr>
+                          <m:t>!</m:t>
                         </m:r>
                       </m:den>
                     </m:f>
@@ -24942,7 +25290,13 @@
                           <a:rPr lang="fr-FR" sz="2400" i="1">
                             <a:latin typeface="Cambria Math" panose="02040503050406030204" pitchFamily="18" charset="0"/>
                           </a:rPr>
-                          <m:t>3!</m:t>
+                          <m:t>3</m:t>
+                        </m:r>
+                        <m:r>
+                          <a:rPr lang="fr-FR" sz="2400" i="1">
+                            <a:latin typeface="Cambria Math" panose="02040503050406030204" pitchFamily="18" charset="0"/>
+                          </a:rPr>
+                          <m:t>!</m:t>
                         </m:r>
                       </m:den>
                     </m:f>
@@ -25460,7 +25814,13 @@
                               <a:rPr lang="fr-FR" sz="2400" i="1">
                                 <a:latin typeface="Cambria Math" panose="02040503050406030204" pitchFamily="18" charset="0"/>
                               </a:rPr>
-                              <m:t>+1</m:t>
+                              <m:t>+</m:t>
+                            </m:r>
+                            <m:r>
+                              <a:rPr lang="fr-FR" sz="2400" i="1">
+                                <a:latin typeface="Cambria Math" panose="02040503050406030204" pitchFamily="18" charset="0"/>
+                              </a:rPr>
+                              <m:t>1</m:t>
                             </m:r>
                           </m:sub>
                           <m:sup>
@@ -25574,7 +25934,13 @@
                               <a:rPr lang="fr-FR" sz="2400" i="1">
                                 <a:latin typeface="Cambria Math" panose="02040503050406030204" pitchFamily="18" charset="0"/>
                               </a:rPr>
-                              <m:t>−1</m:t>
+                              <m:t>−</m:t>
+                            </m:r>
+                            <m:r>
+                              <a:rPr lang="fr-FR" sz="2400" i="1">
+                                <a:latin typeface="Cambria Math" panose="02040503050406030204" pitchFamily="18" charset="0"/>
+                              </a:rPr>
+                              <m:t>1</m:t>
                             </m:r>
                           </m:sub>
                           <m:sup>
@@ -26168,7 +26534,16 @@
                             </a:solidFill>
                             <a:latin typeface="Cambria Math" panose="02040503050406030204" pitchFamily="18" charset="0"/>
                           </a:rPr>
-                          <m:t>2!</m:t>
+                          <m:t>2</m:t>
+                        </m:r>
+                        <m:r>
+                          <a:rPr lang="fr-FR" sz="2400" i="1">
+                            <a:solidFill>
+                              <a:schemeClr val="tx1"/>
+                            </a:solidFill>
+                            <a:latin typeface="Cambria Math" panose="02040503050406030204" pitchFamily="18" charset="0"/>
+                          </a:rPr>
+                          <m:t>!</m:t>
                         </m:r>
                       </m:den>
                     </m:f>
@@ -26436,7 +26811,16 @@
                             </a:solidFill>
                             <a:latin typeface="Cambria Math" panose="02040503050406030204" pitchFamily="18" charset="0"/>
                           </a:rPr>
-                          <m:t>3!</m:t>
+                          <m:t>3</m:t>
+                        </m:r>
+                        <m:r>
+                          <a:rPr lang="fr-FR" sz="2400" i="1">
+                            <a:solidFill>
+                              <a:srgbClr val="FF0000"/>
+                            </a:solidFill>
+                            <a:latin typeface="Cambria Math" panose="02040503050406030204" pitchFamily="18" charset="0"/>
+                          </a:rPr>
+                          <m:t>!</m:t>
                         </m:r>
                       </m:den>
                     </m:f>
@@ -26608,7 +26992,13 @@
                           <a:rPr lang="fr-FR" sz="2400" i="1">
                             <a:latin typeface="Cambria Math" panose="02040503050406030204" pitchFamily="18" charset="0"/>
                           </a:rPr>
-                          <m:t>4!</m:t>
+                          <m:t>4</m:t>
+                        </m:r>
+                        <m:r>
+                          <a:rPr lang="fr-FR" sz="2400" i="1">
+                            <a:latin typeface="Cambria Math" panose="02040503050406030204" pitchFamily="18" charset="0"/>
+                          </a:rPr>
+                          <m:t>!</m:t>
                         </m:r>
                       </m:den>
                     </m:f>
@@ -27039,7 +27429,13 @@
                           <a:rPr lang="fr-FR" sz="2400" i="1">
                             <a:latin typeface="Cambria Math" panose="02040503050406030204" pitchFamily="18" charset="0"/>
                           </a:rPr>
-                          <m:t>2!</m:t>
+                          <m:t>2</m:t>
+                        </m:r>
+                        <m:r>
+                          <a:rPr lang="fr-FR" sz="2400" i="1">
+                            <a:latin typeface="Cambria Math" panose="02040503050406030204" pitchFamily="18" charset="0"/>
+                          </a:rPr>
+                          <m:t>!</m:t>
                         </m:r>
                       </m:den>
                     </m:f>
@@ -27307,7 +27703,16 @@
                             </a:solidFill>
                             <a:latin typeface="Cambria Math" panose="02040503050406030204" pitchFamily="18" charset="0"/>
                           </a:rPr>
-                          <m:t>3!</m:t>
+                          <m:t>3</m:t>
+                        </m:r>
+                        <m:r>
+                          <a:rPr lang="fr-FR" sz="2400" i="1">
+                            <a:solidFill>
+                              <a:srgbClr val="FF0000"/>
+                            </a:solidFill>
+                            <a:latin typeface="Cambria Math" panose="02040503050406030204" pitchFamily="18" charset="0"/>
+                          </a:rPr>
+                          <m:t>!</m:t>
                         </m:r>
                       </m:den>
                     </m:f>
@@ -27479,7 +27884,13 @@
                           <a:rPr lang="fr-FR" sz="2400" i="1">
                             <a:latin typeface="Cambria Math" panose="02040503050406030204" pitchFamily="18" charset="0"/>
                           </a:rPr>
-                          <m:t>4!</m:t>
+                          <m:t>4</m:t>
+                        </m:r>
+                        <m:r>
+                          <a:rPr lang="fr-FR" sz="2400" i="1">
+                            <a:latin typeface="Cambria Math" panose="02040503050406030204" pitchFamily="18" charset="0"/>
+                          </a:rPr>
+                          <m:t>!</m:t>
                         </m:r>
                       </m:den>
                     </m:f>
@@ -28002,7 +28413,13 @@
                           <a:rPr lang="fr-FR" sz="2400" i="1">
                             <a:latin typeface="Cambria Math" panose="02040503050406030204" pitchFamily="18" charset="0"/>
                           </a:rPr>
-                          <m:t>4!</m:t>
+                          <m:t>4</m:t>
+                        </m:r>
+                        <m:r>
+                          <a:rPr lang="fr-FR" sz="2400" i="1">
+                            <a:latin typeface="Cambria Math" panose="02040503050406030204" pitchFamily="18" charset="0"/>
+                          </a:rPr>
+                          <m:t>!</m:t>
                         </m:r>
                       </m:den>
                     </m:f>

--- a/projet_final/projet_final/MEC8211-Projet-final-Presentation.pptx
+++ b/projet_final/projet_final/MEC8211-Projet-final-Presentation.pptx
@@ -8777,8 +8777,8 @@
           </a:prstGeom>
         </p:spPr>
       </p:pic>
-      <mc:AlternateContent xmlns:mc="http://schemas.openxmlformats.org/markup-compatibility/2006">
-        <mc:Choice xmlns:a14="http://schemas.microsoft.com/office/drawing/2010/main" Requires="a14">
+      <mc:AlternateContent xmlns:mc="http://schemas.openxmlformats.org/markup-compatibility/2006" xmlns:a14="http://schemas.microsoft.com/office/drawing/2010/main">
+        <mc:Choice Requires="a14">
           <p:sp>
             <p:nvSpPr>
               <p:cNvPr id="4" name="TextBox 3">
@@ -9066,7 +9066,7 @@
             </p:txBody>
           </p:sp>
         </mc:Choice>
-        <mc:Fallback>
+        <mc:Fallback xmlns="">
           <p:sp>
             <p:nvSpPr>
               <p:cNvPr id="4" name="TextBox 3">
@@ -9284,8 +9284,8 @@
           </a:p>
         </p:txBody>
       </p:sp>
-      <mc:AlternateContent xmlns:mc="http://schemas.openxmlformats.org/markup-compatibility/2006" xmlns:a14="http://schemas.microsoft.com/office/drawing/2010/main">
-        <mc:Choice Requires="a14">
+      <mc:AlternateContent xmlns:mc="http://schemas.openxmlformats.org/markup-compatibility/2006">
+        <mc:Choice xmlns:a14="http://schemas.microsoft.com/office/drawing/2010/main" Requires="a14">
           <p:sp>
             <p:nvSpPr>
               <p:cNvPr id="3" name="Content Placeholder 2">
@@ -9310,10 +9310,13 @@
             </p:spPr>
             <p:txBody>
               <a:bodyPr>
-                <a:normAutofit/>
+                <a:normAutofit fontScale="85000" lnSpcReduction="20000"/>
               </a:bodyPr>
               <a:lstStyle/>
               <a:p>
+                <a:pPr marL="0" indent="0">
+                  <a:buNone/>
+                </a:pPr>
                 <a:r>
                   <a:rPr lang="fr-FR" dirty="0"/>
                   <a:t>Erreur épistémique d’un thermocouple classique : ±1.5°C*</a:t>
@@ -9451,7 +9454,7 @@
                 </a:pPr>
                 <a:r>
                   <a:rPr lang="fr-FR" dirty="0"/>
-                  <a:t> car distribution normale dans cet intervalle </a:t>
+                  <a:t> car distribution uniforme dans l’intervalle [-1.5,1.5]°C.</a:t>
                 </a:r>
               </a:p>
               <a:p>
@@ -9533,16 +9536,37 @@
                             <a:rPr lang="fr-FR" b="0" i="1" smtClean="0">
                               <a:latin typeface="Cambria Math" panose="02040503050406030204" pitchFamily="18" charset="0"/>
                             </a:rPr>
-                            <m:t> + </m:t>
+                            <m:t> +</m:t>
+                          </m:r>
+                          <m:r>
+                            <a:rPr lang="fr-FR" b="0" i="1" smtClean="0">
+                              <a:highlight>
+                                <a:srgbClr val="5B9BD5"/>
+                              </a:highlight>
+                              <a:latin typeface="Cambria Math" panose="02040503050406030204" pitchFamily="18" charset="0"/>
+                            </a:rPr>
+                            <m:t> </m:t>
+                          </m:r>
+                          <m:r>
+                            <a:rPr lang="fr-FR" b="0" i="1" smtClean="0">
+                              <a:highlight>
+                                <a:srgbClr val="5B9BD5"/>
+                              </a:highlight>
+                              <a:latin typeface="Cambria Math" panose="02040503050406030204" pitchFamily="18" charset="0"/>
+                            </a:rPr>
+                            <m:t>0</m:t>
                           </m:r>
                           <m:r>
                             <a:rPr lang="fr-FR" b="0" i="1" smtClean="0">
                               <a:latin typeface="Cambria Math" panose="02040503050406030204" pitchFamily="18" charset="0"/>
                             </a:rPr>
-                            <m:t>02</m:t>
+                            <m:t>²</m:t>
                           </m:r>
                           <m:r>
                             <a:rPr lang="fr-FR" b="0" i="1" smtClean="0">
+                              <a:highlight>
+                                <a:srgbClr val="5B9BD5"/>
+                              </a:highlight>
                               <a:latin typeface="Cambria Math" panose="02040503050406030204" pitchFamily="18" charset="0"/>
                             </a:rPr>
                             <m:t> </m:t>
@@ -9623,10 +9647,23 @@
                 </a:pPr>
                 <a:endParaRPr lang="fr-FR" dirty="0"/>
               </a:p>
+              <a:p>
+                <a:pPr marL="0" indent="0">
+                  <a:buNone/>
+                </a:pPr>
+                <a:r>
+                  <a:rPr lang="fr-FR" dirty="0">
+                    <a:highlight>
+                      <a:srgbClr val="5B9BD5"/>
+                    </a:highlight>
+                  </a:rPr>
+                  <a:t>On considère une incertitude sur la distribution des mesures par manque d’informations</a:t>
+                </a:r>
+              </a:p>
             </p:txBody>
           </p:sp>
         </mc:Choice>
-        <mc:Fallback xmlns="">
+        <mc:Fallback>
           <p:sp>
             <p:nvSpPr>
               <p:cNvPr id="3" name="Content Placeholder 2">
@@ -9651,7 +9688,7 @@
               <a:blipFill>
                 <a:blip r:embed="rId2"/>
                 <a:stretch>
-                  <a:fillRect l="-1217" t="-3301"/>
+                  <a:fillRect l="-928" t="-4272" b="-2718"/>
                 </a:stretch>
               </a:blipFill>
             </p:spPr>
@@ -10201,8 +10238,8 @@
           </p:sp>
         </mc:Fallback>
       </mc:AlternateContent>
-      <mc:AlternateContent xmlns:mc="http://schemas.openxmlformats.org/markup-compatibility/2006">
-        <mc:Choice xmlns:a14="http://schemas.microsoft.com/office/drawing/2010/main" Requires="a14">
+      <mc:AlternateContent xmlns:mc="http://schemas.openxmlformats.org/markup-compatibility/2006" xmlns:a14="http://schemas.microsoft.com/office/drawing/2010/main">
+        <mc:Choice Requires="a14">
           <p:sp>
             <p:nvSpPr>
               <p:cNvPr id="3" name="Content Placeholder 2">
@@ -10509,7 +10546,7 @@
             </p:txBody>
           </p:sp>
         </mc:Choice>
-        <mc:Fallback>
+        <mc:Fallback xmlns="">
           <p:sp>
             <p:nvSpPr>
               <p:cNvPr id="3" name="Content Placeholder 2">
@@ -10590,8 +10627,8 @@
           </a:prstGeom>
         </p:spPr>
       </p:pic>
-      <mc:AlternateContent xmlns:mc="http://schemas.openxmlformats.org/markup-compatibility/2006">
-        <mc:Choice xmlns:a14="http://schemas.microsoft.com/office/drawing/2010/main" Requires="a14">
+      <mc:AlternateContent xmlns:mc="http://schemas.openxmlformats.org/markup-compatibility/2006" xmlns:a14="http://schemas.microsoft.com/office/drawing/2010/main">
+        <mc:Choice Requires="a14">
           <p:sp>
             <p:nvSpPr>
               <p:cNvPr id="6" name="TextBox 5">
@@ -10727,7 +10764,7 @@
             </p:txBody>
           </p:sp>
         </mc:Choice>
-        <mc:Fallback>
+        <mc:Fallback xmlns="">
           <p:sp>
             <p:nvSpPr>
               <p:cNvPr id="6" name="TextBox 5">
@@ -10868,31 +10905,387 @@
           </a:p>
         </p:txBody>
       </p:sp>
-      <p:sp>
-        <p:nvSpPr>
-          <p:cNvPr id="3" name="Content Placeholder 2">
-            <a:extLst>
-              <a:ext uri="{FF2B5EF4-FFF2-40B4-BE49-F238E27FC236}">
-                <a16:creationId xmlns:a16="http://schemas.microsoft.com/office/drawing/2014/main" id="{41DABA39-902C-A6ED-B4EF-7E3705D66722}"/>
-              </a:ext>
-            </a:extLst>
-          </p:cNvPr>
-          <p:cNvSpPr>
-            <a:spLocks noGrp="1"/>
-          </p:cNvSpPr>
-          <p:nvPr>
-            <p:ph idx="1"/>
-          </p:nvPr>
-        </p:nvSpPr>
-        <p:spPr/>
-        <p:txBody>
-          <a:bodyPr/>
-          <a:lstStyle/>
-          <a:p>
-            <a:endParaRPr lang="en-US"/>
-          </a:p>
-        </p:txBody>
-      </p:sp>
+      <mc:AlternateContent xmlns:mc="http://schemas.openxmlformats.org/markup-compatibility/2006">
+        <mc:Choice xmlns:a14="http://schemas.microsoft.com/office/drawing/2010/main" Requires="a14">
+          <p:sp>
+            <p:nvSpPr>
+              <p:cNvPr id="3" name="Content Placeholder 2">
+                <a:extLst>
+                  <a:ext uri="{FF2B5EF4-FFF2-40B4-BE49-F238E27FC236}">
+                    <a16:creationId xmlns:a16="http://schemas.microsoft.com/office/drawing/2014/main" id="{41DABA39-902C-A6ED-B4EF-7E3705D66722}"/>
+                  </a:ext>
+                </a:extLst>
+              </p:cNvPr>
+              <p:cNvSpPr>
+                <a:spLocks noGrp="1"/>
+              </p:cNvSpPr>
+              <p:nvPr>
+                <p:ph idx="1"/>
+              </p:nvPr>
+            </p:nvSpPr>
+            <p:spPr/>
+            <p:txBody>
+              <a:bodyPr/>
+              <a:lstStyle/>
+              <a:p>
+                <a14:m>
+                  <m:oMath xmlns:m="http://schemas.openxmlformats.org/officeDocument/2006/math">
+                    <m:r>
+                      <a:rPr lang="fr-FR" i="1">
+                        <a:latin typeface="Cambria Math" panose="02040503050406030204" pitchFamily="18" charset="0"/>
+                      </a:rPr>
+                      <m:t>𝐸</m:t>
+                    </m:r>
+                    <m:r>
+                      <a:rPr lang="fr-FR" i="1">
+                        <a:latin typeface="Cambria Math" panose="02040503050406030204" pitchFamily="18" charset="0"/>
+                      </a:rPr>
+                      <m:t>−</m:t>
+                    </m:r>
+                    <m:r>
+                      <a:rPr lang="fr-FR" i="1">
+                        <a:latin typeface="Cambria Math" panose="02040503050406030204" pitchFamily="18" charset="0"/>
+                      </a:rPr>
+                      <m:t>𝑘</m:t>
+                    </m:r>
+                    <m:sSub>
+                      <m:sSubPr>
+                        <m:ctrlPr>
+                          <a:rPr lang="fr-FR" i="1">
+                            <a:latin typeface="Cambria Math" panose="02040503050406030204" pitchFamily="18" charset="0"/>
+                          </a:rPr>
+                        </m:ctrlPr>
+                      </m:sSubPr>
+                      <m:e>
+                        <m:r>
+                          <a:rPr lang="fr-FR" i="1">
+                            <a:latin typeface="Cambria Math" panose="02040503050406030204" pitchFamily="18" charset="0"/>
+                          </a:rPr>
+                          <m:t>𝑢</m:t>
+                        </m:r>
+                      </m:e>
+                      <m:sub>
+                        <m:r>
+                          <a:rPr lang="fr-FR" i="1">
+                            <a:latin typeface="Cambria Math" panose="02040503050406030204" pitchFamily="18" charset="0"/>
+                          </a:rPr>
+                          <m:t>𝑣𝑎𝑙</m:t>
+                        </m:r>
+                      </m:sub>
+                    </m:sSub>
+                    <m:r>
+                      <a:rPr lang="fr-FR" i="1">
+                        <a:latin typeface="Cambria Math" panose="02040503050406030204" pitchFamily="18" charset="0"/>
+                      </a:rPr>
+                      <m:t>≤</m:t>
+                    </m:r>
+                    <m:sSub>
+                      <m:sSubPr>
+                        <m:ctrlPr>
+                          <a:rPr lang="fr-FR" i="1">
+                            <a:latin typeface="Cambria Math" panose="02040503050406030204" pitchFamily="18" charset="0"/>
+                          </a:rPr>
+                        </m:ctrlPr>
+                      </m:sSubPr>
+                      <m:e>
+                        <m:r>
+                          <a:rPr lang="fr-FR" i="1">
+                            <a:latin typeface="Cambria Math" panose="02040503050406030204" pitchFamily="18" charset="0"/>
+                          </a:rPr>
+                          <m:t>𝛿</m:t>
+                        </m:r>
+                      </m:e>
+                      <m:sub>
+                        <m:r>
+                          <a:rPr lang="fr-FR" i="1">
+                            <a:latin typeface="Cambria Math" panose="02040503050406030204" pitchFamily="18" charset="0"/>
+                          </a:rPr>
+                          <m:t>𝑚𝑜𝑑𝑒𝑙</m:t>
+                        </m:r>
+                      </m:sub>
+                    </m:sSub>
+                    <m:r>
+                      <a:rPr lang="fr-FR" i="1">
+                        <a:latin typeface="Cambria Math" panose="02040503050406030204" pitchFamily="18" charset="0"/>
+                      </a:rPr>
+                      <m:t>≤</m:t>
+                    </m:r>
+                    <m:r>
+                      <a:rPr lang="fr-FR" i="1">
+                        <a:latin typeface="Cambria Math" panose="02040503050406030204" pitchFamily="18" charset="0"/>
+                      </a:rPr>
+                      <m:t>𝐸</m:t>
+                    </m:r>
+                    <m:r>
+                      <a:rPr lang="fr-FR" i="1">
+                        <a:latin typeface="Cambria Math" panose="02040503050406030204" pitchFamily="18" charset="0"/>
+                      </a:rPr>
+                      <m:t>+</m:t>
+                    </m:r>
+                    <m:r>
+                      <a:rPr lang="fr-FR" i="1">
+                        <a:latin typeface="Cambria Math" panose="02040503050406030204" pitchFamily="18" charset="0"/>
+                      </a:rPr>
+                      <m:t>𝑘</m:t>
+                    </m:r>
+                    <m:sSub>
+                      <m:sSubPr>
+                        <m:ctrlPr>
+                          <a:rPr lang="fr-FR" i="1">
+                            <a:latin typeface="Cambria Math" panose="02040503050406030204" pitchFamily="18" charset="0"/>
+                          </a:rPr>
+                        </m:ctrlPr>
+                      </m:sSubPr>
+                      <m:e>
+                        <m:r>
+                          <a:rPr lang="fr-FR" i="1">
+                            <a:latin typeface="Cambria Math" panose="02040503050406030204" pitchFamily="18" charset="0"/>
+                          </a:rPr>
+                          <m:t>𝑢</m:t>
+                        </m:r>
+                      </m:e>
+                      <m:sub>
+                        <m:r>
+                          <a:rPr lang="fr-FR" i="1">
+                            <a:latin typeface="Cambria Math" panose="02040503050406030204" pitchFamily="18" charset="0"/>
+                          </a:rPr>
+                          <m:t>𝑣𝑎𝑙</m:t>
+                        </m:r>
+                      </m:sub>
+                    </m:sSub>
+                  </m:oMath>
+                </a14:m>
+                <a:endParaRPr lang="fr-FR" dirty="0"/>
+              </a:p>
+              <a:p>
+                <a:r>
+                  <a:rPr lang="en-US" dirty="0" err="1"/>
+                  <a:t>Où</a:t>
+                </a:r>
+                <a:r>
+                  <a:rPr lang="en-US" dirty="0"/>
+                  <a:t> </a:t>
+                </a:r>
+                <a14:m>
+                  <m:oMath xmlns:m="http://schemas.openxmlformats.org/officeDocument/2006/math">
+                    <m:sSub>
+                      <m:sSubPr>
+                        <m:ctrlPr>
+                          <a:rPr lang="fr-FR" b="0" i="1" smtClean="0">
+                            <a:latin typeface="Cambria Math" panose="02040503050406030204" pitchFamily="18" charset="0"/>
+                          </a:rPr>
+                        </m:ctrlPr>
+                      </m:sSubPr>
+                      <m:e>
+                        <m:r>
+                          <a:rPr lang="fr-FR" b="0" i="1" smtClean="0">
+                            <a:latin typeface="Cambria Math" panose="02040503050406030204" pitchFamily="18" charset="0"/>
+                          </a:rPr>
+                          <m:t>𝑢</m:t>
+                        </m:r>
+                      </m:e>
+                      <m:sub>
+                        <m:r>
+                          <a:rPr lang="fr-FR" b="0" i="1" smtClean="0">
+                            <a:latin typeface="Cambria Math" panose="02040503050406030204" pitchFamily="18" charset="0"/>
+                          </a:rPr>
+                          <m:t>𝑣𝑎𝑙</m:t>
+                        </m:r>
+                      </m:sub>
+                    </m:sSub>
+                    <m:r>
+                      <a:rPr lang="fr-FR" b="0" i="1" smtClean="0">
+                        <a:latin typeface="Cambria Math" panose="02040503050406030204" pitchFamily="18" charset="0"/>
+                      </a:rPr>
+                      <m:t>= </m:t>
+                    </m:r>
+                    <m:rad>
+                      <m:radPr>
+                        <m:degHide m:val="on"/>
+                        <m:ctrlPr>
+                          <a:rPr lang="fr-FR" b="0" i="1" smtClean="0">
+                            <a:latin typeface="Cambria Math" panose="02040503050406030204" pitchFamily="18" charset="0"/>
+                          </a:rPr>
+                        </m:ctrlPr>
+                      </m:radPr>
+                      <m:deg/>
+                      <m:e>
+                        <m:sSup>
+                          <m:sSupPr>
+                            <m:ctrlPr>
+                              <a:rPr lang="fr-FR" b="0" i="1" smtClean="0">
+                                <a:latin typeface="Cambria Math" panose="02040503050406030204" pitchFamily="18" charset="0"/>
+                              </a:rPr>
+                            </m:ctrlPr>
+                          </m:sSupPr>
+                          <m:e>
+                            <m:r>
+                              <a:rPr lang="fr-FR" b="0" i="1" smtClean="0">
+                                <a:latin typeface="Cambria Math" panose="02040503050406030204" pitchFamily="18" charset="0"/>
+                              </a:rPr>
+                              <m:t>0.87</m:t>
+                            </m:r>
+                          </m:e>
+                          <m:sup>
+                            <m:r>
+                              <a:rPr lang="fr-FR" b="0" i="1" smtClean="0">
+                                <a:latin typeface="Cambria Math" panose="02040503050406030204" pitchFamily="18" charset="0"/>
+                              </a:rPr>
+                              <m:t>2</m:t>
+                            </m:r>
+                          </m:sup>
+                        </m:sSup>
+                        <m:r>
+                          <a:rPr lang="fr-FR" b="0" i="1" smtClean="0">
+                            <a:latin typeface="Cambria Math" panose="02040503050406030204" pitchFamily="18" charset="0"/>
+                          </a:rPr>
+                          <m:t>+</m:t>
+                        </m:r>
+                        <m:sSup>
+                          <m:sSupPr>
+                            <m:ctrlPr>
+                              <a:rPr lang="fr-FR" b="0" i="1" smtClean="0">
+                                <a:latin typeface="Cambria Math" panose="02040503050406030204" pitchFamily="18" charset="0"/>
+                              </a:rPr>
+                            </m:ctrlPr>
+                          </m:sSupPr>
+                          <m:e>
+                            <m:r>
+                              <a:rPr lang="fr-FR" b="0" i="1" smtClean="0">
+                                <a:latin typeface="Cambria Math" panose="02040503050406030204" pitchFamily="18" charset="0"/>
+                              </a:rPr>
+                              <m:t>44.91</m:t>
+                            </m:r>
+                          </m:e>
+                          <m:sup>
+                            <m:r>
+                              <a:rPr lang="fr-FR" b="0" i="1" smtClean="0">
+                                <a:latin typeface="Cambria Math" panose="02040503050406030204" pitchFamily="18" charset="0"/>
+                              </a:rPr>
+                              <m:t>2</m:t>
+                            </m:r>
+                          </m:sup>
+                        </m:sSup>
+                        <m:r>
+                          <a:rPr lang="fr-FR" b="0" i="1" smtClean="0">
+                            <a:latin typeface="Cambria Math" panose="02040503050406030204" pitchFamily="18" charset="0"/>
+                          </a:rPr>
+                          <m:t>+</m:t>
+                        </m:r>
+                        <m:sSubSup>
+                          <m:sSubSupPr>
+                            <m:ctrlPr>
+                              <a:rPr lang="fr-FR" b="0" i="1" smtClean="0">
+                                <a:latin typeface="Cambria Math" panose="02040503050406030204" pitchFamily="18" charset="0"/>
+                              </a:rPr>
+                            </m:ctrlPr>
+                          </m:sSubSupPr>
+                          <m:e>
+                            <m:r>
+                              <a:rPr lang="fr-FR" b="0" i="1" smtClean="0">
+                                <a:latin typeface="Cambria Math" panose="02040503050406030204" pitchFamily="18" charset="0"/>
+                              </a:rPr>
+                              <m:t>𝑢</m:t>
+                            </m:r>
+                          </m:e>
+                          <m:sub>
+                            <m:r>
+                              <a:rPr lang="fr-FR" b="0" i="1" smtClean="0">
+                                <a:latin typeface="Cambria Math" panose="02040503050406030204" pitchFamily="18" charset="0"/>
+                              </a:rPr>
+                              <m:t>𝑛𝑢𝑚</m:t>
+                            </m:r>
+                          </m:sub>
+                          <m:sup>
+                            <m:r>
+                              <a:rPr lang="fr-FR" b="0" i="1" smtClean="0">
+                                <a:latin typeface="Cambria Math" panose="02040503050406030204" pitchFamily="18" charset="0"/>
+                              </a:rPr>
+                              <m:t>2</m:t>
+                            </m:r>
+                          </m:sup>
+                        </m:sSubSup>
+                      </m:e>
+                    </m:rad>
+                    <m:r>
+                      <a:rPr lang="fr-FR" b="0" i="1" smtClean="0">
+                        <a:latin typeface="Cambria Math" panose="02040503050406030204" pitchFamily="18" charset="0"/>
+                      </a:rPr>
+                      <m:t>= </m:t>
+                    </m:r>
+                    <m:r>
+                      <m:rPr>
+                        <m:sty m:val="p"/>
+                      </m:rPr>
+                      <a:rPr lang="fr-FR" b="0" i="1" smtClean="0">
+                        <a:latin typeface="Cambria Math" panose="02040503050406030204" pitchFamily="18" charset="0"/>
+                      </a:rPr>
+                      <m:t>K</m:t>
+                    </m:r>
+                  </m:oMath>
+                </a14:m>
+                <a:r>
+                  <a:rPr lang="en-US" dirty="0"/>
+                  <a:t>   </a:t>
+                </a:r>
+              </a:p>
+              <a:p>
+                <a:r>
+                  <a:rPr lang="en-US" dirty="0"/>
+                  <a:t>k =2 pour 95.4% de </a:t>
+                </a:r>
+                <a:r>
+                  <a:rPr lang="en-US" dirty="0" err="1"/>
+                  <a:t>confiance</a:t>
+                </a:r>
+                <a:r>
+                  <a:rPr lang="en-US" dirty="0"/>
+                  <a:t> </a:t>
+                </a:r>
+              </a:p>
+            </p:txBody>
+          </p:sp>
+        </mc:Choice>
+        <mc:Fallback>
+          <p:sp>
+            <p:nvSpPr>
+              <p:cNvPr id="3" name="Content Placeholder 2">
+                <a:extLst>
+                  <a:ext uri="{FF2B5EF4-FFF2-40B4-BE49-F238E27FC236}">
+                    <a16:creationId xmlns:a16="http://schemas.microsoft.com/office/drawing/2014/main" id="{41DABA39-902C-A6ED-B4EF-7E3705D66722}"/>
+                  </a:ext>
+                </a:extLst>
+              </p:cNvPr>
+              <p:cNvSpPr>
+                <a:spLocks noGrp="1" noRot="1" noChangeAspect="1" noMove="1" noResize="1" noEditPoints="1" noAdjustHandles="1" noChangeArrowheads="1" noChangeShapeType="1" noTextEdit="1"/>
+              </p:cNvSpPr>
+              <p:nvPr>
+                <p:ph idx="1"/>
+              </p:nvPr>
+            </p:nvSpPr>
+            <p:spPr>
+              <a:blipFill>
+                <a:blip r:embed="rId2"/>
+                <a:stretch>
+                  <a:fillRect l="-1043"/>
+                </a:stretch>
+              </a:blipFill>
+            </p:spPr>
+            <p:txBody>
+              <a:bodyPr/>
+              <a:lstStyle/>
+              <a:p>
+                <a:r>
+                  <a:rPr lang="en-US">
+                    <a:noFill/>
+                  </a:rPr>
+                  <a:t> </a:t>
+                </a:r>
+              </a:p>
+            </p:txBody>
+          </p:sp>
+        </mc:Fallback>
+      </mc:AlternateContent>
     </p:spTree>
     <p:extLst>
       <p:ext uri="{BB962C8B-B14F-4D97-AF65-F5344CB8AC3E}">
@@ -14422,7 +14815,13 @@
                               <a:rPr lang="fr-FR" b="0" i="1" smtClean="0">
                                 <a:latin typeface="Cambria Math" panose="02040503050406030204" pitchFamily="18" charset="0"/>
                               </a:rPr>
-                              <m:t>+1</m:t>
+                              <m:t>+</m:t>
+                            </m:r>
+                            <m:r>
+                              <a:rPr lang="fr-FR" b="0" i="1" smtClean="0">
+                                <a:latin typeface="Cambria Math" panose="02040503050406030204" pitchFamily="18" charset="0"/>
+                              </a:rPr>
+                              <m:t>1</m:t>
                             </m:r>
                             <m:r>
                               <a:rPr lang="fr-FR" i="1">
@@ -14479,7 +14878,13 @@
                               <a:rPr lang="fr-FR" b="0" i="1" smtClean="0">
                                 <a:latin typeface="Cambria Math" panose="02040503050406030204" pitchFamily="18" charset="0"/>
                               </a:rPr>
-                              <m:t>−1</m:t>
+                              <m:t>−</m:t>
+                            </m:r>
+                            <m:r>
+                              <a:rPr lang="fr-FR" b="0" i="1" smtClean="0">
+                                <a:latin typeface="Cambria Math" panose="02040503050406030204" pitchFamily="18" charset="0"/>
+                              </a:rPr>
+                              <m:t>1</m:t>
                             </m:r>
                             <m:r>
                               <a:rPr lang="fr-FR" i="1">
@@ -15127,7 +15532,19 @@
                                 <a:rPr lang="fr-FR" sz="2400" i="1">
                                   <a:latin typeface="Cambria Math" panose="02040503050406030204" pitchFamily="18" charset="0"/>
                                 </a:rPr>
-                                <m:t>+1,</m:t>
+                                <m:t>+</m:t>
+                              </m:r>
+                              <m:r>
+                                <a:rPr lang="fr-FR" sz="2400" i="1">
+                                  <a:latin typeface="Cambria Math" panose="02040503050406030204" pitchFamily="18" charset="0"/>
+                                </a:rPr>
+                                <m:t>1</m:t>
+                              </m:r>
+                              <m:r>
+                                <a:rPr lang="fr-FR" sz="2400" i="1">
+                                  <a:latin typeface="Cambria Math" panose="02040503050406030204" pitchFamily="18" charset="0"/>
+                                </a:rPr>
+                                <m:t>,</m:t>
                               </m:r>
                               <m:r>
                                 <a:rPr lang="fr-FR" sz="2400" i="1">
@@ -15235,7 +15652,19 @@
                                 <a:rPr lang="fr-FR" sz="2400" i="1">
                                   <a:latin typeface="Cambria Math" panose="02040503050406030204" pitchFamily="18" charset="0"/>
                                 </a:rPr>
-                                <m:t>−1,</m:t>
+                                <m:t>−</m:t>
+                              </m:r>
+                              <m:r>
+                                <a:rPr lang="fr-FR" sz="2400" i="1">
+                                  <a:latin typeface="Cambria Math" panose="02040503050406030204" pitchFamily="18" charset="0"/>
+                                </a:rPr>
+                                <m:t>1</m:t>
+                              </m:r>
+                              <m:r>
+                                <a:rPr lang="fr-FR" sz="2400" i="1">
+                                  <a:latin typeface="Cambria Math" panose="02040503050406030204" pitchFamily="18" charset="0"/>
+                                </a:rPr>
+                                <m:t>,</m:t>
                               </m:r>
                               <m:r>
                                 <a:rPr lang="fr-FR" sz="2400" i="1">
@@ -15368,7 +15797,19 @@
                                 <a:rPr lang="fr-FR" sz="2400" i="1">
                                   <a:latin typeface="Cambria Math" panose="02040503050406030204" pitchFamily="18" charset="0"/>
                                 </a:rPr>
-                                <m:t>+1,</m:t>
+                                <m:t>+</m:t>
+                              </m:r>
+                              <m:r>
+                                <a:rPr lang="fr-FR" sz="2400" i="1">
+                                  <a:latin typeface="Cambria Math" panose="02040503050406030204" pitchFamily="18" charset="0"/>
+                                </a:rPr>
+                                <m:t>1</m:t>
+                              </m:r>
+                              <m:r>
+                                <a:rPr lang="fr-FR" sz="2400" i="1">
+                                  <a:latin typeface="Cambria Math" panose="02040503050406030204" pitchFamily="18" charset="0"/>
+                                </a:rPr>
+                                <m:t>,</m:t>
                               </m:r>
                               <m:r>
                                 <a:rPr lang="fr-FR" sz="2400" i="1">
@@ -15419,7 +15860,19 @@
                                 <a:rPr lang="fr-FR" sz="2400" i="1">
                                   <a:latin typeface="Cambria Math" panose="02040503050406030204" pitchFamily="18" charset="0"/>
                                 </a:rPr>
-                                <m:t>−1,</m:t>
+                                <m:t>−</m:t>
+                              </m:r>
+                              <m:r>
+                                <a:rPr lang="fr-FR" sz="2400" i="1">
+                                  <a:latin typeface="Cambria Math" panose="02040503050406030204" pitchFamily="18" charset="0"/>
+                                </a:rPr>
+                                <m:t>1</m:t>
+                              </m:r>
+                              <m:r>
+                                <a:rPr lang="fr-FR" sz="2400" i="1">
+                                  <a:latin typeface="Cambria Math" panose="02040503050406030204" pitchFamily="18" charset="0"/>
+                                </a:rPr>
+                                <m:t>,</m:t>
                               </m:r>
                               <m:r>
                                 <a:rPr lang="fr-FR" sz="2400" i="1">
@@ -15516,7 +15969,13 @@
                                 <a:rPr lang="fr-FR" sz="2400" i="1">
                                   <a:latin typeface="Cambria Math" panose="02040503050406030204" pitchFamily="18" charset="0"/>
                                 </a:rPr>
-                                <m:t>+1</m:t>
+                                <m:t>+</m:t>
+                              </m:r>
+                              <m:r>
+                                <a:rPr lang="fr-FR" sz="2400" i="1">
+                                  <a:latin typeface="Cambria Math" panose="02040503050406030204" pitchFamily="18" charset="0"/>
+                                </a:rPr>
+                                <m:t>1</m:t>
                               </m:r>
                             </m:sub>
                             <m:sup>
@@ -15630,7 +16089,13 @@
                                 <a:rPr lang="fr-FR" sz="2400" i="1">
                                   <a:latin typeface="Cambria Math" panose="02040503050406030204" pitchFamily="18" charset="0"/>
                                 </a:rPr>
-                                <m:t>−1</m:t>
+                                <m:t>−</m:t>
+                              </m:r>
+                              <m:r>
+                                <a:rPr lang="fr-FR" sz="2400" i="1">
+                                  <a:latin typeface="Cambria Math" panose="02040503050406030204" pitchFamily="18" charset="0"/>
+                                </a:rPr>
+                                <m:t>1</m:t>
                               </m:r>
                             </m:sub>
                             <m:sup>
@@ -15976,7 +16441,21 @@
                                 <a:latin typeface="Cambria Math" panose="02040503050406030204" pitchFamily="18" charset="0"/>
                                 <a:ea typeface="Cambria Math" panose="02040503050406030204" pitchFamily="18" charset="0"/>
                               </a:rPr>
-                              <m:t>+1,</m:t>
+                              <m:t>+</m:t>
+                            </m:r>
+                            <m:r>
+                              <a:rPr lang="fr-FR" sz="2600" i="1">
+                                <a:latin typeface="Cambria Math" panose="02040503050406030204" pitchFamily="18" charset="0"/>
+                                <a:ea typeface="Cambria Math" panose="02040503050406030204" pitchFamily="18" charset="0"/>
+                              </a:rPr>
+                              <m:t>1</m:t>
+                            </m:r>
+                            <m:r>
+                              <a:rPr lang="fr-FR" sz="2600" i="1">
+                                <a:latin typeface="Cambria Math" panose="02040503050406030204" pitchFamily="18" charset="0"/>
+                                <a:ea typeface="Cambria Math" panose="02040503050406030204" pitchFamily="18" charset="0"/>
+                              </a:rPr>
+                              <m:t>,</m:t>
                             </m:r>
                             <m:r>
                               <a:rPr lang="fr-FR" sz="2600" i="1">
@@ -16099,7 +16578,21 @@
                                 <a:latin typeface="Cambria Math" panose="02040503050406030204" pitchFamily="18" charset="0"/>
                                 <a:ea typeface="Cambria Math" panose="02040503050406030204" pitchFamily="18" charset="0"/>
                               </a:rPr>
-                              <m:t>−1,</m:t>
+                              <m:t>−</m:t>
+                            </m:r>
+                            <m:r>
+                              <a:rPr lang="fr-FR" sz="2600" i="1">
+                                <a:latin typeface="Cambria Math" panose="02040503050406030204" pitchFamily="18" charset="0"/>
+                                <a:ea typeface="Cambria Math" panose="02040503050406030204" pitchFamily="18" charset="0"/>
+                              </a:rPr>
+                              <m:t>1</m:t>
+                            </m:r>
+                            <m:r>
+                              <a:rPr lang="fr-FR" sz="2600" i="1">
+                                <a:latin typeface="Cambria Math" panose="02040503050406030204" pitchFamily="18" charset="0"/>
+                                <a:ea typeface="Cambria Math" panose="02040503050406030204" pitchFamily="18" charset="0"/>
+                              </a:rPr>
+                              <m:t>,</m:t>
                             </m:r>
                             <m:r>
                               <a:rPr lang="fr-FR" sz="2600" i="1">
@@ -16368,7 +16861,13 @@
                               <a:rPr lang="fr-FR" sz="2600" i="1">
                                 <a:latin typeface="Cambria Math" panose="02040503050406030204" pitchFamily="18" charset="0"/>
                               </a:rPr>
-                              <m:t>+1</m:t>
+                              <m:t>+</m:t>
+                            </m:r>
+                            <m:r>
+                              <a:rPr lang="fr-FR" sz="2600" i="1">
+                                <a:latin typeface="Cambria Math" panose="02040503050406030204" pitchFamily="18" charset="0"/>
+                              </a:rPr>
+                              <m:t>1</m:t>
                             </m:r>
                           </m:sub>
                           <m:sup>
@@ -16482,7 +16981,13 @@
                               <a:rPr lang="fr-FR" sz="2600" i="1">
                                 <a:latin typeface="Cambria Math" panose="02040503050406030204" pitchFamily="18" charset="0"/>
                               </a:rPr>
-                              <m:t>−1</m:t>
+                              <m:t>−</m:t>
+                            </m:r>
+                            <m:r>
+                              <a:rPr lang="fr-FR" sz="2600" i="1">
+                                <a:latin typeface="Cambria Math" panose="02040503050406030204" pitchFamily="18" charset="0"/>
+                              </a:rPr>
+                              <m:t>1</m:t>
                             </m:r>
                           </m:sub>
                           <m:sup>
@@ -16839,16 +17344,7 @@
                         </a:solidFill>
                         <a:latin typeface="Cambria Math" panose="02040503050406030204" pitchFamily="18" charset="0"/>
                       </a:rPr>
-                      <m:t>=</m:t>
-                    </m:r>
-                    <m:r>
-                      <a:rPr lang="fr-CA" b="0" i="1" smtClean="0">
-                        <a:solidFill>
-                          <a:schemeClr val="accent2"/>
-                        </a:solidFill>
-                        <a:latin typeface="Cambria Math" panose="02040503050406030204" pitchFamily="18" charset="0"/>
-                      </a:rPr>
-                      <m:t>0</m:t>
+                      <m:t>=0</m:t>
                     </m:r>
                   </m:oMath>
                 </a14:m>
@@ -16977,16 +17473,7 @@
                               </a:solidFill>
                               <a:latin typeface="Cambria Math" panose="02040503050406030204" pitchFamily="18" charset="0"/>
                             </a:rPr>
-                            <m:t>−</m:t>
-                          </m:r>
-                          <m:r>
-                            <a:rPr lang="fr-CA" b="0" i="0" smtClean="0">
-                              <a:solidFill>
-                                <a:schemeClr val="accent2"/>
-                              </a:solidFill>
-                              <a:latin typeface="Cambria Math" panose="02040503050406030204" pitchFamily="18" charset="0"/>
-                            </a:rPr>
-                            <m:t>1</m:t>
+                            <m:t>−1</m:t>
                           </m:r>
                         </m:num>
                         <m:den>
@@ -17058,16 +17545,7 @@
                               </a:solidFill>
                               <a:latin typeface="Cambria Math" panose="02040503050406030204" pitchFamily="18" charset="0"/>
                             </a:rPr>
-                            <m:t>+</m:t>
-                          </m:r>
-                          <m:r>
-                            <a:rPr lang="fr-CA" b="0" i="1" smtClean="0">
-                              <a:solidFill>
-                                <a:schemeClr val="accent2"/>
-                              </a:solidFill>
-                              <a:latin typeface="Cambria Math" panose="02040503050406030204" pitchFamily="18" charset="0"/>
-                            </a:rPr>
-                            <m:t>2</m:t>
+                            <m:t>+2</m:t>
                           </m:r>
                         </m:sub>
                         <m:sup>
@@ -17186,16 +17664,7 @@
                               </a:solidFill>
                               <a:latin typeface="Cambria Math" panose="02040503050406030204" pitchFamily="18" charset="0"/>
                             </a:rPr>
-                            <m:t>+</m:t>
-                          </m:r>
-                          <m:r>
-                            <a:rPr lang="fr-CA" b="0" i="1" smtClean="0">
-                              <a:solidFill>
-                                <a:schemeClr val="accent2"/>
-                              </a:solidFill>
-                              <a:latin typeface="Cambria Math" panose="02040503050406030204" pitchFamily="18" charset="0"/>
-                            </a:rPr>
-                            <m:t>1</m:t>
+                            <m:t>+1</m:t>
                           </m:r>
                         </m:sub>
                         <m:sup>
@@ -17359,16 +17828,7 @@
                         </a:solidFill>
                         <a:latin typeface="Cambria Math" panose="02040503050406030204" pitchFamily="18" charset="0"/>
                       </a:rPr>
-                      <m:t>=</m:t>
-                    </m:r>
-                    <m:r>
-                      <a:rPr lang="fr-CA" b="0" i="1" smtClean="0">
-                        <a:solidFill>
-                          <a:srgbClr val="FFBF00"/>
-                        </a:solidFill>
-                        <a:latin typeface="Cambria Math" panose="02040503050406030204" pitchFamily="18" charset="0"/>
-                      </a:rPr>
-                      <m:t>0</m:t>
+                      <m:t>=0</m:t>
                     </m:r>
                   </m:oMath>
                 </a14:m>
@@ -17497,16 +17957,7 @@
                               </a:solidFill>
                               <a:latin typeface="Cambria Math" panose="02040503050406030204" pitchFamily="18" charset="0"/>
                             </a:rPr>
-                            <m:t>−</m:t>
-                          </m:r>
-                          <m:r>
-                            <a:rPr lang="fr-CA" b="0" i="0" smtClean="0">
-                              <a:solidFill>
-                                <a:srgbClr val="FFBF00"/>
-                              </a:solidFill>
-                              <a:latin typeface="Cambria Math" panose="02040503050406030204" pitchFamily="18" charset="0"/>
-                            </a:rPr>
-                            <m:t>1</m:t>
+                            <m:t>−1</m:t>
                           </m:r>
                         </m:num>
                         <m:den>
@@ -17578,16 +18029,7 @@
                               </a:solidFill>
                               <a:latin typeface="Cambria Math" panose="02040503050406030204" pitchFamily="18" charset="0"/>
                             </a:rPr>
-                            <m:t>+</m:t>
-                          </m:r>
-                          <m:r>
-                            <a:rPr lang="fr-CA" b="0" i="1" smtClean="0">
-                              <a:solidFill>
-                                <a:srgbClr val="FFBF00"/>
-                              </a:solidFill>
-                              <a:latin typeface="Cambria Math" panose="02040503050406030204" pitchFamily="18" charset="0"/>
-                            </a:rPr>
-                            <m:t>2</m:t>
+                            <m:t>+2</m:t>
                           </m:r>
                         </m:sub>
                         <m:sup>
@@ -17706,16 +18148,7 @@
                               </a:solidFill>
                               <a:latin typeface="Cambria Math" panose="02040503050406030204" pitchFamily="18" charset="0"/>
                             </a:rPr>
-                            <m:t>+</m:t>
-                          </m:r>
-                          <m:r>
-                            <a:rPr lang="fr-CA" b="0" i="1" smtClean="0">
-                              <a:solidFill>
-                                <a:srgbClr val="FFBF00"/>
-                              </a:solidFill>
-                              <a:latin typeface="Cambria Math" panose="02040503050406030204" pitchFamily="18" charset="0"/>
-                            </a:rPr>
-                            <m:t>1</m:t>
+                            <m:t>+1</m:t>
                           </m:r>
                         </m:sub>
                         <m:sup>
@@ -18270,16 +18703,7 @@
                                 </a:solidFill>
                                 <a:latin typeface="Cambria Math" panose="02040503050406030204" pitchFamily="18" charset="0"/>
                               </a:rPr>
-                              <m:t>−</m:t>
-                            </m:r>
-                            <m:r>
-                              <a:rPr lang="fr-CA" b="0" i="0" smtClean="0">
-                                <a:solidFill>
-                                  <a:srgbClr val="5B9BD5"/>
-                                </a:solidFill>
-                                <a:latin typeface="Cambria Math" panose="02040503050406030204" pitchFamily="18" charset="0"/>
-                              </a:rPr>
-                              <m:t>2</m:t>
+                              <m:t>−2</m:t>
                             </m:r>
                             <m:r>
                               <a:rPr lang="fr-CA" b="0" i="1" smtClean="0">
@@ -18737,16 +19161,7 @@
                             </a:solidFill>
                             <a:latin typeface="Cambria Math" panose="02040503050406030204" pitchFamily="18" charset="0"/>
                           </a:rPr>
-                          <m:t>−</m:t>
-                        </m:r>
-                        <m:r>
-                          <a:rPr lang="fr-CA" b="0" i="1" smtClean="0">
-                            <a:solidFill>
-                              <a:srgbClr val="5B9BD5"/>
-                            </a:solidFill>
-                            <a:latin typeface="Cambria Math" panose="02040503050406030204" pitchFamily="18" charset="0"/>
-                          </a:rPr>
-                          <m:t>2</m:t>
+                          <m:t>−2</m:t>
                         </m:r>
                       </m:sub>
                       <m:sup>
@@ -18769,17 +19184,7 @@
                         <a:latin typeface="Cambria Math" panose="02040503050406030204" pitchFamily="18" charset="0"/>
                         <a:ea typeface="Cambria Math" panose="02040503050406030204" pitchFamily="18" charset="0"/>
                       </a:rPr>
-                      <m:t>+</m:t>
-                    </m:r>
-                    <m:r>
-                      <a:rPr lang="fr-CA" b="0" i="1" smtClean="0">
-                        <a:solidFill>
-                          <a:srgbClr val="5B9BD5"/>
-                        </a:solidFill>
-                        <a:latin typeface="Cambria Math" panose="02040503050406030204" pitchFamily="18" charset="0"/>
-                        <a:ea typeface="Cambria Math" panose="02040503050406030204" pitchFamily="18" charset="0"/>
-                      </a:rPr>
-                      <m:t>4</m:t>
+                      <m:t>+4</m:t>
                     </m:r>
                     <m:sSubSup>
                       <m:sSubSupPr>
@@ -18838,16 +19243,7 @@
                             </a:solidFill>
                             <a:latin typeface="Cambria Math" panose="02040503050406030204" pitchFamily="18" charset="0"/>
                           </a:rPr>
-                          <m:t>−</m:t>
-                        </m:r>
-                        <m:r>
-                          <a:rPr lang="fr-CA" b="0" i="1" smtClean="0">
-                            <a:solidFill>
-                              <a:srgbClr val="5B9BD5"/>
-                            </a:solidFill>
-                            <a:latin typeface="Cambria Math" panose="02040503050406030204" pitchFamily="18" charset="0"/>
-                          </a:rPr>
-                          <m:t>1</m:t>
+                          <m:t>−1</m:t>
                         </m:r>
                       </m:sub>
                       <m:sup>
@@ -18870,17 +19266,7 @@
                         <a:latin typeface="Cambria Math" panose="02040503050406030204" pitchFamily="18" charset="0"/>
                         <a:ea typeface="Cambria Math" panose="02040503050406030204" pitchFamily="18" charset="0"/>
                       </a:rPr>
-                      <m:t>)]÷</m:t>
-                    </m:r>
-                    <m:r>
-                      <a:rPr lang="fr-CA" b="0" i="1" smtClean="0">
-                        <a:solidFill>
-                          <a:srgbClr val="5B9BD5"/>
-                        </a:solidFill>
-                        <a:latin typeface="Cambria Math" panose="02040503050406030204" pitchFamily="18" charset="0"/>
-                        <a:ea typeface="Cambria Math" panose="02040503050406030204" pitchFamily="18" charset="0"/>
-                      </a:rPr>
-                      <m:t>3</m:t>
+                      <m:t>)]÷3</m:t>
                     </m:r>
                   </m:oMath>
                 </a14:m>
@@ -18932,43 +19318,7 @@
                           </a:solidFill>
                           <a:latin typeface="Cambria Math" panose="02040503050406030204" pitchFamily="18" charset="0"/>
                         </a:rPr>
-                        <m:t>=(</m:t>
-                      </m:r>
-                      <m:r>
-                        <a:rPr lang="fr-CA" b="0" i="1" smtClean="0">
-                          <a:solidFill>
-                            <a:srgbClr val="5B9BD5"/>
-                          </a:solidFill>
-                          <a:latin typeface="Cambria Math" panose="02040503050406030204" pitchFamily="18" charset="0"/>
-                        </a:rPr>
-                        <m:t>0</m:t>
-                      </m:r>
-                      <m:r>
-                        <a:rPr lang="fr-CA" b="0" i="1" smtClean="0">
-                          <a:solidFill>
-                            <a:srgbClr val="5B9BD5"/>
-                          </a:solidFill>
-                          <a:latin typeface="Cambria Math" panose="02040503050406030204" pitchFamily="18" charset="0"/>
-                        </a:rPr>
-                        <m:t>,</m:t>
-                      </m:r>
-                      <m:r>
-                        <a:rPr lang="fr-CA" b="0" i="1" smtClean="0">
-                          <a:solidFill>
-                            <a:srgbClr val="5B9BD5"/>
-                          </a:solidFill>
-                          <a:latin typeface="Cambria Math" panose="02040503050406030204" pitchFamily="18" charset="0"/>
-                        </a:rPr>
-                        <m:t>1</m:t>
-                      </m:r>
-                      <m:r>
-                        <a:rPr lang="fr-CA" b="0" i="1" smtClean="0">
-                          <a:solidFill>
-                            <a:srgbClr val="5B9BD5"/>
-                          </a:solidFill>
-                          <a:latin typeface="Cambria Math" panose="02040503050406030204" pitchFamily="18" charset="0"/>
-                        </a:rPr>
-                        <m:t>)</m:t>
+                        <m:t>=(0,1)</m:t>
                       </m:r>
                     </m:oMath>
                   </m:oMathPara>
@@ -19510,16 +19860,7 @@
                                 </a:solidFill>
                                 <a:latin typeface="Cambria Math" panose="02040503050406030204" pitchFamily="18" charset="0"/>
                               </a:rPr>
-                              <m:t>−</m:t>
-                            </m:r>
-                            <m:r>
-                              <a:rPr lang="fr-CA" b="0" i="0" smtClean="0">
-                                <a:solidFill>
-                                  <a:srgbClr val="6FAD46"/>
-                                </a:solidFill>
-                                <a:latin typeface="Cambria Math" panose="02040503050406030204" pitchFamily="18" charset="0"/>
-                              </a:rPr>
-                              <m:t>2</m:t>
+                              <m:t>−2</m:t>
                             </m:r>
                             <m:r>
                               <a:rPr lang="fr-CA" b="0" i="1" smtClean="0">
@@ -19977,16 +20318,7 @@
                             </a:solidFill>
                             <a:latin typeface="Cambria Math" panose="02040503050406030204" pitchFamily="18" charset="0"/>
                           </a:rPr>
-                          <m:t>+</m:t>
-                        </m:r>
-                        <m:r>
-                          <a:rPr lang="fr-CA" b="0" i="1" smtClean="0">
-                            <a:solidFill>
-                              <a:srgbClr val="6FAD46"/>
-                            </a:solidFill>
-                            <a:latin typeface="Cambria Math" panose="02040503050406030204" pitchFamily="18" charset="0"/>
-                          </a:rPr>
-                          <m:t>2</m:t>
+                          <m:t>+2</m:t>
                         </m:r>
                       </m:sub>
                       <m:sup>
@@ -20009,17 +20341,7 @@
                         <a:latin typeface="Cambria Math" panose="02040503050406030204" pitchFamily="18" charset="0"/>
                         <a:ea typeface="Cambria Math" panose="02040503050406030204" pitchFamily="18" charset="0"/>
                       </a:rPr>
-                      <m:t>+</m:t>
-                    </m:r>
-                    <m:r>
-                      <a:rPr lang="fr-CA" b="0" i="1" smtClean="0">
-                        <a:solidFill>
-                          <a:srgbClr val="6FAD46"/>
-                        </a:solidFill>
-                        <a:latin typeface="Cambria Math" panose="02040503050406030204" pitchFamily="18" charset="0"/>
-                        <a:ea typeface="Cambria Math" panose="02040503050406030204" pitchFamily="18" charset="0"/>
-                      </a:rPr>
-                      <m:t>4</m:t>
+                      <m:t>+4</m:t>
                     </m:r>
                     <m:sSubSup>
                       <m:sSubSupPr>
@@ -20078,16 +20400,7 @@
                             </a:solidFill>
                             <a:latin typeface="Cambria Math" panose="02040503050406030204" pitchFamily="18" charset="0"/>
                           </a:rPr>
-                          <m:t>+</m:t>
-                        </m:r>
-                        <m:r>
-                          <a:rPr lang="fr-CA" b="0" i="1" smtClean="0">
-                            <a:solidFill>
-                              <a:srgbClr val="6FAD46"/>
-                            </a:solidFill>
-                            <a:latin typeface="Cambria Math" panose="02040503050406030204" pitchFamily="18" charset="0"/>
-                          </a:rPr>
-                          <m:t>1</m:t>
+                          <m:t>+1</m:t>
                         </m:r>
                       </m:sub>
                       <m:sup>
@@ -20110,17 +20423,7 @@
                         <a:latin typeface="Cambria Math" panose="02040503050406030204" pitchFamily="18" charset="0"/>
                         <a:ea typeface="Cambria Math" panose="02040503050406030204" pitchFamily="18" charset="0"/>
                       </a:rPr>
-                      <m:t>)]÷</m:t>
-                    </m:r>
-                    <m:r>
-                      <a:rPr lang="fr-CA" b="0" i="1" smtClean="0">
-                        <a:solidFill>
-                          <a:srgbClr val="6FAD46"/>
-                        </a:solidFill>
-                        <a:latin typeface="Cambria Math" panose="02040503050406030204" pitchFamily="18" charset="0"/>
-                        <a:ea typeface="Cambria Math" panose="02040503050406030204" pitchFamily="18" charset="0"/>
-                      </a:rPr>
-                      <m:t>3</m:t>
+                      <m:t>)]÷3</m:t>
                     </m:r>
                   </m:oMath>
                 </a14:m>
@@ -20172,43 +20475,7 @@
                           </a:solidFill>
                           <a:latin typeface="Cambria Math" panose="02040503050406030204" pitchFamily="18" charset="0"/>
                         </a:rPr>
-                        <m:t>=(</m:t>
-                      </m:r>
-                      <m:r>
-                        <a:rPr lang="fr-CA" b="0" i="1" smtClean="0">
-                          <a:solidFill>
-                            <a:srgbClr val="6FAD46"/>
-                          </a:solidFill>
-                          <a:latin typeface="Cambria Math" panose="02040503050406030204" pitchFamily="18" charset="0"/>
-                        </a:rPr>
-                        <m:t>1</m:t>
-                      </m:r>
-                      <m:r>
-                        <a:rPr lang="fr-CA" b="0" i="1" smtClean="0">
-                          <a:solidFill>
-                            <a:srgbClr val="6FAD46"/>
-                          </a:solidFill>
-                          <a:latin typeface="Cambria Math" panose="02040503050406030204" pitchFamily="18" charset="0"/>
-                        </a:rPr>
-                        <m:t>,</m:t>
-                      </m:r>
-                      <m:r>
-                        <a:rPr lang="fr-CA" b="0" i="1" smtClean="0">
-                          <a:solidFill>
-                            <a:srgbClr val="6FAD46"/>
-                          </a:solidFill>
-                          <a:latin typeface="Cambria Math" panose="02040503050406030204" pitchFamily="18" charset="0"/>
-                        </a:rPr>
-                        <m:t>0</m:t>
-                      </m:r>
-                      <m:r>
-                        <a:rPr lang="fr-CA" b="0" i="1" smtClean="0">
-                          <a:solidFill>
-                            <a:srgbClr val="6FAD46"/>
-                          </a:solidFill>
-                          <a:latin typeface="Cambria Math" panose="02040503050406030204" pitchFamily="18" charset="0"/>
-                        </a:rPr>
-                        <m:t>)</m:t>
+                        <m:t>=(1,0)</m:t>
                       </m:r>
                     </m:oMath>
                   </m:oMathPara>

--- a/projet_final/projet_final/MEC8211-Projet-final-Presentation.pptx
+++ b/projet_final/projet_final/MEC8211-Projet-final-Presentation.pptx
@@ -25,8 +25,8 @@
     <p:sldId id="272" r:id="rId16"/>
     <p:sldId id="270" r:id="rId17"/>
     <p:sldId id="271" r:id="rId18"/>
-    <p:sldId id="273" r:id="rId19"/>
-    <p:sldId id="275" r:id="rId20"/>
+    <p:sldId id="277" r:id="rId19"/>
+    <p:sldId id="273" r:id="rId20"/>
     <p:sldId id="276" r:id="rId21"/>
     <p:sldId id="274" r:id="rId22"/>
   </p:sldIdLst>
@@ -375,7 +375,7 @@
           <a:p>
             <a:fld id="{F6105186-0725-443C-BC59-E521425E81CD}" type="slidenum">
               <a:rPr lang="fr-FR" smtClean="0"/>
-              <a:t>‹#›</a:t>
+              <a:t>‹N°›</a:t>
             </a:fld>
             <a:endParaRPr lang="fr-FR"/>
           </a:p>
@@ -961,7 +961,7 @@
           <a:p>
             <a:fld id="{FD85B578-4E75-4E1C-9BE3-D5DCC0715B13}" type="slidenum">
               <a:rPr lang="fr-FR" smtClean="0"/>
-              <a:t>‹#›</a:t>
+              <a:t>‹N°›</a:t>
             </a:fld>
             <a:endParaRPr lang="fr-FR"/>
           </a:p>
@@ -1159,7 +1159,7 @@
           <a:p>
             <a:fld id="{FD85B578-4E75-4E1C-9BE3-D5DCC0715B13}" type="slidenum">
               <a:rPr lang="fr-FR" smtClean="0"/>
-              <a:t>‹#›</a:t>
+              <a:t>‹N°›</a:t>
             </a:fld>
             <a:endParaRPr lang="fr-FR"/>
           </a:p>
@@ -1367,7 +1367,7 @@
           <a:p>
             <a:fld id="{FD85B578-4E75-4E1C-9BE3-D5DCC0715B13}" type="slidenum">
               <a:rPr lang="fr-FR" smtClean="0"/>
-              <a:t>‹#›</a:t>
+              <a:t>‹N°›</a:t>
             </a:fld>
             <a:endParaRPr lang="fr-FR"/>
           </a:p>
@@ -1565,7 +1565,7 @@
           <a:p>
             <a:fld id="{FD85B578-4E75-4E1C-9BE3-D5DCC0715B13}" type="slidenum">
               <a:rPr lang="fr-FR" smtClean="0"/>
-              <a:t>‹#›</a:t>
+              <a:t>‹N°›</a:t>
             </a:fld>
             <a:endParaRPr lang="fr-FR"/>
           </a:p>
@@ -1840,7 +1840,7 @@
           <a:p>
             <a:fld id="{FD85B578-4E75-4E1C-9BE3-D5DCC0715B13}" type="slidenum">
               <a:rPr lang="fr-FR" smtClean="0"/>
-              <a:t>‹#›</a:t>
+              <a:t>‹N°›</a:t>
             </a:fld>
             <a:endParaRPr lang="fr-FR"/>
           </a:p>
@@ -2105,7 +2105,7 @@
           <a:p>
             <a:fld id="{FD85B578-4E75-4E1C-9BE3-D5DCC0715B13}" type="slidenum">
               <a:rPr lang="fr-FR" smtClean="0"/>
-              <a:t>‹#›</a:t>
+              <a:t>‹N°›</a:t>
             </a:fld>
             <a:endParaRPr lang="fr-FR"/>
           </a:p>
@@ -2517,7 +2517,7 @@
           <a:p>
             <a:fld id="{FD85B578-4E75-4E1C-9BE3-D5DCC0715B13}" type="slidenum">
               <a:rPr lang="fr-FR" smtClean="0"/>
-              <a:t>‹#›</a:t>
+              <a:t>‹N°›</a:t>
             </a:fld>
             <a:endParaRPr lang="fr-FR"/>
           </a:p>
@@ -2658,7 +2658,7 @@
           <a:p>
             <a:fld id="{FD85B578-4E75-4E1C-9BE3-D5DCC0715B13}" type="slidenum">
               <a:rPr lang="fr-FR" smtClean="0"/>
-              <a:t>‹#›</a:t>
+              <a:t>‹N°›</a:t>
             </a:fld>
             <a:endParaRPr lang="fr-FR"/>
           </a:p>
@@ -2771,7 +2771,7 @@
           <a:p>
             <a:fld id="{FD85B578-4E75-4E1C-9BE3-D5DCC0715B13}" type="slidenum">
               <a:rPr lang="fr-FR" smtClean="0"/>
-              <a:t>‹#›</a:t>
+              <a:t>‹N°›</a:t>
             </a:fld>
             <a:endParaRPr lang="fr-FR"/>
           </a:p>
@@ -3082,7 +3082,7 @@
           <a:p>
             <a:fld id="{FD85B578-4E75-4E1C-9BE3-D5DCC0715B13}" type="slidenum">
               <a:rPr lang="fr-FR" smtClean="0"/>
-              <a:t>‹#›</a:t>
+              <a:t>‹N°›</a:t>
             </a:fld>
             <a:endParaRPr lang="fr-FR"/>
           </a:p>
@@ -3370,7 +3370,7 @@
           <a:p>
             <a:fld id="{FD85B578-4E75-4E1C-9BE3-D5DCC0715B13}" type="slidenum">
               <a:rPr lang="fr-FR" smtClean="0"/>
-              <a:t>‹#›</a:t>
+              <a:t>‹N°›</a:t>
             </a:fld>
             <a:endParaRPr lang="fr-FR"/>
           </a:p>
@@ -3650,7 +3650,7 @@
           <a:p>
             <a:fld id="{FD85B578-4E75-4E1C-9BE3-D5DCC0715B13}" type="slidenum">
               <a:rPr lang="fr-FR" smtClean="0"/>
-              <a:t>‹#›</a:t>
+              <a:t>‹N°›</a:t>
             </a:fld>
             <a:endParaRPr lang="fr-FR"/>
           </a:p>
@@ -6196,8 +6196,8 @@
           <a:chExt cx="0" cy="0"/>
         </a:xfrm>
       </p:grpSpPr>
-      <mc:AlternateContent xmlns:mc="http://schemas.openxmlformats.org/markup-compatibility/2006">
-        <mc:Choice xmlns:a14="http://schemas.microsoft.com/office/drawing/2010/main" Requires="a14">
+      <mc:AlternateContent xmlns:mc="http://schemas.openxmlformats.org/markup-compatibility/2006" xmlns:a14="http://schemas.microsoft.com/office/drawing/2010/main">
+        <mc:Choice Requires="a14">
           <p:sp>
             <p:nvSpPr>
               <p:cNvPr id="3" name="Content Placeholder 2">
@@ -6269,13 +6269,7 @@
                         <a:rPr lang="fr-FR" sz="2000" b="0" i="1" smtClean="0">
                           <a:latin typeface="Cambria Math" panose="02040503050406030204" pitchFamily="18" charset="0"/>
                         </a:rPr>
-                        <m:t> </m:t>
-                      </m:r>
-                      <m:r>
-                        <a:rPr lang="fr-FR" sz="2000" b="0" i="1" smtClean="0">
-                          <a:latin typeface="Cambria Math" panose="02040503050406030204" pitchFamily="18" charset="0"/>
-                        </a:rPr>
-                        <m:t>- </m:t>
+                        <m:t> − </m:t>
                       </m:r>
                       <m:r>
                         <m:rPr>
@@ -6317,7 +6311,7 @@
             </p:txBody>
           </p:sp>
         </mc:Choice>
-        <mc:Fallback>
+        <mc:Fallback xmlns="">
           <p:sp>
             <p:nvSpPr>
               <p:cNvPr id="3" name="Content Placeholder 2">
@@ -7256,14 +7250,7 @@
                         <a:latin typeface="Cambria Math" panose="02040503050406030204" pitchFamily="18" charset="0"/>
                         <a:sym typeface="Wingdings" panose="05000000000000000000" pitchFamily="2" charset="2"/>
                       </a:rPr>
-                      <m:t> = </m:t>
-                    </m:r>
-                    <m:r>
-                      <a:rPr lang="fr-FR" b="0" i="1" smtClean="0">
-                        <a:latin typeface="Cambria Math" panose="02040503050406030204" pitchFamily="18" charset="0"/>
-                        <a:sym typeface="Wingdings" panose="05000000000000000000" pitchFamily="2" charset="2"/>
-                      </a:rPr>
-                      <m:t>100</m:t>
+                      <m:t> = 100</m:t>
                     </m:r>
                     <m:r>
                       <m:rPr>
@@ -7297,14 +7284,7 @@
                         <a:latin typeface="Cambria Math" panose="02040503050406030204" pitchFamily="18" charset="0"/>
                         <a:sym typeface="Wingdings" panose="05000000000000000000" pitchFamily="2" charset="2"/>
                       </a:rPr>
-                      <m:t>=</m:t>
-                    </m:r>
-                    <m:r>
-                      <a:rPr lang="fr-FR" b="0" i="1" smtClean="0">
-                        <a:latin typeface="Cambria Math" panose="02040503050406030204" pitchFamily="18" charset="0"/>
-                        <a:sym typeface="Wingdings" panose="05000000000000000000" pitchFamily="2" charset="2"/>
-                      </a:rPr>
-                      <m:t>2</m:t>
+                      <m:t>=2</m:t>
                     </m:r>
                   </m:oMath>
                 </a14:m>
@@ -7370,28 +7350,7 @@
                         <a:latin typeface="Cambria Math" panose="02040503050406030204" pitchFamily="18" charset="0"/>
                         <a:sym typeface="Wingdings" panose="05000000000000000000" pitchFamily="2" charset="2"/>
                       </a:rPr>
-                      <m:t>= </m:t>
-                    </m:r>
-                    <m:r>
-                      <a:rPr lang="fr-FR" b="0" i="1" smtClean="0">
-                        <a:latin typeface="Cambria Math" panose="02040503050406030204" pitchFamily="18" charset="0"/>
-                        <a:sym typeface="Wingdings" panose="05000000000000000000" pitchFamily="2" charset="2"/>
-                      </a:rPr>
-                      <m:t>0</m:t>
-                    </m:r>
-                    <m:r>
-                      <a:rPr lang="fr-FR" b="0" i="1" smtClean="0">
-                        <a:latin typeface="Cambria Math" panose="02040503050406030204" pitchFamily="18" charset="0"/>
-                        <a:sym typeface="Wingdings" panose="05000000000000000000" pitchFamily="2" charset="2"/>
-                      </a:rPr>
-                      <m:t>.</m:t>
-                    </m:r>
-                    <m:r>
-                      <a:rPr lang="fr-FR" b="0" i="1" smtClean="0">
-                        <a:latin typeface="Cambria Math" panose="02040503050406030204" pitchFamily="18" charset="0"/>
-                        <a:sym typeface="Wingdings" panose="05000000000000000000" pitchFamily="2" charset="2"/>
-                      </a:rPr>
-                      <m:t>6</m:t>
+                      <m:t>= 0.6</m:t>
                     </m:r>
                     <m:r>
                       <m:rPr>
@@ -7428,28 +7387,7 @@
                         <a:latin typeface="Cambria Math" panose="02040503050406030204" pitchFamily="18" charset="0"/>
                         <a:sym typeface="Wingdings" panose="05000000000000000000" pitchFamily="2" charset="2"/>
                       </a:rPr>
-                      <m:t> = </m:t>
-                    </m:r>
-                    <m:r>
-                      <a:rPr lang="fr-FR" b="0" i="1" smtClean="0">
-                        <a:latin typeface="Cambria Math" panose="02040503050406030204" pitchFamily="18" charset="0"/>
-                        <a:sym typeface="Wingdings" panose="05000000000000000000" pitchFamily="2" charset="2"/>
-                      </a:rPr>
-                      <m:t>0</m:t>
-                    </m:r>
-                    <m:r>
-                      <a:rPr lang="fr-FR" b="0" i="1" smtClean="0">
-                        <a:latin typeface="Cambria Math" panose="02040503050406030204" pitchFamily="18" charset="0"/>
-                        <a:sym typeface="Wingdings" panose="05000000000000000000" pitchFamily="2" charset="2"/>
-                      </a:rPr>
-                      <m:t>.</m:t>
-                    </m:r>
-                    <m:r>
-                      <a:rPr lang="fr-FR" b="0" i="1" smtClean="0">
-                        <a:latin typeface="Cambria Math" panose="02040503050406030204" pitchFamily="18" charset="0"/>
-                        <a:sym typeface="Wingdings" panose="05000000000000000000" pitchFamily="2" charset="2"/>
-                      </a:rPr>
-                      <m:t>3</m:t>
+                      <m:t> = 0.3</m:t>
                     </m:r>
                   </m:oMath>
                 </a14:m>
@@ -7800,8 +7738,8 @@
           </a:prstGeom>
         </p:spPr>
       </p:pic>
-      <mc:AlternateContent xmlns:mc="http://schemas.openxmlformats.org/markup-compatibility/2006">
-        <mc:Choice xmlns:a14="http://schemas.microsoft.com/office/drawing/2010/main" Requires="a14">
+      <mc:AlternateContent xmlns:mc="http://schemas.openxmlformats.org/markup-compatibility/2006" xmlns:a14="http://schemas.microsoft.com/office/drawing/2010/main">
+        <mc:Choice Requires="a14">
           <p:sp>
             <p:nvSpPr>
               <p:cNvPr id="10" name="TextBox 9">
@@ -7974,13 +7912,7 @@
                                 <a:rPr lang="fr-FR" sz="2400" i="1">
                                   <a:latin typeface="Cambria Math" panose="02040503050406030204" pitchFamily="18" charset="0"/>
                                 </a:rPr>
-                                <m:t>=</m:t>
-                              </m:r>
-                              <m:r>
-                                <a:rPr lang="fr-FR" sz="2400" i="1">
-                                  <a:latin typeface="Cambria Math" panose="02040503050406030204" pitchFamily="18" charset="0"/>
-                                </a:rPr>
-                                <m:t>1</m:t>
+                                <m:t>=1</m:t>
                               </m:r>
                             </m:sub>
                             <m:sup>
@@ -8110,31 +8042,7 @@
                         <a:rPr lang="fr-FR" sz="2400" b="0" i="1" smtClean="0">
                           <a:latin typeface="Cambria Math" panose="02040503050406030204" pitchFamily="18" charset="0"/>
                         </a:rPr>
-                        <m:t>= </m:t>
-                      </m:r>
-                      <m:r>
-                        <a:rPr lang="fr-FR" sz="2400" b="0" i="1" smtClean="0">
-                          <a:latin typeface="Cambria Math" panose="02040503050406030204" pitchFamily="18" charset="0"/>
-                        </a:rPr>
-                        <m:t>11</m:t>
-                      </m:r>
-                      <m:r>
-                        <a:rPr lang="fr-FR" sz="2400" b="0" i="1" smtClean="0">
-                          <a:latin typeface="Cambria Math" panose="02040503050406030204" pitchFamily="18" charset="0"/>
-                        </a:rPr>
-                        <m:t>.</m:t>
-                      </m:r>
-                      <m:r>
-                        <a:rPr lang="fr-FR" sz="2400" b="0" i="1" smtClean="0">
-                          <a:latin typeface="Cambria Math" panose="02040503050406030204" pitchFamily="18" charset="0"/>
-                        </a:rPr>
-                        <m:t>8</m:t>
-                      </m:r>
-                      <m:r>
-                        <a:rPr lang="fr-FR" sz="2400" b="0" i="1" smtClean="0">
-                          <a:latin typeface="Cambria Math" panose="02040503050406030204" pitchFamily="18" charset="0"/>
-                        </a:rPr>
-                        <m:t> </m:t>
+                        <m:t>= 11.8 </m:t>
                       </m:r>
                       <m:r>
                         <a:rPr lang="fr-FR" sz="2400" b="0" i="1" smtClean="0">
@@ -8146,7 +8054,7 @@
                         <a:rPr lang="fr-FR" sz="2400" b="0" i="1" smtClean="0">
                           <a:latin typeface="Cambria Math" panose="02040503050406030204" pitchFamily="18" charset="0"/>
                         </a:rPr>
-                        <m:t>*</m:t>
+                        <m:t>∗</m:t>
                       </m:r>
                     </m:oMath>
                   </m:oMathPara>
@@ -8159,7 +8067,7 @@
             </p:txBody>
           </p:sp>
         </mc:Choice>
-        <mc:Fallback>
+        <mc:Fallback xmlns="">
           <p:sp>
             <p:nvSpPr>
               <p:cNvPr id="10" name="TextBox 9">
@@ -8259,19 +8167,7 @@
                       <a:rPr lang="fr-FR" b="0" i="1" smtClean="0">
                         <a:latin typeface="Cambria Math" panose="02040503050406030204" pitchFamily="18" charset="0"/>
                       </a:rPr>
-                      <m:t>=</m:t>
-                    </m:r>
-                    <m:r>
-                      <a:rPr lang="fr-FR" b="0" i="1" smtClean="0">
-                        <a:latin typeface="Cambria Math" panose="02040503050406030204" pitchFamily="18" charset="0"/>
-                      </a:rPr>
-                      <m:t>7850</m:t>
-                    </m:r>
-                    <m:r>
-                      <a:rPr lang="fr-FR" b="0" i="1" smtClean="0">
-                        <a:latin typeface="Cambria Math" panose="02040503050406030204" pitchFamily="18" charset="0"/>
-                      </a:rPr>
-                      <m:t> </m:t>
+                      <m:t>=7850 </m:t>
                     </m:r>
                     <m:r>
                       <a:rPr lang="fr-FR" b="0" i="1" smtClean="0">
@@ -8333,31 +8229,7 @@
                       <a:rPr lang="fr-FR" b="0" i="1" smtClean="0">
                         <a:latin typeface="Cambria Math" panose="02040503050406030204" pitchFamily="18" charset="0"/>
                       </a:rPr>
-                      <m:t>=</m:t>
-                    </m:r>
-                    <m:r>
-                      <a:rPr lang="fr-FR" b="0" i="1" smtClean="0">
-                        <a:latin typeface="Cambria Math" panose="02040503050406030204" pitchFamily="18" charset="0"/>
-                      </a:rPr>
-                      <m:t>0</m:t>
-                    </m:r>
-                    <m:r>
-                      <a:rPr lang="fr-FR" b="0" i="1" smtClean="0">
-                        <a:latin typeface="Cambria Math" panose="02040503050406030204" pitchFamily="18" charset="0"/>
-                      </a:rPr>
-                      <m:t>.</m:t>
-                    </m:r>
-                    <m:r>
-                      <a:rPr lang="fr-FR" b="0" i="1" smtClean="0">
-                        <a:latin typeface="Cambria Math" panose="02040503050406030204" pitchFamily="18" charset="0"/>
-                      </a:rPr>
-                      <m:t>525</m:t>
-                    </m:r>
-                    <m:r>
-                      <a:rPr lang="fr-FR" b="0" i="1" smtClean="0">
-                        <a:latin typeface="Cambria Math" panose="02040503050406030204" pitchFamily="18" charset="0"/>
-                      </a:rPr>
-                      <m:t> </m:t>
+                      <m:t>=0.525 </m:t>
                     </m:r>
                   </m:oMath>
                 </a14:m>
@@ -8379,13 +8251,7 @@
                       <a:rPr lang="fr-FR" b="0" i="1" smtClean="0">
                         <a:latin typeface="Cambria Math" panose="02040503050406030204" pitchFamily="18" charset="0"/>
                       </a:rPr>
-                      <m:t>=</m:t>
-                    </m:r>
-                    <m:r>
-                      <a:rPr lang="fr-FR" b="0" i="1" smtClean="0">
-                        <a:latin typeface="Cambria Math" panose="02040503050406030204" pitchFamily="18" charset="0"/>
-                      </a:rPr>
-                      <m:t>10</m:t>
+                      <m:t>=10</m:t>
                     </m:r>
                     <m:r>
                       <m:rPr>
@@ -8489,31 +8355,7 @@
                       <a:rPr lang="fr-FR" b="0" i="1" smtClean="0">
                         <a:latin typeface="Cambria Math" panose="02040503050406030204" pitchFamily="18" charset="0"/>
                       </a:rPr>
-                      <m:t>=</m:t>
-                    </m:r>
-                    <m:r>
-                      <a:rPr lang="fr-FR" b="0" i="1" smtClean="0">
-                        <a:latin typeface="Cambria Math" panose="02040503050406030204" pitchFamily="18" charset="0"/>
-                      </a:rPr>
-                      <m:t>1118</m:t>
-                    </m:r>
-                    <m:r>
-                      <a:rPr lang="fr-FR" b="0" i="1" smtClean="0">
-                        <a:latin typeface="Cambria Math" panose="02040503050406030204" pitchFamily="18" charset="0"/>
-                      </a:rPr>
-                      <m:t>.</m:t>
-                    </m:r>
-                    <m:r>
-                      <a:rPr lang="fr-FR" b="0" i="1" smtClean="0">
-                        <a:latin typeface="Cambria Math" panose="02040503050406030204" pitchFamily="18" charset="0"/>
-                      </a:rPr>
-                      <m:t>15</m:t>
-                    </m:r>
-                    <m:r>
-                      <a:rPr lang="fr-FR" b="0" i="1" smtClean="0">
-                        <a:latin typeface="Cambria Math" panose="02040503050406030204" pitchFamily="18" charset="0"/>
-                      </a:rPr>
-                      <m:t> </m:t>
+                      <m:t>=1118.15 </m:t>
                     </m:r>
                     <m:r>
                       <m:rPr>
@@ -8563,31 +8405,7 @@
                       <a:rPr lang="fr-FR" b="0" i="1" smtClean="0">
                         <a:latin typeface="Cambria Math" panose="02040503050406030204" pitchFamily="18" charset="0"/>
                       </a:rPr>
-                      <m:t>=</m:t>
-                    </m:r>
-                    <m:r>
-                      <a:rPr lang="fr-FR" b="0" i="1" smtClean="0">
-                        <a:latin typeface="Cambria Math" panose="02040503050406030204" pitchFamily="18" charset="0"/>
-                      </a:rPr>
-                      <m:t>298</m:t>
-                    </m:r>
-                    <m:r>
-                      <a:rPr lang="fr-FR" b="0" i="1" smtClean="0">
-                        <a:latin typeface="Cambria Math" panose="02040503050406030204" pitchFamily="18" charset="0"/>
-                      </a:rPr>
-                      <m:t>.</m:t>
-                    </m:r>
-                    <m:r>
-                      <a:rPr lang="fr-FR" b="0" i="1" smtClean="0">
-                        <a:latin typeface="Cambria Math" panose="02040503050406030204" pitchFamily="18" charset="0"/>
-                      </a:rPr>
-                      <m:t>15</m:t>
-                    </m:r>
-                    <m:r>
-                      <a:rPr lang="fr-FR" b="0" i="1" smtClean="0">
-                        <a:latin typeface="Cambria Math" panose="02040503050406030204" pitchFamily="18" charset="0"/>
-                      </a:rPr>
-                      <m:t> </m:t>
+                      <m:t>=298.15 </m:t>
                     </m:r>
                     <m:r>
                       <m:rPr>
@@ -8624,25 +8442,7 @@
                       <a:rPr lang="fr-FR" b="0" i="1" smtClean="0">
                         <a:latin typeface="Cambria Math" panose="02040503050406030204" pitchFamily="18" charset="0"/>
                       </a:rPr>
-                      <m:t>=</m:t>
-                    </m:r>
-                    <m:r>
-                      <a:rPr lang="fr-FR" b="0" i="1" smtClean="0">
-                        <a:latin typeface="Cambria Math" panose="02040503050406030204" pitchFamily="18" charset="0"/>
-                      </a:rPr>
-                      <m:t>44</m:t>
-                    </m:r>
-                    <m:r>
-                      <a:rPr lang="fr-FR" b="0" i="1" smtClean="0">
-                        <a:latin typeface="Cambria Math" panose="02040503050406030204" pitchFamily="18" charset="0"/>
-                      </a:rPr>
-                      <m:t>.</m:t>
-                    </m:r>
-                    <m:r>
-                      <a:rPr lang="fr-FR" b="0" i="1" smtClean="0">
-                        <a:latin typeface="Cambria Math" panose="02040503050406030204" pitchFamily="18" charset="0"/>
-                      </a:rPr>
-                      <m:t>5</m:t>
+                      <m:t>=44.5</m:t>
                     </m:r>
                     <m:r>
                       <a:rPr lang="fr-FR" b="0" i="1" smtClean="0">
@@ -8782,8 +8582,8 @@
           </a:prstGeom>
         </p:spPr>
       </p:pic>
-      <mc:AlternateContent xmlns:mc="http://schemas.openxmlformats.org/markup-compatibility/2006">
-        <mc:Choice xmlns:a14="http://schemas.microsoft.com/office/drawing/2010/main" Requires="a14">
+      <mc:AlternateContent xmlns:mc="http://schemas.openxmlformats.org/markup-compatibility/2006" xmlns:a14="http://schemas.microsoft.com/office/drawing/2010/main">
+        <mc:Choice Requires="a14">
           <p:sp>
             <p:nvSpPr>
               <p:cNvPr id="4" name="TextBox 3">
@@ -8855,13 +8655,7 @@
                         <a:rPr lang="fr-FR" b="0" i="1" smtClean="0">
                           <a:latin typeface="Cambria Math" panose="02040503050406030204" pitchFamily="18" charset="0"/>
                         </a:rPr>
-                        <m:t> = </m:t>
-                      </m:r>
-                      <m:r>
-                        <a:rPr lang="fr-FR" b="0" i="1" smtClean="0">
-                          <a:latin typeface="Cambria Math" panose="02040503050406030204" pitchFamily="18" charset="0"/>
-                        </a:rPr>
-                        <m:t>20</m:t>
+                        <m:t> = 20</m:t>
                       </m:r>
                     </m:oMath>
                   </m:oMathPara>
@@ -8891,31 +8685,7 @@
                         <a:rPr lang="fr-FR" b="0" i="1" smtClean="0">
                           <a:latin typeface="Cambria Math" panose="02040503050406030204" pitchFamily="18" charset="0"/>
                         </a:rPr>
-                        <m:t> = </m:t>
-                      </m:r>
-                      <m:r>
-                        <a:rPr lang="fr-FR" b="0" i="1" smtClean="0">
-                          <a:latin typeface="Cambria Math" panose="02040503050406030204" pitchFamily="18" charset="0"/>
-                        </a:rPr>
-                        <m:t>0</m:t>
-                      </m:r>
-                      <m:r>
-                        <a:rPr lang="fr-FR" b="0" i="1" smtClean="0">
-                          <a:latin typeface="Cambria Math" panose="02040503050406030204" pitchFamily="18" charset="0"/>
-                        </a:rPr>
-                        <m:t>.</m:t>
-                      </m:r>
-                      <m:r>
-                        <a:rPr lang="fr-FR" b="0" i="1" smtClean="0">
-                          <a:latin typeface="Cambria Math" panose="02040503050406030204" pitchFamily="18" charset="0"/>
-                        </a:rPr>
-                        <m:t>025</m:t>
-                      </m:r>
-                      <m:r>
-                        <a:rPr lang="fr-FR" b="0" i="1" smtClean="0">
-                          <a:latin typeface="Cambria Math" panose="02040503050406030204" pitchFamily="18" charset="0"/>
-                        </a:rPr>
-                        <m:t> </m:t>
+                        <m:t> = 0.025 </m:t>
                       </m:r>
                       <m:r>
                         <m:rPr>
@@ -8968,31 +8738,7 @@
                         <a:rPr lang="fr-FR" b="0" i="1" smtClean="0">
                           <a:latin typeface="Cambria Math" panose="02040503050406030204" pitchFamily="18" charset="0"/>
                         </a:rPr>
-                        <m:t> =</m:t>
-                      </m:r>
-                      <m:r>
-                        <a:rPr lang="fr-FR" b="0" i="1" smtClean="0">
-                          <a:latin typeface="Cambria Math" panose="02040503050406030204" pitchFamily="18" charset="0"/>
-                        </a:rPr>
-                        <m:t>0</m:t>
-                      </m:r>
-                      <m:r>
-                        <a:rPr lang="fr-FR" b="0" i="1" smtClean="0">
-                          <a:latin typeface="Cambria Math" panose="02040503050406030204" pitchFamily="18" charset="0"/>
-                        </a:rPr>
-                        <m:t>.</m:t>
-                      </m:r>
-                      <m:r>
-                        <a:rPr lang="fr-FR" b="0" i="1" smtClean="0">
-                          <a:latin typeface="Cambria Math" panose="02040503050406030204" pitchFamily="18" charset="0"/>
-                        </a:rPr>
-                        <m:t>6</m:t>
-                      </m:r>
-                      <m:r>
-                        <a:rPr lang="fr-FR" b="0" i="1" smtClean="0">
-                          <a:latin typeface="Cambria Math" panose="02040503050406030204" pitchFamily="18" charset="0"/>
-                        </a:rPr>
-                        <m:t> </m:t>
+                        <m:t> =0.6 </m:t>
                       </m:r>
                       <m:r>
                         <a:rPr lang="fr-FR" b="0" i="1" smtClean="0">
@@ -9034,31 +8780,7 @@
                         <a:rPr lang="fr-FR" b="0" i="1" smtClean="0">
                           <a:latin typeface="Cambria Math" panose="02040503050406030204" pitchFamily="18" charset="0"/>
                         </a:rPr>
-                        <m:t> = </m:t>
-                      </m:r>
-                      <m:r>
-                        <a:rPr lang="fr-FR" b="0" i="1" smtClean="0">
-                          <a:latin typeface="Cambria Math" panose="02040503050406030204" pitchFamily="18" charset="0"/>
-                        </a:rPr>
-                        <m:t>0</m:t>
-                      </m:r>
-                      <m:r>
-                        <a:rPr lang="fr-FR" b="0" i="1" smtClean="0">
-                          <a:latin typeface="Cambria Math" panose="02040503050406030204" pitchFamily="18" charset="0"/>
-                        </a:rPr>
-                        <m:t>.</m:t>
-                      </m:r>
-                      <m:r>
-                        <a:rPr lang="fr-FR" b="0" i="1" smtClean="0">
-                          <a:latin typeface="Cambria Math" panose="02040503050406030204" pitchFamily="18" charset="0"/>
-                        </a:rPr>
-                        <m:t>3</m:t>
-                      </m:r>
-                      <m:r>
-                        <a:rPr lang="fr-FR" b="0" i="1" smtClean="0">
-                          <a:latin typeface="Cambria Math" panose="02040503050406030204" pitchFamily="18" charset="0"/>
-                        </a:rPr>
-                        <m:t> </m:t>
+                        <m:t> = 0.3 </m:t>
                       </m:r>
                       <m:r>
                         <m:rPr>
@@ -9077,7 +8799,7 @@
             </p:txBody>
           </p:sp>
         </mc:Choice>
-        <mc:Fallback>
+        <mc:Fallback xmlns="">
           <p:sp>
             <p:nvSpPr>
               <p:cNvPr id="4" name="TextBox 3">
@@ -9250,6 +8972,1555 @@
 </file>
 
 <file path=ppt/slides/slide18.xml><?xml version="1.0" encoding="utf-8"?>
+<p:sld xmlns:a="http://schemas.openxmlformats.org/drawingml/2006/main" xmlns:r="http://schemas.openxmlformats.org/officeDocument/2006/relationships" xmlns:p="http://schemas.openxmlformats.org/presentationml/2006/main">
+  <p:cSld>
+    <p:spTree>
+      <p:nvGrpSpPr>
+        <p:cNvPr id="1" name=""/>
+        <p:cNvGrpSpPr/>
+        <p:nvPr/>
+      </p:nvGrpSpPr>
+      <p:grpSpPr>
+        <a:xfrm>
+          <a:off x="0" y="0"/>
+          <a:ext cx="0" cy="0"/>
+          <a:chOff x="0" y="0"/>
+          <a:chExt cx="0" cy="0"/>
+        </a:xfrm>
+      </p:grpSpPr>
+      <p:sp>
+        <p:nvSpPr>
+          <p:cNvPr id="2" name="Titre 1">
+            <a:extLst>
+              <a:ext uri="{FF2B5EF4-FFF2-40B4-BE49-F238E27FC236}">
+                <a16:creationId xmlns:a16="http://schemas.microsoft.com/office/drawing/2014/main" id="{19FF1174-F757-BC98-CD45-EA7CDE51F475}"/>
+              </a:ext>
+            </a:extLst>
+          </p:cNvPr>
+          <p:cNvSpPr>
+            <a:spLocks noGrp="1"/>
+          </p:cNvSpPr>
+          <p:nvPr>
+            <p:ph type="title"/>
+          </p:nvPr>
+        </p:nvSpPr>
+        <p:spPr/>
+        <p:txBody>
+          <a:bodyPr/>
+          <a:lstStyle/>
+          <a:p>
+            <a:r>
+              <a:rPr lang="fr-FR" dirty="0"/>
+              <a:t>Validation – Incertitude numérique </a:t>
+            </a:r>
+          </a:p>
+        </p:txBody>
+      </p:sp>
+      <mc:AlternateContent xmlns:mc="http://schemas.openxmlformats.org/markup-compatibility/2006">
+        <mc:Choice xmlns:a14="http://schemas.microsoft.com/office/drawing/2010/main" Requires="a14">
+          <p:sp>
+            <p:nvSpPr>
+              <p:cNvPr id="3" name="Espace réservé du contenu 2">
+                <a:extLst>
+                  <a:ext uri="{FF2B5EF4-FFF2-40B4-BE49-F238E27FC236}">
+                    <a16:creationId xmlns:a16="http://schemas.microsoft.com/office/drawing/2014/main" id="{343FA7A9-6CDD-34AF-AA96-4080445750A7}"/>
+                  </a:ext>
+                </a:extLst>
+              </p:cNvPr>
+              <p:cNvSpPr>
+                <a:spLocks noGrp="1"/>
+              </p:cNvSpPr>
+              <p:nvPr>
+                <p:ph idx="1"/>
+              </p:nvPr>
+            </p:nvSpPr>
+            <p:spPr>
+              <a:xfrm>
+                <a:off x="528587" y="1990217"/>
+                <a:ext cx="5858417" cy="4044823"/>
+              </a:xfrm>
+            </p:spPr>
+            <p:txBody>
+              <a:bodyPr>
+                <a:normAutofit fontScale="92500" lnSpcReduction="10000"/>
+              </a:bodyPr>
+              <a:lstStyle/>
+              <a:p>
+                <a:r>
+                  <a:rPr lang="fr-FR" dirty="0"/>
+                  <a:t>Discrétisation selon 3 dimensions </a:t>
+                </a:r>
+              </a:p>
+              <a:p>
+                <a14:m>
+                  <m:oMath xmlns:m="http://schemas.openxmlformats.org/officeDocument/2006/math">
+                    <m:sSub>
+                      <m:sSubPr>
+                        <m:ctrlPr>
+                          <a:rPr lang="fr-FR" i="1">
+                            <a:latin typeface="Cambria Math" panose="02040503050406030204" pitchFamily="18" charset="0"/>
+                          </a:rPr>
+                        </m:ctrlPr>
+                      </m:sSubPr>
+                      <m:e>
+                        <m:r>
+                          <a:rPr lang="fr-FR" i="1">
+                            <a:latin typeface="Cambria Math" panose="02040503050406030204" pitchFamily="18" charset="0"/>
+                          </a:rPr>
+                          <m:t>𝑢</m:t>
+                        </m:r>
+                      </m:e>
+                      <m:sub>
+                        <m:r>
+                          <a:rPr lang="fr-FR" i="1">
+                            <a:latin typeface="Cambria Math" panose="02040503050406030204" pitchFamily="18" charset="0"/>
+                          </a:rPr>
+                          <m:t>𝑛𝑢𝑚</m:t>
+                        </m:r>
+                      </m:sub>
+                    </m:sSub>
+                    <m:r>
+                      <a:rPr lang="fr-FR" i="1">
+                        <a:latin typeface="Cambria Math" panose="02040503050406030204" pitchFamily="18" charset="0"/>
+                      </a:rPr>
+                      <m:t>=</m:t>
+                    </m:r>
+                    <m:rad>
+                      <m:radPr>
+                        <m:degHide m:val="on"/>
+                        <m:ctrlPr>
+                          <a:rPr lang="fr-FR" i="1">
+                            <a:latin typeface="Cambria Math" panose="02040503050406030204" pitchFamily="18" charset="0"/>
+                          </a:rPr>
+                        </m:ctrlPr>
+                      </m:radPr>
+                      <m:deg/>
+                      <m:e>
+                        <m:sSup>
+                          <m:sSupPr>
+                            <m:ctrlPr>
+                              <a:rPr lang="fr-FR" i="1">
+                                <a:latin typeface="Cambria Math" panose="02040503050406030204" pitchFamily="18" charset="0"/>
+                              </a:rPr>
+                            </m:ctrlPr>
+                          </m:sSupPr>
+                          <m:e>
+                            <m:d>
+                              <m:dPr>
+                                <m:ctrlPr>
+                                  <a:rPr lang="fr-FR" i="1">
+                                    <a:latin typeface="Cambria Math" panose="02040503050406030204" pitchFamily="18" charset="0"/>
+                                  </a:rPr>
+                                </m:ctrlPr>
+                              </m:dPr>
+                              <m:e>
+                                <m:f>
+                                  <m:fPr>
+                                    <m:ctrlPr>
+                                      <a:rPr lang="fr-FR" i="1">
+                                        <a:latin typeface="Cambria Math" panose="02040503050406030204" pitchFamily="18" charset="0"/>
+                                      </a:rPr>
+                                    </m:ctrlPr>
+                                  </m:fPr>
+                                  <m:num>
+                                    <m:r>
+                                      <a:rPr lang="fr-FR" i="1">
+                                        <a:latin typeface="Cambria Math" panose="02040503050406030204" pitchFamily="18" charset="0"/>
+                                      </a:rPr>
+                                      <m:t>𝐺𝐶</m:t>
+                                    </m:r>
+                                    <m:sSub>
+                                      <m:sSubPr>
+                                        <m:ctrlPr>
+                                          <a:rPr lang="fr-FR" i="1">
+                                            <a:latin typeface="Cambria Math" panose="02040503050406030204" pitchFamily="18" charset="0"/>
+                                          </a:rPr>
+                                        </m:ctrlPr>
+                                      </m:sSubPr>
+                                      <m:e>
+                                        <m:r>
+                                          <a:rPr lang="fr-FR" i="1">
+                                            <a:latin typeface="Cambria Math" panose="02040503050406030204" pitchFamily="18" charset="0"/>
+                                          </a:rPr>
+                                          <m:t>𝐼</m:t>
+                                        </m:r>
+                                      </m:e>
+                                      <m:sub>
+                                        <m:r>
+                                          <a:rPr lang="fr-FR" i="1">
+                                            <a:latin typeface="Cambria Math" panose="02040503050406030204" pitchFamily="18" charset="0"/>
+                                          </a:rPr>
+                                          <m:t>𝑟</m:t>
+                                        </m:r>
+                                      </m:sub>
+                                    </m:sSub>
+                                  </m:num>
+                                  <m:den>
+                                    <m:r>
+                                      <a:rPr lang="fr-FR" i="1">
+                                        <a:latin typeface="Cambria Math" panose="02040503050406030204" pitchFamily="18" charset="0"/>
+                                      </a:rPr>
+                                      <m:t>2</m:t>
+                                    </m:r>
+                                  </m:den>
+                                </m:f>
+                              </m:e>
+                            </m:d>
+                          </m:e>
+                          <m:sup>
+                            <m:r>
+                              <a:rPr lang="fr-FR" i="1">
+                                <a:latin typeface="Cambria Math" panose="02040503050406030204" pitchFamily="18" charset="0"/>
+                              </a:rPr>
+                              <m:t>2</m:t>
+                            </m:r>
+                          </m:sup>
+                        </m:sSup>
+                        <m:r>
+                          <a:rPr lang="fr-FR" i="1">
+                            <a:latin typeface="Cambria Math" panose="02040503050406030204" pitchFamily="18" charset="0"/>
+                          </a:rPr>
+                          <m:t>+</m:t>
+                        </m:r>
+                        <m:sSup>
+                          <m:sSupPr>
+                            <m:ctrlPr>
+                              <a:rPr lang="fr-FR" i="1">
+                                <a:latin typeface="Cambria Math" panose="02040503050406030204" pitchFamily="18" charset="0"/>
+                              </a:rPr>
+                            </m:ctrlPr>
+                          </m:sSupPr>
+                          <m:e>
+                            <m:d>
+                              <m:dPr>
+                                <m:ctrlPr>
+                                  <a:rPr lang="fr-FR" i="1">
+                                    <a:latin typeface="Cambria Math" panose="02040503050406030204" pitchFamily="18" charset="0"/>
+                                  </a:rPr>
+                                </m:ctrlPr>
+                              </m:dPr>
+                              <m:e>
+                                <m:f>
+                                  <m:fPr>
+                                    <m:ctrlPr>
+                                      <a:rPr lang="fr-FR" i="1">
+                                        <a:latin typeface="Cambria Math" panose="02040503050406030204" pitchFamily="18" charset="0"/>
+                                      </a:rPr>
+                                    </m:ctrlPr>
+                                  </m:fPr>
+                                  <m:num>
+                                    <m:r>
+                                      <a:rPr lang="fr-FR" i="1">
+                                        <a:latin typeface="Cambria Math" panose="02040503050406030204" pitchFamily="18" charset="0"/>
+                                      </a:rPr>
+                                      <m:t>𝐺𝐶</m:t>
+                                    </m:r>
+                                    <m:sSub>
+                                      <m:sSubPr>
+                                        <m:ctrlPr>
+                                          <a:rPr lang="fr-FR" i="1">
+                                            <a:latin typeface="Cambria Math" panose="02040503050406030204" pitchFamily="18" charset="0"/>
+                                          </a:rPr>
+                                        </m:ctrlPr>
+                                      </m:sSubPr>
+                                      <m:e>
+                                        <m:r>
+                                          <a:rPr lang="fr-FR" i="1">
+                                            <a:latin typeface="Cambria Math" panose="02040503050406030204" pitchFamily="18" charset="0"/>
+                                          </a:rPr>
+                                          <m:t>𝐼</m:t>
+                                        </m:r>
+                                      </m:e>
+                                      <m:sub>
+                                        <m:r>
+                                          <a:rPr lang="fr-FR" i="1">
+                                            <a:latin typeface="Cambria Math" panose="02040503050406030204" pitchFamily="18" charset="0"/>
+                                          </a:rPr>
+                                          <m:t>𝑧</m:t>
+                                        </m:r>
+                                      </m:sub>
+                                    </m:sSub>
+                                  </m:num>
+                                  <m:den>
+                                    <m:r>
+                                      <a:rPr lang="fr-FR" i="1">
+                                        <a:latin typeface="Cambria Math" panose="02040503050406030204" pitchFamily="18" charset="0"/>
+                                      </a:rPr>
+                                      <m:t>2</m:t>
+                                    </m:r>
+                                  </m:den>
+                                </m:f>
+                              </m:e>
+                            </m:d>
+                          </m:e>
+                          <m:sup>
+                            <m:r>
+                              <a:rPr lang="fr-FR" i="1">
+                                <a:latin typeface="Cambria Math" panose="02040503050406030204" pitchFamily="18" charset="0"/>
+                              </a:rPr>
+                              <m:t>2</m:t>
+                            </m:r>
+                          </m:sup>
+                        </m:sSup>
+                        <m:r>
+                          <a:rPr lang="fr-FR" i="1">
+                            <a:latin typeface="Cambria Math" panose="02040503050406030204" pitchFamily="18" charset="0"/>
+                          </a:rPr>
+                          <m:t>+</m:t>
+                        </m:r>
+                        <m:sSup>
+                          <m:sSupPr>
+                            <m:ctrlPr>
+                              <a:rPr lang="fr-FR" i="1">
+                                <a:latin typeface="Cambria Math" panose="02040503050406030204" pitchFamily="18" charset="0"/>
+                              </a:rPr>
+                            </m:ctrlPr>
+                          </m:sSupPr>
+                          <m:e>
+                            <m:d>
+                              <m:dPr>
+                                <m:ctrlPr>
+                                  <a:rPr lang="fr-FR" i="1">
+                                    <a:latin typeface="Cambria Math" panose="02040503050406030204" pitchFamily="18" charset="0"/>
+                                  </a:rPr>
+                                </m:ctrlPr>
+                              </m:dPr>
+                              <m:e>
+                                <m:f>
+                                  <m:fPr>
+                                    <m:ctrlPr>
+                                      <a:rPr lang="fr-FR" i="1">
+                                        <a:latin typeface="Cambria Math" panose="02040503050406030204" pitchFamily="18" charset="0"/>
+                                      </a:rPr>
+                                    </m:ctrlPr>
+                                  </m:fPr>
+                                  <m:num>
+                                    <m:r>
+                                      <a:rPr lang="fr-FR" i="1">
+                                        <a:latin typeface="Cambria Math" panose="02040503050406030204" pitchFamily="18" charset="0"/>
+                                      </a:rPr>
+                                      <m:t>𝐺𝐶</m:t>
+                                    </m:r>
+                                    <m:sSub>
+                                      <m:sSubPr>
+                                        <m:ctrlPr>
+                                          <a:rPr lang="fr-FR" i="1">
+                                            <a:latin typeface="Cambria Math" panose="02040503050406030204" pitchFamily="18" charset="0"/>
+                                          </a:rPr>
+                                        </m:ctrlPr>
+                                      </m:sSubPr>
+                                      <m:e>
+                                        <m:r>
+                                          <a:rPr lang="fr-FR" i="1">
+                                            <a:latin typeface="Cambria Math" panose="02040503050406030204" pitchFamily="18" charset="0"/>
+                                          </a:rPr>
+                                          <m:t>𝐼</m:t>
+                                        </m:r>
+                                      </m:e>
+                                      <m:sub>
+                                        <m:r>
+                                          <a:rPr lang="fr-FR" i="1">
+                                            <a:latin typeface="Cambria Math" panose="02040503050406030204" pitchFamily="18" charset="0"/>
+                                          </a:rPr>
+                                          <m:t>𝑡</m:t>
+                                        </m:r>
+                                      </m:sub>
+                                    </m:sSub>
+                                  </m:num>
+                                  <m:den>
+                                    <m:r>
+                                      <a:rPr lang="fr-FR" i="1">
+                                        <a:latin typeface="Cambria Math" panose="02040503050406030204" pitchFamily="18" charset="0"/>
+                                      </a:rPr>
+                                      <m:t>2</m:t>
+                                    </m:r>
+                                  </m:den>
+                                </m:f>
+                              </m:e>
+                            </m:d>
+                          </m:e>
+                          <m:sup>
+                            <m:r>
+                              <a:rPr lang="fr-FR" i="1">
+                                <a:latin typeface="Cambria Math" panose="02040503050406030204" pitchFamily="18" charset="0"/>
+                              </a:rPr>
+                              <m:t>2</m:t>
+                            </m:r>
+                          </m:sup>
+                        </m:sSup>
+                      </m:e>
+                    </m:rad>
+                  </m:oMath>
+                </a14:m>
+                <a:endParaRPr lang="fr-FR" dirty="0"/>
+              </a:p>
+              <a:p>
+                <a14:m>
+                  <m:oMath xmlns:m="http://schemas.openxmlformats.org/officeDocument/2006/math">
+                    <m:r>
+                      <a:rPr lang="fr-FR" i="1">
+                        <a:latin typeface="Cambria Math" panose="02040503050406030204" pitchFamily="18" charset="0"/>
+                      </a:rPr>
+                      <m:t>𝐺𝐶</m:t>
+                    </m:r>
+                    <m:sSub>
+                      <m:sSubPr>
+                        <m:ctrlPr>
+                          <a:rPr lang="fr-FR" i="1">
+                            <a:latin typeface="Cambria Math" panose="02040503050406030204" pitchFamily="18" charset="0"/>
+                          </a:rPr>
+                        </m:ctrlPr>
+                      </m:sSubPr>
+                      <m:e>
+                        <m:r>
+                          <a:rPr lang="fr-FR" i="1">
+                            <a:latin typeface="Cambria Math" panose="02040503050406030204" pitchFamily="18" charset="0"/>
+                          </a:rPr>
+                          <m:t>𝐼</m:t>
+                        </m:r>
+                      </m:e>
+                      <m:sub>
+                        <m:r>
+                          <a:rPr lang="fr-FR" i="1">
+                            <a:latin typeface="Cambria Math" panose="02040503050406030204" pitchFamily="18" charset="0"/>
+                          </a:rPr>
+                          <m:t>𝑥</m:t>
+                        </m:r>
+                      </m:sub>
+                    </m:sSub>
+                    <m:r>
+                      <a:rPr lang="fr-FR" i="1">
+                        <a:latin typeface="Cambria Math" panose="02040503050406030204" pitchFamily="18" charset="0"/>
+                      </a:rPr>
+                      <m:t>=</m:t>
+                    </m:r>
+                    <m:f>
+                      <m:fPr>
+                        <m:ctrlPr>
+                          <a:rPr lang="fr-FR" i="1">
+                            <a:latin typeface="Cambria Math" panose="02040503050406030204" pitchFamily="18" charset="0"/>
+                          </a:rPr>
+                        </m:ctrlPr>
+                      </m:fPr>
+                      <m:num>
+                        <m:sSub>
+                          <m:sSubPr>
+                            <m:ctrlPr>
+                              <a:rPr lang="fr-FR" i="1">
+                                <a:latin typeface="Cambria Math" panose="02040503050406030204" pitchFamily="18" charset="0"/>
+                              </a:rPr>
+                            </m:ctrlPr>
+                          </m:sSubPr>
+                          <m:e>
+                            <m:r>
+                              <a:rPr lang="fr-FR" i="1">
+                                <a:latin typeface="Cambria Math" panose="02040503050406030204" pitchFamily="18" charset="0"/>
+                              </a:rPr>
+                              <m:t>𝐹</m:t>
+                            </m:r>
+                          </m:e>
+                          <m:sub>
+                            <m:r>
+                              <a:rPr lang="fr-FR" i="1">
+                                <a:latin typeface="Cambria Math" panose="02040503050406030204" pitchFamily="18" charset="0"/>
+                              </a:rPr>
+                              <m:t>𝑠</m:t>
+                            </m:r>
+                          </m:sub>
+                        </m:sSub>
+                      </m:num>
+                      <m:den>
+                        <m:sSup>
+                          <m:sSupPr>
+                            <m:ctrlPr>
+                              <a:rPr lang="fr-FR" i="1">
+                                <a:latin typeface="Cambria Math" panose="02040503050406030204" pitchFamily="18" charset="0"/>
+                              </a:rPr>
+                            </m:ctrlPr>
+                          </m:sSupPr>
+                          <m:e>
+                            <m:r>
+                              <a:rPr lang="fr-FR" i="1">
+                                <a:latin typeface="Cambria Math" panose="02040503050406030204" pitchFamily="18" charset="0"/>
+                              </a:rPr>
+                              <m:t>𝑟</m:t>
+                            </m:r>
+                          </m:e>
+                          <m:sup>
+                            <m:r>
+                              <a:rPr lang="fr-FR" i="1">
+                                <a:latin typeface="Cambria Math" panose="02040503050406030204" pitchFamily="18" charset="0"/>
+                              </a:rPr>
+                              <m:t>𝑝</m:t>
+                            </m:r>
+                          </m:sup>
+                        </m:sSup>
+                        <m:r>
+                          <a:rPr lang="fr-FR" i="1">
+                            <a:latin typeface="Cambria Math" panose="02040503050406030204" pitchFamily="18" charset="0"/>
+                          </a:rPr>
+                          <m:t>−1</m:t>
+                        </m:r>
+                      </m:den>
+                    </m:f>
+                    <m:d>
+                      <m:dPr>
+                        <m:begChr m:val="|"/>
+                        <m:endChr m:val="|"/>
+                        <m:ctrlPr>
+                          <a:rPr lang="fr-FR" i="1">
+                            <a:latin typeface="Cambria Math" panose="02040503050406030204" pitchFamily="18" charset="0"/>
+                          </a:rPr>
+                        </m:ctrlPr>
+                      </m:dPr>
+                      <m:e>
+                        <m:sSub>
+                          <m:sSubPr>
+                            <m:ctrlPr>
+                              <a:rPr lang="fr-FR" i="1">
+                                <a:latin typeface="Cambria Math" panose="02040503050406030204" pitchFamily="18" charset="0"/>
+                              </a:rPr>
+                            </m:ctrlPr>
+                          </m:sSubPr>
+                          <m:e>
+                            <m:r>
+                              <a:rPr lang="fr-FR" i="1">
+                                <a:latin typeface="Cambria Math" panose="02040503050406030204" pitchFamily="18" charset="0"/>
+                              </a:rPr>
+                              <m:t>𝑓</m:t>
+                            </m:r>
+                          </m:e>
+                          <m:sub>
+                            <m:r>
+                              <a:rPr lang="fr-FR" i="1">
+                                <a:latin typeface="Cambria Math" panose="02040503050406030204" pitchFamily="18" charset="0"/>
+                              </a:rPr>
+                              <m:t>2</m:t>
+                            </m:r>
+                          </m:sub>
+                        </m:sSub>
+                        <m:r>
+                          <a:rPr lang="fr-FR" i="1">
+                            <a:latin typeface="Cambria Math" panose="02040503050406030204" pitchFamily="18" charset="0"/>
+                          </a:rPr>
+                          <m:t>−</m:t>
+                        </m:r>
+                        <m:sSub>
+                          <m:sSubPr>
+                            <m:ctrlPr>
+                              <a:rPr lang="fr-FR" i="1">
+                                <a:latin typeface="Cambria Math" panose="02040503050406030204" pitchFamily="18" charset="0"/>
+                              </a:rPr>
+                            </m:ctrlPr>
+                          </m:sSubPr>
+                          <m:e>
+                            <m:r>
+                              <a:rPr lang="fr-FR" i="1">
+                                <a:latin typeface="Cambria Math" panose="02040503050406030204" pitchFamily="18" charset="0"/>
+                              </a:rPr>
+                              <m:t>𝑓</m:t>
+                            </m:r>
+                          </m:e>
+                          <m:sub>
+                            <m:r>
+                              <a:rPr lang="fr-FR" i="1">
+                                <a:latin typeface="Cambria Math" panose="02040503050406030204" pitchFamily="18" charset="0"/>
+                              </a:rPr>
+                              <m:t>1</m:t>
+                            </m:r>
+                          </m:sub>
+                        </m:sSub>
+                      </m:e>
+                    </m:d>
+                  </m:oMath>
+                </a14:m>
+                <a:endParaRPr lang="fr-FR" dirty="0"/>
+              </a:p>
+              <a:p>
+                <a14:m>
+                  <m:oMath xmlns:m="http://schemas.openxmlformats.org/officeDocument/2006/math">
+                    <m:d>
+                      <m:dPr>
+                        <m:begChr m:val="|"/>
+                        <m:endChr m:val="|"/>
+                        <m:ctrlPr>
+                          <a:rPr lang="fr-FR" i="1">
+                            <a:latin typeface="Cambria Math" panose="02040503050406030204" pitchFamily="18" charset="0"/>
+                          </a:rPr>
+                        </m:ctrlPr>
+                      </m:dPr>
+                      <m:e>
+                        <m:f>
+                          <m:fPr>
+                            <m:ctrlPr>
+                              <a:rPr lang="fr-FR" i="1">
+                                <a:latin typeface="Cambria Math" panose="02040503050406030204" pitchFamily="18" charset="0"/>
+                              </a:rPr>
+                            </m:ctrlPr>
+                          </m:fPr>
+                          <m:num>
+                            <m:acc>
+                              <m:accPr>
+                                <m:chr m:val="̂"/>
+                                <m:ctrlPr>
+                                  <a:rPr lang="fr-FR" i="1">
+                                    <a:latin typeface="Cambria Math" panose="02040503050406030204" pitchFamily="18" charset="0"/>
+                                  </a:rPr>
+                                </m:ctrlPr>
+                              </m:accPr>
+                              <m:e>
+                                <m:r>
+                                  <a:rPr lang="fr-FR" i="1">
+                                    <a:latin typeface="Cambria Math" panose="02040503050406030204" pitchFamily="18" charset="0"/>
+                                  </a:rPr>
+                                  <m:t>𝑝</m:t>
+                                </m:r>
+                              </m:e>
+                            </m:acc>
+                            <m:r>
+                              <a:rPr lang="fr-FR" i="1">
+                                <a:latin typeface="Cambria Math" panose="02040503050406030204" pitchFamily="18" charset="0"/>
+                              </a:rPr>
+                              <m:t>−</m:t>
+                            </m:r>
+                            <m:sSub>
+                              <m:sSubPr>
+                                <m:ctrlPr>
+                                  <a:rPr lang="fr-FR" i="1">
+                                    <a:latin typeface="Cambria Math" panose="02040503050406030204" pitchFamily="18" charset="0"/>
+                                  </a:rPr>
+                                </m:ctrlPr>
+                              </m:sSubPr>
+                              <m:e>
+                                <m:r>
+                                  <a:rPr lang="fr-FR" i="1">
+                                    <a:latin typeface="Cambria Math" panose="02040503050406030204" pitchFamily="18" charset="0"/>
+                                  </a:rPr>
+                                  <m:t>𝑝</m:t>
+                                </m:r>
+                              </m:e>
+                              <m:sub>
+                                <m:r>
+                                  <a:rPr lang="fr-FR" i="1">
+                                    <a:latin typeface="Cambria Math" panose="02040503050406030204" pitchFamily="18" charset="0"/>
+                                  </a:rPr>
+                                  <m:t>𝑓</m:t>
+                                </m:r>
+                              </m:sub>
+                            </m:sSub>
+                          </m:num>
+                          <m:den>
+                            <m:sSub>
+                              <m:sSubPr>
+                                <m:ctrlPr>
+                                  <a:rPr lang="fr-FR" i="1">
+                                    <a:latin typeface="Cambria Math" panose="02040503050406030204" pitchFamily="18" charset="0"/>
+                                  </a:rPr>
+                                </m:ctrlPr>
+                              </m:sSubPr>
+                              <m:e>
+                                <m:r>
+                                  <a:rPr lang="fr-FR" i="1">
+                                    <a:latin typeface="Cambria Math" panose="02040503050406030204" pitchFamily="18" charset="0"/>
+                                  </a:rPr>
+                                  <m:t>𝑝</m:t>
+                                </m:r>
+                              </m:e>
+                              <m:sub>
+                                <m:r>
+                                  <a:rPr lang="fr-FR" i="1">
+                                    <a:latin typeface="Cambria Math" panose="02040503050406030204" pitchFamily="18" charset="0"/>
+                                  </a:rPr>
+                                  <m:t>𝑓</m:t>
+                                </m:r>
+                              </m:sub>
+                            </m:sSub>
+                          </m:den>
+                        </m:f>
+                      </m:e>
+                    </m:d>
+                    <m:r>
+                      <a:rPr lang="fr-FR">
+                        <a:latin typeface="Cambria Math" panose="02040503050406030204" pitchFamily="18" charset="0"/>
+                      </a:rPr>
+                      <m:t>≤</m:t>
+                    </m:r>
+                    <m:r>
+                      <a:rPr lang="fr-FR" i="1">
+                        <a:latin typeface="Cambria Math" panose="02040503050406030204" pitchFamily="18" charset="0"/>
+                      </a:rPr>
+                      <m:t>0.1</m:t>
+                    </m:r>
+                  </m:oMath>
+                </a14:m>
+                <a:r>
+                  <a:rPr lang="fr-FR" dirty="0"/>
+                  <a:t> </a:t>
+                </a:r>
+                <a:r>
+                  <a:rPr lang="fr-FR" dirty="0">
+                    <a:sym typeface="Wingdings" panose="05000000000000000000" pitchFamily="2" charset="2"/>
+                  </a:rPr>
+                  <a:t> </a:t>
+                </a:r>
+                <a14:m>
+                  <m:oMath xmlns:m="http://schemas.openxmlformats.org/officeDocument/2006/math">
+                    <m:sSub>
+                      <m:sSubPr>
+                        <m:ctrlPr>
+                          <a:rPr lang="fr-FR" i="1">
+                            <a:latin typeface="Cambria Math" panose="02040503050406030204" pitchFamily="18" charset="0"/>
+                          </a:rPr>
+                        </m:ctrlPr>
+                      </m:sSubPr>
+                      <m:e>
+                        <m:r>
+                          <a:rPr lang="fr-FR" i="1">
+                            <a:latin typeface="Cambria Math" panose="02040503050406030204" pitchFamily="18" charset="0"/>
+                          </a:rPr>
+                          <m:t>𝐹</m:t>
+                        </m:r>
+                      </m:e>
+                      <m:sub>
+                        <m:r>
+                          <a:rPr lang="fr-FR" i="1">
+                            <a:latin typeface="Cambria Math" panose="02040503050406030204" pitchFamily="18" charset="0"/>
+                          </a:rPr>
+                          <m:t>𝑠</m:t>
+                        </m:r>
+                      </m:sub>
+                    </m:sSub>
+                    <m:r>
+                      <a:rPr lang="fr-FR" i="1">
+                        <a:latin typeface="Cambria Math" panose="02040503050406030204" pitchFamily="18" charset="0"/>
+                      </a:rPr>
+                      <m:t>=1.25</m:t>
+                    </m:r>
+                  </m:oMath>
+                </a14:m>
+                <a:r>
+                  <a:rPr lang="fr-FR" dirty="0"/>
+                  <a:t> et </a:t>
+                </a:r>
+                <a14:m>
+                  <m:oMath xmlns:m="http://schemas.openxmlformats.org/officeDocument/2006/math">
+                    <m:r>
+                      <a:rPr lang="fr-FR" i="1">
+                        <a:latin typeface="Cambria Math" panose="02040503050406030204" pitchFamily="18" charset="0"/>
+                      </a:rPr>
+                      <m:t>𝑝</m:t>
+                    </m:r>
+                    <m:r>
+                      <a:rPr lang="fr-FR" i="1">
+                        <a:latin typeface="Cambria Math" panose="02040503050406030204" pitchFamily="18" charset="0"/>
+                      </a:rPr>
+                      <m:t>=</m:t>
+                    </m:r>
+                    <m:sSub>
+                      <m:sSubPr>
+                        <m:ctrlPr>
+                          <a:rPr lang="fr-FR" i="1">
+                            <a:latin typeface="Cambria Math" panose="02040503050406030204" pitchFamily="18" charset="0"/>
+                          </a:rPr>
+                        </m:ctrlPr>
+                      </m:sSubPr>
+                      <m:e>
+                        <m:r>
+                          <a:rPr lang="fr-FR" i="1">
+                            <a:latin typeface="Cambria Math" panose="02040503050406030204" pitchFamily="18" charset="0"/>
+                          </a:rPr>
+                          <m:t>𝑝</m:t>
+                        </m:r>
+                      </m:e>
+                      <m:sub>
+                        <m:r>
+                          <a:rPr lang="fr-FR" i="1">
+                            <a:latin typeface="Cambria Math" panose="02040503050406030204" pitchFamily="18" charset="0"/>
+                          </a:rPr>
+                          <m:t>𝑓</m:t>
+                        </m:r>
+                      </m:sub>
+                    </m:sSub>
+                  </m:oMath>
+                </a14:m>
+                <a:endParaRPr lang="fr-FR" dirty="0"/>
+              </a:p>
+              <a:p>
+                <a:r>
+                  <a:rPr lang="fr-FR" dirty="0"/>
+                  <a:t>SRQ : valeurs de température à t=2h</a:t>
+                </a:r>
+              </a:p>
+              <a:p>
+                <a:endParaRPr lang="fr-FR" dirty="0"/>
+              </a:p>
+              <a:p>
+                <a:pPr>
+                  <a:buFont typeface="Wingdings" panose="05000000000000000000" pitchFamily="2" charset="2"/>
+                  <a:buChar char="à"/>
+                </a:pPr>
+                <a14:m>
+                  <m:oMath xmlns:m="http://schemas.openxmlformats.org/officeDocument/2006/math">
+                    <m:sSub>
+                      <m:sSubPr>
+                        <m:ctrlPr>
+                          <a:rPr lang="fr-FR" b="0" i="1" smtClean="0">
+                            <a:latin typeface="Cambria Math" panose="02040503050406030204" pitchFamily="18" charset="0"/>
+                            <a:sym typeface="Wingdings" panose="05000000000000000000" pitchFamily="2" charset="2"/>
+                          </a:rPr>
+                        </m:ctrlPr>
+                      </m:sSubPr>
+                      <m:e>
+                        <m:r>
+                          <a:rPr lang="fr-FR" b="0" i="1" smtClean="0">
+                            <a:latin typeface="Cambria Math" panose="02040503050406030204" pitchFamily="18" charset="0"/>
+                            <a:sym typeface="Wingdings" panose="05000000000000000000" pitchFamily="2" charset="2"/>
+                          </a:rPr>
+                          <m:t> </m:t>
+                        </m:r>
+                        <m:r>
+                          <a:rPr lang="fr-FR" b="0" i="1" smtClean="0">
+                            <a:latin typeface="Cambria Math" panose="02040503050406030204" pitchFamily="18" charset="0"/>
+                            <a:sym typeface="Wingdings" panose="05000000000000000000" pitchFamily="2" charset="2"/>
+                          </a:rPr>
+                          <m:t>𝑢</m:t>
+                        </m:r>
+                      </m:e>
+                      <m:sub>
+                        <m:r>
+                          <a:rPr lang="fr-FR" b="0" i="1" smtClean="0">
+                            <a:latin typeface="Cambria Math" panose="02040503050406030204" pitchFamily="18" charset="0"/>
+                            <a:sym typeface="Wingdings" panose="05000000000000000000" pitchFamily="2" charset="2"/>
+                          </a:rPr>
+                          <m:t>𝑛𝑢𝑚</m:t>
+                        </m:r>
+                      </m:sub>
+                    </m:sSub>
+                    <m:r>
+                      <a:rPr lang="fr-FR" i="1">
+                        <a:latin typeface="Cambria Math" panose="02040503050406030204" pitchFamily="18" charset="0"/>
+                        <a:sym typeface="Wingdings" panose="05000000000000000000" pitchFamily="2" charset="2"/>
+                      </a:rPr>
+                      <m:t>=</m:t>
+                    </m:r>
+                    <m:sSup>
+                      <m:sSupPr>
+                        <m:ctrlPr>
+                          <a:rPr lang="fr-FR" b="0" i="1" smtClean="0">
+                            <a:latin typeface="Cambria Math" panose="02040503050406030204" pitchFamily="18" charset="0"/>
+                            <a:sym typeface="Wingdings" panose="05000000000000000000" pitchFamily="2" charset="2"/>
+                          </a:rPr>
+                        </m:ctrlPr>
+                      </m:sSupPr>
+                      <m:e>
+                        <m:r>
+                          <a:rPr lang="fr-FR" i="1">
+                            <a:latin typeface="Cambria Math" panose="02040503050406030204" pitchFamily="18" charset="0"/>
+                            <a:sym typeface="Wingdings" panose="05000000000000000000" pitchFamily="2" charset="2"/>
+                          </a:rPr>
+                          <m:t>1</m:t>
+                        </m:r>
+                        <m:r>
+                          <a:rPr lang="fr-FR" b="0" i="1" smtClean="0">
+                            <a:latin typeface="Cambria Math" panose="02040503050406030204" pitchFamily="18" charset="0"/>
+                            <a:sym typeface="Wingdings" panose="05000000000000000000" pitchFamily="2" charset="2"/>
+                          </a:rPr>
+                          <m:t>,</m:t>
+                        </m:r>
+                        <m:r>
+                          <a:rPr lang="fr-FR" i="1">
+                            <a:latin typeface="Cambria Math" panose="02040503050406030204" pitchFamily="18" charset="0"/>
+                            <a:sym typeface="Wingdings" panose="05000000000000000000" pitchFamily="2" charset="2"/>
+                          </a:rPr>
+                          <m:t>1097</m:t>
+                        </m:r>
+                        <m:r>
+                          <a:rPr lang="fr-FR" b="0" i="1" smtClean="0">
+                            <a:latin typeface="Cambria Math" panose="02040503050406030204" pitchFamily="18" charset="0"/>
+                            <a:sym typeface="Wingdings" panose="05000000000000000000" pitchFamily="2" charset="2"/>
+                          </a:rPr>
+                          <m:t>.10</m:t>
+                        </m:r>
+                      </m:e>
+                      <m:sup>
+                        <m:r>
+                          <a:rPr lang="fr-FR" b="0" i="1" smtClean="0">
+                            <a:latin typeface="Cambria Math" panose="02040503050406030204" pitchFamily="18" charset="0"/>
+                            <a:sym typeface="Wingdings" panose="05000000000000000000" pitchFamily="2" charset="2"/>
+                          </a:rPr>
+                          <m:t>−3</m:t>
+                        </m:r>
+                      </m:sup>
+                    </m:sSup>
+                    <m:r>
+                      <a:rPr lang="fr-FR" b="0" i="1" smtClean="0">
+                        <a:latin typeface="Cambria Math" panose="02040503050406030204" pitchFamily="18" charset="0"/>
+                        <a:sym typeface="Wingdings" panose="05000000000000000000" pitchFamily="2" charset="2"/>
+                      </a:rPr>
+                      <m:t>𝐾</m:t>
+                    </m:r>
+                  </m:oMath>
+                </a14:m>
+                <a:endParaRPr lang="fr-FR" b="0" dirty="0">
+                  <a:sym typeface="Wingdings" panose="05000000000000000000" pitchFamily="2" charset="2"/>
+                </a:endParaRPr>
+              </a:p>
+              <a:p>
+                <a:pPr>
+                  <a:buFont typeface="Wingdings" panose="05000000000000000000" pitchFamily="2" charset="2"/>
+                  <a:buChar char="à"/>
+                </a:pPr>
+                <a:endParaRPr lang="fr-FR" b="0" dirty="0">
+                  <a:sym typeface="Wingdings" panose="05000000000000000000" pitchFamily="2" charset="2"/>
+                </a:endParaRPr>
+              </a:p>
+              <a:p>
+                <a:pPr>
+                  <a:buFont typeface="Wingdings" panose="05000000000000000000" pitchFamily="2" charset="2"/>
+                  <a:buChar char="à"/>
+                </a:pPr>
+                <a:endParaRPr lang="fr-FR" dirty="0"/>
+              </a:p>
+              <a:p>
+                <a:pPr marL="0" indent="0">
+                  <a:buNone/>
+                </a:pPr>
+                <a:endParaRPr lang="fr-FR" b="0" i="1" dirty="0">
+                  <a:latin typeface="Cambria Math" panose="02040503050406030204" pitchFamily="18" charset="0"/>
+                </a:endParaRPr>
+              </a:p>
+              <a:p>
+                <a:pPr marL="0" indent="0">
+                  <a:buNone/>
+                </a:pPr>
+                <a:endParaRPr lang="fr-FR" b="0" i="1" dirty="0">
+                  <a:latin typeface="Cambria Math" panose="02040503050406030204" pitchFamily="18" charset="0"/>
+                </a:endParaRPr>
+              </a:p>
+              <a:p>
+                <a:pPr marL="0" indent="0">
+                  <a:buNone/>
+                </a:pPr>
+                <a:endParaRPr lang="fr-FR" i="1" dirty="0">
+                  <a:latin typeface="Cambria Math" panose="02040503050406030204" pitchFamily="18" charset="0"/>
+                </a:endParaRPr>
+              </a:p>
+            </p:txBody>
+          </p:sp>
+        </mc:Choice>
+        <mc:Fallback>
+          <p:sp>
+            <p:nvSpPr>
+              <p:cNvPr id="3" name="Espace réservé du contenu 2">
+                <a:extLst>
+                  <a:ext uri="{FF2B5EF4-FFF2-40B4-BE49-F238E27FC236}">
+                    <a16:creationId xmlns:a16="http://schemas.microsoft.com/office/drawing/2014/main" id="{343FA7A9-6CDD-34AF-AA96-4080445750A7}"/>
+                  </a:ext>
+                </a:extLst>
+              </p:cNvPr>
+              <p:cNvSpPr>
+                <a:spLocks noGrp="1" noRot="1" noChangeAspect="1" noMove="1" noResize="1" noEditPoints="1" noAdjustHandles="1" noChangeArrowheads="1" noChangeShapeType="1" noTextEdit="1"/>
+              </p:cNvSpPr>
+              <p:nvPr>
+                <p:ph idx="1"/>
+              </p:nvPr>
+            </p:nvSpPr>
+            <p:spPr>
+              <a:xfrm>
+                <a:off x="528587" y="1990217"/>
+                <a:ext cx="5858417" cy="4044823"/>
+              </a:xfrm>
+              <a:blipFill>
+                <a:blip r:embed="rId2"/>
+                <a:stretch>
+                  <a:fillRect l="-1665" t="-3012"/>
+                </a:stretch>
+              </a:blipFill>
+            </p:spPr>
+            <p:txBody>
+              <a:bodyPr/>
+              <a:lstStyle/>
+              <a:p>
+                <a:r>
+                  <a:rPr lang="fr-FR">
+                    <a:noFill/>
+                  </a:rPr>
+                  <a:t> </a:t>
+                </a:r>
+              </a:p>
+            </p:txBody>
+          </p:sp>
+        </mc:Fallback>
+      </mc:AlternateContent>
+      <p:pic>
+        <p:nvPicPr>
+          <p:cNvPr id="5" name="Image 4">
+            <a:extLst>
+              <a:ext uri="{FF2B5EF4-FFF2-40B4-BE49-F238E27FC236}">
+                <a16:creationId xmlns:a16="http://schemas.microsoft.com/office/drawing/2014/main" id="{873271AC-9B6F-EBC6-6CB6-88C22C841703}"/>
+              </a:ext>
+            </a:extLst>
+          </p:cNvPr>
+          <p:cNvPicPr>
+            <a:picLocks noChangeAspect="1"/>
+          </p:cNvPicPr>
+          <p:nvPr/>
+        </p:nvPicPr>
+        <p:blipFill>
+          <a:blip r:embed="rId3"/>
+          <a:stretch>
+            <a:fillRect/>
+          </a:stretch>
+        </p:blipFill>
+        <p:spPr>
+          <a:xfrm>
+            <a:off x="7013447" y="2068513"/>
+            <a:ext cx="4649965" cy="1611563"/>
+          </a:xfrm>
+          <a:prstGeom prst="rect">
+            <a:avLst/>
+          </a:prstGeom>
+        </p:spPr>
+      </p:pic>
+      <mc:AlternateContent xmlns:mc="http://schemas.openxmlformats.org/markup-compatibility/2006">
+        <mc:Choice xmlns:a14="http://schemas.microsoft.com/office/drawing/2010/main" Requires="a14">
+          <p:graphicFrame>
+            <p:nvGraphicFramePr>
+              <p:cNvPr id="4" name="Tableau 3">
+                <a:extLst>
+                  <a:ext uri="{FF2B5EF4-FFF2-40B4-BE49-F238E27FC236}">
+                    <a16:creationId xmlns:a16="http://schemas.microsoft.com/office/drawing/2014/main" id="{0F466935-667E-0FF9-8028-45C7C5445289}"/>
+                  </a:ext>
+                </a:extLst>
+              </p:cNvPr>
+              <p:cNvGraphicFramePr>
+                <a:graphicFrameLocks noGrp="1"/>
+              </p:cNvGraphicFramePr>
+              <p:nvPr>
+                <p:extLst>
+                  <p:ext uri="{D42A27DB-BD31-4B8C-83A1-F6EECF244321}">
+                    <p14:modId xmlns:p14="http://schemas.microsoft.com/office/powerpoint/2010/main" val="2481105640"/>
+                  </p:ext>
+                </p:extLst>
+              </p:nvPr>
+            </p:nvGraphicFramePr>
+            <p:xfrm>
+              <a:off x="7013448" y="4057902"/>
+              <a:ext cx="4649965" cy="1529080"/>
+            </p:xfrm>
+            <a:graphic>
+              <a:graphicData uri="http://schemas.openxmlformats.org/drawingml/2006/table">
+                <a:tbl>
+                  <a:tblPr firstRow="1" bandRow="1">
+                    <a:tableStyleId>{5C22544A-7EE6-4342-B048-85BDC9FD1C3A}</a:tableStyleId>
+                  </a:tblPr>
+                  <a:tblGrid>
+                    <a:gridCol w="1757285">
+                      <a:extLst>
+                        <a:ext uri="{9D8B030D-6E8A-4147-A177-3AD203B41FA5}">
+                          <a16:colId xmlns:a16="http://schemas.microsoft.com/office/drawing/2014/main" val="2504244554"/>
+                        </a:ext>
+                      </a:extLst>
+                    </a:gridCol>
+                    <a:gridCol w="2892680">
+                      <a:extLst>
+                        <a:ext uri="{9D8B030D-6E8A-4147-A177-3AD203B41FA5}">
+                          <a16:colId xmlns:a16="http://schemas.microsoft.com/office/drawing/2014/main" val="1599906085"/>
+                        </a:ext>
+                      </a:extLst>
+                    </a:gridCol>
+                  </a:tblGrid>
+                  <a:tr h="382270">
+                    <a:tc>
+                      <a:txBody>
+                        <a:bodyPr/>
+                        <a:lstStyle/>
+                        <a:p>
+                          <a:pPr algn="ctr"/>
+                          <a:r>
+                            <a:rPr lang="fr-FR" dirty="0"/>
+                            <a:t>Dimension</a:t>
+                          </a:r>
+                        </a:p>
+                      </a:txBody>
+                      <a:tcPr/>
+                    </a:tc>
+                    <a:tc>
+                      <a:txBody>
+                        <a:bodyPr/>
+                        <a:lstStyle/>
+                        <a:p>
+                          <a:pPr algn="ctr"/>
+                          <a:r>
+                            <a:rPr lang="fr-FR" dirty="0"/>
+                            <a:t>GCI</a:t>
+                          </a:r>
+                        </a:p>
+                      </a:txBody>
+                      <a:tcPr/>
+                    </a:tc>
+                    <a:extLst>
+                      <a:ext uri="{0D108BD9-81ED-4DB2-BD59-A6C34878D82A}">
+                        <a16:rowId xmlns:a16="http://schemas.microsoft.com/office/drawing/2014/main" val="861847506"/>
+                      </a:ext>
+                    </a:extLst>
+                  </a:tr>
+                  <a:tr h="382270">
+                    <a:tc>
+                      <a:txBody>
+                        <a:bodyPr/>
+                        <a:lstStyle/>
+                        <a:p>
+                          <a:pPr algn="ctr"/>
+                          <a:r>
+                            <a:rPr lang="fr-FR" dirty="0"/>
+                            <a:t>R</a:t>
+                          </a:r>
+                        </a:p>
+                      </a:txBody>
+                      <a:tcPr/>
+                    </a:tc>
+                    <a:tc>
+                      <a:txBody>
+                        <a:bodyPr/>
+                        <a:lstStyle/>
+                        <a:p>
+                          <a:pPr algn="ctr"/>
+                          <a:r>
+                            <a:rPr lang="fr-FR" dirty="0"/>
+                            <a:t>4,9684</a:t>
+                          </a:r>
+                          <a14:m>
+                            <m:oMath xmlns:m="http://schemas.openxmlformats.org/officeDocument/2006/math">
+                              <m:sSup>
+                                <m:sSupPr>
+                                  <m:ctrlPr>
+                                    <a:rPr lang="fr-FR" b="0" i="1" smtClean="0">
+                                      <a:latin typeface="Cambria Math" panose="02040503050406030204" pitchFamily="18" charset="0"/>
+                                    </a:rPr>
+                                  </m:ctrlPr>
+                                </m:sSupPr>
+                                <m:e>
+                                  <m:r>
+                                    <a:rPr lang="fr-FR" dirty="0" smtClean="0"/>
+                                    <m:t>.</m:t>
+                                  </m:r>
+                                  <m:r>
+                                    <a:rPr lang="fr-FR" b="0" i="1" smtClean="0">
+                                      <a:latin typeface="Cambria Math" panose="02040503050406030204" pitchFamily="18" charset="0"/>
+                                    </a:rPr>
+                                    <m:t>10</m:t>
+                                  </m:r>
+                                </m:e>
+                                <m:sup>
+                                  <m:r>
+                                    <a:rPr lang="fr-FR" b="0" i="1" smtClean="0">
+                                      <a:latin typeface="Cambria Math" panose="02040503050406030204" pitchFamily="18" charset="0"/>
+                                    </a:rPr>
+                                    <m:t>−4</m:t>
+                                  </m:r>
+                                </m:sup>
+                              </m:sSup>
+                              <m:r>
+                                <a:rPr lang="fr-FR" b="0" i="1" smtClean="0">
+                                  <a:latin typeface="Cambria Math" panose="02040503050406030204" pitchFamily="18" charset="0"/>
+                                </a:rPr>
+                                <m:t>𝐾</m:t>
+                              </m:r>
+                            </m:oMath>
+                          </a14:m>
+                          <a:endParaRPr lang="fr-FR" b="0" dirty="0"/>
+                        </a:p>
+                      </a:txBody>
+                      <a:tcPr/>
+                    </a:tc>
+                    <a:extLst>
+                      <a:ext uri="{0D108BD9-81ED-4DB2-BD59-A6C34878D82A}">
+                        <a16:rowId xmlns:a16="http://schemas.microsoft.com/office/drawing/2014/main" val="192151411"/>
+                      </a:ext>
+                    </a:extLst>
+                  </a:tr>
+                  <a:tr h="382270">
+                    <a:tc>
+                      <a:txBody>
+                        <a:bodyPr/>
+                        <a:lstStyle/>
+                        <a:p>
+                          <a:pPr algn="ctr"/>
+                          <a:r>
+                            <a:rPr lang="fr-FR" dirty="0"/>
+                            <a:t>z</a:t>
+                          </a:r>
+                        </a:p>
+                      </a:txBody>
+                      <a:tcPr/>
+                    </a:tc>
+                    <a:tc>
+                      <a:txBody>
+                        <a:bodyPr/>
+                        <a:lstStyle/>
+                        <a:p>
+                          <a:pPr algn="ctr"/>
+                          <a:r>
+                            <a:rPr lang="fr-FR" dirty="0"/>
+                            <a:t>7,8557</a:t>
+                          </a:r>
+                          <a14:m>
+                            <m:oMath xmlns:m="http://schemas.openxmlformats.org/officeDocument/2006/math">
+                              <m:sSup>
+                                <m:sSupPr>
+                                  <m:ctrlPr>
+                                    <a:rPr lang="fr-FR" b="0" i="1" smtClean="0">
+                                      <a:latin typeface="Cambria Math" panose="02040503050406030204" pitchFamily="18" charset="0"/>
+                                    </a:rPr>
+                                  </m:ctrlPr>
+                                </m:sSupPr>
+                                <m:e>
+                                  <m:r>
+                                    <a:rPr lang="fr-FR" dirty="0" smtClean="0">
+                                      <a:latin typeface="Cambria Math" panose="02040503050406030204" pitchFamily="18" charset="0"/>
+                                    </a:rPr>
+                                    <m:t>.</m:t>
+                                  </m:r>
+                                  <m:r>
+                                    <a:rPr lang="fr-FR" b="0" i="1" smtClean="0">
+                                      <a:latin typeface="Cambria Math" panose="02040503050406030204" pitchFamily="18" charset="0"/>
+                                    </a:rPr>
+                                    <m:t>10</m:t>
+                                  </m:r>
+                                </m:e>
+                                <m:sup>
+                                  <m:r>
+                                    <a:rPr lang="fr-FR" b="0" i="1" smtClean="0">
+                                      <a:latin typeface="Cambria Math" panose="02040503050406030204" pitchFamily="18" charset="0"/>
+                                    </a:rPr>
+                                    <m:t>−4</m:t>
+                                  </m:r>
+                                </m:sup>
+                              </m:sSup>
+                              <m:r>
+                                <a:rPr lang="fr-FR" b="0" i="1" smtClean="0">
+                                  <a:latin typeface="Cambria Math" panose="02040503050406030204" pitchFamily="18" charset="0"/>
+                                </a:rPr>
+                                <m:t>𝐾</m:t>
+                              </m:r>
+                            </m:oMath>
+                          </a14:m>
+                          <a:endParaRPr lang="fr-FR" dirty="0"/>
+                        </a:p>
+                      </a:txBody>
+                      <a:tcPr/>
+                    </a:tc>
+                    <a:extLst>
+                      <a:ext uri="{0D108BD9-81ED-4DB2-BD59-A6C34878D82A}">
+                        <a16:rowId xmlns:a16="http://schemas.microsoft.com/office/drawing/2014/main" val="212332539"/>
+                      </a:ext>
+                    </a:extLst>
+                  </a:tr>
+                  <a:tr h="382270">
+                    <a:tc>
+                      <a:txBody>
+                        <a:bodyPr/>
+                        <a:lstStyle/>
+                        <a:p>
+                          <a:pPr algn="ctr"/>
+                          <a:r>
+                            <a:rPr lang="fr-FR" dirty="0"/>
+                            <a:t>t</a:t>
+                          </a:r>
+                        </a:p>
+                      </a:txBody>
+                      <a:tcPr/>
+                    </a:tc>
+                    <a:tc>
+                      <a:txBody>
+                        <a:bodyPr/>
+                        <a:lstStyle/>
+                        <a:p>
+                          <a:pPr algn="ctr"/>
+                          <a:r>
+                            <a:rPr lang="fr-FR" dirty="0"/>
+                            <a:t>2,0155</a:t>
+                          </a:r>
+                          <a14:m>
+                            <m:oMath xmlns:m="http://schemas.openxmlformats.org/officeDocument/2006/math">
+                              <m:sSup>
+                                <m:sSupPr>
+                                  <m:ctrlPr>
+                                    <a:rPr lang="fr-FR" b="0" i="1" smtClean="0">
+                                      <a:latin typeface="Cambria Math" panose="02040503050406030204" pitchFamily="18" charset="0"/>
+                                    </a:rPr>
+                                  </m:ctrlPr>
+                                </m:sSupPr>
+                                <m:e>
+                                  <m:r>
+                                    <a:rPr lang="fr-FR" dirty="0" smtClean="0">
+                                      <a:latin typeface="Cambria Math" panose="02040503050406030204" pitchFamily="18" charset="0"/>
+                                    </a:rPr>
+                                    <m:t>.</m:t>
+                                  </m:r>
+                                  <m:r>
+                                    <a:rPr lang="fr-FR" b="0" i="1" smtClean="0">
+                                      <a:latin typeface="Cambria Math" panose="02040503050406030204" pitchFamily="18" charset="0"/>
+                                    </a:rPr>
+                                    <m:t>10</m:t>
+                                  </m:r>
+                                </m:e>
+                                <m:sup>
+                                  <m:r>
+                                    <a:rPr lang="fr-FR" b="0" i="1" smtClean="0">
+                                      <a:latin typeface="Cambria Math" panose="02040503050406030204" pitchFamily="18" charset="0"/>
+                                    </a:rPr>
+                                    <m:t>−</m:t>
+                                  </m:r>
+                                  <m:r>
+                                    <a:rPr lang="fr-FR" b="0" i="1" smtClean="0">
+                                      <a:latin typeface="Cambria Math" panose="02040503050406030204" pitchFamily="18" charset="0"/>
+                                    </a:rPr>
+                                    <m:t>3</m:t>
+                                  </m:r>
+                                </m:sup>
+                              </m:sSup>
+                              <m:r>
+                                <a:rPr lang="fr-FR" b="0" i="1" smtClean="0">
+                                  <a:latin typeface="Cambria Math" panose="02040503050406030204" pitchFamily="18" charset="0"/>
+                                </a:rPr>
+                                <m:t>𝐾</m:t>
+                              </m:r>
+                            </m:oMath>
+                          </a14:m>
+                          <a:endParaRPr lang="fr-FR" dirty="0"/>
+                        </a:p>
+                      </a:txBody>
+                      <a:tcPr/>
+                    </a:tc>
+                    <a:extLst>
+                      <a:ext uri="{0D108BD9-81ED-4DB2-BD59-A6C34878D82A}">
+                        <a16:rowId xmlns:a16="http://schemas.microsoft.com/office/drawing/2014/main" val="3641218454"/>
+                      </a:ext>
+                    </a:extLst>
+                  </a:tr>
+                </a:tbl>
+              </a:graphicData>
+            </a:graphic>
+          </p:graphicFrame>
+        </mc:Choice>
+        <mc:Fallback>
+          <p:graphicFrame>
+            <p:nvGraphicFramePr>
+              <p:cNvPr id="4" name="Tableau 3">
+                <a:extLst>
+                  <a:ext uri="{FF2B5EF4-FFF2-40B4-BE49-F238E27FC236}">
+                    <a16:creationId xmlns:a16="http://schemas.microsoft.com/office/drawing/2014/main" id="{0F466935-667E-0FF9-8028-45C7C5445289}"/>
+                  </a:ext>
+                </a:extLst>
+              </p:cNvPr>
+              <p:cNvGraphicFramePr>
+                <a:graphicFrameLocks noGrp="1"/>
+              </p:cNvGraphicFramePr>
+              <p:nvPr>
+                <p:extLst>
+                  <p:ext uri="{D42A27DB-BD31-4B8C-83A1-F6EECF244321}">
+                    <p14:modId xmlns:p14="http://schemas.microsoft.com/office/powerpoint/2010/main" val="2481105640"/>
+                  </p:ext>
+                </p:extLst>
+              </p:nvPr>
+            </p:nvGraphicFramePr>
+            <p:xfrm>
+              <a:off x="7013448" y="4057902"/>
+              <a:ext cx="4649965" cy="1529080"/>
+            </p:xfrm>
+            <a:graphic>
+              <a:graphicData uri="http://schemas.openxmlformats.org/drawingml/2006/table">
+                <a:tbl>
+                  <a:tblPr firstRow="1" bandRow="1">
+                    <a:tableStyleId>{5C22544A-7EE6-4342-B048-85BDC9FD1C3A}</a:tableStyleId>
+                  </a:tblPr>
+                  <a:tblGrid>
+                    <a:gridCol w="1757285">
+                      <a:extLst>
+                        <a:ext uri="{9D8B030D-6E8A-4147-A177-3AD203B41FA5}">
+                          <a16:colId xmlns:a16="http://schemas.microsoft.com/office/drawing/2014/main" val="2504244554"/>
+                        </a:ext>
+                      </a:extLst>
+                    </a:gridCol>
+                    <a:gridCol w="2892680">
+                      <a:extLst>
+                        <a:ext uri="{9D8B030D-6E8A-4147-A177-3AD203B41FA5}">
+                          <a16:colId xmlns:a16="http://schemas.microsoft.com/office/drawing/2014/main" val="1599906085"/>
+                        </a:ext>
+                      </a:extLst>
+                    </a:gridCol>
+                  </a:tblGrid>
+                  <a:tr h="382270">
+                    <a:tc>
+                      <a:txBody>
+                        <a:bodyPr/>
+                        <a:lstStyle/>
+                        <a:p>
+                          <a:pPr algn="ctr"/>
+                          <a:r>
+                            <a:rPr lang="fr-FR" dirty="0"/>
+                            <a:t>Dimension</a:t>
+                          </a:r>
+                        </a:p>
+                      </a:txBody>
+                      <a:tcPr/>
+                    </a:tc>
+                    <a:tc>
+                      <a:txBody>
+                        <a:bodyPr/>
+                        <a:lstStyle/>
+                        <a:p>
+                          <a:pPr algn="ctr"/>
+                          <a:r>
+                            <a:rPr lang="fr-FR" dirty="0"/>
+                            <a:t>GCI</a:t>
+                          </a:r>
+                        </a:p>
+                      </a:txBody>
+                      <a:tcPr/>
+                    </a:tc>
+                    <a:extLst>
+                      <a:ext uri="{0D108BD9-81ED-4DB2-BD59-A6C34878D82A}">
+                        <a16:rowId xmlns:a16="http://schemas.microsoft.com/office/drawing/2014/main" val="861847506"/>
+                      </a:ext>
+                    </a:extLst>
+                  </a:tr>
+                  <a:tr h="382270">
+                    <a:tc>
+                      <a:txBody>
+                        <a:bodyPr/>
+                        <a:lstStyle/>
+                        <a:p>
+                          <a:pPr algn="ctr"/>
+                          <a:r>
+                            <a:rPr lang="fr-FR" dirty="0"/>
+                            <a:t>R</a:t>
+                          </a:r>
+                        </a:p>
+                      </a:txBody>
+                      <a:tcPr/>
+                    </a:tc>
+                    <a:tc>
+                      <a:txBody>
+                        <a:bodyPr/>
+                        <a:lstStyle/>
+                        <a:p>
+                          <a:endParaRPr lang="fr-FR"/>
+                        </a:p>
+                      </a:txBody>
+                      <a:tcPr>
+                        <a:blipFill>
+                          <a:blip r:embed="rId4"/>
+                          <a:stretch>
+                            <a:fillRect l="-61053" t="-106349" r="-842" b="-222222"/>
+                          </a:stretch>
+                        </a:blipFill>
+                      </a:tcPr>
+                    </a:tc>
+                    <a:extLst>
+                      <a:ext uri="{0D108BD9-81ED-4DB2-BD59-A6C34878D82A}">
+                        <a16:rowId xmlns:a16="http://schemas.microsoft.com/office/drawing/2014/main" val="192151411"/>
+                      </a:ext>
+                    </a:extLst>
+                  </a:tr>
+                  <a:tr h="382270">
+                    <a:tc>
+                      <a:txBody>
+                        <a:bodyPr/>
+                        <a:lstStyle/>
+                        <a:p>
+                          <a:pPr algn="ctr"/>
+                          <a:r>
+                            <a:rPr lang="fr-FR" dirty="0"/>
+                            <a:t>z</a:t>
+                          </a:r>
+                        </a:p>
+                      </a:txBody>
+                      <a:tcPr/>
+                    </a:tc>
+                    <a:tc>
+                      <a:txBody>
+                        <a:bodyPr/>
+                        <a:lstStyle/>
+                        <a:p>
+                          <a:endParaRPr lang="fr-FR"/>
+                        </a:p>
+                      </a:txBody>
+                      <a:tcPr>
+                        <a:blipFill>
+                          <a:blip r:embed="rId4"/>
+                          <a:stretch>
+                            <a:fillRect l="-61053" t="-206349" r="-842" b="-122222"/>
+                          </a:stretch>
+                        </a:blipFill>
+                      </a:tcPr>
+                    </a:tc>
+                    <a:extLst>
+                      <a:ext uri="{0D108BD9-81ED-4DB2-BD59-A6C34878D82A}">
+                        <a16:rowId xmlns:a16="http://schemas.microsoft.com/office/drawing/2014/main" val="212332539"/>
+                      </a:ext>
+                    </a:extLst>
+                  </a:tr>
+                  <a:tr h="382270">
+                    <a:tc>
+                      <a:txBody>
+                        <a:bodyPr/>
+                        <a:lstStyle/>
+                        <a:p>
+                          <a:pPr algn="ctr"/>
+                          <a:r>
+                            <a:rPr lang="fr-FR" dirty="0"/>
+                            <a:t>t</a:t>
+                          </a:r>
+                        </a:p>
+                      </a:txBody>
+                      <a:tcPr/>
+                    </a:tc>
+                    <a:tc>
+                      <a:txBody>
+                        <a:bodyPr/>
+                        <a:lstStyle/>
+                        <a:p>
+                          <a:endParaRPr lang="fr-FR"/>
+                        </a:p>
+                      </a:txBody>
+                      <a:tcPr>
+                        <a:blipFill>
+                          <a:blip r:embed="rId4"/>
+                          <a:stretch>
+                            <a:fillRect l="-61053" t="-306349" r="-842" b="-22222"/>
+                          </a:stretch>
+                        </a:blipFill>
+                      </a:tcPr>
+                    </a:tc>
+                    <a:extLst>
+                      <a:ext uri="{0D108BD9-81ED-4DB2-BD59-A6C34878D82A}">
+                        <a16:rowId xmlns:a16="http://schemas.microsoft.com/office/drawing/2014/main" val="3641218454"/>
+                      </a:ext>
+                    </a:extLst>
+                  </a:tr>
+                </a:tbl>
+              </a:graphicData>
+            </a:graphic>
+          </p:graphicFrame>
+        </mc:Fallback>
+      </mc:AlternateContent>
+    </p:spTree>
+    <p:extLst>
+      <p:ext uri="{BB962C8B-B14F-4D97-AF65-F5344CB8AC3E}">
+        <p14:creationId xmlns:p14="http://schemas.microsoft.com/office/powerpoint/2010/main" val="809223639"/>
+      </p:ext>
+    </p:extLst>
+  </p:cSld>
+  <p:clrMapOvr>
+    <a:masterClrMapping/>
+  </p:clrMapOvr>
+</p:sld>
+</file>
+
+<file path=ppt/slides/slide19.xml><?xml version="1.0" encoding="utf-8"?>
 <p:sld xmlns:a="http://schemas.openxmlformats.org/drawingml/2006/main" xmlns:r="http://schemas.openxmlformats.org/officeDocument/2006/relationships" xmlns:p="http://schemas.openxmlformats.org/presentationml/2006/main">
   <p:cSld>
     <p:spTree>
@@ -9658,169 +10929,6 @@
 </p:sld>
 </file>
 
-<file path=ppt/slides/slide19.xml><?xml version="1.0" encoding="utf-8"?>
-<p:sld xmlns:a="http://schemas.openxmlformats.org/drawingml/2006/main" xmlns:r="http://schemas.openxmlformats.org/officeDocument/2006/relationships" xmlns:p="http://schemas.openxmlformats.org/presentationml/2006/main">
-  <p:cSld>
-    <p:spTree>
-      <p:nvGrpSpPr>
-        <p:cNvPr id="1" name=""/>
-        <p:cNvGrpSpPr/>
-        <p:nvPr/>
-      </p:nvGrpSpPr>
-      <p:grpSpPr>
-        <a:xfrm>
-          <a:off x="0" y="0"/>
-          <a:ext cx="0" cy="0"/>
-          <a:chOff x="0" y="0"/>
-          <a:chExt cx="0" cy="0"/>
-        </a:xfrm>
-      </p:grpSpPr>
-      <mc:AlternateContent xmlns:mc="http://schemas.openxmlformats.org/markup-compatibility/2006" xmlns:a14="http://schemas.microsoft.com/office/drawing/2010/main">
-        <mc:Choice Requires="a14">
-          <p:sp>
-            <p:nvSpPr>
-              <p:cNvPr id="2" name="Title 1">
-                <a:extLst>
-                  <a:ext uri="{FF2B5EF4-FFF2-40B4-BE49-F238E27FC236}">
-                    <a16:creationId xmlns:a16="http://schemas.microsoft.com/office/drawing/2014/main" id="{54C6E061-A18D-9828-5D8A-6DB04AFF154E}"/>
-                  </a:ext>
-                </a:extLst>
-              </p:cNvPr>
-              <p:cNvSpPr>
-                <a:spLocks noGrp="1"/>
-              </p:cNvSpPr>
-              <p:nvPr>
-                <p:ph type="title"/>
-              </p:nvPr>
-            </p:nvSpPr>
-            <p:spPr/>
-            <p:txBody>
-              <a:bodyPr/>
-              <a:lstStyle/>
-              <a:p>
-                <a:r>
-                  <a:rPr lang="fr-FR" dirty="0"/>
-                  <a:t>Validation – incertitude numérique </a:t>
-                </a:r>
-                <a14:m>
-                  <m:oMath xmlns:m="http://schemas.openxmlformats.org/officeDocument/2006/math">
-                    <m:sSub>
-                      <m:sSubPr>
-                        <m:ctrlPr>
-                          <a:rPr lang="fr-FR" b="0" i="1" smtClean="0">
-                            <a:latin typeface="Cambria Math" panose="02040503050406030204" pitchFamily="18" charset="0"/>
-                          </a:rPr>
-                        </m:ctrlPr>
-                      </m:sSubPr>
-                      <m:e>
-                        <m:r>
-                          <a:rPr lang="fr-FR" b="0" i="1" smtClean="0">
-                            <a:latin typeface="Cambria Math" panose="02040503050406030204" pitchFamily="18" charset="0"/>
-                          </a:rPr>
-                          <m:t>𝑢</m:t>
-                        </m:r>
-                      </m:e>
-                      <m:sub>
-                        <m:r>
-                          <m:rPr>
-                            <m:sty m:val="p"/>
-                          </m:rPr>
-                          <a:rPr lang="fr-FR" b="0" i="1" smtClean="0">
-                            <a:latin typeface="Cambria Math" panose="02040503050406030204" pitchFamily="18" charset="0"/>
-                          </a:rPr>
-                          <m:t>num</m:t>
-                        </m:r>
-                      </m:sub>
-                    </m:sSub>
-                  </m:oMath>
-                </a14:m>
-                <a:endParaRPr lang="en-US" dirty="0"/>
-              </a:p>
-            </p:txBody>
-          </p:sp>
-        </mc:Choice>
-        <mc:Fallback xmlns="">
-          <p:sp>
-            <p:nvSpPr>
-              <p:cNvPr id="2" name="Title 1">
-                <a:extLst>
-                  <a:ext uri="{FF2B5EF4-FFF2-40B4-BE49-F238E27FC236}">
-                    <a16:creationId xmlns:a16="http://schemas.microsoft.com/office/drawing/2014/main" id="{54C6E061-A18D-9828-5D8A-6DB04AFF154E}"/>
-                  </a:ext>
-                </a:extLst>
-              </p:cNvPr>
-              <p:cNvSpPr>
-                <a:spLocks noGrp="1" noRot="1" noChangeAspect="1" noMove="1" noResize="1" noEditPoints="1" noAdjustHandles="1" noChangeArrowheads="1" noChangeShapeType="1" noTextEdit="1"/>
-              </p:cNvSpPr>
-              <p:nvPr>
-                <p:ph type="title"/>
-              </p:nvPr>
-            </p:nvSpPr>
-            <p:spPr>
-              <a:blipFill>
-                <a:blip r:embed="rId2"/>
-                <a:stretch>
-                  <a:fillRect l="-2377"/>
-                </a:stretch>
-              </a:blipFill>
-            </p:spPr>
-            <p:txBody>
-              <a:bodyPr/>
-              <a:lstStyle/>
-              <a:p>
-                <a:r>
-                  <a:rPr lang="en-US">
-                    <a:noFill/>
-                  </a:rPr>
-                  <a:t> </a:t>
-                </a:r>
-              </a:p>
-            </p:txBody>
-          </p:sp>
-        </mc:Fallback>
-      </mc:AlternateContent>
-      <p:sp>
-        <p:nvSpPr>
-          <p:cNvPr id="3" name="Content Placeholder 2">
-            <a:extLst>
-              <a:ext uri="{FF2B5EF4-FFF2-40B4-BE49-F238E27FC236}">
-                <a16:creationId xmlns:a16="http://schemas.microsoft.com/office/drawing/2014/main" id="{A130E620-26B7-5449-95D5-A34047E15DFF}"/>
-              </a:ext>
-            </a:extLst>
-          </p:cNvPr>
-          <p:cNvSpPr>
-            <a:spLocks noGrp="1"/>
-          </p:cNvSpPr>
-          <p:nvPr>
-            <p:ph idx="1"/>
-          </p:nvPr>
-        </p:nvSpPr>
-        <p:spPr/>
-        <p:txBody>
-          <a:bodyPr/>
-          <a:lstStyle/>
-          <a:p>
-            <a:r>
-              <a:rPr lang="fr-FR" dirty="0"/>
-              <a:t>En fonction de la valeur de GCI</a:t>
-            </a:r>
-            <a:endParaRPr lang="en-US" dirty="0"/>
-          </a:p>
-        </p:txBody>
-      </p:sp>
-    </p:spTree>
-    <p:extLst>
-      <p:ext uri="{BB962C8B-B14F-4D97-AF65-F5344CB8AC3E}">
-        <p14:creationId xmlns:p14="http://schemas.microsoft.com/office/powerpoint/2010/main" val="211247040"/>
-      </p:ext>
-    </p:extLst>
-  </p:cSld>
-  <p:clrMapOvr>
-    <a:masterClrMapping/>
-  </p:clrMapOvr>
-</p:sld>
-</file>
-
 <file path=ppt/slides/slide2.xml><?xml version="1.0" encoding="utf-8"?>
 <p:sld xmlns:a="http://schemas.openxmlformats.org/drawingml/2006/main" xmlns:r="http://schemas.openxmlformats.org/officeDocument/2006/relationships" xmlns:p="http://schemas.openxmlformats.org/presentationml/2006/main">
   <p:cSld>
@@ -10140,8 +11248,8 @@
           </p:sp>
         </mc:Fallback>
       </mc:AlternateContent>
-      <mc:AlternateContent xmlns:mc="http://schemas.openxmlformats.org/markup-compatibility/2006">
-        <mc:Choice xmlns:a14="http://schemas.microsoft.com/office/drawing/2010/main" Requires="a14">
+      <mc:AlternateContent xmlns:mc="http://schemas.openxmlformats.org/markup-compatibility/2006" xmlns:a14="http://schemas.microsoft.com/office/drawing/2010/main">
+        <mc:Choice Requires="a14">
           <p:sp>
             <p:nvSpPr>
               <p:cNvPr id="3" name="Content Placeholder 2">
@@ -10441,7 +11549,7 @@
             </p:txBody>
           </p:sp>
         </mc:Choice>
-        <mc:Fallback>
+        <mc:Fallback xmlns="">
           <p:sp>
             <p:nvSpPr>
               <p:cNvPr id="3" name="Content Placeholder 2">
@@ -10534,7 +11642,7 @@
           <a:p>
             <a:r>
               <a:rPr lang="fr-FR" dirty="0"/>
-              <a:t>Amélioration possible</a:t>
+              <a:t>Améliorations possibles</a:t>
             </a:r>
             <a:endParaRPr lang="en-US" dirty="0"/>
           </a:p>
@@ -10685,7 +11793,15 @@
                 </a:r>
                 <a:r>
                   <a:rPr lang="en-US" dirty="0"/>
-                  <a:t> experiences pour </a:t>
+                  <a:t> </a:t>
+                </a:r>
+                <a:r>
+                  <a:rPr lang="en-US" dirty="0" err="1"/>
+                  <a:t>expériences</a:t>
+                </a:r>
+                <a:r>
+                  <a:rPr lang="en-US" dirty="0"/>
+                  <a:t> pour </a:t>
                 </a:r>
                 <a:r>
                   <a:rPr lang="en-US" dirty="0" err="1"/>
@@ -10745,7 +11861,7 @@
               <a:lstStyle/>
               <a:p>
                 <a:r>
-                  <a:rPr lang="en-US">
+                  <a:rPr lang="fr-FR">
                     <a:noFill/>
                   </a:rPr>
                   <a:t> </a:t>
@@ -12526,13 +13642,7 @@
                         <a:rPr lang="fr-CA" b="0" i="1" smtClean="0">
                           <a:latin typeface="Cambria Math" panose="02040503050406030204" pitchFamily="18" charset="0"/>
                         </a:rPr>
-                        <m:t>=</m:t>
-                      </m:r>
-                      <m:r>
-                        <a:rPr lang="fr-CA" b="0" i="1" smtClean="0">
-                          <a:latin typeface="Cambria Math" panose="02040503050406030204" pitchFamily="18" charset="0"/>
-                        </a:rPr>
-                        <m:t>0</m:t>
+                        <m:t>=0</m:t>
                       </m:r>
                     </m:oMath>
                   </m:oMathPara>
@@ -14010,13 +15120,7 @@
                               <a:rPr lang="fr-FR" b="0" i="1" smtClean="0">
                                 <a:latin typeface="Cambria Math" panose="02040503050406030204" pitchFamily="18" charset="0"/>
                               </a:rPr>
-                              <m:t>+</m:t>
-                            </m:r>
-                            <m:r>
-                              <a:rPr lang="fr-FR" b="0" i="1" smtClean="0">
-                                <a:latin typeface="Cambria Math" panose="02040503050406030204" pitchFamily="18" charset="0"/>
-                              </a:rPr>
-                              <m:t>1</m:t>
+                              <m:t>+1</m:t>
                             </m:r>
                             <m:r>
                               <a:rPr lang="fr-FR" i="1">
@@ -14073,13 +15177,7 @@
                               <a:rPr lang="fr-FR" b="0" i="1" smtClean="0">
                                 <a:latin typeface="Cambria Math" panose="02040503050406030204" pitchFamily="18" charset="0"/>
                               </a:rPr>
-                              <m:t>−</m:t>
-                            </m:r>
-                            <m:r>
-                              <a:rPr lang="fr-FR" b="0" i="1" smtClean="0">
-                                <a:latin typeface="Cambria Math" panose="02040503050406030204" pitchFamily="18" charset="0"/>
-                              </a:rPr>
-                              <m:t>1</m:t>
+                              <m:t>−1</m:t>
                             </m:r>
                             <m:r>
                               <a:rPr lang="fr-FR" i="1">
@@ -14727,19 +15825,7 @@
                                 <a:rPr lang="fr-FR" sz="2400" i="1">
                                   <a:latin typeface="Cambria Math" panose="02040503050406030204" pitchFamily="18" charset="0"/>
                                 </a:rPr>
-                                <m:t>+</m:t>
-                              </m:r>
-                              <m:r>
-                                <a:rPr lang="fr-FR" sz="2400" i="1">
-                                  <a:latin typeface="Cambria Math" panose="02040503050406030204" pitchFamily="18" charset="0"/>
-                                </a:rPr>
-                                <m:t>1</m:t>
-                              </m:r>
-                              <m:r>
-                                <a:rPr lang="fr-FR" sz="2400" i="1">
-                                  <a:latin typeface="Cambria Math" panose="02040503050406030204" pitchFamily="18" charset="0"/>
-                                </a:rPr>
-                                <m:t>,</m:t>
+                                <m:t>+1,</m:t>
                               </m:r>
                               <m:r>
                                 <a:rPr lang="fr-FR" sz="2400" i="1">
@@ -14847,19 +15933,7 @@
                                 <a:rPr lang="fr-FR" sz="2400" i="1">
                                   <a:latin typeface="Cambria Math" panose="02040503050406030204" pitchFamily="18" charset="0"/>
                                 </a:rPr>
-                                <m:t>−</m:t>
-                              </m:r>
-                              <m:r>
-                                <a:rPr lang="fr-FR" sz="2400" i="1">
-                                  <a:latin typeface="Cambria Math" panose="02040503050406030204" pitchFamily="18" charset="0"/>
-                                </a:rPr>
-                                <m:t>1</m:t>
-                              </m:r>
-                              <m:r>
-                                <a:rPr lang="fr-FR" sz="2400" i="1">
-                                  <a:latin typeface="Cambria Math" panose="02040503050406030204" pitchFamily="18" charset="0"/>
-                                </a:rPr>
-                                <m:t>,</m:t>
+                                <m:t>−1,</m:t>
                               </m:r>
                               <m:r>
                                 <a:rPr lang="fr-FR" sz="2400" i="1">
@@ -14992,19 +16066,7 @@
                                 <a:rPr lang="fr-FR" sz="2400" i="1">
                                   <a:latin typeface="Cambria Math" panose="02040503050406030204" pitchFamily="18" charset="0"/>
                                 </a:rPr>
-                                <m:t>+</m:t>
-                              </m:r>
-                              <m:r>
-                                <a:rPr lang="fr-FR" sz="2400" i="1">
-                                  <a:latin typeface="Cambria Math" panose="02040503050406030204" pitchFamily="18" charset="0"/>
-                                </a:rPr>
-                                <m:t>1</m:t>
-                              </m:r>
-                              <m:r>
-                                <a:rPr lang="fr-FR" sz="2400" i="1">
-                                  <a:latin typeface="Cambria Math" panose="02040503050406030204" pitchFamily="18" charset="0"/>
-                                </a:rPr>
-                                <m:t>,</m:t>
+                                <m:t>+1,</m:t>
                               </m:r>
                               <m:r>
                                 <a:rPr lang="fr-FR" sz="2400" i="1">
@@ -15055,19 +16117,7 @@
                                 <a:rPr lang="fr-FR" sz="2400" i="1">
                                   <a:latin typeface="Cambria Math" panose="02040503050406030204" pitchFamily="18" charset="0"/>
                                 </a:rPr>
-                                <m:t>−</m:t>
-                              </m:r>
-                              <m:r>
-                                <a:rPr lang="fr-FR" sz="2400" i="1">
-                                  <a:latin typeface="Cambria Math" panose="02040503050406030204" pitchFamily="18" charset="0"/>
-                                </a:rPr>
-                                <m:t>1</m:t>
-                              </m:r>
-                              <m:r>
-                                <a:rPr lang="fr-FR" sz="2400" i="1">
-                                  <a:latin typeface="Cambria Math" panose="02040503050406030204" pitchFamily="18" charset="0"/>
-                                </a:rPr>
-                                <m:t>,</m:t>
+                                <m:t>−1,</m:t>
                               </m:r>
                               <m:r>
                                 <a:rPr lang="fr-FR" sz="2400" i="1">
@@ -15164,13 +16214,7 @@
                                 <a:rPr lang="fr-FR" sz="2400" i="1">
                                   <a:latin typeface="Cambria Math" panose="02040503050406030204" pitchFamily="18" charset="0"/>
                                 </a:rPr>
-                                <m:t>+</m:t>
-                              </m:r>
-                              <m:r>
-                                <a:rPr lang="fr-FR" sz="2400" i="1">
-                                  <a:latin typeface="Cambria Math" panose="02040503050406030204" pitchFamily="18" charset="0"/>
-                                </a:rPr>
-                                <m:t>1</m:t>
+                                <m:t>+1</m:t>
                               </m:r>
                             </m:sub>
                             <m:sup>
@@ -15284,13 +16328,7 @@
                                 <a:rPr lang="fr-FR" sz="2400" i="1">
                                   <a:latin typeface="Cambria Math" panose="02040503050406030204" pitchFamily="18" charset="0"/>
                                 </a:rPr>
-                                <m:t>−</m:t>
-                              </m:r>
-                              <m:r>
-                                <a:rPr lang="fr-FR" sz="2400" i="1">
-                                  <a:latin typeface="Cambria Math" panose="02040503050406030204" pitchFamily="18" charset="0"/>
-                                </a:rPr>
-                                <m:t>1</m:t>
+                                <m:t>−1</m:t>
                               </m:r>
                             </m:sub>
                             <m:sup>
@@ -15636,21 +16674,7 @@
                                 <a:latin typeface="Cambria Math" panose="02040503050406030204" pitchFamily="18" charset="0"/>
                                 <a:ea typeface="Cambria Math" panose="02040503050406030204" pitchFamily="18" charset="0"/>
                               </a:rPr>
-                              <m:t>+</m:t>
-                            </m:r>
-                            <m:r>
-                              <a:rPr lang="fr-FR" sz="2600" i="1">
-                                <a:latin typeface="Cambria Math" panose="02040503050406030204" pitchFamily="18" charset="0"/>
-                                <a:ea typeface="Cambria Math" panose="02040503050406030204" pitchFamily="18" charset="0"/>
-                              </a:rPr>
-                              <m:t>1</m:t>
-                            </m:r>
-                            <m:r>
-                              <a:rPr lang="fr-FR" sz="2600" i="1">
-                                <a:latin typeface="Cambria Math" panose="02040503050406030204" pitchFamily="18" charset="0"/>
-                                <a:ea typeface="Cambria Math" panose="02040503050406030204" pitchFamily="18" charset="0"/>
-                              </a:rPr>
-                              <m:t>,</m:t>
+                              <m:t>+1,</m:t>
                             </m:r>
                             <m:r>
                               <a:rPr lang="fr-FR" sz="2600" i="1">
@@ -15773,21 +16797,7 @@
                                 <a:latin typeface="Cambria Math" panose="02040503050406030204" pitchFamily="18" charset="0"/>
                                 <a:ea typeface="Cambria Math" panose="02040503050406030204" pitchFamily="18" charset="0"/>
                               </a:rPr>
-                              <m:t>−</m:t>
-                            </m:r>
-                            <m:r>
-                              <a:rPr lang="fr-FR" sz="2600" i="1">
-                                <a:latin typeface="Cambria Math" panose="02040503050406030204" pitchFamily="18" charset="0"/>
-                                <a:ea typeface="Cambria Math" panose="02040503050406030204" pitchFamily="18" charset="0"/>
-                              </a:rPr>
-                              <m:t>1</m:t>
-                            </m:r>
-                            <m:r>
-                              <a:rPr lang="fr-FR" sz="2600" i="1">
-                                <a:latin typeface="Cambria Math" panose="02040503050406030204" pitchFamily="18" charset="0"/>
-                                <a:ea typeface="Cambria Math" panose="02040503050406030204" pitchFamily="18" charset="0"/>
-                              </a:rPr>
-                              <m:t>,</m:t>
+                              <m:t>−1,</m:t>
                             </m:r>
                             <m:r>
                               <a:rPr lang="fr-FR" sz="2600" i="1">
@@ -16056,13 +17066,7 @@
                               <a:rPr lang="fr-FR" sz="2600" i="1">
                                 <a:latin typeface="Cambria Math" panose="02040503050406030204" pitchFamily="18" charset="0"/>
                               </a:rPr>
-                              <m:t>+</m:t>
-                            </m:r>
-                            <m:r>
-                              <a:rPr lang="fr-FR" sz="2600" i="1">
-                                <a:latin typeface="Cambria Math" panose="02040503050406030204" pitchFamily="18" charset="0"/>
-                              </a:rPr>
-                              <m:t>1</m:t>
+                              <m:t>+1</m:t>
                             </m:r>
                           </m:sub>
                           <m:sup>
@@ -16176,13 +17180,7 @@
                               <a:rPr lang="fr-FR" sz="2600" i="1">
                                 <a:latin typeface="Cambria Math" panose="02040503050406030204" pitchFamily="18" charset="0"/>
                               </a:rPr>
-                              <m:t>−</m:t>
-                            </m:r>
-                            <m:r>
-                              <a:rPr lang="fr-FR" sz="2600" i="1">
-                                <a:latin typeface="Cambria Math" panose="02040503050406030204" pitchFamily="18" charset="0"/>
-                              </a:rPr>
-                              <m:t>1</m:t>
+                              <m:t>−1</m:t>
                             </m:r>
                           </m:sub>
                           <m:sup>
@@ -20993,13 +21991,7 @@
                           <a:rPr lang="fr-FR" i="1">
                             <a:latin typeface="Cambria Math" panose="02040503050406030204" pitchFamily="18" charset="0"/>
                           </a:rPr>
-                          <m:t>2</m:t>
-                        </m:r>
-                        <m:r>
-                          <a:rPr lang="fr-FR" i="1">
-                            <a:latin typeface="Cambria Math" panose="02040503050406030204" pitchFamily="18" charset="0"/>
-                          </a:rPr>
-                          <m:t>!</m:t>
+                          <m:t>2!</m:t>
                         </m:r>
                       </m:den>
                     </m:f>
@@ -21171,13 +22163,7 @@
                           <a:rPr lang="fr-FR" i="1">
                             <a:latin typeface="Cambria Math" panose="02040503050406030204" pitchFamily="18" charset="0"/>
                           </a:rPr>
-                          <m:t>3</m:t>
-                        </m:r>
-                        <m:r>
-                          <a:rPr lang="fr-FR" i="1">
-                            <a:latin typeface="Cambria Math" panose="02040503050406030204" pitchFamily="18" charset="0"/>
-                          </a:rPr>
-                          <m:t>!</m:t>
+                          <m:t>3!</m:t>
                         </m:r>
                       </m:den>
                     </m:f>
@@ -21349,13 +22335,7 @@
                           <a:rPr lang="fr-FR" i="1">
                             <a:latin typeface="Cambria Math" panose="02040503050406030204" pitchFamily="18" charset="0"/>
                           </a:rPr>
-                          <m:t>4</m:t>
-                        </m:r>
-                        <m:r>
-                          <a:rPr lang="fr-FR" i="1">
-                            <a:latin typeface="Cambria Math" panose="02040503050406030204" pitchFamily="18" charset="0"/>
-                          </a:rPr>
-                          <m:t>!</m:t>
+                          <m:t>4!</m:t>
                         </m:r>
                       </m:den>
                     </m:f>
@@ -21773,13 +22753,7 @@
                           <a:rPr lang="fr-FR" i="1">
                             <a:latin typeface="Cambria Math" panose="02040503050406030204" pitchFamily="18" charset="0"/>
                           </a:rPr>
-                          <m:t>2</m:t>
-                        </m:r>
-                        <m:r>
-                          <a:rPr lang="fr-FR" i="1">
-                            <a:latin typeface="Cambria Math" panose="02040503050406030204" pitchFamily="18" charset="0"/>
-                          </a:rPr>
-                          <m:t>!</m:t>
+                          <m:t>2!</m:t>
                         </m:r>
                       </m:den>
                     </m:f>
@@ -21951,13 +22925,7 @@
                           <a:rPr lang="fr-FR" i="1">
                             <a:latin typeface="Cambria Math" panose="02040503050406030204" pitchFamily="18" charset="0"/>
                           </a:rPr>
-                          <m:t>3</m:t>
-                        </m:r>
-                        <m:r>
-                          <a:rPr lang="fr-FR" i="1">
-                            <a:latin typeface="Cambria Math" panose="02040503050406030204" pitchFamily="18" charset="0"/>
-                          </a:rPr>
-                          <m:t>!</m:t>
+                          <m:t>3!</m:t>
                         </m:r>
                       </m:den>
                     </m:f>
@@ -22129,13 +23097,7 @@
                           <a:rPr lang="fr-FR" i="1">
                             <a:latin typeface="Cambria Math" panose="02040503050406030204" pitchFamily="18" charset="0"/>
                           </a:rPr>
-                          <m:t>4</m:t>
-                        </m:r>
-                        <m:r>
-                          <a:rPr lang="fr-FR" i="1">
-                            <a:latin typeface="Cambria Math" panose="02040503050406030204" pitchFamily="18" charset="0"/>
-                          </a:rPr>
-                          <m:t>!</m:t>
+                          <m:t>4!</m:t>
                         </m:r>
                       </m:den>
                     </m:f>
@@ -22726,13 +23688,7 @@
                           <a:rPr lang="fr-FR" i="1">
                             <a:latin typeface="Cambria Math" panose="02040503050406030204" pitchFamily="18" charset="0"/>
                           </a:rPr>
-                          <m:t>2</m:t>
-                        </m:r>
-                        <m:r>
-                          <a:rPr lang="fr-FR" i="1">
-                            <a:latin typeface="Cambria Math" panose="02040503050406030204" pitchFamily="18" charset="0"/>
-                          </a:rPr>
-                          <m:t>!</m:t>
+                          <m:t>2!</m:t>
                         </m:r>
                       </m:den>
                     </m:f>
@@ -23193,13 +24149,7 @@
                           <a:rPr lang="fr-FR" i="1">
                             <a:latin typeface="Cambria Math" panose="02040503050406030204" pitchFamily="18" charset="0"/>
                           </a:rPr>
-                          <m:t>2</m:t>
-                        </m:r>
-                        <m:r>
-                          <a:rPr lang="fr-FR" i="1">
-                            <a:latin typeface="Cambria Math" panose="02040503050406030204" pitchFamily="18" charset="0"/>
-                          </a:rPr>
-                          <m:t>!</m:t>
+                          <m:t>2!</m:t>
                         </m:r>
                       </m:den>
                     </m:f>

--- a/projet_final/projet_final/MEC8211-Projet-final-Presentation.pptx
+++ b/projet_final/projet_final/MEC8211-Projet-final-Presentation.pptx
@@ -25,8 +25,8 @@
     <p:sldId id="272" r:id="rId16"/>
     <p:sldId id="270" r:id="rId17"/>
     <p:sldId id="271" r:id="rId18"/>
-    <p:sldId id="273" r:id="rId19"/>
-    <p:sldId id="275" r:id="rId20"/>
+    <p:sldId id="278" r:id="rId19"/>
+    <p:sldId id="273" r:id="rId20"/>
     <p:sldId id="276" r:id="rId21"/>
     <p:sldId id="277" r:id="rId22"/>
     <p:sldId id="274" r:id="rId23"/>
@@ -376,7 +376,7 @@
           <a:p>
             <a:fld id="{F6105186-0725-443C-BC59-E521425E81CD}" type="slidenum">
               <a:rPr lang="fr-FR" smtClean="0"/>
-              <a:t>‹#›</a:t>
+              <a:t>‹N°›</a:t>
             </a:fld>
             <a:endParaRPr lang="fr-FR"/>
           </a:p>
@@ -962,7 +962,7 @@
           <a:p>
             <a:fld id="{FD85B578-4E75-4E1C-9BE3-D5DCC0715B13}" type="slidenum">
               <a:rPr lang="fr-FR" smtClean="0"/>
-              <a:t>‹#›</a:t>
+              <a:t>‹N°›</a:t>
             </a:fld>
             <a:endParaRPr lang="fr-FR"/>
           </a:p>
@@ -1160,7 +1160,7 @@
           <a:p>
             <a:fld id="{FD85B578-4E75-4E1C-9BE3-D5DCC0715B13}" type="slidenum">
               <a:rPr lang="fr-FR" smtClean="0"/>
-              <a:t>‹#›</a:t>
+              <a:t>‹N°›</a:t>
             </a:fld>
             <a:endParaRPr lang="fr-FR"/>
           </a:p>
@@ -1368,7 +1368,7 @@
           <a:p>
             <a:fld id="{FD85B578-4E75-4E1C-9BE3-D5DCC0715B13}" type="slidenum">
               <a:rPr lang="fr-FR" smtClean="0"/>
-              <a:t>‹#›</a:t>
+              <a:t>‹N°›</a:t>
             </a:fld>
             <a:endParaRPr lang="fr-FR"/>
           </a:p>
@@ -1566,7 +1566,7 @@
           <a:p>
             <a:fld id="{FD85B578-4E75-4E1C-9BE3-D5DCC0715B13}" type="slidenum">
               <a:rPr lang="fr-FR" smtClean="0"/>
-              <a:t>‹#›</a:t>
+              <a:t>‹N°›</a:t>
             </a:fld>
             <a:endParaRPr lang="fr-FR"/>
           </a:p>
@@ -1841,7 +1841,7 @@
           <a:p>
             <a:fld id="{FD85B578-4E75-4E1C-9BE3-D5DCC0715B13}" type="slidenum">
               <a:rPr lang="fr-FR" smtClean="0"/>
-              <a:t>‹#›</a:t>
+              <a:t>‹N°›</a:t>
             </a:fld>
             <a:endParaRPr lang="fr-FR"/>
           </a:p>
@@ -2106,7 +2106,7 @@
           <a:p>
             <a:fld id="{FD85B578-4E75-4E1C-9BE3-D5DCC0715B13}" type="slidenum">
               <a:rPr lang="fr-FR" smtClean="0"/>
-              <a:t>‹#›</a:t>
+              <a:t>‹N°›</a:t>
             </a:fld>
             <a:endParaRPr lang="fr-FR"/>
           </a:p>
@@ -2518,7 +2518,7 @@
           <a:p>
             <a:fld id="{FD85B578-4E75-4E1C-9BE3-D5DCC0715B13}" type="slidenum">
               <a:rPr lang="fr-FR" smtClean="0"/>
-              <a:t>‹#›</a:t>
+              <a:t>‹N°›</a:t>
             </a:fld>
             <a:endParaRPr lang="fr-FR"/>
           </a:p>
@@ -2659,7 +2659,7 @@
           <a:p>
             <a:fld id="{FD85B578-4E75-4E1C-9BE3-D5DCC0715B13}" type="slidenum">
               <a:rPr lang="fr-FR" smtClean="0"/>
-              <a:t>‹#›</a:t>
+              <a:t>‹N°›</a:t>
             </a:fld>
             <a:endParaRPr lang="fr-FR"/>
           </a:p>
@@ -2772,7 +2772,7 @@
           <a:p>
             <a:fld id="{FD85B578-4E75-4E1C-9BE3-D5DCC0715B13}" type="slidenum">
               <a:rPr lang="fr-FR" smtClean="0"/>
-              <a:t>‹#›</a:t>
+              <a:t>‹N°›</a:t>
             </a:fld>
             <a:endParaRPr lang="fr-FR"/>
           </a:p>
@@ -3083,7 +3083,7 @@
           <a:p>
             <a:fld id="{FD85B578-4E75-4E1C-9BE3-D5DCC0715B13}" type="slidenum">
               <a:rPr lang="fr-FR" smtClean="0"/>
-              <a:t>‹#›</a:t>
+              <a:t>‹N°›</a:t>
             </a:fld>
             <a:endParaRPr lang="fr-FR"/>
           </a:p>
@@ -3371,7 +3371,7 @@
           <a:p>
             <a:fld id="{FD85B578-4E75-4E1C-9BE3-D5DCC0715B13}" type="slidenum">
               <a:rPr lang="fr-FR" smtClean="0"/>
-              <a:t>‹#›</a:t>
+              <a:t>‹N°›</a:t>
             </a:fld>
             <a:endParaRPr lang="fr-FR"/>
           </a:p>
@@ -3651,7 +3651,7 @@
           <a:p>
             <a:fld id="{FD85B578-4E75-4E1C-9BE3-D5DCC0715B13}" type="slidenum">
               <a:rPr lang="fr-FR" smtClean="0"/>
-              <a:t>‹#›</a:t>
+              <a:t>‹N°›</a:t>
             </a:fld>
             <a:endParaRPr lang="fr-FR"/>
           </a:p>
@@ -7251,14 +7251,7 @@
                         <a:latin typeface="Cambria Math" panose="02040503050406030204" pitchFamily="18" charset="0"/>
                         <a:sym typeface="Wingdings" panose="05000000000000000000" pitchFamily="2" charset="2"/>
                       </a:rPr>
-                      <m:t> = </m:t>
-                    </m:r>
-                    <m:r>
-                      <a:rPr lang="fr-FR" b="0" i="1" smtClean="0">
-                        <a:latin typeface="Cambria Math" panose="02040503050406030204" pitchFamily="18" charset="0"/>
-                        <a:sym typeface="Wingdings" panose="05000000000000000000" pitchFamily="2" charset="2"/>
-                      </a:rPr>
-                      <m:t>100</m:t>
+                      <m:t> = 100</m:t>
                     </m:r>
                     <m:r>
                       <m:rPr>
@@ -7292,14 +7285,7 @@
                         <a:latin typeface="Cambria Math" panose="02040503050406030204" pitchFamily="18" charset="0"/>
                         <a:sym typeface="Wingdings" panose="05000000000000000000" pitchFamily="2" charset="2"/>
                       </a:rPr>
-                      <m:t>=</m:t>
-                    </m:r>
-                    <m:r>
-                      <a:rPr lang="fr-FR" b="0" i="1" smtClean="0">
-                        <a:latin typeface="Cambria Math" panose="02040503050406030204" pitchFamily="18" charset="0"/>
-                        <a:sym typeface="Wingdings" panose="05000000000000000000" pitchFamily="2" charset="2"/>
-                      </a:rPr>
-                      <m:t>2</m:t>
+                      <m:t>=2</m:t>
                     </m:r>
                   </m:oMath>
                 </a14:m>
@@ -7365,28 +7351,7 @@
                         <a:latin typeface="Cambria Math" panose="02040503050406030204" pitchFamily="18" charset="0"/>
                         <a:sym typeface="Wingdings" panose="05000000000000000000" pitchFamily="2" charset="2"/>
                       </a:rPr>
-                      <m:t>= </m:t>
-                    </m:r>
-                    <m:r>
-                      <a:rPr lang="fr-FR" b="0" i="1" smtClean="0">
-                        <a:latin typeface="Cambria Math" panose="02040503050406030204" pitchFamily="18" charset="0"/>
-                        <a:sym typeface="Wingdings" panose="05000000000000000000" pitchFamily="2" charset="2"/>
-                      </a:rPr>
-                      <m:t>0</m:t>
-                    </m:r>
-                    <m:r>
-                      <a:rPr lang="fr-FR" b="0" i="1" smtClean="0">
-                        <a:latin typeface="Cambria Math" panose="02040503050406030204" pitchFamily="18" charset="0"/>
-                        <a:sym typeface="Wingdings" panose="05000000000000000000" pitchFamily="2" charset="2"/>
-                      </a:rPr>
-                      <m:t>.</m:t>
-                    </m:r>
-                    <m:r>
-                      <a:rPr lang="fr-FR" b="0" i="1" smtClean="0">
-                        <a:latin typeface="Cambria Math" panose="02040503050406030204" pitchFamily="18" charset="0"/>
-                        <a:sym typeface="Wingdings" panose="05000000000000000000" pitchFamily="2" charset="2"/>
-                      </a:rPr>
-                      <m:t>6</m:t>
+                      <m:t>= 0.6</m:t>
                     </m:r>
                     <m:r>
                       <m:rPr>
@@ -7423,28 +7388,7 @@
                         <a:latin typeface="Cambria Math" panose="02040503050406030204" pitchFamily="18" charset="0"/>
                         <a:sym typeface="Wingdings" panose="05000000000000000000" pitchFamily="2" charset="2"/>
                       </a:rPr>
-                      <m:t> = </m:t>
-                    </m:r>
-                    <m:r>
-                      <a:rPr lang="fr-FR" b="0" i="1" smtClean="0">
-                        <a:latin typeface="Cambria Math" panose="02040503050406030204" pitchFamily="18" charset="0"/>
-                        <a:sym typeface="Wingdings" panose="05000000000000000000" pitchFamily="2" charset="2"/>
-                      </a:rPr>
-                      <m:t>0</m:t>
-                    </m:r>
-                    <m:r>
-                      <a:rPr lang="fr-FR" b="0" i="1" smtClean="0">
-                        <a:latin typeface="Cambria Math" panose="02040503050406030204" pitchFamily="18" charset="0"/>
-                        <a:sym typeface="Wingdings" panose="05000000000000000000" pitchFamily="2" charset="2"/>
-                      </a:rPr>
-                      <m:t>.</m:t>
-                    </m:r>
-                    <m:r>
-                      <a:rPr lang="fr-FR" b="0" i="1" smtClean="0">
-                        <a:latin typeface="Cambria Math" panose="02040503050406030204" pitchFamily="18" charset="0"/>
-                        <a:sym typeface="Wingdings" panose="05000000000000000000" pitchFamily="2" charset="2"/>
-                      </a:rPr>
-                      <m:t>3</m:t>
+                      <m:t> = 0.3</m:t>
                     </m:r>
                   </m:oMath>
                 </a14:m>
@@ -7969,13 +7913,7 @@
                                 <a:rPr lang="fr-FR" sz="2400" i="1">
                                   <a:latin typeface="Cambria Math" panose="02040503050406030204" pitchFamily="18" charset="0"/>
                                 </a:rPr>
-                                <m:t>=</m:t>
-                              </m:r>
-                              <m:r>
-                                <a:rPr lang="fr-FR" sz="2400" i="1">
-                                  <a:latin typeface="Cambria Math" panose="02040503050406030204" pitchFamily="18" charset="0"/>
-                                </a:rPr>
-                                <m:t>1</m:t>
+                                <m:t>=1</m:t>
                               </m:r>
                             </m:sub>
                             <m:sup>
@@ -8105,31 +8043,7 @@
                         <a:rPr lang="fr-FR" sz="2400" b="0" i="1" smtClean="0">
                           <a:latin typeface="Cambria Math" panose="02040503050406030204" pitchFamily="18" charset="0"/>
                         </a:rPr>
-                        <m:t>= </m:t>
-                      </m:r>
-                      <m:r>
-                        <a:rPr lang="fr-FR" sz="2400" b="0" i="1" smtClean="0">
-                          <a:latin typeface="Cambria Math" panose="02040503050406030204" pitchFamily="18" charset="0"/>
-                        </a:rPr>
-                        <m:t>11</m:t>
-                      </m:r>
-                      <m:r>
-                        <a:rPr lang="fr-FR" sz="2400" b="0" i="1" smtClean="0">
-                          <a:latin typeface="Cambria Math" panose="02040503050406030204" pitchFamily="18" charset="0"/>
-                        </a:rPr>
-                        <m:t>.</m:t>
-                      </m:r>
-                      <m:r>
-                        <a:rPr lang="fr-FR" sz="2400" b="0" i="1" smtClean="0">
-                          <a:latin typeface="Cambria Math" panose="02040503050406030204" pitchFamily="18" charset="0"/>
-                        </a:rPr>
-                        <m:t>8</m:t>
-                      </m:r>
-                      <m:r>
-                        <a:rPr lang="fr-FR" sz="2400" b="0" i="1" smtClean="0">
-                          <a:latin typeface="Cambria Math" panose="02040503050406030204" pitchFamily="18" charset="0"/>
-                        </a:rPr>
-                        <m:t> </m:t>
+                        <m:t>= 11.8 </m:t>
                       </m:r>
                       <m:r>
                         <a:rPr lang="fr-FR" sz="2400" b="0" i="1" smtClean="0">
@@ -8254,19 +8168,7 @@
                       <a:rPr lang="fr-FR" b="0" i="1" smtClean="0">
                         <a:latin typeface="Cambria Math" panose="02040503050406030204" pitchFamily="18" charset="0"/>
                       </a:rPr>
-                      <m:t>=</m:t>
-                    </m:r>
-                    <m:r>
-                      <a:rPr lang="fr-FR" b="0" i="1" smtClean="0">
-                        <a:latin typeface="Cambria Math" panose="02040503050406030204" pitchFamily="18" charset="0"/>
-                      </a:rPr>
-                      <m:t>7850</m:t>
-                    </m:r>
-                    <m:r>
-                      <a:rPr lang="fr-FR" b="0" i="1" smtClean="0">
-                        <a:latin typeface="Cambria Math" panose="02040503050406030204" pitchFamily="18" charset="0"/>
-                      </a:rPr>
-                      <m:t> </m:t>
+                      <m:t>=7850 </m:t>
                     </m:r>
                     <m:r>
                       <a:rPr lang="fr-FR" b="0" i="1" smtClean="0">
@@ -8328,31 +8230,7 @@
                       <a:rPr lang="fr-FR" b="0" i="1" smtClean="0">
                         <a:latin typeface="Cambria Math" panose="02040503050406030204" pitchFamily="18" charset="0"/>
                       </a:rPr>
-                      <m:t>=</m:t>
-                    </m:r>
-                    <m:r>
-                      <a:rPr lang="fr-FR" b="0" i="1" smtClean="0">
-                        <a:latin typeface="Cambria Math" panose="02040503050406030204" pitchFamily="18" charset="0"/>
-                      </a:rPr>
-                      <m:t>0</m:t>
-                    </m:r>
-                    <m:r>
-                      <a:rPr lang="fr-FR" b="0" i="1" smtClean="0">
-                        <a:latin typeface="Cambria Math" panose="02040503050406030204" pitchFamily="18" charset="0"/>
-                      </a:rPr>
-                      <m:t>.</m:t>
-                    </m:r>
-                    <m:r>
-                      <a:rPr lang="fr-FR" b="0" i="1" smtClean="0">
-                        <a:latin typeface="Cambria Math" panose="02040503050406030204" pitchFamily="18" charset="0"/>
-                      </a:rPr>
-                      <m:t>525</m:t>
-                    </m:r>
-                    <m:r>
-                      <a:rPr lang="fr-FR" b="0" i="1" smtClean="0">
-                        <a:latin typeface="Cambria Math" panose="02040503050406030204" pitchFamily="18" charset="0"/>
-                      </a:rPr>
-                      <m:t> </m:t>
+                      <m:t>=0.525 </m:t>
                     </m:r>
                   </m:oMath>
                 </a14:m>
@@ -8374,13 +8252,7 @@
                       <a:rPr lang="fr-FR" b="0" i="1" smtClean="0">
                         <a:latin typeface="Cambria Math" panose="02040503050406030204" pitchFamily="18" charset="0"/>
                       </a:rPr>
-                      <m:t>=</m:t>
-                    </m:r>
-                    <m:r>
-                      <a:rPr lang="fr-FR" b="0" i="1" smtClean="0">
-                        <a:latin typeface="Cambria Math" panose="02040503050406030204" pitchFamily="18" charset="0"/>
-                      </a:rPr>
-                      <m:t>10</m:t>
+                      <m:t>=10</m:t>
                     </m:r>
                     <m:r>
                       <m:rPr>
@@ -8484,31 +8356,7 @@
                       <a:rPr lang="fr-FR" b="0" i="1" smtClean="0">
                         <a:latin typeface="Cambria Math" panose="02040503050406030204" pitchFamily="18" charset="0"/>
                       </a:rPr>
-                      <m:t>=</m:t>
-                    </m:r>
-                    <m:r>
-                      <a:rPr lang="fr-FR" b="0" i="1" smtClean="0">
-                        <a:latin typeface="Cambria Math" panose="02040503050406030204" pitchFamily="18" charset="0"/>
-                      </a:rPr>
-                      <m:t>1118</m:t>
-                    </m:r>
-                    <m:r>
-                      <a:rPr lang="fr-FR" b="0" i="1" smtClean="0">
-                        <a:latin typeface="Cambria Math" panose="02040503050406030204" pitchFamily="18" charset="0"/>
-                      </a:rPr>
-                      <m:t>.</m:t>
-                    </m:r>
-                    <m:r>
-                      <a:rPr lang="fr-FR" b="0" i="1" smtClean="0">
-                        <a:latin typeface="Cambria Math" panose="02040503050406030204" pitchFamily="18" charset="0"/>
-                      </a:rPr>
-                      <m:t>15</m:t>
-                    </m:r>
-                    <m:r>
-                      <a:rPr lang="fr-FR" b="0" i="1" smtClean="0">
-                        <a:latin typeface="Cambria Math" panose="02040503050406030204" pitchFamily="18" charset="0"/>
-                      </a:rPr>
-                      <m:t> </m:t>
+                      <m:t>=1118.15 </m:t>
                     </m:r>
                     <m:r>
                       <m:rPr>
@@ -8558,31 +8406,7 @@
                       <a:rPr lang="fr-FR" b="0" i="1" smtClean="0">
                         <a:latin typeface="Cambria Math" panose="02040503050406030204" pitchFamily="18" charset="0"/>
                       </a:rPr>
-                      <m:t>=</m:t>
-                    </m:r>
-                    <m:r>
-                      <a:rPr lang="fr-FR" b="0" i="1" smtClean="0">
-                        <a:latin typeface="Cambria Math" panose="02040503050406030204" pitchFamily="18" charset="0"/>
-                      </a:rPr>
-                      <m:t>298</m:t>
-                    </m:r>
-                    <m:r>
-                      <a:rPr lang="fr-FR" b="0" i="1" smtClean="0">
-                        <a:latin typeface="Cambria Math" panose="02040503050406030204" pitchFamily="18" charset="0"/>
-                      </a:rPr>
-                      <m:t>.</m:t>
-                    </m:r>
-                    <m:r>
-                      <a:rPr lang="fr-FR" b="0" i="1" smtClean="0">
-                        <a:latin typeface="Cambria Math" panose="02040503050406030204" pitchFamily="18" charset="0"/>
-                      </a:rPr>
-                      <m:t>15</m:t>
-                    </m:r>
-                    <m:r>
-                      <a:rPr lang="fr-FR" b="0" i="1" smtClean="0">
-                        <a:latin typeface="Cambria Math" panose="02040503050406030204" pitchFamily="18" charset="0"/>
-                      </a:rPr>
-                      <m:t> </m:t>
+                      <m:t>=298.15 </m:t>
                     </m:r>
                     <m:r>
                       <m:rPr>
@@ -8619,25 +8443,7 @@
                       <a:rPr lang="fr-FR" b="0" i="1" smtClean="0">
                         <a:latin typeface="Cambria Math" panose="02040503050406030204" pitchFamily="18" charset="0"/>
                       </a:rPr>
-                      <m:t>=</m:t>
-                    </m:r>
-                    <m:r>
-                      <a:rPr lang="fr-FR" b="0" i="1" smtClean="0">
-                        <a:latin typeface="Cambria Math" panose="02040503050406030204" pitchFamily="18" charset="0"/>
-                      </a:rPr>
-                      <m:t>44</m:t>
-                    </m:r>
-                    <m:r>
-                      <a:rPr lang="fr-FR" b="0" i="1" smtClean="0">
-                        <a:latin typeface="Cambria Math" panose="02040503050406030204" pitchFamily="18" charset="0"/>
-                      </a:rPr>
-                      <m:t>.</m:t>
-                    </m:r>
-                    <m:r>
-                      <a:rPr lang="fr-FR" b="0" i="1" smtClean="0">
-                        <a:latin typeface="Cambria Math" panose="02040503050406030204" pitchFamily="18" charset="0"/>
-                      </a:rPr>
-                      <m:t>5</m:t>
+                      <m:t>=44.5</m:t>
                     </m:r>
                     <m:r>
                       <a:rPr lang="fr-FR" b="0" i="1" smtClean="0">
@@ -8844,13 +8650,7 @@
                         <a:rPr lang="fr-FR" b="0" i="1" smtClean="0">
                           <a:latin typeface="Cambria Math" panose="02040503050406030204" pitchFamily="18" charset="0"/>
                         </a:rPr>
-                        <m:t> = </m:t>
-                      </m:r>
-                      <m:r>
-                        <a:rPr lang="fr-FR" b="0" i="1" smtClean="0">
-                          <a:latin typeface="Cambria Math" panose="02040503050406030204" pitchFamily="18" charset="0"/>
-                        </a:rPr>
-                        <m:t>20</m:t>
+                        <m:t> = 20</m:t>
                       </m:r>
                     </m:oMath>
                   </m:oMathPara>
@@ -8880,31 +8680,7 @@
                         <a:rPr lang="fr-FR" b="0" i="1" smtClean="0">
                           <a:latin typeface="Cambria Math" panose="02040503050406030204" pitchFamily="18" charset="0"/>
                         </a:rPr>
-                        <m:t> = </m:t>
-                      </m:r>
-                      <m:r>
-                        <a:rPr lang="fr-FR" b="0" i="1" smtClean="0">
-                          <a:latin typeface="Cambria Math" panose="02040503050406030204" pitchFamily="18" charset="0"/>
-                        </a:rPr>
-                        <m:t>0</m:t>
-                      </m:r>
-                      <m:r>
-                        <a:rPr lang="fr-FR" b="0" i="1" smtClean="0">
-                          <a:latin typeface="Cambria Math" panose="02040503050406030204" pitchFamily="18" charset="0"/>
-                        </a:rPr>
-                        <m:t>.</m:t>
-                      </m:r>
-                      <m:r>
-                        <a:rPr lang="fr-FR" b="0" i="1" smtClean="0">
-                          <a:latin typeface="Cambria Math" panose="02040503050406030204" pitchFamily="18" charset="0"/>
-                        </a:rPr>
-                        <m:t>025</m:t>
-                      </m:r>
-                      <m:r>
-                        <a:rPr lang="fr-FR" b="0" i="1" smtClean="0">
-                          <a:latin typeface="Cambria Math" panose="02040503050406030204" pitchFamily="18" charset="0"/>
-                        </a:rPr>
-                        <m:t> </m:t>
+                        <m:t> = 0.025 </m:t>
                       </m:r>
                       <m:r>
                         <m:rPr>
@@ -8957,31 +8733,7 @@
                         <a:rPr lang="fr-FR" b="0" i="1" smtClean="0">
                           <a:latin typeface="Cambria Math" panose="02040503050406030204" pitchFamily="18" charset="0"/>
                         </a:rPr>
-                        <m:t> =</m:t>
-                      </m:r>
-                      <m:r>
-                        <a:rPr lang="fr-FR" b="0" i="1" smtClean="0">
-                          <a:latin typeface="Cambria Math" panose="02040503050406030204" pitchFamily="18" charset="0"/>
-                        </a:rPr>
-                        <m:t>0</m:t>
-                      </m:r>
-                      <m:r>
-                        <a:rPr lang="fr-FR" b="0" i="1" smtClean="0">
-                          <a:latin typeface="Cambria Math" panose="02040503050406030204" pitchFamily="18" charset="0"/>
-                        </a:rPr>
-                        <m:t>.</m:t>
-                      </m:r>
-                      <m:r>
-                        <a:rPr lang="fr-FR" b="0" i="1" smtClean="0">
-                          <a:latin typeface="Cambria Math" panose="02040503050406030204" pitchFamily="18" charset="0"/>
-                        </a:rPr>
-                        <m:t>6</m:t>
-                      </m:r>
-                      <m:r>
-                        <a:rPr lang="fr-FR" b="0" i="1" smtClean="0">
-                          <a:latin typeface="Cambria Math" panose="02040503050406030204" pitchFamily="18" charset="0"/>
-                        </a:rPr>
-                        <m:t> </m:t>
+                        <m:t> =0.6 </m:t>
                       </m:r>
                       <m:r>
                         <a:rPr lang="fr-FR" b="0" i="1" smtClean="0">
@@ -9023,31 +8775,7 @@
                         <a:rPr lang="fr-FR" b="0" i="1" smtClean="0">
                           <a:latin typeface="Cambria Math" panose="02040503050406030204" pitchFamily="18" charset="0"/>
                         </a:rPr>
-                        <m:t> = </m:t>
-                      </m:r>
-                      <m:r>
-                        <a:rPr lang="fr-FR" b="0" i="1" smtClean="0">
-                          <a:latin typeface="Cambria Math" panose="02040503050406030204" pitchFamily="18" charset="0"/>
-                        </a:rPr>
-                        <m:t>0</m:t>
-                      </m:r>
-                      <m:r>
-                        <a:rPr lang="fr-FR" b="0" i="1" smtClean="0">
-                          <a:latin typeface="Cambria Math" panose="02040503050406030204" pitchFamily="18" charset="0"/>
-                        </a:rPr>
-                        <m:t>.</m:t>
-                      </m:r>
-                      <m:r>
-                        <a:rPr lang="fr-FR" b="0" i="1" smtClean="0">
-                          <a:latin typeface="Cambria Math" panose="02040503050406030204" pitchFamily="18" charset="0"/>
-                        </a:rPr>
-                        <m:t>3</m:t>
-                      </m:r>
-                      <m:r>
-                        <a:rPr lang="fr-FR" b="0" i="1" smtClean="0">
-                          <a:latin typeface="Cambria Math" panose="02040503050406030204" pitchFamily="18" charset="0"/>
-                        </a:rPr>
-                        <m:t> </m:t>
+                        <m:t> = 0.3 </m:t>
                       </m:r>
                       <m:r>
                         <m:rPr>
@@ -9257,6 +8985,1613 @@
       </p:grpSpPr>
       <p:sp>
         <p:nvSpPr>
+          <p:cNvPr id="2" name="Titre 1">
+            <a:extLst>
+              <a:ext uri="{FF2B5EF4-FFF2-40B4-BE49-F238E27FC236}">
+                <a16:creationId xmlns:a16="http://schemas.microsoft.com/office/drawing/2014/main" id="{19FF1174-F757-BC98-CD45-EA7CDE51F475}"/>
+              </a:ext>
+            </a:extLst>
+          </p:cNvPr>
+          <p:cNvSpPr>
+            <a:spLocks noGrp="1"/>
+          </p:cNvSpPr>
+          <p:nvPr>
+            <p:ph type="title"/>
+          </p:nvPr>
+        </p:nvSpPr>
+        <p:spPr/>
+        <p:txBody>
+          <a:bodyPr/>
+          <a:lstStyle/>
+          <a:p>
+            <a:r>
+              <a:rPr lang="fr-FR" dirty="0"/>
+              <a:t>Validation – Incertitude numérique </a:t>
+            </a:r>
+          </a:p>
+        </p:txBody>
+      </p:sp>
+      <mc:AlternateContent xmlns:mc="http://schemas.openxmlformats.org/markup-compatibility/2006" xmlns:a14="http://schemas.microsoft.com/office/drawing/2010/main">
+        <mc:Choice Requires="a14">
+          <p:sp>
+            <p:nvSpPr>
+              <p:cNvPr id="3" name="Espace réservé du contenu 2">
+                <a:extLst>
+                  <a:ext uri="{FF2B5EF4-FFF2-40B4-BE49-F238E27FC236}">
+                    <a16:creationId xmlns:a16="http://schemas.microsoft.com/office/drawing/2014/main" id="{343FA7A9-6CDD-34AF-AA96-4080445750A7}"/>
+                  </a:ext>
+                </a:extLst>
+              </p:cNvPr>
+              <p:cNvSpPr>
+                <a:spLocks noGrp="1"/>
+              </p:cNvSpPr>
+              <p:nvPr>
+                <p:ph idx="1"/>
+              </p:nvPr>
+            </p:nvSpPr>
+            <p:spPr>
+              <a:xfrm>
+                <a:off x="528587" y="1990217"/>
+                <a:ext cx="5858417" cy="4044823"/>
+              </a:xfrm>
+            </p:spPr>
+            <p:txBody>
+              <a:bodyPr>
+                <a:normAutofit fontScale="92500" lnSpcReduction="10000"/>
+              </a:bodyPr>
+              <a:lstStyle/>
+              <a:p>
+                <a:r>
+                  <a:rPr lang="fr-FR" dirty="0"/>
+                  <a:t>Discrétisation selon 3 dimensions </a:t>
+                </a:r>
+              </a:p>
+              <a:p>
+                <a14:m>
+                  <m:oMath xmlns:m="http://schemas.openxmlformats.org/officeDocument/2006/math">
+                    <m:sSub>
+                      <m:sSubPr>
+                        <m:ctrlPr>
+                          <a:rPr lang="fr-FR" i="1">
+                            <a:latin typeface="Cambria Math" panose="02040503050406030204" pitchFamily="18" charset="0"/>
+                          </a:rPr>
+                        </m:ctrlPr>
+                      </m:sSubPr>
+                      <m:e>
+                        <m:r>
+                          <a:rPr lang="fr-FR" i="1">
+                            <a:latin typeface="Cambria Math" panose="02040503050406030204" pitchFamily="18" charset="0"/>
+                          </a:rPr>
+                          <m:t>𝑢</m:t>
+                        </m:r>
+                      </m:e>
+                      <m:sub>
+                        <m:r>
+                          <a:rPr lang="fr-FR" i="1">
+                            <a:latin typeface="Cambria Math" panose="02040503050406030204" pitchFamily="18" charset="0"/>
+                          </a:rPr>
+                          <m:t>𝑛𝑢𝑚</m:t>
+                        </m:r>
+                      </m:sub>
+                    </m:sSub>
+                    <m:r>
+                      <a:rPr lang="fr-FR" i="1">
+                        <a:latin typeface="Cambria Math" panose="02040503050406030204" pitchFamily="18" charset="0"/>
+                      </a:rPr>
+                      <m:t>=</m:t>
+                    </m:r>
+                    <m:rad>
+                      <m:radPr>
+                        <m:degHide m:val="on"/>
+                        <m:ctrlPr>
+                          <a:rPr lang="fr-FR" i="1">
+                            <a:latin typeface="Cambria Math" panose="02040503050406030204" pitchFamily="18" charset="0"/>
+                          </a:rPr>
+                        </m:ctrlPr>
+                      </m:radPr>
+                      <m:deg/>
+                      <m:e>
+                        <m:sSup>
+                          <m:sSupPr>
+                            <m:ctrlPr>
+                              <a:rPr lang="fr-FR" i="1">
+                                <a:latin typeface="Cambria Math" panose="02040503050406030204" pitchFamily="18" charset="0"/>
+                              </a:rPr>
+                            </m:ctrlPr>
+                          </m:sSupPr>
+                          <m:e>
+                            <m:d>
+                              <m:dPr>
+                                <m:ctrlPr>
+                                  <a:rPr lang="fr-FR" i="1">
+                                    <a:latin typeface="Cambria Math" panose="02040503050406030204" pitchFamily="18" charset="0"/>
+                                  </a:rPr>
+                                </m:ctrlPr>
+                              </m:dPr>
+                              <m:e>
+                                <m:f>
+                                  <m:fPr>
+                                    <m:ctrlPr>
+                                      <a:rPr lang="fr-FR" i="1">
+                                        <a:latin typeface="Cambria Math" panose="02040503050406030204" pitchFamily="18" charset="0"/>
+                                      </a:rPr>
+                                    </m:ctrlPr>
+                                  </m:fPr>
+                                  <m:num>
+                                    <m:r>
+                                      <a:rPr lang="fr-FR" i="1">
+                                        <a:latin typeface="Cambria Math" panose="02040503050406030204" pitchFamily="18" charset="0"/>
+                                      </a:rPr>
+                                      <m:t>𝐺𝐶</m:t>
+                                    </m:r>
+                                    <m:sSub>
+                                      <m:sSubPr>
+                                        <m:ctrlPr>
+                                          <a:rPr lang="fr-FR" i="1">
+                                            <a:latin typeface="Cambria Math" panose="02040503050406030204" pitchFamily="18" charset="0"/>
+                                          </a:rPr>
+                                        </m:ctrlPr>
+                                      </m:sSubPr>
+                                      <m:e>
+                                        <m:r>
+                                          <a:rPr lang="fr-FR" i="1">
+                                            <a:latin typeface="Cambria Math" panose="02040503050406030204" pitchFamily="18" charset="0"/>
+                                          </a:rPr>
+                                          <m:t>𝐼</m:t>
+                                        </m:r>
+                                      </m:e>
+                                      <m:sub>
+                                        <m:r>
+                                          <a:rPr lang="fr-FR" i="1">
+                                            <a:latin typeface="Cambria Math" panose="02040503050406030204" pitchFamily="18" charset="0"/>
+                                          </a:rPr>
+                                          <m:t>𝑟</m:t>
+                                        </m:r>
+                                      </m:sub>
+                                    </m:sSub>
+                                  </m:num>
+                                  <m:den>
+                                    <m:r>
+                                      <a:rPr lang="fr-FR" i="1">
+                                        <a:latin typeface="Cambria Math" panose="02040503050406030204" pitchFamily="18" charset="0"/>
+                                      </a:rPr>
+                                      <m:t>2</m:t>
+                                    </m:r>
+                                  </m:den>
+                                </m:f>
+                              </m:e>
+                            </m:d>
+                          </m:e>
+                          <m:sup>
+                            <m:r>
+                              <a:rPr lang="fr-FR" i="1">
+                                <a:latin typeface="Cambria Math" panose="02040503050406030204" pitchFamily="18" charset="0"/>
+                              </a:rPr>
+                              <m:t>2</m:t>
+                            </m:r>
+                          </m:sup>
+                        </m:sSup>
+                        <m:r>
+                          <a:rPr lang="fr-FR" i="1">
+                            <a:latin typeface="Cambria Math" panose="02040503050406030204" pitchFamily="18" charset="0"/>
+                          </a:rPr>
+                          <m:t>+</m:t>
+                        </m:r>
+                        <m:sSup>
+                          <m:sSupPr>
+                            <m:ctrlPr>
+                              <a:rPr lang="fr-FR" i="1">
+                                <a:latin typeface="Cambria Math" panose="02040503050406030204" pitchFamily="18" charset="0"/>
+                              </a:rPr>
+                            </m:ctrlPr>
+                          </m:sSupPr>
+                          <m:e>
+                            <m:d>
+                              <m:dPr>
+                                <m:ctrlPr>
+                                  <a:rPr lang="fr-FR" i="1">
+                                    <a:latin typeface="Cambria Math" panose="02040503050406030204" pitchFamily="18" charset="0"/>
+                                  </a:rPr>
+                                </m:ctrlPr>
+                              </m:dPr>
+                              <m:e>
+                                <m:f>
+                                  <m:fPr>
+                                    <m:ctrlPr>
+                                      <a:rPr lang="fr-FR" i="1">
+                                        <a:latin typeface="Cambria Math" panose="02040503050406030204" pitchFamily="18" charset="0"/>
+                                      </a:rPr>
+                                    </m:ctrlPr>
+                                  </m:fPr>
+                                  <m:num>
+                                    <m:r>
+                                      <a:rPr lang="fr-FR" i="1">
+                                        <a:latin typeface="Cambria Math" panose="02040503050406030204" pitchFamily="18" charset="0"/>
+                                      </a:rPr>
+                                      <m:t>𝐺𝐶</m:t>
+                                    </m:r>
+                                    <m:sSub>
+                                      <m:sSubPr>
+                                        <m:ctrlPr>
+                                          <a:rPr lang="fr-FR" i="1">
+                                            <a:latin typeface="Cambria Math" panose="02040503050406030204" pitchFamily="18" charset="0"/>
+                                          </a:rPr>
+                                        </m:ctrlPr>
+                                      </m:sSubPr>
+                                      <m:e>
+                                        <m:r>
+                                          <a:rPr lang="fr-FR" i="1">
+                                            <a:latin typeface="Cambria Math" panose="02040503050406030204" pitchFamily="18" charset="0"/>
+                                          </a:rPr>
+                                          <m:t>𝐼</m:t>
+                                        </m:r>
+                                      </m:e>
+                                      <m:sub>
+                                        <m:r>
+                                          <a:rPr lang="fr-FR" i="1">
+                                            <a:latin typeface="Cambria Math" panose="02040503050406030204" pitchFamily="18" charset="0"/>
+                                          </a:rPr>
+                                          <m:t>𝑧</m:t>
+                                        </m:r>
+                                      </m:sub>
+                                    </m:sSub>
+                                  </m:num>
+                                  <m:den>
+                                    <m:r>
+                                      <a:rPr lang="fr-FR" i="1">
+                                        <a:latin typeface="Cambria Math" panose="02040503050406030204" pitchFamily="18" charset="0"/>
+                                      </a:rPr>
+                                      <m:t>2</m:t>
+                                    </m:r>
+                                  </m:den>
+                                </m:f>
+                              </m:e>
+                            </m:d>
+                          </m:e>
+                          <m:sup>
+                            <m:r>
+                              <a:rPr lang="fr-FR" i="1">
+                                <a:latin typeface="Cambria Math" panose="02040503050406030204" pitchFamily="18" charset="0"/>
+                              </a:rPr>
+                              <m:t>2</m:t>
+                            </m:r>
+                          </m:sup>
+                        </m:sSup>
+                        <m:r>
+                          <a:rPr lang="fr-FR" i="1">
+                            <a:latin typeface="Cambria Math" panose="02040503050406030204" pitchFamily="18" charset="0"/>
+                          </a:rPr>
+                          <m:t>+</m:t>
+                        </m:r>
+                        <m:sSup>
+                          <m:sSupPr>
+                            <m:ctrlPr>
+                              <a:rPr lang="fr-FR" i="1">
+                                <a:latin typeface="Cambria Math" panose="02040503050406030204" pitchFamily="18" charset="0"/>
+                              </a:rPr>
+                            </m:ctrlPr>
+                          </m:sSupPr>
+                          <m:e>
+                            <m:d>
+                              <m:dPr>
+                                <m:ctrlPr>
+                                  <a:rPr lang="fr-FR" i="1">
+                                    <a:latin typeface="Cambria Math" panose="02040503050406030204" pitchFamily="18" charset="0"/>
+                                  </a:rPr>
+                                </m:ctrlPr>
+                              </m:dPr>
+                              <m:e>
+                                <m:f>
+                                  <m:fPr>
+                                    <m:ctrlPr>
+                                      <a:rPr lang="fr-FR" i="1">
+                                        <a:latin typeface="Cambria Math" panose="02040503050406030204" pitchFamily="18" charset="0"/>
+                                      </a:rPr>
+                                    </m:ctrlPr>
+                                  </m:fPr>
+                                  <m:num>
+                                    <m:r>
+                                      <a:rPr lang="fr-FR" i="1">
+                                        <a:latin typeface="Cambria Math" panose="02040503050406030204" pitchFamily="18" charset="0"/>
+                                      </a:rPr>
+                                      <m:t>𝐺𝐶</m:t>
+                                    </m:r>
+                                    <m:sSub>
+                                      <m:sSubPr>
+                                        <m:ctrlPr>
+                                          <a:rPr lang="fr-FR" i="1">
+                                            <a:latin typeface="Cambria Math" panose="02040503050406030204" pitchFamily="18" charset="0"/>
+                                          </a:rPr>
+                                        </m:ctrlPr>
+                                      </m:sSubPr>
+                                      <m:e>
+                                        <m:r>
+                                          <a:rPr lang="fr-FR" i="1">
+                                            <a:latin typeface="Cambria Math" panose="02040503050406030204" pitchFamily="18" charset="0"/>
+                                          </a:rPr>
+                                          <m:t>𝐼</m:t>
+                                        </m:r>
+                                      </m:e>
+                                      <m:sub>
+                                        <m:r>
+                                          <a:rPr lang="fr-FR" i="1">
+                                            <a:latin typeface="Cambria Math" panose="02040503050406030204" pitchFamily="18" charset="0"/>
+                                          </a:rPr>
+                                          <m:t>𝑡</m:t>
+                                        </m:r>
+                                      </m:sub>
+                                    </m:sSub>
+                                  </m:num>
+                                  <m:den>
+                                    <m:r>
+                                      <a:rPr lang="fr-FR" i="1">
+                                        <a:latin typeface="Cambria Math" panose="02040503050406030204" pitchFamily="18" charset="0"/>
+                                      </a:rPr>
+                                      <m:t>2</m:t>
+                                    </m:r>
+                                  </m:den>
+                                </m:f>
+                              </m:e>
+                            </m:d>
+                          </m:e>
+                          <m:sup>
+                            <m:r>
+                              <a:rPr lang="fr-FR" i="1">
+                                <a:latin typeface="Cambria Math" panose="02040503050406030204" pitchFamily="18" charset="0"/>
+                              </a:rPr>
+                              <m:t>2</m:t>
+                            </m:r>
+                          </m:sup>
+                        </m:sSup>
+                      </m:e>
+                    </m:rad>
+                  </m:oMath>
+                </a14:m>
+                <a:endParaRPr lang="fr-FR" dirty="0"/>
+              </a:p>
+              <a:p>
+                <a14:m>
+                  <m:oMath xmlns:m="http://schemas.openxmlformats.org/officeDocument/2006/math">
+                    <m:r>
+                      <a:rPr lang="fr-FR" i="1">
+                        <a:latin typeface="Cambria Math" panose="02040503050406030204" pitchFamily="18" charset="0"/>
+                      </a:rPr>
+                      <m:t>𝐺𝐶</m:t>
+                    </m:r>
+                    <m:sSub>
+                      <m:sSubPr>
+                        <m:ctrlPr>
+                          <a:rPr lang="fr-FR" i="1">
+                            <a:latin typeface="Cambria Math" panose="02040503050406030204" pitchFamily="18" charset="0"/>
+                          </a:rPr>
+                        </m:ctrlPr>
+                      </m:sSubPr>
+                      <m:e>
+                        <m:r>
+                          <a:rPr lang="fr-FR" i="1">
+                            <a:latin typeface="Cambria Math" panose="02040503050406030204" pitchFamily="18" charset="0"/>
+                          </a:rPr>
+                          <m:t>𝐼</m:t>
+                        </m:r>
+                      </m:e>
+                      <m:sub>
+                        <m:r>
+                          <a:rPr lang="fr-FR" i="1">
+                            <a:latin typeface="Cambria Math" panose="02040503050406030204" pitchFamily="18" charset="0"/>
+                          </a:rPr>
+                          <m:t>𝑥</m:t>
+                        </m:r>
+                      </m:sub>
+                    </m:sSub>
+                    <m:r>
+                      <a:rPr lang="fr-FR" i="1">
+                        <a:latin typeface="Cambria Math" panose="02040503050406030204" pitchFamily="18" charset="0"/>
+                      </a:rPr>
+                      <m:t>=</m:t>
+                    </m:r>
+                    <m:f>
+                      <m:fPr>
+                        <m:ctrlPr>
+                          <a:rPr lang="fr-FR" i="1">
+                            <a:latin typeface="Cambria Math" panose="02040503050406030204" pitchFamily="18" charset="0"/>
+                          </a:rPr>
+                        </m:ctrlPr>
+                      </m:fPr>
+                      <m:num>
+                        <m:sSub>
+                          <m:sSubPr>
+                            <m:ctrlPr>
+                              <a:rPr lang="fr-FR" i="1">
+                                <a:latin typeface="Cambria Math" panose="02040503050406030204" pitchFamily="18" charset="0"/>
+                              </a:rPr>
+                            </m:ctrlPr>
+                          </m:sSubPr>
+                          <m:e>
+                            <m:r>
+                              <a:rPr lang="fr-FR" i="1">
+                                <a:latin typeface="Cambria Math" panose="02040503050406030204" pitchFamily="18" charset="0"/>
+                              </a:rPr>
+                              <m:t>𝐹</m:t>
+                            </m:r>
+                          </m:e>
+                          <m:sub>
+                            <m:r>
+                              <a:rPr lang="fr-FR" i="1">
+                                <a:latin typeface="Cambria Math" panose="02040503050406030204" pitchFamily="18" charset="0"/>
+                              </a:rPr>
+                              <m:t>𝑠</m:t>
+                            </m:r>
+                          </m:sub>
+                        </m:sSub>
+                      </m:num>
+                      <m:den>
+                        <m:sSup>
+                          <m:sSupPr>
+                            <m:ctrlPr>
+                              <a:rPr lang="fr-FR" i="1">
+                                <a:latin typeface="Cambria Math" panose="02040503050406030204" pitchFamily="18" charset="0"/>
+                              </a:rPr>
+                            </m:ctrlPr>
+                          </m:sSupPr>
+                          <m:e>
+                            <m:r>
+                              <a:rPr lang="fr-FR" i="1">
+                                <a:latin typeface="Cambria Math" panose="02040503050406030204" pitchFamily="18" charset="0"/>
+                              </a:rPr>
+                              <m:t>𝑟</m:t>
+                            </m:r>
+                          </m:e>
+                          <m:sup>
+                            <m:r>
+                              <a:rPr lang="fr-FR" i="1">
+                                <a:latin typeface="Cambria Math" panose="02040503050406030204" pitchFamily="18" charset="0"/>
+                              </a:rPr>
+                              <m:t>𝑝</m:t>
+                            </m:r>
+                          </m:sup>
+                        </m:sSup>
+                        <m:r>
+                          <a:rPr lang="fr-FR" i="1">
+                            <a:latin typeface="Cambria Math" panose="02040503050406030204" pitchFamily="18" charset="0"/>
+                          </a:rPr>
+                          <m:t>−</m:t>
+                        </m:r>
+                        <m:r>
+                          <a:rPr lang="fr-FR" i="1">
+                            <a:latin typeface="Cambria Math" panose="02040503050406030204" pitchFamily="18" charset="0"/>
+                          </a:rPr>
+                          <m:t>1</m:t>
+                        </m:r>
+                      </m:den>
+                    </m:f>
+                    <m:d>
+                      <m:dPr>
+                        <m:begChr m:val="|"/>
+                        <m:endChr m:val="|"/>
+                        <m:ctrlPr>
+                          <a:rPr lang="fr-FR" i="1">
+                            <a:latin typeface="Cambria Math" panose="02040503050406030204" pitchFamily="18" charset="0"/>
+                          </a:rPr>
+                        </m:ctrlPr>
+                      </m:dPr>
+                      <m:e>
+                        <m:sSub>
+                          <m:sSubPr>
+                            <m:ctrlPr>
+                              <a:rPr lang="fr-FR" i="1">
+                                <a:latin typeface="Cambria Math" panose="02040503050406030204" pitchFamily="18" charset="0"/>
+                              </a:rPr>
+                            </m:ctrlPr>
+                          </m:sSubPr>
+                          <m:e>
+                            <m:r>
+                              <a:rPr lang="fr-FR" i="1">
+                                <a:latin typeface="Cambria Math" panose="02040503050406030204" pitchFamily="18" charset="0"/>
+                              </a:rPr>
+                              <m:t>𝑓</m:t>
+                            </m:r>
+                          </m:e>
+                          <m:sub>
+                            <m:r>
+                              <a:rPr lang="fr-FR" i="1">
+                                <a:latin typeface="Cambria Math" panose="02040503050406030204" pitchFamily="18" charset="0"/>
+                              </a:rPr>
+                              <m:t>2</m:t>
+                            </m:r>
+                          </m:sub>
+                        </m:sSub>
+                        <m:r>
+                          <a:rPr lang="fr-FR" i="1">
+                            <a:latin typeface="Cambria Math" panose="02040503050406030204" pitchFamily="18" charset="0"/>
+                          </a:rPr>
+                          <m:t>−</m:t>
+                        </m:r>
+                        <m:sSub>
+                          <m:sSubPr>
+                            <m:ctrlPr>
+                              <a:rPr lang="fr-FR" i="1">
+                                <a:latin typeface="Cambria Math" panose="02040503050406030204" pitchFamily="18" charset="0"/>
+                              </a:rPr>
+                            </m:ctrlPr>
+                          </m:sSubPr>
+                          <m:e>
+                            <m:r>
+                              <a:rPr lang="fr-FR" i="1">
+                                <a:latin typeface="Cambria Math" panose="02040503050406030204" pitchFamily="18" charset="0"/>
+                              </a:rPr>
+                              <m:t>𝑓</m:t>
+                            </m:r>
+                          </m:e>
+                          <m:sub>
+                            <m:r>
+                              <a:rPr lang="fr-FR" i="1">
+                                <a:latin typeface="Cambria Math" panose="02040503050406030204" pitchFamily="18" charset="0"/>
+                              </a:rPr>
+                              <m:t>1</m:t>
+                            </m:r>
+                          </m:sub>
+                        </m:sSub>
+                      </m:e>
+                    </m:d>
+                  </m:oMath>
+                </a14:m>
+                <a:endParaRPr lang="fr-FR" dirty="0"/>
+              </a:p>
+              <a:p>
+                <a14:m>
+                  <m:oMath xmlns:m="http://schemas.openxmlformats.org/officeDocument/2006/math">
+                    <m:d>
+                      <m:dPr>
+                        <m:begChr m:val="|"/>
+                        <m:endChr m:val="|"/>
+                        <m:ctrlPr>
+                          <a:rPr lang="fr-FR" i="1">
+                            <a:latin typeface="Cambria Math" panose="02040503050406030204" pitchFamily="18" charset="0"/>
+                          </a:rPr>
+                        </m:ctrlPr>
+                      </m:dPr>
+                      <m:e>
+                        <m:f>
+                          <m:fPr>
+                            <m:ctrlPr>
+                              <a:rPr lang="fr-FR" i="1">
+                                <a:latin typeface="Cambria Math" panose="02040503050406030204" pitchFamily="18" charset="0"/>
+                              </a:rPr>
+                            </m:ctrlPr>
+                          </m:fPr>
+                          <m:num>
+                            <m:acc>
+                              <m:accPr>
+                                <m:chr m:val="̂"/>
+                                <m:ctrlPr>
+                                  <a:rPr lang="fr-FR" i="1">
+                                    <a:latin typeface="Cambria Math" panose="02040503050406030204" pitchFamily="18" charset="0"/>
+                                  </a:rPr>
+                                </m:ctrlPr>
+                              </m:accPr>
+                              <m:e>
+                                <m:r>
+                                  <a:rPr lang="fr-FR" i="1">
+                                    <a:latin typeface="Cambria Math" panose="02040503050406030204" pitchFamily="18" charset="0"/>
+                                  </a:rPr>
+                                  <m:t>𝑝</m:t>
+                                </m:r>
+                              </m:e>
+                            </m:acc>
+                            <m:r>
+                              <a:rPr lang="fr-FR" i="1">
+                                <a:latin typeface="Cambria Math" panose="02040503050406030204" pitchFamily="18" charset="0"/>
+                              </a:rPr>
+                              <m:t>−</m:t>
+                            </m:r>
+                            <m:sSub>
+                              <m:sSubPr>
+                                <m:ctrlPr>
+                                  <a:rPr lang="fr-FR" i="1">
+                                    <a:latin typeface="Cambria Math" panose="02040503050406030204" pitchFamily="18" charset="0"/>
+                                  </a:rPr>
+                                </m:ctrlPr>
+                              </m:sSubPr>
+                              <m:e>
+                                <m:r>
+                                  <a:rPr lang="fr-FR" i="1">
+                                    <a:latin typeface="Cambria Math" panose="02040503050406030204" pitchFamily="18" charset="0"/>
+                                  </a:rPr>
+                                  <m:t>𝑝</m:t>
+                                </m:r>
+                              </m:e>
+                              <m:sub>
+                                <m:r>
+                                  <a:rPr lang="fr-FR" i="1">
+                                    <a:latin typeface="Cambria Math" panose="02040503050406030204" pitchFamily="18" charset="0"/>
+                                  </a:rPr>
+                                  <m:t>𝑓</m:t>
+                                </m:r>
+                              </m:sub>
+                            </m:sSub>
+                          </m:num>
+                          <m:den>
+                            <m:sSub>
+                              <m:sSubPr>
+                                <m:ctrlPr>
+                                  <a:rPr lang="fr-FR" i="1">
+                                    <a:latin typeface="Cambria Math" panose="02040503050406030204" pitchFamily="18" charset="0"/>
+                                  </a:rPr>
+                                </m:ctrlPr>
+                              </m:sSubPr>
+                              <m:e>
+                                <m:r>
+                                  <a:rPr lang="fr-FR" i="1">
+                                    <a:latin typeface="Cambria Math" panose="02040503050406030204" pitchFamily="18" charset="0"/>
+                                  </a:rPr>
+                                  <m:t>𝑝</m:t>
+                                </m:r>
+                              </m:e>
+                              <m:sub>
+                                <m:r>
+                                  <a:rPr lang="fr-FR" i="1">
+                                    <a:latin typeface="Cambria Math" panose="02040503050406030204" pitchFamily="18" charset="0"/>
+                                  </a:rPr>
+                                  <m:t>𝑓</m:t>
+                                </m:r>
+                              </m:sub>
+                            </m:sSub>
+                          </m:den>
+                        </m:f>
+                      </m:e>
+                    </m:d>
+                    <m:r>
+                      <a:rPr lang="fr-FR">
+                        <a:latin typeface="Cambria Math" panose="02040503050406030204" pitchFamily="18" charset="0"/>
+                      </a:rPr>
+                      <m:t>≤</m:t>
+                    </m:r>
+                    <m:r>
+                      <a:rPr lang="fr-FR" i="1">
+                        <a:latin typeface="Cambria Math" panose="02040503050406030204" pitchFamily="18" charset="0"/>
+                      </a:rPr>
+                      <m:t>0</m:t>
+                    </m:r>
+                    <m:r>
+                      <a:rPr lang="fr-FR" i="1">
+                        <a:latin typeface="Cambria Math" panose="02040503050406030204" pitchFamily="18" charset="0"/>
+                      </a:rPr>
+                      <m:t>.</m:t>
+                    </m:r>
+                    <m:r>
+                      <a:rPr lang="fr-FR" i="1">
+                        <a:latin typeface="Cambria Math" panose="02040503050406030204" pitchFamily="18" charset="0"/>
+                      </a:rPr>
+                      <m:t>1</m:t>
+                    </m:r>
+                  </m:oMath>
+                </a14:m>
+                <a:r>
+                  <a:rPr lang="fr-FR" dirty="0"/>
+                  <a:t> </a:t>
+                </a:r>
+                <a:r>
+                  <a:rPr lang="fr-FR" dirty="0">
+                    <a:sym typeface="Wingdings" panose="05000000000000000000" pitchFamily="2" charset="2"/>
+                  </a:rPr>
+                  <a:t> </a:t>
+                </a:r>
+                <a14:m>
+                  <m:oMath xmlns:m="http://schemas.openxmlformats.org/officeDocument/2006/math">
+                    <m:sSub>
+                      <m:sSubPr>
+                        <m:ctrlPr>
+                          <a:rPr lang="fr-FR" i="1">
+                            <a:latin typeface="Cambria Math" panose="02040503050406030204" pitchFamily="18" charset="0"/>
+                          </a:rPr>
+                        </m:ctrlPr>
+                      </m:sSubPr>
+                      <m:e>
+                        <m:r>
+                          <a:rPr lang="fr-FR" i="1">
+                            <a:latin typeface="Cambria Math" panose="02040503050406030204" pitchFamily="18" charset="0"/>
+                          </a:rPr>
+                          <m:t>𝐹</m:t>
+                        </m:r>
+                      </m:e>
+                      <m:sub>
+                        <m:r>
+                          <a:rPr lang="fr-FR" i="1">
+                            <a:latin typeface="Cambria Math" panose="02040503050406030204" pitchFamily="18" charset="0"/>
+                          </a:rPr>
+                          <m:t>𝑠</m:t>
+                        </m:r>
+                      </m:sub>
+                    </m:sSub>
+                    <m:r>
+                      <a:rPr lang="fr-FR" i="1">
+                        <a:latin typeface="Cambria Math" panose="02040503050406030204" pitchFamily="18" charset="0"/>
+                      </a:rPr>
+                      <m:t>=</m:t>
+                    </m:r>
+                    <m:r>
+                      <a:rPr lang="fr-FR" i="1">
+                        <a:latin typeface="Cambria Math" panose="02040503050406030204" pitchFamily="18" charset="0"/>
+                      </a:rPr>
+                      <m:t>1</m:t>
+                    </m:r>
+                    <m:r>
+                      <a:rPr lang="fr-FR" i="1">
+                        <a:latin typeface="Cambria Math" panose="02040503050406030204" pitchFamily="18" charset="0"/>
+                      </a:rPr>
+                      <m:t>.</m:t>
+                    </m:r>
+                    <m:r>
+                      <a:rPr lang="fr-FR" i="1">
+                        <a:latin typeface="Cambria Math" panose="02040503050406030204" pitchFamily="18" charset="0"/>
+                      </a:rPr>
+                      <m:t>25</m:t>
+                    </m:r>
+                  </m:oMath>
+                </a14:m>
+                <a:r>
+                  <a:rPr lang="fr-FR" dirty="0"/>
+                  <a:t> et </a:t>
+                </a:r>
+                <a14:m>
+                  <m:oMath xmlns:m="http://schemas.openxmlformats.org/officeDocument/2006/math">
+                    <m:r>
+                      <a:rPr lang="fr-FR" i="1">
+                        <a:latin typeface="Cambria Math" panose="02040503050406030204" pitchFamily="18" charset="0"/>
+                      </a:rPr>
+                      <m:t>𝑝</m:t>
+                    </m:r>
+                    <m:r>
+                      <a:rPr lang="fr-FR" i="1">
+                        <a:latin typeface="Cambria Math" panose="02040503050406030204" pitchFamily="18" charset="0"/>
+                      </a:rPr>
+                      <m:t>=</m:t>
+                    </m:r>
+                    <m:sSub>
+                      <m:sSubPr>
+                        <m:ctrlPr>
+                          <a:rPr lang="fr-FR" i="1">
+                            <a:latin typeface="Cambria Math" panose="02040503050406030204" pitchFamily="18" charset="0"/>
+                          </a:rPr>
+                        </m:ctrlPr>
+                      </m:sSubPr>
+                      <m:e>
+                        <m:r>
+                          <a:rPr lang="fr-FR" i="1">
+                            <a:latin typeface="Cambria Math" panose="02040503050406030204" pitchFamily="18" charset="0"/>
+                          </a:rPr>
+                          <m:t>𝑝</m:t>
+                        </m:r>
+                      </m:e>
+                      <m:sub>
+                        <m:r>
+                          <a:rPr lang="fr-FR" i="1">
+                            <a:latin typeface="Cambria Math" panose="02040503050406030204" pitchFamily="18" charset="0"/>
+                          </a:rPr>
+                          <m:t>𝑓</m:t>
+                        </m:r>
+                      </m:sub>
+                    </m:sSub>
+                  </m:oMath>
+                </a14:m>
+                <a:endParaRPr lang="fr-FR" dirty="0"/>
+              </a:p>
+              <a:p>
+                <a:r>
+                  <a:rPr lang="fr-FR" dirty="0"/>
+                  <a:t>SRQ : valeurs de température à t=2h</a:t>
+                </a:r>
+              </a:p>
+              <a:p>
+                <a:endParaRPr lang="fr-FR" dirty="0"/>
+              </a:p>
+              <a:p>
+                <a:pPr>
+                  <a:buFont typeface="Wingdings" panose="05000000000000000000" pitchFamily="2" charset="2"/>
+                  <a:buChar char="à"/>
+                </a:pPr>
+                <a14:m>
+                  <m:oMath xmlns:m="http://schemas.openxmlformats.org/officeDocument/2006/math">
+                    <m:sSub>
+                      <m:sSubPr>
+                        <m:ctrlPr>
+                          <a:rPr lang="fr-FR" b="0" i="1" smtClean="0">
+                            <a:latin typeface="Cambria Math" panose="02040503050406030204" pitchFamily="18" charset="0"/>
+                            <a:sym typeface="Wingdings" panose="05000000000000000000" pitchFamily="2" charset="2"/>
+                          </a:rPr>
+                        </m:ctrlPr>
+                      </m:sSubPr>
+                      <m:e>
+                        <m:r>
+                          <a:rPr lang="fr-FR" b="0" i="1" smtClean="0">
+                            <a:latin typeface="Cambria Math" panose="02040503050406030204" pitchFamily="18" charset="0"/>
+                            <a:sym typeface="Wingdings" panose="05000000000000000000" pitchFamily="2" charset="2"/>
+                          </a:rPr>
+                          <m:t> </m:t>
+                        </m:r>
+                        <m:r>
+                          <a:rPr lang="fr-FR" b="0" i="1" smtClean="0">
+                            <a:latin typeface="Cambria Math" panose="02040503050406030204" pitchFamily="18" charset="0"/>
+                            <a:sym typeface="Wingdings" panose="05000000000000000000" pitchFamily="2" charset="2"/>
+                          </a:rPr>
+                          <m:t>𝑢</m:t>
+                        </m:r>
+                      </m:e>
+                      <m:sub>
+                        <m:r>
+                          <a:rPr lang="fr-FR" b="0" i="1" smtClean="0">
+                            <a:latin typeface="Cambria Math" panose="02040503050406030204" pitchFamily="18" charset="0"/>
+                            <a:sym typeface="Wingdings" panose="05000000000000000000" pitchFamily="2" charset="2"/>
+                          </a:rPr>
+                          <m:t>𝑛𝑢𝑚</m:t>
+                        </m:r>
+                      </m:sub>
+                    </m:sSub>
+                    <m:r>
+                      <a:rPr lang="fr-FR" i="1">
+                        <a:latin typeface="Cambria Math" panose="02040503050406030204" pitchFamily="18" charset="0"/>
+                        <a:sym typeface="Wingdings" panose="05000000000000000000" pitchFamily="2" charset="2"/>
+                      </a:rPr>
+                      <m:t>=</m:t>
+                    </m:r>
+                    <m:sSup>
+                      <m:sSupPr>
+                        <m:ctrlPr>
+                          <a:rPr lang="fr-FR" b="0" i="1" smtClean="0">
+                            <a:latin typeface="Cambria Math" panose="02040503050406030204" pitchFamily="18" charset="0"/>
+                            <a:sym typeface="Wingdings" panose="05000000000000000000" pitchFamily="2" charset="2"/>
+                          </a:rPr>
+                        </m:ctrlPr>
+                      </m:sSupPr>
+                      <m:e>
+                        <m:r>
+                          <a:rPr lang="fr-FR" i="1">
+                            <a:latin typeface="Cambria Math" panose="02040503050406030204" pitchFamily="18" charset="0"/>
+                            <a:sym typeface="Wingdings" panose="05000000000000000000" pitchFamily="2" charset="2"/>
+                          </a:rPr>
+                          <m:t>1</m:t>
+                        </m:r>
+                        <m:r>
+                          <a:rPr lang="fr-FR" b="0" i="1" smtClean="0">
+                            <a:latin typeface="Cambria Math" panose="02040503050406030204" pitchFamily="18" charset="0"/>
+                            <a:sym typeface="Wingdings" panose="05000000000000000000" pitchFamily="2" charset="2"/>
+                          </a:rPr>
+                          <m:t>,</m:t>
+                        </m:r>
+                        <m:r>
+                          <a:rPr lang="fr-FR" i="1">
+                            <a:latin typeface="Cambria Math" panose="02040503050406030204" pitchFamily="18" charset="0"/>
+                            <a:sym typeface="Wingdings" panose="05000000000000000000" pitchFamily="2" charset="2"/>
+                          </a:rPr>
+                          <m:t>1097</m:t>
+                        </m:r>
+                        <m:r>
+                          <a:rPr lang="fr-FR" b="0" i="1" smtClean="0">
+                            <a:latin typeface="Cambria Math" panose="02040503050406030204" pitchFamily="18" charset="0"/>
+                            <a:sym typeface="Wingdings" panose="05000000000000000000" pitchFamily="2" charset="2"/>
+                          </a:rPr>
+                          <m:t>.</m:t>
+                        </m:r>
+                        <m:r>
+                          <a:rPr lang="fr-FR" b="0" i="1" smtClean="0">
+                            <a:latin typeface="Cambria Math" panose="02040503050406030204" pitchFamily="18" charset="0"/>
+                            <a:sym typeface="Wingdings" panose="05000000000000000000" pitchFamily="2" charset="2"/>
+                          </a:rPr>
+                          <m:t>10</m:t>
+                        </m:r>
+                      </m:e>
+                      <m:sup>
+                        <m:r>
+                          <a:rPr lang="fr-FR" b="0" i="1" smtClean="0">
+                            <a:latin typeface="Cambria Math" panose="02040503050406030204" pitchFamily="18" charset="0"/>
+                            <a:sym typeface="Wingdings" panose="05000000000000000000" pitchFamily="2" charset="2"/>
+                          </a:rPr>
+                          <m:t>−</m:t>
+                        </m:r>
+                        <m:r>
+                          <a:rPr lang="fr-FR" b="0" i="1" smtClean="0">
+                            <a:latin typeface="Cambria Math" panose="02040503050406030204" pitchFamily="18" charset="0"/>
+                            <a:sym typeface="Wingdings" panose="05000000000000000000" pitchFamily="2" charset="2"/>
+                          </a:rPr>
+                          <m:t>3</m:t>
+                        </m:r>
+                      </m:sup>
+                    </m:sSup>
+                    <m:r>
+                      <a:rPr lang="fr-FR" b="0" i="1" smtClean="0">
+                        <a:latin typeface="Cambria Math" panose="02040503050406030204" pitchFamily="18" charset="0"/>
+                        <a:sym typeface="Wingdings" panose="05000000000000000000" pitchFamily="2" charset="2"/>
+                      </a:rPr>
+                      <m:t>𝐾</m:t>
+                    </m:r>
+                  </m:oMath>
+                </a14:m>
+                <a:endParaRPr lang="fr-FR" b="0" dirty="0">
+                  <a:sym typeface="Wingdings" panose="05000000000000000000" pitchFamily="2" charset="2"/>
+                </a:endParaRPr>
+              </a:p>
+              <a:p>
+                <a:pPr>
+                  <a:buFont typeface="Wingdings" panose="05000000000000000000" pitchFamily="2" charset="2"/>
+                  <a:buChar char="à"/>
+                </a:pPr>
+                <a:endParaRPr lang="fr-FR" b="0" dirty="0">
+                  <a:sym typeface="Wingdings" panose="05000000000000000000" pitchFamily="2" charset="2"/>
+                </a:endParaRPr>
+              </a:p>
+              <a:p>
+                <a:pPr>
+                  <a:buFont typeface="Wingdings" panose="05000000000000000000" pitchFamily="2" charset="2"/>
+                  <a:buChar char="à"/>
+                </a:pPr>
+                <a:endParaRPr lang="fr-FR" dirty="0"/>
+              </a:p>
+              <a:p>
+                <a:pPr marL="0" indent="0">
+                  <a:buNone/>
+                </a:pPr>
+                <a:endParaRPr lang="fr-FR" b="0" i="1" dirty="0">
+                  <a:latin typeface="Cambria Math" panose="02040503050406030204" pitchFamily="18" charset="0"/>
+                </a:endParaRPr>
+              </a:p>
+              <a:p>
+                <a:pPr marL="0" indent="0">
+                  <a:buNone/>
+                </a:pPr>
+                <a:endParaRPr lang="fr-FR" b="0" i="1" dirty="0">
+                  <a:latin typeface="Cambria Math" panose="02040503050406030204" pitchFamily="18" charset="0"/>
+                </a:endParaRPr>
+              </a:p>
+              <a:p>
+                <a:pPr marL="0" indent="0">
+                  <a:buNone/>
+                </a:pPr>
+                <a:endParaRPr lang="fr-FR" i="1" dirty="0">
+                  <a:latin typeface="Cambria Math" panose="02040503050406030204" pitchFamily="18" charset="0"/>
+                </a:endParaRPr>
+              </a:p>
+            </p:txBody>
+          </p:sp>
+        </mc:Choice>
+        <mc:Fallback xmlns="">
+          <p:sp>
+            <p:nvSpPr>
+              <p:cNvPr id="3" name="Espace réservé du contenu 2">
+                <a:extLst>
+                  <a:ext uri="{FF2B5EF4-FFF2-40B4-BE49-F238E27FC236}">
+                    <a16:creationId xmlns:a16="http://schemas.microsoft.com/office/drawing/2014/main" id="{343FA7A9-6CDD-34AF-AA96-4080445750A7}"/>
+                  </a:ext>
+                </a:extLst>
+              </p:cNvPr>
+              <p:cNvSpPr>
+                <a:spLocks noGrp="1" noRot="1" noChangeAspect="1" noMove="1" noResize="1" noEditPoints="1" noAdjustHandles="1" noChangeArrowheads="1" noChangeShapeType="1" noTextEdit="1"/>
+              </p:cNvSpPr>
+              <p:nvPr>
+                <p:ph idx="1"/>
+              </p:nvPr>
+            </p:nvSpPr>
+            <p:spPr>
+              <a:xfrm>
+                <a:off x="528587" y="1990217"/>
+                <a:ext cx="5858417" cy="4044823"/>
+              </a:xfrm>
+              <a:blipFill>
+                <a:blip r:embed="rId2"/>
+                <a:stretch>
+                  <a:fillRect l="-1665" t="-3012"/>
+                </a:stretch>
+              </a:blipFill>
+            </p:spPr>
+            <p:txBody>
+              <a:bodyPr/>
+              <a:lstStyle/>
+              <a:p>
+                <a:r>
+                  <a:rPr lang="fr-FR">
+                    <a:noFill/>
+                  </a:rPr>
+                  <a:t> </a:t>
+                </a:r>
+              </a:p>
+            </p:txBody>
+          </p:sp>
+        </mc:Fallback>
+      </mc:AlternateContent>
+      <p:pic>
+        <p:nvPicPr>
+          <p:cNvPr id="5" name="Image 4">
+            <a:extLst>
+              <a:ext uri="{FF2B5EF4-FFF2-40B4-BE49-F238E27FC236}">
+                <a16:creationId xmlns:a16="http://schemas.microsoft.com/office/drawing/2014/main" id="{873271AC-9B6F-EBC6-6CB6-88C22C841703}"/>
+              </a:ext>
+            </a:extLst>
+          </p:cNvPr>
+          <p:cNvPicPr>
+            <a:picLocks noChangeAspect="1"/>
+          </p:cNvPicPr>
+          <p:nvPr/>
+        </p:nvPicPr>
+        <p:blipFill>
+          <a:blip r:embed="rId3"/>
+          <a:stretch>
+            <a:fillRect/>
+          </a:stretch>
+        </p:blipFill>
+        <p:spPr>
+          <a:xfrm>
+            <a:off x="7013447" y="2068513"/>
+            <a:ext cx="4649965" cy="1611563"/>
+          </a:xfrm>
+          <a:prstGeom prst="rect">
+            <a:avLst/>
+          </a:prstGeom>
+        </p:spPr>
+      </p:pic>
+      <mc:AlternateContent xmlns:mc="http://schemas.openxmlformats.org/markup-compatibility/2006" xmlns:a14="http://schemas.microsoft.com/office/drawing/2010/main">
+        <mc:Choice Requires="a14">
+          <p:graphicFrame>
+            <p:nvGraphicFramePr>
+              <p:cNvPr id="4" name="Tableau 3">
+                <a:extLst>
+                  <a:ext uri="{FF2B5EF4-FFF2-40B4-BE49-F238E27FC236}">
+                    <a16:creationId xmlns:a16="http://schemas.microsoft.com/office/drawing/2014/main" id="{0F466935-667E-0FF9-8028-45C7C5445289}"/>
+                  </a:ext>
+                </a:extLst>
+              </p:cNvPr>
+              <p:cNvGraphicFramePr>
+                <a:graphicFrameLocks noGrp="1"/>
+              </p:cNvGraphicFramePr>
+              <p:nvPr/>
+            </p:nvGraphicFramePr>
+            <p:xfrm>
+              <a:off x="7013448" y="4057902"/>
+              <a:ext cx="4649965" cy="1529080"/>
+            </p:xfrm>
+            <a:graphic>
+              <a:graphicData uri="http://schemas.openxmlformats.org/drawingml/2006/table">
+                <a:tbl>
+                  <a:tblPr firstRow="1" bandRow="1">
+                    <a:tableStyleId>{5C22544A-7EE6-4342-B048-85BDC9FD1C3A}</a:tableStyleId>
+                  </a:tblPr>
+                  <a:tblGrid>
+                    <a:gridCol w="1757285">
+                      <a:extLst>
+                        <a:ext uri="{9D8B030D-6E8A-4147-A177-3AD203B41FA5}">
+                          <a16:colId xmlns:a16="http://schemas.microsoft.com/office/drawing/2014/main" val="2504244554"/>
+                        </a:ext>
+                      </a:extLst>
+                    </a:gridCol>
+                    <a:gridCol w="2892680">
+                      <a:extLst>
+                        <a:ext uri="{9D8B030D-6E8A-4147-A177-3AD203B41FA5}">
+                          <a16:colId xmlns:a16="http://schemas.microsoft.com/office/drawing/2014/main" val="1599906085"/>
+                        </a:ext>
+                      </a:extLst>
+                    </a:gridCol>
+                  </a:tblGrid>
+                  <a:tr h="382270">
+                    <a:tc>
+                      <a:txBody>
+                        <a:bodyPr/>
+                        <a:lstStyle/>
+                        <a:p>
+                          <a:pPr algn="ctr"/>
+                          <a:r>
+                            <a:rPr lang="fr-FR" dirty="0"/>
+                            <a:t>Dimension</a:t>
+                          </a:r>
+                        </a:p>
+                      </a:txBody>
+                      <a:tcPr/>
+                    </a:tc>
+                    <a:tc>
+                      <a:txBody>
+                        <a:bodyPr/>
+                        <a:lstStyle/>
+                        <a:p>
+                          <a:pPr algn="ctr"/>
+                          <a:r>
+                            <a:rPr lang="fr-FR" dirty="0"/>
+                            <a:t>GCI</a:t>
+                          </a:r>
+                        </a:p>
+                      </a:txBody>
+                      <a:tcPr/>
+                    </a:tc>
+                    <a:extLst>
+                      <a:ext uri="{0D108BD9-81ED-4DB2-BD59-A6C34878D82A}">
+                        <a16:rowId xmlns:a16="http://schemas.microsoft.com/office/drawing/2014/main" val="861847506"/>
+                      </a:ext>
+                    </a:extLst>
+                  </a:tr>
+                  <a:tr h="382270">
+                    <a:tc>
+                      <a:txBody>
+                        <a:bodyPr/>
+                        <a:lstStyle/>
+                        <a:p>
+                          <a:pPr algn="ctr"/>
+                          <a:r>
+                            <a:rPr lang="fr-FR" dirty="0"/>
+                            <a:t>R</a:t>
+                          </a:r>
+                        </a:p>
+                      </a:txBody>
+                      <a:tcPr/>
+                    </a:tc>
+                    <a:tc>
+                      <a:txBody>
+                        <a:bodyPr/>
+                        <a:lstStyle/>
+                        <a:p>
+                          <a:pPr algn="ctr"/>
+                          <a:r>
+                            <a:rPr lang="fr-FR" dirty="0"/>
+                            <a:t>4,9684</a:t>
+                          </a:r>
+                          <a14:m>
+                            <m:oMath xmlns:m="http://schemas.openxmlformats.org/officeDocument/2006/math">
+                              <m:sSup>
+                                <m:sSupPr>
+                                  <m:ctrlPr>
+                                    <a:rPr lang="fr-FR" b="0" i="1" smtClean="0">
+                                      <a:latin typeface="Cambria Math" panose="02040503050406030204" pitchFamily="18" charset="0"/>
+                                    </a:rPr>
+                                  </m:ctrlPr>
+                                </m:sSupPr>
+                                <m:e>
+                                  <m:r>
+                                    <a:rPr lang="fr-FR" dirty="0" smtClean="0">
+                                      <a:latin typeface="Cambria Math" panose="02040503050406030204" pitchFamily="18" charset="0"/>
+                                    </a:rPr>
+                                    <m:t>.</m:t>
+                                  </m:r>
+                                  <m:r>
+                                    <a:rPr lang="fr-FR" b="0" i="1" smtClean="0">
+                                      <a:latin typeface="Cambria Math" panose="02040503050406030204" pitchFamily="18" charset="0"/>
+                                    </a:rPr>
+                                    <m:t>10</m:t>
+                                  </m:r>
+                                </m:e>
+                                <m:sup>
+                                  <m:r>
+                                    <a:rPr lang="fr-FR" b="0" i="1" smtClean="0">
+                                      <a:latin typeface="Cambria Math" panose="02040503050406030204" pitchFamily="18" charset="0"/>
+                                    </a:rPr>
+                                    <m:t>−</m:t>
+                                  </m:r>
+                                  <m:r>
+                                    <a:rPr lang="fr-FR" b="0" i="1" smtClean="0">
+                                      <a:latin typeface="Cambria Math" panose="02040503050406030204" pitchFamily="18" charset="0"/>
+                                    </a:rPr>
+                                    <m:t>4</m:t>
+                                  </m:r>
+                                </m:sup>
+                              </m:sSup>
+                              <m:r>
+                                <a:rPr lang="fr-FR" b="0" i="1" smtClean="0">
+                                  <a:latin typeface="Cambria Math" panose="02040503050406030204" pitchFamily="18" charset="0"/>
+                                </a:rPr>
+                                <m:t>𝐾</m:t>
+                              </m:r>
+                            </m:oMath>
+                          </a14:m>
+                          <a:endParaRPr lang="fr-FR" b="0" dirty="0"/>
+                        </a:p>
+                      </a:txBody>
+                      <a:tcPr/>
+                    </a:tc>
+                    <a:extLst>
+                      <a:ext uri="{0D108BD9-81ED-4DB2-BD59-A6C34878D82A}">
+                        <a16:rowId xmlns:a16="http://schemas.microsoft.com/office/drawing/2014/main" val="192151411"/>
+                      </a:ext>
+                    </a:extLst>
+                  </a:tr>
+                  <a:tr h="382270">
+                    <a:tc>
+                      <a:txBody>
+                        <a:bodyPr/>
+                        <a:lstStyle/>
+                        <a:p>
+                          <a:pPr algn="ctr"/>
+                          <a:r>
+                            <a:rPr lang="fr-FR" dirty="0"/>
+                            <a:t>z</a:t>
+                          </a:r>
+                        </a:p>
+                      </a:txBody>
+                      <a:tcPr/>
+                    </a:tc>
+                    <a:tc>
+                      <a:txBody>
+                        <a:bodyPr/>
+                        <a:lstStyle/>
+                        <a:p>
+                          <a:pPr algn="ctr"/>
+                          <a:r>
+                            <a:rPr lang="fr-FR" dirty="0"/>
+                            <a:t>7,8557</a:t>
+                          </a:r>
+                          <a14:m>
+                            <m:oMath xmlns:m="http://schemas.openxmlformats.org/officeDocument/2006/math">
+                              <m:sSup>
+                                <m:sSupPr>
+                                  <m:ctrlPr>
+                                    <a:rPr lang="fr-FR" b="0" i="1" smtClean="0">
+                                      <a:latin typeface="Cambria Math" panose="02040503050406030204" pitchFamily="18" charset="0"/>
+                                    </a:rPr>
+                                  </m:ctrlPr>
+                                </m:sSupPr>
+                                <m:e>
+                                  <m:r>
+                                    <a:rPr lang="fr-FR" dirty="0" smtClean="0">
+                                      <a:latin typeface="Cambria Math" panose="02040503050406030204" pitchFamily="18" charset="0"/>
+                                    </a:rPr>
+                                    <m:t>.</m:t>
+                                  </m:r>
+                                  <m:r>
+                                    <a:rPr lang="fr-FR" b="0" i="1" smtClean="0">
+                                      <a:latin typeface="Cambria Math" panose="02040503050406030204" pitchFamily="18" charset="0"/>
+                                    </a:rPr>
+                                    <m:t>10</m:t>
+                                  </m:r>
+                                </m:e>
+                                <m:sup>
+                                  <m:r>
+                                    <a:rPr lang="fr-FR" b="0" i="1" smtClean="0">
+                                      <a:latin typeface="Cambria Math" panose="02040503050406030204" pitchFamily="18" charset="0"/>
+                                    </a:rPr>
+                                    <m:t>−</m:t>
+                                  </m:r>
+                                  <m:r>
+                                    <a:rPr lang="fr-FR" b="0" i="1" smtClean="0">
+                                      <a:latin typeface="Cambria Math" panose="02040503050406030204" pitchFamily="18" charset="0"/>
+                                    </a:rPr>
+                                    <m:t>4</m:t>
+                                  </m:r>
+                                </m:sup>
+                              </m:sSup>
+                              <m:r>
+                                <a:rPr lang="fr-FR" b="0" i="1" smtClean="0">
+                                  <a:latin typeface="Cambria Math" panose="02040503050406030204" pitchFamily="18" charset="0"/>
+                                </a:rPr>
+                                <m:t>𝐾</m:t>
+                              </m:r>
+                            </m:oMath>
+                          </a14:m>
+                          <a:endParaRPr lang="fr-FR" dirty="0"/>
+                        </a:p>
+                      </a:txBody>
+                      <a:tcPr/>
+                    </a:tc>
+                    <a:extLst>
+                      <a:ext uri="{0D108BD9-81ED-4DB2-BD59-A6C34878D82A}">
+                        <a16:rowId xmlns:a16="http://schemas.microsoft.com/office/drawing/2014/main" val="212332539"/>
+                      </a:ext>
+                    </a:extLst>
+                  </a:tr>
+                  <a:tr h="382270">
+                    <a:tc>
+                      <a:txBody>
+                        <a:bodyPr/>
+                        <a:lstStyle/>
+                        <a:p>
+                          <a:pPr algn="ctr"/>
+                          <a:r>
+                            <a:rPr lang="fr-FR" dirty="0"/>
+                            <a:t>t</a:t>
+                          </a:r>
+                        </a:p>
+                      </a:txBody>
+                      <a:tcPr/>
+                    </a:tc>
+                    <a:tc>
+                      <a:txBody>
+                        <a:bodyPr/>
+                        <a:lstStyle/>
+                        <a:p>
+                          <a:pPr algn="ctr"/>
+                          <a:r>
+                            <a:rPr lang="fr-FR" dirty="0"/>
+                            <a:t>2,0155</a:t>
+                          </a:r>
+                          <a14:m>
+                            <m:oMath xmlns:m="http://schemas.openxmlformats.org/officeDocument/2006/math">
+                              <m:sSup>
+                                <m:sSupPr>
+                                  <m:ctrlPr>
+                                    <a:rPr lang="fr-FR" b="0" i="1" smtClean="0">
+                                      <a:latin typeface="Cambria Math" panose="02040503050406030204" pitchFamily="18" charset="0"/>
+                                    </a:rPr>
+                                  </m:ctrlPr>
+                                </m:sSupPr>
+                                <m:e>
+                                  <m:r>
+                                    <a:rPr lang="fr-FR" dirty="0" smtClean="0">
+                                      <a:latin typeface="Cambria Math" panose="02040503050406030204" pitchFamily="18" charset="0"/>
+                                    </a:rPr>
+                                    <m:t>.</m:t>
+                                  </m:r>
+                                  <m:r>
+                                    <a:rPr lang="fr-FR" b="0" i="1" smtClean="0">
+                                      <a:latin typeface="Cambria Math" panose="02040503050406030204" pitchFamily="18" charset="0"/>
+                                    </a:rPr>
+                                    <m:t>10</m:t>
+                                  </m:r>
+                                </m:e>
+                                <m:sup>
+                                  <m:r>
+                                    <a:rPr lang="fr-FR" b="0" i="1" smtClean="0">
+                                      <a:latin typeface="Cambria Math" panose="02040503050406030204" pitchFamily="18" charset="0"/>
+                                    </a:rPr>
+                                    <m:t>−</m:t>
+                                  </m:r>
+                                  <m:r>
+                                    <a:rPr lang="fr-FR" b="0" i="1" smtClean="0">
+                                      <a:latin typeface="Cambria Math" panose="02040503050406030204" pitchFamily="18" charset="0"/>
+                                    </a:rPr>
+                                    <m:t>3</m:t>
+                                  </m:r>
+                                </m:sup>
+                              </m:sSup>
+                              <m:r>
+                                <a:rPr lang="fr-FR" b="0" i="1" smtClean="0">
+                                  <a:latin typeface="Cambria Math" panose="02040503050406030204" pitchFamily="18" charset="0"/>
+                                </a:rPr>
+                                <m:t>𝐾</m:t>
+                              </m:r>
+                            </m:oMath>
+                          </a14:m>
+                          <a:endParaRPr lang="fr-FR" dirty="0"/>
+                        </a:p>
+                      </a:txBody>
+                      <a:tcPr/>
+                    </a:tc>
+                    <a:extLst>
+                      <a:ext uri="{0D108BD9-81ED-4DB2-BD59-A6C34878D82A}">
+                        <a16:rowId xmlns:a16="http://schemas.microsoft.com/office/drawing/2014/main" val="3641218454"/>
+                      </a:ext>
+                    </a:extLst>
+                  </a:tr>
+                </a:tbl>
+              </a:graphicData>
+            </a:graphic>
+          </p:graphicFrame>
+        </mc:Choice>
+        <mc:Fallback xmlns="">
+          <p:graphicFrame>
+            <p:nvGraphicFramePr>
+              <p:cNvPr id="4" name="Tableau 3">
+                <a:extLst>
+                  <a:ext uri="{FF2B5EF4-FFF2-40B4-BE49-F238E27FC236}">
+                    <a16:creationId xmlns:a16="http://schemas.microsoft.com/office/drawing/2014/main" id="{0F466935-667E-0FF9-8028-45C7C5445289}"/>
+                  </a:ext>
+                </a:extLst>
+              </p:cNvPr>
+              <p:cNvGraphicFramePr>
+                <a:graphicFrameLocks noGrp="1"/>
+              </p:cNvGraphicFramePr>
+              <p:nvPr>
+                <p:extLst>
+                  <p:ext uri="{D42A27DB-BD31-4B8C-83A1-F6EECF244321}">
+                    <p14:modId xmlns:p14="http://schemas.microsoft.com/office/powerpoint/2010/main" val="2481105640"/>
+                  </p:ext>
+                </p:extLst>
+              </p:nvPr>
+            </p:nvGraphicFramePr>
+            <p:xfrm>
+              <a:off x="7013448" y="4057902"/>
+              <a:ext cx="4649965" cy="1529080"/>
+            </p:xfrm>
+            <a:graphic>
+              <a:graphicData uri="http://schemas.openxmlformats.org/drawingml/2006/table">
+                <a:tbl>
+                  <a:tblPr firstRow="1" bandRow="1">
+                    <a:tableStyleId>{5C22544A-7EE6-4342-B048-85BDC9FD1C3A}</a:tableStyleId>
+                  </a:tblPr>
+                  <a:tblGrid>
+                    <a:gridCol w="1757285">
+                      <a:extLst>
+                        <a:ext uri="{9D8B030D-6E8A-4147-A177-3AD203B41FA5}">
+                          <a16:colId xmlns:a16="http://schemas.microsoft.com/office/drawing/2014/main" val="2504244554"/>
+                        </a:ext>
+                      </a:extLst>
+                    </a:gridCol>
+                    <a:gridCol w="2892680">
+                      <a:extLst>
+                        <a:ext uri="{9D8B030D-6E8A-4147-A177-3AD203B41FA5}">
+                          <a16:colId xmlns:a16="http://schemas.microsoft.com/office/drawing/2014/main" val="1599906085"/>
+                        </a:ext>
+                      </a:extLst>
+                    </a:gridCol>
+                  </a:tblGrid>
+                  <a:tr h="382270">
+                    <a:tc>
+                      <a:txBody>
+                        <a:bodyPr/>
+                        <a:lstStyle/>
+                        <a:p>
+                          <a:pPr algn="ctr"/>
+                          <a:r>
+                            <a:rPr lang="fr-FR" dirty="0"/>
+                            <a:t>Dimension</a:t>
+                          </a:r>
+                        </a:p>
+                      </a:txBody>
+                      <a:tcPr/>
+                    </a:tc>
+                    <a:tc>
+                      <a:txBody>
+                        <a:bodyPr/>
+                        <a:lstStyle/>
+                        <a:p>
+                          <a:pPr algn="ctr"/>
+                          <a:r>
+                            <a:rPr lang="fr-FR" dirty="0"/>
+                            <a:t>GCI</a:t>
+                          </a:r>
+                        </a:p>
+                      </a:txBody>
+                      <a:tcPr/>
+                    </a:tc>
+                    <a:extLst>
+                      <a:ext uri="{0D108BD9-81ED-4DB2-BD59-A6C34878D82A}">
+                        <a16:rowId xmlns:a16="http://schemas.microsoft.com/office/drawing/2014/main" val="861847506"/>
+                      </a:ext>
+                    </a:extLst>
+                  </a:tr>
+                  <a:tr h="382270">
+                    <a:tc>
+                      <a:txBody>
+                        <a:bodyPr/>
+                        <a:lstStyle/>
+                        <a:p>
+                          <a:pPr algn="ctr"/>
+                          <a:r>
+                            <a:rPr lang="fr-FR" dirty="0"/>
+                            <a:t>R</a:t>
+                          </a:r>
+                        </a:p>
+                      </a:txBody>
+                      <a:tcPr/>
+                    </a:tc>
+                    <a:tc>
+                      <a:txBody>
+                        <a:bodyPr/>
+                        <a:lstStyle/>
+                        <a:p>
+                          <a:endParaRPr lang="fr-FR"/>
+                        </a:p>
+                      </a:txBody>
+                      <a:tcPr>
+                        <a:blipFill>
+                          <a:blip r:embed="rId4"/>
+                          <a:stretch>
+                            <a:fillRect l="-61053" t="-106349" r="-842" b="-222222"/>
+                          </a:stretch>
+                        </a:blipFill>
+                      </a:tcPr>
+                    </a:tc>
+                    <a:extLst>
+                      <a:ext uri="{0D108BD9-81ED-4DB2-BD59-A6C34878D82A}">
+                        <a16:rowId xmlns:a16="http://schemas.microsoft.com/office/drawing/2014/main" val="192151411"/>
+                      </a:ext>
+                    </a:extLst>
+                  </a:tr>
+                  <a:tr h="382270">
+                    <a:tc>
+                      <a:txBody>
+                        <a:bodyPr/>
+                        <a:lstStyle/>
+                        <a:p>
+                          <a:pPr algn="ctr"/>
+                          <a:r>
+                            <a:rPr lang="fr-FR" dirty="0"/>
+                            <a:t>z</a:t>
+                          </a:r>
+                        </a:p>
+                      </a:txBody>
+                      <a:tcPr/>
+                    </a:tc>
+                    <a:tc>
+                      <a:txBody>
+                        <a:bodyPr/>
+                        <a:lstStyle/>
+                        <a:p>
+                          <a:endParaRPr lang="fr-FR"/>
+                        </a:p>
+                      </a:txBody>
+                      <a:tcPr>
+                        <a:blipFill>
+                          <a:blip r:embed="rId4"/>
+                          <a:stretch>
+                            <a:fillRect l="-61053" t="-206349" r="-842" b="-122222"/>
+                          </a:stretch>
+                        </a:blipFill>
+                      </a:tcPr>
+                    </a:tc>
+                    <a:extLst>
+                      <a:ext uri="{0D108BD9-81ED-4DB2-BD59-A6C34878D82A}">
+                        <a16:rowId xmlns:a16="http://schemas.microsoft.com/office/drawing/2014/main" val="212332539"/>
+                      </a:ext>
+                    </a:extLst>
+                  </a:tr>
+                  <a:tr h="382270">
+                    <a:tc>
+                      <a:txBody>
+                        <a:bodyPr/>
+                        <a:lstStyle/>
+                        <a:p>
+                          <a:pPr algn="ctr"/>
+                          <a:r>
+                            <a:rPr lang="fr-FR" dirty="0"/>
+                            <a:t>t</a:t>
+                          </a:r>
+                        </a:p>
+                      </a:txBody>
+                      <a:tcPr/>
+                    </a:tc>
+                    <a:tc>
+                      <a:txBody>
+                        <a:bodyPr/>
+                        <a:lstStyle/>
+                        <a:p>
+                          <a:endParaRPr lang="fr-FR"/>
+                        </a:p>
+                      </a:txBody>
+                      <a:tcPr>
+                        <a:blipFill>
+                          <a:blip r:embed="rId4"/>
+                          <a:stretch>
+                            <a:fillRect l="-61053" t="-306349" r="-842" b="-22222"/>
+                          </a:stretch>
+                        </a:blipFill>
+                      </a:tcPr>
+                    </a:tc>
+                    <a:extLst>
+                      <a:ext uri="{0D108BD9-81ED-4DB2-BD59-A6C34878D82A}">
+                        <a16:rowId xmlns:a16="http://schemas.microsoft.com/office/drawing/2014/main" val="3641218454"/>
+                      </a:ext>
+                    </a:extLst>
+                  </a:tr>
+                </a:tbl>
+              </a:graphicData>
+            </a:graphic>
+          </p:graphicFrame>
+        </mc:Fallback>
+      </mc:AlternateContent>
+    </p:spTree>
+    <p:extLst>
+      <p:ext uri="{BB962C8B-B14F-4D97-AF65-F5344CB8AC3E}">
+        <p14:creationId xmlns:p14="http://schemas.microsoft.com/office/powerpoint/2010/main" val="809223639"/>
+      </p:ext>
+    </p:extLst>
+  </p:cSld>
+  <p:clrMapOvr>
+    <a:masterClrMapping/>
+  </p:clrMapOvr>
+</p:sld>
+</file>
+
+<file path=ppt/slides/slide19.xml><?xml version="1.0" encoding="utf-8"?>
+<p:sld xmlns:a="http://schemas.openxmlformats.org/drawingml/2006/main" xmlns:r="http://schemas.openxmlformats.org/officeDocument/2006/relationships" xmlns:p="http://schemas.openxmlformats.org/presentationml/2006/main">
+  <p:cSld>
+    <p:spTree>
+      <p:nvGrpSpPr>
+        <p:cNvPr id="1" name=""/>
+        <p:cNvGrpSpPr/>
+        <p:nvPr/>
+      </p:nvGrpSpPr>
+      <p:grpSpPr>
+        <a:xfrm>
+          <a:off x="0" y="0"/>
+          <a:ext cx="0" cy="0"/>
+          <a:chOff x="0" y="0"/>
+          <a:chExt cx="0" cy="0"/>
+        </a:xfrm>
+      </p:grpSpPr>
+      <p:sp>
+        <p:nvSpPr>
           <p:cNvPr id="2" name="Title 1">
             <a:extLst>
               <a:ext uri="{FF2B5EF4-FFF2-40B4-BE49-F238E27FC236}">
@@ -9284,8 +10619,8 @@
           </a:p>
         </p:txBody>
       </p:sp>
-      <mc:AlternateContent xmlns:mc="http://schemas.openxmlformats.org/markup-compatibility/2006">
-        <mc:Choice xmlns:a14="http://schemas.microsoft.com/office/drawing/2010/main" Requires="a14">
+      <mc:AlternateContent xmlns:mc="http://schemas.openxmlformats.org/markup-compatibility/2006" xmlns:a14="http://schemas.microsoft.com/office/drawing/2010/main">
+        <mc:Choice Requires="a14">
           <p:sp>
             <p:nvSpPr>
               <p:cNvPr id="3" name="Content Placeholder 2">
@@ -9365,19 +10700,7 @@
                           <a:rPr lang="fr-FR" b="0" i="1" smtClean="0">
                             <a:latin typeface="Cambria Math" panose="02040503050406030204" pitchFamily="18" charset="0"/>
                           </a:rPr>
-                          <m:t>1</m:t>
-                        </m:r>
-                        <m:r>
-                          <a:rPr lang="fr-FR" b="0" i="1" smtClean="0">
-                            <a:latin typeface="Cambria Math" panose="02040503050406030204" pitchFamily="18" charset="0"/>
-                          </a:rPr>
-                          <m:t>.</m:t>
-                        </m:r>
-                        <m:r>
-                          <a:rPr lang="fr-FR" b="0" i="1" smtClean="0">
-                            <a:latin typeface="Cambria Math" panose="02040503050406030204" pitchFamily="18" charset="0"/>
-                          </a:rPr>
-                          <m:t>5</m:t>
+                          <m:t>1.5</m:t>
                         </m:r>
                       </m:num>
                       <m:den>
@@ -9406,31 +10729,7 @@
                       <a:rPr lang="fr-FR" b="0" i="1" smtClean="0">
                         <a:latin typeface="Cambria Math" panose="02040503050406030204" pitchFamily="18" charset="0"/>
                       </a:rPr>
-                      <m:t> = </m:t>
-                    </m:r>
-                    <m:r>
-                      <a:rPr lang="fr-FR" b="0" i="1" smtClean="0">
-                        <a:latin typeface="Cambria Math" panose="02040503050406030204" pitchFamily="18" charset="0"/>
-                      </a:rPr>
-                      <m:t>0</m:t>
-                    </m:r>
-                    <m:r>
-                      <a:rPr lang="fr-FR" b="0" i="1" smtClean="0">
-                        <a:latin typeface="Cambria Math" panose="02040503050406030204" pitchFamily="18" charset="0"/>
-                      </a:rPr>
-                      <m:t>.</m:t>
-                    </m:r>
-                    <m:r>
-                      <a:rPr lang="fr-FR" b="0" i="1" smtClean="0">
-                        <a:latin typeface="Cambria Math" panose="02040503050406030204" pitchFamily="18" charset="0"/>
-                      </a:rPr>
-                      <m:t>87</m:t>
-                    </m:r>
-                    <m:r>
-                      <a:rPr lang="fr-FR" b="0" i="1" smtClean="0">
-                        <a:latin typeface="Cambria Math" panose="02040503050406030204" pitchFamily="18" charset="0"/>
-                      </a:rPr>
-                      <m:t> °</m:t>
+                      <m:t> = 0.87 °</m:t>
                     </m:r>
                     <m:r>
                       <m:rPr>
@@ -9545,16 +10844,7 @@
                               </a:highlight>
                               <a:latin typeface="Cambria Math" panose="02040503050406030204" pitchFamily="18" charset="0"/>
                             </a:rPr>
-                            <m:t> </m:t>
-                          </m:r>
-                          <m:r>
-                            <a:rPr lang="fr-FR" b="0" i="1" smtClean="0">
-                              <a:highlight>
-                                <a:srgbClr val="5B9BD5"/>
-                              </a:highlight>
-                              <a:latin typeface="Cambria Math" panose="02040503050406030204" pitchFamily="18" charset="0"/>
-                            </a:rPr>
-                            <m:t>0</m:t>
+                            <m:t> 0</m:t>
                           </m:r>
                           <m:r>
                             <a:rPr lang="fr-FR" b="0" i="1" smtClean="0">
@@ -9601,31 +10891,7 @@
                         <a:rPr lang="fr-FR" b="0" i="1" smtClean="0">
                           <a:latin typeface="Cambria Math" panose="02040503050406030204" pitchFamily="18" charset="0"/>
                         </a:rPr>
-                        <m:t>=</m:t>
-                      </m:r>
-                      <m:r>
-                        <a:rPr lang="fr-FR" b="0" i="1" smtClean="0">
-                          <a:latin typeface="Cambria Math" panose="02040503050406030204" pitchFamily="18" charset="0"/>
-                        </a:rPr>
-                        <m:t>0</m:t>
-                      </m:r>
-                      <m:r>
-                        <a:rPr lang="fr-FR" b="0" i="1" smtClean="0">
-                          <a:latin typeface="Cambria Math" panose="02040503050406030204" pitchFamily="18" charset="0"/>
-                        </a:rPr>
-                        <m:t>.</m:t>
-                      </m:r>
-                      <m:r>
-                        <a:rPr lang="fr-FR" b="0" i="1" smtClean="0">
-                          <a:latin typeface="Cambria Math" panose="02040503050406030204" pitchFamily="18" charset="0"/>
-                        </a:rPr>
-                        <m:t>87</m:t>
-                      </m:r>
-                      <m:r>
-                        <a:rPr lang="fr-FR" b="0" i="1" smtClean="0">
-                          <a:latin typeface="Cambria Math" panose="02040503050406030204" pitchFamily="18" charset="0"/>
-                        </a:rPr>
-                        <m:t>°</m:t>
+                        <m:t>=0.87°</m:t>
                       </m:r>
                       <m:r>
                         <m:rPr>
@@ -9663,7 +10929,7 @@
             </p:txBody>
           </p:sp>
         </mc:Choice>
-        <mc:Fallback>
+        <mc:Fallback xmlns="">
           <p:sp>
             <p:nvSpPr>
               <p:cNvPr id="3" name="Content Placeholder 2">
@@ -9747,169 +11013,6 @@
     <p:extLst>
       <p:ext uri="{BB962C8B-B14F-4D97-AF65-F5344CB8AC3E}">
         <p14:creationId xmlns:p14="http://schemas.microsoft.com/office/powerpoint/2010/main" val="153986674"/>
-      </p:ext>
-    </p:extLst>
-  </p:cSld>
-  <p:clrMapOvr>
-    <a:masterClrMapping/>
-  </p:clrMapOvr>
-</p:sld>
-</file>
-
-<file path=ppt/slides/slide19.xml><?xml version="1.0" encoding="utf-8"?>
-<p:sld xmlns:a="http://schemas.openxmlformats.org/drawingml/2006/main" xmlns:r="http://schemas.openxmlformats.org/officeDocument/2006/relationships" xmlns:p="http://schemas.openxmlformats.org/presentationml/2006/main">
-  <p:cSld>
-    <p:spTree>
-      <p:nvGrpSpPr>
-        <p:cNvPr id="1" name=""/>
-        <p:cNvGrpSpPr/>
-        <p:nvPr/>
-      </p:nvGrpSpPr>
-      <p:grpSpPr>
-        <a:xfrm>
-          <a:off x="0" y="0"/>
-          <a:ext cx="0" cy="0"/>
-          <a:chOff x="0" y="0"/>
-          <a:chExt cx="0" cy="0"/>
-        </a:xfrm>
-      </p:grpSpPr>
-      <mc:AlternateContent xmlns:mc="http://schemas.openxmlformats.org/markup-compatibility/2006" xmlns:a14="http://schemas.microsoft.com/office/drawing/2010/main">
-        <mc:Choice Requires="a14">
-          <p:sp>
-            <p:nvSpPr>
-              <p:cNvPr id="2" name="Title 1">
-                <a:extLst>
-                  <a:ext uri="{FF2B5EF4-FFF2-40B4-BE49-F238E27FC236}">
-                    <a16:creationId xmlns:a16="http://schemas.microsoft.com/office/drawing/2014/main" id="{54C6E061-A18D-9828-5D8A-6DB04AFF154E}"/>
-                  </a:ext>
-                </a:extLst>
-              </p:cNvPr>
-              <p:cNvSpPr>
-                <a:spLocks noGrp="1"/>
-              </p:cNvSpPr>
-              <p:nvPr>
-                <p:ph type="title"/>
-              </p:nvPr>
-            </p:nvSpPr>
-            <p:spPr/>
-            <p:txBody>
-              <a:bodyPr/>
-              <a:lstStyle/>
-              <a:p>
-                <a:r>
-                  <a:rPr lang="fr-FR" dirty="0"/>
-                  <a:t>Validation – incertitude numérique </a:t>
-                </a:r>
-                <a14:m>
-                  <m:oMath xmlns:m="http://schemas.openxmlformats.org/officeDocument/2006/math">
-                    <m:sSub>
-                      <m:sSubPr>
-                        <m:ctrlPr>
-                          <a:rPr lang="fr-FR" b="0" i="1" smtClean="0">
-                            <a:latin typeface="Cambria Math" panose="02040503050406030204" pitchFamily="18" charset="0"/>
-                          </a:rPr>
-                        </m:ctrlPr>
-                      </m:sSubPr>
-                      <m:e>
-                        <m:r>
-                          <a:rPr lang="fr-FR" b="0" i="1" smtClean="0">
-                            <a:latin typeface="Cambria Math" panose="02040503050406030204" pitchFamily="18" charset="0"/>
-                          </a:rPr>
-                          <m:t>𝑢</m:t>
-                        </m:r>
-                      </m:e>
-                      <m:sub>
-                        <m:r>
-                          <m:rPr>
-                            <m:sty m:val="p"/>
-                          </m:rPr>
-                          <a:rPr lang="fr-FR" b="0" i="1" smtClean="0">
-                            <a:latin typeface="Cambria Math" panose="02040503050406030204" pitchFamily="18" charset="0"/>
-                          </a:rPr>
-                          <m:t>num</m:t>
-                        </m:r>
-                      </m:sub>
-                    </m:sSub>
-                  </m:oMath>
-                </a14:m>
-                <a:endParaRPr lang="en-US" dirty="0"/>
-              </a:p>
-            </p:txBody>
-          </p:sp>
-        </mc:Choice>
-        <mc:Fallback xmlns="">
-          <p:sp>
-            <p:nvSpPr>
-              <p:cNvPr id="2" name="Title 1">
-                <a:extLst>
-                  <a:ext uri="{FF2B5EF4-FFF2-40B4-BE49-F238E27FC236}">
-                    <a16:creationId xmlns:a16="http://schemas.microsoft.com/office/drawing/2014/main" id="{54C6E061-A18D-9828-5D8A-6DB04AFF154E}"/>
-                  </a:ext>
-                </a:extLst>
-              </p:cNvPr>
-              <p:cNvSpPr>
-                <a:spLocks noGrp="1" noRot="1" noChangeAspect="1" noMove="1" noResize="1" noEditPoints="1" noAdjustHandles="1" noChangeArrowheads="1" noChangeShapeType="1" noTextEdit="1"/>
-              </p:cNvSpPr>
-              <p:nvPr>
-                <p:ph type="title"/>
-              </p:nvPr>
-            </p:nvSpPr>
-            <p:spPr>
-              <a:blipFill>
-                <a:blip r:embed="rId2"/>
-                <a:stretch>
-                  <a:fillRect l="-2377"/>
-                </a:stretch>
-              </a:blipFill>
-            </p:spPr>
-            <p:txBody>
-              <a:bodyPr/>
-              <a:lstStyle/>
-              <a:p>
-                <a:r>
-                  <a:rPr lang="en-US">
-                    <a:noFill/>
-                  </a:rPr>
-                  <a:t> </a:t>
-                </a:r>
-              </a:p>
-            </p:txBody>
-          </p:sp>
-        </mc:Fallback>
-      </mc:AlternateContent>
-      <p:sp>
-        <p:nvSpPr>
-          <p:cNvPr id="3" name="Content Placeholder 2">
-            <a:extLst>
-              <a:ext uri="{FF2B5EF4-FFF2-40B4-BE49-F238E27FC236}">
-                <a16:creationId xmlns:a16="http://schemas.microsoft.com/office/drawing/2014/main" id="{A130E620-26B7-5449-95D5-A34047E15DFF}"/>
-              </a:ext>
-            </a:extLst>
-          </p:cNvPr>
-          <p:cNvSpPr>
-            <a:spLocks noGrp="1"/>
-          </p:cNvSpPr>
-          <p:nvPr>
-            <p:ph idx="1"/>
-          </p:nvPr>
-        </p:nvSpPr>
-        <p:spPr/>
-        <p:txBody>
-          <a:bodyPr/>
-          <a:lstStyle/>
-          <a:p>
-            <a:r>
-              <a:rPr lang="fr-FR" dirty="0"/>
-              <a:t>En fonction de la valeur de GCI</a:t>
-            </a:r>
-            <a:endParaRPr lang="en-US" dirty="0"/>
-          </a:p>
-        </p:txBody>
-      </p:sp>
-    </p:spTree>
-    <p:extLst>
-      <p:ext uri="{BB962C8B-B14F-4D97-AF65-F5344CB8AC3E}">
-        <p14:creationId xmlns:p14="http://schemas.microsoft.com/office/powerpoint/2010/main" val="211247040"/>
       </p:ext>
     </p:extLst>
   </p:cSld>
@@ -10305,55 +11408,7 @@
                       <a:rPr lang="fr-FR" b="0" i="1" smtClean="0">
                         <a:latin typeface="Cambria Math" panose="02040503050406030204" pitchFamily="18" charset="0"/>
                       </a:rPr>
-                      <m:t>(</m:t>
-                    </m:r>
-                    <m:r>
-                      <a:rPr lang="fr-FR" b="0" i="1" smtClean="0">
-                        <a:latin typeface="Cambria Math" panose="02040503050406030204" pitchFamily="18" charset="0"/>
-                      </a:rPr>
-                      <m:t>42</m:t>
-                    </m:r>
-                    <m:r>
-                      <a:rPr lang="fr-FR" b="0" i="1" smtClean="0">
-                        <a:latin typeface="Cambria Math" panose="02040503050406030204" pitchFamily="18" charset="0"/>
-                      </a:rPr>
-                      <m:t>.</m:t>
-                    </m:r>
-                    <m:r>
-                      <a:rPr lang="fr-FR" b="0" i="1" smtClean="0">
-                        <a:latin typeface="Cambria Math" panose="02040503050406030204" pitchFamily="18" charset="0"/>
-                      </a:rPr>
-                      <m:t>5</m:t>
-                    </m:r>
-                    <m:r>
-                      <a:rPr lang="fr-FR" b="0" i="1" smtClean="0">
-                        <a:latin typeface="Cambria Math" panose="02040503050406030204" pitchFamily="18" charset="0"/>
-                      </a:rPr>
-                      <m:t>,</m:t>
-                    </m:r>
-                    <m:r>
-                      <a:rPr lang="fr-FR" b="0" i="1" smtClean="0">
-                        <a:latin typeface="Cambria Math" panose="02040503050406030204" pitchFamily="18" charset="0"/>
-                      </a:rPr>
-                      <m:t>3</m:t>
-                    </m:r>
-                    <m:r>
-                      <a:rPr lang="fr-FR" b="0" i="1" smtClean="0">
-                        <a:latin typeface="Cambria Math" panose="02040503050406030204" pitchFamily="18" charset="0"/>
-                      </a:rPr>
-                      <m:t>.</m:t>
-                    </m:r>
-                    <m:r>
-                      <a:rPr lang="fr-FR" b="0" i="1" smtClean="0">
-                        <a:latin typeface="Cambria Math" panose="02040503050406030204" pitchFamily="18" charset="0"/>
-                      </a:rPr>
-                      <m:t>75</m:t>
-                    </m:r>
-                    <m:r>
-                      <a:rPr lang="fr-FR" b="0" i="1" smtClean="0">
-                        <a:latin typeface="Cambria Math" panose="02040503050406030204" pitchFamily="18" charset="0"/>
-                      </a:rPr>
-                      <m:t>) </m:t>
+                      <m:t>(42.5,3.75) </m:t>
                     </m:r>
                     <m:r>
                       <a:rPr lang="fr-FR" b="0" i="1" smtClean="0">
@@ -10482,43 +11537,7 @@
                             <a:rPr lang="fr-FR" b="0" i="1" smtClean="0">
                               <a:latin typeface="Cambria Math" panose="02040503050406030204" pitchFamily="18" charset="0"/>
                             </a:rPr>
-                            <m:t>0</m:t>
-                          </m:r>
-                          <m:r>
-                            <a:rPr lang="fr-FR" b="0" i="1" smtClean="0">
-                              <a:latin typeface="Cambria Math" panose="02040503050406030204" pitchFamily="18" charset="0"/>
-                            </a:rPr>
-                            <m:t>.</m:t>
-                          </m:r>
-                          <m:r>
-                            <a:rPr lang="fr-FR" b="0" i="1" smtClean="0">
-                              <a:latin typeface="Cambria Math" panose="02040503050406030204" pitchFamily="18" charset="0"/>
-                            </a:rPr>
-                            <m:t>525</m:t>
-                          </m:r>
-                          <m:r>
-                            <a:rPr lang="fr-FR" b="0" i="1" smtClean="0">
-                              <a:latin typeface="Cambria Math" panose="02040503050406030204" pitchFamily="18" charset="0"/>
-                            </a:rPr>
-                            <m:t>,</m:t>
-                          </m:r>
-                          <m:r>
-                            <a:rPr lang="fr-FR" b="0" i="1" smtClean="0">
-                              <a:latin typeface="Cambria Math" panose="02040503050406030204" pitchFamily="18" charset="0"/>
-                            </a:rPr>
-                            <m:t>0</m:t>
-                          </m:r>
-                          <m:r>
-                            <a:rPr lang="fr-FR" b="0" i="1" smtClean="0">
-                              <a:latin typeface="Cambria Math" panose="02040503050406030204" pitchFamily="18" charset="0"/>
-                            </a:rPr>
-                            <m:t>.</m:t>
-                          </m:r>
-                          <m:r>
-                            <a:rPr lang="fr-FR" b="0" i="1" smtClean="0">
-                              <a:latin typeface="Cambria Math" panose="02040503050406030204" pitchFamily="18" charset="0"/>
-                            </a:rPr>
-                            <m:t>19</m:t>
+                            <m:t>0.525,0.19</m:t>
                           </m:r>
                         </m:e>
                       </m:d>
@@ -10688,31 +11707,7 @@
                       <a:rPr lang="fr-FR" sz="2200" b="0" i="1" smtClean="0">
                         <a:latin typeface="Cambria Math" panose="02040503050406030204" pitchFamily="18" charset="0"/>
                       </a:rPr>
-                      <m:t>=</m:t>
-                    </m:r>
-                    <m:r>
-                      <a:rPr lang="fr-FR" sz="2200" b="0" i="1" smtClean="0">
-                        <a:latin typeface="Cambria Math" panose="02040503050406030204" pitchFamily="18" charset="0"/>
-                      </a:rPr>
-                      <m:t>44</m:t>
-                    </m:r>
-                    <m:r>
-                      <a:rPr lang="fr-FR" sz="2200" b="0" i="1" smtClean="0">
-                        <a:latin typeface="Cambria Math" panose="02040503050406030204" pitchFamily="18" charset="0"/>
-                      </a:rPr>
-                      <m:t>.</m:t>
-                    </m:r>
-                    <m:r>
-                      <a:rPr lang="fr-FR" sz="2200" b="0" i="1" smtClean="0">
-                        <a:latin typeface="Cambria Math" panose="02040503050406030204" pitchFamily="18" charset="0"/>
-                      </a:rPr>
-                      <m:t>91</m:t>
-                    </m:r>
-                    <m:r>
-                      <a:rPr lang="fr-FR" sz="2200" b="0" i="1" smtClean="0">
-                        <a:latin typeface="Cambria Math" panose="02040503050406030204" pitchFamily="18" charset="0"/>
-                      </a:rPr>
-                      <m:t> </m:t>
+                      <m:t>=44.91 </m:t>
                     </m:r>
                     <m:r>
                       <m:rPr>
@@ -10905,8 +11900,8 @@
           </a:p>
         </p:txBody>
       </p:sp>
-      <mc:AlternateContent xmlns:mc="http://schemas.openxmlformats.org/markup-compatibility/2006">
-        <mc:Choice xmlns:a14="http://schemas.microsoft.com/office/drawing/2010/main" Requires="a14">
+      <mc:AlternateContent xmlns:mc="http://schemas.openxmlformats.org/markup-compatibility/2006" xmlns:a14="http://schemas.microsoft.com/office/drawing/2010/main">
+        <mc:Choice Requires="a14">
           <p:sp>
             <p:nvSpPr>
               <p:cNvPr id="3" name="Content Placeholder 2">
@@ -11246,7 +12241,7 @@
             </p:txBody>
           </p:sp>
         </mc:Choice>
-        <mc:Fallback>
+        <mc:Fallback xmlns="">
           <p:sp>
             <p:nvSpPr>
               <p:cNvPr id="3" name="Content Placeholder 2">
@@ -13331,13 +14326,7 @@
                         <a:rPr lang="fr-CA" b="0" i="1" smtClean="0">
                           <a:latin typeface="Cambria Math" panose="02040503050406030204" pitchFamily="18" charset="0"/>
                         </a:rPr>
-                        <m:t>=</m:t>
-                      </m:r>
-                      <m:r>
-                        <a:rPr lang="fr-CA" b="0" i="1" smtClean="0">
-                          <a:latin typeface="Cambria Math" panose="02040503050406030204" pitchFamily="18" charset="0"/>
-                        </a:rPr>
-                        <m:t>0</m:t>
+                        <m:t>=0</m:t>
                       </m:r>
                     </m:oMath>
                   </m:oMathPara>
@@ -14815,13 +15804,7 @@
                               <a:rPr lang="fr-FR" b="0" i="1" smtClean="0">
                                 <a:latin typeface="Cambria Math" panose="02040503050406030204" pitchFamily="18" charset="0"/>
                               </a:rPr>
-                              <m:t>+</m:t>
-                            </m:r>
-                            <m:r>
-                              <a:rPr lang="fr-FR" b="0" i="1" smtClean="0">
-                                <a:latin typeface="Cambria Math" panose="02040503050406030204" pitchFamily="18" charset="0"/>
-                              </a:rPr>
-                              <m:t>1</m:t>
+                              <m:t>+1</m:t>
                             </m:r>
                             <m:r>
                               <a:rPr lang="fr-FR" i="1">
@@ -14878,13 +15861,7 @@
                               <a:rPr lang="fr-FR" b="0" i="1" smtClean="0">
                                 <a:latin typeface="Cambria Math" panose="02040503050406030204" pitchFamily="18" charset="0"/>
                               </a:rPr>
-                              <m:t>−</m:t>
-                            </m:r>
-                            <m:r>
-                              <a:rPr lang="fr-FR" b="0" i="1" smtClean="0">
-                                <a:latin typeface="Cambria Math" panose="02040503050406030204" pitchFamily="18" charset="0"/>
-                              </a:rPr>
-                              <m:t>1</m:t>
+                              <m:t>−1</m:t>
                             </m:r>
                             <m:r>
                               <a:rPr lang="fr-FR" i="1">
@@ -15532,19 +16509,7 @@
                                 <a:rPr lang="fr-FR" sz="2400" i="1">
                                   <a:latin typeface="Cambria Math" panose="02040503050406030204" pitchFamily="18" charset="0"/>
                                 </a:rPr>
-                                <m:t>+</m:t>
-                              </m:r>
-                              <m:r>
-                                <a:rPr lang="fr-FR" sz="2400" i="1">
-                                  <a:latin typeface="Cambria Math" panose="02040503050406030204" pitchFamily="18" charset="0"/>
-                                </a:rPr>
-                                <m:t>1</m:t>
-                              </m:r>
-                              <m:r>
-                                <a:rPr lang="fr-FR" sz="2400" i="1">
-                                  <a:latin typeface="Cambria Math" panose="02040503050406030204" pitchFamily="18" charset="0"/>
-                                </a:rPr>
-                                <m:t>,</m:t>
+                                <m:t>+1,</m:t>
                               </m:r>
                               <m:r>
                                 <a:rPr lang="fr-FR" sz="2400" i="1">
@@ -15652,19 +16617,7 @@
                                 <a:rPr lang="fr-FR" sz="2400" i="1">
                                   <a:latin typeface="Cambria Math" panose="02040503050406030204" pitchFamily="18" charset="0"/>
                                 </a:rPr>
-                                <m:t>−</m:t>
-                              </m:r>
-                              <m:r>
-                                <a:rPr lang="fr-FR" sz="2400" i="1">
-                                  <a:latin typeface="Cambria Math" panose="02040503050406030204" pitchFamily="18" charset="0"/>
-                                </a:rPr>
-                                <m:t>1</m:t>
-                              </m:r>
-                              <m:r>
-                                <a:rPr lang="fr-FR" sz="2400" i="1">
-                                  <a:latin typeface="Cambria Math" panose="02040503050406030204" pitchFamily="18" charset="0"/>
-                                </a:rPr>
-                                <m:t>,</m:t>
+                                <m:t>−1,</m:t>
                               </m:r>
                               <m:r>
                                 <a:rPr lang="fr-FR" sz="2400" i="1">
@@ -15797,19 +16750,7 @@
                                 <a:rPr lang="fr-FR" sz="2400" i="1">
                                   <a:latin typeface="Cambria Math" panose="02040503050406030204" pitchFamily="18" charset="0"/>
                                 </a:rPr>
-                                <m:t>+</m:t>
-                              </m:r>
-                              <m:r>
-                                <a:rPr lang="fr-FR" sz="2400" i="1">
-                                  <a:latin typeface="Cambria Math" panose="02040503050406030204" pitchFamily="18" charset="0"/>
-                                </a:rPr>
-                                <m:t>1</m:t>
-                              </m:r>
-                              <m:r>
-                                <a:rPr lang="fr-FR" sz="2400" i="1">
-                                  <a:latin typeface="Cambria Math" panose="02040503050406030204" pitchFamily="18" charset="0"/>
-                                </a:rPr>
-                                <m:t>,</m:t>
+                                <m:t>+1,</m:t>
                               </m:r>
                               <m:r>
                                 <a:rPr lang="fr-FR" sz="2400" i="1">
@@ -15860,19 +16801,7 @@
                                 <a:rPr lang="fr-FR" sz="2400" i="1">
                                   <a:latin typeface="Cambria Math" panose="02040503050406030204" pitchFamily="18" charset="0"/>
                                 </a:rPr>
-                                <m:t>−</m:t>
-                              </m:r>
-                              <m:r>
-                                <a:rPr lang="fr-FR" sz="2400" i="1">
-                                  <a:latin typeface="Cambria Math" panose="02040503050406030204" pitchFamily="18" charset="0"/>
-                                </a:rPr>
-                                <m:t>1</m:t>
-                              </m:r>
-                              <m:r>
-                                <a:rPr lang="fr-FR" sz="2400" i="1">
-                                  <a:latin typeface="Cambria Math" panose="02040503050406030204" pitchFamily="18" charset="0"/>
-                                </a:rPr>
-                                <m:t>,</m:t>
+                                <m:t>−1,</m:t>
                               </m:r>
                               <m:r>
                                 <a:rPr lang="fr-FR" sz="2400" i="1">
@@ -15969,13 +16898,7 @@
                                 <a:rPr lang="fr-FR" sz="2400" i="1">
                                   <a:latin typeface="Cambria Math" panose="02040503050406030204" pitchFamily="18" charset="0"/>
                                 </a:rPr>
-                                <m:t>+</m:t>
-                              </m:r>
-                              <m:r>
-                                <a:rPr lang="fr-FR" sz="2400" i="1">
-                                  <a:latin typeface="Cambria Math" panose="02040503050406030204" pitchFamily="18" charset="0"/>
-                                </a:rPr>
-                                <m:t>1</m:t>
+                                <m:t>+1</m:t>
                               </m:r>
                             </m:sub>
                             <m:sup>
@@ -16089,13 +17012,7 @@
                                 <a:rPr lang="fr-FR" sz="2400" i="1">
                                   <a:latin typeface="Cambria Math" panose="02040503050406030204" pitchFamily="18" charset="0"/>
                                 </a:rPr>
-                                <m:t>−</m:t>
-                              </m:r>
-                              <m:r>
-                                <a:rPr lang="fr-FR" sz="2400" i="1">
-                                  <a:latin typeface="Cambria Math" panose="02040503050406030204" pitchFamily="18" charset="0"/>
-                                </a:rPr>
-                                <m:t>1</m:t>
+                                <m:t>−1</m:t>
                               </m:r>
                             </m:sub>
                             <m:sup>
@@ -16441,21 +17358,7 @@
                                 <a:latin typeface="Cambria Math" panose="02040503050406030204" pitchFamily="18" charset="0"/>
                                 <a:ea typeface="Cambria Math" panose="02040503050406030204" pitchFamily="18" charset="0"/>
                               </a:rPr>
-                              <m:t>+</m:t>
-                            </m:r>
-                            <m:r>
-                              <a:rPr lang="fr-FR" sz="2600" i="1">
-                                <a:latin typeface="Cambria Math" panose="02040503050406030204" pitchFamily="18" charset="0"/>
-                                <a:ea typeface="Cambria Math" panose="02040503050406030204" pitchFamily="18" charset="0"/>
-                              </a:rPr>
-                              <m:t>1</m:t>
-                            </m:r>
-                            <m:r>
-                              <a:rPr lang="fr-FR" sz="2600" i="1">
-                                <a:latin typeface="Cambria Math" panose="02040503050406030204" pitchFamily="18" charset="0"/>
-                                <a:ea typeface="Cambria Math" panose="02040503050406030204" pitchFamily="18" charset="0"/>
-                              </a:rPr>
-                              <m:t>,</m:t>
+                              <m:t>+1,</m:t>
                             </m:r>
                             <m:r>
                               <a:rPr lang="fr-FR" sz="2600" i="1">
@@ -16578,21 +17481,7 @@
                                 <a:latin typeface="Cambria Math" panose="02040503050406030204" pitchFamily="18" charset="0"/>
                                 <a:ea typeface="Cambria Math" panose="02040503050406030204" pitchFamily="18" charset="0"/>
                               </a:rPr>
-                              <m:t>−</m:t>
-                            </m:r>
-                            <m:r>
-                              <a:rPr lang="fr-FR" sz="2600" i="1">
-                                <a:latin typeface="Cambria Math" panose="02040503050406030204" pitchFamily="18" charset="0"/>
-                                <a:ea typeface="Cambria Math" panose="02040503050406030204" pitchFamily="18" charset="0"/>
-                              </a:rPr>
-                              <m:t>1</m:t>
-                            </m:r>
-                            <m:r>
-                              <a:rPr lang="fr-FR" sz="2600" i="1">
-                                <a:latin typeface="Cambria Math" panose="02040503050406030204" pitchFamily="18" charset="0"/>
-                                <a:ea typeface="Cambria Math" panose="02040503050406030204" pitchFamily="18" charset="0"/>
-                              </a:rPr>
-                              <m:t>,</m:t>
+                              <m:t>−1,</m:t>
                             </m:r>
                             <m:r>
                               <a:rPr lang="fr-FR" sz="2600" i="1">
@@ -16861,13 +17750,7 @@
                               <a:rPr lang="fr-FR" sz="2600" i="1">
                                 <a:latin typeface="Cambria Math" panose="02040503050406030204" pitchFamily="18" charset="0"/>
                               </a:rPr>
-                              <m:t>+</m:t>
-                            </m:r>
-                            <m:r>
-                              <a:rPr lang="fr-FR" sz="2600" i="1">
-                                <a:latin typeface="Cambria Math" panose="02040503050406030204" pitchFamily="18" charset="0"/>
-                              </a:rPr>
-                              <m:t>1</m:t>
+                              <m:t>+1</m:t>
                             </m:r>
                           </m:sub>
                           <m:sup>
@@ -16981,13 +17864,7 @@
                               <a:rPr lang="fr-FR" sz="2600" i="1">
                                 <a:latin typeface="Cambria Math" panose="02040503050406030204" pitchFamily="18" charset="0"/>
                               </a:rPr>
-                              <m:t>−</m:t>
-                            </m:r>
-                            <m:r>
-                              <a:rPr lang="fr-FR" sz="2600" i="1">
-                                <a:latin typeface="Cambria Math" panose="02040503050406030204" pitchFamily="18" charset="0"/>
-                              </a:rPr>
-                              <m:t>1</m:t>
+                              <m:t>−1</m:t>
                             </m:r>
                           </m:sub>
                           <m:sup>
@@ -21560,13 +22437,7 @@
                           <a:rPr lang="fr-FR" i="1">
                             <a:latin typeface="Cambria Math" panose="02040503050406030204" pitchFamily="18" charset="0"/>
                           </a:rPr>
-                          <m:t>2</m:t>
-                        </m:r>
-                        <m:r>
-                          <a:rPr lang="fr-FR" i="1">
-                            <a:latin typeface="Cambria Math" panose="02040503050406030204" pitchFamily="18" charset="0"/>
-                          </a:rPr>
-                          <m:t>!</m:t>
+                          <m:t>2!</m:t>
                         </m:r>
                       </m:den>
                     </m:f>
@@ -21738,13 +22609,7 @@
                           <a:rPr lang="fr-FR" i="1">
                             <a:latin typeface="Cambria Math" panose="02040503050406030204" pitchFamily="18" charset="0"/>
                           </a:rPr>
-                          <m:t>3</m:t>
-                        </m:r>
-                        <m:r>
-                          <a:rPr lang="fr-FR" i="1">
-                            <a:latin typeface="Cambria Math" panose="02040503050406030204" pitchFamily="18" charset="0"/>
-                          </a:rPr>
-                          <m:t>!</m:t>
+                          <m:t>3!</m:t>
                         </m:r>
                       </m:den>
                     </m:f>
@@ -21916,13 +22781,7 @@
                           <a:rPr lang="fr-FR" i="1">
                             <a:latin typeface="Cambria Math" panose="02040503050406030204" pitchFamily="18" charset="0"/>
                           </a:rPr>
-                          <m:t>4</m:t>
-                        </m:r>
-                        <m:r>
-                          <a:rPr lang="fr-FR" i="1">
-                            <a:latin typeface="Cambria Math" panose="02040503050406030204" pitchFamily="18" charset="0"/>
-                          </a:rPr>
-                          <m:t>!</m:t>
+                          <m:t>4!</m:t>
                         </m:r>
                       </m:den>
                     </m:f>
@@ -22340,13 +23199,7 @@
                           <a:rPr lang="fr-FR" i="1">
                             <a:latin typeface="Cambria Math" panose="02040503050406030204" pitchFamily="18" charset="0"/>
                           </a:rPr>
-                          <m:t>2</m:t>
-                        </m:r>
-                        <m:r>
-                          <a:rPr lang="fr-FR" i="1">
-                            <a:latin typeface="Cambria Math" panose="02040503050406030204" pitchFamily="18" charset="0"/>
-                          </a:rPr>
-                          <m:t>!</m:t>
+                          <m:t>2!</m:t>
                         </m:r>
                       </m:den>
                     </m:f>
@@ -22518,13 +23371,7 @@
                           <a:rPr lang="fr-FR" i="1">
                             <a:latin typeface="Cambria Math" panose="02040503050406030204" pitchFamily="18" charset="0"/>
                           </a:rPr>
-                          <m:t>3</m:t>
-                        </m:r>
-                        <m:r>
-                          <a:rPr lang="fr-FR" i="1">
-                            <a:latin typeface="Cambria Math" panose="02040503050406030204" pitchFamily="18" charset="0"/>
-                          </a:rPr>
-                          <m:t>!</m:t>
+                          <m:t>3!</m:t>
                         </m:r>
                       </m:den>
                     </m:f>
@@ -22696,13 +23543,7 @@
                           <a:rPr lang="fr-FR" i="1">
                             <a:latin typeface="Cambria Math" panose="02040503050406030204" pitchFamily="18" charset="0"/>
                           </a:rPr>
-                          <m:t>4</m:t>
-                        </m:r>
-                        <m:r>
-                          <a:rPr lang="fr-FR" i="1">
-                            <a:latin typeface="Cambria Math" panose="02040503050406030204" pitchFamily="18" charset="0"/>
-                          </a:rPr>
-                          <m:t>!</m:t>
+                          <m:t>4!</m:t>
                         </m:r>
                       </m:den>
                     </m:f>
@@ -23293,13 +24134,7 @@
                           <a:rPr lang="fr-FR" i="1">
                             <a:latin typeface="Cambria Math" panose="02040503050406030204" pitchFamily="18" charset="0"/>
                           </a:rPr>
-                          <m:t>2</m:t>
-                        </m:r>
-                        <m:r>
-                          <a:rPr lang="fr-FR" i="1">
-                            <a:latin typeface="Cambria Math" panose="02040503050406030204" pitchFamily="18" charset="0"/>
-                          </a:rPr>
-                          <m:t>!</m:t>
+                          <m:t>2!</m:t>
                         </m:r>
                       </m:den>
                     </m:f>
@@ -23760,13 +24595,7 @@
                           <a:rPr lang="fr-FR" i="1">
                             <a:latin typeface="Cambria Math" panose="02040503050406030204" pitchFamily="18" charset="0"/>
                           </a:rPr>
-                          <m:t>2</m:t>
-                        </m:r>
-                        <m:r>
-                          <a:rPr lang="fr-FR" i="1">
-                            <a:latin typeface="Cambria Math" panose="02040503050406030204" pitchFamily="18" charset="0"/>
-                          </a:rPr>
-                          <m:t>!</m:t>
+                          <m:t>2!</m:t>
                         </m:r>
                       </m:den>
                     </m:f>

--- a/projet_final/projet_final/MEC8211-Projet-final-Presentation.pptx
+++ b/projet_final/projet_final/MEC8211-Projet-final-Presentation.pptx
@@ -376,7 +376,7 @@
           <a:p>
             <a:fld id="{F6105186-0725-443C-BC59-E521425E81CD}" type="slidenum">
               <a:rPr lang="fr-FR" smtClean="0"/>
-              <a:t>‹N°›</a:t>
+              <a:t>‹#›</a:t>
             </a:fld>
             <a:endParaRPr lang="fr-FR"/>
           </a:p>
@@ -962,7 +962,7 @@
           <a:p>
             <a:fld id="{FD85B578-4E75-4E1C-9BE3-D5DCC0715B13}" type="slidenum">
               <a:rPr lang="fr-FR" smtClean="0"/>
-              <a:t>‹N°›</a:t>
+              <a:t>‹#›</a:t>
             </a:fld>
             <a:endParaRPr lang="fr-FR"/>
           </a:p>
@@ -1160,7 +1160,7 @@
           <a:p>
             <a:fld id="{FD85B578-4E75-4E1C-9BE3-D5DCC0715B13}" type="slidenum">
               <a:rPr lang="fr-FR" smtClean="0"/>
-              <a:t>‹N°›</a:t>
+              <a:t>‹#›</a:t>
             </a:fld>
             <a:endParaRPr lang="fr-FR"/>
           </a:p>
@@ -1368,7 +1368,7 @@
           <a:p>
             <a:fld id="{FD85B578-4E75-4E1C-9BE3-D5DCC0715B13}" type="slidenum">
               <a:rPr lang="fr-FR" smtClean="0"/>
-              <a:t>‹N°›</a:t>
+              <a:t>‹#›</a:t>
             </a:fld>
             <a:endParaRPr lang="fr-FR"/>
           </a:p>
@@ -1566,7 +1566,7 @@
           <a:p>
             <a:fld id="{FD85B578-4E75-4E1C-9BE3-D5DCC0715B13}" type="slidenum">
               <a:rPr lang="fr-FR" smtClean="0"/>
-              <a:t>‹N°›</a:t>
+              <a:t>‹#›</a:t>
             </a:fld>
             <a:endParaRPr lang="fr-FR"/>
           </a:p>
@@ -1841,7 +1841,7 @@
           <a:p>
             <a:fld id="{FD85B578-4E75-4E1C-9BE3-D5DCC0715B13}" type="slidenum">
               <a:rPr lang="fr-FR" smtClean="0"/>
-              <a:t>‹N°›</a:t>
+              <a:t>‹#›</a:t>
             </a:fld>
             <a:endParaRPr lang="fr-FR"/>
           </a:p>
@@ -2106,7 +2106,7 @@
           <a:p>
             <a:fld id="{FD85B578-4E75-4E1C-9BE3-D5DCC0715B13}" type="slidenum">
               <a:rPr lang="fr-FR" smtClean="0"/>
-              <a:t>‹N°›</a:t>
+              <a:t>‹#›</a:t>
             </a:fld>
             <a:endParaRPr lang="fr-FR"/>
           </a:p>
@@ -2518,7 +2518,7 @@
           <a:p>
             <a:fld id="{FD85B578-4E75-4E1C-9BE3-D5DCC0715B13}" type="slidenum">
               <a:rPr lang="fr-FR" smtClean="0"/>
-              <a:t>‹N°›</a:t>
+              <a:t>‹#›</a:t>
             </a:fld>
             <a:endParaRPr lang="fr-FR"/>
           </a:p>
@@ -2659,7 +2659,7 @@
           <a:p>
             <a:fld id="{FD85B578-4E75-4E1C-9BE3-D5DCC0715B13}" type="slidenum">
               <a:rPr lang="fr-FR" smtClean="0"/>
-              <a:t>‹N°›</a:t>
+              <a:t>‹#›</a:t>
             </a:fld>
             <a:endParaRPr lang="fr-FR"/>
           </a:p>
@@ -2772,7 +2772,7 @@
           <a:p>
             <a:fld id="{FD85B578-4E75-4E1C-9BE3-D5DCC0715B13}" type="slidenum">
               <a:rPr lang="fr-FR" smtClean="0"/>
-              <a:t>‹N°›</a:t>
+              <a:t>‹#›</a:t>
             </a:fld>
             <a:endParaRPr lang="fr-FR"/>
           </a:p>
@@ -3083,7 +3083,7 @@
           <a:p>
             <a:fld id="{FD85B578-4E75-4E1C-9BE3-D5DCC0715B13}" type="slidenum">
               <a:rPr lang="fr-FR" smtClean="0"/>
-              <a:t>‹N°›</a:t>
+              <a:t>‹#›</a:t>
             </a:fld>
             <a:endParaRPr lang="fr-FR"/>
           </a:p>
@@ -3371,7 +3371,7 @@
           <a:p>
             <a:fld id="{FD85B578-4E75-4E1C-9BE3-D5DCC0715B13}" type="slidenum">
               <a:rPr lang="fr-FR" smtClean="0"/>
-              <a:t>‹N°›</a:t>
+              <a:t>‹#›</a:t>
             </a:fld>
             <a:endParaRPr lang="fr-FR"/>
           </a:p>
@@ -3651,7 +3651,7 @@
           <a:p>
             <a:fld id="{FD85B578-4E75-4E1C-9BE3-D5DCC0715B13}" type="slidenum">
               <a:rPr lang="fr-FR" smtClean="0"/>
-              <a:t>‹N°›</a:t>
+              <a:t>‹#›</a:t>
             </a:fld>
             <a:endParaRPr lang="fr-FR"/>
           </a:p>
@@ -7251,7 +7251,14 @@
                         <a:latin typeface="Cambria Math" panose="02040503050406030204" pitchFamily="18" charset="0"/>
                         <a:sym typeface="Wingdings" panose="05000000000000000000" pitchFamily="2" charset="2"/>
                       </a:rPr>
-                      <m:t> = 100</m:t>
+                      <m:t> = </m:t>
+                    </m:r>
+                    <m:r>
+                      <a:rPr lang="fr-FR" b="0" i="1" smtClean="0">
+                        <a:latin typeface="Cambria Math" panose="02040503050406030204" pitchFamily="18" charset="0"/>
+                        <a:sym typeface="Wingdings" panose="05000000000000000000" pitchFamily="2" charset="2"/>
+                      </a:rPr>
+                      <m:t>100</m:t>
                     </m:r>
                     <m:r>
                       <m:rPr>
@@ -7285,7 +7292,14 @@
                         <a:latin typeface="Cambria Math" panose="02040503050406030204" pitchFamily="18" charset="0"/>
                         <a:sym typeface="Wingdings" panose="05000000000000000000" pitchFamily="2" charset="2"/>
                       </a:rPr>
-                      <m:t>=2</m:t>
+                      <m:t>=</m:t>
+                    </m:r>
+                    <m:r>
+                      <a:rPr lang="fr-FR" b="0" i="1" smtClean="0">
+                        <a:latin typeface="Cambria Math" panose="02040503050406030204" pitchFamily="18" charset="0"/>
+                        <a:sym typeface="Wingdings" panose="05000000000000000000" pitchFamily="2" charset="2"/>
+                      </a:rPr>
+                      <m:t>2</m:t>
                     </m:r>
                   </m:oMath>
                 </a14:m>
@@ -7351,7 +7365,28 @@
                         <a:latin typeface="Cambria Math" panose="02040503050406030204" pitchFamily="18" charset="0"/>
                         <a:sym typeface="Wingdings" panose="05000000000000000000" pitchFamily="2" charset="2"/>
                       </a:rPr>
-                      <m:t>= 0.6</m:t>
+                      <m:t>= </m:t>
+                    </m:r>
+                    <m:r>
+                      <a:rPr lang="fr-FR" b="0" i="1" smtClean="0">
+                        <a:latin typeface="Cambria Math" panose="02040503050406030204" pitchFamily="18" charset="0"/>
+                        <a:sym typeface="Wingdings" panose="05000000000000000000" pitchFamily="2" charset="2"/>
+                      </a:rPr>
+                      <m:t>0</m:t>
+                    </m:r>
+                    <m:r>
+                      <a:rPr lang="fr-FR" b="0" i="1" smtClean="0">
+                        <a:latin typeface="Cambria Math" panose="02040503050406030204" pitchFamily="18" charset="0"/>
+                        <a:sym typeface="Wingdings" panose="05000000000000000000" pitchFamily="2" charset="2"/>
+                      </a:rPr>
+                      <m:t>.</m:t>
+                    </m:r>
+                    <m:r>
+                      <a:rPr lang="fr-FR" b="0" i="1" smtClean="0">
+                        <a:latin typeface="Cambria Math" panose="02040503050406030204" pitchFamily="18" charset="0"/>
+                        <a:sym typeface="Wingdings" panose="05000000000000000000" pitchFamily="2" charset="2"/>
+                      </a:rPr>
+                      <m:t>6</m:t>
                     </m:r>
                     <m:r>
                       <m:rPr>
@@ -7388,7 +7423,28 @@
                         <a:latin typeface="Cambria Math" panose="02040503050406030204" pitchFamily="18" charset="0"/>
                         <a:sym typeface="Wingdings" panose="05000000000000000000" pitchFamily="2" charset="2"/>
                       </a:rPr>
-                      <m:t> = 0.3</m:t>
+                      <m:t> = </m:t>
+                    </m:r>
+                    <m:r>
+                      <a:rPr lang="fr-FR" b="0" i="1" smtClean="0">
+                        <a:latin typeface="Cambria Math" panose="02040503050406030204" pitchFamily="18" charset="0"/>
+                        <a:sym typeface="Wingdings" panose="05000000000000000000" pitchFamily="2" charset="2"/>
+                      </a:rPr>
+                      <m:t>0</m:t>
+                    </m:r>
+                    <m:r>
+                      <a:rPr lang="fr-FR" b="0" i="1" smtClean="0">
+                        <a:latin typeface="Cambria Math" panose="02040503050406030204" pitchFamily="18" charset="0"/>
+                        <a:sym typeface="Wingdings" panose="05000000000000000000" pitchFamily="2" charset="2"/>
+                      </a:rPr>
+                      <m:t>.</m:t>
+                    </m:r>
+                    <m:r>
+                      <a:rPr lang="fr-FR" b="0" i="1" smtClean="0">
+                        <a:latin typeface="Cambria Math" panose="02040503050406030204" pitchFamily="18" charset="0"/>
+                        <a:sym typeface="Wingdings" panose="05000000000000000000" pitchFamily="2" charset="2"/>
+                      </a:rPr>
+                      <m:t>3</m:t>
                     </m:r>
                   </m:oMath>
                 </a14:m>
@@ -7913,7 +7969,13 @@
                                 <a:rPr lang="fr-FR" sz="2400" i="1">
                                   <a:latin typeface="Cambria Math" panose="02040503050406030204" pitchFamily="18" charset="0"/>
                                 </a:rPr>
-                                <m:t>=1</m:t>
+                                <m:t>=</m:t>
+                              </m:r>
+                              <m:r>
+                                <a:rPr lang="fr-FR" sz="2400" i="1">
+                                  <a:latin typeface="Cambria Math" panose="02040503050406030204" pitchFamily="18" charset="0"/>
+                                </a:rPr>
+                                <m:t>1</m:t>
                               </m:r>
                             </m:sub>
                             <m:sup>
@@ -8043,7 +8105,31 @@
                         <a:rPr lang="fr-FR" sz="2400" b="0" i="1" smtClean="0">
                           <a:latin typeface="Cambria Math" panose="02040503050406030204" pitchFamily="18" charset="0"/>
                         </a:rPr>
-                        <m:t>= 11.8 </m:t>
+                        <m:t>= </m:t>
+                      </m:r>
+                      <m:r>
+                        <a:rPr lang="fr-FR" sz="2400" b="0" i="1" smtClean="0">
+                          <a:latin typeface="Cambria Math" panose="02040503050406030204" pitchFamily="18" charset="0"/>
+                        </a:rPr>
+                        <m:t>11</m:t>
+                      </m:r>
+                      <m:r>
+                        <a:rPr lang="fr-FR" sz="2400" b="0" i="1" smtClean="0">
+                          <a:latin typeface="Cambria Math" panose="02040503050406030204" pitchFamily="18" charset="0"/>
+                        </a:rPr>
+                        <m:t>.</m:t>
+                      </m:r>
+                      <m:r>
+                        <a:rPr lang="fr-FR" sz="2400" b="0" i="1" smtClean="0">
+                          <a:latin typeface="Cambria Math" panose="02040503050406030204" pitchFamily="18" charset="0"/>
+                        </a:rPr>
+                        <m:t>8</m:t>
+                      </m:r>
+                      <m:r>
+                        <a:rPr lang="fr-FR" sz="2400" b="0" i="1" smtClean="0">
+                          <a:latin typeface="Cambria Math" panose="02040503050406030204" pitchFamily="18" charset="0"/>
+                        </a:rPr>
+                        <m:t> </m:t>
                       </m:r>
                       <m:r>
                         <a:rPr lang="fr-FR" sz="2400" b="0" i="1" smtClean="0">
@@ -8168,7 +8254,19 @@
                       <a:rPr lang="fr-FR" b="0" i="1" smtClean="0">
                         <a:latin typeface="Cambria Math" panose="02040503050406030204" pitchFamily="18" charset="0"/>
                       </a:rPr>
-                      <m:t>=7850 </m:t>
+                      <m:t>=</m:t>
+                    </m:r>
+                    <m:r>
+                      <a:rPr lang="fr-FR" b="0" i="1" smtClean="0">
+                        <a:latin typeface="Cambria Math" panose="02040503050406030204" pitchFamily="18" charset="0"/>
+                      </a:rPr>
+                      <m:t>7850</m:t>
+                    </m:r>
+                    <m:r>
+                      <a:rPr lang="fr-FR" b="0" i="1" smtClean="0">
+                        <a:latin typeface="Cambria Math" panose="02040503050406030204" pitchFamily="18" charset="0"/>
+                      </a:rPr>
+                      <m:t> </m:t>
                     </m:r>
                     <m:r>
                       <a:rPr lang="fr-FR" b="0" i="1" smtClean="0">
@@ -8230,7 +8328,31 @@
                       <a:rPr lang="fr-FR" b="0" i="1" smtClean="0">
                         <a:latin typeface="Cambria Math" panose="02040503050406030204" pitchFamily="18" charset="0"/>
                       </a:rPr>
-                      <m:t>=0.525 </m:t>
+                      <m:t>=</m:t>
+                    </m:r>
+                    <m:r>
+                      <a:rPr lang="fr-FR" b="0" i="1" smtClean="0">
+                        <a:latin typeface="Cambria Math" panose="02040503050406030204" pitchFamily="18" charset="0"/>
+                      </a:rPr>
+                      <m:t>0</m:t>
+                    </m:r>
+                    <m:r>
+                      <a:rPr lang="fr-FR" b="0" i="1" smtClean="0">
+                        <a:latin typeface="Cambria Math" panose="02040503050406030204" pitchFamily="18" charset="0"/>
+                      </a:rPr>
+                      <m:t>.</m:t>
+                    </m:r>
+                    <m:r>
+                      <a:rPr lang="fr-FR" b="0" i="1" smtClean="0">
+                        <a:latin typeface="Cambria Math" panose="02040503050406030204" pitchFamily="18" charset="0"/>
+                      </a:rPr>
+                      <m:t>525</m:t>
+                    </m:r>
+                    <m:r>
+                      <a:rPr lang="fr-FR" b="0" i="1" smtClean="0">
+                        <a:latin typeface="Cambria Math" panose="02040503050406030204" pitchFamily="18" charset="0"/>
+                      </a:rPr>
+                      <m:t> </m:t>
                     </m:r>
                   </m:oMath>
                 </a14:m>
@@ -8252,7 +8374,13 @@
                       <a:rPr lang="fr-FR" b="0" i="1" smtClean="0">
                         <a:latin typeface="Cambria Math" panose="02040503050406030204" pitchFamily="18" charset="0"/>
                       </a:rPr>
-                      <m:t>=10</m:t>
+                      <m:t>=</m:t>
+                    </m:r>
+                    <m:r>
+                      <a:rPr lang="fr-FR" b="0" i="1" smtClean="0">
+                        <a:latin typeface="Cambria Math" panose="02040503050406030204" pitchFamily="18" charset="0"/>
+                      </a:rPr>
+                      <m:t>10</m:t>
                     </m:r>
                     <m:r>
                       <m:rPr>
@@ -8356,7 +8484,31 @@
                       <a:rPr lang="fr-FR" b="0" i="1" smtClean="0">
                         <a:latin typeface="Cambria Math" panose="02040503050406030204" pitchFamily="18" charset="0"/>
                       </a:rPr>
-                      <m:t>=1118.15 </m:t>
+                      <m:t>=</m:t>
+                    </m:r>
+                    <m:r>
+                      <a:rPr lang="fr-FR" b="0" i="1" smtClean="0">
+                        <a:latin typeface="Cambria Math" panose="02040503050406030204" pitchFamily="18" charset="0"/>
+                      </a:rPr>
+                      <m:t>1118</m:t>
+                    </m:r>
+                    <m:r>
+                      <a:rPr lang="fr-FR" b="0" i="1" smtClean="0">
+                        <a:latin typeface="Cambria Math" panose="02040503050406030204" pitchFamily="18" charset="0"/>
+                      </a:rPr>
+                      <m:t>.</m:t>
+                    </m:r>
+                    <m:r>
+                      <a:rPr lang="fr-FR" b="0" i="1" smtClean="0">
+                        <a:latin typeface="Cambria Math" panose="02040503050406030204" pitchFamily="18" charset="0"/>
+                      </a:rPr>
+                      <m:t>15</m:t>
+                    </m:r>
+                    <m:r>
+                      <a:rPr lang="fr-FR" b="0" i="1" smtClean="0">
+                        <a:latin typeface="Cambria Math" panose="02040503050406030204" pitchFamily="18" charset="0"/>
+                      </a:rPr>
+                      <m:t> </m:t>
                     </m:r>
                     <m:r>
                       <m:rPr>
@@ -8406,7 +8558,31 @@
                       <a:rPr lang="fr-FR" b="0" i="1" smtClean="0">
                         <a:latin typeface="Cambria Math" panose="02040503050406030204" pitchFamily="18" charset="0"/>
                       </a:rPr>
-                      <m:t>=298.15 </m:t>
+                      <m:t>=</m:t>
+                    </m:r>
+                    <m:r>
+                      <a:rPr lang="fr-FR" b="0" i="1" smtClean="0">
+                        <a:latin typeface="Cambria Math" panose="02040503050406030204" pitchFamily="18" charset="0"/>
+                      </a:rPr>
+                      <m:t>298</m:t>
+                    </m:r>
+                    <m:r>
+                      <a:rPr lang="fr-FR" b="0" i="1" smtClean="0">
+                        <a:latin typeface="Cambria Math" panose="02040503050406030204" pitchFamily="18" charset="0"/>
+                      </a:rPr>
+                      <m:t>.</m:t>
+                    </m:r>
+                    <m:r>
+                      <a:rPr lang="fr-FR" b="0" i="1" smtClean="0">
+                        <a:latin typeface="Cambria Math" panose="02040503050406030204" pitchFamily="18" charset="0"/>
+                      </a:rPr>
+                      <m:t>15</m:t>
+                    </m:r>
+                    <m:r>
+                      <a:rPr lang="fr-FR" b="0" i="1" smtClean="0">
+                        <a:latin typeface="Cambria Math" panose="02040503050406030204" pitchFamily="18" charset="0"/>
+                      </a:rPr>
+                      <m:t> </m:t>
                     </m:r>
                     <m:r>
                       <m:rPr>
@@ -8443,7 +8619,25 @@
                       <a:rPr lang="fr-FR" b="0" i="1" smtClean="0">
                         <a:latin typeface="Cambria Math" panose="02040503050406030204" pitchFamily="18" charset="0"/>
                       </a:rPr>
-                      <m:t>=44.5</m:t>
+                      <m:t>=</m:t>
+                    </m:r>
+                    <m:r>
+                      <a:rPr lang="fr-FR" b="0" i="1" smtClean="0">
+                        <a:latin typeface="Cambria Math" panose="02040503050406030204" pitchFamily="18" charset="0"/>
+                      </a:rPr>
+                      <m:t>44</m:t>
+                    </m:r>
+                    <m:r>
+                      <a:rPr lang="fr-FR" b="0" i="1" smtClean="0">
+                        <a:latin typeface="Cambria Math" panose="02040503050406030204" pitchFamily="18" charset="0"/>
+                      </a:rPr>
+                      <m:t>.</m:t>
+                    </m:r>
+                    <m:r>
+                      <a:rPr lang="fr-FR" b="0" i="1" smtClean="0">
+                        <a:latin typeface="Cambria Math" panose="02040503050406030204" pitchFamily="18" charset="0"/>
+                      </a:rPr>
+                      <m:t>5</m:t>
                     </m:r>
                     <m:r>
                       <a:rPr lang="fr-FR" b="0" i="1" smtClean="0">
@@ -8650,7 +8844,13 @@
                         <a:rPr lang="fr-FR" b="0" i="1" smtClean="0">
                           <a:latin typeface="Cambria Math" panose="02040503050406030204" pitchFamily="18" charset="0"/>
                         </a:rPr>
-                        <m:t> = 20</m:t>
+                        <m:t> = </m:t>
+                      </m:r>
+                      <m:r>
+                        <a:rPr lang="fr-FR" b="0" i="1" smtClean="0">
+                          <a:latin typeface="Cambria Math" panose="02040503050406030204" pitchFamily="18" charset="0"/>
+                        </a:rPr>
+                        <m:t>20</m:t>
                       </m:r>
                     </m:oMath>
                   </m:oMathPara>
@@ -8680,7 +8880,31 @@
                         <a:rPr lang="fr-FR" b="0" i="1" smtClean="0">
                           <a:latin typeface="Cambria Math" panose="02040503050406030204" pitchFamily="18" charset="0"/>
                         </a:rPr>
-                        <m:t> = 0.025 </m:t>
+                        <m:t> = </m:t>
+                      </m:r>
+                      <m:r>
+                        <a:rPr lang="fr-FR" b="0" i="1" smtClean="0">
+                          <a:latin typeface="Cambria Math" panose="02040503050406030204" pitchFamily="18" charset="0"/>
+                        </a:rPr>
+                        <m:t>0</m:t>
+                      </m:r>
+                      <m:r>
+                        <a:rPr lang="fr-FR" b="0" i="1" smtClean="0">
+                          <a:latin typeface="Cambria Math" panose="02040503050406030204" pitchFamily="18" charset="0"/>
+                        </a:rPr>
+                        <m:t>.</m:t>
+                      </m:r>
+                      <m:r>
+                        <a:rPr lang="fr-FR" b="0" i="1" smtClean="0">
+                          <a:latin typeface="Cambria Math" panose="02040503050406030204" pitchFamily="18" charset="0"/>
+                        </a:rPr>
+                        <m:t>025</m:t>
+                      </m:r>
+                      <m:r>
+                        <a:rPr lang="fr-FR" b="0" i="1" smtClean="0">
+                          <a:latin typeface="Cambria Math" panose="02040503050406030204" pitchFamily="18" charset="0"/>
+                        </a:rPr>
+                        <m:t> </m:t>
                       </m:r>
                       <m:r>
                         <m:rPr>
@@ -8733,7 +8957,31 @@
                         <a:rPr lang="fr-FR" b="0" i="1" smtClean="0">
                           <a:latin typeface="Cambria Math" panose="02040503050406030204" pitchFamily="18" charset="0"/>
                         </a:rPr>
-                        <m:t> =0.6 </m:t>
+                        <m:t> =</m:t>
+                      </m:r>
+                      <m:r>
+                        <a:rPr lang="fr-FR" b="0" i="1" smtClean="0">
+                          <a:latin typeface="Cambria Math" panose="02040503050406030204" pitchFamily="18" charset="0"/>
+                        </a:rPr>
+                        <m:t>0</m:t>
+                      </m:r>
+                      <m:r>
+                        <a:rPr lang="fr-FR" b="0" i="1" smtClean="0">
+                          <a:latin typeface="Cambria Math" panose="02040503050406030204" pitchFamily="18" charset="0"/>
+                        </a:rPr>
+                        <m:t>.</m:t>
+                      </m:r>
+                      <m:r>
+                        <a:rPr lang="fr-FR" b="0" i="1" smtClean="0">
+                          <a:latin typeface="Cambria Math" panose="02040503050406030204" pitchFamily="18" charset="0"/>
+                        </a:rPr>
+                        <m:t>6</m:t>
+                      </m:r>
+                      <m:r>
+                        <a:rPr lang="fr-FR" b="0" i="1" smtClean="0">
+                          <a:latin typeface="Cambria Math" panose="02040503050406030204" pitchFamily="18" charset="0"/>
+                        </a:rPr>
+                        <m:t> </m:t>
                       </m:r>
                       <m:r>
                         <a:rPr lang="fr-FR" b="0" i="1" smtClean="0">
@@ -8775,7 +9023,31 @@
                         <a:rPr lang="fr-FR" b="0" i="1" smtClean="0">
                           <a:latin typeface="Cambria Math" panose="02040503050406030204" pitchFamily="18" charset="0"/>
                         </a:rPr>
-                        <m:t> = 0.3 </m:t>
+                        <m:t> = </m:t>
+                      </m:r>
+                      <m:r>
+                        <a:rPr lang="fr-FR" b="0" i="1" smtClean="0">
+                          <a:latin typeface="Cambria Math" panose="02040503050406030204" pitchFamily="18" charset="0"/>
+                        </a:rPr>
+                        <m:t>0</m:t>
+                      </m:r>
+                      <m:r>
+                        <a:rPr lang="fr-FR" b="0" i="1" smtClean="0">
+                          <a:latin typeface="Cambria Math" panose="02040503050406030204" pitchFamily="18" charset="0"/>
+                        </a:rPr>
+                        <m:t>.</m:t>
+                      </m:r>
+                      <m:r>
+                        <a:rPr lang="fr-FR" b="0" i="1" smtClean="0">
+                          <a:latin typeface="Cambria Math" panose="02040503050406030204" pitchFamily="18" charset="0"/>
+                        </a:rPr>
+                        <m:t>3</m:t>
+                      </m:r>
+                      <m:r>
+                        <a:rPr lang="fr-FR" b="0" i="1" smtClean="0">
+                          <a:latin typeface="Cambria Math" panose="02040503050406030204" pitchFamily="18" charset="0"/>
+                        </a:rPr>
+                        <m:t> </m:t>
                       </m:r>
                       <m:r>
                         <m:rPr>
@@ -9011,8 +9283,8 @@
           </a:p>
         </p:txBody>
       </p:sp>
-      <mc:AlternateContent xmlns:mc="http://schemas.openxmlformats.org/markup-compatibility/2006" xmlns:a14="http://schemas.microsoft.com/office/drawing/2010/main">
-        <mc:Choice Requires="a14">
+      <mc:AlternateContent xmlns:mc="http://schemas.openxmlformats.org/markup-compatibility/2006">
+        <mc:Choice xmlns:a14="http://schemas.microsoft.com/office/drawing/2010/main" Requires="a14">
           <p:sp>
             <p:nvSpPr>
               <p:cNvPr id="3" name="Espace réservé du contenu 2">
@@ -9454,13 +9726,7 @@
                           <a:rPr lang="fr-FR" i="1">
                             <a:latin typeface="Cambria Math" panose="02040503050406030204" pitchFamily="18" charset="0"/>
                           </a:rPr>
-                          <m:t>−</m:t>
-                        </m:r>
-                        <m:r>
-                          <a:rPr lang="fr-FR" i="1">
-                            <a:latin typeface="Cambria Math" panose="02040503050406030204" pitchFamily="18" charset="0"/>
-                          </a:rPr>
-                          <m:t>1</m:t>
+                          <m:t>−1</m:t>
                         </m:r>
                       </m:den>
                     </m:f>
@@ -9650,19 +9916,7 @@
                       <a:rPr lang="fr-FR" i="1">
                         <a:latin typeface="Cambria Math" panose="02040503050406030204" pitchFamily="18" charset="0"/>
                       </a:rPr>
-                      <m:t>0</m:t>
-                    </m:r>
-                    <m:r>
-                      <a:rPr lang="fr-FR" i="1">
-                        <a:latin typeface="Cambria Math" panose="02040503050406030204" pitchFamily="18" charset="0"/>
-                      </a:rPr>
-                      <m:t>.</m:t>
-                    </m:r>
-                    <m:r>
-                      <a:rPr lang="fr-FR" i="1">
-                        <a:latin typeface="Cambria Math" panose="02040503050406030204" pitchFamily="18" charset="0"/>
-                      </a:rPr>
-                      <m:t>1</m:t>
+                      <m:t>0.1</m:t>
                     </m:r>
                   </m:oMath>
                 </a14:m>
@@ -9707,25 +9961,7 @@
                       <a:rPr lang="fr-FR" i="1">
                         <a:latin typeface="Cambria Math" panose="02040503050406030204" pitchFamily="18" charset="0"/>
                       </a:rPr>
-                      <m:t>=</m:t>
-                    </m:r>
-                    <m:r>
-                      <a:rPr lang="fr-FR" i="1">
-                        <a:latin typeface="Cambria Math" panose="02040503050406030204" pitchFamily="18" charset="0"/>
-                      </a:rPr>
-                      <m:t>1</m:t>
-                    </m:r>
-                    <m:r>
-                      <a:rPr lang="fr-FR" i="1">
-                        <a:latin typeface="Cambria Math" panose="02040503050406030204" pitchFamily="18" charset="0"/>
-                      </a:rPr>
-                      <m:t>.</m:t>
-                    </m:r>
-                    <m:r>
-                      <a:rPr lang="fr-FR" i="1">
-                        <a:latin typeface="Cambria Math" panose="02040503050406030204" pitchFamily="18" charset="0"/>
-                      </a:rPr>
-                      <m:t>25</m:t>
+                      <m:t>=1.25</m:t>
                     </m:r>
                   </m:oMath>
                 </a14:m>
@@ -9870,7 +10106,7 @@
                             <a:latin typeface="Cambria Math" panose="02040503050406030204" pitchFamily="18" charset="0"/>
                             <a:sym typeface="Wingdings" panose="05000000000000000000" pitchFamily="2" charset="2"/>
                           </a:rPr>
-                          <m:t>.</m:t>
+                          <m:t>×</m:t>
                         </m:r>
                         <m:r>
                           <a:rPr lang="fr-FR" b="0" i="1" smtClean="0">
@@ -9886,14 +10122,7 @@
                             <a:latin typeface="Cambria Math" panose="02040503050406030204" pitchFamily="18" charset="0"/>
                             <a:sym typeface="Wingdings" panose="05000000000000000000" pitchFamily="2" charset="2"/>
                           </a:rPr>
-                          <m:t>−</m:t>
-                        </m:r>
-                        <m:r>
-                          <a:rPr lang="fr-FR" b="0" i="1" smtClean="0">
-                            <a:latin typeface="Cambria Math" panose="02040503050406030204" pitchFamily="18" charset="0"/>
-                            <a:sym typeface="Wingdings" panose="05000000000000000000" pitchFamily="2" charset="2"/>
-                          </a:rPr>
-                          <m:t>3</m:t>
+                          <m:t>−3</m:t>
                         </m:r>
                       </m:sup>
                     </m:sSup>
@@ -9953,7 +10182,7 @@
             </p:txBody>
           </p:sp>
         </mc:Choice>
-        <mc:Fallback xmlns="">
+        <mc:Fallback>
           <p:sp>
             <p:nvSpPr>
               <p:cNvPr id="3" name="Espace réservé du contenu 2">
@@ -9987,7 +10216,7 @@
               <a:lstStyle/>
               <a:p>
                 <a:r>
-                  <a:rPr lang="fr-FR">
+                  <a:rPr lang="en-US">
                     <a:noFill/>
                   </a:rPr>
                   <a:t> </a:t>
@@ -10158,13 +10387,7 @@
                                     <a:rPr lang="fr-FR" b="0" i="1" smtClean="0">
                                       <a:latin typeface="Cambria Math" panose="02040503050406030204" pitchFamily="18" charset="0"/>
                                     </a:rPr>
-                                    <m:t>−</m:t>
-                                  </m:r>
-                                  <m:r>
-                                    <a:rPr lang="fr-FR" b="0" i="1" smtClean="0">
-                                      <a:latin typeface="Cambria Math" panose="02040503050406030204" pitchFamily="18" charset="0"/>
-                                    </a:rPr>
-                                    <m:t>4</m:t>
+                                    <m:t>−4</m:t>
                                   </m:r>
                                 </m:sup>
                               </m:sSup>
@@ -10241,13 +10464,7 @@
                                     <a:rPr lang="fr-FR" b="0" i="1" smtClean="0">
                                       <a:latin typeface="Cambria Math" panose="02040503050406030204" pitchFamily="18" charset="0"/>
                                     </a:rPr>
-                                    <m:t>−</m:t>
-                                  </m:r>
-                                  <m:r>
-                                    <a:rPr lang="fr-FR" b="0" i="1" smtClean="0">
-                                      <a:latin typeface="Cambria Math" panose="02040503050406030204" pitchFamily="18" charset="0"/>
-                                    </a:rPr>
-                                    <m:t>4</m:t>
+                                    <m:t>−4</m:t>
                                   </m:r>
                                 </m:sup>
                               </m:sSup>
@@ -10324,13 +10541,7 @@
                                     <a:rPr lang="fr-FR" b="0" i="1" smtClean="0">
                                       <a:latin typeface="Cambria Math" panose="02040503050406030204" pitchFamily="18" charset="0"/>
                                     </a:rPr>
-                                    <m:t>−</m:t>
-                                  </m:r>
-                                  <m:r>
-                                    <a:rPr lang="fr-FR" b="0" i="1" smtClean="0">
-                                      <a:latin typeface="Cambria Math" panose="02040503050406030204" pitchFamily="18" charset="0"/>
-                                    </a:rPr>
-                                    <m:t>3</m:t>
+                                    <m:t>−3</m:t>
                                   </m:r>
                                 </m:sup>
                               </m:sSup>
@@ -11408,7 +11619,55 @@
                       <a:rPr lang="fr-FR" b="0" i="1" smtClean="0">
                         <a:latin typeface="Cambria Math" panose="02040503050406030204" pitchFamily="18" charset="0"/>
                       </a:rPr>
-                      <m:t>(42.5,3.75) </m:t>
+                      <m:t>(</m:t>
+                    </m:r>
+                    <m:r>
+                      <a:rPr lang="fr-FR" b="0" i="1" smtClean="0">
+                        <a:latin typeface="Cambria Math" panose="02040503050406030204" pitchFamily="18" charset="0"/>
+                      </a:rPr>
+                      <m:t>42</m:t>
+                    </m:r>
+                    <m:r>
+                      <a:rPr lang="fr-FR" b="0" i="1" smtClean="0">
+                        <a:latin typeface="Cambria Math" panose="02040503050406030204" pitchFamily="18" charset="0"/>
+                      </a:rPr>
+                      <m:t>.</m:t>
+                    </m:r>
+                    <m:r>
+                      <a:rPr lang="fr-FR" b="0" i="1" smtClean="0">
+                        <a:latin typeface="Cambria Math" panose="02040503050406030204" pitchFamily="18" charset="0"/>
+                      </a:rPr>
+                      <m:t>5</m:t>
+                    </m:r>
+                    <m:r>
+                      <a:rPr lang="fr-FR" b="0" i="1" smtClean="0">
+                        <a:latin typeface="Cambria Math" panose="02040503050406030204" pitchFamily="18" charset="0"/>
+                      </a:rPr>
+                      <m:t>,</m:t>
+                    </m:r>
+                    <m:r>
+                      <a:rPr lang="fr-FR" b="0" i="1" smtClean="0">
+                        <a:latin typeface="Cambria Math" panose="02040503050406030204" pitchFamily="18" charset="0"/>
+                      </a:rPr>
+                      <m:t>3</m:t>
+                    </m:r>
+                    <m:r>
+                      <a:rPr lang="fr-FR" b="0" i="1" smtClean="0">
+                        <a:latin typeface="Cambria Math" panose="02040503050406030204" pitchFamily="18" charset="0"/>
+                      </a:rPr>
+                      <m:t>.</m:t>
+                    </m:r>
+                    <m:r>
+                      <a:rPr lang="fr-FR" b="0" i="1" smtClean="0">
+                        <a:latin typeface="Cambria Math" panose="02040503050406030204" pitchFamily="18" charset="0"/>
+                      </a:rPr>
+                      <m:t>75</m:t>
+                    </m:r>
+                    <m:r>
+                      <a:rPr lang="fr-FR" b="0" i="1" smtClean="0">
+                        <a:latin typeface="Cambria Math" panose="02040503050406030204" pitchFamily="18" charset="0"/>
+                      </a:rPr>
+                      <m:t>) </m:t>
                     </m:r>
                     <m:r>
                       <a:rPr lang="fr-FR" b="0" i="1" smtClean="0">
@@ -11537,7 +11796,43 @@
                             <a:rPr lang="fr-FR" b="0" i="1" smtClean="0">
                               <a:latin typeface="Cambria Math" panose="02040503050406030204" pitchFamily="18" charset="0"/>
                             </a:rPr>
-                            <m:t>0.525,0.19</m:t>
+                            <m:t>0</m:t>
+                          </m:r>
+                          <m:r>
+                            <a:rPr lang="fr-FR" b="0" i="1" smtClean="0">
+                              <a:latin typeface="Cambria Math" panose="02040503050406030204" pitchFamily="18" charset="0"/>
+                            </a:rPr>
+                            <m:t>.</m:t>
+                          </m:r>
+                          <m:r>
+                            <a:rPr lang="fr-FR" b="0" i="1" smtClean="0">
+                              <a:latin typeface="Cambria Math" panose="02040503050406030204" pitchFamily="18" charset="0"/>
+                            </a:rPr>
+                            <m:t>525</m:t>
+                          </m:r>
+                          <m:r>
+                            <a:rPr lang="fr-FR" b="0" i="1" smtClean="0">
+                              <a:latin typeface="Cambria Math" panose="02040503050406030204" pitchFamily="18" charset="0"/>
+                            </a:rPr>
+                            <m:t>,</m:t>
+                          </m:r>
+                          <m:r>
+                            <a:rPr lang="fr-FR" b="0" i="1" smtClean="0">
+                              <a:latin typeface="Cambria Math" panose="02040503050406030204" pitchFamily="18" charset="0"/>
+                            </a:rPr>
+                            <m:t>0</m:t>
+                          </m:r>
+                          <m:r>
+                            <a:rPr lang="fr-FR" b="0" i="1" smtClean="0">
+                              <a:latin typeface="Cambria Math" panose="02040503050406030204" pitchFamily="18" charset="0"/>
+                            </a:rPr>
+                            <m:t>.</m:t>
+                          </m:r>
+                          <m:r>
+                            <a:rPr lang="fr-FR" b="0" i="1" smtClean="0">
+                              <a:latin typeface="Cambria Math" panose="02040503050406030204" pitchFamily="18" charset="0"/>
+                            </a:rPr>
+                            <m:t>19</m:t>
                           </m:r>
                         </m:e>
                       </m:d>
@@ -11707,7 +12002,31 @@
                       <a:rPr lang="fr-FR" sz="2200" b="0" i="1" smtClean="0">
                         <a:latin typeface="Cambria Math" panose="02040503050406030204" pitchFamily="18" charset="0"/>
                       </a:rPr>
-                      <m:t>=44.91 </m:t>
+                      <m:t>=</m:t>
+                    </m:r>
+                    <m:r>
+                      <a:rPr lang="fr-FR" sz="2200" b="0" i="1" smtClean="0">
+                        <a:latin typeface="Cambria Math" panose="02040503050406030204" pitchFamily="18" charset="0"/>
+                      </a:rPr>
+                      <m:t>44</m:t>
+                    </m:r>
+                    <m:r>
+                      <a:rPr lang="fr-FR" sz="2200" b="0" i="1" smtClean="0">
+                        <a:latin typeface="Cambria Math" panose="02040503050406030204" pitchFamily="18" charset="0"/>
+                      </a:rPr>
+                      <m:t>.</m:t>
+                    </m:r>
+                    <m:r>
+                      <a:rPr lang="fr-FR" sz="2200" b="0" i="1" smtClean="0">
+                        <a:latin typeface="Cambria Math" panose="02040503050406030204" pitchFamily="18" charset="0"/>
+                      </a:rPr>
+                      <m:t>91</m:t>
+                    </m:r>
+                    <m:r>
+                      <a:rPr lang="fr-FR" sz="2200" b="0" i="1" smtClean="0">
+                        <a:latin typeface="Cambria Math" panose="02040503050406030204" pitchFamily="18" charset="0"/>
+                      </a:rPr>
+                      <m:t> </m:t>
                     </m:r>
                     <m:r>
                       <m:rPr>
@@ -11900,8 +12219,8 @@
           </a:p>
         </p:txBody>
       </p:sp>
-      <mc:AlternateContent xmlns:mc="http://schemas.openxmlformats.org/markup-compatibility/2006" xmlns:a14="http://schemas.microsoft.com/office/drawing/2010/main">
-        <mc:Choice Requires="a14">
+      <mc:AlternateContent xmlns:mc="http://schemas.openxmlformats.org/markup-compatibility/2006">
+        <mc:Choice xmlns:a14="http://schemas.microsoft.com/office/drawing/2010/main" Requires="a14">
           <p:sp>
             <p:nvSpPr>
               <p:cNvPr id="3" name="Content Placeholder 2">
@@ -11918,7 +12237,12 @@
                 <p:ph idx="1"/>
               </p:nvPr>
             </p:nvSpPr>
-            <p:spPr/>
+            <p:spPr>
+              <a:xfrm>
+                <a:off x="838200" y="1855122"/>
+                <a:ext cx="10515600" cy="4351338"/>
+              </a:xfrm>
+            </p:spPr>
             <p:txBody>
               <a:bodyPr/>
               <a:lstStyle/>
@@ -12118,7 +12442,19 @@
                               <a:rPr lang="fr-FR" b="0" i="1" smtClean="0">
                                 <a:latin typeface="Cambria Math" panose="02040503050406030204" pitchFamily="18" charset="0"/>
                               </a:rPr>
-                              <m:t>0.87</m:t>
+                              <m:t>0</m:t>
+                            </m:r>
+                            <m:r>
+                              <a:rPr lang="fr-FR" b="0" i="1" smtClean="0">
+                                <a:latin typeface="Cambria Math" panose="02040503050406030204" pitchFamily="18" charset="0"/>
+                              </a:rPr>
+                              <m:t>.</m:t>
+                            </m:r>
+                            <m:r>
+                              <a:rPr lang="fr-FR" b="0" i="1" smtClean="0">
+                                <a:latin typeface="Cambria Math" panose="02040503050406030204" pitchFamily="18" charset="0"/>
+                              </a:rPr>
+                              <m:t>87</m:t>
                             </m:r>
                           </m:e>
                           <m:sup>
@@ -12149,7 +12485,19 @@
                               <a:rPr lang="fr-FR" b="0" i="1" smtClean="0">
                                 <a:latin typeface="Cambria Math" panose="02040503050406030204" pitchFamily="18" charset="0"/>
                               </a:rPr>
-                              <m:t>44.91</m:t>
+                              <m:t>44</m:t>
+                            </m:r>
+                            <m:r>
+                              <a:rPr lang="fr-FR" b="0" i="1" smtClean="0">
+                                <a:latin typeface="Cambria Math" panose="02040503050406030204" pitchFamily="18" charset="0"/>
+                              </a:rPr>
+                              <m:t>.</m:t>
+                            </m:r>
+                            <m:r>
+                              <a:rPr lang="fr-FR" b="0" i="1" smtClean="0">
+                                <a:latin typeface="Cambria Math" panose="02040503050406030204" pitchFamily="18" charset="0"/>
+                              </a:rPr>
+                              <m:t>91</m:t>
                             </m:r>
                           </m:e>
                           <m:sup>
@@ -12167,39 +12515,97 @@
                           </a:rPr>
                           <m:t>+</m:t>
                         </m:r>
-                        <m:sSubSup>
-                          <m:sSubSupPr>
+                        <m:sSup>
+                          <m:sSupPr>
                             <m:ctrlPr>
+                              <a:rPr lang="fr-FR" i="1">
+                                <a:latin typeface="Cambria Math" panose="02040503050406030204" pitchFamily="18" charset="0"/>
+                                <a:sym typeface="Wingdings" panose="05000000000000000000" pitchFamily="2" charset="2"/>
+                              </a:rPr>
+                            </m:ctrlPr>
+                          </m:sSupPr>
+                          <m:e>
+                            <m:r>
                               <a:rPr lang="fr-FR" b="0" i="1" smtClean="0">
                                 <a:latin typeface="Cambria Math" panose="02040503050406030204" pitchFamily="18" charset="0"/>
-                              </a:rPr>
-                            </m:ctrlPr>
-                          </m:sSubSupPr>
-                          <m:e>
+                                <a:sym typeface="Wingdings" panose="05000000000000000000" pitchFamily="2" charset="2"/>
+                              </a:rPr>
+                              <m:t>(</m:t>
+                            </m:r>
+                            <m:r>
+                              <a:rPr lang="fr-FR" i="1">
+                                <a:latin typeface="Cambria Math" panose="02040503050406030204" pitchFamily="18" charset="0"/>
+                                <a:sym typeface="Wingdings" panose="05000000000000000000" pitchFamily="2" charset="2"/>
+                              </a:rPr>
+                              <m:t>1</m:t>
+                            </m:r>
+                            <m:r>
+                              <a:rPr lang="fr-FR" i="1">
+                                <a:latin typeface="Cambria Math" panose="02040503050406030204" pitchFamily="18" charset="0"/>
+                                <a:sym typeface="Wingdings" panose="05000000000000000000" pitchFamily="2" charset="2"/>
+                              </a:rPr>
+                              <m:t>,</m:t>
+                            </m:r>
+                            <m:r>
+                              <a:rPr lang="fr-FR" i="1">
+                                <a:latin typeface="Cambria Math" panose="02040503050406030204" pitchFamily="18" charset="0"/>
+                                <a:sym typeface="Wingdings" panose="05000000000000000000" pitchFamily="2" charset="2"/>
+                              </a:rPr>
+                              <m:t>1</m:t>
+                            </m:r>
                             <m:r>
                               <a:rPr lang="fr-FR" b="0" i="1" smtClean="0">
                                 <a:latin typeface="Cambria Math" panose="02040503050406030204" pitchFamily="18" charset="0"/>
-                              </a:rPr>
-                              <m:t>𝑢</m:t>
+                                <a:sym typeface="Wingdings" panose="05000000000000000000" pitchFamily="2" charset="2"/>
+                              </a:rPr>
+                              <m:t>1</m:t>
+                            </m:r>
+                            <m:r>
+                              <a:rPr lang="fr-FR" i="1">
+                                <a:latin typeface="Cambria Math" panose="02040503050406030204" pitchFamily="18" charset="0"/>
+                                <a:sym typeface="Wingdings" panose="05000000000000000000" pitchFamily="2" charset="2"/>
+                              </a:rPr>
+                              <m:t>×</m:t>
+                            </m:r>
+                            <m:r>
+                              <a:rPr lang="fr-FR" i="1">
+                                <a:latin typeface="Cambria Math" panose="02040503050406030204" pitchFamily="18" charset="0"/>
+                                <a:sym typeface="Wingdings" panose="05000000000000000000" pitchFamily="2" charset="2"/>
+                              </a:rPr>
+                              <m:t>10</m:t>
                             </m:r>
                           </m:e>
-                          <m:sub>
-                            <m:r>
-                              <a:rPr lang="fr-FR" b="0" i="1" smtClean="0">
-                                <a:latin typeface="Cambria Math" panose="02040503050406030204" pitchFamily="18" charset="0"/>
-                              </a:rPr>
-                              <m:t>𝑛𝑢𝑚</m:t>
-                            </m:r>
-                          </m:sub>
                           <m:sup>
                             <m:r>
-                              <a:rPr lang="fr-FR" b="0" i="1" smtClean="0">
-                                <a:latin typeface="Cambria Math" panose="02040503050406030204" pitchFamily="18" charset="0"/>
-                              </a:rPr>
-                              <m:t>2</m:t>
+                              <a:rPr lang="fr-FR" i="1">
+                                <a:latin typeface="Cambria Math" panose="02040503050406030204" pitchFamily="18" charset="0"/>
+                                <a:sym typeface="Wingdings" panose="05000000000000000000" pitchFamily="2" charset="2"/>
+                              </a:rPr>
+                              <m:t>−</m:t>
+                            </m:r>
+                            <m:r>
+                              <a:rPr lang="fr-FR" i="1">
+                                <a:latin typeface="Cambria Math" panose="02040503050406030204" pitchFamily="18" charset="0"/>
+                                <a:sym typeface="Wingdings" panose="05000000000000000000" pitchFamily="2" charset="2"/>
+                              </a:rPr>
+                              <m:t>3</m:t>
                             </m:r>
                           </m:sup>
-                        </m:sSubSup>
+                        </m:sSup>
+                        <m:r>
+                          <a:rPr lang="fr-FR" b="0" i="1" smtClean="0">
+                            <a:latin typeface="Cambria Math" panose="02040503050406030204" pitchFamily="18" charset="0"/>
+                            <a:sym typeface="Wingdings" panose="05000000000000000000" pitchFamily="2" charset="2"/>
+                          </a:rPr>
+                          <m:t>)</m:t>
+                        </m:r>
+                        <m:r>
+                          <a:rPr lang="fr-FR" b="0" i="1" smtClean="0">
+                            <a:latin typeface="Cambria Math" panose="02040503050406030204" pitchFamily="18" charset="0"/>
+                            <a:sym typeface="Wingdings" panose="05000000000000000000" pitchFamily="2" charset="2"/>
+                          </a:rPr>
+                          <m:t>²</m:t>
+                        </m:r>
                       </m:e>
                     </m:rad>
                     <m:r>
@@ -12207,6 +12613,30 @@
                         <a:latin typeface="Cambria Math" panose="02040503050406030204" pitchFamily="18" charset="0"/>
                       </a:rPr>
                       <m:t>= </m:t>
+                    </m:r>
+                    <m:r>
+                      <a:rPr lang="fr-FR" b="0" i="1" smtClean="0">
+                        <a:latin typeface="Cambria Math" panose="02040503050406030204" pitchFamily="18" charset="0"/>
+                      </a:rPr>
+                      <m:t>44</m:t>
+                    </m:r>
+                    <m:r>
+                      <a:rPr lang="fr-FR" b="0" i="1" smtClean="0">
+                        <a:latin typeface="Cambria Math" panose="02040503050406030204" pitchFamily="18" charset="0"/>
+                      </a:rPr>
+                      <m:t>.</m:t>
+                    </m:r>
+                    <m:r>
+                      <a:rPr lang="fr-FR" b="0" i="1" smtClean="0">
+                        <a:latin typeface="Cambria Math" panose="02040503050406030204" pitchFamily="18" charset="0"/>
+                      </a:rPr>
+                      <m:t>92</m:t>
+                    </m:r>
+                    <m:r>
+                      <a:rPr lang="fr-FR" b="0" i="1" smtClean="0">
+                        <a:latin typeface="Cambria Math" panose="02040503050406030204" pitchFamily="18" charset="0"/>
+                      </a:rPr>
+                      <m:t> </m:t>
                     </m:r>
                     <m:r>
                       <m:rPr>
@@ -12238,10 +12668,189 @@
                   <a:t> </a:t>
                 </a:r>
               </a:p>
+              <a:p>
+                <a:endParaRPr lang="en-US" dirty="0"/>
+              </a:p>
+              <a:p>
+                <a:pPr marL="0" indent="0">
+                  <a:buNone/>
+                </a:pPr>
+                <a14:m>
+                  <m:oMath xmlns:m="http://schemas.openxmlformats.org/officeDocument/2006/math">
+                    <m:r>
+                      <a:rPr lang="fr-FR" b="1" i="0" smtClean="0">
+                        <a:latin typeface="Cambria Math" panose="02040503050406030204" pitchFamily="18" charset="0"/>
+                      </a:rPr>
+                      <m:t>-</m:t>
+                    </m:r>
+                    <m:r>
+                      <a:rPr lang="fr-FR" b="1" i="0" smtClean="0">
+                        <a:latin typeface="Cambria Math" panose="02040503050406030204" pitchFamily="18" charset="0"/>
+                      </a:rPr>
+                      <m:t>𝟕𝟖</m:t>
+                    </m:r>
+                    <m:r>
+                      <a:rPr lang="fr-FR" b="1" i="0" smtClean="0">
+                        <a:latin typeface="Cambria Math" panose="02040503050406030204" pitchFamily="18" charset="0"/>
+                      </a:rPr>
+                      <m:t>.</m:t>
+                    </m:r>
+                    <m:r>
+                      <a:rPr lang="fr-FR" b="1" i="0" smtClean="0">
+                        <a:latin typeface="Cambria Math" panose="02040503050406030204" pitchFamily="18" charset="0"/>
+                      </a:rPr>
+                      <m:t>𝟎𝟒</m:t>
+                    </m:r>
+                    <m:r>
+                      <a:rPr lang="fr-FR" b="1" i="0" smtClean="0">
+                        <a:latin typeface="Cambria Math" panose="02040503050406030204" pitchFamily="18" charset="0"/>
+                      </a:rPr>
+                      <m:t> </m:t>
+                    </m:r>
+                    <m:r>
+                      <a:rPr lang="fr-FR" b="1" i="0" smtClean="0">
+                        <a:latin typeface="Cambria Math" panose="02040503050406030204" pitchFamily="18" charset="0"/>
+                      </a:rPr>
+                      <m:t>𝐊</m:t>
+                    </m:r>
+                    <m:r>
+                      <a:rPr lang="fr-FR" b="1" i="0" smtClean="0">
+                        <a:latin typeface="Cambria Math" panose="02040503050406030204" pitchFamily="18" charset="0"/>
+                      </a:rPr>
+                      <m:t>&lt;</m:t>
+                    </m:r>
+                    <m:sSub>
+                      <m:sSubPr>
+                        <m:ctrlPr>
+                          <a:rPr lang="fr-FR" b="1">
+                            <a:latin typeface="Cambria Math" panose="02040503050406030204" pitchFamily="18" charset="0"/>
+                          </a:rPr>
+                        </m:ctrlPr>
+                      </m:sSubPr>
+                      <m:e>
+                        <m:r>
+                          <a:rPr lang="fr-FR" b="1" i="0">
+                            <a:latin typeface="Cambria Math" panose="02040503050406030204" pitchFamily="18" charset="0"/>
+                          </a:rPr>
+                          <m:t>𝛅</m:t>
+                        </m:r>
+                      </m:e>
+                      <m:sub>
+                        <m:r>
+                          <a:rPr lang="fr-FR" b="1" i="0">
+                            <a:latin typeface="Cambria Math" panose="02040503050406030204" pitchFamily="18" charset="0"/>
+                          </a:rPr>
+                          <m:t>𝐦𝐨𝐝𝐞𝐥</m:t>
+                        </m:r>
+                      </m:sub>
+                    </m:sSub>
+                    <m:r>
+                      <a:rPr lang="fr-FR" b="1" i="0" smtClean="0">
+                        <a:latin typeface="Cambria Math" panose="02040503050406030204" pitchFamily="18" charset="0"/>
+                      </a:rPr>
+                      <m:t> &lt;</m:t>
+                    </m:r>
+                    <m:r>
+                      <a:rPr lang="fr-FR" b="1" i="0" smtClean="0">
+                        <a:latin typeface="Cambria Math" panose="02040503050406030204" pitchFamily="18" charset="0"/>
+                      </a:rPr>
+                      <m:t>𝟏𝟎𝟏</m:t>
+                    </m:r>
+                    <m:r>
+                      <a:rPr lang="fr-FR" b="1" i="0" smtClean="0">
+                        <a:latin typeface="Cambria Math" panose="02040503050406030204" pitchFamily="18" charset="0"/>
+                      </a:rPr>
+                      <m:t>.</m:t>
+                    </m:r>
+                    <m:r>
+                      <a:rPr lang="fr-FR" b="1" i="0" smtClean="0">
+                        <a:latin typeface="Cambria Math" panose="02040503050406030204" pitchFamily="18" charset="0"/>
+                      </a:rPr>
+                      <m:t>𝟔𝟒</m:t>
+                    </m:r>
+                    <m:r>
+                      <a:rPr lang="fr-FR" b="1" i="0" smtClean="0">
+                        <a:latin typeface="Cambria Math" panose="02040503050406030204" pitchFamily="18" charset="0"/>
+                      </a:rPr>
+                      <m:t> </m:t>
+                    </m:r>
+                    <m:r>
+                      <a:rPr lang="fr-FR" b="1" i="0" smtClean="0">
+                        <a:latin typeface="Cambria Math" panose="02040503050406030204" pitchFamily="18" charset="0"/>
+                      </a:rPr>
+                      <m:t>𝐊</m:t>
+                    </m:r>
+                  </m:oMath>
+                </a14:m>
+                <a:r>
+                  <a:rPr lang="en-US" b="1" dirty="0"/>
+                  <a:t> </a:t>
+                </a:r>
+              </a:p>
+              <a:p>
+                <a:pPr marL="0" indent="0">
+                  <a:buNone/>
+                </a:pPr>
+                <a:endParaRPr lang="en-US" b="1" dirty="0"/>
+              </a:p>
+              <a:p>
+                <a:pPr marL="0" indent="0">
+                  <a:buNone/>
+                </a:pPr>
+                <a14:m>
+                  <m:oMath xmlns:m="http://schemas.openxmlformats.org/officeDocument/2006/math">
+                    <m:r>
+                      <a:rPr lang="en-US" b="1" i="1" smtClean="0">
+                        <a:latin typeface="Cambria Math" panose="02040503050406030204" pitchFamily="18" charset="0"/>
+                      </a:rPr>
+                      <m:t>⇒</m:t>
+                    </m:r>
+                    <m:r>
+                      <a:rPr lang="fr-FR" b="1" i="1" smtClean="0">
+                        <a:latin typeface="Cambria Math" panose="02040503050406030204" pitchFamily="18" charset="0"/>
+                      </a:rPr>
+                      <m:t> </m:t>
+                    </m:r>
+                  </m:oMath>
+                </a14:m>
+                <a:r>
+                  <a:rPr lang="en-US" b="1" dirty="0"/>
+                  <a:t> </a:t>
+                </a:r>
+                <a:r>
+                  <a:rPr lang="en-US" b="1" dirty="0" err="1"/>
+                  <a:t>Amélioration</a:t>
+                </a:r>
+                <a:r>
+                  <a:rPr lang="en-US" b="1" dirty="0"/>
+                  <a:t> sur </a:t>
+                </a:r>
+                <a:r>
+                  <a:rPr lang="en-US" b="1" dirty="0" err="1"/>
+                  <a:t>l’incertitude</a:t>
+                </a:r>
+                <a:r>
+                  <a:rPr lang="en-US" b="1" dirty="0"/>
+                  <a:t> de </a:t>
+                </a:r>
+                <a:r>
+                  <a:rPr lang="en-US" b="1" dirty="0" err="1"/>
+                  <a:t>l’émissivité</a:t>
+                </a:r>
+                <a:r>
+                  <a:rPr lang="en-US" b="1" dirty="0"/>
+                  <a:t> </a:t>
+                </a:r>
+                <a:r>
+                  <a:rPr lang="en-US" b="1" dirty="0" err="1"/>
+                  <a:t>nécessaire</a:t>
+                </a:r>
+                <a:endParaRPr lang="en-US" b="1" dirty="0"/>
+              </a:p>
             </p:txBody>
           </p:sp>
         </mc:Choice>
-        <mc:Fallback xmlns="">
+        <mc:Fallback>
           <p:sp>
             <p:nvSpPr>
               <p:cNvPr id="3" name="Content Placeholder 2">
@@ -12259,6 +12868,10 @@
               </p:nvPr>
             </p:nvSpPr>
             <p:spPr>
+              <a:xfrm>
+                <a:off x="838200" y="1855122"/>
+                <a:ext cx="10515600" cy="4351338"/>
+              </a:xfrm>
               <a:blipFill>
                 <a:blip r:embed="rId2"/>
                 <a:stretch>
@@ -12281,6 +12894,183 @@
           </p:sp>
         </mc:Fallback>
       </mc:AlternateContent>
+      <p:sp>
+        <p:nvSpPr>
+          <p:cNvPr id="4" name="Rectangle 3">
+            <a:extLst>
+              <a:ext uri="{FF2B5EF4-FFF2-40B4-BE49-F238E27FC236}">
+                <a16:creationId xmlns:a16="http://schemas.microsoft.com/office/drawing/2014/main" id="{806A440F-4525-4755-9716-F3DDCC775AB6}"/>
+              </a:ext>
+            </a:extLst>
+          </p:cNvPr>
+          <p:cNvSpPr/>
+          <p:nvPr/>
+        </p:nvSpPr>
+        <p:spPr>
+          <a:xfrm>
+            <a:off x="838200" y="3932141"/>
+            <a:ext cx="5312780" cy="488220"/>
+          </a:xfrm>
+          <a:prstGeom prst="rect">
+            <a:avLst/>
+          </a:prstGeom>
+          <a:noFill/>
+          <a:ln w="28575">
+            <a:solidFill>
+              <a:schemeClr val="tx1"/>
+            </a:solidFill>
+          </a:ln>
+        </p:spPr>
+        <p:style>
+          <a:lnRef idx="2">
+            <a:schemeClr val="accent1">
+              <a:shade val="15000"/>
+            </a:schemeClr>
+          </a:lnRef>
+          <a:fillRef idx="1">
+            <a:schemeClr val="accent1"/>
+          </a:fillRef>
+          <a:effectRef idx="0">
+            <a:schemeClr val="accent1"/>
+          </a:effectRef>
+          <a:fontRef idx="minor">
+            <a:schemeClr val="lt1"/>
+          </a:fontRef>
+        </p:style>
+        <p:txBody>
+          <a:bodyPr rtlCol="0" anchor="ctr"/>
+          <a:lstStyle>
+            <a:defPPr>
+              <a:defRPr lang="fr-FR"/>
+            </a:defPPr>
+            <a:lvl1pPr marL="0" algn="l" defTabSz="914400" rtl="0" eaLnBrk="1" latinLnBrk="0" hangingPunct="1">
+              <a:defRPr sz="1800" kern="1200">
+                <a:solidFill>
+                  <a:schemeClr val="lt1"/>
+                </a:solidFill>
+                <a:latin typeface="+mn-lt"/>
+                <a:ea typeface="+mn-ea"/>
+                <a:cs typeface="+mn-cs"/>
+              </a:defRPr>
+            </a:lvl1pPr>
+            <a:lvl2pPr marL="457200" algn="l" defTabSz="914400" rtl="0" eaLnBrk="1" latinLnBrk="0" hangingPunct="1">
+              <a:defRPr sz="1800" kern="1200">
+                <a:solidFill>
+                  <a:schemeClr val="lt1"/>
+                </a:solidFill>
+                <a:latin typeface="+mn-lt"/>
+                <a:ea typeface="+mn-ea"/>
+                <a:cs typeface="+mn-cs"/>
+              </a:defRPr>
+            </a:lvl2pPr>
+            <a:lvl3pPr marL="914400" algn="l" defTabSz="914400" rtl="0" eaLnBrk="1" latinLnBrk="0" hangingPunct="1">
+              <a:defRPr sz="1800" kern="1200">
+                <a:solidFill>
+                  <a:schemeClr val="lt1"/>
+                </a:solidFill>
+                <a:latin typeface="+mn-lt"/>
+                <a:ea typeface="+mn-ea"/>
+                <a:cs typeface="+mn-cs"/>
+              </a:defRPr>
+            </a:lvl3pPr>
+            <a:lvl4pPr marL="1371600" algn="l" defTabSz="914400" rtl="0" eaLnBrk="1" latinLnBrk="0" hangingPunct="1">
+              <a:defRPr sz="1800" kern="1200">
+                <a:solidFill>
+                  <a:schemeClr val="lt1"/>
+                </a:solidFill>
+                <a:latin typeface="+mn-lt"/>
+                <a:ea typeface="+mn-ea"/>
+                <a:cs typeface="+mn-cs"/>
+              </a:defRPr>
+            </a:lvl4pPr>
+            <a:lvl5pPr marL="1828800" algn="l" defTabSz="914400" rtl="0" eaLnBrk="1" latinLnBrk="0" hangingPunct="1">
+              <a:defRPr sz="1800" kern="1200">
+                <a:solidFill>
+                  <a:schemeClr val="lt1"/>
+                </a:solidFill>
+                <a:latin typeface="+mn-lt"/>
+                <a:ea typeface="+mn-ea"/>
+                <a:cs typeface="+mn-cs"/>
+              </a:defRPr>
+            </a:lvl5pPr>
+            <a:lvl6pPr marL="2286000" algn="l" defTabSz="914400" rtl="0" eaLnBrk="1" latinLnBrk="0" hangingPunct="1">
+              <a:defRPr sz="1800" kern="1200">
+                <a:solidFill>
+                  <a:schemeClr val="lt1"/>
+                </a:solidFill>
+                <a:latin typeface="+mn-lt"/>
+                <a:ea typeface="+mn-ea"/>
+                <a:cs typeface="+mn-cs"/>
+              </a:defRPr>
+            </a:lvl6pPr>
+            <a:lvl7pPr marL="2743200" algn="l" defTabSz="914400" rtl="0" eaLnBrk="1" latinLnBrk="0" hangingPunct="1">
+              <a:defRPr sz="1800" kern="1200">
+                <a:solidFill>
+                  <a:schemeClr val="lt1"/>
+                </a:solidFill>
+                <a:latin typeface="+mn-lt"/>
+                <a:ea typeface="+mn-ea"/>
+                <a:cs typeface="+mn-cs"/>
+              </a:defRPr>
+            </a:lvl7pPr>
+            <a:lvl8pPr marL="3200400" algn="l" defTabSz="914400" rtl="0" eaLnBrk="1" latinLnBrk="0" hangingPunct="1">
+              <a:defRPr sz="1800" kern="1200">
+                <a:solidFill>
+                  <a:schemeClr val="lt1"/>
+                </a:solidFill>
+                <a:latin typeface="+mn-lt"/>
+                <a:ea typeface="+mn-ea"/>
+                <a:cs typeface="+mn-cs"/>
+              </a:defRPr>
+            </a:lvl8pPr>
+            <a:lvl9pPr marL="3657600" algn="l" defTabSz="914400" rtl="0" eaLnBrk="1" latinLnBrk="0" hangingPunct="1">
+              <a:defRPr sz="1800" kern="1200">
+                <a:solidFill>
+                  <a:schemeClr val="lt1"/>
+                </a:solidFill>
+                <a:latin typeface="+mn-lt"/>
+                <a:ea typeface="+mn-ea"/>
+                <a:cs typeface="+mn-cs"/>
+              </a:defRPr>
+            </a:lvl9pPr>
+          </a:lstStyle>
+          <a:p>
+            <a:pPr algn="ctr"/>
+            <a:endParaRPr lang="fr-FR"/>
+          </a:p>
+        </p:txBody>
+      </p:sp>
+      <p:pic>
+        <p:nvPicPr>
+          <p:cNvPr id="6" name="Picture 5">
+            <a:extLst>
+              <a:ext uri="{FF2B5EF4-FFF2-40B4-BE49-F238E27FC236}">
+                <a16:creationId xmlns:a16="http://schemas.microsoft.com/office/drawing/2014/main" id="{BA00158C-C960-342C-B0C7-9E64CB5F528C}"/>
+              </a:ext>
+            </a:extLst>
+          </p:cNvPr>
+          <p:cNvPicPr>
+            <a:picLocks noChangeAspect="1"/>
+          </p:cNvPicPr>
+          <p:nvPr/>
+        </p:nvPicPr>
+        <p:blipFill>
+          <a:blip r:embed="rId3"/>
+          <a:srcRect l="10238" b="2376"/>
+          <a:stretch>
+            <a:fillRect/>
+          </a:stretch>
+        </p:blipFill>
+        <p:spPr>
+          <a:xfrm>
+            <a:off x="6351639" y="3893193"/>
+            <a:ext cx="5002161" cy="566116"/>
+          </a:xfrm>
+          <a:prstGeom prst="rect">
+            <a:avLst/>
+          </a:prstGeom>
+        </p:spPr>
+      </p:pic>
     </p:spTree>
     <p:extLst>
       <p:ext uri="{BB962C8B-B14F-4D97-AF65-F5344CB8AC3E}">
@@ -15804,7 +16594,13 @@
                               <a:rPr lang="fr-FR" b="0" i="1" smtClean="0">
                                 <a:latin typeface="Cambria Math" panose="02040503050406030204" pitchFamily="18" charset="0"/>
                               </a:rPr>
-                              <m:t>+1</m:t>
+                              <m:t>+</m:t>
+                            </m:r>
+                            <m:r>
+                              <a:rPr lang="fr-FR" b="0" i="1" smtClean="0">
+                                <a:latin typeface="Cambria Math" panose="02040503050406030204" pitchFamily="18" charset="0"/>
+                              </a:rPr>
+                              <m:t>1</m:t>
                             </m:r>
                             <m:r>
                               <a:rPr lang="fr-FR" i="1">
@@ -15861,7 +16657,13 @@
                               <a:rPr lang="fr-FR" b="0" i="1" smtClean="0">
                                 <a:latin typeface="Cambria Math" panose="02040503050406030204" pitchFamily="18" charset="0"/>
                               </a:rPr>
-                              <m:t>−1</m:t>
+                              <m:t>−</m:t>
+                            </m:r>
+                            <m:r>
+                              <a:rPr lang="fr-FR" b="0" i="1" smtClean="0">
+                                <a:latin typeface="Cambria Math" panose="02040503050406030204" pitchFamily="18" charset="0"/>
+                              </a:rPr>
+                              <m:t>1</m:t>
                             </m:r>
                             <m:r>
                               <a:rPr lang="fr-FR" i="1">
@@ -16509,7 +17311,19 @@
                                 <a:rPr lang="fr-FR" sz="2400" i="1">
                                   <a:latin typeface="Cambria Math" panose="02040503050406030204" pitchFamily="18" charset="0"/>
                                 </a:rPr>
-                                <m:t>+1,</m:t>
+                                <m:t>+</m:t>
+                              </m:r>
+                              <m:r>
+                                <a:rPr lang="fr-FR" sz="2400" i="1">
+                                  <a:latin typeface="Cambria Math" panose="02040503050406030204" pitchFamily="18" charset="0"/>
+                                </a:rPr>
+                                <m:t>1</m:t>
+                              </m:r>
+                              <m:r>
+                                <a:rPr lang="fr-FR" sz="2400" i="1">
+                                  <a:latin typeface="Cambria Math" panose="02040503050406030204" pitchFamily="18" charset="0"/>
+                                </a:rPr>
+                                <m:t>,</m:t>
                               </m:r>
                               <m:r>
                                 <a:rPr lang="fr-FR" sz="2400" i="1">
@@ -16617,7 +17431,19 @@
                                 <a:rPr lang="fr-FR" sz="2400" i="1">
                                   <a:latin typeface="Cambria Math" panose="02040503050406030204" pitchFamily="18" charset="0"/>
                                 </a:rPr>
-                                <m:t>−1,</m:t>
+                                <m:t>−</m:t>
+                              </m:r>
+                              <m:r>
+                                <a:rPr lang="fr-FR" sz="2400" i="1">
+                                  <a:latin typeface="Cambria Math" panose="02040503050406030204" pitchFamily="18" charset="0"/>
+                                </a:rPr>
+                                <m:t>1</m:t>
+                              </m:r>
+                              <m:r>
+                                <a:rPr lang="fr-FR" sz="2400" i="1">
+                                  <a:latin typeface="Cambria Math" panose="02040503050406030204" pitchFamily="18" charset="0"/>
+                                </a:rPr>
+                                <m:t>,</m:t>
                               </m:r>
                               <m:r>
                                 <a:rPr lang="fr-FR" sz="2400" i="1">
@@ -16750,7 +17576,19 @@
                                 <a:rPr lang="fr-FR" sz="2400" i="1">
                                   <a:latin typeface="Cambria Math" panose="02040503050406030204" pitchFamily="18" charset="0"/>
                                 </a:rPr>
-                                <m:t>+1,</m:t>
+                                <m:t>+</m:t>
+                              </m:r>
+                              <m:r>
+                                <a:rPr lang="fr-FR" sz="2400" i="1">
+                                  <a:latin typeface="Cambria Math" panose="02040503050406030204" pitchFamily="18" charset="0"/>
+                                </a:rPr>
+                                <m:t>1</m:t>
+                              </m:r>
+                              <m:r>
+                                <a:rPr lang="fr-FR" sz="2400" i="1">
+                                  <a:latin typeface="Cambria Math" panose="02040503050406030204" pitchFamily="18" charset="0"/>
+                                </a:rPr>
+                                <m:t>,</m:t>
                               </m:r>
                               <m:r>
                                 <a:rPr lang="fr-FR" sz="2400" i="1">
@@ -16801,7 +17639,19 @@
                                 <a:rPr lang="fr-FR" sz="2400" i="1">
                                   <a:latin typeface="Cambria Math" panose="02040503050406030204" pitchFamily="18" charset="0"/>
                                 </a:rPr>
-                                <m:t>−1,</m:t>
+                                <m:t>−</m:t>
+                              </m:r>
+                              <m:r>
+                                <a:rPr lang="fr-FR" sz="2400" i="1">
+                                  <a:latin typeface="Cambria Math" panose="02040503050406030204" pitchFamily="18" charset="0"/>
+                                </a:rPr>
+                                <m:t>1</m:t>
+                              </m:r>
+                              <m:r>
+                                <a:rPr lang="fr-FR" sz="2400" i="1">
+                                  <a:latin typeface="Cambria Math" panose="02040503050406030204" pitchFamily="18" charset="0"/>
+                                </a:rPr>
+                                <m:t>,</m:t>
                               </m:r>
                               <m:r>
                                 <a:rPr lang="fr-FR" sz="2400" i="1">
@@ -16898,7 +17748,13 @@
                                 <a:rPr lang="fr-FR" sz="2400" i="1">
                                   <a:latin typeface="Cambria Math" panose="02040503050406030204" pitchFamily="18" charset="0"/>
                                 </a:rPr>
-                                <m:t>+1</m:t>
+                                <m:t>+</m:t>
+                              </m:r>
+                              <m:r>
+                                <a:rPr lang="fr-FR" sz="2400" i="1">
+                                  <a:latin typeface="Cambria Math" panose="02040503050406030204" pitchFamily="18" charset="0"/>
+                                </a:rPr>
+                                <m:t>1</m:t>
                               </m:r>
                             </m:sub>
                             <m:sup>
@@ -17012,7 +17868,13 @@
                                 <a:rPr lang="fr-FR" sz="2400" i="1">
                                   <a:latin typeface="Cambria Math" panose="02040503050406030204" pitchFamily="18" charset="0"/>
                                 </a:rPr>
-                                <m:t>−1</m:t>
+                                <m:t>−</m:t>
+                              </m:r>
+                              <m:r>
+                                <a:rPr lang="fr-FR" sz="2400" i="1">
+                                  <a:latin typeface="Cambria Math" panose="02040503050406030204" pitchFamily="18" charset="0"/>
+                                </a:rPr>
+                                <m:t>1</m:t>
                               </m:r>
                             </m:sub>
                             <m:sup>
@@ -17358,7 +18220,21 @@
                                 <a:latin typeface="Cambria Math" panose="02040503050406030204" pitchFamily="18" charset="0"/>
                                 <a:ea typeface="Cambria Math" panose="02040503050406030204" pitchFamily="18" charset="0"/>
                               </a:rPr>
-                              <m:t>+1,</m:t>
+                              <m:t>+</m:t>
+                            </m:r>
+                            <m:r>
+                              <a:rPr lang="fr-FR" sz="2600" i="1">
+                                <a:latin typeface="Cambria Math" panose="02040503050406030204" pitchFamily="18" charset="0"/>
+                                <a:ea typeface="Cambria Math" panose="02040503050406030204" pitchFamily="18" charset="0"/>
+                              </a:rPr>
+                              <m:t>1</m:t>
+                            </m:r>
+                            <m:r>
+                              <a:rPr lang="fr-FR" sz="2600" i="1">
+                                <a:latin typeface="Cambria Math" panose="02040503050406030204" pitchFamily="18" charset="0"/>
+                                <a:ea typeface="Cambria Math" panose="02040503050406030204" pitchFamily="18" charset="0"/>
+                              </a:rPr>
+                              <m:t>,</m:t>
                             </m:r>
                             <m:r>
                               <a:rPr lang="fr-FR" sz="2600" i="1">
@@ -17481,7 +18357,21 @@
                                 <a:latin typeface="Cambria Math" panose="02040503050406030204" pitchFamily="18" charset="0"/>
                                 <a:ea typeface="Cambria Math" panose="02040503050406030204" pitchFamily="18" charset="0"/>
                               </a:rPr>
-                              <m:t>−1,</m:t>
+                              <m:t>−</m:t>
+                            </m:r>
+                            <m:r>
+                              <a:rPr lang="fr-FR" sz="2600" i="1">
+                                <a:latin typeface="Cambria Math" panose="02040503050406030204" pitchFamily="18" charset="0"/>
+                                <a:ea typeface="Cambria Math" panose="02040503050406030204" pitchFamily="18" charset="0"/>
+                              </a:rPr>
+                              <m:t>1</m:t>
+                            </m:r>
+                            <m:r>
+                              <a:rPr lang="fr-FR" sz="2600" i="1">
+                                <a:latin typeface="Cambria Math" panose="02040503050406030204" pitchFamily="18" charset="0"/>
+                                <a:ea typeface="Cambria Math" panose="02040503050406030204" pitchFamily="18" charset="0"/>
+                              </a:rPr>
+                              <m:t>,</m:t>
                             </m:r>
                             <m:r>
                               <a:rPr lang="fr-FR" sz="2600" i="1">
@@ -17750,7 +18640,13 @@
                               <a:rPr lang="fr-FR" sz="2600" i="1">
                                 <a:latin typeface="Cambria Math" panose="02040503050406030204" pitchFamily="18" charset="0"/>
                               </a:rPr>
-                              <m:t>+1</m:t>
+                              <m:t>+</m:t>
+                            </m:r>
+                            <m:r>
+                              <a:rPr lang="fr-FR" sz="2600" i="1">
+                                <a:latin typeface="Cambria Math" panose="02040503050406030204" pitchFamily="18" charset="0"/>
+                              </a:rPr>
+                              <m:t>1</m:t>
                             </m:r>
                           </m:sub>
                           <m:sup>
@@ -17864,7 +18760,13 @@
                               <a:rPr lang="fr-FR" sz="2600" i="1">
                                 <a:latin typeface="Cambria Math" panose="02040503050406030204" pitchFamily="18" charset="0"/>
                               </a:rPr>
-                              <m:t>−1</m:t>
+                              <m:t>−</m:t>
+                            </m:r>
+                            <m:r>
+                              <a:rPr lang="fr-FR" sz="2600" i="1">
+                                <a:latin typeface="Cambria Math" panose="02040503050406030204" pitchFamily="18" charset="0"/>
+                              </a:rPr>
+                              <m:t>1</m:t>
                             </m:r>
                           </m:sub>
                           <m:sup>
@@ -18221,7 +19123,16 @@
                         </a:solidFill>
                         <a:latin typeface="Cambria Math" panose="02040503050406030204" pitchFamily="18" charset="0"/>
                       </a:rPr>
-                      <m:t>=0</m:t>
+                      <m:t>=</m:t>
+                    </m:r>
+                    <m:r>
+                      <a:rPr lang="fr-CA" b="0" i="1" smtClean="0">
+                        <a:solidFill>
+                          <a:schemeClr val="accent2"/>
+                        </a:solidFill>
+                        <a:latin typeface="Cambria Math" panose="02040503050406030204" pitchFamily="18" charset="0"/>
+                      </a:rPr>
+                      <m:t>0</m:t>
                     </m:r>
                   </m:oMath>
                 </a14:m>
@@ -18350,7 +19261,16 @@
                               </a:solidFill>
                               <a:latin typeface="Cambria Math" panose="02040503050406030204" pitchFamily="18" charset="0"/>
                             </a:rPr>
-                            <m:t>−1</m:t>
+                            <m:t>−</m:t>
+                          </m:r>
+                          <m:r>
+                            <a:rPr lang="fr-CA" b="0" i="0" smtClean="0">
+                              <a:solidFill>
+                                <a:schemeClr val="accent2"/>
+                              </a:solidFill>
+                              <a:latin typeface="Cambria Math" panose="02040503050406030204" pitchFamily="18" charset="0"/>
+                            </a:rPr>
+                            <m:t>1</m:t>
                           </m:r>
                         </m:num>
                         <m:den>
@@ -18422,7 +19342,16 @@
                               </a:solidFill>
                               <a:latin typeface="Cambria Math" panose="02040503050406030204" pitchFamily="18" charset="0"/>
                             </a:rPr>
-                            <m:t>+2</m:t>
+                            <m:t>+</m:t>
+                          </m:r>
+                          <m:r>
+                            <a:rPr lang="fr-CA" b="0" i="1" smtClean="0">
+                              <a:solidFill>
+                                <a:schemeClr val="accent2"/>
+                              </a:solidFill>
+                              <a:latin typeface="Cambria Math" panose="02040503050406030204" pitchFamily="18" charset="0"/>
+                            </a:rPr>
+                            <m:t>2</m:t>
                           </m:r>
                         </m:sub>
                         <m:sup>
@@ -18541,7 +19470,16 @@
                               </a:solidFill>
                               <a:latin typeface="Cambria Math" panose="02040503050406030204" pitchFamily="18" charset="0"/>
                             </a:rPr>
-                            <m:t>+1</m:t>
+                            <m:t>+</m:t>
+                          </m:r>
+                          <m:r>
+                            <a:rPr lang="fr-CA" b="0" i="1" smtClean="0">
+                              <a:solidFill>
+                                <a:schemeClr val="accent2"/>
+                              </a:solidFill>
+                              <a:latin typeface="Cambria Math" panose="02040503050406030204" pitchFamily="18" charset="0"/>
+                            </a:rPr>
+                            <m:t>1</m:t>
                           </m:r>
                         </m:sub>
                         <m:sup>
@@ -18705,7 +19643,16 @@
                         </a:solidFill>
                         <a:latin typeface="Cambria Math" panose="02040503050406030204" pitchFamily="18" charset="0"/>
                       </a:rPr>
-                      <m:t>=0</m:t>
+                      <m:t>=</m:t>
+                    </m:r>
+                    <m:r>
+                      <a:rPr lang="fr-CA" b="0" i="1" smtClean="0">
+                        <a:solidFill>
+                          <a:srgbClr val="FFBF00"/>
+                        </a:solidFill>
+                        <a:latin typeface="Cambria Math" panose="02040503050406030204" pitchFamily="18" charset="0"/>
+                      </a:rPr>
+                      <m:t>0</m:t>
                     </m:r>
                   </m:oMath>
                 </a14:m>
@@ -18834,7 +19781,16 @@
                               </a:solidFill>
                               <a:latin typeface="Cambria Math" panose="02040503050406030204" pitchFamily="18" charset="0"/>
                             </a:rPr>
-                            <m:t>−1</m:t>
+                            <m:t>−</m:t>
+                          </m:r>
+                          <m:r>
+                            <a:rPr lang="fr-CA" b="0" i="0" smtClean="0">
+                              <a:solidFill>
+                                <a:srgbClr val="FFBF00"/>
+                              </a:solidFill>
+                              <a:latin typeface="Cambria Math" panose="02040503050406030204" pitchFamily="18" charset="0"/>
+                            </a:rPr>
+                            <m:t>1</m:t>
                           </m:r>
                         </m:num>
                         <m:den>
@@ -18906,7 +19862,16 @@
                               </a:solidFill>
                               <a:latin typeface="Cambria Math" panose="02040503050406030204" pitchFamily="18" charset="0"/>
                             </a:rPr>
-                            <m:t>+2</m:t>
+                            <m:t>+</m:t>
+                          </m:r>
+                          <m:r>
+                            <a:rPr lang="fr-CA" b="0" i="1" smtClean="0">
+                              <a:solidFill>
+                                <a:srgbClr val="FFBF00"/>
+                              </a:solidFill>
+                              <a:latin typeface="Cambria Math" panose="02040503050406030204" pitchFamily="18" charset="0"/>
+                            </a:rPr>
+                            <m:t>2</m:t>
                           </m:r>
                         </m:sub>
                         <m:sup>
@@ -19025,7 +19990,16 @@
                               </a:solidFill>
                               <a:latin typeface="Cambria Math" panose="02040503050406030204" pitchFamily="18" charset="0"/>
                             </a:rPr>
-                            <m:t>+1</m:t>
+                            <m:t>+</m:t>
+                          </m:r>
+                          <m:r>
+                            <a:rPr lang="fr-CA" b="0" i="1" smtClean="0">
+                              <a:solidFill>
+                                <a:srgbClr val="FFBF00"/>
+                              </a:solidFill>
+                              <a:latin typeface="Cambria Math" panose="02040503050406030204" pitchFamily="18" charset="0"/>
+                            </a:rPr>
+                            <m:t>1</m:t>
                           </m:r>
                         </m:sub>
                         <m:sup>
@@ -19580,7 +20554,16 @@
                                 </a:solidFill>
                                 <a:latin typeface="Cambria Math" panose="02040503050406030204" pitchFamily="18" charset="0"/>
                               </a:rPr>
-                              <m:t>−2</m:t>
+                              <m:t>−</m:t>
+                            </m:r>
+                            <m:r>
+                              <a:rPr lang="fr-CA" b="0" i="0" smtClean="0">
+                                <a:solidFill>
+                                  <a:srgbClr val="5B9BD5"/>
+                                </a:solidFill>
+                                <a:latin typeface="Cambria Math" panose="02040503050406030204" pitchFamily="18" charset="0"/>
+                              </a:rPr>
+                              <m:t>2</m:t>
                             </m:r>
                             <m:r>
                               <a:rPr lang="fr-CA" b="0" i="1" smtClean="0">
@@ -20038,7 +21021,16 @@
                             </a:solidFill>
                             <a:latin typeface="Cambria Math" panose="02040503050406030204" pitchFamily="18" charset="0"/>
                           </a:rPr>
-                          <m:t>−2</m:t>
+                          <m:t>−</m:t>
+                        </m:r>
+                        <m:r>
+                          <a:rPr lang="fr-CA" b="0" i="1" smtClean="0">
+                            <a:solidFill>
+                              <a:srgbClr val="5B9BD5"/>
+                            </a:solidFill>
+                            <a:latin typeface="Cambria Math" panose="02040503050406030204" pitchFamily="18" charset="0"/>
+                          </a:rPr>
+                          <m:t>2</m:t>
                         </m:r>
                       </m:sub>
                       <m:sup>
@@ -20061,7 +21053,17 @@
                         <a:latin typeface="Cambria Math" panose="02040503050406030204" pitchFamily="18" charset="0"/>
                         <a:ea typeface="Cambria Math" panose="02040503050406030204" pitchFamily="18" charset="0"/>
                       </a:rPr>
-                      <m:t>+4</m:t>
+                      <m:t>+</m:t>
+                    </m:r>
+                    <m:r>
+                      <a:rPr lang="fr-CA" b="0" i="1" smtClean="0">
+                        <a:solidFill>
+                          <a:srgbClr val="5B9BD5"/>
+                        </a:solidFill>
+                        <a:latin typeface="Cambria Math" panose="02040503050406030204" pitchFamily="18" charset="0"/>
+                        <a:ea typeface="Cambria Math" panose="02040503050406030204" pitchFamily="18" charset="0"/>
+                      </a:rPr>
+                      <m:t>4</m:t>
                     </m:r>
                     <m:sSubSup>
                       <m:sSubSupPr>
@@ -20120,7 +21122,16 @@
                             </a:solidFill>
                             <a:latin typeface="Cambria Math" panose="02040503050406030204" pitchFamily="18" charset="0"/>
                           </a:rPr>
-                          <m:t>−1</m:t>
+                          <m:t>−</m:t>
+                        </m:r>
+                        <m:r>
+                          <a:rPr lang="fr-CA" b="0" i="1" smtClean="0">
+                            <a:solidFill>
+                              <a:srgbClr val="5B9BD5"/>
+                            </a:solidFill>
+                            <a:latin typeface="Cambria Math" panose="02040503050406030204" pitchFamily="18" charset="0"/>
+                          </a:rPr>
+                          <m:t>1</m:t>
                         </m:r>
                       </m:sub>
                       <m:sup>
@@ -20143,7 +21154,17 @@
                         <a:latin typeface="Cambria Math" panose="02040503050406030204" pitchFamily="18" charset="0"/>
                         <a:ea typeface="Cambria Math" panose="02040503050406030204" pitchFamily="18" charset="0"/>
                       </a:rPr>
-                      <m:t>)]÷3</m:t>
+                      <m:t>)]÷</m:t>
+                    </m:r>
+                    <m:r>
+                      <a:rPr lang="fr-CA" b="0" i="1" smtClean="0">
+                        <a:solidFill>
+                          <a:srgbClr val="5B9BD5"/>
+                        </a:solidFill>
+                        <a:latin typeface="Cambria Math" panose="02040503050406030204" pitchFamily="18" charset="0"/>
+                        <a:ea typeface="Cambria Math" panose="02040503050406030204" pitchFamily="18" charset="0"/>
+                      </a:rPr>
+                      <m:t>3</m:t>
                     </m:r>
                   </m:oMath>
                 </a14:m>
@@ -20195,7 +21216,43 @@
                           </a:solidFill>
                           <a:latin typeface="Cambria Math" panose="02040503050406030204" pitchFamily="18" charset="0"/>
                         </a:rPr>
-                        <m:t>=(0,1)</m:t>
+                        <m:t>=(</m:t>
+                      </m:r>
+                      <m:r>
+                        <a:rPr lang="fr-CA" b="0" i="1" smtClean="0">
+                          <a:solidFill>
+                            <a:srgbClr val="5B9BD5"/>
+                          </a:solidFill>
+                          <a:latin typeface="Cambria Math" panose="02040503050406030204" pitchFamily="18" charset="0"/>
+                        </a:rPr>
+                        <m:t>0</m:t>
+                      </m:r>
+                      <m:r>
+                        <a:rPr lang="fr-CA" b="0" i="1" smtClean="0">
+                          <a:solidFill>
+                            <a:srgbClr val="5B9BD5"/>
+                          </a:solidFill>
+                          <a:latin typeface="Cambria Math" panose="02040503050406030204" pitchFamily="18" charset="0"/>
+                        </a:rPr>
+                        <m:t>,</m:t>
+                      </m:r>
+                      <m:r>
+                        <a:rPr lang="fr-CA" b="0" i="1" smtClean="0">
+                          <a:solidFill>
+                            <a:srgbClr val="5B9BD5"/>
+                          </a:solidFill>
+                          <a:latin typeface="Cambria Math" panose="02040503050406030204" pitchFamily="18" charset="0"/>
+                        </a:rPr>
+                        <m:t>1</m:t>
+                      </m:r>
+                      <m:r>
+                        <a:rPr lang="fr-CA" b="0" i="1" smtClean="0">
+                          <a:solidFill>
+                            <a:srgbClr val="5B9BD5"/>
+                          </a:solidFill>
+                          <a:latin typeface="Cambria Math" panose="02040503050406030204" pitchFamily="18" charset="0"/>
+                        </a:rPr>
+                        <m:t>)</m:t>
                       </m:r>
                     </m:oMath>
                   </m:oMathPara>
@@ -20737,7 +21794,16 @@
                                 </a:solidFill>
                                 <a:latin typeface="Cambria Math" panose="02040503050406030204" pitchFamily="18" charset="0"/>
                               </a:rPr>
-                              <m:t>−2</m:t>
+                              <m:t>−</m:t>
+                            </m:r>
+                            <m:r>
+                              <a:rPr lang="fr-CA" b="0" i="0" smtClean="0">
+                                <a:solidFill>
+                                  <a:srgbClr val="6FAD46"/>
+                                </a:solidFill>
+                                <a:latin typeface="Cambria Math" panose="02040503050406030204" pitchFamily="18" charset="0"/>
+                              </a:rPr>
+                              <m:t>2</m:t>
                             </m:r>
                             <m:r>
                               <a:rPr lang="fr-CA" b="0" i="1" smtClean="0">
@@ -21195,7 +22261,16 @@
                             </a:solidFill>
                             <a:latin typeface="Cambria Math" panose="02040503050406030204" pitchFamily="18" charset="0"/>
                           </a:rPr>
-                          <m:t>+2</m:t>
+                          <m:t>+</m:t>
+                        </m:r>
+                        <m:r>
+                          <a:rPr lang="fr-CA" b="0" i="1" smtClean="0">
+                            <a:solidFill>
+                              <a:srgbClr val="6FAD46"/>
+                            </a:solidFill>
+                            <a:latin typeface="Cambria Math" panose="02040503050406030204" pitchFamily="18" charset="0"/>
+                          </a:rPr>
+                          <m:t>2</m:t>
                         </m:r>
                       </m:sub>
                       <m:sup>
@@ -21218,7 +22293,17 @@
                         <a:latin typeface="Cambria Math" panose="02040503050406030204" pitchFamily="18" charset="0"/>
                         <a:ea typeface="Cambria Math" panose="02040503050406030204" pitchFamily="18" charset="0"/>
                       </a:rPr>
-                      <m:t>+4</m:t>
+                      <m:t>+</m:t>
+                    </m:r>
+                    <m:r>
+                      <a:rPr lang="fr-CA" b="0" i="1" smtClean="0">
+                        <a:solidFill>
+                          <a:srgbClr val="6FAD46"/>
+                        </a:solidFill>
+                        <a:latin typeface="Cambria Math" panose="02040503050406030204" pitchFamily="18" charset="0"/>
+                        <a:ea typeface="Cambria Math" panose="02040503050406030204" pitchFamily="18" charset="0"/>
+                      </a:rPr>
+                      <m:t>4</m:t>
                     </m:r>
                     <m:sSubSup>
                       <m:sSubSupPr>
@@ -21277,7 +22362,16 @@
                             </a:solidFill>
                             <a:latin typeface="Cambria Math" panose="02040503050406030204" pitchFamily="18" charset="0"/>
                           </a:rPr>
-                          <m:t>+1</m:t>
+                          <m:t>+</m:t>
+                        </m:r>
+                        <m:r>
+                          <a:rPr lang="fr-CA" b="0" i="1" smtClean="0">
+                            <a:solidFill>
+                              <a:srgbClr val="6FAD46"/>
+                            </a:solidFill>
+                            <a:latin typeface="Cambria Math" panose="02040503050406030204" pitchFamily="18" charset="0"/>
+                          </a:rPr>
+                          <m:t>1</m:t>
                         </m:r>
                       </m:sub>
                       <m:sup>
@@ -21300,7 +22394,17 @@
                         <a:latin typeface="Cambria Math" panose="02040503050406030204" pitchFamily="18" charset="0"/>
                         <a:ea typeface="Cambria Math" panose="02040503050406030204" pitchFamily="18" charset="0"/>
                       </a:rPr>
-                      <m:t>)]÷3</m:t>
+                      <m:t>)]÷</m:t>
+                    </m:r>
+                    <m:r>
+                      <a:rPr lang="fr-CA" b="0" i="1" smtClean="0">
+                        <a:solidFill>
+                          <a:srgbClr val="6FAD46"/>
+                        </a:solidFill>
+                        <a:latin typeface="Cambria Math" panose="02040503050406030204" pitchFamily="18" charset="0"/>
+                        <a:ea typeface="Cambria Math" panose="02040503050406030204" pitchFamily="18" charset="0"/>
+                      </a:rPr>
+                      <m:t>3</m:t>
                     </m:r>
                   </m:oMath>
                 </a14:m>
@@ -21352,7 +22456,43 @@
                           </a:solidFill>
                           <a:latin typeface="Cambria Math" panose="02040503050406030204" pitchFamily="18" charset="0"/>
                         </a:rPr>
-                        <m:t>=(1,0)</m:t>
+                        <m:t>=(</m:t>
+                      </m:r>
+                      <m:r>
+                        <a:rPr lang="fr-CA" b="0" i="1" smtClean="0">
+                          <a:solidFill>
+                            <a:srgbClr val="6FAD46"/>
+                          </a:solidFill>
+                          <a:latin typeface="Cambria Math" panose="02040503050406030204" pitchFamily="18" charset="0"/>
+                        </a:rPr>
+                        <m:t>1</m:t>
+                      </m:r>
+                      <m:r>
+                        <a:rPr lang="fr-CA" b="0" i="1" smtClean="0">
+                          <a:solidFill>
+                            <a:srgbClr val="6FAD46"/>
+                          </a:solidFill>
+                          <a:latin typeface="Cambria Math" panose="02040503050406030204" pitchFamily="18" charset="0"/>
+                        </a:rPr>
+                        <m:t>,</m:t>
+                      </m:r>
+                      <m:r>
+                        <a:rPr lang="fr-CA" b="0" i="1" smtClean="0">
+                          <a:solidFill>
+                            <a:srgbClr val="6FAD46"/>
+                          </a:solidFill>
+                          <a:latin typeface="Cambria Math" panose="02040503050406030204" pitchFamily="18" charset="0"/>
+                        </a:rPr>
+                        <m:t>0</m:t>
+                      </m:r>
+                      <m:r>
+                        <a:rPr lang="fr-CA" b="0" i="1" smtClean="0">
+                          <a:solidFill>
+                            <a:srgbClr val="6FAD46"/>
+                          </a:solidFill>
+                          <a:latin typeface="Cambria Math" panose="02040503050406030204" pitchFamily="18" charset="0"/>
+                        </a:rPr>
+                        <m:t>)</m:t>
                       </m:r>
                     </m:oMath>
                   </m:oMathPara>
@@ -22437,7 +23577,13 @@
                           <a:rPr lang="fr-FR" i="1">
                             <a:latin typeface="Cambria Math" panose="02040503050406030204" pitchFamily="18" charset="0"/>
                           </a:rPr>
-                          <m:t>2!</m:t>
+                          <m:t>2</m:t>
+                        </m:r>
+                        <m:r>
+                          <a:rPr lang="fr-FR" i="1">
+                            <a:latin typeface="Cambria Math" panose="02040503050406030204" pitchFamily="18" charset="0"/>
+                          </a:rPr>
+                          <m:t>!</m:t>
                         </m:r>
                       </m:den>
                     </m:f>
@@ -22609,7 +23755,13 @@
                           <a:rPr lang="fr-FR" i="1">
                             <a:latin typeface="Cambria Math" panose="02040503050406030204" pitchFamily="18" charset="0"/>
                           </a:rPr>
-                          <m:t>3!</m:t>
+                          <m:t>3</m:t>
+                        </m:r>
+                        <m:r>
+                          <a:rPr lang="fr-FR" i="1">
+                            <a:latin typeface="Cambria Math" panose="02040503050406030204" pitchFamily="18" charset="0"/>
+                          </a:rPr>
+                          <m:t>!</m:t>
                         </m:r>
                       </m:den>
                     </m:f>
@@ -22781,7 +23933,13 @@
                           <a:rPr lang="fr-FR" i="1">
                             <a:latin typeface="Cambria Math" panose="02040503050406030204" pitchFamily="18" charset="0"/>
                           </a:rPr>
-                          <m:t>4!</m:t>
+                          <m:t>4</m:t>
+                        </m:r>
+                        <m:r>
+                          <a:rPr lang="fr-FR" i="1">
+                            <a:latin typeface="Cambria Math" panose="02040503050406030204" pitchFamily="18" charset="0"/>
+                          </a:rPr>
+                          <m:t>!</m:t>
                         </m:r>
                       </m:den>
                     </m:f>
@@ -23199,7 +24357,13 @@
                           <a:rPr lang="fr-FR" i="1">
                             <a:latin typeface="Cambria Math" panose="02040503050406030204" pitchFamily="18" charset="0"/>
                           </a:rPr>
-                          <m:t>2!</m:t>
+                          <m:t>2</m:t>
+                        </m:r>
+                        <m:r>
+                          <a:rPr lang="fr-FR" i="1">
+                            <a:latin typeface="Cambria Math" panose="02040503050406030204" pitchFamily="18" charset="0"/>
+                          </a:rPr>
+                          <m:t>!</m:t>
                         </m:r>
                       </m:den>
                     </m:f>
@@ -23371,7 +24535,13 @@
                           <a:rPr lang="fr-FR" i="1">
                             <a:latin typeface="Cambria Math" panose="02040503050406030204" pitchFamily="18" charset="0"/>
                           </a:rPr>
-                          <m:t>3!</m:t>
+                          <m:t>3</m:t>
+                        </m:r>
+                        <m:r>
+                          <a:rPr lang="fr-FR" i="1">
+                            <a:latin typeface="Cambria Math" panose="02040503050406030204" pitchFamily="18" charset="0"/>
+                          </a:rPr>
+                          <m:t>!</m:t>
                         </m:r>
                       </m:den>
                     </m:f>
@@ -23543,7 +24713,13 @@
                           <a:rPr lang="fr-FR" i="1">
                             <a:latin typeface="Cambria Math" panose="02040503050406030204" pitchFamily="18" charset="0"/>
                           </a:rPr>
-                          <m:t>4!</m:t>
+                          <m:t>4</m:t>
+                        </m:r>
+                        <m:r>
+                          <a:rPr lang="fr-FR" i="1">
+                            <a:latin typeface="Cambria Math" panose="02040503050406030204" pitchFamily="18" charset="0"/>
+                          </a:rPr>
+                          <m:t>!</m:t>
                         </m:r>
                       </m:den>
                     </m:f>
@@ -24134,7 +25310,13 @@
                           <a:rPr lang="fr-FR" i="1">
                             <a:latin typeface="Cambria Math" panose="02040503050406030204" pitchFamily="18" charset="0"/>
                           </a:rPr>
-                          <m:t>2!</m:t>
+                          <m:t>2</m:t>
+                        </m:r>
+                        <m:r>
+                          <a:rPr lang="fr-FR" i="1">
+                            <a:latin typeface="Cambria Math" panose="02040503050406030204" pitchFamily="18" charset="0"/>
+                          </a:rPr>
+                          <m:t>!</m:t>
                         </m:r>
                       </m:den>
                     </m:f>
@@ -24595,7 +25777,13 @@
                           <a:rPr lang="fr-FR" i="1">
                             <a:latin typeface="Cambria Math" panose="02040503050406030204" pitchFamily="18" charset="0"/>
                           </a:rPr>
-                          <m:t>2!</m:t>
+                          <m:t>2</m:t>
+                        </m:r>
+                        <m:r>
+                          <a:rPr lang="fr-FR" i="1">
+                            <a:latin typeface="Cambria Math" panose="02040503050406030204" pitchFamily="18" charset="0"/>
+                          </a:rPr>
+                          <m:t>!</m:t>
                         </m:r>
                       </m:den>
                     </m:f>
@@ -24857,19 +26045,7 @@
                               <a:rPr lang="fr-FR" sz="2400" i="1">
                                 <a:latin typeface="Cambria Math" panose="02040503050406030204" pitchFamily="18" charset="0"/>
                               </a:rPr>
-                              <m:t>+</m:t>
-                            </m:r>
-                            <m:r>
-                              <a:rPr lang="fr-FR" sz="2400" i="1">
-                                <a:latin typeface="Cambria Math" panose="02040503050406030204" pitchFamily="18" charset="0"/>
-                              </a:rPr>
-                              <m:t>1</m:t>
-                            </m:r>
-                            <m:r>
-                              <a:rPr lang="fr-FR" sz="2400" i="1">
-                                <a:latin typeface="Cambria Math" panose="02040503050406030204" pitchFamily="18" charset="0"/>
-                              </a:rPr>
-                              <m:t>,</m:t>
+                              <m:t>+1,</m:t>
                             </m:r>
                             <m:r>
                               <a:rPr lang="fr-FR" sz="2400" i="1">
@@ -24920,19 +26096,7 @@
                               <a:rPr lang="fr-FR" sz="2400" i="1">
                                 <a:latin typeface="Cambria Math" panose="02040503050406030204" pitchFamily="18" charset="0"/>
                               </a:rPr>
-                              <m:t>−</m:t>
-                            </m:r>
-                            <m:r>
-                              <a:rPr lang="fr-FR" sz="2400" i="1">
-                                <a:latin typeface="Cambria Math" panose="02040503050406030204" pitchFamily="18" charset="0"/>
-                              </a:rPr>
-                              <m:t>1</m:t>
-                            </m:r>
-                            <m:r>
-                              <a:rPr lang="fr-FR" sz="2400" i="1">
-                                <a:latin typeface="Cambria Math" panose="02040503050406030204" pitchFamily="18" charset="0"/>
-                              </a:rPr>
-                              <m:t>,</m:t>
+                              <m:t>−1,</m:t>
                             </m:r>
                             <m:r>
                               <a:rPr lang="fr-FR" sz="2400" i="1">
@@ -25442,16 +26606,7 @@
                             </a:solidFill>
                             <a:latin typeface="Cambria Math" panose="02040503050406030204" pitchFamily="18" charset="0"/>
                           </a:rPr>
-                          <m:t>2</m:t>
-                        </m:r>
-                        <m:r>
-                          <a:rPr lang="fr-FR" sz="2400" i="1">
-                            <a:solidFill>
-                              <a:srgbClr val="FF0000"/>
-                            </a:solidFill>
-                            <a:latin typeface="Cambria Math" panose="02040503050406030204" pitchFamily="18" charset="0"/>
-                          </a:rPr>
-                          <m:t>!</m:t>
+                          <m:t>2!</m:t>
                         </m:r>
                       </m:den>
                     </m:f>
@@ -25647,13 +26802,7 @@
                           <a:rPr lang="fr-FR" sz="2400" i="1">
                             <a:latin typeface="Cambria Math" panose="02040503050406030204" pitchFamily="18" charset="0"/>
                           </a:rPr>
-                          <m:t>3</m:t>
-                        </m:r>
-                        <m:r>
-                          <a:rPr lang="fr-FR" sz="2400" i="1">
-                            <a:latin typeface="Cambria Math" panose="02040503050406030204" pitchFamily="18" charset="0"/>
-                          </a:rPr>
-                          <m:t>!</m:t>
+                          <m:t>3!</m:t>
                         </m:r>
                       </m:den>
                     </m:f>
@@ -26169,16 +27318,7 @@
                             </a:solidFill>
                             <a:latin typeface="Cambria Math" panose="02040503050406030204" pitchFamily="18" charset="0"/>
                           </a:rPr>
-                          <m:t>2</m:t>
-                        </m:r>
-                        <m:r>
-                          <a:rPr lang="fr-FR" sz="2400" i="1">
-                            <a:solidFill>
-                              <a:srgbClr val="FF0000"/>
-                            </a:solidFill>
-                            <a:latin typeface="Cambria Math" panose="02040503050406030204" pitchFamily="18" charset="0"/>
-                          </a:rPr>
-                          <m:t>!</m:t>
+                          <m:t>2!</m:t>
                         </m:r>
                       </m:den>
                     </m:f>
@@ -26386,13 +27526,7 @@
                           <a:rPr lang="fr-FR" sz="2400" i="1">
                             <a:latin typeface="Cambria Math" panose="02040503050406030204" pitchFamily="18" charset="0"/>
                           </a:rPr>
-                          <m:t>3</m:t>
-                        </m:r>
-                        <m:r>
-                          <a:rPr lang="fr-FR" sz="2400" i="1">
-                            <a:latin typeface="Cambria Math" panose="02040503050406030204" pitchFamily="18" charset="0"/>
-                          </a:rPr>
-                          <m:t>!</m:t>
+                          <m:t>3!</m:t>
                         </m:r>
                       </m:den>
                     </m:f>
@@ -26910,13 +28044,7 @@
                               <a:rPr lang="fr-FR" sz="2400" i="1">
                                 <a:latin typeface="Cambria Math" panose="02040503050406030204" pitchFamily="18" charset="0"/>
                               </a:rPr>
-                              <m:t>+</m:t>
-                            </m:r>
-                            <m:r>
-                              <a:rPr lang="fr-FR" sz="2400" i="1">
-                                <a:latin typeface="Cambria Math" panose="02040503050406030204" pitchFamily="18" charset="0"/>
-                              </a:rPr>
-                              <m:t>1</m:t>
+                              <m:t>+1</m:t>
                             </m:r>
                           </m:sub>
                           <m:sup>
@@ -27030,13 +28158,7 @@
                               <a:rPr lang="fr-FR" sz="2400" i="1">
                                 <a:latin typeface="Cambria Math" panose="02040503050406030204" pitchFamily="18" charset="0"/>
                               </a:rPr>
-                              <m:t>−</m:t>
-                            </m:r>
-                            <m:r>
-                              <a:rPr lang="fr-FR" sz="2400" i="1">
-                                <a:latin typeface="Cambria Math" panose="02040503050406030204" pitchFamily="18" charset="0"/>
-                              </a:rPr>
-                              <m:t>1</m:t>
+                              <m:t>−1</m:t>
                             </m:r>
                           </m:sub>
                           <m:sup>
@@ -27630,16 +28752,7 @@
                             </a:solidFill>
                             <a:latin typeface="Cambria Math" panose="02040503050406030204" pitchFamily="18" charset="0"/>
                           </a:rPr>
-                          <m:t>2</m:t>
-                        </m:r>
-                        <m:r>
-                          <a:rPr lang="fr-FR" sz="2400" i="1">
-                            <a:solidFill>
-                              <a:schemeClr val="tx1"/>
-                            </a:solidFill>
-                            <a:latin typeface="Cambria Math" panose="02040503050406030204" pitchFamily="18" charset="0"/>
-                          </a:rPr>
-                          <m:t>!</m:t>
+                          <m:t>2!</m:t>
                         </m:r>
                       </m:den>
                     </m:f>
@@ -27907,16 +29020,7 @@
                             </a:solidFill>
                             <a:latin typeface="Cambria Math" panose="02040503050406030204" pitchFamily="18" charset="0"/>
                           </a:rPr>
-                          <m:t>3</m:t>
-                        </m:r>
-                        <m:r>
-                          <a:rPr lang="fr-FR" sz="2400" i="1">
-                            <a:solidFill>
-                              <a:srgbClr val="FF0000"/>
-                            </a:solidFill>
-                            <a:latin typeface="Cambria Math" panose="02040503050406030204" pitchFamily="18" charset="0"/>
-                          </a:rPr>
-                          <m:t>!</m:t>
+                          <m:t>3!</m:t>
                         </m:r>
                       </m:den>
                     </m:f>
@@ -28088,13 +29192,7 @@
                           <a:rPr lang="fr-FR" sz="2400" i="1">
                             <a:latin typeface="Cambria Math" panose="02040503050406030204" pitchFamily="18" charset="0"/>
                           </a:rPr>
-                          <m:t>4</m:t>
-                        </m:r>
-                        <m:r>
-                          <a:rPr lang="fr-FR" sz="2400" i="1">
-                            <a:latin typeface="Cambria Math" panose="02040503050406030204" pitchFamily="18" charset="0"/>
-                          </a:rPr>
-                          <m:t>!</m:t>
+                          <m:t>4!</m:t>
                         </m:r>
                       </m:den>
                     </m:f>
@@ -28525,13 +29623,7 @@
                           <a:rPr lang="fr-FR" sz="2400" i="1">
                             <a:latin typeface="Cambria Math" panose="02040503050406030204" pitchFamily="18" charset="0"/>
                           </a:rPr>
-                          <m:t>2</m:t>
-                        </m:r>
-                        <m:r>
-                          <a:rPr lang="fr-FR" sz="2400" i="1">
-                            <a:latin typeface="Cambria Math" panose="02040503050406030204" pitchFamily="18" charset="0"/>
-                          </a:rPr>
-                          <m:t>!</m:t>
+                          <m:t>2!</m:t>
                         </m:r>
                       </m:den>
                     </m:f>
@@ -28799,16 +29891,7 @@
                             </a:solidFill>
                             <a:latin typeface="Cambria Math" panose="02040503050406030204" pitchFamily="18" charset="0"/>
                           </a:rPr>
-                          <m:t>3</m:t>
-                        </m:r>
-                        <m:r>
-                          <a:rPr lang="fr-FR" sz="2400" i="1">
-                            <a:solidFill>
-                              <a:srgbClr val="FF0000"/>
-                            </a:solidFill>
-                            <a:latin typeface="Cambria Math" panose="02040503050406030204" pitchFamily="18" charset="0"/>
-                          </a:rPr>
-                          <m:t>!</m:t>
+                          <m:t>3!</m:t>
                         </m:r>
                       </m:den>
                     </m:f>
@@ -28980,13 +30063,7 @@
                           <a:rPr lang="fr-FR" sz="2400" i="1">
                             <a:latin typeface="Cambria Math" panose="02040503050406030204" pitchFamily="18" charset="0"/>
                           </a:rPr>
-                          <m:t>4</m:t>
-                        </m:r>
-                        <m:r>
-                          <a:rPr lang="fr-FR" sz="2400" i="1">
-                            <a:latin typeface="Cambria Math" panose="02040503050406030204" pitchFamily="18" charset="0"/>
-                          </a:rPr>
-                          <m:t>!</m:t>
+                          <m:t>4!</m:t>
                         </m:r>
                       </m:den>
                     </m:f>
@@ -29509,13 +30586,7 @@
                           <a:rPr lang="fr-FR" sz="2400" i="1">
                             <a:latin typeface="Cambria Math" panose="02040503050406030204" pitchFamily="18" charset="0"/>
                           </a:rPr>
-                          <m:t>4</m:t>
-                        </m:r>
-                        <m:r>
-                          <a:rPr lang="fr-FR" sz="2400" i="1">
-                            <a:latin typeface="Cambria Math" panose="02040503050406030204" pitchFamily="18" charset="0"/>
-                          </a:rPr>
-                          <m:t>!</m:t>
+                          <m:t>4!</m:t>
                         </m:r>
                       </m:den>
                     </m:f>

--- a/projet_final/projet_final/MEC8211-Projet-final-Presentation.pptx
+++ b/projet_final/projet_final/MEC8211-Projet-final-Presentation.pptx
@@ -5,7 +5,7 @@
     <p:sldMasterId id="2147483648" r:id="rId1"/>
   </p:sldMasterIdLst>
   <p:notesMasterIdLst>
-    <p:notesMasterId r:id="rId24"/>
+    <p:notesMasterId r:id="rId25"/>
   </p:notesMasterIdLst>
   <p:sldIdLst>
     <p:sldId id="256" r:id="rId2"/>
@@ -30,6 +30,7 @@
     <p:sldId id="276" r:id="rId21"/>
     <p:sldId id="277" r:id="rId22"/>
     <p:sldId id="274" r:id="rId23"/>
+    <p:sldId id="279" r:id="rId24"/>
   </p:sldIdLst>
   <p:sldSz cx="12192000" cy="6858000"/>
   <p:notesSz cx="6858000" cy="9144000"/>
@@ -7251,14 +7252,7 @@
                         <a:latin typeface="Cambria Math" panose="02040503050406030204" pitchFamily="18" charset="0"/>
                         <a:sym typeface="Wingdings" panose="05000000000000000000" pitchFamily="2" charset="2"/>
                       </a:rPr>
-                      <m:t> = </m:t>
-                    </m:r>
-                    <m:r>
-                      <a:rPr lang="fr-FR" b="0" i="1" smtClean="0">
-                        <a:latin typeface="Cambria Math" panose="02040503050406030204" pitchFamily="18" charset="0"/>
-                        <a:sym typeface="Wingdings" panose="05000000000000000000" pitchFamily="2" charset="2"/>
-                      </a:rPr>
-                      <m:t>100</m:t>
+                      <m:t> = 100</m:t>
                     </m:r>
                     <m:r>
                       <m:rPr>
@@ -7292,14 +7286,7 @@
                         <a:latin typeface="Cambria Math" panose="02040503050406030204" pitchFamily="18" charset="0"/>
                         <a:sym typeface="Wingdings" panose="05000000000000000000" pitchFamily="2" charset="2"/>
                       </a:rPr>
-                      <m:t>=</m:t>
-                    </m:r>
-                    <m:r>
-                      <a:rPr lang="fr-FR" b="0" i="1" smtClean="0">
-                        <a:latin typeface="Cambria Math" panose="02040503050406030204" pitchFamily="18" charset="0"/>
-                        <a:sym typeface="Wingdings" panose="05000000000000000000" pitchFamily="2" charset="2"/>
-                      </a:rPr>
-                      <m:t>2</m:t>
+                      <m:t>=2</m:t>
                     </m:r>
                   </m:oMath>
                 </a14:m>
@@ -7365,28 +7352,7 @@
                         <a:latin typeface="Cambria Math" panose="02040503050406030204" pitchFamily="18" charset="0"/>
                         <a:sym typeface="Wingdings" panose="05000000000000000000" pitchFamily="2" charset="2"/>
                       </a:rPr>
-                      <m:t>= </m:t>
-                    </m:r>
-                    <m:r>
-                      <a:rPr lang="fr-FR" b="0" i="1" smtClean="0">
-                        <a:latin typeface="Cambria Math" panose="02040503050406030204" pitchFamily="18" charset="0"/>
-                        <a:sym typeface="Wingdings" panose="05000000000000000000" pitchFamily="2" charset="2"/>
-                      </a:rPr>
-                      <m:t>0</m:t>
-                    </m:r>
-                    <m:r>
-                      <a:rPr lang="fr-FR" b="0" i="1" smtClean="0">
-                        <a:latin typeface="Cambria Math" panose="02040503050406030204" pitchFamily="18" charset="0"/>
-                        <a:sym typeface="Wingdings" panose="05000000000000000000" pitchFamily="2" charset="2"/>
-                      </a:rPr>
-                      <m:t>.</m:t>
-                    </m:r>
-                    <m:r>
-                      <a:rPr lang="fr-FR" b="0" i="1" smtClean="0">
-                        <a:latin typeface="Cambria Math" panose="02040503050406030204" pitchFamily="18" charset="0"/>
-                        <a:sym typeface="Wingdings" panose="05000000000000000000" pitchFamily="2" charset="2"/>
-                      </a:rPr>
-                      <m:t>6</m:t>
+                      <m:t>= 0.6</m:t>
                     </m:r>
                     <m:r>
                       <m:rPr>
@@ -7423,28 +7389,7 @@
                         <a:latin typeface="Cambria Math" panose="02040503050406030204" pitchFamily="18" charset="0"/>
                         <a:sym typeface="Wingdings" panose="05000000000000000000" pitchFamily="2" charset="2"/>
                       </a:rPr>
-                      <m:t> = </m:t>
-                    </m:r>
-                    <m:r>
-                      <a:rPr lang="fr-FR" b="0" i="1" smtClean="0">
-                        <a:latin typeface="Cambria Math" panose="02040503050406030204" pitchFamily="18" charset="0"/>
-                        <a:sym typeface="Wingdings" panose="05000000000000000000" pitchFamily="2" charset="2"/>
-                      </a:rPr>
-                      <m:t>0</m:t>
-                    </m:r>
-                    <m:r>
-                      <a:rPr lang="fr-FR" b="0" i="1" smtClean="0">
-                        <a:latin typeface="Cambria Math" panose="02040503050406030204" pitchFamily="18" charset="0"/>
-                        <a:sym typeface="Wingdings" panose="05000000000000000000" pitchFamily="2" charset="2"/>
-                      </a:rPr>
-                      <m:t>.</m:t>
-                    </m:r>
-                    <m:r>
-                      <a:rPr lang="fr-FR" b="0" i="1" smtClean="0">
-                        <a:latin typeface="Cambria Math" panose="02040503050406030204" pitchFamily="18" charset="0"/>
-                        <a:sym typeface="Wingdings" panose="05000000000000000000" pitchFamily="2" charset="2"/>
-                      </a:rPr>
-                      <m:t>3</m:t>
+                      <m:t> = 0.3</m:t>
                     </m:r>
                   </m:oMath>
                 </a14:m>
@@ -7969,13 +7914,7 @@
                                 <a:rPr lang="fr-FR" sz="2400" i="1">
                                   <a:latin typeface="Cambria Math" panose="02040503050406030204" pitchFamily="18" charset="0"/>
                                 </a:rPr>
-                                <m:t>=</m:t>
-                              </m:r>
-                              <m:r>
-                                <a:rPr lang="fr-FR" sz="2400" i="1">
-                                  <a:latin typeface="Cambria Math" panose="02040503050406030204" pitchFamily="18" charset="0"/>
-                                </a:rPr>
-                                <m:t>1</m:t>
+                                <m:t>=1</m:t>
                               </m:r>
                             </m:sub>
                             <m:sup>
@@ -8105,31 +8044,7 @@
                         <a:rPr lang="fr-FR" sz="2400" b="0" i="1" smtClean="0">
                           <a:latin typeface="Cambria Math" panose="02040503050406030204" pitchFamily="18" charset="0"/>
                         </a:rPr>
-                        <m:t>= </m:t>
-                      </m:r>
-                      <m:r>
-                        <a:rPr lang="fr-FR" sz="2400" b="0" i="1" smtClean="0">
-                          <a:latin typeface="Cambria Math" panose="02040503050406030204" pitchFamily="18" charset="0"/>
-                        </a:rPr>
-                        <m:t>11</m:t>
-                      </m:r>
-                      <m:r>
-                        <a:rPr lang="fr-FR" sz="2400" b="0" i="1" smtClean="0">
-                          <a:latin typeface="Cambria Math" panose="02040503050406030204" pitchFamily="18" charset="0"/>
-                        </a:rPr>
-                        <m:t>.</m:t>
-                      </m:r>
-                      <m:r>
-                        <a:rPr lang="fr-FR" sz="2400" b="0" i="1" smtClean="0">
-                          <a:latin typeface="Cambria Math" panose="02040503050406030204" pitchFamily="18" charset="0"/>
-                        </a:rPr>
-                        <m:t>8</m:t>
-                      </m:r>
-                      <m:r>
-                        <a:rPr lang="fr-FR" sz="2400" b="0" i="1" smtClean="0">
-                          <a:latin typeface="Cambria Math" panose="02040503050406030204" pitchFamily="18" charset="0"/>
-                        </a:rPr>
-                        <m:t> </m:t>
+                        <m:t>= 11.8 </m:t>
                       </m:r>
                       <m:r>
                         <a:rPr lang="fr-FR" sz="2400" b="0" i="1" smtClean="0">
@@ -8254,19 +8169,7 @@
                       <a:rPr lang="fr-FR" b="0" i="1" smtClean="0">
                         <a:latin typeface="Cambria Math" panose="02040503050406030204" pitchFamily="18" charset="0"/>
                       </a:rPr>
-                      <m:t>=</m:t>
-                    </m:r>
-                    <m:r>
-                      <a:rPr lang="fr-FR" b="0" i="1" smtClean="0">
-                        <a:latin typeface="Cambria Math" panose="02040503050406030204" pitchFamily="18" charset="0"/>
-                      </a:rPr>
-                      <m:t>7850</m:t>
-                    </m:r>
-                    <m:r>
-                      <a:rPr lang="fr-FR" b="0" i="1" smtClean="0">
-                        <a:latin typeface="Cambria Math" panose="02040503050406030204" pitchFamily="18" charset="0"/>
-                      </a:rPr>
-                      <m:t> </m:t>
+                      <m:t>=7850 </m:t>
                     </m:r>
                     <m:r>
                       <a:rPr lang="fr-FR" b="0" i="1" smtClean="0">
@@ -8328,31 +8231,7 @@
                       <a:rPr lang="fr-FR" b="0" i="1" smtClean="0">
                         <a:latin typeface="Cambria Math" panose="02040503050406030204" pitchFamily="18" charset="0"/>
                       </a:rPr>
-                      <m:t>=</m:t>
-                    </m:r>
-                    <m:r>
-                      <a:rPr lang="fr-FR" b="0" i="1" smtClean="0">
-                        <a:latin typeface="Cambria Math" panose="02040503050406030204" pitchFamily="18" charset="0"/>
-                      </a:rPr>
-                      <m:t>0</m:t>
-                    </m:r>
-                    <m:r>
-                      <a:rPr lang="fr-FR" b="0" i="1" smtClean="0">
-                        <a:latin typeface="Cambria Math" panose="02040503050406030204" pitchFamily="18" charset="0"/>
-                      </a:rPr>
-                      <m:t>.</m:t>
-                    </m:r>
-                    <m:r>
-                      <a:rPr lang="fr-FR" b="0" i="1" smtClean="0">
-                        <a:latin typeface="Cambria Math" panose="02040503050406030204" pitchFamily="18" charset="0"/>
-                      </a:rPr>
-                      <m:t>525</m:t>
-                    </m:r>
-                    <m:r>
-                      <a:rPr lang="fr-FR" b="0" i="1" smtClean="0">
-                        <a:latin typeface="Cambria Math" panose="02040503050406030204" pitchFamily="18" charset="0"/>
-                      </a:rPr>
-                      <m:t> </m:t>
+                      <m:t>=0.525 </m:t>
                     </m:r>
                   </m:oMath>
                 </a14:m>
@@ -8374,13 +8253,7 @@
                       <a:rPr lang="fr-FR" b="0" i="1" smtClean="0">
                         <a:latin typeface="Cambria Math" panose="02040503050406030204" pitchFamily="18" charset="0"/>
                       </a:rPr>
-                      <m:t>=</m:t>
-                    </m:r>
-                    <m:r>
-                      <a:rPr lang="fr-FR" b="0" i="1" smtClean="0">
-                        <a:latin typeface="Cambria Math" panose="02040503050406030204" pitchFamily="18" charset="0"/>
-                      </a:rPr>
-                      <m:t>10</m:t>
+                      <m:t>=10</m:t>
                     </m:r>
                     <m:r>
                       <m:rPr>
@@ -8484,31 +8357,7 @@
                       <a:rPr lang="fr-FR" b="0" i="1" smtClean="0">
                         <a:latin typeface="Cambria Math" panose="02040503050406030204" pitchFamily="18" charset="0"/>
                       </a:rPr>
-                      <m:t>=</m:t>
-                    </m:r>
-                    <m:r>
-                      <a:rPr lang="fr-FR" b="0" i="1" smtClean="0">
-                        <a:latin typeface="Cambria Math" panose="02040503050406030204" pitchFamily="18" charset="0"/>
-                      </a:rPr>
-                      <m:t>1118</m:t>
-                    </m:r>
-                    <m:r>
-                      <a:rPr lang="fr-FR" b="0" i="1" smtClean="0">
-                        <a:latin typeface="Cambria Math" panose="02040503050406030204" pitchFamily="18" charset="0"/>
-                      </a:rPr>
-                      <m:t>.</m:t>
-                    </m:r>
-                    <m:r>
-                      <a:rPr lang="fr-FR" b="0" i="1" smtClean="0">
-                        <a:latin typeface="Cambria Math" panose="02040503050406030204" pitchFamily="18" charset="0"/>
-                      </a:rPr>
-                      <m:t>15</m:t>
-                    </m:r>
-                    <m:r>
-                      <a:rPr lang="fr-FR" b="0" i="1" smtClean="0">
-                        <a:latin typeface="Cambria Math" panose="02040503050406030204" pitchFamily="18" charset="0"/>
-                      </a:rPr>
-                      <m:t> </m:t>
+                      <m:t>=1118.15 </m:t>
                     </m:r>
                     <m:r>
                       <m:rPr>
@@ -8558,31 +8407,7 @@
                       <a:rPr lang="fr-FR" b="0" i="1" smtClean="0">
                         <a:latin typeface="Cambria Math" panose="02040503050406030204" pitchFamily="18" charset="0"/>
                       </a:rPr>
-                      <m:t>=</m:t>
-                    </m:r>
-                    <m:r>
-                      <a:rPr lang="fr-FR" b="0" i="1" smtClean="0">
-                        <a:latin typeface="Cambria Math" panose="02040503050406030204" pitchFamily="18" charset="0"/>
-                      </a:rPr>
-                      <m:t>298</m:t>
-                    </m:r>
-                    <m:r>
-                      <a:rPr lang="fr-FR" b="0" i="1" smtClean="0">
-                        <a:latin typeface="Cambria Math" panose="02040503050406030204" pitchFamily="18" charset="0"/>
-                      </a:rPr>
-                      <m:t>.</m:t>
-                    </m:r>
-                    <m:r>
-                      <a:rPr lang="fr-FR" b="0" i="1" smtClean="0">
-                        <a:latin typeface="Cambria Math" panose="02040503050406030204" pitchFamily="18" charset="0"/>
-                      </a:rPr>
-                      <m:t>15</m:t>
-                    </m:r>
-                    <m:r>
-                      <a:rPr lang="fr-FR" b="0" i="1" smtClean="0">
-                        <a:latin typeface="Cambria Math" panose="02040503050406030204" pitchFamily="18" charset="0"/>
-                      </a:rPr>
-                      <m:t> </m:t>
+                      <m:t>=298.15 </m:t>
                     </m:r>
                     <m:r>
                       <m:rPr>
@@ -8619,25 +8444,7 @@
                       <a:rPr lang="fr-FR" b="0" i="1" smtClean="0">
                         <a:latin typeface="Cambria Math" panose="02040503050406030204" pitchFamily="18" charset="0"/>
                       </a:rPr>
-                      <m:t>=</m:t>
-                    </m:r>
-                    <m:r>
-                      <a:rPr lang="fr-FR" b="0" i="1" smtClean="0">
-                        <a:latin typeface="Cambria Math" panose="02040503050406030204" pitchFamily="18" charset="0"/>
-                      </a:rPr>
-                      <m:t>44</m:t>
-                    </m:r>
-                    <m:r>
-                      <a:rPr lang="fr-FR" b="0" i="1" smtClean="0">
-                        <a:latin typeface="Cambria Math" panose="02040503050406030204" pitchFamily="18" charset="0"/>
-                      </a:rPr>
-                      <m:t>.</m:t>
-                    </m:r>
-                    <m:r>
-                      <a:rPr lang="fr-FR" b="0" i="1" smtClean="0">
-                        <a:latin typeface="Cambria Math" panose="02040503050406030204" pitchFamily="18" charset="0"/>
-                      </a:rPr>
-                      <m:t>5</m:t>
+                      <m:t>=44.5</m:t>
                     </m:r>
                     <m:r>
                       <a:rPr lang="fr-FR" b="0" i="1" smtClean="0">
@@ -8844,13 +8651,7 @@
                         <a:rPr lang="fr-FR" b="0" i="1" smtClean="0">
                           <a:latin typeface="Cambria Math" panose="02040503050406030204" pitchFamily="18" charset="0"/>
                         </a:rPr>
-                        <m:t> = </m:t>
-                      </m:r>
-                      <m:r>
-                        <a:rPr lang="fr-FR" b="0" i="1" smtClean="0">
-                          <a:latin typeface="Cambria Math" panose="02040503050406030204" pitchFamily="18" charset="0"/>
-                        </a:rPr>
-                        <m:t>20</m:t>
+                        <m:t> = 20</m:t>
                       </m:r>
                     </m:oMath>
                   </m:oMathPara>
@@ -8880,31 +8681,7 @@
                         <a:rPr lang="fr-FR" b="0" i="1" smtClean="0">
                           <a:latin typeface="Cambria Math" panose="02040503050406030204" pitchFamily="18" charset="0"/>
                         </a:rPr>
-                        <m:t> = </m:t>
-                      </m:r>
-                      <m:r>
-                        <a:rPr lang="fr-FR" b="0" i="1" smtClean="0">
-                          <a:latin typeface="Cambria Math" panose="02040503050406030204" pitchFamily="18" charset="0"/>
-                        </a:rPr>
-                        <m:t>0</m:t>
-                      </m:r>
-                      <m:r>
-                        <a:rPr lang="fr-FR" b="0" i="1" smtClean="0">
-                          <a:latin typeface="Cambria Math" panose="02040503050406030204" pitchFamily="18" charset="0"/>
-                        </a:rPr>
-                        <m:t>.</m:t>
-                      </m:r>
-                      <m:r>
-                        <a:rPr lang="fr-FR" b="0" i="1" smtClean="0">
-                          <a:latin typeface="Cambria Math" panose="02040503050406030204" pitchFamily="18" charset="0"/>
-                        </a:rPr>
-                        <m:t>025</m:t>
-                      </m:r>
-                      <m:r>
-                        <a:rPr lang="fr-FR" b="0" i="1" smtClean="0">
-                          <a:latin typeface="Cambria Math" panose="02040503050406030204" pitchFamily="18" charset="0"/>
-                        </a:rPr>
-                        <m:t> </m:t>
+                        <m:t> = 0.025 </m:t>
                       </m:r>
                       <m:r>
                         <m:rPr>
@@ -8957,31 +8734,7 @@
                         <a:rPr lang="fr-FR" b="0" i="1" smtClean="0">
                           <a:latin typeface="Cambria Math" panose="02040503050406030204" pitchFamily="18" charset="0"/>
                         </a:rPr>
-                        <m:t> =</m:t>
-                      </m:r>
-                      <m:r>
-                        <a:rPr lang="fr-FR" b="0" i="1" smtClean="0">
-                          <a:latin typeface="Cambria Math" panose="02040503050406030204" pitchFamily="18" charset="0"/>
-                        </a:rPr>
-                        <m:t>0</m:t>
-                      </m:r>
-                      <m:r>
-                        <a:rPr lang="fr-FR" b="0" i="1" smtClean="0">
-                          <a:latin typeface="Cambria Math" panose="02040503050406030204" pitchFamily="18" charset="0"/>
-                        </a:rPr>
-                        <m:t>.</m:t>
-                      </m:r>
-                      <m:r>
-                        <a:rPr lang="fr-FR" b="0" i="1" smtClean="0">
-                          <a:latin typeface="Cambria Math" panose="02040503050406030204" pitchFamily="18" charset="0"/>
-                        </a:rPr>
-                        <m:t>6</m:t>
-                      </m:r>
-                      <m:r>
-                        <a:rPr lang="fr-FR" b="0" i="1" smtClean="0">
-                          <a:latin typeface="Cambria Math" panose="02040503050406030204" pitchFamily="18" charset="0"/>
-                        </a:rPr>
-                        <m:t> </m:t>
+                        <m:t> =0.6 </m:t>
                       </m:r>
                       <m:r>
                         <a:rPr lang="fr-FR" b="0" i="1" smtClean="0">
@@ -9023,31 +8776,7 @@
                         <a:rPr lang="fr-FR" b="0" i="1" smtClean="0">
                           <a:latin typeface="Cambria Math" panose="02040503050406030204" pitchFamily="18" charset="0"/>
                         </a:rPr>
-                        <m:t> = </m:t>
-                      </m:r>
-                      <m:r>
-                        <a:rPr lang="fr-FR" b="0" i="1" smtClean="0">
-                          <a:latin typeface="Cambria Math" panose="02040503050406030204" pitchFamily="18" charset="0"/>
-                        </a:rPr>
-                        <m:t>0</m:t>
-                      </m:r>
-                      <m:r>
-                        <a:rPr lang="fr-FR" b="0" i="1" smtClean="0">
-                          <a:latin typeface="Cambria Math" panose="02040503050406030204" pitchFamily="18" charset="0"/>
-                        </a:rPr>
-                        <m:t>.</m:t>
-                      </m:r>
-                      <m:r>
-                        <a:rPr lang="fr-FR" b="0" i="1" smtClean="0">
-                          <a:latin typeface="Cambria Math" panose="02040503050406030204" pitchFamily="18" charset="0"/>
-                        </a:rPr>
-                        <m:t>3</m:t>
-                      </m:r>
-                      <m:r>
-                        <a:rPr lang="fr-FR" b="0" i="1" smtClean="0">
-                          <a:latin typeface="Cambria Math" panose="02040503050406030204" pitchFamily="18" charset="0"/>
-                        </a:rPr>
-                        <m:t> </m:t>
+                        <m:t> = 0.3 </m:t>
                       </m:r>
                       <m:r>
                         <m:rPr>
@@ -9283,8 +9012,8 @@
           </a:p>
         </p:txBody>
       </p:sp>
-      <mc:AlternateContent xmlns:mc="http://schemas.openxmlformats.org/markup-compatibility/2006">
-        <mc:Choice xmlns:a14="http://schemas.microsoft.com/office/drawing/2010/main" Requires="a14">
+      <mc:AlternateContent xmlns:mc="http://schemas.openxmlformats.org/markup-compatibility/2006" xmlns:a14="http://schemas.microsoft.com/office/drawing/2010/main">
+        <mc:Choice Requires="a14">
           <p:sp>
             <p:nvSpPr>
               <p:cNvPr id="3" name="Espace réservé du contenu 2">
@@ -9726,7 +9455,13 @@
                           <a:rPr lang="fr-FR" i="1">
                             <a:latin typeface="Cambria Math" panose="02040503050406030204" pitchFamily="18" charset="0"/>
                           </a:rPr>
-                          <m:t>−1</m:t>
+                          <m:t>−</m:t>
+                        </m:r>
+                        <m:r>
+                          <a:rPr lang="fr-FR" i="1">
+                            <a:latin typeface="Cambria Math" panose="02040503050406030204" pitchFamily="18" charset="0"/>
+                          </a:rPr>
+                          <m:t>1</m:t>
                         </m:r>
                       </m:den>
                     </m:f>
@@ -9916,7 +9651,19 @@
                       <a:rPr lang="fr-FR" i="1">
                         <a:latin typeface="Cambria Math" panose="02040503050406030204" pitchFamily="18" charset="0"/>
                       </a:rPr>
-                      <m:t>0.1</m:t>
+                      <m:t>0</m:t>
+                    </m:r>
+                    <m:r>
+                      <a:rPr lang="fr-FR" i="1">
+                        <a:latin typeface="Cambria Math" panose="02040503050406030204" pitchFamily="18" charset="0"/>
+                      </a:rPr>
+                      <m:t>.</m:t>
+                    </m:r>
+                    <m:r>
+                      <a:rPr lang="fr-FR" i="1">
+                        <a:latin typeface="Cambria Math" panose="02040503050406030204" pitchFamily="18" charset="0"/>
+                      </a:rPr>
+                      <m:t>1</m:t>
                     </m:r>
                   </m:oMath>
                 </a14:m>
@@ -9961,7 +9708,25 @@
                       <a:rPr lang="fr-FR" i="1">
                         <a:latin typeface="Cambria Math" panose="02040503050406030204" pitchFamily="18" charset="0"/>
                       </a:rPr>
-                      <m:t>=1.25</m:t>
+                      <m:t>=</m:t>
+                    </m:r>
+                    <m:r>
+                      <a:rPr lang="fr-FR" i="1">
+                        <a:latin typeface="Cambria Math" panose="02040503050406030204" pitchFamily="18" charset="0"/>
+                      </a:rPr>
+                      <m:t>1</m:t>
+                    </m:r>
+                    <m:r>
+                      <a:rPr lang="fr-FR" i="1">
+                        <a:latin typeface="Cambria Math" panose="02040503050406030204" pitchFamily="18" charset="0"/>
+                      </a:rPr>
+                      <m:t>.</m:t>
+                    </m:r>
+                    <m:r>
+                      <a:rPr lang="fr-FR" i="1">
+                        <a:latin typeface="Cambria Math" panose="02040503050406030204" pitchFamily="18" charset="0"/>
+                      </a:rPr>
+                      <m:t>25</m:t>
                     </m:r>
                   </m:oMath>
                 </a14:m>
@@ -10122,7 +9887,14 @@
                             <a:latin typeface="Cambria Math" panose="02040503050406030204" pitchFamily="18" charset="0"/>
                             <a:sym typeface="Wingdings" panose="05000000000000000000" pitchFamily="2" charset="2"/>
                           </a:rPr>
-                          <m:t>−3</m:t>
+                          <m:t>−</m:t>
+                        </m:r>
+                        <m:r>
+                          <a:rPr lang="fr-FR" b="0" i="1" smtClean="0">
+                            <a:latin typeface="Cambria Math" panose="02040503050406030204" pitchFamily="18" charset="0"/>
+                            <a:sym typeface="Wingdings" panose="05000000000000000000" pitchFamily="2" charset="2"/>
+                          </a:rPr>
+                          <m:t>3</m:t>
                         </m:r>
                       </m:sup>
                     </m:sSup>
@@ -10182,7 +9954,7 @@
             </p:txBody>
           </p:sp>
         </mc:Choice>
-        <mc:Fallback>
+        <mc:Fallback xmlns="">
           <p:sp>
             <p:nvSpPr>
               <p:cNvPr id="3" name="Espace réservé du contenu 2">
@@ -10387,7 +10159,13 @@
                                     <a:rPr lang="fr-FR" b="0" i="1" smtClean="0">
                                       <a:latin typeface="Cambria Math" panose="02040503050406030204" pitchFamily="18" charset="0"/>
                                     </a:rPr>
-                                    <m:t>−4</m:t>
+                                    <m:t>−</m:t>
+                                  </m:r>
+                                  <m:r>
+                                    <a:rPr lang="fr-FR" b="0" i="1" smtClean="0">
+                                      <a:latin typeface="Cambria Math" panose="02040503050406030204" pitchFamily="18" charset="0"/>
+                                    </a:rPr>
+                                    <m:t>4</m:t>
                                   </m:r>
                                 </m:sup>
                               </m:sSup>
@@ -10464,7 +10242,13 @@
                                     <a:rPr lang="fr-FR" b="0" i="1" smtClean="0">
                                       <a:latin typeface="Cambria Math" panose="02040503050406030204" pitchFamily="18" charset="0"/>
                                     </a:rPr>
-                                    <m:t>−4</m:t>
+                                    <m:t>−</m:t>
+                                  </m:r>
+                                  <m:r>
+                                    <a:rPr lang="fr-FR" b="0" i="1" smtClean="0">
+                                      <a:latin typeface="Cambria Math" panose="02040503050406030204" pitchFamily="18" charset="0"/>
+                                    </a:rPr>
+                                    <m:t>4</m:t>
                                   </m:r>
                                 </m:sup>
                               </m:sSup>
@@ -10541,7 +10325,13 @@
                                     <a:rPr lang="fr-FR" b="0" i="1" smtClean="0">
                                       <a:latin typeface="Cambria Math" panose="02040503050406030204" pitchFamily="18" charset="0"/>
                                     </a:rPr>
-                                    <m:t>−3</m:t>
+                                    <m:t>−</m:t>
+                                  </m:r>
+                                  <m:r>
+                                    <a:rPr lang="fr-FR" b="0" i="1" smtClean="0">
+                                      <a:latin typeface="Cambria Math" panose="02040503050406030204" pitchFamily="18" charset="0"/>
+                                    </a:rPr>
+                                    <m:t>3</m:t>
                                   </m:r>
                                 </m:sup>
                               </m:sSup>
@@ -11619,55 +11409,7 @@
                       <a:rPr lang="fr-FR" b="0" i="1" smtClean="0">
                         <a:latin typeface="Cambria Math" panose="02040503050406030204" pitchFamily="18" charset="0"/>
                       </a:rPr>
-                      <m:t>(</m:t>
-                    </m:r>
-                    <m:r>
-                      <a:rPr lang="fr-FR" b="0" i="1" smtClean="0">
-                        <a:latin typeface="Cambria Math" panose="02040503050406030204" pitchFamily="18" charset="0"/>
-                      </a:rPr>
-                      <m:t>42</m:t>
-                    </m:r>
-                    <m:r>
-                      <a:rPr lang="fr-FR" b="0" i="1" smtClean="0">
-                        <a:latin typeface="Cambria Math" panose="02040503050406030204" pitchFamily="18" charset="0"/>
-                      </a:rPr>
-                      <m:t>.</m:t>
-                    </m:r>
-                    <m:r>
-                      <a:rPr lang="fr-FR" b="0" i="1" smtClean="0">
-                        <a:latin typeface="Cambria Math" panose="02040503050406030204" pitchFamily="18" charset="0"/>
-                      </a:rPr>
-                      <m:t>5</m:t>
-                    </m:r>
-                    <m:r>
-                      <a:rPr lang="fr-FR" b="0" i="1" smtClean="0">
-                        <a:latin typeface="Cambria Math" panose="02040503050406030204" pitchFamily="18" charset="0"/>
-                      </a:rPr>
-                      <m:t>,</m:t>
-                    </m:r>
-                    <m:r>
-                      <a:rPr lang="fr-FR" b="0" i="1" smtClean="0">
-                        <a:latin typeface="Cambria Math" panose="02040503050406030204" pitchFamily="18" charset="0"/>
-                      </a:rPr>
-                      <m:t>3</m:t>
-                    </m:r>
-                    <m:r>
-                      <a:rPr lang="fr-FR" b="0" i="1" smtClean="0">
-                        <a:latin typeface="Cambria Math" panose="02040503050406030204" pitchFamily="18" charset="0"/>
-                      </a:rPr>
-                      <m:t>.</m:t>
-                    </m:r>
-                    <m:r>
-                      <a:rPr lang="fr-FR" b="0" i="1" smtClean="0">
-                        <a:latin typeface="Cambria Math" panose="02040503050406030204" pitchFamily="18" charset="0"/>
-                      </a:rPr>
-                      <m:t>75</m:t>
-                    </m:r>
-                    <m:r>
-                      <a:rPr lang="fr-FR" b="0" i="1" smtClean="0">
-                        <a:latin typeface="Cambria Math" panose="02040503050406030204" pitchFamily="18" charset="0"/>
-                      </a:rPr>
-                      <m:t>) </m:t>
+                      <m:t>(42.5,3.75) </m:t>
                     </m:r>
                     <m:r>
                       <a:rPr lang="fr-FR" b="0" i="1" smtClean="0">
@@ -11796,43 +11538,7 @@
                             <a:rPr lang="fr-FR" b="0" i="1" smtClean="0">
                               <a:latin typeface="Cambria Math" panose="02040503050406030204" pitchFamily="18" charset="0"/>
                             </a:rPr>
-                            <m:t>0</m:t>
-                          </m:r>
-                          <m:r>
-                            <a:rPr lang="fr-FR" b="0" i="1" smtClean="0">
-                              <a:latin typeface="Cambria Math" panose="02040503050406030204" pitchFamily="18" charset="0"/>
-                            </a:rPr>
-                            <m:t>.</m:t>
-                          </m:r>
-                          <m:r>
-                            <a:rPr lang="fr-FR" b="0" i="1" smtClean="0">
-                              <a:latin typeface="Cambria Math" panose="02040503050406030204" pitchFamily="18" charset="0"/>
-                            </a:rPr>
-                            <m:t>525</m:t>
-                          </m:r>
-                          <m:r>
-                            <a:rPr lang="fr-FR" b="0" i="1" smtClean="0">
-                              <a:latin typeface="Cambria Math" panose="02040503050406030204" pitchFamily="18" charset="0"/>
-                            </a:rPr>
-                            <m:t>,</m:t>
-                          </m:r>
-                          <m:r>
-                            <a:rPr lang="fr-FR" b="0" i="1" smtClean="0">
-                              <a:latin typeface="Cambria Math" panose="02040503050406030204" pitchFamily="18" charset="0"/>
-                            </a:rPr>
-                            <m:t>0</m:t>
-                          </m:r>
-                          <m:r>
-                            <a:rPr lang="fr-FR" b="0" i="1" smtClean="0">
-                              <a:latin typeface="Cambria Math" panose="02040503050406030204" pitchFamily="18" charset="0"/>
-                            </a:rPr>
-                            <m:t>.</m:t>
-                          </m:r>
-                          <m:r>
-                            <a:rPr lang="fr-FR" b="0" i="1" smtClean="0">
-                              <a:latin typeface="Cambria Math" panose="02040503050406030204" pitchFamily="18" charset="0"/>
-                            </a:rPr>
-                            <m:t>19</m:t>
+                            <m:t>0.525,0.19</m:t>
                           </m:r>
                         </m:e>
                       </m:d>
@@ -12002,31 +11708,7 @@
                       <a:rPr lang="fr-FR" sz="2200" b="0" i="1" smtClean="0">
                         <a:latin typeface="Cambria Math" panose="02040503050406030204" pitchFamily="18" charset="0"/>
                       </a:rPr>
-                      <m:t>=</m:t>
-                    </m:r>
-                    <m:r>
-                      <a:rPr lang="fr-FR" sz="2200" b="0" i="1" smtClean="0">
-                        <a:latin typeface="Cambria Math" panose="02040503050406030204" pitchFamily="18" charset="0"/>
-                      </a:rPr>
-                      <m:t>44</m:t>
-                    </m:r>
-                    <m:r>
-                      <a:rPr lang="fr-FR" sz="2200" b="0" i="1" smtClean="0">
-                        <a:latin typeface="Cambria Math" panose="02040503050406030204" pitchFamily="18" charset="0"/>
-                      </a:rPr>
-                      <m:t>.</m:t>
-                    </m:r>
-                    <m:r>
-                      <a:rPr lang="fr-FR" sz="2200" b="0" i="1" smtClean="0">
-                        <a:latin typeface="Cambria Math" panose="02040503050406030204" pitchFamily="18" charset="0"/>
-                      </a:rPr>
-                      <m:t>91</m:t>
-                    </m:r>
-                    <m:r>
-                      <a:rPr lang="fr-FR" sz="2200" b="0" i="1" smtClean="0">
-                        <a:latin typeface="Cambria Math" panose="02040503050406030204" pitchFamily="18" charset="0"/>
-                      </a:rPr>
-                      <m:t> </m:t>
+                      <m:t>=44.91 </m:t>
                     </m:r>
                     <m:r>
                       <m:rPr>
@@ -12219,8 +11901,8 @@
           </a:p>
         </p:txBody>
       </p:sp>
-      <mc:AlternateContent xmlns:mc="http://schemas.openxmlformats.org/markup-compatibility/2006">
-        <mc:Choice xmlns:a14="http://schemas.microsoft.com/office/drawing/2010/main" Requires="a14">
+      <mc:AlternateContent xmlns:mc="http://schemas.openxmlformats.org/markup-compatibility/2006" xmlns:a14="http://schemas.microsoft.com/office/drawing/2010/main">
+        <mc:Choice Requires="a14">
           <p:sp>
             <p:nvSpPr>
               <p:cNvPr id="3" name="Content Placeholder 2">
@@ -12442,19 +12124,7 @@
                               <a:rPr lang="fr-FR" b="0" i="1" smtClean="0">
                                 <a:latin typeface="Cambria Math" panose="02040503050406030204" pitchFamily="18" charset="0"/>
                               </a:rPr>
-                              <m:t>0</m:t>
-                            </m:r>
-                            <m:r>
-                              <a:rPr lang="fr-FR" b="0" i="1" smtClean="0">
-                                <a:latin typeface="Cambria Math" panose="02040503050406030204" pitchFamily="18" charset="0"/>
-                              </a:rPr>
-                              <m:t>.</m:t>
-                            </m:r>
-                            <m:r>
-                              <a:rPr lang="fr-FR" b="0" i="1" smtClean="0">
-                                <a:latin typeface="Cambria Math" panose="02040503050406030204" pitchFamily="18" charset="0"/>
-                              </a:rPr>
-                              <m:t>87</m:t>
+                              <m:t>0.87</m:t>
                             </m:r>
                           </m:e>
                           <m:sup>
@@ -12485,19 +12155,7 @@
                               <a:rPr lang="fr-FR" b="0" i="1" smtClean="0">
                                 <a:latin typeface="Cambria Math" panose="02040503050406030204" pitchFamily="18" charset="0"/>
                               </a:rPr>
-                              <m:t>44</m:t>
-                            </m:r>
-                            <m:r>
-                              <a:rPr lang="fr-FR" b="0" i="1" smtClean="0">
-                                <a:latin typeface="Cambria Math" panose="02040503050406030204" pitchFamily="18" charset="0"/>
-                              </a:rPr>
-                              <m:t>.</m:t>
-                            </m:r>
-                            <m:r>
-                              <a:rPr lang="fr-FR" b="0" i="1" smtClean="0">
-                                <a:latin typeface="Cambria Math" panose="02040503050406030204" pitchFamily="18" charset="0"/>
-                              </a:rPr>
-                              <m:t>91</m:t>
+                              <m:t>44.91</m:t>
                             </m:r>
                           </m:e>
                           <m:sup>
@@ -12537,6 +12195,13 @@
                                 <a:latin typeface="Cambria Math" panose="02040503050406030204" pitchFamily="18" charset="0"/>
                                 <a:sym typeface="Wingdings" panose="05000000000000000000" pitchFamily="2" charset="2"/>
                               </a:rPr>
+                              <m:t>1,1</m:t>
+                            </m:r>
+                            <m:r>
+                              <a:rPr lang="fr-FR" b="0" i="1" smtClean="0">
+                                <a:latin typeface="Cambria Math" panose="02040503050406030204" pitchFamily="18" charset="0"/>
+                                <a:sym typeface="Wingdings" panose="05000000000000000000" pitchFamily="2" charset="2"/>
+                              </a:rPr>
                               <m:t>1</m:t>
                             </m:r>
                             <m:r>
@@ -12544,35 +12209,7 @@
                                 <a:latin typeface="Cambria Math" panose="02040503050406030204" pitchFamily="18" charset="0"/>
                                 <a:sym typeface="Wingdings" panose="05000000000000000000" pitchFamily="2" charset="2"/>
                               </a:rPr>
-                              <m:t>,</m:t>
-                            </m:r>
-                            <m:r>
-                              <a:rPr lang="fr-FR" i="1">
-                                <a:latin typeface="Cambria Math" panose="02040503050406030204" pitchFamily="18" charset="0"/>
-                                <a:sym typeface="Wingdings" panose="05000000000000000000" pitchFamily="2" charset="2"/>
-                              </a:rPr>
-                              <m:t>1</m:t>
-                            </m:r>
-                            <m:r>
-                              <a:rPr lang="fr-FR" b="0" i="1" smtClean="0">
-                                <a:latin typeface="Cambria Math" panose="02040503050406030204" pitchFamily="18" charset="0"/>
-                                <a:sym typeface="Wingdings" panose="05000000000000000000" pitchFamily="2" charset="2"/>
-                              </a:rPr>
-                              <m:t>1</m:t>
-                            </m:r>
-                            <m:r>
-                              <a:rPr lang="fr-FR" i="1">
-                                <a:latin typeface="Cambria Math" panose="02040503050406030204" pitchFamily="18" charset="0"/>
-                                <a:sym typeface="Wingdings" panose="05000000000000000000" pitchFamily="2" charset="2"/>
-                              </a:rPr>
-                              <m:t>×</m:t>
-                            </m:r>
-                            <m:r>
-                              <a:rPr lang="fr-FR" i="1">
-                                <a:latin typeface="Cambria Math" panose="02040503050406030204" pitchFamily="18" charset="0"/>
-                                <a:sym typeface="Wingdings" panose="05000000000000000000" pitchFamily="2" charset="2"/>
-                              </a:rPr>
-                              <m:t>10</m:t>
+                              <m:t>×10</m:t>
                             </m:r>
                           </m:e>
                           <m:sup>
@@ -12581,14 +12218,7 @@
                                 <a:latin typeface="Cambria Math" panose="02040503050406030204" pitchFamily="18" charset="0"/>
                                 <a:sym typeface="Wingdings" panose="05000000000000000000" pitchFamily="2" charset="2"/>
                               </a:rPr>
-                              <m:t>−</m:t>
-                            </m:r>
-                            <m:r>
-                              <a:rPr lang="fr-FR" i="1">
-                                <a:latin typeface="Cambria Math" panose="02040503050406030204" pitchFamily="18" charset="0"/>
-                                <a:sym typeface="Wingdings" panose="05000000000000000000" pitchFamily="2" charset="2"/>
-                              </a:rPr>
-                              <m:t>3</m:t>
+                              <m:t>−3</m:t>
                             </m:r>
                           </m:sup>
                         </m:sSup>
@@ -12597,14 +12227,7 @@
                             <a:latin typeface="Cambria Math" panose="02040503050406030204" pitchFamily="18" charset="0"/>
                             <a:sym typeface="Wingdings" panose="05000000000000000000" pitchFamily="2" charset="2"/>
                           </a:rPr>
-                          <m:t>)</m:t>
-                        </m:r>
-                        <m:r>
-                          <a:rPr lang="fr-FR" b="0" i="1" smtClean="0">
-                            <a:latin typeface="Cambria Math" panose="02040503050406030204" pitchFamily="18" charset="0"/>
-                            <a:sym typeface="Wingdings" panose="05000000000000000000" pitchFamily="2" charset="2"/>
-                          </a:rPr>
-                          <m:t>²</m:t>
+                          <m:t>)²</m:t>
                         </m:r>
                       </m:e>
                     </m:rad>
@@ -12612,31 +12235,7 @@
                       <a:rPr lang="fr-FR" b="0" i="1" smtClean="0">
                         <a:latin typeface="Cambria Math" panose="02040503050406030204" pitchFamily="18" charset="0"/>
                       </a:rPr>
-                      <m:t>= </m:t>
-                    </m:r>
-                    <m:r>
-                      <a:rPr lang="fr-FR" b="0" i="1" smtClean="0">
-                        <a:latin typeface="Cambria Math" panose="02040503050406030204" pitchFamily="18" charset="0"/>
-                      </a:rPr>
-                      <m:t>44</m:t>
-                    </m:r>
-                    <m:r>
-                      <a:rPr lang="fr-FR" b="0" i="1" smtClean="0">
-                        <a:latin typeface="Cambria Math" panose="02040503050406030204" pitchFamily="18" charset="0"/>
-                      </a:rPr>
-                      <m:t>.</m:t>
-                    </m:r>
-                    <m:r>
-                      <a:rPr lang="fr-FR" b="0" i="1" smtClean="0">
-                        <a:latin typeface="Cambria Math" panose="02040503050406030204" pitchFamily="18" charset="0"/>
-                      </a:rPr>
-                      <m:t>92</m:t>
-                    </m:r>
-                    <m:r>
-                      <a:rPr lang="fr-FR" b="0" i="1" smtClean="0">
-                        <a:latin typeface="Cambria Math" panose="02040503050406030204" pitchFamily="18" charset="0"/>
-                      </a:rPr>
-                      <m:t> </m:t>
+                      <m:t>= 44.92 </m:t>
                     </m:r>
                     <m:r>
                       <m:rPr>
@@ -12681,7 +12280,7 @@
                       <a:rPr lang="fr-FR" b="1" i="0" smtClean="0">
                         <a:latin typeface="Cambria Math" panose="02040503050406030204" pitchFamily="18" charset="0"/>
                       </a:rPr>
-                      <m:t>-</m:t>
+                      <m:t>−</m:t>
                     </m:r>
                     <m:r>
                       <a:rPr lang="fr-FR" b="1" i="0" smtClean="0">
@@ -12722,7 +12321,7 @@
                     <m:sSub>
                       <m:sSubPr>
                         <m:ctrlPr>
-                          <a:rPr lang="fr-FR" b="1">
+                          <a:rPr lang="fr-FR" b="1" i="1">
                             <a:latin typeface="Cambria Math" panose="02040503050406030204" pitchFamily="18" charset="0"/>
                           </a:rPr>
                         </m:ctrlPr>
@@ -12850,7 +12449,7 @@
             </p:txBody>
           </p:sp>
         </mc:Choice>
-        <mc:Fallback>
+        <mc:Fallback xmlns="">
           <p:sp>
             <p:nvSpPr>
               <p:cNvPr id="3" name="Content Placeholder 2">
@@ -13349,6 +12948,429 @@
     <p:extLst>
       <p:ext uri="{BB962C8B-B14F-4D97-AF65-F5344CB8AC3E}">
         <p14:creationId xmlns:p14="http://schemas.microsoft.com/office/powerpoint/2010/main" val="3426608694"/>
+      </p:ext>
+    </p:extLst>
+  </p:cSld>
+  <p:clrMapOvr>
+    <a:masterClrMapping/>
+  </p:clrMapOvr>
+</p:sld>
+</file>
+
+<file path=ppt/slides/slide23.xml><?xml version="1.0" encoding="utf-8"?>
+<p:sld xmlns:a="http://schemas.openxmlformats.org/drawingml/2006/main" xmlns:r="http://schemas.openxmlformats.org/officeDocument/2006/relationships" xmlns:p="http://schemas.openxmlformats.org/presentationml/2006/main">
+  <p:cSld>
+    <p:spTree>
+      <p:nvGrpSpPr>
+        <p:cNvPr id="1" name=""/>
+        <p:cNvGrpSpPr/>
+        <p:nvPr/>
+      </p:nvGrpSpPr>
+      <p:grpSpPr>
+        <a:xfrm>
+          <a:off x="0" y="0"/>
+          <a:ext cx="0" cy="0"/>
+          <a:chOff x="0" y="0"/>
+          <a:chExt cx="0" cy="0"/>
+        </a:xfrm>
+      </p:grpSpPr>
+      <p:sp>
+        <p:nvSpPr>
+          <p:cNvPr id="2" name="Title 1">
+            <a:extLst>
+              <a:ext uri="{FF2B5EF4-FFF2-40B4-BE49-F238E27FC236}">
+                <a16:creationId xmlns:a16="http://schemas.microsoft.com/office/drawing/2014/main" id="{08AFCC7F-3AF3-6D33-FB0F-E15C4FAC0B2D}"/>
+              </a:ext>
+            </a:extLst>
+          </p:cNvPr>
+          <p:cNvSpPr>
+            <a:spLocks noGrp="1"/>
+          </p:cNvSpPr>
+          <p:nvPr>
+            <p:ph type="title"/>
+          </p:nvPr>
+        </p:nvSpPr>
+        <p:spPr/>
+        <p:txBody>
+          <a:bodyPr/>
+          <a:lstStyle/>
+          <a:p>
+            <a:r>
+              <a:rPr lang="fr-FR" dirty="0"/>
+              <a:t>Annexe</a:t>
+            </a:r>
+            <a:endParaRPr lang="en-US" dirty="0"/>
+          </a:p>
+        </p:txBody>
+      </p:sp>
+      <p:pic>
+        <p:nvPicPr>
+          <p:cNvPr id="5" name="Content Placeholder 4">
+            <a:extLst>
+              <a:ext uri="{FF2B5EF4-FFF2-40B4-BE49-F238E27FC236}">
+                <a16:creationId xmlns:a16="http://schemas.microsoft.com/office/drawing/2014/main" id="{AFD8984B-B992-0FD9-B126-55C7737C1E84}"/>
+              </a:ext>
+            </a:extLst>
+          </p:cNvPr>
+          <p:cNvPicPr>
+            <a:picLocks noGrp="1" noChangeAspect="1"/>
+          </p:cNvPicPr>
+          <p:nvPr>
+            <p:ph idx="1"/>
+          </p:nvPr>
+        </p:nvPicPr>
+        <p:blipFill>
+          <a:blip r:embed="rId2">
+            <a:extLst>
+              <a:ext uri="{28A0092B-C50C-407E-A947-70E740481C1C}">
+                <a14:useLocalDpi xmlns:a14="http://schemas.microsoft.com/office/drawing/2010/main" val="0"/>
+              </a:ext>
+            </a:extLst>
+          </a:blip>
+          <a:stretch>
+            <a:fillRect/>
+          </a:stretch>
+        </p:blipFill>
+        <p:spPr>
+          <a:xfrm>
+            <a:off x="838200" y="1690688"/>
+            <a:ext cx="10515600" cy="3416374"/>
+          </a:xfrm>
+          <a:prstGeom prst="rect">
+            <a:avLst/>
+          </a:prstGeom>
+        </p:spPr>
+      </p:pic>
+      <mc:AlternateContent xmlns:mc="http://schemas.openxmlformats.org/markup-compatibility/2006">
+        <mc:Choice xmlns:a14="http://schemas.microsoft.com/office/drawing/2010/main" Requires="a14">
+          <p:sp>
+            <p:nvSpPr>
+              <p:cNvPr id="6" name="TextBox 5">
+                <a:extLst>
+                  <a:ext uri="{FF2B5EF4-FFF2-40B4-BE49-F238E27FC236}">
+                    <a16:creationId xmlns:a16="http://schemas.microsoft.com/office/drawing/2014/main" id="{D0E9DB5F-EBD0-D834-D4ED-493307BE600E}"/>
+                  </a:ext>
+                </a:extLst>
+              </p:cNvPr>
+              <p:cNvSpPr txBox="1"/>
+              <p:nvPr/>
+            </p:nvSpPr>
+            <p:spPr>
+              <a:xfrm>
+                <a:off x="954593" y="5456255"/>
+                <a:ext cx="10279464" cy="390748"/>
+              </a:xfrm>
+              <a:prstGeom prst="rect">
+                <a:avLst/>
+              </a:prstGeom>
+              <a:noFill/>
+            </p:spPr>
+            <p:txBody>
+              <a:bodyPr wrap="square" rtlCol="0">
+                <a:spAutoFit/>
+              </a:bodyPr>
+              <a:lstStyle/>
+              <a:p>
+                <a14:m>
+                  <m:oMath xmlns:m="http://schemas.openxmlformats.org/officeDocument/2006/math">
+                    <m:sSub>
+                      <m:sSubPr>
+                        <m:ctrlPr>
+                          <a:rPr lang="fr-FR" b="0" i="1" smtClean="0">
+                            <a:latin typeface="Cambria Math" panose="02040503050406030204" pitchFamily="18" charset="0"/>
+                          </a:rPr>
+                        </m:ctrlPr>
+                      </m:sSubPr>
+                      <m:e>
+                        <m:r>
+                          <a:rPr lang="fr-FR" b="0" i="1" smtClean="0">
+                            <a:latin typeface="Cambria Math" panose="02040503050406030204" pitchFamily="18" charset="0"/>
+                          </a:rPr>
+                          <m:t>𝑢</m:t>
+                        </m:r>
+                      </m:e>
+                      <m:sub>
+                        <m:r>
+                          <a:rPr lang="fr-FR" b="0" i="1" smtClean="0">
+                            <a:latin typeface="Cambria Math" panose="02040503050406030204" pitchFamily="18" charset="0"/>
+                          </a:rPr>
+                          <m:t>𝑖𝑛𝑝𝑢𝑡</m:t>
+                        </m:r>
+                      </m:sub>
+                    </m:sSub>
+                    <m:r>
+                      <a:rPr lang="fr-FR" b="0" i="1" smtClean="0">
+                        <a:latin typeface="Cambria Math" panose="02040503050406030204" pitchFamily="18" charset="0"/>
+                      </a:rPr>
+                      <m:t>=9.71 </m:t>
+                    </m:r>
+                    <m:r>
+                      <m:rPr>
+                        <m:sty m:val="p"/>
+                      </m:rPr>
+                      <a:rPr lang="fr-FR" b="0" i="1" smtClean="0">
+                        <a:latin typeface="Cambria Math" panose="02040503050406030204" pitchFamily="18" charset="0"/>
+                      </a:rPr>
+                      <m:t>K</m:t>
+                    </m:r>
+                  </m:oMath>
+                </a14:m>
+                <a:r>
+                  <a:rPr lang="en-US" dirty="0"/>
+                  <a:t> pour </a:t>
+                </a:r>
+                <a14:m>
+                  <m:oMath xmlns:m="http://schemas.openxmlformats.org/officeDocument/2006/math">
+                    <m:sSub>
+                      <m:sSubPr>
+                        <m:ctrlPr>
+                          <a:rPr lang="fr-FR" b="0" i="1" smtClean="0">
+                            <a:latin typeface="Cambria Math" panose="02040503050406030204" pitchFamily="18" charset="0"/>
+                          </a:rPr>
+                        </m:ctrlPr>
+                      </m:sSubPr>
+                      <m:e>
+                        <m:r>
+                          <a:rPr lang="fr-FR" b="0" i="1" smtClean="0">
+                            <a:latin typeface="Cambria Math" panose="02040503050406030204" pitchFamily="18" charset="0"/>
+                          </a:rPr>
+                          <m:t>𝜎</m:t>
+                        </m:r>
+                      </m:e>
+                      <m:sub>
+                        <m:r>
+                          <a:rPr lang="fr-FR" b="0" i="1" smtClean="0">
+                            <a:latin typeface="Cambria Math" panose="02040503050406030204" pitchFamily="18" charset="0"/>
+                          </a:rPr>
+                          <m:t>𝜀</m:t>
+                        </m:r>
+                      </m:sub>
+                    </m:sSub>
+                    <m:r>
+                      <a:rPr lang="fr-FR" b="0" i="1" smtClean="0">
+                        <a:latin typeface="Cambria Math" panose="02040503050406030204" pitchFamily="18" charset="0"/>
+                      </a:rPr>
+                      <m:t>=0.05</m:t>
+                    </m:r>
+                    <m:r>
+                      <a:rPr lang="en-US" b="1" i="1">
+                        <a:latin typeface="Cambria Math" panose="02040503050406030204" pitchFamily="18" charset="0"/>
+                      </a:rPr>
+                      <m:t>⇒</m:t>
+                    </m:r>
+                    <m:sSub>
+                      <m:sSubPr>
+                        <m:ctrlPr>
+                          <a:rPr lang="fr-FR" b="1" i="1" smtClean="0">
+                            <a:latin typeface="Cambria Math" panose="02040503050406030204" pitchFamily="18" charset="0"/>
+                          </a:rPr>
+                        </m:ctrlPr>
+                      </m:sSubPr>
+                      <m:e>
+                        <m:r>
+                          <a:rPr lang="fr-FR" b="1" i="1" smtClean="0">
+                            <a:latin typeface="Cambria Math" panose="02040503050406030204" pitchFamily="18" charset="0"/>
+                          </a:rPr>
+                          <m:t>𝒖</m:t>
+                        </m:r>
+                      </m:e>
+                      <m:sub>
+                        <m:r>
+                          <a:rPr lang="fr-FR" b="1" i="1" smtClean="0">
+                            <a:latin typeface="Cambria Math" panose="02040503050406030204" pitchFamily="18" charset="0"/>
+                          </a:rPr>
+                          <m:t>𝒗𝒂𝒍</m:t>
+                        </m:r>
+                      </m:sub>
+                    </m:sSub>
+                    <m:r>
+                      <a:rPr lang="fr-FR" b="1" i="1" smtClean="0">
+                        <a:latin typeface="Cambria Math" panose="02040503050406030204" pitchFamily="18" charset="0"/>
+                      </a:rPr>
+                      <m:t>=</m:t>
+                    </m:r>
+                    <m:r>
+                      <a:rPr lang="fr-FR" b="1" i="1" smtClean="0">
+                        <a:latin typeface="Cambria Math" panose="02040503050406030204" pitchFamily="18" charset="0"/>
+                      </a:rPr>
+                      <m:t>𝟗</m:t>
+                    </m:r>
+                    <m:r>
+                      <a:rPr lang="fr-FR" b="1" i="1" smtClean="0">
+                        <a:latin typeface="Cambria Math" panose="02040503050406030204" pitchFamily="18" charset="0"/>
+                      </a:rPr>
+                      <m:t>.</m:t>
+                    </m:r>
+                    <m:r>
+                      <a:rPr lang="fr-FR" b="1" i="1" smtClean="0">
+                        <a:latin typeface="Cambria Math" panose="02040503050406030204" pitchFamily="18" charset="0"/>
+                      </a:rPr>
+                      <m:t>𝟕𝟓</m:t>
+                    </m:r>
+                    <m:r>
+                      <a:rPr lang="fr-FR" b="1" i="1" smtClean="0">
+                        <a:latin typeface="Cambria Math" panose="02040503050406030204" pitchFamily="18" charset="0"/>
+                      </a:rPr>
+                      <m:t> </m:t>
+                    </m:r>
+                    <m:r>
+                      <a:rPr lang="fr-FR" b="1" i="1" smtClean="0">
+                        <a:latin typeface="Cambria Math" panose="02040503050406030204" pitchFamily="18" charset="0"/>
+                      </a:rPr>
+                      <m:t>𝑲</m:t>
+                    </m:r>
+                  </m:oMath>
+                </a14:m>
+                <a:r>
+                  <a:rPr lang="en-US" dirty="0"/>
+                  <a:t> </a:t>
+                </a:r>
+                <a14:m>
+                  <m:oMath xmlns:m="http://schemas.openxmlformats.org/officeDocument/2006/math">
+                    <m:r>
+                      <a:rPr lang="en-US" b="1" i="1">
+                        <a:latin typeface="Cambria Math" panose="02040503050406030204" pitchFamily="18" charset="0"/>
+                      </a:rPr>
+                      <m:t>⇒</m:t>
+                    </m:r>
+                    <m:r>
+                      <m:rPr>
+                        <m:nor/>
+                      </m:rPr>
+                      <a:rPr lang="en-US" dirty="0"/>
+                      <m:t>-7.70 </m:t>
+                    </m:r>
+                    <m:r>
+                      <m:rPr>
+                        <m:nor/>
+                      </m:rPr>
+                      <a:rPr lang="en-US" dirty="0"/>
+                      <m:t>K</m:t>
+                    </m:r>
+                    <m:r>
+                      <m:rPr>
+                        <m:nor/>
+                      </m:rPr>
+                      <a:rPr lang="en-US" dirty="0"/>
+                      <m:t> &lt;</m:t>
+                    </m:r>
+                    <m:sSub>
+                      <m:sSubPr>
+                        <m:ctrlPr>
+                          <a:rPr lang="fr-FR" i="1">
+                            <a:latin typeface="Cambria Math" panose="02040503050406030204" pitchFamily="18" charset="0"/>
+                          </a:rPr>
+                        </m:ctrlPr>
+                      </m:sSubPr>
+                      <m:e>
+                        <m:r>
+                          <a:rPr lang="fr-FR" b="0" i="1" smtClean="0">
+                            <a:latin typeface="Cambria Math" panose="02040503050406030204" pitchFamily="18" charset="0"/>
+                          </a:rPr>
+                          <m:t> </m:t>
+                        </m:r>
+                        <m:r>
+                          <m:rPr>
+                            <m:sty m:val="p"/>
+                          </m:rPr>
+                          <a:rPr lang="fr-FR" b="0" i="1">
+                            <a:latin typeface="Cambria Math" panose="02040503050406030204" pitchFamily="18" charset="0"/>
+                          </a:rPr>
+                          <m:t>δ</m:t>
+                        </m:r>
+                      </m:e>
+                      <m:sub>
+                        <m:r>
+                          <m:rPr>
+                            <m:sty m:val="p"/>
+                          </m:rPr>
+                          <a:rPr lang="fr-FR" b="0" i="1">
+                            <a:latin typeface="Cambria Math" panose="02040503050406030204" pitchFamily="18" charset="0"/>
+                          </a:rPr>
+                          <m:t>model</m:t>
+                        </m:r>
+                      </m:sub>
+                    </m:sSub>
+                    <m:r>
+                      <a:rPr lang="fr-FR" b="0">
+                        <a:latin typeface="Cambria Math" panose="02040503050406030204" pitchFamily="18" charset="0"/>
+                      </a:rPr>
+                      <m:t>&lt;</m:t>
+                    </m:r>
+                    <m:r>
+                      <a:rPr lang="fr-FR" b="0" i="0" smtClean="0">
+                        <a:latin typeface="Cambria Math" panose="02040503050406030204" pitchFamily="18" charset="0"/>
+                      </a:rPr>
+                      <m:t>31.30</m:t>
+                    </m:r>
+                    <m:r>
+                      <m:rPr>
+                        <m:sty m:val="p"/>
+                      </m:rPr>
+                      <a:rPr lang="fr-FR" b="0" i="1">
+                        <a:latin typeface="Cambria Math" panose="02040503050406030204" pitchFamily="18" charset="0"/>
+                      </a:rPr>
+                      <m:t>K</m:t>
+                    </m:r>
+                  </m:oMath>
+                </a14:m>
+                <a:r>
+                  <a:rPr lang="en-US" dirty="0"/>
+                  <a:t> </a:t>
+                </a:r>
+              </a:p>
+            </p:txBody>
+          </p:sp>
+        </mc:Choice>
+        <mc:Fallback>
+          <p:sp>
+            <p:nvSpPr>
+              <p:cNvPr id="6" name="TextBox 5">
+                <a:extLst>
+                  <a:ext uri="{FF2B5EF4-FFF2-40B4-BE49-F238E27FC236}">
+                    <a16:creationId xmlns:a16="http://schemas.microsoft.com/office/drawing/2014/main" id="{D0E9DB5F-EBD0-D834-D4ED-493307BE600E}"/>
+                  </a:ext>
+                </a:extLst>
+              </p:cNvPr>
+              <p:cNvSpPr txBox="1">
+                <a:spLocks noRot="1" noChangeAspect="1" noMove="1" noResize="1" noEditPoints="1" noAdjustHandles="1" noChangeArrowheads="1" noChangeShapeType="1" noTextEdit="1"/>
+              </p:cNvSpPr>
+              <p:nvPr/>
+            </p:nvSpPr>
+            <p:spPr>
+              <a:xfrm>
+                <a:off x="954593" y="5456255"/>
+                <a:ext cx="10279464" cy="390748"/>
+              </a:xfrm>
+              <a:prstGeom prst="rect">
+                <a:avLst/>
+              </a:prstGeom>
+              <a:blipFill>
+                <a:blip r:embed="rId3"/>
+                <a:stretch>
+                  <a:fillRect t="-4688" b="-21875"/>
+                </a:stretch>
+              </a:blipFill>
+            </p:spPr>
+            <p:txBody>
+              <a:bodyPr/>
+              <a:lstStyle/>
+              <a:p>
+                <a:r>
+                  <a:rPr lang="en-US">
+                    <a:noFill/>
+                  </a:rPr>
+                  <a:t> </a:t>
+                </a:r>
+              </a:p>
+            </p:txBody>
+          </p:sp>
+        </mc:Fallback>
+      </mc:AlternateContent>
+    </p:spTree>
+    <p:extLst>
+      <p:ext uri="{BB962C8B-B14F-4D97-AF65-F5344CB8AC3E}">
+        <p14:creationId xmlns:p14="http://schemas.microsoft.com/office/powerpoint/2010/main" val="2932396356"/>
       </p:ext>
     </p:extLst>
   </p:cSld>
@@ -16594,13 +16616,7 @@
                               <a:rPr lang="fr-FR" b="0" i="1" smtClean="0">
                                 <a:latin typeface="Cambria Math" panose="02040503050406030204" pitchFamily="18" charset="0"/>
                               </a:rPr>
-                              <m:t>+</m:t>
-                            </m:r>
-                            <m:r>
-                              <a:rPr lang="fr-FR" b="0" i="1" smtClean="0">
-                                <a:latin typeface="Cambria Math" panose="02040503050406030204" pitchFamily="18" charset="0"/>
-                              </a:rPr>
-                              <m:t>1</m:t>
+                              <m:t>+1</m:t>
                             </m:r>
                             <m:r>
                               <a:rPr lang="fr-FR" i="1">
@@ -16657,13 +16673,7 @@
                               <a:rPr lang="fr-FR" b="0" i="1" smtClean="0">
                                 <a:latin typeface="Cambria Math" panose="02040503050406030204" pitchFamily="18" charset="0"/>
                               </a:rPr>
-                              <m:t>−</m:t>
-                            </m:r>
-                            <m:r>
-                              <a:rPr lang="fr-FR" b="0" i="1" smtClean="0">
-                                <a:latin typeface="Cambria Math" panose="02040503050406030204" pitchFamily="18" charset="0"/>
-                              </a:rPr>
-                              <m:t>1</m:t>
+                              <m:t>−1</m:t>
                             </m:r>
                             <m:r>
                               <a:rPr lang="fr-FR" i="1">
@@ -17311,19 +17321,7 @@
                                 <a:rPr lang="fr-FR" sz="2400" i="1">
                                   <a:latin typeface="Cambria Math" panose="02040503050406030204" pitchFamily="18" charset="0"/>
                                 </a:rPr>
-                                <m:t>+</m:t>
-                              </m:r>
-                              <m:r>
-                                <a:rPr lang="fr-FR" sz="2400" i="1">
-                                  <a:latin typeface="Cambria Math" panose="02040503050406030204" pitchFamily="18" charset="0"/>
-                                </a:rPr>
-                                <m:t>1</m:t>
-                              </m:r>
-                              <m:r>
-                                <a:rPr lang="fr-FR" sz="2400" i="1">
-                                  <a:latin typeface="Cambria Math" panose="02040503050406030204" pitchFamily="18" charset="0"/>
-                                </a:rPr>
-                                <m:t>,</m:t>
+                                <m:t>+1,</m:t>
                               </m:r>
                               <m:r>
                                 <a:rPr lang="fr-FR" sz="2400" i="1">
@@ -17431,19 +17429,7 @@
                                 <a:rPr lang="fr-FR" sz="2400" i="1">
                                   <a:latin typeface="Cambria Math" panose="02040503050406030204" pitchFamily="18" charset="0"/>
                                 </a:rPr>
-                                <m:t>−</m:t>
-                              </m:r>
-                              <m:r>
-                                <a:rPr lang="fr-FR" sz="2400" i="1">
-                                  <a:latin typeface="Cambria Math" panose="02040503050406030204" pitchFamily="18" charset="0"/>
-                                </a:rPr>
-                                <m:t>1</m:t>
-                              </m:r>
-                              <m:r>
-                                <a:rPr lang="fr-FR" sz="2400" i="1">
-                                  <a:latin typeface="Cambria Math" panose="02040503050406030204" pitchFamily="18" charset="0"/>
-                                </a:rPr>
-                                <m:t>,</m:t>
+                                <m:t>−1,</m:t>
                               </m:r>
                               <m:r>
                                 <a:rPr lang="fr-FR" sz="2400" i="1">
@@ -17576,19 +17562,7 @@
                                 <a:rPr lang="fr-FR" sz="2400" i="1">
                                   <a:latin typeface="Cambria Math" panose="02040503050406030204" pitchFamily="18" charset="0"/>
                                 </a:rPr>
-                                <m:t>+</m:t>
-                              </m:r>
-                              <m:r>
-                                <a:rPr lang="fr-FR" sz="2400" i="1">
-                                  <a:latin typeface="Cambria Math" panose="02040503050406030204" pitchFamily="18" charset="0"/>
-                                </a:rPr>
-                                <m:t>1</m:t>
-                              </m:r>
-                              <m:r>
-                                <a:rPr lang="fr-FR" sz="2400" i="1">
-                                  <a:latin typeface="Cambria Math" panose="02040503050406030204" pitchFamily="18" charset="0"/>
-                                </a:rPr>
-                                <m:t>,</m:t>
+                                <m:t>+1,</m:t>
                               </m:r>
                               <m:r>
                                 <a:rPr lang="fr-FR" sz="2400" i="1">
@@ -17639,19 +17613,7 @@
                                 <a:rPr lang="fr-FR" sz="2400" i="1">
                                   <a:latin typeface="Cambria Math" panose="02040503050406030204" pitchFamily="18" charset="0"/>
                                 </a:rPr>
-                                <m:t>−</m:t>
-                              </m:r>
-                              <m:r>
-                                <a:rPr lang="fr-FR" sz="2400" i="1">
-                                  <a:latin typeface="Cambria Math" panose="02040503050406030204" pitchFamily="18" charset="0"/>
-                                </a:rPr>
-                                <m:t>1</m:t>
-                              </m:r>
-                              <m:r>
-                                <a:rPr lang="fr-FR" sz="2400" i="1">
-                                  <a:latin typeface="Cambria Math" panose="02040503050406030204" pitchFamily="18" charset="0"/>
-                                </a:rPr>
-                                <m:t>,</m:t>
+                                <m:t>−1,</m:t>
                               </m:r>
                               <m:r>
                                 <a:rPr lang="fr-FR" sz="2400" i="1">
@@ -17748,13 +17710,7 @@
                                 <a:rPr lang="fr-FR" sz="2400" i="1">
                                   <a:latin typeface="Cambria Math" panose="02040503050406030204" pitchFamily="18" charset="0"/>
                                 </a:rPr>
-                                <m:t>+</m:t>
-                              </m:r>
-                              <m:r>
-                                <a:rPr lang="fr-FR" sz="2400" i="1">
-                                  <a:latin typeface="Cambria Math" panose="02040503050406030204" pitchFamily="18" charset="0"/>
-                                </a:rPr>
-                                <m:t>1</m:t>
+                                <m:t>+1</m:t>
                               </m:r>
                             </m:sub>
                             <m:sup>
@@ -17868,13 +17824,7 @@
                                 <a:rPr lang="fr-FR" sz="2400" i="1">
                                   <a:latin typeface="Cambria Math" panose="02040503050406030204" pitchFamily="18" charset="0"/>
                                 </a:rPr>
-                                <m:t>−</m:t>
-                              </m:r>
-                              <m:r>
-                                <a:rPr lang="fr-FR" sz="2400" i="1">
-                                  <a:latin typeface="Cambria Math" panose="02040503050406030204" pitchFamily="18" charset="0"/>
-                                </a:rPr>
-                                <m:t>1</m:t>
+                                <m:t>−1</m:t>
                               </m:r>
                             </m:sub>
                             <m:sup>
@@ -18220,21 +18170,7 @@
                                 <a:latin typeface="Cambria Math" panose="02040503050406030204" pitchFamily="18" charset="0"/>
                                 <a:ea typeface="Cambria Math" panose="02040503050406030204" pitchFamily="18" charset="0"/>
                               </a:rPr>
-                              <m:t>+</m:t>
-                            </m:r>
-                            <m:r>
-                              <a:rPr lang="fr-FR" sz="2600" i="1">
-                                <a:latin typeface="Cambria Math" panose="02040503050406030204" pitchFamily="18" charset="0"/>
-                                <a:ea typeface="Cambria Math" panose="02040503050406030204" pitchFamily="18" charset="0"/>
-                              </a:rPr>
-                              <m:t>1</m:t>
-                            </m:r>
-                            <m:r>
-                              <a:rPr lang="fr-FR" sz="2600" i="1">
-                                <a:latin typeface="Cambria Math" panose="02040503050406030204" pitchFamily="18" charset="0"/>
-                                <a:ea typeface="Cambria Math" panose="02040503050406030204" pitchFamily="18" charset="0"/>
-                              </a:rPr>
-                              <m:t>,</m:t>
+                              <m:t>+1,</m:t>
                             </m:r>
                             <m:r>
                               <a:rPr lang="fr-FR" sz="2600" i="1">
@@ -18357,21 +18293,7 @@
                                 <a:latin typeface="Cambria Math" panose="02040503050406030204" pitchFamily="18" charset="0"/>
                                 <a:ea typeface="Cambria Math" panose="02040503050406030204" pitchFamily="18" charset="0"/>
                               </a:rPr>
-                              <m:t>−</m:t>
-                            </m:r>
-                            <m:r>
-                              <a:rPr lang="fr-FR" sz="2600" i="1">
-                                <a:latin typeface="Cambria Math" panose="02040503050406030204" pitchFamily="18" charset="0"/>
-                                <a:ea typeface="Cambria Math" panose="02040503050406030204" pitchFamily="18" charset="0"/>
-                              </a:rPr>
-                              <m:t>1</m:t>
-                            </m:r>
-                            <m:r>
-                              <a:rPr lang="fr-FR" sz="2600" i="1">
-                                <a:latin typeface="Cambria Math" panose="02040503050406030204" pitchFamily="18" charset="0"/>
-                                <a:ea typeface="Cambria Math" panose="02040503050406030204" pitchFamily="18" charset="0"/>
-                              </a:rPr>
-                              <m:t>,</m:t>
+                              <m:t>−1,</m:t>
                             </m:r>
                             <m:r>
                               <a:rPr lang="fr-FR" sz="2600" i="1">
@@ -18640,13 +18562,7 @@
                               <a:rPr lang="fr-FR" sz="2600" i="1">
                                 <a:latin typeface="Cambria Math" panose="02040503050406030204" pitchFamily="18" charset="0"/>
                               </a:rPr>
-                              <m:t>+</m:t>
-                            </m:r>
-                            <m:r>
-                              <a:rPr lang="fr-FR" sz="2600" i="1">
-                                <a:latin typeface="Cambria Math" panose="02040503050406030204" pitchFamily="18" charset="0"/>
-                              </a:rPr>
-                              <m:t>1</m:t>
+                              <m:t>+1</m:t>
                             </m:r>
                           </m:sub>
                           <m:sup>
@@ -18760,13 +18676,7 @@
                               <a:rPr lang="fr-FR" sz="2600" i="1">
                                 <a:latin typeface="Cambria Math" panose="02040503050406030204" pitchFamily="18" charset="0"/>
                               </a:rPr>
-                              <m:t>−</m:t>
-                            </m:r>
-                            <m:r>
-                              <a:rPr lang="fr-FR" sz="2600" i="1">
-                                <a:latin typeface="Cambria Math" panose="02040503050406030204" pitchFamily="18" charset="0"/>
-                              </a:rPr>
-                              <m:t>1</m:t>
+                              <m:t>−1</m:t>
                             </m:r>
                           </m:sub>
                           <m:sup>
@@ -19123,16 +19033,7 @@
                         </a:solidFill>
                         <a:latin typeface="Cambria Math" panose="02040503050406030204" pitchFamily="18" charset="0"/>
                       </a:rPr>
-                      <m:t>=</m:t>
-                    </m:r>
-                    <m:r>
-                      <a:rPr lang="fr-CA" b="0" i="1" smtClean="0">
-                        <a:solidFill>
-                          <a:schemeClr val="accent2"/>
-                        </a:solidFill>
-                        <a:latin typeface="Cambria Math" panose="02040503050406030204" pitchFamily="18" charset="0"/>
-                      </a:rPr>
-                      <m:t>0</m:t>
+                      <m:t>=0</m:t>
                     </m:r>
                   </m:oMath>
                 </a14:m>
@@ -19261,16 +19162,7 @@
                               </a:solidFill>
                               <a:latin typeface="Cambria Math" panose="02040503050406030204" pitchFamily="18" charset="0"/>
                             </a:rPr>
-                            <m:t>−</m:t>
-                          </m:r>
-                          <m:r>
-                            <a:rPr lang="fr-CA" b="0" i="0" smtClean="0">
-                              <a:solidFill>
-                                <a:schemeClr val="accent2"/>
-                              </a:solidFill>
-                              <a:latin typeface="Cambria Math" panose="02040503050406030204" pitchFamily="18" charset="0"/>
-                            </a:rPr>
-                            <m:t>1</m:t>
+                            <m:t>−1</m:t>
                           </m:r>
                         </m:num>
                         <m:den>
@@ -19342,16 +19234,7 @@
                               </a:solidFill>
                               <a:latin typeface="Cambria Math" panose="02040503050406030204" pitchFamily="18" charset="0"/>
                             </a:rPr>
-                            <m:t>+</m:t>
-                          </m:r>
-                          <m:r>
-                            <a:rPr lang="fr-CA" b="0" i="1" smtClean="0">
-                              <a:solidFill>
-                                <a:schemeClr val="accent2"/>
-                              </a:solidFill>
-                              <a:latin typeface="Cambria Math" panose="02040503050406030204" pitchFamily="18" charset="0"/>
-                            </a:rPr>
-                            <m:t>2</m:t>
+                            <m:t>+2</m:t>
                           </m:r>
                         </m:sub>
                         <m:sup>
@@ -19470,16 +19353,7 @@
                               </a:solidFill>
                               <a:latin typeface="Cambria Math" panose="02040503050406030204" pitchFamily="18" charset="0"/>
                             </a:rPr>
-                            <m:t>+</m:t>
-                          </m:r>
-                          <m:r>
-                            <a:rPr lang="fr-CA" b="0" i="1" smtClean="0">
-                              <a:solidFill>
-                                <a:schemeClr val="accent2"/>
-                              </a:solidFill>
-                              <a:latin typeface="Cambria Math" panose="02040503050406030204" pitchFamily="18" charset="0"/>
-                            </a:rPr>
-                            <m:t>1</m:t>
+                            <m:t>+1</m:t>
                           </m:r>
                         </m:sub>
                         <m:sup>
@@ -19643,16 +19517,7 @@
                         </a:solidFill>
                         <a:latin typeface="Cambria Math" panose="02040503050406030204" pitchFamily="18" charset="0"/>
                       </a:rPr>
-                      <m:t>=</m:t>
-                    </m:r>
-                    <m:r>
-                      <a:rPr lang="fr-CA" b="0" i="1" smtClean="0">
-                        <a:solidFill>
-                          <a:srgbClr val="FFBF00"/>
-                        </a:solidFill>
-                        <a:latin typeface="Cambria Math" panose="02040503050406030204" pitchFamily="18" charset="0"/>
-                      </a:rPr>
-                      <m:t>0</m:t>
+                      <m:t>=0</m:t>
                     </m:r>
                   </m:oMath>
                 </a14:m>
@@ -19781,16 +19646,7 @@
                               </a:solidFill>
                               <a:latin typeface="Cambria Math" panose="02040503050406030204" pitchFamily="18" charset="0"/>
                             </a:rPr>
-                            <m:t>−</m:t>
-                          </m:r>
-                          <m:r>
-                            <a:rPr lang="fr-CA" b="0" i="0" smtClean="0">
-                              <a:solidFill>
-                                <a:srgbClr val="FFBF00"/>
-                              </a:solidFill>
-                              <a:latin typeface="Cambria Math" panose="02040503050406030204" pitchFamily="18" charset="0"/>
-                            </a:rPr>
-                            <m:t>1</m:t>
+                            <m:t>−1</m:t>
                           </m:r>
                         </m:num>
                         <m:den>
@@ -19862,16 +19718,7 @@
                               </a:solidFill>
                               <a:latin typeface="Cambria Math" panose="02040503050406030204" pitchFamily="18" charset="0"/>
                             </a:rPr>
-                            <m:t>+</m:t>
-                          </m:r>
-                          <m:r>
-                            <a:rPr lang="fr-CA" b="0" i="1" smtClean="0">
-                              <a:solidFill>
-                                <a:srgbClr val="FFBF00"/>
-                              </a:solidFill>
-                              <a:latin typeface="Cambria Math" panose="02040503050406030204" pitchFamily="18" charset="0"/>
-                            </a:rPr>
-                            <m:t>2</m:t>
+                            <m:t>+2</m:t>
                           </m:r>
                         </m:sub>
                         <m:sup>
@@ -19990,16 +19837,7 @@
                               </a:solidFill>
                               <a:latin typeface="Cambria Math" panose="02040503050406030204" pitchFamily="18" charset="0"/>
                             </a:rPr>
-                            <m:t>+</m:t>
-                          </m:r>
-                          <m:r>
-                            <a:rPr lang="fr-CA" b="0" i="1" smtClean="0">
-                              <a:solidFill>
-                                <a:srgbClr val="FFBF00"/>
-                              </a:solidFill>
-                              <a:latin typeface="Cambria Math" panose="02040503050406030204" pitchFamily="18" charset="0"/>
-                            </a:rPr>
-                            <m:t>1</m:t>
+                            <m:t>+1</m:t>
                           </m:r>
                         </m:sub>
                         <m:sup>
@@ -20554,16 +20392,7 @@
                                 </a:solidFill>
                                 <a:latin typeface="Cambria Math" panose="02040503050406030204" pitchFamily="18" charset="0"/>
                               </a:rPr>
-                              <m:t>−</m:t>
-                            </m:r>
-                            <m:r>
-                              <a:rPr lang="fr-CA" b="0" i="0" smtClean="0">
-                                <a:solidFill>
-                                  <a:srgbClr val="5B9BD5"/>
-                                </a:solidFill>
-                                <a:latin typeface="Cambria Math" panose="02040503050406030204" pitchFamily="18" charset="0"/>
-                              </a:rPr>
-                              <m:t>2</m:t>
+                              <m:t>−2</m:t>
                             </m:r>
                             <m:r>
                               <a:rPr lang="fr-CA" b="0" i="1" smtClean="0">
@@ -21021,16 +20850,7 @@
                             </a:solidFill>
                             <a:latin typeface="Cambria Math" panose="02040503050406030204" pitchFamily="18" charset="0"/>
                           </a:rPr>
-                          <m:t>−</m:t>
-                        </m:r>
-                        <m:r>
-                          <a:rPr lang="fr-CA" b="0" i="1" smtClean="0">
-                            <a:solidFill>
-                              <a:srgbClr val="5B9BD5"/>
-                            </a:solidFill>
-                            <a:latin typeface="Cambria Math" panose="02040503050406030204" pitchFamily="18" charset="0"/>
-                          </a:rPr>
-                          <m:t>2</m:t>
+                          <m:t>−2</m:t>
                         </m:r>
                       </m:sub>
                       <m:sup>
@@ -21053,17 +20873,7 @@
                         <a:latin typeface="Cambria Math" panose="02040503050406030204" pitchFamily="18" charset="0"/>
                         <a:ea typeface="Cambria Math" panose="02040503050406030204" pitchFamily="18" charset="0"/>
                       </a:rPr>
-                      <m:t>+</m:t>
-                    </m:r>
-                    <m:r>
-                      <a:rPr lang="fr-CA" b="0" i="1" smtClean="0">
-                        <a:solidFill>
-                          <a:srgbClr val="5B9BD5"/>
-                        </a:solidFill>
-                        <a:latin typeface="Cambria Math" panose="02040503050406030204" pitchFamily="18" charset="0"/>
-                        <a:ea typeface="Cambria Math" panose="02040503050406030204" pitchFamily="18" charset="0"/>
-                      </a:rPr>
-                      <m:t>4</m:t>
+                      <m:t>+4</m:t>
                     </m:r>
                     <m:sSubSup>
                       <m:sSubSupPr>
@@ -21122,16 +20932,7 @@
                             </a:solidFill>
                             <a:latin typeface="Cambria Math" panose="02040503050406030204" pitchFamily="18" charset="0"/>
                           </a:rPr>
-                          <m:t>−</m:t>
-                        </m:r>
-                        <m:r>
-                          <a:rPr lang="fr-CA" b="0" i="1" smtClean="0">
-                            <a:solidFill>
-                              <a:srgbClr val="5B9BD5"/>
-                            </a:solidFill>
-                            <a:latin typeface="Cambria Math" panose="02040503050406030204" pitchFamily="18" charset="0"/>
-                          </a:rPr>
-                          <m:t>1</m:t>
+                          <m:t>−1</m:t>
                         </m:r>
                       </m:sub>
                       <m:sup>
@@ -21154,17 +20955,7 @@
                         <a:latin typeface="Cambria Math" panose="02040503050406030204" pitchFamily="18" charset="0"/>
                         <a:ea typeface="Cambria Math" panose="02040503050406030204" pitchFamily="18" charset="0"/>
                       </a:rPr>
-                      <m:t>)]÷</m:t>
-                    </m:r>
-                    <m:r>
-                      <a:rPr lang="fr-CA" b="0" i="1" smtClean="0">
-                        <a:solidFill>
-                          <a:srgbClr val="5B9BD5"/>
-                        </a:solidFill>
-                        <a:latin typeface="Cambria Math" panose="02040503050406030204" pitchFamily="18" charset="0"/>
-                        <a:ea typeface="Cambria Math" panose="02040503050406030204" pitchFamily="18" charset="0"/>
-                      </a:rPr>
-                      <m:t>3</m:t>
+                      <m:t>)]÷3</m:t>
                     </m:r>
                   </m:oMath>
                 </a14:m>
@@ -21216,43 +21007,7 @@
                           </a:solidFill>
                           <a:latin typeface="Cambria Math" panose="02040503050406030204" pitchFamily="18" charset="0"/>
                         </a:rPr>
-                        <m:t>=(</m:t>
-                      </m:r>
-                      <m:r>
-                        <a:rPr lang="fr-CA" b="0" i="1" smtClean="0">
-                          <a:solidFill>
-                            <a:srgbClr val="5B9BD5"/>
-                          </a:solidFill>
-                          <a:latin typeface="Cambria Math" panose="02040503050406030204" pitchFamily="18" charset="0"/>
-                        </a:rPr>
-                        <m:t>0</m:t>
-                      </m:r>
-                      <m:r>
-                        <a:rPr lang="fr-CA" b="0" i="1" smtClean="0">
-                          <a:solidFill>
-                            <a:srgbClr val="5B9BD5"/>
-                          </a:solidFill>
-                          <a:latin typeface="Cambria Math" panose="02040503050406030204" pitchFamily="18" charset="0"/>
-                        </a:rPr>
-                        <m:t>,</m:t>
-                      </m:r>
-                      <m:r>
-                        <a:rPr lang="fr-CA" b="0" i="1" smtClean="0">
-                          <a:solidFill>
-                            <a:srgbClr val="5B9BD5"/>
-                          </a:solidFill>
-                          <a:latin typeface="Cambria Math" panose="02040503050406030204" pitchFamily="18" charset="0"/>
-                        </a:rPr>
-                        <m:t>1</m:t>
-                      </m:r>
-                      <m:r>
-                        <a:rPr lang="fr-CA" b="0" i="1" smtClean="0">
-                          <a:solidFill>
-                            <a:srgbClr val="5B9BD5"/>
-                          </a:solidFill>
-                          <a:latin typeface="Cambria Math" panose="02040503050406030204" pitchFamily="18" charset="0"/>
-                        </a:rPr>
-                        <m:t>)</m:t>
+                        <m:t>=(0,1)</m:t>
                       </m:r>
                     </m:oMath>
                   </m:oMathPara>
@@ -21794,16 +21549,7 @@
                                 </a:solidFill>
                                 <a:latin typeface="Cambria Math" panose="02040503050406030204" pitchFamily="18" charset="0"/>
                               </a:rPr>
-                              <m:t>−</m:t>
-                            </m:r>
-                            <m:r>
-                              <a:rPr lang="fr-CA" b="0" i="0" smtClean="0">
-                                <a:solidFill>
-                                  <a:srgbClr val="6FAD46"/>
-                                </a:solidFill>
-                                <a:latin typeface="Cambria Math" panose="02040503050406030204" pitchFamily="18" charset="0"/>
-                              </a:rPr>
-                              <m:t>2</m:t>
+                              <m:t>−2</m:t>
                             </m:r>
                             <m:r>
                               <a:rPr lang="fr-CA" b="0" i="1" smtClean="0">
@@ -22261,16 +22007,7 @@
                             </a:solidFill>
                             <a:latin typeface="Cambria Math" panose="02040503050406030204" pitchFamily="18" charset="0"/>
                           </a:rPr>
-                          <m:t>+</m:t>
-                        </m:r>
-                        <m:r>
-                          <a:rPr lang="fr-CA" b="0" i="1" smtClean="0">
-                            <a:solidFill>
-                              <a:srgbClr val="6FAD46"/>
-                            </a:solidFill>
-                            <a:latin typeface="Cambria Math" panose="02040503050406030204" pitchFamily="18" charset="0"/>
-                          </a:rPr>
-                          <m:t>2</m:t>
+                          <m:t>+2</m:t>
                         </m:r>
                       </m:sub>
                       <m:sup>
@@ -22293,17 +22030,7 @@
                         <a:latin typeface="Cambria Math" panose="02040503050406030204" pitchFamily="18" charset="0"/>
                         <a:ea typeface="Cambria Math" panose="02040503050406030204" pitchFamily="18" charset="0"/>
                       </a:rPr>
-                      <m:t>+</m:t>
-                    </m:r>
-                    <m:r>
-                      <a:rPr lang="fr-CA" b="0" i="1" smtClean="0">
-                        <a:solidFill>
-                          <a:srgbClr val="6FAD46"/>
-                        </a:solidFill>
-                        <a:latin typeface="Cambria Math" panose="02040503050406030204" pitchFamily="18" charset="0"/>
-                        <a:ea typeface="Cambria Math" panose="02040503050406030204" pitchFamily="18" charset="0"/>
-                      </a:rPr>
-                      <m:t>4</m:t>
+                      <m:t>+4</m:t>
                     </m:r>
                     <m:sSubSup>
                       <m:sSubSupPr>
@@ -22362,16 +22089,7 @@
                             </a:solidFill>
                             <a:latin typeface="Cambria Math" panose="02040503050406030204" pitchFamily="18" charset="0"/>
                           </a:rPr>
-                          <m:t>+</m:t>
-                        </m:r>
-                        <m:r>
-                          <a:rPr lang="fr-CA" b="0" i="1" smtClean="0">
-                            <a:solidFill>
-                              <a:srgbClr val="6FAD46"/>
-                            </a:solidFill>
-                            <a:latin typeface="Cambria Math" panose="02040503050406030204" pitchFamily="18" charset="0"/>
-                          </a:rPr>
-                          <m:t>1</m:t>
+                          <m:t>+1</m:t>
                         </m:r>
                       </m:sub>
                       <m:sup>
@@ -22394,17 +22112,7 @@
                         <a:latin typeface="Cambria Math" panose="02040503050406030204" pitchFamily="18" charset="0"/>
                         <a:ea typeface="Cambria Math" panose="02040503050406030204" pitchFamily="18" charset="0"/>
                       </a:rPr>
-                      <m:t>)]÷</m:t>
-                    </m:r>
-                    <m:r>
-                      <a:rPr lang="fr-CA" b="0" i="1" smtClean="0">
-                        <a:solidFill>
-                          <a:srgbClr val="6FAD46"/>
-                        </a:solidFill>
-                        <a:latin typeface="Cambria Math" panose="02040503050406030204" pitchFamily="18" charset="0"/>
-                        <a:ea typeface="Cambria Math" panose="02040503050406030204" pitchFamily="18" charset="0"/>
-                      </a:rPr>
-                      <m:t>3</m:t>
+                      <m:t>)]÷3</m:t>
                     </m:r>
                   </m:oMath>
                 </a14:m>
@@ -22456,43 +22164,7 @@
                           </a:solidFill>
                           <a:latin typeface="Cambria Math" panose="02040503050406030204" pitchFamily="18" charset="0"/>
                         </a:rPr>
-                        <m:t>=(</m:t>
-                      </m:r>
-                      <m:r>
-                        <a:rPr lang="fr-CA" b="0" i="1" smtClean="0">
-                          <a:solidFill>
-                            <a:srgbClr val="6FAD46"/>
-                          </a:solidFill>
-                          <a:latin typeface="Cambria Math" panose="02040503050406030204" pitchFamily="18" charset="0"/>
-                        </a:rPr>
-                        <m:t>1</m:t>
-                      </m:r>
-                      <m:r>
-                        <a:rPr lang="fr-CA" b="0" i="1" smtClean="0">
-                          <a:solidFill>
-                            <a:srgbClr val="6FAD46"/>
-                          </a:solidFill>
-                          <a:latin typeface="Cambria Math" panose="02040503050406030204" pitchFamily="18" charset="0"/>
-                        </a:rPr>
-                        <m:t>,</m:t>
-                      </m:r>
-                      <m:r>
-                        <a:rPr lang="fr-CA" b="0" i="1" smtClean="0">
-                          <a:solidFill>
-                            <a:srgbClr val="6FAD46"/>
-                          </a:solidFill>
-                          <a:latin typeface="Cambria Math" panose="02040503050406030204" pitchFamily="18" charset="0"/>
-                        </a:rPr>
-                        <m:t>0</m:t>
-                      </m:r>
-                      <m:r>
-                        <a:rPr lang="fr-CA" b="0" i="1" smtClean="0">
-                          <a:solidFill>
-                            <a:srgbClr val="6FAD46"/>
-                          </a:solidFill>
-                          <a:latin typeface="Cambria Math" panose="02040503050406030204" pitchFamily="18" charset="0"/>
-                        </a:rPr>
-                        <m:t>)</m:t>
+                        <m:t>=(1,0)</m:t>
                       </m:r>
                     </m:oMath>
                   </m:oMathPara>
@@ -23577,13 +23249,7 @@
                           <a:rPr lang="fr-FR" i="1">
                             <a:latin typeface="Cambria Math" panose="02040503050406030204" pitchFamily="18" charset="0"/>
                           </a:rPr>
-                          <m:t>2</m:t>
-                        </m:r>
-                        <m:r>
-                          <a:rPr lang="fr-FR" i="1">
-                            <a:latin typeface="Cambria Math" panose="02040503050406030204" pitchFamily="18" charset="0"/>
-                          </a:rPr>
-                          <m:t>!</m:t>
+                          <m:t>2!</m:t>
                         </m:r>
                       </m:den>
                     </m:f>
@@ -23755,13 +23421,7 @@
                           <a:rPr lang="fr-FR" i="1">
                             <a:latin typeface="Cambria Math" panose="02040503050406030204" pitchFamily="18" charset="0"/>
                           </a:rPr>
-                          <m:t>3</m:t>
-                        </m:r>
-                        <m:r>
-                          <a:rPr lang="fr-FR" i="1">
-                            <a:latin typeface="Cambria Math" panose="02040503050406030204" pitchFamily="18" charset="0"/>
-                          </a:rPr>
-                          <m:t>!</m:t>
+                          <m:t>3!</m:t>
                         </m:r>
                       </m:den>
                     </m:f>
@@ -23933,13 +23593,7 @@
                           <a:rPr lang="fr-FR" i="1">
                             <a:latin typeface="Cambria Math" panose="02040503050406030204" pitchFamily="18" charset="0"/>
                           </a:rPr>
-                          <m:t>4</m:t>
-                        </m:r>
-                        <m:r>
-                          <a:rPr lang="fr-FR" i="1">
-                            <a:latin typeface="Cambria Math" panose="02040503050406030204" pitchFamily="18" charset="0"/>
-                          </a:rPr>
-                          <m:t>!</m:t>
+                          <m:t>4!</m:t>
                         </m:r>
                       </m:den>
                     </m:f>
@@ -24357,13 +24011,7 @@
                           <a:rPr lang="fr-FR" i="1">
                             <a:latin typeface="Cambria Math" panose="02040503050406030204" pitchFamily="18" charset="0"/>
                           </a:rPr>
-                          <m:t>2</m:t>
-                        </m:r>
-                        <m:r>
-                          <a:rPr lang="fr-FR" i="1">
-                            <a:latin typeface="Cambria Math" panose="02040503050406030204" pitchFamily="18" charset="0"/>
-                          </a:rPr>
-                          <m:t>!</m:t>
+                          <m:t>2!</m:t>
                         </m:r>
                       </m:den>
                     </m:f>
@@ -24535,13 +24183,7 @@
                           <a:rPr lang="fr-FR" i="1">
                             <a:latin typeface="Cambria Math" panose="02040503050406030204" pitchFamily="18" charset="0"/>
                           </a:rPr>
-                          <m:t>3</m:t>
-                        </m:r>
-                        <m:r>
-                          <a:rPr lang="fr-FR" i="1">
-                            <a:latin typeface="Cambria Math" panose="02040503050406030204" pitchFamily="18" charset="0"/>
-                          </a:rPr>
-                          <m:t>!</m:t>
+                          <m:t>3!</m:t>
                         </m:r>
                       </m:den>
                     </m:f>
@@ -24713,13 +24355,7 @@
                           <a:rPr lang="fr-FR" i="1">
                             <a:latin typeface="Cambria Math" panose="02040503050406030204" pitchFamily="18" charset="0"/>
                           </a:rPr>
-                          <m:t>4</m:t>
-                        </m:r>
-                        <m:r>
-                          <a:rPr lang="fr-FR" i="1">
-                            <a:latin typeface="Cambria Math" panose="02040503050406030204" pitchFamily="18" charset="0"/>
-                          </a:rPr>
-                          <m:t>!</m:t>
+                          <m:t>4!</m:t>
                         </m:r>
                       </m:den>
                     </m:f>
@@ -25310,13 +24946,7 @@
                           <a:rPr lang="fr-FR" i="1">
                             <a:latin typeface="Cambria Math" panose="02040503050406030204" pitchFamily="18" charset="0"/>
                           </a:rPr>
-                          <m:t>2</m:t>
-                        </m:r>
-                        <m:r>
-                          <a:rPr lang="fr-FR" i="1">
-                            <a:latin typeface="Cambria Math" panose="02040503050406030204" pitchFamily="18" charset="0"/>
-                          </a:rPr>
-                          <m:t>!</m:t>
+                          <m:t>2!</m:t>
                         </m:r>
                       </m:den>
                     </m:f>
@@ -25777,13 +25407,7 @@
                           <a:rPr lang="fr-FR" i="1">
                             <a:latin typeface="Cambria Math" panose="02040503050406030204" pitchFamily="18" charset="0"/>
                           </a:rPr>
-                          <m:t>2</m:t>
-                        </m:r>
-                        <m:r>
-                          <a:rPr lang="fr-FR" i="1">
-                            <a:latin typeface="Cambria Math" panose="02040503050406030204" pitchFamily="18" charset="0"/>
-                          </a:rPr>
-                          <m:t>!</m:t>
+                          <m:t>2!</m:t>
                         </m:r>
                       </m:den>
                     </m:f>
@@ -26045,7 +25669,19 @@
                               <a:rPr lang="fr-FR" sz="2400" i="1">
                                 <a:latin typeface="Cambria Math" panose="02040503050406030204" pitchFamily="18" charset="0"/>
                               </a:rPr>
-                              <m:t>+1,</m:t>
+                              <m:t>+</m:t>
+                            </m:r>
+                            <m:r>
+                              <a:rPr lang="fr-FR" sz="2400" i="1">
+                                <a:latin typeface="Cambria Math" panose="02040503050406030204" pitchFamily="18" charset="0"/>
+                              </a:rPr>
+                              <m:t>1</m:t>
+                            </m:r>
+                            <m:r>
+                              <a:rPr lang="fr-FR" sz="2400" i="1">
+                                <a:latin typeface="Cambria Math" panose="02040503050406030204" pitchFamily="18" charset="0"/>
+                              </a:rPr>
+                              <m:t>,</m:t>
                             </m:r>
                             <m:r>
                               <a:rPr lang="fr-FR" sz="2400" i="1">
@@ -26096,7 +25732,19 @@
                               <a:rPr lang="fr-FR" sz="2400" i="1">
                                 <a:latin typeface="Cambria Math" panose="02040503050406030204" pitchFamily="18" charset="0"/>
                               </a:rPr>
-                              <m:t>−1,</m:t>
+                              <m:t>−</m:t>
+                            </m:r>
+                            <m:r>
+                              <a:rPr lang="fr-FR" sz="2400" i="1">
+                                <a:latin typeface="Cambria Math" panose="02040503050406030204" pitchFamily="18" charset="0"/>
+                              </a:rPr>
+                              <m:t>1</m:t>
+                            </m:r>
+                            <m:r>
+                              <a:rPr lang="fr-FR" sz="2400" i="1">
+                                <a:latin typeface="Cambria Math" panose="02040503050406030204" pitchFamily="18" charset="0"/>
+                              </a:rPr>
+                              <m:t>,</m:t>
                             </m:r>
                             <m:r>
                               <a:rPr lang="fr-FR" sz="2400" i="1">
@@ -26606,7 +26254,16 @@
                             </a:solidFill>
                             <a:latin typeface="Cambria Math" panose="02040503050406030204" pitchFamily="18" charset="0"/>
                           </a:rPr>
-                          <m:t>2!</m:t>
+                          <m:t>2</m:t>
+                        </m:r>
+                        <m:r>
+                          <a:rPr lang="fr-FR" sz="2400" i="1">
+                            <a:solidFill>
+                              <a:srgbClr val="FF0000"/>
+                            </a:solidFill>
+                            <a:latin typeface="Cambria Math" panose="02040503050406030204" pitchFamily="18" charset="0"/>
+                          </a:rPr>
+                          <m:t>!</m:t>
                         </m:r>
                       </m:den>
                     </m:f>
@@ -26802,7 +26459,13 @@
                           <a:rPr lang="fr-FR" sz="2400" i="1">
                             <a:latin typeface="Cambria Math" panose="02040503050406030204" pitchFamily="18" charset="0"/>
                           </a:rPr>
-                          <m:t>3!</m:t>
+                          <m:t>3</m:t>
+                        </m:r>
+                        <m:r>
+                          <a:rPr lang="fr-FR" sz="2400" i="1">
+                            <a:latin typeface="Cambria Math" panose="02040503050406030204" pitchFamily="18" charset="0"/>
+                          </a:rPr>
+                          <m:t>!</m:t>
                         </m:r>
                       </m:den>
                     </m:f>
@@ -27318,7 +26981,16 @@
                             </a:solidFill>
                             <a:latin typeface="Cambria Math" panose="02040503050406030204" pitchFamily="18" charset="0"/>
                           </a:rPr>
-                          <m:t>2!</m:t>
+                          <m:t>2</m:t>
+                        </m:r>
+                        <m:r>
+                          <a:rPr lang="fr-FR" sz="2400" i="1">
+                            <a:solidFill>
+                              <a:srgbClr val="FF0000"/>
+                            </a:solidFill>
+                            <a:latin typeface="Cambria Math" panose="02040503050406030204" pitchFamily="18" charset="0"/>
+                          </a:rPr>
+                          <m:t>!</m:t>
                         </m:r>
                       </m:den>
                     </m:f>
@@ -27526,7 +27198,13 @@
                           <a:rPr lang="fr-FR" sz="2400" i="1">
                             <a:latin typeface="Cambria Math" panose="02040503050406030204" pitchFamily="18" charset="0"/>
                           </a:rPr>
-                          <m:t>3!</m:t>
+                          <m:t>3</m:t>
+                        </m:r>
+                        <m:r>
+                          <a:rPr lang="fr-FR" sz="2400" i="1">
+                            <a:latin typeface="Cambria Math" panose="02040503050406030204" pitchFamily="18" charset="0"/>
+                          </a:rPr>
+                          <m:t>!</m:t>
                         </m:r>
                       </m:den>
                     </m:f>
@@ -28044,7 +27722,13 @@
                               <a:rPr lang="fr-FR" sz="2400" i="1">
                                 <a:latin typeface="Cambria Math" panose="02040503050406030204" pitchFamily="18" charset="0"/>
                               </a:rPr>
-                              <m:t>+1</m:t>
+                              <m:t>+</m:t>
+                            </m:r>
+                            <m:r>
+                              <a:rPr lang="fr-FR" sz="2400" i="1">
+                                <a:latin typeface="Cambria Math" panose="02040503050406030204" pitchFamily="18" charset="0"/>
+                              </a:rPr>
+                              <m:t>1</m:t>
                             </m:r>
                           </m:sub>
                           <m:sup>
@@ -28158,7 +27842,13 @@
                               <a:rPr lang="fr-FR" sz="2400" i="1">
                                 <a:latin typeface="Cambria Math" panose="02040503050406030204" pitchFamily="18" charset="0"/>
                               </a:rPr>
-                              <m:t>−1</m:t>
+                              <m:t>−</m:t>
+                            </m:r>
+                            <m:r>
+                              <a:rPr lang="fr-FR" sz="2400" i="1">
+                                <a:latin typeface="Cambria Math" panose="02040503050406030204" pitchFamily="18" charset="0"/>
+                              </a:rPr>
+                              <m:t>1</m:t>
                             </m:r>
                           </m:sub>
                           <m:sup>
@@ -28752,7 +28442,16 @@
                             </a:solidFill>
                             <a:latin typeface="Cambria Math" panose="02040503050406030204" pitchFamily="18" charset="0"/>
                           </a:rPr>
-                          <m:t>2!</m:t>
+                          <m:t>2</m:t>
+                        </m:r>
+                        <m:r>
+                          <a:rPr lang="fr-FR" sz="2400" i="1">
+                            <a:solidFill>
+                              <a:schemeClr val="tx1"/>
+                            </a:solidFill>
+                            <a:latin typeface="Cambria Math" panose="02040503050406030204" pitchFamily="18" charset="0"/>
+                          </a:rPr>
+                          <m:t>!</m:t>
                         </m:r>
                       </m:den>
                     </m:f>
@@ -29020,7 +28719,16 @@
                             </a:solidFill>
                             <a:latin typeface="Cambria Math" panose="02040503050406030204" pitchFamily="18" charset="0"/>
                           </a:rPr>
-                          <m:t>3!</m:t>
+                          <m:t>3</m:t>
+                        </m:r>
+                        <m:r>
+                          <a:rPr lang="fr-FR" sz="2400" i="1">
+                            <a:solidFill>
+                              <a:srgbClr val="FF0000"/>
+                            </a:solidFill>
+                            <a:latin typeface="Cambria Math" panose="02040503050406030204" pitchFamily="18" charset="0"/>
+                          </a:rPr>
+                          <m:t>!</m:t>
                         </m:r>
                       </m:den>
                     </m:f>
@@ -29192,7 +28900,13 @@
                           <a:rPr lang="fr-FR" sz="2400" i="1">
                             <a:latin typeface="Cambria Math" panose="02040503050406030204" pitchFamily="18" charset="0"/>
                           </a:rPr>
-                          <m:t>4!</m:t>
+                          <m:t>4</m:t>
+                        </m:r>
+                        <m:r>
+                          <a:rPr lang="fr-FR" sz="2400" i="1">
+                            <a:latin typeface="Cambria Math" panose="02040503050406030204" pitchFamily="18" charset="0"/>
+                          </a:rPr>
+                          <m:t>!</m:t>
                         </m:r>
                       </m:den>
                     </m:f>
@@ -29623,7 +29337,13 @@
                           <a:rPr lang="fr-FR" sz="2400" i="1">
                             <a:latin typeface="Cambria Math" panose="02040503050406030204" pitchFamily="18" charset="0"/>
                           </a:rPr>
-                          <m:t>2!</m:t>
+                          <m:t>2</m:t>
+                        </m:r>
+                        <m:r>
+                          <a:rPr lang="fr-FR" sz="2400" i="1">
+                            <a:latin typeface="Cambria Math" panose="02040503050406030204" pitchFamily="18" charset="0"/>
+                          </a:rPr>
+                          <m:t>!</m:t>
                         </m:r>
                       </m:den>
                     </m:f>
@@ -29891,7 +29611,16 @@
                             </a:solidFill>
                             <a:latin typeface="Cambria Math" panose="02040503050406030204" pitchFamily="18" charset="0"/>
                           </a:rPr>
-                          <m:t>3!</m:t>
+                          <m:t>3</m:t>
+                        </m:r>
+                        <m:r>
+                          <a:rPr lang="fr-FR" sz="2400" i="1">
+                            <a:solidFill>
+                              <a:srgbClr val="FF0000"/>
+                            </a:solidFill>
+                            <a:latin typeface="Cambria Math" panose="02040503050406030204" pitchFamily="18" charset="0"/>
+                          </a:rPr>
+                          <m:t>!</m:t>
                         </m:r>
                       </m:den>
                     </m:f>
@@ -30063,7 +29792,13 @@
                           <a:rPr lang="fr-FR" sz="2400" i="1">
                             <a:latin typeface="Cambria Math" panose="02040503050406030204" pitchFamily="18" charset="0"/>
                           </a:rPr>
-                          <m:t>4!</m:t>
+                          <m:t>4</m:t>
+                        </m:r>
+                        <m:r>
+                          <a:rPr lang="fr-FR" sz="2400" i="1">
+                            <a:latin typeface="Cambria Math" panose="02040503050406030204" pitchFamily="18" charset="0"/>
+                          </a:rPr>
+                          <m:t>!</m:t>
                         </m:r>
                       </m:den>
                     </m:f>
@@ -30586,7 +30321,13 @@
                           <a:rPr lang="fr-FR" sz="2400" i="1">
                             <a:latin typeface="Cambria Math" panose="02040503050406030204" pitchFamily="18" charset="0"/>
                           </a:rPr>
-                          <m:t>4!</m:t>
+                          <m:t>4</m:t>
+                        </m:r>
+                        <m:r>
+                          <a:rPr lang="fr-FR" sz="2400" i="1">
+                            <a:latin typeface="Cambria Math" panose="02040503050406030204" pitchFamily="18" charset="0"/>
+                          </a:rPr>
+                          <m:t>!</m:t>
                         </m:r>
                       </m:den>
                     </m:f>

--- a/projet_final/projet_final/MEC8211-Projet-final-Presentation.pptx
+++ b/projet_final/projet_final/MEC8211-Projet-final-Presentation.pptx
@@ -377,7 +377,7 @@
           <a:p>
             <a:fld id="{F6105186-0725-443C-BC59-E521425E81CD}" type="slidenum">
               <a:rPr lang="fr-FR" smtClean="0"/>
-              <a:t>‹#›</a:t>
+              <a:t>‹N°›</a:t>
             </a:fld>
             <a:endParaRPr lang="fr-FR"/>
           </a:p>
@@ -963,7 +963,7 @@
           <a:p>
             <a:fld id="{FD85B578-4E75-4E1C-9BE3-D5DCC0715B13}" type="slidenum">
               <a:rPr lang="fr-FR" smtClean="0"/>
-              <a:t>‹#›</a:t>
+              <a:t>‹N°›</a:t>
             </a:fld>
             <a:endParaRPr lang="fr-FR"/>
           </a:p>
@@ -1161,7 +1161,7 @@
           <a:p>
             <a:fld id="{FD85B578-4E75-4E1C-9BE3-D5DCC0715B13}" type="slidenum">
               <a:rPr lang="fr-FR" smtClean="0"/>
-              <a:t>‹#›</a:t>
+              <a:t>‹N°›</a:t>
             </a:fld>
             <a:endParaRPr lang="fr-FR"/>
           </a:p>
@@ -1369,7 +1369,7 @@
           <a:p>
             <a:fld id="{FD85B578-4E75-4E1C-9BE3-D5DCC0715B13}" type="slidenum">
               <a:rPr lang="fr-FR" smtClean="0"/>
-              <a:t>‹#›</a:t>
+              <a:t>‹N°›</a:t>
             </a:fld>
             <a:endParaRPr lang="fr-FR"/>
           </a:p>
@@ -1567,7 +1567,7 @@
           <a:p>
             <a:fld id="{FD85B578-4E75-4E1C-9BE3-D5DCC0715B13}" type="slidenum">
               <a:rPr lang="fr-FR" smtClean="0"/>
-              <a:t>‹#›</a:t>
+              <a:t>‹N°›</a:t>
             </a:fld>
             <a:endParaRPr lang="fr-FR"/>
           </a:p>
@@ -1842,7 +1842,7 @@
           <a:p>
             <a:fld id="{FD85B578-4E75-4E1C-9BE3-D5DCC0715B13}" type="slidenum">
               <a:rPr lang="fr-FR" smtClean="0"/>
-              <a:t>‹#›</a:t>
+              <a:t>‹N°›</a:t>
             </a:fld>
             <a:endParaRPr lang="fr-FR"/>
           </a:p>
@@ -2107,7 +2107,7 @@
           <a:p>
             <a:fld id="{FD85B578-4E75-4E1C-9BE3-D5DCC0715B13}" type="slidenum">
               <a:rPr lang="fr-FR" smtClean="0"/>
-              <a:t>‹#›</a:t>
+              <a:t>‹N°›</a:t>
             </a:fld>
             <a:endParaRPr lang="fr-FR"/>
           </a:p>
@@ -2519,7 +2519,7 @@
           <a:p>
             <a:fld id="{FD85B578-4E75-4E1C-9BE3-D5DCC0715B13}" type="slidenum">
               <a:rPr lang="fr-FR" smtClean="0"/>
-              <a:t>‹#›</a:t>
+              <a:t>‹N°›</a:t>
             </a:fld>
             <a:endParaRPr lang="fr-FR"/>
           </a:p>
@@ -2660,7 +2660,7 @@
           <a:p>
             <a:fld id="{FD85B578-4E75-4E1C-9BE3-D5DCC0715B13}" type="slidenum">
               <a:rPr lang="fr-FR" smtClean="0"/>
-              <a:t>‹#›</a:t>
+              <a:t>‹N°›</a:t>
             </a:fld>
             <a:endParaRPr lang="fr-FR"/>
           </a:p>
@@ -2773,7 +2773,7 @@
           <a:p>
             <a:fld id="{FD85B578-4E75-4E1C-9BE3-D5DCC0715B13}" type="slidenum">
               <a:rPr lang="fr-FR" smtClean="0"/>
-              <a:t>‹#›</a:t>
+              <a:t>‹N°›</a:t>
             </a:fld>
             <a:endParaRPr lang="fr-FR"/>
           </a:p>
@@ -3084,7 +3084,7 @@
           <a:p>
             <a:fld id="{FD85B578-4E75-4E1C-9BE3-D5DCC0715B13}" type="slidenum">
               <a:rPr lang="fr-FR" smtClean="0"/>
-              <a:t>‹#›</a:t>
+              <a:t>‹N°›</a:t>
             </a:fld>
             <a:endParaRPr lang="fr-FR"/>
           </a:p>
@@ -3372,7 +3372,7 @@
           <a:p>
             <a:fld id="{FD85B578-4E75-4E1C-9BE3-D5DCC0715B13}" type="slidenum">
               <a:rPr lang="fr-FR" smtClean="0"/>
-              <a:t>‹#›</a:t>
+              <a:t>‹N°›</a:t>
             </a:fld>
             <a:endParaRPr lang="fr-FR"/>
           </a:p>
@@ -3652,7 +3652,7 @@
           <a:p>
             <a:fld id="{FD85B578-4E75-4E1C-9BE3-D5DCC0715B13}" type="slidenum">
               <a:rPr lang="fr-FR" smtClean="0"/>
-              <a:t>‹#›</a:t>
+              <a:t>‹N°›</a:t>
             </a:fld>
             <a:endParaRPr lang="fr-FR"/>
           </a:p>
@@ -7252,7 +7252,14 @@
                         <a:latin typeface="Cambria Math" panose="02040503050406030204" pitchFamily="18" charset="0"/>
                         <a:sym typeface="Wingdings" panose="05000000000000000000" pitchFamily="2" charset="2"/>
                       </a:rPr>
-                      <m:t> = 100</m:t>
+                      <m:t> = </m:t>
+                    </m:r>
+                    <m:r>
+                      <a:rPr lang="fr-FR" b="0" i="1" smtClean="0">
+                        <a:latin typeface="Cambria Math" panose="02040503050406030204" pitchFamily="18" charset="0"/>
+                        <a:sym typeface="Wingdings" panose="05000000000000000000" pitchFamily="2" charset="2"/>
+                      </a:rPr>
+                      <m:t>100</m:t>
                     </m:r>
                     <m:r>
                       <m:rPr>
@@ -7286,7 +7293,14 @@
                         <a:latin typeface="Cambria Math" panose="02040503050406030204" pitchFamily="18" charset="0"/>
                         <a:sym typeface="Wingdings" panose="05000000000000000000" pitchFamily="2" charset="2"/>
                       </a:rPr>
-                      <m:t>=2</m:t>
+                      <m:t>=</m:t>
+                    </m:r>
+                    <m:r>
+                      <a:rPr lang="fr-FR" b="0" i="1" smtClean="0">
+                        <a:latin typeface="Cambria Math" panose="02040503050406030204" pitchFamily="18" charset="0"/>
+                        <a:sym typeface="Wingdings" panose="05000000000000000000" pitchFamily="2" charset="2"/>
+                      </a:rPr>
+                      <m:t>2</m:t>
                     </m:r>
                   </m:oMath>
                 </a14:m>
@@ -7352,7 +7366,28 @@
                         <a:latin typeface="Cambria Math" panose="02040503050406030204" pitchFamily="18" charset="0"/>
                         <a:sym typeface="Wingdings" panose="05000000000000000000" pitchFamily="2" charset="2"/>
                       </a:rPr>
-                      <m:t>= 0.6</m:t>
+                      <m:t>= </m:t>
+                    </m:r>
+                    <m:r>
+                      <a:rPr lang="fr-FR" b="0" i="1" smtClean="0">
+                        <a:latin typeface="Cambria Math" panose="02040503050406030204" pitchFamily="18" charset="0"/>
+                        <a:sym typeface="Wingdings" panose="05000000000000000000" pitchFamily="2" charset="2"/>
+                      </a:rPr>
+                      <m:t>0</m:t>
+                    </m:r>
+                    <m:r>
+                      <a:rPr lang="fr-FR" b="0" i="1" smtClean="0">
+                        <a:latin typeface="Cambria Math" panose="02040503050406030204" pitchFamily="18" charset="0"/>
+                        <a:sym typeface="Wingdings" panose="05000000000000000000" pitchFamily="2" charset="2"/>
+                      </a:rPr>
+                      <m:t>.</m:t>
+                    </m:r>
+                    <m:r>
+                      <a:rPr lang="fr-FR" b="0" i="1" smtClean="0">
+                        <a:latin typeface="Cambria Math" panose="02040503050406030204" pitchFamily="18" charset="0"/>
+                        <a:sym typeface="Wingdings" panose="05000000000000000000" pitchFamily="2" charset="2"/>
+                      </a:rPr>
+                      <m:t>6</m:t>
                     </m:r>
                     <m:r>
                       <m:rPr>
@@ -7389,7 +7424,28 @@
                         <a:latin typeface="Cambria Math" panose="02040503050406030204" pitchFamily="18" charset="0"/>
                         <a:sym typeface="Wingdings" panose="05000000000000000000" pitchFamily="2" charset="2"/>
                       </a:rPr>
-                      <m:t> = 0.3</m:t>
+                      <m:t> = </m:t>
+                    </m:r>
+                    <m:r>
+                      <a:rPr lang="fr-FR" b="0" i="1" smtClean="0">
+                        <a:latin typeface="Cambria Math" panose="02040503050406030204" pitchFamily="18" charset="0"/>
+                        <a:sym typeface="Wingdings" panose="05000000000000000000" pitchFamily="2" charset="2"/>
+                      </a:rPr>
+                      <m:t>0</m:t>
+                    </m:r>
+                    <m:r>
+                      <a:rPr lang="fr-FR" b="0" i="1" smtClean="0">
+                        <a:latin typeface="Cambria Math" panose="02040503050406030204" pitchFamily="18" charset="0"/>
+                        <a:sym typeface="Wingdings" panose="05000000000000000000" pitchFamily="2" charset="2"/>
+                      </a:rPr>
+                      <m:t>.</m:t>
+                    </m:r>
+                    <m:r>
+                      <a:rPr lang="fr-FR" b="0" i="1" smtClean="0">
+                        <a:latin typeface="Cambria Math" panose="02040503050406030204" pitchFamily="18" charset="0"/>
+                        <a:sym typeface="Wingdings" panose="05000000000000000000" pitchFamily="2" charset="2"/>
+                      </a:rPr>
+                      <m:t>3</m:t>
                     </m:r>
                   </m:oMath>
                 </a14:m>
@@ -9455,13 +9511,7 @@
                           <a:rPr lang="fr-FR" i="1">
                             <a:latin typeface="Cambria Math" panose="02040503050406030204" pitchFamily="18" charset="0"/>
                           </a:rPr>
-                          <m:t>−</m:t>
-                        </m:r>
-                        <m:r>
-                          <a:rPr lang="fr-FR" i="1">
-                            <a:latin typeface="Cambria Math" panose="02040503050406030204" pitchFamily="18" charset="0"/>
-                          </a:rPr>
-                          <m:t>1</m:t>
+                          <m:t>−1</m:t>
                         </m:r>
                       </m:den>
                     </m:f>
@@ -9651,19 +9701,7 @@
                       <a:rPr lang="fr-FR" i="1">
                         <a:latin typeface="Cambria Math" panose="02040503050406030204" pitchFamily="18" charset="0"/>
                       </a:rPr>
-                      <m:t>0</m:t>
-                    </m:r>
-                    <m:r>
-                      <a:rPr lang="fr-FR" i="1">
-                        <a:latin typeface="Cambria Math" panose="02040503050406030204" pitchFamily="18" charset="0"/>
-                      </a:rPr>
-                      <m:t>.</m:t>
-                    </m:r>
-                    <m:r>
-                      <a:rPr lang="fr-FR" i="1">
-                        <a:latin typeface="Cambria Math" panose="02040503050406030204" pitchFamily="18" charset="0"/>
-                      </a:rPr>
-                      <m:t>1</m:t>
+                      <m:t>0.1</m:t>
                     </m:r>
                   </m:oMath>
                 </a14:m>
@@ -9708,25 +9746,7 @@
                       <a:rPr lang="fr-FR" i="1">
                         <a:latin typeface="Cambria Math" panose="02040503050406030204" pitchFamily="18" charset="0"/>
                       </a:rPr>
-                      <m:t>=</m:t>
-                    </m:r>
-                    <m:r>
-                      <a:rPr lang="fr-FR" i="1">
-                        <a:latin typeface="Cambria Math" panose="02040503050406030204" pitchFamily="18" charset="0"/>
-                      </a:rPr>
-                      <m:t>1</m:t>
-                    </m:r>
-                    <m:r>
-                      <a:rPr lang="fr-FR" i="1">
-                        <a:latin typeface="Cambria Math" panose="02040503050406030204" pitchFamily="18" charset="0"/>
-                      </a:rPr>
-                      <m:t>.</m:t>
-                    </m:r>
-                    <m:r>
-                      <a:rPr lang="fr-FR" i="1">
-                        <a:latin typeface="Cambria Math" panose="02040503050406030204" pitchFamily="18" charset="0"/>
-                      </a:rPr>
-                      <m:t>25</m:t>
+                      <m:t>=1.25</m:t>
                     </m:r>
                   </m:oMath>
                 </a14:m>
@@ -9871,14 +9891,7 @@
                             <a:latin typeface="Cambria Math" panose="02040503050406030204" pitchFamily="18" charset="0"/>
                             <a:sym typeface="Wingdings" panose="05000000000000000000" pitchFamily="2" charset="2"/>
                           </a:rPr>
-                          <m:t>×</m:t>
-                        </m:r>
-                        <m:r>
-                          <a:rPr lang="fr-FR" b="0" i="1" smtClean="0">
-                            <a:latin typeface="Cambria Math" panose="02040503050406030204" pitchFamily="18" charset="0"/>
-                            <a:sym typeface="Wingdings" panose="05000000000000000000" pitchFamily="2" charset="2"/>
-                          </a:rPr>
-                          <m:t>10</m:t>
+                          <m:t>×10</m:t>
                         </m:r>
                       </m:e>
                       <m:sup>
@@ -9887,14 +9900,7 @@
                             <a:latin typeface="Cambria Math" panose="02040503050406030204" pitchFamily="18" charset="0"/>
                             <a:sym typeface="Wingdings" panose="05000000000000000000" pitchFamily="2" charset="2"/>
                           </a:rPr>
-                          <m:t>−</m:t>
-                        </m:r>
-                        <m:r>
-                          <a:rPr lang="fr-FR" b="0" i="1" smtClean="0">
-                            <a:latin typeface="Cambria Math" panose="02040503050406030204" pitchFamily="18" charset="0"/>
-                            <a:sym typeface="Wingdings" panose="05000000000000000000" pitchFamily="2" charset="2"/>
-                          </a:rPr>
-                          <m:t>3</m:t>
+                          <m:t>−3</m:t>
                         </m:r>
                       </m:sup>
                     </m:sSup>
@@ -10159,13 +10165,7 @@
                                     <a:rPr lang="fr-FR" b="0" i="1" smtClean="0">
                                       <a:latin typeface="Cambria Math" panose="02040503050406030204" pitchFamily="18" charset="0"/>
                                     </a:rPr>
-                                    <m:t>−</m:t>
-                                  </m:r>
-                                  <m:r>
-                                    <a:rPr lang="fr-FR" b="0" i="1" smtClean="0">
-                                      <a:latin typeface="Cambria Math" panose="02040503050406030204" pitchFamily="18" charset="0"/>
-                                    </a:rPr>
-                                    <m:t>4</m:t>
+                                    <m:t>−4</m:t>
                                   </m:r>
                                 </m:sup>
                               </m:sSup>
@@ -10242,13 +10242,7 @@
                                     <a:rPr lang="fr-FR" b="0" i="1" smtClean="0">
                                       <a:latin typeface="Cambria Math" panose="02040503050406030204" pitchFamily="18" charset="0"/>
                                     </a:rPr>
-                                    <m:t>−</m:t>
-                                  </m:r>
-                                  <m:r>
-                                    <a:rPr lang="fr-FR" b="0" i="1" smtClean="0">
-                                      <a:latin typeface="Cambria Math" panose="02040503050406030204" pitchFamily="18" charset="0"/>
-                                    </a:rPr>
-                                    <m:t>4</m:t>
+                                    <m:t>−4</m:t>
                                   </m:r>
                                 </m:sup>
                               </m:sSup>
@@ -10325,13 +10319,7 @@
                                     <a:rPr lang="fr-FR" b="0" i="1" smtClean="0">
                                       <a:latin typeface="Cambria Math" panose="02040503050406030204" pitchFamily="18" charset="0"/>
                                     </a:rPr>
-                                    <m:t>−</m:t>
-                                  </m:r>
-                                  <m:r>
-                                    <a:rPr lang="fr-FR" b="0" i="1" smtClean="0">
-                                      <a:latin typeface="Cambria Math" panose="02040503050406030204" pitchFamily="18" charset="0"/>
-                                    </a:rPr>
-                                    <m:t>3</m:t>
+                                    <m:t>−3</m:t>
                                   </m:r>
                                 </m:sup>
                               </m:sSup>
@@ -11409,7 +11397,55 @@
                       <a:rPr lang="fr-FR" b="0" i="1" smtClean="0">
                         <a:latin typeface="Cambria Math" panose="02040503050406030204" pitchFamily="18" charset="0"/>
                       </a:rPr>
-                      <m:t>(42.5,3.75) </m:t>
+                      <m:t>(</m:t>
+                    </m:r>
+                    <m:r>
+                      <a:rPr lang="fr-FR" b="0" i="1" smtClean="0">
+                        <a:latin typeface="Cambria Math" panose="02040503050406030204" pitchFamily="18" charset="0"/>
+                      </a:rPr>
+                      <m:t>42</m:t>
+                    </m:r>
+                    <m:r>
+                      <a:rPr lang="fr-FR" b="0" i="1" smtClean="0">
+                        <a:latin typeface="Cambria Math" panose="02040503050406030204" pitchFamily="18" charset="0"/>
+                      </a:rPr>
+                      <m:t>.</m:t>
+                    </m:r>
+                    <m:r>
+                      <a:rPr lang="fr-FR" b="0" i="1" smtClean="0">
+                        <a:latin typeface="Cambria Math" panose="02040503050406030204" pitchFamily="18" charset="0"/>
+                      </a:rPr>
+                      <m:t>5</m:t>
+                    </m:r>
+                    <m:r>
+                      <a:rPr lang="fr-FR" b="0" i="1" smtClean="0">
+                        <a:latin typeface="Cambria Math" panose="02040503050406030204" pitchFamily="18" charset="0"/>
+                      </a:rPr>
+                      <m:t>,</m:t>
+                    </m:r>
+                    <m:r>
+                      <a:rPr lang="fr-FR" b="0" i="1" smtClean="0">
+                        <a:latin typeface="Cambria Math" panose="02040503050406030204" pitchFamily="18" charset="0"/>
+                      </a:rPr>
+                      <m:t>3</m:t>
+                    </m:r>
+                    <m:r>
+                      <a:rPr lang="fr-FR" b="0" i="1" smtClean="0">
+                        <a:latin typeface="Cambria Math" panose="02040503050406030204" pitchFamily="18" charset="0"/>
+                      </a:rPr>
+                      <m:t>.</m:t>
+                    </m:r>
+                    <m:r>
+                      <a:rPr lang="fr-FR" b="0" i="1" smtClean="0">
+                        <a:latin typeface="Cambria Math" panose="02040503050406030204" pitchFamily="18" charset="0"/>
+                      </a:rPr>
+                      <m:t>75</m:t>
+                    </m:r>
+                    <m:r>
+                      <a:rPr lang="fr-FR" b="0" i="1" smtClean="0">
+                        <a:latin typeface="Cambria Math" panose="02040503050406030204" pitchFamily="18" charset="0"/>
+                      </a:rPr>
+                      <m:t>) </m:t>
                     </m:r>
                     <m:r>
                       <a:rPr lang="fr-FR" b="0" i="1" smtClean="0">
@@ -11538,7 +11574,43 @@
                             <a:rPr lang="fr-FR" b="0" i="1" smtClean="0">
                               <a:latin typeface="Cambria Math" panose="02040503050406030204" pitchFamily="18" charset="0"/>
                             </a:rPr>
-                            <m:t>0.525,0.19</m:t>
+                            <m:t>0</m:t>
+                          </m:r>
+                          <m:r>
+                            <a:rPr lang="fr-FR" b="0" i="1" smtClean="0">
+                              <a:latin typeface="Cambria Math" panose="02040503050406030204" pitchFamily="18" charset="0"/>
+                            </a:rPr>
+                            <m:t>.</m:t>
+                          </m:r>
+                          <m:r>
+                            <a:rPr lang="fr-FR" b="0" i="1" smtClean="0">
+                              <a:latin typeface="Cambria Math" panose="02040503050406030204" pitchFamily="18" charset="0"/>
+                            </a:rPr>
+                            <m:t>525</m:t>
+                          </m:r>
+                          <m:r>
+                            <a:rPr lang="fr-FR" b="0" i="1" smtClean="0">
+                              <a:latin typeface="Cambria Math" panose="02040503050406030204" pitchFamily="18" charset="0"/>
+                            </a:rPr>
+                            <m:t>,</m:t>
+                          </m:r>
+                          <m:r>
+                            <a:rPr lang="fr-FR" b="0" i="1" smtClean="0">
+                              <a:latin typeface="Cambria Math" panose="02040503050406030204" pitchFamily="18" charset="0"/>
+                            </a:rPr>
+                            <m:t>0</m:t>
+                          </m:r>
+                          <m:r>
+                            <a:rPr lang="fr-FR" b="0" i="1" smtClean="0">
+                              <a:latin typeface="Cambria Math" panose="02040503050406030204" pitchFamily="18" charset="0"/>
+                            </a:rPr>
+                            <m:t>.</m:t>
+                          </m:r>
+                          <m:r>
+                            <a:rPr lang="fr-FR" b="0" i="1" smtClean="0">
+                              <a:latin typeface="Cambria Math" panose="02040503050406030204" pitchFamily="18" charset="0"/>
+                            </a:rPr>
+                            <m:t>19</m:t>
                           </m:r>
                         </m:e>
                       </m:d>
@@ -11708,7 +11780,31 @@
                       <a:rPr lang="fr-FR" sz="2200" b="0" i="1" smtClean="0">
                         <a:latin typeface="Cambria Math" panose="02040503050406030204" pitchFamily="18" charset="0"/>
                       </a:rPr>
-                      <m:t>=44.91 </m:t>
+                      <m:t>=</m:t>
+                    </m:r>
+                    <m:r>
+                      <a:rPr lang="fr-FR" sz="2200" b="0" i="1" smtClean="0">
+                        <a:latin typeface="Cambria Math" panose="02040503050406030204" pitchFamily="18" charset="0"/>
+                      </a:rPr>
+                      <m:t>44</m:t>
+                    </m:r>
+                    <m:r>
+                      <a:rPr lang="fr-FR" sz="2200" b="0" i="1" smtClean="0">
+                        <a:latin typeface="Cambria Math" panose="02040503050406030204" pitchFamily="18" charset="0"/>
+                      </a:rPr>
+                      <m:t>.</m:t>
+                    </m:r>
+                    <m:r>
+                      <a:rPr lang="fr-FR" sz="2200" b="0" i="1" smtClean="0">
+                        <a:latin typeface="Cambria Math" panose="02040503050406030204" pitchFamily="18" charset="0"/>
+                      </a:rPr>
+                      <m:t>91</m:t>
+                    </m:r>
+                    <m:r>
+                      <a:rPr lang="fr-FR" sz="2200" b="0" i="1" smtClean="0">
+                        <a:latin typeface="Cambria Math" panose="02040503050406030204" pitchFamily="18" charset="0"/>
+                      </a:rPr>
+                      <m:t> </m:t>
                     </m:r>
                     <m:r>
                       <m:rPr>
@@ -13041,8 +13137,8 @@
           </a:prstGeom>
         </p:spPr>
       </p:pic>
-      <mc:AlternateContent xmlns:mc="http://schemas.openxmlformats.org/markup-compatibility/2006">
-        <mc:Choice xmlns:a14="http://schemas.microsoft.com/office/drawing/2010/main" Requires="a14">
+      <mc:AlternateContent xmlns:mc="http://schemas.openxmlformats.org/markup-compatibility/2006" xmlns:a14="http://schemas.microsoft.com/office/drawing/2010/main">
+        <mc:Choice Requires="a14">
           <p:sp>
             <p:nvSpPr>
               <p:cNvPr id="6" name="TextBox 5">
@@ -13238,7 +13334,7 @@
                         <m:nor/>
                       </m:rPr>
                       <a:rPr lang="en-US" dirty="0"/>
-                      <m:t>-7.70 </m:t>
+                      <m:t>−7.70 </m:t>
                     </m:r>
                     <m:r>
                       <m:rPr>
@@ -13322,7 +13418,7 @@
             </p:txBody>
           </p:sp>
         </mc:Choice>
-        <mc:Fallback>
+        <mc:Fallback xmlns="">
           <p:sp>
             <p:nvSpPr>
               <p:cNvPr id="6" name="TextBox 5">
@@ -25590,8 +25686,8 @@
           </a:p>
         </p:txBody>
       </p:sp>
-      <mc:AlternateContent xmlns:mc="http://schemas.openxmlformats.org/markup-compatibility/2006" xmlns:a14="http://schemas.microsoft.com/office/drawing/2010/main">
-        <mc:Choice Requires="a14">
+      <mc:AlternateContent xmlns:mc="http://schemas.openxmlformats.org/markup-compatibility/2006">
+        <mc:Choice xmlns:a14="http://schemas.microsoft.com/office/drawing/2010/main" Requires="a14">
           <p:sp>
             <p:nvSpPr>
               <p:cNvPr id="3" name="Espace réservé du contenu 2">
@@ -25669,19 +25765,7 @@
                               <a:rPr lang="fr-FR" sz="2400" i="1">
                                 <a:latin typeface="Cambria Math" panose="02040503050406030204" pitchFamily="18" charset="0"/>
                               </a:rPr>
-                              <m:t>+</m:t>
-                            </m:r>
-                            <m:r>
-                              <a:rPr lang="fr-FR" sz="2400" i="1">
-                                <a:latin typeface="Cambria Math" panose="02040503050406030204" pitchFamily="18" charset="0"/>
-                              </a:rPr>
-                              <m:t>1</m:t>
-                            </m:r>
-                            <m:r>
-                              <a:rPr lang="fr-FR" sz="2400" i="1">
-                                <a:latin typeface="Cambria Math" panose="02040503050406030204" pitchFamily="18" charset="0"/>
-                              </a:rPr>
-                              <m:t>,</m:t>
+                              <m:t>+1,</m:t>
                             </m:r>
                             <m:r>
                               <a:rPr lang="fr-FR" sz="2400" i="1">
@@ -25732,19 +25816,7 @@
                               <a:rPr lang="fr-FR" sz="2400" i="1">
                                 <a:latin typeface="Cambria Math" panose="02040503050406030204" pitchFamily="18" charset="0"/>
                               </a:rPr>
-                              <m:t>−</m:t>
-                            </m:r>
-                            <m:r>
-                              <a:rPr lang="fr-FR" sz="2400" i="1">
-                                <a:latin typeface="Cambria Math" panose="02040503050406030204" pitchFamily="18" charset="0"/>
-                              </a:rPr>
-                              <m:t>1</m:t>
-                            </m:r>
-                            <m:r>
-                              <a:rPr lang="fr-FR" sz="2400" i="1">
-                                <a:latin typeface="Cambria Math" panose="02040503050406030204" pitchFamily="18" charset="0"/>
-                              </a:rPr>
-                              <m:t>,</m:t>
+                              <m:t>−1,</m:t>
                             </m:r>
                             <m:r>
                               <a:rPr lang="fr-FR" sz="2400" i="1">
@@ -25764,6 +25836,12 @@
                         </m:sSubSup>
                       </m:num>
                       <m:den>
+                        <m:r>
+                          <a:rPr lang="fr-CA" sz="2400" b="0" i="1" smtClean="0">
+                            <a:latin typeface="Cambria Math" panose="02040503050406030204" pitchFamily="18" charset="0"/>
+                          </a:rPr>
+                          <m:t>2</m:t>
+                        </m:r>
                         <m:r>
                           <m:rPr>
                             <m:sty m:val="p"/>
@@ -26254,16 +26332,7 @@
                             </a:solidFill>
                             <a:latin typeface="Cambria Math" panose="02040503050406030204" pitchFamily="18" charset="0"/>
                           </a:rPr>
-                          <m:t>2</m:t>
-                        </m:r>
-                        <m:r>
-                          <a:rPr lang="fr-FR" sz="2400" i="1">
-                            <a:solidFill>
-                              <a:srgbClr val="FF0000"/>
-                            </a:solidFill>
-                            <a:latin typeface="Cambria Math" panose="02040503050406030204" pitchFamily="18" charset="0"/>
-                          </a:rPr>
-                          <m:t>!</m:t>
+                          <m:t>2!</m:t>
                         </m:r>
                       </m:den>
                     </m:f>
@@ -26459,13 +26528,7 @@
                           <a:rPr lang="fr-FR" sz="2400" i="1">
                             <a:latin typeface="Cambria Math"